--- a/slides/C24_kMeans.pptx
+++ b/slides/C24_kMeans.pptx
@@ -5,32 +5,34 @@
     <p:sldMasterId id="2147483648" r:id="rId1"/>
   </p:sldMasterIdLst>
   <p:notesMasterIdLst>
-    <p:notesMasterId r:id="rId25"/>
+    <p:notesMasterId r:id="rId27"/>
   </p:notesMasterIdLst>
   <p:sldIdLst>
     <p:sldId id="256" r:id="rId2"/>
     <p:sldId id="284" r:id="rId3"/>
-    <p:sldId id="258" r:id="rId4"/>
-    <p:sldId id="294" r:id="rId5"/>
-    <p:sldId id="286" r:id="rId6"/>
-    <p:sldId id="285" r:id="rId7"/>
-    <p:sldId id="287" r:id="rId8"/>
-    <p:sldId id="296" r:id="rId9"/>
-    <p:sldId id="288" r:id="rId10"/>
-    <p:sldId id="297" r:id="rId11"/>
-    <p:sldId id="298" r:id="rId12"/>
-    <p:sldId id="289" r:id="rId13"/>
-    <p:sldId id="290" r:id="rId14"/>
-    <p:sldId id="291" r:id="rId15"/>
-    <p:sldId id="292" r:id="rId16"/>
-    <p:sldId id="299" r:id="rId17"/>
-    <p:sldId id="293" r:id="rId18"/>
-    <p:sldId id="300" r:id="rId19"/>
-    <p:sldId id="338" r:id="rId20"/>
-    <p:sldId id="395" r:id="rId21"/>
-    <p:sldId id="396" r:id="rId22"/>
-    <p:sldId id="306" r:id="rId23"/>
-    <p:sldId id="265" r:id="rId24"/>
+    <p:sldId id="397" r:id="rId4"/>
+    <p:sldId id="258" r:id="rId5"/>
+    <p:sldId id="294" r:id="rId6"/>
+    <p:sldId id="286" r:id="rId7"/>
+    <p:sldId id="285" r:id="rId8"/>
+    <p:sldId id="287" r:id="rId9"/>
+    <p:sldId id="296" r:id="rId10"/>
+    <p:sldId id="288" r:id="rId11"/>
+    <p:sldId id="297" r:id="rId12"/>
+    <p:sldId id="298" r:id="rId13"/>
+    <p:sldId id="289" r:id="rId14"/>
+    <p:sldId id="290" r:id="rId15"/>
+    <p:sldId id="291" r:id="rId16"/>
+    <p:sldId id="292" r:id="rId17"/>
+    <p:sldId id="299" r:id="rId18"/>
+    <p:sldId id="293" r:id="rId19"/>
+    <p:sldId id="300" r:id="rId20"/>
+    <p:sldId id="398" r:id="rId21"/>
+    <p:sldId id="338" r:id="rId22"/>
+    <p:sldId id="395" r:id="rId23"/>
+    <p:sldId id="396" r:id="rId24"/>
+    <p:sldId id="306" r:id="rId25"/>
+    <p:sldId id="265" r:id="rId26"/>
   </p:sldIdLst>
   <p:sldSz cx="12192000" cy="6858000"/>
   <p:notesSz cx="6858000" cy="9144000"/>
@@ -660,7 +662,7 @@
           <a:p>
             <a:fld id="{F430A2A4-8C14-4B1A-AD48-7B6401078BF7}" type="slidenum">
               <a:rPr lang="pt-BR" smtClean="0"/>
-              <a:t>3</a:t>
+              <a:t>4</a:t>
             </a:fld>
             <a:endParaRPr lang="pt-BR"/>
           </a:p>
@@ -785,7 +787,7 @@
           <a:p>
             <a:fld id="{F430A2A4-8C14-4B1A-AD48-7B6401078BF7}" type="slidenum">
               <a:rPr lang="pt-BR" smtClean="0"/>
-              <a:t>4</a:t>
+              <a:t>5</a:t>
             </a:fld>
             <a:endParaRPr lang="pt-BR"/>
           </a:p>
@@ -1454,7 +1456,7 @@
           <a:p>
             <a:fld id="{F430A2A4-8C14-4B1A-AD48-7B6401078BF7}" type="slidenum">
               <a:rPr lang="pt-BR" smtClean="0"/>
-              <a:t>5</a:t>
+              <a:t>6</a:t>
             </a:fld>
             <a:endParaRPr lang="pt-BR"/>
           </a:p>
@@ -1538,7 +1540,7 @@
           <a:p>
             <a:fld id="{F430A2A4-8C14-4B1A-AD48-7B6401078BF7}" type="slidenum">
               <a:rPr lang="pt-BR" smtClean="0"/>
-              <a:t>7</a:t>
+              <a:t>8</a:t>
             </a:fld>
             <a:endParaRPr lang="pt-BR"/>
           </a:p>
@@ -1646,7 +1648,7 @@
           <a:p>
             <a:fld id="{F430A2A4-8C14-4B1A-AD48-7B6401078BF7}" type="slidenum">
               <a:rPr lang="pt-BR" smtClean="0"/>
-              <a:t>8</a:t>
+              <a:t>9</a:t>
             </a:fld>
             <a:endParaRPr lang="pt-BR"/>
           </a:p>
@@ -2100,7 +2102,7 @@
           <a:p>
             <a:fld id="{F430A2A4-8C14-4B1A-AD48-7B6401078BF7}" type="slidenum">
               <a:rPr lang="pt-BR" smtClean="0"/>
-              <a:t>14</a:t>
+              <a:t>15</a:t>
             </a:fld>
             <a:endParaRPr lang="pt-BR"/>
           </a:p>
@@ -2791,7 +2793,7 @@
           <a:p>
             <a:fld id="{F430A2A4-8C14-4B1A-AD48-7B6401078BF7}" type="slidenum">
               <a:rPr lang="pt-BR" smtClean="0"/>
-              <a:t>17</a:t>
+              <a:t>18</a:t>
             </a:fld>
             <a:endParaRPr lang="pt-BR"/>
           </a:p>
@@ -2902,7 +2904,7 @@
           <a:p>
             <a:fld id="{6FC8D850-966F-45A6-8DE7-15B891E7D40D}" type="slidenum">
               <a:rPr lang="pt-BR" smtClean="0"/>
-              <a:t>19</a:t>
+              <a:t>21</a:t>
             </a:fld>
             <a:endParaRPr lang="pt-BR"/>
           </a:p>
@@ -5977,6 +5979,249 @@
   <p:cSld>
     <p:spTree>
       <p:nvGrpSpPr>
+        <p:cNvPr id="1" name=""/>
+        <p:cNvGrpSpPr/>
+        <p:nvPr/>
+      </p:nvGrpSpPr>
+      <p:grpSpPr>
+        <a:xfrm>
+          <a:off x="0" y="0"/>
+          <a:ext cx="0" cy="0"/>
+          <a:chOff x="0" y="0"/>
+          <a:chExt cx="0" cy="0"/>
+        </a:xfrm>
+      </p:grpSpPr>
+      <p:sp>
+        <p:nvSpPr>
+          <p:cNvPr id="2" name="Título 1"/>
+          <p:cNvSpPr>
+            <a:spLocks noGrp="1"/>
+          </p:cNvSpPr>
+          <p:nvPr>
+            <p:ph type="title"/>
+          </p:nvPr>
+        </p:nvSpPr>
+        <p:spPr/>
+        <p:txBody>
+          <a:bodyPr/>
+          <a:lstStyle/>
+          <a:p>
+            <a:r>
+              <a:rPr lang="pt-BR" dirty="0"/>
+              <a:t>Quantos devem ser os clusters?</a:t>
+            </a:r>
+            <a:endParaRPr lang="en-US" dirty="0"/>
+          </a:p>
+        </p:txBody>
+      </p:sp>
+      <p:sp>
+        <p:nvSpPr>
+          <p:cNvPr id="3" name="Espaço Reservado para Conteúdo 2"/>
+          <p:cNvSpPr>
+            <a:spLocks noGrp="1"/>
+          </p:cNvSpPr>
+          <p:nvPr>
+            <p:ph idx="1"/>
+          </p:nvPr>
+        </p:nvSpPr>
+        <p:spPr>
+          <a:xfrm>
+            <a:off x="5334000" y="1690688"/>
+            <a:ext cx="6729845" cy="5167311"/>
+          </a:xfrm>
+        </p:spPr>
+        <p:txBody>
+          <a:bodyPr>
+            <a:normAutofit/>
+          </a:bodyPr>
+          <a:lstStyle/>
+          <a:p>
+            <a:r>
+              <a:rPr lang="pt-BR" i="1" dirty="0"/>
+              <a:t>Os clusters </a:t>
+            </a:r>
+            <a:r>
+              <a:rPr lang="pt-BR" b="1" i="1" dirty="0"/>
+              <a:t>não devem se sobrepor</a:t>
+            </a:r>
+            <a:r>
+              <a:rPr lang="pt-BR" i="1" dirty="0"/>
+              <a:t>: </a:t>
+            </a:r>
+            <a:r>
+              <a:rPr lang="pt-BR" b="1" i="1" dirty="0">
+                <a:solidFill>
+                  <a:srgbClr val="00B050"/>
+                </a:solidFill>
+              </a:rPr>
+              <a:t>cada exemplo</a:t>
+            </a:r>
+            <a:r>
+              <a:rPr lang="pt-BR" i="1" dirty="0"/>
+              <a:t> deve </a:t>
+            </a:r>
+            <a:r>
+              <a:rPr lang="pt-BR" b="1" i="1" dirty="0">
+                <a:solidFill>
+                  <a:srgbClr val="00B050"/>
+                </a:solidFill>
+              </a:rPr>
+              <a:t>pertencer</a:t>
+            </a:r>
+            <a:r>
+              <a:rPr lang="pt-BR" i="1" dirty="0"/>
+              <a:t> a </a:t>
+            </a:r>
+            <a:r>
+              <a:rPr lang="pt-BR" b="1" i="1" dirty="0">
+                <a:solidFill>
+                  <a:srgbClr val="00B050"/>
+                </a:solidFill>
+              </a:rPr>
+              <a:t>um e apenas a um cluster</a:t>
+            </a:r>
+            <a:r>
+              <a:rPr lang="pt-BR" i="1" dirty="0"/>
+              <a:t>. </a:t>
+            </a:r>
+          </a:p>
+          <a:p>
+            <a:r>
+              <a:rPr lang="pt-BR" i="1" dirty="0"/>
+              <a:t>Porém, </a:t>
+            </a:r>
+            <a:r>
+              <a:rPr lang="pt-BR" b="1" i="1" dirty="0">
+                <a:solidFill>
+                  <a:srgbClr val="0070C0"/>
+                </a:solidFill>
+              </a:rPr>
+              <a:t>dentro do mesmo cluster</a:t>
+            </a:r>
+            <a:r>
+              <a:rPr lang="pt-BR" i="1" dirty="0"/>
+              <a:t>, os </a:t>
+            </a:r>
+            <a:r>
+              <a:rPr lang="pt-BR" b="1" i="1" dirty="0">
+                <a:solidFill>
+                  <a:srgbClr val="0070C0"/>
+                </a:solidFill>
+              </a:rPr>
+              <a:t>exemplos</a:t>
+            </a:r>
+            <a:r>
+              <a:rPr lang="pt-BR" i="1" dirty="0"/>
+              <a:t> devem estar relativamente </a:t>
+            </a:r>
+            <a:r>
+              <a:rPr lang="pt-BR" b="1" i="1" dirty="0">
+                <a:solidFill>
+                  <a:srgbClr val="0070C0"/>
+                </a:solidFill>
+              </a:rPr>
+              <a:t>próximos</a:t>
+            </a:r>
+            <a:r>
+              <a:rPr lang="pt-BR" i="1" dirty="0"/>
+              <a:t> uns dos outros e </a:t>
+            </a:r>
+            <a:r>
+              <a:rPr lang="pt-BR" b="1" i="1" dirty="0">
+                <a:solidFill>
+                  <a:srgbClr val="7030A0"/>
+                </a:solidFill>
+              </a:rPr>
+              <a:t>distantes</a:t>
+            </a:r>
+            <a:r>
+              <a:rPr lang="pt-BR" i="1" dirty="0"/>
+              <a:t> dos </a:t>
+            </a:r>
+            <a:r>
+              <a:rPr lang="pt-BR" b="1" i="1" dirty="0">
+                <a:solidFill>
+                  <a:srgbClr val="7030A0"/>
+                </a:solidFill>
+              </a:rPr>
+              <a:t>exemplos dos outros clusters</a:t>
+            </a:r>
+            <a:r>
+              <a:rPr lang="pt-BR" i="1" dirty="0"/>
+              <a:t>.</a:t>
+            </a:r>
+          </a:p>
+          <a:p>
+            <a:r>
+              <a:rPr lang="pt-BR" i="1" dirty="0"/>
+              <a:t>Aí surge uma dúvida. </a:t>
+            </a:r>
+          </a:p>
+          <a:p>
+            <a:r>
+              <a:rPr lang="pt-BR" i="1" dirty="0"/>
+              <a:t>Quantos clusters um conjunto de exemplos contém?</a:t>
+            </a:r>
+          </a:p>
+        </p:txBody>
+      </p:sp>
+      <p:pic>
+        <p:nvPicPr>
+          <p:cNvPr id="5" name="Picture 2" descr="K-Means Clustering using Python. Welcome back guys! Hope you had a great… |  by Luigi Fiori | Medium"/>
+          <p:cNvPicPr>
+            <a:picLocks noChangeAspect="1" noChangeArrowheads="1"/>
+          </p:cNvPicPr>
+          <p:nvPr/>
+        </p:nvPicPr>
+        <p:blipFill rotWithShape="1">
+          <a:blip r:embed="rId2">
+            <a:extLst>
+              <a:ext uri="{28A0092B-C50C-407E-A947-70E740481C1C}">
+                <a14:useLocalDpi xmlns:a14="http://schemas.microsoft.com/office/drawing/2010/main" val="0"/>
+              </a:ext>
+            </a:extLst>
+          </a:blip>
+          <a:srcRect l="1639" t="12047" r="55246" b="11854"/>
+          <a:stretch/>
+        </p:blipFill>
+        <p:spPr bwMode="auto">
+          <a:xfrm>
+            <a:off x="1045029" y="2388412"/>
+            <a:ext cx="3798090" cy="2793188"/>
+          </a:xfrm>
+          <a:prstGeom prst="rect">
+            <a:avLst/>
+          </a:prstGeom>
+          <a:noFill/>
+          <a:extLst>
+            <a:ext uri="{909E8E84-426E-40DD-AFC4-6F175D3DCCD1}">
+              <a14:hiddenFill xmlns:a14="http://schemas.microsoft.com/office/drawing/2010/main">
+                <a:solidFill>
+                  <a:srgbClr val="FFFFFF"/>
+                </a:solidFill>
+              </a14:hiddenFill>
+            </a:ext>
+          </a:extLst>
+        </p:spPr>
+      </p:pic>
+    </p:spTree>
+    <p:extLst>
+      <p:ext uri="{BB962C8B-B14F-4D97-AF65-F5344CB8AC3E}">
+        <p14:creationId xmlns:p14="http://schemas.microsoft.com/office/powerpoint/2010/main" val="506141761"/>
+      </p:ext>
+    </p:extLst>
+  </p:cSld>
+  <p:clrMapOvr>
+    <a:masterClrMapping/>
+  </p:clrMapOvr>
+</p:sld>
+</file>
+
+<file path=ppt/slides/slide11.xml><?xml version="1.0" encoding="utf-8"?>
+<p:sld xmlns:a="http://schemas.openxmlformats.org/drawingml/2006/main" xmlns:r="http://schemas.openxmlformats.org/officeDocument/2006/relationships" xmlns:p="http://schemas.openxmlformats.org/presentationml/2006/main">
+  <p:cSld>
+    <p:spTree>
+      <p:nvGrpSpPr>
         <p:cNvPr id="1" name="">
           <a:extLst>
             <a:ext uri="{FF2B5EF4-FFF2-40B4-BE49-F238E27FC236}">
@@ -6173,7 +6418,7 @@
 </p:sld>
 </file>
 
-<file path=ppt/slides/slide11.xml><?xml version="1.0" encoding="utf-8"?>
+<file path=ppt/slides/slide12.xml><?xml version="1.0" encoding="utf-8"?>
 <p:sld xmlns:a="http://schemas.openxmlformats.org/drawingml/2006/main" xmlns:r="http://schemas.openxmlformats.org/officeDocument/2006/relationships" xmlns:p="http://schemas.openxmlformats.org/presentationml/2006/main">
   <p:cSld>
     <p:spTree>
@@ -6384,7 +6629,7 @@
 </p:sld>
 </file>
 
-<file path=ppt/slides/slide12.xml><?xml version="1.0" encoding="utf-8"?>
+<file path=ppt/slides/slide13.xml><?xml version="1.0" encoding="utf-8"?>
 <p:sld xmlns:a="http://schemas.openxmlformats.org/drawingml/2006/main" xmlns:r="http://schemas.openxmlformats.org/officeDocument/2006/relationships" xmlns:p="http://schemas.openxmlformats.org/presentationml/2006/main">
   <p:cSld>
     <p:spTree>
@@ -6432,8 +6677,8 @@
           </a:p>
         </p:txBody>
       </p:sp>
-      <mc:AlternateContent xmlns:mc="http://schemas.openxmlformats.org/markup-compatibility/2006">
-        <mc:Choice xmlns:a14="http://schemas.microsoft.com/office/drawing/2010/main" Requires="a14">
+      <mc:AlternateContent xmlns:mc="http://schemas.openxmlformats.org/markup-compatibility/2006" xmlns:a14="http://schemas.microsoft.com/office/drawing/2010/main">
+        <mc:Choice Requires="a14">
           <p:sp>
             <p:nvSpPr>
               <p:cNvPr id="3" name="Espaço Reservado para Conteúdo 2"/>
@@ -7265,7 +7510,7 @@
             </p:txBody>
           </p:sp>
         </mc:Choice>
-        <mc:Fallback>
+        <mc:Fallback xmlns="">
           <p:sp>
             <p:nvSpPr>
               <p:cNvPr id="3" name="Espaço Reservado para Conteúdo 2"/>
@@ -7361,7 +7606,7 @@
 </p:sld>
 </file>
 
-<file path=ppt/slides/slide13.xml><?xml version="1.0" encoding="utf-8"?>
+<file path=ppt/slides/slide14.xml><?xml version="1.0" encoding="utf-8"?>
 <p:sld xmlns:a="http://schemas.openxmlformats.org/drawingml/2006/main" xmlns:r="http://schemas.openxmlformats.org/officeDocument/2006/relationships" xmlns:p="http://schemas.openxmlformats.org/presentationml/2006/main">
   <p:cSld>
     <p:spTree>
@@ -7401,8 +7646,8 @@
           </a:p>
         </p:txBody>
       </p:sp>
-      <mc:AlternateContent xmlns:mc="http://schemas.openxmlformats.org/markup-compatibility/2006">
-        <mc:Choice xmlns:a14="http://schemas.microsoft.com/office/drawing/2010/main" Requires="a14">
+      <mc:AlternateContent xmlns:mc="http://schemas.openxmlformats.org/markup-compatibility/2006" xmlns:a14="http://schemas.microsoft.com/office/drawing/2010/main">
+        <mc:Choice Requires="a14">
           <p:sp>
             <p:nvSpPr>
               <p:cNvPr id="3" name="Espaço Reservado para Conteúdo 2"/>
@@ -7794,7 +8039,7 @@
             </p:txBody>
           </p:sp>
         </mc:Choice>
-        <mc:Fallback>
+        <mc:Fallback xmlns="">
           <p:sp>
             <p:nvSpPr>
               <p:cNvPr id="3" name="Espaço Reservado para Conteúdo 2"/>
@@ -7845,7 +8090,7 @@
 </p:sld>
 </file>
 
-<file path=ppt/slides/slide14.xml><?xml version="1.0" encoding="utf-8"?>
+<file path=ppt/slides/slide15.xml><?xml version="1.0" encoding="utf-8"?>
 <p:sld xmlns:a="http://schemas.openxmlformats.org/drawingml/2006/main" xmlns:r="http://schemas.openxmlformats.org/officeDocument/2006/relationships" xmlns:p="http://schemas.openxmlformats.org/presentationml/2006/main">
   <p:cSld>
     <p:spTree>
@@ -7889,8 +8134,8 @@
           </a:p>
         </p:txBody>
       </p:sp>
-      <mc:AlternateContent xmlns:mc="http://schemas.openxmlformats.org/markup-compatibility/2006">
-        <mc:Choice xmlns:a14="http://schemas.microsoft.com/office/drawing/2010/main" Requires="a14">
+      <mc:AlternateContent xmlns:mc="http://schemas.openxmlformats.org/markup-compatibility/2006" xmlns:a14="http://schemas.microsoft.com/office/drawing/2010/main">
+        <mc:Choice Requires="a14">
           <p:sp>
             <p:nvSpPr>
               <p:cNvPr id="3" name="Espaço Reservado para Conteúdo 2"/>
@@ -7982,7 +8227,7 @@
             </p:txBody>
           </p:sp>
         </mc:Choice>
-        <mc:Fallback>
+        <mc:Fallback xmlns="">
           <p:sp>
             <p:nvSpPr>
               <p:cNvPr id="3" name="Espaço Reservado para Conteúdo 2"/>
@@ -8245,7 +8490,7 @@
 </p:sld>
 </file>
 
-<file path=ppt/slides/slide15.xml><?xml version="1.0" encoding="utf-8"?>
+<file path=ppt/slides/slide16.xml><?xml version="1.0" encoding="utf-8"?>
 <p:sld xmlns:a="http://schemas.openxmlformats.org/drawingml/2006/main" xmlns:r="http://schemas.openxmlformats.org/officeDocument/2006/relationships" xmlns:p="http://schemas.openxmlformats.org/presentationml/2006/main">
   <p:cSld>
     <p:spTree>
@@ -8285,8 +8530,8 @@
           </a:p>
         </p:txBody>
       </p:sp>
-      <mc:AlternateContent xmlns:mc="http://schemas.openxmlformats.org/markup-compatibility/2006">
-        <mc:Choice xmlns:a14="http://schemas.microsoft.com/office/drawing/2010/main" Requires="a14">
+      <mc:AlternateContent xmlns:mc="http://schemas.openxmlformats.org/markup-compatibility/2006" xmlns:a14="http://schemas.microsoft.com/office/drawing/2010/main">
+        <mc:Choice Requires="a14">
           <p:sp>
             <p:nvSpPr>
               <p:cNvPr id="3" name="Espaço Reservado para Conteúdo 2"/>
@@ -8410,7 +8655,7 @@
             </p:txBody>
           </p:sp>
         </mc:Choice>
-        <mc:Fallback>
+        <mc:Fallback xmlns="">
           <p:sp>
             <p:nvSpPr>
               <p:cNvPr id="3" name="Espaço Reservado para Conteúdo 2"/>
@@ -8506,7 +8751,7 @@
 </p:sld>
 </file>
 
-<file path=ppt/slides/slide16.xml><?xml version="1.0" encoding="utf-8"?>
+<file path=ppt/slides/slide17.xml><?xml version="1.0" encoding="utf-8"?>
 <p:sld xmlns:a="http://schemas.openxmlformats.org/drawingml/2006/main" xmlns:r="http://schemas.openxmlformats.org/officeDocument/2006/relationships" xmlns:p="http://schemas.openxmlformats.org/presentationml/2006/main">
   <p:cSld>
     <p:spTree>
@@ -8759,7 +9004,7 @@
 </p:sld>
 </file>
 
-<file path=ppt/slides/slide17.xml><?xml version="1.0" encoding="utf-8"?>
+<file path=ppt/slides/slide18.xml><?xml version="1.0" encoding="utf-8"?>
 <p:sld xmlns:a="http://schemas.openxmlformats.org/drawingml/2006/main" xmlns:r="http://schemas.openxmlformats.org/officeDocument/2006/relationships" xmlns:p="http://schemas.openxmlformats.org/presentationml/2006/main">
   <p:cSld>
     <p:spTree>
@@ -9000,7 +9245,7 @@
 </p:sld>
 </file>
 
-<file path=ppt/slides/slide18.xml><?xml version="1.0" encoding="utf-8"?>
+<file path=ppt/slides/slide19.xml><?xml version="1.0" encoding="utf-8"?>
 <p:sld xmlns:a="http://schemas.openxmlformats.org/drawingml/2006/main" xmlns:r="http://schemas.openxmlformats.org/officeDocument/2006/relationships" xmlns:p="http://schemas.openxmlformats.org/presentationml/2006/main">
   <p:cSld>
     <p:spTree>
@@ -9045,8 +9290,8 @@
           </a:p>
         </p:txBody>
       </p:sp>
-      <mc:AlternateContent xmlns:mc="http://schemas.openxmlformats.org/markup-compatibility/2006">
-        <mc:Choice xmlns:a14="http://schemas.microsoft.com/office/drawing/2010/main" Requires="a14">
+      <mc:AlternateContent xmlns:mc="http://schemas.openxmlformats.org/markup-compatibility/2006" xmlns:a14="http://schemas.microsoft.com/office/drawing/2010/main">
+        <mc:Choice Requires="a14">
           <p:sp>
             <p:nvSpPr>
               <p:cNvPr id="3" name="Espaço Reservado para Conteúdo 2">
@@ -9162,7 +9407,7 @@
             </p:txBody>
           </p:sp>
         </mc:Choice>
-        <mc:Fallback>
+        <mc:Fallback xmlns="">
           <p:sp>
             <p:nvSpPr>
               <p:cNvPr id="3" name="Espaço Reservado para Conteúdo 2">
@@ -9219,7 +9464,320 @@
 </p:sld>
 </file>
 
-<file path=ppt/slides/slide19.xml><?xml version="1.0" encoding="utf-8"?>
+<file path=ppt/slides/slide2.xml><?xml version="1.0" encoding="utf-8"?>
+<p:sld xmlns:a="http://schemas.openxmlformats.org/drawingml/2006/main" xmlns:r="http://schemas.openxmlformats.org/officeDocument/2006/relationships" xmlns:p="http://schemas.openxmlformats.org/presentationml/2006/main">
+  <p:cSld>
+    <p:spTree>
+      <p:nvGrpSpPr>
+        <p:cNvPr id="1" name=""/>
+        <p:cNvGrpSpPr/>
+        <p:nvPr/>
+      </p:nvGrpSpPr>
+      <p:grpSpPr>
+        <a:xfrm>
+          <a:off x="0" y="0"/>
+          <a:ext cx="0" cy="0"/>
+          <a:chOff x="0" y="0"/>
+          <a:chExt cx="0" cy="0"/>
+        </a:xfrm>
+      </p:grpSpPr>
+      <p:sp>
+        <p:nvSpPr>
+          <p:cNvPr id="2" name="Título 1"/>
+          <p:cNvSpPr>
+            <a:spLocks noGrp="1"/>
+          </p:cNvSpPr>
+          <p:nvPr>
+            <p:ph type="title"/>
+          </p:nvPr>
+        </p:nvSpPr>
+        <p:spPr/>
+        <p:txBody>
+          <a:bodyPr/>
+          <a:lstStyle/>
+          <a:p>
+            <a:r>
+              <a:rPr lang="pt-BR" dirty="0"/>
+              <a:t>Recapitulando</a:t>
+            </a:r>
+            <a:endParaRPr lang="en-US" dirty="0"/>
+          </a:p>
+        </p:txBody>
+      </p:sp>
+      <p:sp>
+        <p:nvSpPr>
+          <p:cNvPr id="3" name="Espaço Reservado para Conteúdo 2"/>
+          <p:cNvSpPr>
+            <a:spLocks noGrp="1"/>
+          </p:cNvSpPr>
+          <p:nvPr>
+            <p:ph idx="1"/>
+          </p:nvPr>
+        </p:nvSpPr>
+        <p:spPr>
+          <a:xfrm>
+            <a:off x="838199" y="1825624"/>
+            <a:ext cx="11223172" cy="5032376"/>
+          </a:xfrm>
+        </p:spPr>
+        <p:txBody>
+          <a:bodyPr>
+            <a:normAutofit/>
+          </a:bodyPr>
+          <a:lstStyle/>
+          <a:p>
+            <a:r>
+              <a:rPr lang="pt-BR" dirty="0"/>
+              <a:t>Até o momento, todos os algoritmos que aprendemos seguiam o paradigma do aprendizado supervisionado.</a:t>
+            </a:r>
+          </a:p>
+          <a:p>
+            <a:r>
+              <a:rPr lang="pt-BR" dirty="0"/>
+              <a:t>Hoje, falaremos sobre </a:t>
+            </a:r>
+            <a:r>
+              <a:rPr lang="pt-BR" b="1" i="1" dirty="0"/>
+              <a:t>clustering</a:t>
+            </a:r>
+            <a:r>
+              <a:rPr lang="pt-BR" dirty="0"/>
+              <a:t>, que são algoritmos de </a:t>
+            </a:r>
+            <a:r>
+              <a:rPr lang="pt-BR" b="1" dirty="0"/>
+              <a:t>aprendizado não-supervisionado</a:t>
+            </a:r>
+            <a:r>
+              <a:rPr lang="pt-BR" dirty="0"/>
+              <a:t>.</a:t>
+            </a:r>
+          </a:p>
+          <a:p>
+            <a:pPr lvl="1">
+              <a:buFont typeface="Wingdings" panose="05000000000000000000" pitchFamily="2" charset="2"/>
+              <a:buChar char="§"/>
+            </a:pPr>
+            <a:r>
+              <a:rPr lang="pt-BR" dirty="0"/>
+              <a:t>Não temos rótulos, apenas atributos.</a:t>
+            </a:r>
+          </a:p>
+          <a:p>
+            <a:r>
+              <a:rPr lang="pt-BR" dirty="0"/>
+              <a:t>Eles visam criar agrupamentos de dados (chamados de </a:t>
+            </a:r>
+            <a:r>
+              <a:rPr lang="pt-BR" b="1" i="1" dirty="0"/>
+              <a:t>clusters</a:t>
+            </a:r>
+            <a:r>
+              <a:rPr lang="pt-BR" b="1" dirty="0"/>
+              <a:t> </a:t>
+            </a:r>
+            <a:r>
+              <a:rPr lang="pt-BR" dirty="0"/>
+              <a:t>ou</a:t>
+            </a:r>
+            <a:r>
+              <a:rPr lang="pt-BR" b="1" dirty="0"/>
+              <a:t> grupos</a:t>
+            </a:r>
+            <a:r>
+              <a:rPr lang="pt-BR" dirty="0"/>
+              <a:t>) segundo seu </a:t>
+            </a:r>
+            <a:r>
+              <a:rPr lang="pt-BR" b="1" dirty="0">
+                <a:solidFill>
+                  <a:srgbClr val="00B050"/>
+                </a:solidFill>
+              </a:rPr>
+              <a:t>grau de semelhança</a:t>
+            </a:r>
+            <a:r>
+              <a:rPr lang="pt-BR" dirty="0"/>
+              <a:t>. </a:t>
+            </a:r>
+          </a:p>
+          <a:p>
+            <a:r>
+              <a:rPr lang="pt-BR" dirty="0"/>
+              <a:t>Nesta aula, aprenderemos sobre o algoritmo chamado de </a:t>
+            </a:r>
+            <a:r>
+              <a:rPr lang="pt-BR" b="1" dirty="0"/>
+              <a:t>k-Médias</a:t>
+            </a:r>
+            <a:r>
+              <a:rPr lang="pt-BR" dirty="0"/>
+              <a:t> (ou </a:t>
+            </a:r>
+            <a:r>
+              <a:rPr lang="pt-BR" b="1" i="1" dirty="0"/>
+              <a:t>k-</a:t>
+            </a:r>
+            <a:r>
+              <a:rPr lang="pt-BR" b="1" i="1" dirty="0" err="1"/>
+              <a:t>Means</a:t>
+            </a:r>
+            <a:r>
+              <a:rPr lang="pt-BR" dirty="0"/>
+              <a:t>, em inglês) que é um dos algoritmos mais simples de </a:t>
+            </a:r>
+            <a:r>
+              <a:rPr lang="pt-BR" b="1" i="1" dirty="0"/>
+              <a:t>clustering</a:t>
+            </a:r>
+            <a:r>
+              <a:rPr lang="pt-BR" dirty="0"/>
+              <a:t>.</a:t>
+            </a:r>
+          </a:p>
+        </p:txBody>
+      </p:sp>
+    </p:spTree>
+    <p:extLst>
+      <p:ext uri="{BB962C8B-B14F-4D97-AF65-F5344CB8AC3E}">
+        <p14:creationId xmlns:p14="http://schemas.microsoft.com/office/powerpoint/2010/main" val="2127415881"/>
+      </p:ext>
+    </p:extLst>
+  </p:cSld>
+  <p:clrMapOvr>
+    <a:masterClrMapping/>
+  </p:clrMapOvr>
+</p:sld>
+</file>
+
+<file path=ppt/slides/slide20.xml><?xml version="1.0" encoding="utf-8"?>
+<p:sld xmlns:a="http://schemas.openxmlformats.org/drawingml/2006/main" xmlns:r="http://schemas.openxmlformats.org/officeDocument/2006/relationships" xmlns:p="http://schemas.openxmlformats.org/presentationml/2006/main">
+  <p:cSld>
+    <p:spTree>
+      <p:nvGrpSpPr>
+        <p:cNvPr id="1" name=""/>
+        <p:cNvGrpSpPr/>
+        <p:nvPr/>
+      </p:nvGrpSpPr>
+      <p:grpSpPr>
+        <a:xfrm>
+          <a:off x="0" y="0"/>
+          <a:ext cx="0" cy="0"/>
+          <a:chOff x="0" y="0"/>
+          <a:chExt cx="0" cy="0"/>
+        </a:xfrm>
+      </p:grpSpPr>
+      <p:sp>
+        <p:nvSpPr>
+          <p:cNvPr id="2" name="Title 1">
+            <a:extLst>
+              <a:ext uri="{FF2B5EF4-FFF2-40B4-BE49-F238E27FC236}">
+                <a16:creationId xmlns:a16="http://schemas.microsoft.com/office/drawing/2014/main" id="{A07C804B-5A43-5C89-0C42-420DDBB1CA5A}"/>
+              </a:ext>
+            </a:extLst>
+          </p:cNvPr>
+          <p:cNvSpPr>
+            <a:spLocks noGrp="1"/>
+          </p:cNvSpPr>
+          <p:nvPr>
+            <p:ph type="title"/>
+          </p:nvPr>
+        </p:nvSpPr>
+        <p:spPr/>
+        <p:txBody>
+          <a:bodyPr/>
+          <a:lstStyle/>
+          <a:p>
+            <a:r>
+              <a:rPr lang="pt-BR" dirty="0"/>
+              <a:t>Outros algoritmos de </a:t>
+            </a:r>
+            <a:r>
+              <a:rPr lang="pt-BR" i="1" dirty="0"/>
+              <a:t>clustering</a:t>
+            </a:r>
+            <a:endParaRPr lang="en-US" i="1" dirty="0"/>
+          </a:p>
+        </p:txBody>
+      </p:sp>
+      <p:sp>
+        <p:nvSpPr>
+          <p:cNvPr id="3" name="Content Placeholder 2">
+            <a:extLst>
+              <a:ext uri="{FF2B5EF4-FFF2-40B4-BE49-F238E27FC236}">
+                <a16:creationId xmlns:a16="http://schemas.microsoft.com/office/drawing/2014/main" id="{288A7DCE-B5C5-82F5-CC2A-E963BDDE03C9}"/>
+              </a:ext>
+            </a:extLst>
+          </p:cNvPr>
+          <p:cNvSpPr>
+            <a:spLocks noGrp="1"/>
+          </p:cNvSpPr>
+          <p:nvPr>
+            <p:ph idx="1"/>
+          </p:nvPr>
+        </p:nvSpPr>
+        <p:spPr/>
+        <p:txBody>
+          <a:bodyPr/>
+          <a:lstStyle/>
+          <a:p>
+            <a:r>
+              <a:rPr lang="pt-BR" dirty="0"/>
+              <a:t>DBSCAN</a:t>
+            </a:r>
+          </a:p>
+          <a:p>
+            <a:r>
+              <a:rPr lang="pt-BR" dirty="0"/>
+              <a:t>HDBSCAN</a:t>
+            </a:r>
+          </a:p>
+          <a:p>
+            <a:r>
+              <a:rPr lang="pt-BR" dirty="0" err="1"/>
+              <a:t>Gaussian</a:t>
+            </a:r>
+            <a:r>
+              <a:rPr lang="pt-BR" dirty="0"/>
+              <a:t> </a:t>
+            </a:r>
+            <a:r>
+              <a:rPr lang="pt-BR" dirty="0" err="1"/>
+              <a:t>mixtrures</a:t>
+            </a:r>
+            <a:endParaRPr lang="pt-BR" dirty="0"/>
+          </a:p>
+          <a:p>
+            <a:endParaRPr lang="en-US" dirty="0"/>
+          </a:p>
+          <a:p>
+            <a:r>
+              <a:rPr lang="en-US" dirty="0">
+                <a:hlinkClick r:id="rId2"/>
+              </a:rPr>
+              <a:t>https://scikit-learn.org/stable/modules/clustering.html</a:t>
+            </a:r>
+            <a:endParaRPr lang="en-US" dirty="0"/>
+          </a:p>
+          <a:p>
+            <a:endParaRPr lang="en-US" dirty="0"/>
+          </a:p>
+        </p:txBody>
+      </p:sp>
+    </p:spTree>
+    <p:extLst>
+      <p:ext uri="{BB962C8B-B14F-4D97-AF65-F5344CB8AC3E}">
+        <p14:creationId xmlns:p14="http://schemas.microsoft.com/office/powerpoint/2010/main" val="3933081201"/>
+      </p:ext>
+    </p:extLst>
+  </p:cSld>
+  <p:clrMapOvr>
+    <a:masterClrMapping/>
+  </p:clrMapOvr>
+</p:sld>
+</file>
+
+<file path=ppt/slides/slide21.xml><?xml version="1.0" encoding="utf-8"?>
 <p:sld xmlns:a="http://schemas.openxmlformats.org/drawingml/2006/main" xmlns:r="http://schemas.openxmlformats.org/officeDocument/2006/relationships" xmlns:p="http://schemas.openxmlformats.org/presentationml/2006/main">
   <p:cSld>
     <p:spTree>
@@ -9570,7 +10128,7 @@
 </p:sld>
 </file>
 
-<file path=ppt/slides/slide2.xml><?xml version="1.0" encoding="utf-8"?>
+<file path=ppt/slides/slide22.xml><?xml version="1.0" encoding="utf-8"?>
 <p:sld xmlns:a="http://schemas.openxmlformats.org/drawingml/2006/main" xmlns:r="http://schemas.openxmlformats.org/officeDocument/2006/relationships" xmlns:p="http://schemas.openxmlformats.org/presentationml/2006/main">
   <p:cSld>
     <p:spTree>
@@ -9589,172 +10147,6 @@
       </p:grpSpPr>
       <p:sp>
         <p:nvSpPr>
-          <p:cNvPr id="2" name="Título 1"/>
-          <p:cNvSpPr>
-            <a:spLocks noGrp="1"/>
-          </p:cNvSpPr>
-          <p:nvPr>
-            <p:ph type="title"/>
-          </p:nvPr>
-        </p:nvSpPr>
-        <p:spPr/>
-        <p:txBody>
-          <a:bodyPr/>
-          <a:lstStyle/>
-          <a:p>
-            <a:r>
-              <a:rPr lang="pt-BR" dirty="0"/>
-              <a:t>Recapitulando</a:t>
-            </a:r>
-            <a:endParaRPr lang="en-US" dirty="0"/>
-          </a:p>
-        </p:txBody>
-      </p:sp>
-      <p:sp>
-        <p:nvSpPr>
-          <p:cNvPr id="3" name="Espaço Reservado para Conteúdo 2"/>
-          <p:cNvSpPr>
-            <a:spLocks noGrp="1"/>
-          </p:cNvSpPr>
-          <p:nvPr>
-            <p:ph idx="1"/>
-          </p:nvPr>
-        </p:nvSpPr>
-        <p:spPr>
-          <a:xfrm>
-            <a:off x="838199" y="1825624"/>
-            <a:ext cx="11204865" cy="5032376"/>
-          </a:xfrm>
-        </p:spPr>
-        <p:txBody>
-          <a:bodyPr>
-            <a:normAutofit/>
-          </a:bodyPr>
-          <a:lstStyle/>
-          <a:p>
-            <a:r>
-              <a:rPr lang="pt-BR" dirty="0"/>
-              <a:t>Até o momento, todos os algoritmos que aprendemos seguiam o paradigma do aprendizado supervisionado.</a:t>
-            </a:r>
-          </a:p>
-          <a:p>
-            <a:r>
-              <a:rPr lang="pt-BR" dirty="0"/>
-              <a:t>Hoje, falaremos sobre </a:t>
-            </a:r>
-            <a:r>
-              <a:rPr lang="pt-BR" b="1" dirty="0" err="1"/>
-              <a:t>clustering</a:t>
-            </a:r>
-            <a:r>
-              <a:rPr lang="pt-BR" dirty="0"/>
-              <a:t>, que são algoritmos de </a:t>
-            </a:r>
-            <a:r>
-              <a:rPr lang="pt-BR" b="1" dirty="0"/>
-              <a:t>aprendizado não-supervisionado</a:t>
-            </a:r>
-            <a:r>
-              <a:rPr lang="pt-BR" dirty="0"/>
-              <a:t> que visam criar agrupamentos de dados (chamados de </a:t>
-            </a:r>
-            <a:r>
-              <a:rPr lang="pt-BR" b="1" dirty="0"/>
-              <a:t>clusters </a:t>
-            </a:r>
-            <a:r>
-              <a:rPr lang="pt-BR" dirty="0"/>
-              <a:t>ou</a:t>
-            </a:r>
-            <a:r>
-              <a:rPr lang="pt-BR" b="1" dirty="0"/>
-              <a:t> grupos</a:t>
-            </a:r>
-            <a:r>
-              <a:rPr lang="pt-BR" dirty="0"/>
-              <a:t>) segundo seu </a:t>
-            </a:r>
-            <a:r>
-              <a:rPr lang="pt-BR" b="1" dirty="0">
-                <a:solidFill>
-                  <a:srgbClr val="00B050"/>
-                </a:solidFill>
-              </a:rPr>
-              <a:t>grau de semelhança</a:t>
-            </a:r>
-            <a:r>
-              <a:rPr lang="pt-BR" dirty="0"/>
-              <a:t>. </a:t>
-            </a:r>
-          </a:p>
-          <a:p>
-            <a:r>
-              <a:rPr lang="pt-BR" dirty="0"/>
-              <a:t>Em seguida, aprenderemos sobre o algoritmo chamado de </a:t>
-            </a:r>
-            <a:r>
-              <a:rPr lang="pt-BR" b="1" dirty="0"/>
-              <a:t>k-Médias</a:t>
-            </a:r>
-            <a:r>
-              <a:rPr lang="pt-BR" dirty="0"/>
-              <a:t> (ou </a:t>
-            </a:r>
-            <a:r>
-              <a:rPr lang="pt-BR" b="1" dirty="0"/>
-              <a:t>k-</a:t>
-            </a:r>
-            <a:r>
-              <a:rPr lang="pt-BR" b="1" dirty="0" err="1"/>
-              <a:t>Means</a:t>
-            </a:r>
-            <a:r>
-              <a:rPr lang="pt-BR" dirty="0"/>
-              <a:t>, em inglês) que é um dos algoritmos mais simples de </a:t>
-            </a:r>
-            <a:r>
-              <a:rPr lang="pt-BR" b="1" dirty="0" err="1"/>
-              <a:t>clustering</a:t>
-            </a:r>
-            <a:r>
-              <a:rPr lang="pt-BR" dirty="0"/>
-              <a:t>.</a:t>
-            </a:r>
-          </a:p>
-        </p:txBody>
-      </p:sp>
-    </p:spTree>
-    <p:extLst>
-      <p:ext uri="{BB962C8B-B14F-4D97-AF65-F5344CB8AC3E}">
-        <p14:creationId xmlns:p14="http://schemas.microsoft.com/office/powerpoint/2010/main" val="2127415881"/>
-      </p:ext>
-    </p:extLst>
-  </p:cSld>
-  <p:clrMapOvr>
-    <a:masterClrMapping/>
-  </p:clrMapOvr>
-</p:sld>
-</file>
-
-<file path=ppt/slides/slide20.xml><?xml version="1.0" encoding="utf-8"?>
-<p:sld xmlns:a="http://schemas.openxmlformats.org/drawingml/2006/main" xmlns:r="http://schemas.openxmlformats.org/officeDocument/2006/relationships" xmlns:p="http://schemas.openxmlformats.org/presentationml/2006/main">
-  <p:cSld>
-    <p:spTree>
-      <p:nvGrpSpPr>
-        <p:cNvPr id="1" name=""/>
-        <p:cNvGrpSpPr/>
-        <p:nvPr/>
-      </p:nvGrpSpPr>
-      <p:grpSpPr>
-        <a:xfrm>
-          <a:off x="0" y="0"/>
-          <a:ext cx="0" cy="0"/>
-          <a:chOff x="0" y="0"/>
-          <a:chExt cx="0" cy="0"/>
-        </a:xfrm>
-      </p:grpSpPr>
-      <p:sp>
-        <p:nvSpPr>
           <p:cNvPr id="2" name="Title 1">
             <a:extLst>
               <a:ext uri="{FF2B5EF4-FFF2-40B4-BE49-F238E27FC236}">
@@ -9831,7 +10223,7 @@
 </p:sld>
 </file>
 
-<file path=ppt/slides/slide21.xml><?xml version="1.0" encoding="utf-8"?>
+<file path=ppt/slides/slide23.xml><?xml version="1.0" encoding="utf-8"?>
 <p:sld xmlns:a="http://schemas.openxmlformats.org/drawingml/2006/main" xmlns:r="http://schemas.openxmlformats.org/officeDocument/2006/relationships" xmlns:p="http://schemas.openxmlformats.org/presentationml/2006/main">
   <p:cSld>
     <p:spTree>
@@ -9917,7 +10309,7 @@
 </p:sld>
 </file>
 
-<file path=ppt/slides/slide22.xml><?xml version="1.0" encoding="utf-8"?>
+<file path=ppt/slides/slide24.xml><?xml version="1.0" encoding="utf-8"?>
 <p:sld xmlns:a="http://schemas.openxmlformats.org/drawingml/2006/main" xmlns:r="http://schemas.openxmlformats.org/officeDocument/2006/relationships" xmlns:p="http://schemas.openxmlformats.org/presentationml/2006/main">
   <p:cSld>
     <p:spTree>
@@ -10003,7 +10395,7 @@
 </p:sld>
 </file>
 
-<file path=ppt/slides/slide23.xml><?xml version="1.0" encoding="utf-8"?>
+<file path=ppt/slides/slide25.xml><?xml version="1.0" encoding="utf-8"?>
 <p:sld xmlns:a="http://schemas.openxmlformats.org/drawingml/2006/main" xmlns:r="http://schemas.openxmlformats.org/officeDocument/2006/relationships" xmlns:p="http://schemas.openxmlformats.org/presentationml/2006/main">
   <p:cSld>
     <p:spTree>
@@ -10253,6 +10645,126 @@
           <a:chExt cx="0" cy="0"/>
         </a:xfrm>
       </p:grpSpPr>
+      <p:pic>
+        <p:nvPicPr>
+          <p:cNvPr id="4" name="Picture 4" descr="openAlchemy no Twitter: &quot;Sunday Funday! Pool day with some mean algorithms,  K? #machinelearning #deeplearning #kmeans #sundayfunday #ml #ai  #artificialintelligence #memes #meme #memesdaily #openalchemy #nlp #cv  #aimemes #funny #math #statistics https ...">
+            <a:extLst>
+              <a:ext uri="{FF2B5EF4-FFF2-40B4-BE49-F238E27FC236}">
+                <a16:creationId xmlns:a16="http://schemas.microsoft.com/office/drawing/2014/main" id="{37E0D542-AEF0-704D-B767-771A0D88CE79}"/>
+              </a:ext>
+            </a:extLst>
+          </p:cNvPr>
+          <p:cNvPicPr>
+            <a:picLocks noChangeAspect="1" noChangeArrowheads="1"/>
+          </p:cNvPicPr>
+          <p:nvPr/>
+        </p:nvPicPr>
+        <p:blipFill rotWithShape="1">
+          <a:blip r:embed="rId2">
+            <a:extLst>
+              <a:ext uri="{28A0092B-C50C-407E-A947-70E740481C1C}">
+                <a14:useLocalDpi xmlns:a14="http://schemas.microsoft.com/office/drawing/2010/main" val="0"/>
+              </a:ext>
+            </a:extLst>
+          </a:blip>
+          <a:srcRect l="21838" r="22192"/>
+          <a:stretch/>
+        </p:blipFill>
+        <p:spPr bwMode="auto">
+          <a:xfrm>
+            <a:off x="2413464" y="433788"/>
+            <a:ext cx="3519251" cy="6287671"/>
+          </a:xfrm>
+          <a:prstGeom prst="rect">
+            <a:avLst/>
+          </a:prstGeom>
+          <a:noFill/>
+          <a:extLst>
+            <a:ext uri="{909E8E84-426E-40DD-AFC4-6F175D3DCCD1}">
+              <a14:hiddenFill xmlns:a14="http://schemas.microsoft.com/office/drawing/2010/main">
+                <a:solidFill>
+                  <a:srgbClr val="FFFFFF"/>
+                </a:solidFill>
+              </a14:hiddenFill>
+            </a:ext>
+          </a:extLst>
+        </p:spPr>
+      </p:pic>
+      <p:sp>
+        <p:nvSpPr>
+          <p:cNvPr id="6" name="TextBox 5">
+            <a:extLst>
+              <a:ext uri="{FF2B5EF4-FFF2-40B4-BE49-F238E27FC236}">
+                <a16:creationId xmlns:a16="http://schemas.microsoft.com/office/drawing/2014/main" id="{7A9955D7-EF0A-C073-CA9C-EC6A396485B8}"/>
+              </a:ext>
+            </a:extLst>
+          </p:cNvPr>
+          <p:cNvSpPr txBox="1"/>
+          <p:nvPr/>
+        </p:nvSpPr>
+        <p:spPr>
+          <a:xfrm>
+            <a:off x="6574971" y="2814935"/>
+            <a:ext cx="4898572" cy="2246769"/>
+          </a:xfrm>
+          <a:prstGeom prst="rect">
+            <a:avLst/>
+          </a:prstGeom>
+          <a:noFill/>
+        </p:spPr>
+        <p:txBody>
+          <a:bodyPr wrap="square">
+            <a:spAutoFit/>
+          </a:bodyPr>
+          <a:lstStyle/>
+          <a:p>
+            <a:pPr algn="ctr"/>
+            <a:r>
+              <a:rPr lang="pt-BR" sz="2800" i="1" dirty="0"/>
+              <a:t>K-</a:t>
+            </a:r>
+            <a:r>
+              <a:rPr lang="pt-BR" sz="2800" i="1" dirty="0" err="1"/>
+              <a:t>means</a:t>
+            </a:r>
+            <a:r>
+              <a:rPr lang="pt-BR" sz="2800" dirty="0"/>
+              <a:t> organiza dados como na figura: cada ponto encontra seu grupo mais próximo, formando clusters de forma simples e iterativa</a:t>
+            </a:r>
+            <a:endParaRPr lang="en-US" sz="2800" dirty="0"/>
+          </a:p>
+        </p:txBody>
+      </p:sp>
+    </p:spTree>
+    <p:extLst>
+      <p:ext uri="{BB962C8B-B14F-4D97-AF65-F5344CB8AC3E}">
+        <p14:creationId xmlns:p14="http://schemas.microsoft.com/office/powerpoint/2010/main" val="3439447642"/>
+      </p:ext>
+    </p:extLst>
+  </p:cSld>
+  <p:clrMapOvr>
+    <a:masterClrMapping/>
+  </p:clrMapOvr>
+</p:sld>
+</file>
+
+<file path=ppt/slides/slide4.xml><?xml version="1.0" encoding="utf-8"?>
+<p:sld xmlns:a="http://schemas.openxmlformats.org/drawingml/2006/main" xmlns:r="http://schemas.openxmlformats.org/officeDocument/2006/relationships" xmlns:p="http://schemas.openxmlformats.org/presentationml/2006/main">
+  <p:cSld>
+    <p:spTree>
+      <p:nvGrpSpPr>
+        <p:cNvPr id="1" name=""/>
+        <p:cNvGrpSpPr/>
+        <p:nvPr/>
+      </p:nvGrpSpPr>
+      <p:grpSpPr>
+        <a:xfrm>
+          <a:off x="0" y="0"/>
+          <a:ext cx="0" cy="0"/>
+          <a:chOff x="0" y="0"/>
+          <a:chExt cx="0" cy="0"/>
+        </a:xfrm>
+      </p:grpSpPr>
       <p:sp>
         <p:nvSpPr>
           <p:cNvPr id="2" name="Title 1"/>
@@ -10356,7 +10868,7 @@
 </p:sld>
 </file>
 
-<file path=ppt/slides/slide4.xml><?xml version="1.0" encoding="utf-8"?>
+<file path=ppt/slides/slide5.xml><?xml version="1.0" encoding="utf-8"?>
 <p:sld xmlns:a="http://schemas.openxmlformats.org/drawingml/2006/main" xmlns:r="http://schemas.openxmlformats.org/officeDocument/2006/relationships" xmlns:p="http://schemas.openxmlformats.org/presentationml/2006/main">
   <p:cSld>
     <p:spTree>
@@ -10702,7 +11214,7 @@
 </p:sld>
 </file>
 
-<file path=ppt/slides/slide5.xml><?xml version="1.0" encoding="utf-8"?>
+<file path=ppt/slides/slide6.xml><?xml version="1.0" encoding="utf-8"?>
 <p:sld xmlns:a="http://schemas.openxmlformats.org/drawingml/2006/main" xmlns:r="http://schemas.openxmlformats.org/officeDocument/2006/relationships" xmlns:p="http://schemas.openxmlformats.org/presentationml/2006/main">
   <p:cSld>
     <p:spTree>
@@ -10972,7 +11484,7 @@
 </p:sld>
 </file>
 
-<file path=ppt/slides/slide6.xml><?xml version="1.0" encoding="utf-8"?>
+<file path=ppt/slides/slide7.xml><?xml version="1.0" encoding="utf-8"?>
 <p:sld xmlns:a="http://schemas.openxmlformats.org/drawingml/2006/main" xmlns:r="http://schemas.openxmlformats.org/officeDocument/2006/relationships" xmlns:p="http://schemas.openxmlformats.org/presentationml/2006/main">
   <p:cSld>
     <p:spTree>
@@ -11359,7 +11871,7 @@
 </p:sld>
 </file>
 
-<file path=ppt/slides/slide7.xml><?xml version="1.0" encoding="utf-8"?>
+<file path=ppt/slides/slide8.xml><?xml version="1.0" encoding="utf-8"?>
 <p:sld xmlns:a="http://schemas.openxmlformats.org/drawingml/2006/main" xmlns:r="http://schemas.openxmlformats.org/officeDocument/2006/relationships" xmlns:p="http://schemas.openxmlformats.org/presentationml/2006/main">
   <p:cSld>
     <p:spTree>
@@ -11563,7 +12075,7 @@
 </p:sld>
 </file>
 
-<file path=ppt/slides/slide8.xml><?xml version="1.0" encoding="utf-8"?>
+<file path=ppt/slides/slide9.xml><?xml version="1.0" encoding="utf-8"?>
 <p:sld xmlns:a="http://schemas.openxmlformats.org/drawingml/2006/main" xmlns:r="http://schemas.openxmlformats.org/officeDocument/2006/relationships" xmlns:p="http://schemas.openxmlformats.org/presentationml/2006/main">
   <p:cSld>
     <p:spTree>
@@ -11630,8 +12142,8 @@
           </a:p>
         </p:txBody>
       </p:sp>
-      <mc:AlternateContent xmlns:mc="http://schemas.openxmlformats.org/markup-compatibility/2006">
-        <mc:Choice xmlns:a14="http://schemas.microsoft.com/office/drawing/2010/main" Requires="a14">
+      <mc:AlternateContent xmlns:mc="http://schemas.openxmlformats.org/markup-compatibility/2006" xmlns:a14="http://schemas.microsoft.com/office/drawing/2010/main">
+        <mc:Choice Requires="a14">
           <p:sp>
             <p:nvSpPr>
               <p:cNvPr id="3" name="Espaço Reservado para Conteúdo 2">
@@ -11915,7 +12427,7 @@
             </p:txBody>
           </p:sp>
         </mc:Choice>
-        <mc:Fallback>
+        <mc:Fallback xmlns="">
           <p:sp>
             <p:nvSpPr>
               <p:cNvPr id="3" name="Espaço Reservado para Conteúdo 2">
@@ -11974,7 +12486,7 @@
           <p:nvPr/>
         </p:nvPicPr>
         <p:blipFill rotWithShape="1">
-          <a:blip r:embed="rId4">
+          <a:blip r:embed="rId3">
             <a:extLst>
               <a:ext uri="{28A0092B-C50C-407E-A947-70E740481C1C}">
                 <a14:useLocalDpi xmlns:a14="http://schemas.microsoft.com/office/drawing/2010/main" val="0"/>
@@ -12008,249 +12520,6 @@
     <p:extLst>
       <p:ext uri="{BB962C8B-B14F-4D97-AF65-F5344CB8AC3E}">
         <p14:creationId xmlns:p14="http://schemas.microsoft.com/office/powerpoint/2010/main" val="3453578561"/>
-      </p:ext>
-    </p:extLst>
-  </p:cSld>
-  <p:clrMapOvr>
-    <a:masterClrMapping/>
-  </p:clrMapOvr>
-</p:sld>
-</file>
-
-<file path=ppt/slides/slide9.xml><?xml version="1.0" encoding="utf-8"?>
-<p:sld xmlns:a="http://schemas.openxmlformats.org/drawingml/2006/main" xmlns:r="http://schemas.openxmlformats.org/officeDocument/2006/relationships" xmlns:p="http://schemas.openxmlformats.org/presentationml/2006/main">
-  <p:cSld>
-    <p:spTree>
-      <p:nvGrpSpPr>
-        <p:cNvPr id="1" name=""/>
-        <p:cNvGrpSpPr/>
-        <p:nvPr/>
-      </p:nvGrpSpPr>
-      <p:grpSpPr>
-        <a:xfrm>
-          <a:off x="0" y="0"/>
-          <a:ext cx="0" cy="0"/>
-          <a:chOff x="0" y="0"/>
-          <a:chExt cx="0" cy="0"/>
-        </a:xfrm>
-      </p:grpSpPr>
-      <p:sp>
-        <p:nvSpPr>
-          <p:cNvPr id="2" name="Título 1"/>
-          <p:cNvSpPr>
-            <a:spLocks noGrp="1"/>
-          </p:cNvSpPr>
-          <p:nvPr>
-            <p:ph type="title"/>
-          </p:nvPr>
-        </p:nvSpPr>
-        <p:spPr/>
-        <p:txBody>
-          <a:bodyPr/>
-          <a:lstStyle/>
-          <a:p>
-            <a:r>
-              <a:rPr lang="pt-BR" dirty="0"/>
-              <a:t>Quantos devem ser os clusters?</a:t>
-            </a:r>
-            <a:endParaRPr lang="en-US" dirty="0"/>
-          </a:p>
-        </p:txBody>
-      </p:sp>
-      <p:sp>
-        <p:nvSpPr>
-          <p:cNvPr id="3" name="Espaço Reservado para Conteúdo 2"/>
-          <p:cNvSpPr>
-            <a:spLocks noGrp="1"/>
-          </p:cNvSpPr>
-          <p:nvPr>
-            <p:ph idx="1"/>
-          </p:nvPr>
-        </p:nvSpPr>
-        <p:spPr>
-          <a:xfrm>
-            <a:off x="5334000" y="1690688"/>
-            <a:ext cx="6729845" cy="5167311"/>
-          </a:xfrm>
-        </p:spPr>
-        <p:txBody>
-          <a:bodyPr>
-            <a:normAutofit/>
-          </a:bodyPr>
-          <a:lstStyle/>
-          <a:p>
-            <a:r>
-              <a:rPr lang="pt-BR" i="1" dirty="0"/>
-              <a:t>Os clusters </a:t>
-            </a:r>
-            <a:r>
-              <a:rPr lang="pt-BR" b="1" i="1" dirty="0"/>
-              <a:t>não devem se sobrepor</a:t>
-            </a:r>
-            <a:r>
-              <a:rPr lang="pt-BR" i="1" dirty="0"/>
-              <a:t>: </a:t>
-            </a:r>
-            <a:r>
-              <a:rPr lang="pt-BR" b="1" i="1" dirty="0">
-                <a:solidFill>
-                  <a:srgbClr val="00B050"/>
-                </a:solidFill>
-              </a:rPr>
-              <a:t>cada exemplo</a:t>
-            </a:r>
-            <a:r>
-              <a:rPr lang="pt-BR" i="1" dirty="0"/>
-              <a:t> deve </a:t>
-            </a:r>
-            <a:r>
-              <a:rPr lang="pt-BR" b="1" i="1" dirty="0">
-                <a:solidFill>
-                  <a:srgbClr val="00B050"/>
-                </a:solidFill>
-              </a:rPr>
-              <a:t>pertencer</a:t>
-            </a:r>
-            <a:r>
-              <a:rPr lang="pt-BR" i="1" dirty="0"/>
-              <a:t> a </a:t>
-            </a:r>
-            <a:r>
-              <a:rPr lang="pt-BR" b="1" i="1" dirty="0">
-                <a:solidFill>
-                  <a:srgbClr val="00B050"/>
-                </a:solidFill>
-              </a:rPr>
-              <a:t>um e apenas a um cluster</a:t>
-            </a:r>
-            <a:r>
-              <a:rPr lang="pt-BR" i="1" dirty="0"/>
-              <a:t>. </a:t>
-            </a:r>
-          </a:p>
-          <a:p>
-            <a:r>
-              <a:rPr lang="pt-BR" i="1" dirty="0"/>
-              <a:t>Porém, </a:t>
-            </a:r>
-            <a:r>
-              <a:rPr lang="pt-BR" b="1" i="1" dirty="0">
-                <a:solidFill>
-                  <a:srgbClr val="0070C0"/>
-                </a:solidFill>
-              </a:rPr>
-              <a:t>dentro do mesmo cluster</a:t>
-            </a:r>
-            <a:r>
-              <a:rPr lang="pt-BR" i="1" dirty="0"/>
-              <a:t>, os </a:t>
-            </a:r>
-            <a:r>
-              <a:rPr lang="pt-BR" b="1" i="1" dirty="0">
-                <a:solidFill>
-                  <a:srgbClr val="0070C0"/>
-                </a:solidFill>
-              </a:rPr>
-              <a:t>exemplos</a:t>
-            </a:r>
-            <a:r>
-              <a:rPr lang="pt-BR" i="1" dirty="0"/>
-              <a:t> devem estar relativamente </a:t>
-            </a:r>
-            <a:r>
-              <a:rPr lang="pt-BR" b="1" i="1" dirty="0">
-                <a:solidFill>
-                  <a:srgbClr val="0070C0"/>
-                </a:solidFill>
-              </a:rPr>
-              <a:t>próximos</a:t>
-            </a:r>
-            <a:r>
-              <a:rPr lang="pt-BR" i="1" dirty="0"/>
-              <a:t> uns dos outros e </a:t>
-            </a:r>
-            <a:r>
-              <a:rPr lang="pt-BR" b="1" i="1" dirty="0">
-                <a:solidFill>
-                  <a:srgbClr val="7030A0"/>
-                </a:solidFill>
-              </a:rPr>
-              <a:t>distantes</a:t>
-            </a:r>
-            <a:r>
-              <a:rPr lang="pt-BR" i="1" dirty="0"/>
-              <a:t> dos </a:t>
-            </a:r>
-            <a:r>
-              <a:rPr lang="pt-BR" b="1" i="1" dirty="0">
-                <a:solidFill>
-                  <a:srgbClr val="7030A0"/>
-                </a:solidFill>
-              </a:rPr>
-              <a:t>exemplos dos outros clusters</a:t>
-            </a:r>
-            <a:r>
-              <a:rPr lang="pt-BR" i="1" dirty="0"/>
-              <a:t>.</a:t>
-            </a:r>
-          </a:p>
-          <a:p>
-            <a:r>
-              <a:rPr lang="pt-BR" i="1" dirty="0"/>
-              <a:t>Aí surge uma dúvida. </a:t>
-            </a:r>
-          </a:p>
-          <a:p>
-            <a:r>
-              <a:rPr lang="pt-BR" i="1" dirty="0"/>
-              <a:t>Quantos clusters um conjunto de exemplos contém?</a:t>
-            </a:r>
-          </a:p>
-        </p:txBody>
-      </p:sp>
-      <p:pic>
-        <p:nvPicPr>
-          <p:cNvPr id="5" name="Picture 2" descr="K-Means Clustering using Python. Welcome back guys! Hope you had a great… |  by Luigi Fiori | Medium"/>
-          <p:cNvPicPr>
-            <a:picLocks noChangeAspect="1" noChangeArrowheads="1"/>
-          </p:cNvPicPr>
-          <p:nvPr/>
-        </p:nvPicPr>
-        <p:blipFill rotWithShape="1">
-          <a:blip r:embed="rId2">
-            <a:extLst>
-              <a:ext uri="{28A0092B-C50C-407E-A947-70E740481C1C}">
-                <a14:useLocalDpi xmlns:a14="http://schemas.microsoft.com/office/drawing/2010/main" val="0"/>
-              </a:ext>
-            </a:extLst>
-          </a:blip>
-          <a:srcRect l="1639" t="12047" r="55246" b="11854"/>
-          <a:stretch/>
-        </p:blipFill>
-        <p:spPr bwMode="auto">
-          <a:xfrm>
-            <a:off x="1045029" y="2388412"/>
-            <a:ext cx="3798090" cy="2793188"/>
-          </a:xfrm>
-          <a:prstGeom prst="rect">
-            <a:avLst/>
-          </a:prstGeom>
-          <a:noFill/>
-          <a:extLst>
-            <a:ext uri="{909E8E84-426E-40DD-AFC4-6F175D3DCCD1}">
-              <a14:hiddenFill xmlns:a14="http://schemas.microsoft.com/office/drawing/2010/main">
-                <a:solidFill>
-                  <a:srgbClr val="FFFFFF"/>
-                </a:solidFill>
-              </a14:hiddenFill>
-            </a:ext>
-          </a:extLst>
-        </p:spPr>
-      </p:pic>
-    </p:spTree>
-    <p:extLst>
-      <p:ext uri="{BB962C8B-B14F-4D97-AF65-F5344CB8AC3E}">
-        <p14:creationId xmlns:p14="http://schemas.microsoft.com/office/powerpoint/2010/main" val="506141761"/>
       </p:ext>
     </p:extLst>
   </p:cSld>

--- a/slides/C24_kMeans.pptx
+++ b/slides/C24_kMeans.pptx
@@ -5,7 +5,7 @@
     <p:sldMasterId id="2147483648" r:id="rId1"/>
   </p:sldMasterIdLst>
   <p:notesMasterIdLst>
-    <p:notesMasterId r:id="rId27"/>
+    <p:notesMasterId r:id="rId31"/>
   </p:notesMasterIdLst>
   <p:sldIdLst>
     <p:sldId id="256" r:id="rId2"/>
@@ -15,24 +15,28 @@
     <p:sldId id="294" r:id="rId6"/>
     <p:sldId id="286" r:id="rId7"/>
     <p:sldId id="285" r:id="rId8"/>
-    <p:sldId id="287" r:id="rId9"/>
-    <p:sldId id="296" r:id="rId10"/>
-    <p:sldId id="288" r:id="rId11"/>
-    <p:sldId id="297" r:id="rId12"/>
-    <p:sldId id="298" r:id="rId13"/>
-    <p:sldId id="289" r:id="rId14"/>
-    <p:sldId id="290" r:id="rId15"/>
-    <p:sldId id="291" r:id="rId16"/>
-    <p:sldId id="292" r:id="rId17"/>
-    <p:sldId id="299" r:id="rId18"/>
-    <p:sldId id="293" r:id="rId19"/>
-    <p:sldId id="300" r:id="rId20"/>
-    <p:sldId id="398" r:id="rId21"/>
-    <p:sldId id="338" r:id="rId22"/>
-    <p:sldId id="395" r:id="rId23"/>
-    <p:sldId id="396" r:id="rId24"/>
-    <p:sldId id="306" r:id="rId25"/>
-    <p:sldId id="265" r:id="rId26"/>
+    <p:sldId id="401" r:id="rId9"/>
+    <p:sldId id="287" r:id="rId10"/>
+    <p:sldId id="400" r:id="rId11"/>
+    <p:sldId id="296" r:id="rId12"/>
+    <p:sldId id="399" r:id="rId13"/>
+    <p:sldId id="288" r:id="rId14"/>
+    <p:sldId id="402" r:id="rId15"/>
+    <p:sldId id="297" r:id="rId16"/>
+    <p:sldId id="298" r:id="rId17"/>
+    <p:sldId id="289" r:id="rId18"/>
+    <p:sldId id="290" r:id="rId19"/>
+    <p:sldId id="291" r:id="rId20"/>
+    <p:sldId id="292" r:id="rId21"/>
+    <p:sldId id="299" r:id="rId22"/>
+    <p:sldId id="293" r:id="rId23"/>
+    <p:sldId id="300" r:id="rId24"/>
+    <p:sldId id="398" r:id="rId25"/>
+    <p:sldId id="338" r:id="rId26"/>
+    <p:sldId id="395" r:id="rId27"/>
+    <p:sldId id="396" r:id="rId28"/>
+    <p:sldId id="306" r:id="rId29"/>
+    <p:sldId id="265" r:id="rId30"/>
   </p:sldIdLst>
   <p:sldSz cx="12192000" cy="6858000"/>
   <p:notesSz cx="6858000" cy="9144000"/>
@@ -221,7 +225,7 @@
           <a:p>
             <a:fld id="{C3C82C08-3EFC-4473-8294-F0E229C19EFF}" type="datetimeFigureOut">
               <a:rPr lang="pt-BR" smtClean="0"/>
-              <a:t>04/04/2026</a:t>
+              <a:t>05/04/2026</a:t>
             </a:fld>
             <a:endParaRPr lang="pt-BR"/>
           </a:p>
@@ -580,6 +584,808 @@
 </p:notes>
 </file>
 
+<file path=ppt/notesSlides/notesSlide10.xml><?xml version="1.0" encoding="utf-8"?>
+<p:notes xmlns:a="http://schemas.openxmlformats.org/drawingml/2006/main" xmlns:r="http://schemas.openxmlformats.org/officeDocument/2006/relationships" xmlns:p="http://schemas.openxmlformats.org/presentationml/2006/main">
+  <p:cSld>
+    <p:spTree>
+      <p:nvGrpSpPr>
+        <p:cNvPr id="1" name=""/>
+        <p:cNvGrpSpPr/>
+        <p:nvPr/>
+      </p:nvGrpSpPr>
+      <p:grpSpPr>
+        <a:xfrm>
+          <a:off x="0" y="0"/>
+          <a:ext cx="0" cy="0"/>
+          <a:chOff x="0" y="0"/>
+          <a:chExt cx="0" cy="0"/>
+        </a:xfrm>
+      </p:grpSpPr>
+      <p:sp>
+        <p:nvSpPr>
+          <p:cNvPr id="2" name="Espaço Reservado para Imagem de Slide 1"/>
+          <p:cNvSpPr>
+            <a:spLocks noGrp="1" noRot="1" noChangeAspect="1"/>
+          </p:cNvSpPr>
+          <p:nvPr>
+            <p:ph type="sldImg"/>
+          </p:nvPr>
+        </p:nvSpPr>
+        <p:spPr/>
+      </p:sp>
+      <p:sp>
+        <p:nvSpPr>
+          <p:cNvPr id="3" name="Espaço Reservado para Anotações 2"/>
+          <p:cNvSpPr>
+            <a:spLocks noGrp="1"/>
+          </p:cNvSpPr>
+          <p:nvPr>
+            <p:ph type="body" idx="1"/>
+          </p:nvPr>
+        </p:nvSpPr>
+        <p:spPr/>
+        <p:txBody>
+          <a:bodyPr/>
+          <a:lstStyle/>
+          <a:p>
+            <a:pPr marL="0" marR="0" lvl="0" indent="0" algn="l" defTabSz="914400" rtl="0" eaLnBrk="1" fontAlgn="auto" latinLnBrk="0" hangingPunct="1">
+              <a:lnSpc>
+                <a:spcPct val="100000"/>
+              </a:lnSpc>
+              <a:spcBef>
+                <a:spcPts val="0"/>
+              </a:spcBef>
+              <a:spcAft>
+                <a:spcPts val="0"/>
+              </a:spcAft>
+              <a:buClrTx/>
+              <a:buSzTx/>
+              <a:buFontTx/>
+              <a:buNone/>
+              <a:tabLst/>
+              <a:defRPr/>
+            </a:pPr>
+            <a:r>
+              <a:rPr lang="pt-BR" sz="1200" b="0" dirty="0">
+                <a:solidFill>
+                  <a:srgbClr val="00B0F0"/>
+                </a:solidFill>
+              </a:rPr>
+              <a:t>E</a:t>
+            </a:r>
+            <a:r>
+              <a:rPr lang="pt-BR" dirty="0"/>
+              <a:t>xemplo:</a:t>
+            </a:r>
+            <a:r>
+              <a:rPr lang="pt-BR" baseline="0" dirty="0"/>
+              <a:t> </a:t>
+            </a:r>
+            <a:r>
+              <a:rPr lang="pt-BR" dirty="0"/>
+              <a:t>https://colab.research.google.com/github/zz4fap/t320_aprendizado_de_maquina/blob/main/notebooks/clustering/kmeans_example.ipynb</a:t>
+            </a:r>
+          </a:p>
+          <a:p>
+            <a:pPr marL="0" marR="0" lvl="0" indent="0" algn="l" defTabSz="914400" rtl="0" eaLnBrk="1" fontAlgn="auto" latinLnBrk="0" hangingPunct="1">
+              <a:lnSpc>
+                <a:spcPct val="100000"/>
+              </a:lnSpc>
+              <a:spcBef>
+                <a:spcPts val="0"/>
+              </a:spcBef>
+              <a:spcAft>
+                <a:spcPts val="0"/>
+              </a:spcAft>
+              <a:buClrTx/>
+              <a:buSzTx/>
+              <a:buFontTx/>
+              <a:buNone/>
+              <a:tabLst/>
+              <a:defRPr/>
+            </a:pPr>
+            <a:endParaRPr lang="pt-BR" sz="1200" b="0" dirty="0">
+              <a:solidFill>
+                <a:srgbClr val="00B0F0"/>
+              </a:solidFill>
+            </a:endParaRPr>
+          </a:p>
+          <a:p>
+            <a:pPr marL="0" marR="0" lvl="0" indent="0" algn="l" defTabSz="914400" rtl="0" eaLnBrk="1" fontAlgn="auto" latinLnBrk="0" hangingPunct="1">
+              <a:lnSpc>
+                <a:spcPct val="100000"/>
+              </a:lnSpc>
+              <a:spcBef>
+                <a:spcPts val="0"/>
+              </a:spcBef>
+              <a:spcAft>
+                <a:spcPts val="0"/>
+              </a:spcAft>
+              <a:buClrTx/>
+              <a:buSzTx/>
+              <a:buFontTx/>
+              <a:buNone/>
+              <a:tabLst/>
+              <a:defRPr/>
+            </a:pPr>
+            <a:endParaRPr lang="pt-BR" sz="1200" b="0" dirty="0">
+              <a:solidFill>
+                <a:srgbClr val="00B0F0"/>
+              </a:solidFill>
+            </a:endParaRPr>
+          </a:p>
+          <a:p>
+            <a:r>
+              <a:rPr lang="pt-BR" dirty="0"/>
+              <a:t>Identificar o melhor número de clusters (</a:t>
+            </a:r>
+            <a:r>
+              <a:rPr lang="pt-BR" dirty="0" err="1"/>
+              <a:t>kk</a:t>
+            </a:r>
+            <a:r>
+              <a:rPr lang="pt-BR" dirty="0"/>
+              <a:t>) no K-</a:t>
+            </a:r>
+            <a:r>
+              <a:rPr lang="pt-BR" dirty="0" err="1"/>
+              <a:t>Means</a:t>
+            </a:r>
+            <a:r>
+              <a:rPr lang="pt-BR" dirty="0"/>
+              <a:t> é um passo fundamental para garantir a eficiência e a utilidade da clusterização. Existem várias abordagens para determinar o valor ideal de </a:t>
+            </a:r>
+            <a:r>
+              <a:rPr lang="pt-BR" dirty="0" err="1"/>
+              <a:t>kk</a:t>
+            </a:r>
+            <a:r>
+              <a:rPr lang="pt-BR" dirty="0"/>
+              <a:t>. As mais comuns incluem:</a:t>
+            </a:r>
+          </a:p>
+          <a:p>
+            <a:r>
+              <a:rPr lang="pt-BR" b="1" dirty="0"/>
+              <a:t>1. Método do Cotovelo (</a:t>
+            </a:r>
+            <a:r>
+              <a:rPr lang="pt-BR" b="1" dirty="0" err="1"/>
+              <a:t>Elbow</a:t>
+            </a:r>
+            <a:r>
+              <a:rPr lang="pt-BR" b="1" dirty="0"/>
+              <a:t> </a:t>
+            </a:r>
+            <a:r>
+              <a:rPr lang="pt-BR" b="1" dirty="0" err="1"/>
+              <a:t>Method</a:t>
+            </a:r>
+            <a:r>
+              <a:rPr lang="pt-BR" b="1" dirty="0"/>
+              <a:t>)</a:t>
+            </a:r>
+          </a:p>
+          <a:p>
+            <a:r>
+              <a:rPr lang="pt-BR" dirty="0"/>
+              <a:t>Este método analisa a variação da </a:t>
+            </a:r>
+            <a:r>
+              <a:rPr lang="pt-BR" b="1" dirty="0"/>
+              <a:t>inércia </a:t>
+            </a:r>
+            <a:r>
+              <a:rPr lang="pt-BR" b="1" dirty="0" err="1"/>
+              <a:t>intra-cluster</a:t>
+            </a:r>
+            <a:r>
+              <a:rPr lang="pt-BR" dirty="0"/>
+              <a:t> (ou soma dos erros quadráticos dentro dos clusters, WSSWSS) à medida que o número de clusters aumenta.</a:t>
+            </a:r>
+          </a:p>
+          <a:p>
+            <a:r>
+              <a:rPr lang="pt-BR" b="1" dirty="0"/>
+              <a:t>Passos:</a:t>
+            </a:r>
+          </a:p>
+          <a:p>
+            <a:pPr>
+              <a:buFont typeface="+mj-lt"/>
+              <a:buAutoNum type="arabicPeriod"/>
+            </a:pPr>
+            <a:r>
+              <a:rPr lang="pt-BR" dirty="0"/>
+              <a:t>Execute o K-</a:t>
+            </a:r>
+            <a:r>
+              <a:rPr lang="pt-BR" dirty="0" err="1"/>
+              <a:t>Means</a:t>
+            </a:r>
+            <a:r>
+              <a:rPr lang="pt-BR" dirty="0"/>
+              <a:t> com diferentes valores de </a:t>
+            </a:r>
+            <a:r>
+              <a:rPr lang="pt-BR" dirty="0" err="1"/>
+              <a:t>kk</a:t>
+            </a:r>
+            <a:r>
+              <a:rPr lang="pt-BR" dirty="0"/>
+              <a:t> (por exemplo, k=1k=1 a k=10k=10).</a:t>
+            </a:r>
+          </a:p>
+          <a:p>
+            <a:pPr>
+              <a:buFont typeface="+mj-lt"/>
+              <a:buAutoNum type="arabicPeriod"/>
+            </a:pPr>
+            <a:r>
+              <a:rPr lang="pt-BR" dirty="0"/>
+              <a:t>Calcule o WSSWSS para cada valor de </a:t>
+            </a:r>
+            <a:r>
+              <a:rPr lang="pt-BR" dirty="0" err="1"/>
+              <a:t>kk</a:t>
+            </a:r>
+            <a:r>
+              <a:rPr lang="pt-BR" dirty="0"/>
+              <a:t>.</a:t>
+            </a:r>
+          </a:p>
+          <a:p>
+            <a:pPr>
+              <a:buFont typeface="+mj-lt"/>
+              <a:buAutoNum type="arabicPeriod"/>
+            </a:pPr>
+            <a:r>
+              <a:rPr lang="pt-BR" dirty="0"/>
+              <a:t>Trace um gráfico do WSSWSS em função de </a:t>
+            </a:r>
+            <a:r>
+              <a:rPr lang="pt-BR" dirty="0" err="1"/>
+              <a:t>kk</a:t>
+            </a:r>
+            <a:r>
+              <a:rPr lang="pt-BR" dirty="0"/>
+              <a:t>.</a:t>
+            </a:r>
+          </a:p>
+          <a:p>
+            <a:pPr>
+              <a:buFont typeface="+mj-lt"/>
+              <a:buAutoNum type="arabicPeriod"/>
+            </a:pPr>
+            <a:r>
+              <a:rPr lang="pt-BR" dirty="0"/>
+              <a:t>Identifique o "cotovelo" no gráfico — o ponto onde a redução no WSSWSS se torna menos significativa.</a:t>
+            </a:r>
+          </a:p>
+          <a:p>
+            <a:r>
+              <a:rPr lang="pt-BR" b="1" dirty="0"/>
+              <a:t>Observação:</a:t>
+            </a:r>
+          </a:p>
+          <a:p>
+            <a:r>
+              <a:rPr lang="pt-BR" dirty="0"/>
+              <a:t>O "cotovelo" indica que aumentar </a:t>
+            </a:r>
+            <a:r>
+              <a:rPr lang="pt-BR" dirty="0" err="1"/>
+              <a:t>kk</a:t>
+            </a:r>
+            <a:r>
+              <a:rPr lang="pt-BR" dirty="0"/>
+              <a:t> além desse ponto não resulta em uma melhoria substancial na compactação dos clusters.</a:t>
+            </a:r>
+          </a:p>
+          <a:p>
+            <a:r>
+              <a:rPr lang="pt-BR" b="1" dirty="0"/>
+              <a:t>2. Coeficiente de Silhueta (</a:t>
+            </a:r>
+            <a:r>
+              <a:rPr lang="pt-BR" b="1" dirty="0" err="1"/>
+              <a:t>Silhouette</a:t>
+            </a:r>
+            <a:r>
+              <a:rPr lang="pt-BR" b="1" dirty="0"/>
+              <a:t> Score)</a:t>
+            </a:r>
+          </a:p>
+          <a:p>
+            <a:r>
+              <a:rPr lang="pt-BR" dirty="0"/>
+              <a:t>O coeficiente de silhueta avalia a </a:t>
+            </a:r>
+            <a:r>
+              <a:rPr lang="pt-BR" b="1" dirty="0"/>
+              <a:t>qualidade da clusterização</a:t>
+            </a:r>
+            <a:r>
+              <a:rPr lang="pt-BR" dirty="0"/>
+              <a:t>, considerando a coesão dentro dos clusters e a separação entre eles.</a:t>
+            </a:r>
+          </a:p>
+          <a:p>
+            <a:pPr>
+              <a:buFont typeface="Arial" panose="020B0604020202020204" pitchFamily="34" charset="0"/>
+              <a:buChar char="•"/>
+            </a:pPr>
+            <a:r>
+              <a:rPr lang="pt-BR" dirty="0"/>
+              <a:t>s=b−</a:t>
+            </a:r>
+            <a:r>
+              <a:rPr lang="pt-BR" dirty="0" err="1"/>
+              <a:t>amax</a:t>
+            </a:r>
+            <a:r>
+              <a:rPr lang="pt-BR" dirty="0"/>
+              <a:t>⁡(</a:t>
+            </a:r>
+            <a:r>
+              <a:rPr lang="pt-BR" dirty="0" err="1"/>
+              <a:t>a,b</a:t>
+            </a:r>
+            <a:r>
+              <a:rPr lang="pt-BR" dirty="0"/>
+              <a:t>)s = \</a:t>
+            </a:r>
+            <a:r>
+              <a:rPr lang="pt-BR" dirty="0" err="1"/>
+              <a:t>frac</a:t>
+            </a:r>
+            <a:r>
+              <a:rPr lang="pt-BR" dirty="0"/>
+              <a:t>{b - a}{\</a:t>
+            </a:r>
+            <a:r>
+              <a:rPr lang="pt-BR" dirty="0" err="1"/>
+              <a:t>max</a:t>
+            </a:r>
+            <a:r>
+              <a:rPr lang="pt-BR" dirty="0"/>
+              <a:t>(a, b)} aa: distância média de um ponto para os outros pontos do mesmo cluster.</a:t>
+            </a:r>
+          </a:p>
+          <a:p>
+            <a:pPr>
+              <a:buFont typeface="Arial" panose="020B0604020202020204" pitchFamily="34" charset="0"/>
+              <a:buChar char="•"/>
+            </a:pPr>
+            <a:r>
+              <a:rPr lang="pt-BR" dirty="0" err="1"/>
+              <a:t>bb</a:t>
+            </a:r>
+            <a:r>
+              <a:rPr lang="pt-BR" dirty="0"/>
+              <a:t>: distância média de um ponto para os pontos do cluster mais próximo.</a:t>
+            </a:r>
+          </a:p>
+          <a:p>
+            <a:r>
+              <a:rPr lang="pt-BR" b="1" dirty="0"/>
+              <a:t>Passos:</a:t>
+            </a:r>
+          </a:p>
+          <a:p>
+            <a:pPr>
+              <a:buFont typeface="+mj-lt"/>
+              <a:buAutoNum type="arabicPeriod"/>
+            </a:pPr>
+            <a:r>
+              <a:rPr lang="pt-BR" dirty="0"/>
+              <a:t>Execute o K-</a:t>
+            </a:r>
+            <a:r>
+              <a:rPr lang="pt-BR" dirty="0" err="1"/>
+              <a:t>Means</a:t>
+            </a:r>
+            <a:r>
+              <a:rPr lang="pt-BR" dirty="0"/>
+              <a:t> para diferentes valores de </a:t>
+            </a:r>
+            <a:r>
+              <a:rPr lang="pt-BR" dirty="0" err="1"/>
+              <a:t>kk</a:t>
+            </a:r>
+            <a:r>
+              <a:rPr lang="pt-BR" dirty="0"/>
+              <a:t>.</a:t>
+            </a:r>
+          </a:p>
+          <a:p>
+            <a:pPr>
+              <a:buFont typeface="+mj-lt"/>
+              <a:buAutoNum type="arabicPeriod"/>
+            </a:pPr>
+            <a:r>
+              <a:rPr lang="pt-BR" dirty="0"/>
+              <a:t>Calcule o coeficiente de silhueta para cada ponto e, em seguida, a média para o conjunto.</a:t>
+            </a:r>
+          </a:p>
+          <a:p>
+            <a:pPr>
+              <a:buFont typeface="+mj-lt"/>
+              <a:buAutoNum type="arabicPeriod"/>
+            </a:pPr>
+            <a:r>
+              <a:rPr lang="pt-BR" dirty="0"/>
+              <a:t>Escolha </a:t>
+            </a:r>
+            <a:r>
+              <a:rPr lang="pt-BR" dirty="0" err="1"/>
+              <a:t>kk</a:t>
+            </a:r>
+            <a:r>
+              <a:rPr lang="pt-BR" dirty="0"/>
+              <a:t> que maximize o valor médio do coeficiente de silhueta.</a:t>
+            </a:r>
+          </a:p>
+          <a:p>
+            <a:r>
+              <a:rPr lang="pt-BR" b="1" dirty="0"/>
+              <a:t>3. Critério Gap </a:t>
+            </a:r>
+            <a:r>
+              <a:rPr lang="pt-BR" b="1" dirty="0" err="1"/>
+              <a:t>Statistic</a:t>
+            </a:r>
+            <a:endParaRPr lang="pt-BR" b="1" dirty="0"/>
+          </a:p>
+          <a:p>
+            <a:r>
+              <a:rPr lang="pt-BR" dirty="0"/>
+              <a:t>Este método compara a dispersão dos clusters no conjunto de dados com uma dispersão esperada de um conjunto de dados gerado aleatoriamente.</a:t>
+            </a:r>
+          </a:p>
+          <a:p>
+            <a:r>
+              <a:rPr lang="pt-BR" b="1" dirty="0"/>
+              <a:t>Passos:</a:t>
+            </a:r>
+          </a:p>
+          <a:p>
+            <a:pPr>
+              <a:buFont typeface="+mj-lt"/>
+              <a:buAutoNum type="arabicPeriod"/>
+            </a:pPr>
+            <a:r>
+              <a:rPr lang="pt-BR" dirty="0"/>
+              <a:t>Execute o K-</a:t>
+            </a:r>
+            <a:r>
+              <a:rPr lang="pt-BR" dirty="0" err="1"/>
+              <a:t>Means</a:t>
+            </a:r>
+            <a:r>
+              <a:rPr lang="pt-BR" dirty="0"/>
+              <a:t> para diferentes valores de </a:t>
+            </a:r>
+            <a:r>
+              <a:rPr lang="pt-BR" dirty="0" err="1"/>
+              <a:t>kk</a:t>
+            </a:r>
+            <a:r>
+              <a:rPr lang="pt-BR" dirty="0"/>
+              <a:t> no conjunto de dados real.</a:t>
+            </a:r>
+          </a:p>
+          <a:p>
+            <a:pPr>
+              <a:buFont typeface="+mj-lt"/>
+              <a:buAutoNum type="arabicPeriod"/>
+            </a:pPr>
+            <a:r>
+              <a:rPr lang="pt-BR" dirty="0"/>
+              <a:t>Gere um conjunto de dados aleatório com a mesma distribuição e calcule a dispersão dos clusters.</a:t>
+            </a:r>
+          </a:p>
+          <a:p>
+            <a:pPr>
+              <a:buFont typeface="+mj-lt"/>
+              <a:buAutoNum type="arabicPeriod"/>
+            </a:pPr>
+            <a:r>
+              <a:rPr lang="pt-BR" dirty="0"/>
+              <a:t>Compare as dispersões e encontre </a:t>
+            </a:r>
+            <a:r>
+              <a:rPr lang="pt-BR" dirty="0" err="1"/>
+              <a:t>kk</a:t>
+            </a:r>
+            <a:r>
+              <a:rPr lang="pt-BR" dirty="0"/>
+              <a:t> que maximize a diferença (gap) entre os dois conjuntos.</a:t>
+            </a:r>
+          </a:p>
+          <a:p>
+            <a:r>
+              <a:rPr lang="pt-BR" b="1" dirty="0"/>
+              <a:t>4. Validação Cruzada</a:t>
+            </a:r>
+          </a:p>
+          <a:p>
+            <a:r>
+              <a:rPr lang="pt-BR" dirty="0"/>
+              <a:t>Divida o conjunto de dados em subconjuntos e avalie a consistência dos clusters em diferentes amostras.</a:t>
+            </a:r>
+          </a:p>
+          <a:p>
+            <a:r>
+              <a:rPr lang="pt-BR" b="1" dirty="0"/>
+              <a:t>5. Métodos Automáticos, como X-</a:t>
+            </a:r>
+            <a:r>
+              <a:rPr lang="pt-BR" b="1" dirty="0" err="1"/>
+              <a:t>Means</a:t>
+            </a:r>
+            <a:r>
+              <a:rPr lang="pt-BR" b="1" dirty="0"/>
+              <a:t> e G-</a:t>
+            </a:r>
+            <a:r>
+              <a:rPr lang="pt-BR" b="1" dirty="0" err="1"/>
+              <a:t>Means</a:t>
+            </a:r>
+            <a:endParaRPr lang="pt-BR" b="1" dirty="0"/>
+          </a:p>
+          <a:p>
+            <a:pPr>
+              <a:buFont typeface="Arial" panose="020B0604020202020204" pitchFamily="34" charset="0"/>
+              <a:buChar char="•"/>
+            </a:pPr>
+            <a:r>
+              <a:rPr lang="pt-BR" b="1" dirty="0"/>
+              <a:t>X-</a:t>
+            </a:r>
+            <a:r>
+              <a:rPr lang="pt-BR" b="1" dirty="0" err="1"/>
+              <a:t>Means</a:t>
+            </a:r>
+            <a:r>
+              <a:rPr lang="pt-BR" dirty="0"/>
+              <a:t>: Extensão do K-</a:t>
+            </a:r>
+            <a:r>
+              <a:rPr lang="pt-BR" dirty="0" err="1"/>
+              <a:t>Means</a:t>
+            </a:r>
+            <a:r>
+              <a:rPr lang="pt-BR" dirty="0"/>
+              <a:t> que escolhe automaticamente </a:t>
+            </a:r>
+            <a:r>
+              <a:rPr lang="pt-BR" dirty="0" err="1"/>
+              <a:t>kk</a:t>
+            </a:r>
+            <a:r>
+              <a:rPr lang="pt-BR" dirty="0"/>
+              <a:t> otimizando o critério Bayesiano.</a:t>
+            </a:r>
+          </a:p>
+          <a:p>
+            <a:pPr>
+              <a:buFont typeface="Arial" panose="020B0604020202020204" pitchFamily="34" charset="0"/>
+              <a:buChar char="•"/>
+            </a:pPr>
+            <a:r>
+              <a:rPr lang="pt-BR" b="1" dirty="0"/>
+              <a:t>G-</a:t>
+            </a:r>
+            <a:r>
+              <a:rPr lang="pt-BR" b="1" dirty="0" err="1"/>
+              <a:t>Means</a:t>
+            </a:r>
+            <a:r>
+              <a:rPr lang="pt-BR" dirty="0"/>
+              <a:t>: Usa testes estatísticos para determinar se os clusters seguem uma distribuição gaussiana.</a:t>
+            </a:r>
+          </a:p>
+          <a:p>
+            <a:r>
+              <a:rPr lang="pt-BR" b="1" dirty="0"/>
+              <a:t>Considerações:</a:t>
+            </a:r>
+          </a:p>
+          <a:p>
+            <a:pPr>
+              <a:buFont typeface="Arial" panose="020B0604020202020204" pitchFamily="34" charset="0"/>
+              <a:buChar char="•"/>
+            </a:pPr>
+            <a:r>
+              <a:rPr lang="pt-BR" b="1" dirty="0"/>
+              <a:t>Dimensão dos dados</a:t>
+            </a:r>
+            <a:r>
+              <a:rPr lang="pt-BR" dirty="0"/>
+              <a:t>: Em alta dimensionalidade, os métodos podem se tornar menos claros devido à maldição da dimensionalidade.</a:t>
+            </a:r>
+          </a:p>
+          <a:p>
+            <a:pPr>
+              <a:buFont typeface="Arial" panose="020B0604020202020204" pitchFamily="34" charset="0"/>
+              <a:buChar char="•"/>
+            </a:pPr>
+            <a:r>
+              <a:rPr lang="pt-BR" b="1" dirty="0"/>
+              <a:t>Interpretação</a:t>
+            </a:r>
+            <a:r>
+              <a:rPr lang="pt-BR" dirty="0"/>
+              <a:t>: O número de clusters deve fazer sentido no contexto do problema, além de ser estatisticamente válido.</a:t>
+            </a:r>
+          </a:p>
+          <a:p>
+            <a:r>
+              <a:rPr lang="pt-BR" dirty="0"/>
+              <a:t>Combinar múltiplos métodos pode ser útil para confirmar a escolha do melhor </a:t>
+            </a:r>
+            <a:r>
+              <a:rPr lang="pt-BR" dirty="0" err="1"/>
+              <a:t>kk</a:t>
+            </a:r>
+            <a:r>
+              <a:rPr lang="pt-BR" dirty="0"/>
+              <a:t>.</a:t>
+            </a:r>
+          </a:p>
+          <a:p>
+            <a:endParaRPr lang="en-US" dirty="0"/>
+          </a:p>
+        </p:txBody>
+      </p:sp>
+      <p:sp>
+        <p:nvSpPr>
+          <p:cNvPr id="4" name="Espaço Reservado para Número de Slide 3"/>
+          <p:cNvSpPr>
+            <a:spLocks noGrp="1"/>
+          </p:cNvSpPr>
+          <p:nvPr>
+            <p:ph type="sldNum" sz="quarter" idx="10"/>
+          </p:nvPr>
+        </p:nvSpPr>
+        <p:spPr/>
+        <p:txBody>
+          <a:bodyPr/>
+          <a:lstStyle/>
+          <a:p>
+            <a:fld id="{F430A2A4-8C14-4B1A-AD48-7B6401078BF7}" type="slidenum">
+              <a:rPr lang="pt-BR" smtClean="0"/>
+              <a:t>22</a:t>
+            </a:fld>
+            <a:endParaRPr lang="pt-BR"/>
+          </a:p>
+        </p:txBody>
+      </p:sp>
+    </p:spTree>
+    <p:extLst>
+      <p:ext uri="{BB962C8B-B14F-4D97-AF65-F5344CB8AC3E}">
+        <p14:creationId xmlns:p14="http://schemas.microsoft.com/office/powerpoint/2010/main" val="3992294165"/>
+      </p:ext>
+    </p:extLst>
+  </p:cSld>
+  <p:clrMapOvr>
+    <a:masterClrMapping/>
+  </p:clrMapOvr>
+</p:notes>
+</file>
+
+<file path=ppt/notesSlides/notesSlide11.xml><?xml version="1.0" encoding="utf-8"?>
+<p:notes xmlns:a="http://schemas.openxmlformats.org/drawingml/2006/main" xmlns:r="http://schemas.openxmlformats.org/officeDocument/2006/relationships" xmlns:p="http://schemas.openxmlformats.org/presentationml/2006/main">
+  <p:cSld>
+    <p:spTree>
+      <p:nvGrpSpPr>
+        <p:cNvPr id="1" name=""/>
+        <p:cNvGrpSpPr/>
+        <p:nvPr/>
+      </p:nvGrpSpPr>
+      <p:grpSpPr>
+        <a:xfrm>
+          <a:off x="0" y="0"/>
+          <a:ext cx="0" cy="0"/>
+          <a:chOff x="0" y="0"/>
+          <a:chExt cx="0" cy="0"/>
+        </a:xfrm>
+      </p:grpSpPr>
+      <p:sp>
+        <p:nvSpPr>
+          <p:cNvPr id="2" name="Slide Image Placeholder 1"/>
+          <p:cNvSpPr>
+            <a:spLocks noGrp="1" noRot="1" noChangeAspect="1"/>
+          </p:cNvSpPr>
+          <p:nvPr>
+            <p:ph type="sldImg"/>
+          </p:nvPr>
+        </p:nvSpPr>
+        <p:spPr/>
+        <p:txBody>
+          <a:bodyPr/>
+          <a:lstStyle/>
+          <a:p>
+            <a:endParaRPr lang="en-US"/>
+          </a:p>
+        </p:txBody>
+      </p:sp>
+      <p:sp>
+        <p:nvSpPr>
+          <p:cNvPr id="3" name="Notes Placeholder 2"/>
+          <p:cNvSpPr>
+            <a:spLocks noGrp="1"/>
+          </p:cNvSpPr>
+          <p:nvPr>
+            <p:ph type="body" idx="1"/>
+          </p:nvPr>
+        </p:nvSpPr>
+        <p:spPr/>
+        <p:txBody>
+          <a:bodyPr/>
+          <a:lstStyle/>
+          <a:p>
+            <a:r>
+              <a:rPr lang="pt-BR" sz="1200" kern="1200" dirty="0">
+                <a:solidFill>
+                  <a:schemeClr val="tx1"/>
+                </a:solidFill>
+                <a:latin typeface="+mn-lt"/>
+                <a:ea typeface="+mn-ea"/>
+                <a:cs typeface="+mn-cs"/>
+                <a:hlinkClick r:id="rId3">
+                  <a:extLst>
+                    <a:ext uri="{A12FA001-AC4F-418D-AE19-62706E023703}">
+                      <ahyp:hlinkClr xmlns:ahyp="http://schemas.microsoft.com/office/drawing/2018/hyperlinkcolor" val="tx"/>
+                    </a:ext>
+                  </a:extLst>
+                </a:hlinkClick>
+              </a:rPr>
+              <a:t>Referencias</a:t>
+            </a:r>
+          </a:p>
+          <a:p>
+            <a:endParaRPr lang="en-US" dirty="0"/>
+          </a:p>
+        </p:txBody>
+      </p:sp>
+      <p:sp>
+        <p:nvSpPr>
+          <p:cNvPr id="4" name="Slide Number Placeholder 3"/>
+          <p:cNvSpPr>
+            <a:spLocks noGrp="1"/>
+          </p:cNvSpPr>
+          <p:nvPr>
+            <p:ph type="sldNum" sz="quarter" idx="5"/>
+          </p:nvPr>
+        </p:nvSpPr>
+        <p:spPr/>
+        <p:txBody>
+          <a:bodyPr/>
+          <a:lstStyle/>
+          <a:p>
+            <a:fld id="{6FC8D850-966F-45A6-8DE7-15B891E7D40D}" type="slidenum">
+              <a:rPr lang="pt-BR" smtClean="0"/>
+              <a:t>25</a:t>
+            </a:fld>
+            <a:endParaRPr lang="pt-BR"/>
+          </a:p>
+        </p:txBody>
+      </p:sp>
+    </p:spTree>
+    <p:extLst>
+      <p:ext uri="{BB962C8B-B14F-4D97-AF65-F5344CB8AC3E}">
+        <p14:creationId xmlns:p14="http://schemas.microsoft.com/office/powerpoint/2010/main" val="1774144237"/>
+      </p:ext>
+    </p:extLst>
+  </p:cSld>
+  <p:clrMapOvr>
+    <a:masterClrMapping/>
+  </p:clrMapOvr>
+</p:notes>
+</file>
+
 <file path=ppt/notesSlides/notesSlide2.xml><?xml version="1.0" encoding="utf-8"?>
 <p:notes xmlns:a="http://schemas.openxmlformats.org/drawingml/2006/main" xmlns:r="http://schemas.openxmlformats.org/officeDocument/2006/relationships" xmlns:p="http://schemas.openxmlformats.org/presentationml/2006/main">
   <p:cSld>
@@ -760,6 +1566,42 @@
               <a:tabLst/>
               <a:defRPr/>
             </a:pPr>
+            <a:r>
+              <a:rPr lang="pt-BR" dirty="0"/>
+              <a:t> </a:t>
+            </a:r>
+            <a:r>
+              <a:rPr lang="pt-BR" b="1" dirty="0">
+                <a:solidFill>
+                  <a:srgbClr val="7030A0"/>
+                </a:solidFill>
+              </a:rPr>
+              <a:t>descobrir propriedades úteis dos dados disponíveis</a:t>
+            </a:r>
+            <a:r>
+              <a:rPr lang="pt-BR" dirty="0"/>
+              <a:t>.</a:t>
+            </a:r>
+            <a:endParaRPr lang="en-US" dirty="0"/>
+          </a:p>
+          <a:p>
+            <a:pPr marL="0" marR="0" lvl="0" indent="0" algn="l" defTabSz="914400" rtl="0" eaLnBrk="1" fontAlgn="auto" latinLnBrk="0" hangingPunct="1">
+              <a:lnSpc>
+                <a:spcPct val="100000"/>
+              </a:lnSpc>
+              <a:spcBef>
+                <a:spcPts val="0"/>
+              </a:spcBef>
+              <a:spcAft>
+                <a:spcPts val="0"/>
+              </a:spcAft>
+              <a:buClrTx/>
+              <a:buSzTx/>
+              <a:buFontTx/>
+              <a:buNone/>
+              <a:tabLst/>
+              <a:defRPr/>
+            </a:pPr>
             <a:endParaRPr lang="pt-BR" dirty="0"/>
           </a:p>
         </p:txBody>
@@ -1494,7 +2336,7 @@
       </p:grpSpPr>
       <p:sp>
         <p:nvSpPr>
-          <p:cNvPr id="2" name="Espaço Reservado para Imagem de Slide 1"/>
+          <p:cNvPr id="2" name="Slide Image Placeholder 1"/>
           <p:cNvSpPr>
             <a:spLocks noGrp="1" noRot="1" noChangeAspect="1"/>
           </p:cNvSpPr>
@@ -1506,7 +2348,7 @@
       </p:sp>
       <p:sp>
         <p:nvSpPr>
-          <p:cNvPr id="3" name="Espaço Reservado para Anotações 2"/>
+          <p:cNvPr id="3" name="Notes Placeholder 2"/>
           <p:cNvSpPr>
             <a:spLocks noGrp="1"/>
           </p:cNvSpPr>
@@ -1525,12 +2367,12 @@
       </p:sp>
       <p:sp>
         <p:nvSpPr>
-          <p:cNvPr id="4" name="Espaço Reservado para Número de Slide 3"/>
+          <p:cNvPr id="4" name="Slide Number Placeholder 3"/>
           <p:cNvSpPr>
             <a:spLocks noGrp="1"/>
           </p:cNvSpPr>
           <p:nvPr>
-            <p:ph type="sldNum" sz="quarter" idx="10"/>
+            <p:ph type="sldNum" sz="quarter" idx="5"/>
           </p:nvPr>
         </p:nvSpPr>
         <p:spPr/>
@@ -1549,7 +2391,7 @@
     </p:spTree>
     <p:extLst>
       <p:ext uri="{BB962C8B-B14F-4D97-AF65-F5344CB8AC3E}">
-        <p14:creationId xmlns:p14="http://schemas.microsoft.com/office/powerpoint/2010/main" val="4076858274"/>
+        <p14:creationId xmlns:p14="http://schemas.microsoft.com/office/powerpoint/2010/main" val="4276714969"/>
       </p:ext>
     </p:extLst>
   </p:cSld>
@@ -1564,13 +2406,7 @@
   <p:cSld>
     <p:spTree>
       <p:nvGrpSpPr>
-        <p:cNvPr id="1" name="">
-          <a:extLst>
-            <a:ext uri="{FF2B5EF4-FFF2-40B4-BE49-F238E27FC236}">
-              <a16:creationId xmlns:a16="http://schemas.microsoft.com/office/drawing/2014/main" id="{D98F69D2-AA2F-1FAB-FC58-E17B9F051FEC}"/>
-            </a:ext>
-          </a:extLst>
-        </p:cNvPr>
+        <p:cNvPr id="1" name=""/>
         <p:cNvGrpSpPr/>
         <p:nvPr/>
       </p:nvGrpSpPr>
@@ -1584,13 +2420,7 @@
       </p:grpSpPr>
       <p:sp>
         <p:nvSpPr>
-          <p:cNvPr id="2" name="Espaço Reservado para Imagem de Slide 1">
-            <a:extLst>
-              <a:ext uri="{FF2B5EF4-FFF2-40B4-BE49-F238E27FC236}">
-                <a16:creationId xmlns:a16="http://schemas.microsoft.com/office/drawing/2014/main" id="{BFA38404-D7C9-03F2-A7E5-10C0EFC8F190}"/>
-              </a:ext>
-            </a:extLst>
-          </p:cNvPr>
+          <p:cNvPr id="2" name="Espaço Reservado para Imagem de Slide 1"/>
           <p:cNvSpPr>
             <a:spLocks noGrp="1" noRot="1" noChangeAspect="1"/>
           </p:cNvSpPr>
@@ -1602,13 +2432,7 @@
       </p:sp>
       <p:sp>
         <p:nvSpPr>
-          <p:cNvPr id="3" name="Espaço Reservado para Anotações 2">
-            <a:extLst>
-              <a:ext uri="{FF2B5EF4-FFF2-40B4-BE49-F238E27FC236}">
-                <a16:creationId xmlns:a16="http://schemas.microsoft.com/office/drawing/2014/main" id="{5A8313F1-5D52-52B4-46D0-20D6D6D5149A}"/>
-              </a:ext>
-            </a:extLst>
-          </p:cNvPr>
+          <p:cNvPr id="3" name="Espaço Reservado para Anotações 2"/>
           <p:cNvSpPr>
             <a:spLocks noGrp="1"/>
           </p:cNvSpPr>
@@ -1621,19 +2445,60 @@
           <a:bodyPr/>
           <a:lstStyle/>
           <a:p>
+            <a:pPr marL="0" marR="0" lvl="0" indent="0" algn="l" defTabSz="914400" rtl="0" eaLnBrk="1" fontAlgn="auto" latinLnBrk="0" hangingPunct="1">
+              <a:lnSpc>
+                <a:spcPct val="100000"/>
+              </a:lnSpc>
+              <a:spcBef>
+                <a:spcPts val="0"/>
+              </a:spcBef>
+              <a:spcAft>
+                <a:spcPts val="0"/>
+              </a:spcAft>
+              <a:buClrTx/>
+              <a:buSzTx/>
+              <a:buFontTx/>
+              <a:buNone/>
+              <a:tabLst/>
+              <a:defRPr/>
+            </a:pPr>
+            <a:r>
+              <a:rPr lang="pt-BR" dirty="0"/>
+              <a:t>Se os atributos forem numéricos, o </a:t>
+            </a:r>
+            <a:r>
+              <a:rPr lang="pt-BR" b="1" dirty="0">
+                <a:solidFill>
+                  <a:srgbClr val="7030A0"/>
+                </a:solidFill>
+              </a:rPr>
+              <a:t>centroide</a:t>
+            </a:r>
+            <a:r>
+              <a:rPr lang="pt-BR" dirty="0"/>
+              <a:t> é obtido através das </a:t>
+            </a:r>
+            <a:r>
+              <a:rPr lang="pt-BR" b="1" dirty="0">
+                <a:solidFill>
+                  <a:srgbClr val="00B050"/>
+                </a:solidFill>
+              </a:rPr>
+              <a:t>médias individuais dos atributos</a:t>
+            </a:r>
+            <a:r>
+              <a:rPr lang="pt-BR" dirty="0"/>
+              <a:t>.</a:t>
+            </a:r>
+          </a:p>
+          <a:p>
             <a:endParaRPr lang="en-US" dirty="0"/>
           </a:p>
         </p:txBody>
       </p:sp>
       <p:sp>
         <p:nvSpPr>
-          <p:cNvPr id="4" name="Espaço Reservado para Número de Slide 3">
-            <a:extLst>
-              <a:ext uri="{FF2B5EF4-FFF2-40B4-BE49-F238E27FC236}">
-                <a16:creationId xmlns:a16="http://schemas.microsoft.com/office/drawing/2014/main" id="{428A95A6-CC49-168A-C37A-1C6EB3B93225}"/>
-              </a:ext>
-            </a:extLst>
-          </p:cNvPr>
+          <p:cNvPr id="4" name="Espaço Reservado para Número de Slide 3"/>
           <p:cNvSpPr>
             <a:spLocks noGrp="1"/>
           </p:cNvSpPr>
@@ -1657,7 +2522,7 @@
     </p:spTree>
     <p:extLst>
       <p:ext uri="{BB962C8B-B14F-4D97-AF65-F5344CB8AC3E}">
-        <p14:creationId xmlns:p14="http://schemas.microsoft.com/office/powerpoint/2010/main" val="2545804501"/>
+        <p14:creationId xmlns:p14="http://schemas.microsoft.com/office/powerpoint/2010/main" val="4076858274"/>
       </p:ext>
     </p:extLst>
   </p:cSld>
@@ -1686,7 +2551,7 @@
       </p:grpSpPr>
       <p:sp>
         <p:nvSpPr>
-          <p:cNvPr id="2" name="Espaço Reservado para Imagem de Slide 1"/>
+          <p:cNvPr id="2" name="Slide Image Placeholder 1"/>
           <p:cNvSpPr>
             <a:spLocks noGrp="1" noRot="1" noChangeAspect="1"/>
           </p:cNvSpPr>
@@ -1698,7 +2563,7 @@
       </p:sp>
       <p:sp>
         <p:nvSpPr>
-          <p:cNvPr id="3" name="Espaço Reservado para Anotações 2"/>
+          <p:cNvPr id="3" name="Notes Placeholder 2"/>
           <p:cNvSpPr>
             <a:spLocks noGrp="1"/>
           </p:cNvSpPr>
@@ -1711,383 +2576,13 @@
           <a:bodyPr/>
           <a:lstStyle/>
           <a:p>
-            <a:r>
-              <a:rPr lang="pt-BR" dirty="0"/>
-              <a:t>O K-</a:t>
-            </a:r>
-            <a:r>
-              <a:rPr lang="pt-BR" dirty="0" err="1"/>
-              <a:t>Means</a:t>
-            </a:r>
-            <a:r>
-              <a:rPr lang="pt-BR" dirty="0"/>
-              <a:t> encerra o treinamento com base em </a:t>
-            </a:r>
-            <a:r>
-              <a:rPr lang="pt-BR" b="1" dirty="0"/>
-              <a:t>critérios de convergência</a:t>
-            </a:r>
-            <a:r>
-              <a:rPr lang="pt-BR" dirty="0"/>
-              <a:t> que indicam quando o algoritmo atingiu um estado estável ou suficiente para parar. Esses critérios incluem:</a:t>
-            </a:r>
-          </a:p>
-          <a:p>
-            <a:r>
-              <a:rPr lang="pt-BR" b="1" dirty="0"/>
-              <a:t>1. Estabilização dos Centroides</a:t>
-            </a:r>
-          </a:p>
-          <a:p>
-            <a:pPr>
-              <a:buFont typeface="Arial" panose="020B0604020202020204" pitchFamily="34" charset="0"/>
-              <a:buChar char="•"/>
-            </a:pPr>
-            <a:r>
-              <a:rPr lang="pt-BR" dirty="0"/>
-              <a:t>O algoritmo para quando os </a:t>
-            </a:r>
-            <a:r>
-              <a:rPr lang="pt-BR" b="1" dirty="0"/>
-              <a:t>centroides não se movem mais significativamente</a:t>
-            </a:r>
-            <a:r>
-              <a:rPr lang="pt-BR" dirty="0"/>
-              <a:t> entre iterações.</a:t>
-            </a:r>
-          </a:p>
-          <a:p>
-            <a:pPr>
-              <a:buFont typeface="Arial" panose="020B0604020202020204" pitchFamily="34" charset="0"/>
-              <a:buChar char="•"/>
-            </a:pPr>
-            <a:r>
-              <a:rPr lang="pt-BR" dirty="0"/>
-              <a:t>Concretamente, isso significa que os deslocamentos dos centroides são menores que um limite pré-definido (ϵ\</a:t>
-            </a:r>
-            <a:r>
-              <a:rPr lang="pt-BR" dirty="0" err="1"/>
-              <a:t>epsilon</a:t>
-            </a:r>
-            <a:r>
-              <a:rPr lang="pt-BR" dirty="0"/>
-              <a:t>).</a:t>
-            </a:r>
-          </a:p>
-          <a:p>
-            <a:r>
-              <a:rPr lang="pt-BR" dirty="0"/>
-              <a:t>∥novo centroide−antigo centroide∥&lt;ϵ\|\</a:t>
-            </a:r>
-            <a:r>
-              <a:rPr lang="pt-BR" dirty="0" err="1"/>
-              <a:t>text</a:t>
-            </a:r>
-            <a:r>
-              <a:rPr lang="pt-BR" dirty="0"/>
-              <a:t>{novo centroide} - \</a:t>
-            </a:r>
-            <a:r>
-              <a:rPr lang="pt-BR" dirty="0" err="1"/>
-              <a:t>text</a:t>
-            </a:r>
-            <a:r>
-              <a:rPr lang="pt-BR" dirty="0"/>
-              <a:t>{antigo centroide}\| &lt; \</a:t>
-            </a:r>
-            <a:r>
-              <a:rPr lang="pt-BR" dirty="0" err="1"/>
-              <a:t>epsilon</a:t>
-            </a:r>
-            <a:r>
-              <a:rPr lang="pt-BR" dirty="0"/>
-              <a:t> </a:t>
-            </a:r>
-            <a:r>
-              <a:rPr lang="pt-BR" b="1" dirty="0"/>
-              <a:t>2. Estabilização das Atribuições de Cluster</a:t>
-            </a:r>
-          </a:p>
-          <a:p>
-            <a:pPr>
-              <a:buFont typeface="Arial" panose="020B0604020202020204" pitchFamily="34" charset="0"/>
-              <a:buChar char="•"/>
-            </a:pPr>
-            <a:r>
-              <a:rPr lang="pt-BR" dirty="0"/>
-              <a:t>Se os pontos não mudarem de cluster entre iterações, o K-</a:t>
-            </a:r>
-            <a:r>
-              <a:rPr lang="pt-BR" dirty="0" err="1"/>
-              <a:t>Means</a:t>
-            </a:r>
-            <a:r>
-              <a:rPr lang="pt-BR" dirty="0"/>
-              <a:t> considera que atingiu a convergência.</a:t>
-            </a:r>
-          </a:p>
-          <a:p>
-            <a:r>
-              <a:rPr lang="pt-BR" b="1" dirty="0"/>
-              <a:t>3. Número Máximo de Iterações</a:t>
-            </a:r>
-          </a:p>
-          <a:p>
-            <a:pPr>
-              <a:buFont typeface="Arial" panose="020B0604020202020204" pitchFamily="34" charset="0"/>
-              <a:buChar char="•"/>
-            </a:pPr>
-            <a:r>
-              <a:rPr lang="pt-BR" dirty="0"/>
-              <a:t>Um limite máximo de iterações pode ser imposto (</a:t>
-            </a:r>
-            <a:r>
-              <a:rPr lang="pt-BR" dirty="0" err="1"/>
-              <a:t>max_itermax</a:t>
-            </a:r>
-            <a:r>
-              <a:rPr lang="pt-BR" dirty="0"/>
-              <a:t>\_iter) para evitar que o algoritmo continue indefinidamente, especialmente em casos em que a convergência é difícil de alcançar.</a:t>
-            </a:r>
-          </a:p>
-          <a:p>
-            <a:r>
-              <a:rPr lang="pt-BR" b="1" dirty="0"/>
-              <a:t>4. Convergência da Função Objetivo</a:t>
-            </a:r>
-          </a:p>
-          <a:p>
-            <a:pPr>
-              <a:buFont typeface="Arial" panose="020B0604020202020204" pitchFamily="34" charset="0"/>
-              <a:buChar char="•"/>
-            </a:pPr>
-            <a:r>
-              <a:rPr lang="pt-BR" dirty="0"/>
-              <a:t>O algoritmo minimiza a </a:t>
-            </a:r>
-            <a:r>
-              <a:rPr lang="pt-BR" b="1" dirty="0"/>
-              <a:t>soma dos erros quadráticos </a:t>
-            </a:r>
-            <a:r>
-              <a:rPr lang="pt-BR" b="1" dirty="0" err="1"/>
-              <a:t>intra-cluster</a:t>
-            </a:r>
-            <a:r>
-              <a:rPr lang="pt-BR" b="1" dirty="0"/>
-              <a:t> (WSS)</a:t>
-            </a:r>
-            <a:r>
-              <a:rPr lang="pt-BR" dirty="0"/>
-              <a:t>, definida como:</a:t>
-            </a:r>
-          </a:p>
-          <a:p>
-            <a:pPr>
-              <a:buFont typeface="Arial" panose="020B0604020202020204" pitchFamily="34" charset="0"/>
-              <a:buChar char="•"/>
-            </a:pPr>
-            <a:r>
-              <a:rPr lang="pt-BR" dirty="0"/>
-              <a:t>WSS=∑i=1k∑x∈Ci∥x−μi∥2\</a:t>
-            </a:r>
-            <a:r>
-              <a:rPr lang="pt-BR" dirty="0" err="1"/>
-              <a:t>text</a:t>
-            </a:r>
-            <a:r>
-              <a:rPr lang="pt-BR" dirty="0"/>
-              <a:t>{WSS} = \sum_{i=1}^{k} \sum_{x \in </a:t>
-            </a:r>
-            <a:r>
-              <a:rPr lang="pt-BR" dirty="0" err="1"/>
-              <a:t>C_i</a:t>
-            </a:r>
-            <a:r>
-              <a:rPr lang="pt-BR" dirty="0"/>
-              <a:t>} \|\</a:t>
-            </a:r>
-            <a:r>
-              <a:rPr lang="pt-BR" dirty="0" err="1"/>
-              <a:t>mathbf</a:t>
-            </a:r>
-            <a:r>
-              <a:rPr lang="pt-BR" dirty="0"/>
-              <a:t>{x} - \</a:t>
-            </a:r>
-            <a:r>
-              <a:rPr lang="pt-BR" dirty="0" err="1"/>
-              <a:t>mu_i</a:t>
-            </a:r>
-            <a:r>
-              <a:rPr lang="pt-BR" dirty="0"/>
-              <a:t>\|^2 O K-</a:t>
-            </a:r>
-            <a:r>
-              <a:rPr lang="pt-BR" dirty="0" err="1"/>
-              <a:t>Means</a:t>
-            </a:r>
-            <a:r>
-              <a:rPr lang="pt-BR" dirty="0"/>
-              <a:t> para quando a redução no WSSWSS entre iterações consecutivas é menor que um limiar (Δ\Delta).</a:t>
-            </a:r>
-          </a:p>
-          <a:p>
-            <a:r>
-              <a:rPr lang="pt-BR" b="1" dirty="0"/>
-              <a:t>Processo Geral:</a:t>
-            </a:r>
-          </a:p>
-          <a:p>
-            <a:pPr>
-              <a:buFont typeface="+mj-lt"/>
-              <a:buAutoNum type="arabicPeriod"/>
-            </a:pPr>
-            <a:r>
-              <a:rPr lang="pt-BR" b="1" dirty="0"/>
-              <a:t>Inicialização</a:t>
-            </a:r>
-            <a:r>
-              <a:rPr lang="pt-BR" dirty="0"/>
-              <a:t>: Escolher </a:t>
-            </a:r>
-            <a:r>
-              <a:rPr lang="pt-BR" dirty="0" err="1"/>
-              <a:t>kk</a:t>
-            </a:r>
-            <a:r>
-              <a:rPr lang="pt-BR" dirty="0"/>
-              <a:t> centroides iniciais (aleatoriamente ou por métodos como K-</a:t>
-            </a:r>
-            <a:r>
-              <a:rPr lang="pt-BR" dirty="0" err="1"/>
-              <a:t>Means</a:t>
-            </a:r>
-            <a:r>
-              <a:rPr lang="pt-BR" dirty="0"/>
-              <a:t>++).</a:t>
-            </a:r>
-          </a:p>
-          <a:p>
-            <a:pPr>
-              <a:buFont typeface="+mj-lt"/>
-              <a:buAutoNum type="arabicPeriod"/>
-            </a:pPr>
-            <a:r>
-              <a:rPr lang="pt-BR" b="1" dirty="0"/>
-              <a:t>Passo de Atribuição</a:t>
-            </a:r>
-            <a:r>
-              <a:rPr lang="pt-BR" dirty="0"/>
-              <a:t>: Atribuir cada ponto ao cluster mais próximo (com base na distância, normalmente Euclidiana).</a:t>
-            </a:r>
-          </a:p>
-          <a:p>
-            <a:pPr>
-              <a:buFont typeface="+mj-lt"/>
-              <a:buAutoNum type="arabicPeriod"/>
-            </a:pPr>
-            <a:r>
-              <a:rPr lang="pt-BR" b="1" dirty="0"/>
-              <a:t>Passo de Atualização</a:t>
-            </a:r>
-            <a:r>
-              <a:rPr lang="pt-BR" dirty="0"/>
-              <a:t>: Recalcular os centroides como a média dos pontos atribuídos a cada cluster.</a:t>
-            </a:r>
-          </a:p>
-          <a:p>
-            <a:pPr>
-              <a:buFont typeface="+mj-lt"/>
-              <a:buAutoNum type="arabicPeriod"/>
-            </a:pPr>
-            <a:r>
-              <a:rPr lang="pt-BR" b="1" dirty="0"/>
-              <a:t>Verificação do Critério de Parada</a:t>
-            </a:r>
-            <a:r>
-              <a:rPr lang="pt-BR" dirty="0"/>
-              <a:t>: Verificar se algum dos critérios acima foi atendido. Caso contrário, repetir os passos 2 e 3.</a:t>
-            </a:r>
-          </a:p>
-          <a:p>
-            <a:r>
-              <a:rPr lang="pt-BR" b="1" dirty="0"/>
-              <a:t>Convergência e Garantias</a:t>
-            </a:r>
-          </a:p>
-          <a:p>
-            <a:pPr>
-              <a:buFont typeface="Arial" panose="020B0604020202020204" pitchFamily="34" charset="0"/>
-              <a:buChar char="•"/>
-            </a:pPr>
-            <a:r>
-              <a:rPr lang="pt-BR" dirty="0"/>
-              <a:t>O K-</a:t>
-            </a:r>
-            <a:r>
-              <a:rPr lang="pt-BR" dirty="0" err="1"/>
-              <a:t>Means</a:t>
-            </a:r>
-            <a:r>
-              <a:rPr lang="pt-BR" dirty="0"/>
-              <a:t> </a:t>
-            </a:r>
-            <a:r>
-              <a:rPr lang="pt-BR" b="1" dirty="0"/>
-              <a:t>sempre converge</a:t>
-            </a:r>
-            <a:r>
-              <a:rPr lang="pt-BR" dirty="0"/>
-              <a:t>, mas pode parar em mínimos locais (não garante o ótimo global).</a:t>
-            </a:r>
-          </a:p>
-          <a:p>
-            <a:pPr>
-              <a:buFont typeface="Arial" panose="020B0604020202020204" pitchFamily="34" charset="0"/>
-              <a:buChar char="•"/>
-            </a:pPr>
-            <a:r>
-              <a:rPr lang="pt-BR" dirty="0"/>
-              <a:t>Para melhorar a convergência, pode-se: </a:t>
-            </a:r>
-          </a:p>
-          <a:p>
-            <a:pPr marL="742950" lvl="1" indent="-285750">
-              <a:buFont typeface="Arial" panose="020B0604020202020204" pitchFamily="34" charset="0"/>
-              <a:buChar char="•"/>
-            </a:pPr>
-            <a:r>
-              <a:rPr lang="pt-BR" dirty="0"/>
-              <a:t>Usar inicialização inteligente (como K-</a:t>
-            </a:r>
-            <a:r>
-              <a:rPr lang="pt-BR" dirty="0" err="1"/>
-              <a:t>Means</a:t>
-            </a:r>
-            <a:r>
-              <a:rPr lang="pt-BR" dirty="0"/>
-              <a:t>++).</a:t>
-            </a:r>
-          </a:p>
-          <a:p>
-            <a:pPr marL="742950" lvl="1" indent="-285750">
-              <a:buFont typeface="Arial" panose="020B0604020202020204" pitchFamily="34" charset="0"/>
-              <a:buChar char="•"/>
-            </a:pPr>
-            <a:r>
-              <a:rPr lang="pt-BR" dirty="0"/>
-              <a:t>Executar o algoritmo várias vezes com diferentes inicializações e escolher o melhor resultado.</a:t>
-            </a:r>
-          </a:p>
-          <a:p>
-            <a:endParaRPr lang="pt-BR" dirty="0"/>
+            <a:endParaRPr lang="en-US" dirty="0"/>
           </a:p>
         </p:txBody>
       </p:sp>
       <p:sp>
         <p:nvSpPr>
-          <p:cNvPr id="4" name="Espaço Reservado para Número de Slide 3"/>
+          <p:cNvPr id="4" name="Slide Number Placeholder 3"/>
           <p:cNvSpPr>
             <a:spLocks noGrp="1"/>
           </p:cNvSpPr>
@@ -2102,7 +2597,7 @@
           <a:p>
             <a:fld id="{F430A2A4-8C14-4B1A-AD48-7B6401078BF7}" type="slidenum">
               <a:rPr lang="pt-BR" smtClean="0"/>
-              <a:t>15</a:t>
+              <a:t>10</a:t>
             </a:fld>
             <a:endParaRPr lang="pt-BR"/>
           </a:p>
@@ -2111,7 +2606,7 @@
     </p:spTree>
     <p:extLst>
       <p:ext uri="{BB962C8B-B14F-4D97-AF65-F5344CB8AC3E}">
-        <p14:creationId xmlns:p14="http://schemas.microsoft.com/office/powerpoint/2010/main" val="3481659351"/>
+        <p14:creationId xmlns:p14="http://schemas.microsoft.com/office/powerpoint/2010/main" val="1947555992"/>
       </p:ext>
     </p:extLst>
   </p:cSld>
@@ -2126,7 +2621,13 @@
   <p:cSld>
     <p:spTree>
       <p:nvGrpSpPr>
-        <p:cNvPr id="1" name=""/>
+        <p:cNvPr id="1" name="">
+          <a:extLst>
+            <a:ext uri="{FF2B5EF4-FFF2-40B4-BE49-F238E27FC236}">
+              <a16:creationId xmlns:a16="http://schemas.microsoft.com/office/drawing/2014/main" id="{D98F69D2-AA2F-1FAB-FC58-E17B9F051FEC}"/>
+            </a:ext>
+          </a:extLst>
+        </p:cNvPr>
         <p:cNvGrpSpPr/>
         <p:nvPr/>
       </p:nvGrpSpPr>
@@ -2140,7 +2641,13 @@
       </p:grpSpPr>
       <p:sp>
         <p:nvSpPr>
-          <p:cNvPr id="2" name="Espaço Reservado para Imagem de Slide 1"/>
+          <p:cNvPr id="2" name="Espaço Reservado para Imagem de Slide 1">
+            <a:extLst>
+              <a:ext uri="{FF2B5EF4-FFF2-40B4-BE49-F238E27FC236}">
+                <a16:creationId xmlns:a16="http://schemas.microsoft.com/office/drawing/2014/main" id="{BFA38404-D7C9-03F2-A7E5-10C0EFC8F190}"/>
+              </a:ext>
+            </a:extLst>
+          </p:cNvPr>
           <p:cNvSpPr>
             <a:spLocks noGrp="1" noRot="1" noChangeAspect="1"/>
           </p:cNvSpPr>
@@ -2152,7 +2659,13 @@
       </p:sp>
       <p:sp>
         <p:nvSpPr>
-          <p:cNvPr id="3" name="Espaço Reservado para Anotações 2"/>
+          <p:cNvPr id="3" name="Espaço Reservado para Anotações 2">
+            <a:extLst>
+              <a:ext uri="{FF2B5EF4-FFF2-40B4-BE49-F238E27FC236}">
+                <a16:creationId xmlns:a16="http://schemas.microsoft.com/office/drawing/2014/main" id="{5A8313F1-5D52-52B4-46D0-20D6D6D5149A}"/>
+              </a:ext>
+            </a:extLst>
+          </p:cNvPr>
           <p:cNvSpPr>
             <a:spLocks noGrp="1"/>
           </p:cNvSpPr>
@@ -2165,610 +2678,96 @@
           <a:bodyPr/>
           <a:lstStyle/>
           <a:p>
-            <a:pPr marL="0" marR="0" lvl="0" indent="0" algn="l" defTabSz="914400" rtl="0" eaLnBrk="1" fontAlgn="auto" latinLnBrk="0" hangingPunct="1">
-              <a:lnSpc>
-                <a:spcPct val="100000"/>
-              </a:lnSpc>
-              <a:spcBef>
-                <a:spcPts val="0"/>
-              </a:spcBef>
-              <a:spcAft>
-                <a:spcPts val="0"/>
-              </a:spcAft>
-              <a:buClrTx/>
-              <a:buSzTx/>
-              <a:buFontTx/>
-              <a:buNone/>
-              <a:tabLst/>
-              <a:defRPr/>
-            </a:pPr>
-            <a:r>
-              <a:rPr lang="pt-BR" sz="1200" b="0" dirty="0">
-                <a:solidFill>
-                  <a:srgbClr val="00B0F0"/>
-                </a:solidFill>
-              </a:rPr>
-              <a:t>E</a:t>
-            </a:r>
-            <a:r>
-              <a:rPr lang="pt-BR" dirty="0"/>
-              <a:t>xemplo:</a:t>
-            </a:r>
-            <a:r>
-              <a:rPr lang="pt-BR" baseline="0" dirty="0"/>
-              <a:t> </a:t>
-            </a:r>
-            <a:r>
-              <a:rPr lang="pt-BR" dirty="0"/>
-              <a:t>https://colab.research.google.com/github/zz4fap/t320_aprendizado_de_maquina/blob/main/notebooks/clustering/kmeans_example.ipynb</a:t>
-            </a:r>
-          </a:p>
-          <a:p>
-            <a:pPr marL="0" marR="0" lvl="0" indent="0" algn="l" defTabSz="914400" rtl="0" eaLnBrk="1" fontAlgn="auto" latinLnBrk="0" hangingPunct="1">
-              <a:lnSpc>
-                <a:spcPct val="100000"/>
-              </a:lnSpc>
-              <a:spcBef>
-                <a:spcPts val="0"/>
-              </a:spcBef>
-              <a:spcAft>
-                <a:spcPts val="0"/>
-              </a:spcAft>
-              <a:buClrTx/>
-              <a:buSzTx/>
-              <a:buFontTx/>
-              <a:buNone/>
-              <a:tabLst/>
-              <a:defRPr/>
-            </a:pPr>
-            <a:endParaRPr lang="pt-BR" sz="1200" b="0" dirty="0">
-              <a:solidFill>
-                <a:srgbClr val="00B0F0"/>
-              </a:solidFill>
-            </a:endParaRPr>
-          </a:p>
-          <a:p>
-            <a:pPr marL="0" marR="0" lvl="0" indent="0" algn="l" defTabSz="914400" rtl="0" eaLnBrk="1" fontAlgn="auto" latinLnBrk="0" hangingPunct="1">
-              <a:lnSpc>
-                <a:spcPct val="100000"/>
-              </a:lnSpc>
-              <a:spcBef>
-                <a:spcPts val="0"/>
-              </a:spcBef>
-              <a:spcAft>
-                <a:spcPts val="0"/>
-              </a:spcAft>
-              <a:buClrTx/>
-              <a:buSzTx/>
-              <a:buFontTx/>
-              <a:buNone/>
-              <a:tabLst/>
-              <a:defRPr/>
-            </a:pPr>
-            <a:endParaRPr lang="pt-BR" sz="1200" b="0" dirty="0">
-              <a:solidFill>
-                <a:srgbClr val="00B0F0"/>
-              </a:solidFill>
-            </a:endParaRPr>
-          </a:p>
-          <a:p>
-            <a:r>
-              <a:rPr lang="pt-BR" dirty="0"/>
-              <a:t>Identificar o melhor número de clusters (</a:t>
-            </a:r>
-            <a:r>
-              <a:rPr lang="pt-BR" dirty="0" err="1"/>
-              <a:t>kk</a:t>
-            </a:r>
-            <a:r>
-              <a:rPr lang="pt-BR" dirty="0"/>
-              <a:t>) no K-</a:t>
-            </a:r>
-            <a:r>
-              <a:rPr lang="pt-BR" dirty="0" err="1"/>
-              <a:t>Means</a:t>
-            </a:r>
-            <a:r>
-              <a:rPr lang="pt-BR" dirty="0"/>
-              <a:t> é um passo fundamental para garantir a eficiência e a utilidade da clusterização. Existem várias abordagens para determinar o valor ideal de </a:t>
-            </a:r>
-            <a:r>
-              <a:rPr lang="pt-BR" dirty="0" err="1"/>
-              <a:t>kk</a:t>
-            </a:r>
-            <a:r>
-              <a:rPr lang="pt-BR" dirty="0"/>
-              <a:t>. As mais comuns incluem:</a:t>
-            </a:r>
+            <a:r>
+              <a:rPr lang="pt-BR" dirty="0"/>
+              <a:t>Não se aplica clusterização a dados categóricos, mesmo que sejam ordinais:</a:t>
+            </a:r>
+          </a:p>
+          <a:p>
+            <a:r>
+              <a:rPr lang="pt-BR" dirty="0"/>
+              <a:t>Nós sabemos quem é maior ou menor, mas não “quanto maior” </a:t>
+            </a:r>
+          </a:p>
+          <a:p>
+            <a:r>
+              <a:rPr lang="pt-BR" dirty="0"/>
+              <a:t>Em dados ordinais, a diferença entre 1→2 pode não ser igual a 4→5</a:t>
+            </a:r>
+          </a:p>
+          <a:p>
+            <a:endParaRPr lang="pt-BR" dirty="0"/>
           </a:p>
           <a:p>
             <a:r>
               <a:rPr lang="pt-BR" b="1" dirty="0"/>
-              <a:t>1. Método do Cotovelo (</a:t>
+              <a:t>K-</a:t>
             </a:r>
             <a:r>
               <a:rPr lang="pt-BR" b="1" dirty="0" err="1"/>
-              <a:t>Elbow</a:t>
-            </a:r>
-            <a:r>
-              <a:rPr lang="pt-BR" b="1" dirty="0"/>
-              <a:t> </a:t>
-            </a:r>
-            <a:r>
-              <a:rPr lang="pt-BR" b="1" dirty="0" err="1"/>
-              <a:t>Method</a:t>
-            </a:r>
-            <a:r>
-              <a:rPr lang="pt-BR" b="1" dirty="0"/>
-              <a:t>)</a:t>
-            </a:r>
-          </a:p>
-          <a:p>
-            <a:r>
-              <a:rPr lang="pt-BR" dirty="0"/>
-              <a:t>Este método analisa a variação da </a:t>
-            </a:r>
-            <a:r>
-              <a:rPr lang="pt-BR" b="1" dirty="0"/>
-              <a:t>inércia </a:t>
-            </a:r>
-            <a:r>
-              <a:rPr lang="pt-BR" b="1" dirty="0" err="1"/>
-              <a:t>intra-cluster</a:t>
-            </a:r>
-            <a:r>
-              <a:rPr lang="pt-BR" dirty="0"/>
-              <a:t> (ou soma dos erros quadráticos dentro dos clusters, WSSWSS) à medida que o número de clusters aumenta.</a:t>
-            </a:r>
-          </a:p>
-          <a:p>
-            <a:r>
-              <a:rPr lang="pt-BR" b="1" dirty="0"/>
-              <a:t>Passos:</a:t>
-            </a:r>
-          </a:p>
-          <a:p>
-            <a:pPr>
-              <a:buFont typeface="+mj-lt"/>
-              <a:buAutoNum type="arabicPeriod"/>
-            </a:pPr>
-            <a:r>
-              <a:rPr lang="pt-BR" dirty="0"/>
-              <a:t>Execute o K-</a:t>
-            </a:r>
-            <a:r>
-              <a:rPr lang="pt-BR" dirty="0" err="1"/>
-              <a:t>Means</a:t>
-            </a:r>
-            <a:r>
-              <a:rPr lang="pt-BR" dirty="0"/>
-              <a:t> com diferentes valores de </a:t>
-            </a:r>
-            <a:r>
-              <a:rPr lang="pt-BR" dirty="0" err="1"/>
-              <a:t>kk</a:t>
-            </a:r>
-            <a:r>
-              <a:rPr lang="pt-BR" dirty="0"/>
-              <a:t> (por exemplo, k=1k=1 a k=10k=10).</a:t>
-            </a:r>
-          </a:p>
-          <a:p>
-            <a:pPr>
-              <a:buFont typeface="+mj-lt"/>
-              <a:buAutoNum type="arabicPeriod"/>
-            </a:pPr>
-            <a:r>
-              <a:rPr lang="pt-BR" dirty="0"/>
-              <a:t>Calcule o WSSWSS para cada valor de </a:t>
-            </a:r>
-            <a:r>
-              <a:rPr lang="pt-BR" dirty="0" err="1"/>
-              <a:t>kk</a:t>
-            </a:r>
-            <a:r>
-              <a:rPr lang="pt-BR" dirty="0"/>
-              <a:t>.</a:t>
-            </a:r>
-          </a:p>
-          <a:p>
-            <a:pPr>
-              <a:buFont typeface="+mj-lt"/>
-              <a:buAutoNum type="arabicPeriod"/>
-            </a:pPr>
-            <a:r>
-              <a:rPr lang="pt-BR" dirty="0"/>
-              <a:t>Trace um gráfico do WSSWSS em função de </a:t>
-            </a:r>
-            <a:r>
-              <a:rPr lang="pt-BR" dirty="0" err="1"/>
-              <a:t>kk</a:t>
-            </a:r>
-            <a:r>
-              <a:rPr lang="pt-BR" dirty="0"/>
-              <a:t>.</a:t>
-            </a:r>
-          </a:p>
-          <a:p>
-            <a:pPr>
-              <a:buFont typeface="+mj-lt"/>
-              <a:buAutoNum type="arabicPeriod"/>
-            </a:pPr>
-            <a:r>
-              <a:rPr lang="pt-BR" dirty="0"/>
-              <a:t>Identifique o "cotovelo" no gráfico — o ponto onde a redução no WSSWSS se torna menos significativa.</a:t>
-            </a:r>
-          </a:p>
-          <a:p>
-            <a:r>
-              <a:rPr lang="pt-BR" b="1" dirty="0"/>
-              <a:t>Observação:</a:t>
-            </a:r>
-          </a:p>
-          <a:p>
-            <a:r>
-              <a:rPr lang="pt-BR" dirty="0"/>
-              <a:t>O "cotovelo" indica que aumentar </a:t>
-            </a:r>
-            <a:r>
-              <a:rPr lang="pt-BR" dirty="0" err="1"/>
-              <a:t>kk</a:t>
-            </a:r>
-            <a:r>
-              <a:rPr lang="pt-BR" dirty="0"/>
-              <a:t> além desse ponto não resulta em uma melhoria substancial na compactação dos clusters.</a:t>
-            </a:r>
-          </a:p>
-          <a:p>
-            <a:r>
-              <a:rPr lang="pt-BR" b="1" dirty="0"/>
-              <a:t>2. Coeficiente de Silhueta (</a:t>
-            </a:r>
-            <a:r>
-              <a:rPr lang="pt-BR" b="1" dirty="0" err="1"/>
-              <a:t>Silhouette</a:t>
-            </a:r>
-            <a:r>
-              <a:rPr lang="pt-BR" b="1" dirty="0"/>
-              <a:t> Score)</a:t>
-            </a:r>
-          </a:p>
-          <a:p>
-            <a:r>
-              <a:rPr lang="pt-BR" dirty="0"/>
-              <a:t>O coeficiente de silhueta avalia a </a:t>
-            </a:r>
-            <a:r>
-              <a:rPr lang="pt-BR" b="1" dirty="0"/>
-              <a:t>qualidade da clusterização</a:t>
-            </a:r>
-            <a:r>
-              <a:rPr lang="pt-BR" dirty="0"/>
-              <a:t>, considerando a coesão dentro dos clusters e a separação entre eles.</a:t>
-            </a:r>
-          </a:p>
-          <a:p>
-            <a:pPr>
+              <a:t>prototypes</a:t>
+            </a:r>
+            <a:r>
+              <a:rPr lang="pt-BR" dirty="0"/>
+              <a:t> combina: </a:t>
+            </a:r>
+          </a:p>
+          <a:p>
+            <a:pPr marL="171450" indent="-171450">
               <a:buFont typeface="Arial" panose="020B0604020202020204" pitchFamily="34" charset="0"/>
               <a:buChar char="•"/>
             </a:pPr>
             <a:r>
               <a:rPr lang="pt-BR" dirty="0"/>
-              <a:t>s=b−</a:t>
-            </a:r>
-            <a:r>
-              <a:rPr lang="pt-BR" dirty="0" err="1"/>
-              <a:t>amax</a:t>
-            </a:r>
-            <a:r>
-              <a:rPr lang="pt-BR" dirty="0"/>
-              <a:t>⁡(</a:t>
-            </a:r>
-            <a:r>
-              <a:rPr lang="pt-BR" dirty="0" err="1"/>
-              <a:t>a,b</a:t>
-            </a:r>
-            <a:r>
-              <a:rPr lang="pt-BR" dirty="0"/>
-              <a:t>)s = \</a:t>
-            </a:r>
-            <a:r>
-              <a:rPr lang="pt-BR" dirty="0" err="1"/>
-              <a:t>frac</a:t>
-            </a:r>
-            <a:r>
-              <a:rPr lang="pt-BR" dirty="0"/>
-              <a:t>{b - a}{\</a:t>
-            </a:r>
-            <a:r>
-              <a:rPr lang="pt-BR" dirty="0" err="1"/>
-              <a:t>max</a:t>
-            </a:r>
-            <a:r>
-              <a:rPr lang="pt-BR" dirty="0"/>
-              <a:t>(a, b)} aa: distância média de um ponto para os outros pontos do mesmo cluster.</a:t>
-            </a:r>
-          </a:p>
-          <a:p>
-            <a:pPr>
+              <a:t>distância euclidiana (numérico)</a:t>
+            </a:r>
+          </a:p>
+          <a:p>
+            <a:pPr marL="171450" indent="-171450">
               <a:buFont typeface="Arial" panose="020B0604020202020204" pitchFamily="34" charset="0"/>
               <a:buChar char="•"/>
             </a:pPr>
             <a:r>
+              <a:rPr lang="pt-BR" dirty="0"/>
+              <a:t>distância de </a:t>
+            </a:r>
+            <a:r>
               <a:rPr lang="pt-BR" dirty="0" err="1"/>
-              <a:t>bb</a:t>
-            </a:r>
-            <a:r>
-              <a:rPr lang="pt-BR" dirty="0"/>
-              <a:t>: distância média de um ponto para os pontos do cluster mais próximo.</a:t>
-            </a:r>
-          </a:p>
-          <a:p>
-            <a:r>
-              <a:rPr lang="pt-BR" b="1" dirty="0"/>
-              <a:t>Passos:</a:t>
-            </a:r>
-          </a:p>
-          <a:p>
-            <a:pPr>
-              <a:buFont typeface="+mj-lt"/>
-              <a:buAutoNum type="arabicPeriod"/>
-            </a:pPr>
-            <a:r>
-              <a:rPr lang="pt-BR" dirty="0"/>
-              <a:t>Execute o K-</a:t>
-            </a:r>
-            <a:r>
-              <a:rPr lang="pt-BR" dirty="0" err="1"/>
-              <a:t>Means</a:t>
-            </a:r>
-            <a:r>
-              <a:rPr lang="pt-BR" dirty="0"/>
-              <a:t> para diferentes valores de </a:t>
-            </a:r>
-            <a:r>
-              <a:rPr lang="pt-BR" dirty="0" err="1"/>
-              <a:t>kk</a:t>
-            </a:r>
-            <a:r>
-              <a:rPr lang="pt-BR" dirty="0"/>
-              <a:t>.</a:t>
-            </a:r>
-          </a:p>
-          <a:p>
-            <a:pPr>
-              <a:buFont typeface="+mj-lt"/>
-              <a:buAutoNum type="arabicPeriod"/>
-            </a:pPr>
-            <a:r>
-              <a:rPr lang="pt-BR" dirty="0"/>
-              <a:t>Calcule o coeficiente de silhueta para cada ponto e, em seguida, a média para o conjunto.</a:t>
-            </a:r>
-          </a:p>
-          <a:p>
-            <a:pPr>
-              <a:buFont typeface="+mj-lt"/>
-              <a:buAutoNum type="arabicPeriod"/>
-            </a:pPr>
-            <a:r>
-              <a:rPr lang="pt-BR" dirty="0"/>
-              <a:t>Escolha </a:t>
-            </a:r>
-            <a:r>
-              <a:rPr lang="pt-BR" dirty="0" err="1"/>
-              <a:t>kk</a:t>
-            </a:r>
-            <a:r>
-              <a:rPr lang="pt-BR" dirty="0"/>
-              <a:t> que maximize o valor médio do coeficiente de silhueta.</a:t>
-            </a:r>
-          </a:p>
-          <a:p>
-            <a:r>
-              <a:rPr lang="pt-BR" b="1" dirty="0"/>
-              <a:t>3. Critério Gap </a:t>
-            </a:r>
+              <a:t>Hamming</a:t>
+            </a:r>
+            <a:r>
+              <a:rPr lang="pt-BR" dirty="0"/>
+              <a:t> (categórico)</a:t>
+            </a:r>
+          </a:p>
+          <a:p>
+            <a:endParaRPr lang="pt-BR" dirty="0"/>
+          </a:p>
+          <a:p>
             <a:r>
               <a:rPr lang="pt-BR" b="1" dirty="0" err="1"/>
-              <a:t>Statistic</a:t>
-            </a:r>
-            <a:endParaRPr lang="pt-BR" b="1" dirty="0"/>
-          </a:p>
-          <a:p>
-            <a:r>
-              <a:rPr lang="pt-BR" dirty="0"/>
-              <a:t>Este método compara a dispersão dos clusters no conjunto de dados com uma dispersão esperada de um conjunto de dados gerado aleatoriamente.</a:t>
-            </a:r>
-          </a:p>
-          <a:p>
-            <a:r>
-              <a:rPr lang="pt-BR" b="1" dirty="0"/>
-              <a:t>Passos:</a:t>
-            </a:r>
-          </a:p>
-          <a:p>
-            <a:pPr>
-              <a:buFont typeface="+mj-lt"/>
-              <a:buAutoNum type="arabicPeriod"/>
-            </a:pPr>
-            <a:r>
-              <a:rPr lang="pt-BR" dirty="0"/>
-              <a:t>Execute o K-</a:t>
-            </a:r>
-            <a:r>
-              <a:rPr lang="pt-BR" dirty="0" err="1"/>
-              <a:t>Means</a:t>
-            </a:r>
-            <a:r>
-              <a:rPr lang="pt-BR" dirty="0"/>
-              <a:t> para diferentes valores de </a:t>
-            </a:r>
-            <a:r>
-              <a:rPr lang="pt-BR" dirty="0" err="1"/>
-              <a:t>kk</a:t>
-            </a:r>
-            <a:r>
-              <a:rPr lang="pt-BR" dirty="0"/>
-              <a:t> no conjunto de dados real.</a:t>
-            </a:r>
-          </a:p>
-          <a:p>
-            <a:pPr>
-              <a:buFont typeface="+mj-lt"/>
-              <a:buAutoNum type="arabicPeriod"/>
-            </a:pPr>
-            <a:r>
-              <a:rPr lang="pt-BR" dirty="0"/>
-              <a:t>Gere um conjunto de dados aleatório com a mesma distribuição e calcule a dispersão dos clusters.</a:t>
-            </a:r>
-          </a:p>
-          <a:p>
-            <a:pPr>
-              <a:buFont typeface="+mj-lt"/>
-              <a:buAutoNum type="arabicPeriod"/>
-            </a:pPr>
-            <a:r>
-              <a:rPr lang="pt-BR" dirty="0"/>
-              <a:t>Compare as dispersões e encontre </a:t>
-            </a:r>
-            <a:r>
-              <a:rPr lang="pt-BR" dirty="0" err="1"/>
-              <a:t>kk</a:t>
-            </a:r>
-            <a:r>
-              <a:rPr lang="pt-BR" dirty="0"/>
-              <a:t> que maximize a diferença (gap) entre os dois conjuntos.</a:t>
-            </a:r>
-          </a:p>
-          <a:p>
-            <a:r>
-              <a:rPr lang="pt-BR" b="1" dirty="0"/>
-              <a:t>4. Validação Cruzada</a:t>
-            </a:r>
-          </a:p>
-          <a:p>
-            <a:r>
-              <a:rPr lang="pt-BR" dirty="0"/>
-              <a:t>Divida o conjunto de dados em subconjuntos e avalie a consistência dos clusters em diferentes amostras.</a:t>
-            </a:r>
-          </a:p>
-          <a:p>
-            <a:r>
-              <a:rPr lang="pt-BR" b="1" dirty="0"/>
-              <a:t>5. Métodos Automáticos, como X-</a:t>
-            </a:r>
-            <a:r>
-              <a:rPr lang="pt-BR" b="1" dirty="0" err="1"/>
-              <a:t>Means</a:t>
-            </a:r>
-            <a:r>
-              <a:rPr lang="pt-BR" b="1" dirty="0"/>
-              <a:t> e G-</a:t>
-            </a:r>
-            <a:r>
-              <a:rPr lang="pt-BR" b="1" dirty="0" err="1"/>
-              <a:t>Means</a:t>
-            </a:r>
-            <a:endParaRPr lang="pt-BR" b="1" dirty="0"/>
-          </a:p>
-          <a:p>
-            <a:pPr>
+              <a:t>K-modes</a:t>
+            </a:r>
+            <a:endParaRPr lang="pt-BR" dirty="0"/>
+          </a:p>
+          <a:p>
+            <a:pPr marL="171450" indent="-171450">
               <a:buFont typeface="Arial" panose="020B0604020202020204" pitchFamily="34" charset="0"/>
               <a:buChar char="•"/>
             </a:pPr>
             <a:r>
-              <a:rPr lang="pt-BR" b="1" dirty="0"/>
-              <a:t>X-</a:t>
-            </a:r>
-            <a:r>
-              <a:rPr lang="pt-BR" b="1" dirty="0" err="1"/>
-              <a:t>Means</a:t>
-            </a:r>
-            <a:r>
-              <a:rPr lang="pt-BR" dirty="0"/>
-              <a:t>: Extensão do K-</a:t>
-            </a:r>
-            <a:r>
-              <a:rPr lang="pt-BR" dirty="0" err="1"/>
-              <a:t>Means</a:t>
-            </a:r>
-            <a:r>
-              <a:rPr lang="pt-BR" dirty="0"/>
-              <a:t> que escolhe automaticamente </a:t>
-            </a:r>
-            <a:r>
-              <a:rPr lang="pt-BR" dirty="0" err="1"/>
-              <a:t>kk</a:t>
-            </a:r>
-            <a:r>
-              <a:rPr lang="pt-BR" dirty="0"/>
-              <a:t> otimizando o critério Bayesiano.</a:t>
-            </a:r>
-          </a:p>
-          <a:p>
-            <a:pPr>
+              <a:rPr lang="pt-BR" dirty="0"/>
+              <a:t>usa “moda” em vez de média </a:t>
+            </a:r>
+          </a:p>
+          <a:p>
+            <a:pPr marL="171450" indent="-171450">
               <a:buFont typeface="Arial" panose="020B0604020202020204" pitchFamily="34" charset="0"/>
               <a:buChar char="•"/>
             </a:pPr>
             <a:r>
-              <a:rPr lang="pt-BR" b="1" dirty="0"/>
-              <a:t>G-</a:t>
-            </a:r>
-            <a:r>
-              <a:rPr lang="pt-BR" b="1" dirty="0" err="1"/>
-              <a:t>Means</a:t>
-            </a:r>
-            <a:r>
-              <a:rPr lang="pt-BR" dirty="0"/>
-              <a:t>: Usa testes estatísticos para determinar se os clusters seguem uma distribuição gaussiana.</a:t>
-            </a:r>
-          </a:p>
-          <a:p>
-            <a:r>
-              <a:rPr lang="pt-BR" b="1" dirty="0"/>
-              <a:t>Considerações:</a:t>
-            </a:r>
-          </a:p>
-          <a:p>
-            <a:pPr>
-              <a:buFont typeface="Arial" panose="020B0604020202020204" pitchFamily="34" charset="0"/>
-              <a:buChar char="•"/>
-            </a:pPr>
-            <a:r>
-              <a:rPr lang="pt-BR" b="1" dirty="0"/>
-              <a:t>Dimensão dos dados</a:t>
-            </a:r>
-            <a:r>
-              <a:rPr lang="pt-BR" dirty="0"/>
-              <a:t>: Em alta dimensionalidade, os métodos podem se tornar menos claros devido à maldição da dimensionalidade.</a:t>
-            </a:r>
-          </a:p>
-          <a:p>
-            <a:pPr>
-              <a:buFont typeface="Arial" panose="020B0604020202020204" pitchFamily="34" charset="0"/>
-              <a:buChar char="•"/>
-            </a:pPr>
-            <a:r>
-              <a:rPr lang="pt-BR" b="1" dirty="0"/>
-              <a:t>Interpretação</a:t>
-            </a:r>
-            <a:r>
-              <a:rPr lang="pt-BR" dirty="0"/>
-              <a:t>: O número de clusters deve fazer sentido no contexto do problema, além de ser estatisticamente válido.</a:t>
-            </a:r>
-          </a:p>
-          <a:p>
-            <a:r>
-              <a:rPr lang="pt-BR" dirty="0"/>
-              <a:t>Combinar múltiplos métodos pode ser útil para confirmar a escolha do melhor </a:t>
-            </a:r>
-            <a:r>
-              <a:rPr lang="pt-BR" dirty="0" err="1"/>
-              <a:t>kk</a:t>
-            </a:r>
-            <a:r>
-              <a:rPr lang="pt-BR" dirty="0"/>
-              <a:t>.</a:t>
+              <a:rPr lang="pt-BR" dirty="0"/>
+              <a:t>mede dissimilaridade por diferenças</a:t>
             </a:r>
           </a:p>
           <a:p>
@@ -2778,7 +2777,13 @@
       </p:sp>
       <p:sp>
         <p:nvSpPr>
-          <p:cNvPr id="4" name="Espaço Reservado para Número de Slide 3"/>
+          <p:cNvPr id="4" name="Espaço Reservado para Número de Slide 3">
+            <a:extLst>
+              <a:ext uri="{FF2B5EF4-FFF2-40B4-BE49-F238E27FC236}">
+                <a16:creationId xmlns:a16="http://schemas.microsoft.com/office/drawing/2014/main" id="{428A95A6-CC49-168A-C37A-1C6EB3B93225}"/>
+              </a:ext>
+            </a:extLst>
+          </p:cNvPr>
           <p:cNvSpPr>
             <a:spLocks noGrp="1"/>
           </p:cNvSpPr>
@@ -2793,7 +2798,7 @@
           <a:p>
             <a:fld id="{F430A2A4-8C14-4B1A-AD48-7B6401078BF7}" type="slidenum">
               <a:rPr lang="pt-BR" smtClean="0"/>
-              <a:t>18</a:t>
+              <a:t>11</a:t>
             </a:fld>
             <a:endParaRPr lang="pt-BR"/>
           </a:p>
@@ -2802,7 +2807,7 @@
     </p:spTree>
     <p:extLst>
       <p:ext uri="{BB962C8B-B14F-4D97-AF65-F5344CB8AC3E}">
-        <p14:creationId xmlns:p14="http://schemas.microsoft.com/office/powerpoint/2010/main" val="3992294165"/>
+        <p14:creationId xmlns:p14="http://schemas.microsoft.com/office/powerpoint/2010/main" val="2545804501"/>
       </p:ext>
     </p:extLst>
   </p:cSld>
@@ -2831,12 +2836,24 @@
       </p:grpSpPr>
       <p:sp>
         <p:nvSpPr>
-          <p:cNvPr id="2" name="Slide Image Placeholder 1"/>
+          <p:cNvPr id="2" name="Espaço Reservado para Imagem de Slide 1"/>
           <p:cNvSpPr>
             <a:spLocks noGrp="1" noRot="1" noChangeAspect="1"/>
           </p:cNvSpPr>
           <p:nvPr>
             <p:ph type="sldImg"/>
+          </p:nvPr>
+        </p:nvSpPr>
+        <p:spPr/>
+      </p:sp>
+      <p:sp>
+        <p:nvSpPr>
+          <p:cNvPr id="3" name="Espaço Reservado para Anotações 2"/>
+          <p:cNvSpPr>
+            <a:spLocks noGrp="1"/>
+          </p:cNvSpPr>
+          <p:nvPr>
+            <p:ph type="body" idx="1"/>
           </p:nvPr>
         </p:nvSpPr>
         <p:spPr/>
@@ -2844,18 +2861,388 @@
           <a:bodyPr/>
           <a:lstStyle/>
           <a:p>
-            <a:endParaRPr lang="en-US"/>
+            <a:r>
+              <a:rPr lang="pt-BR" dirty="0"/>
+              <a:t>O K-</a:t>
+            </a:r>
+            <a:r>
+              <a:rPr lang="pt-BR" dirty="0" err="1"/>
+              <a:t>Means</a:t>
+            </a:r>
+            <a:r>
+              <a:rPr lang="pt-BR" dirty="0"/>
+              <a:t> encerra o treinamento com base em </a:t>
+            </a:r>
+            <a:r>
+              <a:rPr lang="pt-BR" b="1" dirty="0"/>
+              <a:t>critérios de convergência</a:t>
+            </a:r>
+            <a:r>
+              <a:rPr lang="pt-BR" dirty="0"/>
+              <a:t> que indicam quando o algoritmo atingiu um estado estável ou suficiente para parar. Esses critérios incluem:</a:t>
+            </a:r>
+          </a:p>
+          <a:p>
+            <a:r>
+              <a:rPr lang="pt-BR" b="1" dirty="0"/>
+              <a:t>1. Estabilização dos Centroides</a:t>
+            </a:r>
+          </a:p>
+          <a:p>
+            <a:pPr>
+              <a:buFont typeface="Arial" panose="020B0604020202020204" pitchFamily="34" charset="0"/>
+              <a:buChar char="•"/>
+            </a:pPr>
+            <a:r>
+              <a:rPr lang="pt-BR" dirty="0"/>
+              <a:t>O algoritmo para quando os </a:t>
+            </a:r>
+            <a:r>
+              <a:rPr lang="pt-BR" b="1" dirty="0"/>
+              <a:t>centroides não se movem mais significativamente</a:t>
+            </a:r>
+            <a:r>
+              <a:rPr lang="pt-BR" dirty="0"/>
+              <a:t> entre iterações.</a:t>
+            </a:r>
+          </a:p>
+          <a:p>
+            <a:pPr>
+              <a:buFont typeface="Arial" panose="020B0604020202020204" pitchFamily="34" charset="0"/>
+              <a:buChar char="•"/>
+            </a:pPr>
+            <a:r>
+              <a:rPr lang="pt-BR" dirty="0"/>
+              <a:t>Concretamente, isso significa que os deslocamentos dos centroides são menores que um limite pré-definido (ϵ\</a:t>
+            </a:r>
+            <a:r>
+              <a:rPr lang="pt-BR" dirty="0" err="1"/>
+              <a:t>epsilon</a:t>
+            </a:r>
+            <a:r>
+              <a:rPr lang="pt-BR" dirty="0"/>
+              <a:t>).</a:t>
+            </a:r>
+          </a:p>
+          <a:p>
+            <a:r>
+              <a:rPr lang="pt-BR" dirty="0"/>
+              <a:t>∥novo centroide−antigo centroide∥&lt;ϵ\|\</a:t>
+            </a:r>
+            <a:r>
+              <a:rPr lang="pt-BR" dirty="0" err="1"/>
+              <a:t>text</a:t>
+            </a:r>
+            <a:r>
+              <a:rPr lang="pt-BR" dirty="0"/>
+              <a:t>{novo centroide} - \</a:t>
+            </a:r>
+            <a:r>
+              <a:rPr lang="pt-BR" dirty="0" err="1"/>
+              <a:t>text</a:t>
+            </a:r>
+            <a:r>
+              <a:rPr lang="pt-BR" dirty="0"/>
+              <a:t>{antigo centroide}\| &lt; \</a:t>
+            </a:r>
+            <a:r>
+              <a:rPr lang="pt-BR" dirty="0" err="1"/>
+              <a:t>epsilon</a:t>
+            </a:r>
+            <a:r>
+              <a:rPr lang="pt-BR" dirty="0"/>
+              <a:t> </a:t>
+            </a:r>
+            <a:r>
+              <a:rPr lang="pt-BR" b="1" dirty="0"/>
+              <a:t>2. Estabilização das Atribuições de Cluster</a:t>
+            </a:r>
+          </a:p>
+          <a:p>
+            <a:pPr>
+              <a:buFont typeface="Arial" panose="020B0604020202020204" pitchFamily="34" charset="0"/>
+              <a:buChar char="•"/>
+            </a:pPr>
+            <a:r>
+              <a:rPr lang="pt-BR" dirty="0"/>
+              <a:t>Se os pontos não mudarem de cluster entre iterações, o K-</a:t>
+            </a:r>
+            <a:r>
+              <a:rPr lang="pt-BR" dirty="0" err="1"/>
+              <a:t>Means</a:t>
+            </a:r>
+            <a:r>
+              <a:rPr lang="pt-BR" dirty="0"/>
+              <a:t> considera que atingiu a convergência.</a:t>
+            </a:r>
+          </a:p>
+          <a:p>
+            <a:r>
+              <a:rPr lang="pt-BR" b="1" dirty="0"/>
+              <a:t>3. Número Máximo de Iterações</a:t>
+            </a:r>
+          </a:p>
+          <a:p>
+            <a:pPr>
+              <a:buFont typeface="Arial" panose="020B0604020202020204" pitchFamily="34" charset="0"/>
+              <a:buChar char="•"/>
+            </a:pPr>
+            <a:r>
+              <a:rPr lang="pt-BR" dirty="0"/>
+              <a:t>Um limite máximo de iterações pode ser imposto (</a:t>
+            </a:r>
+            <a:r>
+              <a:rPr lang="pt-BR" dirty="0" err="1"/>
+              <a:t>max_itermax</a:t>
+            </a:r>
+            <a:r>
+              <a:rPr lang="pt-BR" dirty="0"/>
+              <a:t>\_iter) para evitar que o algoritmo continue indefinidamente, especialmente em casos em que a convergência é difícil de alcançar.</a:t>
+            </a:r>
+          </a:p>
+          <a:p>
+            <a:r>
+              <a:rPr lang="pt-BR" b="1" dirty="0"/>
+              <a:t>4. Convergência da Função Objetivo</a:t>
+            </a:r>
+          </a:p>
+          <a:p>
+            <a:pPr>
+              <a:buFont typeface="Arial" panose="020B0604020202020204" pitchFamily="34" charset="0"/>
+              <a:buChar char="•"/>
+            </a:pPr>
+            <a:r>
+              <a:rPr lang="pt-BR" dirty="0"/>
+              <a:t>O algoritmo minimiza a </a:t>
+            </a:r>
+            <a:r>
+              <a:rPr lang="pt-BR" b="1" dirty="0"/>
+              <a:t>soma dos erros quadráticos </a:t>
+            </a:r>
+            <a:r>
+              <a:rPr lang="pt-BR" b="1" dirty="0" err="1"/>
+              <a:t>intra-cluster</a:t>
+            </a:r>
+            <a:r>
+              <a:rPr lang="pt-BR" b="1" dirty="0"/>
+              <a:t> (WSS)</a:t>
+            </a:r>
+            <a:r>
+              <a:rPr lang="pt-BR" dirty="0"/>
+              <a:t>, definida como:</a:t>
+            </a:r>
+          </a:p>
+          <a:p>
+            <a:pPr>
+              <a:buFont typeface="Arial" panose="020B0604020202020204" pitchFamily="34" charset="0"/>
+              <a:buChar char="•"/>
+            </a:pPr>
+            <a:r>
+              <a:rPr lang="pt-BR" dirty="0"/>
+              <a:t>WSS=∑i=1k∑x∈Ci∥x−μi∥2\</a:t>
+            </a:r>
+            <a:r>
+              <a:rPr lang="pt-BR" dirty="0" err="1"/>
+              <a:t>text</a:t>
+            </a:r>
+            <a:r>
+              <a:rPr lang="pt-BR" dirty="0"/>
+              <a:t>{WSS} = \sum_{i=1}^{k} \sum_{x \in </a:t>
+            </a:r>
+            <a:r>
+              <a:rPr lang="pt-BR" dirty="0" err="1"/>
+              <a:t>C_i</a:t>
+            </a:r>
+            <a:r>
+              <a:rPr lang="pt-BR" dirty="0"/>
+              <a:t>} \|\</a:t>
+            </a:r>
+            <a:r>
+              <a:rPr lang="pt-BR" dirty="0" err="1"/>
+              <a:t>mathbf</a:t>
+            </a:r>
+            <a:r>
+              <a:rPr lang="pt-BR" dirty="0"/>
+              <a:t>{x} - \</a:t>
+            </a:r>
+            <a:r>
+              <a:rPr lang="pt-BR" dirty="0" err="1"/>
+              <a:t>mu_i</a:t>
+            </a:r>
+            <a:r>
+              <a:rPr lang="pt-BR" dirty="0"/>
+              <a:t>\|^2 O K-</a:t>
+            </a:r>
+            <a:r>
+              <a:rPr lang="pt-BR" dirty="0" err="1"/>
+              <a:t>Means</a:t>
+            </a:r>
+            <a:r>
+              <a:rPr lang="pt-BR" dirty="0"/>
+              <a:t> para quando a redução no WSSWSS entre iterações consecutivas é menor que um limiar (Δ\Delta).</a:t>
+            </a:r>
+          </a:p>
+          <a:p>
+            <a:r>
+              <a:rPr lang="pt-BR" b="1" dirty="0"/>
+              <a:t>Processo Geral:</a:t>
+            </a:r>
+          </a:p>
+          <a:p>
+            <a:pPr>
+              <a:buFont typeface="+mj-lt"/>
+              <a:buAutoNum type="arabicPeriod"/>
+            </a:pPr>
+            <a:r>
+              <a:rPr lang="pt-BR" b="1" dirty="0"/>
+              <a:t>Inicialização</a:t>
+            </a:r>
+            <a:r>
+              <a:rPr lang="pt-BR" dirty="0"/>
+              <a:t>: Escolher </a:t>
+            </a:r>
+            <a:r>
+              <a:rPr lang="pt-BR" dirty="0" err="1"/>
+              <a:t>kk</a:t>
+            </a:r>
+            <a:r>
+              <a:rPr lang="pt-BR" dirty="0"/>
+              <a:t> centroides iniciais (aleatoriamente ou por métodos como K-</a:t>
+            </a:r>
+            <a:r>
+              <a:rPr lang="pt-BR" dirty="0" err="1"/>
+              <a:t>Means</a:t>
+            </a:r>
+            <a:r>
+              <a:rPr lang="pt-BR" dirty="0"/>
+              <a:t>++).</a:t>
+            </a:r>
+          </a:p>
+          <a:p>
+            <a:pPr>
+              <a:buFont typeface="+mj-lt"/>
+              <a:buAutoNum type="arabicPeriod"/>
+            </a:pPr>
+            <a:r>
+              <a:rPr lang="pt-BR" b="1" dirty="0"/>
+              <a:t>Passo de Atribuição</a:t>
+            </a:r>
+            <a:r>
+              <a:rPr lang="pt-BR" dirty="0"/>
+              <a:t>: Atribuir cada ponto ao cluster mais próximo (com base na distância, normalmente Euclidiana).</a:t>
+            </a:r>
+          </a:p>
+          <a:p>
+            <a:pPr>
+              <a:buFont typeface="+mj-lt"/>
+              <a:buAutoNum type="arabicPeriod"/>
+            </a:pPr>
+            <a:r>
+              <a:rPr lang="pt-BR" b="1" dirty="0"/>
+              <a:t>Passo de Atualização</a:t>
+            </a:r>
+            <a:r>
+              <a:rPr lang="pt-BR" dirty="0"/>
+              <a:t>: Recalcular os centroides como a média dos pontos atribuídos a cada cluster.</a:t>
+            </a:r>
+          </a:p>
+          <a:p>
+            <a:pPr>
+              <a:buFont typeface="+mj-lt"/>
+              <a:buAutoNum type="arabicPeriod"/>
+            </a:pPr>
+            <a:r>
+              <a:rPr lang="pt-BR" b="1" dirty="0"/>
+              <a:t>Verificação do Critério de Parada</a:t>
+            </a:r>
+            <a:r>
+              <a:rPr lang="pt-BR" dirty="0"/>
+              <a:t>: Verificar se algum dos critérios acima foi atendido. Caso contrário, repetir os passos 2 e 3.</a:t>
+            </a:r>
+          </a:p>
+          <a:p>
+            <a:r>
+              <a:rPr lang="pt-BR" b="1" dirty="0"/>
+              <a:t>Convergência e Garantias</a:t>
+            </a:r>
+          </a:p>
+          <a:p>
+            <a:pPr>
+              <a:buFont typeface="Arial" panose="020B0604020202020204" pitchFamily="34" charset="0"/>
+              <a:buChar char="•"/>
+            </a:pPr>
+            <a:r>
+              <a:rPr lang="pt-BR" dirty="0"/>
+              <a:t>O K-</a:t>
+            </a:r>
+            <a:r>
+              <a:rPr lang="pt-BR" dirty="0" err="1"/>
+              <a:t>Means</a:t>
+            </a:r>
+            <a:r>
+              <a:rPr lang="pt-BR" dirty="0"/>
+              <a:t> </a:t>
+            </a:r>
+            <a:r>
+              <a:rPr lang="pt-BR" b="1" dirty="0"/>
+              <a:t>sempre converge</a:t>
+            </a:r>
+            <a:r>
+              <a:rPr lang="pt-BR" dirty="0"/>
+              <a:t>, mas pode parar em mínimos locais (não garante o ótimo global).</a:t>
+            </a:r>
+          </a:p>
+          <a:p>
+            <a:pPr>
+              <a:buFont typeface="Arial" panose="020B0604020202020204" pitchFamily="34" charset="0"/>
+              <a:buChar char="•"/>
+            </a:pPr>
+            <a:r>
+              <a:rPr lang="pt-BR" dirty="0"/>
+              <a:t>Para melhorar a convergência, pode-se: </a:t>
+            </a:r>
+          </a:p>
+          <a:p>
+            <a:pPr marL="742950" lvl="1" indent="-285750">
+              <a:buFont typeface="Arial" panose="020B0604020202020204" pitchFamily="34" charset="0"/>
+              <a:buChar char="•"/>
+            </a:pPr>
+            <a:r>
+              <a:rPr lang="pt-BR" dirty="0"/>
+              <a:t>Usar inicialização inteligente (como K-</a:t>
+            </a:r>
+            <a:r>
+              <a:rPr lang="pt-BR" dirty="0" err="1"/>
+              <a:t>Means</a:t>
+            </a:r>
+            <a:r>
+              <a:rPr lang="pt-BR" dirty="0"/>
+              <a:t>++).</a:t>
+            </a:r>
+          </a:p>
+          <a:p>
+            <a:pPr marL="742950" lvl="1" indent="-285750">
+              <a:buFont typeface="Arial" panose="020B0604020202020204" pitchFamily="34" charset="0"/>
+              <a:buChar char="•"/>
+            </a:pPr>
+            <a:r>
+              <a:rPr lang="pt-BR" dirty="0"/>
+              <a:t>Executar o algoritmo várias vezes com diferentes inicializações e escolher o melhor resultado.</a:t>
+            </a:r>
+          </a:p>
+          <a:p>
+            <a:endParaRPr lang="pt-BR" dirty="0"/>
           </a:p>
         </p:txBody>
       </p:sp>
       <p:sp>
         <p:nvSpPr>
-          <p:cNvPr id="3" name="Notes Placeholder 2"/>
+          <p:cNvPr id="4" name="Espaço Reservado para Número de Slide 3"/>
           <p:cNvSpPr>
             <a:spLocks noGrp="1"/>
           </p:cNvSpPr>
           <p:nvPr>
-            <p:ph type="body" idx="1"/>
+            <p:ph type="sldNum" sz="quarter" idx="5"/>
           </p:nvPr>
         </p:nvSpPr>
         <p:spPr/>
@@ -2863,48 +3250,9 @@
           <a:bodyPr/>
           <a:lstStyle/>
           <a:p>
-            <a:r>
-              <a:rPr lang="pt-BR" sz="1200" kern="1200" dirty="0">
-                <a:solidFill>
-                  <a:schemeClr val="tx1"/>
-                </a:solidFill>
-                <a:latin typeface="+mn-lt"/>
-                <a:ea typeface="+mn-ea"/>
-                <a:cs typeface="+mn-cs"/>
-                <a:hlinkClick r:id="rId3">
-                  <a:extLst>
-                    <a:ext uri="{A12FA001-AC4F-418D-AE19-62706E023703}">
-                      <ahyp:hlinkClr xmlns:ahyp="http://schemas.microsoft.com/office/drawing/2018/hyperlinkcolor" val="tx"/>
-                    </a:ext>
-                  </a:extLst>
-                </a:hlinkClick>
-              </a:rPr>
-              <a:t>Referencias</a:t>
-            </a:r>
-          </a:p>
-          <a:p>
-            <a:endParaRPr lang="en-US" dirty="0"/>
-          </a:p>
-        </p:txBody>
-      </p:sp>
-      <p:sp>
-        <p:nvSpPr>
-          <p:cNvPr id="4" name="Slide Number Placeholder 3"/>
-          <p:cNvSpPr>
-            <a:spLocks noGrp="1"/>
-          </p:cNvSpPr>
-          <p:nvPr>
-            <p:ph type="sldNum" sz="quarter" idx="5"/>
-          </p:nvPr>
-        </p:nvSpPr>
-        <p:spPr/>
-        <p:txBody>
-          <a:bodyPr/>
-          <a:lstStyle/>
-          <a:p>
-            <a:fld id="{6FC8D850-966F-45A6-8DE7-15B891E7D40D}" type="slidenum">
+            <a:fld id="{F430A2A4-8C14-4B1A-AD48-7B6401078BF7}" type="slidenum">
               <a:rPr lang="pt-BR" smtClean="0"/>
-              <a:t>21</a:t>
+              <a:t>19</a:t>
             </a:fld>
             <a:endParaRPr lang="pt-BR"/>
           </a:p>
@@ -2913,7 +3261,7 @@
     </p:spTree>
     <p:extLst>
       <p:ext uri="{BB962C8B-B14F-4D97-AF65-F5344CB8AC3E}">
-        <p14:creationId xmlns:p14="http://schemas.microsoft.com/office/powerpoint/2010/main" val="1774144237"/>
+        <p14:creationId xmlns:p14="http://schemas.microsoft.com/office/powerpoint/2010/main" val="3481659351"/>
       </p:ext>
     </p:extLst>
   </p:cSld>
@@ -3054,7 +3402,7 @@
           <a:p>
             <a:fld id="{221D0464-8C8A-49C0-859F-777E51766A35}" type="datetimeFigureOut">
               <a:rPr lang="pt-BR" smtClean="0"/>
-              <a:t>04/04/2026</a:t>
+              <a:t>05/04/2026</a:t>
             </a:fld>
             <a:endParaRPr lang="pt-BR"/>
           </a:p>
@@ -3224,7 +3572,7 @@
           <a:p>
             <a:fld id="{221D0464-8C8A-49C0-859F-777E51766A35}" type="datetimeFigureOut">
               <a:rPr lang="pt-BR" smtClean="0"/>
-              <a:t>04/04/2026</a:t>
+              <a:t>05/04/2026</a:t>
             </a:fld>
             <a:endParaRPr lang="pt-BR"/>
           </a:p>
@@ -3404,7 +3752,7 @@
           <a:p>
             <a:fld id="{221D0464-8C8A-49C0-859F-777E51766A35}" type="datetimeFigureOut">
               <a:rPr lang="pt-BR" smtClean="0"/>
-              <a:t>04/04/2026</a:t>
+              <a:t>05/04/2026</a:t>
             </a:fld>
             <a:endParaRPr lang="pt-BR"/>
           </a:p>
@@ -3574,7 +3922,7 @@
           <a:p>
             <a:fld id="{221D0464-8C8A-49C0-859F-777E51766A35}" type="datetimeFigureOut">
               <a:rPr lang="pt-BR" smtClean="0"/>
-              <a:t>04/04/2026</a:t>
+              <a:t>05/04/2026</a:t>
             </a:fld>
             <a:endParaRPr lang="pt-BR"/>
           </a:p>
@@ -3820,7 +4168,7 @@
           <a:p>
             <a:fld id="{221D0464-8C8A-49C0-859F-777E51766A35}" type="datetimeFigureOut">
               <a:rPr lang="pt-BR" smtClean="0"/>
-              <a:t>04/04/2026</a:t>
+              <a:t>05/04/2026</a:t>
             </a:fld>
             <a:endParaRPr lang="pt-BR"/>
           </a:p>
@@ -4052,7 +4400,7 @@
           <a:p>
             <a:fld id="{221D0464-8C8A-49C0-859F-777E51766A35}" type="datetimeFigureOut">
               <a:rPr lang="pt-BR" smtClean="0"/>
-              <a:t>04/04/2026</a:t>
+              <a:t>05/04/2026</a:t>
             </a:fld>
             <a:endParaRPr lang="pt-BR"/>
           </a:p>
@@ -4419,7 +4767,7 @@
           <a:p>
             <a:fld id="{221D0464-8C8A-49C0-859F-777E51766A35}" type="datetimeFigureOut">
               <a:rPr lang="pt-BR" smtClean="0"/>
-              <a:t>04/04/2026</a:t>
+              <a:t>05/04/2026</a:t>
             </a:fld>
             <a:endParaRPr lang="pt-BR"/>
           </a:p>
@@ -4537,7 +4885,7 @@
           <a:p>
             <a:fld id="{221D0464-8C8A-49C0-859F-777E51766A35}" type="datetimeFigureOut">
               <a:rPr lang="pt-BR" smtClean="0"/>
-              <a:t>04/04/2026</a:t>
+              <a:t>05/04/2026</a:t>
             </a:fld>
             <a:endParaRPr lang="pt-BR"/>
           </a:p>
@@ -4632,7 +4980,7 @@
           <a:p>
             <a:fld id="{221D0464-8C8A-49C0-859F-777E51766A35}" type="datetimeFigureOut">
               <a:rPr lang="pt-BR" smtClean="0"/>
-              <a:t>04/04/2026</a:t>
+              <a:t>05/04/2026</a:t>
             </a:fld>
             <a:endParaRPr lang="pt-BR"/>
           </a:p>
@@ -4909,7 +5257,7 @@
           <a:p>
             <a:fld id="{221D0464-8C8A-49C0-859F-777E51766A35}" type="datetimeFigureOut">
               <a:rPr lang="pt-BR" smtClean="0"/>
-              <a:t>04/04/2026</a:t>
+              <a:t>05/04/2026</a:t>
             </a:fld>
             <a:endParaRPr lang="pt-BR"/>
           </a:p>
@@ -5162,7 +5510,7 @@
           <a:p>
             <a:fld id="{221D0464-8C8A-49C0-859F-777E51766A35}" type="datetimeFigureOut">
               <a:rPr lang="pt-BR" smtClean="0"/>
-              <a:t>04/04/2026</a:t>
+              <a:t>05/04/2026</a:t>
             </a:fld>
             <a:endParaRPr lang="pt-BR"/>
           </a:p>
@@ -5375,7 +5723,7 @@
           <a:p>
             <a:fld id="{221D0464-8C8A-49C0-859F-777E51766A35}" type="datetimeFigureOut">
               <a:rPr lang="pt-BR" smtClean="0"/>
-              <a:t>04/04/2026</a:t>
+              <a:t>05/04/2026</a:t>
             </a:fld>
             <a:endParaRPr lang="pt-BR"/>
           </a:p>
@@ -5993,7 +6341,13 @@
       </p:grpSpPr>
       <p:sp>
         <p:nvSpPr>
-          <p:cNvPr id="2" name="Título 1"/>
+          <p:cNvPr id="2" name="Title 1">
+            <a:extLst>
+              <a:ext uri="{FF2B5EF4-FFF2-40B4-BE49-F238E27FC236}">
+                <a16:creationId xmlns:a16="http://schemas.microsoft.com/office/drawing/2014/main" id="{FFE84507-EC77-45EC-8B3A-27BFC439AB0A}"/>
+              </a:ext>
+            </a:extLst>
+          </p:cNvPr>
           <p:cNvSpPr>
             <a:spLocks noGrp="1"/>
           </p:cNvSpPr>
@@ -6008,7 +6362,900 @@
           <a:p>
             <a:r>
               <a:rPr lang="pt-BR" dirty="0"/>
-              <a:t>Quantos devem ser os clusters?</a:t>
+              <a:t>Centroide</a:t>
+            </a:r>
+            <a:endParaRPr lang="en-US" dirty="0"/>
+          </a:p>
+        </p:txBody>
+      </p:sp>
+      <p:sp>
+        <p:nvSpPr>
+          <p:cNvPr id="3" name="Content Placeholder 2">
+            <a:extLst>
+              <a:ext uri="{FF2B5EF4-FFF2-40B4-BE49-F238E27FC236}">
+                <a16:creationId xmlns:a16="http://schemas.microsoft.com/office/drawing/2014/main" id="{04FEB374-1415-DA51-E59A-B5E50D17F763}"/>
+              </a:ext>
+            </a:extLst>
+          </p:cNvPr>
+          <p:cNvSpPr>
+            <a:spLocks noGrp="1"/>
+          </p:cNvSpPr>
+          <p:nvPr>
+            <p:ph idx="1"/>
+          </p:nvPr>
+        </p:nvSpPr>
+        <p:spPr>
+          <a:xfrm>
+            <a:off x="838200" y="1825624"/>
+            <a:ext cx="11353800" cy="5032375"/>
+          </a:xfrm>
+        </p:spPr>
+        <p:txBody>
+          <a:bodyPr>
+            <a:normAutofit/>
+          </a:bodyPr>
+          <a:lstStyle/>
+          <a:p>
+            <a:r>
+              <a:rPr lang="pt-BR" b="1" dirty="0"/>
+              <a:t>Centroide</a:t>
+            </a:r>
+            <a:r>
+              <a:rPr lang="pt-BR" dirty="0"/>
+              <a:t> é o ponto central de um </a:t>
+            </a:r>
+            <a:r>
+              <a:rPr lang="pt-BR" i="1" dirty="0"/>
+              <a:t>cluster</a:t>
+            </a:r>
+            <a:r>
+              <a:rPr lang="pt-BR" dirty="0"/>
+              <a:t> de dados. </a:t>
+            </a:r>
+          </a:p>
+          <a:p>
+            <a:pPr lvl="1"/>
+            <a:r>
+              <a:rPr lang="pt-BR" dirty="0"/>
+              <a:t>Representa a "média" das amostras dentro do cluster.</a:t>
+            </a:r>
+          </a:p>
+          <a:p>
+            <a:r>
+              <a:rPr lang="pt-BR" dirty="0"/>
+              <a:t>Os </a:t>
+            </a:r>
+            <a:r>
+              <a:rPr lang="pt-BR" b="1" dirty="0">
+                <a:solidFill>
+                  <a:schemeClr val="accent2"/>
+                </a:solidFill>
+              </a:rPr>
+              <a:t>centroides</a:t>
+            </a:r>
+            <a:r>
+              <a:rPr lang="pt-BR" dirty="0"/>
+              <a:t> podem ser usados ​​como </a:t>
+            </a:r>
+          </a:p>
+          <a:p>
+            <a:pPr lvl="1">
+              <a:buFont typeface="Wingdings" panose="05000000000000000000" pitchFamily="2" charset="2"/>
+              <a:buChar char="§"/>
+            </a:pPr>
+            <a:r>
+              <a:rPr lang="pt-BR" dirty="0"/>
+              <a:t>centros para inicializar redes neurais Bayesianas ou de </a:t>
+            </a:r>
+            <a:r>
+              <a:rPr lang="en-US" dirty="0" err="1"/>
+              <a:t>funções</a:t>
+            </a:r>
+            <a:r>
+              <a:rPr lang="en-US" dirty="0"/>
+              <a:t> de base radial (</a:t>
+            </a:r>
+            <a:r>
+              <a:rPr lang="pt-BR" dirty="0"/>
+              <a:t>RBF), </a:t>
+            </a:r>
+          </a:p>
+          <a:p>
+            <a:pPr lvl="1">
+              <a:buFont typeface="Wingdings" panose="05000000000000000000" pitchFamily="2" charset="2"/>
+              <a:buChar char="§"/>
+            </a:pPr>
+            <a:r>
+              <a:rPr lang="pt-BR" dirty="0"/>
+              <a:t>estimativas de valores de atributos ausentes.</a:t>
+            </a:r>
+          </a:p>
+          <a:p>
+            <a:pPr lvl="1">
+              <a:buFont typeface="Wingdings" panose="05000000000000000000" pitchFamily="2" charset="2"/>
+              <a:buChar char="§"/>
+            </a:pPr>
+            <a:r>
+              <a:rPr lang="pt-BR" dirty="0"/>
+              <a:t>forma de comprimir dados usando apenas o </a:t>
+            </a:r>
+            <a:r>
+              <a:rPr lang="pt-BR" dirty="0" err="1"/>
+              <a:t>centróide</a:t>
+            </a:r>
+            <a:r>
+              <a:rPr lang="pt-BR" dirty="0"/>
+              <a:t> mais próximo.</a:t>
+            </a:r>
+          </a:p>
+          <a:p>
+            <a:pPr lvl="1">
+              <a:buFont typeface="Wingdings" panose="05000000000000000000" pitchFamily="2" charset="2"/>
+              <a:buChar char="§"/>
+            </a:pPr>
+            <a:r>
+              <a:rPr lang="pt-BR" dirty="0"/>
+              <a:t>forma de visualizar dados multidimensionais.</a:t>
+            </a:r>
+          </a:p>
+          <a:p>
+            <a:pPr lvl="1">
+              <a:buFont typeface="Wingdings" panose="05000000000000000000" pitchFamily="2" charset="2"/>
+              <a:buChar char="§"/>
+            </a:pPr>
+            <a:r>
+              <a:rPr lang="pt-BR" i="1" dirty="0"/>
+              <a:t>feature </a:t>
+            </a:r>
+            <a:r>
+              <a:rPr lang="pt-BR" i="1" dirty="0" err="1"/>
+              <a:t>engineering</a:t>
+            </a:r>
+            <a:r>
+              <a:rPr lang="pt-BR" i="1" dirty="0"/>
+              <a:t>:</a:t>
+            </a:r>
+            <a:r>
+              <a:rPr lang="pt-BR" dirty="0"/>
+              <a:t> o índice do </a:t>
+            </a:r>
+            <a:r>
+              <a:rPr lang="pt-BR" dirty="0" err="1"/>
+              <a:t>centróide</a:t>
+            </a:r>
+            <a:r>
+              <a:rPr lang="pt-BR" dirty="0"/>
+              <a:t> e a distância até os </a:t>
+            </a:r>
+            <a:r>
+              <a:rPr lang="pt-BR" dirty="0" err="1"/>
+              <a:t>centróides</a:t>
+            </a:r>
+            <a:r>
+              <a:rPr lang="pt-BR" dirty="0"/>
+              <a:t> podem ser novos atributos.</a:t>
+            </a:r>
+          </a:p>
+          <a:p>
+            <a:pPr lvl="1">
+              <a:buFont typeface="Wingdings" panose="05000000000000000000" pitchFamily="2" charset="2"/>
+              <a:buChar char="§"/>
+            </a:pPr>
+            <a:r>
+              <a:rPr lang="pt-BR" dirty="0"/>
+              <a:t>forma de detectar anomalias: distância alta ao </a:t>
+            </a:r>
+            <a:r>
+              <a:rPr lang="pt-BR" dirty="0" err="1"/>
+              <a:t>centróide</a:t>
+            </a:r>
+            <a:r>
+              <a:rPr lang="pt-BR" dirty="0"/>
+              <a:t> indica </a:t>
+            </a:r>
+            <a:r>
+              <a:rPr lang="pt-BR" i="1" dirty="0"/>
+              <a:t>outlier</a:t>
+            </a:r>
+            <a:r>
+              <a:rPr lang="pt-BR" dirty="0"/>
+              <a:t>.</a:t>
+            </a:r>
+          </a:p>
+          <a:p>
+            <a:pPr lvl="1">
+              <a:buFont typeface="Wingdings" panose="05000000000000000000" pitchFamily="2" charset="2"/>
+              <a:buChar char="§"/>
+            </a:pPr>
+            <a:r>
+              <a:rPr lang="pt-BR" dirty="0"/>
+              <a:t>forma de agrupar dados sem classes em problemas </a:t>
+            </a:r>
+            <a:r>
+              <a:rPr lang="pt-BR" dirty="0" err="1"/>
+              <a:t>semi-supervisionados</a:t>
+            </a:r>
+            <a:r>
+              <a:rPr lang="pt-BR" dirty="0"/>
+              <a:t>: os </a:t>
+            </a:r>
+            <a:r>
+              <a:rPr lang="pt-BR" i="1" dirty="0"/>
+              <a:t>clusters</a:t>
+            </a:r>
+            <a:r>
+              <a:rPr lang="pt-BR" dirty="0"/>
+              <a:t> são usados como classes e, consequentemente, rotular os dados.</a:t>
+            </a:r>
+            <a:endParaRPr lang="en-US" dirty="0"/>
+          </a:p>
+          <a:p>
+            <a:pPr lvl="1">
+              <a:buFont typeface="Wingdings" panose="05000000000000000000" pitchFamily="2" charset="2"/>
+              <a:buChar char="§"/>
+            </a:pPr>
+            <a:endParaRPr lang="pt-BR" dirty="0"/>
+          </a:p>
+          <a:p>
+            <a:pPr lvl="1">
+              <a:buFont typeface="Wingdings" panose="05000000000000000000" pitchFamily="2" charset="2"/>
+              <a:buChar char="§"/>
+            </a:pPr>
+            <a:endParaRPr lang="pt-BR" dirty="0"/>
+          </a:p>
+        </p:txBody>
+      </p:sp>
+    </p:spTree>
+    <p:extLst>
+      <p:ext uri="{BB962C8B-B14F-4D97-AF65-F5344CB8AC3E}">
+        <p14:creationId xmlns:p14="http://schemas.microsoft.com/office/powerpoint/2010/main" val="429952234"/>
+      </p:ext>
+    </p:extLst>
+  </p:cSld>
+  <p:clrMapOvr>
+    <a:masterClrMapping/>
+  </p:clrMapOvr>
+</p:sld>
+</file>
+
+<file path=ppt/slides/slide11.xml><?xml version="1.0" encoding="utf-8"?>
+<p:sld xmlns:a="http://schemas.openxmlformats.org/drawingml/2006/main" xmlns:r="http://schemas.openxmlformats.org/officeDocument/2006/relationships" xmlns:p="http://schemas.openxmlformats.org/presentationml/2006/main">
+  <p:cSld>
+    <p:spTree>
+      <p:nvGrpSpPr>
+        <p:cNvPr id="1" name="">
+          <a:extLst>
+            <a:ext uri="{FF2B5EF4-FFF2-40B4-BE49-F238E27FC236}">
+              <a16:creationId xmlns:a16="http://schemas.microsoft.com/office/drawing/2014/main" id="{5B00F73A-8390-7530-E708-9D3EBFB35B37}"/>
+            </a:ext>
+          </a:extLst>
+        </p:cNvPr>
+        <p:cNvGrpSpPr/>
+        <p:nvPr/>
+      </p:nvGrpSpPr>
+      <p:grpSpPr>
+        <a:xfrm>
+          <a:off x="0" y="0"/>
+          <a:ext cx="0" cy="0"/>
+          <a:chOff x="0" y="0"/>
+          <a:chExt cx="0" cy="0"/>
+        </a:xfrm>
+      </p:grpSpPr>
+      <p:sp>
+        <p:nvSpPr>
+          <p:cNvPr id="2" name="Título 1">
+            <a:extLst>
+              <a:ext uri="{FF2B5EF4-FFF2-40B4-BE49-F238E27FC236}">
+                <a16:creationId xmlns:a16="http://schemas.microsoft.com/office/drawing/2014/main" id="{A7779880-5E02-1DB8-EA94-C86330794A8C}"/>
+              </a:ext>
+            </a:extLst>
+          </p:cNvPr>
+          <p:cNvSpPr>
+            <a:spLocks noGrp="1"/>
+          </p:cNvSpPr>
+          <p:nvPr>
+            <p:ph type="title"/>
+          </p:nvPr>
+        </p:nvSpPr>
+        <p:spPr/>
+        <p:txBody>
+          <a:bodyPr/>
+          <a:lstStyle/>
+          <a:p>
+            <a:r>
+              <a:rPr lang="en-US" dirty="0"/>
+              <a:t>Como </a:t>
+            </a:r>
+            <a:r>
+              <a:rPr lang="en-US" dirty="0" err="1"/>
+              <a:t>representar</a:t>
+            </a:r>
+            <a:r>
+              <a:rPr lang="en-US" dirty="0"/>
+              <a:t> </a:t>
+            </a:r>
+            <a:r>
+              <a:rPr lang="en-US" dirty="0" err="1"/>
+              <a:t>os</a:t>
+            </a:r>
+            <a:r>
+              <a:rPr lang="en-US" dirty="0"/>
+              <a:t> </a:t>
+            </a:r>
+            <a:r>
+              <a:rPr lang="en-US" i="1" dirty="0"/>
+              <a:t>clusters</a:t>
+            </a:r>
+            <a:r>
+              <a:rPr lang="en-US" dirty="0"/>
+              <a:t>?</a:t>
+            </a:r>
+          </a:p>
+        </p:txBody>
+      </p:sp>
+      <mc:AlternateContent xmlns:mc="http://schemas.openxmlformats.org/markup-compatibility/2006">
+        <mc:Choice xmlns:a14="http://schemas.microsoft.com/office/drawing/2010/main" Requires="a14">
+          <p:sp>
+            <p:nvSpPr>
+              <p:cNvPr id="3" name="Espaço Reservado para Conteúdo 2">
+                <a:extLst>
+                  <a:ext uri="{FF2B5EF4-FFF2-40B4-BE49-F238E27FC236}">
+                    <a16:creationId xmlns:a16="http://schemas.microsoft.com/office/drawing/2014/main" id="{A72472E5-6211-3EFD-BA89-06782640C939}"/>
+                  </a:ext>
+                </a:extLst>
+              </p:cNvPr>
+              <p:cNvSpPr>
+                <a:spLocks noGrp="1"/>
+              </p:cNvSpPr>
+              <p:nvPr>
+                <p:ph idx="1"/>
+              </p:nvPr>
+            </p:nvSpPr>
+            <p:spPr>
+              <a:xfrm>
+                <a:off x="5072743" y="1825624"/>
+                <a:ext cx="7119257" cy="5032375"/>
+              </a:xfrm>
+            </p:spPr>
+            <p:txBody>
+              <a:bodyPr>
+                <a:normAutofit/>
+              </a:bodyPr>
+              <a:lstStyle/>
+              <a:p>
+                <a:r>
+                  <a:rPr lang="pt-BR" dirty="0"/>
+                  <a:t>Por exemplo, suponhamos os seguintes </a:t>
+                </a:r>
+                <a:r>
+                  <a:rPr lang="pt-BR" b="1" dirty="0"/>
+                  <a:t>vetores de atributos </a:t>
+                </a:r>
+                <a:r>
+                  <a:rPr lang="pt-BR" dirty="0"/>
+                  <a:t>em um espaço bidimensional, </a:t>
+                </a:r>
+                <a14:m>
+                  <m:oMath xmlns:m="http://schemas.openxmlformats.org/officeDocument/2006/math">
+                    <m:sSub>
+                      <m:sSubPr>
+                        <m:ctrlPr>
+                          <a:rPr lang="pt-BR" i="1" smtClean="0">
+                            <a:latin typeface="Cambria Math" panose="02040503050406030204" pitchFamily="18" charset="0"/>
+                          </a:rPr>
+                        </m:ctrlPr>
+                      </m:sSubPr>
+                      <m:e>
+                        <m:r>
+                          <a:rPr lang="pt-BR" b="0" i="1" smtClean="0">
+                            <a:latin typeface="Cambria Math" panose="02040503050406030204" pitchFamily="18" charset="0"/>
+                          </a:rPr>
+                          <m:t>𝑥</m:t>
+                        </m:r>
+                      </m:e>
+                      <m:sub>
+                        <m:r>
+                          <a:rPr lang="pt-BR" b="0" i="1" smtClean="0">
+                            <a:latin typeface="Cambria Math" panose="02040503050406030204" pitchFamily="18" charset="0"/>
+                          </a:rPr>
+                          <m:t>1</m:t>
+                        </m:r>
+                      </m:sub>
+                    </m:sSub>
+                  </m:oMath>
+                </a14:m>
+                <a:r>
+                  <a:rPr lang="pt-BR" i="1" dirty="0"/>
+                  <a:t> </a:t>
+                </a:r>
+                <a:r>
+                  <a:rPr lang="pt-BR" dirty="0"/>
+                  <a:t>e </a:t>
+                </a:r>
+                <a14:m>
+                  <m:oMath xmlns:m="http://schemas.openxmlformats.org/officeDocument/2006/math">
+                    <m:sSub>
+                      <m:sSubPr>
+                        <m:ctrlPr>
+                          <a:rPr lang="pt-BR" i="1">
+                            <a:latin typeface="Cambria Math" panose="02040503050406030204" pitchFamily="18" charset="0"/>
+                          </a:rPr>
+                        </m:ctrlPr>
+                      </m:sSubPr>
+                      <m:e>
+                        <m:r>
+                          <a:rPr lang="pt-BR" i="1">
+                            <a:latin typeface="Cambria Math" panose="02040503050406030204" pitchFamily="18" charset="0"/>
+                          </a:rPr>
+                          <m:t>𝑥</m:t>
+                        </m:r>
+                      </m:e>
+                      <m:sub>
+                        <m:r>
+                          <a:rPr lang="pt-BR" b="0" i="1" smtClean="0">
+                            <a:latin typeface="Cambria Math" panose="02040503050406030204" pitchFamily="18" charset="0"/>
+                          </a:rPr>
+                          <m:t>2</m:t>
+                        </m:r>
+                      </m:sub>
+                    </m:sSub>
+                  </m:oMath>
+                </a14:m>
+                <a:r>
+                  <a:rPr lang="pt-BR" dirty="0"/>
+                  <a:t>: (2, 5), (1, 4), (3, 6).</a:t>
+                </a:r>
+              </a:p>
+              <a:p>
+                <a:r>
+                  <a:rPr lang="pt-BR" dirty="0"/>
+                  <a:t>Nesse caso, o </a:t>
+                </a:r>
+                <a:r>
+                  <a:rPr lang="pt-BR" b="1" dirty="0"/>
+                  <a:t>centroide</a:t>
+                </a:r>
+                <a:r>
+                  <a:rPr lang="pt-BR" dirty="0"/>
+                  <a:t> é representado pelo vetor (2, 5), pois</a:t>
+                </a:r>
+                <a:endParaRPr lang="en-US" dirty="0"/>
+              </a:p>
+              <a:p>
+                <a:pPr lvl="1">
+                  <a:buFont typeface="Wingdings" panose="05000000000000000000" pitchFamily="2" charset="2"/>
+                  <a:buChar char="§"/>
+                </a:pPr>
+                <a:r>
+                  <a:rPr lang="pt-BR" dirty="0"/>
+                  <a:t>A média do primeiro atributo é  </a:t>
+                </a:r>
+                <a14:m>
+                  <m:oMath xmlns:m="http://schemas.openxmlformats.org/officeDocument/2006/math">
+                    <m:f>
+                      <m:fPr>
+                        <m:ctrlPr>
+                          <a:rPr lang="pt-BR" smtClean="0">
+                            <a:latin typeface="Cambria Math" panose="02040503050406030204" pitchFamily="18" charset="0"/>
+                          </a:rPr>
+                        </m:ctrlPr>
+                      </m:fPr>
+                      <m:num>
+                        <m:r>
+                          <a:rPr lang="pt-BR" b="0" i="0" smtClean="0">
+                            <a:latin typeface="Cambria Math" panose="02040503050406030204" pitchFamily="18" charset="0"/>
+                          </a:rPr>
+                          <m:t>2+1+3</m:t>
+                        </m:r>
+                      </m:num>
+                      <m:den>
+                        <m:r>
+                          <a:rPr lang="pt-BR" b="0" i="0" smtClean="0">
+                            <a:latin typeface="Cambria Math" panose="02040503050406030204" pitchFamily="18" charset="0"/>
+                          </a:rPr>
+                          <m:t>3</m:t>
+                        </m:r>
+                      </m:den>
+                    </m:f>
+                    <m:r>
+                      <a:rPr lang="pt-BR" b="0" i="0" smtClean="0">
+                        <a:latin typeface="Cambria Math" panose="02040503050406030204" pitchFamily="18" charset="0"/>
+                      </a:rPr>
+                      <m:t>=2</m:t>
+                    </m:r>
+                  </m:oMath>
+                </a14:m>
+                <a:r>
+                  <a:rPr lang="pt-BR" b="0" dirty="0"/>
+                  <a:t>.</a:t>
+                </a:r>
+              </a:p>
+              <a:p>
+                <a:pPr lvl="1">
+                  <a:buFont typeface="Wingdings" panose="05000000000000000000" pitchFamily="2" charset="2"/>
+                  <a:buChar char="§"/>
+                </a:pPr>
+                <a:r>
+                  <a:rPr lang="pt-BR" dirty="0"/>
+                  <a:t>A média do segundo atributo é </a:t>
+                </a:r>
+                <a14:m>
+                  <m:oMath xmlns:m="http://schemas.openxmlformats.org/officeDocument/2006/math">
+                    <m:f>
+                      <m:fPr>
+                        <m:ctrlPr>
+                          <a:rPr lang="pt-BR">
+                            <a:latin typeface="Cambria Math" panose="02040503050406030204" pitchFamily="18" charset="0"/>
+                          </a:rPr>
+                        </m:ctrlPr>
+                      </m:fPr>
+                      <m:num>
+                        <m:r>
+                          <a:rPr lang="pt-BR" b="0" i="0" smtClean="0">
+                            <a:latin typeface="Cambria Math" panose="02040503050406030204" pitchFamily="18" charset="0"/>
+                          </a:rPr>
+                          <m:t>5</m:t>
+                        </m:r>
+                        <m:r>
+                          <a:rPr lang="pt-BR" i="0">
+                            <a:latin typeface="Cambria Math" panose="02040503050406030204" pitchFamily="18" charset="0"/>
+                          </a:rPr>
+                          <m:t>+</m:t>
+                        </m:r>
+                        <m:r>
+                          <a:rPr lang="pt-BR" b="0" i="0" smtClean="0">
+                            <a:latin typeface="Cambria Math" panose="02040503050406030204" pitchFamily="18" charset="0"/>
+                          </a:rPr>
+                          <m:t>4</m:t>
+                        </m:r>
+                        <m:r>
+                          <a:rPr lang="pt-BR" i="0">
+                            <a:latin typeface="Cambria Math" panose="02040503050406030204" pitchFamily="18" charset="0"/>
+                          </a:rPr>
+                          <m:t>+</m:t>
+                        </m:r>
+                        <m:r>
+                          <a:rPr lang="pt-BR" b="0" i="0" smtClean="0">
+                            <a:latin typeface="Cambria Math" panose="02040503050406030204" pitchFamily="18" charset="0"/>
+                          </a:rPr>
+                          <m:t>6</m:t>
+                        </m:r>
+                      </m:num>
+                      <m:den>
+                        <m:r>
+                          <a:rPr lang="pt-BR" i="0">
+                            <a:latin typeface="Cambria Math" panose="02040503050406030204" pitchFamily="18" charset="0"/>
+                          </a:rPr>
+                          <m:t>3</m:t>
+                        </m:r>
+                      </m:den>
+                    </m:f>
+                    <m:r>
+                      <a:rPr lang="pt-BR" i="0">
+                        <a:latin typeface="Cambria Math" panose="02040503050406030204" pitchFamily="18" charset="0"/>
+                      </a:rPr>
+                      <m:t>=</m:t>
+                    </m:r>
+                    <m:r>
+                      <a:rPr lang="pt-BR" b="0" i="0" smtClean="0">
+                        <a:latin typeface="Cambria Math" panose="02040503050406030204" pitchFamily="18" charset="0"/>
+                      </a:rPr>
+                      <m:t>5</m:t>
+                    </m:r>
+                  </m:oMath>
+                </a14:m>
+                <a:r>
+                  <a:rPr lang="pt-BR" dirty="0"/>
+                  <a:t>.</a:t>
+                </a:r>
+              </a:p>
+              <a:p>
+                <a:r>
+                  <a:rPr lang="pt-BR" b="1" dirty="0">
+                    <a:solidFill>
+                      <a:srgbClr val="7030A0"/>
+                    </a:solidFill>
+                  </a:rPr>
+                  <a:t>OBS</a:t>
+                </a:r>
+                <a:r>
+                  <a:rPr lang="pt-BR" dirty="0"/>
+                  <a:t>.: Em geral, aplicamos clusterização apenas a atributos numéricos.</a:t>
+                </a:r>
+              </a:p>
+              <a:p>
+                <a:pPr lvl="1">
+                  <a:buFont typeface="Wingdings" panose="05000000000000000000" pitchFamily="2" charset="2"/>
+                  <a:buChar char="§"/>
+                </a:pPr>
+                <a:r>
+                  <a:rPr lang="pt-BR" dirty="0"/>
+                  <a:t>Existem algoritmos de clusterização específicos para dados categóricos: </a:t>
+                </a:r>
+                <a:r>
+                  <a:rPr lang="pt-BR" i="1" dirty="0"/>
+                  <a:t>k-</a:t>
+                </a:r>
+                <a:r>
+                  <a:rPr lang="pt-BR" i="1" dirty="0" err="1"/>
+                  <a:t>modes</a:t>
+                </a:r>
+                <a:r>
+                  <a:rPr lang="pt-BR" i="1" dirty="0"/>
+                  <a:t> </a:t>
+                </a:r>
+                <a:r>
+                  <a:rPr lang="pt-BR" dirty="0"/>
+                  <a:t>e </a:t>
+                </a:r>
+                <a:r>
+                  <a:rPr lang="en-US" i="1" dirty="0"/>
+                  <a:t>k-prototypes</a:t>
+                </a:r>
+                <a:r>
+                  <a:rPr lang="en-US" dirty="0"/>
+                  <a:t>.</a:t>
+                </a:r>
+                <a:endParaRPr lang="pt-BR" dirty="0"/>
+              </a:p>
+            </p:txBody>
+          </p:sp>
+        </mc:Choice>
+        <mc:Fallback>
+          <p:sp>
+            <p:nvSpPr>
+              <p:cNvPr id="3" name="Espaço Reservado para Conteúdo 2">
+                <a:extLst>
+                  <a:ext uri="{FF2B5EF4-FFF2-40B4-BE49-F238E27FC236}">
+                    <a16:creationId xmlns:a16="http://schemas.microsoft.com/office/drawing/2014/main" id="{A72472E5-6211-3EFD-BA89-06782640C939}"/>
+                  </a:ext>
+                </a:extLst>
+              </p:cNvPr>
+              <p:cNvSpPr>
+                <a:spLocks noGrp="1" noRot="1" noChangeAspect="1" noMove="1" noResize="1" noEditPoints="1" noAdjustHandles="1" noChangeArrowheads="1" noChangeShapeType="1" noTextEdit="1"/>
+              </p:cNvSpPr>
+              <p:nvPr>
+                <p:ph idx="1"/>
+              </p:nvPr>
+            </p:nvSpPr>
+            <p:spPr>
+              <a:xfrm>
+                <a:off x="5072743" y="1825624"/>
+                <a:ext cx="7119257" cy="5032375"/>
+              </a:xfrm>
+              <a:blipFill>
+                <a:blip r:embed="rId3"/>
+                <a:stretch>
+                  <a:fillRect l="-1541" t="-1937"/>
+                </a:stretch>
+              </a:blipFill>
+            </p:spPr>
+            <p:txBody>
+              <a:bodyPr/>
+              <a:lstStyle/>
+              <a:p>
+                <a:r>
+                  <a:rPr lang="en-US">
+                    <a:noFill/>
+                  </a:rPr>
+                  <a:t> </a:t>
+                </a:r>
+              </a:p>
+            </p:txBody>
+          </p:sp>
+        </mc:Fallback>
+      </mc:AlternateContent>
+      <p:pic>
+        <p:nvPicPr>
+          <p:cNvPr id="4" name="Picture 3" descr="K Means Clustering no Aprendizado de Máquinas — Aprendizado de Máquina —  DATA SCIENCE">
+            <a:extLst>
+              <a:ext uri="{FF2B5EF4-FFF2-40B4-BE49-F238E27FC236}">
+                <a16:creationId xmlns:a16="http://schemas.microsoft.com/office/drawing/2014/main" id="{E728BEA3-C89C-08D5-CE28-8BD1C00DAD53}"/>
+              </a:ext>
+            </a:extLst>
+          </p:cNvPr>
+          <p:cNvPicPr>
+            <a:picLocks noChangeAspect="1" noChangeArrowheads="1"/>
+          </p:cNvPicPr>
+          <p:nvPr/>
+        </p:nvPicPr>
+        <p:blipFill rotWithShape="1">
+          <a:blip r:embed="rId4">
+            <a:extLst>
+              <a:ext uri="{28A0092B-C50C-407E-A947-70E740481C1C}">
+                <a14:useLocalDpi xmlns:a14="http://schemas.microsoft.com/office/drawing/2010/main" val="0"/>
+              </a:ext>
+            </a:extLst>
+          </a:blip>
+          <a:srcRect l="56603" t="18889" r="3388" b="36825"/>
+          <a:stretch/>
+        </p:blipFill>
+        <p:spPr bwMode="auto">
+          <a:xfrm>
+            <a:off x="838200" y="2111829"/>
+            <a:ext cx="3831771" cy="3037114"/>
+          </a:xfrm>
+          <a:prstGeom prst="rect">
+            <a:avLst/>
+          </a:prstGeom>
+          <a:noFill/>
+          <a:extLst>
+            <a:ext uri="{909E8E84-426E-40DD-AFC4-6F175D3DCCD1}">
+              <a14:hiddenFill xmlns:a14="http://schemas.microsoft.com/office/drawing/2010/main">
+                <a:solidFill>
+                  <a:srgbClr val="FFFFFF"/>
+                </a:solidFill>
+              </a14:hiddenFill>
+            </a:ext>
+          </a:extLst>
+        </p:spPr>
+      </p:pic>
+    </p:spTree>
+    <p:extLst>
+      <p:ext uri="{BB962C8B-B14F-4D97-AF65-F5344CB8AC3E}">
+        <p14:creationId xmlns:p14="http://schemas.microsoft.com/office/powerpoint/2010/main" val="3453578561"/>
+      </p:ext>
+    </p:extLst>
+  </p:cSld>
+  <p:clrMapOvr>
+    <a:masterClrMapping/>
+  </p:clrMapOvr>
+</p:sld>
+</file>
+
+<file path=ppt/slides/slide12.xml><?xml version="1.0" encoding="utf-8"?>
+<p:sld xmlns:a="http://schemas.openxmlformats.org/drawingml/2006/main" xmlns:r="http://schemas.openxmlformats.org/officeDocument/2006/relationships" xmlns:p="http://schemas.openxmlformats.org/presentationml/2006/main">
+  <p:cSld>
+    <p:spTree>
+      <p:nvGrpSpPr>
+        <p:cNvPr id="1" name=""/>
+        <p:cNvGrpSpPr/>
+        <p:nvPr/>
+      </p:nvGrpSpPr>
+      <p:grpSpPr>
+        <a:xfrm>
+          <a:off x="0" y="0"/>
+          <a:ext cx="0" cy="0"/>
+          <a:chOff x="0" y="0"/>
+          <a:chExt cx="0" cy="0"/>
+        </a:xfrm>
+      </p:grpSpPr>
+      <p:sp>
+        <p:nvSpPr>
+          <p:cNvPr id="2" name="Title 1">
+            <a:extLst>
+              <a:ext uri="{FF2B5EF4-FFF2-40B4-BE49-F238E27FC236}">
+                <a16:creationId xmlns:a16="http://schemas.microsoft.com/office/drawing/2014/main" id="{D87F6E31-B0DF-F3EC-D348-0D4E93DD1974}"/>
+              </a:ext>
+            </a:extLst>
+          </p:cNvPr>
+          <p:cNvSpPr>
+            <a:spLocks noGrp="1"/>
+          </p:cNvSpPr>
+          <p:nvPr>
+            <p:ph type="title"/>
+          </p:nvPr>
+        </p:nvSpPr>
+        <p:spPr/>
+        <p:txBody>
+          <a:bodyPr/>
+          <a:lstStyle/>
+          <a:p>
+            <a:endParaRPr lang="en-US"/>
+          </a:p>
+        </p:txBody>
+      </p:sp>
+      <p:sp>
+        <p:nvSpPr>
+          <p:cNvPr id="3" name="Content Placeholder 2">
+            <a:extLst>
+              <a:ext uri="{FF2B5EF4-FFF2-40B4-BE49-F238E27FC236}">
+                <a16:creationId xmlns:a16="http://schemas.microsoft.com/office/drawing/2014/main" id="{5007CCEC-CA32-01B4-A9B5-F81A83FF3ECA}"/>
+              </a:ext>
+            </a:extLst>
+          </p:cNvPr>
+          <p:cNvSpPr>
+            <a:spLocks noGrp="1"/>
+          </p:cNvSpPr>
+          <p:nvPr>
+            <p:ph idx="1"/>
+          </p:nvPr>
+        </p:nvSpPr>
+        <p:spPr/>
+        <p:txBody>
+          <a:bodyPr>
+            <a:normAutofit/>
+          </a:bodyPr>
+          <a:lstStyle/>
+          <a:p>
+            <a:r>
+              <a:rPr lang="pt-BR" sz="5400" b="1" dirty="0">
+                <a:solidFill>
+                  <a:srgbClr val="FF0000"/>
+                </a:solidFill>
+              </a:rPr>
+              <a:t>PAREI </a:t>
+            </a:r>
+            <a:r>
+              <a:rPr lang="pt-BR" sz="5400" b="1" dirty="0" err="1">
+                <a:solidFill>
+                  <a:srgbClr val="FF0000"/>
+                </a:solidFill>
+              </a:rPr>
+              <a:t>AQUi</a:t>
+            </a:r>
+            <a:r>
+              <a:rPr lang="pt-BR" sz="5400" b="1" dirty="0">
+                <a:solidFill>
+                  <a:srgbClr val="FF0000"/>
+                </a:solidFill>
+              </a:rPr>
+              <a:t>!!!!</a:t>
+            </a:r>
+            <a:endParaRPr lang="en-US" sz="5400" b="1" dirty="0">
+              <a:solidFill>
+                <a:srgbClr val="FF0000"/>
+              </a:solidFill>
+            </a:endParaRPr>
+          </a:p>
+        </p:txBody>
+      </p:sp>
+    </p:spTree>
+    <p:extLst>
+      <p:ext uri="{BB962C8B-B14F-4D97-AF65-F5344CB8AC3E}">
+        <p14:creationId xmlns:p14="http://schemas.microsoft.com/office/powerpoint/2010/main" val="2112245231"/>
+      </p:ext>
+    </p:extLst>
+  </p:cSld>
+  <p:clrMapOvr>
+    <a:masterClrMapping/>
+  </p:clrMapOvr>
+</p:sld>
+</file>
+
+<file path=ppt/slides/slide13.xml><?xml version="1.0" encoding="utf-8"?>
+<p:sld xmlns:a="http://schemas.openxmlformats.org/drawingml/2006/main" xmlns:r="http://schemas.openxmlformats.org/officeDocument/2006/relationships" xmlns:p="http://schemas.openxmlformats.org/presentationml/2006/main">
+  <p:cSld>
+    <p:spTree>
+      <p:nvGrpSpPr>
+        <p:cNvPr id="1" name=""/>
+        <p:cNvGrpSpPr/>
+        <p:nvPr/>
+      </p:nvGrpSpPr>
+      <p:grpSpPr>
+        <a:xfrm>
+          <a:off x="0" y="0"/>
+          <a:ext cx="0" cy="0"/>
+          <a:chOff x="0" y="0"/>
+          <a:chExt cx="0" cy="0"/>
+        </a:xfrm>
+      </p:grpSpPr>
+      <p:sp>
+        <p:nvSpPr>
+          <p:cNvPr id="2" name="Título 1"/>
+          <p:cNvSpPr>
+            <a:spLocks noGrp="1"/>
+          </p:cNvSpPr>
+          <p:nvPr>
+            <p:ph type="title"/>
+          </p:nvPr>
+        </p:nvSpPr>
+        <p:spPr/>
+        <p:txBody>
+          <a:bodyPr/>
+          <a:lstStyle/>
+          <a:p>
+            <a:r>
+              <a:rPr lang="pt-BR" dirty="0"/>
+              <a:t>Quantos devem ser os </a:t>
+            </a:r>
+            <a:r>
+              <a:rPr lang="pt-BR" i="1" dirty="0"/>
+              <a:t>clusters</a:t>
+            </a:r>
+            <a:r>
+              <a:rPr lang="pt-BR" dirty="0"/>
+              <a:t>?</a:t>
             </a:r>
             <a:endParaRPr lang="en-US" dirty="0"/>
           </a:p>
@@ -6037,16 +7284,48 @@
           <a:lstStyle/>
           <a:p>
             <a:r>
-              <a:rPr lang="pt-BR" i="1" dirty="0"/>
+              <a:rPr lang="pt-BR" dirty="0"/>
               <a:t>Os clusters </a:t>
             </a:r>
             <a:r>
-              <a:rPr lang="pt-BR" b="1" i="1" dirty="0"/>
+              <a:rPr lang="pt-BR" b="1" dirty="0"/>
               <a:t>não devem se sobrepor</a:t>
             </a:r>
             <a:r>
-              <a:rPr lang="pt-BR" i="1" dirty="0"/>
+              <a:rPr lang="pt-BR" dirty="0"/>
               <a:t>: </a:t>
+            </a:r>
+            <a:r>
+              <a:rPr lang="pt-BR" b="1" dirty="0">
+                <a:solidFill>
+                  <a:srgbClr val="00B050"/>
+                </a:solidFill>
+              </a:rPr>
+              <a:t>cada exemplo</a:t>
+            </a:r>
+            <a:r>
+              <a:rPr lang="pt-BR" dirty="0"/>
+              <a:t> deve </a:t>
+            </a:r>
+            <a:r>
+              <a:rPr lang="pt-BR" b="1" dirty="0">
+                <a:solidFill>
+                  <a:srgbClr val="00B050"/>
+                </a:solidFill>
+              </a:rPr>
+              <a:t>pertencer</a:t>
+            </a:r>
+            <a:r>
+              <a:rPr lang="pt-BR" dirty="0"/>
+              <a:t> a </a:t>
+            </a:r>
+            <a:r>
+              <a:rPr lang="pt-BR" b="1" dirty="0">
+                <a:solidFill>
+                  <a:srgbClr val="00B050"/>
+                </a:solidFill>
+              </a:rPr>
+              <a:t>um e apenas a um </a:t>
             </a:r>
             <a:r>
               <a:rPr lang="pt-BR" b="1" i="1" dirty="0">
@@ -6054,44 +7333,20 @@
                   <a:srgbClr val="00B050"/>
                 </a:solidFill>
               </a:rPr>
-              <a:t>cada exemplo</a:t>
-            </a:r>
-            <a:r>
-              <a:rPr lang="pt-BR" i="1" dirty="0"/>
-              <a:t> deve </a:t>
-            </a:r>
-            <a:r>
-              <a:rPr lang="pt-BR" b="1" i="1" dirty="0">
-                <a:solidFill>
-                  <a:srgbClr val="00B050"/>
-                </a:solidFill>
-              </a:rPr>
-              <a:t>pertencer</a:t>
-            </a:r>
-            <a:r>
-              <a:rPr lang="pt-BR" i="1" dirty="0"/>
-              <a:t> a </a:t>
-            </a:r>
-            <a:r>
-              <a:rPr lang="pt-BR" b="1" i="1" dirty="0">
-                <a:solidFill>
-                  <a:srgbClr val="00B050"/>
-                </a:solidFill>
-              </a:rPr>
-              <a:t>um e apenas a um cluster</a:t>
-            </a:r>
-            <a:r>
-              <a:rPr lang="pt-BR" i="1" dirty="0"/>
+              <a:t>cluster</a:t>
+            </a:r>
+            <a:r>
+              <a:rPr lang="pt-BR" dirty="0"/>
               <a:t>. </a:t>
             </a:r>
           </a:p>
           <a:p>
             <a:r>
-              <a:rPr lang="pt-BR" i="1" dirty="0"/>
+              <a:rPr lang="pt-BR" dirty="0"/>
               <a:t>Porém, </a:t>
             </a:r>
             <a:r>
-              <a:rPr lang="pt-BR" b="1" i="1" dirty="0">
+              <a:rPr lang="pt-BR" b="1" dirty="0">
                 <a:solidFill>
                   <a:srgbClr val="0070C0"/>
                 </a:solidFill>
@@ -6099,11 +7354,11 @@
               <a:t>dentro do mesmo cluster</a:t>
             </a:r>
             <a:r>
-              <a:rPr lang="pt-BR" i="1" dirty="0"/>
+              <a:rPr lang="pt-BR" dirty="0"/>
               <a:t>, os </a:t>
             </a:r>
             <a:r>
-              <a:rPr lang="pt-BR" b="1" i="1" dirty="0">
+              <a:rPr lang="pt-BR" b="1" dirty="0">
                 <a:solidFill>
                   <a:srgbClr val="0070C0"/>
                 </a:solidFill>
@@ -6111,11 +7366,11 @@
               <a:t>exemplos</a:t>
             </a:r>
             <a:r>
-              <a:rPr lang="pt-BR" i="1" dirty="0"/>
+              <a:rPr lang="pt-BR" dirty="0"/>
               <a:t> devem estar relativamente </a:t>
             </a:r>
             <a:r>
-              <a:rPr lang="pt-BR" b="1" i="1" dirty="0">
+              <a:rPr lang="pt-BR" b="1" dirty="0">
                 <a:solidFill>
                   <a:srgbClr val="0070C0"/>
                 </a:solidFill>
@@ -6123,11 +7378,11 @@
               <a:t>próximos</a:t>
             </a:r>
             <a:r>
-              <a:rPr lang="pt-BR" i="1" dirty="0"/>
+              <a:rPr lang="pt-BR" dirty="0"/>
               <a:t> uns dos outros e </a:t>
             </a:r>
             <a:r>
-              <a:rPr lang="pt-BR" b="1" i="1" dirty="0">
+              <a:rPr lang="pt-BR" b="1" dirty="0">
                 <a:solidFill>
                   <a:srgbClr val="7030A0"/>
                 </a:solidFill>
@@ -6135,11 +7390,11 @@
               <a:t>distantes</a:t>
             </a:r>
             <a:r>
-              <a:rPr lang="pt-BR" i="1" dirty="0"/>
+              <a:rPr lang="pt-BR" dirty="0"/>
               <a:t> dos </a:t>
             </a:r>
             <a:r>
-              <a:rPr lang="pt-BR" b="1" i="1" dirty="0">
+              <a:rPr lang="pt-BR" b="1" dirty="0">
                 <a:solidFill>
                   <a:srgbClr val="7030A0"/>
                 </a:solidFill>
@@ -6147,19 +7402,19 @@
               <a:t>exemplos dos outros clusters</a:t>
             </a:r>
             <a:r>
-              <a:rPr lang="pt-BR" i="1" dirty="0"/>
+              <a:rPr lang="pt-BR" dirty="0"/>
               <a:t>.</a:t>
             </a:r>
           </a:p>
           <a:p>
             <a:r>
-              <a:rPr lang="pt-BR" i="1" dirty="0"/>
+              <a:rPr lang="pt-BR" dirty="0"/>
               <a:t>Aí surge uma dúvida. </a:t>
             </a:r>
           </a:p>
           <a:p>
             <a:r>
-              <a:rPr lang="pt-BR" i="1" dirty="0"/>
+              <a:rPr lang="pt-BR" dirty="0"/>
               <a:t>Quantos clusters um conjunto de exemplos contém?</a:t>
             </a:r>
           </a:p>
@@ -6217,7 +7472,117 @@
 </p:sld>
 </file>
 
-<file path=ppt/slides/slide11.xml><?xml version="1.0" encoding="utf-8"?>
+<file path=ppt/slides/slide14.xml><?xml version="1.0" encoding="utf-8"?>
+<p:sld xmlns:a="http://schemas.openxmlformats.org/drawingml/2006/main" xmlns:r="http://schemas.openxmlformats.org/officeDocument/2006/relationships" xmlns:p="http://schemas.openxmlformats.org/presentationml/2006/main">
+  <p:cSld>
+    <p:spTree>
+      <p:nvGrpSpPr>
+        <p:cNvPr id="1" name=""/>
+        <p:cNvGrpSpPr/>
+        <p:nvPr/>
+      </p:nvGrpSpPr>
+      <p:grpSpPr>
+        <a:xfrm>
+          <a:off x="0" y="0"/>
+          <a:ext cx="0" cy="0"/>
+          <a:chOff x="0" y="0"/>
+          <a:chExt cx="0" cy="0"/>
+        </a:xfrm>
+      </p:grpSpPr>
+      <p:sp>
+        <p:nvSpPr>
+          <p:cNvPr id="2" name="Title 1">
+            <a:extLst>
+              <a:ext uri="{FF2B5EF4-FFF2-40B4-BE49-F238E27FC236}">
+                <a16:creationId xmlns:a16="http://schemas.microsoft.com/office/drawing/2014/main" id="{0719C974-9A37-ED60-45B8-7CF90E038097}"/>
+              </a:ext>
+            </a:extLst>
+          </p:cNvPr>
+          <p:cNvSpPr>
+            <a:spLocks noGrp="1"/>
+          </p:cNvSpPr>
+          <p:nvPr>
+            <p:ph type="title"/>
+          </p:nvPr>
+        </p:nvSpPr>
+        <p:spPr/>
+        <p:txBody>
+          <a:bodyPr/>
+          <a:lstStyle/>
+          <a:p>
+            <a:endParaRPr lang="en-US"/>
+          </a:p>
+        </p:txBody>
+      </p:sp>
+      <p:sp>
+        <p:nvSpPr>
+          <p:cNvPr id="3" name="Content Placeholder 2">
+            <a:extLst>
+              <a:ext uri="{FF2B5EF4-FFF2-40B4-BE49-F238E27FC236}">
+                <a16:creationId xmlns:a16="http://schemas.microsoft.com/office/drawing/2014/main" id="{D812A04D-0F4A-CB81-D7DF-C4B0B13163E8}"/>
+              </a:ext>
+            </a:extLst>
+          </p:cNvPr>
+          <p:cNvSpPr>
+            <a:spLocks noGrp="1"/>
+          </p:cNvSpPr>
+          <p:nvPr>
+            <p:ph idx="1"/>
+          </p:nvPr>
+        </p:nvSpPr>
+        <p:spPr/>
+        <p:txBody>
+          <a:bodyPr>
+            <a:normAutofit/>
+          </a:bodyPr>
+          <a:lstStyle/>
+          <a:p>
+            <a:r>
+              <a:rPr lang="pt-BR" sz="6000" b="1" dirty="0">
+                <a:solidFill>
+                  <a:srgbClr val="FF0000"/>
+                </a:solidFill>
+              </a:rPr>
+              <a:t>Quais as formas usadas para definir o melhor número de </a:t>
+            </a:r>
+            <a:r>
+              <a:rPr lang="pt-BR" sz="6000" b="1" dirty="0" err="1">
+                <a:solidFill>
+                  <a:srgbClr val="FF0000"/>
+                </a:solidFill>
+              </a:rPr>
+              <a:t>clsuters</a:t>
+            </a:r>
+            <a:r>
+              <a:rPr lang="pt-BR" sz="6000" b="1" dirty="0">
+                <a:solidFill>
+                  <a:srgbClr val="FF0000"/>
+                </a:solidFill>
+              </a:rPr>
+              <a:t>???</a:t>
+            </a:r>
+            <a:endParaRPr lang="en-US" sz="6000" b="1" dirty="0">
+              <a:solidFill>
+                <a:srgbClr val="FF0000"/>
+              </a:solidFill>
+            </a:endParaRPr>
+          </a:p>
+        </p:txBody>
+      </p:sp>
+    </p:spTree>
+    <p:extLst>
+      <p:ext uri="{BB962C8B-B14F-4D97-AF65-F5344CB8AC3E}">
+        <p14:creationId xmlns:p14="http://schemas.microsoft.com/office/powerpoint/2010/main" val="2912513465"/>
+      </p:ext>
+    </p:extLst>
+  </p:cSld>
+  <p:clrMapOvr>
+    <a:masterClrMapping/>
+  </p:clrMapOvr>
+</p:sld>
+</file>
+
+<file path=ppt/slides/slide15.xml><?xml version="1.0" encoding="utf-8"?>
 <p:sld xmlns:a="http://schemas.openxmlformats.org/drawingml/2006/main" xmlns:r="http://schemas.openxmlformats.org/officeDocument/2006/relationships" xmlns:p="http://schemas.openxmlformats.org/presentationml/2006/main">
   <p:cSld>
     <p:spTree>
@@ -6418,7 +7783,7 @@
 </p:sld>
 </file>
 
-<file path=ppt/slides/slide12.xml><?xml version="1.0" encoding="utf-8"?>
+<file path=ppt/slides/slide16.xml><?xml version="1.0" encoding="utf-8"?>
 <p:sld xmlns:a="http://schemas.openxmlformats.org/drawingml/2006/main" xmlns:r="http://schemas.openxmlformats.org/officeDocument/2006/relationships" xmlns:p="http://schemas.openxmlformats.org/presentationml/2006/main">
   <p:cSld>
     <p:spTree>
@@ -6629,7 +7994,7 @@
 </p:sld>
 </file>
 
-<file path=ppt/slides/slide13.xml><?xml version="1.0" encoding="utf-8"?>
+<file path=ppt/slides/slide17.xml><?xml version="1.0" encoding="utf-8"?>
 <p:sld xmlns:a="http://schemas.openxmlformats.org/drawingml/2006/main" xmlns:r="http://schemas.openxmlformats.org/officeDocument/2006/relationships" xmlns:p="http://schemas.openxmlformats.org/presentationml/2006/main">
   <p:cSld>
     <p:spTree>
@@ -7563,7 +8928,7 @@
           <p:nvPr/>
         </p:nvPicPr>
         <p:blipFill rotWithShape="1">
-          <a:blip r:embed="rId3">
+          <a:blip r:embed="rId2">
             <a:extLst>
               <a:ext uri="{28A0092B-C50C-407E-A947-70E740481C1C}">
                 <a14:useLocalDpi xmlns:a14="http://schemas.microsoft.com/office/drawing/2010/main" val="0"/>
@@ -7606,7 +8971,7 @@
 </p:sld>
 </file>
 
-<file path=ppt/slides/slide14.xml><?xml version="1.0" encoding="utf-8"?>
+<file path=ppt/slides/slide18.xml><?xml version="1.0" encoding="utf-8"?>
 <p:sld xmlns:a="http://schemas.openxmlformats.org/drawingml/2006/main" xmlns:r="http://schemas.openxmlformats.org/officeDocument/2006/relationships" xmlns:p="http://schemas.openxmlformats.org/presentationml/2006/main">
   <p:cSld>
     <p:spTree>
@@ -8090,7 +9455,7 @@
 </p:sld>
 </file>
 
-<file path=ppt/slides/slide15.xml><?xml version="1.0" encoding="utf-8"?>
+<file path=ppt/slides/slide19.xml><?xml version="1.0" encoding="utf-8"?>
 <p:sld xmlns:a="http://schemas.openxmlformats.org/drawingml/2006/main" xmlns:r="http://schemas.openxmlformats.org/officeDocument/2006/relationships" xmlns:p="http://schemas.openxmlformats.org/presentationml/2006/main">
   <p:cSld>
     <p:spTree>
@@ -8490,7 +9855,193 @@
 </p:sld>
 </file>
 
-<file path=ppt/slides/slide16.xml><?xml version="1.0" encoding="utf-8"?>
+<file path=ppt/slides/slide2.xml><?xml version="1.0" encoding="utf-8"?>
+<p:sld xmlns:a="http://schemas.openxmlformats.org/drawingml/2006/main" xmlns:r="http://schemas.openxmlformats.org/officeDocument/2006/relationships" xmlns:p="http://schemas.openxmlformats.org/presentationml/2006/main">
+  <p:cSld>
+    <p:spTree>
+      <p:nvGrpSpPr>
+        <p:cNvPr id="1" name=""/>
+        <p:cNvGrpSpPr/>
+        <p:nvPr/>
+      </p:nvGrpSpPr>
+      <p:grpSpPr>
+        <a:xfrm>
+          <a:off x="0" y="0"/>
+          <a:ext cx="0" cy="0"/>
+          <a:chOff x="0" y="0"/>
+          <a:chExt cx="0" cy="0"/>
+        </a:xfrm>
+      </p:grpSpPr>
+      <p:sp>
+        <p:nvSpPr>
+          <p:cNvPr id="2" name="Título 1"/>
+          <p:cNvSpPr>
+            <a:spLocks noGrp="1"/>
+          </p:cNvSpPr>
+          <p:nvPr>
+            <p:ph type="title"/>
+          </p:nvPr>
+        </p:nvSpPr>
+        <p:spPr/>
+        <p:txBody>
+          <a:bodyPr/>
+          <a:lstStyle/>
+          <a:p>
+            <a:r>
+              <a:rPr lang="pt-BR" dirty="0"/>
+              <a:t>Recapitulando</a:t>
+            </a:r>
+            <a:endParaRPr lang="en-US" dirty="0"/>
+          </a:p>
+        </p:txBody>
+      </p:sp>
+      <p:sp>
+        <p:nvSpPr>
+          <p:cNvPr id="3" name="Espaço Reservado para Conteúdo 2"/>
+          <p:cNvSpPr>
+            <a:spLocks noGrp="1"/>
+          </p:cNvSpPr>
+          <p:nvPr>
+            <p:ph idx="1"/>
+          </p:nvPr>
+        </p:nvSpPr>
+        <p:spPr>
+          <a:xfrm>
+            <a:off x="838199" y="1825624"/>
+            <a:ext cx="11223172" cy="5032376"/>
+          </a:xfrm>
+        </p:spPr>
+        <p:txBody>
+          <a:bodyPr>
+            <a:normAutofit/>
+          </a:bodyPr>
+          <a:lstStyle/>
+          <a:p>
+            <a:r>
+              <a:rPr lang="pt-BR" dirty="0"/>
+              <a:t>Até o momento, todos os algoritmos que aprendemos seguiam o paradigma do aprendizado supervisionado.</a:t>
+            </a:r>
+          </a:p>
+          <a:p>
+            <a:r>
+              <a:rPr lang="pt-BR" dirty="0"/>
+              <a:t>Hoje, falaremos sobre </a:t>
+            </a:r>
+            <a:r>
+              <a:rPr lang="pt-BR" b="1" i="1" dirty="0"/>
+              <a:t>clustering</a:t>
+            </a:r>
+            <a:r>
+              <a:rPr lang="pt-BR" dirty="0"/>
+              <a:t>, que são algoritmos de </a:t>
+            </a:r>
+            <a:r>
+              <a:rPr lang="pt-BR" b="1" dirty="0"/>
+              <a:t>aprendizado não-supervisionado</a:t>
+            </a:r>
+            <a:r>
+              <a:rPr lang="pt-BR" dirty="0"/>
+              <a:t>.</a:t>
+            </a:r>
+          </a:p>
+          <a:p>
+            <a:pPr lvl="1">
+              <a:buFont typeface="Wingdings" panose="05000000000000000000" pitchFamily="2" charset="2"/>
+              <a:buChar char="§"/>
+            </a:pPr>
+            <a:r>
+              <a:rPr lang="pt-BR" dirty="0"/>
+              <a:t>Não temos rótulos, apenas atributos.</a:t>
+            </a:r>
+          </a:p>
+          <a:p>
+            <a:r>
+              <a:rPr lang="pt-BR" dirty="0"/>
+              <a:t>Eles visam criar agrupamentos de dados (chamados de </a:t>
+            </a:r>
+            <a:r>
+              <a:rPr lang="pt-BR" b="1" i="1" dirty="0"/>
+              <a:t>clusters</a:t>
+            </a:r>
+            <a:r>
+              <a:rPr lang="pt-BR" b="1" dirty="0"/>
+              <a:t> </a:t>
+            </a:r>
+            <a:r>
+              <a:rPr lang="pt-BR" dirty="0"/>
+              <a:t>ou</a:t>
+            </a:r>
+            <a:r>
+              <a:rPr lang="pt-BR" b="1" dirty="0"/>
+              <a:t> grupos</a:t>
+            </a:r>
+            <a:r>
+              <a:rPr lang="pt-BR" dirty="0"/>
+              <a:t>) segundo seu </a:t>
+            </a:r>
+            <a:r>
+              <a:rPr lang="pt-BR" b="1" dirty="0">
+                <a:solidFill>
+                  <a:srgbClr val="00B050"/>
+                </a:solidFill>
+              </a:rPr>
+              <a:t>grau de semelhança</a:t>
+            </a:r>
+            <a:r>
+              <a:rPr lang="pt-BR" dirty="0"/>
+              <a:t>. </a:t>
+            </a:r>
+          </a:p>
+          <a:p>
+            <a:r>
+              <a:rPr lang="pt-BR" dirty="0"/>
+              <a:t>Nesta aula, aprenderemos sobre o algoritmo chamado de </a:t>
+            </a:r>
+            <a:r>
+              <a:rPr lang="pt-BR" b="1" dirty="0"/>
+              <a:t>k-Médias</a:t>
+            </a:r>
+            <a:r>
+              <a:rPr lang="pt-BR" dirty="0"/>
+              <a:t> (ou </a:t>
+            </a:r>
+            <a:r>
+              <a:rPr lang="pt-BR" b="1" i="1" dirty="0"/>
+              <a:t>k-</a:t>
+            </a:r>
+            <a:r>
+              <a:rPr lang="pt-BR" b="1" i="1" dirty="0" err="1"/>
+              <a:t>Means</a:t>
+            </a:r>
+            <a:r>
+              <a:rPr lang="pt-BR" dirty="0"/>
+              <a:t>, em inglês) que é um dos algoritmos mais simples de </a:t>
+            </a:r>
+            <a:r>
+              <a:rPr lang="pt-BR" b="1" i="1" dirty="0"/>
+              <a:t>clustering</a:t>
+            </a:r>
+            <a:r>
+              <a:rPr lang="pt-BR" dirty="0"/>
+              <a:t>.</a:t>
+            </a:r>
+          </a:p>
+        </p:txBody>
+      </p:sp>
+    </p:spTree>
+    <p:extLst>
+      <p:ext uri="{BB962C8B-B14F-4D97-AF65-F5344CB8AC3E}">
+        <p14:creationId xmlns:p14="http://schemas.microsoft.com/office/powerpoint/2010/main" val="2127415881"/>
+      </p:ext>
+    </p:extLst>
+  </p:cSld>
+  <p:clrMapOvr>
+    <a:masterClrMapping/>
+  </p:clrMapOvr>
+</p:sld>
+</file>
+
+<file path=ppt/slides/slide20.xml><?xml version="1.0" encoding="utf-8"?>
 <p:sld xmlns:a="http://schemas.openxmlformats.org/drawingml/2006/main" xmlns:r="http://schemas.openxmlformats.org/officeDocument/2006/relationships" xmlns:p="http://schemas.openxmlformats.org/presentationml/2006/main">
   <p:cSld>
     <p:spTree>
@@ -8751,7 +10302,7 @@
 </p:sld>
 </file>
 
-<file path=ppt/slides/slide17.xml><?xml version="1.0" encoding="utf-8"?>
+<file path=ppt/slides/slide21.xml><?xml version="1.0" encoding="utf-8"?>
 <p:sld xmlns:a="http://schemas.openxmlformats.org/drawingml/2006/main" xmlns:r="http://schemas.openxmlformats.org/officeDocument/2006/relationships" xmlns:p="http://schemas.openxmlformats.org/presentationml/2006/main">
   <p:cSld>
     <p:spTree>
@@ -9004,7 +10555,7 @@
 </p:sld>
 </file>
 
-<file path=ppt/slides/slide18.xml><?xml version="1.0" encoding="utf-8"?>
+<file path=ppt/slides/slide22.xml><?xml version="1.0" encoding="utf-8"?>
 <p:sld xmlns:a="http://schemas.openxmlformats.org/drawingml/2006/main" xmlns:r="http://schemas.openxmlformats.org/officeDocument/2006/relationships" xmlns:p="http://schemas.openxmlformats.org/presentationml/2006/main">
   <p:cSld>
     <p:spTree>
@@ -9245,7 +10796,7 @@
 </p:sld>
 </file>
 
-<file path=ppt/slides/slide19.xml><?xml version="1.0" encoding="utf-8"?>
+<file path=ppt/slides/slide23.xml><?xml version="1.0" encoding="utf-8"?>
 <p:sld xmlns:a="http://schemas.openxmlformats.org/drawingml/2006/main" xmlns:r="http://schemas.openxmlformats.org/officeDocument/2006/relationships" xmlns:p="http://schemas.openxmlformats.org/presentationml/2006/main">
   <p:cSld>
     <p:spTree>
@@ -9464,7 +11015,7 @@
 </p:sld>
 </file>
 
-<file path=ppt/slides/slide2.xml><?xml version="1.0" encoding="utf-8"?>
+<file path=ppt/slides/slide24.xml><?xml version="1.0" encoding="utf-8"?>
 <p:sld xmlns:a="http://schemas.openxmlformats.org/drawingml/2006/main" xmlns:r="http://schemas.openxmlformats.org/officeDocument/2006/relationships" xmlns:p="http://schemas.openxmlformats.org/presentationml/2006/main">
   <p:cSld>
     <p:spTree>
@@ -9483,192 +11034,6 @@
       </p:grpSpPr>
       <p:sp>
         <p:nvSpPr>
-          <p:cNvPr id="2" name="Título 1"/>
-          <p:cNvSpPr>
-            <a:spLocks noGrp="1"/>
-          </p:cNvSpPr>
-          <p:nvPr>
-            <p:ph type="title"/>
-          </p:nvPr>
-        </p:nvSpPr>
-        <p:spPr/>
-        <p:txBody>
-          <a:bodyPr/>
-          <a:lstStyle/>
-          <a:p>
-            <a:r>
-              <a:rPr lang="pt-BR" dirty="0"/>
-              <a:t>Recapitulando</a:t>
-            </a:r>
-            <a:endParaRPr lang="en-US" dirty="0"/>
-          </a:p>
-        </p:txBody>
-      </p:sp>
-      <p:sp>
-        <p:nvSpPr>
-          <p:cNvPr id="3" name="Espaço Reservado para Conteúdo 2"/>
-          <p:cNvSpPr>
-            <a:spLocks noGrp="1"/>
-          </p:cNvSpPr>
-          <p:nvPr>
-            <p:ph idx="1"/>
-          </p:nvPr>
-        </p:nvSpPr>
-        <p:spPr>
-          <a:xfrm>
-            <a:off x="838199" y="1825624"/>
-            <a:ext cx="11223172" cy="5032376"/>
-          </a:xfrm>
-        </p:spPr>
-        <p:txBody>
-          <a:bodyPr>
-            <a:normAutofit/>
-          </a:bodyPr>
-          <a:lstStyle/>
-          <a:p>
-            <a:r>
-              <a:rPr lang="pt-BR" dirty="0"/>
-              <a:t>Até o momento, todos os algoritmos que aprendemos seguiam o paradigma do aprendizado supervisionado.</a:t>
-            </a:r>
-          </a:p>
-          <a:p>
-            <a:r>
-              <a:rPr lang="pt-BR" dirty="0"/>
-              <a:t>Hoje, falaremos sobre </a:t>
-            </a:r>
-            <a:r>
-              <a:rPr lang="pt-BR" b="1" i="1" dirty="0"/>
-              <a:t>clustering</a:t>
-            </a:r>
-            <a:r>
-              <a:rPr lang="pt-BR" dirty="0"/>
-              <a:t>, que são algoritmos de </a:t>
-            </a:r>
-            <a:r>
-              <a:rPr lang="pt-BR" b="1" dirty="0"/>
-              <a:t>aprendizado não-supervisionado</a:t>
-            </a:r>
-            <a:r>
-              <a:rPr lang="pt-BR" dirty="0"/>
-              <a:t>.</a:t>
-            </a:r>
-          </a:p>
-          <a:p>
-            <a:pPr lvl="1">
-              <a:buFont typeface="Wingdings" panose="05000000000000000000" pitchFamily="2" charset="2"/>
-              <a:buChar char="§"/>
-            </a:pPr>
-            <a:r>
-              <a:rPr lang="pt-BR" dirty="0"/>
-              <a:t>Não temos rótulos, apenas atributos.</a:t>
-            </a:r>
-          </a:p>
-          <a:p>
-            <a:r>
-              <a:rPr lang="pt-BR" dirty="0"/>
-              <a:t>Eles visam criar agrupamentos de dados (chamados de </a:t>
-            </a:r>
-            <a:r>
-              <a:rPr lang="pt-BR" b="1" i="1" dirty="0"/>
-              <a:t>clusters</a:t>
-            </a:r>
-            <a:r>
-              <a:rPr lang="pt-BR" b="1" dirty="0"/>
-              <a:t> </a:t>
-            </a:r>
-            <a:r>
-              <a:rPr lang="pt-BR" dirty="0"/>
-              <a:t>ou</a:t>
-            </a:r>
-            <a:r>
-              <a:rPr lang="pt-BR" b="1" dirty="0"/>
-              <a:t> grupos</a:t>
-            </a:r>
-            <a:r>
-              <a:rPr lang="pt-BR" dirty="0"/>
-              <a:t>) segundo seu </a:t>
-            </a:r>
-            <a:r>
-              <a:rPr lang="pt-BR" b="1" dirty="0">
-                <a:solidFill>
-                  <a:srgbClr val="00B050"/>
-                </a:solidFill>
-              </a:rPr>
-              <a:t>grau de semelhança</a:t>
-            </a:r>
-            <a:r>
-              <a:rPr lang="pt-BR" dirty="0"/>
-              <a:t>. </a:t>
-            </a:r>
-          </a:p>
-          <a:p>
-            <a:r>
-              <a:rPr lang="pt-BR" dirty="0"/>
-              <a:t>Nesta aula, aprenderemos sobre o algoritmo chamado de </a:t>
-            </a:r>
-            <a:r>
-              <a:rPr lang="pt-BR" b="1" dirty="0"/>
-              <a:t>k-Médias</a:t>
-            </a:r>
-            <a:r>
-              <a:rPr lang="pt-BR" dirty="0"/>
-              <a:t> (ou </a:t>
-            </a:r>
-            <a:r>
-              <a:rPr lang="pt-BR" b="1" i="1" dirty="0"/>
-              <a:t>k-</a:t>
-            </a:r>
-            <a:r>
-              <a:rPr lang="pt-BR" b="1" i="1" dirty="0" err="1"/>
-              <a:t>Means</a:t>
-            </a:r>
-            <a:r>
-              <a:rPr lang="pt-BR" dirty="0"/>
-              <a:t>, em inglês) que é um dos algoritmos mais simples de </a:t>
-            </a:r>
-            <a:r>
-              <a:rPr lang="pt-BR" b="1" i="1" dirty="0"/>
-              <a:t>clustering</a:t>
-            </a:r>
-            <a:r>
-              <a:rPr lang="pt-BR" dirty="0"/>
-              <a:t>.</a:t>
-            </a:r>
-          </a:p>
-        </p:txBody>
-      </p:sp>
-    </p:spTree>
-    <p:extLst>
-      <p:ext uri="{BB962C8B-B14F-4D97-AF65-F5344CB8AC3E}">
-        <p14:creationId xmlns:p14="http://schemas.microsoft.com/office/powerpoint/2010/main" val="2127415881"/>
-      </p:ext>
-    </p:extLst>
-  </p:cSld>
-  <p:clrMapOvr>
-    <a:masterClrMapping/>
-  </p:clrMapOvr>
-</p:sld>
-</file>
-
-<file path=ppt/slides/slide20.xml><?xml version="1.0" encoding="utf-8"?>
-<p:sld xmlns:a="http://schemas.openxmlformats.org/drawingml/2006/main" xmlns:r="http://schemas.openxmlformats.org/officeDocument/2006/relationships" xmlns:p="http://schemas.openxmlformats.org/presentationml/2006/main">
-  <p:cSld>
-    <p:spTree>
-      <p:nvGrpSpPr>
-        <p:cNvPr id="1" name=""/>
-        <p:cNvGrpSpPr/>
-        <p:nvPr/>
-      </p:nvGrpSpPr>
-      <p:grpSpPr>
-        <a:xfrm>
-          <a:off x="0" y="0"/>
-          <a:ext cx="0" cy="0"/>
-          <a:chOff x="0" y="0"/>
-          <a:chExt cx="0" cy="0"/>
-        </a:xfrm>
-      </p:grpSpPr>
-      <p:sp>
-        <p:nvSpPr>
           <p:cNvPr id="2" name="Title 1">
             <a:extLst>
               <a:ext uri="{FF2B5EF4-FFF2-40B4-BE49-F238E27FC236}">
@@ -9777,7 +11142,7 @@
 </p:sld>
 </file>
 
-<file path=ppt/slides/slide21.xml><?xml version="1.0" encoding="utf-8"?>
+<file path=ppt/slides/slide25.xml><?xml version="1.0" encoding="utf-8"?>
 <p:sld xmlns:a="http://schemas.openxmlformats.org/drawingml/2006/main" xmlns:r="http://schemas.openxmlformats.org/officeDocument/2006/relationships" xmlns:p="http://schemas.openxmlformats.org/presentationml/2006/main">
   <p:cSld>
     <p:spTree>
@@ -10128,7 +11493,7 @@
 </p:sld>
 </file>
 
-<file path=ppt/slides/slide22.xml><?xml version="1.0" encoding="utf-8"?>
+<file path=ppt/slides/slide26.xml><?xml version="1.0" encoding="utf-8"?>
 <p:sld xmlns:a="http://schemas.openxmlformats.org/drawingml/2006/main" xmlns:r="http://schemas.openxmlformats.org/officeDocument/2006/relationships" xmlns:p="http://schemas.openxmlformats.org/presentationml/2006/main">
   <p:cSld>
     <p:spTree>
@@ -10223,7 +11588,7 @@
 </p:sld>
 </file>
 
-<file path=ppt/slides/slide23.xml><?xml version="1.0" encoding="utf-8"?>
+<file path=ppt/slides/slide27.xml><?xml version="1.0" encoding="utf-8"?>
 <p:sld xmlns:a="http://schemas.openxmlformats.org/drawingml/2006/main" xmlns:r="http://schemas.openxmlformats.org/officeDocument/2006/relationships" xmlns:p="http://schemas.openxmlformats.org/presentationml/2006/main">
   <p:cSld>
     <p:spTree>
@@ -10309,7 +11674,7 @@
 </p:sld>
 </file>
 
-<file path=ppt/slides/slide24.xml><?xml version="1.0" encoding="utf-8"?>
+<file path=ppt/slides/slide28.xml><?xml version="1.0" encoding="utf-8"?>
 <p:sld xmlns:a="http://schemas.openxmlformats.org/drawingml/2006/main" xmlns:r="http://schemas.openxmlformats.org/officeDocument/2006/relationships" xmlns:p="http://schemas.openxmlformats.org/presentationml/2006/main">
   <p:cSld>
     <p:spTree>
@@ -10395,7 +11760,7 @@
 </p:sld>
 </file>
 
-<file path=ppt/slides/slide25.xml><?xml version="1.0" encoding="utf-8"?>
+<file path=ppt/slides/slide29.xml><?xml version="1.0" encoding="utf-8"?>
 <p:sld xmlns:a="http://schemas.openxmlformats.org/drawingml/2006/main" xmlns:r="http://schemas.openxmlformats.org/officeDocument/2006/relationships" xmlns:p="http://schemas.openxmlformats.org/presentationml/2006/main">
   <p:cSld>
     <p:spTree>
@@ -10645,51 +12010,6 @@
           <a:chExt cx="0" cy="0"/>
         </a:xfrm>
       </p:grpSpPr>
-      <p:pic>
-        <p:nvPicPr>
-          <p:cNvPr id="4" name="Picture 4" descr="openAlchemy no Twitter: &quot;Sunday Funday! Pool day with some mean algorithms,  K? #machinelearning #deeplearning #kmeans #sundayfunday #ml #ai  #artificialintelligence #memes #meme #memesdaily #openalchemy #nlp #cv  #aimemes #funny #math #statistics https ...">
-            <a:extLst>
-              <a:ext uri="{FF2B5EF4-FFF2-40B4-BE49-F238E27FC236}">
-                <a16:creationId xmlns:a16="http://schemas.microsoft.com/office/drawing/2014/main" id="{37E0D542-AEF0-704D-B767-771A0D88CE79}"/>
-              </a:ext>
-            </a:extLst>
-          </p:cNvPr>
-          <p:cNvPicPr>
-            <a:picLocks noChangeAspect="1" noChangeArrowheads="1"/>
-          </p:cNvPicPr>
-          <p:nvPr/>
-        </p:nvPicPr>
-        <p:blipFill rotWithShape="1">
-          <a:blip r:embed="rId2">
-            <a:extLst>
-              <a:ext uri="{28A0092B-C50C-407E-A947-70E740481C1C}">
-                <a14:useLocalDpi xmlns:a14="http://schemas.microsoft.com/office/drawing/2010/main" val="0"/>
-              </a:ext>
-            </a:extLst>
-          </a:blip>
-          <a:srcRect l="21838" r="22192"/>
-          <a:stretch/>
-        </p:blipFill>
-        <p:spPr bwMode="auto">
-          <a:xfrm>
-            <a:off x="2413464" y="433788"/>
-            <a:ext cx="3519251" cy="6287671"/>
-          </a:xfrm>
-          <a:prstGeom prst="rect">
-            <a:avLst/>
-          </a:prstGeom>
-          <a:noFill/>
-          <a:extLst>
-            <a:ext uri="{909E8E84-426E-40DD-AFC4-6F175D3DCCD1}">
-              <a14:hiddenFill xmlns:a14="http://schemas.microsoft.com/office/drawing/2010/main">
-                <a:solidFill>
-                  <a:srgbClr val="FFFFFF"/>
-                </a:solidFill>
-              </a14:hiddenFill>
-            </a:ext>
-          </a:extLst>
-        </p:spPr>
-      </p:pic>
       <p:sp>
         <p:nvSpPr>
           <p:cNvPr id="6" name="TextBox 5">
@@ -10705,7 +12025,7 @@
         <p:spPr>
           <a:xfrm>
             <a:off x="6574971" y="2814935"/>
-            <a:ext cx="4898572" cy="2246769"/>
+            <a:ext cx="4898572" cy="1815882"/>
           </a:xfrm>
           <a:prstGeom prst="rect">
             <a:avLst/>
@@ -10720,21 +12040,61 @@
           <a:p>
             <a:pPr algn="ctr"/>
             <a:r>
+              <a:rPr lang="pt-BR" sz="2800" dirty="0"/>
+              <a:t>A </a:t>
+            </a:r>
+            <a:r>
+              <a:rPr lang="pt-BR" sz="2800" b="1" dirty="0"/>
+              <a:t>clusterização</a:t>
+            </a:r>
+            <a:r>
+              <a:rPr lang="pt-BR" sz="2800" dirty="0"/>
+              <a:t> organiza dados como na figura: cada ponto encontra seu grupo mais próximo, formando </a:t>
+            </a:r>
+            <a:r>
               <a:rPr lang="pt-BR" sz="2800" i="1" dirty="0"/>
-              <a:t>K-</a:t>
-            </a:r>
-            <a:r>
-              <a:rPr lang="pt-BR" sz="2800" i="1" dirty="0" err="1"/>
-              <a:t>means</a:t>
-            </a:r>
-            <a:r>
-              <a:rPr lang="pt-BR" sz="2800" dirty="0"/>
-              <a:t> organiza dados como na figura: cada ponto encontra seu grupo mais próximo, formando clusters de forma simples e iterativa</a:t>
+              <a:t>clusters.</a:t>
             </a:r>
             <a:endParaRPr lang="en-US" sz="2800" dirty="0"/>
           </a:p>
         </p:txBody>
       </p:sp>
+      <p:pic>
+        <p:nvPicPr>
+          <p:cNvPr id="3" name="Picture 2">
+            <a:extLst>
+              <a:ext uri="{FF2B5EF4-FFF2-40B4-BE49-F238E27FC236}">
+                <a16:creationId xmlns:a16="http://schemas.microsoft.com/office/drawing/2014/main" id="{9863C601-9BD1-3DD0-9219-97CD9BA5DC5A}"/>
+              </a:ext>
+            </a:extLst>
+          </p:cNvPr>
+          <p:cNvPicPr>
+            <a:picLocks noChangeAspect="1"/>
+          </p:cNvPicPr>
+          <p:nvPr/>
+        </p:nvPicPr>
+        <p:blipFill>
+          <a:blip r:embed="rId2" cstate="print">
+            <a:extLst>
+              <a:ext uri="{28A0092B-C50C-407E-A947-70E740481C1C}">
+                <a14:useLocalDpi xmlns:a14="http://schemas.microsoft.com/office/drawing/2010/main" val="0"/>
+              </a:ext>
+            </a:extLst>
+          </a:blip>
+          <a:stretch>
+            <a:fillRect/>
+          </a:stretch>
+        </p:blipFill>
+        <p:spPr>
+          <a:xfrm>
+            <a:off x="1934027" y="642219"/>
+            <a:ext cx="3889829" cy="5834743"/>
+          </a:xfrm>
+          <a:prstGeom prst="rect">
+            <a:avLst/>
+          </a:prstGeom>
+        </p:spPr>
+      </p:pic>
     </p:spTree>
     <p:extLst>
       <p:ext uri="{BB962C8B-B14F-4D97-AF65-F5344CB8AC3E}">
@@ -10937,13 +12297,13 @@
         </p:nvSpPr>
         <p:spPr>
           <a:xfrm>
-            <a:off x="838199" y="4052457"/>
-            <a:ext cx="11204865" cy="2674914"/>
+            <a:off x="838199" y="4027637"/>
+            <a:ext cx="11353801" cy="2830362"/>
           </a:xfrm>
         </p:spPr>
         <p:txBody>
           <a:bodyPr>
-            <a:normAutofit/>
+            <a:normAutofit lnSpcReduction="10000"/>
           </a:bodyPr>
           <a:lstStyle/>
           <a:p>
@@ -10991,16 +12351,22 @@
                   <a:srgbClr val="7030A0"/>
                 </a:solidFill>
               </a:rPr>
-              <a:t>descobrir propriedades úteis dos dados disponíveis</a:t>
+              <a:t>extrair estrutura e conhecimento de dados quando não existem rótulos</a:t>
             </a:r>
             <a:r>
               <a:rPr lang="pt-BR" dirty="0"/>
               <a:t>.</a:t>
             </a:r>
-            <a:endParaRPr lang="en-US" dirty="0"/>
-          </a:p>
-          <a:p>
-            <a:endParaRPr lang="pt-BR" dirty="0"/>
+          </a:p>
+          <a:p>
+            <a:r>
+              <a:rPr lang="pt-BR" i="1" dirty="0"/>
+              <a:t>Clustering</a:t>
+            </a:r>
+            <a:r>
+              <a:rPr lang="pt-BR" dirty="0"/>
+              <a:t> tenta reproduzir como humanos organizam o mundo: agrupamos objetos por similaridade</a:t>
+            </a:r>
           </a:p>
         </p:txBody>
       </p:sp>
@@ -11099,10 +12465,10 @@
             <a:p>
               <a:pPr algn="ctr"/>
               <a:r>
-                <a:rPr lang="pt-BR" sz="1400" b="1" dirty="0" err="1"/>
+                <a:rPr lang="pt-BR" sz="1400" b="1" i="1" dirty="0" err="1"/>
                 <a:t>clustering</a:t>
               </a:r>
-              <a:endParaRPr lang="en-US" sz="1400" b="1" dirty="0"/>
+              <a:endParaRPr lang="en-US" sz="1400" b="1" i="1" dirty="0"/>
             </a:p>
           </p:txBody>
         </p:sp>
@@ -11266,7 +12632,7 @@
         <p:spPr>
           <a:xfrm>
             <a:off x="4996543" y="1690688"/>
-            <a:ext cx="7046521" cy="5167311"/>
+            <a:ext cx="7108371" cy="5167311"/>
           </a:xfrm>
         </p:spPr>
         <p:txBody>
@@ -11288,7 +12654,7 @@
               <a:t> (chamados </a:t>
             </a:r>
             <a:r>
-              <a:rPr lang="pt-BR" b="1" dirty="0">
+              <a:rPr lang="pt-BR" b="1" i="1" dirty="0">
                 <a:solidFill>
                   <a:srgbClr val="7030A0"/>
                 </a:solidFill>
@@ -11315,27 +12681,41 @@
           <a:p>
             <a:r>
               <a:rPr lang="pt-BR" dirty="0"/>
-              <a:t>Os </a:t>
-            </a:r>
-            <a:r>
-              <a:rPr lang="pt-BR" b="1" dirty="0">
+              <a:t>O </a:t>
+            </a:r>
+            <a:r>
+              <a:rPr lang="pt-BR" b="1" i="1" dirty="0">
                 <a:solidFill>
                   <a:schemeClr val="accent2"/>
                 </a:solidFill>
               </a:rPr>
-              <a:t>centroides</a:t>
-            </a:r>
-            <a:r>
-              <a:rPr lang="pt-BR" dirty="0"/>
-              <a:t> desses </a:t>
+              <a:t>clustering </a:t>
+            </a:r>
+            <a:r>
+              <a:rPr lang="pt-BR" dirty="0"/>
+              <a:t>agrupa dados </a:t>
             </a:r>
             <a:r>
               <a:rPr lang="pt-BR" b="1" dirty="0"/>
-              <a:t>clusters</a:t>
-            </a:r>
-            <a:r>
-              <a:rPr lang="pt-BR" dirty="0"/>
-              <a:t> podem então ser usados ​​como </a:t>
+              <a:t>com base em similaridade</a:t>
+            </a:r>
+            <a:r>
+              <a:rPr lang="pt-BR" dirty="0"/>
+              <a:t> sem precisar de supervisão.</a:t>
+            </a:r>
+          </a:p>
+          <a:p>
+            <a:r>
+              <a:rPr lang="pt-BR" dirty="0"/>
+              <a:t>A ideia mais importante é revelar a </a:t>
+            </a:r>
+            <a:r>
+              <a:rPr lang="pt-BR" b="1" dirty="0"/>
+              <a:t>estrutura intrínseca dos dados</a:t>
+            </a:r>
+            <a:r>
+              <a:rPr lang="pt-BR" dirty="0"/>
+              <a:t>:</a:t>
             </a:r>
           </a:p>
           <a:p>
@@ -11345,19 +12725,7 @@
             </a:pPr>
             <a:r>
               <a:rPr lang="pt-BR" dirty="0"/>
-              <a:t>centros para redes Bayesianas ou de </a:t>
-            </a:r>
-            <a:r>
-              <a:rPr lang="en-US" dirty="0" err="1"/>
-              <a:t>Função</a:t>
-            </a:r>
-            <a:r>
-              <a:rPr lang="en-US" dirty="0"/>
-              <a:t> de base radial (</a:t>
-            </a:r>
-            <a:r>
-              <a:rPr lang="pt-BR" dirty="0"/>
-              <a:t>RBF), </a:t>
+              <a:t>padrões escondidos</a:t>
             </a:r>
           </a:p>
           <a:p>
@@ -11367,7 +12735,7 @@
             </a:pPr>
             <a:r>
               <a:rPr lang="pt-BR" dirty="0"/>
-              <a:t>estimativas de valores de atributos desconhecidos (ou ausentes),</a:t>
+              <a:t>subgrupos naturais</a:t>
             </a:r>
           </a:p>
           <a:p>
@@ -11377,17 +12745,7 @@
             </a:pPr>
             <a:r>
               <a:rPr lang="pt-BR" dirty="0"/>
-              <a:t>ferramentas de visualização de dados multidimensionais,</a:t>
-            </a:r>
-          </a:p>
-          <a:p>
-            <a:pPr lvl="1">
-              <a:buFont typeface="Wingdings" panose="05000000000000000000" pitchFamily="2" charset="2"/>
-              <a:buChar char="§"/>
-            </a:pPr>
-            <a:r>
-              <a:rPr lang="pt-BR" dirty="0"/>
-              <a:t>auxiliares para criação de classificadores mais simples.</a:t>
+              <a:t>relações não explícitas</a:t>
             </a:r>
           </a:p>
         </p:txBody>
@@ -11431,46 +12789,6 @@
           </a:extLst>
         </p:spPr>
       </p:pic>
-      <p:sp>
-        <p:nvSpPr>
-          <p:cNvPr id="4" name="CaixaDeTexto 3">
-            <a:extLst>
-              <a:ext uri="{FF2B5EF4-FFF2-40B4-BE49-F238E27FC236}">
-                <a16:creationId xmlns:a16="http://schemas.microsoft.com/office/drawing/2014/main" id="{8983938C-72D4-9E58-2CE8-D43E36E7012F}"/>
-              </a:ext>
-            </a:extLst>
-          </p:cNvPr>
-          <p:cNvSpPr txBox="1"/>
-          <p:nvPr/>
-        </p:nvSpPr>
-        <p:spPr>
-          <a:xfrm>
-            <a:off x="838200" y="5292546"/>
-            <a:ext cx="3780793" cy="1200329"/>
-          </a:xfrm>
-          <a:prstGeom prst="rect">
-            <a:avLst/>
-          </a:prstGeom>
-          <a:noFill/>
-        </p:spPr>
-        <p:txBody>
-          <a:bodyPr wrap="square">
-            <a:spAutoFit/>
-          </a:bodyPr>
-          <a:lstStyle/>
-          <a:p>
-            <a:pPr algn="ctr"/>
-            <a:r>
-              <a:rPr lang="pt-BR" b="1" dirty="0"/>
-              <a:t>centroide</a:t>
-            </a:r>
-            <a:r>
-              <a:rPr lang="pt-BR" dirty="0"/>
-              <a:t> é o ponto central de um cluster de dados. Representa a "média" das amostras dentro do cluster.</a:t>
-            </a:r>
-          </a:p>
-        </p:txBody>
-      </p:sp>
     </p:spTree>
     <p:extLst>
       <p:ext uri="{BB962C8B-B14F-4D97-AF65-F5344CB8AC3E}">
@@ -11522,7 +12840,11 @@
             </a:r>
             <a:r>
               <a:rPr lang="en-US" dirty="0"/>
-              <a:t> de clusters</a:t>
+              <a:t> de </a:t>
+            </a:r>
+            <a:r>
+              <a:rPr lang="en-US" i="1" dirty="0"/>
+              <a:t>clusters</a:t>
             </a:r>
           </a:p>
         </p:txBody>
@@ -11540,7 +12862,7 @@
         <p:spPr>
           <a:xfrm>
             <a:off x="838199" y="1825625"/>
-            <a:ext cx="11194473" cy="5032376"/>
+            <a:ext cx="11277601" cy="5032376"/>
           </a:xfrm>
         </p:spPr>
         <p:txBody>
@@ -11577,7 +12899,15 @@
                   <a:srgbClr val="7030A0"/>
                 </a:solidFill>
               </a:rPr>
-              <a:t>identificação de clusters</a:t>
+              <a:t>identificação de </a:t>
+            </a:r>
+            <a:r>
+              <a:rPr lang="pt-BR" b="1" i="1" dirty="0">
+                <a:solidFill>
+                  <a:srgbClr val="7030A0"/>
+                </a:solidFill>
+              </a:rPr>
+              <a:t>clusters</a:t>
             </a:r>
             <a:r>
               <a:rPr lang="pt-BR" dirty="0"/>
@@ -11641,10 +12971,10 @@
             </a:r>
             <a:r>
               <a:rPr lang="pt-BR" dirty="0"/>
-              <a:t> é um conjunto com os </a:t>
-            </a:r>
-            <a:r>
-              <a:rPr lang="pt-BR" b="1" dirty="0">
+              <a:t> é um conjunto de </a:t>
+            </a:r>
+            <a:r>
+              <a:rPr lang="pt-BR" b="1" i="1" dirty="0">
                 <a:solidFill>
                   <a:srgbClr val="00B050"/>
                 </a:solidFill>
@@ -11653,7 +12983,7 @@
             </a:r>
             <a:r>
               <a:rPr lang="pt-BR" dirty="0"/>
-              <a:t> a que pertencem cada um dos exemplos.</a:t>
+              <a:t> a que pertencem cada um dos exemplos do conjunto de treinamento.</a:t>
             </a:r>
           </a:p>
         </p:txBody>
@@ -11666,7 +12996,7 @@
         </p:nvGrpSpPr>
         <p:grpSpPr>
           <a:xfrm>
-            <a:off x="1078958" y="4579446"/>
+            <a:off x="1022928" y="4688303"/>
             <a:ext cx="5960847" cy="2029172"/>
             <a:chOff x="3186691" y="4631401"/>
             <a:chExt cx="5960847" cy="2029172"/>
@@ -11833,8 +13163,8 @@
         </p:nvSpPr>
         <p:spPr>
           <a:xfrm>
-            <a:off x="7168503" y="4854292"/>
-            <a:ext cx="4839707" cy="1477328"/>
+            <a:off x="7282335" y="5041169"/>
+            <a:ext cx="4223866" cy="1323439"/>
           </a:xfrm>
           <a:prstGeom prst="rect">
             <a:avLst/>
@@ -11848,11 +13178,11 @@
           <a:p>
             <a:pPr algn="ctr"/>
             <a:r>
-              <a:rPr lang="pt-BR" b="1" dirty="0"/>
+              <a:rPr lang="pt-BR" sz="1600" b="1" dirty="0"/>
               <a:t>OBS</a:t>
             </a:r>
             <a:r>
-              <a:rPr lang="pt-BR" dirty="0"/>
+              <a:rPr lang="pt-BR" sz="1600" dirty="0"/>
               <a:t>.: A identificação visual de clusters em um espaço bidimensional é fácil, mas em quatro ou mais dimensões isso já não é mais possível. Nesses casos, apenas algoritmos de identificação de clusters conseguem agrupar os dados. </a:t>
             </a:r>
           </a:p>
@@ -11890,7 +13220,13 @@
       </p:grpSpPr>
       <p:sp>
         <p:nvSpPr>
-          <p:cNvPr id="2" name="Título 1"/>
+          <p:cNvPr id="2" name="Title 1">
+            <a:extLst>
+              <a:ext uri="{FF2B5EF4-FFF2-40B4-BE49-F238E27FC236}">
+                <a16:creationId xmlns:a16="http://schemas.microsoft.com/office/drawing/2014/main" id="{536BFB42-0017-5ED1-7773-E084E5A015B7}"/>
+              </a:ext>
+            </a:extLst>
+          </p:cNvPr>
           <p:cNvSpPr>
             <a:spLocks noGrp="1"/>
           </p:cNvSpPr>
@@ -11904,6 +13240,274 @@
           <a:lstStyle/>
           <a:p>
             <a:r>
+              <a:rPr lang="pt-BR" dirty="0"/>
+              <a:t>Aplicações</a:t>
+            </a:r>
+            <a:endParaRPr lang="en-US" dirty="0"/>
+          </a:p>
+        </p:txBody>
+      </p:sp>
+      <p:sp>
+        <p:nvSpPr>
+          <p:cNvPr id="3" name="Content Placeholder 2">
+            <a:extLst>
+              <a:ext uri="{FF2B5EF4-FFF2-40B4-BE49-F238E27FC236}">
+                <a16:creationId xmlns:a16="http://schemas.microsoft.com/office/drawing/2014/main" id="{D299C266-04B6-6A8C-91F5-24FCD2CC3103}"/>
+              </a:ext>
+            </a:extLst>
+          </p:cNvPr>
+          <p:cNvSpPr>
+            <a:spLocks noGrp="1"/>
+          </p:cNvSpPr>
+          <p:nvPr>
+            <p:ph idx="1"/>
+          </p:nvPr>
+        </p:nvSpPr>
+        <p:spPr>
+          <a:xfrm>
+            <a:off x="5377542" y="1825624"/>
+            <a:ext cx="6814457" cy="5032375"/>
+          </a:xfrm>
+        </p:spPr>
+        <p:txBody>
+          <a:bodyPr/>
+          <a:lstStyle/>
+          <a:p>
+            <a:r>
+              <a:rPr lang="en-US" dirty="0" err="1"/>
+              <a:t>Redução</a:t>
+            </a:r>
+            <a:r>
+              <a:rPr lang="en-US" dirty="0"/>
+              <a:t> de </a:t>
+            </a:r>
+            <a:r>
+              <a:rPr lang="en-US" dirty="0" err="1"/>
+              <a:t>complexidade</a:t>
+            </a:r>
+            <a:endParaRPr lang="en-US" dirty="0"/>
+          </a:p>
+          <a:p>
+            <a:pPr lvl="1">
+              <a:buFont typeface="Wingdings" panose="05000000000000000000" pitchFamily="2" charset="2"/>
+              <a:buChar char="§"/>
+            </a:pPr>
+            <a:r>
+              <a:rPr lang="pt-BR" dirty="0"/>
+              <a:t>substituir milhões de pontos por alguns grupos </a:t>
+            </a:r>
+          </a:p>
+          <a:p>
+            <a:pPr lvl="1">
+              <a:buFont typeface="Wingdings" panose="05000000000000000000" pitchFamily="2" charset="2"/>
+              <a:buChar char="§"/>
+            </a:pPr>
+            <a:r>
+              <a:rPr lang="pt-BR" dirty="0"/>
+              <a:t>resumir dados complexos</a:t>
+            </a:r>
+            <a:endParaRPr lang="en-US" dirty="0"/>
+          </a:p>
+          <a:p>
+            <a:r>
+              <a:rPr lang="en-US" dirty="0"/>
+              <a:t>Pré-</a:t>
+            </a:r>
+            <a:r>
+              <a:rPr lang="en-US" dirty="0" err="1"/>
+              <a:t>processamento</a:t>
+            </a:r>
+            <a:r>
+              <a:rPr lang="en-US" dirty="0"/>
+              <a:t> para outros </a:t>
+            </a:r>
+            <a:r>
+              <a:rPr lang="en-US" dirty="0" err="1"/>
+              <a:t>modelos</a:t>
+            </a:r>
+            <a:endParaRPr lang="en-US" dirty="0"/>
+          </a:p>
+          <a:p>
+            <a:pPr lvl="1">
+              <a:buFont typeface="Wingdings" panose="05000000000000000000" pitchFamily="2" charset="2"/>
+              <a:buChar char="§"/>
+            </a:pPr>
+            <a:r>
+              <a:rPr lang="pt-BR" dirty="0"/>
+              <a:t>criar features (cluster ID)</a:t>
+            </a:r>
+          </a:p>
+          <a:p>
+            <a:pPr lvl="1">
+              <a:buFont typeface="Wingdings" panose="05000000000000000000" pitchFamily="2" charset="2"/>
+              <a:buChar char="§"/>
+            </a:pPr>
+            <a:r>
+              <a:rPr lang="pt-BR" dirty="0"/>
+              <a:t>inicializar modelos</a:t>
+            </a:r>
+          </a:p>
+          <a:p>
+            <a:pPr lvl="1">
+              <a:buFont typeface="Wingdings" panose="05000000000000000000" pitchFamily="2" charset="2"/>
+              <a:buChar char="§"/>
+            </a:pPr>
+            <a:r>
+              <a:rPr lang="pt-BR" dirty="0"/>
+              <a:t>reduzir dimensionalidade</a:t>
+            </a:r>
+          </a:p>
+          <a:p>
+            <a:pPr lvl="1">
+              <a:buFont typeface="Wingdings" panose="05000000000000000000" pitchFamily="2" charset="2"/>
+              <a:buChar char="§"/>
+            </a:pPr>
+            <a:r>
+              <a:rPr lang="pt-BR" dirty="0"/>
+              <a:t>organizar dados antes de aprendizado supervisionado</a:t>
+            </a:r>
+          </a:p>
+          <a:p>
+            <a:r>
+              <a:rPr lang="en-US" dirty="0" err="1"/>
+              <a:t>Detecção</a:t>
+            </a:r>
+            <a:r>
+              <a:rPr lang="en-US" dirty="0"/>
+              <a:t> de </a:t>
+            </a:r>
+            <a:r>
+              <a:rPr lang="en-US" dirty="0" err="1"/>
+              <a:t>padrões</a:t>
+            </a:r>
+            <a:r>
+              <a:rPr lang="en-US" dirty="0"/>
+              <a:t> </a:t>
+            </a:r>
+            <a:r>
+              <a:rPr lang="en-US" dirty="0" err="1"/>
+              <a:t>raros</a:t>
+            </a:r>
+            <a:endParaRPr lang="en-US" dirty="0"/>
+          </a:p>
+          <a:p>
+            <a:pPr lvl="1">
+              <a:buFont typeface="Wingdings" panose="05000000000000000000" pitchFamily="2" charset="2"/>
+              <a:buChar char="§"/>
+            </a:pPr>
+            <a:r>
+              <a:rPr lang="pt-BR" dirty="0"/>
+              <a:t>detector de comportamento “normal”</a:t>
+            </a:r>
+          </a:p>
+          <a:p>
+            <a:pPr lvl="1">
+              <a:buFont typeface="Wingdings" panose="05000000000000000000" pitchFamily="2" charset="2"/>
+              <a:buChar char="§"/>
+            </a:pPr>
+            <a:r>
+              <a:rPr lang="pt-BR" dirty="0"/>
+              <a:t>tudo fora disso é considerado suspeito</a:t>
+            </a:r>
+            <a:endParaRPr lang="en-US" dirty="0"/>
+          </a:p>
+          <a:p>
+            <a:pPr lvl="1"/>
+            <a:endParaRPr lang="en-US" dirty="0"/>
+          </a:p>
+        </p:txBody>
+      </p:sp>
+      <p:pic>
+        <p:nvPicPr>
+          <p:cNvPr id="5" name="Picture 2" descr="K-means clustering on the digits dataset (PCA-reduced data) Centroids are marked with white cross">
+            <a:extLst>
+              <a:ext uri="{FF2B5EF4-FFF2-40B4-BE49-F238E27FC236}">
+                <a16:creationId xmlns:a16="http://schemas.microsoft.com/office/drawing/2014/main" id="{A7524CD6-9254-ABD9-EBBF-94136AAAEDE9}"/>
+              </a:ext>
+            </a:extLst>
+          </p:cNvPr>
+          <p:cNvPicPr>
+            <a:picLocks noChangeAspect="1" noChangeArrowheads="1"/>
+          </p:cNvPicPr>
+          <p:nvPr/>
+        </p:nvPicPr>
+        <p:blipFill rotWithShape="1">
+          <a:blip r:embed="rId3">
+            <a:extLst>
+              <a:ext uri="{28A0092B-C50C-407E-A947-70E740481C1C}">
+                <a14:useLocalDpi xmlns:a14="http://schemas.microsoft.com/office/drawing/2010/main" val="0"/>
+              </a:ext>
+            </a:extLst>
+          </a:blip>
+          <a:srcRect l="12278" t="11622" r="9484" b="10196"/>
+          <a:stretch/>
+        </p:blipFill>
+        <p:spPr bwMode="auto">
+          <a:xfrm>
+            <a:off x="838200" y="2656115"/>
+            <a:ext cx="3780793" cy="2833534"/>
+          </a:xfrm>
+          <a:prstGeom prst="rect">
+            <a:avLst/>
+          </a:prstGeom>
+          <a:noFill/>
+          <a:extLst>
+            <a:ext uri="{909E8E84-426E-40DD-AFC4-6F175D3DCCD1}">
+              <a14:hiddenFill xmlns:a14="http://schemas.microsoft.com/office/drawing/2010/main">
+                <a:solidFill>
+                  <a:srgbClr val="FFFFFF"/>
+                </a:solidFill>
+              </a14:hiddenFill>
+            </a:ext>
+          </a:extLst>
+        </p:spPr>
+      </p:pic>
+    </p:spTree>
+    <p:extLst>
+      <p:ext uri="{BB962C8B-B14F-4D97-AF65-F5344CB8AC3E}">
+        <p14:creationId xmlns:p14="http://schemas.microsoft.com/office/powerpoint/2010/main" val="3538192162"/>
+      </p:ext>
+    </p:extLst>
+  </p:cSld>
+  <p:clrMapOvr>
+    <a:masterClrMapping/>
+  </p:clrMapOvr>
+</p:sld>
+</file>
+
+<file path=ppt/slides/slide9.xml><?xml version="1.0" encoding="utf-8"?>
+<p:sld xmlns:a="http://schemas.openxmlformats.org/drawingml/2006/main" xmlns:r="http://schemas.openxmlformats.org/officeDocument/2006/relationships" xmlns:p="http://schemas.openxmlformats.org/presentationml/2006/main">
+  <p:cSld>
+    <p:spTree>
+      <p:nvGrpSpPr>
+        <p:cNvPr id="1" name=""/>
+        <p:cNvGrpSpPr/>
+        <p:nvPr/>
+      </p:nvGrpSpPr>
+      <p:grpSpPr>
+        <a:xfrm>
+          <a:off x="0" y="0"/>
+          <a:ext cx="0" cy="0"/>
+          <a:chOff x="0" y="0"/>
+          <a:chExt cx="0" cy="0"/>
+        </a:xfrm>
+      </p:grpSpPr>
+      <p:sp>
+        <p:nvSpPr>
+          <p:cNvPr id="2" name="Título 1"/>
+          <p:cNvSpPr>
+            <a:spLocks noGrp="1"/>
+          </p:cNvSpPr>
+          <p:nvPr>
+            <p:ph type="title"/>
+          </p:nvPr>
+        </p:nvSpPr>
+        <p:spPr/>
+        <p:txBody>
+          <a:bodyPr/>
+          <a:lstStyle/>
+          <a:p>
+            <a:r>
               <a:rPr lang="en-US" dirty="0"/>
               <a:t>Como </a:t>
             </a:r>
@@ -11921,7 +13525,15 @@
             </a:r>
             <a:r>
               <a:rPr lang="en-US" dirty="0"/>
-              <a:t> clusters?</a:t>
+              <a:t> </a:t>
+            </a:r>
+            <a:r>
+              <a:rPr lang="en-US" i="1" dirty="0"/>
+              <a:t>clusters</a:t>
+            </a:r>
+            <a:r>
+              <a:rPr lang="en-US" dirty="0"/>
+              <a:t>?</a:t>
             </a:r>
           </a:p>
         </p:txBody>
@@ -11938,8 +13550,8 @@
         </p:nvSpPr>
         <p:spPr>
           <a:xfrm>
-            <a:off x="5257800" y="1825624"/>
-            <a:ext cx="6712526" cy="5032375"/>
+            <a:off x="5257799" y="1825624"/>
+            <a:ext cx="6825343" cy="5032375"/>
           </a:xfrm>
         </p:spPr>
         <p:txBody>
@@ -11958,49 +13570,15 @@
                   <a:srgbClr val="00B050"/>
                 </a:solidFill>
               </a:rPr>
-              <a:t>decidir como os clusters serão representados</a:t>
-            </a:r>
-            <a:r>
-              <a:rPr lang="pt-BR" dirty="0"/>
-              <a:t>.</a:t>
-            </a:r>
-          </a:p>
-          <a:p>
-            <a:r>
-              <a:rPr lang="pt-BR" dirty="0"/>
-              <a:t>Existem algumas opções como a densidade, distribuição, hierarquia, etc.</a:t>
-            </a:r>
-          </a:p>
-          <a:p>
-            <a:r>
-              <a:rPr lang="pt-BR" dirty="0"/>
-              <a:t>Porém, a abordagem mais simples usa os </a:t>
-            </a:r>
-            <a:r>
-              <a:rPr lang="pt-BR" b="1" dirty="0"/>
-              <a:t>centroides </a:t>
-            </a:r>
-            <a:r>
-              <a:rPr lang="pt-BR" dirty="0"/>
-              <a:t>(i.e., centros) dos clusters.</a:t>
-            </a:r>
-          </a:p>
-          <a:p>
-            <a:r>
-              <a:rPr lang="pt-BR" dirty="0"/>
-              <a:t>Se os atributos forem numéricos, o </a:t>
-            </a:r>
-            <a:r>
-              <a:rPr lang="pt-BR" b="1" dirty="0">
+              <a:t>decidir como os </a:t>
+            </a:r>
+            <a:r>
+              <a:rPr lang="pt-BR" b="1" i="1" dirty="0">
                 <a:solidFill>
-                  <a:srgbClr val="7030A0"/>
+                  <a:srgbClr val="00B050"/>
                 </a:solidFill>
               </a:rPr>
-              <a:t>centroide</a:t>
-            </a:r>
-            <a:r>
-              <a:rPr lang="pt-BR" dirty="0"/>
-              <a:t> é obtido através das </a:t>
+              <a:t>clusters</a:t>
             </a:r>
             <a:r>
               <a:rPr lang="pt-BR" b="1" dirty="0">
@@ -12008,11 +13586,55 @@
                   <a:srgbClr val="00B050"/>
                 </a:solidFill>
               </a:rPr>
-              <a:t>médias individuais dos atributos</a:t>
+              <a:t> serão representados</a:t>
             </a:r>
             <a:r>
               <a:rPr lang="pt-BR" dirty="0"/>
               <a:t>.</a:t>
+            </a:r>
+          </a:p>
+          <a:p>
+            <a:r>
+              <a:rPr lang="pt-BR" dirty="0"/>
+              <a:t>Existem algumas opções como a densidade, distribuição, hierarquia, etc.</a:t>
+            </a:r>
+          </a:p>
+          <a:p>
+            <a:r>
+              <a:rPr lang="pt-BR" dirty="0"/>
+              <a:t>Porém, a abordagem mais simples usa os </a:t>
+            </a:r>
+            <a:r>
+              <a:rPr lang="pt-BR" b="1" dirty="0"/>
+              <a:t>centroides </a:t>
+            </a:r>
+            <a:r>
+              <a:rPr lang="pt-BR" dirty="0"/>
+              <a:t>(i.e., centros) dos clusters.</a:t>
+            </a:r>
+          </a:p>
+          <a:p>
+            <a:r>
+              <a:rPr lang="pt-BR" dirty="0"/>
+              <a:t>O algoritmo conhecido como </a:t>
+            </a:r>
+            <a:r>
+              <a:rPr lang="pt-BR" b="1" i="1" dirty="0"/>
+              <a:t>k-</a:t>
+            </a:r>
+            <a:r>
+              <a:rPr lang="pt-BR" b="1" i="1" dirty="0" err="1"/>
+              <a:t>Means</a:t>
+            </a:r>
+            <a:r>
+              <a:rPr lang="pt-BR" dirty="0"/>
+              <a:t> implementa esta abordagem.</a:t>
+            </a:r>
+          </a:p>
+          <a:p>
+            <a:r>
+              <a:rPr lang="pt-BR" dirty="0"/>
+              <a:t>Vejamos então suas características e como funciona.</a:t>
             </a:r>
           </a:p>
         </p:txBody>
@@ -12066,460 +13688,6 @@
     <p:extLst>
       <p:ext uri="{BB962C8B-B14F-4D97-AF65-F5344CB8AC3E}">
         <p14:creationId xmlns:p14="http://schemas.microsoft.com/office/powerpoint/2010/main" val="4003545077"/>
-      </p:ext>
-    </p:extLst>
-  </p:cSld>
-  <p:clrMapOvr>
-    <a:masterClrMapping/>
-  </p:clrMapOvr>
-</p:sld>
-</file>
-
-<file path=ppt/slides/slide9.xml><?xml version="1.0" encoding="utf-8"?>
-<p:sld xmlns:a="http://schemas.openxmlformats.org/drawingml/2006/main" xmlns:r="http://schemas.openxmlformats.org/officeDocument/2006/relationships" xmlns:p="http://schemas.openxmlformats.org/presentationml/2006/main">
-  <p:cSld>
-    <p:spTree>
-      <p:nvGrpSpPr>
-        <p:cNvPr id="1" name="">
-          <a:extLst>
-            <a:ext uri="{FF2B5EF4-FFF2-40B4-BE49-F238E27FC236}">
-              <a16:creationId xmlns:a16="http://schemas.microsoft.com/office/drawing/2014/main" id="{5B00F73A-8390-7530-E708-9D3EBFB35B37}"/>
-            </a:ext>
-          </a:extLst>
-        </p:cNvPr>
-        <p:cNvGrpSpPr/>
-        <p:nvPr/>
-      </p:nvGrpSpPr>
-      <p:grpSpPr>
-        <a:xfrm>
-          <a:off x="0" y="0"/>
-          <a:ext cx="0" cy="0"/>
-          <a:chOff x="0" y="0"/>
-          <a:chExt cx="0" cy="0"/>
-        </a:xfrm>
-      </p:grpSpPr>
-      <p:sp>
-        <p:nvSpPr>
-          <p:cNvPr id="2" name="Título 1">
-            <a:extLst>
-              <a:ext uri="{FF2B5EF4-FFF2-40B4-BE49-F238E27FC236}">
-                <a16:creationId xmlns:a16="http://schemas.microsoft.com/office/drawing/2014/main" id="{A7779880-5E02-1DB8-EA94-C86330794A8C}"/>
-              </a:ext>
-            </a:extLst>
-          </p:cNvPr>
-          <p:cNvSpPr>
-            <a:spLocks noGrp="1"/>
-          </p:cNvSpPr>
-          <p:nvPr>
-            <p:ph type="title"/>
-          </p:nvPr>
-        </p:nvSpPr>
-        <p:spPr/>
-        <p:txBody>
-          <a:bodyPr/>
-          <a:lstStyle/>
-          <a:p>
-            <a:r>
-              <a:rPr lang="en-US" dirty="0"/>
-              <a:t>Como </a:t>
-            </a:r>
-            <a:r>
-              <a:rPr lang="en-US" dirty="0" err="1"/>
-              <a:t>representar</a:t>
-            </a:r>
-            <a:r>
-              <a:rPr lang="en-US" dirty="0"/>
-              <a:t> </a:t>
-            </a:r>
-            <a:r>
-              <a:rPr lang="en-US" dirty="0" err="1"/>
-              <a:t>os</a:t>
-            </a:r>
-            <a:r>
-              <a:rPr lang="en-US" dirty="0"/>
-              <a:t> clusters?</a:t>
-            </a:r>
-          </a:p>
-        </p:txBody>
-      </p:sp>
-      <mc:AlternateContent xmlns:mc="http://schemas.openxmlformats.org/markup-compatibility/2006" xmlns:a14="http://schemas.microsoft.com/office/drawing/2010/main">
-        <mc:Choice Requires="a14">
-          <p:sp>
-            <p:nvSpPr>
-              <p:cNvPr id="3" name="Espaço Reservado para Conteúdo 2">
-                <a:extLst>
-                  <a:ext uri="{FF2B5EF4-FFF2-40B4-BE49-F238E27FC236}">
-                    <a16:creationId xmlns:a16="http://schemas.microsoft.com/office/drawing/2014/main" id="{A72472E5-6211-3EFD-BA89-06782640C939}"/>
-                  </a:ext>
-                </a:extLst>
-              </p:cNvPr>
-              <p:cNvSpPr>
-                <a:spLocks noGrp="1"/>
-              </p:cNvSpPr>
-              <p:nvPr>
-                <p:ph idx="1"/>
-              </p:nvPr>
-            </p:nvSpPr>
-            <p:spPr>
-              <a:xfrm>
-                <a:off x="5072743" y="1825624"/>
-                <a:ext cx="6897583" cy="5032375"/>
-              </a:xfrm>
-            </p:spPr>
-            <p:txBody>
-              <a:bodyPr>
-                <a:normAutofit/>
-              </a:bodyPr>
-              <a:lstStyle/>
-              <a:p>
-                <a:r>
-                  <a:rPr lang="pt-BR" i="1" dirty="0"/>
-                  <a:t>Por exemplo, suponhamos os seguintes </a:t>
-                </a:r>
-                <a:r>
-                  <a:rPr lang="pt-BR" b="1" i="1" dirty="0"/>
-                  <a:t>vetores de atributos </a:t>
-                </a:r>
-                <a:r>
-                  <a:rPr lang="pt-BR" i="1" dirty="0"/>
-                  <a:t>em um espaço bidimensional, </a:t>
-                </a:r>
-                <a14:m>
-                  <m:oMath xmlns:m="http://schemas.openxmlformats.org/officeDocument/2006/math">
-                    <m:sSub>
-                      <m:sSubPr>
-                        <m:ctrlPr>
-                          <a:rPr lang="pt-BR" i="1" smtClean="0">
-                            <a:latin typeface="Cambria Math" panose="02040503050406030204" pitchFamily="18" charset="0"/>
-                          </a:rPr>
-                        </m:ctrlPr>
-                      </m:sSubPr>
-                      <m:e>
-                        <m:r>
-                          <a:rPr lang="pt-BR" b="0" i="1" smtClean="0">
-                            <a:latin typeface="Cambria Math" panose="02040503050406030204" pitchFamily="18" charset="0"/>
-                          </a:rPr>
-                          <m:t>𝑥</m:t>
-                        </m:r>
-                      </m:e>
-                      <m:sub>
-                        <m:r>
-                          <a:rPr lang="pt-BR" b="0" i="1" smtClean="0">
-                            <a:latin typeface="Cambria Math" panose="02040503050406030204" pitchFamily="18" charset="0"/>
-                          </a:rPr>
-                          <m:t>1</m:t>
-                        </m:r>
-                      </m:sub>
-                    </m:sSub>
-                  </m:oMath>
-                </a14:m>
-                <a:r>
-                  <a:rPr lang="pt-BR" i="1" dirty="0"/>
-                  <a:t> e </a:t>
-                </a:r>
-                <a14:m>
-                  <m:oMath xmlns:m="http://schemas.openxmlformats.org/officeDocument/2006/math">
-                    <m:sSub>
-                      <m:sSubPr>
-                        <m:ctrlPr>
-                          <a:rPr lang="pt-BR" i="1">
-                            <a:latin typeface="Cambria Math" panose="02040503050406030204" pitchFamily="18" charset="0"/>
-                          </a:rPr>
-                        </m:ctrlPr>
-                      </m:sSubPr>
-                      <m:e>
-                        <m:r>
-                          <a:rPr lang="pt-BR" i="1">
-                            <a:latin typeface="Cambria Math" panose="02040503050406030204" pitchFamily="18" charset="0"/>
-                          </a:rPr>
-                          <m:t>𝑥</m:t>
-                        </m:r>
-                      </m:e>
-                      <m:sub>
-                        <m:r>
-                          <a:rPr lang="pt-BR" b="0" i="1" smtClean="0">
-                            <a:latin typeface="Cambria Math" panose="02040503050406030204" pitchFamily="18" charset="0"/>
-                          </a:rPr>
-                          <m:t>2</m:t>
-                        </m:r>
-                      </m:sub>
-                    </m:sSub>
-                  </m:oMath>
-                </a14:m>
-                <a:r>
-                  <a:rPr lang="pt-BR" i="1" dirty="0"/>
-                  <a:t>: (2, 5), (1, 4), (3, 6).</a:t>
-                </a:r>
-              </a:p>
-              <a:p>
-                <a:r>
-                  <a:rPr lang="pt-BR" i="1" dirty="0"/>
-                  <a:t>Nesse caso, o </a:t>
-                </a:r>
-                <a:r>
-                  <a:rPr lang="pt-BR" b="1" i="1" dirty="0"/>
-                  <a:t>centroide</a:t>
-                </a:r>
-                <a:r>
-                  <a:rPr lang="pt-BR" i="1" dirty="0"/>
-                  <a:t> é representado pelo vetor (2, 5), pois</a:t>
-                </a:r>
-                <a:endParaRPr lang="en-US" i="1" dirty="0"/>
-              </a:p>
-              <a:p>
-                <a:pPr lvl="1">
-                  <a:buFont typeface="Wingdings" panose="05000000000000000000" pitchFamily="2" charset="2"/>
-                  <a:buChar char="§"/>
-                </a:pPr>
-                <a:r>
-                  <a:rPr lang="pt-BR" i="1" dirty="0"/>
-                  <a:t>A média do primeiro atributo é  </a:t>
-                </a:r>
-                <a14:m>
-                  <m:oMath xmlns:m="http://schemas.openxmlformats.org/officeDocument/2006/math">
-                    <m:f>
-                      <m:fPr>
-                        <m:ctrlPr>
-                          <a:rPr lang="pt-BR" i="1" smtClean="0">
-                            <a:latin typeface="Cambria Math" panose="02040503050406030204" pitchFamily="18" charset="0"/>
-                          </a:rPr>
-                        </m:ctrlPr>
-                      </m:fPr>
-                      <m:num>
-                        <m:r>
-                          <a:rPr lang="pt-BR" b="0" i="1" smtClean="0">
-                            <a:latin typeface="Cambria Math" panose="02040503050406030204" pitchFamily="18" charset="0"/>
-                          </a:rPr>
-                          <m:t>2+1+3</m:t>
-                        </m:r>
-                      </m:num>
-                      <m:den>
-                        <m:r>
-                          <a:rPr lang="pt-BR" b="0" i="1" smtClean="0">
-                            <a:latin typeface="Cambria Math" panose="02040503050406030204" pitchFamily="18" charset="0"/>
-                          </a:rPr>
-                          <m:t>3</m:t>
-                        </m:r>
-                      </m:den>
-                    </m:f>
-                    <m:r>
-                      <a:rPr lang="pt-BR" b="0" i="1" smtClean="0">
-                        <a:latin typeface="Cambria Math" panose="02040503050406030204" pitchFamily="18" charset="0"/>
-                      </a:rPr>
-                      <m:t>=2</m:t>
-                    </m:r>
-                  </m:oMath>
-                </a14:m>
-                <a:r>
-                  <a:rPr lang="pt-BR" b="0" i="1" dirty="0"/>
-                  <a:t>.</a:t>
-                </a:r>
-              </a:p>
-              <a:p>
-                <a:pPr lvl="1">
-                  <a:buFont typeface="Wingdings" panose="05000000000000000000" pitchFamily="2" charset="2"/>
-                  <a:buChar char="§"/>
-                </a:pPr>
-                <a:r>
-                  <a:rPr lang="pt-BR" i="1" dirty="0"/>
-                  <a:t>A média do segundo atributo é </a:t>
-                </a:r>
-                <a14:m>
-                  <m:oMath xmlns:m="http://schemas.openxmlformats.org/officeDocument/2006/math">
-                    <m:f>
-                      <m:fPr>
-                        <m:ctrlPr>
-                          <a:rPr lang="pt-BR" i="1">
-                            <a:latin typeface="Cambria Math" panose="02040503050406030204" pitchFamily="18" charset="0"/>
-                          </a:rPr>
-                        </m:ctrlPr>
-                      </m:fPr>
-                      <m:num>
-                        <m:r>
-                          <a:rPr lang="pt-BR" b="0" i="1" smtClean="0">
-                            <a:latin typeface="Cambria Math" panose="02040503050406030204" pitchFamily="18" charset="0"/>
-                          </a:rPr>
-                          <m:t>5</m:t>
-                        </m:r>
-                        <m:r>
-                          <a:rPr lang="pt-BR" i="1">
-                            <a:latin typeface="Cambria Math" panose="02040503050406030204" pitchFamily="18" charset="0"/>
-                          </a:rPr>
-                          <m:t>+</m:t>
-                        </m:r>
-                        <m:r>
-                          <a:rPr lang="pt-BR" b="0" i="1" smtClean="0">
-                            <a:latin typeface="Cambria Math" panose="02040503050406030204" pitchFamily="18" charset="0"/>
-                          </a:rPr>
-                          <m:t>4</m:t>
-                        </m:r>
-                        <m:r>
-                          <a:rPr lang="pt-BR" i="1">
-                            <a:latin typeface="Cambria Math" panose="02040503050406030204" pitchFamily="18" charset="0"/>
-                          </a:rPr>
-                          <m:t>+</m:t>
-                        </m:r>
-                        <m:r>
-                          <a:rPr lang="pt-BR" b="0" i="1" smtClean="0">
-                            <a:latin typeface="Cambria Math" panose="02040503050406030204" pitchFamily="18" charset="0"/>
-                          </a:rPr>
-                          <m:t>6</m:t>
-                        </m:r>
-                      </m:num>
-                      <m:den>
-                        <m:r>
-                          <a:rPr lang="pt-BR" i="1">
-                            <a:latin typeface="Cambria Math" panose="02040503050406030204" pitchFamily="18" charset="0"/>
-                          </a:rPr>
-                          <m:t>3</m:t>
-                        </m:r>
-                      </m:den>
-                    </m:f>
-                    <m:r>
-                      <a:rPr lang="pt-BR" i="1">
-                        <a:latin typeface="Cambria Math" panose="02040503050406030204" pitchFamily="18" charset="0"/>
-                      </a:rPr>
-                      <m:t>=</m:t>
-                    </m:r>
-                    <m:r>
-                      <a:rPr lang="pt-BR" b="0" i="1" smtClean="0">
-                        <a:latin typeface="Cambria Math" panose="02040503050406030204" pitchFamily="18" charset="0"/>
-                      </a:rPr>
-                      <m:t>5</m:t>
-                    </m:r>
-                  </m:oMath>
-                </a14:m>
-                <a:r>
-                  <a:rPr lang="pt-BR" i="1" dirty="0"/>
-                  <a:t>.</a:t>
-                </a:r>
-              </a:p>
-              <a:p>
-                <a:r>
-                  <a:rPr lang="pt-BR" i="1" dirty="0"/>
-                  <a:t>Se os atributos </a:t>
-                </a:r>
-                <a:r>
-                  <a:rPr lang="pt-BR" b="1" i="1" dirty="0">
-                    <a:solidFill>
-                      <a:srgbClr val="7030A0"/>
-                    </a:solidFill>
-                  </a:rPr>
-                  <a:t>não forem numéricos</a:t>
-                </a:r>
-                <a:r>
-                  <a:rPr lang="pt-BR" i="1" dirty="0"/>
-                  <a:t>, devemos </a:t>
-                </a:r>
-                <a:r>
-                  <a:rPr lang="pt-BR" b="1" i="1" dirty="0">
-                    <a:solidFill>
-                      <a:srgbClr val="00B050"/>
-                    </a:solidFill>
-                  </a:rPr>
-                  <a:t>transformá-los em numéricos</a:t>
-                </a:r>
-                <a:r>
-                  <a:rPr lang="pt-BR" i="1" dirty="0"/>
-                  <a:t>.</a:t>
-                </a:r>
-              </a:p>
-            </p:txBody>
-          </p:sp>
-        </mc:Choice>
-        <mc:Fallback xmlns="">
-          <p:sp>
-            <p:nvSpPr>
-              <p:cNvPr id="3" name="Espaço Reservado para Conteúdo 2">
-                <a:extLst>
-                  <a:ext uri="{FF2B5EF4-FFF2-40B4-BE49-F238E27FC236}">
-                    <a16:creationId xmlns:a16="http://schemas.microsoft.com/office/drawing/2014/main" id="{A72472E5-6211-3EFD-BA89-06782640C939}"/>
-                  </a:ext>
-                </a:extLst>
-              </p:cNvPr>
-              <p:cNvSpPr>
-                <a:spLocks noGrp="1" noRot="1" noChangeAspect="1" noMove="1" noResize="1" noEditPoints="1" noAdjustHandles="1" noChangeArrowheads="1" noChangeShapeType="1" noTextEdit="1"/>
-              </p:cNvSpPr>
-              <p:nvPr>
-                <p:ph idx="1"/>
-              </p:nvPr>
-            </p:nvSpPr>
-            <p:spPr>
-              <a:xfrm>
-                <a:off x="5072743" y="1825624"/>
-                <a:ext cx="6897583" cy="5032375"/>
-              </a:xfrm>
-              <a:blipFill>
-                <a:blip r:embed="rId3"/>
-                <a:stretch>
-                  <a:fillRect l="-1590" t="-1937" r="-795"/>
-                </a:stretch>
-              </a:blipFill>
-            </p:spPr>
-            <p:txBody>
-              <a:bodyPr/>
-              <a:lstStyle/>
-              <a:p>
-                <a:r>
-                  <a:rPr lang="en-US">
-                    <a:noFill/>
-                  </a:rPr>
-                  <a:t> </a:t>
-                </a:r>
-              </a:p>
-            </p:txBody>
-          </p:sp>
-        </mc:Fallback>
-      </mc:AlternateContent>
-      <p:pic>
-        <p:nvPicPr>
-          <p:cNvPr id="5" name="Picture 4" descr="K Means Clustering no Aprendizado de Máquinas — Aprendizado de Máquina —  DATA SCIENCE">
-            <a:extLst>
-              <a:ext uri="{FF2B5EF4-FFF2-40B4-BE49-F238E27FC236}">
-                <a16:creationId xmlns:a16="http://schemas.microsoft.com/office/drawing/2014/main" id="{1340B874-C37C-46C8-FA71-6364C1463C13}"/>
-              </a:ext>
-            </a:extLst>
-          </p:cNvPr>
-          <p:cNvPicPr>
-            <a:picLocks noChangeAspect="1" noChangeArrowheads="1"/>
-          </p:cNvPicPr>
-          <p:nvPr/>
-        </p:nvPicPr>
-        <p:blipFill rotWithShape="1">
-          <a:blip r:embed="rId3">
-            <a:extLst>
-              <a:ext uri="{28A0092B-C50C-407E-A947-70E740481C1C}">
-                <a14:useLocalDpi xmlns:a14="http://schemas.microsoft.com/office/drawing/2010/main" val="0"/>
-              </a:ext>
-            </a:extLst>
-          </a:blip>
-          <a:srcRect l="56603" t="18889" r="3388" b="36825"/>
-          <a:stretch/>
-        </p:blipFill>
-        <p:spPr bwMode="auto">
-          <a:xfrm>
-            <a:off x="838200" y="2111829"/>
-            <a:ext cx="3831771" cy="3037114"/>
-          </a:xfrm>
-          <a:prstGeom prst="rect">
-            <a:avLst/>
-          </a:prstGeom>
-          <a:noFill/>
-          <a:extLst>
-            <a:ext uri="{909E8E84-426E-40DD-AFC4-6F175D3DCCD1}">
-              <a14:hiddenFill xmlns:a14="http://schemas.microsoft.com/office/drawing/2010/main">
-                <a:solidFill>
-                  <a:srgbClr val="FFFFFF"/>
-                </a:solidFill>
-              </a14:hiddenFill>
-            </a:ext>
-          </a:extLst>
-        </p:spPr>
-      </p:pic>
-    </p:spTree>
-    <p:extLst>
-      <p:ext uri="{BB962C8B-B14F-4D97-AF65-F5344CB8AC3E}">
-        <p14:creationId xmlns:p14="http://schemas.microsoft.com/office/powerpoint/2010/main" val="3453578561"/>
       </p:ext>
     </p:extLst>
   </p:cSld>

--- a/slides/C24_kMeans.pptx
+++ b/slides/C24_kMeans.pptx
@@ -6693,8 +6693,8 @@
           </a:p>
         </p:txBody>
       </p:sp>
-      <mc:AlternateContent xmlns:mc="http://schemas.openxmlformats.org/markup-compatibility/2006">
-        <mc:Choice xmlns:a14="http://schemas.microsoft.com/office/drawing/2010/main" Requires="a14">
+      <mc:AlternateContent xmlns:mc="http://schemas.openxmlformats.org/markup-compatibility/2006" xmlns:a14="http://schemas.microsoft.com/office/drawing/2010/main">
+        <mc:Choice Requires="a14">
           <p:sp>
             <p:nvSpPr>
               <p:cNvPr id="3" name="Espaço Reservado para Conteúdo 2">
@@ -6835,7 +6835,7 @@
                     <m:f>
                       <m:fPr>
                         <m:ctrlPr>
-                          <a:rPr lang="pt-BR" smtClean="0">
+                          <a:rPr lang="pt-BR" i="1" smtClean="0">
                             <a:latin typeface="Cambria Math" panose="02040503050406030204" pitchFamily="18" charset="0"/>
                           </a:rPr>
                         </m:ctrlPr>
@@ -6884,7 +6884,7 @@
                     <m:f>
                       <m:fPr>
                         <m:ctrlPr>
-                          <a:rPr lang="pt-BR">
+                          <a:rPr lang="pt-BR" i="1">
                             <a:latin typeface="Cambria Math" panose="02040503050406030204" pitchFamily="18" charset="0"/>
                           </a:rPr>
                         </m:ctrlPr>
@@ -7001,7 +7001,7 @@
             </p:txBody>
           </p:sp>
         </mc:Choice>
-        <mc:Fallback>
+        <mc:Fallback xmlns="">
           <p:sp>
             <p:nvSpPr>
               <p:cNvPr id="3" name="Espaço Reservado para Conteúdo 2">
@@ -8928,7 +8928,7 @@
           <p:nvPr/>
         </p:nvPicPr>
         <p:blipFill rotWithShape="1">
-          <a:blip r:embed="rId2">
+          <a:blip r:embed="rId3">
             <a:extLst>
               <a:ext uri="{28A0092B-C50C-407E-A947-70E740481C1C}">
                 <a14:useLocalDpi xmlns:a14="http://schemas.microsoft.com/office/drawing/2010/main" val="0"/>

--- a/slides/C24_kMeans.pptx
+++ b/slides/C24_kMeans.pptx
@@ -5,7 +5,7 @@
     <p:sldMasterId id="2147483648" r:id="rId1"/>
   </p:sldMasterIdLst>
   <p:notesMasterIdLst>
-    <p:notesMasterId r:id="rId31"/>
+    <p:notesMasterId r:id="rId40"/>
   </p:notesMasterIdLst>
   <p:sldIdLst>
     <p:sldId id="256" r:id="rId2"/>
@@ -21,22 +21,31 @@
     <p:sldId id="296" r:id="rId12"/>
     <p:sldId id="399" r:id="rId13"/>
     <p:sldId id="288" r:id="rId14"/>
-    <p:sldId id="402" r:id="rId15"/>
-    <p:sldId id="297" r:id="rId16"/>
-    <p:sldId id="298" r:id="rId17"/>
-    <p:sldId id="289" r:id="rId18"/>
-    <p:sldId id="290" r:id="rId19"/>
-    <p:sldId id="291" r:id="rId20"/>
-    <p:sldId id="292" r:id="rId21"/>
-    <p:sldId id="299" r:id="rId22"/>
-    <p:sldId id="293" r:id="rId23"/>
-    <p:sldId id="300" r:id="rId24"/>
-    <p:sldId id="398" r:id="rId25"/>
-    <p:sldId id="338" r:id="rId26"/>
-    <p:sldId id="395" r:id="rId27"/>
-    <p:sldId id="396" r:id="rId28"/>
-    <p:sldId id="306" r:id="rId29"/>
-    <p:sldId id="265" r:id="rId30"/>
+    <p:sldId id="297" r:id="rId15"/>
+    <p:sldId id="403" r:id="rId16"/>
+    <p:sldId id="402" r:id="rId17"/>
+    <p:sldId id="298" r:id="rId18"/>
+    <p:sldId id="289" r:id="rId19"/>
+    <p:sldId id="290" r:id="rId20"/>
+    <p:sldId id="291" r:id="rId21"/>
+    <p:sldId id="404" r:id="rId22"/>
+    <p:sldId id="405" r:id="rId23"/>
+    <p:sldId id="406" r:id="rId24"/>
+    <p:sldId id="407" r:id="rId25"/>
+    <p:sldId id="408" r:id="rId26"/>
+    <p:sldId id="409" r:id="rId27"/>
+    <p:sldId id="410" r:id="rId28"/>
+    <p:sldId id="292" r:id="rId29"/>
+    <p:sldId id="299" r:id="rId30"/>
+    <p:sldId id="411" r:id="rId31"/>
+    <p:sldId id="293" r:id="rId32"/>
+    <p:sldId id="300" r:id="rId33"/>
+    <p:sldId id="398" r:id="rId34"/>
+    <p:sldId id="338" r:id="rId35"/>
+    <p:sldId id="395" r:id="rId36"/>
+    <p:sldId id="396" r:id="rId37"/>
+    <p:sldId id="306" r:id="rId38"/>
+    <p:sldId id="265" r:id="rId39"/>
   </p:sldIdLst>
   <p:sldSz cx="12192000" cy="6858000"/>
   <p:notesSz cx="6858000" cy="9144000"/>
@@ -384,7 +393,7 @@
           <a:p>
             <a:fld id="{F430A2A4-8C14-4B1A-AD48-7B6401078BF7}" type="slidenum">
               <a:rPr lang="pt-BR" smtClean="0"/>
-              <a:t>‹#›</a:t>
+              <a:t>‹nº›</a:t>
             </a:fld>
             <a:endParaRPr lang="pt-BR"/>
           </a:p>
@@ -628,614 +637,11 @@
           <a:bodyPr/>
           <a:lstStyle/>
           <a:p>
-            <a:pPr marL="0" marR="0" lvl="0" indent="0" algn="l" defTabSz="914400" rtl="0" eaLnBrk="1" fontAlgn="auto" latinLnBrk="0" hangingPunct="1">
-              <a:lnSpc>
-                <a:spcPct val="100000"/>
-              </a:lnSpc>
-              <a:spcBef>
-                <a:spcPts val="0"/>
-              </a:spcBef>
-              <a:spcAft>
-                <a:spcPts val="0"/>
-              </a:spcAft>
-              <a:buClrTx/>
-              <a:buSzTx/>
-              <a:buFontTx/>
-              <a:buNone/>
-              <a:tabLst/>
-              <a:defRPr/>
-            </a:pPr>
-            <a:r>
-              <a:rPr lang="pt-BR" sz="1200" b="0" dirty="0">
-                <a:solidFill>
-                  <a:srgbClr val="00B0F0"/>
-                </a:solidFill>
-              </a:rPr>
-              <a:t>E</a:t>
-            </a:r>
-            <a:r>
-              <a:rPr lang="pt-BR" dirty="0"/>
-              <a:t>xemplo:</a:t>
-            </a:r>
-            <a:r>
-              <a:rPr lang="pt-BR" baseline="0" dirty="0"/>
-              <a:t> </a:t>
-            </a:r>
-            <a:r>
-              <a:rPr lang="pt-BR" dirty="0"/>
-              <a:t>https://colab.research.google.com/github/zz4fap/t320_aprendizado_de_maquina/blob/main/notebooks/clustering/kmeans_example.ipynb</a:t>
-            </a:r>
-          </a:p>
-          <a:p>
-            <a:pPr marL="0" marR="0" lvl="0" indent="0" algn="l" defTabSz="914400" rtl="0" eaLnBrk="1" fontAlgn="auto" latinLnBrk="0" hangingPunct="1">
-              <a:lnSpc>
-                <a:spcPct val="100000"/>
-              </a:lnSpc>
-              <a:spcBef>
-                <a:spcPts val="0"/>
-              </a:spcBef>
-              <a:spcAft>
-                <a:spcPts val="0"/>
-              </a:spcAft>
-              <a:buClrTx/>
-              <a:buSzTx/>
-              <a:buFontTx/>
-              <a:buNone/>
-              <a:tabLst/>
-              <a:defRPr/>
-            </a:pPr>
-            <a:endParaRPr lang="pt-BR" sz="1200" b="0" dirty="0">
-              <a:solidFill>
-                <a:srgbClr val="00B0F0"/>
-              </a:solidFill>
-            </a:endParaRPr>
-          </a:p>
-          <a:p>
-            <a:pPr marL="0" marR="0" lvl="0" indent="0" algn="l" defTabSz="914400" rtl="0" eaLnBrk="1" fontAlgn="auto" latinLnBrk="0" hangingPunct="1">
-              <a:lnSpc>
-                <a:spcPct val="100000"/>
-              </a:lnSpc>
-              <a:spcBef>
-                <a:spcPts val="0"/>
-              </a:spcBef>
-              <a:spcAft>
-                <a:spcPts val="0"/>
-              </a:spcAft>
-              <a:buClrTx/>
-              <a:buSzTx/>
-              <a:buFontTx/>
-              <a:buNone/>
-              <a:tabLst/>
-              <a:defRPr/>
-            </a:pPr>
-            <a:endParaRPr lang="pt-BR" sz="1200" b="0" dirty="0">
-              <a:solidFill>
-                <a:srgbClr val="00B0F0"/>
-              </a:solidFill>
-            </a:endParaRPr>
-          </a:p>
-          <a:p>
-            <a:r>
-              <a:rPr lang="pt-BR" dirty="0"/>
-              <a:t>Identificar o melhor número de clusters (</a:t>
-            </a:r>
-            <a:r>
-              <a:rPr lang="pt-BR" dirty="0" err="1"/>
-              <a:t>kk</a:t>
-            </a:r>
-            <a:r>
-              <a:rPr lang="pt-BR" dirty="0"/>
-              <a:t>) no K-</a:t>
-            </a:r>
-            <a:r>
-              <a:rPr lang="pt-BR" dirty="0" err="1"/>
-              <a:t>Means</a:t>
-            </a:r>
-            <a:r>
-              <a:rPr lang="pt-BR" dirty="0"/>
-              <a:t> é um passo fundamental para garantir a eficiência e a utilidade da clusterização. Existem várias abordagens para determinar o valor ideal de </a:t>
-            </a:r>
-            <a:r>
-              <a:rPr lang="pt-BR" dirty="0" err="1"/>
-              <a:t>kk</a:t>
-            </a:r>
-            <a:r>
-              <a:rPr lang="pt-BR" dirty="0"/>
-              <a:t>. As mais comuns incluem:</a:t>
-            </a:r>
-          </a:p>
-          <a:p>
-            <a:r>
-              <a:rPr lang="pt-BR" b="1" dirty="0"/>
-              <a:t>1. Método do Cotovelo (</a:t>
-            </a:r>
-            <a:r>
-              <a:rPr lang="pt-BR" b="1" dirty="0" err="1"/>
-              <a:t>Elbow</a:t>
-            </a:r>
-            <a:r>
-              <a:rPr lang="pt-BR" b="1" dirty="0"/>
-              <a:t> </a:t>
-            </a:r>
-            <a:r>
-              <a:rPr lang="pt-BR" b="1" dirty="0" err="1"/>
-              <a:t>Method</a:t>
-            </a:r>
-            <a:r>
-              <a:rPr lang="pt-BR" b="1" dirty="0"/>
-              <a:t>)</a:t>
-            </a:r>
-          </a:p>
-          <a:p>
-            <a:r>
-              <a:rPr lang="pt-BR" dirty="0"/>
-              <a:t>Este método analisa a variação da </a:t>
-            </a:r>
-            <a:r>
-              <a:rPr lang="pt-BR" b="1" dirty="0"/>
-              <a:t>inércia </a:t>
-            </a:r>
-            <a:r>
-              <a:rPr lang="pt-BR" b="1" dirty="0" err="1"/>
-              <a:t>intra-cluster</a:t>
-            </a:r>
-            <a:r>
-              <a:rPr lang="pt-BR" dirty="0"/>
-              <a:t> (ou soma dos erros quadráticos dentro dos clusters, WSSWSS) à medida que o número de clusters aumenta.</a:t>
-            </a:r>
-          </a:p>
-          <a:p>
-            <a:r>
-              <a:rPr lang="pt-BR" b="1" dirty="0"/>
-              <a:t>Passos:</a:t>
-            </a:r>
-          </a:p>
-          <a:p>
-            <a:pPr>
-              <a:buFont typeface="+mj-lt"/>
-              <a:buAutoNum type="arabicPeriod"/>
-            </a:pPr>
-            <a:r>
-              <a:rPr lang="pt-BR" dirty="0"/>
-              <a:t>Execute o K-</a:t>
-            </a:r>
-            <a:r>
-              <a:rPr lang="pt-BR" dirty="0" err="1"/>
-              <a:t>Means</a:t>
-            </a:r>
-            <a:r>
-              <a:rPr lang="pt-BR" dirty="0"/>
-              <a:t> com diferentes valores de </a:t>
-            </a:r>
-            <a:r>
-              <a:rPr lang="pt-BR" dirty="0" err="1"/>
-              <a:t>kk</a:t>
-            </a:r>
-            <a:r>
-              <a:rPr lang="pt-BR" dirty="0"/>
-              <a:t> (por exemplo, k=1k=1 a k=10k=10).</a:t>
-            </a:r>
-          </a:p>
-          <a:p>
-            <a:pPr>
-              <a:buFont typeface="+mj-lt"/>
-              <a:buAutoNum type="arabicPeriod"/>
-            </a:pPr>
-            <a:r>
-              <a:rPr lang="pt-BR" dirty="0"/>
-              <a:t>Calcule o WSSWSS para cada valor de </a:t>
-            </a:r>
-            <a:r>
-              <a:rPr lang="pt-BR" dirty="0" err="1"/>
-              <a:t>kk</a:t>
-            </a:r>
-            <a:r>
-              <a:rPr lang="pt-BR" dirty="0"/>
-              <a:t>.</a:t>
-            </a:r>
-          </a:p>
-          <a:p>
-            <a:pPr>
-              <a:buFont typeface="+mj-lt"/>
-              <a:buAutoNum type="arabicPeriod"/>
-            </a:pPr>
-            <a:r>
-              <a:rPr lang="pt-BR" dirty="0"/>
-              <a:t>Trace um gráfico do WSSWSS em função de </a:t>
-            </a:r>
-            <a:r>
-              <a:rPr lang="pt-BR" dirty="0" err="1"/>
-              <a:t>kk</a:t>
-            </a:r>
-            <a:r>
-              <a:rPr lang="pt-BR" dirty="0"/>
-              <a:t>.</a:t>
-            </a:r>
-          </a:p>
-          <a:p>
-            <a:pPr>
-              <a:buFont typeface="+mj-lt"/>
-              <a:buAutoNum type="arabicPeriod"/>
-            </a:pPr>
-            <a:r>
-              <a:rPr lang="pt-BR" dirty="0"/>
-              <a:t>Identifique o "cotovelo" no gráfico — o ponto onde a redução no WSSWSS se torna menos significativa.</a:t>
-            </a:r>
-          </a:p>
-          <a:p>
-            <a:r>
-              <a:rPr lang="pt-BR" b="1" dirty="0"/>
-              <a:t>Observação:</a:t>
-            </a:r>
-          </a:p>
-          <a:p>
-            <a:r>
-              <a:rPr lang="pt-BR" dirty="0"/>
-              <a:t>O "cotovelo" indica que aumentar </a:t>
-            </a:r>
-            <a:r>
-              <a:rPr lang="pt-BR" dirty="0" err="1"/>
-              <a:t>kk</a:t>
-            </a:r>
-            <a:r>
-              <a:rPr lang="pt-BR" dirty="0"/>
-              <a:t> além desse ponto não resulta em uma melhoria substancial na compactação dos clusters.</a:t>
-            </a:r>
-          </a:p>
-          <a:p>
-            <a:r>
-              <a:rPr lang="pt-BR" b="1" dirty="0"/>
-              <a:t>2. Coeficiente de Silhueta (</a:t>
-            </a:r>
-            <a:r>
-              <a:rPr lang="pt-BR" b="1" dirty="0" err="1"/>
-              <a:t>Silhouette</a:t>
-            </a:r>
-            <a:r>
-              <a:rPr lang="pt-BR" b="1" dirty="0"/>
-              <a:t> Score)</a:t>
-            </a:r>
-          </a:p>
-          <a:p>
-            <a:r>
-              <a:rPr lang="pt-BR" dirty="0"/>
-              <a:t>O coeficiente de silhueta avalia a </a:t>
-            </a:r>
-            <a:r>
-              <a:rPr lang="pt-BR" b="1" dirty="0"/>
-              <a:t>qualidade da clusterização</a:t>
-            </a:r>
-            <a:r>
-              <a:rPr lang="pt-BR" dirty="0"/>
-              <a:t>, considerando a coesão dentro dos clusters e a separação entre eles.</a:t>
-            </a:r>
-          </a:p>
-          <a:p>
-            <a:pPr>
-              <a:buFont typeface="Arial" panose="020B0604020202020204" pitchFamily="34" charset="0"/>
-              <a:buChar char="•"/>
-            </a:pPr>
-            <a:r>
-              <a:rPr lang="pt-BR" dirty="0"/>
-              <a:t>s=b−</a:t>
-            </a:r>
-            <a:r>
-              <a:rPr lang="pt-BR" dirty="0" err="1"/>
-              <a:t>amax</a:t>
-            </a:r>
-            <a:r>
-              <a:rPr lang="pt-BR" dirty="0"/>
-              <a:t>⁡(</a:t>
-            </a:r>
-            <a:r>
-              <a:rPr lang="pt-BR" dirty="0" err="1"/>
-              <a:t>a,b</a:t>
-            </a:r>
-            <a:r>
-              <a:rPr lang="pt-BR" dirty="0"/>
-              <a:t>)s = \</a:t>
-            </a:r>
-            <a:r>
-              <a:rPr lang="pt-BR" dirty="0" err="1"/>
-              <a:t>frac</a:t>
-            </a:r>
-            <a:r>
-              <a:rPr lang="pt-BR" dirty="0"/>
-              <a:t>{b - a}{\</a:t>
-            </a:r>
-            <a:r>
-              <a:rPr lang="pt-BR" dirty="0" err="1"/>
-              <a:t>max</a:t>
-            </a:r>
-            <a:r>
-              <a:rPr lang="pt-BR" dirty="0"/>
-              <a:t>(a, b)} aa: distância média de um ponto para os outros pontos do mesmo cluster.</a:t>
-            </a:r>
-          </a:p>
-          <a:p>
-            <a:pPr>
-              <a:buFont typeface="Arial" panose="020B0604020202020204" pitchFamily="34" charset="0"/>
-              <a:buChar char="•"/>
-            </a:pPr>
-            <a:r>
-              <a:rPr lang="pt-BR" dirty="0" err="1"/>
-              <a:t>bb</a:t>
-            </a:r>
-            <a:r>
-              <a:rPr lang="pt-BR" dirty="0"/>
-              <a:t>: distância média de um ponto para os pontos do cluster mais próximo.</a:t>
-            </a:r>
-          </a:p>
-          <a:p>
-            <a:r>
-              <a:rPr lang="pt-BR" b="1" dirty="0"/>
-              <a:t>Passos:</a:t>
-            </a:r>
-          </a:p>
-          <a:p>
-            <a:pPr>
-              <a:buFont typeface="+mj-lt"/>
-              <a:buAutoNum type="arabicPeriod"/>
-            </a:pPr>
-            <a:r>
-              <a:rPr lang="pt-BR" dirty="0"/>
-              <a:t>Execute o K-</a:t>
-            </a:r>
-            <a:r>
-              <a:rPr lang="pt-BR" dirty="0" err="1"/>
-              <a:t>Means</a:t>
-            </a:r>
-            <a:r>
-              <a:rPr lang="pt-BR" dirty="0"/>
-              <a:t> para diferentes valores de </a:t>
-            </a:r>
-            <a:r>
-              <a:rPr lang="pt-BR" dirty="0" err="1"/>
-              <a:t>kk</a:t>
-            </a:r>
-            <a:r>
-              <a:rPr lang="pt-BR" dirty="0"/>
-              <a:t>.</a:t>
-            </a:r>
-          </a:p>
-          <a:p>
-            <a:pPr>
-              <a:buFont typeface="+mj-lt"/>
-              <a:buAutoNum type="arabicPeriod"/>
-            </a:pPr>
-            <a:r>
-              <a:rPr lang="pt-BR" dirty="0"/>
-              <a:t>Calcule o coeficiente de silhueta para cada ponto e, em seguida, a média para o conjunto.</a:t>
-            </a:r>
-          </a:p>
-          <a:p>
-            <a:pPr>
-              <a:buFont typeface="+mj-lt"/>
-              <a:buAutoNum type="arabicPeriod"/>
-            </a:pPr>
-            <a:r>
-              <a:rPr lang="pt-BR" dirty="0"/>
-              <a:t>Escolha </a:t>
-            </a:r>
-            <a:r>
-              <a:rPr lang="pt-BR" dirty="0" err="1"/>
-              <a:t>kk</a:t>
-            </a:r>
-            <a:r>
-              <a:rPr lang="pt-BR" dirty="0"/>
-              <a:t> que maximize o valor médio do coeficiente de silhueta.</a:t>
-            </a:r>
-          </a:p>
-          <a:p>
-            <a:r>
-              <a:rPr lang="pt-BR" b="1" dirty="0"/>
-              <a:t>3. Critério Gap </a:t>
-            </a:r>
-            <a:r>
-              <a:rPr lang="pt-BR" b="1" dirty="0" err="1"/>
-              <a:t>Statistic</a:t>
-            </a:r>
-            <a:endParaRPr lang="pt-BR" b="1" dirty="0"/>
-          </a:p>
-          <a:p>
-            <a:r>
-              <a:rPr lang="pt-BR" dirty="0"/>
-              <a:t>Este método compara a dispersão dos clusters no conjunto de dados com uma dispersão esperada de um conjunto de dados gerado aleatoriamente.</a:t>
-            </a:r>
-          </a:p>
-          <a:p>
-            <a:r>
-              <a:rPr lang="pt-BR" b="1" dirty="0"/>
-              <a:t>Passos:</a:t>
-            </a:r>
-          </a:p>
-          <a:p>
-            <a:pPr>
-              <a:buFont typeface="+mj-lt"/>
-              <a:buAutoNum type="arabicPeriod"/>
-            </a:pPr>
-            <a:r>
-              <a:rPr lang="pt-BR" dirty="0"/>
-              <a:t>Execute o K-</a:t>
-            </a:r>
-            <a:r>
-              <a:rPr lang="pt-BR" dirty="0" err="1"/>
-              <a:t>Means</a:t>
-            </a:r>
-            <a:r>
-              <a:rPr lang="pt-BR" dirty="0"/>
-              <a:t> para diferentes valores de </a:t>
-            </a:r>
-            <a:r>
-              <a:rPr lang="pt-BR" dirty="0" err="1"/>
-              <a:t>kk</a:t>
-            </a:r>
-            <a:r>
-              <a:rPr lang="pt-BR" dirty="0"/>
-              <a:t> no conjunto de dados real.</a:t>
-            </a:r>
-          </a:p>
-          <a:p>
-            <a:pPr>
-              <a:buFont typeface="+mj-lt"/>
-              <a:buAutoNum type="arabicPeriod"/>
-            </a:pPr>
-            <a:r>
-              <a:rPr lang="pt-BR" dirty="0"/>
-              <a:t>Gere um conjunto de dados aleatório com a mesma distribuição e calcule a dispersão dos clusters.</a:t>
-            </a:r>
-          </a:p>
-          <a:p>
-            <a:pPr>
-              <a:buFont typeface="+mj-lt"/>
-              <a:buAutoNum type="arabicPeriod"/>
-            </a:pPr>
-            <a:r>
-              <a:rPr lang="pt-BR" dirty="0"/>
-              <a:t>Compare as dispersões e encontre </a:t>
-            </a:r>
-            <a:r>
-              <a:rPr lang="pt-BR" dirty="0" err="1"/>
-              <a:t>kk</a:t>
-            </a:r>
-            <a:r>
-              <a:rPr lang="pt-BR" dirty="0"/>
-              <a:t> que maximize a diferença (gap) entre os dois conjuntos.</a:t>
-            </a:r>
-          </a:p>
-          <a:p>
-            <a:r>
-              <a:rPr lang="pt-BR" b="1" dirty="0"/>
-              <a:t>4. Validação Cruzada</a:t>
-            </a:r>
-          </a:p>
-          <a:p>
-            <a:r>
-              <a:rPr lang="pt-BR" dirty="0"/>
-              <a:t>Divida o conjunto de dados em subconjuntos e avalie a consistência dos clusters em diferentes amostras.</a:t>
-            </a:r>
-          </a:p>
-          <a:p>
-            <a:r>
-              <a:rPr lang="pt-BR" b="1" dirty="0"/>
-              <a:t>5. Métodos Automáticos, como X-</a:t>
-            </a:r>
-            <a:r>
-              <a:rPr lang="pt-BR" b="1" dirty="0" err="1"/>
-              <a:t>Means</a:t>
-            </a:r>
-            <a:r>
-              <a:rPr lang="pt-BR" b="1" dirty="0"/>
-              <a:t> e G-</a:t>
-            </a:r>
-            <a:r>
-              <a:rPr lang="pt-BR" b="1" dirty="0" err="1"/>
-              <a:t>Means</a:t>
-            </a:r>
-            <a:endParaRPr lang="pt-BR" b="1" dirty="0"/>
-          </a:p>
-          <a:p>
-            <a:pPr>
-              <a:buFont typeface="Arial" panose="020B0604020202020204" pitchFamily="34" charset="0"/>
-              <a:buChar char="•"/>
-            </a:pPr>
-            <a:r>
-              <a:rPr lang="pt-BR" b="1" dirty="0"/>
-              <a:t>X-</a:t>
-            </a:r>
-            <a:r>
-              <a:rPr lang="pt-BR" b="1" dirty="0" err="1"/>
-              <a:t>Means</a:t>
-            </a:r>
-            <a:r>
-              <a:rPr lang="pt-BR" dirty="0"/>
-              <a:t>: Extensão do K-</a:t>
-            </a:r>
-            <a:r>
-              <a:rPr lang="pt-BR" dirty="0" err="1"/>
-              <a:t>Means</a:t>
-            </a:r>
-            <a:r>
-              <a:rPr lang="pt-BR" dirty="0"/>
-              <a:t> que escolhe automaticamente </a:t>
-            </a:r>
-            <a:r>
-              <a:rPr lang="pt-BR" dirty="0" err="1"/>
-              <a:t>kk</a:t>
-            </a:r>
-            <a:r>
-              <a:rPr lang="pt-BR" dirty="0"/>
-              <a:t> otimizando o critério Bayesiano.</a:t>
-            </a:r>
-          </a:p>
-          <a:p>
-            <a:pPr>
-              <a:buFont typeface="Arial" panose="020B0604020202020204" pitchFamily="34" charset="0"/>
-              <a:buChar char="•"/>
-            </a:pPr>
-            <a:r>
-              <a:rPr lang="pt-BR" b="1" dirty="0"/>
-              <a:t>G-</a:t>
-            </a:r>
-            <a:r>
-              <a:rPr lang="pt-BR" b="1" dirty="0" err="1"/>
-              <a:t>Means</a:t>
-            </a:r>
-            <a:r>
-              <a:rPr lang="pt-BR" dirty="0"/>
-              <a:t>: Usa testes estatísticos para determinar se os clusters seguem uma distribuição gaussiana.</a:t>
-            </a:r>
-          </a:p>
-          <a:p>
-            <a:r>
-              <a:rPr lang="pt-BR" b="1" dirty="0"/>
-              <a:t>Considerações:</a:t>
-            </a:r>
-          </a:p>
-          <a:p>
-            <a:pPr>
-              <a:buFont typeface="Arial" panose="020B0604020202020204" pitchFamily="34" charset="0"/>
-              <a:buChar char="•"/>
-            </a:pPr>
-            <a:r>
-              <a:rPr lang="pt-BR" b="1" dirty="0"/>
-              <a:t>Dimensão dos dados</a:t>
-            </a:r>
-            <a:r>
-              <a:rPr lang="pt-BR" dirty="0"/>
-              <a:t>: Em alta dimensionalidade, os métodos podem se tornar menos claros devido à maldição da dimensionalidade.</a:t>
-            </a:r>
-          </a:p>
-          <a:p>
-            <a:pPr>
-              <a:buFont typeface="Arial" panose="020B0604020202020204" pitchFamily="34" charset="0"/>
-              <a:buChar char="•"/>
-            </a:pPr>
-            <a:r>
-              <a:rPr lang="pt-BR" b="1" dirty="0"/>
-              <a:t>Interpretação</a:t>
-            </a:r>
-            <a:r>
-              <a:rPr lang="pt-BR" dirty="0"/>
-              <a:t>: O número de clusters deve fazer sentido no contexto do problema, além de ser estatisticamente válido.</a:t>
-            </a:r>
-          </a:p>
-          <a:p>
-            <a:r>
-              <a:rPr lang="pt-BR" dirty="0"/>
-              <a:t>Combinar múltiplos métodos pode ser útil para confirmar a escolha do melhor </a:t>
-            </a:r>
-            <a:r>
-              <a:rPr lang="pt-BR" dirty="0" err="1"/>
-              <a:t>kk</a:t>
-            </a:r>
-            <a:r>
-              <a:rPr lang="pt-BR" dirty="0"/>
-              <a:t>.</a:t>
-            </a:r>
-          </a:p>
-          <a:p>
-            <a:endParaRPr lang="en-US" dirty="0"/>
+            <a:r>
+              <a:rPr lang="pt-BR" smtClean="0"/>
+              <a:t>https://colab.research.google.com/github/zz4fap/tp557-iot-ml/blob/main/examples/k_means_centros_de_distribui%C3%A7%C3%A3o.ipynb</a:t>
+            </a:r>
+            <a:endParaRPr lang="pt-BR"/>
           </a:p>
         </p:txBody>
       </p:sp>
@@ -1256,7 +662,7 @@
           <a:p>
             <a:fld id="{F430A2A4-8C14-4B1A-AD48-7B6401078BF7}" type="slidenum">
               <a:rPr lang="pt-BR" smtClean="0"/>
-              <a:t>22</a:t>
+              <a:t>30</a:t>
             </a:fld>
             <a:endParaRPr lang="pt-BR"/>
           </a:p>
@@ -1265,7 +671,7 @@
     </p:spTree>
     <p:extLst>
       <p:ext uri="{BB962C8B-B14F-4D97-AF65-F5344CB8AC3E}">
-        <p14:creationId xmlns:p14="http://schemas.microsoft.com/office/powerpoint/2010/main" val="3992294165"/>
+        <p14:creationId xmlns:p14="http://schemas.microsoft.com/office/powerpoint/2010/main" val="2397769607"/>
       </p:ext>
     </p:extLst>
   </p:cSld>
@@ -1294,6 +700,697 @@
       </p:grpSpPr>
       <p:sp>
         <p:nvSpPr>
+          <p:cNvPr id="2" name="Espaço Reservado para Imagem de Slide 1"/>
+          <p:cNvSpPr>
+            <a:spLocks noGrp="1" noRot="1" noChangeAspect="1"/>
+          </p:cNvSpPr>
+          <p:nvPr>
+            <p:ph type="sldImg"/>
+          </p:nvPr>
+        </p:nvSpPr>
+        <p:spPr/>
+      </p:sp>
+      <p:sp>
+        <p:nvSpPr>
+          <p:cNvPr id="3" name="Espaço Reservado para Anotações 2"/>
+          <p:cNvSpPr>
+            <a:spLocks noGrp="1"/>
+          </p:cNvSpPr>
+          <p:nvPr>
+            <p:ph type="body" idx="1"/>
+          </p:nvPr>
+        </p:nvSpPr>
+        <p:spPr/>
+        <p:txBody>
+          <a:bodyPr/>
+          <a:lstStyle/>
+          <a:p>
+            <a:pPr marL="0" marR="0" lvl="0" indent="0" algn="l" defTabSz="914400" rtl="0" eaLnBrk="1" fontAlgn="auto" latinLnBrk="0" hangingPunct="1">
+              <a:lnSpc>
+                <a:spcPct val="100000"/>
+              </a:lnSpc>
+              <a:spcBef>
+                <a:spcPts val="0"/>
+              </a:spcBef>
+              <a:spcAft>
+                <a:spcPts val="0"/>
+              </a:spcAft>
+              <a:buClrTx/>
+              <a:buSzTx/>
+              <a:buFontTx/>
+              <a:buNone/>
+              <a:tabLst/>
+              <a:defRPr/>
+            </a:pPr>
+            <a:r>
+              <a:rPr lang="pt-BR" sz="1200" b="0" dirty="0">
+                <a:solidFill>
+                  <a:srgbClr val="00B0F0"/>
+                </a:solidFill>
+              </a:rPr>
+              <a:t>E</a:t>
+            </a:r>
+            <a:r>
+              <a:rPr lang="pt-BR" dirty="0"/>
+              <a:t>xemplo:</a:t>
+            </a:r>
+            <a:r>
+              <a:rPr lang="pt-BR" baseline="0" dirty="0"/>
+              <a:t> </a:t>
+            </a:r>
+            <a:r>
+              <a:rPr lang="pt-BR" dirty="0"/>
+              <a:t>https://colab.research.google.com/github/zz4fap/t320_aprendizado_de_maquina/blob/main/notebooks/clustering/kmeans_example.ipynb</a:t>
+            </a:r>
+          </a:p>
+          <a:p>
+            <a:pPr marL="0" marR="0" lvl="0" indent="0" algn="l" defTabSz="914400" rtl="0" eaLnBrk="1" fontAlgn="auto" latinLnBrk="0" hangingPunct="1">
+              <a:lnSpc>
+                <a:spcPct val="100000"/>
+              </a:lnSpc>
+              <a:spcBef>
+                <a:spcPts val="0"/>
+              </a:spcBef>
+              <a:spcAft>
+                <a:spcPts val="0"/>
+              </a:spcAft>
+              <a:buClrTx/>
+              <a:buSzTx/>
+              <a:buFontTx/>
+              <a:buNone/>
+              <a:tabLst/>
+              <a:defRPr/>
+            </a:pPr>
+            <a:endParaRPr lang="pt-BR" sz="1200" b="0" dirty="0">
+              <a:solidFill>
+                <a:srgbClr val="00B0F0"/>
+              </a:solidFill>
+            </a:endParaRPr>
+          </a:p>
+          <a:p>
+            <a:pPr marL="0" marR="0" lvl="0" indent="0" algn="l" defTabSz="914400" rtl="0" eaLnBrk="1" fontAlgn="auto" latinLnBrk="0" hangingPunct="1">
+              <a:lnSpc>
+                <a:spcPct val="100000"/>
+              </a:lnSpc>
+              <a:spcBef>
+                <a:spcPts val="0"/>
+              </a:spcBef>
+              <a:spcAft>
+                <a:spcPts val="0"/>
+              </a:spcAft>
+              <a:buClrTx/>
+              <a:buSzTx/>
+              <a:buFontTx/>
+              <a:buNone/>
+              <a:tabLst/>
+              <a:defRPr/>
+            </a:pPr>
+            <a:endParaRPr lang="pt-BR" sz="1200" b="0" dirty="0">
+              <a:solidFill>
+                <a:srgbClr val="00B0F0"/>
+              </a:solidFill>
+            </a:endParaRPr>
+          </a:p>
+          <a:p>
+            <a:r>
+              <a:rPr lang="pt-BR" dirty="0"/>
+              <a:t>Identificar o melhor número de clusters (</a:t>
+            </a:r>
+            <a:r>
+              <a:rPr lang="pt-BR" dirty="0" err="1"/>
+              <a:t>kk</a:t>
+            </a:r>
+            <a:r>
+              <a:rPr lang="pt-BR" dirty="0"/>
+              <a:t>) no K-</a:t>
+            </a:r>
+            <a:r>
+              <a:rPr lang="pt-BR" dirty="0" err="1"/>
+              <a:t>Means</a:t>
+            </a:r>
+            <a:r>
+              <a:rPr lang="pt-BR" dirty="0"/>
+              <a:t> é um passo fundamental para garantir a eficiência e a utilidade da clusterização. Existem várias abordagens para determinar o valor ideal de </a:t>
+            </a:r>
+            <a:r>
+              <a:rPr lang="pt-BR" dirty="0" err="1"/>
+              <a:t>kk</a:t>
+            </a:r>
+            <a:r>
+              <a:rPr lang="pt-BR" dirty="0"/>
+              <a:t>. As mais comuns incluem:</a:t>
+            </a:r>
+          </a:p>
+          <a:p>
+            <a:r>
+              <a:rPr lang="pt-BR" b="1" dirty="0"/>
+              <a:t>1. Método do Cotovelo (</a:t>
+            </a:r>
+            <a:r>
+              <a:rPr lang="pt-BR" b="1" dirty="0" err="1"/>
+              <a:t>Elbow</a:t>
+            </a:r>
+            <a:r>
+              <a:rPr lang="pt-BR" b="1" dirty="0"/>
+              <a:t> </a:t>
+            </a:r>
+            <a:r>
+              <a:rPr lang="pt-BR" b="1" dirty="0" err="1"/>
+              <a:t>Method</a:t>
+            </a:r>
+            <a:r>
+              <a:rPr lang="pt-BR" b="1" dirty="0"/>
+              <a:t>)</a:t>
+            </a:r>
+          </a:p>
+          <a:p>
+            <a:r>
+              <a:rPr lang="pt-BR" dirty="0"/>
+              <a:t>Este método analisa a variação da </a:t>
+            </a:r>
+            <a:r>
+              <a:rPr lang="pt-BR" b="1" dirty="0"/>
+              <a:t>inércia </a:t>
+            </a:r>
+            <a:r>
+              <a:rPr lang="pt-BR" b="1" dirty="0" err="1"/>
+              <a:t>intra-cluster</a:t>
+            </a:r>
+            <a:r>
+              <a:rPr lang="pt-BR" dirty="0"/>
+              <a:t> (ou soma dos erros quadráticos dentro dos clusters, WSSWSS) à medida que o número de clusters aumenta.</a:t>
+            </a:r>
+          </a:p>
+          <a:p>
+            <a:r>
+              <a:rPr lang="pt-BR" b="1" dirty="0"/>
+              <a:t>Passos:</a:t>
+            </a:r>
+          </a:p>
+          <a:p>
+            <a:pPr>
+              <a:buFont typeface="+mj-lt"/>
+              <a:buAutoNum type="arabicPeriod"/>
+            </a:pPr>
+            <a:r>
+              <a:rPr lang="pt-BR" dirty="0"/>
+              <a:t>Execute o K-</a:t>
+            </a:r>
+            <a:r>
+              <a:rPr lang="pt-BR" dirty="0" err="1"/>
+              <a:t>Means</a:t>
+            </a:r>
+            <a:r>
+              <a:rPr lang="pt-BR" dirty="0"/>
+              <a:t> com diferentes valores de </a:t>
+            </a:r>
+            <a:r>
+              <a:rPr lang="pt-BR" dirty="0" err="1"/>
+              <a:t>kk</a:t>
+            </a:r>
+            <a:r>
+              <a:rPr lang="pt-BR" dirty="0"/>
+              <a:t> (por exemplo, k=1k=1 a k=10k=10).</a:t>
+            </a:r>
+          </a:p>
+          <a:p>
+            <a:pPr>
+              <a:buFont typeface="+mj-lt"/>
+              <a:buAutoNum type="arabicPeriod"/>
+            </a:pPr>
+            <a:r>
+              <a:rPr lang="pt-BR" dirty="0"/>
+              <a:t>Calcule o WSSWSS para cada valor de </a:t>
+            </a:r>
+            <a:r>
+              <a:rPr lang="pt-BR" dirty="0" err="1"/>
+              <a:t>kk</a:t>
+            </a:r>
+            <a:r>
+              <a:rPr lang="pt-BR" dirty="0"/>
+              <a:t>.</a:t>
+            </a:r>
+          </a:p>
+          <a:p>
+            <a:pPr>
+              <a:buFont typeface="+mj-lt"/>
+              <a:buAutoNum type="arabicPeriod"/>
+            </a:pPr>
+            <a:r>
+              <a:rPr lang="pt-BR" dirty="0"/>
+              <a:t>Trace um gráfico do WSSWSS em função de </a:t>
+            </a:r>
+            <a:r>
+              <a:rPr lang="pt-BR" dirty="0" err="1"/>
+              <a:t>kk</a:t>
+            </a:r>
+            <a:r>
+              <a:rPr lang="pt-BR" dirty="0"/>
+              <a:t>.</a:t>
+            </a:r>
+          </a:p>
+          <a:p>
+            <a:pPr>
+              <a:buFont typeface="+mj-lt"/>
+              <a:buAutoNum type="arabicPeriod"/>
+            </a:pPr>
+            <a:r>
+              <a:rPr lang="pt-BR" dirty="0"/>
+              <a:t>Identifique o "cotovelo" no gráfico — o ponto onde a redução no WSSWSS se torna menos significativa.</a:t>
+            </a:r>
+          </a:p>
+          <a:p>
+            <a:r>
+              <a:rPr lang="pt-BR" b="1" dirty="0"/>
+              <a:t>Observação:</a:t>
+            </a:r>
+          </a:p>
+          <a:p>
+            <a:r>
+              <a:rPr lang="pt-BR" dirty="0"/>
+              <a:t>O "cotovelo" indica que aumentar </a:t>
+            </a:r>
+            <a:r>
+              <a:rPr lang="pt-BR" dirty="0" err="1"/>
+              <a:t>kk</a:t>
+            </a:r>
+            <a:r>
+              <a:rPr lang="pt-BR" dirty="0"/>
+              <a:t> além desse ponto não resulta em uma melhoria substancial na compactação dos clusters.</a:t>
+            </a:r>
+          </a:p>
+          <a:p>
+            <a:r>
+              <a:rPr lang="pt-BR" b="1" dirty="0"/>
+              <a:t>2. Coeficiente de Silhueta (</a:t>
+            </a:r>
+            <a:r>
+              <a:rPr lang="pt-BR" b="1" dirty="0" err="1"/>
+              <a:t>Silhouette</a:t>
+            </a:r>
+            <a:r>
+              <a:rPr lang="pt-BR" b="1" dirty="0"/>
+              <a:t> Score)</a:t>
+            </a:r>
+          </a:p>
+          <a:p>
+            <a:r>
+              <a:rPr lang="pt-BR" dirty="0"/>
+              <a:t>O coeficiente de silhueta avalia a </a:t>
+            </a:r>
+            <a:r>
+              <a:rPr lang="pt-BR" b="1" dirty="0"/>
+              <a:t>qualidade da clusterização</a:t>
+            </a:r>
+            <a:r>
+              <a:rPr lang="pt-BR" dirty="0"/>
+              <a:t>, considerando a coesão dentro dos clusters e a separação entre eles.</a:t>
+            </a:r>
+          </a:p>
+          <a:p>
+            <a:pPr>
+              <a:buFont typeface="Arial" panose="020B0604020202020204" pitchFamily="34" charset="0"/>
+              <a:buChar char="•"/>
+            </a:pPr>
+            <a:r>
+              <a:rPr lang="pt-BR" dirty="0"/>
+              <a:t>s=b−</a:t>
+            </a:r>
+            <a:r>
+              <a:rPr lang="pt-BR" dirty="0" err="1"/>
+              <a:t>amax</a:t>
+            </a:r>
+            <a:r>
+              <a:rPr lang="pt-BR" dirty="0"/>
+              <a:t>⁡(</a:t>
+            </a:r>
+            <a:r>
+              <a:rPr lang="pt-BR" dirty="0" err="1"/>
+              <a:t>a,b</a:t>
+            </a:r>
+            <a:r>
+              <a:rPr lang="pt-BR" dirty="0"/>
+              <a:t>)s = \</a:t>
+            </a:r>
+            <a:r>
+              <a:rPr lang="pt-BR" dirty="0" err="1"/>
+              <a:t>frac</a:t>
+            </a:r>
+            <a:r>
+              <a:rPr lang="pt-BR" dirty="0"/>
+              <a:t>{b - a}{\</a:t>
+            </a:r>
+            <a:r>
+              <a:rPr lang="pt-BR" dirty="0" err="1"/>
+              <a:t>max</a:t>
+            </a:r>
+            <a:r>
+              <a:rPr lang="pt-BR" dirty="0"/>
+              <a:t>(a, b)} aa: distância média de um ponto para os outros pontos do mesmo cluster.</a:t>
+            </a:r>
+          </a:p>
+          <a:p>
+            <a:pPr>
+              <a:buFont typeface="Arial" panose="020B0604020202020204" pitchFamily="34" charset="0"/>
+              <a:buChar char="•"/>
+            </a:pPr>
+            <a:r>
+              <a:rPr lang="pt-BR" dirty="0" err="1"/>
+              <a:t>bb</a:t>
+            </a:r>
+            <a:r>
+              <a:rPr lang="pt-BR" dirty="0"/>
+              <a:t>: distância média de um ponto para os pontos do cluster mais próximo.</a:t>
+            </a:r>
+          </a:p>
+          <a:p>
+            <a:r>
+              <a:rPr lang="pt-BR" b="1" dirty="0"/>
+              <a:t>Passos:</a:t>
+            </a:r>
+          </a:p>
+          <a:p>
+            <a:pPr>
+              <a:buFont typeface="+mj-lt"/>
+              <a:buAutoNum type="arabicPeriod"/>
+            </a:pPr>
+            <a:r>
+              <a:rPr lang="pt-BR" dirty="0"/>
+              <a:t>Execute o K-</a:t>
+            </a:r>
+            <a:r>
+              <a:rPr lang="pt-BR" dirty="0" err="1"/>
+              <a:t>Means</a:t>
+            </a:r>
+            <a:r>
+              <a:rPr lang="pt-BR" dirty="0"/>
+              <a:t> para diferentes valores de </a:t>
+            </a:r>
+            <a:r>
+              <a:rPr lang="pt-BR" dirty="0" err="1"/>
+              <a:t>kk</a:t>
+            </a:r>
+            <a:r>
+              <a:rPr lang="pt-BR" dirty="0"/>
+              <a:t>.</a:t>
+            </a:r>
+          </a:p>
+          <a:p>
+            <a:pPr>
+              <a:buFont typeface="+mj-lt"/>
+              <a:buAutoNum type="arabicPeriod"/>
+            </a:pPr>
+            <a:r>
+              <a:rPr lang="pt-BR" dirty="0"/>
+              <a:t>Calcule o coeficiente de silhueta para cada ponto e, em seguida, a média para o conjunto.</a:t>
+            </a:r>
+          </a:p>
+          <a:p>
+            <a:pPr>
+              <a:buFont typeface="+mj-lt"/>
+              <a:buAutoNum type="arabicPeriod"/>
+            </a:pPr>
+            <a:r>
+              <a:rPr lang="pt-BR" dirty="0"/>
+              <a:t>Escolha </a:t>
+            </a:r>
+            <a:r>
+              <a:rPr lang="pt-BR" dirty="0" err="1"/>
+              <a:t>kk</a:t>
+            </a:r>
+            <a:r>
+              <a:rPr lang="pt-BR" dirty="0"/>
+              <a:t> que maximize o valor médio do coeficiente de silhueta.</a:t>
+            </a:r>
+          </a:p>
+          <a:p>
+            <a:r>
+              <a:rPr lang="pt-BR" b="1" dirty="0"/>
+              <a:t>3. Critério Gap </a:t>
+            </a:r>
+            <a:r>
+              <a:rPr lang="pt-BR" b="1" dirty="0" err="1"/>
+              <a:t>Statistic</a:t>
+            </a:r>
+            <a:endParaRPr lang="pt-BR" b="1" dirty="0"/>
+          </a:p>
+          <a:p>
+            <a:r>
+              <a:rPr lang="pt-BR" dirty="0"/>
+              <a:t>Este método compara a dispersão dos clusters no conjunto de dados com uma dispersão esperada de um conjunto de dados gerado aleatoriamente.</a:t>
+            </a:r>
+          </a:p>
+          <a:p>
+            <a:r>
+              <a:rPr lang="pt-BR" b="1" dirty="0"/>
+              <a:t>Passos:</a:t>
+            </a:r>
+          </a:p>
+          <a:p>
+            <a:pPr>
+              <a:buFont typeface="+mj-lt"/>
+              <a:buAutoNum type="arabicPeriod"/>
+            </a:pPr>
+            <a:r>
+              <a:rPr lang="pt-BR" dirty="0"/>
+              <a:t>Execute o K-</a:t>
+            </a:r>
+            <a:r>
+              <a:rPr lang="pt-BR" dirty="0" err="1"/>
+              <a:t>Means</a:t>
+            </a:r>
+            <a:r>
+              <a:rPr lang="pt-BR" dirty="0"/>
+              <a:t> para diferentes valores de </a:t>
+            </a:r>
+            <a:r>
+              <a:rPr lang="pt-BR" dirty="0" err="1"/>
+              <a:t>kk</a:t>
+            </a:r>
+            <a:r>
+              <a:rPr lang="pt-BR" dirty="0"/>
+              <a:t> no conjunto de dados real.</a:t>
+            </a:r>
+          </a:p>
+          <a:p>
+            <a:pPr>
+              <a:buFont typeface="+mj-lt"/>
+              <a:buAutoNum type="arabicPeriod"/>
+            </a:pPr>
+            <a:r>
+              <a:rPr lang="pt-BR" dirty="0"/>
+              <a:t>Gere um conjunto de dados aleatório com a mesma distribuição e calcule a dispersão dos clusters.</a:t>
+            </a:r>
+          </a:p>
+          <a:p>
+            <a:pPr>
+              <a:buFont typeface="+mj-lt"/>
+              <a:buAutoNum type="arabicPeriod"/>
+            </a:pPr>
+            <a:r>
+              <a:rPr lang="pt-BR" dirty="0"/>
+              <a:t>Compare as dispersões e encontre </a:t>
+            </a:r>
+            <a:r>
+              <a:rPr lang="pt-BR" dirty="0" err="1"/>
+              <a:t>kk</a:t>
+            </a:r>
+            <a:r>
+              <a:rPr lang="pt-BR" dirty="0"/>
+              <a:t> que maximize a diferença (gap) entre os dois conjuntos.</a:t>
+            </a:r>
+          </a:p>
+          <a:p>
+            <a:r>
+              <a:rPr lang="pt-BR" b="1" dirty="0"/>
+              <a:t>4. Validação Cruzada</a:t>
+            </a:r>
+          </a:p>
+          <a:p>
+            <a:r>
+              <a:rPr lang="pt-BR" dirty="0"/>
+              <a:t>Divida o conjunto de dados em subconjuntos e avalie a consistência dos clusters em diferentes amostras.</a:t>
+            </a:r>
+          </a:p>
+          <a:p>
+            <a:r>
+              <a:rPr lang="pt-BR" b="1" dirty="0"/>
+              <a:t>5. Métodos Automáticos, como X-</a:t>
+            </a:r>
+            <a:r>
+              <a:rPr lang="pt-BR" b="1" dirty="0" err="1"/>
+              <a:t>Means</a:t>
+            </a:r>
+            <a:r>
+              <a:rPr lang="pt-BR" b="1" dirty="0"/>
+              <a:t> e G-</a:t>
+            </a:r>
+            <a:r>
+              <a:rPr lang="pt-BR" b="1" dirty="0" err="1"/>
+              <a:t>Means</a:t>
+            </a:r>
+            <a:endParaRPr lang="pt-BR" b="1" dirty="0"/>
+          </a:p>
+          <a:p>
+            <a:pPr>
+              <a:buFont typeface="Arial" panose="020B0604020202020204" pitchFamily="34" charset="0"/>
+              <a:buChar char="•"/>
+            </a:pPr>
+            <a:r>
+              <a:rPr lang="pt-BR" b="1" dirty="0"/>
+              <a:t>X-</a:t>
+            </a:r>
+            <a:r>
+              <a:rPr lang="pt-BR" b="1" dirty="0" err="1"/>
+              <a:t>Means</a:t>
+            </a:r>
+            <a:r>
+              <a:rPr lang="pt-BR" dirty="0"/>
+              <a:t>: Extensão do K-</a:t>
+            </a:r>
+            <a:r>
+              <a:rPr lang="pt-BR" dirty="0" err="1"/>
+              <a:t>Means</a:t>
+            </a:r>
+            <a:r>
+              <a:rPr lang="pt-BR" dirty="0"/>
+              <a:t> que escolhe automaticamente </a:t>
+            </a:r>
+            <a:r>
+              <a:rPr lang="pt-BR" dirty="0" err="1"/>
+              <a:t>kk</a:t>
+            </a:r>
+            <a:r>
+              <a:rPr lang="pt-BR" dirty="0"/>
+              <a:t> otimizando o critério Bayesiano.</a:t>
+            </a:r>
+          </a:p>
+          <a:p>
+            <a:pPr>
+              <a:buFont typeface="Arial" panose="020B0604020202020204" pitchFamily="34" charset="0"/>
+              <a:buChar char="•"/>
+            </a:pPr>
+            <a:r>
+              <a:rPr lang="pt-BR" b="1" dirty="0"/>
+              <a:t>G-</a:t>
+            </a:r>
+            <a:r>
+              <a:rPr lang="pt-BR" b="1" dirty="0" err="1"/>
+              <a:t>Means</a:t>
+            </a:r>
+            <a:r>
+              <a:rPr lang="pt-BR" dirty="0"/>
+              <a:t>: Usa testes estatísticos para determinar se os clusters seguem uma distribuição gaussiana.</a:t>
+            </a:r>
+          </a:p>
+          <a:p>
+            <a:r>
+              <a:rPr lang="pt-BR" b="1" dirty="0"/>
+              <a:t>Considerações:</a:t>
+            </a:r>
+          </a:p>
+          <a:p>
+            <a:pPr>
+              <a:buFont typeface="Arial" panose="020B0604020202020204" pitchFamily="34" charset="0"/>
+              <a:buChar char="•"/>
+            </a:pPr>
+            <a:r>
+              <a:rPr lang="pt-BR" b="1" dirty="0"/>
+              <a:t>Dimensão dos dados</a:t>
+            </a:r>
+            <a:r>
+              <a:rPr lang="pt-BR" dirty="0"/>
+              <a:t>: Em alta dimensionalidade, os métodos podem se tornar menos claros devido à maldição da dimensionalidade.</a:t>
+            </a:r>
+          </a:p>
+          <a:p>
+            <a:pPr>
+              <a:buFont typeface="Arial" panose="020B0604020202020204" pitchFamily="34" charset="0"/>
+              <a:buChar char="•"/>
+            </a:pPr>
+            <a:r>
+              <a:rPr lang="pt-BR" b="1" dirty="0"/>
+              <a:t>Interpretação</a:t>
+            </a:r>
+            <a:r>
+              <a:rPr lang="pt-BR" dirty="0"/>
+              <a:t>: O número de clusters deve fazer sentido no contexto do problema, além de ser estatisticamente válido.</a:t>
+            </a:r>
+          </a:p>
+          <a:p>
+            <a:r>
+              <a:rPr lang="pt-BR" dirty="0"/>
+              <a:t>Combinar múltiplos métodos pode ser útil para confirmar a escolha do melhor </a:t>
+            </a:r>
+            <a:r>
+              <a:rPr lang="pt-BR" dirty="0" err="1"/>
+              <a:t>kk</a:t>
+            </a:r>
+            <a:r>
+              <a:rPr lang="pt-BR" dirty="0"/>
+              <a:t>.</a:t>
+            </a:r>
+          </a:p>
+          <a:p>
+            <a:endParaRPr lang="en-US" dirty="0"/>
+          </a:p>
+        </p:txBody>
+      </p:sp>
+      <p:sp>
+        <p:nvSpPr>
+          <p:cNvPr id="4" name="Espaço Reservado para Número de Slide 3"/>
+          <p:cNvSpPr>
+            <a:spLocks noGrp="1"/>
+          </p:cNvSpPr>
+          <p:nvPr>
+            <p:ph type="sldNum" sz="quarter" idx="10"/>
+          </p:nvPr>
+        </p:nvSpPr>
+        <p:spPr/>
+        <p:txBody>
+          <a:bodyPr/>
+          <a:lstStyle/>
+          <a:p>
+            <a:fld id="{F430A2A4-8C14-4B1A-AD48-7B6401078BF7}" type="slidenum">
+              <a:rPr lang="pt-BR" smtClean="0"/>
+              <a:t>31</a:t>
+            </a:fld>
+            <a:endParaRPr lang="pt-BR"/>
+          </a:p>
+        </p:txBody>
+      </p:sp>
+    </p:spTree>
+    <p:extLst>
+      <p:ext uri="{BB962C8B-B14F-4D97-AF65-F5344CB8AC3E}">
+        <p14:creationId xmlns:p14="http://schemas.microsoft.com/office/powerpoint/2010/main" val="3992294165"/>
+      </p:ext>
+    </p:extLst>
+  </p:cSld>
+  <p:clrMapOvr>
+    <a:masterClrMapping/>
+  </p:clrMapOvr>
+</p:notes>
+</file>
+
+<file path=ppt/notesSlides/notesSlide12.xml><?xml version="1.0" encoding="utf-8"?>
+<p:notes xmlns:a="http://schemas.openxmlformats.org/drawingml/2006/main" xmlns:r="http://schemas.openxmlformats.org/officeDocument/2006/relationships" xmlns:p="http://schemas.openxmlformats.org/presentationml/2006/main">
+  <p:cSld>
+    <p:spTree>
+      <p:nvGrpSpPr>
+        <p:cNvPr id="1" name=""/>
+        <p:cNvGrpSpPr/>
+        <p:nvPr/>
+      </p:nvGrpSpPr>
+      <p:grpSpPr>
+        <a:xfrm>
+          <a:off x="0" y="0"/>
+          <a:ext cx="0" cy="0"/>
+          <a:chOff x="0" y="0"/>
+          <a:chExt cx="0" cy="0"/>
+        </a:xfrm>
+      </p:grpSpPr>
+      <p:sp>
+        <p:nvSpPr>
           <p:cNvPr id="2" name="Slide Image Placeholder 1"/>
           <p:cNvSpPr>
             <a:spLocks noGrp="1" noRot="1" noChangeAspect="1"/>
@@ -1337,7 +1434,7 @@
                 <a:hlinkClick r:id="rId3">
                   <a:extLst>
                     <a:ext uri="{A12FA001-AC4F-418D-AE19-62706E023703}">
-                      <ahyp:hlinkClr xmlns:ahyp="http://schemas.microsoft.com/office/drawing/2018/hyperlinkcolor" val="tx"/>
+                      <ahyp:hlinkClr xmlns:ahyp="http://schemas.microsoft.com/office/drawing/2018/hyperlinkcolor" xmlns="" val="tx"/>
                     </a:ext>
                   </a:extLst>
                 </a:hlinkClick>
@@ -1367,7 +1464,7 @@
           <a:p>
             <a:fld id="{6FC8D850-966F-45A6-8DE7-15B891E7D40D}" type="slidenum">
               <a:rPr lang="pt-BR" smtClean="0"/>
-              <a:t>25</a:t>
+              <a:t>34</a:t>
             </a:fld>
             <a:endParaRPr lang="pt-BR"/>
           </a:p>
@@ -1495,7 +1592,7 @@
         <p:cNvPr id="1" name="">
           <a:extLst>
             <a:ext uri="{FF2B5EF4-FFF2-40B4-BE49-F238E27FC236}">
-              <a16:creationId xmlns:a16="http://schemas.microsoft.com/office/drawing/2014/main" id="{BFE637E2-97BB-CFD3-DBB7-5EC561A4F1C5}"/>
+              <a16:creationId xmlns:a16="http://schemas.microsoft.com/office/drawing/2014/main" xmlns="" id="{BFE637E2-97BB-CFD3-DBB7-5EC561A4F1C5}"/>
             </a:ext>
           </a:extLst>
         </p:cNvPr>
@@ -1515,7 +1612,7 @@
           <p:cNvPr id="2" name="Slide Image Placeholder 1">
             <a:extLst>
               <a:ext uri="{FF2B5EF4-FFF2-40B4-BE49-F238E27FC236}">
-                <a16:creationId xmlns:a16="http://schemas.microsoft.com/office/drawing/2014/main" id="{4ED7BD22-361E-0DCE-46D8-42A9C128E592}"/>
+                <a16:creationId xmlns:a16="http://schemas.microsoft.com/office/drawing/2014/main" xmlns="" id="{4ED7BD22-361E-0DCE-46D8-42A9C128E592}"/>
               </a:ext>
             </a:extLst>
           </p:cNvPr>
@@ -1533,7 +1630,7 @@
           <p:cNvPr id="3" name="Notes Placeholder 2">
             <a:extLst>
               <a:ext uri="{FF2B5EF4-FFF2-40B4-BE49-F238E27FC236}">
-                <a16:creationId xmlns:a16="http://schemas.microsoft.com/office/drawing/2014/main" id="{A845AE5E-1008-C289-F444-04515B31A21D}"/>
+                <a16:creationId xmlns:a16="http://schemas.microsoft.com/office/drawing/2014/main" xmlns="" id="{A845AE5E-1008-C289-F444-04515B31A21D}"/>
               </a:ext>
             </a:extLst>
           </p:cNvPr>
@@ -1611,7 +1708,7 @@
           <p:cNvPr id="4" name="Slide Number Placeholder 3">
             <a:extLst>
               <a:ext uri="{FF2B5EF4-FFF2-40B4-BE49-F238E27FC236}">
-                <a16:creationId xmlns:a16="http://schemas.microsoft.com/office/drawing/2014/main" id="{64C5BAB2-4C6F-96F0-D4ED-0C66FFB4872B}"/>
+                <a16:creationId xmlns:a16="http://schemas.microsoft.com/office/drawing/2014/main" xmlns="" id="{64C5BAB2-4C6F-96F0-D4ED-0C66FFB4872B}"/>
               </a:ext>
             </a:extLst>
           </p:cNvPr>
@@ -2624,7 +2721,7 @@
         <p:cNvPr id="1" name="">
           <a:extLst>
             <a:ext uri="{FF2B5EF4-FFF2-40B4-BE49-F238E27FC236}">
-              <a16:creationId xmlns:a16="http://schemas.microsoft.com/office/drawing/2014/main" id="{D98F69D2-AA2F-1FAB-FC58-E17B9F051FEC}"/>
+              <a16:creationId xmlns:a16="http://schemas.microsoft.com/office/drawing/2014/main" xmlns="" id="{D98F69D2-AA2F-1FAB-FC58-E17B9F051FEC}"/>
             </a:ext>
           </a:extLst>
         </p:cNvPr>
@@ -2644,7 +2741,7 @@
           <p:cNvPr id="2" name="Espaço Reservado para Imagem de Slide 1">
             <a:extLst>
               <a:ext uri="{FF2B5EF4-FFF2-40B4-BE49-F238E27FC236}">
-                <a16:creationId xmlns:a16="http://schemas.microsoft.com/office/drawing/2014/main" id="{BFA38404-D7C9-03F2-A7E5-10C0EFC8F190}"/>
+                <a16:creationId xmlns:a16="http://schemas.microsoft.com/office/drawing/2014/main" xmlns="" id="{BFA38404-D7C9-03F2-A7E5-10C0EFC8F190}"/>
               </a:ext>
             </a:extLst>
           </p:cNvPr>
@@ -2662,7 +2759,7 @@
           <p:cNvPr id="3" name="Espaço Reservado para Anotações 2">
             <a:extLst>
               <a:ext uri="{FF2B5EF4-FFF2-40B4-BE49-F238E27FC236}">
-                <a16:creationId xmlns:a16="http://schemas.microsoft.com/office/drawing/2014/main" id="{5A8313F1-5D52-52B4-46D0-20D6D6D5149A}"/>
+                <a16:creationId xmlns:a16="http://schemas.microsoft.com/office/drawing/2014/main" xmlns="" id="{5A8313F1-5D52-52B4-46D0-20D6D6D5149A}"/>
               </a:ext>
             </a:extLst>
           </p:cNvPr>
@@ -2780,7 +2877,7 @@
           <p:cNvPr id="4" name="Espaço Reservado para Número de Slide 3">
             <a:extLst>
               <a:ext uri="{FF2B5EF4-FFF2-40B4-BE49-F238E27FC236}">
-                <a16:creationId xmlns:a16="http://schemas.microsoft.com/office/drawing/2014/main" id="{428A95A6-CC49-168A-C37A-1C6EB3B93225}"/>
+                <a16:creationId xmlns:a16="http://schemas.microsoft.com/office/drawing/2014/main" xmlns="" id="{428A95A6-CC49-168A-C37A-1C6EB3B93225}"/>
               </a:ext>
             </a:extLst>
           </p:cNvPr>
@@ -3252,7 +3349,7 @@
           <a:p>
             <a:fld id="{F430A2A4-8C14-4B1A-AD48-7B6401078BF7}" type="slidenum">
               <a:rPr lang="pt-BR" smtClean="0"/>
-              <a:t>19</a:t>
+              <a:t>20</a:t>
             </a:fld>
             <a:endParaRPr lang="pt-BR"/>
           </a:p>
@@ -3444,7 +3541,7 @@
           <a:p>
             <a:fld id="{5CB2E8FC-741C-4BF1-B071-7D772D706EF9}" type="slidenum">
               <a:rPr lang="pt-BR" smtClean="0"/>
-              <a:t>‹#›</a:t>
+              <a:t>‹nº›</a:t>
             </a:fld>
             <a:endParaRPr lang="pt-BR"/>
           </a:p>
@@ -3614,7 +3711,7 @@
           <a:p>
             <a:fld id="{5CB2E8FC-741C-4BF1-B071-7D772D706EF9}" type="slidenum">
               <a:rPr lang="pt-BR" smtClean="0"/>
-              <a:t>‹#›</a:t>
+              <a:t>‹nº›</a:t>
             </a:fld>
             <a:endParaRPr lang="pt-BR"/>
           </a:p>
@@ -3794,7 +3891,7 @@
           <a:p>
             <a:fld id="{5CB2E8FC-741C-4BF1-B071-7D772D706EF9}" type="slidenum">
               <a:rPr lang="pt-BR" smtClean="0"/>
-              <a:t>‹#›</a:t>
+              <a:t>‹nº›</a:t>
             </a:fld>
             <a:endParaRPr lang="pt-BR"/>
           </a:p>
@@ -3964,7 +4061,7 @@
           <a:p>
             <a:fld id="{5CB2E8FC-741C-4BF1-B071-7D772D706EF9}" type="slidenum">
               <a:rPr lang="pt-BR" smtClean="0"/>
-              <a:t>‹#›</a:t>
+              <a:t>‹nº›</a:t>
             </a:fld>
             <a:endParaRPr lang="pt-BR"/>
           </a:p>
@@ -4210,7 +4307,7 @@
           <a:p>
             <a:fld id="{5CB2E8FC-741C-4BF1-B071-7D772D706EF9}" type="slidenum">
               <a:rPr lang="pt-BR" smtClean="0"/>
-              <a:t>‹#›</a:t>
+              <a:t>‹nº›</a:t>
             </a:fld>
             <a:endParaRPr lang="pt-BR"/>
           </a:p>
@@ -4442,7 +4539,7 @@
           <a:p>
             <a:fld id="{5CB2E8FC-741C-4BF1-B071-7D772D706EF9}" type="slidenum">
               <a:rPr lang="pt-BR" smtClean="0"/>
-              <a:t>‹#›</a:t>
+              <a:t>‹nº›</a:t>
             </a:fld>
             <a:endParaRPr lang="pt-BR"/>
           </a:p>
@@ -4809,7 +4906,7 @@
           <a:p>
             <a:fld id="{5CB2E8FC-741C-4BF1-B071-7D772D706EF9}" type="slidenum">
               <a:rPr lang="pt-BR" smtClean="0"/>
-              <a:t>‹#›</a:t>
+              <a:t>‹nº›</a:t>
             </a:fld>
             <a:endParaRPr lang="pt-BR"/>
           </a:p>
@@ -4927,7 +5024,7 @@
           <a:p>
             <a:fld id="{5CB2E8FC-741C-4BF1-B071-7D772D706EF9}" type="slidenum">
               <a:rPr lang="pt-BR" smtClean="0"/>
-              <a:t>‹#›</a:t>
+              <a:t>‹nº›</a:t>
             </a:fld>
             <a:endParaRPr lang="pt-BR"/>
           </a:p>
@@ -5022,7 +5119,7 @@
           <a:p>
             <a:fld id="{5CB2E8FC-741C-4BF1-B071-7D772D706EF9}" type="slidenum">
               <a:rPr lang="pt-BR" smtClean="0"/>
-              <a:t>‹#›</a:t>
+              <a:t>‹nº›</a:t>
             </a:fld>
             <a:endParaRPr lang="pt-BR"/>
           </a:p>
@@ -5299,7 +5396,7 @@
           <a:p>
             <a:fld id="{5CB2E8FC-741C-4BF1-B071-7D772D706EF9}" type="slidenum">
               <a:rPr lang="pt-BR" smtClean="0"/>
-              <a:t>‹#›</a:t>
+              <a:t>‹nº›</a:t>
             </a:fld>
             <a:endParaRPr lang="pt-BR"/>
           </a:p>
@@ -5552,7 +5649,7 @@
           <a:p>
             <a:fld id="{5CB2E8FC-741C-4BF1-B071-7D772D706EF9}" type="slidenum">
               <a:rPr lang="pt-BR" smtClean="0"/>
-              <a:t>‹#›</a:t>
+              <a:t>‹nº›</a:t>
             </a:fld>
             <a:endParaRPr lang="pt-BR"/>
           </a:p>
@@ -5801,7 +5898,7 @@
           <a:p>
             <a:fld id="{5CB2E8FC-741C-4BF1-B071-7D772D706EF9}" type="slidenum">
               <a:rPr lang="pt-BR" smtClean="0"/>
-              <a:t>‹#›</a:t>
+              <a:t>‹nº›</a:t>
             </a:fld>
             <a:endParaRPr lang="pt-BR"/>
           </a:p>
@@ -6133,7 +6230,7 @@
           <p:cNvPr id="4" name="CaixaDeTexto 3">
             <a:extLst>
               <a:ext uri="{FF2B5EF4-FFF2-40B4-BE49-F238E27FC236}">
-                <a16:creationId xmlns:a16="http://schemas.microsoft.com/office/drawing/2014/main" id="{430EB894-B7D4-434C-9D1A-A14094D9BEEC}"/>
+                <a16:creationId xmlns:a16="http://schemas.microsoft.com/office/drawing/2014/main" xmlns="" id="{430EB894-B7D4-434C-9D1A-A14094D9BEEC}"/>
               </a:ext>
             </a:extLst>
           </p:cNvPr>
@@ -6177,7 +6274,7 @@
           <p:cNvPr id="1026" name="Picture 2" descr="Logo">
             <a:extLst>
               <a:ext uri="{FF2B5EF4-FFF2-40B4-BE49-F238E27FC236}">
-                <a16:creationId xmlns:a16="http://schemas.microsoft.com/office/drawing/2014/main" id="{3F2642E0-4F6A-4196-8F58-E77D36E9A33F}"/>
+                <a16:creationId xmlns:a16="http://schemas.microsoft.com/office/drawing/2014/main" xmlns="" id="{3F2642E0-4F6A-4196-8F58-E77D36E9A33F}"/>
               </a:ext>
             </a:extLst>
           </p:cNvPr>
@@ -6222,7 +6319,7 @@
           <p:cNvPr id="5122" name="Picture 2" descr="Image result for machine learning">
             <a:extLst>
               <a:ext uri="{FF2B5EF4-FFF2-40B4-BE49-F238E27FC236}">
-                <a16:creationId xmlns:a16="http://schemas.microsoft.com/office/drawing/2014/main" id="{810CE0A2-4102-44A6-A370-175E7896CDCB}"/>
+                <a16:creationId xmlns:a16="http://schemas.microsoft.com/office/drawing/2014/main" xmlns="" id="{810CE0A2-4102-44A6-A370-175E7896CDCB}"/>
               </a:ext>
             </a:extLst>
           </p:cNvPr>
@@ -6267,7 +6364,7 @@
           <p:cNvPr id="7" name="Título 1">
             <a:extLst>
               <a:ext uri="{FF2B5EF4-FFF2-40B4-BE49-F238E27FC236}">
-                <a16:creationId xmlns:a16="http://schemas.microsoft.com/office/drawing/2014/main" id="{32666AC8-2E17-4DB4-B0F5-60C640CCFD2E}"/>
+                <a16:creationId xmlns:a16="http://schemas.microsoft.com/office/drawing/2014/main" xmlns="" id="{32666AC8-2E17-4DB4-B0F5-60C640CCFD2E}"/>
               </a:ext>
             </a:extLst>
           </p:cNvPr>
@@ -6293,6 +6390,10 @@
             <a:r>
               <a:rPr lang="pt-BR" sz="6600" dirty="0"/>
               <a:t>C24 - Inteligência Artificial:</a:t>
+            </a:r>
+            <a:r>
+              <a:rPr lang="pt-BR" sz="7200" dirty="0"/>
+              <a:t/>
             </a:r>
             <a:br>
               <a:rPr lang="pt-BR" sz="7200" dirty="0"/>
@@ -6344,7 +6445,7 @@
           <p:cNvPr id="2" name="Title 1">
             <a:extLst>
               <a:ext uri="{FF2B5EF4-FFF2-40B4-BE49-F238E27FC236}">
-                <a16:creationId xmlns:a16="http://schemas.microsoft.com/office/drawing/2014/main" id="{FFE84507-EC77-45EC-8B3A-27BFC439AB0A}"/>
+                <a16:creationId xmlns:a16="http://schemas.microsoft.com/office/drawing/2014/main" xmlns="" id="{FFE84507-EC77-45EC-8B3A-27BFC439AB0A}"/>
               </a:ext>
             </a:extLst>
           </p:cNvPr>
@@ -6373,7 +6474,7 @@
           <p:cNvPr id="3" name="Content Placeholder 2">
             <a:extLst>
               <a:ext uri="{FF2B5EF4-FFF2-40B4-BE49-F238E27FC236}">
-                <a16:creationId xmlns:a16="http://schemas.microsoft.com/office/drawing/2014/main" id="{04FEB374-1415-DA51-E59A-B5E50D17F763}"/>
+                <a16:creationId xmlns:a16="http://schemas.microsoft.com/office/drawing/2014/main" xmlns="" id="{04FEB374-1415-DA51-E59A-B5E50D17F763}"/>
               </a:ext>
             </a:extLst>
           </p:cNvPr>
@@ -6626,7 +6727,7 @@
         <p:cNvPr id="1" name="">
           <a:extLst>
             <a:ext uri="{FF2B5EF4-FFF2-40B4-BE49-F238E27FC236}">
-              <a16:creationId xmlns:a16="http://schemas.microsoft.com/office/drawing/2014/main" id="{5B00F73A-8390-7530-E708-9D3EBFB35B37}"/>
+              <a16:creationId xmlns:a16="http://schemas.microsoft.com/office/drawing/2014/main" xmlns="" id="{5B00F73A-8390-7530-E708-9D3EBFB35B37}"/>
             </a:ext>
           </a:extLst>
         </p:cNvPr>
@@ -6646,7 +6747,7 @@
           <p:cNvPr id="2" name="Título 1">
             <a:extLst>
               <a:ext uri="{FF2B5EF4-FFF2-40B4-BE49-F238E27FC236}">
-                <a16:creationId xmlns:a16="http://schemas.microsoft.com/office/drawing/2014/main" id="{A7779880-5E02-1DB8-EA94-C86330794A8C}"/>
+                <a16:creationId xmlns:a16="http://schemas.microsoft.com/office/drawing/2014/main" xmlns="" id="{A7779880-5E02-1DB8-EA94-C86330794A8C}"/>
               </a:ext>
             </a:extLst>
           </p:cNvPr>
@@ -6693,14 +6794,14 @@
           </a:p>
         </p:txBody>
       </p:sp>
-      <mc:AlternateContent xmlns:mc="http://schemas.openxmlformats.org/markup-compatibility/2006" xmlns:a14="http://schemas.microsoft.com/office/drawing/2010/main">
-        <mc:Choice Requires="a14">
+      <mc:AlternateContent xmlns:mc="http://schemas.openxmlformats.org/markup-compatibility/2006">
+        <mc:Choice xmlns:a14="http://schemas.microsoft.com/office/drawing/2010/main" Requires="a14">
           <p:sp>
             <p:nvSpPr>
               <p:cNvPr id="3" name="Espaço Reservado para Conteúdo 2">
                 <a:extLst>
                   <a:ext uri="{FF2B5EF4-FFF2-40B4-BE49-F238E27FC236}">
-                    <a16:creationId xmlns:a16="http://schemas.microsoft.com/office/drawing/2014/main" id="{A72472E5-6211-3EFD-BA89-06782640C939}"/>
+                    <a16:creationId xmlns:a16="http://schemas.microsoft.com/office/drawing/2014/main" xmlns="" id="{A72472E5-6211-3EFD-BA89-06782640C939}"/>
                   </a:ext>
                 </a:extLst>
               </p:cNvPr>
@@ -6713,8 +6814,8 @@
             </p:nvSpPr>
             <p:spPr>
               <a:xfrm>
-                <a:off x="5072743" y="1825624"/>
-                <a:ext cx="7119257" cy="5032375"/>
+                <a:off x="4739641" y="1825624"/>
+                <a:ext cx="7452360" cy="5032375"/>
               </a:xfrm>
             </p:spPr>
             <p:txBody>
@@ -6809,7 +6910,19 @@
               <a:p>
                 <a:r>
                   <a:rPr lang="pt-BR" dirty="0"/>
-                  <a:t>Nesse caso, o </a:t>
+                  <a:t>Nesse caso, </a:t>
+                </a:r>
+                <a:r>
+                  <a:rPr lang="pt-BR" dirty="0" smtClean="0"/>
+                  <a:t>se elas pertencem a um </a:t>
+                </a:r>
+                <a:r>
+                  <a:rPr lang="pt-BR" i="1" dirty="0" smtClean="0"/>
+                  <a:t>cluster</a:t>
+                </a:r>
+                <a:r>
+                  <a:rPr lang="pt-BR" dirty="0" smtClean="0"/>
+                  <a:t>, seu </a:t>
                 </a:r>
                 <a:r>
                   <a:rPr lang="pt-BR" b="1" dirty="0"/>
@@ -7001,13 +7114,13 @@
             </p:txBody>
           </p:sp>
         </mc:Choice>
-        <mc:Fallback xmlns="">
+        <mc:Fallback>
           <p:sp>
             <p:nvSpPr>
               <p:cNvPr id="3" name="Espaço Reservado para Conteúdo 2">
                 <a:extLst>
                   <a:ext uri="{FF2B5EF4-FFF2-40B4-BE49-F238E27FC236}">
-                    <a16:creationId xmlns:a16="http://schemas.microsoft.com/office/drawing/2014/main" id="{A72472E5-6211-3EFD-BA89-06782640C939}"/>
+                    <a16:creationId xmlns:a16="http://schemas.microsoft.com/office/drawing/2014/main" xmlns:a14="http://schemas.microsoft.com/office/drawing/2010/main" xmlns="" id="{A72472E5-6211-3EFD-BA89-06782640C939}"/>
                   </a:ext>
                 </a:extLst>
               </p:cNvPr>
@@ -7020,13 +7133,13 @@
             </p:nvSpPr>
             <p:spPr>
               <a:xfrm>
-                <a:off x="5072743" y="1825624"/>
-                <a:ext cx="7119257" cy="5032375"/>
+                <a:off x="4739641" y="1825624"/>
+                <a:ext cx="7452360" cy="5032375"/>
               </a:xfrm>
-              <a:blipFill>
+              <a:blipFill rotWithShape="0">
                 <a:blip r:embed="rId3"/>
                 <a:stretch>
-                  <a:fillRect l="-1541" t="-1937"/>
+                  <a:fillRect l="-1473" t="-1937" r="-655"/>
                 </a:stretch>
               </a:blipFill>
             </p:spPr>
@@ -7035,7 +7148,7 @@
               <a:lstStyle/>
               <a:p>
                 <a:r>
-                  <a:rPr lang="en-US">
+                  <a:rPr lang="pt-BR">
                     <a:noFill/>
                   </a:rPr>
                   <a:t> </a:t>
@@ -7050,7 +7163,7 @@
           <p:cNvPr id="4" name="Picture 3" descr="K Means Clustering no Aprendizado de Máquinas — Aprendizado de Máquina —  DATA SCIENCE">
             <a:extLst>
               <a:ext uri="{FF2B5EF4-FFF2-40B4-BE49-F238E27FC236}">
-                <a16:creationId xmlns:a16="http://schemas.microsoft.com/office/drawing/2014/main" id="{E728BEA3-C89C-08D5-CE28-8BD1C00DAD53}"/>
+                <a16:creationId xmlns:a16="http://schemas.microsoft.com/office/drawing/2014/main" xmlns="" id="{E728BEA3-C89C-08D5-CE28-8BD1C00DAD53}"/>
               </a:ext>
             </a:extLst>
           </p:cNvPr>
@@ -7072,7 +7185,7 @@
         </p:blipFill>
         <p:spPr bwMode="auto">
           <a:xfrm>
-            <a:off x="838200" y="2111829"/>
+            <a:off x="472440" y="2355669"/>
             <a:ext cx="3831771" cy="3037114"/>
           </a:xfrm>
           <a:prstGeom prst="rect">
@@ -7125,7 +7238,7 @@
           <p:cNvPr id="2" name="Title 1">
             <a:extLst>
               <a:ext uri="{FF2B5EF4-FFF2-40B4-BE49-F238E27FC236}">
-                <a16:creationId xmlns:a16="http://schemas.microsoft.com/office/drawing/2014/main" id="{D87F6E31-B0DF-F3EC-D348-0D4E93DD1974}"/>
+                <a16:creationId xmlns:a16="http://schemas.microsoft.com/office/drawing/2014/main" xmlns="" id="{D87F6E31-B0DF-F3EC-D348-0D4E93DD1974}"/>
               </a:ext>
             </a:extLst>
           </p:cNvPr>
@@ -7150,7 +7263,7 @@
           <p:cNvPr id="3" name="Content Placeholder 2">
             <a:extLst>
               <a:ext uri="{FF2B5EF4-FFF2-40B4-BE49-F238E27FC236}">
-                <a16:creationId xmlns:a16="http://schemas.microsoft.com/office/drawing/2014/main" id="{5007CCEC-CA32-01B4-A9B5-F81A83FF3ECA}"/>
+                <a16:creationId xmlns:a16="http://schemas.microsoft.com/office/drawing/2014/main" xmlns="" id="{5007CCEC-CA32-01B4-A9B5-F81A83FF3ECA}"/>
               </a:ext>
             </a:extLst>
           </p:cNvPr>
@@ -7274,7 +7387,7 @@
         <p:spPr>
           <a:xfrm>
             <a:off x="5334000" y="1690688"/>
-            <a:ext cx="6729845" cy="5167311"/>
+            <a:ext cx="6858000" cy="5167311"/>
           </a:xfrm>
         </p:spPr>
         <p:txBody>
@@ -7285,27 +7398,41 @@
           <a:p>
             <a:r>
               <a:rPr lang="pt-BR" dirty="0"/>
-              <a:t>Os clusters </a:t>
+              <a:t>Os </a:t>
+            </a:r>
+            <a:r>
+              <a:rPr lang="pt-BR" i="1" dirty="0"/>
+              <a:t>clusters</a:t>
+            </a:r>
+            <a:r>
+              <a:rPr lang="pt-BR" dirty="0"/>
+              <a:t> </a:t>
             </a:r>
             <a:r>
               <a:rPr lang="pt-BR" b="1" dirty="0"/>
-              <a:t>não devem se sobrepor</a:t>
-            </a:r>
-            <a:r>
-              <a:rPr lang="pt-BR" dirty="0"/>
-              <a:t>: </a:t>
-            </a:r>
-            <a:r>
-              <a:rPr lang="pt-BR" b="1" dirty="0">
+              <a:t>não devem se </a:t>
+            </a:r>
+            <a:r>
+              <a:rPr lang="pt-BR" b="1" dirty="0" smtClean="0"/>
+              <a:t>sobrepor</a:t>
+            </a:r>
+            <a:r>
+              <a:rPr lang="pt-BR" dirty="0" smtClean="0"/>
+              <a:t>.</a:t>
+            </a:r>
+          </a:p>
+          <a:p>
+            <a:r>
+              <a:rPr lang="pt-BR" b="1" dirty="0" smtClean="0">
                 <a:solidFill>
                   <a:srgbClr val="00B050"/>
                 </a:solidFill>
               </a:rPr>
-              <a:t>cada exemplo</a:t>
-            </a:r>
-            <a:r>
-              <a:rPr lang="pt-BR" dirty="0"/>
-              <a:t> deve </a:t>
+              <a:t>Cada amostra </a:t>
+            </a:r>
+            <a:r>
+              <a:rPr lang="pt-BR" dirty="0" smtClean="0"/>
+              <a:t>deve </a:t>
             </a:r>
             <a:r>
               <a:rPr lang="pt-BR" b="1" dirty="0">
@@ -7325,7 +7452,23 @@
                   <a:srgbClr val="00B050"/>
                 </a:solidFill>
               </a:rPr>
-              <a:t>um e apenas a um </a:t>
+              <a:t>um e </a:t>
+            </a:r>
+            <a:r>
+              <a:rPr lang="pt-BR" b="1" dirty="0" smtClean="0">
+                <a:solidFill>
+                  <a:srgbClr val="00B050"/>
+                </a:solidFill>
+              </a:rPr>
+              <a:t>apenas </a:t>
+            </a:r>
+            <a:r>
+              <a:rPr lang="pt-BR" b="1" dirty="0">
+                <a:solidFill>
+                  <a:srgbClr val="00B050"/>
+                </a:solidFill>
+              </a:rPr>
+              <a:t>um </a:t>
             </a:r>
             <a:r>
               <a:rPr lang="pt-BR" b="1" i="1" dirty="0">
@@ -7355,19 +7498,27 @@
             </a:r>
             <a:r>
               <a:rPr lang="pt-BR" dirty="0"/>
-              <a:t>, os </a:t>
-            </a:r>
-            <a:r>
-              <a:rPr lang="pt-BR" b="1" dirty="0">
+              <a:t>, </a:t>
+            </a:r>
+            <a:r>
+              <a:rPr lang="pt-BR" dirty="0" smtClean="0"/>
+              <a:t>as </a:t>
+            </a:r>
+            <a:r>
+              <a:rPr lang="pt-BR" b="1" dirty="0" smtClean="0">
                 <a:solidFill>
                   <a:srgbClr val="0070C0"/>
                 </a:solidFill>
               </a:rPr>
-              <a:t>exemplos</a:t>
-            </a:r>
-            <a:r>
-              <a:rPr lang="pt-BR" dirty="0"/>
-              <a:t> devem estar relativamente </a:t>
+              <a:t>amostras </a:t>
+            </a:r>
+            <a:r>
+              <a:rPr lang="pt-BR" dirty="0" smtClean="0"/>
+              <a:t>devem </a:t>
+            </a:r>
+            <a:r>
+              <a:rPr lang="pt-BR" dirty="0"/>
+              <a:t>estar relativamente </a:t>
             </a:r>
             <a:r>
               <a:rPr lang="pt-BR" b="1" dirty="0">
@@ -7379,7 +7530,15 @@
             </a:r>
             <a:r>
               <a:rPr lang="pt-BR" dirty="0"/>
-              <a:t> uns dos outros e </a:t>
+              <a:t> </a:t>
+            </a:r>
+            <a:r>
+              <a:rPr lang="pt-BR" dirty="0" smtClean="0"/>
+              <a:t>umas das outras </a:t>
+            </a:r>
+            <a:r>
+              <a:rPr lang="pt-BR" dirty="0"/>
+              <a:t>e </a:t>
             </a:r>
             <a:r>
               <a:rPr lang="pt-BR" b="1" dirty="0">
@@ -7391,7 +7550,19 @@
             </a:r>
             <a:r>
               <a:rPr lang="pt-BR" dirty="0"/>
-              <a:t> dos </a:t>
+              <a:t> </a:t>
+            </a:r>
+            <a:r>
+              <a:rPr lang="pt-BR" dirty="0" smtClean="0"/>
+              <a:t>das </a:t>
+            </a:r>
+            <a:r>
+              <a:rPr lang="pt-BR" b="1" dirty="0" smtClean="0">
+                <a:solidFill>
+                  <a:srgbClr val="7030A0"/>
+                </a:solidFill>
+              </a:rPr>
+              <a:t>amostras dos </a:t>
             </a:r>
             <a:r>
               <a:rPr lang="pt-BR" b="1" dirty="0">
@@ -7399,7 +7570,15 @@
                   <a:srgbClr val="7030A0"/>
                 </a:solidFill>
               </a:rPr>
-              <a:t>exemplos dos outros clusters</a:t>
+              <a:t>outros </a:t>
+            </a:r>
+            <a:r>
+              <a:rPr lang="pt-BR" b="1" i="1" dirty="0">
+                <a:solidFill>
+                  <a:srgbClr val="7030A0"/>
+                </a:solidFill>
+              </a:rPr>
+              <a:t>clusters</a:t>
             </a:r>
             <a:r>
               <a:rPr lang="pt-BR" dirty="0"/>
@@ -7415,7 +7594,23 @@
           <a:p>
             <a:r>
               <a:rPr lang="pt-BR" dirty="0"/>
-              <a:t>Quantos clusters um conjunto de exemplos contém?</a:t>
+              <a:t>Quantos </a:t>
+            </a:r>
+            <a:r>
+              <a:rPr lang="pt-BR" i="1" dirty="0"/>
+              <a:t>clusters</a:t>
+            </a:r>
+            <a:r>
+              <a:rPr lang="pt-BR" dirty="0"/>
+              <a:t> um conjunto de </a:t>
+            </a:r>
+            <a:r>
+              <a:rPr lang="pt-BR" dirty="0" smtClean="0"/>
+              <a:t>dados contém</a:t>
+            </a:r>
+            <a:r>
+              <a:rPr lang="pt-BR" dirty="0"/>
+              <a:t>?</a:t>
             </a:r>
           </a:p>
         </p:txBody>
@@ -7477,120 +7672,10 @@
   <p:cSld>
     <p:spTree>
       <p:nvGrpSpPr>
-        <p:cNvPr id="1" name=""/>
-        <p:cNvGrpSpPr/>
-        <p:nvPr/>
-      </p:nvGrpSpPr>
-      <p:grpSpPr>
-        <a:xfrm>
-          <a:off x="0" y="0"/>
-          <a:ext cx="0" cy="0"/>
-          <a:chOff x="0" y="0"/>
-          <a:chExt cx="0" cy="0"/>
-        </a:xfrm>
-      </p:grpSpPr>
-      <p:sp>
-        <p:nvSpPr>
-          <p:cNvPr id="2" name="Title 1">
-            <a:extLst>
-              <a:ext uri="{FF2B5EF4-FFF2-40B4-BE49-F238E27FC236}">
-                <a16:creationId xmlns:a16="http://schemas.microsoft.com/office/drawing/2014/main" id="{0719C974-9A37-ED60-45B8-7CF90E038097}"/>
-              </a:ext>
-            </a:extLst>
-          </p:cNvPr>
-          <p:cNvSpPr>
-            <a:spLocks noGrp="1"/>
-          </p:cNvSpPr>
-          <p:nvPr>
-            <p:ph type="title"/>
-          </p:nvPr>
-        </p:nvSpPr>
-        <p:spPr/>
-        <p:txBody>
-          <a:bodyPr/>
-          <a:lstStyle/>
-          <a:p>
-            <a:endParaRPr lang="en-US"/>
-          </a:p>
-        </p:txBody>
-      </p:sp>
-      <p:sp>
-        <p:nvSpPr>
-          <p:cNvPr id="3" name="Content Placeholder 2">
-            <a:extLst>
-              <a:ext uri="{FF2B5EF4-FFF2-40B4-BE49-F238E27FC236}">
-                <a16:creationId xmlns:a16="http://schemas.microsoft.com/office/drawing/2014/main" id="{D812A04D-0F4A-CB81-D7DF-C4B0B13163E8}"/>
-              </a:ext>
-            </a:extLst>
-          </p:cNvPr>
-          <p:cNvSpPr>
-            <a:spLocks noGrp="1"/>
-          </p:cNvSpPr>
-          <p:nvPr>
-            <p:ph idx="1"/>
-          </p:nvPr>
-        </p:nvSpPr>
-        <p:spPr/>
-        <p:txBody>
-          <a:bodyPr>
-            <a:normAutofit/>
-          </a:bodyPr>
-          <a:lstStyle/>
-          <a:p>
-            <a:r>
-              <a:rPr lang="pt-BR" sz="6000" b="1" dirty="0">
-                <a:solidFill>
-                  <a:srgbClr val="FF0000"/>
-                </a:solidFill>
-              </a:rPr>
-              <a:t>Quais as formas usadas para definir o melhor número de </a:t>
-            </a:r>
-            <a:r>
-              <a:rPr lang="pt-BR" sz="6000" b="1" dirty="0" err="1">
-                <a:solidFill>
-                  <a:srgbClr val="FF0000"/>
-                </a:solidFill>
-              </a:rPr>
-              <a:t>clsuters</a:t>
-            </a:r>
-            <a:r>
-              <a:rPr lang="pt-BR" sz="6000" b="1" dirty="0">
-                <a:solidFill>
-                  <a:srgbClr val="FF0000"/>
-                </a:solidFill>
-              </a:rPr>
-              <a:t>???</a:t>
-            </a:r>
-            <a:endParaRPr lang="en-US" sz="6000" b="1" dirty="0">
-              <a:solidFill>
-                <a:srgbClr val="FF0000"/>
-              </a:solidFill>
-            </a:endParaRPr>
-          </a:p>
-        </p:txBody>
-      </p:sp>
-    </p:spTree>
-    <p:extLst>
-      <p:ext uri="{BB962C8B-B14F-4D97-AF65-F5344CB8AC3E}">
-        <p14:creationId xmlns:p14="http://schemas.microsoft.com/office/powerpoint/2010/main" val="2912513465"/>
-      </p:ext>
-    </p:extLst>
-  </p:cSld>
-  <p:clrMapOvr>
-    <a:masterClrMapping/>
-  </p:clrMapOvr>
-</p:sld>
-</file>
-
-<file path=ppt/slides/slide15.xml><?xml version="1.0" encoding="utf-8"?>
-<p:sld xmlns:a="http://schemas.openxmlformats.org/drawingml/2006/main" xmlns:r="http://schemas.openxmlformats.org/officeDocument/2006/relationships" xmlns:p="http://schemas.openxmlformats.org/presentationml/2006/main">
-  <p:cSld>
-    <p:spTree>
-      <p:nvGrpSpPr>
         <p:cNvPr id="1" name="">
           <a:extLst>
             <a:ext uri="{FF2B5EF4-FFF2-40B4-BE49-F238E27FC236}">
-              <a16:creationId xmlns:a16="http://schemas.microsoft.com/office/drawing/2014/main" id="{36D1FDFF-84F9-A395-CDB0-AC77470C24F7}"/>
+              <a16:creationId xmlns:a16="http://schemas.microsoft.com/office/drawing/2014/main" xmlns="" id="{36D1FDFF-84F9-A395-CDB0-AC77470C24F7}"/>
             </a:ext>
           </a:extLst>
         </p:cNvPr>
@@ -7610,7 +7695,7 @@
           <p:cNvPr id="2" name="Título 1">
             <a:extLst>
               <a:ext uri="{FF2B5EF4-FFF2-40B4-BE49-F238E27FC236}">
-                <a16:creationId xmlns:a16="http://schemas.microsoft.com/office/drawing/2014/main" id="{CA82907A-6417-D3C2-265A-0FFD53046E99}"/>
+                <a16:creationId xmlns:a16="http://schemas.microsoft.com/office/drawing/2014/main" xmlns="" id="{CA82907A-6417-D3C2-265A-0FFD53046E99}"/>
               </a:ext>
             </a:extLst>
           </p:cNvPr>
@@ -7628,7 +7713,15 @@
           <a:p>
             <a:r>
               <a:rPr lang="pt-BR" dirty="0"/>
-              <a:t>Quantos devem ser os clusters?</a:t>
+              <a:t>Quantos devem ser os </a:t>
+            </a:r>
+            <a:r>
+              <a:rPr lang="pt-BR" i="1" dirty="0"/>
+              <a:t>clusters</a:t>
+            </a:r>
+            <a:r>
+              <a:rPr lang="pt-BR" dirty="0"/>
+              <a:t>?</a:t>
             </a:r>
             <a:endParaRPr lang="en-US" dirty="0"/>
           </a:p>
@@ -7639,7 +7732,7 @@
           <p:cNvPr id="3" name="Espaço Reservado para Conteúdo 2">
             <a:extLst>
               <a:ext uri="{FF2B5EF4-FFF2-40B4-BE49-F238E27FC236}">
-                <a16:creationId xmlns:a16="http://schemas.microsoft.com/office/drawing/2014/main" id="{3C767761-7363-3966-1F66-B32029649DCD}"/>
+                <a16:creationId xmlns:a16="http://schemas.microsoft.com/office/drawing/2014/main" xmlns="" id="{3C767761-7363-3966-1F66-B32029649DCD}"/>
               </a:ext>
             </a:extLst>
           </p:cNvPr>
@@ -7690,38 +7783,13 @@
             </a:pPr>
             <a:r>
               <a:rPr lang="pt-BR" dirty="0"/>
-              <a:t>no outro, cada exemplo pode ser visto como representando seu próprio cluster de um único exemplo.</a:t>
-            </a:r>
-          </a:p>
-          <a:p>
-            <a:pPr>
-              <a:buFont typeface="Wingdings" panose="05000000000000000000" pitchFamily="2" charset="2"/>
-              <a:buChar char="§"/>
-            </a:pPr>
-            <a:r>
-              <a:rPr lang="pt-BR" b="1" dirty="0">
-                <a:solidFill>
-                  <a:srgbClr val="7030A0"/>
-                </a:solidFill>
-              </a:rPr>
-              <a:t>Implementações</a:t>
-            </a:r>
-            <a:r>
-              <a:rPr lang="pt-BR" dirty="0"/>
-              <a:t> práticas geralmente evitam esse problema pedindo ao </a:t>
-            </a:r>
-            <a:r>
-              <a:rPr lang="pt-BR" b="1" dirty="0">
-                <a:solidFill>
-                  <a:srgbClr val="7030A0"/>
-                </a:solidFill>
-              </a:rPr>
-              <a:t>usuário que forneça o número de clusters</a:t>
-            </a:r>
-            <a:r>
-              <a:rPr lang="pt-BR" dirty="0"/>
+              <a:t>no outro, cada exemplo pode ser visto como representando seu próprio cluster de um único exemplo</a:t>
+            </a:r>
+            <a:r>
+              <a:rPr lang="pt-BR" dirty="0" smtClean="0"/>
               <a:t>.</a:t>
             </a:r>
+            <a:endParaRPr lang="pt-BR" dirty="0"/>
           </a:p>
         </p:txBody>
       </p:sp>
@@ -7730,7 +7798,7 @@
           <p:cNvPr id="5" name="Picture 2" descr="K-Means Clustering using Python. Welcome back guys! Hope you had a great… |  by Luigi Fiori | Medium">
             <a:extLst>
               <a:ext uri="{FF2B5EF4-FFF2-40B4-BE49-F238E27FC236}">
-                <a16:creationId xmlns:a16="http://schemas.microsoft.com/office/drawing/2014/main" id="{079377DD-55D2-BED3-3BB3-D573A6F13921}"/>
+                <a16:creationId xmlns:a16="http://schemas.microsoft.com/office/drawing/2014/main" xmlns="" id="{079377DD-55D2-BED3-3BB3-D573A6F13921}"/>
               </a:ext>
             </a:extLst>
           </p:cNvPr>
@@ -7783,7 +7851,7 @@
 </p:sld>
 </file>
 
-<file path=ppt/slides/slide16.xml><?xml version="1.0" encoding="utf-8"?>
+<file path=ppt/slides/slide15.xml><?xml version="1.0" encoding="utf-8"?>
 <p:sld xmlns:a="http://schemas.openxmlformats.org/drawingml/2006/main" xmlns:r="http://schemas.openxmlformats.org/officeDocument/2006/relationships" xmlns:p="http://schemas.openxmlformats.org/presentationml/2006/main">
   <p:cSld>
     <p:spTree>
@@ -7791,7 +7859,7 @@
         <p:cNvPr id="1" name="">
           <a:extLst>
             <a:ext uri="{FF2B5EF4-FFF2-40B4-BE49-F238E27FC236}">
-              <a16:creationId xmlns:a16="http://schemas.microsoft.com/office/drawing/2014/main" id="{654994D8-D711-9C2A-C202-7BAD7B93F7EE}"/>
+              <a16:creationId xmlns:a16="http://schemas.microsoft.com/office/drawing/2014/main" xmlns="" id="{36D1FDFF-84F9-A395-CDB0-AC77470C24F7}"/>
             </a:ext>
           </a:extLst>
         </p:cNvPr>
@@ -7811,7 +7879,7 @@
           <p:cNvPr id="2" name="Título 1">
             <a:extLst>
               <a:ext uri="{FF2B5EF4-FFF2-40B4-BE49-F238E27FC236}">
-                <a16:creationId xmlns:a16="http://schemas.microsoft.com/office/drawing/2014/main" id="{FA636E4B-196C-922B-890C-6917F63A065D}"/>
+                <a16:creationId xmlns:a16="http://schemas.microsoft.com/office/drawing/2014/main" xmlns="" id="{CA82907A-6417-D3C2-265A-0FFD53046E99}"/>
               </a:ext>
             </a:extLst>
           </p:cNvPr>
@@ -7828,16 +7896,16 @@
           <a:lstStyle/>
           <a:p>
             <a:r>
-              <a:rPr lang="en-US" dirty="0" err="1"/>
-              <a:t>Medindo</a:t>
-            </a:r>
-            <a:r>
-              <a:rPr lang="en-US" dirty="0"/>
-              <a:t> </a:t>
-            </a:r>
-            <a:r>
-              <a:rPr lang="en-US" dirty="0" err="1"/>
-              <a:t>distâncias</a:t>
+              <a:rPr lang="pt-BR" dirty="0"/>
+              <a:t>Quantos devem ser os </a:t>
+            </a:r>
+            <a:r>
+              <a:rPr lang="pt-BR" i="1" dirty="0"/>
+              <a:t>clusters</a:t>
+            </a:r>
+            <a:r>
+              <a:rPr lang="pt-BR" dirty="0"/>
+              <a:t>?</a:t>
             </a:r>
             <a:endParaRPr lang="en-US" dirty="0"/>
           </a:p>
@@ -7848,7 +7916,7 @@
           <p:cNvPr id="3" name="Espaço Reservado para Conteúdo 2">
             <a:extLst>
               <a:ext uri="{FF2B5EF4-FFF2-40B4-BE49-F238E27FC236}">
-                <a16:creationId xmlns:a16="http://schemas.microsoft.com/office/drawing/2014/main" id="{1FCDFA83-D279-17E3-E2CD-6E304EAF637F}"/>
+                <a16:creationId xmlns:a16="http://schemas.microsoft.com/office/drawing/2014/main" xmlns="" id="{3C767761-7363-3966-1F66-B32029649DCD}"/>
               </a:ext>
             </a:extLst>
           </p:cNvPr>
@@ -7861,8 +7929,8 @@
         </p:nvSpPr>
         <p:spPr>
           <a:xfrm>
-            <a:off x="5769429" y="1825624"/>
-            <a:ext cx="6263244" cy="5032375"/>
+            <a:off x="4942114" y="1690688"/>
+            <a:ext cx="7121731" cy="5167311"/>
           </a:xfrm>
         </p:spPr>
         <p:txBody>
@@ -7872,8 +7940,310 @@
           <a:lstStyle/>
           <a:p>
             <a:r>
-              <a:rPr lang="pt-BR" dirty="0"/>
-              <a:t>Algoritmos para identificação de clusters geralmente precisam de uma </a:t>
+              <a:rPr lang="pt-BR" b="1" dirty="0">
+                <a:solidFill>
+                  <a:srgbClr val="7030A0"/>
+                </a:solidFill>
+              </a:rPr>
+              <a:t>Implementações</a:t>
+            </a:r>
+            <a:r>
+              <a:rPr lang="pt-BR" dirty="0"/>
+              <a:t> práticas geralmente evitam esse problema pedindo ao </a:t>
+            </a:r>
+            <a:r>
+              <a:rPr lang="pt-BR" b="1" dirty="0">
+                <a:solidFill>
+                  <a:srgbClr val="7030A0"/>
+                </a:solidFill>
+              </a:rPr>
+              <a:t>usuário que forneça o número de </a:t>
+            </a:r>
+            <a:r>
+              <a:rPr lang="pt-BR" b="1" i="1" dirty="0">
+                <a:solidFill>
+                  <a:srgbClr val="7030A0"/>
+                </a:solidFill>
+              </a:rPr>
+              <a:t>clusters</a:t>
+            </a:r>
+            <a:r>
+              <a:rPr lang="pt-BR" dirty="0"/>
+              <a:t>.</a:t>
+            </a:r>
+          </a:p>
+          <a:p>
+            <a:endParaRPr lang="pt-BR" dirty="0"/>
+          </a:p>
+        </p:txBody>
+      </p:sp>
+      <p:pic>
+        <p:nvPicPr>
+          <p:cNvPr id="5" name="Picture 2" descr="K-Means Clustering using Python. Welcome back guys! Hope you had a great… |  by Luigi Fiori | Medium">
+            <a:extLst>
+              <a:ext uri="{FF2B5EF4-FFF2-40B4-BE49-F238E27FC236}">
+                <a16:creationId xmlns:a16="http://schemas.microsoft.com/office/drawing/2014/main" xmlns="" id="{079377DD-55D2-BED3-3BB3-D573A6F13921}"/>
+              </a:ext>
+            </a:extLst>
+          </p:cNvPr>
+          <p:cNvPicPr>
+            <a:picLocks noChangeAspect="1" noChangeArrowheads="1"/>
+          </p:cNvPicPr>
+          <p:nvPr/>
+        </p:nvPicPr>
+        <p:blipFill rotWithShape="1">
+          <a:blip r:embed="rId2">
+            <a:extLst>
+              <a:ext uri="{28A0092B-C50C-407E-A947-70E740481C1C}">
+                <a14:useLocalDpi xmlns:a14="http://schemas.microsoft.com/office/drawing/2010/main" val="0"/>
+              </a:ext>
+            </a:extLst>
+          </a:blip>
+          <a:srcRect l="1639" t="12047" r="55246" b="11854"/>
+          <a:stretch/>
+        </p:blipFill>
+        <p:spPr bwMode="auto">
+          <a:xfrm>
+            <a:off x="838200" y="2562584"/>
+            <a:ext cx="3694477" cy="2716989"/>
+          </a:xfrm>
+          <a:prstGeom prst="rect">
+            <a:avLst/>
+          </a:prstGeom>
+          <a:noFill/>
+          <a:extLst>
+            <a:ext uri="{909E8E84-426E-40DD-AFC4-6F175D3DCCD1}">
+              <a14:hiddenFill xmlns:a14="http://schemas.microsoft.com/office/drawing/2010/main">
+                <a:solidFill>
+                  <a:srgbClr val="FFFFFF"/>
+                </a:solidFill>
+              </a14:hiddenFill>
+            </a:ext>
+          </a:extLst>
+        </p:spPr>
+      </p:pic>
+    </p:spTree>
+    <p:extLst>
+      <p:ext uri="{BB962C8B-B14F-4D97-AF65-F5344CB8AC3E}">
+        <p14:creationId xmlns:p14="http://schemas.microsoft.com/office/powerpoint/2010/main" val="788130926"/>
+      </p:ext>
+    </p:extLst>
+  </p:cSld>
+  <p:clrMapOvr>
+    <a:masterClrMapping/>
+  </p:clrMapOvr>
+</p:sld>
+</file>
+
+<file path=ppt/slides/slide16.xml><?xml version="1.0" encoding="utf-8"?>
+<p:sld xmlns:a="http://schemas.openxmlformats.org/drawingml/2006/main" xmlns:r="http://schemas.openxmlformats.org/officeDocument/2006/relationships" xmlns:p="http://schemas.openxmlformats.org/presentationml/2006/main">
+  <p:cSld>
+    <p:spTree>
+      <p:nvGrpSpPr>
+        <p:cNvPr id="1" name=""/>
+        <p:cNvGrpSpPr/>
+        <p:nvPr/>
+      </p:nvGrpSpPr>
+      <p:grpSpPr>
+        <a:xfrm>
+          <a:off x="0" y="0"/>
+          <a:ext cx="0" cy="0"/>
+          <a:chOff x="0" y="0"/>
+          <a:chExt cx="0" cy="0"/>
+        </a:xfrm>
+      </p:grpSpPr>
+      <p:sp>
+        <p:nvSpPr>
+          <p:cNvPr id="2" name="Title 1">
+            <a:extLst>
+              <a:ext uri="{FF2B5EF4-FFF2-40B4-BE49-F238E27FC236}">
+                <a16:creationId xmlns:a16="http://schemas.microsoft.com/office/drawing/2014/main" xmlns="" id="{0719C974-9A37-ED60-45B8-7CF90E038097}"/>
+              </a:ext>
+            </a:extLst>
+          </p:cNvPr>
+          <p:cNvSpPr>
+            <a:spLocks noGrp="1"/>
+          </p:cNvSpPr>
+          <p:nvPr>
+            <p:ph type="title"/>
+          </p:nvPr>
+        </p:nvSpPr>
+        <p:spPr/>
+        <p:txBody>
+          <a:bodyPr/>
+          <a:lstStyle/>
+          <a:p>
+            <a:endParaRPr lang="en-US"/>
+          </a:p>
+        </p:txBody>
+      </p:sp>
+      <p:sp>
+        <p:nvSpPr>
+          <p:cNvPr id="3" name="Content Placeholder 2">
+            <a:extLst>
+              <a:ext uri="{FF2B5EF4-FFF2-40B4-BE49-F238E27FC236}">
+                <a16:creationId xmlns:a16="http://schemas.microsoft.com/office/drawing/2014/main" xmlns="" id="{D812A04D-0F4A-CB81-D7DF-C4B0B13163E8}"/>
+              </a:ext>
+            </a:extLst>
+          </p:cNvPr>
+          <p:cNvSpPr>
+            <a:spLocks noGrp="1"/>
+          </p:cNvSpPr>
+          <p:nvPr>
+            <p:ph idx="1"/>
+          </p:nvPr>
+        </p:nvSpPr>
+        <p:spPr/>
+        <p:txBody>
+          <a:bodyPr>
+            <a:normAutofit/>
+          </a:bodyPr>
+          <a:lstStyle/>
+          <a:p>
+            <a:r>
+              <a:rPr lang="pt-BR" sz="6000" b="1" dirty="0">
+                <a:solidFill>
+                  <a:srgbClr val="FF0000"/>
+                </a:solidFill>
+              </a:rPr>
+              <a:t>Quais as formas usadas para definir o melhor número de </a:t>
+            </a:r>
+            <a:r>
+              <a:rPr lang="pt-BR" sz="6000" b="1" dirty="0" err="1">
+                <a:solidFill>
+                  <a:srgbClr val="FF0000"/>
+                </a:solidFill>
+              </a:rPr>
+              <a:t>clsuters</a:t>
+            </a:r>
+            <a:r>
+              <a:rPr lang="pt-BR" sz="6000" b="1" dirty="0">
+                <a:solidFill>
+                  <a:srgbClr val="FF0000"/>
+                </a:solidFill>
+              </a:rPr>
+              <a:t>???</a:t>
+            </a:r>
+            <a:endParaRPr lang="en-US" sz="6000" b="1" dirty="0">
+              <a:solidFill>
+                <a:srgbClr val="FF0000"/>
+              </a:solidFill>
+            </a:endParaRPr>
+          </a:p>
+        </p:txBody>
+      </p:sp>
+    </p:spTree>
+    <p:extLst>
+      <p:ext uri="{BB962C8B-B14F-4D97-AF65-F5344CB8AC3E}">
+        <p14:creationId xmlns:p14="http://schemas.microsoft.com/office/powerpoint/2010/main" val="2912513465"/>
+      </p:ext>
+    </p:extLst>
+  </p:cSld>
+  <p:clrMapOvr>
+    <a:masterClrMapping/>
+  </p:clrMapOvr>
+</p:sld>
+</file>
+
+<file path=ppt/slides/slide17.xml><?xml version="1.0" encoding="utf-8"?>
+<p:sld xmlns:a="http://schemas.openxmlformats.org/drawingml/2006/main" xmlns:r="http://schemas.openxmlformats.org/officeDocument/2006/relationships" xmlns:p="http://schemas.openxmlformats.org/presentationml/2006/main">
+  <p:cSld>
+    <p:spTree>
+      <p:nvGrpSpPr>
+        <p:cNvPr id="1" name="">
+          <a:extLst>
+            <a:ext uri="{FF2B5EF4-FFF2-40B4-BE49-F238E27FC236}">
+              <a16:creationId xmlns:a16="http://schemas.microsoft.com/office/drawing/2014/main" xmlns="" id="{654994D8-D711-9C2A-C202-7BAD7B93F7EE}"/>
+            </a:ext>
+          </a:extLst>
+        </p:cNvPr>
+        <p:cNvGrpSpPr/>
+        <p:nvPr/>
+      </p:nvGrpSpPr>
+      <p:grpSpPr>
+        <a:xfrm>
+          <a:off x="0" y="0"/>
+          <a:ext cx="0" cy="0"/>
+          <a:chOff x="0" y="0"/>
+          <a:chExt cx="0" cy="0"/>
+        </a:xfrm>
+      </p:grpSpPr>
+      <p:sp>
+        <p:nvSpPr>
+          <p:cNvPr id="2" name="Título 1">
+            <a:extLst>
+              <a:ext uri="{FF2B5EF4-FFF2-40B4-BE49-F238E27FC236}">
+                <a16:creationId xmlns:a16="http://schemas.microsoft.com/office/drawing/2014/main" xmlns="" id="{FA636E4B-196C-922B-890C-6917F63A065D}"/>
+              </a:ext>
+            </a:extLst>
+          </p:cNvPr>
+          <p:cNvSpPr>
+            <a:spLocks noGrp="1"/>
+          </p:cNvSpPr>
+          <p:nvPr>
+            <p:ph type="title"/>
+          </p:nvPr>
+        </p:nvSpPr>
+        <p:spPr/>
+        <p:txBody>
+          <a:bodyPr/>
+          <a:lstStyle/>
+          <a:p>
+            <a:r>
+              <a:rPr lang="en-US" dirty="0" err="1"/>
+              <a:t>Medindo</a:t>
+            </a:r>
+            <a:r>
+              <a:rPr lang="en-US" dirty="0"/>
+              <a:t> </a:t>
+            </a:r>
+            <a:r>
+              <a:rPr lang="en-US" dirty="0" err="1"/>
+              <a:t>distâncias</a:t>
+            </a:r>
+            <a:endParaRPr lang="en-US" dirty="0"/>
+          </a:p>
+        </p:txBody>
+      </p:sp>
+      <p:sp>
+        <p:nvSpPr>
+          <p:cNvPr id="3" name="Espaço Reservado para Conteúdo 2">
+            <a:extLst>
+              <a:ext uri="{FF2B5EF4-FFF2-40B4-BE49-F238E27FC236}">
+                <a16:creationId xmlns:a16="http://schemas.microsoft.com/office/drawing/2014/main" xmlns="" id="{1FCDFA83-D279-17E3-E2CD-6E304EAF637F}"/>
+              </a:ext>
+            </a:extLst>
+          </p:cNvPr>
+          <p:cNvSpPr>
+            <a:spLocks noGrp="1"/>
+          </p:cNvSpPr>
+          <p:nvPr>
+            <p:ph idx="1"/>
+          </p:nvPr>
+        </p:nvSpPr>
+        <p:spPr>
+          <a:xfrm>
+            <a:off x="5769428" y="1825624"/>
+            <a:ext cx="6422571" cy="5032375"/>
+          </a:xfrm>
+        </p:spPr>
+        <p:txBody>
+          <a:bodyPr>
+            <a:normAutofit/>
+          </a:bodyPr>
+          <a:lstStyle/>
+          <a:p>
+            <a:r>
+              <a:rPr lang="pt-BR" dirty="0"/>
+              <a:t>Algoritmos para identificação de </a:t>
+            </a:r>
+            <a:r>
+              <a:rPr lang="pt-BR" i="1" dirty="0"/>
+              <a:t>clusters</a:t>
+            </a:r>
+            <a:r>
+              <a:rPr lang="pt-BR" dirty="0"/>
+              <a:t> geralmente precisam de uma </a:t>
             </a:r>
             <a:r>
               <a:rPr lang="pt-BR" b="1" dirty="0">
@@ -7941,7 +8311,7 @@
           <p:cNvPr id="3074" name="Picture 2" descr="Quantum machine learning: distance estimation for k-means clustering | by  Sashwat Anagolum | Towards Data Science">
             <a:extLst>
               <a:ext uri="{FF2B5EF4-FFF2-40B4-BE49-F238E27FC236}">
-                <a16:creationId xmlns:a16="http://schemas.microsoft.com/office/drawing/2014/main" id="{EE37D2FB-B661-E3F3-5FAE-2D65997FAF56}"/>
+                <a16:creationId xmlns:a16="http://schemas.microsoft.com/office/drawing/2014/main" xmlns="" id="{EE37D2FB-B661-E3F3-5FAE-2D65997FAF56}"/>
               </a:ext>
             </a:extLst>
           </p:cNvPr>
@@ -7994,7 +8364,7 @@
 </p:sld>
 </file>
 
-<file path=ppt/slides/slide17.xml><?xml version="1.0" encoding="utf-8"?>
+<file path=ppt/slides/slide18.xml><?xml version="1.0" encoding="utf-8"?>
 <p:sld xmlns:a="http://schemas.openxmlformats.org/drawingml/2006/main" xmlns:r="http://schemas.openxmlformats.org/officeDocument/2006/relationships" xmlns:p="http://schemas.openxmlformats.org/presentationml/2006/main">
   <p:cSld>
     <p:spTree>
@@ -8042,8 +8412,8 @@
           </a:p>
         </p:txBody>
       </p:sp>
-      <mc:AlternateContent xmlns:mc="http://schemas.openxmlformats.org/markup-compatibility/2006" xmlns:a14="http://schemas.microsoft.com/office/drawing/2010/main">
-        <mc:Choice Requires="a14">
+      <mc:AlternateContent xmlns:mc="http://schemas.openxmlformats.org/markup-compatibility/2006">
+        <mc:Choice xmlns:a14="http://schemas.microsoft.com/office/drawing/2010/main" Requires="a14">
           <p:sp>
             <p:nvSpPr>
               <p:cNvPr id="3" name="Espaço Reservado para Conteúdo 2"/>
@@ -8056,19 +8426,27 @@
             </p:nvSpPr>
             <p:spPr>
               <a:xfrm>
-                <a:off x="5246914" y="1825624"/>
-                <a:ext cx="6785759" cy="5032375"/>
+                <a:off x="838200" y="1825624"/>
+                <a:ext cx="11353800" cy="5032375"/>
               </a:xfrm>
             </p:spPr>
             <p:txBody>
               <a:bodyPr>
-                <a:normAutofit lnSpcReduction="10000"/>
+                <a:normAutofit/>
               </a:bodyPr>
               <a:lstStyle/>
               <a:p>
                 <a:r>
                   <a:rPr lang="pt-BR" dirty="0"/>
-                  <a:t>Para exemplos com atributos contínuos e discretos ou uma mistura com categóricos, usamos uma equação mais geral para calcular as distâncias:</a:t>
+                  <a:t>Para </a:t>
+                </a:r>
+                <a:r>
+                  <a:rPr lang="pt-BR" dirty="0" smtClean="0"/>
+                  <a:t>dados com </a:t>
+                </a:r>
+                <a:r>
+                  <a:rPr lang="pt-BR" dirty="0"/>
+                  <a:t>atributos contínuos e discretos ou uma mistura com categóricos, usamos uma equação mais geral para calcular as distâncias:</a:t>
                 </a:r>
               </a:p>
               <a:p>
@@ -8864,8 +9242,8 @@
                   <a:t> para atributos categóricos, mas transformados em </a:t>
                 </a:r>
                 <a:r>
-                  <a:rPr lang="pt-BR" dirty="0" err="1"/>
-                  <a:t>numércos</a:t>
+                  <a:rPr lang="pt-BR" dirty="0" smtClean="0"/>
+                  <a:t>numéricos</a:t>
                 </a:r>
                 <a:r>
                   <a:rPr lang="pt-BR" dirty="0"/>
@@ -8875,7 +9253,7 @@
             </p:txBody>
           </p:sp>
         </mc:Choice>
-        <mc:Fallback xmlns="">
+        <mc:Fallback>
           <p:sp>
             <p:nvSpPr>
               <p:cNvPr id="3" name="Espaço Reservado para Conteúdo 2"/>
@@ -8888,13 +9266,13 @@
             </p:nvSpPr>
             <p:spPr>
               <a:xfrm>
-                <a:off x="5246914" y="1825624"/>
-                <a:ext cx="6785759" cy="5032375"/>
+                <a:off x="838200" y="1825624"/>
+                <a:ext cx="11353800" cy="5032375"/>
               </a:xfrm>
-              <a:blipFill>
+              <a:blipFill rotWithShape="0">
                 <a:blip r:embed="rId2"/>
                 <a:stretch>
-                  <a:fillRect l="-1887" t="-2663" r="-1797" b="-3269"/>
+                  <a:fillRect l="-1128" t="-1937"/>
                 </a:stretch>
               </a:blipFill>
             </p:spPr>
@@ -8903,7 +9281,7 @@
               <a:lstStyle/>
               <a:p>
                 <a:r>
-                  <a:rPr lang="en-US">
+                  <a:rPr lang="pt-BR">
                     <a:noFill/>
                   </a:rPr>
                   <a:t> </a:t>
@@ -8913,51 +9291,6 @@
           </p:sp>
         </mc:Fallback>
       </mc:AlternateContent>
-      <p:pic>
-        <p:nvPicPr>
-          <p:cNvPr id="4" name="Picture 2" descr="Quantum machine learning: distance estimation for k-means clustering | by  Sashwat Anagolum | Towards Data Science">
-            <a:extLst>
-              <a:ext uri="{FF2B5EF4-FFF2-40B4-BE49-F238E27FC236}">
-                <a16:creationId xmlns:a16="http://schemas.microsoft.com/office/drawing/2014/main" id="{22ACC8D3-8B80-BBE4-31ED-C31E6E11B17D}"/>
-              </a:ext>
-            </a:extLst>
-          </p:cNvPr>
-          <p:cNvPicPr>
-            <a:picLocks noChangeAspect="1" noChangeArrowheads="1"/>
-          </p:cNvPicPr>
-          <p:nvPr/>
-        </p:nvPicPr>
-        <p:blipFill rotWithShape="1">
-          <a:blip r:embed="rId3">
-            <a:extLst>
-              <a:ext uri="{28A0092B-C50C-407E-A947-70E740481C1C}">
-                <a14:useLocalDpi xmlns:a14="http://schemas.microsoft.com/office/drawing/2010/main" val="0"/>
-              </a:ext>
-            </a:extLst>
-          </a:blip>
-          <a:srcRect l="3750" t="11979" r="8929"/>
-          <a:stretch/>
-        </p:blipFill>
-        <p:spPr bwMode="auto">
-          <a:xfrm>
-            <a:off x="511629" y="2202317"/>
-            <a:ext cx="4487974" cy="3392940"/>
-          </a:xfrm>
-          <a:prstGeom prst="rect">
-            <a:avLst/>
-          </a:prstGeom>
-          <a:noFill/>
-          <a:extLst>
-            <a:ext uri="{909E8E84-426E-40DD-AFC4-6F175D3DCCD1}">
-              <a14:hiddenFill xmlns:a14="http://schemas.microsoft.com/office/drawing/2010/main">
-                <a:solidFill>
-                  <a:srgbClr val="FFFFFF"/>
-                </a:solidFill>
-              </a14:hiddenFill>
-            </a:ext>
-          </a:extLst>
-        </p:spPr>
-      </p:pic>
     </p:spTree>
     <p:extLst>
       <p:ext uri="{BB962C8B-B14F-4D97-AF65-F5344CB8AC3E}">
@@ -8971,7 +9304,7 @@
 </p:sld>
 </file>
 
-<file path=ppt/slides/slide18.xml><?xml version="1.0" encoding="utf-8"?>
+<file path=ppt/slides/slide19.xml><?xml version="1.0" encoding="utf-8"?>
 <p:sld xmlns:a="http://schemas.openxmlformats.org/drawingml/2006/main" xmlns:r="http://schemas.openxmlformats.org/officeDocument/2006/relationships" xmlns:p="http://schemas.openxmlformats.org/presentationml/2006/main">
   <p:cSld>
     <p:spTree>
@@ -9011,8 +9344,8 @@
           </a:p>
         </p:txBody>
       </p:sp>
-      <mc:AlternateContent xmlns:mc="http://schemas.openxmlformats.org/markup-compatibility/2006" xmlns:a14="http://schemas.microsoft.com/office/drawing/2010/main">
-        <mc:Choice Requires="a14">
+      <mc:AlternateContent xmlns:mc="http://schemas.openxmlformats.org/markup-compatibility/2006">
+        <mc:Choice xmlns:a14="http://schemas.microsoft.com/office/drawing/2010/main" Requires="a14">
           <p:sp>
             <p:nvSpPr>
               <p:cNvPr id="3" name="Espaço Reservado para Conteúdo 2"/>
@@ -9390,10 +9723,14 @@
               <a:p>
                 <a:r>
                   <a:rPr lang="pt-BR" dirty="0"/>
-                  <a:t>Agora, veremos como funciona o k-</a:t>
+                  <a:t>Agora, veremos como funciona o </a:t>
                 </a:r>
                 <a:r>
-                  <a:rPr lang="pt-BR" dirty="0" err="1"/>
+                  <a:rPr lang="pt-BR" i="1" dirty="0"/>
+                  <a:t>k-</a:t>
+                </a:r>
+                <a:r>
+                  <a:rPr lang="pt-BR" i="1" dirty="0" err="1"/>
                   <a:t>Means</a:t>
                 </a:r>
                 <a:r>
@@ -9404,7 +9741,7 @@
             </p:txBody>
           </p:sp>
         </mc:Choice>
-        <mc:Fallback xmlns="">
+        <mc:Fallback>
           <p:sp>
             <p:nvSpPr>
               <p:cNvPr id="3" name="Espaço Reservado para Conteúdo 2"/>
@@ -9420,7 +9757,7 @@
                 <a:off x="838199" y="1825624"/>
                 <a:ext cx="10924309" cy="4710257"/>
               </a:xfrm>
-              <a:blipFill>
+              <a:blipFill rotWithShape="0">
                 <a:blip r:embed="rId2"/>
                 <a:stretch>
                   <a:fillRect l="-948" t="-2070"/>
@@ -9432,7 +9769,7 @@
               <a:lstStyle/>
               <a:p>
                 <a:r>
-                  <a:rPr lang="en-US">
+                  <a:rPr lang="pt-BR">
                     <a:noFill/>
                   </a:rPr>
                   <a:t> </a:t>
@@ -9455,7 +9792,7 @@
 </p:sld>
 </file>
 
-<file path=ppt/slides/slide19.xml><?xml version="1.0" encoding="utf-8"?>
+<file path=ppt/slides/slide2.xml><?xml version="1.0" encoding="utf-8"?>
 <p:sld xmlns:a="http://schemas.openxmlformats.org/drawingml/2006/main" xmlns:r="http://schemas.openxmlformats.org/officeDocument/2006/relationships" xmlns:p="http://schemas.openxmlformats.org/presentationml/2006/main">
   <p:cSld>
     <p:spTree>
@@ -9489,18 +9826,204 @@
           <a:p>
             <a:r>
               <a:rPr lang="pt-BR" dirty="0"/>
+              <a:t>Recapitulando</a:t>
+            </a:r>
+            <a:endParaRPr lang="en-US" dirty="0"/>
+          </a:p>
+        </p:txBody>
+      </p:sp>
+      <p:sp>
+        <p:nvSpPr>
+          <p:cNvPr id="3" name="Espaço Reservado para Conteúdo 2"/>
+          <p:cNvSpPr>
+            <a:spLocks noGrp="1"/>
+          </p:cNvSpPr>
+          <p:nvPr>
+            <p:ph idx="1"/>
+          </p:nvPr>
+        </p:nvSpPr>
+        <p:spPr>
+          <a:xfrm>
+            <a:off x="838199" y="1825624"/>
+            <a:ext cx="11223172" cy="5032376"/>
+          </a:xfrm>
+        </p:spPr>
+        <p:txBody>
+          <a:bodyPr>
+            <a:normAutofit/>
+          </a:bodyPr>
+          <a:lstStyle/>
+          <a:p>
+            <a:r>
+              <a:rPr lang="pt-BR" dirty="0"/>
+              <a:t>Até o momento, todos os algoritmos que aprendemos seguiam o paradigma do aprendizado supervisionado.</a:t>
+            </a:r>
+          </a:p>
+          <a:p>
+            <a:r>
+              <a:rPr lang="pt-BR" dirty="0"/>
+              <a:t>Hoje, falaremos sobre </a:t>
+            </a:r>
+            <a:r>
+              <a:rPr lang="pt-BR" b="1" i="1" dirty="0"/>
+              <a:t>clustering</a:t>
+            </a:r>
+            <a:r>
+              <a:rPr lang="pt-BR" dirty="0"/>
+              <a:t>, que são algoritmos de </a:t>
+            </a:r>
+            <a:r>
+              <a:rPr lang="pt-BR" b="1" dirty="0"/>
+              <a:t>aprendizado não-supervisionado</a:t>
+            </a:r>
+            <a:r>
+              <a:rPr lang="pt-BR" dirty="0"/>
+              <a:t>.</a:t>
+            </a:r>
+          </a:p>
+          <a:p>
+            <a:pPr lvl="1">
+              <a:buFont typeface="Wingdings" panose="05000000000000000000" pitchFamily="2" charset="2"/>
+              <a:buChar char="§"/>
+            </a:pPr>
+            <a:r>
+              <a:rPr lang="pt-BR" dirty="0"/>
+              <a:t>Não temos rótulos, apenas atributos.</a:t>
+            </a:r>
+          </a:p>
+          <a:p>
+            <a:r>
+              <a:rPr lang="pt-BR" dirty="0"/>
+              <a:t>Eles visam criar agrupamentos de dados (chamados de </a:t>
+            </a:r>
+            <a:r>
+              <a:rPr lang="pt-BR" b="1" i="1" dirty="0"/>
+              <a:t>clusters</a:t>
+            </a:r>
+            <a:r>
+              <a:rPr lang="pt-BR" b="1" dirty="0"/>
+              <a:t> </a:t>
+            </a:r>
+            <a:r>
+              <a:rPr lang="pt-BR" dirty="0"/>
+              <a:t>ou</a:t>
+            </a:r>
+            <a:r>
+              <a:rPr lang="pt-BR" b="1" dirty="0"/>
+              <a:t> grupos</a:t>
+            </a:r>
+            <a:r>
+              <a:rPr lang="pt-BR" dirty="0"/>
+              <a:t>) segundo seu </a:t>
+            </a:r>
+            <a:r>
+              <a:rPr lang="pt-BR" b="1" dirty="0">
+                <a:solidFill>
+                  <a:srgbClr val="00B050"/>
+                </a:solidFill>
+              </a:rPr>
+              <a:t>grau de semelhança</a:t>
+            </a:r>
+            <a:r>
+              <a:rPr lang="pt-BR" dirty="0"/>
+              <a:t>. </a:t>
+            </a:r>
+          </a:p>
+          <a:p>
+            <a:r>
+              <a:rPr lang="pt-BR" dirty="0"/>
+              <a:t>Nesta aula, aprenderemos sobre o algoritmo chamado de </a:t>
+            </a:r>
+            <a:r>
+              <a:rPr lang="pt-BR" b="1" dirty="0"/>
+              <a:t>k-Médias</a:t>
+            </a:r>
+            <a:r>
+              <a:rPr lang="pt-BR" dirty="0"/>
+              <a:t> (ou </a:t>
+            </a:r>
+            <a:r>
+              <a:rPr lang="pt-BR" b="1" i="1" dirty="0"/>
               <a:t>k-</a:t>
             </a:r>
             <a:r>
-              <a:rPr lang="pt-BR" dirty="0" err="1"/>
+              <a:rPr lang="pt-BR" b="1" i="1" dirty="0" err="1"/>
               <a:t>Means</a:t>
             </a:r>
-            <a:endParaRPr lang="en-US" dirty="0"/>
-          </a:p>
-        </p:txBody>
-      </p:sp>
-      <mc:AlternateContent xmlns:mc="http://schemas.openxmlformats.org/markup-compatibility/2006" xmlns:a14="http://schemas.microsoft.com/office/drawing/2010/main">
-        <mc:Choice Requires="a14">
+            <a:r>
+              <a:rPr lang="pt-BR" dirty="0"/>
+              <a:t>, em inglês) que é um dos algoritmos mais simples de </a:t>
+            </a:r>
+            <a:r>
+              <a:rPr lang="pt-BR" b="1" i="1" dirty="0"/>
+              <a:t>clustering</a:t>
+            </a:r>
+            <a:r>
+              <a:rPr lang="pt-BR" dirty="0"/>
+              <a:t>.</a:t>
+            </a:r>
+          </a:p>
+        </p:txBody>
+      </p:sp>
+    </p:spTree>
+    <p:extLst>
+      <p:ext uri="{BB962C8B-B14F-4D97-AF65-F5344CB8AC3E}">
+        <p14:creationId xmlns:p14="http://schemas.microsoft.com/office/powerpoint/2010/main" val="2127415881"/>
+      </p:ext>
+    </p:extLst>
+  </p:cSld>
+  <p:clrMapOvr>
+    <a:masterClrMapping/>
+  </p:clrMapOvr>
+</p:sld>
+</file>
+
+<file path=ppt/slides/slide20.xml><?xml version="1.0" encoding="utf-8"?>
+<p:sld xmlns:a="http://schemas.openxmlformats.org/drawingml/2006/main" xmlns:r="http://schemas.openxmlformats.org/officeDocument/2006/relationships" xmlns:p="http://schemas.openxmlformats.org/presentationml/2006/main">
+  <p:cSld>
+    <p:spTree>
+      <p:nvGrpSpPr>
+        <p:cNvPr id="1" name=""/>
+        <p:cNvGrpSpPr/>
+        <p:nvPr/>
+      </p:nvGrpSpPr>
+      <p:grpSpPr>
+        <a:xfrm>
+          <a:off x="0" y="0"/>
+          <a:ext cx="0" cy="0"/>
+          <a:chOff x="0" y="0"/>
+          <a:chExt cx="0" cy="0"/>
+        </a:xfrm>
+      </p:grpSpPr>
+      <p:sp>
+        <p:nvSpPr>
+          <p:cNvPr id="2" name="Título 1"/>
+          <p:cNvSpPr>
+            <a:spLocks noGrp="1"/>
+          </p:cNvSpPr>
+          <p:nvPr>
+            <p:ph type="title"/>
+          </p:nvPr>
+        </p:nvSpPr>
+        <p:spPr/>
+        <p:txBody>
+          <a:bodyPr/>
+          <a:lstStyle/>
+          <a:p>
+            <a:r>
+              <a:rPr lang="pt-BR" i="1" dirty="0"/>
+              <a:t>k-</a:t>
+            </a:r>
+            <a:r>
+              <a:rPr lang="pt-BR" i="1" dirty="0" err="1"/>
+              <a:t>Means</a:t>
+            </a:r>
+            <a:endParaRPr lang="en-US" i="1" dirty="0"/>
+          </a:p>
+        </p:txBody>
+      </p:sp>
+      <mc:AlternateContent xmlns:mc="http://schemas.openxmlformats.org/markup-compatibility/2006">
+        <mc:Choice xmlns:a14="http://schemas.microsoft.com/office/drawing/2010/main" Requires="a14">
           <p:sp>
             <p:nvSpPr>
               <p:cNvPr id="3" name="Espaço Reservado para Conteúdo 2"/>
@@ -9514,7 +10037,7 @@
             <p:spPr>
               <a:xfrm>
                 <a:off x="838199" y="1825624"/>
-                <a:ext cx="11152909" cy="5032375"/>
+                <a:ext cx="11353801" cy="5032375"/>
               </a:xfrm>
             </p:spPr>
             <p:txBody>
@@ -9551,21 +10074,45 @@
                 </a14:m>
                 <a:r>
                   <a:rPr lang="pt-BR" dirty="0"/>
-                  <a:t> no nome denota o número </a:t>
-                </a:r>
-                <a:r>
-                  <a:rPr lang="pt-BR" b="1" dirty="0"/>
-                  <a:t>pré-definido</a:t>
+                  <a:t> </a:t>
                 </a:r>
                 <a:r>
                   <a:rPr lang="pt-BR" dirty="0"/>
-                  <a:t> de clusters, i.e., o número de clusters é um parâmetro definido pelo usuário.</a:t>
+                  <a:t>é </a:t>
+                </a:r>
+                <a:r>
+                  <a:rPr lang="pt-BR" dirty="0" smtClean="0"/>
+                  <a:t>um parâmetro </a:t>
+                </a:r>
+                <a:r>
+                  <a:rPr lang="pt-BR" dirty="0"/>
+                  <a:t>definido pelo usuário </a:t>
+                </a:r>
+                <a:r>
+                  <a:rPr lang="pt-BR" dirty="0" smtClean="0"/>
+                  <a:t>e define o</a:t>
+                </a:r>
+                <a:r>
+                  <a:rPr lang="pt-BR" dirty="0" smtClean="0"/>
+                  <a:t> número de </a:t>
+                </a:r>
+                <a:r>
+                  <a:rPr lang="pt-BR" i="1" dirty="0" smtClean="0"/>
+                  <a:t>clusters</a:t>
+                </a:r>
+                <a:r>
+                  <a:rPr lang="pt-BR" dirty="0" smtClean="0"/>
+                  <a:t>.</a:t>
                 </a:r>
               </a:p>
               <a:p>
                 <a:r>
+                  <a:rPr lang="pt-BR" dirty="0" smtClean="0"/>
+                  <a:t>O </a:t>
+                </a:r>
+                <a:r>
                   <a:rPr lang="pt-BR" dirty="0"/>
-                  <a:t>O pseudocódigo do algoritmo é mostrado abaixo.</a:t>
+                  <a:t>pseudocódigo do algoritmo é mostrado abaixo.</a:t>
                 </a:r>
               </a:p>
               <a:p>
@@ -9584,15 +10131,33 @@
                 <a:endParaRPr lang="pt-BR" dirty="0"/>
               </a:p>
               <a:p>
+                <a:pPr marL="0" indent="0">
+                  <a:buNone/>
+                </a:pPr>
+                <a:endParaRPr lang="pt-BR" dirty="0" smtClean="0"/>
+              </a:p>
+              <a:p>
+                <a:r>
+                  <a:rPr lang="pt-BR" dirty="0" smtClean="0"/>
+                  <a:t>O </a:t>
+                </a:r>
                 <a:r>
                   <a:rPr lang="pt-BR" dirty="0"/>
-                  <a:t>O algoritmo garantidamente chega a uma situação em que cada exemplo se encontra no cluster mais próximo, de modo que, a partir deste momento, os centroides não mudem mais.</a:t>
+                  <a:t>algoritmo garantidamente chega a uma situação em que cada exemplo se encontra no </a:t>
+                </a:r>
+                <a:r>
+                  <a:rPr lang="pt-BR" i="1" dirty="0"/>
+                  <a:t>cluster</a:t>
+                </a:r>
+                <a:r>
+                  <a:rPr lang="pt-BR" dirty="0"/>
+                  <a:t> mais próximo, de modo que, a partir deste momento, os centroides não mudem mais.</a:t>
                 </a:r>
               </a:p>
             </p:txBody>
           </p:sp>
         </mc:Choice>
-        <mc:Fallback xmlns="">
+        <mc:Fallback>
           <p:sp>
             <p:nvSpPr>
               <p:cNvPr id="3" name="Espaço Reservado para Conteúdo 2"/>
@@ -9606,12 +10171,12 @@
             <p:spPr>
               <a:xfrm>
                 <a:off x="838199" y="1825624"/>
-                <a:ext cx="11152909" cy="5032375"/>
+                <a:ext cx="11353801" cy="5032375"/>
               </a:xfrm>
-              <a:blipFill>
+              <a:blipFill rotWithShape="0">
                 <a:blip r:embed="rId3"/>
                 <a:stretch>
-                  <a:fillRect l="-929" t="-1937"/>
+                  <a:fillRect l="-913" t="-1937" r="-1557"/>
                 </a:stretch>
               </a:blipFill>
             </p:spPr>
@@ -9620,7 +10185,7 @@
               <a:lstStyle/>
               <a:p>
                 <a:r>
-                  <a:rPr lang="en-US">
+                  <a:rPr lang="pt-BR">
                     <a:noFill/>
                   </a:rPr>
                   <a:t> </a:t>
@@ -9630,8 +10195,8 @@
           </p:sp>
         </mc:Fallback>
       </mc:AlternateContent>
-      <mc:AlternateContent xmlns:mc="http://schemas.openxmlformats.org/markup-compatibility/2006" xmlns:a14="http://schemas.microsoft.com/office/drawing/2010/main">
-        <mc:Choice Requires="a14">
+      <mc:AlternateContent xmlns:mc="http://schemas.openxmlformats.org/markup-compatibility/2006">
+        <mc:Choice xmlns:a14="http://schemas.microsoft.com/office/drawing/2010/main" Requires="a14">
           <p:sp>
             <p:nvSpPr>
               <p:cNvPr id="4" name="TextBox 4"/>
@@ -9640,8 +10205,8 @@
             </p:nvSpPr>
             <p:spPr>
               <a:xfrm>
-                <a:off x="2079214" y="3325262"/>
-                <a:ext cx="8670878" cy="1815882"/>
+                <a:off x="1698214" y="2989982"/>
+                <a:ext cx="9167906" cy="2031325"/>
               </a:xfrm>
               <a:prstGeom prst="rect">
                 <a:avLst/>
@@ -9660,17 +10225,25 @@
               <a:lstStyle/>
               <a:p>
                 <a:r>
-                  <a:rPr lang="pt-BR" sz="1600" b="1" dirty="0"/>
+                  <a:rPr lang="pt-BR" b="1" dirty="0"/>
                   <a:t>Entradas</a:t>
                 </a:r>
                 <a:r>
-                  <a:rPr lang="pt-BR" sz="1600" dirty="0"/>
-                  <a:t>: conjunto de exemplos e número de clusters, </a:t>
+                  <a:rPr lang="pt-BR" dirty="0"/>
+                  <a:t>: conjunto de exemplos e número de </a:t>
+                </a:r>
+                <a:r>
+                  <a:rPr lang="pt-BR" i="1" dirty="0"/>
+                  <a:t>clusters</a:t>
+                </a:r>
+                <a:r>
+                  <a:rPr lang="pt-BR" dirty="0"/>
+                  <a:t>, </a:t>
                 </a:r>
                 <a14:m>
                   <m:oMath xmlns:m="http://schemas.openxmlformats.org/officeDocument/2006/math">
                     <m:r>
-                      <a:rPr lang="pt-BR" sz="1600" i="1">
+                      <a:rPr lang="pt-BR" i="1">
                         <a:latin typeface="Cambria Math" panose="02040503050406030204" pitchFamily="18" charset="0"/>
                       </a:rPr>
                       <m:t>𝑘</m:t>
@@ -9678,10 +10251,10 @@
                   </m:oMath>
                 </a14:m>
                 <a:r>
-                  <a:rPr lang="pt-BR" sz="1600" dirty="0"/>
+                  <a:rPr lang="pt-BR" dirty="0"/>
                   <a:t>. </a:t>
                 </a:r>
-                <a:endParaRPr lang="pt-BR" sz="1600" b="1" dirty="0"/>
+                <a:endParaRPr lang="pt-BR" b="1" dirty="0"/>
               </a:p>
               <a:p>
                 <a:pPr marL="342900" indent="-342900">
@@ -9689,17 +10262,17 @@
                   <a:buAutoNum type="arabicPeriod"/>
                 </a:pPr>
                 <a:r>
-                  <a:rPr lang="pt-BR" sz="1600" b="1" dirty="0"/>
+                  <a:rPr lang="pt-BR" b="1" dirty="0"/>
                   <a:t>Defina</a:t>
                 </a:r>
                 <a:r>
-                  <a:rPr lang="pt-BR" sz="1600" dirty="0"/>
+                  <a:rPr lang="pt-BR" dirty="0"/>
                   <a:t> </a:t>
                 </a:r>
                 <a14:m>
                   <m:oMath xmlns:m="http://schemas.openxmlformats.org/officeDocument/2006/math">
                     <m:r>
-                      <a:rPr lang="pt-BR" sz="1600" i="1">
+                      <a:rPr lang="pt-BR" i="1">
                         <a:latin typeface="Cambria Math" panose="02040503050406030204" pitchFamily="18" charset="0"/>
                       </a:rPr>
                       <m:t>𝑘</m:t>
@@ -9707,7 +10280,7 @@
                   </m:oMath>
                 </a14:m>
                 <a:r>
-                  <a:rPr lang="pt-BR" sz="1600" dirty="0"/>
+                  <a:rPr lang="pt-BR" dirty="0"/>
                   <a:t> centroides iniciais (geralmente, feito de forma aleatória).</a:t>
                 </a:r>
               </a:p>
@@ -9717,7 +10290,7 @@
                   <a:buAutoNum type="arabicPeriod"/>
                 </a:pPr>
                 <a:r>
-                  <a:rPr lang="pt-BR" sz="1600" b="1" dirty="0"/>
+                  <a:rPr lang="pt-BR" b="1" dirty="0"/>
                   <a:t>Repita</a:t>
                 </a:r>
               </a:p>
@@ -9727,25 +10300,25 @@
                   <a:buAutoNum type="alphaLcParenR"/>
                 </a:pPr>
                 <a:r>
-                  <a:rPr lang="pt-BR" sz="1600" dirty="0"/>
+                  <a:rPr lang="pt-BR" dirty="0"/>
                   <a:t>Calcule a distância de cada exemplo, </a:t>
                 </a:r>
                 <a14:m>
                   <m:oMath xmlns:m="http://schemas.openxmlformats.org/officeDocument/2006/math">
                     <m:r>
-                      <a:rPr lang="pt-BR" sz="1600" b="1" i="1">
+                      <a:rPr lang="pt-BR" b="1" i="1">
                         <a:latin typeface="Cambria Math" panose="02040503050406030204" pitchFamily="18" charset="0"/>
                       </a:rPr>
                       <m:t>𝒙</m:t>
                     </m:r>
                     <m:r>
-                      <a:rPr lang="pt-BR" sz="1600" b="1" i="1" smtClean="0">
+                      <a:rPr lang="pt-BR" b="1" i="1" smtClean="0">
                         <a:latin typeface="Cambria Math" panose="02040503050406030204" pitchFamily="18" charset="0"/>
                       </a:rPr>
                       <m:t>,</m:t>
                     </m:r>
                     <m:r>
-                      <a:rPr lang="pt-BR" sz="1600" b="1" i="1">
+                      <a:rPr lang="pt-BR" b="1" i="1">
                         <a:latin typeface="Cambria Math" panose="02040503050406030204" pitchFamily="18" charset="0"/>
                       </a:rPr>
                       <m:t> </m:t>
@@ -9753,13 +10326,13 @@
                   </m:oMath>
                 </a14:m>
                 <a:r>
-                  <a:rPr lang="pt-BR" sz="1600" dirty="0"/>
+                  <a:rPr lang="pt-BR" dirty="0"/>
                   <a:t>para cada um dos </a:t>
                 </a:r>
                 <a14:m>
                   <m:oMath xmlns:m="http://schemas.openxmlformats.org/officeDocument/2006/math">
                     <m:r>
-                      <a:rPr lang="pt-BR" sz="1600" i="1">
+                      <a:rPr lang="pt-BR" i="1">
                         <a:latin typeface="Cambria Math" panose="02040503050406030204" pitchFamily="18" charset="0"/>
                       </a:rPr>
                       <m:t>𝑘</m:t>
@@ -9767,8 +10340,16 @@
                   </m:oMath>
                 </a14:m>
                 <a:r>
-                  <a:rPr lang="pt-BR" sz="1600" dirty="0"/>
-                  <a:t> centroides e atribua cada exemplo ao cluster mais próximo.</a:t>
+                  <a:rPr lang="pt-BR" dirty="0"/>
+                  <a:t> centroides e atribua cada exemplo ao </a:t>
+                </a:r>
+                <a:r>
+                  <a:rPr lang="pt-BR" i="1" dirty="0"/>
+                  <a:t>cluster</a:t>
+                </a:r>
+                <a:r>
+                  <a:rPr lang="pt-BR" dirty="0"/>
+                  <a:t> mais próximo.</a:t>
                 </a:r>
               </a:p>
               <a:p>
@@ -9777,9 +10358,18 @@
                   <a:buAutoNum type="alphaLcParenR"/>
                 </a:pPr>
                 <a:r>
-                  <a:rPr lang="pt-BR" sz="1600" dirty="0"/>
-                  <a:t>Calcule o novo centroide de cada cluster.</a:t>
+                  <a:rPr lang="pt-BR" dirty="0"/>
+                  <a:t>Calcule o novo centroide de cada </a:t>
                 </a:r>
+                <a:r>
+                  <a:rPr lang="pt-BR" i="1" dirty="0" smtClean="0"/>
+                  <a:t>cluster</a:t>
+                </a:r>
+                <a:r>
+                  <a:rPr lang="pt-BR" dirty="0" smtClean="0"/>
+                  <a:t>*.</a:t>
+                </a:r>
+                <a:endParaRPr lang="pt-BR" dirty="0"/>
               </a:p>
               <a:p>
                 <a:pPr marL="342900" indent="-342900">
@@ -9787,18 +10377,18 @@
                   <a:buAutoNum type="arabicPeriod"/>
                 </a:pPr>
                 <a:r>
-                  <a:rPr lang="pt-BR" sz="1600" b="1" dirty="0"/>
+                  <a:rPr lang="pt-BR" b="1" dirty="0"/>
                   <a:t>Enquanto </a:t>
                 </a:r>
                 <a:r>
-                  <a:rPr lang="pt-BR" sz="1600" dirty="0"/>
+                  <a:rPr lang="pt-BR" dirty="0"/>
                   <a:t>as posições dos centroides continuarem mudando.</a:t>
                 </a:r>
               </a:p>
             </p:txBody>
           </p:sp>
         </mc:Choice>
-        <mc:Fallback xmlns="">
+        <mc:Fallback>
           <p:sp>
             <p:nvSpPr>
               <p:cNvPr id="4" name="TextBox 4"/>
@@ -9809,16 +10399,16 @@
             </p:nvSpPr>
             <p:spPr>
               <a:xfrm>
-                <a:off x="2079214" y="3325262"/>
-                <a:ext cx="8670878" cy="1815882"/>
+                <a:off x="1698214" y="2989982"/>
+                <a:ext cx="9167906" cy="2031325"/>
               </a:xfrm>
               <a:prstGeom prst="rect">
                 <a:avLst/>
               </a:prstGeom>
-              <a:blipFill>
+              <a:blipFill rotWithShape="0">
                 <a:blip r:embed="rId4"/>
                 <a:stretch>
-                  <a:fillRect l="-281" t="-667" b="-3000"/>
+                  <a:fillRect l="-531" t="-1190" b="-3274"/>
                 </a:stretch>
               </a:blipFill>
               <a:ln>
@@ -9842,6 +10432,58 @@
           </p:sp>
         </mc:Fallback>
       </mc:AlternateContent>
+      <p:sp>
+        <p:nvSpPr>
+          <p:cNvPr id="5" name="Retângulo 4"/>
+          <p:cNvSpPr/>
+          <p:nvPr/>
+        </p:nvSpPr>
+        <p:spPr>
+          <a:xfrm>
+            <a:off x="1698214" y="5021307"/>
+            <a:ext cx="9167906" cy="307777"/>
+          </a:xfrm>
+          <a:prstGeom prst="rect">
+            <a:avLst/>
+          </a:prstGeom>
+        </p:spPr>
+        <p:txBody>
+          <a:bodyPr wrap="square">
+            <a:spAutoFit/>
+          </a:bodyPr>
+          <a:lstStyle/>
+          <a:p>
+            <a:r>
+              <a:rPr lang="pt-BR" sz="1400" dirty="0">
+                <a:solidFill>
+                  <a:srgbClr val="000000"/>
+                </a:solidFill>
+                <a:latin typeface="Calibri" panose="020F0502020204030204" pitchFamily="34" charset="0"/>
+              </a:rPr>
+              <a:t>*os novos centroides são calculados como a média aritmética (centro geométrico) das amostras pertencentes a cada </a:t>
+            </a:r>
+            <a:r>
+              <a:rPr lang="pt-BR" sz="1400" i="1" dirty="0">
+                <a:solidFill>
+                  <a:srgbClr val="000000"/>
+                </a:solidFill>
+                <a:latin typeface="Calibri" panose="020F0502020204030204" pitchFamily="34" charset="0"/>
+              </a:rPr>
+              <a:t>cluster</a:t>
+            </a:r>
+            <a:r>
+              <a:rPr lang="pt-BR" sz="1400" dirty="0">
+                <a:solidFill>
+                  <a:srgbClr val="000000"/>
+                </a:solidFill>
+                <a:latin typeface="Calibri" panose="020F0502020204030204" pitchFamily="34" charset="0"/>
+              </a:rPr>
+              <a:t>.</a:t>
+            </a:r>
+            <a:endParaRPr lang="pt-BR" sz="1400" dirty="0"/>
+          </a:p>
+        </p:txBody>
+      </p:sp>
     </p:spTree>
     <p:extLst>
       <p:ext uri="{BB962C8B-B14F-4D97-AF65-F5344CB8AC3E}">
@@ -9855,7 +10497,7 @@
 </p:sld>
 </file>
 
-<file path=ppt/slides/slide2.xml><?xml version="1.0" encoding="utf-8"?>
+<file path=ppt/slides/slide21.xml><?xml version="1.0" encoding="utf-8"?>
 <p:sld xmlns:a="http://schemas.openxmlformats.org/drawingml/2006/main" xmlns:r="http://schemas.openxmlformats.org/officeDocument/2006/relationships" xmlns:p="http://schemas.openxmlformats.org/presentationml/2006/main">
   <p:cSld>
     <p:spTree>
@@ -9888,150 +10530,91 @@
           <a:lstStyle/>
           <a:p>
             <a:r>
-              <a:rPr lang="pt-BR" dirty="0"/>
-              <a:t>Recapitulando</a:t>
-            </a:r>
-            <a:endParaRPr lang="en-US" dirty="0"/>
-          </a:p>
-        </p:txBody>
-      </p:sp>
-      <p:sp>
-        <p:nvSpPr>
-          <p:cNvPr id="3" name="Espaço Reservado para Conteúdo 2"/>
-          <p:cNvSpPr>
-            <a:spLocks noGrp="1"/>
-          </p:cNvSpPr>
-          <p:nvPr>
-            <p:ph idx="1"/>
-          </p:nvPr>
-        </p:nvSpPr>
+              <a:rPr lang="pt-BR" dirty="0" smtClean="0"/>
+              <a:t>Funcionamento do </a:t>
+            </a:r>
+            <a:r>
+              <a:rPr lang="pt-BR" i="1" dirty="0" smtClean="0"/>
+              <a:t>k-</a:t>
+            </a:r>
+            <a:r>
+              <a:rPr lang="pt-BR" i="1" dirty="0" err="1" smtClean="0"/>
+              <a:t>Means</a:t>
+            </a:r>
+            <a:endParaRPr lang="pt-BR" i="1" dirty="0"/>
+          </a:p>
+        </p:txBody>
+      </p:sp>
+      <p:pic>
+        <p:nvPicPr>
+          <p:cNvPr id="4" name="Picture 5">
+            <a:extLst>
+              <a:ext uri="{FF2B5EF4-FFF2-40B4-BE49-F238E27FC236}">
+                <a16:creationId xmlns:a16="http://schemas.microsoft.com/office/drawing/2014/main" xmlns="" id="{F98B536F-38AB-58C5-0FFB-41BDB557E9EF}"/>
+              </a:ext>
+            </a:extLst>
+          </p:cNvPr>
+          <p:cNvPicPr>
+            <a:picLocks noChangeAspect="1"/>
+          </p:cNvPicPr>
+          <p:nvPr/>
+        </p:nvPicPr>
+        <p:blipFill>
+          <a:blip r:embed="rId2"/>
+          <a:stretch>
+            <a:fillRect/>
+          </a:stretch>
+        </p:blipFill>
         <p:spPr>
           <a:xfrm>
-            <a:off x="838199" y="1825624"/>
-            <a:ext cx="11223172" cy="5032376"/>
+            <a:off x="2836422" y="1856677"/>
+            <a:ext cx="6315956" cy="5001323"/>
           </a:xfrm>
+          <a:prstGeom prst="rect">
+            <a:avLst/>
+          </a:prstGeom>
         </p:spPr>
-        <p:txBody>
-          <a:bodyPr>
-            <a:normAutofit/>
+      </p:pic>
+      <p:sp>
+        <p:nvSpPr>
+          <p:cNvPr id="5" name="TextBox 7">
+            <a:extLst>
+              <a:ext uri="{FF2B5EF4-FFF2-40B4-BE49-F238E27FC236}">
+                <a16:creationId xmlns:a16="http://schemas.microsoft.com/office/drawing/2014/main" xmlns="" id="{04EA9FAE-D371-68E0-2CB7-9C8893491B3B}"/>
+              </a:ext>
+            </a:extLst>
+          </p:cNvPr>
+          <p:cNvSpPr txBox="1"/>
+          <p:nvPr/>
+        </p:nvSpPr>
+        <p:spPr>
+          <a:xfrm>
+            <a:off x="303430" y="2475186"/>
+            <a:ext cx="2532992" cy="646331"/>
+          </a:xfrm>
+          <a:prstGeom prst="rect">
+            <a:avLst/>
+          </a:prstGeom>
+          <a:noFill/>
+        </p:spPr>
+        <p:txBody>
+          <a:bodyPr wrap="square" rtlCol="0">
+            <a:spAutoFit/>
           </a:bodyPr>
           <a:lstStyle/>
           <a:p>
             <a:r>
               <a:rPr lang="pt-BR" dirty="0"/>
-              <a:t>Até o momento, todos os algoritmos que aprendemos seguiam o paradigma do aprendizado supervisionado.</a:t>
-            </a:r>
-          </a:p>
-          <a:p>
-            <a:r>
-              <a:rPr lang="pt-BR" dirty="0"/>
-              <a:t>Hoje, falaremos sobre </a:t>
-            </a:r>
-            <a:r>
-              <a:rPr lang="pt-BR" b="1" i="1" dirty="0"/>
-              <a:t>clustering</a:t>
-            </a:r>
-            <a:r>
-              <a:rPr lang="pt-BR" dirty="0"/>
-              <a:t>, que são algoritmos de </a:t>
-            </a:r>
-            <a:r>
-              <a:rPr lang="pt-BR" b="1" dirty="0"/>
-              <a:t>aprendizado não-supervisionado</a:t>
-            </a:r>
-            <a:r>
-              <a:rPr lang="pt-BR" dirty="0"/>
-              <a:t>.</a:t>
-            </a:r>
-          </a:p>
-          <a:p>
-            <a:pPr lvl="1">
-              <a:buFont typeface="Wingdings" panose="05000000000000000000" pitchFamily="2" charset="2"/>
-              <a:buChar char="§"/>
-            </a:pPr>
-            <a:r>
-              <a:rPr lang="pt-BR" dirty="0"/>
-              <a:t>Não temos rótulos, apenas atributos.</a:t>
-            </a:r>
-          </a:p>
-          <a:p>
-            <a:r>
-              <a:rPr lang="pt-BR" dirty="0"/>
-              <a:t>Eles visam criar agrupamentos de dados (chamados de </a:t>
-            </a:r>
-            <a:r>
-              <a:rPr lang="pt-BR" b="1" i="1" dirty="0"/>
-              <a:t>clusters</a:t>
-            </a:r>
-            <a:r>
-              <a:rPr lang="pt-BR" b="1" dirty="0"/>
-              <a:t> </a:t>
-            </a:r>
-            <a:r>
-              <a:rPr lang="pt-BR" dirty="0"/>
-              <a:t>ou</a:t>
-            </a:r>
-            <a:r>
-              <a:rPr lang="pt-BR" b="1" dirty="0"/>
-              <a:t> grupos</a:t>
-            </a:r>
-            <a:r>
-              <a:rPr lang="pt-BR" dirty="0"/>
-              <a:t>) segundo seu </a:t>
-            </a:r>
-            <a:r>
-              <a:rPr lang="pt-BR" b="1" dirty="0">
-                <a:solidFill>
-                  <a:srgbClr val="00B050"/>
-                </a:solidFill>
-              </a:rPr>
-              <a:t>grau de semelhança</a:t>
-            </a:r>
-            <a:r>
-              <a:rPr lang="pt-BR" dirty="0"/>
-              <a:t>. </a:t>
-            </a:r>
-          </a:p>
-          <a:p>
-            <a:r>
-              <a:rPr lang="pt-BR" dirty="0"/>
-              <a:t>Nesta aula, aprenderemos sobre o algoritmo chamado de </a:t>
-            </a:r>
-            <a:r>
-              <a:rPr lang="pt-BR" b="1" dirty="0"/>
-              <a:t>k-Médias</a:t>
-            </a:r>
-            <a:r>
-              <a:rPr lang="pt-BR" dirty="0"/>
-              <a:t> (ou </a:t>
-            </a:r>
-            <a:r>
-              <a:rPr lang="pt-BR" b="1" i="1" dirty="0"/>
-              <a:t>k-</a:t>
-            </a:r>
-            <a:r>
-              <a:rPr lang="pt-BR" b="1" i="1" dirty="0" err="1"/>
-              <a:t>Means</a:t>
-            </a:r>
-            <a:r>
-              <a:rPr lang="pt-BR" dirty="0"/>
-              <a:t>, em inglês) que é um dos algoritmos mais simples de </a:t>
-            </a:r>
-            <a:r>
-              <a:rPr lang="pt-BR" b="1" i="1" dirty="0"/>
-              <a:t>clustering</a:t>
-            </a:r>
-            <a:r>
-              <a:rPr lang="pt-BR" dirty="0"/>
-              <a:t>.</a:t>
-            </a:r>
+              <a:t>1. Define-se o número de clusters, K = 3</a:t>
+            </a:r>
+            <a:endParaRPr lang="en-US" dirty="0"/>
           </a:p>
         </p:txBody>
       </p:sp>
     </p:spTree>
     <p:extLst>
       <p:ext uri="{BB962C8B-B14F-4D97-AF65-F5344CB8AC3E}">
-        <p14:creationId xmlns:p14="http://schemas.microsoft.com/office/powerpoint/2010/main" val="2127415881"/>
+        <p14:creationId xmlns:p14="http://schemas.microsoft.com/office/powerpoint/2010/main" val="3417258356"/>
       </p:ext>
     </p:extLst>
   </p:cSld>
@@ -10041,7 +10624,919 @@
 </p:sld>
 </file>
 
-<file path=ppt/slides/slide20.xml><?xml version="1.0" encoding="utf-8"?>
+<file path=ppt/slides/slide22.xml><?xml version="1.0" encoding="utf-8"?>
+<p:sld xmlns:a="http://schemas.openxmlformats.org/drawingml/2006/main" xmlns:r="http://schemas.openxmlformats.org/officeDocument/2006/relationships" xmlns:p="http://schemas.openxmlformats.org/presentationml/2006/main">
+  <p:cSld>
+    <p:spTree>
+      <p:nvGrpSpPr>
+        <p:cNvPr id="1" name=""/>
+        <p:cNvGrpSpPr/>
+        <p:nvPr/>
+      </p:nvGrpSpPr>
+      <p:grpSpPr>
+        <a:xfrm>
+          <a:off x="0" y="0"/>
+          <a:ext cx="0" cy="0"/>
+          <a:chOff x="0" y="0"/>
+          <a:chExt cx="0" cy="0"/>
+        </a:xfrm>
+      </p:grpSpPr>
+      <p:sp>
+        <p:nvSpPr>
+          <p:cNvPr id="2" name="Título 1"/>
+          <p:cNvSpPr>
+            <a:spLocks noGrp="1"/>
+          </p:cNvSpPr>
+          <p:nvPr>
+            <p:ph type="title"/>
+          </p:nvPr>
+        </p:nvSpPr>
+        <p:spPr/>
+        <p:txBody>
+          <a:bodyPr/>
+          <a:lstStyle/>
+          <a:p>
+            <a:r>
+              <a:rPr lang="pt-BR" dirty="0"/>
+              <a:t>Funcionamento do </a:t>
+            </a:r>
+            <a:r>
+              <a:rPr lang="pt-BR" i="1" dirty="0"/>
+              <a:t>k-</a:t>
+            </a:r>
+            <a:r>
+              <a:rPr lang="pt-BR" i="1" dirty="0" err="1"/>
+              <a:t>Means</a:t>
+            </a:r>
+            <a:endParaRPr lang="pt-BR" dirty="0"/>
+          </a:p>
+        </p:txBody>
+      </p:sp>
+      <p:pic>
+        <p:nvPicPr>
+          <p:cNvPr id="3" name="Picture 5">
+            <a:extLst>
+              <a:ext uri="{FF2B5EF4-FFF2-40B4-BE49-F238E27FC236}">
+                <a16:creationId xmlns:a16="http://schemas.microsoft.com/office/drawing/2014/main" xmlns="" id="{69F3FE92-0D0B-AECE-B64E-FC9D2F3EADBC}"/>
+              </a:ext>
+            </a:extLst>
+          </p:cNvPr>
+          <p:cNvPicPr>
+            <a:picLocks noChangeAspect="1"/>
+          </p:cNvPicPr>
+          <p:nvPr/>
+        </p:nvPicPr>
+        <p:blipFill>
+          <a:blip r:embed="rId2"/>
+          <a:stretch>
+            <a:fillRect/>
+          </a:stretch>
+        </p:blipFill>
+        <p:spPr>
+          <a:xfrm>
+            <a:off x="2966601" y="1913835"/>
+            <a:ext cx="6258798" cy="4944165"/>
+          </a:xfrm>
+          <a:prstGeom prst="rect">
+            <a:avLst/>
+          </a:prstGeom>
+        </p:spPr>
+      </p:pic>
+      <p:sp>
+        <p:nvSpPr>
+          <p:cNvPr id="4" name="TextBox 7">
+            <a:extLst>
+              <a:ext uri="{FF2B5EF4-FFF2-40B4-BE49-F238E27FC236}">
+                <a16:creationId xmlns:a16="http://schemas.microsoft.com/office/drawing/2014/main" xmlns="" id="{5D947541-89EC-69EF-1918-6EFD56E0B3C2}"/>
+              </a:ext>
+            </a:extLst>
+          </p:cNvPr>
+          <p:cNvSpPr txBox="1"/>
+          <p:nvPr/>
+        </p:nvSpPr>
+        <p:spPr>
+          <a:xfrm>
+            <a:off x="65746" y="2490952"/>
+            <a:ext cx="2900855" cy="923330"/>
+          </a:xfrm>
+          <a:prstGeom prst="rect">
+            <a:avLst/>
+          </a:prstGeom>
+          <a:noFill/>
+        </p:spPr>
+        <p:txBody>
+          <a:bodyPr wrap="square" rtlCol="0">
+            <a:spAutoFit/>
+          </a:bodyPr>
+          <a:lstStyle/>
+          <a:p>
+            <a:r>
+              <a:rPr lang="en-US" dirty="0"/>
+              <a:t>2. </a:t>
+            </a:r>
+            <a:r>
+              <a:rPr lang="en-US" dirty="0" err="1"/>
+              <a:t>Escolhe</a:t>
+            </a:r>
+            <a:r>
+              <a:rPr lang="en-US" dirty="0"/>
+              <a:t>-se </a:t>
+            </a:r>
+            <a:r>
+              <a:rPr lang="en-US" dirty="0" err="1"/>
+              <a:t>os</a:t>
+            </a:r>
+            <a:r>
+              <a:rPr lang="en-US" dirty="0"/>
+              <a:t> </a:t>
+            </a:r>
+            <a:r>
+              <a:rPr lang="en-US" dirty="0" err="1"/>
+              <a:t>centroides</a:t>
+            </a:r>
+            <a:r>
+              <a:rPr lang="en-US" dirty="0"/>
+              <a:t> para </a:t>
+            </a:r>
+            <a:r>
+              <a:rPr lang="en-US" dirty="0" err="1"/>
+              <a:t>cada</a:t>
+            </a:r>
+            <a:r>
+              <a:rPr lang="en-US" dirty="0"/>
+              <a:t> cluster de forma </a:t>
+            </a:r>
+            <a:r>
+              <a:rPr lang="en-US" dirty="0" err="1"/>
+              <a:t>aleatória</a:t>
+            </a:r>
+            <a:r>
+              <a:rPr lang="en-US" dirty="0"/>
+              <a:t>.</a:t>
+            </a:r>
+          </a:p>
+        </p:txBody>
+      </p:sp>
+    </p:spTree>
+    <p:extLst>
+      <p:ext uri="{BB962C8B-B14F-4D97-AF65-F5344CB8AC3E}">
+        <p14:creationId xmlns:p14="http://schemas.microsoft.com/office/powerpoint/2010/main" val="489881645"/>
+      </p:ext>
+    </p:extLst>
+  </p:cSld>
+  <p:clrMapOvr>
+    <a:masterClrMapping/>
+  </p:clrMapOvr>
+</p:sld>
+</file>
+
+<file path=ppt/slides/slide23.xml><?xml version="1.0" encoding="utf-8"?>
+<p:sld xmlns:a="http://schemas.openxmlformats.org/drawingml/2006/main" xmlns:r="http://schemas.openxmlformats.org/officeDocument/2006/relationships" xmlns:p="http://schemas.openxmlformats.org/presentationml/2006/main">
+  <p:cSld>
+    <p:spTree>
+      <p:nvGrpSpPr>
+        <p:cNvPr id="1" name=""/>
+        <p:cNvGrpSpPr/>
+        <p:nvPr/>
+      </p:nvGrpSpPr>
+      <p:grpSpPr>
+        <a:xfrm>
+          <a:off x="0" y="0"/>
+          <a:ext cx="0" cy="0"/>
+          <a:chOff x="0" y="0"/>
+          <a:chExt cx="0" cy="0"/>
+        </a:xfrm>
+      </p:grpSpPr>
+      <p:sp>
+        <p:nvSpPr>
+          <p:cNvPr id="2" name="Título 1"/>
+          <p:cNvSpPr>
+            <a:spLocks noGrp="1"/>
+          </p:cNvSpPr>
+          <p:nvPr>
+            <p:ph type="title"/>
+          </p:nvPr>
+        </p:nvSpPr>
+        <p:spPr/>
+        <p:txBody>
+          <a:bodyPr/>
+          <a:lstStyle/>
+          <a:p>
+            <a:r>
+              <a:rPr lang="pt-BR" dirty="0"/>
+              <a:t>Funcionamento do </a:t>
+            </a:r>
+            <a:r>
+              <a:rPr lang="pt-BR" i="1" dirty="0"/>
+              <a:t>k-</a:t>
+            </a:r>
+            <a:r>
+              <a:rPr lang="pt-BR" i="1" dirty="0" err="1"/>
+              <a:t>Means</a:t>
+            </a:r>
+            <a:endParaRPr lang="pt-BR" dirty="0"/>
+          </a:p>
+        </p:txBody>
+      </p:sp>
+      <p:pic>
+        <p:nvPicPr>
+          <p:cNvPr id="3" name="Picture 5">
+            <a:extLst>
+              <a:ext uri="{FF2B5EF4-FFF2-40B4-BE49-F238E27FC236}">
+                <a16:creationId xmlns:a16="http://schemas.microsoft.com/office/drawing/2014/main" xmlns="" id="{1C0684BB-EFF7-DBA8-3519-25CE2A1A9632}"/>
+              </a:ext>
+            </a:extLst>
+          </p:cNvPr>
+          <p:cNvPicPr>
+            <a:picLocks noChangeAspect="1"/>
+          </p:cNvPicPr>
+          <p:nvPr/>
+        </p:nvPicPr>
+        <p:blipFill>
+          <a:blip r:embed="rId2"/>
+          <a:stretch>
+            <a:fillRect/>
+          </a:stretch>
+        </p:blipFill>
+        <p:spPr>
+          <a:xfrm>
+            <a:off x="2961837" y="1885256"/>
+            <a:ext cx="6268325" cy="4972744"/>
+          </a:xfrm>
+          <a:prstGeom prst="rect">
+            <a:avLst/>
+          </a:prstGeom>
+        </p:spPr>
+      </p:pic>
+      <p:sp>
+        <p:nvSpPr>
+          <p:cNvPr id="4" name="TextBox 8">
+            <a:extLst>
+              <a:ext uri="{FF2B5EF4-FFF2-40B4-BE49-F238E27FC236}">
+                <a16:creationId xmlns:a16="http://schemas.microsoft.com/office/drawing/2014/main" xmlns="" id="{38267D7C-379A-003E-4048-8D4DDD969EB6}"/>
+              </a:ext>
+            </a:extLst>
+          </p:cNvPr>
+          <p:cNvSpPr txBox="1"/>
+          <p:nvPr/>
+        </p:nvSpPr>
+        <p:spPr>
+          <a:xfrm>
+            <a:off x="101600" y="2865735"/>
+            <a:ext cx="2652110" cy="1477328"/>
+          </a:xfrm>
+          <a:prstGeom prst="rect">
+            <a:avLst/>
+          </a:prstGeom>
+          <a:noFill/>
+        </p:spPr>
+        <p:txBody>
+          <a:bodyPr wrap="square">
+            <a:spAutoFit/>
+          </a:bodyPr>
+          <a:lstStyle/>
+          <a:p>
+            <a:r>
+              <a:rPr lang="pt-BR" b="0" i="0" dirty="0">
+                <a:solidFill>
+                  <a:srgbClr val="404040"/>
+                </a:solidFill>
+                <a:effectLst/>
+              </a:rPr>
+              <a:t>3. Atribui-se cada amostra ao </a:t>
+            </a:r>
+            <a:r>
+              <a:rPr lang="pt-BR" b="0" i="0" dirty="0" smtClean="0">
+                <a:solidFill>
+                  <a:srgbClr val="404040"/>
+                </a:solidFill>
+                <a:effectLst/>
+              </a:rPr>
+              <a:t>centroide </a:t>
+            </a:r>
+            <a:r>
+              <a:rPr lang="pt-BR" b="0" i="0" dirty="0">
+                <a:solidFill>
+                  <a:srgbClr val="404040"/>
+                </a:solidFill>
+                <a:effectLst/>
+              </a:rPr>
+              <a:t>mais próximo com base na distância euclidiana.</a:t>
+            </a:r>
+            <a:r>
+              <a:rPr lang="pt-BR" dirty="0"/>
+              <a:t/>
+            </a:r>
+            <a:br>
+              <a:rPr lang="pt-BR" dirty="0"/>
+            </a:br>
+            <a:endParaRPr lang="en-US" dirty="0"/>
+          </a:p>
+        </p:txBody>
+      </p:sp>
+    </p:spTree>
+    <p:extLst>
+      <p:ext uri="{BB962C8B-B14F-4D97-AF65-F5344CB8AC3E}">
+        <p14:creationId xmlns:p14="http://schemas.microsoft.com/office/powerpoint/2010/main" val="3168554397"/>
+      </p:ext>
+    </p:extLst>
+  </p:cSld>
+  <p:clrMapOvr>
+    <a:masterClrMapping/>
+  </p:clrMapOvr>
+</p:sld>
+</file>
+
+<file path=ppt/slides/slide24.xml><?xml version="1.0" encoding="utf-8"?>
+<p:sld xmlns:a="http://schemas.openxmlformats.org/drawingml/2006/main" xmlns:r="http://schemas.openxmlformats.org/officeDocument/2006/relationships" xmlns:p="http://schemas.openxmlformats.org/presentationml/2006/main">
+  <p:cSld>
+    <p:spTree>
+      <p:nvGrpSpPr>
+        <p:cNvPr id="1" name=""/>
+        <p:cNvGrpSpPr/>
+        <p:nvPr/>
+      </p:nvGrpSpPr>
+      <p:grpSpPr>
+        <a:xfrm>
+          <a:off x="0" y="0"/>
+          <a:ext cx="0" cy="0"/>
+          <a:chOff x="0" y="0"/>
+          <a:chExt cx="0" cy="0"/>
+        </a:xfrm>
+      </p:grpSpPr>
+      <p:sp>
+        <p:nvSpPr>
+          <p:cNvPr id="2" name="Título 1"/>
+          <p:cNvSpPr>
+            <a:spLocks noGrp="1"/>
+          </p:cNvSpPr>
+          <p:nvPr>
+            <p:ph type="title"/>
+          </p:nvPr>
+        </p:nvSpPr>
+        <p:spPr/>
+        <p:txBody>
+          <a:bodyPr/>
+          <a:lstStyle/>
+          <a:p>
+            <a:r>
+              <a:rPr lang="pt-BR" dirty="0"/>
+              <a:t>Funcionamento do </a:t>
+            </a:r>
+            <a:r>
+              <a:rPr lang="pt-BR" i="1" dirty="0"/>
+              <a:t>k-</a:t>
+            </a:r>
+            <a:r>
+              <a:rPr lang="pt-BR" i="1" dirty="0" err="1"/>
+              <a:t>Means</a:t>
+            </a:r>
+            <a:endParaRPr lang="pt-BR" dirty="0"/>
+          </a:p>
+        </p:txBody>
+      </p:sp>
+      <p:pic>
+        <p:nvPicPr>
+          <p:cNvPr id="3" name="Picture 7">
+            <a:extLst>
+              <a:ext uri="{FF2B5EF4-FFF2-40B4-BE49-F238E27FC236}">
+                <a16:creationId xmlns:a16="http://schemas.microsoft.com/office/drawing/2014/main" xmlns="" id="{4A874BBD-11DB-833A-341F-F134DDD11108}"/>
+              </a:ext>
+            </a:extLst>
+          </p:cNvPr>
+          <p:cNvPicPr>
+            <a:picLocks noChangeAspect="1"/>
+          </p:cNvPicPr>
+          <p:nvPr/>
+        </p:nvPicPr>
+        <p:blipFill>
+          <a:blip r:embed="rId2"/>
+          <a:stretch>
+            <a:fillRect/>
+          </a:stretch>
+        </p:blipFill>
+        <p:spPr>
+          <a:xfrm>
+            <a:off x="2957074" y="1913835"/>
+            <a:ext cx="6277851" cy="4944165"/>
+          </a:xfrm>
+          <a:prstGeom prst="rect">
+            <a:avLst/>
+          </a:prstGeom>
+        </p:spPr>
+      </p:pic>
+      <p:sp>
+        <p:nvSpPr>
+          <p:cNvPr id="4" name="TextBox 9">
+            <a:extLst>
+              <a:ext uri="{FF2B5EF4-FFF2-40B4-BE49-F238E27FC236}">
+                <a16:creationId xmlns:a16="http://schemas.microsoft.com/office/drawing/2014/main" xmlns="" id="{FB63ADD3-D956-76C5-F130-F38465877D67}"/>
+              </a:ext>
+            </a:extLst>
+          </p:cNvPr>
+          <p:cNvSpPr txBox="1"/>
+          <p:nvPr/>
+        </p:nvSpPr>
+        <p:spPr>
+          <a:xfrm>
+            <a:off x="101600" y="2577501"/>
+            <a:ext cx="2998952" cy="646331"/>
+          </a:xfrm>
+          <a:prstGeom prst="rect">
+            <a:avLst/>
+          </a:prstGeom>
+          <a:noFill/>
+        </p:spPr>
+        <p:txBody>
+          <a:bodyPr wrap="square">
+            <a:spAutoFit/>
+          </a:bodyPr>
+          <a:lstStyle/>
+          <a:p>
+            <a:r>
+              <a:rPr lang="pt-BR" b="0" i="0" dirty="0">
+                <a:solidFill>
+                  <a:srgbClr val="404040"/>
+                </a:solidFill>
+                <a:effectLst/>
+              </a:rPr>
+              <a:t>4. Recalcula-se o centroide dos clusters.</a:t>
+            </a:r>
+            <a:endParaRPr lang="en-US" dirty="0"/>
+          </a:p>
+        </p:txBody>
+      </p:sp>
+    </p:spTree>
+    <p:extLst>
+      <p:ext uri="{BB962C8B-B14F-4D97-AF65-F5344CB8AC3E}">
+        <p14:creationId xmlns:p14="http://schemas.microsoft.com/office/powerpoint/2010/main" val="1154901412"/>
+      </p:ext>
+    </p:extLst>
+  </p:cSld>
+  <p:clrMapOvr>
+    <a:masterClrMapping/>
+  </p:clrMapOvr>
+</p:sld>
+</file>
+
+<file path=ppt/slides/slide25.xml><?xml version="1.0" encoding="utf-8"?>
+<p:sld xmlns:a="http://schemas.openxmlformats.org/drawingml/2006/main" xmlns:r="http://schemas.openxmlformats.org/officeDocument/2006/relationships" xmlns:p="http://schemas.openxmlformats.org/presentationml/2006/main">
+  <p:cSld>
+    <p:spTree>
+      <p:nvGrpSpPr>
+        <p:cNvPr id="1" name=""/>
+        <p:cNvGrpSpPr/>
+        <p:nvPr/>
+      </p:nvGrpSpPr>
+      <p:grpSpPr>
+        <a:xfrm>
+          <a:off x="0" y="0"/>
+          <a:ext cx="0" cy="0"/>
+          <a:chOff x="0" y="0"/>
+          <a:chExt cx="0" cy="0"/>
+        </a:xfrm>
+      </p:grpSpPr>
+      <p:sp>
+        <p:nvSpPr>
+          <p:cNvPr id="2" name="Título 1"/>
+          <p:cNvSpPr>
+            <a:spLocks noGrp="1"/>
+          </p:cNvSpPr>
+          <p:nvPr>
+            <p:ph type="title"/>
+          </p:nvPr>
+        </p:nvSpPr>
+        <p:spPr/>
+        <p:txBody>
+          <a:bodyPr/>
+          <a:lstStyle/>
+          <a:p>
+            <a:r>
+              <a:rPr lang="pt-BR" dirty="0"/>
+              <a:t>Funcionamento do </a:t>
+            </a:r>
+            <a:r>
+              <a:rPr lang="pt-BR" i="1" dirty="0"/>
+              <a:t>k-</a:t>
+            </a:r>
+            <a:r>
+              <a:rPr lang="pt-BR" i="1" dirty="0" err="1"/>
+              <a:t>Means</a:t>
+            </a:r>
+            <a:endParaRPr lang="pt-BR" dirty="0"/>
+          </a:p>
+        </p:txBody>
+      </p:sp>
+      <p:pic>
+        <p:nvPicPr>
+          <p:cNvPr id="3" name="Picture 5">
+            <a:extLst>
+              <a:ext uri="{FF2B5EF4-FFF2-40B4-BE49-F238E27FC236}">
+                <a16:creationId xmlns:a16="http://schemas.microsoft.com/office/drawing/2014/main" xmlns="" id="{BE9E2474-44BE-43D0-EE2F-D03349050DA2}"/>
+              </a:ext>
+            </a:extLst>
+          </p:cNvPr>
+          <p:cNvPicPr>
+            <a:picLocks noChangeAspect="1"/>
+          </p:cNvPicPr>
+          <p:nvPr/>
+        </p:nvPicPr>
+        <p:blipFill>
+          <a:blip r:embed="rId2"/>
+          <a:stretch>
+            <a:fillRect/>
+          </a:stretch>
+        </p:blipFill>
+        <p:spPr>
+          <a:xfrm>
+            <a:off x="2836422" y="1913835"/>
+            <a:ext cx="6315956" cy="4944165"/>
+          </a:xfrm>
+          <a:prstGeom prst="rect">
+            <a:avLst/>
+          </a:prstGeom>
+        </p:spPr>
+      </p:pic>
+      <p:sp>
+        <p:nvSpPr>
+          <p:cNvPr id="4" name="TextBox 9">
+            <a:extLst>
+              <a:ext uri="{FF2B5EF4-FFF2-40B4-BE49-F238E27FC236}">
+                <a16:creationId xmlns:a16="http://schemas.microsoft.com/office/drawing/2014/main" xmlns="" id="{E7FEC406-7A7E-5D78-DF69-D2416A2375C3}"/>
+              </a:ext>
+            </a:extLst>
+          </p:cNvPr>
+          <p:cNvSpPr txBox="1"/>
+          <p:nvPr/>
+        </p:nvSpPr>
+        <p:spPr>
+          <a:xfrm>
+            <a:off x="304800" y="2629284"/>
+            <a:ext cx="2531622" cy="646331"/>
+          </a:xfrm>
+          <a:prstGeom prst="rect">
+            <a:avLst/>
+          </a:prstGeom>
+          <a:noFill/>
+        </p:spPr>
+        <p:txBody>
+          <a:bodyPr wrap="square">
+            <a:spAutoFit/>
+          </a:bodyPr>
+          <a:lstStyle/>
+          <a:p>
+            <a:r>
+              <a:rPr lang="pt-BR" b="0" i="0" dirty="0">
+                <a:solidFill>
+                  <a:srgbClr val="404040"/>
+                </a:solidFill>
+                <a:effectLst/>
+              </a:rPr>
+              <a:t>5. Repete-se os passos 3 e 4.</a:t>
+            </a:r>
+            <a:endParaRPr lang="en-US" dirty="0"/>
+          </a:p>
+        </p:txBody>
+      </p:sp>
+    </p:spTree>
+    <p:extLst>
+      <p:ext uri="{BB962C8B-B14F-4D97-AF65-F5344CB8AC3E}">
+        <p14:creationId xmlns:p14="http://schemas.microsoft.com/office/powerpoint/2010/main" val="928097257"/>
+      </p:ext>
+    </p:extLst>
+  </p:cSld>
+  <p:clrMapOvr>
+    <a:masterClrMapping/>
+  </p:clrMapOvr>
+</p:sld>
+</file>
+
+<file path=ppt/slides/slide26.xml><?xml version="1.0" encoding="utf-8"?>
+<p:sld xmlns:a="http://schemas.openxmlformats.org/drawingml/2006/main" xmlns:r="http://schemas.openxmlformats.org/officeDocument/2006/relationships" xmlns:p="http://schemas.openxmlformats.org/presentationml/2006/main">
+  <p:cSld>
+    <p:spTree>
+      <p:nvGrpSpPr>
+        <p:cNvPr id="1" name=""/>
+        <p:cNvGrpSpPr/>
+        <p:nvPr/>
+      </p:nvGrpSpPr>
+      <p:grpSpPr>
+        <a:xfrm>
+          <a:off x="0" y="0"/>
+          <a:ext cx="0" cy="0"/>
+          <a:chOff x="0" y="0"/>
+          <a:chExt cx="0" cy="0"/>
+        </a:xfrm>
+      </p:grpSpPr>
+      <p:sp>
+        <p:nvSpPr>
+          <p:cNvPr id="2" name="Título 1"/>
+          <p:cNvSpPr>
+            <a:spLocks noGrp="1"/>
+          </p:cNvSpPr>
+          <p:nvPr>
+            <p:ph type="title"/>
+          </p:nvPr>
+        </p:nvSpPr>
+        <p:spPr/>
+        <p:txBody>
+          <a:bodyPr/>
+          <a:lstStyle/>
+          <a:p>
+            <a:r>
+              <a:rPr lang="pt-BR" dirty="0"/>
+              <a:t>Funcionamento do </a:t>
+            </a:r>
+            <a:r>
+              <a:rPr lang="pt-BR" i="1" dirty="0"/>
+              <a:t>k-</a:t>
+            </a:r>
+            <a:r>
+              <a:rPr lang="pt-BR" i="1" dirty="0" err="1"/>
+              <a:t>Means</a:t>
+            </a:r>
+            <a:endParaRPr lang="pt-BR" dirty="0"/>
+          </a:p>
+        </p:txBody>
+      </p:sp>
+      <p:pic>
+        <p:nvPicPr>
+          <p:cNvPr id="3" name="Picture 5">
+            <a:extLst>
+              <a:ext uri="{FF2B5EF4-FFF2-40B4-BE49-F238E27FC236}">
+                <a16:creationId xmlns:a16="http://schemas.microsoft.com/office/drawing/2014/main" xmlns="" id="{CD544109-9098-CA3C-766B-DFEB05AE1F38}"/>
+              </a:ext>
+            </a:extLst>
+          </p:cNvPr>
+          <p:cNvPicPr>
+            <a:picLocks noChangeAspect="1"/>
+          </p:cNvPicPr>
+          <p:nvPr/>
+        </p:nvPicPr>
+        <p:blipFill>
+          <a:blip r:embed="rId2"/>
+          <a:stretch>
+            <a:fillRect/>
+          </a:stretch>
+        </p:blipFill>
+        <p:spPr>
+          <a:xfrm>
+            <a:off x="2879290" y="1932888"/>
+            <a:ext cx="6230219" cy="4925112"/>
+          </a:xfrm>
+          <a:prstGeom prst="rect">
+            <a:avLst/>
+          </a:prstGeom>
+        </p:spPr>
+      </p:pic>
+      <p:sp>
+        <p:nvSpPr>
+          <p:cNvPr id="4" name="TextBox 9">
+            <a:extLst>
+              <a:ext uri="{FF2B5EF4-FFF2-40B4-BE49-F238E27FC236}">
+                <a16:creationId xmlns:a16="http://schemas.microsoft.com/office/drawing/2014/main" xmlns="" id="{E7FEC406-7A7E-5D78-DF69-D2416A2375C3}"/>
+              </a:ext>
+            </a:extLst>
+          </p:cNvPr>
+          <p:cNvSpPr txBox="1"/>
+          <p:nvPr/>
+        </p:nvSpPr>
+        <p:spPr>
+          <a:xfrm>
+            <a:off x="304800" y="2629284"/>
+            <a:ext cx="2531622" cy="646331"/>
+          </a:xfrm>
+          <a:prstGeom prst="rect">
+            <a:avLst/>
+          </a:prstGeom>
+          <a:noFill/>
+        </p:spPr>
+        <p:txBody>
+          <a:bodyPr wrap="square">
+            <a:spAutoFit/>
+          </a:bodyPr>
+          <a:lstStyle/>
+          <a:p>
+            <a:r>
+              <a:rPr lang="pt-BR" b="0" i="0" dirty="0">
+                <a:solidFill>
+                  <a:srgbClr val="404040"/>
+                </a:solidFill>
+                <a:effectLst/>
+              </a:rPr>
+              <a:t>5. Repete-se os passos 3 e 4.</a:t>
+            </a:r>
+            <a:endParaRPr lang="en-US" dirty="0"/>
+          </a:p>
+        </p:txBody>
+      </p:sp>
+    </p:spTree>
+    <p:extLst>
+      <p:ext uri="{BB962C8B-B14F-4D97-AF65-F5344CB8AC3E}">
+        <p14:creationId xmlns:p14="http://schemas.microsoft.com/office/powerpoint/2010/main" val="1524781492"/>
+      </p:ext>
+    </p:extLst>
+  </p:cSld>
+  <p:clrMapOvr>
+    <a:masterClrMapping/>
+  </p:clrMapOvr>
+</p:sld>
+</file>
+
+<file path=ppt/slides/slide27.xml><?xml version="1.0" encoding="utf-8"?>
+<p:sld xmlns:a="http://schemas.openxmlformats.org/drawingml/2006/main" xmlns:r="http://schemas.openxmlformats.org/officeDocument/2006/relationships" xmlns:p="http://schemas.openxmlformats.org/presentationml/2006/main">
+  <p:cSld>
+    <p:spTree>
+      <p:nvGrpSpPr>
+        <p:cNvPr id="1" name=""/>
+        <p:cNvGrpSpPr/>
+        <p:nvPr/>
+      </p:nvGrpSpPr>
+      <p:grpSpPr>
+        <a:xfrm>
+          <a:off x="0" y="0"/>
+          <a:ext cx="0" cy="0"/>
+          <a:chOff x="0" y="0"/>
+          <a:chExt cx="0" cy="0"/>
+        </a:xfrm>
+      </p:grpSpPr>
+      <p:sp>
+        <p:nvSpPr>
+          <p:cNvPr id="2" name="Título 1"/>
+          <p:cNvSpPr>
+            <a:spLocks noGrp="1"/>
+          </p:cNvSpPr>
+          <p:nvPr>
+            <p:ph type="title"/>
+          </p:nvPr>
+        </p:nvSpPr>
+        <p:spPr/>
+        <p:txBody>
+          <a:bodyPr/>
+          <a:lstStyle/>
+          <a:p>
+            <a:r>
+              <a:rPr lang="pt-BR" dirty="0"/>
+              <a:t>Funcionamento do </a:t>
+            </a:r>
+            <a:r>
+              <a:rPr lang="pt-BR" i="1" dirty="0"/>
+              <a:t>k-</a:t>
+            </a:r>
+            <a:r>
+              <a:rPr lang="pt-BR" i="1" dirty="0" err="1"/>
+              <a:t>Means</a:t>
+            </a:r>
+            <a:endParaRPr lang="pt-BR" dirty="0"/>
+          </a:p>
+        </p:txBody>
+      </p:sp>
+      <p:pic>
+        <p:nvPicPr>
+          <p:cNvPr id="3" name="Picture 5">
+            <a:extLst>
+              <a:ext uri="{FF2B5EF4-FFF2-40B4-BE49-F238E27FC236}">
+                <a16:creationId xmlns:a16="http://schemas.microsoft.com/office/drawing/2014/main" xmlns="" id="{9F08A47C-C93C-D40B-F5DC-3C29F2EEEE60}"/>
+              </a:ext>
+            </a:extLst>
+          </p:cNvPr>
+          <p:cNvPicPr>
+            <a:picLocks noChangeAspect="1"/>
+          </p:cNvPicPr>
+          <p:nvPr/>
+        </p:nvPicPr>
+        <p:blipFill>
+          <a:blip r:embed="rId2"/>
+          <a:stretch>
+            <a:fillRect/>
+          </a:stretch>
+        </p:blipFill>
+        <p:spPr>
+          <a:xfrm>
+            <a:off x="2995180" y="1961467"/>
+            <a:ext cx="6201640" cy="4896533"/>
+          </a:xfrm>
+          <a:prstGeom prst="rect">
+            <a:avLst/>
+          </a:prstGeom>
+        </p:spPr>
+      </p:pic>
+      <p:sp>
+        <p:nvSpPr>
+          <p:cNvPr id="4" name="TextBox 7">
+            <a:extLst>
+              <a:ext uri="{FF2B5EF4-FFF2-40B4-BE49-F238E27FC236}">
+                <a16:creationId xmlns:a16="http://schemas.microsoft.com/office/drawing/2014/main" xmlns="" id="{4376C1A9-3731-8BF9-861E-3D686FEA4F43}"/>
+              </a:ext>
+            </a:extLst>
+          </p:cNvPr>
+          <p:cNvSpPr txBox="1"/>
+          <p:nvPr/>
+        </p:nvSpPr>
+        <p:spPr>
+          <a:xfrm>
+            <a:off x="141890" y="2629285"/>
+            <a:ext cx="2954890" cy="3139321"/>
+          </a:xfrm>
+          <a:prstGeom prst="rect">
+            <a:avLst/>
+          </a:prstGeom>
+          <a:noFill/>
+        </p:spPr>
+        <p:txBody>
+          <a:bodyPr wrap="square">
+            <a:spAutoFit/>
+          </a:bodyPr>
+          <a:lstStyle/>
+          <a:p>
+            <a:r>
+              <a:rPr lang="pt-BR" b="0" i="0" dirty="0">
+                <a:solidFill>
+                  <a:srgbClr val="404040"/>
+                </a:solidFill>
+                <a:effectLst/>
+              </a:rPr>
+              <a:t>Repete-se os passos 3-4</a:t>
+            </a:r>
+            <a:r>
+              <a:rPr lang="pt-BR" dirty="0"/>
+              <a:t> </a:t>
+            </a:r>
+            <a:r>
+              <a:rPr lang="pt-BR" b="0" i="0" dirty="0">
+                <a:solidFill>
+                  <a:srgbClr val="404040"/>
+                </a:solidFill>
+                <a:effectLst/>
+              </a:rPr>
+              <a:t>até que um dos casos abaixo ocorra:</a:t>
+            </a:r>
+            <a:endParaRPr lang="pt-BR" dirty="0"/>
+          </a:p>
+          <a:p>
+            <a:pPr marL="342900" indent="-342900">
+              <a:buFont typeface="+mj-lt"/>
+              <a:buAutoNum type="arabicPeriod"/>
+            </a:pPr>
+            <a:r>
+              <a:rPr lang="pt-BR" b="0" i="0" dirty="0">
+                <a:solidFill>
+                  <a:srgbClr val="404040"/>
+                </a:solidFill>
+                <a:effectLst/>
+              </a:rPr>
+              <a:t>A soma das distâncias entre as amostras e o centroide correspondente seja minimizada</a:t>
+            </a:r>
+            <a:endParaRPr lang="pt-BR" dirty="0"/>
+          </a:p>
+          <a:p>
+            <a:pPr marL="342900" indent="-342900">
+              <a:buFont typeface="+mj-lt"/>
+              <a:buAutoNum type="arabicPeriod"/>
+            </a:pPr>
+            <a:r>
+              <a:rPr lang="pt-BR" b="0" i="0" dirty="0">
+                <a:solidFill>
+                  <a:srgbClr val="404040"/>
+                </a:solidFill>
+                <a:effectLst/>
+              </a:rPr>
+              <a:t>Não haja alteração nos centroides</a:t>
+            </a:r>
+            <a:endParaRPr lang="pt-BR" dirty="0"/>
+          </a:p>
+          <a:p>
+            <a:pPr marL="342900" indent="-342900">
+              <a:buFont typeface="+mj-lt"/>
+              <a:buAutoNum type="arabicPeriod"/>
+            </a:pPr>
+            <a:r>
+              <a:rPr lang="pt-BR" b="0" i="0" dirty="0">
+                <a:solidFill>
+                  <a:srgbClr val="404040"/>
+                </a:solidFill>
+                <a:effectLst/>
+              </a:rPr>
+              <a:t>O número máximo de iterações seja atingido</a:t>
+            </a:r>
+            <a:endParaRPr lang="en-US" dirty="0"/>
+          </a:p>
+        </p:txBody>
+      </p:sp>
+    </p:spTree>
+    <p:extLst>
+      <p:ext uri="{BB962C8B-B14F-4D97-AF65-F5344CB8AC3E}">
+        <p14:creationId xmlns:p14="http://schemas.microsoft.com/office/powerpoint/2010/main" val="3046733346"/>
+      </p:ext>
+    </p:extLst>
+  </p:cSld>
+  <p:clrMapOvr>
+    <a:masterClrMapping/>
+  </p:clrMapOvr>
+</p:sld>
+</file>
+
+<file path=ppt/slides/slide28.xml><?xml version="1.0" encoding="utf-8"?>
 <p:sld xmlns:a="http://schemas.openxmlformats.org/drawingml/2006/main" xmlns:r="http://schemas.openxmlformats.org/officeDocument/2006/relationships" xmlns:p="http://schemas.openxmlformats.org/presentationml/2006/main">
   <p:cSld>
     <p:spTree>
@@ -10249,7 +11744,7 @@
           <p:cNvPr id="4" name="Picture 2" descr="Quantum machine learning: distance estimation for k-means clustering | by  Sashwat Anagolum | Towards Data Science">
             <a:extLst>
               <a:ext uri="{FF2B5EF4-FFF2-40B4-BE49-F238E27FC236}">
-                <a16:creationId xmlns:a16="http://schemas.microsoft.com/office/drawing/2014/main" id="{3663CA52-EDD8-4A35-5A6A-3A247A7891B7}"/>
+                <a16:creationId xmlns:a16="http://schemas.microsoft.com/office/drawing/2014/main" xmlns="" id="{3663CA52-EDD8-4A35-5A6A-3A247A7891B7}"/>
               </a:ext>
             </a:extLst>
           </p:cNvPr>
@@ -10302,7 +11797,7 @@
 </p:sld>
 </file>
 
-<file path=ppt/slides/slide21.xml><?xml version="1.0" encoding="utf-8"?>
+<file path=ppt/slides/slide29.xml><?xml version="1.0" encoding="utf-8"?>
 <p:sld xmlns:a="http://schemas.openxmlformats.org/drawingml/2006/main" xmlns:r="http://schemas.openxmlformats.org/officeDocument/2006/relationships" xmlns:p="http://schemas.openxmlformats.org/presentationml/2006/main">
   <p:cSld>
     <p:spTree>
@@ -10310,7 +11805,7 @@
         <p:cNvPr id="1" name="">
           <a:extLst>
             <a:ext uri="{FF2B5EF4-FFF2-40B4-BE49-F238E27FC236}">
-              <a16:creationId xmlns:a16="http://schemas.microsoft.com/office/drawing/2014/main" id="{17B1A926-A8C8-946A-0DCB-7DA6EAEC80E3}"/>
+              <a16:creationId xmlns:a16="http://schemas.microsoft.com/office/drawing/2014/main" xmlns="" id="{17B1A926-A8C8-946A-0DCB-7DA6EAEC80E3}"/>
             </a:ext>
           </a:extLst>
         </p:cNvPr>
@@ -10330,7 +11825,7 @@
           <p:cNvPr id="2" name="Título 1">
             <a:extLst>
               <a:ext uri="{FF2B5EF4-FFF2-40B4-BE49-F238E27FC236}">
-                <a16:creationId xmlns:a16="http://schemas.microsoft.com/office/drawing/2014/main" id="{602E24AF-FE6E-7B0A-D179-EB49A1DEB2F8}"/>
+                <a16:creationId xmlns:a16="http://schemas.microsoft.com/office/drawing/2014/main" xmlns="" id="{602E24AF-FE6E-7B0A-D179-EB49A1DEB2F8}"/>
               </a:ext>
             </a:extLst>
           </p:cNvPr>
@@ -10359,7 +11854,7 @@
           <p:cNvPr id="3" name="Espaço Reservado para Conteúdo 2">
             <a:extLst>
               <a:ext uri="{FF2B5EF4-FFF2-40B4-BE49-F238E27FC236}">
-                <a16:creationId xmlns:a16="http://schemas.microsoft.com/office/drawing/2014/main" id="{4E35406F-F929-EFBE-0B16-7CF919C6F311}"/>
+                <a16:creationId xmlns:a16="http://schemas.microsoft.com/office/drawing/2014/main" xmlns="" id="{4E35406F-F929-EFBE-0B16-7CF919C6F311}"/>
               </a:ext>
             </a:extLst>
           </p:cNvPr>
@@ -10502,7 +11997,7 @@
           <p:cNvPr id="4" name="Picture 2" descr="Quantum machine learning: distance estimation for k-means clustering | by  Sashwat Anagolum | Towards Data Science">
             <a:extLst>
               <a:ext uri="{FF2B5EF4-FFF2-40B4-BE49-F238E27FC236}">
-                <a16:creationId xmlns:a16="http://schemas.microsoft.com/office/drawing/2014/main" id="{375C1022-A6C8-5B17-2FC3-13794270B208}"/>
+                <a16:creationId xmlns:a16="http://schemas.microsoft.com/office/drawing/2014/main" xmlns="" id="{375C1022-A6C8-5B17-2FC3-13794270B208}"/>
               </a:ext>
             </a:extLst>
           </p:cNvPr>
@@ -10555,7 +12050,556 @@
 </p:sld>
 </file>
 
-<file path=ppt/slides/slide22.xml><?xml version="1.0" encoding="utf-8"?>
+<file path=ppt/slides/slide3.xml><?xml version="1.0" encoding="utf-8"?>
+<p:sld xmlns:a="http://schemas.openxmlformats.org/drawingml/2006/main" xmlns:r="http://schemas.openxmlformats.org/officeDocument/2006/relationships" xmlns:p="http://schemas.openxmlformats.org/presentationml/2006/main">
+  <p:cSld>
+    <p:spTree>
+      <p:nvGrpSpPr>
+        <p:cNvPr id="1" name=""/>
+        <p:cNvGrpSpPr/>
+        <p:nvPr/>
+      </p:nvGrpSpPr>
+      <p:grpSpPr>
+        <a:xfrm>
+          <a:off x="0" y="0"/>
+          <a:ext cx="0" cy="0"/>
+          <a:chOff x="0" y="0"/>
+          <a:chExt cx="0" cy="0"/>
+        </a:xfrm>
+      </p:grpSpPr>
+      <p:sp>
+        <p:nvSpPr>
+          <p:cNvPr id="6" name="TextBox 5">
+            <a:extLst>
+              <a:ext uri="{FF2B5EF4-FFF2-40B4-BE49-F238E27FC236}">
+                <a16:creationId xmlns:a16="http://schemas.microsoft.com/office/drawing/2014/main" xmlns="" id="{7A9955D7-EF0A-C073-CA9C-EC6A396485B8}"/>
+              </a:ext>
+            </a:extLst>
+          </p:cNvPr>
+          <p:cNvSpPr txBox="1"/>
+          <p:nvPr/>
+        </p:nvSpPr>
+        <p:spPr>
+          <a:xfrm>
+            <a:off x="6574971" y="2814935"/>
+            <a:ext cx="4898572" cy="1815882"/>
+          </a:xfrm>
+          <a:prstGeom prst="rect">
+            <a:avLst/>
+          </a:prstGeom>
+          <a:noFill/>
+        </p:spPr>
+        <p:txBody>
+          <a:bodyPr wrap="square">
+            <a:spAutoFit/>
+          </a:bodyPr>
+          <a:lstStyle/>
+          <a:p>
+            <a:pPr algn="ctr"/>
+            <a:r>
+              <a:rPr lang="pt-BR" sz="2800" dirty="0"/>
+              <a:t>A </a:t>
+            </a:r>
+            <a:r>
+              <a:rPr lang="pt-BR" sz="2800" b="1" dirty="0"/>
+              <a:t>clusterização</a:t>
+            </a:r>
+            <a:r>
+              <a:rPr lang="pt-BR" sz="2800" dirty="0"/>
+              <a:t> organiza dados como na figura: cada ponto encontra seu grupo mais próximo, formando </a:t>
+            </a:r>
+            <a:r>
+              <a:rPr lang="pt-BR" sz="2800" i="1" dirty="0"/>
+              <a:t>clusters.</a:t>
+            </a:r>
+            <a:endParaRPr lang="en-US" sz="2800" dirty="0"/>
+          </a:p>
+        </p:txBody>
+      </p:sp>
+      <p:pic>
+        <p:nvPicPr>
+          <p:cNvPr id="3" name="Picture 2">
+            <a:extLst>
+              <a:ext uri="{FF2B5EF4-FFF2-40B4-BE49-F238E27FC236}">
+                <a16:creationId xmlns:a16="http://schemas.microsoft.com/office/drawing/2014/main" xmlns="" id="{9863C601-9BD1-3DD0-9219-97CD9BA5DC5A}"/>
+              </a:ext>
+            </a:extLst>
+          </p:cNvPr>
+          <p:cNvPicPr>
+            <a:picLocks noChangeAspect="1"/>
+          </p:cNvPicPr>
+          <p:nvPr/>
+        </p:nvPicPr>
+        <p:blipFill>
+          <a:blip r:embed="rId2" cstate="print">
+            <a:extLst>
+              <a:ext uri="{28A0092B-C50C-407E-A947-70E740481C1C}">
+                <a14:useLocalDpi xmlns:a14="http://schemas.microsoft.com/office/drawing/2010/main" val="0"/>
+              </a:ext>
+            </a:extLst>
+          </a:blip>
+          <a:stretch>
+            <a:fillRect/>
+          </a:stretch>
+        </p:blipFill>
+        <p:spPr>
+          <a:xfrm>
+            <a:off x="1934027" y="642219"/>
+            <a:ext cx="3889829" cy="5834743"/>
+          </a:xfrm>
+          <a:prstGeom prst="rect">
+            <a:avLst/>
+          </a:prstGeom>
+        </p:spPr>
+      </p:pic>
+    </p:spTree>
+    <p:extLst>
+      <p:ext uri="{BB962C8B-B14F-4D97-AF65-F5344CB8AC3E}">
+        <p14:creationId xmlns:p14="http://schemas.microsoft.com/office/powerpoint/2010/main" val="3439447642"/>
+      </p:ext>
+    </p:extLst>
+  </p:cSld>
+  <p:clrMapOvr>
+    <a:masterClrMapping/>
+  </p:clrMapOvr>
+</p:sld>
+</file>
+
+<file path=ppt/slides/slide30.xml><?xml version="1.0" encoding="utf-8"?>
+<p:sld xmlns:a="http://schemas.openxmlformats.org/drawingml/2006/main" xmlns:r="http://schemas.openxmlformats.org/officeDocument/2006/relationships" xmlns:p="http://schemas.openxmlformats.org/presentationml/2006/main">
+  <p:cSld>
+    <p:spTree>
+      <p:nvGrpSpPr>
+        <p:cNvPr id="1" name=""/>
+        <p:cNvGrpSpPr/>
+        <p:nvPr/>
+      </p:nvGrpSpPr>
+      <p:grpSpPr>
+        <a:xfrm>
+          <a:off x="0" y="0"/>
+          <a:ext cx="0" cy="0"/>
+          <a:chOff x="0" y="0"/>
+          <a:chExt cx="0" cy="0"/>
+        </a:xfrm>
+      </p:grpSpPr>
+      <p:sp>
+        <p:nvSpPr>
+          <p:cNvPr id="2" name="Título 1"/>
+          <p:cNvSpPr>
+            <a:spLocks noGrp="1"/>
+          </p:cNvSpPr>
+          <p:nvPr>
+            <p:ph type="title"/>
+          </p:nvPr>
+        </p:nvSpPr>
+        <p:spPr/>
+        <p:txBody>
+          <a:bodyPr/>
+          <a:lstStyle/>
+          <a:p>
+            <a:r>
+              <a:rPr lang="pt-BR" dirty="0" smtClean="0"/>
+              <a:t>Método do cotovelo</a:t>
+            </a:r>
+            <a:endParaRPr lang="pt-BR" dirty="0"/>
+          </a:p>
+        </p:txBody>
+      </p:sp>
+      <p:sp>
+        <p:nvSpPr>
+          <p:cNvPr id="3" name="Espaço Reservado para Conteúdo 2"/>
+          <p:cNvSpPr>
+            <a:spLocks noGrp="1"/>
+          </p:cNvSpPr>
+          <p:nvPr>
+            <p:ph idx="1"/>
+          </p:nvPr>
+        </p:nvSpPr>
+        <p:spPr>
+          <a:xfrm>
+            <a:off x="7293186" y="1825624"/>
+            <a:ext cx="4898814" cy="5032375"/>
+          </a:xfrm>
+        </p:spPr>
+        <p:txBody>
+          <a:bodyPr>
+            <a:normAutofit fontScale="32500" lnSpcReduction="20000"/>
+          </a:bodyPr>
+          <a:lstStyle/>
+          <a:p>
+            <a:r>
+              <a:rPr lang="pt-BR" dirty="0"/>
+              <a:t>Essa abordagem utiliza a Soma dos Quadrados </a:t>
+            </a:r>
+            <a:r>
+              <a:rPr lang="pt-BR" dirty="0" err="1"/>
+              <a:t>Intra-Clusters</a:t>
+            </a:r>
+            <a:r>
+              <a:rPr lang="pt-BR" dirty="0"/>
+              <a:t> (WSS - </a:t>
+            </a:r>
+            <a:r>
+              <a:rPr lang="pt-BR" dirty="0" err="1"/>
+              <a:t>Within</a:t>
+            </a:r>
+            <a:r>
+              <a:rPr lang="pt-BR" dirty="0"/>
+              <a:t>-Cluster Sum </a:t>
+            </a:r>
+            <a:r>
+              <a:rPr lang="pt-BR" dirty="0" err="1"/>
+              <a:t>of</a:t>
+            </a:r>
+            <a:r>
+              <a:rPr lang="pt-BR" dirty="0"/>
+              <a:t> </a:t>
+            </a:r>
+            <a:r>
+              <a:rPr lang="pt-BR" dirty="0" err="1"/>
+              <a:t>Squares</a:t>
+            </a:r>
+            <a:r>
+              <a:rPr lang="pt-BR" dirty="0"/>
+              <a:t>), também conhecido como inércia, e analisa a curva de WSS em função de</a:t>
+            </a:r>
+          </a:p>
+          <a:p>
+            <a:r>
+              <a:rPr lang="pt-BR" dirty="0"/>
+              <a:t>$k$.</a:t>
+            </a:r>
+          </a:p>
+          <a:p>
+            <a:r>
+              <a:rPr lang="pt-BR" dirty="0"/>
+              <a:t/>
+            </a:r>
+            <a:br>
+              <a:rPr lang="pt-BR" dirty="0"/>
+            </a:br>
+            <a:r>
+              <a:rPr lang="pt-BR" dirty="0"/>
+              <a:t>A curva quantifica o quão próximos os pontos de um cluster estão do seu </a:t>
+            </a:r>
+            <a:r>
+              <a:rPr lang="pt-BR" dirty="0" err="1"/>
+              <a:t>centróide</a:t>
+            </a:r>
+            <a:r>
+              <a:rPr lang="pt-BR" dirty="0"/>
+              <a:t> (centro do cluster).</a:t>
+            </a:r>
+          </a:p>
+          <a:p>
+            <a:r>
+              <a:rPr lang="pt-BR" dirty="0"/>
+              <a:t/>
+            </a:r>
+            <a:br>
+              <a:rPr lang="pt-BR" dirty="0"/>
+            </a:br>
+            <a:r>
+              <a:rPr lang="pt-BR" dirty="0"/>
+              <a:t>Quanto menor o WSS, mais coesos são os clusters (os pontos dentro de um cluster estão fortemente agrupados, próximos entre si e do </a:t>
+            </a:r>
+            <a:r>
+              <a:rPr lang="pt-BR" dirty="0" err="1"/>
+              <a:t>centróide</a:t>
+            </a:r>
+            <a:r>
+              <a:rPr lang="pt-BR" dirty="0"/>
+              <a:t>).</a:t>
+            </a:r>
+          </a:p>
+          <a:p>
+            <a:r>
+              <a:rPr lang="pt-BR" dirty="0"/>
+              <a:t/>
+            </a:r>
+            <a:br>
+              <a:rPr lang="pt-BR" dirty="0"/>
+            </a:br>
+            <a:r>
+              <a:rPr lang="pt-BR" dirty="0"/>
+              <a:t>A equação do </a:t>
+            </a:r>
+            <a:r>
+              <a:rPr lang="pt-BR" b="1" dirty="0"/>
+              <a:t>**</a:t>
+            </a:r>
+            <a:r>
+              <a:rPr lang="pt-BR" b="1" dirty="0" err="1"/>
+              <a:t>Within</a:t>
+            </a:r>
+            <a:r>
+              <a:rPr lang="pt-BR" b="1" dirty="0"/>
+              <a:t>-Cluster Sum </a:t>
+            </a:r>
+            <a:r>
+              <a:rPr lang="pt-BR" b="1" dirty="0" err="1"/>
+              <a:t>of</a:t>
+            </a:r>
+            <a:r>
+              <a:rPr lang="pt-BR" b="1" dirty="0"/>
+              <a:t> </a:t>
+            </a:r>
+            <a:r>
+              <a:rPr lang="pt-BR" b="1" dirty="0" err="1"/>
+              <a:t>Squares</a:t>
+            </a:r>
+            <a:r>
+              <a:rPr lang="pt-BR" b="1" dirty="0"/>
+              <a:t> (WSS)**</a:t>
+            </a:r>
+            <a:r>
+              <a:rPr lang="pt-BR" dirty="0"/>
+              <a:t> é:</a:t>
+            </a:r>
+          </a:p>
+          <a:p>
+            <a:r>
+              <a:rPr lang="pt-BR" dirty="0"/>
+              <a:t>$$WSS = \sum</a:t>
+            </a:r>
+            <a:r>
+              <a:rPr lang="pt-BR" i="1" dirty="0"/>
+              <a:t>_{i=1}^{k} \sum_</a:t>
+            </a:r>
+            <a:r>
+              <a:rPr lang="pt-BR" dirty="0"/>
+              <a:t>{x \in </a:t>
+            </a:r>
+            <a:r>
+              <a:rPr lang="pt-BR" dirty="0" err="1"/>
+              <a:t>C_i</a:t>
+            </a:r>
+            <a:r>
+              <a:rPr lang="pt-BR" dirty="0"/>
+              <a:t>} \|x - \</a:t>
+            </a:r>
+            <a:r>
+              <a:rPr lang="pt-BR" dirty="0" err="1"/>
+              <a:t>mu_i</a:t>
+            </a:r>
+            <a:r>
+              <a:rPr lang="pt-BR" dirty="0"/>
+              <a:t>\|^2$$,</a:t>
+            </a:r>
+          </a:p>
+          <a:p>
+            <a:r>
+              <a:rPr lang="pt-BR" dirty="0"/>
+              <a:t>onde:</a:t>
+            </a:r>
+          </a:p>
+          <a:p>
+            <a:r>
+              <a:rPr lang="pt-BR" dirty="0"/>
+              <a:t>- $k$ -&gt; número de clusters,</a:t>
+            </a:r>
+          </a:p>
+          <a:p>
+            <a:r>
+              <a:rPr lang="pt-BR" dirty="0"/>
+              <a:t>- $</a:t>
+            </a:r>
+            <a:r>
+              <a:rPr lang="pt-BR" dirty="0" err="1"/>
+              <a:t>C_i</a:t>
+            </a:r>
+            <a:r>
+              <a:rPr lang="pt-BR" dirty="0"/>
+              <a:t>$ -&gt; conjunto de pontos no cluster \( i \),</a:t>
+            </a:r>
+          </a:p>
+          <a:p>
+            <a:r>
+              <a:rPr lang="pt-BR" dirty="0"/>
+              <a:t>- $</a:t>
+            </a:r>
+            <a:r>
+              <a:rPr lang="pt-BR" dirty="0" err="1"/>
+              <a:t>mu_i</a:t>
+            </a:r>
+            <a:r>
+              <a:rPr lang="pt-BR" dirty="0"/>
+              <a:t>$ = </a:t>
+            </a:r>
+            <a:r>
+              <a:rPr lang="pt-BR" dirty="0" err="1"/>
+              <a:t>centróide</a:t>
+            </a:r>
+            <a:r>
+              <a:rPr lang="pt-BR" dirty="0"/>
+              <a:t> (média) do cluster \( i \),</a:t>
+            </a:r>
+          </a:p>
+          <a:p>
+            <a:r>
+              <a:rPr lang="pt-BR" dirty="0"/>
+              <a:t>- $ \|x - \</a:t>
+            </a:r>
+            <a:r>
+              <a:rPr lang="pt-BR" dirty="0" err="1"/>
+              <a:t>mu_i</a:t>
+            </a:r>
+            <a:r>
+              <a:rPr lang="pt-BR" dirty="0"/>
+              <a:t>\|^2 $ -&gt; distância quadrada (Euclidiana) entre um ponto $x$ e seu </a:t>
+            </a:r>
+            <a:r>
+              <a:rPr lang="pt-BR" dirty="0" err="1"/>
+              <a:t>centróide</a:t>
+            </a:r>
+            <a:r>
+              <a:rPr lang="pt-BR" dirty="0"/>
+              <a:t>.</a:t>
+            </a:r>
+          </a:p>
+          <a:p>
+            <a:r>
+              <a:rPr lang="pt-BR" dirty="0"/>
+              <a:t/>
+            </a:r>
+            <a:br>
+              <a:rPr lang="pt-BR" dirty="0"/>
+            </a:br>
+            <a:r>
+              <a:rPr lang="pt-BR" dirty="0"/>
+              <a:t/>
+            </a:r>
+            <a:br>
+              <a:rPr lang="pt-BR" dirty="0"/>
+            </a:br>
+            <a:r>
+              <a:rPr lang="pt-BR" b="1" dirty="0"/>
+              <a:t>**O objetivo é encontrar um $k$ onde aumentar o número de clusters não reduz significativamente o WSS. Isso ocorre a partir do cotovelo da curva.**</a:t>
+            </a:r>
+            <a:endParaRPr lang="pt-BR" dirty="0"/>
+          </a:p>
+          <a:p>
+            <a:r>
+              <a:rPr lang="pt-BR" dirty="0"/>
+              <a:t/>
+            </a:r>
+            <a:br>
+              <a:rPr lang="pt-BR" dirty="0"/>
+            </a:br>
+            <a:r>
+              <a:rPr lang="pt-BR" dirty="0"/>
+              <a:t>Assim, o valor ideal de $k$ é encontrando localizando-se o cotovelo na curva.</a:t>
+            </a:r>
+          </a:p>
+          <a:p>
+            <a:r>
+              <a:rPr lang="pt-BR" dirty="0"/>
+              <a:t/>
+            </a:r>
+            <a:br>
+              <a:rPr lang="pt-BR" dirty="0"/>
+            </a:br>
+            <a:r>
+              <a:rPr lang="pt-BR" dirty="0"/>
+              <a:t>Quando o cotovelo na curva não é claramente visível, uma técnica comum é traçar uma reta conectando os pontos extremos da curva e identificar o ponto mais distante dessa reta como o "cotovelo" ideal.</a:t>
+            </a:r>
+          </a:p>
+          <a:p>
+            <a:endParaRPr lang="pt-BR" dirty="0"/>
+          </a:p>
+        </p:txBody>
+      </p:sp>
+      <p:pic>
+        <p:nvPicPr>
+          <p:cNvPr id="4" name="Picture 2" descr="Base Teórica do K-Means! Aprenda a Lógica desse Algoritmo Hoje!">
+            <a:extLst>
+              <a:ext uri="{FF2B5EF4-FFF2-40B4-BE49-F238E27FC236}">
+                <a16:creationId xmlns:a16="http://schemas.microsoft.com/office/drawing/2014/main" xmlns="" id="{0694ADFD-EB2E-2BF0-18BE-B07E4CD60A5F}"/>
+              </a:ext>
+            </a:extLst>
+          </p:cNvPr>
+          <p:cNvPicPr>
+            <a:picLocks noChangeAspect="1" noChangeArrowheads="1"/>
+          </p:cNvPicPr>
+          <p:nvPr/>
+        </p:nvPicPr>
+        <p:blipFill>
+          <a:blip r:embed="rId3">
+            <a:extLst>
+              <a:ext uri="{28A0092B-C50C-407E-A947-70E740481C1C}">
+                <a14:useLocalDpi xmlns:a14="http://schemas.microsoft.com/office/drawing/2010/main" val="0"/>
+              </a:ext>
+            </a:extLst>
+          </a:blip>
+          <a:srcRect/>
+          <a:stretch>
+            <a:fillRect/>
+          </a:stretch>
+        </p:blipFill>
+        <p:spPr bwMode="auto">
+          <a:xfrm>
+            <a:off x="-256699" y="2565319"/>
+            <a:ext cx="7549885" cy="3444004"/>
+          </a:xfrm>
+          <a:prstGeom prst="rect">
+            <a:avLst/>
+          </a:prstGeom>
+          <a:noFill/>
+          <a:extLst>
+            <a:ext uri="{909E8E84-426E-40DD-AFC4-6F175D3DCCD1}">
+              <a14:hiddenFill xmlns:a14="http://schemas.microsoft.com/office/drawing/2010/main">
+                <a:solidFill>
+                  <a:srgbClr val="FFFFFF"/>
+                </a:solidFill>
+              </a14:hiddenFill>
+            </a:ext>
+          </a:extLst>
+        </p:spPr>
+      </p:pic>
+      <p:pic>
+        <p:nvPicPr>
+          <p:cNvPr id="5" name="Imagem 4">
+            <a:extLst>
+              <a:ext uri="{FF2B5EF4-FFF2-40B4-BE49-F238E27FC236}">
+                <a16:creationId xmlns:a16="http://schemas.microsoft.com/office/drawing/2014/main" xmlns="" id="{EEF69E85-6440-34FE-5C8A-A5F37765D292}"/>
+              </a:ext>
+            </a:extLst>
+          </p:cNvPr>
+          <p:cNvPicPr>
+            <a:picLocks noChangeAspect="1"/>
+          </p:cNvPicPr>
+          <p:nvPr/>
+        </p:nvPicPr>
+        <p:blipFill>
+          <a:blip r:embed="rId4"/>
+          <a:stretch>
+            <a:fillRect/>
+          </a:stretch>
+        </p:blipFill>
+        <p:spPr>
+          <a:xfrm>
+            <a:off x="3182963" y="3894857"/>
+            <a:ext cx="2377646" cy="784928"/>
+          </a:xfrm>
+          <a:prstGeom prst="rect">
+            <a:avLst/>
+          </a:prstGeom>
+        </p:spPr>
+      </p:pic>
+    </p:spTree>
+    <p:extLst>
+      <p:ext uri="{BB962C8B-B14F-4D97-AF65-F5344CB8AC3E}">
+        <p14:creationId xmlns:p14="http://schemas.microsoft.com/office/powerpoint/2010/main" val="756208419"/>
+      </p:ext>
+    </p:extLst>
+  </p:cSld>
+  <p:clrMapOvr>
+    <a:masterClrMapping/>
+  </p:clrMapOvr>
+</p:sld>
+</file>
+
+<file path=ppt/slides/slide31.xml><?xml version="1.0" encoding="utf-8"?>
 <p:sld xmlns:a="http://schemas.openxmlformats.org/drawingml/2006/main" xmlns:r="http://schemas.openxmlformats.org/officeDocument/2006/relationships" xmlns:p="http://schemas.openxmlformats.org/presentationml/2006/main">
   <p:cSld>
     <p:spTree>
@@ -10796,7 +12840,7 @@
 </p:sld>
 </file>
 
-<file path=ppt/slides/slide23.xml><?xml version="1.0" encoding="utf-8"?>
+<file path=ppt/slides/slide32.xml><?xml version="1.0" encoding="utf-8"?>
 <p:sld xmlns:a="http://schemas.openxmlformats.org/drawingml/2006/main" xmlns:r="http://schemas.openxmlformats.org/officeDocument/2006/relationships" xmlns:p="http://schemas.openxmlformats.org/presentationml/2006/main">
   <p:cSld>
     <p:spTree>
@@ -10818,7 +12862,7 @@
           <p:cNvPr id="2" name="Título 1">
             <a:extLst>
               <a:ext uri="{FF2B5EF4-FFF2-40B4-BE49-F238E27FC236}">
-                <a16:creationId xmlns:a16="http://schemas.microsoft.com/office/drawing/2014/main" id="{654EC41E-A91F-2BE6-4481-EFFD64DC2B91}"/>
+                <a16:creationId xmlns:a16="http://schemas.microsoft.com/office/drawing/2014/main" xmlns="" id="{654EC41E-A91F-2BE6-4481-EFFD64DC2B91}"/>
               </a:ext>
             </a:extLst>
           </p:cNvPr>
@@ -10848,7 +12892,7 @@
               <p:cNvPr id="3" name="Espaço Reservado para Conteúdo 2">
                 <a:extLst>
                   <a:ext uri="{FF2B5EF4-FFF2-40B4-BE49-F238E27FC236}">
-                    <a16:creationId xmlns:a16="http://schemas.microsoft.com/office/drawing/2014/main" id="{7C91871B-A0D0-6F26-D59B-6230818E6267}"/>
+                    <a16:creationId xmlns:a16="http://schemas.microsoft.com/office/drawing/2014/main" xmlns="" id="{7C91871B-A0D0-6F26-D59B-6230818E6267}"/>
                   </a:ext>
                 </a:extLst>
               </p:cNvPr>
@@ -11015,7 +13059,7 @@
 </p:sld>
 </file>
 
-<file path=ppt/slides/slide24.xml><?xml version="1.0" encoding="utf-8"?>
+<file path=ppt/slides/slide33.xml><?xml version="1.0" encoding="utf-8"?>
 <p:sld xmlns:a="http://schemas.openxmlformats.org/drawingml/2006/main" xmlns:r="http://schemas.openxmlformats.org/officeDocument/2006/relationships" xmlns:p="http://schemas.openxmlformats.org/presentationml/2006/main">
   <p:cSld>
     <p:spTree>
@@ -11037,7 +13081,7 @@
           <p:cNvPr id="2" name="Title 1">
             <a:extLst>
               <a:ext uri="{FF2B5EF4-FFF2-40B4-BE49-F238E27FC236}">
-                <a16:creationId xmlns:a16="http://schemas.microsoft.com/office/drawing/2014/main" id="{A07C804B-5A43-5C89-0C42-420DDBB1CA5A}"/>
+                <a16:creationId xmlns:a16="http://schemas.microsoft.com/office/drawing/2014/main" xmlns="" id="{A07C804B-5A43-5C89-0C42-420DDBB1CA5A}"/>
               </a:ext>
             </a:extLst>
           </p:cNvPr>
@@ -11070,7 +13114,7 @@
           <p:cNvPr id="3" name="Content Placeholder 2">
             <a:extLst>
               <a:ext uri="{FF2B5EF4-FFF2-40B4-BE49-F238E27FC236}">
-                <a16:creationId xmlns:a16="http://schemas.microsoft.com/office/drawing/2014/main" id="{288A7DCE-B5C5-82F5-CC2A-E963BDDE03C9}"/>
+                <a16:creationId xmlns:a16="http://schemas.microsoft.com/office/drawing/2014/main" xmlns="" id="{288A7DCE-B5C5-82F5-CC2A-E963BDDE03C9}"/>
               </a:ext>
             </a:extLst>
           </p:cNvPr>
@@ -11142,7 +13186,7 @@
 </p:sld>
 </file>
 
-<file path=ppt/slides/slide25.xml><?xml version="1.0" encoding="utf-8"?>
+<file path=ppt/slides/slide34.xml><?xml version="1.0" encoding="utf-8"?>
 <p:sld xmlns:a="http://schemas.openxmlformats.org/drawingml/2006/main" xmlns:r="http://schemas.openxmlformats.org/officeDocument/2006/relationships" xmlns:p="http://schemas.openxmlformats.org/presentationml/2006/main">
   <p:cSld>
     <p:spTree>
@@ -11164,7 +13208,7 @@
           <p:cNvPr id="2" name="Título 1">
             <a:extLst>
               <a:ext uri="{FF2B5EF4-FFF2-40B4-BE49-F238E27FC236}">
-                <a16:creationId xmlns:a16="http://schemas.microsoft.com/office/drawing/2014/main" id="{94AB8438-E56E-2412-517C-8456E4CA773C}"/>
+                <a16:creationId xmlns:a16="http://schemas.microsoft.com/office/drawing/2014/main" xmlns="" id="{94AB8438-E56E-2412-517C-8456E4CA773C}"/>
               </a:ext>
             </a:extLst>
           </p:cNvPr>
@@ -11192,7 +13236,7 @@
           <p:cNvPr id="3" name="Espaço Reservado para Conteúdo 2">
             <a:extLst>
               <a:ext uri="{FF2B5EF4-FFF2-40B4-BE49-F238E27FC236}">
-                <a16:creationId xmlns:a16="http://schemas.microsoft.com/office/drawing/2014/main" id="{F7E2B09C-6D56-4C9F-A364-B904CCE2F1A0}"/>
+                <a16:creationId xmlns:a16="http://schemas.microsoft.com/office/drawing/2014/main" xmlns="" id="{F7E2B09C-6D56-4C9F-A364-B904CCE2F1A0}"/>
               </a:ext>
             </a:extLst>
           </p:cNvPr>
@@ -11231,7 +13275,7 @@
           <p:cNvPr id="18" name="Group 17">
             <a:extLst>
               <a:ext uri="{FF2B5EF4-FFF2-40B4-BE49-F238E27FC236}">
-                <a16:creationId xmlns:a16="http://schemas.microsoft.com/office/drawing/2014/main" id="{627C64FD-88E0-EC8E-2A34-0D5737B4C854}"/>
+                <a16:creationId xmlns:a16="http://schemas.microsoft.com/office/drawing/2014/main" xmlns="" id="{627C64FD-88E0-EC8E-2A34-0D5737B4C854}"/>
               </a:ext>
             </a:extLst>
           </p:cNvPr>
@@ -11251,7 +13295,7 @@
             <p:cNvPr id="12" name="Picture 4" descr="Project Jupyter | Try Jupyter">
               <a:extLst>
                 <a:ext uri="{FF2B5EF4-FFF2-40B4-BE49-F238E27FC236}">
-                  <a16:creationId xmlns:a16="http://schemas.microsoft.com/office/drawing/2014/main" id="{FF92EA36-91E7-292B-D7A0-2D4D83A10F98}"/>
+                  <a16:creationId xmlns:a16="http://schemas.microsoft.com/office/drawing/2014/main" xmlns="" id="{FF92EA36-91E7-292B-D7A0-2D4D83A10F98}"/>
                 </a:ext>
               </a:extLst>
             </p:cNvPr>
@@ -11298,7 +13342,7 @@
             <p:cNvPr id="13" name="Picture 8" descr="Google Colaboratory Colab - Guía Completa Español - Marketing Branding">
               <a:extLst>
                 <a:ext uri="{FF2B5EF4-FFF2-40B4-BE49-F238E27FC236}">
-                  <a16:creationId xmlns:a16="http://schemas.microsoft.com/office/drawing/2014/main" id="{46F1718A-89E6-9E63-E40B-2B19852D6AA0}"/>
+                  <a16:creationId xmlns:a16="http://schemas.microsoft.com/office/drawing/2014/main" xmlns="" id="{46F1718A-89E6-9E63-E40B-2B19852D6AA0}"/>
                 </a:ext>
               </a:extLst>
             </p:cNvPr>
@@ -11343,7 +13387,7 @@
             <p:cNvPr id="14" name="Picture 10" descr="IT12A01: FUNDAMENTALS OF PYTHON PROGRAMMING (SF) (SYNCHRONOUS E-LEARNING) -  NTUC LearningHub">
               <a:extLst>
                 <a:ext uri="{FF2B5EF4-FFF2-40B4-BE49-F238E27FC236}">
-                  <a16:creationId xmlns:a16="http://schemas.microsoft.com/office/drawing/2014/main" id="{33F6B1B4-9B79-D634-3E35-33F24609C848}"/>
+                  <a16:creationId xmlns:a16="http://schemas.microsoft.com/office/drawing/2014/main" xmlns="" id="{33F6B1B4-9B79-D634-3E35-33F24609C848}"/>
                 </a:ext>
               </a:extLst>
             </p:cNvPr>
@@ -11388,7 +13432,7 @@
             <p:cNvPr id="15" name="Sinal de Adição 7">
               <a:extLst>
                 <a:ext uri="{FF2B5EF4-FFF2-40B4-BE49-F238E27FC236}">
-                  <a16:creationId xmlns:a16="http://schemas.microsoft.com/office/drawing/2014/main" id="{6959EE6C-DCDB-E78B-5C50-EBD3FF3049E2}"/>
+                  <a16:creationId xmlns:a16="http://schemas.microsoft.com/office/drawing/2014/main" xmlns="" id="{6959EE6C-DCDB-E78B-5C50-EBD3FF3049E2}"/>
                 </a:ext>
               </a:extLst>
             </p:cNvPr>
@@ -11436,7 +13480,7 @@
             <p:cNvPr id="17" name="Sinal de Adição 10">
               <a:extLst>
                 <a:ext uri="{FF2B5EF4-FFF2-40B4-BE49-F238E27FC236}">
-                  <a16:creationId xmlns:a16="http://schemas.microsoft.com/office/drawing/2014/main" id="{30A21FDB-ABA6-9FD5-49EF-7762414AEF0C}"/>
+                  <a16:creationId xmlns:a16="http://schemas.microsoft.com/office/drawing/2014/main" xmlns="" id="{30A21FDB-ABA6-9FD5-49EF-7762414AEF0C}"/>
                 </a:ext>
               </a:extLst>
             </p:cNvPr>
@@ -11493,7 +13537,7 @@
 </p:sld>
 </file>
 
-<file path=ppt/slides/slide26.xml><?xml version="1.0" encoding="utf-8"?>
+<file path=ppt/slides/slide35.xml><?xml version="1.0" encoding="utf-8"?>
 <p:sld xmlns:a="http://schemas.openxmlformats.org/drawingml/2006/main" xmlns:r="http://schemas.openxmlformats.org/officeDocument/2006/relationships" xmlns:p="http://schemas.openxmlformats.org/presentationml/2006/main">
   <p:cSld>
     <p:spTree>
@@ -11515,7 +13559,7 @@
           <p:cNvPr id="2" name="Title 1">
             <a:extLst>
               <a:ext uri="{FF2B5EF4-FFF2-40B4-BE49-F238E27FC236}">
-                <a16:creationId xmlns:a16="http://schemas.microsoft.com/office/drawing/2014/main" id="{E8FD0E11-3B37-4336-5BF0-C8C033354AF6}"/>
+                <a16:creationId xmlns:a16="http://schemas.microsoft.com/office/drawing/2014/main" xmlns="" id="{E8FD0E11-3B37-4336-5BF0-C8C033354AF6}"/>
               </a:ext>
             </a:extLst>
           </p:cNvPr>
@@ -11544,7 +13588,7 @@
           <p:cNvPr id="3" name="Content Placeholder 2">
             <a:extLst>
               <a:ext uri="{FF2B5EF4-FFF2-40B4-BE49-F238E27FC236}">
-                <a16:creationId xmlns:a16="http://schemas.microsoft.com/office/drawing/2014/main" id="{32CB14AB-72E4-05EB-962C-F8B4618D0574}"/>
+                <a16:creationId xmlns:a16="http://schemas.microsoft.com/office/drawing/2014/main" xmlns="" id="{32CB14AB-72E4-05EB-962C-F8B4618D0574}"/>
               </a:ext>
             </a:extLst>
           </p:cNvPr>
@@ -11588,7 +13632,7 @@
 </p:sld>
 </file>
 
-<file path=ppt/slides/slide27.xml><?xml version="1.0" encoding="utf-8"?>
+<file path=ppt/slides/slide36.xml><?xml version="1.0" encoding="utf-8"?>
 <p:sld xmlns:a="http://schemas.openxmlformats.org/drawingml/2006/main" xmlns:r="http://schemas.openxmlformats.org/officeDocument/2006/relationships" xmlns:p="http://schemas.openxmlformats.org/presentationml/2006/main">
   <p:cSld>
     <p:spTree>
@@ -11610,7 +13654,7 @@
           <p:cNvPr id="4" name="Título 1">
             <a:extLst>
               <a:ext uri="{FF2B5EF4-FFF2-40B4-BE49-F238E27FC236}">
-                <a16:creationId xmlns:a16="http://schemas.microsoft.com/office/drawing/2014/main" id="{32666AC8-2E17-4DB4-B0F5-60C640CCFD2E}"/>
+                <a16:creationId xmlns:a16="http://schemas.microsoft.com/office/drawing/2014/main" xmlns="" id="{32666AC8-2E17-4DB4-B0F5-60C640CCFD2E}"/>
               </a:ext>
             </a:extLst>
           </p:cNvPr>
@@ -11674,7 +13718,7 @@
 </p:sld>
 </file>
 
-<file path=ppt/slides/slide28.xml><?xml version="1.0" encoding="utf-8"?>
+<file path=ppt/slides/slide37.xml><?xml version="1.0" encoding="utf-8"?>
 <p:sld xmlns:a="http://schemas.openxmlformats.org/drawingml/2006/main" xmlns:r="http://schemas.openxmlformats.org/officeDocument/2006/relationships" xmlns:p="http://schemas.openxmlformats.org/presentationml/2006/main">
   <p:cSld>
     <p:spTree>
@@ -11696,7 +13740,7 @@
           <p:cNvPr id="4" name="Título 1">
             <a:extLst>
               <a:ext uri="{FF2B5EF4-FFF2-40B4-BE49-F238E27FC236}">
-                <a16:creationId xmlns:a16="http://schemas.microsoft.com/office/drawing/2014/main" id="{32666AC8-2E17-4DB4-B0F5-60C640CCFD2E}"/>
+                <a16:creationId xmlns:a16="http://schemas.microsoft.com/office/drawing/2014/main" xmlns="" id="{32666AC8-2E17-4DB4-B0F5-60C640CCFD2E}"/>
               </a:ext>
             </a:extLst>
           </p:cNvPr>
@@ -11760,7 +13804,7 @@
 </p:sld>
 </file>
 
-<file path=ppt/slides/slide29.xml><?xml version="1.0" encoding="utf-8"?>
+<file path=ppt/slides/slide38.xml><?xml version="1.0" encoding="utf-8"?>
 <p:sld xmlns:a="http://schemas.openxmlformats.org/drawingml/2006/main" xmlns:r="http://schemas.openxmlformats.org/officeDocument/2006/relationships" xmlns:p="http://schemas.openxmlformats.org/presentationml/2006/main">
   <p:cSld>
     <p:spTree>
@@ -11993,121 +14037,6 @@
 </p:sld>
 </file>
 
-<file path=ppt/slides/slide3.xml><?xml version="1.0" encoding="utf-8"?>
-<p:sld xmlns:a="http://schemas.openxmlformats.org/drawingml/2006/main" xmlns:r="http://schemas.openxmlformats.org/officeDocument/2006/relationships" xmlns:p="http://schemas.openxmlformats.org/presentationml/2006/main">
-  <p:cSld>
-    <p:spTree>
-      <p:nvGrpSpPr>
-        <p:cNvPr id="1" name=""/>
-        <p:cNvGrpSpPr/>
-        <p:nvPr/>
-      </p:nvGrpSpPr>
-      <p:grpSpPr>
-        <a:xfrm>
-          <a:off x="0" y="0"/>
-          <a:ext cx="0" cy="0"/>
-          <a:chOff x="0" y="0"/>
-          <a:chExt cx="0" cy="0"/>
-        </a:xfrm>
-      </p:grpSpPr>
-      <p:sp>
-        <p:nvSpPr>
-          <p:cNvPr id="6" name="TextBox 5">
-            <a:extLst>
-              <a:ext uri="{FF2B5EF4-FFF2-40B4-BE49-F238E27FC236}">
-                <a16:creationId xmlns:a16="http://schemas.microsoft.com/office/drawing/2014/main" id="{7A9955D7-EF0A-C073-CA9C-EC6A396485B8}"/>
-              </a:ext>
-            </a:extLst>
-          </p:cNvPr>
-          <p:cNvSpPr txBox="1"/>
-          <p:nvPr/>
-        </p:nvSpPr>
-        <p:spPr>
-          <a:xfrm>
-            <a:off x="6574971" y="2814935"/>
-            <a:ext cx="4898572" cy="1815882"/>
-          </a:xfrm>
-          <a:prstGeom prst="rect">
-            <a:avLst/>
-          </a:prstGeom>
-          <a:noFill/>
-        </p:spPr>
-        <p:txBody>
-          <a:bodyPr wrap="square">
-            <a:spAutoFit/>
-          </a:bodyPr>
-          <a:lstStyle/>
-          <a:p>
-            <a:pPr algn="ctr"/>
-            <a:r>
-              <a:rPr lang="pt-BR" sz="2800" dirty="0"/>
-              <a:t>A </a:t>
-            </a:r>
-            <a:r>
-              <a:rPr lang="pt-BR" sz="2800" b="1" dirty="0"/>
-              <a:t>clusterização</a:t>
-            </a:r>
-            <a:r>
-              <a:rPr lang="pt-BR" sz="2800" dirty="0"/>
-              <a:t> organiza dados como na figura: cada ponto encontra seu grupo mais próximo, formando </a:t>
-            </a:r>
-            <a:r>
-              <a:rPr lang="pt-BR" sz="2800" i="1" dirty="0"/>
-              <a:t>clusters.</a:t>
-            </a:r>
-            <a:endParaRPr lang="en-US" sz="2800" dirty="0"/>
-          </a:p>
-        </p:txBody>
-      </p:sp>
-      <p:pic>
-        <p:nvPicPr>
-          <p:cNvPr id="3" name="Picture 2">
-            <a:extLst>
-              <a:ext uri="{FF2B5EF4-FFF2-40B4-BE49-F238E27FC236}">
-                <a16:creationId xmlns:a16="http://schemas.microsoft.com/office/drawing/2014/main" id="{9863C601-9BD1-3DD0-9219-97CD9BA5DC5A}"/>
-              </a:ext>
-            </a:extLst>
-          </p:cNvPr>
-          <p:cNvPicPr>
-            <a:picLocks noChangeAspect="1"/>
-          </p:cNvPicPr>
-          <p:nvPr/>
-        </p:nvPicPr>
-        <p:blipFill>
-          <a:blip r:embed="rId2" cstate="print">
-            <a:extLst>
-              <a:ext uri="{28A0092B-C50C-407E-A947-70E740481C1C}">
-                <a14:useLocalDpi xmlns:a14="http://schemas.microsoft.com/office/drawing/2010/main" val="0"/>
-              </a:ext>
-            </a:extLst>
-          </a:blip>
-          <a:stretch>
-            <a:fillRect/>
-          </a:stretch>
-        </p:blipFill>
-        <p:spPr>
-          <a:xfrm>
-            <a:off x="1934027" y="642219"/>
-            <a:ext cx="3889829" cy="5834743"/>
-          </a:xfrm>
-          <a:prstGeom prst="rect">
-            <a:avLst/>
-          </a:prstGeom>
-        </p:spPr>
-      </p:pic>
-    </p:spTree>
-    <p:extLst>
-      <p:ext uri="{BB962C8B-B14F-4D97-AF65-F5344CB8AC3E}">
-        <p14:creationId xmlns:p14="http://schemas.microsoft.com/office/powerpoint/2010/main" val="3439447642"/>
-      </p:ext>
-    </p:extLst>
-  </p:cSld>
-  <p:clrMapOvr>
-    <a:masterClrMapping/>
-  </p:clrMapOvr>
-</p:sld>
-</file>
-
 <file path=ppt/slides/slide4.xml><?xml version="1.0" encoding="utf-8"?>
 <p:sld xmlns:a="http://schemas.openxmlformats.org/drawingml/2006/main" xmlns:r="http://schemas.openxmlformats.org/officeDocument/2006/relationships" xmlns:p="http://schemas.openxmlformats.org/presentationml/2006/main">
   <p:cSld>
@@ -12236,7 +14165,7 @@
         <p:cNvPr id="1" name="">
           <a:extLst>
             <a:ext uri="{FF2B5EF4-FFF2-40B4-BE49-F238E27FC236}">
-              <a16:creationId xmlns:a16="http://schemas.microsoft.com/office/drawing/2014/main" id="{E5F23F1A-965B-E657-4F46-B48EB78CFF12}"/>
+              <a16:creationId xmlns:a16="http://schemas.microsoft.com/office/drawing/2014/main" xmlns="" id="{E5F23F1A-965B-E657-4F46-B48EB78CFF12}"/>
             </a:ext>
           </a:extLst>
         </p:cNvPr>
@@ -12256,7 +14185,7 @@
           <p:cNvPr id="2" name="Title 1">
             <a:extLst>
               <a:ext uri="{FF2B5EF4-FFF2-40B4-BE49-F238E27FC236}">
-                <a16:creationId xmlns:a16="http://schemas.microsoft.com/office/drawing/2014/main" id="{1D2CEC37-D651-72A5-0293-3FB911F60F37}"/>
+                <a16:creationId xmlns:a16="http://schemas.microsoft.com/office/drawing/2014/main" xmlns="" id="{1D2CEC37-D651-72A5-0293-3FB911F60F37}"/>
               </a:ext>
             </a:extLst>
           </p:cNvPr>
@@ -12284,7 +14213,7 @@
           <p:cNvPr id="7" name="Content Placeholder 2">
             <a:extLst>
               <a:ext uri="{FF2B5EF4-FFF2-40B4-BE49-F238E27FC236}">
-                <a16:creationId xmlns:a16="http://schemas.microsoft.com/office/drawing/2014/main" id="{B3C1A135-4B52-F54B-5BDE-7C6DA1069706}"/>
+                <a16:creationId xmlns:a16="http://schemas.microsoft.com/office/drawing/2014/main" xmlns="" id="{B3C1A135-4B52-F54B-5BDE-7C6DA1069706}"/>
               </a:ext>
             </a:extLst>
           </p:cNvPr>
@@ -12375,7 +14304,7 @@
           <p:cNvPr id="5" name="Grupo 4">
             <a:extLst>
               <a:ext uri="{FF2B5EF4-FFF2-40B4-BE49-F238E27FC236}">
-                <a16:creationId xmlns:a16="http://schemas.microsoft.com/office/drawing/2014/main" id="{FD3AFEA6-16E8-D562-210E-DDE126CC469D}"/>
+                <a16:creationId xmlns:a16="http://schemas.microsoft.com/office/drawing/2014/main" xmlns="" id="{FD3AFEA6-16E8-D562-210E-DDE126CC469D}"/>
               </a:ext>
             </a:extLst>
           </p:cNvPr>
@@ -12395,7 +14324,7 @@
             <p:cNvPr id="6" name="Picture 2" descr="K-Means Clustering using Python. Welcome back guys! Hope you had a great… |  by Luigi Fiori | Medium">
               <a:extLst>
                 <a:ext uri="{FF2B5EF4-FFF2-40B4-BE49-F238E27FC236}">
-                  <a16:creationId xmlns:a16="http://schemas.microsoft.com/office/drawing/2014/main" id="{5EE61C46-3856-780A-E6BB-BC8EBB4234F4}"/>
+                  <a16:creationId xmlns:a16="http://schemas.microsoft.com/office/drawing/2014/main" xmlns="" id="{5EE61C46-3856-780A-E6BB-BC8EBB4234F4}"/>
                 </a:ext>
               </a:extLst>
             </p:cNvPr>
@@ -12440,7 +14369,7 @@
             <p:cNvPr id="8" name="CaixaDeTexto 7">
               <a:extLst>
                 <a:ext uri="{FF2B5EF4-FFF2-40B4-BE49-F238E27FC236}">
-                  <a16:creationId xmlns:a16="http://schemas.microsoft.com/office/drawing/2014/main" id="{843AD3E7-A8FE-599D-36F8-EA8BA9682F1B}"/>
+                  <a16:creationId xmlns:a16="http://schemas.microsoft.com/office/drawing/2014/main" xmlns="" id="{843AD3E7-A8FE-599D-36F8-EA8BA9682F1B}"/>
                 </a:ext>
               </a:extLst>
             </p:cNvPr>
@@ -12477,7 +14406,7 @@
             <p:cNvPr id="9" name="Picture 2" descr="K-Means Clustering using Python. Welcome back guys! Hope you had a great… |  by Luigi Fiori | Medium">
               <a:extLst>
                 <a:ext uri="{FF2B5EF4-FFF2-40B4-BE49-F238E27FC236}">
-                  <a16:creationId xmlns:a16="http://schemas.microsoft.com/office/drawing/2014/main" id="{E7C74A0F-F2DD-912F-E092-3530D068D40B}"/>
+                  <a16:creationId xmlns:a16="http://schemas.microsoft.com/office/drawing/2014/main" xmlns="" id="{E7C74A0F-F2DD-912F-E092-3530D068D40B}"/>
                 </a:ext>
               </a:extLst>
             </p:cNvPr>
@@ -12522,7 +14451,7 @@
             <p:cNvPr id="10" name="Seta para a direita 9">
               <a:extLst>
                 <a:ext uri="{FF2B5EF4-FFF2-40B4-BE49-F238E27FC236}">
-                  <a16:creationId xmlns:a16="http://schemas.microsoft.com/office/drawing/2014/main" id="{88A77E2D-B8CF-1AE8-8196-DD8F94371FF0}"/>
+                  <a16:creationId xmlns:a16="http://schemas.microsoft.com/office/drawing/2014/main" xmlns="" id="{88A77E2D-B8CF-1AE8-8196-DD8F94371FF0}"/>
                 </a:ext>
               </a:extLst>
             </p:cNvPr>
@@ -13223,7 +15152,7 @@
           <p:cNvPr id="2" name="Title 1">
             <a:extLst>
               <a:ext uri="{FF2B5EF4-FFF2-40B4-BE49-F238E27FC236}">
-                <a16:creationId xmlns:a16="http://schemas.microsoft.com/office/drawing/2014/main" id="{536BFB42-0017-5ED1-7773-E084E5A015B7}"/>
+                <a16:creationId xmlns:a16="http://schemas.microsoft.com/office/drawing/2014/main" xmlns="" id="{536BFB42-0017-5ED1-7773-E084E5A015B7}"/>
               </a:ext>
             </a:extLst>
           </p:cNvPr>
@@ -13252,7 +15181,7 @@
           <p:cNvPr id="3" name="Content Placeholder 2">
             <a:extLst>
               <a:ext uri="{FF2B5EF4-FFF2-40B4-BE49-F238E27FC236}">
-                <a16:creationId xmlns:a16="http://schemas.microsoft.com/office/drawing/2014/main" id="{D299C266-04B6-6A8C-91F5-24FCD2CC3103}"/>
+                <a16:creationId xmlns:a16="http://schemas.microsoft.com/office/drawing/2014/main" xmlns="" id="{D299C266-04B6-6A8C-91F5-24FCD2CC3103}"/>
               </a:ext>
             </a:extLst>
           </p:cNvPr>
@@ -13422,7 +15351,7 @@
           <p:cNvPr id="5" name="Picture 2" descr="K-means clustering on the digits dataset (PCA-reduced data) Centroids are marked with white cross">
             <a:extLst>
               <a:ext uri="{FF2B5EF4-FFF2-40B4-BE49-F238E27FC236}">
-                <a16:creationId xmlns:a16="http://schemas.microsoft.com/office/drawing/2014/main" id="{A7524CD6-9254-ABD9-EBBF-94136AAAEDE9}"/>
+                <a16:creationId xmlns:a16="http://schemas.microsoft.com/office/drawing/2014/main" xmlns="" id="{A7524CD6-9254-ABD9-EBBF-94136AAAEDE9}"/>
               </a:ext>
             </a:extLst>
           </p:cNvPr>
@@ -13644,7 +15573,7 @@
           <p:cNvPr id="1028" name="Picture 4" descr="K Means Clustering no Aprendizado de Máquinas — Aprendizado de Máquina —  DATA SCIENCE">
             <a:extLst>
               <a:ext uri="{FF2B5EF4-FFF2-40B4-BE49-F238E27FC236}">
-                <a16:creationId xmlns:a16="http://schemas.microsoft.com/office/drawing/2014/main" id="{D99905E1-3749-BAAD-E01A-C9B3686C4770}"/>
+                <a16:creationId xmlns:a16="http://schemas.microsoft.com/office/drawing/2014/main" xmlns="" id="{D99905E1-3749-BAAD-E01A-C9B3686C4770}"/>
               </a:ext>
             </a:extLst>
           </p:cNvPr>

--- a/slides/C24_kMeans.pptx
+++ b/slides/C24_kMeans.pptx
@@ -5,7 +5,7 @@
     <p:sldMasterId id="2147483648" r:id="rId1"/>
   </p:sldMasterIdLst>
   <p:notesMasterIdLst>
-    <p:notesMasterId r:id="rId40"/>
+    <p:notesMasterId r:id="rId41"/>
   </p:notesMasterIdLst>
   <p:sldIdLst>
     <p:sldId id="256" r:id="rId2"/>
@@ -37,15 +37,16 @@
     <p:sldId id="410" r:id="rId28"/>
     <p:sldId id="292" r:id="rId29"/>
     <p:sldId id="299" r:id="rId30"/>
-    <p:sldId id="411" r:id="rId31"/>
-    <p:sldId id="293" r:id="rId32"/>
-    <p:sldId id="300" r:id="rId33"/>
-    <p:sldId id="398" r:id="rId34"/>
-    <p:sldId id="338" r:id="rId35"/>
-    <p:sldId id="395" r:id="rId36"/>
-    <p:sldId id="396" r:id="rId37"/>
-    <p:sldId id="306" r:id="rId38"/>
-    <p:sldId id="265" r:id="rId39"/>
+    <p:sldId id="412" r:id="rId31"/>
+    <p:sldId id="411" r:id="rId32"/>
+    <p:sldId id="293" r:id="rId33"/>
+    <p:sldId id="300" r:id="rId34"/>
+    <p:sldId id="398" r:id="rId35"/>
+    <p:sldId id="338" r:id="rId36"/>
+    <p:sldId id="395" r:id="rId37"/>
+    <p:sldId id="396" r:id="rId38"/>
+    <p:sldId id="306" r:id="rId39"/>
+    <p:sldId id="265" r:id="rId40"/>
   </p:sldIdLst>
   <p:sldSz cx="12192000" cy="6858000"/>
   <p:notesSz cx="6858000" cy="9144000"/>
@@ -234,7 +235,7 @@
           <a:p>
             <a:fld id="{C3C82C08-3EFC-4473-8294-F0E229C19EFF}" type="datetimeFigureOut">
               <a:rPr lang="pt-BR" smtClean="0"/>
-              <a:t>05/04/2026</a:t>
+              <a:t>08/04/2026</a:t>
             </a:fld>
             <a:endParaRPr lang="pt-BR"/>
           </a:p>
@@ -662,7 +663,7 @@
           <a:p>
             <a:fld id="{F430A2A4-8C14-4B1A-AD48-7B6401078BF7}" type="slidenum">
               <a:rPr lang="pt-BR" smtClean="0"/>
-              <a:t>30</a:t>
+              <a:t>31</a:t>
             </a:fld>
             <a:endParaRPr lang="pt-BR"/>
           </a:p>
@@ -1353,7 +1354,7 @@
           <a:p>
             <a:fld id="{F430A2A4-8C14-4B1A-AD48-7B6401078BF7}" type="slidenum">
               <a:rPr lang="pt-BR" smtClean="0"/>
-              <a:t>31</a:t>
+              <a:t>32</a:t>
             </a:fld>
             <a:endParaRPr lang="pt-BR"/>
           </a:p>
@@ -1434,7 +1435,7 @@
                 <a:hlinkClick r:id="rId3">
                   <a:extLst>
                     <a:ext uri="{A12FA001-AC4F-418D-AE19-62706E023703}">
-                      <ahyp:hlinkClr xmlns:ahyp="http://schemas.microsoft.com/office/drawing/2018/hyperlinkcolor" xmlns="" val="tx"/>
+                      <ahyp:hlinkClr xmlns="" xmlns:ahyp="http://schemas.microsoft.com/office/drawing/2018/hyperlinkcolor" val="tx"/>
                     </a:ext>
                   </a:extLst>
                 </a:hlinkClick>
@@ -1464,7 +1465,7 @@
           <a:p>
             <a:fld id="{6FC8D850-966F-45A6-8DE7-15B891E7D40D}" type="slidenum">
               <a:rPr lang="pt-BR" smtClean="0"/>
-              <a:t>34</a:t>
+              <a:t>35</a:t>
             </a:fld>
             <a:endParaRPr lang="pt-BR"/>
           </a:p>
@@ -1592,7 +1593,7 @@
         <p:cNvPr id="1" name="">
           <a:extLst>
             <a:ext uri="{FF2B5EF4-FFF2-40B4-BE49-F238E27FC236}">
-              <a16:creationId xmlns:a16="http://schemas.microsoft.com/office/drawing/2014/main" xmlns="" id="{BFE637E2-97BB-CFD3-DBB7-5EC561A4F1C5}"/>
+              <a16:creationId xmlns="" xmlns:a16="http://schemas.microsoft.com/office/drawing/2014/main" id="{BFE637E2-97BB-CFD3-DBB7-5EC561A4F1C5}"/>
             </a:ext>
           </a:extLst>
         </p:cNvPr>
@@ -1612,7 +1613,7 @@
           <p:cNvPr id="2" name="Slide Image Placeholder 1">
             <a:extLst>
               <a:ext uri="{FF2B5EF4-FFF2-40B4-BE49-F238E27FC236}">
-                <a16:creationId xmlns:a16="http://schemas.microsoft.com/office/drawing/2014/main" xmlns="" id="{4ED7BD22-361E-0DCE-46D8-42A9C128E592}"/>
+                <a16:creationId xmlns="" xmlns:a16="http://schemas.microsoft.com/office/drawing/2014/main" id="{4ED7BD22-361E-0DCE-46D8-42A9C128E592}"/>
               </a:ext>
             </a:extLst>
           </p:cNvPr>
@@ -1630,7 +1631,7 @@
           <p:cNvPr id="3" name="Notes Placeholder 2">
             <a:extLst>
               <a:ext uri="{FF2B5EF4-FFF2-40B4-BE49-F238E27FC236}">
-                <a16:creationId xmlns:a16="http://schemas.microsoft.com/office/drawing/2014/main" xmlns="" id="{A845AE5E-1008-C289-F444-04515B31A21D}"/>
+                <a16:creationId xmlns="" xmlns:a16="http://schemas.microsoft.com/office/drawing/2014/main" id="{A845AE5E-1008-C289-F444-04515B31A21D}"/>
               </a:ext>
             </a:extLst>
           </p:cNvPr>
@@ -1708,7 +1709,7 @@
           <p:cNvPr id="4" name="Slide Number Placeholder 3">
             <a:extLst>
               <a:ext uri="{FF2B5EF4-FFF2-40B4-BE49-F238E27FC236}">
-                <a16:creationId xmlns:a16="http://schemas.microsoft.com/office/drawing/2014/main" xmlns="" id="{64C5BAB2-4C6F-96F0-D4ED-0C66FFB4872B}"/>
+                <a16:creationId xmlns="" xmlns:a16="http://schemas.microsoft.com/office/drawing/2014/main" id="{64C5BAB2-4C6F-96F0-D4ED-0C66FFB4872B}"/>
               </a:ext>
             </a:extLst>
           </p:cNvPr>
@@ -2721,7 +2722,7 @@
         <p:cNvPr id="1" name="">
           <a:extLst>
             <a:ext uri="{FF2B5EF4-FFF2-40B4-BE49-F238E27FC236}">
-              <a16:creationId xmlns:a16="http://schemas.microsoft.com/office/drawing/2014/main" xmlns="" id="{D98F69D2-AA2F-1FAB-FC58-E17B9F051FEC}"/>
+              <a16:creationId xmlns="" xmlns:a16="http://schemas.microsoft.com/office/drawing/2014/main" id="{D98F69D2-AA2F-1FAB-FC58-E17B9F051FEC}"/>
             </a:ext>
           </a:extLst>
         </p:cNvPr>
@@ -2741,7 +2742,7 @@
           <p:cNvPr id="2" name="Espaço Reservado para Imagem de Slide 1">
             <a:extLst>
               <a:ext uri="{FF2B5EF4-FFF2-40B4-BE49-F238E27FC236}">
-                <a16:creationId xmlns:a16="http://schemas.microsoft.com/office/drawing/2014/main" xmlns="" id="{BFA38404-D7C9-03F2-A7E5-10C0EFC8F190}"/>
+                <a16:creationId xmlns="" xmlns:a16="http://schemas.microsoft.com/office/drawing/2014/main" id="{BFA38404-D7C9-03F2-A7E5-10C0EFC8F190}"/>
               </a:ext>
             </a:extLst>
           </p:cNvPr>
@@ -2759,7 +2760,7 @@
           <p:cNvPr id="3" name="Espaço Reservado para Anotações 2">
             <a:extLst>
               <a:ext uri="{FF2B5EF4-FFF2-40B4-BE49-F238E27FC236}">
-                <a16:creationId xmlns:a16="http://schemas.microsoft.com/office/drawing/2014/main" xmlns="" id="{5A8313F1-5D52-52B4-46D0-20D6D6D5149A}"/>
+                <a16:creationId xmlns="" xmlns:a16="http://schemas.microsoft.com/office/drawing/2014/main" id="{5A8313F1-5D52-52B4-46D0-20D6D6D5149A}"/>
               </a:ext>
             </a:extLst>
           </p:cNvPr>
@@ -2877,7 +2878,7 @@
           <p:cNvPr id="4" name="Espaço Reservado para Número de Slide 3">
             <a:extLst>
               <a:ext uri="{FF2B5EF4-FFF2-40B4-BE49-F238E27FC236}">
-                <a16:creationId xmlns:a16="http://schemas.microsoft.com/office/drawing/2014/main" xmlns="" id="{428A95A6-CC49-168A-C37A-1C6EB3B93225}"/>
+                <a16:creationId xmlns="" xmlns:a16="http://schemas.microsoft.com/office/drawing/2014/main" id="{428A95A6-CC49-168A-C37A-1C6EB3B93225}"/>
               </a:ext>
             </a:extLst>
           </p:cNvPr>
@@ -3499,7 +3500,7 @@
           <a:p>
             <a:fld id="{221D0464-8C8A-49C0-859F-777E51766A35}" type="datetimeFigureOut">
               <a:rPr lang="pt-BR" smtClean="0"/>
-              <a:t>05/04/2026</a:t>
+              <a:t>08/04/2026</a:t>
             </a:fld>
             <a:endParaRPr lang="pt-BR"/>
           </a:p>
@@ -3669,7 +3670,7 @@
           <a:p>
             <a:fld id="{221D0464-8C8A-49C0-859F-777E51766A35}" type="datetimeFigureOut">
               <a:rPr lang="pt-BR" smtClean="0"/>
-              <a:t>05/04/2026</a:t>
+              <a:t>08/04/2026</a:t>
             </a:fld>
             <a:endParaRPr lang="pt-BR"/>
           </a:p>
@@ -3849,7 +3850,7 @@
           <a:p>
             <a:fld id="{221D0464-8C8A-49C0-859F-777E51766A35}" type="datetimeFigureOut">
               <a:rPr lang="pt-BR" smtClean="0"/>
-              <a:t>05/04/2026</a:t>
+              <a:t>08/04/2026</a:t>
             </a:fld>
             <a:endParaRPr lang="pt-BR"/>
           </a:p>
@@ -4019,7 +4020,7 @@
           <a:p>
             <a:fld id="{221D0464-8C8A-49C0-859F-777E51766A35}" type="datetimeFigureOut">
               <a:rPr lang="pt-BR" smtClean="0"/>
-              <a:t>05/04/2026</a:t>
+              <a:t>08/04/2026</a:t>
             </a:fld>
             <a:endParaRPr lang="pt-BR"/>
           </a:p>
@@ -4265,7 +4266,7 @@
           <a:p>
             <a:fld id="{221D0464-8C8A-49C0-859F-777E51766A35}" type="datetimeFigureOut">
               <a:rPr lang="pt-BR" smtClean="0"/>
-              <a:t>05/04/2026</a:t>
+              <a:t>08/04/2026</a:t>
             </a:fld>
             <a:endParaRPr lang="pt-BR"/>
           </a:p>
@@ -4497,7 +4498,7 @@
           <a:p>
             <a:fld id="{221D0464-8C8A-49C0-859F-777E51766A35}" type="datetimeFigureOut">
               <a:rPr lang="pt-BR" smtClean="0"/>
-              <a:t>05/04/2026</a:t>
+              <a:t>08/04/2026</a:t>
             </a:fld>
             <a:endParaRPr lang="pt-BR"/>
           </a:p>
@@ -4864,7 +4865,7 @@
           <a:p>
             <a:fld id="{221D0464-8C8A-49C0-859F-777E51766A35}" type="datetimeFigureOut">
               <a:rPr lang="pt-BR" smtClean="0"/>
-              <a:t>05/04/2026</a:t>
+              <a:t>08/04/2026</a:t>
             </a:fld>
             <a:endParaRPr lang="pt-BR"/>
           </a:p>
@@ -4982,7 +4983,7 @@
           <a:p>
             <a:fld id="{221D0464-8C8A-49C0-859F-777E51766A35}" type="datetimeFigureOut">
               <a:rPr lang="pt-BR" smtClean="0"/>
-              <a:t>05/04/2026</a:t>
+              <a:t>08/04/2026</a:t>
             </a:fld>
             <a:endParaRPr lang="pt-BR"/>
           </a:p>
@@ -5077,7 +5078,7 @@
           <a:p>
             <a:fld id="{221D0464-8C8A-49C0-859F-777E51766A35}" type="datetimeFigureOut">
               <a:rPr lang="pt-BR" smtClean="0"/>
-              <a:t>05/04/2026</a:t>
+              <a:t>08/04/2026</a:t>
             </a:fld>
             <a:endParaRPr lang="pt-BR"/>
           </a:p>
@@ -5354,7 +5355,7 @@
           <a:p>
             <a:fld id="{221D0464-8C8A-49C0-859F-777E51766A35}" type="datetimeFigureOut">
               <a:rPr lang="pt-BR" smtClean="0"/>
-              <a:t>05/04/2026</a:t>
+              <a:t>08/04/2026</a:t>
             </a:fld>
             <a:endParaRPr lang="pt-BR"/>
           </a:p>
@@ -5607,7 +5608,7 @@
           <a:p>
             <a:fld id="{221D0464-8C8A-49C0-859F-777E51766A35}" type="datetimeFigureOut">
               <a:rPr lang="pt-BR" smtClean="0"/>
-              <a:t>05/04/2026</a:t>
+              <a:t>08/04/2026</a:t>
             </a:fld>
             <a:endParaRPr lang="pt-BR"/>
           </a:p>
@@ -5820,7 +5821,7 @@
           <a:p>
             <a:fld id="{221D0464-8C8A-49C0-859F-777E51766A35}" type="datetimeFigureOut">
               <a:rPr lang="pt-BR" smtClean="0"/>
-              <a:t>05/04/2026</a:t>
+              <a:t>08/04/2026</a:t>
             </a:fld>
             <a:endParaRPr lang="pt-BR"/>
           </a:p>
@@ -6230,7 +6231,7 @@
           <p:cNvPr id="4" name="CaixaDeTexto 3">
             <a:extLst>
               <a:ext uri="{FF2B5EF4-FFF2-40B4-BE49-F238E27FC236}">
-                <a16:creationId xmlns:a16="http://schemas.microsoft.com/office/drawing/2014/main" xmlns="" id="{430EB894-B7D4-434C-9D1A-A14094D9BEEC}"/>
+                <a16:creationId xmlns="" xmlns:a16="http://schemas.microsoft.com/office/drawing/2014/main" id="{430EB894-B7D4-434C-9D1A-A14094D9BEEC}"/>
               </a:ext>
             </a:extLst>
           </p:cNvPr>
@@ -6274,7 +6275,7 @@
           <p:cNvPr id="1026" name="Picture 2" descr="Logo">
             <a:extLst>
               <a:ext uri="{FF2B5EF4-FFF2-40B4-BE49-F238E27FC236}">
-                <a16:creationId xmlns:a16="http://schemas.microsoft.com/office/drawing/2014/main" xmlns="" id="{3F2642E0-4F6A-4196-8F58-E77D36E9A33F}"/>
+                <a16:creationId xmlns="" xmlns:a16="http://schemas.microsoft.com/office/drawing/2014/main" id="{3F2642E0-4F6A-4196-8F58-E77D36E9A33F}"/>
               </a:ext>
             </a:extLst>
           </p:cNvPr>
@@ -6319,7 +6320,7 @@
           <p:cNvPr id="5122" name="Picture 2" descr="Image result for machine learning">
             <a:extLst>
               <a:ext uri="{FF2B5EF4-FFF2-40B4-BE49-F238E27FC236}">
-                <a16:creationId xmlns:a16="http://schemas.microsoft.com/office/drawing/2014/main" xmlns="" id="{810CE0A2-4102-44A6-A370-175E7896CDCB}"/>
+                <a16:creationId xmlns="" xmlns:a16="http://schemas.microsoft.com/office/drawing/2014/main" id="{810CE0A2-4102-44A6-A370-175E7896CDCB}"/>
               </a:ext>
             </a:extLst>
           </p:cNvPr>
@@ -6364,7 +6365,7 @@
           <p:cNvPr id="7" name="Título 1">
             <a:extLst>
               <a:ext uri="{FF2B5EF4-FFF2-40B4-BE49-F238E27FC236}">
-                <a16:creationId xmlns:a16="http://schemas.microsoft.com/office/drawing/2014/main" xmlns="" id="{32666AC8-2E17-4DB4-B0F5-60C640CCFD2E}"/>
+                <a16:creationId xmlns="" xmlns:a16="http://schemas.microsoft.com/office/drawing/2014/main" id="{32666AC8-2E17-4DB4-B0F5-60C640CCFD2E}"/>
               </a:ext>
             </a:extLst>
           </p:cNvPr>
@@ -6445,7 +6446,7 @@
           <p:cNvPr id="2" name="Title 1">
             <a:extLst>
               <a:ext uri="{FF2B5EF4-FFF2-40B4-BE49-F238E27FC236}">
-                <a16:creationId xmlns:a16="http://schemas.microsoft.com/office/drawing/2014/main" xmlns="" id="{FFE84507-EC77-45EC-8B3A-27BFC439AB0A}"/>
+                <a16:creationId xmlns="" xmlns:a16="http://schemas.microsoft.com/office/drawing/2014/main" id="{FFE84507-EC77-45EC-8B3A-27BFC439AB0A}"/>
               </a:ext>
             </a:extLst>
           </p:cNvPr>
@@ -6474,7 +6475,7 @@
           <p:cNvPr id="3" name="Content Placeholder 2">
             <a:extLst>
               <a:ext uri="{FF2B5EF4-FFF2-40B4-BE49-F238E27FC236}">
-                <a16:creationId xmlns:a16="http://schemas.microsoft.com/office/drawing/2014/main" xmlns="" id="{04FEB374-1415-DA51-E59A-B5E50D17F763}"/>
+                <a16:creationId xmlns="" xmlns:a16="http://schemas.microsoft.com/office/drawing/2014/main" id="{04FEB374-1415-DA51-E59A-B5E50D17F763}"/>
               </a:ext>
             </a:extLst>
           </p:cNvPr>
@@ -6727,7 +6728,7 @@
         <p:cNvPr id="1" name="">
           <a:extLst>
             <a:ext uri="{FF2B5EF4-FFF2-40B4-BE49-F238E27FC236}">
-              <a16:creationId xmlns:a16="http://schemas.microsoft.com/office/drawing/2014/main" xmlns="" id="{5B00F73A-8390-7530-E708-9D3EBFB35B37}"/>
+              <a16:creationId xmlns="" xmlns:a16="http://schemas.microsoft.com/office/drawing/2014/main" id="{5B00F73A-8390-7530-E708-9D3EBFB35B37}"/>
             </a:ext>
           </a:extLst>
         </p:cNvPr>
@@ -6747,7 +6748,7 @@
           <p:cNvPr id="2" name="Título 1">
             <a:extLst>
               <a:ext uri="{FF2B5EF4-FFF2-40B4-BE49-F238E27FC236}">
-                <a16:creationId xmlns:a16="http://schemas.microsoft.com/office/drawing/2014/main" xmlns="" id="{A7779880-5E02-1DB8-EA94-C86330794A8C}"/>
+                <a16:creationId xmlns="" xmlns:a16="http://schemas.microsoft.com/office/drawing/2014/main" id="{A7779880-5E02-1DB8-EA94-C86330794A8C}"/>
               </a:ext>
             </a:extLst>
           </p:cNvPr>
@@ -6794,14 +6795,14 @@
           </a:p>
         </p:txBody>
       </p:sp>
-      <mc:AlternateContent xmlns:mc="http://schemas.openxmlformats.org/markup-compatibility/2006">
-        <mc:Choice xmlns:a14="http://schemas.microsoft.com/office/drawing/2010/main" Requires="a14">
+      <mc:AlternateContent xmlns:mc="http://schemas.openxmlformats.org/markup-compatibility/2006" xmlns:a14="http://schemas.microsoft.com/office/drawing/2010/main">
+        <mc:Choice Requires="a14">
           <p:sp>
             <p:nvSpPr>
               <p:cNvPr id="3" name="Espaço Reservado para Conteúdo 2">
                 <a:extLst>
                   <a:ext uri="{FF2B5EF4-FFF2-40B4-BE49-F238E27FC236}">
-                    <a16:creationId xmlns:a16="http://schemas.microsoft.com/office/drawing/2014/main" xmlns="" id="{A72472E5-6211-3EFD-BA89-06782640C939}"/>
+                    <a16:creationId xmlns="" xmlns:a16="http://schemas.microsoft.com/office/drawing/2014/main" id="{A72472E5-6211-3EFD-BA89-06782640C939}"/>
                   </a:ext>
                 </a:extLst>
               </p:cNvPr>
@@ -7114,7 +7115,7 @@
             </p:txBody>
           </p:sp>
         </mc:Choice>
-        <mc:Fallback>
+        <mc:Fallback xmlns="">
           <p:sp>
             <p:nvSpPr>
               <p:cNvPr id="3" name="Espaço Reservado para Conteúdo 2">
@@ -7163,7 +7164,7 @@
           <p:cNvPr id="4" name="Picture 3" descr="K Means Clustering no Aprendizado de Máquinas — Aprendizado de Máquina —  DATA SCIENCE">
             <a:extLst>
               <a:ext uri="{FF2B5EF4-FFF2-40B4-BE49-F238E27FC236}">
-                <a16:creationId xmlns:a16="http://schemas.microsoft.com/office/drawing/2014/main" xmlns="" id="{E728BEA3-C89C-08D5-CE28-8BD1C00DAD53}"/>
+                <a16:creationId xmlns="" xmlns:a16="http://schemas.microsoft.com/office/drawing/2014/main" id="{E728BEA3-C89C-08D5-CE28-8BD1C00DAD53}"/>
               </a:ext>
             </a:extLst>
           </p:cNvPr>
@@ -7238,7 +7239,7 @@
           <p:cNvPr id="2" name="Title 1">
             <a:extLst>
               <a:ext uri="{FF2B5EF4-FFF2-40B4-BE49-F238E27FC236}">
-                <a16:creationId xmlns:a16="http://schemas.microsoft.com/office/drawing/2014/main" xmlns="" id="{D87F6E31-B0DF-F3EC-D348-0D4E93DD1974}"/>
+                <a16:creationId xmlns="" xmlns:a16="http://schemas.microsoft.com/office/drawing/2014/main" id="{D87F6E31-B0DF-F3EC-D348-0D4E93DD1974}"/>
               </a:ext>
             </a:extLst>
           </p:cNvPr>
@@ -7263,7 +7264,7 @@
           <p:cNvPr id="3" name="Content Placeholder 2">
             <a:extLst>
               <a:ext uri="{FF2B5EF4-FFF2-40B4-BE49-F238E27FC236}">
-                <a16:creationId xmlns:a16="http://schemas.microsoft.com/office/drawing/2014/main" xmlns="" id="{5007CCEC-CA32-01B4-A9B5-F81A83FF3ECA}"/>
+                <a16:creationId xmlns="" xmlns:a16="http://schemas.microsoft.com/office/drawing/2014/main" id="{5007CCEC-CA32-01B4-A9B5-F81A83FF3ECA}"/>
               </a:ext>
             </a:extLst>
           </p:cNvPr>
@@ -7521,15 +7522,15 @@
               <a:t>estar relativamente </a:t>
             </a:r>
             <a:r>
-              <a:rPr lang="pt-BR" b="1" dirty="0">
+              <a:rPr lang="pt-BR" b="1" dirty="0" smtClean="0">
                 <a:solidFill>
                   <a:srgbClr val="0070C0"/>
                 </a:solidFill>
               </a:rPr>
-              <a:t>próximos</a:t>
-            </a:r>
-            <a:r>
-              <a:rPr lang="pt-BR" dirty="0"/>
+              <a:t>próximas</a:t>
+            </a:r>
+            <a:r>
+              <a:rPr lang="pt-BR" dirty="0" smtClean="0"/>
               <a:t> </a:t>
             </a:r>
             <a:r>
@@ -7581,7 +7582,7 @@
               <a:t>clusters</a:t>
             </a:r>
             <a:r>
-              <a:rPr lang="pt-BR" dirty="0"/>
+              <a:rPr lang="pt-BR" dirty="0" smtClean="0"/>
               <a:t>.</a:t>
             </a:r>
           </a:p>
@@ -7602,16 +7603,13 @@
             </a:r>
             <a:r>
               <a:rPr lang="pt-BR" dirty="0"/>
-              <a:t> um conjunto de </a:t>
+              <a:t> um conjunto de dados contém</a:t>
             </a:r>
             <a:r>
               <a:rPr lang="pt-BR" dirty="0" smtClean="0"/>
-              <a:t>dados contém</a:t>
-            </a:r>
-            <a:r>
-              <a:rPr lang="pt-BR" dirty="0"/>
               <a:t>?</a:t>
             </a:r>
+            <a:endParaRPr lang="pt-BR" dirty="0"/>
           </a:p>
         </p:txBody>
       </p:sp>
@@ -7675,7 +7673,7 @@
         <p:cNvPr id="1" name="">
           <a:extLst>
             <a:ext uri="{FF2B5EF4-FFF2-40B4-BE49-F238E27FC236}">
-              <a16:creationId xmlns:a16="http://schemas.microsoft.com/office/drawing/2014/main" xmlns="" id="{36D1FDFF-84F9-A395-CDB0-AC77470C24F7}"/>
+              <a16:creationId xmlns="" xmlns:a16="http://schemas.microsoft.com/office/drawing/2014/main" id="{36D1FDFF-84F9-A395-CDB0-AC77470C24F7}"/>
             </a:ext>
           </a:extLst>
         </p:cNvPr>
@@ -7695,7 +7693,7 @@
           <p:cNvPr id="2" name="Título 1">
             <a:extLst>
               <a:ext uri="{FF2B5EF4-FFF2-40B4-BE49-F238E27FC236}">
-                <a16:creationId xmlns:a16="http://schemas.microsoft.com/office/drawing/2014/main" xmlns="" id="{CA82907A-6417-D3C2-265A-0FFD53046E99}"/>
+                <a16:creationId xmlns="" xmlns:a16="http://schemas.microsoft.com/office/drawing/2014/main" id="{CA82907A-6417-D3C2-265A-0FFD53046E99}"/>
               </a:ext>
             </a:extLst>
           </p:cNvPr>
@@ -7732,7 +7730,7 @@
           <p:cNvPr id="3" name="Espaço Reservado para Conteúdo 2">
             <a:extLst>
               <a:ext uri="{FF2B5EF4-FFF2-40B4-BE49-F238E27FC236}">
-                <a16:creationId xmlns:a16="http://schemas.microsoft.com/office/drawing/2014/main" xmlns="" id="{3C767761-7363-3966-1F66-B32029649DCD}"/>
+                <a16:creationId xmlns="" xmlns:a16="http://schemas.microsoft.com/office/drawing/2014/main" id="{3C767761-7363-3966-1F66-B32029649DCD}"/>
               </a:ext>
             </a:extLst>
           </p:cNvPr>
@@ -7798,7 +7796,7 @@
           <p:cNvPr id="5" name="Picture 2" descr="K-Means Clustering using Python. Welcome back guys! Hope you had a great… |  by Luigi Fiori | Medium">
             <a:extLst>
               <a:ext uri="{FF2B5EF4-FFF2-40B4-BE49-F238E27FC236}">
-                <a16:creationId xmlns:a16="http://schemas.microsoft.com/office/drawing/2014/main" xmlns="" id="{079377DD-55D2-BED3-3BB3-D573A6F13921}"/>
+                <a16:creationId xmlns="" xmlns:a16="http://schemas.microsoft.com/office/drawing/2014/main" id="{079377DD-55D2-BED3-3BB3-D573A6F13921}"/>
               </a:ext>
             </a:extLst>
           </p:cNvPr>
@@ -7859,7 +7857,7 @@
         <p:cNvPr id="1" name="">
           <a:extLst>
             <a:ext uri="{FF2B5EF4-FFF2-40B4-BE49-F238E27FC236}">
-              <a16:creationId xmlns:a16="http://schemas.microsoft.com/office/drawing/2014/main" xmlns="" id="{36D1FDFF-84F9-A395-CDB0-AC77470C24F7}"/>
+              <a16:creationId xmlns="" xmlns:a16="http://schemas.microsoft.com/office/drawing/2014/main" id="{36D1FDFF-84F9-A395-CDB0-AC77470C24F7}"/>
             </a:ext>
           </a:extLst>
         </p:cNvPr>
@@ -7879,7 +7877,7 @@
           <p:cNvPr id="2" name="Título 1">
             <a:extLst>
               <a:ext uri="{FF2B5EF4-FFF2-40B4-BE49-F238E27FC236}">
-                <a16:creationId xmlns:a16="http://schemas.microsoft.com/office/drawing/2014/main" xmlns="" id="{CA82907A-6417-D3C2-265A-0FFD53046E99}"/>
+                <a16:creationId xmlns="" xmlns:a16="http://schemas.microsoft.com/office/drawing/2014/main" id="{CA82907A-6417-D3C2-265A-0FFD53046E99}"/>
               </a:ext>
             </a:extLst>
           </p:cNvPr>
@@ -7911,78 +7909,164 @@
           </a:p>
         </p:txBody>
       </p:sp>
-      <p:sp>
-        <p:nvSpPr>
-          <p:cNvPr id="3" name="Espaço Reservado para Conteúdo 2">
-            <a:extLst>
-              <a:ext uri="{FF2B5EF4-FFF2-40B4-BE49-F238E27FC236}">
-                <a16:creationId xmlns:a16="http://schemas.microsoft.com/office/drawing/2014/main" xmlns="" id="{3C767761-7363-3966-1F66-B32029649DCD}"/>
-              </a:ext>
-            </a:extLst>
-          </p:cNvPr>
-          <p:cNvSpPr>
-            <a:spLocks noGrp="1"/>
-          </p:cNvSpPr>
-          <p:nvPr>
-            <p:ph idx="1"/>
-          </p:nvPr>
-        </p:nvSpPr>
-        <p:spPr>
-          <a:xfrm>
-            <a:off x="4942114" y="1690688"/>
-            <a:ext cx="7121731" cy="5167311"/>
-          </a:xfrm>
-        </p:spPr>
-        <p:txBody>
-          <a:bodyPr>
-            <a:normAutofit/>
-          </a:bodyPr>
-          <a:lstStyle/>
-          <a:p>
-            <a:r>
-              <a:rPr lang="pt-BR" b="1" dirty="0">
-                <a:solidFill>
-                  <a:srgbClr val="7030A0"/>
-                </a:solidFill>
-              </a:rPr>
-              <a:t>Implementações</a:t>
-            </a:r>
-            <a:r>
-              <a:rPr lang="pt-BR" dirty="0"/>
-              <a:t> práticas geralmente evitam esse problema pedindo ao </a:t>
-            </a:r>
-            <a:r>
-              <a:rPr lang="pt-BR" b="1" dirty="0">
-                <a:solidFill>
-                  <a:srgbClr val="7030A0"/>
-                </a:solidFill>
-              </a:rPr>
-              <a:t>usuário que forneça o número de </a:t>
-            </a:r>
-            <a:r>
-              <a:rPr lang="pt-BR" b="1" i="1" dirty="0">
-                <a:solidFill>
-                  <a:srgbClr val="7030A0"/>
-                </a:solidFill>
-              </a:rPr>
-              <a:t>clusters</a:t>
-            </a:r>
-            <a:r>
-              <a:rPr lang="pt-BR" dirty="0"/>
-              <a:t>.</a:t>
-            </a:r>
-          </a:p>
-          <a:p>
-            <a:endParaRPr lang="pt-BR" dirty="0"/>
-          </a:p>
-        </p:txBody>
-      </p:sp>
+      <mc:AlternateContent xmlns:mc="http://schemas.openxmlformats.org/markup-compatibility/2006">
+        <mc:Choice xmlns:a14="http://schemas.microsoft.com/office/drawing/2010/main" Requires="a14">
+          <p:sp>
+            <p:nvSpPr>
+              <p:cNvPr id="3" name="Espaço Reservado para Conteúdo 2">
+                <a:extLst>
+                  <a:ext uri="{FF2B5EF4-FFF2-40B4-BE49-F238E27FC236}">
+                    <a16:creationId xmlns="" xmlns:a16="http://schemas.microsoft.com/office/drawing/2014/main" id="{3C767761-7363-3966-1F66-B32029649DCD}"/>
+                  </a:ext>
+                </a:extLst>
+              </p:cNvPr>
+              <p:cNvSpPr>
+                <a:spLocks noGrp="1"/>
+              </p:cNvSpPr>
+              <p:nvPr>
+                <p:ph idx="1"/>
+              </p:nvPr>
+            </p:nvSpPr>
+            <p:spPr>
+              <a:xfrm>
+                <a:off x="5181600" y="1690688"/>
+                <a:ext cx="6882245" cy="5167311"/>
+              </a:xfrm>
+            </p:spPr>
+            <p:txBody>
+              <a:bodyPr>
+                <a:normAutofit/>
+              </a:bodyPr>
+              <a:lstStyle/>
+              <a:p>
+                <a:r>
+                  <a:rPr lang="pt-BR" b="1" dirty="0" smtClean="0">
+                    <a:solidFill>
+                      <a:srgbClr val="7030A0"/>
+                    </a:solidFill>
+                  </a:rPr>
+                  <a:t>Implementações</a:t>
+                </a:r>
+                <a:r>
+                  <a:rPr lang="pt-BR" dirty="0"/>
+                  <a:t> práticas geralmente evitam esse problema pedindo ao </a:t>
+                </a:r>
+                <a:r>
+                  <a:rPr lang="pt-BR" b="1" dirty="0">
+                    <a:solidFill>
+                      <a:srgbClr val="7030A0"/>
+                    </a:solidFill>
+                  </a:rPr>
+                  <a:t>usuário que forneça o número de </a:t>
+                </a:r>
+                <a:r>
+                  <a:rPr lang="pt-BR" b="1" i="1" dirty="0">
+                    <a:solidFill>
+                      <a:srgbClr val="7030A0"/>
+                    </a:solidFill>
+                  </a:rPr>
+                  <a:t>clusters</a:t>
+                </a:r>
+                <a:r>
+                  <a:rPr lang="pt-BR" dirty="0" smtClean="0"/>
+                  <a:t>.</a:t>
+                </a:r>
+              </a:p>
+              <a:p>
+                <a:r>
+                  <a:rPr lang="pt-BR" dirty="0" smtClean="0"/>
+                  <a:t>Existem diversos métodos para otimizar o </a:t>
+                </a:r>
+                <a:r>
+                  <a:rPr lang="pt-BR" dirty="0" err="1" smtClean="0"/>
+                  <a:t>hiperparâmetro</a:t>
+                </a:r>
+                <a:r>
+                  <a:rPr lang="pt-BR" dirty="0" smtClean="0"/>
+                  <a:t> </a:t>
+                </a:r>
+                <a14:m>
+                  <m:oMath xmlns:m="http://schemas.openxmlformats.org/officeDocument/2006/math">
+                    <m:r>
+                      <a:rPr lang="pt-BR" b="0" i="1" smtClean="0">
+                        <a:latin typeface="Cambria Math" panose="02040503050406030204" pitchFamily="18" charset="0"/>
+                      </a:rPr>
+                      <m:t>𝑘</m:t>
+                    </m:r>
+                  </m:oMath>
+                </a14:m>
+                <a:r>
+                  <a:rPr lang="pt-BR" dirty="0" smtClean="0"/>
+                  <a:t>, dentre eles, o mais usado é o método do cotovelo.</a:t>
+                </a:r>
+              </a:p>
+              <a:p>
+                <a:r>
+                  <a:rPr lang="pt-BR" dirty="0" smtClean="0"/>
+                  <a:t>Veremos como ele funciona </a:t>
+                </a:r>
+                <a:r>
+                  <a:rPr lang="pt-BR" smtClean="0"/>
+                  <a:t>em breve.</a:t>
+                </a:r>
+                <a:endParaRPr lang="pt-BR" dirty="0"/>
+              </a:p>
+              <a:p>
+                <a:endParaRPr lang="pt-BR" dirty="0"/>
+              </a:p>
+            </p:txBody>
+          </p:sp>
+        </mc:Choice>
+        <mc:Fallback>
+          <p:sp>
+            <p:nvSpPr>
+              <p:cNvPr id="3" name="Espaço Reservado para Conteúdo 2">
+                <a:extLst>
+                  <a:ext uri="{FF2B5EF4-FFF2-40B4-BE49-F238E27FC236}">
+                    <a16:creationId xmlns="" xmlns:a16="http://schemas.microsoft.com/office/drawing/2014/main" id="{3C767761-7363-3966-1F66-B32029649DCD}"/>
+                  </a:ext>
+                </a:extLst>
+              </p:cNvPr>
+              <p:cNvSpPr>
+                <a:spLocks noGrp="1" noRot="1" noChangeAspect="1" noMove="1" noResize="1" noEditPoints="1" noAdjustHandles="1" noChangeArrowheads="1" noChangeShapeType="1" noTextEdit="1"/>
+              </p:cNvSpPr>
+              <p:nvPr>
+                <p:ph idx="1"/>
+              </p:nvPr>
+            </p:nvSpPr>
+            <p:spPr>
+              <a:xfrm>
+                <a:off x="5181600" y="1690688"/>
+                <a:ext cx="6882245" cy="5167311"/>
+              </a:xfrm>
+              <a:blipFill rotWithShape="0">
+                <a:blip r:embed="rId2"/>
+                <a:stretch>
+                  <a:fillRect l="-1594" t="-1887" r="-2657"/>
+                </a:stretch>
+              </a:blipFill>
+            </p:spPr>
+            <p:txBody>
+              <a:bodyPr/>
+              <a:lstStyle/>
+              <a:p>
+                <a:r>
+                  <a:rPr lang="pt-BR">
+                    <a:noFill/>
+                  </a:rPr>
+                  <a:t> </a:t>
+                </a:r>
+              </a:p>
+            </p:txBody>
+          </p:sp>
+        </mc:Fallback>
+      </mc:AlternateContent>
       <p:pic>
         <p:nvPicPr>
           <p:cNvPr id="5" name="Picture 2" descr="K-Means Clustering using Python. Welcome back guys! Hope you had a great… |  by Luigi Fiori | Medium">
             <a:extLst>
               <a:ext uri="{FF2B5EF4-FFF2-40B4-BE49-F238E27FC236}">
-                <a16:creationId xmlns:a16="http://schemas.microsoft.com/office/drawing/2014/main" xmlns="" id="{079377DD-55D2-BED3-3BB3-D573A6F13921}"/>
+                <a16:creationId xmlns="" xmlns:a16="http://schemas.microsoft.com/office/drawing/2014/main" id="{079377DD-55D2-BED3-3BB3-D573A6F13921}"/>
               </a:ext>
             </a:extLst>
           </p:cNvPr>
@@ -7992,7 +8076,7 @@
           <p:nvPr/>
         </p:nvPicPr>
         <p:blipFill rotWithShape="1">
-          <a:blip r:embed="rId2">
+          <a:blip r:embed="rId3">
             <a:extLst>
               <a:ext uri="{28A0092B-C50C-407E-A947-70E740481C1C}">
                 <a14:useLocalDpi xmlns:a14="http://schemas.microsoft.com/office/drawing/2010/main" val="0"/>
@@ -8057,7 +8141,7 @@
           <p:cNvPr id="2" name="Title 1">
             <a:extLst>
               <a:ext uri="{FF2B5EF4-FFF2-40B4-BE49-F238E27FC236}">
-                <a16:creationId xmlns:a16="http://schemas.microsoft.com/office/drawing/2014/main" xmlns="" id="{0719C974-9A37-ED60-45B8-7CF90E038097}"/>
+                <a16:creationId xmlns="" xmlns:a16="http://schemas.microsoft.com/office/drawing/2014/main" id="{0719C974-9A37-ED60-45B8-7CF90E038097}"/>
               </a:ext>
             </a:extLst>
           </p:cNvPr>
@@ -8082,7 +8166,7 @@
           <p:cNvPr id="3" name="Content Placeholder 2">
             <a:extLst>
               <a:ext uri="{FF2B5EF4-FFF2-40B4-BE49-F238E27FC236}">
-                <a16:creationId xmlns:a16="http://schemas.microsoft.com/office/drawing/2014/main" xmlns="" id="{D812A04D-0F4A-CB81-D7DF-C4B0B13163E8}"/>
+                <a16:creationId xmlns="" xmlns:a16="http://schemas.microsoft.com/office/drawing/2014/main" id="{D812A04D-0F4A-CB81-D7DF-C4B0B13163E8}"/>
               </a:ext>
             </a:extLst>
           </p:cNvPr>
@@ -8153,7 +8237,7 @@
         <p:cNvPr id="1" name="">
           <a:extLst>
             <a:ext uri="{FF2B5EF4-FFF2-40B4-BE49-F238E27FC236}">
-              <a16:creationId xmlns:a16="http://schemas.microsoft.com/office/drawing/2014/main" xmlns="" id="{654994D8-D711-9C2A-C202-7BAD7B93F7EE}"/>
+              <a16:creationId xmlns="" xmlns:a16="http://schemas.microsoft.com/office/drawing/2014/main" id="{654994D8-D711-9C2A-C202-7BAD7B93F7EE}"/>
             </a:ext>
           </a:extLst>
         </p:cNvPr>
@@ -8173,7 +8257,7 @@
           <p:cNvPr id="2" name="Título 1">
             <a:extLst>
               <a:ext uri="{FF2B5EF4-FFF2-40B4-BE49-F238E27FC236}">
-                <a16:creationId xmlns:a16="http://schemas.microsoft.com/office/drawing/2014/main" xmlns="" id="{FA636E4B-196C-922B-890C-6917F63A065D}"/>
+                <a16:creationId xmlns="" xmlns:a16="http://schemas.microsoft.com/office/drawing/2014/main" id="{FA636E4B-196C-922B-890C-6917F63A065D}"/>
               </a:ext>
             </a:extLst>
           </p:cNvPr>
@@ -8210,7 +8294,7 @@
           <p:cNvPr id="3" name="Espaço Reservado para Conteúdo 2">
             <a:extLst>
               <a:ext uri="{FF2B5EF4-FFF2-40B4-BE49-F238E27FC236}">
-                <a16:creationId xmlns:a16="http://schemas.microsoft.com/office/drawing/2014/main" xmlns="" id="{1FCDFA83-D279-17E3-E2CD-6E304EAF637F}"/>
+                <a16:creationId xmlns="" xmlns:a16="http://schemas.microsoft.com/office/drawing/2014/main" id="{1FCDFA83-D279-17E3-E2CD-6E304EAF637F}"/>
               </a:ext>
             </a:extLst>
           </p:cNvPr>
@@ -8311,7 +8395,7 @@
           <p:cNvPr id="3074" name="Picture 2" descr="Quantum machine learning: distance estimation for k-means clustering | by  Sashwat Anagolum | Towards Data Science">
             <a:extLst>
               <a:ext uri="{FF2B5EF4-FFF2-40B4-BE49-F238E27FC236}">
-                <a16:creationId xmlns:a16="http://schemas.microsoft.com/office/drawing/2014/main" xmlns="" id="{EE37D2FB-B661-E3F3-5FAE-2D65997FAF56}"/>
+                <a16:creationId xmlns="" xmlns:a16="http://schemas.microsoft.com/office/drawing/2014/main" id="{EE37D2FB-B661-E3F3-5FAE-2D65997FAF56}"/>
               </a:ext>
             </a:extLst>
           </p:cNvPr>
@@ -8412,8 +8496,8 @@
           </a:p>
         </p:txBody>
       </p:sp>
-      <mc:AlternateContent xmlns:mc="http://schemas.openxmlformats.org/markup-compatibility/2006">
-        <mc:Choice xmlns:a14="http://schemas.microsoft.com/office/drawing/2010/main" Requires="a14">
+      <mc:AlternateContent xmlns:mc="http://schemas.openxmlformats.org/markup-compatibility/2006" xmlns:a14="http://schemas.microsoft.com/office/drawing/2010/main">
+        <mc:Choice Requires="a14">
           <p:sp>
             <p:nvSpPr>
               <p:cNvPr id="3" name="Espaço Reservado para Conteúdo 2"/>
@@ -9253,7 +9337,7 @@
             </p:txBody>
           </p:sp>
         </mc:Choice>
-        <mc:Fallback>
+        <mc:Fallback xmlns="">
           <p:sp>
             <p:nvSpPr>
               <p:cNvPr id="3" name="Espaço Reservado para Conteúdo 2"/>
@@ -9344,8 +9428,8 @@
           </a:p>
         </p:txBody>
       </p:sp>
-      <mc:AlternateContent xmlns:mc="http://schemas.openxmlformats.org/markup-compatibility/2006">
-        <mc:Choice xmlns:a14="http://schemas.microsoft.com/office/drawing/2010/main" Requires="a14">
+      <mc:AlternateContent xmlns:mc="http://schemas.openxmlformats.org/markup-compatibility/2006" xmlns:a14="http://schemas.microsoft.com/office/drawing/2010/main">
+        <mc:Choice Requires="a14">
           <p:sp>
             <p:nvSpPr>
               <p:cNvPr id="3" name="Espaço Reservado para Conteúdo 2"/>
@@ -9741,7 +9825,7 @@
             </p:txBody>
           </p:sp>
         </mc:Choice>
-        <mc:Fallback>
+        <mc:Fallback xmlns="">
           <p:sp>
             <p:nvSpPr>
               <p:cNvPr id="3" name="Espaço Reservado para Conteúdo 2"/>
@@ -10022,8 +10106,8 @@
           </a:p>
         </p:txBody>
       </p:sp>
-      <mc:AlternateContent xmlns:mc="http://schemas.openxmlformats.org/markup-compatibility/2006">
-        <mc:Choice xmlns:a14="http://schemas.microsoft.com/office/drawing/2010/main" Requires="a14">
+      <mc:AlternateContent xmlns:mc="http://schemas.openxmlformats.org/markup-compatibility/2006" xmlns:a14="http://schemas.microsoft.com/office/drawing/2010/main">
+        <mc:Choice Requires="a14">
           <p:sp>
             <p:nvSpPr>
               <p:cNvPr id="3" name="Espaço Reservado para Conteúdo 2"/>
@@ -10074,11 +10158,7 @@
                 </a14:m>
                 <a:r>
                   <a:rPr lang="pt-BR" dirty="0"/>
-                  <a:t> </a:t>
-                </a:r>
-                <a:r>
-                  <a:rPr lang="pt-BR" dirty="0"/>
-                  <a:t>é </a:t>
+                  <a:t> é </a:t>
                 </a:r>
                 <a:r>
                   <a:rPr lang="pt-BR" dirty="0" smtClean="0"/>
@@ -10090,11 +10170,7 @@
                 </a:r>
                 <a:r>
                   <a:rPr lang="pt-BR" dirty="0" smtClean="0"/>
-                  <a:t>e define o</a:t>
-                </a:r>
-                <a:r>
-                  <a:rPr lang="pt-BR" dirty="0" smtClean="0"/>
-                  <a:t> número de </a:t>
+                  <a:t>e define o número de </a:t>
                 </a:r>
                 <a:r>
                   <a:rPr lang="pt-BR" i="1" dirty="0" smtClean="0"/>
@@ -10157,7 +10233,7 @@
             </p:txBody>
           </p:sp>
         </mc:Choice>
-        <mc:Fallback>
+        <mc:Fallback xmlns="">
           <p:sp>
             <p:nvSpPr>
               <p:cNvPr id="3" name="Espaço Reservado para Conteúdo 2"/>
@@ -10195,8 +10271,8 @@
           </p:sp>
         </mc:Fallback>
       </mc:AlternateContent>
-      <mc:AlternateContent xmlns:mc="http://schemas.openxmlformats.org/markup-compatibility/2006">
-        <mc:Choice xmlns:a14="http://schemas.microsoft.com/office/drawing/2010/main" Requires="a14">
+      <mc:AlternateContent xmlns:mc="http://schemas.openxmlformats.org/markup-compatibility/2006" xmlns:a14="http://schemas.microsoft.com/office/drawing/2010/main">
+        <mc:Choice Requires="a14">
           <p:sp>
             <p:nvSpPr>
               <p:cNvPr id="4" name="TextBox 4"/>
@@ -10388,7 +10464,7 @@
             </p:txBody>
           </p:sp>
         </mc:Choice>
-        <mc:Fallback>
+        <mc:Fallback xmlns="">
           <p:sp>
             <p:nvSpPr>
               <p:cNvPr id="4" name="TextBox 4"/>
@@ -10550,7 +10626,7 @@
           <p:cNvPr id="4" name="Picture 5">
             <a:extLst>
               <a:ext uri="{FF2B5EF4-FFF2-40B4-BE49-F238E27FC236}">
-                <a16:creationId xmlns:a16="http://schemas.microsoft.com/office/drawing/2014/main" xmlns="" id="{F98B536F-38AB-58C5-0FFB-41BDB557E9EF}"/>
+                <a16:creationId xmlns="" xmlns:a16="http://schemas.microsoft.com/office/drawing/2014/main" id="{F98B536F-38AB-58C5-0FFB-41BDB557E9EF}"/>
               </a:ext>
             </a:extLst>
           </p:cNvPr>
@@ -10580,7 +10656,7 @@
           <p:cNvPr id="5" name="TextBox 7">
             <a:extLst>
               <a:ext uri="{FF2B5EF4-FFF2-40B4-BE49-F238E27FC236}">
-                <a16:creationId xmlns:a16="http://schemas.microsoft.com/office/drawing/2014/main" xmlns="" id="{04EA9FAE-D371-68E0-2CB7-9C8893491B3B}"/>
+                <a16:creationId xmlns="" xmlns:a16="http://schemas.microsoft.com/office/drawing/2014/main" id="{04EA9FAE-D371-68E0-2CB7-9C8893491B3B}"/>
               </a:ext>
             </a:extLst>
           </p:cNvPr>
@@ -10677,7 +10753,7 @@
           <p:cNvPr id="3" name="Picture 5">
             <a:extLst>
               <a:ext uri="{FF2B5EF4-FFF2-40B4-BE49-F238E27FC236}">
-                <a16:creationId xmlns:a16="http://schemas.microsoft.com/office/drawing/2014/main" xmlns="" id="{69F3FE92-0D0B-AECE-B64E-FC9D2F3EADBC}"/>
+                <a16:creationId xmlns="" xmlns:a16="http://schemas.microsoft.com/office/drawing/2014/main" id="{69F3FE92-0D0B-AECE-B64E-FC9D2F3EADBC}"/>
               </a:ext>
             </a:extLst>
           </p:cNvPr>
@@ -10707,7 +10783,7 @@
           <p:cNvPr id="4" name="TextBox 7">
             <a:extLst>
               <a:ext uri="{FF2B5EF4-FFF2-40B4-BE49-F238E27FC236}">
-                <a16:creationId xmlns:a16="http://schemas.microsoft.com/office/drawing/2014/main" xmlns="" id="{5D947541-89EC-69EF-1918-6EFD56E0B3C2}"/>
+                <a16:creationId xmlns="" xmlns:a16="http://schemas.microsoft.com/office/drawing/2014/main" id="{5D947541-89EC-69EF-1918-6EFD56E0B3C2}"/>
               </a:ext>
             </a:extLst>
           </p:cNvPr>
@@ -10843,7 +10919,7 @@
           <p:cNvPr id="3" name="Picture 5">
             <a:extLst>
               <a:ext uri="{FF2B5EF4-FFF2-40B4-BE49-F238E27FC236}">
-                <a16:creationId xmlns:a16="http://schemas.microsoft.com/office/drawing/2014/main" xmlns="" id="{1C0684BB-EFF7-DBA8-3519-25CE2A1A9632}"/>
+                <a16:creationId xmlns="" xmlns:a16="http://schemas.microsoft.com/office/drawing/2014/main" id="{1C0684BB-EFF7-DBA8-3519-25CE2A1A9632}"/>
               </a:ext>
             </a:extLst>
           </p:cNvPr>
@@ -10873,7 +10949,7 @@
           <p:cNvPr id="4" name="TextBox 8">
             <a:extLst>
               <a:ext uri="{FF2B5EF4-FFF2-40B4-BE49-F238E27FC236}">
-                <a16:creationId xmlns:a16="http://schemas.microsoft.com/office/drawing/2014/main" xmlns="" id="{38267D7C-379A-003E-4048-8D4DDD969EB6}"/>
+                <a16:creationId xmlns="" xmlns:a16="http://schemas.microsoft.com/office/drawing/2014/main" id="{38267D7C-379A-003E-4048-8D4DDD969EB6}"/>
               </a:ext>
             </a:extLst>
           </p:cNvPr>
@@ -11000,7 +11076,7 @@
           <p:cNvPr id="3" name="Picture 7">
             <a:extLst>
               <a:ext uri="{FF2B5EF4-FFF2-40B4-BE49-F238E27FC236}">
-                <a16:creationId xmlns:a16="http://schemas.microsoft.com/office/drawing/2014/main" xmlns="" id="{4A874BBD-11DB-833A-341F-F134DDD11108}"/>
+                <a16:creationId xmlns="" xmlns:a16="http://schemas.microsoft.com/office/drawing/2014/main" id="{4A874BBD-11DB-833A-341F-F134DDD11108}"/>
               </a:ext>
             </a:extLst>
           </p:cNvPr>
@@ -11030,7 +11106,7 @@
           <p:cNvPr id="4" name="TextBox 9">
             <a:extLst>
               <a:ext uri="{FF2B5EF4-FFF2-40B4-BE49-F238E27FC236}">
-                <a16:creationId xmlns:a16="http://schemas.microsoft.com/office/drawing/2014/main" xmlns="" id="{FB63ADD3-D956-76C5-F130-F38465877D67}"/>
+                <a16:creationId xmlns="" xmlns:a16="http://schemas.microsoft.com/office/drawing/2014/main" id="{FB63ADD3-D956-76C5-F130-F38465877D67}"/>
               </a:ext>
             </a:extLst>
           </p:cNvPr>
@@ -11132,7 +11208,7 @@
           <p:cNvPr id="3" name="Picture 5">
             <a:extLst>
               <a:ext uri="{FF2B5EF4-FFF2-40B4-BE49-F238E27FC236}">
-                <a16:creationId xmlns:a16="http://schemas.microsoft.com/office/drawing/2014/main" xmlns="" id="{BE9E2474-44BE-43D0-EE2F-D03349050DA2}"/>
+                <a16:creationId xmlns="" xmlns:a16="http://schemas.microsoft.com/office/drawing/2014/main" id="{BE9E2474-44BE-43D0-EE2F-D03349050DA2}"/>
               </a:ext>
             </a:extLst>
           </p:cNvPr>
@@ -11162,7 +11238,7 @@
           <p:cNvPr id="4" name="TextBox 9">
             <a:extLst>
               <a:ext uri="{FF2B5EF4-FFF2-40B4-BE49-F238E27FC236}">
-                <a16:creationId xmlns:a16="http://schemas.microsoft.com/office/drawing/2014/main" xmlns="" id="{E7FEC406-7A7E-5D78-DF69-D2416A2375C3}"/>
+                <a16:creationId xmlns="" xmlns:a16="http://schemas.microsoft.com/office/drawing/2014/main" id="{E7FEC406-7A7E-5D78-DF69-D2416A2375C3}"/>
               </a:ext>
             </a:extLst>
           </p:cNvPr>
@@ -11264,7 +11340,7 @@
           <p:cNvPr id="3" name="Picture 5">
             <a:extLst>
               <a:ext uri="{FF2B5EF4-FFF2-40B4-BE49-F238E27FC236}">
-                <a16:creationId xmlns:a16="http://schemas.microsoft.com/office/drawing/2014/main" xmlns="" id="{CD544109-9098-CA3C-766B-DFEB05AE1F38}"/>
+                <a16:creationId xmlns="" xmlns:a16="http://schemas.microsoft.com/office/drawing/2014/main" id="{CD544109-9098-CA3C-766B-DFEB05AE1F38}"/>
               </a:ext>
             </a:extLst>
           </p:cNvPr>
@@ -11294,7 +11370,7 @@
           <p:cNvPr id="4" name="TextBox 9">
             <a:extLst>
               <a:ext uri="{FF2B5EF4-FFF2-40B4-BE49-F238E27FC236}">
-                <a16:creationId xmlns:a16="http://schemas.microsoft.com/office/drawing/2014/main" xmlns="" id="{E7FEC406-7A7E-5D78-DF69-D2416A2375C3}"/>
+                <a16:creationId xmlns="" xmlns:a16="http://schemas.microsoft.com/office/drawing/2014/main" id="{E7FEC406-7A7E-5D78-DF69-D2416A2375C3}"/>
               </a:ext>
             </a:extLst>
           </p:cNvPr>
@@ -11396,7 +11472,7 @@
           <p:cNvPr id="3" name="Picture 5">
             <a:extLst>
               <a:ext uri="{FF2B5EF4-FFF2-40B4-BE49-F238E27FC236}">
-                <a16:creationId xmlns:a16="http://schemas.microsoft.com/office/drawing/2014/main" xmlns="" id="{9F08A47C-C93C-D40B-F5DC-3C29F2EEEE60}"/>
+                <a16:creationId xmlns="" xmlns:a16="http://schemas.microsoft.com/office/drawing/2014/main" id="{9F08A47C-C93C-D40B-F5DC-3C29F2EEEE60}"/>
               </a:ext>
             </a:extLst>
           </p:cNvPr>
@@ -11426,7 +11502,7 @@
           <p:cNvPr id="4" name="TextBox 7">
             <a:extLst>
               <a:ext uri="{FF2B5EF4-FFF2-40B4-BE49-F238E27FC236}">
-                <a16:creationId xmlns:a16="http://schemas.microsoft.com/office/drawing/2014/main" xmlns="" id="{4376C1A9-3731-8BF9-861E-3D686FEA4F43}"/>
+                <a16:creationId xmlns="" xmlns:a16="http://schemas.microsoft.com/office/drawing/2014/main" id="{4376C1A9-3731-8BF9-861E-3D686FEA4F43}"/>
               </a:ext>
             </a:extLst>
           </p:cNvPr>
@@ -11744,7 +11820,7 @@
           <p:cNvPr id="4" name="Picture 2" descr="Quantum machine learning: distance estimation for k-means clustering | by  Sashwat Anagolum | Towards Data Science">
             <a:extLst>
               <a:ext uri="{FF2B5EF4-FFF2-40B4-BE49-F238E27FC236}">
-                <a16:creationId xmlns:a16="http://schemas.microsoft.com/office/drawing/2014/main" xmlns="" id="{3663CA52-EDD8-4A35-5A6A-3A247A7891B7}"/>
+                <a16:creationId xmlns="" xmlns:a16="http://schemas.microsoft.com/office/drawing/2014/main" id="{3663CA52-EDD8-4A35-5A6A-3A247A7891B7}"/>
               </a:ext>
             </a:extLst>
           </p:cNvPr>
@@ -11805,7 +11881,7 @@
         <p:cNvPr id="1" name="">
           <a:extLst>
             <a:ext uri="{FF2B5EF4-FFF2-40B4-BE49-F238E27FC236}">
-              <a16:creationId xmlns:a16="http://schemas.microsoft.com/office/drawing/2014/main" xmlns="" id="{17B1A926-A8C8-946A-0DCB-7DA6EAEC80E3}"/>
+              <a16:creationId xmlns="" xmlns:a16="http://schemas.microsoft.com/office/drawing/2014/main" id="{17B1A926-A8C8-946A-0DCB-7DA6EAEC80E3}"/>
             </a:ext>
           </a:extLst>
         </p:cNvPr>
@@ -11825,7 +11901,7 @@
           <p:cNvPr id="2" name="Título 1">
             <a:extLst>
               <a:ext uri="{FF2B5EF4-FFF2-40B4-BE49-F238E27FC236}">
-                <a16:creationId xmlns:a16="http://schemas.microsoft.com/office/drawing/2014/main" xmlns="" id="{602E24AF-FE6E-7B0A-D179-EB49A1DEB2F8}"/>
+                <a16:creationId xmlns="" xmlns:a16="http://schemas.microsoft.com/office/drawing/2014/main" id="{602E24AF-FE6E-7B0A-D179-EB49A1DEB2F8}"/>
               </a:ext>
             </a:extLst>
           </p:cNvPr>
@@ -11854,7 +11930,7 @@
           <p:cNvPr id="3" name="Espaço Reservado para Conteúdo 2">
             <a:extLst>
               <a:ext uri="{FF2B5EF4-FFF2-40B4-BE49-F238E27FC236}">
-                <a16:creationId xmlns:a16="http://schemas.microsoft.com/office/drawing/2014/main" xmlns="" id="{4E35406F-F929-EFBE-0B16-7CF919C6F311}"/>
+                <a16:creationId xmlns="" xmlns:a16="http://schemas.microsoft.com/office/drawing/2014/main" id="{4E35406F-F929-EFBE-0B16-7CF919C6F311}"/>
               </a:ext>
             </a:extLst>
           </p:cNvPr>
@@ -11997,7 +12073,7 @@
           <p:cNvPr id="4" name="Picture 2" descr="Quantum machine learning: distance estimation for k-means clustering | by  Sashwat Anagolum | Towards Data Science">
             <a:extLst>
               <a:ext uri="{FF2B5EF4-FFF2-40B4-BE49-F238E27FC236}">
-                <a16:creationId xmlns:a16="http://schemas.microsoft.com/office/drawing/2014/main" xmlns="" id="{375C1022-A6C8-5B17-2FC3-13794270B208}"/>
+                <a16:creationId xmlns="" xmlns:a16="http://schemas.microsoft.com/office/drawing/2014/main" id="{375C1022-A6C8-5B17-2FC3-13794270B208}"/>
               </a:ext>
             </a:extLst>
           </p:cNvPr>
@@ -12072,7 +12148,7 @@
           <p:cNvPr id="6" name="TextBox 5">
             <a:extLst>
               <a:ext uri="{FF2B5EF4-FFF2-40B4-BE49-F238E27FC236}">
-                <a16:creationId xmlns:a16="http://schemas.microsoft.com/office/drawing/2014/main" xmlns="" id="{7A9955D7-EF0A-C073-CA9C-EC6A396485B8}"/>
+                <a16:creationId xmlns="" xmlns:a16="http://schemas.microsoft.com/office/drawing/2014/main" id="{7A9955D7-EF0A-C073-CA9C-EC6A396485B8}"/>
               </a:ext>
             </a:extLst>
           </p:cNvPr>
@@ -12121,7 +12197,7 @@
           <p:cNvPr id="3" name="Picture 2">
             <a:extLst>
               <a:ext uri="{FF2B5EF4-FFF2-40B4-BE49-F238E27FC236}">
-                <a16:creationId xmlns:a16="http://schemas.microsoft.com/office/drawing/2014/main" xmlns="" id="{9863C601-9BD1-3DD0-9219-97CD9BA5DC5A}"/>
+                <a16:creationId xmlns="" xmlns:a16="http://schemas.microsoft.com/office/drawing/2014/main" id="{9863C601-9BD1-3DD0-9219-97CD9BA5DC5A}"/>
               </a:ext>
             </a:extLst>
           </p:cNvPr>
@@ -12197,11 +12273,7 @@
           <a:bodyPr/>
           <a:lstStyle/>
           <a:p>
-            <a:r>
-              <a:rPr lang="pt-BR" dirty="0" smtClean="0"/>
-              <a:t>Método do cotovelo</a:t>
-            </a:r>
-            <a:endParaRPr lang="pt-BR" dirty="0"/>
+            <a:endParaRPr lang="pt-BR"/>
           </a:p>
         </p:txBody>
       </p:sp>
@@ -12215,6 +12287,98 @@
             <p:ph idx="1"/>
           </p:nvPr>
         </p:nvSpPr>
+        <p:spPr/>
+        <p:txBody>
+          <a:bodyPr/>
+          <a:lstStyle/>
+          <a:p>
+            <a:r>
+              <a:rPr lang="pt-BR" dirty="0"/>
+              <a:t>Aí surge uma dúvida. </a:t>
+            </a:r>
+          </a:p>
+          <a:p>
+            <a:r>
+              <a:rPr lang="pt-BR" dirty="0"/>
+              <a:t>Quantos </a:t>
+            </a:r>
+            <a:r>
+              <a:rPr lang="pt-BR" i="1" dirty="0"/>
+              <a:t>clusters</a:t>
+            </a:r>
+            <a:r>
+              <a:rPr lang="pt-BR" dirty="0"/>
+              <a:t> um conjunto de dados contém?</a:t>
+            </a:r>
+          </a:p>
+          <a:p>
+            <a:endParaRPr lang="pt-BR" dirty="0"/>
+          </a:p>
+        </p:txBody>
+      </p:sp>
+    </p:spTree>
+    <p:extLst>
+      <p:ext uri="{BB962C8B-B14F-4D97-AF65-F5344CB8AC3E}">
+        <p14:creationId xmlns:p14="http://schemas.microsoft.com/office/powerpoint/2010/main" val="1550317019"/>
+      </p:ext>
+    </p:extLst>
+  </p:cSld>
+  <p:clrMapOvr>
+    <a:masterClrMapping/>
+  </p:clrMapOvr>
+</p:sld>
+</file>
+
+<file path=ppt/slides/slide31.xml><?xml version="1.0" encoding="utf-8"?>
+<p:sld xmlns:a="http://schemas.openxmlformats.org/drawingml/2006/main" xmlns:r="http://schemas.openxmlformats.org/officeDocument/2006/relationships" xmlns:p="http://schemas.openxmlformats.org/presentationml/2006/main">
+  <p:cSld>
+    <p:spTree>
+      <p:nvGrpSpPr>
+        <p:cNvPr id="1" name=""/>
+        <p:cNvGrpSpPr/>
+        <p:nvPr/>
+      </p:nvGrpSpPr>
+      <p:grpSpPr>
+        <a:xfrm>
+          <a:off x="0" y="0"/>
+          <a:ext cx="0" cy="0"/>
+          <a:chOff x="0" y="0"/>
+          <a:chExt cx="0" cy="0"/>
+        </a:xfrm>
+      </p:grpSpPr>
+      <p:sp>
+        <p:nvSpPr>
+          <p:cNvPr id="2" name="Título 1"/>
+          <p:cNvSpPr>
+            <a:spLocks noGrp="1"/>
+          </p:cNvSpPr>
+          <p:nvPr>
+            <p:ph type="title"/>
+          </p:nvPr>
+        </p:nvSpPr>
+        <p:spPr/>
+        <p:txBody>
+          <a:bodyPr/>
+          <a:lstStyle/>
+          <a:p>
+            <a:r>
+              <a:rPr lang="pt-BR" dirty="0" smtClean="0"/>
+              <a:t>Método do cotovelo</a:t>
+            </a:r>
+            <a:endParaRPr lang="pt-BR" dirty="0"/>
+          </a:p>
+        </p:txBody>
+      </p:sp>
+      <p:sp>
+        <p:nvSpPr>
+          <p:cNvPr id="3" name="Espaço Reservado para Conteúdo 2"/>
+          <p:cNvSpPr>
+            <a:spLocks noGrp="1"/>
+          </p:cNvSpPr>
+          <p:nvPr>
+            <p:ph idx="1"/>
+          </p:nvPr>
+        </p:nvSpPr>
         <p:spPr>
           <a:xfrm>
             <a:off x="7293186" y="1825624"/>
@@ -12514,7 +12678,7 @@
           <p:cNvPr id="4" name="Picture 2" descr="Base Teórica do K-Means! Aprenda a Lógica desse Algoritmo Hoje!">
             <a:extLst>
               <a:ext uri="{FF2B5EF4-FFF2-40B4-BE49-F238E27FC236}">
-                <a16:creationId xmlns:a16="http://schemas.microsoft.com/office/drawing/2014/main" xmlns="" id="{0694ADFD-EB2E-2BF0-18BE-B07E4CD60A5F}"/>
+                <a16:creationId xmlns="" xmlns:a16="http://schemas.microsoft.com/office/drawing/2014/main" id="{0694ADFD-EB2E-2BF0-18BE-B07E4CD60A5F}"/>
               </a:ext>
             </a:extLst>
           </p:cNvPr>
@@ -12561,7 +12725,7 @@
           <p:cNvPr id="5" name="Imagem 4">
             <a:extLst>
               <a:ext uri="{FF2B5EF4-FFF2-40B4-BE49-F238E27FC236}">
-                <a16:creationId xmlns:a16="http://schemas.microsoft.com/office/drawing/2014/main" xmlns="" id="{EEF69E85-6440-34FE-5C8A-A5F37765D292}"/>
+                <a16:creationId xmlns="" xmlns:a16="http://schemas.microsoft.com/office/drawing/2014/main" id="{EEF69E85-6440-34FE-5C8A-A5F37765D292}"/>
               </a:ext>
             </a:extLst>
           </p:cNvPr>
@@ -12599,7 +12763,7 @@
 </p:sld>
 </file>
 
-<file path=ppt/slides/slide31.xml><?xml version="1.0" encoding="utf-8"?>
+<file path=ppt/slides/slide32.xml><?xml version="1.0" encoding="utf-8"?>
 <p:sld xmlns:a="http://schemas.openxmlformats.org/drawingml/2006/main" xmlns:r="http://schemas.openxmlformats.org/officeDocument/2006/relationships" xmlns:p="http://schemas.openxmlformats.org/presentationml/2006/main">
   <p:cSld>
     <p:spTree>
@@ -12840,7 +13004,7 @@
 </p:sld>
 </file>
 
-<file path=ppt/slides/slide32.xml><?xml version="1.0" encoding="utf-8"?>
+<file path=ppt/slides/slide33.xml><?xml version="1.0" encoding="utf-8"?>
 <p:sld xmlns:a="http://schemas.openxmlformats.org/drawingml/2006/main" xmlns:r="http://schemas.openxmlformats.org/officeDocument/2006/relationships" xmlns:p="http://schemas.openxmlformats.org/presentationml/2006/main">
   <p:cSld>
     <p:spTree>
@@ -12862,7 +13026,7 @@
           <p:cNvPr id="2" name="Título 1">
             <a:extLst>
               <a:ext uri="{FF2B5EF4-FFF2-40B4-BE49-F238E27FC236}">
-                <a16:creationId xmlns:a16="http://schemas.microsoft.com/office/drawing/2014/main" xmlns="" id="{654EC41E-A91F-2BE6-4481-EFFD64DC2B91}"/>
+                <a16:creationId xmlns="" xmlns:a16="http://schemas.microsoft.com/office/drawing/2014/main" id="{654EC41E-A91F-2BE6-4481-EFFD64DC2B91}"/>
               </a:ext>
             </a:extLst>
           </p:cNvPr>
@@ -12892,7 +13056,7 @@
               <p:cNvPr id="3" name="Espaço Reservado para Conteúdo 2">
                 <a:extLst>
                   <a:ext uri="{FF2B5EF4-FFF2-40B4-BE49-F238E27FC236}">
-                    <a16:creationId xmlns:a16="http://schemas.microsoft.com/office/drawing/2014/main" xmlns="" id="{7C91871B-A0D0-6F26-D59B-6230818E6267}"/>
+                    <a16:creationId xmlns="" xmlns:a16="http://schemas.microsoft.com/office/drawing/2014/main" id="{7C91871B-A0D0-6F26-D59B-6230818E6267}"/>
                   </a:ext>
                 </a:extLst>
               </p:cNvPr>
@@ -13059,133 +13223,6 @@
 </p:sld>
 </file>
 
-<file path=ppt/slides/slide33.xml><?xml version="1.0" encoding="utf-8"?>
-<p:sld xmlns:a="http://schemas.openxmlformats.org/drawingml/2006/main" xmlns:r="http://schemas.openxmlformats.org/officeDocument/2006/relationships" xmlns:p="http://schemas.openxmlformats.org/presentationml/2006/main">
-  <p:cSld>
-    <p:spTree>
-      <p:nvGrpSpPr>
-        <p:cNvPr id="1" name=""/>
-        <p:cNvGrpSpPr/>
-        <p:nvPr/>
-      </p:nvGrpSpPr>
-      <p:grpSpPr>
-        <a:xfrm>
-          <a:off x="0" y="0"/>
-          <a:ext cx="0" cy="0"/>
-          <a:chOff x="0" y="0"/>
-          <a:chExt cx="0" cy="0"/>
-        </a:xfrm>
-      </p:grpSpPr>
-      <p:sp>
-        <p:nvSpPr>
-          <p:cNvPr id="2" name="Title 1">
-            <a:extLst>
-              <a:ext uri="{FF2B5EF4-FFF2-40B4-BE49-F238E27FC236}">
-                <a16:creationId xmlns:a16="http://schemas.microsoft.com/office/drawing/2014/main" xmlns="" id="{A07C804B-5A43-5C89-0C42-420DDBB1CA5A}"/>
-              </a:ext>
-            </a:extLst>
-          </p:cNvPr>
-          <p:cNvSpPr>
-            <a:spLocks noGrp="1"/>
-          </p:cNvSpPr>
-          <p:nvPr>
-            <p:ph type="title"/>
-          </p:nvPr>
-        </p:nvSpPr>
-        <p:spPr/>
-        <p:txBody>
-          <a:bodyPr/>
-          <a:lstStyle/>
-          <a:p>
-            <a:r>
-              <a:rPr lang="pt-BR" dirty="0"/>
-              <a:t>Outros algoritmos de </a:t>
-            </a:r>
-            <a:r>
-              <a:rPr lang="pt-BR" i="1" dirty="0"/>
-              <a:t>clustering</a:t>
-            </a:r>
-            <a:endParaRPr lang="en-US" i="1" dirty="0"/>
-          </a:p>
-        </p:txBody>
-      </p:sp>
-      <p:sp>
-        <p:nvSpPr>
-          <p:cNvPr id="3" name="Content Placeholder 2">
-            <a:extLst>
-              <a:ext uri="{FF2B5EF4-FFF2-40B4-BE49-F238E27FC236}">
-                <a16:creationId xmlns:a16="http://schemas.microsoft.com/office/drawing/2014/main" xmlns="" id="{288A7DCE-B5C5-82F5-CC2A-E963BDDE03C9}"/>
-              </a:ext>
-            </a:extLst>
-          </p:cNvPr>
-          <p:cNvSpPr>
-            <a:spLocks noGrp="1"/>
-          </p:cNvSpPr>
-          <p:nvPr>
-            <p:ph idx="1"/>
-          </p:nvPr>
-        </p:nvSpPr>
-        <p:spPr/>
-        <p:txBody>
-          <a:bodyPr/>
-          <a:lstStyle/>
-          <a:p>
-            <a:r>
-              <a:rPr lang="pt-BR" dirty="0"/>
-              <a:t>DBSCAN</a:t>
-            </a:r>
-          </a:p>
-          <a:p>
-            <a:r>
-              <a:rPr lang="pt-BR" dirty="0"/>
-              <a:t>HDBSCAN</a:t>
-            </a:r>
-          </a:p>
-          <a:p>
-            <a:r>
-              <a:rPr lang="pt-BR" dirty="0" err="1"/>
-              <a:t>Gaussian</a:t>
-            </a:r>
-            <a:r>
-              <a:rPr lang="pt-BR" dirty="0"/>
-              <a:t> </a:t>
-            </a:r>
-            <a:r>
-              <a:rPr lang="pt-BR" dirty="0" err="1"/>
-              <a:t>mixtrures</a:t>
-            </a:r>
-            <a:endParaRPr lang="pt-BR" dirty="0"/>
-          </a:p>
-          <a:p>
-            <a:endParaRPr lang="en-US" dirty="0"/>
-          </a:p>
-          <a:p>
-            <a:r>
-              <a:rPr lang="en-US" dirty="0">
-                <a:hlinkClick r:id="rId2"/>
-              </a:rPr>
-              <a:t>https://scikit-learn.org/stable/modules/clustering.html</a:t>
-            </a:r>
-            <a:endParaRPr lang="en-US" dirty="0"/>
-          </a:p>
-          <a:p>
-            <a:endParaRPr lang="en-US" dirty="0"/>
-          </a:p>
-        </p:txBody>
-      </p:sp>
-    </p:spTree>
-    <p:extLst>
-      <p:ext uri="{BB962C8B-B14F-4D97-AF65-F5344CB8AC3E}">
-        <p14:creationId xmlns:p14="http://schemas.microsoft.com/office/powerpoint/2010/main" val="3933081201"/>
-      </p:ext>
-    </p:extLst>
-  </p:cSld>
-  <p:clrMapOvr>
-    <a:masterClrMapping/>
-  </p:clrMapOvr>
-</p:sld>
-</file>
-
 <file path=ppt/slides/slide34.xml><?xml version="1.0" encoding="utf-8"?>
 <p:sld xmlns:a="http://schemas.openxmlformats.org/drawingml/2006/main" xmlns:r="http://schemas.openxmlformats.org/officeDocument/2006/relationships" xmlns:p="http://schemas.openxmlformats.org/presentationml/2006/main">
   <p:cSld>
@@ -13205,10 +13242,10 @@
       </p:grpSpPr>
       <p:sp>
         <p:nvSpPr>
-          <p:cNvPr id="2" name="Título 1">
+          <p:cNvPr id="2" name="Title 1">
             <a:extLst>
               <a:ext uri="{FF2B5EF4-FFF2-40B4-BE49-F238E27FC236}">
-                <a16:creationId xmlns:a16="http://schemas.microsoft.com/office/drawing/2014/main" xmlns="" id="{94AB8438-E56E-2412-517C-8456E4CA773C}"/>
+                <a16:creationId xmlns="" xmlns:a16="http://schemas.microsoft.com/office/drawing/2014/main" id="{A07C804B-5A43-5C89-0C42-420DDBB1CA5A}"/>
               </a:ext>
             </a:extLst>
           </p:cNvPr>
@@ -13226,17 +13263,22 @@
           <a:p>
             <a:r>
               <a:rPr lang="pt-BR" dirty="0"/>
-              <a:t>Exemplo</a:t>
-            </a:r>
-          </a:p>
-        </p:txBody>
-      </p:sp>
-      <p:sp>
-        <p:nvSpPr>
-          <p:cNvPr id="3" name="Espaço Reservado para Conteúdo 2">
+              <a:t>Outros algoritmos de </a:t>
+            </a:r>
+            <a:r>
+              <a:rPr lang="pt-BR" i="1" dirty="0"/>
+              <a:t>clustering</a:t>
+            </a:r>
+            <a:endParaRPr lang="en-US" i="1" dirty="0"/>
+          </a:p>
+        </p:txBody>
+      </p:sp>
+      <p:sp>
+        <p:nvSpPr>
+          <p:cNvPr id="3" name="Content Placeholder 2">
             <a:extLst>
               <a:ext uri="{FF2B5EF4-FFF2-40B4-BE49-F238E27FC236}">
-                <a16:creationId xmlns:a16="http://schemas.microsoft.com/office/drawing/2014/main" xmlns="" id="{F7E2B09C-6D56-4C9F-A364-B904CCE2F1A0}"/>
+                <a16:creationId xmlns="" xmlns:a16="http://schemas.microsoft.com/office/drawing/2014/main" id="{288A7DCE-B5C5-82F5-CC2A-E963BDDE03C9}"/>
               </a:ext>
             </a:extLst>
           </p:cNvPr>
@@ -13254,6 +13296,128 @@
           <a:p>
             <a:r>
               <a:rPr lang="pt-BR" dirty="0"/>
+              <a:t>DBSCAN</a:t>
+            </a:r>
+          </a:p>
+          <a:p>
+            <a:r>
+              <a:rPr lang="pt-BR" dirty="0"/>
+              <a:t>HDBSCAN</a:t>
+            </a:r>
+          </a:p>
+          <a:p>
+            <a:r>
+              <a:rPr lang="pt-BR" dirty="0" err="1"/>
+              <a:t>Gaussian</a:t>
+            </a:r>
+            <a:r>
+              <a:rPr lang="pt-BR" dirty="0"/>
+              <a:t> </a:t>
+            </a:r>
+            <a:r>
+              <a:rPr lang="pt-BR" dirty="0" err="1"/>
+              <a:t>mixtrures</a:t>
+            </a:r>
+            <a:endParaRPr lang="pt-BR" dirty="0"/>
+          </a:p>
+          <a:p>
+            <a:endParaRPr lang="en-US" dirty="0"/>
+          </a:p>
+          <a:p>
+            <a:r>
+              <a:rPr lang="en-US" dirty="0">
+                <a:hlinkClick r:id="rId2"/>
+              </a:rPr>
+              <a:t>https://scikit-learn.org/stable/modules/clustering.html</a:t>
+            </a:r>
+            <a:endParaRPr lang="en-US" dirty="0"/>
+          </a:p>
+          <a:p>
+            <a:endParaRPr lang="en-US" dirty="0"/>
+          </a:p>
+        </p:txBody>
+      </p:sp>
+    </p:spTree>
+    <p:extLst>
+      <p:ext uri="{BB962C8B-B14F-4D97-AF65-F5344CB8AC3E}">
+        <p14:creationId xmlns:p14="http://schemas.microsoft.com/office/powerpoint/2010/main" val="3933081201"/>
+      </p:ext>
+    </p:extLst>
+  </p:cSld>
+  <p:clrMapOvr>
+    <a:masterClrMapping/>
+  </p:clrMapOvr>
+</p:sld>
+</file>
+
+<file path=ppt/slides/slide35.xml><?xml version="1.0" encoding="utf-8"?>
+<p:sld xmlns:a="http://schemas.openxmlformats.org/drawingml/2006/main" xmlns:r="http://schemas.openxmlformats.org/officeDocument/2006/relationships" xmlns:p="http://schemas.openxmlformats.org/presentationml/2006/main">
+  <p:cSld>
+    <p:spTree>
+      <p:nvGrpSpPr>
+        <p:cNvPr id="1" name=""/>
+        <p:cNvGrpSpPr/>
+        <p:nvPr/>
+      </p:nvGrpSpPr>
+      <p:grpSpPr>
+        <a:xfrm>
+          <a:off x="0" y="0"/>
+          <a:ext cx="0" cy="0"/>
+          <a:chOff x="0" y="0"/>
+          <a:chExt cx="0" cy="0"/>
+        </a:xfrm>
+      </p:grpSpPr>
+      <p:sp>
+        <p:nvSpPr>
+          <p:cNvPr id="2" name="Título 1">
+            <a:extLst>
+              <a:ext uri="{FF2B5EF4-FFF2-40B4-BE49-F238E27FC236}">
+                <a16:creationId xmlns="" xmlns:a16="http://schemas.microsoft.com/office/drawing/2014/main" id="{94AB8438-E56E-2412-517C-8456E4CA773C}"/>
+              </a:ext>
+            </a:extLst>
+          </p:cNvPr>
+          <p:cNvSpPr>
+            <a:spLocks noGrp="1"/>
+          </p:cNvSpPr>
+          <p:nvPr>
+            <p:ph type="title"/>
+          </p:nvPr>
+        </p:nvSpPr>
+        <p:spPr/>
+        <p:txBody>
+          <a:bodyPr/>
+          <a:lstStyle/>
+          <a:p>
+            <a:r>
+              <a:rPr lang="pt-BR" dirty="0"/>
+              <a:t>Exemplo</a:t>
+            </a:r>
+          </a:p>
+        </p:txBody>
+      </p:sp>
+      <p:sp>
+        <p:nvSpPr>
+          <p:cNvPr id="3" name="Espaço Reservado para Conteúdo 2">
+            <a:extLst>
+              <a:ext uri="{FF2B5EF4-FFF2-40B4-BE49-F238E27FC236}">
+                <a16:creationId xmlns="" xmlns:a16="http://schemas.microsoft.com/office/drawing/2014/main" id="{F7E2B09C-6D56-4C9F-A364-B904CCE2F1A0}"/>
+              </a:ext>
+            </a:extLst>
+          </p:cNvPr>
+          <p:cNvSpPr>
+            <a:spLocks noGrp="1"/>
+          </p:cNvSpPr>
+          <p:nvPr>
+            <p:ph idx="1"/>
+          </p:nvPr>
+        </p:nvSpPr>
+        <p:spPr/>
+        <p:txBody>
+          <a:bodyPr/>
+          <a:lstStyle/>
+          <a:p>
+            <a:r>
+              <a:rPr lang="pt-BR" dirty="0"/>
               <a:t>Exemplo: </a:t>
             </a:r>
             <a:r>
@@ -13275,7 +13439,7 @@
           <p:cNvPr id="18" name="Group 17">
             <a:extLst>
               <a:ext uri="{FF2B5EF4-FFF2-40B4-BE49-F238E27FC236}">
-                <a16:creationId xmlns:a16="http://schemas.microsoft.com/office/drawing/2014/main" xmlns="" id="{627C64FD-88E0-EC8E-2A34-0D5737B4C854}"/>
+                <a16:creationId xmlns="" xmlns:a16="http://schemas.microsoft.com/office/drawing/2014/main" id="{627C64FD-88E0-EC8E-2A34-0D5737B4C854}"/>
               </a:ext>
             </a:extLst>
           </p:cNvPr>
@@ -13295,7 +13459,7 @@
             <p:cNvPr id="12" name="Picture 4" descr="Project Jupyter | Try Jupyter">
               <a:extLst>
                 <a:ext uri="{FF2B5EF4-FFF2-40B4-BE49-F238E27FC236}">
-                  <a16:creationId xmlns:a16="http://schemas.microsoft.com/office/drawing/2014/main" xmlns="" id="{FF92EA36-91E7-292B-D7A0-2D4D83A10F98}"/>
+                  <a16:creationId xmlns="" xmlns:a16="http://schemas.microsoft.com/office/drawing/2014/main" id="{FF92EA36-91E7-292B-D7A0-2D4D83A10F98}"/>
                 </a:ext>
               </a:extLst>
             </p:cNvPr>
@@ -13342,7 +13506,7 @@
             <p:cNvPr id="13" name="Picture 8" descr="Google Colaboratory Colab - Guía Completa Español - Marketing Branding">
               <a:extLst>
                 <a:ext uri="{FF2B5EF4-FFF2-40B4-BE49-F238E27FC236}">
-                  <a16:creationId xmlns:a16="http://schemas.microsoft.com/office/drawing/2014/main" xmlns="" id="{46F1718A-89E6-9E63-E40B-2B19852D6AA0}"/>
+                  <a16:creationId xmlns="" xmlns:a16="http://schemas.microsoft.com/office/drawing/2014/main" id="{46F1718A-89E6-9E63-E40B-2B19852D6AA0}"/>
                 </a:ext>
               </a:extLst>
             </p:cNvPr>
@@ -13387,7 +13551,7 @@
             <p:cNvPr id="14" name="Picture 10" descr="IT12A01: FUNDAMENTALS OF PYTHON PROGRAMMING (SF) (SYNCHRONOUS E-LEARNING) -  NTUC LearningHub">
               <a:extLst>
                 <a:ext uri="{FF2B5EF4-FFF2-40B4-BE49-F238E27FC236}">
-                  <a16:creationId xmlns:a16="http://schemas.microsoft.com/office/drawing/2014/main" xmlns="" id="{33F6B1B4-9B79-D634-3E35-33F24609C848}"/>
+                  <a16:creationId xmlns="" xmlns:a16="http://schemas.microsoft.com/office/drawing/2014/main" id="{33F6B1B4-9B79-D634-3E35-33F24609C848}"/>
                 </a:ext>
               </a:extLst>
             </p:cNvPr>
@@ -13432,7 +13596,7 @@
             <p:cNvPr id="15" name="Sinal de Adição 7">
               <a:extLst>
                 <a:ext uri="{FF2B5EF4-FFF2-40B4-BE49-F238E27FC236}">
-                  <a16:creationId xmlns:a16="http://schemas.microsoft.com/office/drawing/2014/main" xmlns="" id="{6959EE6C-DCDB-E78B-5C50-EBD3FF3049E2}"/>
+                  <a16:creationId xmlns="" xmlns:a16="http://schemas.microsoft.com/office/drawing/2014/main" id="{6959EE6C-DCDB-E78B-5C50-EBD3FF3049E2}"/>
                 </a:ext>
               </a:extLst>
             </p:cNvPr>
@@ -13480,7 +13644,7 @@
             <p:cNvPr id="17" name="Sinal de Adição 10">
               <a:extLst>
                 <a:ext uri="{FF2B5EF4-FFF2-40B4-BE49-F238E27FC236}">
-                  <a16:creationId xmlns:a16="http://schemas.microsoft.com/office/drawing/2014/main" xmlns="" id="{30A21FDB-ABA6-9FD5-49EF-7762414AEF0C}"/>
+                  <a16:creationId xmlns="" xmlns:a16="http://schemas.microsoft.com/office/drawing/2014/main" id="{30A21FDB-ABA6-9FD5-49EF-7762414AEF0C}"/>
                 </a:ext>
               </a:extLst>
             </p:cNvPr>
@@ -13537,101 +13701,6 @@
 </p:sld>
 </file>
 
-<file path=ppt/slides/slide35.xml><?xml version="1.0" encoding="utf-8"?>
-<p:sld xmlns:a="http://schemas.openxmlformats.org/drawingml/2006/main" xmlns:r="http://schemas.openxmlformats.org/officeDocument/2006/relationships" xmlns:p="http://schemas.openxmlformats.org/presentationml/2006/main">
-  <p:cSld>
-    <p:spTree>
-      <p:nvGrpSpPr>
-        <p:cNvPr id="1" name=""/>
-        <p:cNvGrpSpPr/>
-        <p:nvPr/>
-      </p:nvGrpSpPr>
-      <p:grpSpPr>
-        <a:xfrm>
-          <a:off x="0" y="0"/>
-          <a:ext cx="0" cy="0"/>
-          <a:chOff x="0" y="0"/>
-          <a:chExt cx="0" cy="0"/>
-        </a:xfrm>
-      </p:grpSpPr>
-      <p:sp>
-        <p:nvSpPr>
-          <p:cNvPr id="2" name="Title 1">
-            <a:extLst>
-              <a:ext uri="{FF2B5EF4-FFF2-40B4-BE49-F238E27FC236}">
-                <a16:creationId xmlns:a16="http://schemas.microsoft.com/office/drawing/2014/main" xmlns="" id="{E8FD0E11-3B37-4336-5BF0-C8C033354AF6}"/>
-              </a:ext>
-            </a:extLst>
-          </p:cNvPr>
-          <p:cNvSpPr>
-            <a:spLocks noGrp="1"/>
-          </p:cNvSpPr>
-          <p:nvPr>
-            <p:ph type="title"/>
-          </p:nvPr>
-        </p:nvSpPr>
-        <p:spPr/>
-        <p:txBody>
-          <a:bodyPr/>
-          <a:lstStyle/>
-          <a:p>
-            <a:r>
-              <a:rPr lang="pt-BR" dirty="0"/>
-              <a:t>Lista de exercícios</a:t>
-            </a:r>
-            <a:endParaRPr lang="en-US" dirty="0"/>
-          </a:p>
-        </p:txBody>
-      </p:sp>
-      <p:sp>
-        <p:nvSpPr>
-          <p:cNvPr id="3" name="Content Placeholder 2">
-            <a:extLst>
-              <a:ext uri="{FF2B5EF4-FFF2-40B4-BE49-F238E27FC236}">
-                <a16:creationId xmlns:a16="http://schemas.microsoft.com/office/drawing/2014/main" xmlns="" id="{32CB14AB-72E4-05EB-962C-F8B4618D0574}"/>
-              </a:ext>
-            </a:extLst>
-          </p:cNvPr>
-          <p:cNvSpPr>
-            <a:spLocks noGrp="1"/>
-          </p:cNvSpPr>
-          <p:nvPr>
-            <p:ph idx="1"/>
-          </p:nvPr>
-        </p:nvSpPr>
-        <p:spPr/>
-        <p:txBody>
-          <a:bodyPr/>
-          <a:lstStyle/>
-          <a:p>
-            <a:pPr marL="0" indent="0">
-              <a:buNone/>
-            </a:pPr>
-            <a:r>
-              <a:rPr lang="pt-BR" dirty="0"/>
-              <a:t>Lista #13 – </a:t>
-            </a:r>
-            <a:r>
-              <a:rPr lang="pt-BR" dirty="0" err="1"/>
-              <a:t>kmeans</a:t>
-            </a:r>
-            <a:endParaRPr lang="en-US" dirty="0"/>
-          </a:p>
-        </p:txBody>
-      </p:sp>
-    </p:spTree>
-    <p:extLst>
-      <p:ext uri="{BB962C8B-B14F-4D97-AF65-F5344CB8AC3E}">
-        <p14:creationId xmlns:p14="http://schemas.microsoft.com/office/powerpoint/2010/main" val="4209356042"/>
-      </p:ext>
-    </p:extLst>
-  </p:cSld>
-  <p:clrMapOvr>
-    <a:masterClrMapping/>
-  </p:clrMapOvr>
-</p:sld>
-</file>
-
 <file path=ppt/slides/slide36.xml><?xml version="1.0" encoding="utf-8"?>
 <p:sld xmlns:a="http://schemas.openxmlformats.org/drawingml/2006/main" xmlns:r="http://schemas.openxmlformats.org/officeDocument/2006/relationships" xmlns:p="http://schemas.openxmlformats.org/presentationml/2006/main">
   <p:cSld>
@@ -13651,64 +13720,73 @@
       </p:grpSpPr>
       <p:sp>
         <p:nvSpPr>
-          <p:cNvPr id="4" name="Título 1">
+          <p:cNvPr id="2" name="Title 1">
             <a:extLst>
               <a:ext uri="{FF2B5EF4-FFF2-40B4-BE49-F238E27FC236}">
-                <a16:creationId xmlns:a16="http://schemas.microsoft.com/office/drawing/2014/main" xmlns="" id="{32666AC8-2E17-4DB4-B0F5-60C640CCFD2E}"/>
+                <a16:creationId xmlns="" xmlns:a16="http://schemas.microsoft.com/office/drawing/2014/main" id="{E8FD0E11-3B37-4336-5BF0-C8C033354AF6}"/>
               </a:ext>
             </a:extLst>
           </p:cNvPr>
-          <p:cNvSpPr txBox="1">
-            <a:spLocks/>
+          <p:cNvSpPr>
+            <a:spLocks noGrp="1"/>
           </p:cNvSpPr>
-          <p:nvPr/>
-        </p:nvSpPr>
-        <p:spPr>
-          <a:xfrm>
-            <a:off x="1431533" y="2720526"/>
-            <a:ext cx="9144000" cy="1029541"/>
-          </a:xfrm>
-          <a:prstGeom prst="rect">
-            <a:avLst/>
-          </a:prstGeom>
-        </p:spPr>
-        <p:txBody>
-          <a:bodyPr vert="horz" lIns="91440" tIns="45720" rIns="91440" bIns="45720" rtlCol="0" anchor="ctr">
-            <a:normAutofit/>
-          </a:bodyPr>
-          <a:lstStyle>
-            <a:lvl1pPr algn="l" defTabSz="914400" rtl="0" eaLnBrk="1" latinLnBrk="0" hangingPunct="1">
-              <a:lnSpc>
-                <a:spcPct val="90000"/>
-              </a:lnSpc>
-              <a:spcBef>
-                <a:spcPct val="0"/>
-              </a:spcBef>
+          <p:nvPr>
+            <p:ph type="title"/>
+          </p:nvPr>
+        </p:nvSpPr>
+        <p:spPr/>
+        <p:txBody>
+          <a:bodyPr/>
+          <a:lstStyle/>
+          <a:p>
+            <a:r>
+              <a:rPr lang="pt-BR" dirty="0"/>
+              <a:t>Lista de exercícios</a:t>
+            </a:r>
+            <a:endParaRPr lang="en-US" dirty="0"/>
+          </a:p>
+        </p:txBody>
+      </p:sp>
+      <p:sp>
+        <p:nvSpPr>
+          <p:cNvPr id="3" name="Content Placeholder 2">
+            <a:extLst>
+              <a:ext uri="{FF2B5EF4-FFF2-40B4-BE49-F238E27FC236}">
+                <a16:creationId xmlns="" xmlns:a16="http://schemas.microsoft.com/office/drawing/2014/main" id="{32CB14AB-72E4-05EB-962C-F8B4618D0574}"/>
+              </a:ext>
+            </a:extLst>
+          </p:cNvPr>
+          <p:cNvSpPr>
+            <a:spLocks noGrp="1"/>
+          </p:cNvSpPr>
+          <p:nvPr>
+            <p:ph idx="1"/>
+          </p:nvPr>
+        </p:nvSpPr>
+        <p:spPr/>
+        <p:txBody>
+          <a:bodyPr/>
+          <a:lstStyle/>
+          <a:p>
+            <a:pPr marL="0" indent="0">
               <a:buNone/>
-              <a:defRPr sz="4400" kern="1200">
-                <a:solidFill>
-                  <a:schemeClr val="tx1"/>
-                </a:solidFill>
-                <a:latin typeface="+mj-lt"/>
-                <a:ea typeface="+mj-ea"/>
-                <a:cs typeface="+mj-cs"/>
-              </a:defRPr>
-            </a:lvl1pPr>
-          </a:lstStyle>
-          <a:p>
-            <a:pPr algn="ctr"/>
-            <a:r>
-              <a:rPr lang="pt-BR" sz="6600" dirty="0"/>
-              <a:t>Perguntas?</a:t>
-            </a:r>
-            <a:endParaRPr lang="pt-BR" sz="6600" b="1" i="1" dirty="0"/>
+            </a:pPr>
+            <a:r>
+              <a:rPr lang="pt-BR" dirty="0"/>
+              <a:t>Lista #13 – </a:t>
+            </a:r>
+            <a:r>
+              <a:rPr lang="pt-BR" dirty="0" err="1"/>
+              <a:t>kmeans</a:t>
+            </a:r>
+            <a:endParaRPr lang="en-US" dirty="0"/>
           </a:p>
         </p:txBody>
       </p:sp>
     </p:spTree>
     <p:extLst>
       <p:ext uri="{BB962C8B-B14F-4D97-AF65-F5344CB8AC3E}">
-        <p14:creationId xmlns:p14="http://schemas.microsoft.com/office/powerpoint/2010/main" val="3773005660"/>
+        <p14:creationId xmlns:p14="http://schemas.microsoft.com/office/powerpoint/2010/main" val="4209356042"/>
       </p:ext>
     </p:extLst>
   </p:cSld>
@@ -13740,7 +13818,7 @@
           <p:cNvPr id="4" name="Título 1">
             <a:extLst>
               <a:ext uri="{FF2B5EF4-FFF2-40B4-BE49-F238E27FC236}">
-                <a16:creationId xmlns:a16="http://schemas.microsoft.com/office/drawing/2014/main" xmlns="" id="{32666AC8-2E17-4DB4-B0F5-60C640CCFD2E}"/>
+                <a16:creationId xmlns="" xmlns:a16="http://schemas.microsoft.com/office/drawing/2014/main" id="{32666AC8-2E17-4DB4-B0F5-60C640CCFD2E}"/>
               </a:ext>
             </a:extLst>
           </p:cNvPr>
@@ -13785,6 +13863,92 @@
             <a:pPr algn="ctr"/>
             <a:r>
               <a:rPr lang="pt-BR" sz="6600" dirty="0"/>
+              <a:t>Perguntas?</a:t>
+            </a:r>
+            <a:endParaRPr lang="pt-BR" sz="6600" b="1" i="1" dirty="0"/>
+          </a:p>
+        </p:txBody>
+      </p:sp>
+    </p:spTree>
+    <p:extLst>
+      <p:ext uri="{BB962C8B-B14F-4D97-AF65-F5344CB8AC3E}">
+        <p14:creationId xmlns:p14="http://schemas.microsoft.com/office/powerpoint/2010/main" val="3773005660"/>
+      </p:ext>
+    </p:extLst>
+  </p:cSld>
+  <p:clrMapOvr>
+    <a:masterClrMapping/>
+  </p:clrMapOvr>
+</p:sld>
+</file>
+
+<file path=ppt/slides/slide38.xml><?xml version="1.0" encoding="utf-8"?>
+<p:sld xmlns:a="http://schemas.openxmlformats.org/drawingml/2006/main" xmlns:r="http://schemas.openxmlformats.org/officeDocument/2006/relationships" xmlns:p="http://schemas.openxmlformats.org/presentationml/2006/main">
+  <p:cSld>
+    <p:spTree>
+      <p:nvGrpSpPr>
+        <p:cNvPr id="1" name=""/>
+        <p:cNvGrpSpPr/>
+        <p:nvPr/>
+      </p:nvGrpSpPr>
+      <p:grpSpPr>
+        <a:xfrm>
+          <a:off x="0" y="0"/>
+          <a:ext cx="0" cy="0"/>
+          <a:chOff x="0" y="0"/>
+          <a:chExt cx="0" cy="0"/>
+        </a:xfrm>
+      </p:grpSpPr>
+      <p:sp>
+        <p:nvSpPr>
+          <p:cNvPr id="4" name="Título 1">
+            <a:extLst>
+              <a:ext uri="{FF2B5EF4-FFF2-40B4-BE49-F238E27FC236}">
+                <a16:creationId xmlns="" xmlns:a16="http://schemas.microsoft.com/office/drawing/2014/main" id="{32666AC8-2E17-4DB4-B0F5-60C640CCFD2E}"/>
+              </a:ext>
+            </a:extLst>
+          </p:cNvPr>
+          <p:cNvSpPr txBox="1">
+            <a:spLocks/>
+          </p:cNvSpPr>
+          <p:nvPr/>
+        </p:nvSpPr>
+        <p:spPr>
+          <a:xfrm>
+            <a:off x="1431533" y="2720526"/>
+            <a:ext cx="9144000" cy="1029541"/>
+          </a:xfrm>
+          <a:prstGeom prst="rect">
+            <a:avLst/>
+          </a:prstGeom>
+        </p:spPr>
+        <p:txBody>
+          <a:bodyPr vert="horz" lIns="91440" tIns="45720" rIns="91440" bIns="45720" rtlCol="0" anchor="ctr">
+            <a:normAutofit/>
+          </a:bodyPr>
+          <a:lstStyle>
+            <a:lvl1pPr algn="l" defTabSz="914400" rtl="0" eaLnBrk="1" latinLnBrk="0" hangingPunct="1">
+              <a:lnSpc>
+                <a:spcPct val="90000"/>
+              </a:lnSpc>
+              <a:spcBef>
+                <a:spcPct val="0"/>
+              </a:spcBef>
+              <a:buNone/>
+              <a:defRPr sz="4400" kern="1200">
+                <a:solidFill>
+                  <a:schemeClr val="tx1"/>
+                </a:solidFill>
+                <a:latin typeface="+mj-lt"/>
+                <a:ea typeface="+mj-ea"/>
+                <a:cs typeface="+mj-cs"/>
+              </a:defRPr>
+            </a:lvl1pPr>
+          </a:lstStyle>
+          <a:p>
+            <a:pPr algn="ctr"/>
+            <a:r>
+              <a:rPr lang="pt-BR" sz="6600" dirty="0"/>
               <a:t>Obrigado!</a:t>
             </a:r>
             <a:endParaRPr lang="pt-BR" sz="6600" b="1" i="1" dirty="0"/>
@@ -13804,7 +13968,7 @@
 </p:sld>
 </file>
 
-<file path=ppt/slides/slide38.xml><?xml version="1.0" encoding="utf-8"?>
+<file path=ppt/slides/slide39.xml><?xml version="1.0" encoding="utf-8"?>
 <p:sld xmlns:a="http://schemas.openxmlformats.org/drawingml/2006/main" xmlns:r="http://schemas.openxmlformats.org/officeDocument/2006/relationships" xmlns:p="http://schemas.openxmlformats.org/presentationml/2006/main">
   <p:cSld>
     <p:spTree>
@@ -14165,7 +14329,7 @@
         <p:cNvPr id="1" name="">
           <a:extLst>
             <a:ext uri="{FF2B5EF4-FFF2-40B4-BE49-F238E27FC236}">
-              <a16:creationId xmlns:a16="http://schemas.microsoft.com/office/drawing/2014/main" xmlns="" id="{E5F23F1A-965B-E657-4F46-B48EB78CFF12}"/>
+              <a16:creationId xmlns="" xmlns:a16="http://schemas.microsoft.com/office/drawing/2014/main" id="{E5F23F1A-965B-E657-4F46-B48EB78CFF12}"/>
             </a:ext>
           </a:extLst>
         </p:cNvPr>
@@ -14185,7 +14349,7 @@
           <p:cNvPr id="2" name="Title 1">
             <a:extLst>
               <a:ext uri="{FF2B5EF4-FFF2-40B4-BE49-F238E27FC236}">
-                <a16:creationId xmlns:a16="http://schemas.microsoft.com/office/drawing/2014/main" xmlns="" id="{1D2CEC37-D651-72A5-0293-3FB911F60F37}"/>
+                <a16:creationId xmlns="" xmlns:a16="http://schemas.microsoft.com/office/drawing/2014/main" id="{1D2CEC37-D651-72A5-0293-3FB911F60F37}"/>
               </a:ext>
             </a:extLst>
           </p:cNvPr>
@@ -14213,7 +14377,7 @@
           <p:cNvPr id="7" name="Content Placeholder 2">
             <a:extLst>
               <a:ext uri="{FF2B5EF4-FFF2-40B4-BE49-F238E27FC236}">
-                <a16:creationId xmlns:a16="http://schemas.microsoft.com/office/drawing/2014/main" xmlns="" id="{B3C1A135-4B52-F54B-5BDE-7C6DA1069706}"/>
+                <a16:creationId xmlns="" xmlns:a16="http://schemas.microsoft.com/office/drawing/2014/main" id="{B3C1A135-4B52-F54B-5BDE-7C6DA1069706}"/>
               </a:ext>
             </a:extLst>
           </p:cNvPr>
@@ -14304,7 +14468,7 @@
           <p:cNvPr id="5" name="Grupo 4">
             <a:extLst>
               <a:ext uri="{FF2B5EF4-FFF2-40B4-BE49-F238E27FC236}">
-                <a16:creationId xmlns:a16="http://schemas.microsoft.com/office/drawing/2014/main" xmlns="" id="{FD3AFEA6-16E8-D562-210E-DDE126CC469D}"/>
+                <a16:creationId xmlns="" xmlns:a16="http://schemas.microsoft.com/office/drawing/2014/main" id="{FD3AFEA6-16E8-D562-210E-DDE126CC469D}"/>
               </a:ext>
             </a:extLst>
           </p:cNvPr>
@@ -14324,7 +14488,7 @@
             <p:cNvPr id="6" name="Picture 2" descr="K-Means Clustering using Python. Welcome back guys! Hope you had a great… |  by Luigi Fiori | Medium">
               <a:extLst>
                 <a:ext uri="{FF2B5EF4-FFF2-40B4-BE49-F238E27FC236}">
-                  <a16:creationId xmlns:a16="http://schemas.microsoft.com/office/drawing/2014/main" xmlns="" id="{5EE61C46-3856-780A-E6BB-BC8EBB4234F4}"/>
+                  <a16:creationId xmlns="" xmlns:a16="http://schemas.microsoft.com/office/drawing/2014/main" id="{5EE61C46-3856-780A-E6BB-BC8EBB4234F4}"/>
                 </a:ext>
               </a:extLst>
             </p:cNvPr>
@@ -14369,7 +14533,7 @@
             <p:cNvPr id="8" name="CaixaDeTexto 7">
               <a:extLst>
                 <a:ext uri="{FF2B5EF4-FFF2-40B4-BE49-F238E27FC236}">
-                  <a16:creationId xmlns:a16="http://schemas.microsoft.com/office/drawing/2014/main" xmlns="" id="{843AD3E7-A8FE-599D-36F8-EA8BA9682F1B}"/>
+                  <a16:creationId xmlns="" xmlns:a16="http://schemas.microsoft.com/office/drawing/2014/main" id="{843AD3E7-A8FE-599D-36F8-EA8BA9682F1B}"/>
                 </a:ext>
               </a:extLst>
             </p:cNvPr>
@@ -14406,7 +14570,7 @@
             <p:cNvPr id="9" name="Picture 2" descr="K-Means Clustering using Python. Welcome back guys! Hope you had a great… |  by Luigi Fiori | Medium">
               <a:extLst>
                 <a:ext uri="{FF2B5EF4-FFF2-40B4-BE49-F238E27FC236}">
-                  <a16:creationId xmlns:a16="http://schemas.microsoft.com/office/drawing/2014/main" xmlns="" id="{E7C74A0F-F2DD-912F-E092-3530D068D40B}"/>
+                  <a16:creationId xmlns="" xmlns:a16="http://schemas.microsoft.com/office/drawing/2014/main" id="{E7C74A0F-F2DD-912F-E092-3530D068D40B}"/>
                 </a:ext>
               </a:extLst>
             </p:cNvPr>
@@ -14451,7 +14615,7 @@
             <p:cNvPr id="10" name="Seta para a direita 9">
               <a:extLst>
                 <a:ext uri="{FF2B5EF4-FFF2-40B4-BE49-F238E27FC236}">
-                  <a16:creationId xmlns:a16="http://schemas.microsoft.com/office/drawing/2014/main" xmlns="" id="{88A77E2D-B8CF-1AE8-8196-DD8F94371FF0}"/>
+                  <a16:creationId xmlns="" xmlns:a16="http://schemas.microsoft.com/office/drawing/2014/main" id="{88A77E2D-B8CF-1AE8-8196-DD8F94371FF0}"/>
                 </a:ext>
               </a:extLst>
             </p:cNvPr>
@@ -15152,7 +15316,7 @@
           <p:cNvPr id="2" name="Title 1">
             <a:extLst>
               <a:ext uri="{FF2B5EF4-FFF2-40B4-BE49-F238E27FC236}">
-                <a16:creationId xmlns:a16="http://schemas.microsoft.com/office/drawing/2014/main" xmlns="" id="{536BFB42-0017-5ED1-7773-E084E5A015B7}"/>
+                <a16:creationId xmlns="" xmlns:a16="http://schemas.microsoft.com/office/drawing/2014/main" id="{536BFB42-0017-5ED1-7773-E084E5A015B7}"/>
               </a:ext>
             </a:extLst>
           </p:cNvPr>
@@ -15181,7 +15345,7 @@
           <p:cNvPr id="3" name="Content Placeholder 2">
             <a:extLst>
               <a:ext uri="{FF2B5EF4-FFF2-40B4-BE49-F238E27FC236}">
-                <a16:creationId xmlns:a16="http://schemas.microsoft.com/office/drawing/2014/main" xmlns="" id="{D299C266-04B6-6A8C-91F5-24FCD2CC3103}"/>
+                <a16:creationId xmlns="" xmlns:a16="http://schemas.microsoft.com/office/drawing/2014/main" id="{D299C266-04B6-6A8C-91F5-24FCD2CC3103}"/>
               </a:ext>
             </a:extLst>
           </p:cNvPr>
@@ -15351,7 +15515,7 @@
           <p:cNvPr id="5" name="Picture 2" descr="K-means clustering on the digits dataset (PCA-reduced data) Centroids are marked with white cross">
             <a:extLst>
               <a:ext uri="{FF2B5EF4-FFF2-40B4-BE49-F238E27FC236}">
-                <a16:creationId xmlns:a16="http://schemas.microsoft.com/office/drawing/2014/main" xmlns="" id="{A7524CD6-9254-ABD9-EBBF-94136AAAEDE9}"/>
+                <a16:creationId xmlns="" xmlns:a16="http://schemas.microsoft.com/office/drawing/2014/main" id="{A7524CD6-9254-ABD9-EBBF-94136AAAEDE9}"/>
               </a:ext>
             </a:extLst>
           </p:cNvPr>
@@ -15573,7 +15737,7 @@
           <p:cNvPr id="1028" name="Picture 4" descr="K Means Clustering no Aprendizado de Máquinas — Aprendizado de Máquina —  DATA SCIENCE">
             <a:extLst>
               <a:ext uri="{FF2B5EF4-FFF2-40B4-BE49-F238E27FC236}">
-                <a16:creationId xmlns:a16="http://schemas.microsoft.com/office/drawing/2014/main" xmlns="" id="{D99905E1-3749-BAAD-E01A-C9B3686C4770}"/>
+                <a16:creationId xmlns="" xmlns:a16="http://schemas.microsoft.com/office/drawing/2014/main" id="{D99905E1-3749-BAAD-E01A-C9B3686C4770}"/>
               </a:ext>
             </a:extLst>
           </p:cNvPr>

--- a/slides/C24_kMeans.pptx
+++ b/slides/C24_kMeans.pptx
@@ -19,25 +19,25 @@
     <p:sldId id="287" r:id="rId10"/>
     <p:sldId id="400" r:id="rId11"/>
     <p:sldId id="296" r:id="rId12"/>
-    <p:sldId id="399" r:id="rId13"/>
-    <p:sldId id="288" r:id="rId14"/>
-    <p:sldId id="297" r:id="rId15"/>
-    <p:sldId id="403" r:id="rId16"/>
-    <p:sldId id="402" r:id="rId17"/>
-    <p:sldId id="298" r:id="rId18"/>
-    <p:sldId id="289" r:id="rId19"/>
-    <p:sldId id="290" r:id="rId20"/>
-    <p:sldId id="291" r:id="rId21"/>
-    <p:sldId id="404" r:id="rId22"/>
-    <p:sldId id="405" r:id="rId23"/>
-    <p:sldId id="406" r:id="rId24"/>
-    <p:sldId id="407" r:id="rId25"/>
-    <p:sldId id="408" r:id="rId26"/>
-    <p:sldId id="409" r:id="rId27"/>
-    <p:sldId id="410" r:id="rId28"/>
-    <p:sldId id="292" r:id="rId29"/>
-    <p:sldId id="299" r:id="rId30"/>
-    <p:sldId id="412" r:id="rId31"/>
+    <p:sldId id="413" r:id="rId13"/>
+    <p:sldId id="414" r:id="rId14"/>
+    <p:sldId id="415" r:id="rId15"/>
+    <p:sldId id="298" r:id="rId16"/>
+    <p:sldId id="290" r:id="rId17"/>
+    <p:sldId id="291" r:id="rId18"/>
+    <p:sldId id="417" r:id="rId19"/>
+    <p:sldId id="404" r:id="rId20"/>
+    <p:sldId id="405" r:id="rId21"/>
+    <p:sldId id="406" r:id="rId22"/>
+    <p:sldId id="407" r:id="rId23"/>
+    <p:sldId id="408" r:id="rId24"/>
+    <p:sldId id="409" r:id="rId25"/>
+    <p:sldId id="410" r:id="rId26"/>
+    <p:sldId id="418" r:id="rId27"/>
+    <p:sldId id="292" r:id="rId28"/>
+    <p:sldId id="299" r:id="rId29"/>
+    <p:sldId id="412" r:id="rId30"/>
+    <p:sldId id="416" r:id="rId31"/>
     <p:sldId id="411" r:id="rId32"/>
     <p:sldId id="293" r:id="rId33"/>
     <p:sldId id="300" r:id="rId34"/>
@@ -1435,7 +1435,7 @@
                 <a:hlinkClick r:id="rId3">
                   <a:extLst>
                     <a:ext uri="{A12FA001-AC4F-418D-AE19-62706E023703}">
-                      <ahyp:hlinkClr xmlns="" xmlns:ahyp="http://schemas.microsoft.com/office/drawing/2018/hyperlinkcolor" val="tx"/>
+                      <ahyp:hlinkClr xmlns:ahyp="http://schemas.microsoft.com/office/drawing/2018/hyperlinkcolor" xmlns="" val="tx"/>
                     </a:ext>
                   </a:extLst>
                 </a:hlinkClick>
@@ -1593,7 +1593,7 @@
         <p:cNvPr id="1" name="">
           <a:extLst>
             <a:ext uri="{FF2B5EF4-FFF2-40B4-BE49-F238E27FC236}">
-              <a16:creationId xmlns="" xmlns:a16="http://schemas.microsoft.com/office/drawing/2014/main" id="{BFE637E2-97BB-CFD3-DBB7-5EC561A4F1C5}"/>
+              <a16:creationId xmlns:a16="http://schemas.microsoft.com/office/drawing/2014/main" xmlns="" id="{BFE637E2-97BB-CFD3-DBB7-5EC561A4F1C5}"/>
             </a:ext>
           </a:extLst>
         </p:cNvPr>
@@ -1613,7 +1613,7 @@
           <p:cNvPr id="2" name="Slide Image Placeholder 1">
             <a:extLst>
               <a:ext uri="{FF2B5EF4-FFF2-40B4-BE49-F238E27FC236}">
-                <a16:creationId xmlns="" xmlns:a16="http://schemas.microsoft.com/office/drawing/2014/main" id="{4ED7BD22-361E-0DCE-46D8-42A9C128E592}"/>
+                <a16:creationId xmlns:a16="http://schemas.microsoft.com/office/drawing/2014/main" xmlns="" id="{4ED7BD22-361E-0DCE-46D8-42A9C128E592}"/>
               </a:ext>
             </a:extLst>
           </p:cNvPr>
@@ -1631,7 +1631,7 @@
           <p:cNvPr id="3" name="Notes Placeholder 2">
             <a:extLst>
               <a:ext uri="{FF2B5EF4-FFF2-40B4-BE49-F238E27FC236}">
-                <a16:creationId xmlns="" xmlns:a16="http://schemas.microsoft.com/office/drawing/2014/main" id="{A845AE5E-1008-C289-F444-04515B31A21D}"/>
+                <a16:creationId xmlns:a16="http://schemas.microsoft.com/office/drawing/2014/main" xmlns="" id="{A845AE5E-1008-C289-F444-04515B31A21D}"/>
               </a:ext>
             </a:extLst>
           </p:cNvPr>
@@ -1709,7 +1709,7 @@
           <p:cNvPr id="4" name="Slide Number Placeholder 3">
             <a:extLst>
               <a:ext uri="{FF2B5EF4-FFF2-40B4-BE49-F238E27FC236}">
-                <a16:creationId xmlns="" xmlns:a16="http://schemas.microsoft.com/office/drawing/2014/main" id="{64C5BAB2-4C6F-96F0-D4ED-0C66FFB4872B}"/>
+                <a16:creationId xmlns:a16="http://schemas.microsoft.com/office/drawing/2014/main" xmlns="" id="{64C5BAB2-4C6F-96F0-D4ED-0C66FFB4872B}"/>
               </a:ext>
             </a:extLst>
           </p:cNvPr>
@@ -2722,7 +2722,7 @@
         <p:cNvPr id="1" name="">
           <a:extLst>
             <a:ext uri="{FF2B5EF4-FFF2-40B4-BE49-F238E27FC236}">
-              <a16:creationId xmlns="" xmlns:a16="http://schemas.microsoft.com/office/drawing/2014/main" id="{D98F69D2-AA2F-1FAB-FC58-E17B9F051FEC}"/>
+              <a16:creationId xmlns:a16="http://schemas.microsoft.com/office/drawing/2014/main" xmlns="" id="{D98F69D2-AA2F-1FAB-FC58-E17B9F051FEC}"/>
             </a:ext>
           </a:extLst>
         </p:cNvPr>
@@ -2742,7 +2742,7 @@
           <p:cNvPr id="2" name="Espaço Reservado para Imagem de Slide 1">
             <a:extLst>
               <a:ext uri="{FF2B5EF4-FFF2-40B4-BE49-F238E27FC236}">
-                <a16:creationId xmlns="" xmlns:a16="http://schemas.microsoft.com/office/drawing/2014/main" id="{BFA38404-D7C9-03F2-A7E5-10C0EFC8F190}"/>
+                <a16:creationId xmlns:a16="http://schemas.microsoft.com/office/drawing/2014/main" xmlns="" id="{BFA38404-D7C9-03F2-A7E5-10C0EFC8F190}"/>
               </a:ext>
             </a:extLst>
           </p:cNvPr>
@@ -2760,7 +2760,7 @@
           <p:cNvPr id="3" name="Espaço Reservado para Anotações 2">
             <a:extLst>
               <a:ext uri="{FF2B5EF4-FFF2-40B4-BE49-F238E27FC236}">
-                <a16:creationId xmlns="" xmlns:a16="http://schemas.microsoft.com/office/drawing/2014/main" id="{5A8313F1-5D52-52B4-46D0-20D6D6D5149A}"/>
+                <a16:creationId xmlns:a16="http://schemas.microsoft.com/office/drawing/2014/main" xmlns="" id="{5A8313F1-5D52-52B4-46D0-20D6D6D5149A}"/>
               </a:ext>
             </a:extLst>
           </p:cNvPr>
@@ -2878,7 +2878,7 @@
           <p:cNvPr id="4" name="Espaço Reservado para Número de Slide 3">
             <a:extLst>
               <a:ext uri="{FF2B5EF4-FFF2-40B4-BE49-F238E27FC236}">
-                <a16:creationId xmlns="" xmlns:a16="http://schemas.microsoft.com/office/drawing/2014/main" id="{428A95A6-CC49-168A-C37A-1C6EB3B93225}"/>
+                <a16:creationId xmlns:a16="http://schemas.microsoft.com/office/drawing/2014/main" xmlns="" id="{428A95A6-CC49-168A-C37A-1C6EB3B93225}"/>
               </a:ext>
             </a:extLst>
           </p:cNvPr>
@@ -3350,7 +3350,7 @@
           <a:p>
             <a:fld id="{F430A2A4-8C14-4B1A-AD48-7B6401078BF7}" type="slidenum">
               <a:rPr lang="pt-BR" smtClean="0"/>
-              <a:t>20</a:t>
+              <a:t>17</a:t>
             </a:fld>
             <a:endParaRPr lang="pt-BR"/>
           </a:p>
@@ -6231,7 +6231,7 @@
           <p:cNvPr id="4" name="CaixaDeTexto 3">
             <a:extLst>
               <a:ext uri="{FF2B5EF4-FFF2-40B4-BE49-F238E27FC236}">
-                <a16:creationId xmlns="" xmlns:a16="http://schemas.microsoft.com/office/drawing/2014/main" id="{430EB894-B7D4-434C-9D1A-A14094D9BEEC}"/>
+                <a16:creationId xmlns:a16="http://schemas.microsoft.com/office/drawing/2014/main" xmlns="" id="{430EB894-B7D4-434C-9D1A-A14094D9BEEC}"/>
               </a:ext>
             </a:extLst>
           </p:cNvPr>
@@ -6275,7 +6275,7 @@
           <p:cNvPr id="1026" name="Picture 2" descr="Logo">
             <a:extLst>
               <a:ext uri="{FF2B5EF4-FFF2-40B4-BE49-F238E27FC236}">
-                <a16:creationId xmlns="" xmlns:a16="http://schemas.microsoft.com/office/drawing/2014/main" id="{3F2642E0-4F6A-4196-8F58-E77D36E9A33F}"/>
+                <a16:creationId xmlns:a16="http://schemas.microsoft.com/office/drawing/2014/main" xmlns="" id="{3F2642E0-4F6A-4196-8F58-E77D36E9A33F}"/>
               </a:ext>
             </a:extLst>
           </p:cNvPr>
@@ -6320,7 +6320,7 @@
           <p:cNvPr id="5122" name="Picture 2" descr="Image result for machine learning">
             <a:extLst>
               <a:ext uri="{FF2B5EF4-FFF2-40B4-BE49-F238E27FC236}">
-                <a16:creationId xmlns="" xmlns:a16="http://schemas.microsoft.com/office/drawing/2014/main" id="{810CE0A2-4102-44A6-A370-175E7896CDCB}"/>
+                <a16:creationId xmlns:a16="http://schemas.microsoft.com/office/drawing/2014/main" xmlns="" id="{810CE0A2-4102-44A6-A370-175E7896CDCB}"/>
               </a:ext>
             </a:extLst>
           </p:cNvPr>
@@ -6365,7 +6365,7 @@
           <p:cNvPr id="7" name="Título 1">
             <a:extLst>
               <a:ext uri="{FF2B5EF4-FFF2-40B4-BE49-F238E27FC236}">
-                <a16:creationId xmlns="" xmlns:a16="http://schemas.microsoft.com/office/drawing/2014/main" id="{32666AC8-2E17-4DB4-B0F5-60C640CCFD2E}"/>
+                <a16:creationId xmlns:a16="http://schemas.microsoft.com/office/drawing/2014/main" xmlns="" id="{32666AC8-2E17-4DB4-B0F5-60C640CCFD2E}"/>
               </a:ext>
             </a:extLst>
           </p:cNvPr>
@@ -6446,7 +6446,7 @@
           <p:cNvPr id="2" name="Title 1">
             <a:extLst>
               <a:ext uri="{FF2B5EF4-FFF2-40B4-BE49-F238E27FC236}">
-                <a16:creationId xmlns="" xmlns:a16="http://schemas.microsoft.com/office/drawing/2014/main" id="{FFE84507-EC77-45EC-8B3A-27BFC439AB0A}"/>
+                <a16:creationId xmlns:a16="http://schemas.microsoft.com/office/drawing/2014/main" xmlns="" id="{FFE84507-EC77-45EC-8B3A-27BFC439AB0A}"/>
               </a:ext>
             </a:extLst>
           </p:cNvPr>
@@ -6475,7 +6475,7 @@
           <p:cNvPr id="3" name="Content Placeholder 2">
             <a:extLst>
               <a:ext uri="{FF2B5EF4-FFF2-40B4-BE49-F238E27FC236}">
-                <a16:creationId xmlns="" xmlns:a16="http://schemas.microsoft.com/office/drawing/2014/main" id="{04FEB374-1415-DA51-E59A-B5E50D17F763}"/>
+                <a16:creationId xmlns:a16="http://schemas.microsoft.com/office/drawing/2014/main" xmlns="" id="{04FEB374-1415-DA51-E59A-B5E50D17F763}"/>
               </a:ext>
             </a:extLst>
           </p:cNvPr>
@@ -6728,7 +6728,7 @@
         <p:cNvPr id="1" name="">
           <a:extLst>
             <a:ext uri="{FF2B5EF4-FFF2-40B4-BE49-F238E27FC236}">
-              <a16:creationId xmlns="" xmlns:a16="http://schemas.microsoft.com/office/drawing/2014/main" id="{5B00F73A-8390-7530-E708-9D3EBFB35B37}"/>
+              <a16:creationId xmlns:a16="http://schemas.microsoft.com/office/drawing/2014/main" xmlns="" id="{5B00F73A-8390-7530-E708-9D3EBFB35B37}"/>
             </a:ext>
           </a:extLst>
         </p:cNvPr>
@@ -6748,7 +6748,7 @@
           <p:cNvPr id="2" name="Título 1">
             <a:extLst>
               <a:ext uri="{FF2B5EF4-FFF2-40B4-BE49-F238E27FC236}">
-                <a16:creationId xmlns="" xmlns:a16="http://schemas.microsoft.com/office/drawing/2014/main" id="{A7779880-5E02-1DB8-EA94-C86330794A8C}"/>
+                <a16:creationId xmlns:a16="http://schemas.microsoft.com/office/drawing/2014/main" xmlns="" id="{A7779880-5E02-1DB8-EA94-C86330794A8C}"/>
               </a:ext>
             </a:extLst>
           </p:cNvPr>
@@ -6802,7 +6802,7 @@
               <p:cNvPr id="3" name="Espaço Reservado para Conteúdo 2">
                 <a:extLst>
                   <a:ext uri="{FF2B5EF4-FFF2-40B4-BE49-F238E27FC236}">
-                    <a16:creationId xmlns="" xmlns:a16="http://schemas.microsoft.com/office/drawing/2014/main" id="{A72472E5-6211-3EFD-BA89-06782640C939}"/>
+                    <a16:creationId xmlns:a16="http://schemas.microsoft.com/office/drawing/2014/main" xmlns="" id="{A72472E5-6211-3EFD-BA89-06782640C939}"/>
                   </a:ext>
                 </a:extLst>
               </p:cNvPr>
@@ -7164,7 +7164,7 @@
           <p:cNvPr id="4" name="Picture 3" descr="K Means Clustering no Aprendizado de Máquinas — Aprendizado de Máquina —  DATA SCIENCE">
             <a:extLst>
               <a:ext uri="{FF2B5EF4-FFF2-40B4-BE49-F238E27FC236}">
-                <a16:creationId xmlns="" xmlns:a16="http://schemas.microsoft.com/office/drawing/2014/main" id="{E728BEA3-C89C-08D5-CE28-8BD1C00DAD53}"/>
+                <a16:creationId xmlns:a16="http://schemas.microsoft.com/office/drawing/2014/main" xmlns="" id="{E728BEA3-C89C-08D5-CE28-8BD1C00DAD53}"/>
               </a:ext>
             </a:extLst>
           </p:cNvPr>
@@ -7236,116 +7236,6 @@
       </p:grpSpPr>
       <p:sp>
         <p:nvSpPr>
-          <p:cNvPr id="2" name="Title 1">
-            <a:extLst>
-              <a:ext uri="{FF2B5EF4-FFF2-40B4-BE49-F238E27FC236}">
-                <a16:creationId xmlns="" xmlns:a16="http://schemas.microsoft.com/office/drawing/2014/main" id="{D87F6E31-B0DF-F3EC-D348-0D4E93DD1974}"/>
-              </a:ext>
-            </a:extLst>
-          </p:cNvPr>
-          <p:cNvSpPr>
-            <a:spLocks noGrp="1"/>
-          </p:cNvSpPr>
-          <p:nvPr>
-            <p:ph type="title"/>
-          </p:nvPr>
-        </p:nvSpPr>
-        <p:spPr/>
-        <p:txBody>
-          <a:bodyPr/>
-          <a:lstStyle/>
-          <a:p>
-            <a:endParaRPr lang="en-US"/>
-          </a:p>
-        </p:txBody>
-      </p:sp>
-      <p:sp>
-        <p:nvSpPr>
-          <p:cNvPr id="3" name="Content Placeholder 2">
-            <a:extLst>
-              <a:ext uri="{FF2B5EF4-FFF2-40B4-BE49-F238E27FC236}">
-                <a16:creationId xmlns="" xmlns:a16="http://schemas.microsoft.com/office/drawing/2014/main" id="{5007CCEC-CA32-01B4-A9B5-F81A83FF3ECA}"/>
-              </a:ext>
-            </a:extLst>
-          </p:cNvPr>
-          <p:cNvSpPr>
-            <a:spLocks noGrp="1"/>
-          </p:cNvSpPr>
-          <p:nvPr>
-            <p:ph idx="1"/>
-          </p:nvPr>
-        </p:nvSpPr>
-        <p:spPr/>
-        <p:txBody>
-          <a:bodyPr>
-            <a:normAutofit/>
-          </a:bodyPr>
-          <a:lstStyle/>
-          <a:p>
-            <a:r>
-              <a:rPr lang="pt-BR" sz="5400" b="1" dirty="0">
-                <a:solidFill>
-                  <a:srgbClr val="FF0000"/>
-                </a:solidFill>
-              </a:rPr>
-              <a:t>PAREI </a:t>
-            </a:r>
-            <a:r>
-              <a:rPr lang="pt-BR" sz="5400" b="1" dirty="0" err="1">
-                <a:solidFill>
-                  <a:srgbClr val="FF0000"/>
-                </a:solidFill>
-              </a:rPr>
-              <a:t>AQUi</a:t>
-            </a:r>
-            <a:r>
-              <a:rPr lang="pt-BR" sz="5400" b="1" dirty="0">
-                <a:solidFill>
-                  <a:srgbClr val="FF0000"/>
-                </a:solidFill>
-              </a:rPr>
-              <a:t>!!!!</a:t>
-            </a:r>
-            <a:endParaRPr lang="en-US" sz="5400" b="1" dirty="0">
-              <a:solidFill>
-                <a:srgbClr val="FF0000"/>
-              </a:solidFill>
-            </a:endParaRPr>
-          </a:p>
-        </p:txBody>
-      </p:sp>
-    </p:spTree>
-    <p:extLst>
-      <p:ext uri="{BB962C8B-B14F-4D97-AF65-F5344CB8AC3E}">
-        <p14:creationId xmlns:p14="http://schemas.microsoft.com/office/powerpoint/2010/main" val="2112245231"/>
-      </p:ext>
-    </p:extLst>
-  </p:cSld>
-  <p:clrMapOvr>
-    <a:masterClrMapping/>
-  </p:clrMapOvr>
-</p:sld>
-</file>
-
-<file path=ppt/slides/slide13.xml><?xml version="1.0" encoding="utf-8"?>
-<p:sld xmlns:a="http://schemas.openxmlformats.org/drawingml/2006/main" xmlns:r="http://schemas.openxmlformats.org/officeDocument/2006/relationships" xmlns:p="http://schemas.openxmlformats.org/presentationml/2006/main">
-  <p:cSld>
-    <p:spTree>
-      <p:nvGrpSpPr>
-        <p:cNvPr id="1" name=""/>
-        <p:cNvGrpSpPr/>
-        <p:nvPr/>
-      </p:nvGrpSpPr>
-      <p:grpSpPr>
-        <a:xfrm>
-          <a:off x="0" y="0"/>
-          <a:ext cx="0" cy="0"/>
-          <a:chOff x="0" y="0"/>
-          <a:chExt cx="0" cy="0"/>
-        </a:xfrm>
-      </p:grpSpPr>
-      <p:sp>
-        <p:nvSpPr>
           <p:cNvPr id="2" name="Título 1"/>
           <p:cNvSpPr>
             <a:spLocks noGrp="1"/>
@@ -7531,11 +7421,7 @@
             </a:r>
             <a:r>
               <a:rPr lang="pt-BR" dirty="0" smtClean="0"/>
-              <a:t> </a:t>
-            </a:r>
-            <a:r>
-              <a:rPr lang="pt-BR" dirty="0" smtClean="0"/>
-              <a:t>umas das outras </a:t>
+              <a:t> umas das outras </a:t>
             </a:r>
             <a:r>
               <a:rPr lang="pt-BR" dirty="0"/>
@@ -7655,7 +7541,7 @@
     </p:spTree>
     <p:extLst>
       <p:ext uri="{BB962C8B-B14F-4D97-AF65-F5344CB8AC3E}">
-        <p14:creationId xmlns:p14="http://schemas.microsoft.com/office/powerpoint/2010/main" val="506141761"/>
+        <p14:creationId xmlns:p14="http://schemas.microsoft.com/office/powerpoint/2010/main" val="2343532738"/>
       </p:ext>
     </p:extLst>
   </p:cSld>
@@ -7665,7 +7551,7 @@
 </p:sld>
 </file>
 
-<file path=ppt/slides/slide14.xml><?xml version="1.0" encoding="utf-8"?>
+<file path=ppt/slides/slide13.xml><?xml version="1.0" encoding="utf-8"?>
 <p:sld xmlns:a="http://schemas.openxmlformats.org/drawingml/2006/main" xmlns:r="http://schemas.openxmlformats.org/officeDocument/2006/relationships" xmlns:p="http://schemas.openxmlformats.org/presentationml/2006/main">
   <p:cSld>
     <p:spTree>
@@ -7673,7 +7559,7 @@
         <p:cNvPr id="1" name="">
           <a:extLst>
             <a:ext uri="{FF2B5EF4-FFF2-40B4-BE49-F238E27FC236}">
-              <a16:creationId xmlns="" xmlns:a16="http://schemas.microsoft.com/office/drawing/2014/main" id="{36D1FDFF-84F9-A395-CDB0-AC77470C24F7}"/>
+              <a16:creationId xmlns:a16="http://schemas.microsoft.com/office/drawing/2014/main" xmlns="" id="{36D1FDFF-84F9-A395-CDB0-AC77470C24F7}"/>
             </a:ext>
           </a:extLst>
         </p:cNvPr>
@@ -7693,7 +7579,7 @@
           <p:cNvPr id="2" name="Título 1">
             <a:extLst>
               <a:ext uri="{FF2B5EF4-FFF2-40B4-BE49-F238E27FC236}">
-                <a16:creationId xmlns="" xmlns:a16="http://schemas.microsoft.com/office/drawing/2014/main" id="{CA82907A-6417-D3C2-265A-0FFD53046E99}"/>
+                <a16:creationId xmlns:a16="http://schemas.microsoft.com/office/drawing/2014/main" xmlns="" id="{CA82907A-6417-D3C2-265A-0FFD53046E99}"/>
               </a:ext>
             </a:extLst>
           </p:cNvPr>
@@ -7730,7 +7616,7 @@
           <p:cNvPr id="3" name="Espaço Reservado para Conteúdo 2">
             <a:extLst>
               <a:ext uri="{FF2B5EF4-FFF2-40B4-BE49-F238E27FC236}">
-                <a16:creationId xmlns="" xmlns:a16="http://schemas.microsoft.com/office/drawing/2014/main" id="{3C767761-7363-3966-1F66-B32029649DCD}"/>
+                <a16:creationId xmlns:a16="http://schemas.microsoft.com/office/drawing/2014/main" xmlns="" id="{3C767761-7363-3966-1F66-B32029649DCD}"/>
               </a:ext>
             </a:extLst>
           </p:cNvPr>
@@ -7796,7 +7682,7 @@
           <p:cNvPr id="5" name="Picture 2" descr="K-Means Clustering using Python. Welcome back guys! Hope you had a great… |  by Luigi Fiori | Medium">
             <a:extLst>
               <a:ext uri="{FF2B5EF4-FFF2-40B4-BE49-F238E27FC236}">
-                <a16:creationId xmlns="" xmlns:a16="http://schemas.microsoft.com/office/drawing/2014/main" id="{079377DD-55D2-BED3-3BB3-D573A6F13921}"/>
+                <a16:creationId xmlns:a16="http://schemas.microsoft.com/office/drawing/2014/main" xmlns="" id="{079377DD-55D2-BED3-3BB3-D573A6F13921}"/>
               </a:ext>
             </a:extLst>
           </p:cNvPr>
@@ -7839,7 +7725,7 @@
     </p:spTree>
     <p:extLst>
       <p:ext uri="{BB962C8B-B14F-4D97-AF65-F5344CB8AC3E}">
-        <p14:creationId xmlns:p14="http://schemas.microsoft.com/office/powerpoint/2010/main" val="2054730646"/>
+        <p14:creationId xmlns:p14="http://schemas.microsoft.com/office/powerpoint/2010/main" val="3604844345"/>
       </p:ext>
     </p:extLst>
   </p:cSld>
@@ -7849,7 +7735,7 @@
 </p:sld>
 </file>
 
-<file path=ppt/slides/slide15.xml><?xml version="1.0" encoding="utf-8"?>
+<file path=ppt/slides/slide14.xml><?xml version="1.0" encoding="utf-8"?>
 <p:sld xmlns:a="http://schemas.openxmlformats.org/drawingml/2006/main" xmlns:r="http://schemas.openxmlformats.org/officeDocument/2006/relationships" xmlns:p="http://schemas.openxmlformats.org/presentationml/2006/main">
   <p:cSld>
     <p:spTree>
@@ -7857,7 +7743,7 @@
         <p:cNvPr id="1" name="">
           <a:extLst>
             <a:ext uri="{FF2B5EF4-FFF2-40B4-BE49-F238E27FC236}">
-              <a16:creationId xmlns="" xmlns:a16="http://schemas.microsoft.com/office/drawing/2014/main" id="{36D1FDFF-84F9-A395-CDB0-AC77470C24F7}"/>
+              <a16:creationId xmlns:a16="http://schemas.microsoft.com/office/drawing/2014/main" xmlns="" id="{36D1FDFF-84F9-A395-CDB0-AC77470C24F7}"/>
             </a:ext>
           </a:extLst>
         </p:cNvPr>
@@ -7877,7 +7763,7 @@
           <p:cNvPr id="2" name="Título 1">
             <a:extLst>
               <a:ext uri="{FF2B5EF4-FFF2-40B4-BE49-F238E27FC236}">
-                <a16:creationId xmlns="" xmlns:a16="http://schemas.microsoft.com/office/drawing/2014/main" id="{CA82907A-6417-D3C2-265A-0FFD53046E99}"/>
+                <a16:creationId xmlns:a16="http://schemas.microsoft.com/office/drawing/2014/main" xmlns="" id="{CA82907A-6417-D3C2-265A-0FFD53046E99}"/>
               </a:ext>
             </a:extLst>
           </p:cNvPr>
@@ -7909,164 +7795,133 @@
           </a:p>
         </p:txBody>
       </p:sp>
-      <mc:AlternateContent xmlns:mc="http://schemas.openxmlformats.org/markup-compatibility/2006">
-        <mc:Choice xmlns:a14="http://schemas.microsoft.com/office/drawing/2010/main" Requires="a14">
-          <p:sp>
-            <p:nvSpPr>
-              <p:cNvPr id="3" name="Espaço Reservado para Conteúdo 2">
-                <a:extLst>
-                  <a:ext uri="{FF2B5EF4-FFF2-40B4-BE49-F238E27FC236}">
-                    <a16:creationId xmlns="" xmlns:a16="http://schemas.microsoft.com/office/drawing/2014/main" id="{3C767761-7363-3966-1F66-B32029649DCD}"/>
-                  </a:ext>
-                </a:extLst>
-              </p:cNvPr>
-              <p:cNvSpPr>
-                <a:spLocks noGrp="1"/>
-              </p:cNvSpPr>
-              <p:nvPr>
-                <p:ph idx="1"/>
-              </p:nvPr>
-            </p:nvSpPr>
-            <p:spPr>
-              <a:xfrm>
-                <a:off x="5181600" y="1690688"/>
-                <a:ext cx="6882245" cy="5167311"/>
-              </a:xfrm>
-            </p:spPr>
-            <p:txBody>
-              <a:bodyPr>
-                <a:normAutofit/>
-              </a:bodyPr>
-              <a:lstStyle/>
-              <a:p>
-                <a:r>
-                  <a:rPr lang="pt-BR" b="1" dirty="0" smtClean="0">
-                    <a:solidFill>
-                      <a:srgbClr val="7030A0"/>
-                    </a:solidFill>
-                  </a:rPr>
-                  <a:t>Implementações</a:t>
-                </a:r>
-                <a:r>
-                  <a:rPr lang="pt-BR" dirty="0"/>
-                  <a:t> práticas geralmente evitam esse problema pedindo ao </a:t>
-                </a:r>
-                <a:r>
-                  <a:rPr lang="pt-BR" b="1" dirty="0">
-                    <a:solidFill>
-                      <a:srgbClr val="7030A0"/>
-                    </a:solidFill>
-                  </a:rPr>
-                  <a:t>usuário que forneça o número de </a:t>
-                </a:r>
-                <a:r>
-                  <a:rPr lang="pt-BR" b="1" i="1" dirty="0">
-                    <a:solidFill>
-                      <a:srgbClr val="7030A0"/>
-                    </a:solidFill>
-                  </a:rPr>
-                  <a:t>clusters</a:t>
-                </a:r>
-                <a:r>
-                  <a:rPr lang="pt-BR" dirty="0" smtClean="0"/>
-                  <a:t>.</a:t>
-                </a:r>
-              </a:p>
-              <a:p>
-                <a:r>
-                  <a:rPr lang="pt-BR" dirty="0" smtClean="0"/>
-                  <a:t>Existem diversos métodos para otimizar o </a:t>
-                </a:r>
-                <a:r>
-                  <a:rPr lang="pt-BR" dirty="0" err="1" smtClean="0"/>
-                  <a:t>hiperparâmetro</a:t>
-                </a:r>
-                <a:r>
-                  <a:rPr lang="pt-BR" dirty="0" smtClean="0"/>
-                  <a:t> </a:t>
-                </a:r>
-                <a14:m>
-                  <m:oMath xmlns:m="http://schemas.openxmlformats.org/officeDocument/2006/math">
-                    <m:r>
-                      <a:rPr lang="pt-BR" b="0" i="1" smtClean="0">
-                        <a:latin typeface="Cambria Math" panose="02040503050406030204" pitchFamily="18" charset="0"/>
-                      </a:rPr>
-                      <m:t>𝑘</m:t>
-                    </m:r>
-                  </m:oMath>
-                </a14:m>
-                <a:r>
-                  <a:rPr lang="pt-BR" dirty="0" smtClean="0"/>
-                  <a:t>, dentre eles, o mais usado é o método do cotovelo.</a:t>
-                </a:r>
-              </a:p>
-              <a:p>
-                <a:r>
-                  <a:rPr lang="pt-BR" dirty="0" smtClean="0"/>
-                  <a:t>Veremos como ele funciona </a:t>
-                </a:r>
-                <a:r>
-                  <a:rPr lang="pt-BR" smtClean="0"/>
-                  <a:t>em breve.</a:t>
-                </a:r>
-                <a:endParaRPr lang="pt-BR" dirty="0"/>
-              </a:p>
-              <a:p>
-                <a:endParaRPr lang="pt-BR" dirty="0"/>
-              </a:p>
-            </p:txBody>
-          </p:sp>
-        </mc:Choice>
-        <mc:Fallback>
-          <p:sp>
-            <p:nvSpPr>
-              <p:cNvPr id="3" name="Espaço Reservado para Conteúdo 2">
-                <a:extLst>
-                  <a:ext uri="{FF2B5EF4-FFF2-40B4-BE49-F238E27FC236}">
-                    <a16:creationId xmlns="" xmlns:a16="http://schemas.microsoft.com/office/drawing/2014/main" id="{3C767761-7363-3966-1F66-B32029649DCD}"/>
-                  </a:ext>
-                </a:extLst>
-              </p:cNvPr>
-              <p:cNvSpPr>
-                <a:spLocks noGrp="1" noRot="1" noChangeAspect="1" noMove="1" noResize="1" noEditPoints="1" noAdjustHandles="1" noChangeArrowheads="1" noChangeShapeType="1" noTextEdit="1"/>
-              </p:cNvSpPr>
-              <p:nvPr>
-                <p:ph idx="1"/>
-              </p:nvPr>
-            </p:nvSpPr>
-            <p:spPr>
-              <a:xfrm>
-                <a:off x="5181600" y="1690688"/>
-                <a:ext cx="6882245" cy="5167311"/>
-              </a:xfrm>
-              <a:blipFill rotWithShape="0">
-                <a:blip r:embed="rId2"/>
-                <a:stretch>
-                  <a:fillRect l="-1594" t="-1887" r="-2657"/>
-                </a:stretch>
-              </a:blipFill>
-            </p:spPr>
-            <p:txBody>
-              <a:bodyPr/>
-              <a:lstStyle/>
-              <a:p>
-                <a:r>
-                  <a:rPr lang="pt-BR">
-                    <a:noFill/>
-                  </a:rPr>
-                  <a:t> </a:t>
-                </a:r>
-              </a:p>
-            </p:txBody>
-          </p:sp>
-        </mc:Fallback>
-      </mc:AlternateContent>
+      <p:sp>
+        <p:nvSpPr>
+          <p:cNvPr id="3" name="Espaço Reservado para Conteúdo 2">
+            <a:extLst>
+              <a:ext uri="{FF2B5EF4-FFF2-40B4-BE49-F238E27FC236}">
+                <a16:creationId xmlns:a16="http://schemas.microsoft.com/office/drawing/2014/main" xmlns="" xmlns:a14="http://schemas.microsoft.com/office/drawing/2010/main" xmlns:mc="http://schemas.openxmlformats.org/markup-compatibility/2006" id="{3C767761-7363-3966-1F66-B32029649DCD}"/>
+              </a:ext>
+            </a:extLst>
+          </p:cNvPr>
+          <p:cNvSpPr>
+            <a:spLocks noGrp="1"/>
+          </p:cNvSpPr>
+          <p:nvPr>
+            <p:ph idx="1"/>
+          </p:nvPr>
+        </p:nvSpPr>
+        <p:spPr>
+          <a:xfrm>
+            <a:off x="5181600" y="1690688"/>
+            <a:ext cx="7010400" cy="5167311"/>
+          </a:xfrm>
+        </p:spPr>
+        <p:txBody>
+          <a:bodyPr>
+            <a:normAutofit/>
+          </a:bodyPr>
+          <a:lstStyle/>
+          <a:p>
+            <a:r>
+              <a:rPr lang="pt-BR" b="1" dirty="0" smtClean="0">
+                <a:solidFill>
+                  <a:srgbClr val="7030A0"/>
+                </a:solidFill>
+              </a:rPr>
+              <a:t>Implementações</a:t>
+            </a:r>
+            <a:r>
+              <a:rPr lang="pt-BR" dirty="0"/>
+              <a:t> práticas geralmente evitam esse problema pedindo ao </a:t>
+            </a:r>
+            <a:r>
+              <a:rPr lang="pt-BR" b="1" dirty="0">
+                <a:solidFill>
+                  <a:srgbClr val="7030A0"/>
+                </a:solidFill>
+              </a:rPr>
+              <a:t>usuário que forneça o número de </a:t>
+            </a:r>
+            <a:r>
+              <a:rPr lang="pt-BR" b="1" i="1" dirty="0">
+                <a:solidFill>
+                  <a:srgbClr val="7030A0"/>
+                </a:solidFill>
+              </a:rPr>
+              <a:t>clusters</a:t>
+            </a:r>
+            <a:r>
+              <a:rPr lang="pt-BR" dirty="0" smtClean="0"/>
+              <a:t>.</a:t>
+            </a:r>
+          </a:p>
+          <a:p>
+            <a:r>
+              <a:rPr lang="pt-BR" dirty="0" smtClean="0"/>
+              <a:t>Existem diversos métodos para otimizar o </a:t>
+            </a:r>
+            <a:r>
+              <a:rPr lang="pt-BR" dirty="0" err="1" smtClean="0"/>
+              <a:t>hiperparâmetro</a:t>
+            </a:r>
+            <a:r>
+              <a:rPr lang="pt-BR" dirty="0" smtClean="0"/>
+              <a:t> que defin</a:t>
+            </a:r>
+            <a:r>
+              <a:rPr lang="pt-BR" dirty="0" smtClean="0"/>
+              <a:t>e o número de </a:t>
+            </a:r>
+            <a:r>
+              <a:rPr lang="pt-BR" i="1" dirty="0" smtClean="0"/>
+              <a:t>clusters</a:t>
+            </a:r>
+            <a:r>
+              <a:rPr lang="pt-BR" dirty="0" smtClean="0"/>
+              <a:t>, </a:t>
+            </a:r>
+            <a:r>
+              <a:rPr lang="pt-BR" dirty="0" smtClean="0"/>
+              <a:t>dentre eles, o mais usado é o método do cotovelo.</a:t>
+            </a:r>
+          </a:p>
+          <a:p>
+            <a:r>
+              <a:rPr lang="pt-BR" dirty="0" smtClean="0"/>
+              <a:t>Veremos como ele funciona em breve</a:t>
+            </a:r>
+            <a:r>
+              <a:rPr lang="pt-BR" dirty="0" smtClean="0"/>
+              <a:t>.</a:t>
+            </a:r>
+          </a:p>
+          <a:p>
+            <a:r>
+              <a:rPr lang="pt-BR" dirty="0" smtClean="0"/>
+              <a:t>Porém, antes, precisamos entender como os </a:t>
+            </a:r>
+            <a:r>
+              <a:rPr lang="pt-BR" i="1" dirty="0" smtClean="0"/>
+              <a:t>clusters</a:t>
+            </a:r>
+            <a:r>
+              <a:rPr lang="pt-BR" dirty="0" smtClean="0"/>
+              <a:t> são criados.</a:t>
+            </a:r>
+            <a:endParaRPr lang="pt-BR" dirty="0"/>
+          </a:p>
+          <a:p>
+            <a:endParaRPr lang="pt-BR" dirty="0"/>
+          </a:p>
+        </p:txBody>
+      </p:sp>
       <p:pic>
         <p:nvPicPr>
           <p:cNvPr id="5" name="Picture 2" descr="K-Means Clustering using Python. Welcome back guys! Hope you had a great… |  by Luigi Fiori | Medium">
             <a:extLst>
               <a:ext uri="{FF2B5EF4-FFF2-40B4-BE49-F238E27FC236}">
-                <a16:creationId xmlns="" xmlns:a16="http://schemas.microsoft.com/office/drawing/2014/main" id="{079377DD-55D2-BED3-3BB3-D573A6F13921}"/>
+                <a16:creationId xmlns:a16="http://schemas.microsoft.com/office/drawing/2014/main" xmlns="" id="{079377DD-55D2-BED3-3BB3-D573A6F13921}"/>
               </a:ext>
             </a:extLst>
           </p:cNvPr>
@@ -8076,7 +7931,7 @@
           <p:nvPr/>
         </p:nvPicPr>
         <p:blipFill rotWithShape="1">
-          <a:blip r:embed="rId3">
+          <a:blip r:embed="rId2">
             <a:extLst>
               <a:ext uri="{28A0092B-C50C-407E-A947-70E740481C1C}">
                 <a14:useLocalDpi xmlns:a14="http://schemas.microsoft.com/office/drawing/2010/main" val="0"/>
@@ -8109,7 +7964,587 @@
     </p:spTree>
     <p:extLst>
       <p:ext uri="{BB962C8B-B14F-4D97-AF65-F5344CB8AC3E}">
-        <p14:creationId xmlns:p14="http://schemas.microsoft.com/office/powerpoint/2010/main" val="788130926"/>
+        <p14:creationId xmlns:p14="http://schemas.microsoft.com/office/powerpoint/2010/main" val="725722606"/>
+      </p:ext>
+    </p:extLst>
+  </p:cSld>
+  <p:clrMapOvr>
+    <a:masterClrMapping/>
+  </p:clrMapOvr>
+</p:sld>
+</file>
+
+<file path=ppt/slides/slide15.xml><?xml version="1.0" encoding="utf-8"?>
+<p:sld xmlns:a="http://schemas.openxmlformats.org/drawingml/2006/main" xmlns:r="http://schemas.openxmlformats.org/officeDocument/2006/relationships" xmlns:p="http://schemas.openxmlformats.org/presentationml/2006/main">
+  <p:cSld>
+    <p:spTree>
+      <p:nvGrpSpPr>
+        <p:cNvPr id="1" name="">
+          <a:extLst>
+            <a:ext uri="{FF2B5EF4-FFF2-40B4-BE49-F238E27FC236}">
+              <a16:creationId xmlns:a16="http://schemas.microsoft.com/office/drawing/2014/main" xmlns="" id="{654994D8-D711-9C2A-C202-7BAD7B93F7EE}"/>
+            </a:ext>
+          </a:extLst>
+        </p:cNvPr>
+        <p:cNvGrpSpPr/>
+        <p:nvPr/>
+      </p:nvGrpSpPr>
+      <p:grpSpPr>
+        <a:xfrm>
+          <a:off x="0" y="0"/>
+          <a:ext cx="0" cy="0"/>
+          <a:chOff x="0" y="0"/>
+          <a:chExt cx="0" cy="0"/>
+        </a:xfrm>
+      </p:grpSpPr>
+      <p:sp>
+        <p:nvSpPr>
+          <p:cNvPr id="2" name="Título 1">
+            <a:extLst>
+              <a:ext uri="{FF2B5EF4-FFF2-40B4-BE49-F238E27FC236}">
+                <a16:creationId xmlns:a16="http://schemas.microsoft.com/office/drawing/2014/main" xmlns="" id="{FA636E4B-196C-922B-890C-6917F63A065D}"/>
+              </a:ext>
+            </a:extLst>
+          </p:cNvPr>
+          <p:cNvSpPr>
+            <a:spLocks noGrp="1"/>
+          </p:cNvSpPr>
+          <p:nvPr>
+            <p:ph type="title"/>
+          </p:nvPr>
+        </p:nvSpPr>
+        <p:spPr/>
+        <p:txBody>
+          <a:bodyPr/>
+          <a:lstStyle/>
+          <a:p>
+            <a:r>
+              <a:rPr lang="en-US" dirty="0" err="1"/>
+              <a:t>Medindo</a:t>
+            </a:r>
+            <a:r>
+              <a:rPr lang="en-US" dirty="0"/>
+              <a:t> </a:t>
+            </a:r>
+            <a:r>
+              <a:rPr lang="en-US" dirty="0" err="1"/>
+              <a:t>distâncias</a:t>
+            </a:r>
+            <a:endParaRPr lang="en-US" dirty="0"/>
+          </a:p>
+        </p:txBody>
+      </p:sp>
+      <mc:AlternateContent xmlns:mc="http://schemas.openxmlformats.org/markup-compatibility/2006">
+        <mc:Choice xmlns:a14="http://schemas.microsoft.com/office/drawing/2010/main" Requires="a14">
+          <p:sp>
+            <p:nvSpPr>
+              <p:cNvPr id="3" name="Espaço Reservado para Conteúdo 2">
+                <a:extLst>
+                  <a:ext uri="{FF2B5EF4-FFF2-40B4-BE49-F238E27FC236}">
+                    <a16:creationId xmlns:a16="http://schemas.microsoft.com/office/drawing/2014/main" xmlns="" id="{1FCDFA83-D279-17E3-E2CD-6E304EAF637F}"/>
+                  </a:ext>
+                </a:extLst>
+              </p:cNvPr>
+              <p:cNvSpPr>
+                <a:spLocks noGrp="1"/>
+              </p:cNvSpPr>
+              <p:nvPr>
+                <p:ph idx="1"/>
+              </p:nvPr>
+            </p:nvSpPr>
+            <p:spPr>
+              <a:xfrm>
+                <a:off x="838200" y="1825624"/>
+                <a:ext cx="11353799" cy="5032375"/>
+              </a:xfrm>
+            </p:spPr>
+            <p:txBody>
+              <a:bodyPr>
+                <a:normAutofit/>
+              </a:bodyPr>
+              <a:lstStyle/>
+              <a:p>
+                <a:r>
+                  <a:rPr lang="pt-BR" dirty="0" smtClean="0"/>
+                  <a:t>Algoritmos para identificação de </a:t>
+                </a:r>
+                <a:r>
+                  <a:rPr lang="pt-BR" i="1" dirty="0"/>
+                  <a:t>clusters</a:t>
+                </a:r>
+                <a:r>
+                  <a:rPr lang="pt-BR" dirty="0"/>
+                  <a:t> </a:t>
+                </a:r>
+                <a:r>
+                  <a:rPr lang="pt-BR" dirty="0" smtClean="0"/>
+                  <a:t>precisam </a:t>
+                </a:r>
+                <a:r>
+                  <a:rPr lang="pt-BR" dirty="0"/>
+                  <a:t>de uma </a:t>
+                </a:r>
+                <a:r>
+                  <a:rPr lang="pt-BR" b="1" dirty="0">
+                    <a:solidFill>
+                      <a:srgbClr val="7030A0"/>
+                    </a:solidFill>
+                  </a:rPr>
+                  <a:t>métrica para avaliar a </a:t>
+                </a:r>
+                <a:r>
+                  <a:rPr lang="pt-BR" b="1" dirty="0">
+                    <a:solidFill>
+                      <a:srgbClr val="00B050"/>
+                    </a:solidFill>
+                  </a:rPr>
+                  <a:t>distância</a:t>
+                </a:r>
+                <a:r>
+                  <a:rPr lang="pt-BR" b="1" dirty="0">
+                    <a:solidFill>
+                      <a:srgbClr val="7030A0"/>
+                    </a:solidFill>
+                  </a:rPr>
+                  <a:t> entre </a:t>
+                </a:r>
+                <a:r>
+                  <a:rPr lang="pt-BR" b="1" dirty="0" smtClean="0">
+                    <a:solidFill>
+                      <a:srgbClr val="7030A0"/>
+                    </a:solidFill>
+                  </a:rPr>
+                  <a:t>uma amostra e </a:t>
+                </a:r>
+                <a:r>
+                  <a:rPr lang="pt-BR" b="1" dirty="0">
+                    <a:solidFill>
+                      <a:srgbClr val="7030A0"/>
+                    </a:solidFill>
+                  </a:rPr>
+                  <a:t>o centroide</a:t>
+                </a:r>
+                <a:r>
+                  <a:rPr lang="pt-BR" dirty="0"/>
+                  <a:t> de um </a:t>
+                </a:r>
+                <a:r>
+                  <a:rPr lang="pt-BR" i="1" dirty="0"/>
+                  <a:t>cluster</a:t>
+                </a:r>
+                <a:r>
+                  <a:rPr lang="pt-BR" dirty="0"/>
+                  <a:t>. </a:t>
+                </a:r>
+              </a:p>
+              <a:p>
+                <a:r>
+                  <a:rPr lang="pt-BR" dirty="0"/>
+                  <a:t>Uma forma de fazer isso </a:t>
+                </a:r>
+                <a:r>
+                  <a:rPr lang="pt-BR" dirty="0" smtClean="0"/>
+                  <a:t>é </a:t>
+                </a:r>
+                <a:r>
+                  <a:rPr lang="pt-BR" dirty="0"/>
+                  <a:t>usar a </a:t>
+                </a:r>
+                <a:r>
+                  <a:rPr lang="pt-BR" b="1" dirty="0">
+                    <a:solidFill>
+                      <a:srgbClr val="00B050"/>
+                    </a:solidFill>
+                  </a:rPr>
+                  <a:t>distância euclidiana </a:t>
+                </a:r>
+                <a:r>
+                  <a:rPr lang="pt-BR" dirty="0"/>
+                  <a:t>entre os dois </a:t>
+                </a:r>
+                <a:r>
+                  <a:rPr lang="pt-BR" dirty="0" smtClean="0"/>
+                  <a:t>vetores</a:t>
+                </a:r>
+              </a:p>
+              <a:p>
+                <a:pPr marL="0" indent="0">
+                  <a:buNone/>
+                </a:pPr>
+                <a:endParaRPr lang="pt-BR" sz="600" dirty="0" smtClean="0"/>
+              </a:p>
+              <a:p>
+                <a:pPr marL="0" indent="0">
+                  <a:buNone/>
+                </a:pPr>
+                <a14:m>
+                  <m:oMathPara xmlns:m="http://schemas.openxmlformats.org/officeDocument/2006/math">
+                    <m:oMathParaPr>
+                      <m:jc m:val="centerGroup"/>
+                    </m:oMathParaPr>
+                    <m:oMath xmlns:m="http://schemas.openxmlformats.org/officeDocument/2006/math">
+                      <m:r>
+                        <a:rPr lang="pt-BR" i="1">
+                          <a:latin typeface="Cambria Math" panose="02040503050406030204" pitchFamily="18" charset="0"/>
+                        </a:rPr>
+                        <m:t>𝑑</m:t>
+                      </m:r>
+                      <m:d>
+                        <m:dPr>
+                          <m:ctrlPr>
+                            <a:rPr lang="pt-BR" i="1">
+                              <a:latin typeface="Cambria Math" panose="02040503050406030204" pitchFamily="18" charset="0"/>
+                            </a:rPr>
+                          </m:ctrlPr>
+                        </m:dPr>
+                        <m:e>
+                          <m:r>
+                            <a:rPr lang="pt-BR" b="1" i="1">
+                              <a:latin typeface="Cambria Math" panose="02040503050406030204" pitchFamily="18" charset="0"/>
+                            </a:rPr>
+                            <m:t>𝒙</m:t>
+                          </m:r>
+                          <m:r>
+                            <a:rPr lang="pt-BR" i="1">
+                              <a:latin typeface="Cambria Math" panose="02040503050406030204" pitchFamily="18" charset="0"/>
+                            </a:rPr>
+                            <m:t>,</m:t>
+                          </m:r>
+                          <m:r>
+                            <a:rPr lang="pt-BR" b="1" i="1">
+                              <a:latin typeface="Cambria Math" panose="02040503050406030204" pitchFamily="18" charset="0"/>
+                            </a:rPr>
+                            <m:t>𝒚</m:t>
+                          </m:r>
+                        </m:e>
+                      </m:d>
+                      <m:r>
+                        <a:rPr lang="pt-BR" i="1">
+                          <a:latin typeface="Cambria Math" panose="02040503050406030204" pitchFamily="18" charset="0"/>
+                        </a:rPr>
+                        <m:t>=</m:t>
+                      </m:r>
+                      <m:rad>
+                        <m:radPr>
+                          <m:degHide m:val="on"/>
+                          <m:ctrlPr>
+                            <a:rPr lang="pt-BR" i="1">
+                              <a:latin typeface="Cambria Math" panose="02040503050406030204" pitchFamily="18" charset="0"/>
+                            </a:rPr>
+                          </m:ctrlPr>
+                        </m:radPr>
+                        <m:deg/>
+                        <m:e>
+                          <m:nary>
+                            <m:naryPr>
+                              <m:chr m:val="∑"/>
+                              <m:ctrlPr>
+                                <a:rPr lang="pt-BR" i="1">
+                                  <a:latin typeface="Cambria Math" panose="02040503050406030204" pitchFamily="18" charset="0"/>
+                                </a:rPr>
+                              </m:ctrlPr>
+                            </m:naryPr>
+                            <m:sub>
+                              <m:r>
+                                <m:rPr>
+                                  <m:brk m:alnAt="23"/>
+                                </m:rPr>
+                                <a:rPr lang="pt-BR" i="1">
+                                  <a:latin typeface="Cambria Math" panose="02040503050406030204" pitchFamily="18" charset="0"/>
+                                </a:rPr>
+                                <m:t>𝑖</m:t>
+                              </m:r>
+                              <m:r>
+                                <a:rPr lang="pt-BR" i="1">
+                                  <a:latin typeface="Cambria Math" panose="02040503050406030204" pitchFamily="18" charset="0"/>
+                                </a:rPr>
+                                <m:t>=1</m:t>
+                              </m:r>
+                            </m:sub>
+                            <m:sup>
+                              <m:r>
+                                <a:rPr lang="pt-BR" i="1">
+                                  <a:latin typeface="Cambria Math" panose="02040503050406030204" pitchFamily="18" charset="0"/>
+                                </a:rPr>
+                                <m:t>𝐾</m:t>
+                              </m:r>
+                            </m:sup>
+                            <m:e>
+                              <m:sSup>
+                                <m:sSupPr>
+                                  <m:ctrlPr>
+                                    <a:rPr lang="pt-BR" i="1">
+                                      <a:latin typeface="Cambria Math" panose="02040503050406030204" pitchFamily="18" charset="0"/>
+                                    </a:rPr>
+                                  </m:ctrlPr>
+                                </m:sSupPr>
+                                <m:e>
+                                  <m:d>
+                                    <m:dPr>
+                                      <m:ctrlPr>
+                                        <a:rPr lang="pt-BR" i="1">
+                                          <a:latin typeface="Cambria Math" panose="02040503050406030204" pitchFamily="18" charset="0"/>
+                                        </a:rPr>
+                                      </m:ctrlPr>
+                                    </m:dPr>
+                                    <m:e>
+                                      <m:sSub>
+                                        <m:sSubPr>
+                                          <m:ctrlPr>
+                                            <a:rPr lang="pt-BR" i="1">
+                                              <a:latin typeface="Cambria Math" panose="02040503050406030204" pitchFamily="18" charset="0"/>
+                                            </a:rPr>
+                                          </m:ctrlPr>
+                                        </m:sSubPr>
+                                        <m:e>
+                                          <m:r>
+                                            <a:rPr lang="pt-BR" i="1">
+                                              <a:latin typeface="Cambria Math" panose="02040503050406030204" pitchFamily="18" charset="0"/>
+                                            </a:rPr>
+                                            <m:t>𝑥</m:t>
+                                          </m:r>
+                                        </m:e>
+                                        <m:sub>
+                                          <m:r>
+                                            <a:rPr lang="pt-BR" i="1">
+                                              <a:latin typeface="Cambria Math" panose="02040503050406030204" pitchFamily="18" charset="0"/>
+                                            </a:rPr>
+                                            <m:t>𝑖</m:t>
+                                          </m:r>
+                                        </m:sub>
+                                      </m:sSub>
+                                      <m:r>
+                                        <a:rPr lang="pt-BR" i="1">
+                                          <a:latin typeface="Cambria Math" panose="02040503050406030204" pitchFamily="18" charset="0"/>
+                                        </a:rPr>
+                                        <m:t>−</m:t>
+                                      </m:r>
+                                      <m:sSub>
+                                        <m:sSubPr>
+                                          <m:ctrlPr>
+                                            <a:rPr lang="pt-BR" i="1">
+                                              <a:latin typeface="Cambria Math" panose="02040503050406030204" pitchFamily="18" charset="0"/>
+                                            </a:rPr>
+                                          </m:ctrlPr>
+                                        </m:sSubPr>
+                                        <m:e>
+                                          <m:r>
+                                            <a:rPr lang="pt-BR" i="1">
+                                              <a:latin typeface="Cambria Math" panose="02040503050406030204" pitchFamily="18" charset="0"/>
+                                            </a:rPr>
+                                            <m:t>𝑦</m:t>
+                                          </m:r>
+                                        </m:e>
+                                        <m:sub>
+                                          <m:r>
+                                            <a:rPr lang="pt-BR" i="1">
+                                              <a:latin typeface="Cambria Math" panose="02040503050406030204" pitchFamily="18" charset="0"/>
+                                            </a:rPr>
+                                            <m:t>𝑖</m:t>
+                                          </m:r>
+                                        </m:sub>
+                                      </m:sSub>
+                                    </m:e>
+                                  </m:d>
+                                </m:e>
+                                <m:sup>
+                                  <m:r>
+                                    <a:rPr lang="pt-BR" i="1">
+                                      <a:latin typeface="Cambria Math" panose="02040503050406030204" pitchFamily="18" charset="0"/>
+                                    </a:rPr>
+                                    <m:t>2</m:t>
+                                  </m:r>
+                                </m:sup>
+                              </m:sSup>
+                            </m:e>
+                          </m:nary>
+                        </m:e>
+                      </m:rad>
+                      <m:r>
+                        <a:rPr lang="pt-BR" i="1">
+                          <a:latin typeface="Cambria Math" panose="02040503050406030204" pitchFamily="18" charset="0"/>
+                        </a:rPr>
+                        <m:t>,</m:t>
+                      </m:r>
+                    </m:oMath>
+                  </m:oMathPara>
+                </a14:m>
+                <a:endParaRPr lang="pt-BR" dirty="0"/>
+              </a:p>
+              <a:p>
+                <a:pPr marL="0" indent="0">
+                  <a:buNone/>
+                </a:pPr>
+                <a:r>
+                  <a:rPr lang="pt-BR" dirty="0"/>
+                  <a:t>onde </a:t>
+                </a:r>
+                <a14:m>
+                  <m:oMath xmlns:m="http://schemas.openxmlformats.org/officeDocument/2006/math">
+                    <m:r>
+                      <a:rPr lang="pt-BR" i="1">
+                        <a:latin typeface="Cambria Math" panose="02040503050406030204" pitchFamily="18" charset="0"/>
+                      </a:rPr>
+                      <m:t>𝐾</m:t>
+                    </m:r>
+                  </m:oMath>
+                </a14:m>
+                <a:r>
+                  <a:rPr lang="pt-BR" dirty="0"/>
+                  <a:t> é o número de </a:t>
+                </a:r>
+                <a:r>
+                  <a:rPr lang="pt-BR" dirty="0" smtClean="0"/>
+                  <a:t>atributos</a:t>
+                </a:r>
+                <a:r>
+                  <a:rPr lang="pt-BR" dirty="0"/>
+                  <a:t> </a:t>
+                </a:r>
+                <a:r>
+                  <a:rPr lang="pt-BR" dirty="0" smtClean="0"/>
+                  <a:t>e </a:t>
+                </a:r>
+                <a14:m>
+                  <m:oMath xmlns:m="http://schemas.openxmlformats.org/officeDocument/2006/math">
+                    <m:sSub>
+                      <m:sSubPr>
+                        <m:ctrlPr>
+                          <a:rPr lang="pt-BR" i="1">
+                            <a:latin typeface="Cambria Math" panose="02040503050406030204" pitchFamily="18" charset="0"/>
+                          </a:rPr>
+                        </m:ctrlPr>
+                      </m:sSubPr>
+                      <m:e>
+                        <m:r>
+                          <a:rPr lang="pt-BR" i="1">
+                            <a:latin typeface="Cambria Math" panose="02040503050406030204" pitchFamily="18" charset="0"/>
+                          </a:rPr>
+                          <m:t>𝑥</m:t>
+                        </m:r>
+                      </m:e>
+                      <m:sub>
+                        <m:r>
+                          <a:rPr lang="pt-BR" i="1">
+                            <a:latin typeface="Cambria Math" panose="02040503050406030204" pitchFamily="18" charset="0"/>
+                          </a:rPr>
+                          <m:t>𝑖</m:t>
+                        </m:r>
+                      </m:sub>
+                    </m:sSub>
+                  </m:oMath>
+                </a14:m>
+                <a:r>
+                  <a:rPr lang="pt-BR" dirty="0" smtClean="0"/>
+                  <a:t> e </a:t>
+                </a:r>
+                <a14:m>
+                  <m:oMath xmlns:m="http://schemas.openxmlformats.org/officeDocument/2006/math">
+                    <m:sSub>
+                      <m:sSubPr>
+                        <m:ctrlPr>
+                          <a:rPr lang="pt-BR" i="1">
+                            <a:latin typeface="Cambria Math" panose="02040503050406030204" pitchFamily="18" charset="0"/>
+                          </a:rPr>
+                        </m:ctrlPr>
+                      </m:sSubPr>
+                      <m:e>
+                        <m:r>
+                          <a:rPr lang="pt-BR" i="1">
+                            <a:latin typeface="Cambria Math" panose="02040503050406030204" pitchFamily="18" charset="0"/>
+                          </a:rPr>
+                          <m:t>𝑦</m:t>
+                        </m:r>
+                      </m:e>
+                      <m:sub>
+                        <m:r>
+                          <a:rPr lang="pt-BR" i="1">
+                            <a:latin typeface="Cambria Math" panose="02040503050406030204" pitchFamily="18" charset="0"/>
+                          </a:rPr>
+                          <m:t>𝑖</m:t>
+                        </m:r>
+                      </m:sub>
+                    </m:sSub>
+                  </m:oMath>
+                </a14:m>
+                <a:r>
+                  <a:rPr lang="pt-BR" dirty="0" smtClean="0"/>
+                  <a:t> são os </a:t>
+                </a:r>
+                <a14:m>
+                  <m:oMath xmlns:m="http://schemas.openxmlformats.org/officeDocument/2006/math">
+                    <m:r>
+                      <a:rPr lang="pt-BR" i="1">
+                        <a:latin typeface="Cambria Math" panose="02040503050406030204" pitchFamily="18" charset="0"/>
+                      </a:rPr>
+                      <m:t>𝑖</m:t>
+                    </m:r>
+                  </m:oMath>
+                </a14:m>
+                <a:r>
+                  <a:rPr lang="pt-BR" dirty="0" smtClean="0"/>
+                  <a:t>-</a:t>
+                </a:r>
+                <a:r>
+                  <a:rPr lang="pt-BR" dirty="0" err="1" smtClean="0"/>
+                  <a:t>ésimos</a:t>
+                </a:r>
+                <a:r>
+                  <a:rPr lang="pt-BR" dirty="0" smtClean="0"/>
+                  <a:t> elementos dos vetores tendo sua distância calculada.</a:t>
+                </a:r>
+              </a:p>
+            </p:txBody>
+          </p:sp>
+        </mc:Choice>
+        <mc:Fallback>
+          <p:sp>
+            <p:nvSpPr>
+              <p:cNvPr id="3" name="Espaço Reservado para Conteúdo 2">
+                <a:extLst>
+                  <a:ext uri="{FF2B5EF4-FFF2-40B4-BE49-F238E27FC236}">
+                    <a16:creationId xmlns:a16="http://schemas.microsoft.com/office/drawing/2014/main" xmlns="" id="{1FCDFA83-D279-17E3-E2CD-6E304EAF637F}"/>
+                  </a:ext>
+                </a:extLst>
+              </p:cNvPr>
+              <p:cNvSpPr>
+                <a:spLocks noGrp="1" noRot="1" noChangeAspect="1" noMove="1" noResize="1" noEditPoints="1" noAdjustHandles="1" noChangeArrowheads="1" noChangeShapeType="1" noTextEdit="1"/>
+              </p:cNvSpPr>
+              <p:nvPr>
+                <p:ph idx="1"/>
+              </p:nvPr>
+            </p:nvSpPr>
+            <p:spPr>
+              <a:xfrm>
+                <a:off x="838200" y="1825624"/>
+                <a:ext cx="11353799" cy="5032375"/>
+              </a:xfrm>
+              <a:blipFill rotWithShape="0">
+                <a:blip r:embed="rId2"/>
+                <a:stretch>
+                  <a:fillRect l="-1128" t="-1937"/>
+                </a:stretch>
+              </a:blipFill>
+            </p:spPr>
+            <p:txBody>
+              <a:bodyPr/>
+              <a:lstStyle/>
+              <a:p>
+                <a:r>
+                  <a:rPr lang="pt-BR">
+                    <a:noFill/>
+                  </a:rPr>
+                  <a:t> </a:t>
+                </a:r>
+              </a:p>
+            </p:txBody>
+          </p:sp>
+        </mc:Fallback>
+      </mc:AlternateContent>
+    </p:spTree>
+    <p:extLst>
+      <p:ext uri="{BB962C8B-B14F-4D97-AF65-F5344CB8AC3E}">
+        <p14:creationId xmlns:p14="http://schemas.microsoft.com/office/powerpoint/2010/main" val="847345513"/>
       </p:ext>
     </p:extLst>
   </p:cSld>
@@ -8138,13 +8573,7 @@
       </p:grpSpPr>
       <p:sp>
         <p:nvSpPr>
-          <p:cNvPr id="2" name="Title 1">
-            <a:extLst>
-              <a:ext uri="{FF2B5EF4-FFF2-40B4-BE49-F238E27FC236}">
-                <a16:creationId xmlns="" xmlns:a16="http://schemas.microsoft.com/office/drawing/2014/main" id="{0719C974-9A37-ED60-45B8-7CF90E038097}"/>
-              </a:ext>
-            </a:extLst>
-          </p:cNvPr>
+          <p:cNvPr id="2" name="Título 1"/>
           <p:cNvSpPr>
             <a:spLocks noGrp="1"/>
           </p:cNvSpPr>
@@ -8157,1279 +8586,24 @@
           <a:bodyPr/>
           <a:lstStyle/>
           <a:p>
-            <a:endParaRPr lang="en-US"/>
-          </a:p>
-        </p:txBody>
-      </p:sp>
-      <p:sp>
-        <p:nvSpPr>
-          <p:cNvPr id="3" name="Content Placeholder 2">
-            <a:extLst>
-              <a:ext uri="{FF2B5EF4-FFF2-40B4-BE49-F238E27FC236}">
-                <a16:creationId xmlns="" xmlns:a16="http://schemas.microsoft.com/office/drawing/2014/main" id="{D812A04D-0F4A-CB81-D7DF-C4B0B13163E8}"/>
-              </a:ext>
-            </a:extLst>
-          </p:cNvPr>
-          <p:cNvSpPr>
-            <a:spLocks noGrp="1"/>
-          </p:cNvSpPr>
-          <p:nvPr>
-            <p:ph idx="1"/>
-          </p:nvPr>
-        </p:nvSpPr>
-        <p:spPr/>
-        <p:txBody>
-          <a:bodyPr>
-            <a:normAutofit/>
-          </a:bodyPr>
-          <a:lstStyle/>
-          <a:p>
-            <a:r>
-              <a:rPr lang="pt-BR" sz="6000" b="1" dirty="0">
-                <a:solidFill>
-                  <a:srgbClr val="FF0000"/>
-                </a:solidFill>
-              </a:rPr>
-              <a:t>Quais as formas usadas para definir o melhor número de </a:t>
-            </a:r>
-            <a:r>
-              <a:rPr lang="pt-BR" sz="6000" b="1" dirty="0" err="1">
-                <a:solidFill>
-                  <a:srgbClr val="FF0000"/>
-                </a:solidFill>
-              </a:rPr>
-              <a:t>clsuters</a:t>
-            </a:r>
-            <a:r>
-              <a:rPr lang="pt-BR" sz="6000" b="1" dirty="0">
-                <a:solidFill>
-                  <a:srgbClr val="FF0000"/>
-                </a:solidFill>
-              </a:rPr>
-              <a:t>???</a:t>
-            </a:r>
-            <a:endParaRPr lang="en-US" sz="6000" b="1" dirty="0">
-              <a:solidFill>
-                <a:srgbClr val="FF0000"/>
-              </a:solidFill>
-            </a:endParaRPr>
-          </a:p>
-        </p:txBody>
-      </p:sp>
-    </p:spTree>
-    <p:extLst>
-      <p:ext uri="{BB962C8B-B14F-4D97-AF65-F5344CB8AC3E}">
-        <p14:creationId xmlns:p14="http://schemas.microsoft.com/office/powerpoint/2010/main" val="2912513465"/>
-      </p:ext>
-    </p:extLst>
-  </p:cSld>
-  <p:clrMapOvr>
-    <a:masterClrMapping/>
-  </p:clrMapOvr>
-</p:sld>
-</file>
-
-<file path=ppt/slides/slide17.xml><?xml version="1.0" encoding="utf-8"?>
-<p:sld xmlns:a="http://schemas.openxmlformats.org/drawingml/2006/main" xmlns:r="http://schemas.openxmlformats.org/officeDocument/2006/relationships" xmlns:p="http://schemas.openxmlformats.org/presentationml/2006/main">
-  <p:cSld>
-    <p:spTree>
-      <p:nvGrpSpPr>
-        <p:cNvPr id="1" name="">
-          <a:extLst>
-            <a:ext uri="{FF2B5EF4-FFF2-40B4-BE49-F238E27FC236}">
-              <a16:creationId xmlns="" xmlns:a16="http://schemas.microsoft.com/office/drawing/2014/main" id="{654994D8-D711-9C2A-C202-7BAD7B93F7EE}"/>
-            </a:ext>
-          </a:extLst>
-        </p:cNvPr>
-        <p:cNvGrpSpPr/>
-        <p:nvPr/>
-      </p:nvGrpSpPr>
-      <p:grpSpPr>
-        <a:xfrm>
-          <a:off x="0" y="0"/>
-          <a:ext cx="0" cy="0"/>
-          <a:chOff x="0" y="0"/>
-          <a:chExt cx="0" cy="0"/>
-        </a:xfrm>
-      </p:grpSpPr>
-      <p:sp>
-        <p:nvSpPr>
-          <p:cNvPr id="2" name="Título 1">
-            <a:extLst>
-              <a:ext uri="{FF2B5EF4-FFF2-40B4-BE49-F238E27FC236}">
-                <a16:creationId xmlns="" xmlns:a16="http://schemas.microsoft.com/office/drawing/2014/main" id="{FA636E4B-196C-922B-890C-6917F63A065D}"/>
-              </a:ext>
-            </a:extLst>
-          </p:cNvPr>
-          <p:cNvSpPr>
-            <a:spLocks noGrp="1"/>
-          </p:cNvSpPr>
-          <p:nvPr>
-            <p:ph type="title"/>
-          </p:nvPr>
-        </p:nvSpPr>
-        <p:spPr/>
-        <p:txBody>
-          <a:bodyPr/>
-          <a:lstStyle/>
-          <a:p>
-            <a:r>
-              <a:rPr lang="en-US" dirty="0" err="1"/>
-              <a:t>Medindo</a:t>
-            </a:r>
-            <a:r>
-              <a:rPr lang="en-US" dirty="0"/>
-              <a:t> </a:t>
-            </a:r>
-            <a:r>
-              <a:rPr lang="en-US" dirty="0" err="1"/>
-              <a:t>distâncias</a:t>
+            <a:r>
+              <a:rPr lang="pt-BR" dirty="0"/>
+              <a:t>A qual </a:t>
+            </a:r>
+            <a:r>
+              <a:rPr lang="pt-BR" i="1" dirty="0"/>
+              <a:t>cluster</a:t>
+            </a:r>
+            <a:r>
+              <a:rPr lang="pt-BR" dirty="0"/>
+              <a:t> um exemplo deve pertencer?</a:t>
             </a:r>
             <a:endParaRPr lang="en-US" dirty="0"/>
           </a:p>
         </p:txBody>
       </p:sp>
-      <p:sp>
-        <p:nvSpPr>
-          <p:cNvPr id="3" name="Espaço Reservado para Conteúdo 2">
-            <a:extLst>
-              <a:ext uri="{FF2B5EF4-FFF2-40B4-BE49-F238E27FC236}">
-                <a16:creationId xmlns="" xmlns:a16="http://schemas.microsoft.com/office/drawing/2014/main" id="{1FCDFA83-D279-17E3-E2CD-6E304EAF637F}"/>
-              </a:ext>
-            </a:extLst>
-          </p:cNvPr>
-          <p:cNvSpPr>
-            <a:spLocks noGrp="1"/>
-          </p:cNvSpPr>
-          <p:nvPr>
-            <p:ph idx="1"/>
-          </p:nvPr>
-        </p:nvSpPr>
-        <p:spPr>
-          <a:xfrm>
-            <a:off x="5769428" y="1825624"/>
-            <a:ext cx="6422571" cy="5032375"/>
-          </a:xfrm>
-        </p:spPr>
-        <p:txBody>
-          <a:bodyPr>
-            <a:normAutofit/>
-          </a:bodyPr>
-          <a:lstStyle/>
-          <a:p>
-            <a:r>
-              <a:rPr lang="pt-BR" dirty="0"/>
-              <a:t>Algoritmos para identificação de </a:t>
-            </a:r>
-            <a:r>
-              <a:rPr lang="pt-BR" i="1" dirty="0"/>
-              <a:t>clusters</a:t>
-            </a:r>
-            <a:r>
-              <a:rPr lang="pt-BR" dirty="0"/>
-              <a:t> geralmente precisam de uma </a:t>
-            </a:r>
-            <a:r>
-              <a:rPr lang="pt-BR" b="1" dirty="0">
-                <a:solidFill>
-                  <a:srgbClr val="7030A0"/>
-                </a:solidFill>
-              </a:rPr>
-              <a:t>métrica para avaliar a </a:t>
-            </a:r>
-            <a:r>
-              <a:rPr lang="pt-BR" b="1" dirty="0">
-                <a:solidFill>
-                  <a:srgbClr val="00B050"/>
-                </a:solidFill>
-              </a:rPr>
-              <a:t>distância</a:t>
-            </a:r>
-            <a:r>
-              <a:rPr lang="pt-BR" b="1" dirty="0">
-                <a:solidFill>
-                  <a:srgbClr val="7030A0"/>
-                </a:solidFill>
-              </a:rPr>
-              <a:t> entre um exemplo e o centroide</a:t>
-            </a:r>
-            <a:r>
-              <a:rPr lang="pt-BR" dirty="0"/>
-              <a:t> de um cluster. </a:t>
-            </a:r>
-          </a:p>
-          <a:p>
-            <a:r>
-              <a:rPr lang="pt-BR" dirty="0"/>
-              <a:t>Uma forma de fazer isso quando os atributos são </a:t>
-            </a:r>
-            <a:r>
-              <a:rPr lang="pt-BR" b="1" dirty="0">
-                <a:solidFill>
-                  <a:schemeClr val="accent5"/>
-                </a:solidFill>
-              </a:rPr>
-              <a:t>contínuos ou discretos </a:t>
-            </a:r>
-            <a:r>
-              <a:rPr lang="pt-BR" dirty="0"/>
-              <a:t>é usar a </a:t>
-            </a:r>
-            <a:r>
-              <a:rPr lang="pt-BR" b="1" dirty="0">
-                <a:solidFill>
-                  <a:srgbClr val="00B050"/>
-                </a:solidFill>
-              </a:rPr>
-              <a:t>distância euclidiana </a:t>
-            </a:r>
-            <a:r>
-              <a:rPr lang="pt-BR" dirty="0"/>
-              <a:t>entre os dois vetores.</a:t>
-            </a:r>
-          </a:p>
-        </p:txBody>
-      </p:sp>
-      <p:pic>
-        <p:nvPicPr>
-          <p:cNvPr id="3074" name="Picture 2" descr="Quantum machine learning: distance estimation for k-means clustering | by  Sashwat Anagolum | Towards Data Science">
-            <a:extLst>
-              <a:ext uri="{FF2B5EF4-FFF2-40B4-BE49-F238E27FC236}">
-                <a16:creationId xmlns="" xmlns:a16="http://schemas.microsoft.com/office/drawing/2014/main" id="{EE37D2FB-B661-E3F3-5FAE-2D65997FAF56}"/>
-              </a:ext>
-            </a:extLst>
-          </p:cNvPr>
-          <p:cNvPicPr>
-            <a:picLocks noChangeAspect="1" noChangeArrowheads="1"/>
-          </p:cNvPicPr>
-          <p:nvPr/>
-        </p:nvPicPr>
-        <p:blipFill rotWithShape="1">
-          <a:blip r:embed="rId2">
-            <a:extLst>
-              <a:ext uri="{28A0092B-C50C-407E-A947-70E740481C1C}">
-                <a14:useLocalDpi xmlns:a14="http://schemas.microsoft.com/office/drawing/2010/main" val="0"/>
-              </a:ext>
-            </a:extLst>
-          </a:blip>
-          <a:srcRect l="3750" t="11979" r="8929"/>
-          <a:stretch/>
-        </p:blipFill>
-        <p:spPr bwMode="auto">
-          <a:xfrm>
-            <a:off x="838200" y="2202317"/>
-            <a:ext cx="4487974" cy="3392940"/>
-          </a:xfrm>
-          <a:prstGeom prst="rect">
-            <a:avLst/>
-          </a:prstGeom>
-          <a:noFill/>
-          <a:extLst>
-            <a:ext uri="{909E8E84-426E-40DD-AFC4-6F175D3DCCD1}">
-              <a14:hiddenFill xmlns:a14="http://schemas.microsoft.com/office/drawing/2010/main">
-                <a:solidFill>
-                  <a:srgbClr val="FFFFFF"/>
-                </a:solidFill>
-              </a14:hiddenFill>
-            </a:ext>
-          </a:extLst>
-        </p:spPr>
-      </p:pic>
-    </p:spTree>
-    <p:extLst>
-      <p:ext uri="{BB962C8B-B14F-4D97-AF65-F5344CB8AC3E}">
-        <p14:creationId xmlns:p14="http://schemas.microsoft.com/office/powerpoint/2010/main" val="847345513"/>
-      </p:ext>
-    </p:extLst>
-  </p:cSld>
-  <p:clrMapOvr>
-    <a:masterClrMapping/>
-  </p:clrMapOvr>
-</p:sld>
-</file>
-
-<file path=ppt/slides/slide18.xml><?xml version="1.0" encoding="utf-8"?>
-<p:sld xmlns:a="http://schemas.openxmlformats.org/drawingml/2006/main" xmlns:r="http://schemas.openxmlformats.org/officeDocument/2006/relationships" xmlns:p="http://schemas.openxmlformats.org/presentationml/2006/main">
-  <p:cSld>
-    <p:spTree>
-      <p:nvGrpSpPr>
-        <p:cNvPr id="1" name=""/>
-        <p:cNvGrpSpPr/>
-        <p:nvPr/>
-      </p:nvGrpSpPr>
-      <p:grpSpPr>
-        <a:xfrm>
-          <a:off x="0" y="0"/>
-          <a:ext cx="0" cy="0"/>
-          <a:chOff x="0" y="0"/>
-          <a:chExt cx="0" cy="0"/>
-        </a:xfrm>
-      </p:grpSpPr>
-      <p:sp>
-        <p:nvSpPr>
-          <p:cNvPr id="2" name="Título 1"/>
-          <p:cNvSpPr>
-            <a:spLocks noGrp="1"/>
-          </p:cNvSpPr>
-          <p:nvPr>
-            <p:ph type="title"/>
-          </p:nvPr>
-        </p:nvSpPr>
-        <p:spPr/>
-        <p:txBody>
-          <a:bodyPr/>
-          <a:lstStyle/>
-          <a:p>
-            <a:r>
-              <a:rPr lang="en-US" dirty="0" err="1"/>
-              <a:t>Medindo</a:t>
-            </a:r>
-            <a:r>
-              <a:rPr lang="en-US" dirty="0"/>
-              <a:t> </a:t>
-            </a:r>
-            <a:r>
-              <a:rPr lang="en-US" dirty="0" err="1"/>
-              <a:t>distâncias</a:t>
-            </a:r>
-            <a:endParaRPr lang="en-US" dirty="0"/>
-          </a:p>
-        </p:txBody>
-      </p:sp>
-      <mc:AlternateContent xmlns:mc="http://schemas.openxmlformats.org/markup-compatibility/2006" xmlns:a14="http://schemas.microsoft.com/office/drawing/2010/main">
-        <mc:Choice Requires="a14">
-          <p:sp>
-            <p:nvSpPr>
-              <p:cNvPr id="3" name="Espaço Reservado para Conteúdo 2"/>
-              <p:cNvSpPr>
-                <a:spLocks noGrp="1"/>
-              </p:cNvSpPr>
-              <p:nvPr>
-                <p:ph idx="1"/>
-              </p:nvPr>
-            </p:nvSpPr>
-            <p:spPr>
-              <a:xfrm>
-                <a:off x="838200" y="1825624"/>
-                <a:ext cx="11353800" cy="5032375"/>
-              </a:xfrm>
-            </p:spPr>
-            <p:txBody>
-              <a:bodyPr>
-                <a:normAutofit/>
-              </a:bodyPr>
-              <a:lstStyle/>
-              <a:p>
-                <a:r>
-                  <a:rPr lang="pt-BR" dirty="0"/>
-                  <a:t>Para </a:t>
-                </a:r>
-                <a:r>
-                  <a:rPr lang="pt-BR" dirty="0" smtClean="0"/>
-                  <a:t>dados com </a:t>
-                </a:r>
-                <a:r>
-                  <a:rPr lang="pt-BR" dirty="0"/>
-                  <a:t>atributos contínuos e discretos ou uma mistura com categóricos, usamos uma equação mais geral para calcular as distâncias:</a:t>
-                </a:r>
-              </a:p>
-              <a:p>
-                <a:pPr marL="0" indent="0">
-                  <a:buNone/>
-                </a:pPr>
-                <a14:m>
-                  <m:oMathPara xmlns:m="http://schemas.openxmlformats.org/officeDocument/2006/math">
-                    <m:oMathParaPr>
-                      <m:jc m:val="centerGroup"/>
-                    </m:oMathParaPr>
-                    <m:oMath xmlns:m="http://schemas.openxmlformats.org/officeDocument/2006/math">
-                      <m:r>
-                        <a:rPr lang="pt-BR" sz="2600" b="0" i="1" smtClean="0">
-                          <a:latin typeface="Cambria Math" panose="02040503050406030204" pitchFamily="18" charset="0"/>
-                        </a:rPr>
-                        <m:t>𝑑</m:t>
-                      </m:r>
-                      <m:d>
-                        <m:dPr>
-                          <m:ctrlPr>
-                            <a:rPr lang="pt-BR" sz="2600" b="0" i="1" smtClean="0">
-                              <a:latin typeface="Cambria Math" panose="02040503050406030204" pitchFamily="18" charset="0"/>
-                            </a:rPr>
-                          </m:ctrlPr>
-                        </m:dPr>
-                        <m:e>
-                          <m:r>
-                            <a:rPr lang="pt-BR" sz="2600" b="1" i="1" smtClean="0">
-                              <a:latin typeface="Cambria Math" panose="02040503050406030204" pitchFamily="18" charset="0"/>
-                            </a:rPr>
-                            <m:t>𝒙</m:t>
-                          </m:r>
-                          <m:r>
-                            <a:rPr lang="pt-BR" sz="2600" b="0" i="1" smtClean="0">
-                              <a:latin typeface="Cambria Math" panose="02040503050406030204" pitchFamily="18" charset="0"/>
-                            </a:rPr>
-                            <m:t>,</m:t>
-                          </m:r>
-                          <m:r>
-                            <a:rPr lang="pt-BR" sz="2600" b="1" i="1" smtClean="0">
-                              <a:latin typeface="Cambria Math" panose="02040503050406030204" pitchFamily="18" charset="0"/>
-                            </a:rPr>
-                            <m:t>𝒚</m:t>
-                          </m:r>
-                        </m:e>
-                      </m:d>
-                      <m:r>
-                        <a:rPr lang="pt-BR" sz="2600" b="0" i="1" smtClean="0">
-                          <a:latin typeface="Cambria Math" panose="02040503050406030204" pitchFamily="18" charset="0"/>
-                        </a:rPr>
-                        <m:t>=</m:t>
-                      </m:r>
-                      <m:rad>
-                        <m:radPr>
-                          <m:degHide m:val="on"/>
-                          <m:ctrlPr>
-                            <a:rPr lang="pt-BR" sz="2600" b="0" i="1" smtClean="0">
-                              <a:latin typeface="Cambria Math" panose="02040503050406030204" pitchFamily="18" charset="0"/>
-                            </a:rPr>
-                          </m:ctrlPr>
-                        </m:radPr>
-                        <m:deg/>
-                        <m:e>
-                          <m:nary>
-                            <m:naryPr>
-                              <m:chr m:val="∑"/>
-                              <m:ctrlPr>
-                                <a:rPr lang="pt-BR" sz="2600" b="0" i="1" smtClean="0">
-                                  <a:latin typeface="Cambria Math" panose="02040503050406030204" pitchFamily="18" charset="0"/>
-                                </a:rPr>
-                              </m:ctrlPr>
-                            </m:naryPr>
-                            <m:sub>
-                              <m:r>
-                                <m:rPr>
-                                  <m:brk m:alnAt="23"/>
-                                </m:rPr>
-                                <a:rPr lang="pt-BR" sz="2600" b="0" i="1" smtClean="0">
-                                  <a:latin typeface="Cambria Math" panose="02040503050406030204" pitchFamily="18" charset="0"/>
-                                </a:rPr>
-                                <m:t>𝑖</m:t>
-                              </m:r>
-                              <m:r>
-                                <a:rPr lang="pt-BR" sz="2600" b="0" i="1" smtClean="0">
-                                  <a:latin typeface="Cambria Math" panose="02040503050406030204" pitchFamily="18" charset="0"/>
-                                </a:rPr>
-                                <m:t>=1</m:t>
-                              </m:r>
-                            </m:sub>
-                            <m:sup>
-                              <m:r>
-                                <a:rPr lang="pt-BR" sz="2600" b="0" i="1" smtClean="0">
-                                  <a:latin typeface="Cambria Math" panose="02040503050406030204" pitchFamily="18" charset="0"/>
-                                </a:rPr>
-                                <m:t>𝐾</m:t>
-                              </m:r>
-                            </m:sup>
-                            <m:e>
-                              <m:sSub>
-                                <m:sSubPr>
-                                  <m:ctrlPr>
-                                    <a:rPr lang="pt-BR" sz="2600" b="0" i="1" smtClean="0">
-                                      <a:latin typeface="Cambria Math" panose="02040503050406030204" pitchFamily="18" charset="0"/>
-                                    </a:rPr>
-                                  </m:ctrlPr>
-                                </m:sSubPr>
-                                <m:e>
-                                  <m:r>
-                                    <a:rPr lang="pt-BR" sz="2600" b="0" i="1" smtClean="0">
-                                      <a:latin typeface="Cambria Math" panose="02040503050406030204" pitchFamily="18" charset="0"/>
-                                    </a:rPr>
-                                    <m:t>𝑑</m:t>
-                                  </m:r>
-                                </m:e>
-                                <m:sub>
-                                  <m:r>
-                                    <a:rPr lang="pt-BR" sz="2600" b="0" i="1" smtClean="0">
-                                      <a:latin typeface="Cambria Math" panose="02040503050406030204" pitchFamily="18" charset="0"/>
-                                    </a:rPr>
-                                    <m:t>𝑎</m:t>
-                                  </m:r>
-                                </m:sub>
-                              </m:sSub>
-                              <m:d>
-                                <m:dPr>
-                                  <m:ctrlPr>
-                                    <a:rPr lang="pt-BR" sz="2600" b="0" i="1" smtClean="0">
-                                      <a:latin typeface="Cambria Math" panose="02040503050406030204" pitchFamily="18" charset="0"/>
-                                    </a:rPr>
-                                  </m:ctrlPr>
-                                </m:dPr>
-                                <m:e>
-                                  <m:sSub>
-                                    <m:sSubPr>
-                                      <m:ctrlPr>
-                                        <a:rPr lang="pt-BR" sz="2600" b="0" i="1" smtClean="0">
-                                          <a:latin typeface="Cambria Math" panose="02040503050406030204" pitchFamily="18" charset="0"/>
-                                        </a:rPr>
-                                      </m:ctrlPr>
-                                    </m:sSubPr>
-                                    <m:e>
-                                      <m:r>
-                                        <a:rPr lang="pt-BR" sz="2600" b="0" i="1" smtClean="0">
-                                          <a:latin typeface="Cambria Math" panose="02040503050406030204" pitchFamily="18" charset="0"/>
-                                        </a:rPr>
-                                        <m:t>𝑥</m:t>
-                                      </m:r>
-                                    </m:e>
-                                    <m:sub>
-                                      <m:r>
-                                        <a:rPr lang="pt-BR" sz="2600" b="0" i="1" smtClean="0">
-                                          <a:latin typeface="Cambria Math" panose="02040503050406030204" pitchFamily="18" charset="0"/>
-                                        </a:rPr>
-                                        <m:t>𝑖</m:t>
-                                      </m:r>
-                                    </m:sub>
-                                  </m:sSub>
-                                  <m:r>
-                                    <a:rPr lang="pt-BR" sz="2600" b="0" i="1" smtClean="0">
-                                      <a:latin typeface="Cambria Math" panose="02040503050406030204" pitchFamily="18" charset="0"/>
-                                    </a:rPr>
-                                    <m:t>,</m:t>
-                                  </m:r>
-                                  <m:sSub>
-                                    <m:sSubPr>
-                                      <m:ctrlPr>
-                                        <a:rPr lang="pt-BR" sz="2600" i="1" smtClean="0">
-                                          <a:latin typeface="Cambria Math" panose="02040503050406030204" pitchFamily="18" charset="0"/>
-                                        </a:rPr>
-                                      </m:ctrlPr>
-                                    </m:sSubPr>
-                                    <m:e>
-                                      <m:r>
-                                        <a:rPr lang="pt-BR" sz="2600" b="0" i="1" smtClean="0">
-                                          <a:latin typeface="Cambria Math" panose="02040503050406030204" pitchFamily="18" charset="0"/>
-                                        </a:rPr>
-                                        <m:t>𝑦</m:t>
-                                      </m:r>
-                                    </m:e>
-                                    <m:sub>
-                                      <m:r>
-                                        <a:rPr lang="pt-BR" sz="2600" b="0" i="1" smtClean="0">
-                                          <a:latin typeface="Cambria Math" panose="02040503050406030204" pitchFamily="18" charset="0"/>
-                                        </a:rPr>
-                                        <m:t>𝑖</m:t>
-                                      </m:r>
-                                    </m:sub>
-                                  </m:sSub>
-                                </m:e>
-                              </m:d>
-                            </m:e>
-                          </m:nary>
-                        </m:e>
-                      </m:rad>
-                      <m:r>
-                        <a:rPr lang="pt-BR" sz="2600" b="0" i="1" smtClean="0">
-                          <a:latin typeface="Cambria Math" panose="02040503050406030204" pitchFamily="18" charset="0"/>
-                        </a:rPr>
-                        <m:t>,</m:t>
-                      </m:r>
-                    </m:oMath>
-                  </m:oMathPara>
-                </a14:m>
-                <a:endParaRPr lang="pt-BR" sz="2600" dirty="0"/>
-              </a:p>
-              <a:p>
-                <a:pPr marL="0" indent="0">
-                  <a:buNone/>
-                </a:pPr>
-                <a:r>
-                  <a:rPr lang="pt-BR" dirty="0"/>
-                  <a:t>onde </a:t>
-                </a:r>
-                <a14:m>
-                  <m:oMath xmlns:m="http://schemas.openxmlformats.org/officeDocument/2006/math">
-                    <m:r>
-                      <a:rPr lang="pt-BR" i="1" smtClean="0">
-                        <a:latin typeface="Cambria Math" panose="02040503050406030204" pitchFamily="18" charset="0"/>
-                      </a:rPr>
-                      <m:t>𝐾</m:t>
-                    </m:r>
-                  </m:oMath>
-                </a14:m>
-                <a:r>
-                  <a:rPr lang="pt-BR" dirty="0"/>
-                  <a:t> é o número de atributos, </a:t>
-                </a:r>
-                <a14:m>
-                  <m:oMath xmlns:m="http://schemas.openxmlformats.org/officeDocument/2006/math">
-                    <m:sSub>
-                      <m:sSubPr>
-                        <m:ctrlPr>
-                          <a:rPr lang="pt-BR" i="1">
-                            <a:latin typeface="Cambria Math" panose="02040503050406030204" pitchFamily="18" charset="0"/>
-                          </a:rPr>
-                        </m:ctrlPr>
-                      </m:sSubPr>
-                      <m:e>
-                        <m:r>
-                          <a:rPr lang="pt-BR" i="1" smtClean="0">
-                            <a:latin typeface="Cambria Math" panose="02040503050406030204" pitchFamily="18" charset="0"/>
-                          </a:rPr>
-                          <m:t>𝑑</m:t>
-                        </m:r>
-                      </m:e>
-                      <m:sub>
-                        <m:r>
-                          <a:rPr lang="pt-BR" i="1" smtClean="0">
-                            <a:latin typeface="Cambria Math" panose="02040503050406030204" pitchFamily="18" charset="0"/>
-                          </a:rPr>
-                          <m:t>𝑎</m:t>
-                        </m:r>
-                      </m:sub>
-                    </m:sSub>
-                    <m:d>
-                      <m:dPr>
-                        <m:ctrlPr>
-                          <a:rPr lang="pt-BR" i="1">
-                            <a:latin typeface="Cambria Math" panose="02040503050406030204" pitchFamily="18" charset="0"/>
-                          </a:rPr>
-                        </m:ctrlPr>
-                      </m:dPr>
-                      <m:e>
-                        <m:sSub>
-                          <m:sSubPr>
-                            <m:ctrlPr>
-                              <a:rPr lang="pt-BR" i="1">
-                                <a:latin typeface="Cambria Math" panose="02040503050406030204" pitchFamily="18" charset="0"/>
-                              </a:rPr>
-                            </m:ctrlPr>
-                          </m:sSubPr>
-                          <m:e>
-                            <m:r>
-                              <a:rPr lang="pt-BR" i="1" smtClean="0">
-                                <a:latin typeface="Cambria Math" panose="02040503050406030204" pitchFamily="18" charset="0"/>
-                              </a:rPr>
-                              <m:t>𝑥</m:t>
-                            </m:r>
-                          </m:e>
-                          <m:sub>
-                            <m:r>
-                              <a:rPr lang="pt-BR" i="1" smtClean="0">
-                                <a:latin typeface="Cambria Math" panose="02040503050406030204" pitchFamily="18" charset="0"/>
-                              </a:rPr>
-                              <m:t>𝑖</m:t>
-                            </m:r>
-                          </m:sub>
-                        </m:sSub>
-                        <m:r>
-                          <a:rPr lang="pt-BR" i="1" smtClean="0">
-                            <a:latin typeface="Cambria Math" panose="02040503050406030204" pitchFamily="18" charset="0"/>
-                          </a:rPr>
-                          <m:t>,</m:t>
-                        </m:r>
-                        <m:sSub>
-                          <m:sSubPr>
-                            <m:ctrlPr>
-                              <a:rPr lang="pt-BR" i="1">
-                                <a:latin typeface="Cambria Math" panose="02040503050406030204" pitchFamily="18" charset="0"/>
-                              </a:rPr>
-                            </m:ctrlPr>
-                          </m:sSubPr>
-                          <m:e>
-                            <m:r>
-                              <a:rPr lang="pt-BR" i="1" smtClean="0">
-                                <a:latin typeface="Cambria Math" panose="02040503050406030204" pitchFamily="18" charset="0"/>
-                              </a:rPr>
-                              <m:t>𝑦</m:t>
-                            </m:r>
-                          </m:e>
-                          <m:sub>
-                            <m:r>
-                              <a:rPr lang="pt-BR" i="1" smtClean="0">
-                                <a:latin typeface="Cambria Math" panose="02040503050406030204" pitchFamily="18" charset="0"/>
-                              </a:rPr>
-                              <m:t>𝑖</m:t>
-                            </m:r>
-                          </m:sub>
-                        </m:sSub>
-                      </m:e>
-                    </m:d>
-                    <m:r>
-                      <a:rPr lang="pt-BR" b="0" i="1" smtClean="0">
-                        <a:latin typeface="Cambria Math" panose="02040503050406030204" pitchFamily="18" charset="0"/>
-                      </a:rPr>
-                      <m:t>=</m:t>
-                    </m:r>
-                    <m:sSup>
-                      <m:sSupPr>
-                        <m:ctrlPr>
-                          <a:rPr lang="pt-BR" b="0" i="1" smtClean="0">
-                            <a:latin typeface="Cambria Math" panose="02040503050406030204" pitchFamily="18" charset="0"/>
-                          </a:rPr>
-                        </m:ctrlPr>
-                      </m:sSupPr>
-                      <m:e>
-                        <m:d>
-                          <m:dPr>
-                            <m:ctrlPr>
-                              <a:rPr lang="pt-BR" b="0" i="1" smtClean="0">
-                                <a:latin typeface="Cambria Math" panose="02040503050406030204" pitchFamily="18" charset="0"/>
-                              </a:rPr>
-                            </m:ctrlPr>
-                          </m:dPr>
-                          <m:e>
-                            <m:sSub>
-                              <m:sSubPr>
-                                <m:ctrlPr>
-                                  <a:rPr lang="pt-BR" i="1">
-                                    <a:latin typeface="Cambria Math" panose="02040503050406030204" pitchFamily="18" charset="0"/>
-                                  </a:rPr>
-                                </m:ctrlPr>
-                              </m:sSubPr>
-                              <m:e>
-                                <m:r>
-                                  <a:rPr lang="pt-BR" i="1" smtClean="0">
-                                    <a:latin typeface="Cambria Math" panose="02040503050406030204" pitchFamily="18" charset="0"/>
-                                  </a:rPr>
-                                  <m:t>𝑥</m:t>
-                                </m:r>
-                              </m:e>
-                              <m:sub>
-                                <m:r>
-                                  <a:rPr lang="pt-BR" i="1" smtClean="0">
-                                    <a:latin typeface="Cambria Math" panose="02040503050406030204" pitchFamily="18" charset="0"/>
-                                  </a:rPr>
-                                  <m:t>𝑖</m:t>
-                                </m:r>
-                              </m:sub>
-                            </m:sSub>
-                            <m:r>
-                              <a:rPr lang="pt-BR" b="0" i="1" smtClean="0">
-                                <a:latin typeface="Cambria Math" panose="02040503050406030204" pitchFamily="18" charset="0"/>
-                              </a:rPr>
-                              <m:t>−</m:t>
-                            </m:r>
-                            <m:sSub>
-                              <m:sSubPr>
-                                <m:ctrlPr>
-                                  <a:rPr lang="pt-BR" i="1">
-                                    <a:latin typeface="Cambria Math" panose="02040503050406030204" pitchFamily="18" charset="0"/>
-                                  </a:rPr>
-                                </m:ctrlPr>
-                              </m:sSubPr>
-                              <m:e>
-                                <m:r>
-                                  <a:rPr lang="pt-BR" i="1" smtClean="0">
-                                    <a:latin typeface="Cambria Math" panose="02040503050406030204" pitchFamily="18" charset="0"/>
-                                  </a:rPr>
-                                  <m:t>𝑦</m:t>
-                                </m:r>
-                              </m:e>
-                              <m:sub>
-                                <m:r>
-                                  <a:rPr lang="pt-BR" i="1" smtClean="0">
-                                    <a:latin typeface="Cambria Math" panose="02040503050406030204" pitchFamily="18" charset="0"/>
-                                  </a:rPr>
-                                  <m:t>𝑖</m:t>
-                                </m:r>
-                              </m:sub>
-                            </m:sSub>
-                          </m:e>
-                        </m:d>
-                      </m:e>
-                      <m:sup>
-                        <m:r>
-                          <a:rPr lang="pt-BR" b="0" i="1" smtClean="0">
-                            <a:latin typeface="Cambria Math" panose="02040503050406030204" pitchFamily="18" charset="0"/>
-                          </a:rPr>
-                          <m:t>2</m:t>
-                        </m:r>
-                      </m:sup>
-                    </m:sSup>
-                  </m:oMath>
-                </a14:m>
-                <a:r>
-                  <a:rPr lang="pt-BR" dirty="0"/>
-                  <a:t> para atributos contínuos e discretos e </a:t>
-                </a:r>
-                <a14:m>
-                  <m:oMath xmlns:m="http://schemas.openxmlformats.org/officeDocument/2006/math">
-                    <m:sSub>
-                      <m:sSubPr>
-                        <m:ctrlPr>
-                          <a:rPr lang="pt-BR" i="1">
-                            <a:latin typeface="Cambria Math" panose="02040503050406030204" pitchFamily="18" charset="0"/>
-                          </a:rPr>
-                        </m:ctrlPr>
-                      </m:sSubPr>
-                      <m:e>
-                        <m:r>
-                          <a:rPr lang="pt-BR" i="1" smtClean="0">
-                            <a:latin typeface="Cambria Math" panose="02040503050406030204" pitchFamily="18" charset="0"/>
-                          </a:rPr>
-                          <m:t>𝑑</m:t>
-                        </m:r>
-                      </m:e>
-                      <m:sub>
-                        <m:r>
-                          <a:rPr lang="pt-BR" i="1" smtClean="0">
-                            <a:latin typeface="Cambria Math" panose="02040503050406030204" pitchFamily="18" charset="0"/>
-                          </a:rPr>
-                          <m:t>𝑎</m:t>
-                        </m:r>
-                      </m:sub>
-                    </m:sSub>
-                    <m:d>
-                      <m:dPr>
-                        <m:ctrlPr>
-                          <a:rPr lang="pt-BR" i="1">
-                            <a:latin typeface="Cambria Math" panose="02040503050406030204" pitchFamily="18" charset="0"/>
-                          </a:rPr>
-                        </m:ctrlPr>
-                      </m:dPr>
-                      <m:e>
-                        <m:sSub>
-                          <m:sSubPr>
-                            <m:ctrlPr>
-                              <a:rPr lang="pt-BR" i="1">
-                                <a:latin typeface="Cambria Math" panose="02040503050406030204" pitchFamily="18" charset="0"/>
-                              </a:rPr>
-                            </m:ctrlPr>
-                          </m:sSubPr>
-                          <m:e>
-                            <m:r>
-                              <a:rPr lang="pt-BR" i="1" smtClean="0">
-                                <a:latin typeface="Cambria Math" panose="02040503050406030204" pitchFamily="18" charset="0"/>
-                              </a:rPr>
-                              <m:t>𝑥</m:t>
-                            </m:r>
-                          </m:e>
-                          <m:sub>
-                            <m:r>
-                              <a:rPr lang="pt-BR" i="1" smtClean="0">
-                                <a:latin typeface="Cambria Math" panose="02040503050406030204" pitchFamily="18" charset="0"/>
-                              </a:rPr>
-                              <m:t>𝑖</m:t>
-                            </m:r>
-                          </m:sub>
-                        </m:sSub>
-                        <m:r>
-                          <a:rPr lang="pt-BR" i="1" smtClean="0">
-                            <a:latin typeface="Cambria Math" panose="02040503050406030204" pitchFamily="18" charset="0"/>
-                          </a:rPr>
-                          <m:t>,</m:t>
-                        </m:r>
-                        <m:sSub>
-                          <m:sSubPr>
-                            <m:ctrlPr>
-                              <a:rPr lang="pt-BR" i="1">
-                                <a:latin typeface="Cambria Math" panose="02040503050406030204" pitchFamily="18" charset="0"/>
-                              </a:rPr>
-                            </m:ctrlPr>
-                          </m:sSubPr>
-                          <m:e>
-                            <m:r>
-                              <a:rPr lang="pt-BR" i="1" smtClean="0">
-                                <a:latin typeface="Cambria Math" panose="02040503050406030204" pitchFamily="18" charset="0"/>
-                              </a:rPr>
-                              <m:t>𝑦</m:t>
-                            </m:r>
-                          </m:e>
-                          <m:sub>
-                            <m:r>
-                              <a:rPr lang="pt-BR" i="1" smtClean="0">
-                                <a:latin typeface="Cambria Math" panose="02040503050406030204" pitchFamily="18" charset="0"/>
-                              </a:rPr>
-                              <m:t>𝑖</m:t>
-                            </m:r>
-                          </m:sub>
-                        </m:sSub>
-                      </m:e>
-                    </m:d>
-                    <m:r>
-                      <a:rPr lang="pt-BR" i="1" smtClean="0">
-                        <a:latin typeface="Cambria Math" panose="02040503050406030204" pitchFamily="18" charset="0"/>
-                      </a:rPr>
-                      <m:t>=</m:t>
-                    </m:r>
-                    <m:r>
-                      <a:rPr lang="pt-BR" b="0" i="1" smtClean="0">
-                        <a:latin typeface="Cambria Math" panose="02040503050406030204" pitchFamily="18" charset="0"/>
-                      </a:rPr>
-                      <m:t>0 </m:t>
-                    </m:r>
-                    <m:r>
-                      <m:rPr>
-                        <m:sty m:val="p"/>
-                      </m:rPr>
-                      <a:rPr lang="pt-BR" b="0" smtClean="0">
-                        <a:latin typeface="Cambria Math" panose="02040503050406030204" pitchFamily="18" charset="0"/>
-                      </a:rPr>
-                      <m:t>se</m:t>
-                    </m:r>
-                    <m:sSub>
-                      <m:sSubPr>
-                        <m:ctrlPr>
-                          <a:rPr lang="pt-BR" i="1" smtClean="0">
-                            <a:latin typeface="Cambria Math" panose="02040503050406030204" pitchFamily="18" charset="0"/>
-                          </a:rPr>
-                        </m:ctrlPr>
-                      </m:sSubPr>
-                      <m:e>
-                        <m:r>
-                          <a:rPr lang="pt-BR" b="0" i="1" smtClean="0">
-                            <a:latin typeface="Cambria Math" panose="02040503050406030204" pitchFamily="18" charset="0"/>
-                          </a:rPr>
-                          <m:t> </m:t>
-                        </m:r>
-                        <m:r>
-                          <a:rPr lang="pt-BR" i="1" smtClean="0">
-                            <a:latin typeface="Cambria Math" panose="02040503050406030204" pitchFamily="18" charset="0"/>
-                          </a:rPr>
-                          <m:t>𝑥</m:t>
-                        </m:r>
-                      </m:e>
-                      <m:sub>
-                        <m:r>
-                          <a:rPr lang="pt-BR" i="1" smtClean="0">
-                            <a:latin typeface="Cambria Math" panose="02040503050406030204" pitchFamily="18" charset="0"/>
-                          </a:rPr>
-                          <m:t>𝑖</m:t>
-                        </m:r>
-                      </m:sub>
-                    </m:sSub>
-                    <m:r>
-                      <a:rPr lang="pt-BR" i="1" smtClean="0">
-                        <a:latin typeface="Cambria Math" panose="02040503050406030204" pitchFamily="18" charset="0"/>
-                        <a:ea typeface="Cambria Math" panose="02040503050406030204" pitchFamily="18" charset="0"/>
-                      </a:rPr>
-                      <m:t>=</m:t>
-                    </m:r>
-                    <m:sSub>
-                      <m:sSubPr>
-                        <m:ctrlPr>
-                          <a:rPr lang="pt-BR" i="1">
-                            <a:latin typeface="Cambria Math" panose="02040503050406030204" pitchFamily="18" charset="0"/>
-                          </a:rPr>
-                        </m:ctrlPr>
-                      </m:sSubPr>
-                      <m:e>
-                        <m:r>
-                          <a:rPr lang="pt-BR" i="1" smtClean="0">
-                            <a:latin typeface="Cambria Math" panose="02040503050406030204" pitchFamily="18" charset="0"/>
-                          </a:rPr>
-                          <m:t>𝑦</m:t>
-                        </m:r>
-                      </m:e>
-                      <m:sub>
-                        <m:r>
-                          <a:rPr lang="pt-BR" i="1" smtClean="0">
-                            <a:latin typeface="Cambria Math" panose="02040503050406030204" pitchFamily="18" charset="0"/>
-                          </a:rPr>
-                          <m:t>𝑖</m:t>
-                        </m:r>
-                      </m:sub>
-                    </m:sSub>
-                  </m:oMath>
-                </a14:m>
-                <a:r>
-                  <a:rPr lang="pt-BR" dirty="0"/>
-                  <a:t> e </a:t>
-                </a:r>
-                <a14:m>
-                  <m:oMath xmlns:m="http://schemas.openxmlformats.org/officeDocument/2006/math">
-                    <m:sSub>
-                      <m:sSubPr>
-                        <m:ctrlPr>
-                          <a:rPr lang="pt-BR" i="1">
-                            <a:latin typeface="Cambria Math" panose="02040503050406030204" pitchFamily="18" charset="0"/>
-                          </a:rPr>
-                        </m:ctrlPr>
-                      </m:sSubPr>
-                      <m:e>
-                        <m:r>
-                          <a:rPr lang="pt-BR" i="1" smtClean="0">
-                            <a:latin typeface="Cambria Math" panose="02040503050406030204" pitchFamily="18" charset="0"/>
-                          </a:rPr>
-                          <m:t>𝑑</m:t>
-                        </m:r>
-                      </m:e>
-                      <m:sub>
-                        <m:r>
-                          <a:rPr lang="pt-BR" i="1" smtClean="0">
-                            <a:latin typeface="Cambria Math" panose="02040503050406030204" pitchFamily="18" charset="0"/>
-                          </a:rPr>
-                          <m:t>𝑎</m:t>
-                        </m:r>
-                      </m:sub>
-                    </m:sSub>
-                    <m:d>
-                      <m:dPr>
-                        <m:ctrlPr>
-                          <a:rPr lang="pt-BR" i="1">
-                            <a:latin typeface="Cambria Math" panose="02040503050406030204" pitchFamily="18" charset="0"/>
-                          </a:rPr>
-                        </m:ctrlPr>
-                      </m:dPr>
-                      <m:e>
-                        <m:sSub>
-                          <m:sSubPr>
-                            <m:ctrlPr>
-                              <a:rPr lang="pt-BR" i="1">
-                                <a:latin typeface="Cambria Math" panose="02040503050406030204" pitchFamily="18" charset="0"/>
-                              </a:rPr>
-                            </m:ctrlPr>
-                          </m:sSubPr>
-                          <m:e>
-                            <m:r>
-                              <a:rPr lang="pt-BR" i="1" smtClean="0">
-                                <a:latin typeface="Cambria Math" panose="02040503050406030204" pitchFamily="18" charset="0"/>
-                              </a:rPr>
-                              <m:t>𝑥</m:t>
-                            </m:r>
-                          </m:e>
-                          <m:sub>
-                            <m:r>
-                              <a:rPr lang="pt-BR" i="1" smtClean="0">
-                                <a:latin typeface="Cambria Math" panose="02040503050406030204" pitchFamily="18" charset="0"/>
-                              </a:rPr>
-                              <m:t>𝑖</m:t>
-                            </m:r>
-                          </m:sub>
-                        </m:sSub>
-                        <m:r>
-                          <a:rPr lang="pt-BR" i="1" smtClean="0">
-                            <a:latin typeface="Cambria Math" panose="02040503050406030204" pitchFamily="18" charset="0"/>
-                          </a:rPr>
-                          <m:t>,</m:t>
-                        </m:r>
-                        <m:sSub>
-                          <m:sSubPr>
-                            <m:ctrlPr>
-                              <a:rPr lang="pt-BR" i="1">
-                                <a:latin typeface="Cambria Math" panose="02040503050406030204" pitchFamily="18" charset="0"/>
-                              </a:rPr>
-                            </m:ctrlPr>
-                          </m:sSubPr>
-                          <m:e>
-                            <m:r>
-                              <a:rPr lang="pt-BR" i="1" smtClean="0">
-                                <a:latin typeface="Cambria Math" panose="02040503050406030204" pitchFamily="18" charset="0"/>
-                              </a:rPr>
-                              <m:t>𝑦</m:t>
-                            </m:r>
-                          </m:e>
-                          <m:sub>
-                            <m:r>
-                              <a:rPr lang="pt-BR" i="1" smtClean="0">
-                                <a:latin typeface="Cambria Math" panose="02040503050406030204" pitchFamily="18" charset="0"/>
-                              </a:rPr>
-                              <m:t>𝑖</m:t>
-                            </m:r>
-                          </m:sub>
-                        </m:sSub>
-                      </m:e>
-                    </m:d>
-                    <m:r>
-                      <a:rPr lang="pt-BR" i="1" smtClean="0">
-                        <a:latin typeface="Cambria Math" panose="02040503050406030204" pitchFamily="18" charset="0"/>
-                      </a:rPr>
-                      <m:t>=</m:t>
-                    </m:r>
-                    <m:r>
-                      <a:rPr lang="pt-BR" b="0" i="1" smtClean="0">
-                        <a:latin typeface="Cambria Math" panose="02040503050406030204" pitchFamily="18" charset="0"/>
-                      </a:rPr>
-                      <m:t>1</m:t>
-                    </m:r>
-                    <m:r>
-                      <a:rPr lang="pt-BR" i="1" smtClean="0">
-                        <a:latin typeface="Cambria Math" panose="02040503050406030204" pitchFamily="18" charset="0"/>
-                      </a:rPr>
-                      <m:t> </m:t>
-                    </m:r>
-                    <m:r>
-                      <m:rPr>
-                        <m:sty m:val="p"/>
-                      </m:rPr>
-                      <a:rPr lang="pt-BR" smtClean="0">
-                        <a:latin typeface="Cambria Math" panose="02040503050406030204" pitchFamily="18" charset="0"/>
-                      </a:rPr>
-                      <m:t>se</m:t>
-                    </m:r>
-                    <m:sSub>
-                      <m:sSubPr>
-                        <m:ctrlPr>
-                          <a:rPr lang="pt-BR" i="1">
-                            <a:latin typeface="Cambria Math" panose="02040503050406030204" pitchFamily="18" charset="0"/>
-                          </a:rPr>
-                        </m:ctrlPr>
-                      </m:sSubPr>
-                      <m:e>
-                        <m:r>
-                          <a:rPr lang="pt-BR" i="1" smtClean="0">
-                            <a:latin typeface="Cambria Math" panose="02040503050406030204" pitchFamily="18" charset="0"/>
-                          </a:rPr>
-                          <m:t> </m:t>
-                        </m:r>
-                        <m:r>
-                          <a:rPr lang="pt-BR" i="1" smtClean="0">
-                            <a:latin typeface="Cambria Math" panose="02040503050406030204" pitchFamily="18" charset="0"/>
-                          </a:rPr>
-                          <m:t>𝑥</m:t>
-                        </m:r>
-                      </m:e>
-                      <m:sub>
-                        <m:r>
-                          <a:rPr lang="pt-BR" i="1" smtClean="0">
-                            <a:latin typeface="Cambria Math" panose="02040503050406030204" pitchFamily="18" charset="0"/>
-                          </a:rPr>
-                          <m:t>𝑖</m:t>
-                        </m:r>
-                      </m:sub>
-                    </m:sSub>
-                    <m:r>
-                      <a:rPr lang="pt-BR" i="1" smtClean="0">
-                        <a:latin typeface="Cambria Math" panose="02040503050406030204" pitchFamily="18" charset="0"/>
-                        <a:ea typeface="Cambria Math" panose="02040503050406030204" pitchFamily="18" charset="0"/>
-                      </a:rPr>
-                      <m:t>≠</m:t>
-                    </m:r>
-                    <m:sSub>
-                      <m:sSubPr>
-                        <m:ctrlPr>
-                          <a:rPr lang="pt-BR" i="1" smtClean="0">
-                            <a:latin typeface="Cambria Math" panose="02040503050406030204" pitchFamily="18" charset="0"/>
-                          </a:rPr>
-                        </m:ctrlPr>
-                      </m:sSubPr>
-                      <m:e>
-                        <m:r>
-                          <a:rPr lang="pt-BR" i="1" smtClean="0">
-                            <a:latin typeface="Cambria Math" panose="02040503050406030204" pitchFamily="18" charset="0"/>
-                          </a:rPr>
-                          <m:t>𝑦</m:t>
-                        </m:r>
-                      </m:e>
-                      <m:sub>
-                        <m:r>
-                          <a:rPr lang="pt-BR" i="1" smtClean="0">
-                            <a:latin typeface="Cambria Math" panose="02040503050406030204" pitchFamily="18" charset="0"/>
-                          </a:rPr>
-                          <m:t>𝑖</m:t>
-                        </m:r>
-                      </m:sub>
-                    </m:sSub>
-                  </m:oMath>
-                </a14:m>
-                <a:r>
-                  <a:rPr lang="pt-BR" dirty="0"/>
-                  <a:t> para atributos categóricos, mas transformados em </a:t>
-                </a:r>
-                <a:r>
-                  <a:rPr lang="pt-BR" dirty="0" smtClean="0"/>
-                  <a:t>numéricos</a:t>
-                </a:r>
-                <a:r>
-                  <a:rPr lang="pt-BR" dirty="0"/>
-                  <a:t>.</a:t>
-                </a:r>
-              </a:p>
-            </p:txBody>
-          </p:sp>
-        </mc:Choice>
-        <mc:Fallback xmlns="">
-          <p:sp>
-            <p:nvSpPr>
-              <p:cNvPr id="3" name="Espaço Reservado para Conteúdo 2"/>
-              <p:cNvSpPr>
-                <a:spLocks noGrp="1" noRot="1" noChangeAspect="1" noMove="1" noResize="1" noEditPoints="1" noAdjustHandles="1" noChangeArrowheads="1" noChangeShapeType="1" noTextEdit="1"/>
-              </p:cNvSpPr>
-              <p:nvPr>
-                <p:ph idx="1"/>
-              </p:nvPr>
-            </p:nvSpPr>
-            <p:spPr>
-              <a:xfrm>
-                <a:off x="838200" y="1825624"/>
-                <a:ext cx="11353800" cy="5032375"/>
-              </a:xfrm>
-              <a:blipFill rotWithShape="0">
-                <a:blip r:embed="rId2"/>
-                <a:stretch>
-                  <a:fillRect l="-1128" t="-1937"/>
-                </a:stretch>
-              </a:blipFill>
-            </p:spPr>
-            <p:txBody>
-              <a:bodyPr/>
-              <a:lstStyle/>
-              <a:p>
-                <a:r>
-                  <a:rPr lang="pt-BR">
-                    <a:noFill/>
-                  </a:rPr>
-                  <a:t> </a:t>
-                </a:r>
-              </a:p>
-            </p:txBody>
-          </p:sp>
-        </mc:Fallback>
-      </mc:AlternateContent>
-    </p:spTree>
-    <p:extLst>
-      <p:ext uri="{BB962C8B-B14F-4D97-AF65-F5344CB8AC3E}">
-        <p14:creationId xmlns:p14="http://schemas.microsoft.com/office/powerpoint/2010/main" val="2253238490"/>
-      </p:ext>
-    </p:extLst>
-  </p:cSld>
-  <p:clrMapOvr>
-    <a:masterClrMapping/>
-  </p:clrMapOvr>
-</p:sld>
-</file>
-
-<file path=ppt/slides/slide19.xml><?xml version="1.0" encoding="utf-8"?>
-<p:sld xmlns:a="http://schemas.openxmlformats.org/drawingml/2006/main" xmlns:r="http://schemas.openxmlformats.org/officeDocument/2006/relationships" xmlns:p="http://schemas.openxmlformats.org/presentationml/2006/main">
-  <p:cSld>
-    <p:spTree>
-      <p:nvGrpSpPr>
-        <p:cNvPr id="1" name=""/>
-        <p:cNvGrpSpPr/>
-        <p:nvPr/>
-      </p:nvGrpSpPr>
-      <p:grpSpPr>
-        <a:xfrm>
-          <a:off x="0" y="0"/>
-          <a:ext cx="0" cy="0"/>
-          <a:chOff x="0" y="0"/>
-          <a:chExt cx="0" cy="0"/>
-        </a:xfrm>
-      </p:grpSpPr>
-      <p:sp>
-        <p:nvSpPr>
-          <p:cNvPr id="2" name="Título 1"/>
-          <p:cNvSpPr>
-            <a:spLocks noGrp="1"/>
-          </p:cNvSpPr>
-          <p:nvPr>
-            <p:ph type="title"/>
-          </p:nvPr>
-        </p:nvSpPr>
-        <p:spPr/>
-        <p:txBody>
-          <a:bodyPr/>
-          <a:lstStyle/>
-          <a:p>
-            <a:r>
-              <a:rPr lang="pt-BR" dirty="0"/>
-              <a:t>A qual cluster um exemplo deve pertencer?</a:t>
-            </a:r>
-            <a:endParaRPr lang="en-US" dirty="0"/>
-          </a:p>
-        </p:txBody>
-      </p:sp>
-      <mc:AlternateContent xmlns:mc="http://schemas.openxmlformats.org/markup-compatibility/2006" xmlns:a14="http://schemas.microsoft.com/office/drawing/2010/main">
-        <mc:Choice Requires="a14">
+      <mc:AlternateContent xmlns:mc="http://schemas.openxmlformats.org/markup-compatibility/2006">
+        <mc:Choice xmlns:a14="http://schemas.microsoft.com/office/drawing/2010/main" Requires="a14">
           <p:sp>
             <p:nvSpPr>
               <p:cNvPr id="3" name="Espaço Reservado para Conteúdo 2"/>
@@ -9443,7 +8617,7 @@
             <p:spPr>
               <a:xfrm>
                 <a:off x="838199" y="1825624"/>
-                <a:ext cx="10924309" cy="4710257"/>
+                <a:ext cx="11353801" cy="5032376"/>
               </a:xfrm>
             </p:spPr>
             <p:txBody>
@@ -9453,7 +8627,7 @@
               <a:lstStyle/>
               <a:p>
                 <a:r>
-                  <a:rPr lang="pt-BR" dirty="0"/>
+                  <a:rPr lang="pt-BR" dirty="0" smtClean="0"/>
                   <a:t>Vamos supor que existam </a:t>
                 </a:r>
                 <a14:m>
@@ -9559,8 +8733,16 @@
               </a:p>
               <a:p>
                 <a:r>
+                  <a:rPr lang="pt-BR" dirty="0" smtClean="0"/>
+                  <a:t>Uma </a:t>
+                </a:r>
+                <a:r>
                   <a:rPr lang="pt-BR" dirty="0"/>
-                  <a:t>Um exemplo </a:t>
+                  <a:t>a</a:t>
+                </a:r>
+                <a:r>
+                  <a:rPr lang="pt-BR" dirty="0" smtClean="0"/>
+                  <a:t>mostra </a:t>
                 </a:r>
                 <a14:m>
                   <m:oMath xmlns:m="http://schemas.openxmlformats.org/officeDocument/2006/math">
@@ -9807,25 +8989,38 @@
               <a:p>
                 <a:r>
                   <a:rPr lang="pt-BR" dirty="0"/>
-                  <a:t>Agora, veremos como funciona o </a:t>
+                  <a:t>Agora, veremos como funciona </a:t>
                 </a:r>
                 <a:r>
-                  <a:rPr lang="pt-BR" i="1" dirty="0"/>
+                  <a:rPr lang="pt-BR" dirty="0" smtClean="0"/>
+                  <a:t>o </a:t>
+                </a:r>
+                <a:r>
+                  <a:rPr lang="pt-BR" dirty="0" err="1" smtClean="0"/>
+                  <a:t>algortimo</a:t>
+                </a:r>
+                <a:r>
+                  <a:rPr lang="pt-BR" dirty="0" smtClean="0"/>
+                  <a:t> </a:t>
+                </a:r>
+                <a:r>
+                  <a:rPr lang="pt-BR" i="1" dirty="0" smtClean="0"/>
                   <a:t>k-</a:t>
                 </a:r>
                 <a:r>
-                  <a:rPr lang="pt-BR" i="1" dirty="0" err="1"/>
+                  <a:rPr lang="pt-BR" i="1" dirty="0" err="1" smtClean="0"/>
                   <a:t>Means</a:t>
                 </a:r>
                 <a:r>
-                  <a:rPr lang="pt-BR" dirty="0"/>
-                  <a:t>, um dos algoritmos de clusterização (i.e., identificação de clusters) mais simples.</a:t>
+                  <a:rPr lang="pt-BR" dirty="0" smtClean="0"/>
+                  <a:t>.</a:t>
                 </a:r>
+                <a:endParaRPr lang="pt-BR" dirty="0"/>
               </a:p>
             </p:txBody>
           </p:sp>
         </mc:Choice>
-        <mc:Fallback xmlns="">
+        <mc:Fallback>
           <p:sp>
             <p:nvSpPr>
               <p:cNvPr id="3" name="Espaço Reservado para Conteúdo 2"/>
@@ -9839,12 +9034,12 @@
             <p:spPr>
               <a:xfrm>
                 <a:off x="838199" y="1825624"/>
-                <a:ext cx="10924309" cy="4710257"/>
+                <a:ext cx="11353801" cy="5032376"/>
               </a:xfrm>
               <a:blipFill rotWithShape="0">
                 <a:blip r:embed="rId2"/>
                 <a:stretch>
-                  <a:fillRect l="-948" t="-2070"/>
+                  <a:fillRect l="-913" t="-1937"/>
                 </a:stretch>
               </a:blipFill>
             </p:spPr>
@@ -9876,7 +9071,7 @@
 </p:sld>
 </file>
 
-<file path=ppt/slides/slide2.xml><?xml version="1.0" encoding="utf-8"?>
+<file path=ppt/slides/slide17.xml><?xml version="1.0" encoding="utf-8"?>
 <p:sld xmlns:a="http://schemas.openxmlformats.org/drawingml/2006/main" xmlns:r="http://schemas.openxmlformats.org/officeDocument/2006/relationships" xmlns:p="http://schemas.openxmlformats.org/presentationml/2006/main">
   <p:cSld>
     <p:spTree>
@@ -9909,192 +9104,6 @@
           <a:lstStyle/>
           <a:p>
             <a:r>
-              <a:rPr lang="pt-BR" dirty="0"/>
-              <a:t>Recapitulando</a:t>
-            </a:r>
-            <a:endParaRPr lang="en-US" dirty="0"/>
-          </a:p>
-        </p:txBody>
-      </p:sp>
-      <p:sp>
-        <p:nvSpPr>
-          <p:cNvPr id="3" name="Espaço Reservado para Conteúdo 2"/>
-          <p:cNvSpPr>
-            <a:spLocks noGrp="1"/>
-          </p:cNvSpPr>
-          <p:nvPr>
-            <p:ph idx="1"/>
-          </p:nvPr>
-        </p:nvSpPr>
-        <p:spPr>
-          <a:xfrm>
-            <a:off x="838199" y="1825624"/>
-            <a:ext cx="11223172" cy="5032376"/>
-          </a:xfrm>
-        </p:spPr>
-        <p:txBody>
-          <a:bodyPr>
-            <a:normAutofit/>
-          </a:bodyPr>
-          <a:lstStyle/>
-          <a:p>
-            <a:r>
-              <a:rPr lang="pt-BR" dirty="0"/>
-              <a:t>Até o momento, todos os algoritmos que aprendemos seguiam o paradigma do aprendizado supervisionado.</a:t>
-            </a:r>
-          </a:p>
-          <a:p>
-            <a:r>
-              <a:rPr lang="pt-BR" dirty="0"/>
-              <a:t>Hoje, falaremos sobre </a:t>
-            </a:r>
-            <a:r>
-              <a:rPr lang="pt-BR" b="1" i="1" dirty="0"/>
-              <a:t>clustering</a:t>
-            </a:r>
-            <a:r>
-              <a:rPr lang="pt-BR" dirty="0"/>
-              <a:t>, que são algoritmos de </a:t>
-            </a:r>
-            <a:r>
-              <a:rPr lang="pt-BR" b="1" dirty="0"/>
-              <a:t>aprendizado não-supervisionado</a:t>
-            </a:r>
-            <a:r>
-              <a:rPr lang="pt-BR" dirty="0"/>
-              <a:t>.</a:t>
-            </a:r>
-          </a:p>
-          <a:p>
-            <a:pPr lvl="1">
-              <a:buFont typeface="Wingdings" panose="05000000000000000000" pitchFamily="2" charset="2"/>
-              <a:buChar char="§"/>
-            </a:pPr>
-            <a:r>
-              <a:rPr lang="pt-BR" dirty="0"/>
-              <a:t>Não temos rótulos, apenas atributos.</a:t>
-            </a:r>
-          </a:p>
-          <a:p>
-            <a:r>
-              <a:rPr lang="pt-BR" dirty="0"/>
-              <a:t>Eles visam criar agrupamentos de dados (chamados de </a:t>
-            </a:r>
-            <a:r>
-              <a:rPr lang="pt-BR" b="1" i="1" dirty="0"/>
-              <a:t>clusters</a:t>
-            </a:r>
-            <a:r>
-              <a:rPr lang="pt-BR" b="1" dirty="0"/>
-              <a:t> </a:t>
-            </a:r>
-            <a:r>
-              <a:rPr lang="pt-BR" dirty="0"/>
-              <a:t>ou</a:t>
-            </a:r>
-            <a:r>
-              <a:rPr lang="pt-BR" b="1" dirty="0"/>
-              <a:t> grupos</a:t>
-            </a:r>
-            <a:r>
-              <a:rPr lang="pt-BR" dirty="0"/>
-              <a:t>) segundo seu </a:t>
-            </a:r>
-            <a:r>
-              <a:rPr lang="pt-BR" b="1" dirty="0">
-                <a:solidFill>
-                  <a:srgbClr val="00B050"/>
-                </a:solidFill>
-              </a:rPr>
-              <a:t>grau de semelhança</a:t>
-            </a:r>
-            <a:r>
-              <a:rPr lang="pt-BR" dirty="0"/>
-              <a:t>. </a:t>
-            </a:r>
-          </a:p>
-          <a:p>
-            <a:r>
-              <a:rPr lang="pt-BR" dirty="0"/>
-              <a:t>Nesta aula, aprenderemos sobre o algoritmo chamado de </a:t>
-            </a:r>
-            <a:r>
-              <a:rPr lang="pt-BR" b="1" dirty="0"/>
-              <a:t>k-Médias</a:t>
-            </a:r>
-            <a:r>
-              <a:rPr lang="pt-BR" dirty="0"/>
-              <a:t> (ou </a:t>
-            </a:r>
-            <a:r>
-              <a:rPr lang="pt-BR" b="1" i="1" dirty="0"/>
-              <a:t>k-</a:t>
-            </a:r>
-            <a:r>
-              <a:rPr lang="pt-BR" b="1" i="1" dirty="0" err="1"/>
-              <a:t>Means</a:t>
-            </a:r>
-            <a:r>
-              <a:rPr lang="pt-BR" dirty="0"/>
-              <a:t>, em inglês) que é um dos algoritmos mais simples de </a:t>
-            </a:r>
-            <a:r>
-              <a:rPr lang="pt-BR" b="1" i="1" dirty="0"/>
-              <a:t>clustering</a:t>
-            </a:r>
-            <a:r>
-              <a:rPr lang="pt-BR" dirty="0"/>
-              <a:t>.</a:t>
-            </a:r>
-          </a:p>
-        </p:txBody>
-      </p:sp>
-    </p:spTree>
-    <p:extLst>
-      <p:ext uri="{BB962C8B-B14F-4D97-AF65-F5344CB8AC3E}">
-        <p14:creationId xmlns:p14="http://schemas.microsoft.com/office/powerpoint/2010/main" val="2127415881"/>
-      </p:ext>
-    </p:extLst>
-  </p:cSld>
-  <p:clrMapOvr>
-    <a:masterClrMapping/>
-  </p:clrMapOvr>
-</p:sld>
-</file>
-
-<file path=ppt/slides/slide20.xml><?xml version="1.0" encoding="utf-8"?>
-<p:sld xmlns:a="http://schemas.openxmlformats.org/drawingml/2006/main" xmlns:r="http://schemas.openxmlformats.org/officeDocument/2006/relationships" xmlns:p="http://schemas.openxmlformats.org/presentationml/2006/main">
-  <p:cSld>
-    <p:spTree>
-      <p:nvGrpSpPr>
-        <p:cNvPr id="1" name=""/>
-        <p:cNvGrpSpPr/>
-        <p:nvPr/>
-      </p:nvGrpSpPr>
-      <p:grpSpPr>
-        <a:xfrm>
-          <a:off x="0" y="0"/>
-          <a:ext cx="0" cy="0"/>
-          <a:chOff x="0" y="0"/>
-          <a:chExt cx="0" cy="0"/>
-        </a:xfrm>
-      </p:grpSpPr>
-      <p:sp>
-        <p:nvSpPr>
-          <p:cNvPr id="2" name="Título 1"/>
-          <p:cNvSpPr>
-            <a:spLocks noGrp="1"/>
-          </p:cNvSpPr>
-          <p:nvPr>
-            <p:ph type="title"/>
-          </p:nvPr>
-        </p:nvSpPr>
-        <p:spPr/>
-        <p:txBody>
-          <a:bodyPr/>
-          <a:lstStyle/>
-          <a:p>
-            <a:r>
               <a:rPr lang="pt-BR" i="1" dirty="0"/>
               <a:t>k-</a:t>
             </a:r>
@@ -10106,8 +9115,8 @@
           </a:p>
         </p:txBody>
       </p:sp>
-      <mc:AlternateContent xmlns:mc="http://schemas.openxmlformats.org/markup-compatibility/2006" xmlns:a14="http://schemas.microsoft.com/office/drawing/2010/main">
-        <mc:Choice Requires="a14">
+      <mc:AlternateContent xmlns:mc="http://schemas.openxmlformats.org/markup-compatibility/2006">
+        <mc:Choice xmlns:a14="http://schemas.microsoft.com/office/drawing/2010/main" Requires="a14">
           <p:sp>
             <p:nvSpPr>
               <p:cNvPr id="3" name="Espaço Reservado para Conteúdo 2"/>
@@ -10162,15 +9171,19 @@
                 </a:r>
                 <a:r>
                   <a:rPr lang="pt-BR" dirty="0" smtClean="0"/>
-                  <a:t>um parâmetro </a:t>
+                  <a:t>um </a:t>
                 </a:r>
                 <a:r>
-                  <a:rPr lang="pt-BR" dirty="0"/>
-                  <a:t>definido pelo usuário </a:t>
+                  <a:rPr lang="pt-BR" dirty="0" err="1" smtClean="0"/>
+                  <a:t>hiperparâmetro</a:t>
                 </a:r>
                 <a:r>
                   <a:rPr lang="pt-BR" dirty="0" smtClean="0"/>
-                  <a:t>e define o número de </a:t>
+                  <a:t> que define </a:t>
+                </a:r>
+                <a:r>
+                  <a:rPr lang="pt-BR" dirty="0" smtClean="0"/>
+                  <a:t>o número de </a:t>
                 </a:r>
                 <a:r>
                   <a:rPr lang="pt-BR" i="1" dirty="0" smtClean="0"/>
@@ -10233,7 +9246,7 @@
             </p:txBody>
           </p:sp>
         </mc:Choice>
-        <mc:Fallback xmlns="">
+        <mc:Fallback>
           <p:sp>
             <p:nvSpPr>
               <p:cNvPr id="3" name="Espaço Reservado para Conteúdo 2"/>
@@ -10573,7 +9586,7 @@
 </p:sld>
 </file>
 
-<file path=ppt/slides/slide21.xml><?xml version="1.0" encoding="utf-8"?>
+<file path=ppt/slides/slide18.xml><?xml version="1.0" encoding="utf-8"?>
 <p:sld xmlns:a="http://schemas.openxmlformats.org/drawingml/2006/main" xmlns:r="http://schemas.openxmlformats.org/officeDocument/2006/relationships" xmlns:p="http://schemas.openxmlformats.org/presentationml/2006/main">
   <p:cSld>
     <p:spTree>
@@ -10592,6 +9605,69 @@
       </p:grpSpPr>
       <p:sp>
         <p:nvSpPr>
+          <p:cNvPr id="3" name="Espaço Reservado para Conteúdo 2"/>
+          <p:cNvSpPr>
+            <a:spLocks noGrp="1"/>
+          </p:cNvSpPr>
+          <p:nvPr>
+            <p:ph idx="1"/>
+          </p:nvPr>
+        </p:nvSpPr>
+        <p:spPr>
+          <a:xfrm>
+            <a:off x="929640" y="2892425"/>
+            <a:ext cx="10515600" cy="993775"/>
+          </a:xfrm>
+        </p:spPr>
+        <p:txBody>
+          <a:bodyPr>
+            <a:normAutofit/>
+          </a:bodyPr>
+          <a:lstStyle/>
+          <a:p>
+            <a:pPr marL="0" indent="0" algn="ctr">
+              <a:buNone/>
+            </a:pPr>
+            <a:r>
+              <a:rPr lang="pt-BR" sz="5400" dirty="0" smtClean="0"/>
+              <a:t>Vejamos um exemplo</a:t>
+            </a:r>
+            <a:endParaRPr lang="pt-BR" sz="5400" dirty="0"/>
+          </a:p>
+        </p:txBody>
+      </p:sp>
+    </p:spTree>
+    <p:extLst>
+      <p:ext uri="{BB962C8B-B14F-4D97-AF65-F5344CB8AC3E}">
+        <p14:creationId xmlns:p14="http://schemas.microsoft.com/office/powerpoint/2010/main" val="2538123681"/>
+      </p:ext>
+    </p:extLst>
+  </p:cSld>
+  <p:clrMapOvr>
+    <a:masterClrMapping/>
+  </p:clrMapOvr>
+</p:sld>
+</file>
+
+<file path=ppt/slides/slide19.xml><?xml version="1.0" encoding="utf-8"?>
+<p:sld xmlns:a="http://schemas.openxmlformats.org/drawingml/2006/main" xmlns:r="http://schemas.openxmlformats.org/officeDocument/2006/relationships" xmlns:p="http://schemas.openxmlformats.org/presentationml/2006/main">
+  <p:cSld>
+    <p:spTree>
+      <p:nvGrpSpPr>
+        <p:cNvPr id="1" name=""/>
+        <p:cNvGrpSpPr/>
+        <p:nvPr/>
+      </p:nvGrpSpPr>
+      <p:grpSpPr>
+        <a:xfrm>
+          <a:off x="0" y="0"/>
+          <a:ext cx="0" cy="0"/>
+          <a:chOff x="0" y="0"/>
+          <a:chExt cx="0" cy="0"/>
+        </a:xfrm>
+      </p:grpSpPr>
+      <p:sp>
+        <p:nvSpPr>
           <p:cNvPr id="2" name="Título 1"/>
           <p:cNvSpPr>
             <a:spLocks noGrp="1"/>
@@ -10626,7 +9702,7 @@
           <p:cNvPr id="4" name="Picture 5">
             <a:extLst>
               <a:ext uri="{FF2B5EF4-FFF2-40B4-BE49-F238E27FC236}">
-                <a16:creationId xmlns="" xmlns:a16="http://schemas.microsoft.com/office/drawing/2014/main" id="{F98B536F-38AB-58C5-0FFB-41BDB557E9EF}"/>
+                <a16:creationId xmlns:a16="http://schemas.microsoft.com/office/drawing/2014/main" xmlns="" id="{F98B536F-38AB-58C5-0FFB-41BDB557E9EF}"/>
               </a:ext>
             </a:extLst>
           </p:cNvPr>
@@ -10651,12 +9727,391 @@
           </a:prstGeom>
         </p:spPr>
       </p:pic>
-      <p:sp>
-        <p:nvSpPr>
-          <p:cNvPr id="5" name="TextBox 7">
+      <mc:AlternateContent xmlns:mc="http://schemas.openxmlformats.org/markup-compatibility/2006">
+        <mc:Choice xmlns:a14="http://schemas.microsoft.com/office/drawing/2010/main" Requires="a14">
+          <p:sp>
+            <p:nvSpPr>
+              <p:cNvPr id="5" name="TextBox 7">
+                <a:extLst>
+                  <a:ext uri="{FF2B5EF4-FFF2-40B4-BE49-F238E27FC236}">
+                    <a16:creationId xmlns:a16="http://schemas.microsoft.com/office/drawing/2014/main" xmlns="" id="{04EA9FAE-D371-68E0-2CB7-9C8893491B3B}"/>
+                  </a:ext>
+                </a:extLst>
+              </p:cNvPr>
+              <p:cNvSpPr txBox="1"/>
+              <p:nvPr/>
+            </p:nvSpPr>
+            <p:spPr>
+              <a:xfrm>
+                <a:off x="303430" y="2475186"/>
+                <a:ext cx="2532992" cy="646331"/>
+              </a:xfrm>
+              <a:prstGeom prst="rect">
+                <a:avLst/>
+              </a:prstGeom>
+              <a:noFill/>
+            </p:spPr>
+            <p:txBody>
+              <a:bodyPr wrap="square" rtlCol="0">
+                <a:spAutoFit/>
+              </a:bodyPr>
+              <a:lstStyle/>
+              <a:p>
+                <a:r>
+                  <a:rPr lang="pt-BR" dirty="0" smtClean="0"/>
+                  <a:t>1. Define-se o número de clusters, </a:t>
+                </a:r>
+                <a14:m>
+                  <m:oMath xmlns:m="http://schemas.openxmlformats.org/officeDocument/2006/math">
+                    <m:r>
+                      <a:rPr lang="pt-BR" b="0" i="1" smtClean="0">
+                        <a:latin typeface="Cambria Math" panose="02040503050406030204" pitchFamily="18" charset="0"/>
+                      </a:rPr>
+                      <m:t>𝑘</m:t>
+                    </m:r>
+                  </m:oMath>
+                </a14:m>
+                <a:r>
+                  <a:rPr lang="pt-BR" dirty="0" smtClean="0"/>
+                  <a:t> </a:t>
+                </a:r>
+                <a:r>
+                  <a:rPr lang="pt-BR" dirty="0"/>
+                  <a:t>= 3</a:t>
+                </a:r>
+                <a:endParaRPr lang="en-US" dirty="0"/>
+              </a:p>
+            </p:txBody>
+          </p:sp>
+        </mc:Choice>
+        <mc:Fallback>
+          <p:sp>
+            <p:nvSpPr>
+              <p:cNvPr id="5" name="TextBox 7">
+                <a:extLst>
+                  <a:ext uri="{FF2B5EF4-FFF2-40B4-BE49-F238E27FC236}">
+                    <a16:creationId xmlns:a16="http://schemas.microsoft.com/office/drawing/2014/main" xmlns="" id="{04EA9FAE-D371-68E0-2CB7-9C8893491B3B}"/>
+                  </a:ext>
+                </a:extLst>
+              </p:cNvPr>
+              <p:cNvSpPr txBox="1">
+                <a:spLocks noRot="1" noChangeAspect="1" noMove="1" noResize="1" noEditPoints="1" noAdjustHandles="1" noChangeArrowheads="1" noChangeShapeType="1" noTextEdit="1"/>
+              </p:cNvSpPr>
+              <p:nvPr/>
+            </p:nvSpPr>
+            <p:spPr>
+              <a:xfrm>
+                <a:off x="303430" y="2475186"/>
+                <a:ext cx="2532992" cy="646331"/>
+              </a:xfrm>
+              <a:prstGeom prst="rect">
+                <a:avLst/>
+              </a:prstGeom>
+              <a:blipFill rotWithShape="0">
+                <a:blip r:embed="rId3"/>
+                <a:stretch>
+                  <a:fillRect l="-2169" t="-4717" b="-14151"/>
+                </a:stretch>
+              </a:blipFill>
+            </p:spPr>
+            <p:txBody>
+              <a:bodyPr/>
+              <a:lstStyle/>
+              <a:p>
+                <a:r>
+                  <a:rPr lang="pt-BR">
+                    <a:noFill/>
+                  </a:rPr>
+                  <a:t> </a:t>
+                </a:r>
+              </a:p>
+            </p:txBody>
+          </p:sp>
+        </mc:Fallback>
+      </mc:AlternateContent>
+    </p:spTree>
+    <p:extLst>
+      <p:ext uri="{BB962C8B-B14F-4D97-AF65-F5344CB8AC3E}">
+        <p14:creationId xmlns:p14="http://schemas.microsoft.com/office/powerpoint/2010/main" val="3417258356"/>
+      </p:ext>
+    </p:extLst>
+  </p:cSld>
+  <p:clrMapOvr>
+    <a:masterClrMapping/>
+  </p:clrMapOvr>
+</p:sld>
+</file>
+
+<file path=ppt/slides/slide2.xml><?xml version="1.0" encoding="utf-8"?>
+<p:sld xmlns:a="http://schemas.openxmlformats.org/drawingml/2006/main" xmlns:r="http://schemas.openxmlformats.org/officeDocument/2006/relationships" xmlns:p="http://schemas.openxmlformats.org/presentationml/2006/main">
+  <p:cSld>
+    <p:spTree>
+      <p:nvGrpSpPr>
+        <p:cNvPr id="1" name=""/>
+        <p:cNvGrpSpPr/>
+        <p:nvPr/>
+      </p:nvGrpSpPr>
+      <p:grpSpPr>
+        <a:xfrm>
+          <a:off x="0" y="0"/>
+          <a:ext cx="0" cy="0"/>
+          <a:chOff x="0" y="0"/>
+          <a:chExt cx="0" cy="0"/>
+        </a:xfrm>
+      </p:grpSpPr>
+      <p:sp>
+        <p:nvSpPr>
+          <p:cNvPr id="2" name="Título 1"/>
+          <p:cNvSpPr>
+            <a:spLocks noGrp="1"/>
+          </p:cNvSpPr>
+          <p:nvPr>
+            <p:ph type="title"/>
+          </p:nvPr>
+        </p:nvSpPr>
+        <p:spPr/>
+        <p:txBody>
+          <a:bodyPr/>
+          <a:lstStyle/>
+          <a:p>
+            <a:r>
+              <a:rPr lang="pt-BR" dirty="0"/>
+              <a:t>Recapitulando</a:t>
+            </a:r>
+            <a:endParaRPr lang="en-US" dirty="0"/>
+          </a:p>
+        </p:txBody>
+      </p:sp>
+      <p:sp>
+        <p:nvSpPr>
+          <p:cNvPr id="3" name="Espaço Reservado para Conteúdo 2"/>
+          <p:cNvSpPr>
+            <a:spLocks noGrp="1"/>
+          </p:cNvSpPr>
+          <p:nvPr>
+            <p:ph idx="1"/>
+          </p:nvPr>
+        </p:nvSpPr>
+        <p:spPr>
+          <a:xfrm>
+            <a:off x="838199" y="1825624"/>
+            <a:ext cx="11223172" cy="5032376"/>
+          </a:xfrm>
+        </p:spPr>
+        <p:txBody>
+          <a:bodyPr>
+            <a:normAutofit/>
+          </a:bodyPr>
+          <a:lstStyle/>
+          <a:p>
+            <a:r>
+              <a:rPr lang="pt-BR" dirty="0"/>
+              <a:t>Até o momento, todos os algoritmos que aprendemos seguiam o paradigma do aprendizado supervisionado.</a:t>
+            </a:r>
+          </a:p>
+          <a:p>
+            <a:r>
+              <a:rPr lang="pt-BR" dirty="0"/>
+              <a:t>Hoje, falaremos sobre </a:t>
+            </a:r>
+            <a:r>
+              <a:rPr lang="pt-BR" b="1" i="1" dirty="0"/>
+              <a:t>clustering</a:t>
+            </a:r>
+            <a:r>
+              <a:rPr lang="pt-BR" dirty="0"/>
+              <a:t>, que são algoritmos de </a:t>
+            </a:r>
+            <a:r>
+              <a:rPr lang="pt-BR" b="1" dirty="0"/>
+              <a:t>aprendizado não-supervisionado</a:t>
+            </a:r>
+            <a:r>
+              <a:rPr lang="pt-BR" dirty="0"/>
+              <a:t>.</a:t>
+            </a:r>
+          </a:p>
+          <a:p>
+            <a:pPr lvl="1">
+              <a:buFont typeface="Wingdings" panose="05000000000000000000" pitchFamily="2" charset="2"/>
+              <a:buChar char="§"/>
+            </a:pPr>
+            <a:r>
+              <a:rPr lang="pt-BR" dirty="0"/>
+              <a:t>Não temos rótulos, apenas atributos.</a:t>
+            </a:r>
+          </a:p>
+          <a:p>
+            <a:r>
+              <a:rPr lang="pt-BR" dirty="0"/>
+              <a:t>Eles visam criar agrupamentos de dados (chamados de </a:t>
+            </a:r>
+            <a:r>
+              <a:rPr lang="pt-BR" b="1" i="1" dirty="0"/>
+              <a:t>clusters</a:t>
+            </a:r>
+            <a:r>
+              <a:rPr lang="pt-BR" b="1" dirty="0"/>
+              <a:t> </a:t>
+            </a:r>
+            <a:r>
+              <a:rPr lang="pt-BR" dirty="0"/>
+              <a:t>ou</a:t>
+            </a:r>
+            <a:r>
+              <a:rPr lang="pt-BR" b="1" dirty="0"/>
+              <a:t> grupos</a:t>
+            </a:r>
+            <a:r>
+              <a:rPr lang="pt-BR" dirty="0"/>
+              <a:t>) segundo seu </a:t>
+            </a:r>
+            <a:r>
+              <a:rPr lang="pt-BR" b="1" dirty="0">
+                <a:solidFill>
+                  <a:srgbClr val="00B050"/>
+                </a:solidFill>
+              </a:rPr>
+              <a:t>grau de semelhança</a:t>
+            </a:r>
+            <a:r>
+              <a:rPr lang="pt-BR" dirty="0"/>
+              <a:t>. </a:t>
+            </a:r>
+          </a:p>
+          <a:p>
+            <a:r>
+              <a:rPr lang="pt-BR" dirty="0"/>
+              <a:t>Nesta aula, aprenderemos sobre o algoritmo chamado de </a:t>
+            </a:r>
+            <a:r>
+              <a:rPr lang="pt-BR" b="1" dirty="0"/>
+              <a:t>k-Médias</a:t>
+            </a:r>
+            <a:r>
+              <a:rPr lang="pt-BR" dirty="0"/>
+              <a:t> (ou </a:t>
+            </a:r>
+            <a:r>
+              <a:rPr lang="pt-BR" b="1" i="1" dirty="0"/>
+              <a:t>k-</a:t>
+            </a:r>
+            <a:r>
+              <a:rPr lang="pt-BR" b="1" i="1" dirty="0" err="1"/>
+              <a:t>Means</a:t>
+            </a:r>
+            <a:r>
+              <a:rPr lang="pt-BR" dirty="0"/>
+              <a:t>, em inglês) que é um dos algoritmos mais simples de </a:t>
+            </a:r>
+            <a:r>
+              <a:rPr lang="pt-BR" b="1" i="1" dirty="0"/>
+              <a:t>clustering</a:t>
+            </a:r>
+            <a:r>
+              <a:rPr lang="pt-BR" dirty="0"/>
+              <a:t>.</a:t>
+            </a:r>
+          </a:p>
+        </p:txBody>
+      </p:sp>
+    </p:spTree>
+    <p:extLst>
+      <p:ext uri="{BB962C8B-B14F-4D97-AF65-F5344CB8AC3E}">
+        <p14:creationId xmlns:p14="http://schemas.microsoft.com/office/powerpoint/2010/main" val="2127415881"/>
+      </p:ext>
+    </p:extLst>
+  </p:cSld>
+  <p:clrMapOvr>
+    <a:masterClrMapping/>
+  </p:clrMapOvr>
+</p:sld>
+</file>
+
+<file path=ppt/slides/slide20.xml><?xml version="1.0" encoding="utf-8"?>
+<p:sld xmlns:a="http://schemas.openxmlformats.org/drawingml/2006/main" xmlns:r="http://schemas.openxmlformats.org/officeDocument/2006/relationships" xmlns:p="http://schemas.openxmlformats.org/presentationml/2006/main">
+  <p:cSld>
+    <p:spTree>
+      <p:nvGrpSpPr>
+        <p:cNvPr id="1" name=""/>
+        <p:cNvGrpSpPr/>
+        <p:nvPr/>
+      </p:nvGrpSpPr>
+      <p:grpSpPr>
+        <a:xfrm>
+          <a:off x="0" y="0"/>
+          <a:ext cx="0" cy="0"/>
+          <a:chOff x="0" y="0"/>
+          <a:chExt cx="0" cy="0"/>
+        </a:xfrm>
+      </p:grpSpPr>
+      <p:sp>
+        <p:nvSpPr>
+          <p:cNvPr id="2" name="Título 1"/>
+          <p:cNvSpPr>
+            <a:spLocks noGrp="1"/>
+          </p:cNvSpPr>
+          <p:nvPr>
+            <p:ph type="title"/>
+          </p:nvPr>
+        </p:nvSpPr>
+        <p:spPr/>
+        <p:txBody>
+          <a:bodyPr/>
+          <a:lstStyle/>
+          <a:p>
+            <a:r>
+              <a:rPr lang="pt-BR" dirty="0"/>
+              <a:t>Funcionamento do </a:t>
+            </a:r>
+            <a:r>
+              <a:rPr lang="pt-BR" i="1" dirty="0"/>
+              <a:t>k-</a:t>
+            </a:r>
+            <a:r>
+              <a:rPr lang="pt-BR" i="1" dirty="0" err="1"/>
+              <a:t>Means</a:t>
+            </a:r>
+            <a:endParaRPr lang="pt-BR" dirty="0"/>
+          </a:p>
+        </p:txBody>
+      </p:sp>
+      <p:pic>
+        <p:nvPicPr>
+          <p:cNvPr id="3" name="Picture 5">
             <a:extLst>
               <a:ext uri="{FF2B5EF4-FFF2-40B4-BE49-F238E27FC236}">
-                <a16:creationId xmlns="" xmlns:a16="http://schemas.microsoft.com/office/drawing/2014/main" id="{04EA9FAE-D371-68E0-2CB7-9C8893491B3B}"/>
+                <a16:creationId xmlns:a16="http://schemas.microsoft.com/office/drawing/2014/main" xmlns="" id="{69F3FE92-0D0B-AECE-B64E-FC9D2F3EADBC}"/>
+              </a:ext>
+            </a:extLst>
+          </p:cNvPr>
+          <p:cNvPicPr>
+            <a:picLocks noChangeAspect="1"/>
+          </p:cNvPicPr>
+          <p:nvPr/>
+        </p:nvPicPr>
+        <p:blipFill>
+          <a:blip r:embed="rId2"/>
+          <a:stretch>
+            <a:fillRect/>
+          </a:stretch>
+        </p:blipFill>
+        <p:spPr>
+          <a:xfrm>
+            <a:off x="2966601" y="1913835"/>
+            <a:ext cx="6258798" cy="4944165"/>
+          </a:xfrm>
+          <a:prstGeom prst="rect">
+            <a:avLst/>
+          </a:prstGeom>
+        </p:spPr>
+      </p:pic>
+      <p:sp>
+        <p:nvSpPr>
+          <p:cNvPr id="4" name="TextBox 7">
+            <a:extLst>
+              <a:ext uri="{FF2B5EF4-FFF2-40B4-BE49-F238E27FC236}">
+                <a16:creationId xmlns:a16="http://schemas.microsoft.com/office/drawing/2014/main" xmlns="" id="{5D947541-89EC-69EF-1918-6EFD56E0B3C2}"/>
               </a:ext>
             </a:extLst>
           </p:cNvPr>
@@ -10665,8 +10120,8 @@
         </p:nvSpPr>
         <p:spPr>
           <a:xfrm>
-            <a:off x="303430" y="2475186"/>
-            <a:ext cx="2532992" cy="646331"/>
+            <a:off x="65746" y="2490952"/>
+            <a:ext cx="2900855" cy="923330"/>
           </a:xfrm>
           <a:prstGeom prst="rect">
             <a:avLst/>
@@ -10680,17 +10135,213 @@
           <a:lstStyle/>
           <a:p>
             <a:r>
-              <a:rPr lang="pt-BR" dirty="0"/>
-              <a:t>1. Define-se o número de clusters, K = 3</a:t>
-            </a:r>
-            <a:endParaRPr lang="en-US" dirty="0"/>
+              <a:rPr lang="en-US" dirty="0"/>
+              <a:t>2. </a:t>
+            </a:r>
+            <a:r>
+              <a:rPr lang="en-US" dirty="0" err="1"/>
+              <a:t>Escolhe</a:t>
+            </a:r>
+            <a:r>
+              <a:rPr lang="en-US" dirty="0"/>
+              <a:t>-se </a:t>
+            </a:r>
+            <a:r>
+              <a:rPr lang="en-US" dirty="0" err="1"/>
+              <a:t>os</a:t>
+            </a:r>
+            <a:r>
+              <a:rPr lang="en-US" dirty="0"/>
+              <a:t> </a:t>
+            </a:r>
+            <a:r>
+              <a:rPr lang="en-US" dirty="0" err="1"/>
+              <a:t>centroides</a:t>
+            </a:r>
+            <a:r>
+              <a:rPr lang="en-US" dirty="0"/>
+              <a:t> para </a:t>
+            </a:r>
+            <a:r>
+              <a:rPr lang="en-US" dirty="0" err="1"/>
+              <a:t>cada</a:t>
+            </a:r>
+            <a:r>
+              <a:rPr lang="en-US" dirty="0"/>
+              <a:t> cluster de forma </a:t>
+            </a:r>
+            <a:r>
+              <a:rPr lang="en-US" dirty="0" err="1"/>
+              <a:t>aleatória</a:t>
+            </a:r>
+            <a:r>
+              <a:rPr lang="en-US" dirty="0"/>
+              <a:t>.</a:t>
+            </a:r>
           </a:p>
         </p:txBody>
       </p:sp>
     </p:spTree>
     <p:extLst>
       <p:ext uri="{BB962C8B-B14F-4D97-AF65-F5344CB8AC3E}">
-        <p14:creationId xmlns:p14="http://schemas.microsoft.com/office/powerpoint/2010/main" val="3417258356"/>
+        <p14:creationId xmlns:p14="http://schemas.microsoft.com/office/powerpoint/2010/main" val="489881645"/>
+      </p:ext>
+    </p:extLst>
+  </p:cSld>
+  <p:clrMapOvr>
+    <a:masterClrMapping/>
+  </p:clrMapOvr>
+</p:sld>
+</file>
+
+<file path=ppt/slides/slide21.xml><?xml version="1.0" encoding="utf-8"?>
+<p:sld xmlns:a="http://schemas.openxmlformats.org/drawingml/2006/main" xmlns:r="http://schemas.openxmlformats.org/officeDocument/2006/relationships" xmlns:p="http://schemas.openxmlformats.org/presentationml/2006/main">
+  <p:cSld>
+    <p:spTree>
+      <p:nvGrpSpPr>
+        <p:cNvPr id="1" name=""/>
+        <p:cNvGrpSpPr/>
+        <p:nvPr/>
+      </p:nvGrpSpPr>
+      <p:grpSpPr>
+        <a:xfrm>
+          <a:off x="0" y="0"/>
+          <a:ext cx="0" cy="0"/>
+          <a:chOff x="0" y="0"/>
+          <a:chExt cx="0" cy="0"/>
+        </a:xfrm>
+      </p:grpSpPr>
+      <p:sp>
+        <p:nvSpPr>
+          <p:cNvPr id="2" name="Título 1"/>
+          <p:cNvSpPr>
+            <a:spLocks noGrp="1"/>
+          </p:cNvSpPr>
+          <p:nvPr>
+            <p:ph type="title"/>
+          </p:nvPr>
+        </p:nvSpPr>
+        <p:spPr/>
+        <p:txBody>
+          <a:bodyPr/>
+          <a:lstStyle/>
+          <a:p>
+            <a:r>
+              <a:rPr lang="pt-BR" dirty="0"/>
+              <a:t>Funcionamento do </a:t>
+            </a:r>
+            <a:r>
+              <a:rPr lang="pt-BR" i="1" dirty="0"/>
+              <a:t>k-</a:t>
+            </a:r>
+            <a:r>
+              <a:rPr lang="pt-BR" i="1" dirty="0" err="1"/>
+              <a:t>Means</a:t>
+            </a:r>
+            <a:endParaRPr lang="pt-BR" dirty="0"/>
+          </a:p>
+        </p:txBody>
+      </p:sp>
+      <p:pic>
+        <p:nvPicPr>
+          <p:cNvPr id="3" name="Picture 5">
+            <a:extLst>
+              <a:ext uri="{FF2B5EF4-FFF2-40B4-BE49-F238E27FC236}">
+                <a16:creationId xmlns:a16="http://schemas.microsoft.com/office/drawing/2014/main" xmlns="" id="{1C0684BB-EFF7-DBA8-3519-25CE2A1A9632}"/>
+              </a:ext>
+            </a:extLst>
+          </p:cNvPr>
+          <p:cNvPicPr>
+            <a:picLocks noChangeAspect="1"/>
+          </p:cNvPicPr>
+          <p:nvPr/>
+        </p:nvPicPr>
+        <p:blipFill>
+          <a:blip r:embed="rId2"/>
+          <a:stretch>
+            <a:fillRect/>
+          </a:stretch>
+        </p:blipFill>
+        <p:spPr>
+          <a:xfrm>
+            <a:off x="2961837" y="1885256"/>
+            <a:ext cx="6268325" cy="4972744"/>
+          </a:xfrm>
+          <a:prstGeom prst="rect">
+            <a:avLst/>
+          </a:prstGeom>
+        </p:spPr>
+      </p:pic>
+      <p:sp>
+        <p:nvSpPr>
+          <p:cNvPr id="4" name="TextBox 8">
+            <a:extLst>
+              <a:ext uri="{FF2B5EF4-FFF2-40B4-BE49-F238E27FC236}">
+                <a16:creationId xmlns:a16="http://schemas.microsoft.com/office/drawing/2014/main" xmlns="" id="{38267D7C-379A-003E-4048-8D4DDD969EB6}"/>
+              </a:ext>
+            </a:extLst>
+          </p:cNvPr>
+          <p:cNvSpPr txBox="1"/>
+          <p:nvPr/>
+        </p:nvSpPr>
+        <p:spPr>
+          <a:xfrm>
+            <a:off x="101600" y="2865735"/>
+            <a:ext cx="2652110" cy="1477328"/>
+          </a:xfrm>
+          <a:prstGeom prst="rect">
+            <a:avLst/>
+          </a:prstGeom>
+          <a:noFill/>
+        </p:spPr>
+        <p:txBody>
+          <a:bodyPr wrap="square">
+            <a:spAutoFit/>
+          </a:bodyPr>
+          <a:lstStyle/>
+          <a:p>
+            <a:r>
+              <a:rPr lang="pt-BR" b="0" i="0" dirty="0">
+                <a:solidFill>
+                  <a:srgbClr val="404040"/>
+                </a:solidFill>
+                <a:effectLst/>
+              </a:rPr>
+              <a:t>3. Atribui-se cada amostra ao </a:t>
+            </a:r>
+            <a:r>
+              <a:rPr lang="pt-BR" b="0" i="0" dirty="0" smtClean="0">
+                <a:solidFill>
+                  <a:srgbClr val="404040"/>
+                </a:solidFill>
+                <a:effectLst/>
+              </a:rPr>
+              <a:t>centroide </a:t>
+            </a:r>
+            <a:r>
+              <a:rPr lang="pt-BR" b="0" i="0" dirty="0">
+                <a:solidFill>
+                  <a:srgbClr val="404040"/>
+                </a:solidFill>
+                <a:effectLst/>
+              </a:rPr>
+              <a:t>mais próximo com base na distância euclidiana.</a:t>
+            </a:r>
+            <a:r>
+              <a:rPr lang="pt-BR" dirty="0"/>
+              <a:t/>
+            </a:r>
+            <a:br>
+              <a:rPr lang="pt-BR" dirty="0"/>
+            </a:br>
+            <a:endParaRPr lang="en-US" dirty="0"/>
+          </a:p>
+        </p:txBody>
+      </p:sp>
+    </p:spTree>
+    <p:extLst>
+      <p:ext uri="{BB962C8B-B14F-4D97-AF65-F5344CB8AC3E}">
+        <p14:creationId xmlns:p14="http://schemas.microsoft.com/office/powerpoint/2010/main" val="3168554397"/>
       </p:ext>
     </p:extLst>
   </p:cSld>
@@ -10750,10 +10401,10 @@
       </p:sp>
       <p:pic>
         <p:nvPicPr>
-          <p:cNvPr id="3" name="Picture 5">
+          <p:cNvPr id="3" name="Picture 7">
             <a:extLst>
               <a:ext uri="{FF2B5EF4-FFF2-40B4-BE49-F238E27FC236}">
-                <a16:creationId xmlns="" xmlns:a16="http://schemas.microsoft.com/office/drawing/2014/main" id="{69F3FE92-0D0B-AECE-B64E-FC9D2F3EADBC}"/>
+                <a16:creationId xmlns:a16="http://schemas.microsoft.com/office/drawing/2014/main" xmlns="" id="{4A874BBD-11DB-833A-341F-F134DDD11108}"/>
               </a:ext>
             </a:extLst>
           </p:cNvPr>
@@ -10770,8 +10421,8 @@
         </p:blipFill>
         <p:spPr>
           <a:xfrm>
-            <a:off x="2966601" y="1913835"/>
-            <a:ext cx="6258798" cy="4944165"/>
+            <a:off x="2957074" y="1913835"/>
+            <a:ext cx="6277851" cy="4944165"/>
           </a:xfrm>
           <a:prstGeom prst="rect">
             <a:avLst/>
@@ -10780,10 +10431,10 @@
       </p:pic>
       <p:sp>
         <p:nvSpPr>
-          <p:cNvPr id="4" name="TextBox 7">
+          <p:cNvPr id="4" name="TextBox 9">
             <a:extLst>
               <a:ext uri="{FF2B5EF4-FFF2-40B4-BE49-F238E27FC236}">
-                <a16:creationId xmlns="" xmlns:a16="http://schemas.microsoft.com/office/drawing/2014/main" id="{5D947541-89EC-69EF-1918-6EFD56E0B3C2}"/>
+                <a16:creationId xmlns:a16="http://schemas.microsoft.com/office/drawing/2014/main" xmlns="" id="{FB63ADD3-D956-76C5-F130-F38465877D67}"/>
               </a:ext>
             </a:extLst>
           </p:cNvPr>
@@ -10792,8 +10443,8 @@
         </p:nvSpPr>
         <p:spPr>
           <a:xfrm>
-            <a:off x="65746" y="2490952"/>
-            <a:ext cx="2900855" cy="923330"/>
+            <a:off x="101600" y="2577501"/>
+            <a:ext cx="2998952" cy="646331"/>
           </a:xfrm>
           <a:prstGeom prst="rect">
             <a:avLst/>
@@ -10801,62 +10452,28 @@
           <a:noFill/>
         </p:spPr>
         <p:txBody>
-          <a:bodyPr wrap="square" rtlCol="0">
+          <a:bodyPr wrap="square">
             <a:spAutoFit/>
           </a:bodyPr>
           <a:lstStyle/>
           <a:p>
             <a:r>
-              <a:rPr lang="en-US" dirty="0"/>
-              <a:t>2. </a:t>
-            </a:r>
-            <a:r>
-              <a:rPr lang="en-US" dirty="0" err="1"/>
-              <a:t>Escolhe</a:t>
-            </a:r>
-            <a:r>
-              <a:rPr lang="en-US" dirty="0"/>
-              <a:t>-se </a:t>
-            </a:r>
-            <a:r>
-              <a:rPr lang="en-US" dirty="0" err="1"/>
-              <a:t>os</a:t>
-            </a:r>
-            <a:r>
-              <a:rPr lang="en-US" dirty="0"/>
-              <a:t> </a:t>
-            </a:r>
-            <a:r>
-              <a:rPr lang="en-US" dirty="0" err="1"/>
-              <a:t>centroides</a:t>
-            </a:r>
-            <a:r>
-              <a:rPr lang="en-US" dirty="0"/>
-              <a:t> para </a:t>
-            </a:r>
-            <a:r>
-              <a:rPr lang="en-US" dirty="0" err="1"/>
-              <a:t>cada</a:t>
-            </a:r>
-            <a:r>
-              <a:rPr lang="en-US" dirty="0"/>
-              <a:t> cluster de forma </a:t>
-            </a:r>
-            <a:r>
-              <a:rPr lang="en-US" dirty="0" err="1"/>
-              <a:t>aleatória</a:t>
-            </a:r>
-            <a:r>
-              <a:rPr lang="en-US" dirty="0"/>
-              <a:t>.</a:t>
-            </a:r>
+              <a:rPr lang="pt-BR" b="0" i="0" dirty="0">
+                <a:solidFill>
+                  <a:srgbClr val="404040"/>
+                </a:solidFill>
+                <a:effectLst/>
+              </a:rPr>
+              <a:t>4. Recalcula-se o centroide dos clusters.</a:t>
+            </a:r>
+            <a:endParaRPr lang="en-US" dirty="0"/>
           </a:p>
         </p:txBody>
       </p:sp>
     </p:spTree>
     <p:extLst>
       <p:ext uri="{BB962C8B-B14F-4D97-AF65-F5344CB8AC3E}">
-        <p14:creationId xmlns:p14="http://schemas.microsoft.com/office/powerpoint/2010/main" val="489881645"/>
+        <p14:creationId xmlns:p14="http://schemas.microsoft.com/office/powerpoint/2010/main" val="1154901412"/>
       </p:ext>
     </p:extLst>
   </p:cSld>
@@ -10919,7 +10536,7 @@
           <p:cNvPr id="3" name="Picture 5">
             <a:extLst>
               <a:ext uri="{FF2B5EF4-FFF2-40B4-BE49-F238E27FC236}">
-                <a16:creationId xmlns="" xmlns:a16="http://schemas.microsoft.com/office/drawing/2014/main" id="{1C0684BB-EFF7-DBA8-3519-25CE2A1A9632}"/>
+                <a16:creationId xmlns:a16="http://schemas.microsoft.com/office/drawing/2014/main" xmlns="" id="{BE9E2474-44BE-43D0-EE2F-D03349050DA2}"/>
               </a:ext>
             </a:extLst>
           </p:cNvPr>
@@ -10936,8 +10553,8 @@
         </p:blipFill>
         <p:spPr>
           <a:xfrm>
-            <a:off x="2961837" y="1885256"/>
-            <a:ext cx="6268325" cy="4972744"/>
+            <a:off x="2836422" y="1913835"/>
+            <a:ext cx="6315956" cy="4944165"/>
           </a:xfrm>
           <a:prstGeom prst="rect">
             <a:avLst/>
@@ -10946,10 +10563,10 @@
       </p:pic>
       <p:sp>
         <p:nvSpPr>
-          <p:cNvPr id="4" name="TextBox 8">
+          <p:cNvPr id="4" name="TextBox 9">
             <a:extLst>
               <a:ext uri="{FF2B5EF4-FFF2-40B4-BE49-F238E27FC236}">
-                <a16:creationId xmlns="" xmlns:a16="http://schemas.microsoft.com/office/drawing/2014/main" id="{38267D7C-379A-003E-4048-8D4DDD969EB6}"/>
+                <a16:creationId xmlns:a16="http://schemas.microsoft.com/office/drawing/2014/main" xmlns="" id="{E7FEC406-7A7E-5D78-DF69-D2416A2375C3}"/>
               </a:ext>
             </a:extLst>
           </p:cNvPr>
@@ -10958,8 +10575,8 @@
         </p:nvSpPr>
         <p:spPr>
           <a:xfrm>
-            <a:off x="101600" y="2865735"/>
-            <a:ext cx="2652110" cy="1477328"/>
+            <a:off x="304800" y="2629284"/>
+            <a:ext cx="2531622" cy="646331"/>
           </a:xfrm>
           <a:prstGeom prst="rect">
             <a:avLst/>
@@ -10979,33 +10596,8 @@
                 </a:solidFill>
                 <a:effectLst/>
               </a:rPr>
-              <a:t>3. Atribui-se cada amostra ao </a:t>
-            </a:r>
-            <a:r>
-              <a:rPr lang="pt-BR" b="0" i="0" dirty="0" smtClean="0">
-                <a:solidFill>
-                  <a:srgbClr val="404040"/>
-                </a:solidFill>
-                <a:effectLst/>
-              </a:rPr>
-              <a:t>centroide </a:t>
-            </a:r>
-            <a:r>
-              <a:rPr lang="pt-BR" b="0" i="0" dirty="0">
-                <a:solidFill>
-                  <a:srgbClr val="404040"/>
-                </a:solidFill>
-                <a:effectLst/>
-              </a:rPr>
-              <a:t>mais próximo com base na distância euclidiana.</a:t>
-            </a:r>
-            <a:r>
-              <a:rPr lang="pt-BR" dirty="0"/>
-              <a:t/>
-            </a:r>
-            <a:br>
-              <a:rPr lang="pt-BR" dirty="0"/>
-            </a:br>
+              <a:t>5. Repete-se os passos 3 e 4.</a:t>
+            </a:r>
             <a:endParaRPr lang="en-US" dirty="0"/>
           </a:p>
         </p:txBody>
@@ -11013,7 +10605,7 @@
     </p:spTree>
     <p:extLst>
       <p:ext uri="{BB962C8B-B14F-4D97-AF65-F5344CB8AC3E}">
-        <p14:creationId xmlns:p14="http://schemas.microsoft.com/office/powerpoint/2010/main" val="3168554397"/>
+        <p14:creationId xmlns:p14="http://schemas.microsoft.com/office/powerpoint/2010/main" val="928097257"/>
       </p:ext>
     </p:extLst>
   </p:cSld>
@@ -11073,10 +10665,10 @@
       </p:sp>
       <p:pic>
         <p:nvPicPr>
-          <p:cNvPr id="3" name="Picture 7">
+          <p:cNvPr id="3" name="Picture 5">
             <a:extLst>
               <a:ext uri="{FF2B5EF4-FFF2-40B4-BE49-F238E27FC236}">
-                <a16:creationId xmlns="" xmlns:a16="http://schemas.microsoft.com/office/drawing/2014/main" id="{4A874BBD-11DB-833A-341F-F134DDD11108}"/>
+                <a16:creationId xmlns:a16="http://schemas.microsoft.com/office/drawing/2014/main" xmlns="" id="{CD544109-9098-CA3C-766B-DFEB05AE1F38}"/>
               </a:ext>
             </a:extLst>
           </p:cNvPr>
@@ -11093,8 +10685,8 @@
         </p:blipFill>
         <p:spPr>
           <a:xfrm>
-            <a:off x="2957074" y="1913835"/>
-            <a:ext cx="6277851" cy="4944165"/>
+            <a:off x="2879290" y="1932888"/>
+            <a:ext cx="6230219" cy="4925112"/>
           </a:xfrm>
           <a:prstGeom prst="rect">
             <a:avLst/>
@@ -11106,7 +10698,7 @@
           <p:cNvPr id="4" name="TextBox 9">
             <a:extLst>
               <a:ext uri="{FF2B5EF4-FFF2-40B4-BE49-F238E27FC236}">
-                <a16:creationId xmlns="" xmlns:a16="http://schemas.microsoft.com/office/drawing/2014/main" id="{FB63ADD3-D956-76C5-F130-F38465877D67}"/>
+                <a16:creationId xmlns:a16="http://schemas.microsoft.com/office/drawing/2014/main" xmlns="" id="{E7FEC406-7A7E-5D78-DF69-D2416A2375C3}"/>
               </a:ext>
             </a:extLst>
           </p:cNvPr>
@@ -11115,8 +10707,8 @@
         </p:nvSpPr>
         <p:spPr>
           <a:xfrm>
-            <a:off x="101600" y="2577501"/>
-            <a:ext cx="2998952" cy="646331"/>
+            <a:off x="304800" y="2629284"/>
+            <a:ext cx="2531622" cy="646331"/>
           </a:xfrm>
           <a:prstGeom prst="rect">
             <a:avLst/>
@@ -11136,7 +10728,7 @@
                 </a:solidFill>
                 <a:effectLst/>
               </a:rPr>
-              <a:t>4. Recalcula-se o centroide dos clusters.</a:t>
+              <a:t>5. Repete-se os passos 3 e 4.</a:t>
             </a:r>
             <a:endParaRPr lang="en-US" dirty="0"/>
           </a:p>
@@ -11145,7 +10737,7 @@
     </p:spTree>
     <p:extLst>
       <p:ext uri="{BB962C8B-B14F-4D97-AF65-F5344CB8AC3E}">
-        <p14:creationId xmlns:p14="http://schemas.microsoft.com/office/powerpoint/2010/main" val="1154901412"/>
+        <p14:creationId xmlns:p14="http://schemas.microsoft.com/office/powerpoint/2010/main" val="1524781492"/>
       </p:ext>
     </p:extLst>
   </p:cSld>
@@ -11208,7 +10800,7 @@
           <p:cNvPr id="3" name="Picture 5">
             <a:extLst>
               <a:ext uri="{FF2B5EF4-FFF2-40B4-BE49-F238E27FC236}">
-                <a16:creationId xmlns="" xmlns:a16="http://schemas.microsoft.com/office/drawing/2014/main" id="{BE9E2474-44BE-43D0-EE2F-D03349050DA2}"/>
+                <a16:creationId xmlns:a16="http://schemas.microsoft.com/office/drawing/2014/main" xmlns="" id="{9F08A47C-C93C-D40B-F5DC-3C29F2EEEE60}"/>
               </a:ext>
             </a:extLst>
           </p:cNvPr>
@@ -11225,8 +10817,8 @@
         </p:blipFill>
         <p:spPr>
           <a:xfrm>
-            <a:off x="2836422" y="1913835"/>
-            <a:ext cx="6315956" cy="4944165"/>
+            <a:off x="2995180" y="1961467"/>
+            <a:ext cx="6201640" cy="4896533"/>
           </a:xfrm>
           <a:prstGeom prst="rect">
             <a:avLst/>
@@ -11235,10 +10827,10 @@
       </p:pic>
       <p:sp>
         <p:nvSpPr>
-          <p:cNvPr id="4" name="TextBox 9">
+          <p:cNvPr id="4" name="TextBox 7">
             <a:extLst>
               <a:ext uri="{FF2B5EF4-FFF2-40B4-BE49-F238E27FC236}">
-                <a16:creationId xmlns="" xmlns:a16="http://schemas.microsoft.com/office/drawing/2014/main" id="{E7FEC406-7A7E-5D78-DF69-D2416A2375C3}"/>
+                <a16:creationId xmlns:a16="http://schemas.microsoft.com/office/drawing/2014/main" xmlns="" id="{4376C1A9-3731-8BF9-861E-3D686FEA4F43}"/>
               </a:ext>
             </a:extLst>
           </p:cNvPr>
@@ -11247,8 +10839,8 @@
         </p:nvSpPr>
         <p:spPr>
           <a:xfrm>
-            <a:off x="304800" y="2629284"/>
-            <a:ext cx="2531622" cy="646331"/>
+            <a:off x="141890" y="2629285"/>
+            <a:ext cx="2954890" cy="3139321"/>
           </a:xfrm>
           <a:prstGeom prst="rect">
             <a:avLst/>
@@ -11268,7 +10860,68 @@
                 </a:solidFill>
                 <a:effectLst/>
               </a:rPr>
-              <a:t>5. Repete-se os passos 3 e 4.</a:t>
+              <a:t>Repete-se os passos 3-4</a:t>
+            </a:r>
+            <a:r>
+              <a:rPr lang="pt-BR" dirty="0"/>
+              <a:t> </a:t>
+            </a:r>
+            <a:r>
+              <a:rPr lang="pt-BR" b="0" i="0" dirty="0">
+                <a:solidFill>
+                  <a:srgbClr val="404040"/>
+                </a:solidFill>
+                <a:effectLst/>
+              </a:rPr>
+              <a:t>até que um dos casos abaixo ocorra:</a:t>
+            </a:r>
+            <a:endParaRPr lang="pt-BR" dirty="0"/>
+          </a:p>
+          <a:p>
+            <a:pPr marL="342900" indent="-342900">
+              <a:buFont typeface="+mj-lt"/>
+              <a:buAutoNum type="arabicPeriod"/>
+            </a:pPr>
+            <a:r>
+              <a:rPr lang="pt-BR" b="0" i="0" dirty="0">
+                <a:solidFill>
+                  <a:srgbClr val="404040"/>
+                </a:solidFill>
+                <a:effectLst/>
+              </a:rPr>
+              <a:t>A soma das distâncias entre as amostras e o centroide correspondente seja minimizada</a:t>
+            </a:r>
+            <a:endParaRPr lang="pt-BR" dirty="0"/>
+          </a:p>
+          <a:p>
+            <a:pPr marL="342900" indent="-342900">
+              <a:buFont typeface="+mj-lt"/>
+              <a:buAutoNum type="arabicPeriod"/>
+            </a:pPr>
+            <a:r>
+              <a:rPr lang="pt-BR" b="0" i="0" dirty="0">
+                <a:solidFill>
+                  <a:srgbClr val="404040"/>
+                </a:solidFill>
+                <a:effectLst/>
+              </a:rPr>
+              <a:t>Não haja alteração nos centroides</a:t>
+            </a:r>
+            <a:endParaRPr lang="pt-BR" dirty="0"/>
+          </a:p>
+          <a:p>
+            <a:pPr marL="342900" indent="-342900">
+              <a:buFont typeface="+mj-lt"/>
+              <a:buAutoNum type="arabicPeriod"/>
+            </a:pPr>
+            <a:r>
+              <a:rPr lang="pt-BR" b="0" i="0" dirty="0">
+                <a:solidFill>
+                  <a:srgbClr val="404040"/>
+                </a:solidFill>
+                <a:effectLst/>
+              </a:rPr>
+              <a:t>O número máximo de iterações seja atingido</a:t>
             </a:r>
             <a:endParaRPr lang="en-US" dirty="0"/>
           </a:p>
@@ -11277,7 +10930,7 @@
     </p:spTree>
     <p:extLst>
       <p:ext uri="{BB962C8B-B14F-4D97-AF65-F5344CB8AC3E}">
-        <p14:creationId xmlns:p14="http://schemas.microsoft.com/office/powerpoint/2010/main" val="928097257"/>
+        <p14:creationId xmlns:p14="http://schemas.microsoft.com/office/powerpoint/2010/main" val="3046733346"/>
       </p:ext>
     </p:extLst>
   </p:cSld>
@@ -11306,7 +10959,13 @@
       </p:grpSpPr>
       <p:sp>
         <p:nvSpPr>
-          <p:cNvPr id="2" name="Título 1"/>
+          <p:cNvPr id="2" name="Title 1">
+            <a:extLst>
+              <a:ext uri="{FF2B5EF4-FFF2-40B4-BE49-F238E27FC236}">
+                <a16:creationId xmlns:a16="http://schemas.microsoft.com/office/drawing/2014/main" xmlns="" id="{D87F6E31-B0DF-F3EC-D348-0D4E93DD1974}"/>
+              </a:ext>
+            </a:extLst>
+          </p:cNvPr>
           <p:cNvSpPr>
             <a:spLocks noGrp="1"/>
           </p:cNvSpPr>
@@ -11319,97 +10978,69 @@
           <a:bodyPr/>
           <a:lstStyle/>
           <a:p>
-            <a:r>
-              <a:rPr lang="pt-BR" dirty="0"/>
-              <a:t>Funcionamento do </a:t>
-            </a:r>
-            <a:r>
-              <a:rPr lang="pt-BR" i="1" dirty="0"/>
-              <a:t>k-</a:t>
-            </a:r>
-            <a:r>
-              <a:rPr lang="pt-BR" i="1" dirty="0" err="1"/>
-              <a:t>Means</a:t>
-            </a:r>
-            <a:endParaRPr lang="pt-BR" dirty="0"/>
-          </a:p>
-        </p:txBody>
-      </p:sp>
-      <p:pic>
-        <p:nvPicPr>
-          <p:cNvPr id="3" name="Picture 5">
+            <a:endParaRPr lang="en-US"/>
+          </a:p>
+        </p:txBody>
+      </p:sp>
+      <p:sp>
+        <p:nvSpPr>
+          <p:cNvPr id="3" name="Content Placeholder 2">
             <a:extLst>
               <a:ext uri="{FF2B5EF4-FFF2-40B4-BE49-F238E27FC236}">
-                <a16:creationId xmlns="" xmlns:a16="http://schemas.microsoft.com/office/drawing/2014/main" id="{CD544109-9098-CA3C-766B-DFEB05AE1F38}"/>
+                <a16:creationId xmlns:a16="http://schemas.microsoft.com/office/drawing/2014/main" xmlns="" id="{5007CCEC-CA32-01B4-A9B5-F81A83FF3ECA}"/>
               </a:ext>
             </a:extLst>
           </p:cNvPr>
-          <p:cNvPicPr>
-            <a:picLocks noChangeAspect="1"/>
-          </p:cNvPicPr>
-          <p:nvPr/>
-        </p:nvPicPr>
-        <p:blipFill>
-          <a:blip r:embed="rId2"/>
-          <a:stretch>
-            <a:fillRect/>
-          </a:stretch>
-        </p:blipFill>
-        <p:spPr>
-          <a:xfrm>
-            <a:off x="2879290" y="1932888"/>
-            <a:ext cx="6230219" cy="4925112"/>
-          </a:xfrm>
-          <a:prstGeom prst="rect">
-            <a:avLst/>
-          </a:prstGeom>
-        </p:spPr>
-      </p:pic>
-      <p:sp>
-        <p:nvSpPr>
-          <p:cNvPr id="4" name="TextBox 9">
-            <a:extLst>
-              <a:ext uri="{FF2B5EF4-FFF2-40B4-BE49-F238E27FC236}">
-                <a16:creationId xmlns="" xmlns:a16="http://schemas.microsoft.com/office/drawing/2014/main" id="{E7FEC406-7A7E-5D78-DF69-D2416A2375C3}"/>
-              </a:ext>
-            </a:extLst>
-          </p:cNvPr>
-          <p:cNvSpPr txBox="1"/>
-          <p:nvPr/>
-        </p:nvSpPr>
-        <p:spPr>
-          <a:xfrm>
-            <a:off x="304800" y="2629284"/>
-            <a:ext cx="2531622" cy="646331"/>
-          </a:xfrm>
-          <a:prstGeom prst="rect">
-            <a:avLst/>
-          </a:prstGeom>
-          <a:noFill/>
-        </p:spPr>
-        <p:txBody>
-          <a:bodyPr wrap="square">
-            <a:spAutoFit/>
+          <p:cNvSpPr>
+            <a:spLocks noGrp="1"/>
+          </p:cNvSpPr>
+          <p:nvPr>
+            <p:ph idx="1"/>
+          </p:nvPr>
+        </p:nvSpPr>
+        <p:spPr/>
+        <p:txBody>
+          <a:bodyPr>
+            <a:normAutofit/>
           </a:bodyPr>
           <a:lstStyle/>
           <a:p>
             <a:r>
-              <a:rPr lang="pt-BR" b="0" i="0" dirty="0">
+              <a:rPr lang="pt-BR" sz="5400" b="1" dirty="0">
                 <a:solidFill>
-                  <a:srgbClr val="404040"/>
+                  <a:srgbClr val="FF0000"/>
                 </a:solidFill>
-                <a:effectLst/>
               </a:rPr>
-              <a:t>5. Repete-se os passos 3 e 4.</a:t>
-            </a:r>
-            <a:endParaRPr lang="en-US" dirty="0"/>
+              <a:t>PAREI </a:t>
+            </a:r>
+            <a:r>
+              <a:rPr lang="pt-BR" sz="5400" b="1" dirty="0" err="1">
+                <a:solidFill>
+                  <a:srgbClr val="FF0000"/>
+                </a:solidFill>
+              </a:rPr>
+              <a:t>AQUi</a:t>
+            </a:r>
+            <a:r>
+              <a:rPr lang="pt-BR" sz="5400" b="1" dirty="0">
+                <a:solidFill>
+                  <a:srgbClr val="FF0000"/>
+                </a:solidFill>
+              </a:rPr>
+              <a:t>!!!!</a:t>
+            </a:r>
+            <a:endParaRPr lang="en-US" sz="5400" b="1" dirty="0">
+              <a:solidFill>
+                <a:srgbClr val="FF0000"/>
+              </a:solidFill>
+            </a:endParaRPr>
           </a:p>
         </p:txBody>
       </p:sp>
     </p:spTree>
     <p:extLst>
       <p:ext uri="{BB962C8B-B14F-4D97-AF65-F5344CB8AC3E}">
-        <p14:creationId xmlns:p14="http://schemas.microsoft.com/office/powerpoint/2010/main" val="1524781492"/>
+        <p14:creationId xmlns:p14="http://schemas.microsoft.com/office/powerpoint/2010/main" val="1718932620"/>
       </p:ext>
     </p:extLst>
   </p:cSld>
@@ -11453,207 +11084,14 @@
           <a:p>
             <a:r>
               <a:rPr lang="pt-BR" dirty="0"/>
-              <a:t>Funcionamento do </a:t>
-            </a:r>
-            <a:r>
-              <a:rPr lang="pt-BR" i="1" dirty="0"/>
-              <a:t>k-</a:t>
-            </a:r>
-            <a:r>
-              <a:rPr lang="pt-BR" i="1" dirty="0" err="1"/>
-              <a:t>Means</a:t>
-            </a:r>
-            <a:endParaRPr lang="pt-BR" dirty="0"/>
-          </a:p>
-        </p:txBody>
-      </p:sp>
-      <p:pic>
-        <p:nvPicPr>
-          <p:cNvPr id="3" name="Picture 5">
-            <a:extLst>
-              <a:ext uri="{FF2B5EF4-FFF2-40B4-BE49-F238E27FC236}">
-                <a16:creationId xmlns="" xmlns:a16="http://schemas.microsoft.com/office/drawing/2014/main" id="{9F08A47C-C93C-D40B-F5DC-3C29F2EEEE60}"/>
-              </a:ext>
-            </a:extLst>
-          </p:cNvPr>
-          <p:cNvPicPr>
-            <a:picLocks noChangeAspect="1"/>
-          </p:cNvPicPr>
-          <p:nvPr/>
-        </p:nvPicPr>
-        <p:blipFill>
-          <a:blip r:embed="rId2"/>
-          <a:stretch>
-            <a:fillRect/>
-          </a:stretch>
-        </p:blipFill>
-        <p:spPr>
-          <a:xfrm>
-            <a:off x="2995180" y="1961467"/>
-            <a:ext cx="6201640" cy="4896533"/>
-          </a:xfrm>
-          <a:prstGeom prst="rect">
-            <a:avLst/>
-          </a:prstGeom>
-        </p:spPr>
-      </p:pic>
-      <p:sp>
-        <p:nvSpPr>
-          <p:cNvPr id="4" name="TextBox 7">
-            <a:extLst>
-              <a:ext uri="{FF2B5EF4-FFF2-40B4-BE49-F238E27FC236}">
-                <a16:creationId xmlns="" xmlns:a16="http://schemas.microsoft.com/office/drawing/2014/main" id="{4376C1A9-3731-8BF9-861E-3D686FEA4F43}"/>
-              </a:ext>
-            </a:extLst>
-          </p:cNvPr>
-          <p:cNvSpPr txBox="1"/>
-          <p:nvPr/>
-        </p:nvSpPr>
-        <p:spPr>
-          <a:xfrm>
-            <a:off x="141890" y="2629285"/>
-            <a:ext cx="2954890" cy="3139321"/>
-          </a:xfrm>
-          <a:prstGeom prst="rect">
-            <a:avLst/>
-          </a:prstGeom>
-          <a:noFill/>
-        </p:spPr>
-        <p:txBody>
-          <a:bodyPr wrap="square">
-            <a:spAutoFit/>
-          </a:bodyPr>
-          <a:lstStyle/>
-          <a:p>
-            <a:r>
-              <a:rPr lang="pt-BR" b="0" i="0" dirty="0">
-                <a:solidFill>
-                  <a:srgbClr val="404040"/>
-                </a:solidFill>
-                <a:effectLst/>
-              </a:rPr>
-              <a:t>Repete-se os passos 3-4</a:t>
-            </a:r>
-            <a:r>
-              <a:rPr lang="pt-BR" dirty="0"/>
-              <a:t> </a:t>
-            </a:r>
-            <a:r>
-              <a:rPr lang="pt-BR" b="0" i="0" dirty="0">
-                <a:solidFill>
-                  <a:srgbClr val="404040"/>
-                </a:solidFill>
-                <a:effectLst/>
-              </a:rPr>
-              <a:t>até que um dos casos abaixo ocorra:</a:t>
-            </a:r>
-            <a:endParaRPr lang="pt-BR" dirty="0"/>
-          </a:p>
-          <a:p>
-            <a:pPr marL="342900" indent="-342900">
-              <a:buFont typeface="+mj-lt"/>
-              <a:buAutoNum type="arabicPeriod"/>
-            </a:pPr>
-            <a:r>
-              <a:rPr lang="pt-BR" b="0" i="0" dirty="0">
-                <a:solidFill>
-                  <a:srgbClr val="404040"/>
-                </a:solidFill>
-                <a:effectLst/>
-              </a:rPr>
-              <a:t>A soma das distâncias entre as amostras e o centroide correspondente seja minimizada</a:t>
-            </a:r>
-            <a:endParaRPr lang="pt-BR" dirty="0"/>
-          </a:p>
-          <a:p>
-            <a:pPr marL="342900" indent="-342900">
-              <a:buFont typeface="+mj-lt"/>
-              <a:buAutoNum type="arabicPeriod"/>
-            </a:pPr>
-            <a:r>
-              <a:rPr lang="pt-BR" b="0" i="0" dirty="0">
-                <a:solidFill>
-                  <a:srgbClr val="404040"/>
-                </a:solidFill>
-                <a:effectLst/>
-              </a:rPr>
-              <a:t>Não haja alteração nos centroides</a:t>
-            </a:r>
-            <a:endParaRPr lang="pt-BR" dirty="0"/>
-          </a:p>
-          <a:p>
-            <a:pPr marL="342900" indent="-342900">
-              <a:buFont typeface="+mj-lt"/>
-              <a:buAutoNum type="arabicPeriod"/>
-            </a:pPr>
-            <a:r>
-              <a:rPr lang="pt-BR" b="0" i="0" dirty="0">
-                <a:solidFill>
-                  <a:srgbClr val="404040"/>
-                </a:solidFill>
-                <a:effectLst/>
-              </a:rPr>
-              <a:t>O número máximo de iterações seja atingido</a:t>
+              <a:t>Como inicializar os centroides? </a:t>
             </a:r>
             <a:endParaRPr lang="en-US" dirty="0"/>
           </a:p>
         </p:txBody>
       </p:sp>
-    </p:spTree>
-    <p:extLst>
-      <p:ext uri="{BB962C8B-B14F-4D97-AF65-F5344CB8AC3E}">
-        <p14:creationId xmlns:p14="http://schemas.microsoft.com/office/powerpoint/2010/main" val="3046733346"/>
-      </p:ext>
-    </p:extLst>
-  </p:cSld>
-  <p:clrMapOvr>
-    <a:masterClrMapping/>
-  </p:clrMapOvr>
-</p:sld>
-</file>
-
-<file path=ppt/slides/slide28.xml><?xml version="1.0" encoding="utf-8"?>
-<p:sld xmlns:a="http://schemas.openxmlformats.org/drawingml/2006/main" xmlns:r="http://schemas.openxmlformats.org/officeDocument/2006/relationships" xmlns:p="http://schemas.openxmlformats.org/presentationml/2006/main">
-  <p:cSld>
-    <p:spTree>
-      <p:nvGrpSpPr>
-        <p:cNvPr id="1" name=""/>
-        <p:cNvGrpSpPr/>
-        <p:nvPr/>
-      </p:nvGrpSpPr>
-      <p:grpSpPr>
-        <a:xfrm>
-          <a:off x="0" y="0"/>
-          <a:ext cx="0" cy="0"/>
-          <a:chOff x="0" y="0"/>
-          <a:chExt cx="0" cy="0"/>
-        </a:xfrm>
-      </p:grpSpPr>
-      <p:sp>
-        <p:nvSpPr>
-          <p:cNvPr id="2" name="Título 1"/>
-          <p:cNvSpPr>
-            <a:spLocks noGrp="1"/>
-          </p:cNvSpPr>
-          <p:nvPr>
-            <p:ph type="title"/>
-          </p:nvPr>
-        </p:nvSpPr>
-        <p:spPr/>
-        <p:txBody>
-          <a:bodyPr/>
-          <a:lstStyle/>
-          <a:p>
-            <a:r>
-              <a:rPr lang="pt-BR" dirty="0"/>
-              <a:t>Como inicializar os centroides? </a:t>
-            </a:r>
-            <a:endParaRPr lang="en-US" dirty="0"/>
-          </a:p>
-        </p:txBody>
-      </p:sp>
-      <mc:AlternateContent xmlns:mc="http://schemas.openxmlformats.org/markup-compatibility/2006" xmlns:a14="http://schemas.microsoft.com/office/drawing/2010/main">
-        <mc:Choice Requires="a14">
+      <mc:AlternateContent xmlns:mc="http://schemas.openxmlformats.org/markup-compatibility/2006">
+        <mc:Choice xmlns:a14="http://schemas.microsoft.com/office/drawing/2010/main" Requires="a14">
           <p:sp>
             <p:nvSpPr>
               <p:cNvPr id="3" name="Espaço Reservado para Conteúdo 2"/>
@@ -11667,7 +11105,7 @@
             <p:spPr>
               <a:xfrm>
                 <a:off x="5214257" y="1825624"/>
-                <a:ext cx="6776851" cy="5032375"/>
+                <a:ext cx="6977743" cy="5032375"/>
               </a:xfrm>
             </p:spPr>
             <p:txBody>
@@ -11691,13 +11129,13 @@
                 <a14:m>
                   <m:oMath xmlns:m="http://schemas.openxmlformats.org/officeDocument/2006/math">
                     <m:r>
-                      <a:rPr lang="pt-BR" b="1" i="0">
+                      <a:rPr lang="pt-BR" b="0" i="1">
                         <a:solidFill>
                           <a:schemeClr val="accent5"/>
                         </a:solidFill>
                         <a:latin typeface="Cambria Math" panose="02040503050406030204" pitchFamily="18" charset="0"/>
                       </a:rPr>
-                      <m:t>𝐤</m:t>
+                      <m:t>𝑘</m:t>
                     </m:r>
                   </m:oMath>
                 </a14:m>
@@ -11777,7 +11215,7 @@
             </p:txBody>
           </p:sp>
         </mc:Choice>
-        <mc:Fallback xmlns="">
+        <mc:Fallback>
           <p:sp>
             <p:nvSpPr>
               <p:cNvPr id="3" name="Espaço Reservado para Conteúdo 2"/>
@@ -11791,12 +11229,12 @@
             <p:spPr>
               <a:xfrm>
                 <a:off x="5214257" y="1825624"/>
-                <a:ext cx="6776851" cy="5032375"/>
+                <a:ext cx="6977743" cy="5032375"/>
               </a:xfrm>
-              <a:blipFill>
+              <a:blipFill rotWithShape="0">
                 <a:blip r:embed="rId2"/>
                 <a:stretch>
-                  <a:fillRect l="-1619" t="-1937" r="-2698"/>
+                  <a:fillRect l="-1572" t="-1937" r="-2795"/>
                 </a:stretch>
               </a:blipFill>
             </p:spPr>
@@ -11805,7 +11243,7 @@
               <a:lstStyle/>
               <a:p>
                 <a:r>
-                  <a:rPr lang="en-US">
+                  <a:rPr lang="pt-BR">
                     <a:noFill/>
                   </a:rPr>
                   <a:t> </a:t>
@@ -11820,7 +11258,7 @@
           <p:cNvPr id="4" name="Picture 2" descr="Quantum machine learning: distance estimation for k-means clustering | by  Sashwat Anagolum | Towards Data Science">
             <a:extLst>
               <a:ext uri="{FF2B5EF4-FFF2-40B4-BE49-F238E27FC236}">
-                <a16:creationId xmlns="" xmlns:a16="http://schemas.microsoft.com/office/drawing/2014/main" id="{3663CA52-EDD8-4A35-5A6A-3A247A7891B7}"/>
+                <a16:creationId xmlns:a16="http://schemas.microsoft.com/office/drawing/2014/main" xmlns="" id="{3663CA52-EDD8-4A35-5A6A-3A247A7891B7}"/>
               </a:ext>
             </a:extLst>
           </p:cNvPr>
@@ -11873,7 +11311,7 @@
 </p:sld>
 </file>
 
-<file path=ppt/slides/slide29.xml><?xml version="1.0" encoding="utf-8"?>
+<file path=ppt/slides/slide28.xml><?xml version="1.0" encoding="utf-8"?>
 <p:sld xmlns:a="http://schemas.openxmlformats.org/drawingml/2006/main" xmlns:r="http://schemas.openxmlformats.org/officeDocument/2006/relationships" xmlns:p="http://schemas.openxmlformats.org/presentationml/2006/main">
   <p:cSld>
     <p:spTree>
@@ -11881,7 +11319,7 @@
         <p:cNvPr id="1" name="">
           <a:extLst>
             <a:ext uri="{FF2B5EF4-FFF2-40B4-BE49-F238E27FC236}">
-              <a16:creationId xmlns="" xmlns:a16="http://schemas.microsoft.com/office/drawing/2014/main" id="{17B1A926-A8C8-946A-0DCB-7DA6EAEC80E3}"/>
+              <a16:creationId xmlns:a16="http://schemas.microsoft.com/office/drawing/2014/main" xmlns="" id="{17B1A926-A8C8-946A-0DCB-7DA6EAEC80E3}"/>
             </a:ext>
           </a:extLst>
         </p:cNvPr>
@@ -11901,7 +11339,7 @@
           <p:cNvPr id="2" name="Título 1">
             <a:extLst>
               <a:ext uri="{FF2B5EF4-FFF2-40B4-BE49-F238E27FC236}">
-                <a16:creationId xmlns="" xmlns:a16="http://schemas.microsoft.com/office/drawing/2014/main" id="{602E24AF-FE6E-7B0A-D179-EB49A1DEB2F8}"/>
+                <a16:creationId xmlns:a16="http://schemas.microsoft.com/office/drawing/2014/main" xmlns="" id="{602E24AF-FE6E-7B0A-D179-EB49A1DEB2F8}"/>
               </a:ext>
             </a:extLst>
           </p:cNvPr>
@@ -11930,7 +11368,7 @@
           <p:cNvPr id="3" name="Espaço Reservado para Conteúdo 2">
             <a:extLst>
               <a:ext uri="{FF2B5EF4-FFF2-40B4-BE49-F238E27FC236}">
-                <a16:creationId xmlns="" xmlns:a16="http://schemas.microsoft.com/office/drawing/2014/main" id="{4E35406F-F929-EFBE-0B16-7CF919C6F311}"/>
+                <a16:creationId xmlns:a16="http://schemas.microsoft.com/office/drawing/2014/main" xmlns="" id="{4E35406F-F929-EFBE-0B16-7CF919C6F311}"/>
               </a:ext>
             </a:extLst>
           </p:cNvPr>
@@ -12073,7 +11511,7 @@
           <p:cNvPr id="4" name="Picture 2" descr="Quantum machine learning: distance estimation for k-means clustering | by  Sashwat Anagolum | Towards Data Science">
             <a:extLst>
               <a:ext uri="{FF2B5EF4-FFF2-40B4-BE49-F238E27FC236}">
-                <a16:creationId xmlns="" xmlns:a16="http://schemas.microsoft.com/office/drawing/2014/main" id="{375C1022-A6C8-5B17-2FC3-13794270B208}"/>
+                <a16:creationId xmlns:a16="http://schemas.microsoft.com/office/drawing/2014/main" xmlns="" id="{375C1022-A6C8-5B17-2FC3-13794270B208}"/>
               </a:ext>
             </a:extLst>
           </p:cNvPr>
@@ -12126,6 +11564,94 @@
 </p:sld>
 </file>
 
+<file path=ppt/slides/slide29.xml><?xml version="1.0" encoding="utf-8"?>
+<p:sld xmlns:a="http://schemas.openxmlformats.org/drawingml/2006/main" xmlns:r="http://schemas.openxmlformats.org/officeDocument/2006/relationships" xmlns:p="http://schemas.openxmlformats.org/presentationml/2006/main">
+  <p:cSld>
+    <p:spTree>
+      <p:nvGrpSpPr>
+        <p:cNvPr id="1" name=""/>
+        <p:cNvGrpSpPr/>
+        <p:nvPr/>
+      </p:nvGrpSpPr>
+      <p:grpSpPr>
+        <a:xfrm>
+          <a:off x="0" y="0"/>
+          <a:ext cx="0" cy="0"/>
+          <a:chOff x="0" y="0"/>
+          <a:chExt cx="0" cy="0"/>
+        </a:xfrm>
+      </p:grpSpPr>
+      <p:sp>
+        <p:nvSpPr>
+          <p:cNvPr id="2" name="Título 1"/>
+          <p:cNvSpPr>
+            <a:spLocks noGrp="1"/>
+          </p:cNvSpPr>
+          <p:nvPr>
+            <p:ph type="title"/>
+          </p:nvPr>
+        </p:nvSpPr>
+        <p:spPr/>
+        <p:txBody>
+          <a:bodyPr/>
+          <a:lstStyle/>
+          <a:p>
+            <a:endParaRPr lang="pt-BR"/>
+          </a:p>
+        </p:txBody>
+      </p:sp>
+      <p:sp>
+        <p:nvSpPr>
+          <p:cNvPr id="3" name="Espaço Reservado para Conteúdo 2"/>
+          <p:cNvSpPr>
+            <a:spLocks noGrp="1"/>
+          </p:cNvSpPr>
+          <p:nvPr>
+            <p:ph idx="1"/>
+          </p:nvPr>
+        </p:nvSpPr>
+        <p:spPr/>
+        <p:txBody>
+          <a:bodyPr/>
+          <a:lstStyle/>
+          <a:p>
+            <a:r>
+              <a:rPr lang="pt-BR" dirty="0"/>
+              <a:t>Aí surge uma dúvida. </a:t>
+            </a:r>
+          </a:p>
+          <a:p>
+            <a:r>
+              <a:rPr lang="pt-BR" dirty="0"/>
+              <a:t>Quantos </a:t>
+            </a:r>
+            <a:r>
+              <a:rPr lang="pt-BR" i="1" dirty="0"/>
+              <a:t>clusters</a:t>
+            </a:r>
+            <a:r>
+              <a:rPr lang="pt-BR" dirty="0"/>
+              <a:t> um conjunto de dados contém?</a:t>
+            </a:r>
+          </a:p>
+          <a:p>
+            <a:endParaRPr lang="pt-BR" dirty="0"/>
+          </a:p>
+        </p:txBody>
+      </p:sp>
+    </p:spTree>
+    <p:extLst>
+      <p:ext uri="{BB962C8B-B14F-4D97-AF65-F5344CB8AC3E}">
+        <p14:creationId xmlns:p14="http://schemas.microsoft.com/office/powerpoint/2010/main" val="1550317019"/>
+      </p:ext>
+    </p:extLst>
+  </p:cSld>
+  <p:clrMapOvr>
+    <a:masterClrMapping/>
+  </p:clrMapOvr>
+</p:sld>
+</file>
+
 <file path=ppt/slides/slide3.xml><?xml version="1.0" encoding="utf-8"?>
 <p:sld xmlns:a="http://schemas.openxmlformats.org/drawingml/2006/main" xmlns:r="http://schemas.openxmlformats.org/officeDocument/2006/relationships" xmlns:p="http://schemas.openxmlformats.org/presentationml/2006/main">
   <p:cSld>
@@ -12148,7 +11674,7 @@
           <p:cNvPr id="6" name="TextBox 5">
             <a:extLst>
               <a:ext uri="{FF2B5EF4-FFF2-40B4-BE49-F238E27FC236}">
-                <a16:creationId xmlns="" xmlns:a16="http://schemas.microsoft.com/office/drawing/2014/main" id="{7A9955D7-EF0A-C073-CA9C-EC6A396485B8}"/>
+                <a16:creationId xmlns:a16="http://schemas.microsoft.com/office/drawing/2014/main" xmlns="" id="{7A9955D7-EF0A-C073-CA9C-EC6A396485B8}"/>
               </a:ext>
             </a:extLst>
           </p:cNvPr>
@@ -12197,7 +11723,7 @@
           <p:cNvPr id="3" name="Picture 2">
             <a:extLst>
               <a:ext uri="{FF2B5EF4-FFF2-40B4-BE49-F238E27FC236}">
-                <a16:creationId xmlns="" xmlns:a16="http://schemas.microsoft.com/office/drawing/2014/main" id="{9863C601-9BD1-3DD0-9219-97CD9BA5DC5A}"/>
+                <a16:creationId xmlns:a16="http://schemas.microsoft.com/office/drawing/2014/main" xmlns="" id="{9863C601-9BD1-3DD0-9219-97CD9BA5DC5A}"/>
               </a:ext>
             </a:extLst>
           </p:cNvPr>
@@ -12260,7 +11786,13 @@
       </p:grpSpPr>
       <p:sp>
         <p:nvSpPr>
-          <p:cNvPr id="2" name="Título 1"/>
+          <p:cNvPr id="2" name="Title 1">
+            <a:extLst>
+              <a:ext uri="{FF2B5EF4-FFF2-40B4-BE49-F238E27FC236}">
+                <a16:creationId xmlns:a16="http://schemas.microsoft.com/office/drawing/2014/main" xmlns="" id="{0719C974-9A37-ED60-45B8-7CF90E038097}"/>
+              </a:ext>
+            </a:extLst>
+          </p:cNvPr>
           <p:cNvSpPr>
             <a:spLocks noGrp="1"/>
           </p:cNvSpPr>
@@ -12273,13 +11805,19 @@
           <a:bodyPr/>
           <a:lstStyle/>
           <a:p>
-            <a:endParaRPr lang="pt-BR"/>
-          </a:p>
-        </p:txBody>
-      </p:sp>
-      <p:sp>
-        <p:nvSpPr>
-          <p:cNvPr id="3" name="Espaço Reservado para Conteúdo 2"/>
+            <a:endParaRPr lang="en-US"/>
+          </a:p>
+        </p:txBody>
+      </p:sp>
+      <p:sp>
+        <p:nvSpPr>
+          <p:cNvPr id="3" name="Content Placeholder 2">
+            <a:extLst>
+              <a:ext uri="{FF2B5EF4-FFF2-40B4-BE49-F238E27FC236}">
+                <a16:creationId xmlns:a16="http://schemas.microsoft.com/office/drawing/2014/main" xmlns="" id="{D812A04D-0F4A-CB81-D7DF-C4B0B13163E8}"/>
+              </a:ext>
+            </a:extLst>
+          </p:cNvPr>
           <p:cNvSpPr>
             <a:spLocks noGrp="1"/>
           </p:cNvSpPr>
@@ -12289,37 +11827,47 @@
         </p:nvSpPr>
         <p:spPr/>
         <p:txBody>
-          <a:bodyPr/>
+          <a:bodyPr>
+            <a:normAutofit/>
+          </a:bodyPr>
           <a:lstStyle/>
           <a:p>
             <a:r>
-              <a:rPr lang="pt-BR" dirty="0"/>
-              <a:t>Aí surge uma dúvida. </a:t>
-            </a:r>
-          </a:p>
-          <a:p>
-            <a:r>
-              <a:rPr lang="pt-BR" dirty="0"/>
-              <a:t>Quantos </a:t>
-            </a:r>
-            <a:r>
-              <a:rPr lang="pt-BR" i="1" dirty="0"/>
-              <a:t>clusters</a:t>
-            </a:r>
-            <a:r>
-              <a:rPr lang="pt-BR" dirty="0"/>
-              <a:t> um conjunto de dados contém?</a:t>
-            </a:r>
-          </a:p>
-          <a:p>
-            <a:endParaRPr lang="pt-BR" dirty="0"/>
+              <a:rPr lang="pt-BR" sz="6000" b="1" dirty="0">
+                <a:solidFill>
+                  <a:srgbClr val="FF0000"/>
+                </a:solidFill>
+              </a:rPr>
+              <a:t>Quais as formas usadas para definir o melhor número de </a:t>
+            </a:r>
+            <a:r>
+              <a:rPr lang="pt-BR" sz="6000" b="1" dirty="0" err="1">
+                <a:solidFill>
+                  <a:srgbClr val="FF0000"/>
+                </a:solidFill>
+              </a:rPr>
+              <a:t>clsuters</a:t>
+            </a:r>
+            <a:r>
+              <a:rPr lang="pt-BR" sz="6000" b="1" dirty="0">
+                <a:solidFill>
+                  <a:srgbClr val="FF0000"/>
+                </a:solidFill>
+              </a:rPr>
+              <a:t>???</a:t>
+            </a:r>
+            <a:endParaRPr lang="en-US" sz="6000" b="1" dirty="0">
+              <a:solidFill>
+                <a:srgbClr val="FF0000"/>
+              </a:solidFill>
+            </a:endParaRPr>
           </a:p>
         </p:txBody>
       </p:sp>
     </p:spTree>
     <p:extLst>
       <p:ext uri="{BB962C8B-B14F-4D97-AF65-F5344CB8AC3E}">
-        <p14:creationId xmlns:p14="http://schemas.microsoft.com/office/powerpoint/2010/main" val="1550317019"/>
+        <p14:creationId xmlns:p14="http://schemas.microsoft.com/office/powerpoint/2010/main" val="1271403432"/>
       </p:ext>
     </p:extLst>
   </p:cSld>
@@ -12678,7 +12226,7 @@
           <p:cNvPr id="4" name="Picture 2" descr="Base Teórica do K-Means! Aprenda a Lógica desse Algoritmo Hoje!">
             <a:extLst>
               <a:ext uri="{FF2B5EF4-FFF2-40B4-BE49-F238E27FC236}">
-                <a16:creationId xmlns="" xmlns:a16="http://schemas.microsoft.com/office/drawing/2014/main" id="{0694ADFD-EB2E-2BF0-18BE-B07E4CD60A5F}"/>
+                <a16:creationId xmlns:a16="http://schemas.microsoft.com/office/drawing/2014/main" xmlns="" id="{0694ADFD-EB2E-2BF0-18BE-B07E4CD60A5F}"/>
               </a:ext>
             </a:extLst>
           </p:cNvPr>
@@ -12725,7 +12273,7 @@
           <p:cNvPr id="5" name="Imagem 4">
             <a:extLst>
               <a:ext uri="{FF2B5EF4-FFF2-40B4-BE49-F238E27FC236}">
-                <a16:creationId xmlns="" xmlns:a16="http://schemas.microsoft.com/office/drawing/2014/main" id="{EEF69E85-6440-34FE-5C8A-A5F37765D292}"/>
+                <a16:creationId xmlns:a16="http://schemas.microsoft.com/office/drawing/2014/main" xmlns="" id="{EEF69E85-6440-34FE-5C8A-A5F37765D292}"/>
               </a:ext>
             </a:extLst>
           </p:cNvPr>
@@ -13026,7 +12574,7 @@
           <p:cNvPr id="2" name="Título 1">
             <a:extLst>
               <a:ext uri="{FF2B5EF4-FFF2-40B4-BE49-F238E27FC236}">
-                <a16:creationId xmlns="" xmlns:a16="http://schemas.microsoft.com/office/drawing/2014/main" id="{654EC41E-A91F-2BE6-4481-EFFD64DC2B91}"/>
+                <a16:creationId xmlns:a16="http://schemas.microsoft.com/office/drawing/2014/main" xmlns="" id="{654EC41E-A91F-2BE6-4481-EFFD64DC2B91}"/>
               </a:ext>
             </a:extLst>
           </p:cNvPr>
@@ -13056,7 +12604,7 @@
               <p:cNvPr id="3" name="Espaço Reservado para Conteúdo 2">
                 <a:extLst>
                   <a:ext uri="{FF2B5EF4-FFF2-40B4-BE49-F238E27FC236}">
-                    <a16:creationId xmlns="" xmlns:a16="http://schemas.microsoft.com/office/drawing/2014/main" id="{7C91871B-A0D0-6F26-D59B-6230818E6267}"/>
+                    <a16:creationId xmlns:a16="http://schemas.microsoft.com/office/drawing/2014/main" xmlns="" id="{7C91871B-A0D0-6F26-D59B-6230818E6267}"/>
                   </a:ext>
                 </a:extLst>
               </p:cNvPr>
@@ -13245,7 +12793,7 @@
           <p:cNvPr id="2" name="Title 1">
             <a:extLst>
               <a:ext uri="{FF2B5EF4-FFF2-40B4-BE49-F238E27FC236}">
-                <a16:creationId xmlns="" xmlns:a16="http://schemas.microsoft.com/office/drawing/2014/main" id="{A07C804B-5A43-5C89-0C42-420DDBB1CA5A}"/>
+                <a16:creationId xmlns:a16="http://schemas.microsoft.com/office/drawing/2014/main" xmlns="" id="{A07C804B-5A43-5C89-0C42-420DDBB1CA5A}"/>
               </a:ext>
             </a:extLst>
           </p:cNvPr>
@@ -13278,7 +12826,7 @@
           <p:cNvPr id="3" name="Content Placeholder 2">
             <a:extLst>
               <a:ext uri="{FF2B5EF4-FFF2-40B4-BE49-F238E27FC236}">
-                <a16:creationId xmlns="" xmlns:a16="http://schemas.microsoft.com/office/drawing/2014/main" id="{288A7DCE-B5C5-82F5-CC2A-E963BDDE03C9}"/>
+                <a16:creationId xmlns:a16="http://schemas.microsoft.com/office/drawing/2014/main" xmlns="" id="{288A7DCE-B5C5-82F5-CC2A-E963BDDE03C9}"/>
               </a:ext>
             </a:extLst>
           </p:cNvPr>
@@ -13372,7 +12920,7 @@
           <p:cNvPr id="2" name="Título 1">
             <a:extLst>
               <a:ext uri="{FF2B5EF4-FFF2-40B4-BE49-F238E27FC236}">
-                <a16:creationId xmlns="" xmlns:a16="http://schemas.microsoft.com/office/drawing/2014/main" id="{94AB8438-E56E-2412-517C-8456E4CA773C}"/>
+                <a16:creationId xmlns:a16="http://schemas.microsoft.com/office/drawing/2014/main" xmlns="" id="{94AB8438-E56E-2412-517C-8456E4CA773C}"/>
               </a:ext>
             </a:extLst>
           </p:cNvPr>
@@ -13400,7 +12948,7 @@
           <p:cNvPr id="3" name="Espaço Reservado para Conteúdo 2">
             <a:extLst>
               <a:ext uri="{FF2B5EF4-FFF2-40B4-BE49-F238E27FC236}">
-                <a16:creationId xmlns="" xmlns:a16="http://schemas.microsoft.com/office/drawing/2014/main" id="{F7E2B09C-6D56-4C9F-A364-B904CCE2F1A0}"/>
+                <a16:creationId xmlns:a16="http://schemas.microsoft.com/office/drawing/2014/main" xmlns="" id="{F7E2B09C-6D56-4C9F-A364-B904CCE2F1A0}"/>
               </a:ext>
             </a:extLst>
           </p:cNvPr>
@@ -13439,7 +12987,7 @@
           <p:cNvPr id="18" name="Group 17">
             <a:extLst>
               <a:ext uri="{FF2B5EF4-FFF2-40B4-BE49-F238E27FC236}">
-                <a16:creationId xmlns="" xmlns:a16="http://schemas.microsoft.com/office/drawing/2014/main" id="{627C64FD-88E0-EC8E-2A34-0D5737B4C854}"/>
+                <a16:creationId xmlns:a16="http://schemas.microsoft.com/office/drawing/2014/main" xmlns="" id="{627C64FD-88E0-EC8E-2A34-0D5737B4C854}"/>
               </a:ext>
             </a:extLst>
           </p:cNvPr>
@@ -13459,7 +13007,7 @@
             <p:cNvPr id="12" name="Picture 4" descr="Project Jupyter | Try Jupyter">
               <a:extLst>
                 <a:ext uri="{FF2B5EF4-FFF2-40B4-BE49-F238E27FC236}">
-                  <a16:creationId xmlns="" xmlns:a16="http://schemas.microsoft.com/office/drawing/2014/main" id="{FF92EA36-91E7-292B-D7A0-2D4D83A10F98}"/>
+                  <a16:creationId xmlns:a16="http://schemas.microsoft.com/office/drawing/2014/main" xmlns="" id="{FF92EA36-91E7-292B-D7A0-2D4D83A10F98}"/>
                 </a:ext>
               </a:extLst>
             </p:cNvPr>
@@ -13506,7 +13054,7 @@
             <p:cNvPr id="13" name="Picture 8" descr="Google Colaboratory Colab - Guía Completa Español - Marketing Branding">
               <a:extLst>
                 <a:ext uri="{FF2B5EF4-FFF2-40B4-BE49-F238E27FC236}">
-                  <a16:creationId xmlns="" xmlns:a16="http://schemas.microsoft.com/office/drawing/2014/main" id="{46F1718A-89E6-9E63-E40B-2B19852D6AA0}"/>
+                  <a16:creationId xmlns:a16="http://schemas.microsoft.com/office/drawing/2014/main" xmlns="" id="{46F1718A-89E6-9E63-E40B-2B19852D6AA0}"/>
                 </a:ext>
               </a:extLst>
             </p:cNvPr>
@@ -13551,7 +13099,7 @@
             <p:cNvPr id="14" name="Picture 10" descr="IT12A01: FUNDAMENTALS OF PYTHON PROGRAMMING (SF) (SYNCHRONOUS E-LEARNING) -  NTUC LearningHub">
               <a:extLst>
                 <a:ext uri="{FF2B5EF4-FFF2-40B4-BE49-F238E27FC236}">
-                  <a16:creationId xmlns="" xmlns:a16="http://schemas.microsoft.com/office/drawing/2014/main" id="{33F6B1B4-9B79-D634-3E35-33F24609C848}"/>
+                  <a16:creationId xmlns:a16="http://schemas.microsoft.com/office/drawing/2014/main" xmlns="" id="{33F6B1B4-9B79-D634-3E35-33F24609C848}"/>
                 </a:ext>
               </a:extLst>
             </p:cNvPr>
@@ -13596,7 +13144,7 @@
             <p:cNvPr id="15" name="Sinal de Adição 7">
               <a:extLst>
                 <a:ext uri="{FF2B5EF4-FFF2-40B4-BE49-F238E27FC236}">
-                  <a16:creationId xmlns="" xmlns:a16="http://schemas.microsoft.com/office/drawing/2014/main" id="{6959EE6C-DCDB-E78B-5C50-EBD3FF3049E2}"/>
+                  <a16:creationId xmlns:a16="http://schemas.microsoft.com/office/drawing/2014/main" xmlns="" id="{6959EE6C-DCDB-E78B-5C50-EBD3FF3049E2}"/>
                 </a:ext>
               </a:extLst>
             </p:cNvPr>
@@ -13644,7 +13192,7 @@
             <p:cNvPr id="17" name="Sinal de Adição 10">
               <a:extLst>
                 <a:ext uri="{FF2B5EF4-FFF2-40B4-BE49-F238E27FC236}">
-                  <a16:creationId xmlns="" xmlns:a16="http://schemas.microsoft.com/office/drawing/2014/main" id="{30A21FDB-ABA6-9FD5-49EF-7762414AEF0C}"/>
+                  <a16:creationId xmlns:a16="http://schemas.microsoft.com/office/drawing/2014/main" xmlns="" id="{30A21FDB-ABA6-9FD5-49EF-7762414AEF0C}"/>
                 </a:ext>
               </a:extLst>
             </p:cNvPr>
@@ -13723,7 +13271,7 @@
           <p:cNvPr id="2" name="Title 1">
             <a:extLst>
               <a:ext uri="{FF2B5EF4-FFF2-40B4-BE49-F238E27FC236}">
-                <a16:creationId xmlns="" xmlns:a16="http://schemas.microsoft.com/office/drawing/2014/main" id="{E8FD0E11-3B37-4336-5BF0-C8C033354AF6}"/>
+                <a16:creationId xmlns:a16="http://schemas.microsoft.com/office/drawing/2014/main" xmlns="" id="{E8FD0E11-3B37-4336-5BF0-C8C033354AF6}"/>
               </a:ext>
             </a:extLst>
           </p:cNvPr>
@@ -13752,7 +13300,7 @@
           <p:cNvPr id="3" name="Content Placeholder 2">
             <a:extLst>
               <a:ext uri="{FF2B5EF4-FFF2-40B4-BE49-F238E27FC236}">
-                <a16:creationId xmlns="" xmlns:a16="http://schemas.microsoft.com/office/drawing/2014/main" id="{32CB14AB-72E4-05EB-962C-F8B4618D0574}"/>
+                <a16:creationId xmlns:a16="http://schemas.microsoft.com/office/drawing/2014/main" xmlns="" id="{32CB14AB-72E4-05EB-962C-F8B4618D0574}"/>
               </a:ext>
             </a:extLst>
           </p:cNvPr>
@@ -13818,7 +13366,7 @@
           <p:cNvPr id="4" name="Título 1">
             <a:extLst>
               <a:ext uri="{FF2B5EF4-FFF2-40B4-BE49-F238E27FC236}">
-                <a16:creationId xmlns="" xmlns:a16="http://schemas.microsoft.com/office/drawing/2014/main" id="{32666AC8-2E17-4DB4-B0F5-60C640CCFD2E}"/>
+                <a16:creationId xmlns:a16="http://schemas.microsoft.com/office/drawing/2014/main" xmlns="" id="{32666AC8-2E17-4DB4-B0F5-60C640CCFD2E}"/>
               </a:ext>
             </a:extLst>
           </p:cNvPr>
@@ -13904,7 +13452,7 @@
           <p:cNvPr id="4" name="Título 1">
             <a:extLst>
               <a:ext uri="{FF2B5EF4-FFF2-40B4-BE49-F238E27FC236}">
-                <a16:creationId xmlns="" xmlns:a16="http://schemas.microsoft.com/office/drawing/2014/main" id="{32666AC8-2E17-4DB4-B0F5-60C640CCFD2E}"/>
+                <a16:creationId xmlns:a16="http://schemas.microsoft.com/office/drawing/2014/main" xmlns="" id="{32666AC8-2E17-4DB4-B0F5-60C640CCFD2E}"/>
               </a:ext>
             </a:extLst>
           </p:cNvPr>
@@ -14329,7 +13877,7 @@
         <p:cNvPr id="1" name="">
           <a:extLst>
             <a:ext uri="{FF2B5EF4-FFF2-40B4-BE49-F238E27FC236}">
-              <a16:creationId xmlns="" xmlns:a16="http://schemas.microsoft.com/office/drawing/2014/main" id="{E5F23F1A-965B-E657-4F46-B48EB78CFF12}"/>
+              <a16:creationId xmlns:a16="http://schemas.microsoft.com/office/drawing/2014/main" xmlns="" id="{E5F23F1A-965B-E657-4F46-B48EB78CFF12}"/>
             </a:ext>
           </a:extLst>
         </p:cNvPr>
@@ -14349,7 +13897,7 @@
           <p:cNvPr id="2" name="Title 1">
             <a:extLst>
               <a:ext uri="{FF2B5EF4-FFF2-40B4-BE49-F238E27FC236}">
-                <a16:creationId xmlns="" xmlns:a16="http://schemas.microsoft.com/office/drawing/2014/main" id="{1D2CEC37-D651-72A5-0293-3FB911F60F37}"/>
+                <a16:creationId xmlns:a16="http://schemas.microsoft.com/office/drawing/2014/main" xmlns="" id="{1D2CEC37-D651-72A5-0293-3FB911F60F37}"/>
               </a:ext>
             </a:extLst>
           </p:cNvPr>
@@ -14377,7 +13925,7 @@
           <p:cNvPr id="7" name="Content Placeholder 2">
             <a:extLst>
               <a:ext uri="{FF2B5EF4-FFF2-40B4-BE49-F238E27FC236}">
-                <a16:creationId xmlns="" xmlns:a16="http://schemas.microsoft.com/office/drawing/2014/main" id="{B3C1A135-4B52-F54B-5BDE-7C6DA1069706}"/>
+                <a16:creationId xmlns:a16="http://schemas.microsoft.com/office/drawing/2014/main" xmlns="" id="{B3C1A135-4B52-F54B-5BDE-7C6DA1069706}"/>
               </a:ext>
             </a:extLst>
           </p:cNvPr>
@@ -14468,7 +14016,7 @@
           <p:cNvPr id="5" name="Grupo 4">
             <a:extLst>
               <a:ext uri="{FF2B5EF4-FFF2-40B4-BE49-F238E27FC236}">
-                <a16:creationId xmlns="" xmlns:a16="http://schemas.microsoft.com/office/drawing/2014/main" id="{FD3AFEA6-16E8-D562-210E-DDE126CC469D}"/>
+                <a16:creationId xmlns:a16="http://schemas.microsoft.com/office/drawing/2014/main" xmlns="" id="{FD3AFEA6-16E8-D562-210E-DDE126CC469D}"/>
               </a:ext>
             </a:extLst>
           </p:cNvPr>
@@ -14488,7 +14036,7 @@
             <p:cNvPr id="6" name="Picture 2" descr="K-Means Clustering using Python. Welcome back guys! Hope you had a great… |  by Luigi Fiori | Medium">
               <a:extLst>
                 <a:ext uri="{FF2B5EF4-FFF2-40B4-BE49-F238E27FC236}">
-                  <a16:creationId xmlns="" xmlns:a16="http://schemas.microsoft.com/office/drawing/2014/main" id="{5EE61C46-3856-780A-E6BB-BC8EBB4234F4}"/>
+                  <a16:creationId xmlns:a16="http://schemas.microsoft.com/office/drawing/2014/main" xmlns="" id="{5EE61C46-3856-780A-E6BB-BC8EBB4234F4}"/>
                 </a:ext>
               </a:extLst>
             </p:cNvPr>
@@ -14533,7 +14081,7 @@
             <p:cNvPr id="8" name="CaixaDeTexto 7">
               <a:extLst>
                 <a:ext uri="{FF2B5EF4-FFF2-40B4-BE49-F238E27FC236}">
-                  <a16:creationId xmlns="" xmlns:a16="http://schemas.microsoft.com/office/drawing/2014/main" id="{843AD3E7-A8FE-599D-36F8-EA8BA9682F1B}"/>
+                  <a16:creationId xmlns:a16="http://schemas.microsoft.com/office/drawing/2014/main" xmlns="" id="{843AD3E7-A8FE-599D-36F8-EA8BA9682F1B}"/>
                 </a:ext>
               </a:extLst>
             </p:cNvPr>
@@ -14570,7 +14118,7 @@
             <p:cNvPr id="9" name="Picture 2" descr="K-Means Clustering using Python. Welcome back guys! Hope you had a great… |  by Luigi Fiori | Medium">
               <a:extLst>
                 <a:ext uri="{FF2B5EF4-FFF2-40B4-BE49-F238E27FC236}">
-                  <a16:creationId xmlns="" xmlns:a16="http://schemas.microsoft.com/office/drawing/2014/main" id="{E7C74A0F-F2DD-912F-E092-3530D068D40B}"/>
+                  <a16:creationId xmlns:a16="http://schemas.microsoft.com/office/drawing/2014/main" xmlns="" id="{E7C74A0F-F2DD-912F-E092-3530D068D40B}"/>
                 </a:ext>
               </a:extLst>
             </p:cNvPr>
@@ -14615,7 +14163,7 @@
             <p:cNvPr id="10" name="Seta para a direita 9">
               <a:extLst>
                 <a:ext uri="{FF2B5EF4-FFF2-40B4-BE49-F238E27FC236}">
-                  <a16:creationId xmlns="" xmlns:a16="http://schemas.microsoft.com/office/drawing/2014/main" id="{88A77E2D-B8CF-1AE8-8196-DD8F94371FF0}"/>
+                  <a16:creationId xmlns:a16="http://schemas.microsoft.com/office/drawing/2014/main" xmlns="" id="{88A77E2D-B8CF-1AE8-8196-DD8F94371FF0}"/>
                 </a:ext>
               </a:extLst>
             </p:cNvPr>
@@ -15316,7 +14864,7 @@
           <p:cNvPr id="2" name="Title 1">
             <a:extLst>
               <a:ext uri="{FF2B5EF4-FFF2-40B4-BE49-F238E27FC236}">
-                <a16:creationId xmlns="" xmlns:a16="http://schemas.microsoft.com/office/drawing/2014/main" id="{536BFB42-0017-5ED1-7773-E084E5A015B7}"/>
+                <a16:creationId xmlns:a16="http://schemas.microsoft.com/office/drawing/2014/main" xmlns="" id="{536BFB42-0017-5ED1-7773-E084E5A015B7}"/>
               </a:ext>
             </a:extLst>
           </p:cNvPr>
@@ -15345,7 +14893,7 @@
           <p:cNvPr id="3" name="Content Placeholder 2">
             <a:extLst>
               <a:ext uri="{FF2B5EF4-FFF2-40B4-BE49-F238E27FC236}">
-                <a16:creationId xmlns="" xmlns:a16="http://schemas.microsoft.com/office/drawing/2014/main" id="{D299C266-04B6-6A8C-91F5-24FCD2CC3103}"/>
+                <a16:creationId xmlns:a16="http://schemas.microsoft.com/office/drawing/2014/main" xmlns="" id="{D299C266-04B6-6A8C-91F5-24FCD2CC3103}"/>
               </a:ext>
             </a:extLst>
           </p:cNvPr>
@@ -15515,7 +15063,7 @@
           <p:cNvPr id="5" name="Picture 2" descr="K-means clustering on the digits dataset (PCA-reduced data) Centroids are marked with white cross">
             <a:extLst>
               <a:ext uri="{FF2B5EF4-FFF2-40B4-BE49-F238E27FC236}">
-                <a16:creationId xmlns="" xmlns:a16="http://schemas.microsoft.com/office/drawing/2014/main" id="{A7524CD6-9254-ABD9-EBBF-94136AAAEDE9}"/>
+                <a16:creationId xmlns:a16="http://schemas.microsoft.com/office/drawing/2014/main" xmlns="" id="{A7524CD6-9254-ABD9-EBBF-94136AAAEDE9}"/>
               </a:ext>
             </a:extLst>
           </p:cNvPr>
@@ -15737,7 +15285,7 @@
           <p:cNvPr id="1028" name="Picture 4" descr="K Means Clustering no Aprendizado de Máquinas — Aprendizado de Máquina —  DATA SCIENCE">
             <a:extLst>
               <a:ext uri="{FF2B5EF4-FFF2-40B4-BE49-F238E27FC236}">
-                <a16:creationId xmlns="" xmlns:a16="http://schemas.microsoft.com/office/drawing/2014/main" id="{D99905E1-3749-BAAD-E01A-C9B3686C4770}"/>
+                <a16:creationId xmlns:a16="http://schemas.microsoft.com/office/drawing/2014/main" xmlns="" id="{D99905E1-3749-BAAD-E01A-C9B3686C4770}"/>
               </a:ext>
             </a:extLst>
           </p:cNvPr>

--- a/slides/C24_kMeans.pptx
+++ b/slides/C24_kMeans.pptx
@@ -5,7 +5,7 @@
     <p:sldMasterId id="2147483648" r:id="rId1"/>
   </p:sldMasterIdLst>
   <p:notesMasterIdLst>
-    <p:notesMasterId r:id="rId41"/>
+    <p:notesMasterId r:id="rId44"/>
   </p:notesMasterIdLst>
   <p:sldIdLst>
     <p:sldId id="256" r:id="rId2"/>
@@ -33,20 +33,23 @@
     <p:sldId id="408" r:id="rId24"/>
     <p:sldId id="409" r:id="rId25"/>
     <p:sldId id="410" r:id="rId26"/>
-    <p:sldId id="418" r:id="rId27"/>
-    <p:sldId id="292" r:id="rId28"/>
-    <p:sldId id="299" r:id="rId29"/>
-    <p:sldId id="412" r:id="rId30"/>
-    <p:sldId id="416" r:id="rId31"/>
-    <p:sldId id="411" r:id="rId32"/>
-    <p:sldId id="293" r:id="rId33"/>
-    <p:sldId id="300" r:id="rId34"/>
-    <p:sldId id="398" r:id="rId35"/>
-    <p:sldId id="338" r:id="rId36"/>
-    <p:sldId id="395" r:id="rId37"/>
-    <p:sldId id="396" r:id="rId38"/>
-    <p:sldId id="306" r:id="rId39"/>
-    <p:sldId id="265" r:id="rId40"/>
+    <p:sldId id="292" r:id="rId27"/>
+    <p:sldId id="299" r:id="rId28"/>
+    <p:sldId id="419" r:id="rId29"/>
+    <p:sldId id="420" r:id="rId30"/>
+    <p:sldId id="421" r:id="rId31"/>
+    <p:sldId id="422" r:id="rId32"/>
+    <p:sldId id="423" r:id="rId33"/>
+    <p:sldId id="418" r:id="rId34"/>
+    <p:sldId id="411" r:id="rId35"/>
+    <p:sldId id="293" r:id="rId36"/>
+    <p:sldId id="300" r:id="rId37"/>
+    <p:sldId id="398" r:id="rId38"/>
+    <p:sldId id="338" r:id="rId39"/>
+    <p:sldId id="395" r:id="rId40"/>
+    <p:sldId id="396" r:id="rId41"/>
+    <p:sldId id="306" r:id="rId42"/>
+    <p:sldId id="265" r:id="rId43"/>
   </p:sldIdLst>
   <p:sldSz cx="12192000" cy="6858000"/>
   <p:notesSz cx="6858000" cy="9144000"/>
@@ -235,7 +238,7 @@
           <a:p>
             <a:fld id="{C3C82C08-3EFC-4473-8294-F0E229C19EFF}" type="datetimeFigureOut">
               <a:rPr lang="pt-BR" smtClean="0"/>
-              <a:t>08/04/2026</a:t>
+              <a:t>09/04/2026</a:t>
             </a:fld>
             <a:endParaRPr lang="pt-BR"/>
           </a:p>
@@ -394,7 +397,7 @@
           <a:p>
             <a:fld id="{F430A2A4-8C14-4B1A-AD48-7B6401078BF7}" type="slidenum">
               <a:rPr lang="pt-BR" smtClean="0"/>
-              <a:t>‹nº›</a:t>
+              <a:t>‹#›</a:t>
             </a:fld>
             <a:endParaRPr lang="pt-BR"/>
           </a:p>
@@ -613,7 +616,7 @@
       </p:grpSpPr>
       <p:sp>
         <p:nvSpPr>
-          <p:cNvPr id="2" name="Espaço Reservado para Imagem de Slide 1"/>
+          <p:cNvPr id="2" name="Slide Image Placeholder 1"/>
           <p:cNvSpPr>
             <a:spLocks noGrp="1" noRot="1" noChangeAspect="1"/>
           </p:cNvSpPr>
@@ -625,7 +628,7 @@
       </p:sp>
       <p:sp>
         <p:nvSpPr>
-          <p:cNvPr id="3" name="Espaço Reservado para Anotações 2"/>
+          <p:cNvPr id="3" name="Notes Placeholder 2"/>
           <p:cNvSpPr>
             <a:spLocks noGrp="1"/>
           </p:cNvSpPr>
@@ -638,22 +641,18 @@
           <a:bodyPr/>
           <a:lstStyle/>
           <a:p>
-            <a:r>
-              <a:rPr lang="pt-BR" smtClean="0"/>
-              <a:t>https://colab.research.google.com/github/zz4fap/tp557-iot-ml/blob/main/examples/k_means_centros_de_distribui%C3%A7%C3%A3o.ipynb</a:t>
-            </a:r>
-            <a:endParaRPr lang="pt-BR"/>
+            <a:endParaRPr lang="en-US" dirty="0"/>
           </a:p>
         </p:txBody>
       </p:sp>
       <p:sp>
         <p:nvSpPr>
-          <p:cNvPr id="4" name="Espaço Reservado para Número de Slide 3"/>
+          <p:cNvPr id="4" name="Slide Number Placeholder 3"/>
           <p:cNvSpPr>
             <a:spLocks noGrp="1"/>
           </p:cNvSpPr>
           <p:nvPr>
-            <p:ph type="sldNum" sz="quarter" idx="10"/>
+            <p:ph type="sldNum" sz="quarter" idx="5"/>
           </p:nvPr>
         </p:nvSpPr>
         <p:spPr/>
@@ -663,7 +662,7 @@
           <a:p>
             <a:fld id="{F430A2A4-8C14-4B1A-AD48-7B6401078BF7}" type="slidenum">
               <a:rPr lang="pt-BR" smtClean="0"/>
-              <a:t>31</a:t>
+              <a:t>27</a:t>
             </a:fld>
             <a:endParaRPr lang="pt-BR"/>
           </a:p>
@@ -672,7 +671,7 @@
     </p:spTree>
     <p:extLst>
       <p:ext uri="{BB962C8B-B14F-4D97-AF65-F5344CB8AC3E}">
-        <p14:creationId xmlns:p14="http://schemas.microsoft.com/office/powerpoint/2010/main" val="2397769607"/>
+        <p14:creationId xmlns:p14="http://schemas.microsoft.com/office/powerpoint/2010/main" val="26339951"/>
       </p:ext>
     </p:extLst>
   </p:cSld>
@@ -701,7 +700,7 @@
       </p:grpSpPr>
       <p:sp>
         <p:nvSpPr>
-          <p:cNvPr id="2" name="Espaço Reservado para Imagem de Slide 1"/>
+          <p:cNvPr id="2" name="Slide Image Placeholder 1"/>
           <p:cNvSpPr>
             <a:spLocks noGrp="1" noRot="1" noChangeAspect="1"/>
           </p:cNvSpPr>
@@ -713,7 +712,7 @@
       </p:sp>
       <p:sp>
         <p:nvSpPr>
-          <p:cNvPr id="3" name="Espaço Reservado para Anotações 2"/>
+          <p:cNvPr id="3" name="Notes Placeholder 2"/>
           <p:cNvSpPr>
             <a:spLocks noGrp="1"/>
           </p:cNvSpPr>
@@ -726,625 +725,18 @@
           <a:bodyPr/>
           <a:lstStyle/>
           <a:p>
-            <a:pPr marL="0" marR="0" lvl="0" indent="0" algn="l" defTabSz="914400" rtl="0" eaLnBrk="1" fontAlgn="auto" latinLnBrk="0" hangingPunct="1">
-              <a:lnSpc>
-                <a:spcPct val="100000"/>
-              </a:lnSpc>
-              <a:spcBef>
-                <a:spcPts val="0"/>
-              </a:spcBef>
-              <a:spcAft>
-                <a:spcPts val="0"/>
-              </a:spcAft>
-              <a:buClrTx/>
-              <a:buSzTx/>
-              <a:buFontTx/>
-              <a:buNone/>
-              <a:tabLst/>
-              <a:defRPr/>
-            </a:pPr>
-            <a:r>
-              <a:rPr lang="pt-BR" sz="1200" b="0" dirty="0">
-                <a:solidFill>
-                  <a:srgbClr val="00B0F0"/>
-                </a:solidFill>
-              </a:rPr>
-              <a:t>E</a:t>
-            </a:r>
-            <a:r>
-              <a:rPr lang="pt-BR" dirty="0"/>
-              <a:t>xemplo:</a:t>
-            </a:r>
-            <a:r>
-              <a:rPr lang="pt-BR" baseline="0" dirty="0"/>
-              <a:t> </a:t>
-            </a:r>
-            <a:r>
-              <a:rPr lang="pt-BR" dirty="0"/>
-              <a:t>https://colab.research.google.com/github/zz4fap/t320_aprendizado_de_maquina/blob/main/notebooks/clustering/kmeans_example.ipynb</a:t>
-            </a:r>
-          </a:p>
-          <a:p>
-            <a:pPr marL="0" marR="0" lvl="0" indent="0" algn="l" defTabSz="914400" rtl="0" eaLnBrk="1" fontAlgn="auto" latinLnBrk="0" hangingPunct="1">
-              <a:lnSpc>
-                <a:spcPct val="100000"/>
-              </a:lnSpc>
-              <a:spcBef>
-                <a:spcPts val="0"/>
-              </a:spcBef>
-              <a:spcAft>
-                <a:spcPts val="0"/>
-              </a:spcAft>
-              <a:buClrTx/>
-              <a:buSzTx/>
-              <a:buFontTx/>
-              <a:buNone/>
-              <a:tabLst/>
-              <a:defRPr/>
-            </a:pPr>
-            <a:endParaRPr lang="pt-BR" sz="1200" b="0" dirty="0">
-              <a:solidFill>
-                <a:srgbClr val="00B0F0"/>
-              </a:solidFill>
-            </a:endParaRPr>
-          </a:p>
-          <a:p>
-            <a:pPr marL="0" marR="0" lvl="0" indent="0" algn="l" defTabSz="914400" rtl="0" eaLnBrk="1" fontAlgn="auto" latinLnBrk="0" hangingPunct="1">
-              <a:lnSpc>
-                <a:spcPct val="100000"/>
-              </a:lnSpc>
-              <a:spcBef>
-                <a:spcPts val="0"/>
-              </a:spcBef>
-              <a:spcAft>
-                <a:spcPts val="0"/>
-              </a:spcAft>
-              <a:buClrTx/>
-              <a:buSzTx/>
-              <a:buFontTx/>
-              <a:buNone/>
-              <a:tabLst/>
-              <a:defRPr/>
-            </a:pPr>
-            <a:endParaRPr lang="pt-BR" sz="1200" b="0" dirty="0">
-              <a:solidFill>
-                <a:srgbClr val="00B0F0"/>
-              </a:solidFill>
-            </a:endParaRPr>
-          </a:p>
-          <a:p>
-            <a:r>
-              <a:rPr lang="pt-BR" dirty="0"/>
-              <a:t>Identificar o melhor número de clusters (</a:t>
-            </a:r>
-            <a:r>
-              <a:rPr lang="pt-BR" dirty="0" err="1"/>
-              <a:t>kk</a:t>
-            </a:r>
-            <a:r>
-              <a:rPr lang="pt-BR" dirty="0"/>
-              <a:t>) no K-</a:t>
-            </a:r>
-            <a:r>
-              <a:rPr lang="pt-BR" dirty="0" err="1"/>
-              <a:t>Means</a:t>
-            </a:r>
-            <a:r>
-              <a:rPr lang="pt-BR" dirty="0"/>
-              <a:t> é um passo fundamental para garantir a eficiência e a utilidade da clusterização. Existem várias abordagens para determinar o valor ideal de </a:t>
-            </a:r>
-            <a:r>
-              <a:rPr lang="pt-BR" dirty="0" err="1"/>
-              <a:t>kk</a:t>
-            </a:r>
-            <a:r>
-              <a:rPr lang="pt-BR" dirty="0"/>
-              <a:t>. As mais comuns incluem:</a:t>
-            </a:r>
-          </a:p>
-          <a:p>
-            <a:r>
-              <a:rPr lang="pt-BR" b="1" dirty="0"/>
-              <a:t>1. Método do Cotovelo (</a:t>
-            </a:r>
-            <a:r>
-              <a:rPr lang="pt-BR" b="1" dirty="0" err="1"/>
-              <a:t>Elbow</a:t>
-            </a:r>
-            <a:r>
-              <a:rPr lang="pt-BR" b="1" dirty="0"/>
-              <a:t> </a:t>
-            </a:r>
-            <a:r>
-              <a:rPr lang="pt-BR" b="1" dirty="0" err="1"/>
-              <a:t>Method</a:t>
-            </a:r>
-            <a:r>
-              <a:rPr lang="pt-BR" b="1" dirty="0"/>
-              <a:t>)</a:t>
-            </a:r>
-          </a:p>
-          <a:p>
-            <a:r>
-              <a:rPr lang="pt-BR" dirty="0"/>
-              <a:t>Este método analisa a variação da </a:t>
-            </a:r>
-            <a:r>
-              <a:rPr lang="pt-BR" b="1" dirty="0"/>
-              <a:t>inércia </a:t>
-            </a:r>
-            <a:r>
-              <a:rPr lang="pt-BR" b="1" dirty="0" err="1"/>
-              <a:t>intra-cluster</a:t>
-            </a:r>
-            <a:r>
-              <a:rPr lang="pt-BR" dirty="0"/>
-              <a:t> (ou soma dos erros quadráticos dentro dos clusters, WSSWSS) à medida que o número de clusters aumenta.</a:t>
-            </a:r>
-          </a:p>
-          <a:p>
-            <a:r>
-              <a:rPr lang="pt-BR" b="1" dirty="0"/>
-              <a:t>Passos:</a:t>
-            </a:r>
-          </a:p>
-          <a:p>
-            <a:pPr>
-              <a:buFont typeface="+mj-lt"/>
-              <a:buAutoNum type="arabicPeriod"/>
-            </a:pPr>
-            <a:r>
-              <a:rPr lang="pt-BR" dirty="0"/>
-              <a:t>Execute o K-</a:t>
-            </a:r>
-            <a:r>
-              <a:rPr lang="pt-BR" dirty="0" err="1"/>
-              <a:t>Means</a:t>
-            </a:r>
-            <a:r>
-              <a:rPr lang="pt-BR" dirty="0"/>
-              <a:t> com diferentes valores de </a:t>
-            </a:r>
-            <a:r>
-              <a:rPr lang="pt-BR" dirty="0" err="1"/>
-              <a:t>kk</a:t>
-            </a:r>
-            <a:r>
-              <a:rPr lang="pt-BR" dirty="0"/>
-              <a:t> (por exemplo, k=1k=1 a k=10k=10).</a:t>
-            </a:r>
-          </a:p>
-          <a:p>
-            <a:pPr>
-              <a:buFont typeface="+mj-lt"/>
-              <a:buAutoNum type="arabicPeriod"/>
-            </a:pPr>
-            <a:r>
-              <a:rPr lang="pt-BR" dirty="0"/>
-              <a:t>Calcule o WSSWSS para cada valor de </a:t>
-            </a:r>
-            <a:r>
-              <a:rPr lang="pt-BR" dirty="0" err="1"/>
-              <a:t>kk</a:t>
-            </a:r>
-            <a:r>
-              <a:rPr lang="pt-BR" dirty="0"/>
-              <a:t>.</a:t>
-            </a:r>
-          </a:p>
-          <a:p>
-            <a:pPr>
-              <a:buFont typeface="+mj-lt"/>
-              <a:buAutoNum type="arabicPeriod"/>
-            </a:pPr>
-            <a:r>
-              <a:rPr lang="pt-BR" dirty="0"/>
-              <a:t>Trace um gráfico do WSSWSS em função de </a:t>
-            </a:r>
-            <a:r>
-              <a:rPr lang="pt-BR" dirty="0" err="1"/>
-              <a:t>kk</a:t>
-            </a:r>
-            <a:r>
-              <a:rPr lang="pt-BR" dirty="0"/>
-              <a:t>.</a:t>
-            </a:r>
-          </a:p>
-          <a:p>
-            <a:pPr>
-              <a:buFont typeface="+mj-lt"/>
-              <a:buAutoNum type="arabicPeriod"/>
-            </a:pPr>
-            <a:r>
-              <a:rPr lang="pt-BR" dirty="0"/>
-              <a:t>Identifique o "cotovelo" no gráfico — o ponto onde a redução no WSSWSS se torna menos significativa.</a:t>
-            </a:r>
-          </a:p>
-          <a:p>
-            <a:r>
-              <a:rPr lang="pt-BR" b="1" dirty="0"/>
-              <a:t>Observação:</a:t>
-            </a:r>
-          </a:p>
-          <a:p>
-            <a:r>
-              <a:rPr lang="pt-BR" dirty="0"/>
-              <a:t>O "cotovelo" indica que aumentar </a:t>
-            </a:r>
-            <a:r>
-              <a:rPr lang="pt-BR" dirty="0" err="1"/>
-              <a:t>kk</a:t>
-            </a:r>
-            <a:r>
-              <a:rPr lang="pt-BR" dirty="0"/>
-              <a:t> além desse ponto não resulta em uma melhoria substancial na compactação dos clusters.</a:t>
-            </a:r>
-          </a:p>
-          <a:p>
-            <a:r>
-              <a:rPr lang="pt-BR" b="1" dirty="0"/>
-              <a:t>2. Coeficiente de Silhueta (</a:t>
-            </a:r>
-            <a:r>
-              <a:rPr lang="pt-BR" b="1" dirty="0" err="1"/>
-              <a:t>Silhouette</a:t>
-            </a:r>
-            <a:r>
-              <a:rPr lang="pt-BR" b="1" dirty="0"/>
-              <a:t> Score)</a:t>
-            </a:r>
-          </a:p>
-          <a:p>
-            <a:r>
-              <a:rPr lang="pt-BR" dirty="0"/>
-              <a:t>O coeficiente de silhueta avalia a </a:t>
-            </a:r>
-            <a:r>
-              <a:rPr lang="pt-BR" b="1" dirty="0"/>
-              <a:t>qualidade da clusterização</a:t>
-            </a:r>
-            <a:r>
-              <a:rPr lang="pt-BR" dirty="0"/>
-              <a:t>, considerando a coesão dentro dos clusters e a separação entre eles.</a:t>
-            </a:r>
-          </a:p>
-          <a:p>
-            <a:pPr>
-              <a:buFont typeface="Arial" panose="020B0604020202020204" pitchFamily="34" charset="0"/>
-              <a:buChar char="•"/>
-            </a:pPr>
-            <a:r>
-              <a:rPr lang="pt-BR" dirty="0"/>
-              <a:t>s=b−</a:t>
-            </a:r>
-            <a:r>
-              <a:rPr lang="pt-BR" dirty="0" err="1"/>
-              <a:t>amax</a:t>
-            </a:r>
-            <a:r>
-              <a:rPr lang="pt-BR" dirty="0"/>
-              <a:t>⁡(</a:t>
-            </a:r>
-            <a:r>
-              <a:rPr lang="pt-BR" dirty="0" err="1"/>
-              <a:t>a,b</a:t>
-            </a:r>
-            <a:r>
-              <a:rPr lang="pt-BR" dirty="0"/>
-              <a:t>)s = \</a:t>
-            </a:r>
-            <a:r>
-              <a:rPr lang="pt-BR" dirty="0" err="1"/>
-              <a:t>frac</a:t>
-            </a:r>
-            <a:r>
-              <a:rPr lang="pt-BR" dirty="0"/>
-              <a:t>{b - a}{\</a:t>
-            </a:r>
-            <a:r>
-              <a:rPr lang="pt-BR" dirty="0" err="1"/>
-              <a:t>max</a:t>
-            </a:r>
-            <a:r>
-              <a:rPr lang="pt-BR" dirty="0"/>
-              <a:t>(a, b)} aa: distância média de um ponto para os outros pontos do mesmo cluster.</a:t>
-            </a:r>
-          </a:p>
-          <a:p>
-            <a:pPr>
-              <a:buFont typeface="Arial" panose="020B0604020202020204" pitchFamily="34" charset="0"/>
-              <a:buChar char="•"/>
-            </a:pPr>
-            <a:r>
-              <a:rPr lang="pt-BR" dirty="0" err="1"/>
-              <a:t>bb</a:t>
-            </a:r>
-            <a:r>
-              <a:rPr lang="pt-BR" dirty="0"/>
-              <a:t>: distância média de um ponto para os pontos do cluster mais próximo.</a:t>
-            </a:r>
-          </a:p>
-          <a:p>
-            <a:r>
-              <a:rPr lang="pt-BR" b="1" dirty="0"/>
-              <a:t>Passos:</a:t>
-            </a:r>
-          </a:p>
-          <a:p>
-            <a:pPr>
-              <a:buFont typeface="+mj-lt"/>
-              <a:buAutoNum type="arabicPeriod"/>
-            </a:pPr>
-            <a:r>
-              <a:rPr lang="pt-BR" dirty="0"/>
-              <a:t>Execute o K-</a:t>
-            </a:r>
-            <a:r>
-              <a:rPr lang="pt-BR" dirty="0" err="1"/>
-              <a:t>Means</a:t>
-            </a:r>
-            <a:r>
-              <a:rPr lang="pt-BR" dirty="0"/>
-              <a:t> para diferentes valores de </a:t>
-            </a:r>
-            <a:r>
-              <a:rPr lang="pt-BR" dirty="0" err="1"/>
-              <a:t>kk</a:t>
-            </a:r>
-            <a:r>
-              <a:rPr lang="pt-BR" dirty="0"/>
-              <a:t>.</a:t>
-            </a:r>
-          </a:p>
-          <a:p>
-            <a:pPr>
-              <a:buFont typeface="+mj-lt"/>
-              <a:buAutoNum type="arabicPeriod"/>
-            </a:pPr>
-            <a:r>
-              <a:rPr lang="pt-BR" dirty="0"/>
-              <a:t>Calcule o coeficiente de silhueta para cada ponto e, em seguida, a média para o conjunto.</a:t>
-            </a:r>
-          </a:p>
-          <a:p>
-            <a:pPr>
-              <a:buFont typeface="+mj-lt"/>
-              <a:buAutoNum type="arabicPeriod"/>
-            </a:pPr>
-            <a:r>
-              <a:rPr lang="pt-BR" dirty="0"/>
-              <a:t>Escolha </a:t>
-            </a:r>
-            <a:r>
-              <a:rPr lang="pt-BR" dirty="0" err="1"/>
-              <a:t>kk</a:t>
-            </a:r>
-            <a:r>
-              <a:rPr lang="pt-BR" dirty="0"/>
-              <a:t> que maximize o valor médio do coeficiente de silhueta.</a:t>
-            </a:r>
-          </a:p>
-          <a:p>
-            <a:r>
-              <a:rPr lang="pt-BR" b="1" dirty="0"/>
-              <a:t>3. Critério Gap </a:t>
-            </a:r>
-            <a:r>
-              <a:rPr lang="pt-BR" b="1" dirty="0" err="1"/>
-              <a:t>Statistic</a:t>
-            </a:r>
-            <a:endParaRPr lang="pt-BR" b="1" dirty="0"/>
-          </a:p>
-          <a:p>
-            <a:r>
-              <a:rPr lang="pt-BR" dirty="0"/>
-              <a:t>Este método compara a dispersão dos clusters no conjunto de dados com uma dispersão esperada de um conjunto de dados gerado aleatoriamente.</a:t>
-            </a:r>
-          </a:p>
-          <a:p>
-            <a:r>
-              <a:rPr lang="pt-BR" b="1" dirty="0"/>
-              <a:t>Passos:</a:t>
-            </a:r>
-          </a:p>
-          <a:p>
-            <a:pPr>
-              <a:buFont typeface="+mj-lt"/>
-              <a:buAutoNum type="arabicPeriod"/>
-            </a:pPr>
-            <a:r>
-              <a:rPr lang="pt-BR" dirty="0"/>
-              <a:t>Execute o K-</a:t>
-            </a:r>
-            <a:r>
-              <a:rPr lang="pt-BR" dirty="0" err="1"/>
-              <a:t>Means</a:t>
-            </a:r>
-            <a:r>
-              <a:rPr lang="pt-BR" dirty="0"/>
-              <a:t> para diferentes valores de </a:t>
-            </a:r>
-            <a:r>
-              <a:rPr lang="pt-BR" dirty="0" err="1"/>
-              <a:t>kk</a:t>
-            </a:r>
-            <a:r>
-              <a:rPr lang="pt-BR" dirty="0"/>
-              <a:t> no conjunto de dados real.</a:t>
-            </a:r>
-          </a:p>
-          <a:p>
-            <a:pPr>
-              <a:buFont typeface="+mj-lt"/>
-              <a:buAutoNum type="arabicPeriod"/>
-            </a:pPr>
-            <a:r>
-              <a:rPr lang="pt-BR" dirty="0"/>
-              <a:t>Gere um conjunto de dados aleatório com a mesma distribuição e calcule a dispersão dos clusters.</a:t>
-            </a:r>
-          </a:p>
-          <a:p>
-            <a:pPr>
-              <a:buFont typeface="+mj-lt"/>
-              <a:buAutoNum type="arabicPeriod"/>
-            </a:pPr>
-            <a:r>
-              <a:rPr lang="pt-BR" dirty="0"/>
-              <a:t>Compare as dispersões e encontre </a:t>
-            </a:r>
-            <a:r>
-              <a:rPr lang="pt-BR" dirty="0" err="1"/>
-              <a:t>kk</a:t>
-            </a:r>
-            <a:r>
-              <a:rPr lang="pt-BR" dirty="0"/>
-              <a:t> que maximize a diferença (gap) entre os dois conjuntos.</a:t>
-            </a:r>
-          </a:p>
-          <a:p>
-            <a:r>
-              <a:rPr lang="pt-BR" b="1" dirty="0"/>
-              <a:t>4. Validação Cruzada</a:t>
-            </a:r>
-          </a:p>
-          <a:p>
-            <a:r>
-              <a:rPr lang="pt-BR" dirty="0"/>
-              <a:t>Divida o conjunto de dados em subconjuntos e avalie a consistência dos clusters em diferentes amostras.</a:t>
-            </a:r>
-          </a:p>
-          <a:p>
-            <a:r>
-              <a:rPr lang="pt-BR" b="1" dirty="0"/>
-              <a:t>5. Métodos Automáticos, como X-</a:t>
-            </a:r>
-            <a:r>
-              <a:rPr lang="pt-BR" b="1" dirty="0" err="1"/>
-              <a:t>Means</a:t>
-            </a:r>
-            <a:r>
-              <a:rPr lang="pt-BR" b="1" dirty="0"/>
-              <a:t> e G-</a:t>
-            </a:r>
-            <a:r>
-              <a:rPr lang="pt-BR" b="1" dirty="0" err="1"/>
-              <a:t>Means</a:t>
-            </a:r>
-            <a:endParaRPr lang="pt-BR" b="1" dirty="0"/>
-          </a:p>
-          <a:p>
-            <a:pPr>
-              <a:buFont typeface="Arial" panose="020B0604020202020204" pitchFamily="34" charset="0"/>
-              <a:buChar char="•"/>
-            </a:pPr>
-            <a:r>
-              <a:rPr lang="pt-BR" b="1" dirty="0"/>
-              <a:t>X-</a:t>
-            </a:r>
-            <a:r>
-              <a:rPr lang="pt-BR" b="1" dirty="0" err="1"/>
-              <a:t>Means</a:t>
-            </a:r>
-            <a:r>
-              <a:rPr lang="pt-BR" dirty="0"/>
-              <a:t>: Extensão do K-</a:t>
-            </a:r>
-            <a:r>
-              <a:rPr lang="pt-BR" dirty="0" err="1"/>
-              <a:t>Means</a:t>
-            </a:r>
-            <a:r>
-              <a:rPr lang="pt-BR" dirty="0"/>
-              <a:t> que escolhe automaticamente </a:t>
-            </a:r>
-            <a:r>
-              <a:rPr lang="pt-BR" dirty="0" err="1"/>
-              <a:t>kk</a:t>
-            </a:r>
-            <a:r>
-              <a:rPr lang="pt-BR" dirty="0"/>
-              <a:t> otimizando o critério Bayesiano.</a:t>
-            </a:r>
-          </a:p>
-          <a:p>
-            <a:pPr>
-              <a:buFont typeface="Arial" panose="020B0604020202020204" pitchFamily="34" charset="0"/>
-              <a:buChar char="•"/>
-            </a:pPr>
-            <a:r>
-              <a:rPr lang="pt-BR" b="1" dirty="0"/>
-              <a:t>G-</a:t>
-            </a:r>
-            <a:r>
-              <a:rPr lang="pt-BR" b="1" dirty="0" err="1"/>
-              <a:t>Means</a:t>
-            </a:r>
-            <a:r>
-              <a:rPr lang="pt-BR" dirty="0"/>
-              <a:t>: Usa testes estatísticos para determinar se os clusters seguem uma distribuição gaussiana.</a:t>
-            </a:r>
-          </a:p>
-          <a:p>
-            <a:r>
-              <a:rPr lang="pt-BR" b="1" dirty="0"/>
-              <a:t>Considerações:</a:t>
-            </a:r>
-          </a:p>
-          <a:p>
-            <a:pPr>
-              <a:buFont typeface="Arial" panose="020B0604020202020204" pitchFamily="34" charset="0"/>
-              <a:buChar char="•"/>
-            </a:pPr>
-            <a:r>
-              <a:rPr lang="pt-BR" b="1" dirty="0"/>
-              <a:t>Dimensão dos dados</a:t>
-            </a:r>
-            <a:r>
-              <a:rPr lang="pt-BR" dirty="0"/>
-              <a:t>: Em alta dimensionalidade, os métodos podem se tornar menos claros devido à maldição da dimensionalidade.</a:t>
-            </a:r>
-          </a:p>
-          <a:p>
-            <a:pPr>
-              <a:buFont typeface="Arial" panose="020B0604020202020204" pitchFamily="34" charset="0"/>
-              <a:buChar char="•"/>
-            </a:pPr>
-            <a:r>
-              <a:rPr lang="pt-BR" b="1" dirty="0"/>
-              <a:t>Interpretação</a:t>
-            </a:r>
-            <a:r>
-              <a:rPr lang="pt-BR" dirty="0"/>
-              <a:t>: O número de clusters deve fazer sentido no contexto do problema, além de ser estatisticamente válido.</a:t>
-            </a:r>
-          </a:p>
-          <a:p>
-            <a:r>
-              <a:rPr lang="pt-BR" dirty="0"/>
-              <a:t>Combinar múltiplos métodos pode ser útil para confirmar a escolha do melhor </a:t>
-            </a:r>
-            <a:r>
-              <a:rPr lang="pt-BR" dirty="0" err="1"/>
-              <a:t>kk</a:t>
-            </a:r>
-            <a:r>
-              <a:rPr lang="pt-BR" dirty="0"/>
-              <a:t>.</a:t>
-            </a:r>
-          </a:p>
-          <a:p>
             <a:endParaRPr lang="en-US" dirty="0"/>
           </a:p>
         </p:txBody>
       </p:sp>
       <p:sp>
         <p:nvSpPr>
-          <p:cNvPr id="4" name="Espaço Reservado para Número de Slide 3"/>
+          <p:cNvPr id="4" name="Slide Number Placeholder 3"/>
           <p:cNvSpPr>
             <a:spLocks noGrp="1"/>
           </p:cNvSpPr>
           <p:nvPr>
-            <p:ph type="sldNum" sz="quarter" idx="10"/>
+            <p:ph type="sldNum" sz="quarter" idx="5"/>
           </p:nvPr>
         </p:nvSpPr>
         <p:spPr/>
@@ -1354,7 +746,7 @@
           <a:p>
             <a:fld id="{F430A2A4-8C14-4B1A-AD48-7B6401078BF7}" type="slidenum">
               <a:rPr lang="pt-BR" smtClean="0"/>
-              <a:t>32</a:t>
+              <a:t>31</a:t>
             </a:fld>
             <a:endParaRPr lang="pt-BR"/>
           </a:p>
@@ -1363,7 +755,7 @@
     </p:spTree>
     <p:extLst>
       <p:ext uri="{BB962C8B-B14F-4D97-AF65-F5344CB8AC3E}">
-        <p14:creationId xmlns:p14="http://schemas.microsoft.com/office/powerpoint/2010/main" val="3992294165"/>
+        <p14:creationId xmlns:p14="http://schemas.microsoft.com/office/powerpoint/2010/main" val="1918560515"/>
       </p:ext>
     </p:extLst>
   </p:cSld>
@@ -1392,6 +784,784 @@
       </p:grpSpPr>
       <p:sp>
         <p:nvSpPr>
+          <p:cNvPr id="2" name="Espaço Reservado para Imagem de Slide 1"/>
+          <p:cNvSpPr>
+            <a:spLocks noGrp="1" noRot="1" noChangeAspect="1"/>
+          </p:cNvSpPr>
+          <p:nvPr>
+            <p:ph type="sldImg"/>
+          </p:nvPr>
+        </p:nvSpPr>
+        <p:spPr/>
+      </p:sp>
+      <p:sp>
+        <p:nvSpPr>
+          <p:cNvPr id="3" name="Espaço Reservado para Anotações 2"/>
+          <p:cNvSpPr>
+            <a:spLocks noGrp="1"/>
+          </p:cNvSpPr>
+          <p:nvPr>
+            <p:ph type="body" idx="1"/>
+          </p:nvPr>
+        </p:nvSpPr>
+        <p:spPr/>
+        <p:txBody>
+          <a:bodyPr/>
+          <a:lstStyle/>
+          <a:p>
+            <a:r>
+              <a:rPr lang="pt-BR"/>
+              <a:t>https://colab.research.google.com/github/zz4fap/tp557-iot-ml/blob/main/examples/k_means_centros_de_distribui%C3%A7%C3%A3o.ipynb</a:t>
+            </a:r>
+          </a:p>
+        </p:txBody>
+      </p:sp>
+      <p:sp>
+        <p:nvSpPr>
+          <p:cNvPr id="4" name="Espaço Reservado para Número de Slide 3"/>
+          <p:cNvSpPr>
+            <a:spLocks noGrp="1"/>
+          </p:cNvSpPr>
+          <p:nvPr>
+            <p:ph type="sldNum" sz="quarter" idx="10"/>
+          </p:nvPr>
+        </p:nvSpPr>
+        <p:spPr/>
+        <p:txBody>
+          <a:bodyPr/>
+          <a:lstStyle/>
+          <a:p>
+            <a:fld id="{F430A2A4-8C14-4B1A-AD48-7B6401078BF7}" type="slidenum">
+              <a:rPr lang="pt-BR" smtClean="0"/>
+              <a:t>34</a:t>
+            </a:fld>
+            <a:endParaRPr lang="pt-BR"/>
+          </a:p>
+        </p:txBody>
+      </p:sp>
+    </p:spTree>
+    <p:extLst>
+      <p:ext uri="{BB962C8B-B14F-4D97-AF65-F5344CB8AC3E}">
+        <p14:creationId xmlns:p14="http://schemas.microsoft.com/office/powerpoint/2010/main" val="2397769607"/>
+      </p:ext>
+    </p:extLst>
+  </p:cSld>
+  <p:clrMapOvr>
+    <a:masterClrMapping/>
+  </p:clrMapOvr>
+</p:notes>
+</file>
+
+<file path=ppt/notesSlides/notesSlide13.xml><?xml version="1.0" encoding="utf-8"?>
+<p:notes xmlns:a="http://schemas.openxmlformats.org/drawingml/2006/main" xmlns:r="http://schemas.openxmlformats.org/officeDocument/2006/relationships" xmlns:p="http://schemas.openxmlformats.org/presentationml/2006/main">
+  <p:cSld>
+    <p:spTree>
+      <p:nvGrpSpPr>
+        <p:cNvPr id="1" name=""/>
+        <p:cNvGrpSpPr/>
+        <p:nvPr/>
+      </p:nvGrpSpPr>
+      <p:grpSpPr>
+        <a:xfrm>
+          <a:off x="0" y="0"/>
+          <a:ext cx="0" cy="0"/>
+          <a:chOff x="0" y="0"/>
+          <a:chExt cx="0" cy="0"/>
+        </a:xfrm>
+      </p:grpSpPr>
+      <p:sp>
+        <p:nvSpPr>
+          <p:cNvPr id="2" name="Espaço Reservado para Imagem de Slide 1"/>
+          <p:cNvSpPr>
+            <a:spLocks noGrp="1" noRot="1" noChangeAspect="1"/>
+          </p:cNvSpPr>
+          <p:nvPr>
+            <p:ph type="sldImg"/>
+          </p:nvPr>
+        </p:nvSpPr>
+        <p:spPr/>
+      </p:sp>
+      <p:sp>
+        <p:nvSpPr>
+          <p:cNvPr id="3" name="Espaço Reservado para Anotações 2"/>
+          <p:cNvSpPr>
+            <a:spLocks noGrp="1"/>
+          </p:cNvSpPr>
+          <p:nvPr>
+            <p:ph type="body" idx="1"/>
+          </p:nvPr>
+        </p:nvSpPr>
+        <p:spPr/>
+        <p:txBody>
+          <a:bodyPr/>
+          <a:lstStyle/>
+          <a:p>
+            <a:pPr marL="0" marR="0" lvl="0" indent="0" algn="l" defTabSz="914400" rtl="0" eaLnBrk="1" fontAlgn="auto" latinLnBrk="0" hangingPunct="1">
+              <a:lnSpc>
+                <a:spcPct val="100000"/>
+              </a:lnSpc>
+              <a:spcBef>
+                <a:spcPts val="0"/>
+              </a:spcBef>
+              <a:spcAft>
+                <a:spcPts val="0"/>
+              </a:spcAft>
+              <a:buClrTx/>
+              <a:buSzTx/>
+              <a:buFontTx/>
+              <a:buNone/>
+              <a:tabLst/>
+              <a:defRPr/>
+            </a:pPr>
+            <a:r>
+              <a:rPr lang="pt-BR" sz="1200" b="0" dirty="0">
+                <a:solidFill>
+                  <a:srgbClr val="00B0F0"/>
+                </a:solidFill>
+              </a:rPr>
+              <a:t>E</a:t>
+            </a:r>
+            <a:r>
+              <a:rPr lang="pt-BR" dirty="0"/>
+              <a:t>xemplo:</a:t>
+            </a:r>
+            <a:r>
+              <a:rPr lang="pt-BR" baseline="0" dirty="0"/>
+              <a:t> </a:t>
+            </a:r>
+            <a:r>
+              <a:rPr lang="pt-BR" dirty="0"/>
+              <a:t>https://colab.research.google.com/github/zz4fap/t320_aprendizado_de_maquina/blob/main/notebooks/clustering/kmeans_example.ipynb</a:t>
+            </a:r>
+          </a:p>
+          <a:p>
+            <a:pPr marL="0" marR="0" lvl="0" indent="0" algn="l" defTabSz="914400" rtl="0" eaLnBrk="1" fontAlgn="auto" latinLnBrk="0" hangingPunct="1">
+              <a:lnSpc>
+                <a:spcPct val="100000"/>
+              </a:lnSpc>
+              <a:spcBef>
+                <a:spcPts val="0"/>
+              </a:spcBef>
+              <a:spcAft>
+                <a:spcPts val="0"/>
+              </a:spcAft>
+              <a:buClrTx/>
+              <a:buSzTx/>
+              <a:buFontTx/>
+              <a:buNone/>
+              <a:tabLst/>
+              <a:defRPr/>
+            </a:pPr>
+            <a:endParaRPr lang="pt-BR" sz="1200" b="0" dirty="0">
+              <a:solidFill>
+                <a:srgbClr val="00B0F0"/>
+              </a:solidFill>
+            </a:endParaRPr>
+          </a:p>
+          <a:p>
+            <a:pPr marL="0" marR="0" lvl="0" indent="0" algn="l" defTabSz="914400" rtl="0" eaLnBrk="1" fontAlgn="auto" latinLnBrk="0" hangingPunct="1">
+              <a:lnSpc>
+                <a:spcPct val="100000"/>
+              </a:lnSpc>
+              <a:spcBef>
+                <a:spcPts val="0"/>
+              </a:spcBef>
+              <a:spcAft>
+                <a:spcPts val="0"/>
+              </a:spcAft>
+              <a:buClrTx/>
+              <a:buSzTx/>
+              <a:buFontTx/>
+              <a:buNone/>
+              <a:tabLst/>
+              <a:defRPr/>
+            </a:pPr>
+            <a:endParaRPr lang="pt-BR" sz="1200" b="0" dirty="0">
+              <a:solidFill>
+                <a:srgbClr val="00B0F0"/>
+              </a:solidFill>
+            </a:endParaRPr>
+          </a:p>
+          <a:p>
+            <a:r>
+              <a:rPr lang="pt-BR" dirty="0"/>
+              <a:t>Identificar o melhor número de clusters (</a:t>
+            </a:r>
+            <a:r>
+              <a:rPr lang="pt-BR" dirty="0" err="1"/>
+              <a:t>kk</a:t>
+            </a:r>
+            <a:r>
+              <a:rPr lang="pt-BR" dirty="0"/>
+              <a:t>) no K-</a:t>
+            </a:r>
+            <a:r>
+              <a:rPr lang="pt-BR" dirty="0" err="1"/>
+              <a:t>Means</a:t>
+            </a:r>
+            <a:r>
+              <a:rPr lang="pt-BR" dirty="0"/>
+              <a:t> é um passo fundamental para garantir a eficiência e a utilidade da clusterização. Existem várias abordagens para determinar o valor ideal de </a:t>
+            </a:r>
+            <a:r>
+              <a:rPr lang="pt-BR" dirty="0" err="1"/>
+              <a:t>kk</a:t>
+            </a:r>
+            <a:r>
+              <a:rPr lang="pt-BR" dirty="0"/>
+              <a:t>. As mais comuns incluem:</a:t>
+            </a:r>
+          </a:p>
+          <a:p>
+            <a:r>
+              <a:rPr lang="pt-BR" b="1" dirty="0"/>
+              <a:t>1. Método do Cotovelo (</a:t>
+            </a:r>
+            <a:r>
+              <a:rPr lang="pt-BR" b="1" dirty="0" err="1"/>
+              <a:t>Elbow</a:t>
+            </a:r>
+            <a:r>
+              <a:rPr lang="pt-BR" b="1" dirty="0"/>
+              <a:t> </a:t>
+            </a:r>
+            <a:r>
+              <a:rPr lang="pt-BR" b="1" dirty="0" err="1"/>
+              <a:t>Method</a:t>
+            </a:r>
+            <a:r>
+              <a:rPr lang="pt-BR" b="1" dirty="0"/>
+              <a:t>)</a:t>
+            </a:r>
+          </a:p>
+          <a:p>
+            <a:r>
+              <a:rPr lang="pt-BR" dirty="0"/>
+              <a:t>Este método analisa a variação da </a:t>
+            </a:r>
+            <a:r>
+              <a:rPr lang="pt-BR" b="1" dirty="0"/>
+              <a:t>inércia </a:t>
+            </a:r>
+            <a:r>
+              <a:rPr lang="pt-BR" b="1" dirty="0" err="1"/>
+              <a:t>intra-cluster</a:t>
+            </a:r>
+            <a:r>
+              <a:rPr lang="pt-BR" dirty="0"/>
+              <a:t> (ou soma dos erros quadráticos dentro dos clusters, WSSWSS) à medida que o número de clusters aumenta.</a:t>
+            </a:r>
+          </a:p>
+          <a:p>
+            <a:r>
+              <a:rPr lang="pt-BR" b="1" dirty="0"/>
+              <a:t>Passos:</a:t>
+            </a:r>
+          </a:p>
+          <a:p>
+            <a:pPr>
+              <a:buFont typeface="+mj-lt"/>
+              <a:buAutoNum type="arabicPeriod"/>
+            </a:pPr>
+            <a:r>
+              <a:rPr lang="pt-BR" dirty="0"/>
+              <a:t>Execute o K-</a:t>
+            </a:r>
+            <a:r>
+              <a:rPr lang="pt-BR" dirty="0" err="1"/>
+              <a:t>Means</a:t>
+            </a:r>
+            <a:r>
+              <a:rPr lang="pt-BR" dirty="0"/>
+              <a:t> com diferentes valores de </a:t>
+            </a:r>
+            <a:r>
+              <a:rPr lang="pt-BR" dirty="0" err="1"/>
+              <a:t>kk</a:t>
+            </a:r>
+            <a:r>
+              <a:rPr lang="pt-BR" dirty="0"/>
+              <a:t> (por exemplo, k=1k=1 a k=10k=10).</a:t>
+            </a:r>
+          </a:p>
+          <a:p>
+            <a:pPr>
+              <a:buFont typeface="+mj-lt"/>
+              <a:buAutoNum type="arabicPeriod"/>
+            </a:pPr>
+            <a:r>
+              <a:rPr lang="pt-BR" dirty="0"/>
+              <a:t>Calcule o WSSWSS para cada valor de </a:t>
+            </a:r>
+            <a:r>
+              <a:rPr lang="pt-BR" dirty="0" err="1"/>
+              <a:t>kk</a:t>
+            </a:r>
+            <a:r>
+              <a:rPr lang="pt-BR" dirty="0"/>
+              <a:t>.</a:t>
+            </a:r>
+          </a:p>
+          <a:p>
+            <a:pPr>
+              <a:buFont typeface="+mj-lt"/>
+              <a:buAutoNum type="arabicPeriod"/>
+            </a:pPr>
+            <a:r>
+              <a:rPr lang="pt-BR" dirty="0"/>
+              <a:t>Trace um gráfico do WSSWSS em função de </a:t>
+            </a:r>
+            <a:r>
+              <a:rPr lang="pt-BR" dirty="0" err="1"/>
+              <a:t>kk</a:t>
+            </a:r>
+            <a:r>
+              <a:rPr lang="pt-BR" dirty="0"/>
+              <a:t>.</a:t>
+            </a:r>
+          </a:p>
+          <a:p>
+            <a:pPr>
+              <a:buFont typeface="+mj-lt"/>
+              <a:buAutoNum type="arabicPeriod"/>
+            </a:pPr>
+            <a:r>
+              <a:rPr lang="pt-BR" dirty="0"/>
+              <a:t>Identifique o "cotovelo" no gráfico — o ponto onde a redução no WSSWSS se torna menos significativa.</a:t>
+            </a:r>
+          </a:p>
+          <a:p>
+            <a:r>
+              <a:rPr lang="pt-BR" b="1" dirty="0"/>
+              <a:t>Observação:</a:t>
+            </a:r>
+          </a:p>
+          <a:p>
+            <a:r>
+              <a:rPr lang="pt-BR" dirty="0"/>
+              <a:t>O "cotovelo" indica que aumentar </a:t>
+            </a:r>
+            <a:r>
+              <a:rPr lang="pt-BR" dirty="0" err="1"/>
+              <a:t>kk</a:t>
+            </a:r>
+            <a:r>
+              <a:rPr lang="pt-BR" dirty="0"/>
+              <a:t> além desse ponto não resulta em uma melhoria substancial na compactação dos clusters.</a:t>
+            </a:r>
+          </a:p>
+          <a:p>
+            <a:r>
+              <a:rPr lang="pt-BR" b="1" dirty="0"/>
+              <a:t>2. Coeficiente de Silhueta (</a:t>
+            </a:r>
+            <a:r>
+              <a:rPr lang="pt-BR" b="1" dirty="0" err="1"/>
+              <a:t>Silhouette</a:t>
+            </a:r>
+            <a:r>
+              <a:rPr lang="pt-BR" b="1" dirty="0"/>
+              <a:t> Score)</a:t>
+            </a:r>
+          </a:p>
+          <a:p>
+            <a:r>
+              <a:rPr lang="pt-BR" dirty="0"/>
+              <a:t>O coeficiente de silhueta avalia a </a:t>
+            </a:r>
+            <a:r>
+              <a:rPr lang="pt-BR" b="1" dirty="0"/>
+              <a:t>qualidade da clusterização</a:t>
+            </a:r>
+            <a:r>
+              <a:rPr lang="pt-BR" dirty="0"/>
+              <a:t>, considerando a coesão dentro dos clusters e a separação entre eles.</a:t>
+            </a:r>
+          </a:p>
+          <a:p>
+            <a:pPr>
+              <a:buFont typeface="Arial" panose="020B0604020202020204" pitchFamily="34" charset="0"/>
+              <a:buChar char="•"/>
+            </a:pPr>
+            <a:r>
+              <a:rPr lang="pt-BR" dirty="0"/>
+              <a:t>s=b−</a:t>
+            </a:r>
+            <a:r>
+              <a:rPr lang="pt-BR" dirty="0" err="1"/>
+              <a:t>amax</a:t>
+            </a:r>
+            <a:r>
+              <a:rPr lang="pt-BR" dirty="0"/>
+              <a:t>⁡(</a:t>
+            </a:r>
+            <a:r>
+              <a:rPr lang="pt-BR" dirty="0" err="1"/>
+              <a:t>a,b</a:t>
+            </a:r>
+            <a:r>
+              <a:rPr lang="pt-BR" dirty="0"/>
+              <a:t>)s = \</a:t>
+            </a:r>
+            <a:r>
+              <a:rPr lang="pt-BR" dirty="0" err="1"/>
+              <a:t>frac</a:t>
+            </a:r>
+            <a:r>
+              <a:rPr lang="pt-BR" dirty="0"/>
+              <a:t>{b - a}{\</a:t>
+            </a:r>
+            <a:r>
+              <a:rPr lang="pt-BR" dirty="0" err="1"/>
+              <a:t>max</a:t>
+            </a:r>
+            <a:r>
+              <a:rPr lang="pt-BR" dirty="0"/>
+              <a:t>(a, b)} aa: distância média de um ponto para os outros pontos do mesmo cluster.</a:t>
+            </a:r>
+          </a:p>
+          <a:p>
+            <a:pPr>
+              <a:buFont typeface="Arial" panose="020B0604020202020204" pitchFamily="34" charset="0"/>
+              <a:buChar char="•"/>
+            </a:pPr>
+            <a:r>
+              <a:rPr lang="pt-BR" dirty="0" err="1"/>
+              <a:t>bb</a:t>
+            </a:r>
+            <a:r>
+              <a:rPr lang="pt-BR" dirty="0"/>
+              <a:t>: distância média de um ponto para os pontos do cluster mais próximo.</a:t>
+            </a:r>
+          </a:p>
+          <a:p>
+            <a:r>
+              <a:rPr lang="pt-BR" b="1" dirty="0"/>
+              <a:t>Passos:</a:t>
+            </a:r>
+          </a:p>
+          <a:p>
+            <a:pPr>
+              <a:buFont typeface="+mj-lt"/>
+              <a:buAutoNum type="arabicPeriod"/>
+            </a:pPr>
+            <a:r>
+              <a:rPr lang="pt-BR" dirty="0"/>
+              <a:t>Execute o K-</a:t>
+            </a:r>
+            <a:r>
+              <a:rPr lang="pt-BR" dirty="0" err="1"/>
+              <a:t>Means</a:t>
+            </a:r>
+            <a:r>
+              <a:rPr lang="pt-BR" dirty="0"/>
+              <a:t> para diferentes valores de </a:t>
+            </a:r>
+            <a:r>
+              <a:rPr lang="pt-BR" dirty="0" err="1"/>
+              <a:t>kk</a:t>
+            </a:r>
+            <a:r>
+              <a:rPr lang="pt-BR" dirty="0"/>
+              <a:t>.</a:t>
+            </a:r>
+          </a:p>
+          <a:p>
+            <a:pPr>
+              <a:buFont typeface="+mj-lt"/>
+              <a:buAutoNum type="arabicPeriod"/>
+            </a:pPr>
+            <a:r>
+              <a:rPr lang="pt-BR" dirty="0"/>
+              <a:t>Calcule o coeficiente de silhueta para cada ponto e, em seguida, a média para o conjunto.</a:t>
+            </a:r>
+          </a:p>
+          <a:p>
+            <a:pPr>
+              <a:buFont typeface="+mj-lt"/>
+              <a:buAutoNum type="arabicPeriod"/>
+            </a:pPr>
+            <a:r>
+              <a:rPr lang="pt-BR" dirty="0"/>
+              <a:t>Escolha </a:t>
+            </a:r>
+            <a:r>
+              <a:rPr lang="pt-BR" dirty="0" err="1"/>
+              <a:t>kk</a:t>
+            </a:r>
+            <a:r>
+              <a:rPr lang="pt-BR" dirty="0"/>
+              <a:t> que maximize o valor médio do coeficiente de silhueta.</a:t>
+            </a:r>
+          </a:p>
+          <a:p>
+            <a:r>
+              <a:rPr lang="pt-BR" b="1" dirty="0"/>
+              <a:t>3. Critério Gap </a:t>
+            </a:r>
+            <a:r>
+              <a:rPr lang="pt-BR" b="1" dirty="0" err="1"/>
+              <a:t>Statistic</a:t>
+            </a:r>
+            <a:endParaRPr lang="pt-BR" b="1" dirty="0"/>
+          </a:p>
+          <a:p>
+            <a:r>
+              <a:rPr lang="pt-BR" dirty="0"/>
+              <a:t>Este método compara a dispersão dos clusters no conjunto de dados com uma dispersão esperada de um conjunto de dados gerado aleatoriamente.</a:t>
+            </a:r>
+          </a:p>
+          <a:p>
+            <a:r>
+              <a:rPr lang="pt-BR" b="1" dirty="0"/>
+              <a:t>Passos:</a:t>
+            </a:r>
+          </a:p>
+          <a:p>
+            <a:pPr>
+              <a:buFont typeface="+mj-lt"/>
+              <a:buAutoNum type="arabicPeriod"/>
+            </a:pPr>
+            <a:r>
+              <a:rPr lang="pt-BR" dirty="0"/>
+              <a:t>Execute o K-</a:t>
+            </a:r>
+            <a:r>
+              <a:rPr lang="pt-BR" dirty="0" err="1"/>
+              <a:t>Means</a:t>
+            </a:r>
+            <a:r>
+              <a:rPr lang="pt-BR" dirty="0"/>
+              <a:t> para diferentes valores de </a:t>
+            </a:r>
+            <a:r>
+              <a:rPr lang="pt-BR" dirty="0" err="1"/>
+              <a:t>kk</a:t>
+            </a:r>
+            <a:r>
+              <a:rPr lang="pt-BR" dirty="0"/>
+              <a:t> no conjunto de dados real.</a:t>
+            </a:r>
+          </a:p>
+          <a:p>
+            <a:pPr>
+              <a:buFont typeface="+mj-lt"/>
+              <a:buAutoNum type="arabicPeriod"/>
+            </a:pPr>
+            <a:r>
+              <a:rPr lang="pt-BR" dirty="0"/>
+              <a:t>Gere um conjunto de dados aleatório com a mesma distribuição e calcule a dispersão dos clusters.</a:t>
+            </a:r>
+          </a:p>
+          <a:p>
+            <a:pPr>
+              <a:buFont typeface="+mj-lt"/>
+              <a:buAutoNum type="arabicPeriod"/>
+            </a:pPr>
+            <a:r>
+              <a:rPr lang="pt-BR" dirty="0"/>
+              <a:t>Compare as dispersões e encontre </a:t>
+            </a:r>
+            <a:r>
+              <a:rPr lang="pt-BR" dirty="0" err="1"/>
+              <a:t>kk</a:t>
+            </a:r>
+            <a:r>
+              <a:rPr lang="pt-BR" dirty="0"/>
+              <a:t> que maximize a diferença (gap) entre os dois conjuntos.</a:t>
+            </a:r>
+          </a:p>
+          <a:p>
+            <a:r>
+              <a:rPr lang="pt-BR" b="1" dirty="0"/>
+              <a:t>4. Validação Cruzada</a:t>
+            </a:r>
+          </a:p>
+          <a:p>
+            <a:r>
+              <a:rPr lang="pt-BR" dirty="0"/>
+              <a:t>Divida o conjunto de dados em subconjuntos e avalie a consistência dos clusters em diferentes amostras.</a:t>
+            </a:r>
+          </a:p>
+          <a:p>
+            <a:r>
+              <a:rPr lang="pt-BR" b="1" dirty="0"/>
+              <a:t>5. Métodos Automáticos, como X-</a:t>
+            </a:r>
+            <a:r>
+              <a:rPr lang="pt-BR" b="1" dirty="0" err="1"/>
+              <a:t>Means</a:t>
+            </a:r>
+            <a:r>
+              <a:rPr lang="pt-BR" b="1" dirty="0"/>
+              <a:t> e G-</a:t>
+            </a:r>
+            <a:r>
+              <a:rPr lang="pt-BR" b="1" dirty="0" err="1"/>
+              <a:t>Means</a:t>
+            </a:r>
+            <a:endParaRPr lang="pt-BR" b="1" dirty="0"/>
+          </a:p>
+          <a:p>
+            <a:pPr>
+              <a:buFont typeface="Arial" panose="020B0604020202020204" pitchFamily="34" charset="0"/>
+              <a:buChar char="•"/>
+            </a:pPr>
+            <a:r>
+              <a:rPr lang="pt-BR" b="1" dirty="0"/>
+              <a:t>X-</a:t>
+            </a:r>
+            <a:r>
+              <a:rPr lang="pt-BR" b="1" dirty="0" err="1"/>
+              <a:t>Means</a:t>
+            </a:r>
+            <a:r>
+              <a:rPr lang="pt-BR" dirty="0"/>
+              <a:t>: Extensão do K-</a:t>
+            </a:r>
+            <a:r>
+              <a:rPr lang="pt-BR" dirty="0" err="1"/>
+              <a:t>Means</a:t>
+            </a:r>
+            <a:r>
+              <a:rPr lang="pt-BR" dirty="0"/>
+              <a:t> que escolhe automaticamente </a:t>
+            </a:r>
+            <a:r>
+              <a:rPr lang="pt-BR" dirty="0" err="1"/>
+              <a:t>kk</a:t>
+            </a:r>
+            <a:r>
+              <a:rPr lang="pt-BR" dirty="0"/>
+              <a:t> otimizando o critério Bayesiano.</a:t>
+            </a:r>
+          </a:p>
+          <a:p>
+            <a:pPr>
+              <a:buFont typeface="Arial" panose="020B0604020202020204" pitchFamily="34" charset="0"/>
+              <a:buChar char="•"/>
+            </a:pPr>
+            <a:r>
+              <a:rPr lang="pt-BR" b="1" dirty="0"/>
+              <a:t>G-</a:t>
+            </a:r>
+            <a:r>
+              <a:rPr lang="pt-BR" b="1" dirty="0" err="1"/>
+              <a:t>Means</a:t>
+            </a:r>
+            <a:r>
+              <a:rPr lang="pt-BR" dirty="0"/>
+              <a:t>: Usa testes estatísticos para determinar se os clusters seguem uma distribuição gaussiana.</a:t>
+            </a:r>
+          </a:p>
+          <a:p>
+            <a:r>
+              <a:rPr lang="pt-BR" b="1" dirty="0"/>
+              <a:t>Considerações:</a:t>
+            </a:r>
+          </a:p>
+          <a:p>
+            <a:pPr>
+              <a:buFont typeface="Arial" panose="020B0604020202020204" pitchFamily="34" charset="0"/>
+              <a:buChar char="•"/>
+            </a:pPr>
+            <a:r>
+              <a:rPr lang="pt-BR" b="1" dirty="0"/>
+              <a:t>Dimensão dos dados</a:t>
+            </a:r>
+            <a:r>
+              <a:rPr lang="pt-BR" dirty="0"/>
+              <a:t>: Em alta dimensionalidade, os métodos podem se tornar menos claros devido à maldição da dimensionalidade.</a:t>
+            </a:r>
+          </a:p>
+          <a:p>
+            <a:pPr>
+              <a:buFont typeface="Arial" panose="020B0604020202020204" pitchFamily="34" charset="0"/>
+              <a:buChar char="•"/>
+            </a:pPr>
+            <a:r>
+              <a:rPr lang="pt-BR" b="1" dirty="0"/>
+              <a:t>Interpretação</a:t>
+            </a:r>
+            <a:r>
+              <a:rPr lang="pt-BR" dirty="0"/>
+              <a:t>: O número de clusters deve fazer sentido no contexto do problema, além de ser estatisticamente válido.</a:t>
+            </a:r>
+          </a:p>
+          <a:p>
+            <a:r>
+              <a:rPr lang="pt-BR" dirty="0"/>
+              <a:t>Combinar múltiplos métodos pode ser útil para confirmar a escolha do melhor </a:t>
+            </a:r>
+            <a:r>
+              <a:rPr lang="pt-BR" dirty="0" err="1"/>
+              <a:t>kk</a:t>
+            </a:r>
+            <a:r>
+              <a:rPr lang="pt-BR" dirty="0"/>
+              <a:t>.</a:t>
+            </a:r>
+          </a:p>
+          <a:p>
+            <a:endParaRPr lang="en-US" dirty="0"/>
+          </a:p>
+        </p:txBody>
+      </p:sp>
+      <p:sp>
+        <p:nvSpPr>
+          <p:cNvPr id="4" name="Espaço Reservado para Número de Slide 3"/>
+          <p:cNvSpPr>
+            <a:spLocks noGrp="1"/>
+          </p:cNvSpPr>
+          <p:nvPr>
+            <p:ph type="sldNum" sz="quarter" idx="10"/>
+          </p:nvPr>
+        </p:nvSpPr>
+        <p:spPr/>
+        <p:txBody>
+          <a:bodyPr/>
+          <a:lstStyle/>
+          <a:p>
+            <a:fld id="{F430A2A4-8C14-4B1A-AD48-7B6401078BF7}" type="slidenum">
+              <a:rPr lang="pt-BR" smtClean="0"/>
+              <a:t>35</a:t>
+            </a:fld>
+            <a:endParaRPr lang="pt-BR"/>
+          </a:p>
+        </p:txBody>
+      </p:sp>
+    </p:spTree>
+    <p:extLst>
+      <p:ext uri="{BB962C8B-B14F-4D97-AF65-F5344CB8AC3E}">
+        <p14:creationId xmlns:p14="http://schemas.microsoft.com/office/powerpoint/2010/main" val="3992294165"/>
+      </p:ext>
+    </p:extLst>
+  </p:cSld>
+  <p:clrMapOvr>
+    <a:masterClrMapping/>
+  </p:clrMapOvr>
+</p:notes>
+</file>
+
+<file path=ppt/notesSlides/notesSlide14.xml><?xml version="1.0" encoding="utf-8"?>
+<p:notes xmlns:a="http://schemas.openxmlformats.org/drawingml/2006/main" xmlns:r="http://schemas.openxmlformats.org/officeDocument/2006/relationships" xmlns:p="http://schemas.openxmlformats.org/presentationml/2006/main">
+  <p:cSld>
+    <p:spTree>
+      <p:nvGrpSpPr>
+        <p:cNvPr id="1" name=""/>
+        <p:cNvGrpSpPr/>
+        <p:nvPr/>
+      </p:nvGrpSpPr>
+      <p:grpSpPr>
+        <a:xfrm>
+          <a:off x="0" y="0"/>
+          <a:ext cx="0" cy="0"/>
+          <a:chOff x="0" y="0"/>
+          <a:chExt cx="0" cy="0"/>
+        </a:xfrm>
+      </p:grpSpPr>
+      <p:sp>
+        <p:nvSpPr>
           <p:cNvPr id="2" name="Slide Image Placeholder 1"/>
           <p:cNvSpPr>
             <a:spLocks noGrp="1" noRot="1" noChangeAspect="1"/>
@@ -1435,7 +1605,7 @@
                 <a:hlinkClick r:id="rId3">
                   <a:extLst>
                     <a:ext uri="{A12FA001-AC4F-418D-AE19-62706E023703}">
-                      <ahyp:hlinkClr xmlns:ahyp="http://schemas.microsoft.com/office/drawing/2018/hyperlinkcolor" xmlns="" val="tx"/>
+                      <ahyp:hlinkClr xmlns:ahyp="http://schemas.microsoft.com/office/drawing/2018/hyperlinkcolor" val="tx"/>
                     </a:ext>
                   </a:extLst>
                 </a:hlinkClick>
@@ -1465,7 +1635,7 @@
           <a:p>
             <a:fld id="{6FC8D850-966F-45A6-8DE7-15B891E7D40D}" type="slidenum">
               <a:rPr lang="pt-BR" smtClean="0"/>
-              <a:t>35</a:t>
+              <a:t>38</a:t>
             </a:fld>
             <a:endParaRPr lang="pt-BR"/>
           </a:p>
@@ -1593,7 +1763,7 @@
         <p:cNvPr id="1" name="">
           <a:extLst>
             <a:ext uri="{FF2B5EF4-FFF2-40B4-BE49-F238E27FC236}">
-              <a16:creationId xmlns:a16="http://schemas.microsoft.com/office/drawing/2014/main" xmlns="" id="{BFE637E2-97BB-CFD3-DBB7-5EC561A4F1C5}"/>
+              <a16:creationId xmlns:a16="http://schemas.microsoft.com/office/drawing/2014/main" id="{BFE637E2-97BB-CFD3-DBB7-5EC561A4F1C5}"/>
             </a:ext>
           </a:extLst>
         </p:cNvPr>
@@ -1613,7 +1783,7 @@
           <p:cNvPr id="2" name="Slide Image Placeholder 1">
             <a:extLst>
               <a:ext uri="{FF2B5EF4-FFF2-40B4-BE49-F238E27FC236}">
-                <a16:creationId xmlns:a16="http://schemas.microsoft.com/office/drawing/2014/main" xmlns="" id="{4ED7BD22-361E-0DCE-46D8-42A9C128E592}"/>
+                <a16:creationId xmlns:a16="http://schemas.microsoft.com/office/drawing/2014/main" id="{4ED7BD22-361E-0DCE-46D8-42A9C128E592}"/>
               </a:ext>
             </a:extLst>
           </p:cNvPr>
@@ -1631,7 +1801,7 @@
           <p:cNvPr id="3" name="Notes Placeholder 2">
             <a:extLst>
               <a:ext uri="{FF2B5EF4-FFF2-40B4-BE49-F238E27FC236}">
-                <a16:creationId xmlns:a16="http://schemas.microsoft.com/office/drawing/2014/main" xmlns="" id="{A845AE5E-1008-C289-F444-04515B31A21D}"/>
+                <a16:creationId xmlns:a16="http://schemas.microsoft.com/office/drawing/2014/main" id="{A845AE5E-1008-C289-F444-04515B31A21D}"/>
               </a:ext>
             </a:extLst>
           </p:cNvPr>
@@ -1709,7 +1879,7 @@
           <p:cNvPr id="4" name="Slide Number Placeholder 3">
             <a:extLst>
               <a:ext uri="{FF2B5EF4-FFF2-40B4-BE49-F238E27FC236}">
-                <a16:creationId xmlns:a16="http://schemas.microsoft.com/office/drawing/2014/main" xmlns="" id="{64C5BAB2-4C6F-96F0-D4ED-0C66FFB4872B}"/>
+                <a16:creationId xmlns:a16="http://schemas.microsoft.com/office/drawing/2014/main" id="{64C5BAB2-4C6F-96F0-D4ED-0C66FFB4872B}"/>
               </a:ext>
             </a:extLst>
           </p:cNvPr>
@@ -2722,7 +2892,7 @@
         <p:cNvPr id="1" name="">
           <a:extLst>
             <a:ext uri="{FF2B5EF4-FFF2-40B4-BE49-F238E27FC236}">
-              <a16:creationId xmlns:a16="http://schemas.microsoft.com/office/drawing/2014/main" xmlns="" id="{D98F69D2-AA2F-1FAB-FC58-E17B9F051FEC}"/>
+              <a16:creationId xmlns:a16="http://schemas.microsoft.com/office/drawing/2014/main" id="{D98F69D2-AA2F-1FAB-FC58-E17B9F051FEC}"/>
             </a:ext>
           </a:extLst>
         </p:cNvPr>
@@ -2742,7 +2912,7 @@
           <p:cNvPr id="2" name="Espaço Reservado para Imagem de Slide 1">
             <a:extLst>
               <a:ext uri="{FF2B5EF4-FFF2-40B4-BE49-F238E27FC236}">
-                <a16:creationId xmlns:a16="http://schemas.microsoft.com/office/drawing/2014/main" xmlns="" id="{BFA38404-D7C9-03F2-A7E5-10C0EFC8F190}"/>
+                <a16:creationId xmlns:a16="http://schemas.microsoft.com/office/drawing/2014/main" id="{BFA38404-D7C9-03F2-A7E5-10C0EFC8F190}"/>
               </a:ext>
             </a:extLst>
           </p:cNvPr>
@@ -2760,7 +2930,7 @@
           <p:cNvPr id="3" name="Espaço Reservado para Anotações 2">
             <a:extLst>
               <a:ext uri="{FF2B5EF4-FFF2-40B4-BE49-F238E27FC236}">
-                <a16:creationId xmlns:a16="http://schemas.microsoft.com/office/drawing/2014/main" xmlns="" id="{5A8313F1-5D52-52B4-46D0-20D6D6D5149A}"/>
+                <a16:creationId xmlns:a16="http://schemas.microsoft.com/office/drawing/2014/main" id="{5A8313F1-5D52-52B4-46D0-20D6D6D5149A}"/>
               </a:ext>
             </a:extLst>
           </p:cNvPr>
@@ -2878,7 +3048,7 @@
           <p:cNvPr id="4" name="Espaço Reservado para Número de Slide 3">
             <a:extLst>
               <a:ext uri="{FF2B5EF4-FFF2-40B4-BE49-F238E27FC236}">
-                <a16:creationId xmlns:a16="http://schemas.microsoft.com/office/drawing/2014/main" xmlns="" id="{428A95A6-CC49-168A-C37A-1C6EB3B93225}"/>
+                <a16:creationId xmlns:a16="http://schemas.microsoft.com/office/drawing/2014/main" id="{428A95A6-CC49-168A-C37A-1C6EB3B93225}"/>
               </a:ext>
             </a:extLst>
           </p:cNvPr>
@@ -3500,7 +3670,7 @@
           <a:p>
             <a:fld id="{221D0464-8C8A-49C0-859F-777E51766A35}" type="datetimeFigureOut">
               <a:rPr lang="pt-BR" smtClean="0"/>
-              <a:t>08/04/2026</a:t>
+              <a:t>09/04/2026</a:t>
             </a:fld>
             <a:endParaRPr lang="pt-BR"/>
           </a:p>
@@ -3542,7 +3712,7 @@
           <a:p>
             <a:fld id="{5CB2E8FC-741C-4BF1-B071-7D772D706EF9}" type="slidenum">
               <a:rPr lang="pt-BR" smtClean="0"/>
-              <a:t>‹nº›</a:t>
+              <a:t>‹#›</a:t>
             </a:fld>
             <a:endParaRPr lang="pt-BR"/>
           </a:p>
@@ -3670,7 +3840,7 @@
           <a:p>
             <a:fld id="{221D0464-8C8A-49C0-859F-777E51766A35}" type="datetimeFigureOut">
               <a:rPr lang="pt-BR" smtClean="0"/>
-              <a:t>08/04/2026</a:t>
+              <a:t>09/04/2026</a:t>
             </a:fld>
             <a:endParaRPr lang="pt-BR"/>
           </a:p>
@@ -3712,7 +3882,7 @@
           <a:p>
             <a:fld id="{5CB2E8FC-741C-4BF1-B071-7D772D706EF9}" type="slidenum">
               <a:rPr lang="pt-BR" smtClean="0"/>
-              <a:t>‹nº›</a:t>
+              <a:t>‹#›</a:t>
             </a:fld>
             <a:endParaRPr lang="pt-BR"/>
           </a:p>
@@ -3850,7 +4020,7 @@
           <a:p>
             <a:fld id="{221D0464-8C8A-49C0-859F-777E51766A35}" type="datetimeFigureOut">
               <a:rPr lang="pt-BR" smtClean="0"/>
-              <a:t>08/04/2026</a:t>
+              <a:t>09/04/2026</a:t>
             </a:fld>
             <a:endParaRPr lang="pt-BR"/>
           </a:p>
@@ -3892,7 +4062,7 @@
           <a:p>
             <a:fld id="{5CB2E8FC-741C-4BF1-B071-7D772D706EF9}" type="slidenum">
               <a:rPr lang="pt-BR" smtClean="0"/>
-              <a:t>‹nº›</a:t>
+              <a:t>‹#›</a:t>
             </a:fld>
             <a:endParaRPr lang="pt-BR"/>
           </a:p>
@@ -4020,7 +4190,7 @@
           <a:p>
             <a:fld id="{221D0464-8C8A-49C0-859F-777E51766A35}" type="datetimeFigureOut">
               <a:rPr lang="pt-BR" smtClean="0"/>
-              <a:t>08/04/2026</a:t>
+              <a:t>09/04/2026</a:t>
             </a:fld>
             <a:endParaRPr lang="pt-BR"/>
           </a:p>
@@ -4062,7 +4232,7 @@
           <a:p>
             <a:fld id="{5CB2E8FC-741C-4BF1-B071-7D772D706EF9}" type="slidenum">
               <a:rPr lang="pt-BR" smtClean="0"/>
-              <a:t>‹nº›</a:t>
+              <a:t>‹#›</a:t>
             </a:fld>
             <a:endParaRPr lang="pt-BR"/>
           </a:p>
@@ -4266,7 +4436,7 @@
           <a:p>
             <a:fld id="{221D0464-8C8A-49C0-859F-777E51766A35}" type="datetimeFigureOut">
               <a:rPr lang="pt-BR" smtClean="0"/>
-              <a:t>08/04/2026</a:t>
+              <a:t>09/04/2026</a:t>
             </a:fld>
             <a:endParaRPr lang="pt-BR"/>
           </a:p>
@@ -4308,7 +4478,7 @@
           <a:p>
             <a:fld id="{5CB2E8FC-741C-4BF1-B071-7D772D706EF9}" type="slidenum">
               <a:rPr lang="pt-BR" smtClean="0"/>
-              <a:t>‹nº›</a:t>
+              <a:t>‹#›</a:t>
             </a:fld>
             <a:endParaRPr lang="pt-BR"/>
           </a:p>
@@ -4498,7 +4668,7 @@
           <a:p>
             <a:fld id="{221D0464-8C8A-49C0-859F-777E51766A35}" type="datetimeFigureOut">
               <a:rPr lang="pt-BR" smtClean="0"/>
-              <a:t>08/04/2026</a:t>
+              <a:t>09/04/2026</a:t>
             </a:fld>
             <a:endParaRPr lang="pt-BR"/>
           </a:p>
@@ -4540,7 +4710,7 @@
           <a:p>
             <a:fld id="{5CB2E8FC-741C-4BF1-B071-7D772D706EF9}" type="slidenum">
               <a:rPr lang="pt-BR" smtClean="0"/>
-              <a:t>‹nº›</a:t>
+              <a:t>‹#›</a:t>
             </a:fld>
             <a:endParaRPr lang="pt-BR"/>
           </a:p>
@@ -4865,7 +5035,7 @@
           <a:p>
             <a:fld id="{221D0464-8C8A-49C0-859F-777E51766A35}" type="datetimeFigureOut">
               <a:rPr lang="pt-BR" smtClean="0"/>
-              <a:t>08/04/2026</a:t>
+              <a:t>09/04/2026</a:t>
             </a:fld>
             <a:endParaRPr lang="pt-BR"/>
           </a:p>
@@ -4907,7 +5077,7 @@
           <a:p>
             <a:fld id="{5CB2E8FC-741C-4BF1-B071-7D772D706EF9}" type="slidenum">
               <a:rPr lang="pt-BR" smtClean="0"/>
-              <a:t>‹nº›</a:t>
+              <a:t>‹#›</a:t>
             </a:fld>
             <a:endParaRPr lang="pt-BR"/>
           </a:p>
@@ -4983,7 +5153,7 @@
           <a:p>
             <a:fld id="{221D0464-8C8A-49C0-859F-777E51766A35}" type="datetimeFigureOut">
               <a:rPr lang="pt-BR" smtClean="0"/>
-              <a:t>08/04/2026</a:t>
+              <a:t>09/04/2026</a:t>
             </a:fld>
             <a:endParaRPr lang="pt-BR"/>
           </a:p>
@@ -5025,7 +5195,7 @@
           <a:p>
             <a:fld id="{5CB2E8FC-741C-4BF1-B071-7D772D706EF9}" type="slidenum">
               <a:rPr lang="pt-BR" smtClean="0"/>
-              <a:t>‹nº›</a:t>
+              <a:t>‹#›</a:t>
             </a:fld>
             <a:endParaRPr lang="pt-BR"/>
           </a:p>
@@ -5078,7 +5248,7 @@
           <a:p>
             <a:fld id="{221D0464-8C8A-49C0-859F-777E51766A35}" type="datetimeFigureOut">
               <a:rPr lang="pt-BR" smtClean="0"/>
-              <a:t>08/04/2026</a:t>
+              <a:t>09/04/2026</a:t>
             </a:fld>
             <a:endParaRPr lang="pt-BR"/>
           </a:p>
@@ -5120,7 +5290,7 @@
           <a:p>
             <a:fld id="{5CB2E8FC-741C-4BF1-B071-7D772D706EF9}" type="slidenum">
               <a:rPr lang="pt-BR" smtClean="0"/>
-              <a:t>‹nº›</a:t>
+              <a:t>‹#›</a:t>
             </a:fld>
             <a:endParaRPr lang="pt-BR"/>
           </a:p>
@@ -5355,7 +5525,7 @@
           <a:p>
             <a:fld id="{221D0464-8C8A-49C0-859F-777E51766A35}" type="datetimeFigureOut">
               <a:rPr lang="pt-BR" smtClean="0"/>
-              <a:t>08/04/2026</a:t>
+              <a:t>09/04/2026</a:t>
             </a:fld>
             <a:endParaRPr lang="pt-BR"/>
           </a:p>
@@ -5397,7 +5567,7 @@
           <a:p>
             <a:fld id="{5CB2E8FC-741C-4BF1-B071-7D772D706EF9}" type="slidenum">
               <a:rPr lang="pt-BR" smtClean="0"/>
-              <a:t>‹nº›</a:t>
+              <a:t>‹#›</a:t>
             </a:fld>
             <a:endParaRPr lang="pt-BR"/>
           </a:p>
@@ -5608,7 +5778,7 @@
           <a:p>
             <a:fld id="{221D0464-8C8A-49C0-859F-777E51766A35}" type="datetimeFigureOut">
               <a:rPr lang="pt-BR" smtClean="0"/>
-              <a:t>08/04/2026</a:t>
+              <a:t>09/04/2026</a:t>
             </a:fld>
             <a:endParaRPr lang="pt-BR"/>
           </a:p>
@@ -5650,7 +5820,7 @@
           <a:p>
             <a:fld id="{5CB2E8FC-741C-4BF1-B071-7D772D706EF9}" type="slidenum">
               <a:rPr lang="pt-BR" smtClean="0"/>
-              <a:t>‹nº›</a:t>
+              <a:t>‹#›</a:t>
             </a:fld>
             <a:endParaRPr lang="pt-BR"/>
           </a:p>
@@ -5821,7 +5991,7 @@
           <a:p>
             <a:fld id="{221D0464-8C8A-49C0-859F-777E51766A35}" type="datetimeFigureOut">
               <a:rPr lang="pt-BR" smtClean="0"/>
-              <a:t>08/04/2026</a:t>
+              <a:t>09/04/2026</a:t>
             </a:fld>
             <a:endParaRPr lang="pt-BR"/>
           </a:p>
@@ -5899,7 +6069,7 @@
           <a:p>
             <a:fld id="{5CB2E8FC-741C-4BF1-B071-7D772D706EF9}" type="slidenum">
               <a:rPr lang="pt-BR" smtClean="0"/>
-              <a:t>‹nº›</a:t>
+              <a:t>‹#›</a:t>
             </a:fld>
             <a:endParaRPr lang="pt-BR"/>
           </a:p>
@@ -6231,7 +6401,7 @@
           <p:cNvPr id="4" name="CaixaDeTexto 3">
             <a:extLst>
               <a:ext uri="{FF2B5EF4-FFF2-40B4-BE49-F238E27FC236}">
-                <a16:creationId xmlns:a16="http://schemas.microsoft.com/office/drawing/2014/main" xmlns="" id="{430EB894-B7D4-434C-9D1A-A14094D9BEEC}"/>
+                <a16:creationId xmlns:a16="http://schemas.microsoft.com/office/drawing/2014/main" id="{430EB894-B7D4-434C-9D1A-A14094D9BEEC}"/>
               </a:ext>
             </a:extLst>
           </p:cNvPr>
@@ -6264,7 +6434,7 @@
               <a:rPr lang="pt-BR" dirty="0">
                 <a:hlinkClick r:id="rId3"/>
               </a:rPr>
-              <a:t>felipe.figueiredo@Inatel.br</a:t>
+              <a:t>felipe.figueiredo@inatel.br</a:t>
             </a:r>
             <a:endParaRPr lang="pt-BR" dirty="0"/>
           </a:p>
@@ -6275,7 +6445,7 @@
           <p:cNvPr id="1026" name="Picture 2" descr="Logo">
             <a:extLst>
               <a:ext uri="{FF2B5EF4-FFF2-40B4-BE49-F238E27FC236}">
-                <a16:creationId xmlns:a16="http://schemas.microsoft.com/office/drawing/2014/main" xmlns="" id="{3F2642E0-4F6A-4196-8F58-E77D36E9A33F}"/>
+                <a16:creationId xmlns:a16="http://schemas.microsoft.com/office/drawing/2014/main" id="{3F2642E0-4F6A-4196-8F58-E77D36E9A33F}"/>
               </a:ext>
             </a:extLst>
           </p:cNvPr>
@@ -6320,7 +6490,7 @@
           <p:cNvPr id="5122" name="Picture 2" descr="Image result for machine learning">
             <a:extLst>
               <a:ext uri="{FF2B5EF4-FFF2-40B4-BE49-F238E27FC236}">
-                <a16:creationId xmlns:a16="http://schemas.microsoft.com/office/drawing/2014/main" xmlns="" id="{810CE0A2-4102-44A6-A370-175E7896CDCB}"/>
+                <a16:creationId xmlns:a16="http://schemas.microsoft.com/office/drawing/2014/main" id="{810CE0A2-4102-44A6-A370-175E7896CDCB}"/>
               </a:ext>
             </a:extLst>
           </p:cNvPr>
@@ -6365,7 +6535,7 @@
           <p:cNvPr id="7" name="Título 1">
             <a:extLst>
               <a:ext uri="{FF2B5EF4-FFF2-40B4-BE49-F238E27FC236}">
-                <a16:creationId xmlns:a16="http://schemas.microsoft.com/office/drawing/2014/main" xmlns="" id="{32666AC8-2E17-4DB4-B0F5-60C640CCFD2E}"/>
+                <a16:creationId xmlns:a16="http://schemas.microsoft.com/office/drawing/2014/main" id="{32666AC8-2E17-4DB4-B0F5-60C640CCFD2E}"/>
               </a:ext>
             </a:extLst>
           </p:cNvPr>
@@ -6391,10 +6561,6 @@
             <a:r>
               <a:rPr lang="pt-BR" sz="6600" dirty="0"/>
               <a:t>C24 - Inteligência Artificial:</a:t>
-            </a:r>
-            <a:r>
-              <a:rPr lang="pt-BR" sz="7200" dirty="0"/>
-              <a:t/>
             </a:r>
             <a:br>
               <a:rPr lang="pt-BR" sz="7200" dirty="0"/>
@@ -6446,7 +6612,7 @@
           <p:cNvPr id="2" name="Title 1">
             <a:extLst>
               <a:ext uri="{FF2B5EF4-FFF2-40B4-BE49-F238E27FC236}">
-                <a16:creationId xmlns:a16="http://schemas.microsoft.com/office/drawing/2014/main" xmlns="" id="{FFE84507-EC77-45EC-8B3A-27BFC439AB0A}"/>
+                <a16:creationId xmlns:a16="http://schemas.microsoft.com/office/drawing/2014/main" id="{FFE84507-EC77-45EC-8B3A-27BFC439AB0A}"/>
               </a:ext>
             </a:extLst>
           </p:cNvPr>
@@ -6475,7 +6641,7 @@
           <p:cNvPr id="3" name="Content Placeholder 2">
             <a:extLst>
               <a:ext uri="{FF2B5EF4-FFF2-40B4-BE49-F238E27FC236}">
-                <a16:creationId xmlns:a16="http://schemas.microsoft.com/office/drawing/2014/main" xmlns="" id="{04FEB374-1415-DA51-E59A-B5E50D17F763}"/>
+                <a16:creationId xmlns:a16="http://schemas.microsoft.com/office/drawing/2014/main" id="{04FEB374-1415-DA51-E59A-B5E50D17F763}"/>
               </a:ext>
             </a:extLst>
           </p:cNvPr>
@@ -6728,7 +6894,7 @@
         <p:cNvPr id="1" name="">
           <a:extLst>
             <a:ext uri="{FF2B5EF4-FFF2-40B4-BE49-F238E27FC236}">
-              <a16:creationId xmlns:a16="http://schemas.microsoft.com/office/drawing/2014/main" xmlns="" id="{5B00F73A-8390-7530-E708-9D3EBFB35B37}"/>
+              <a16:creationId xmlns:a16="http://schemas.microsoft.com/office/drawing/2014/main" id="{5B00F73A-8390-7530-E708-9D3EBFB35B37}"/>
             </a:ext>
           </a:extLst>
         </p:cNvPr>
@@ -6748,7 +6914,7 @@
           <p:cNvPr id="2" name="Título 1">
             <a:extLst>
               <a:ext uri="{FF2B5EF4-FFF2-40B4-BE49-F238E27FC236}">
-                <a16:creationId xmlns:a16="http://schemas.microsoft.com/office/drawing/2014/main" xmlns="" id="{A7779880-5E02-1DB8-EA94-C86330794A8C}"/>
+                <a16:creationId xmlns:a16="http://schemas.microsoft.com/office/drawing/2014/main" id="{A7779880-5E02-1DB8-EA94-C86330794A8C}"/>
               </a:ext>
             </a:extLst>
           </p:cNvPr>
@@ -6802,7 +6968,7 @@
               <p:cNvPr id="3" name="Espaço Reservado para Conteúdo 2">
                 <a:extLst>
                   <a:ext uri="{FF2B5EF4-FFF2-40B4-BE49-F238E27FC236}">
-                    <a16:creationId xmlns:a16="http://schemas.microsoft.com/office/drawing/2014/main" xmlns="" id="{A72472E5-6211-3EFD-BA89-06782640C939}"/>
+                    <a16:creationId xmlns:a16="http://schemas.microsoft.com/office/drawing/2014/main" id="{A72472E5-6211-3EFD-BA89-06782640C939}"/>
                   </a:ext>
                 </a:extLst>
               </p:cNvPr>
@@ -6911,18 +7077,14 @@
               <a:p>
                 <a:r>
                   <a:rPr lang="pt-BR" dirty="0"/>
-                  <a:t>Nesse caso, </a:t>
+                  <a:t>Nesse caso, se elas pertencem a um </a:t>
                 </a:r>
                 <a:r>
-                  <a:rPr lang="pt-BR" dirty="0" smtClean="0"/>
-                  <a:t>se elas pertencem a um </a:t>
-                </a:r>
-                <a:r>
-                  <a:rPr lang="pt-BR" i="1" dirty="0" smtClean="0"/>
+                  <a:rPr lang="pt-BR" i="1" dirty="0"/>
                   <a:t>cluster</a:t>
                 </a:r>
                 <a:r>
-                  <a:rPr lang="pt-BR" dirty="0" smtClean="0"/>
+                  <a:rPr lang="pt-BR" dirty="0"/>
                   <a:t>, seu </a:t>
                 </a:r>
                 <a:r>
@@ -7164,7 +7326,7 @@
           <p:cNvPr id="4" name="Picture 3" descr="K Means Clustering no Aprendizado de Máquinas — Aprendizado de Máquina —  DATA SCIENCE">
             <a:extLst>
               <a:ext uri="{FF2B5EF4-FFF2-40B4-BE49-F238E27FC236}">
-                <a16:creationId xmlns:a16="http://schemas.microsoft.com/office/drawing/2014/main" xmlns="" id="{E728BEA3-C89C-08D5-CE28-8BD1C00DAD53}"/>
+                <a16:creationId xmlns:a16="http://schemas.microsoft.com/office/drawing/2014/main" id="{E728BEA3-C89C-08D5-CE28-8BD1C00DAD53}"/>
               </a:ext>
             </a:extLst>
           </p:cNvPr>
@@ -7301,20 +7463,16 @@
             </a:r>
             <a:r>
               <a:rPr lang="pt-BR" b="1" dirty="0"/>
-              <a:t>não devem se </a:t>
-            </a:r>
-            <a:r>
-              <a:rPr lang="pt-BR" b="1" dirty="0" smtClean="0"/>
-              <a:t>sobrepor</a:t>
-            </a:r>
-            <a:r>
-              <a:rPr lang="pt-BR" dirty="0" smtClean="0"/>
+              <a:t>não devem se sobrepor</a:t>
+            </a:r>
+            <a:r>
+              <a:rPr lang="pt-BR" dirty="0"/>
               <a:t>.</a:t>
             </a:r>
           </a:p>
           <a:p>
             <a:r>
-              <a:rPr lang="pt-BR" b="1" dirty="0" smtClean="0">
+              <a:rPr lang="pt-BR" b="1" dirty="0">
                 <a:solidFill>
                   <a:srgbClr val="00B050"/>
                 </a:solidFill>
@@ -7322,7 +7480,7 @@
               <a:t>Cada amostra </a:t>
             </a:r>
             <a:r>
-              <a:rPr lang="pt-BR" dirty="0" smtClean="0"/>
+              <a:rPr lang="pt-BR" dirty="0"/>
               <a:t>deve </a:t>
             </a:r>
             <a:r>
@@ -7343,23 +7501,7 @@
                   <a:srgbClr val="00B050"/>
                 </a:solidFill>
               </a:rPr>
-              <a:t>um e </a:t>
-            </a:r>
-            <a:r>
-              <a:rPr lang="pt-BR" b="1" dirty="0" smtClean="0">
-                <a:solidFill>
-                  <a:srgbClr val="00B050"/>
-                </a:solidFill>
-              </a:rPr>
-              <a:t>apenas </a:t>
-            </a:r>
-            <a:r>
-              <a:rPr lang="pt-BR" b="1" dirty="0">
-                <a:solidFill>
-                  <a:srgbClr val="00B050"/>
-                </a:solidFill>
-              </a:rPr>
-              <a:t>um </a:t>
+              <a:t>um e apenas um </a:t>
             </a:r>
             <a:r>
               <a:rPr lang="pt-BR" b="1" i="1" dirty="0">
@@ -7389,14 +7531,10 @@
             </a:r>
             <a:r>
               <a:rPr lang="pt-BR" dirty="0"/>
-              <a:t>, </a:t>
-            </a:r>
-            <a:r>
-              <a:rPr lang="pt-BR" dirty="0" smtClean="0"/>
-              <a:t>as </a:t>
-            </a:r>
-            <a:r>
-              <a:rPr lang="pt-BR" b="1" dirty="0" smtClean="0">
+              <a:t>, as </a:t>
+            </a:r>
+            <a:r>
+              <a:rPr lang="pt-BR" b="1" dirty="0">
                 <a:solidFill>
                   <a:srgbClr val="0070C0"/>
                 </a:solidFill>
@@ -7404,15 +7542,11 @@
               <a:t>amostras </a:t>
             </a:r>
             <a:r>
-              <a:rPr lang="pt-BR" dirty="0" smtClean="0"/>
-              <a:t>devem </a:t>
-            </a:r>
-            <a:r>
-              <a:rPr lang="pt-BR" dirty="0"/>
-              <a:t>estar relativamente </a:t>
-            </a:r>
-            <a:r>
-              <a:rPr lang="pt-BR" b="1" dirty="0" smtClean="0">
+              <a:rPr lang="pt-BR" dirty="0"/>
+              <a:t>devem estar relativamente </a:t>
+            </a:r>
+            <a:r>
+              <a:rPr lang="pt-BR" b="1" dirty="0">
                 <a:solidFill>
                   <a:srgbClr val="0070C0"/>
                 </a:solidFill>
@@ -7420,12 +7554,8 @@
               <a:t>próximas</a:t>
             </a:r>
             <a:r>
-              <a:rPr lang="pt-BR" dirty="0" smtClean="0"/>
-              <a:t> umas das outras </a:t>
-            </a:r>
-            <a:r>
-              <a:rPr lang="pt-BR" dirty="0"/>
-              <a:t>e </a:t>
+              <a:rPr lang="pt-BR" dirty="0"/>
+              <a:t> umas das outras e </a:t>
             </a:r>
             <a:r>
               <a:rPr lang="pt-BR" b="1" dirty="0">
@@ -7437,19 +7567,7 @@
             </a:r>
             <a:r>
               <a:rPr lang="pt-BR" dirty="0"/>
-              <a:t> </a:t>
-            </a:r>
-            <a:r>
-              <a:rPr lang="pt-BR" dirty="0" smtClean="0"/>
-              <a:t>das </a:t>
-            </a:r>
-            <a:r>
-              <a:rPr lang="pt-BR" b="1" dirty="0" smtClean="0">
-                <a:solidFill>
-                  <a:srgbClr val="7030A0"/>
-                </a:solidFill>
-              </a:rPr>
-              <a:t>amostras dos </a:t>
+              <a:t> das </a:t>
             </a:r>
             <a:r>
               <a:rPr lang="pt-BR" b="1" dirty="0">
@@ -7457,7 +7575,7 @@
                   <a:srgbClr val="7030A0"/>
                 </a:solidFill>
               </a:rPr>
-              <a:t>outros </a:t>
+              <a:t>amostras dos outros </a:t>
             </a:r>
             <a:r>
               <a:rPr lang="pt-BR" b="1" i="1" dirty="0">
@@ -7468,7 +7586,7 @@
               <a:t>clusters</a:t>
             </a:r>
             <a:r>
-              <a:rPr lang="pt-BR" dirty="0" smtClean="0"/>
+              <a:rPr lang="pt-BR" dirty="0"/>
               <a:t>.</a:t>
             </a:r>
           </a:p>
@@ -7489,13 +7607,8 @@
             </a:r>
             <a:r>
               <a:rPr lang="pt-BR" dirty="0"/>
-              <a:t> um conjunto de dados contém</a:t>
-            </a:r>
-            <a:r>
-              <a:rPr lang="pt-BR" dirty="0" smtClean="0"/>
-              <a:t>?</a:t>
-            </a:r>
-            <a:endParaRPr lang="pt-BR" dirty="0"/>
+              <a:t> um conjunto de dados contém?</a:t>
+            </a:r>
           </a:p>
         </p:txBody>
       </p:sp>
@@ -7559,7 +7672,7 @@
         <p:cNvPr id="1" name="">
           <a:extLst>
             <a:ext uri="{FF2B5EF4-FFF2-40B4-BE49-F238E27FC236}">
-              <a16:creationId xmlns:a16="http://schemas.microsoft.com/office/drawing/2014/main" xmlns="" id="{36D1FDFF-84F9-A395-CDB0-AC77470C24F7}"/>
+              <a16:creationId xmlns:a16="http://schemas.microsoft.com/office/drawing/2014/main" id="{36D1FDFF-84F9-A395-CDB0-AC77470C24F7}"/>
             </a:ext>
           </a:extLst>
         </p:cNvPr>
@@ -7579,7 +7692,7 @@
           <p:cNvPr id="2" name="Título 1">
             <a:extLst>
               <a:ext uri="{FF2B5EF4-FFF2-40B4-BE49-F238E27FC236}">
-                <a16:creationId xmlns:a16="http://schemas.microsoft.com/office/drawing/2014/main" xmlns="" id="{CA82907A-6417-D3C2-265A-0FFD53046E99}"/>
+                <a16:creationId xmlns:a16="http://schemas.microsoft.com/office/drawing/2014/main" id="{CA82907A-6417-D3C2-265A-0FFD53046E99}"/>
               </a:ext>
             </a:extLst>
           </p:cNvPr>
@@ -7616,7 +7729,7 @@
           <p:cNvPr id="3" name="Espaço Reservado para Conteúdo 2">
             <a:extLst>
               <a:ext uri="{FF2B5EF4-FFF2-40B4-BE49-F238E27FC236}">
-                <a16:creationId xmlns:a16="http://schemas.microsoft.com/office/drawing/2014/main" xmlns="" id="{3C767761-7363-3966-1F66-B32029649DCD}"/>
+                <a16:creationId xmlns:a16="http://schemas.microsoft.com/office/drawing/2014/main" id="{3C767761-7363-3966-1F66-B32029649DCD}"/>
               </a:ext>
             </a:extLst>
           </p:cNvPr>
@@ -7667,13 +7780,8 @@
             </a:pPr>
             <a:r>
               <a:rPr lang="pt-BR" dirty="0"/>
-              <a:t>no outro, cada exemplo pode ser visto como representando seu próprio cluster de um único exemplo</a:t>
-            </a:r>
-            <a:r>
-              <a:rPr lang="pt-BR" dirty="0" smtClean="0"/>
-              <a:t>.</a:t>
-            </a:r>
-            <a:endParaRPr lang="pt-BR" dirty="0"/>
+              <a:t>no outro, cada exemplo pode ser visto como representando seu próprio cluster de um único exemplo.</a:t>
+            </a:r>
           </a:p>
         </p:txBody>
       </p:sp>
@@ -7682,7 +7790,7 @@
           <p:cNvPr id="5" name="Picture 2" descr="K-Means Clustering using Python. Welcome back guys! Hope you had a great… |  by Luigi Fiori | Medium">
             <a:extLst>
               <a:ext uri="{FF2B5EF4-FFF2-40B4-BE49-F238E27FC236}">
-                <a16:creationId xmlns:a16="http://schemas.microsoft.com/office/drawing/2014/main" xmlns="" id="{079377DD-55D2-BED3-3BB3-D573A6F13921}"/>
+                <a16:creationId xmlns:a16="http://schemas.microsoft.com/office/drawing/2014/main" id="{079377DD-55D2-BED3-3BB3-D573A6F13921}"/>
               </a:ext>
             </a:extLst>
           </p:cNvPr>
@@ -7743,7 +7851,7 @@
         <p:cNvPr id="1" name="">
           <a:extLst>
             <a:ext uri="{FF2B5EF4-FFF2-40B4-BE49-F238E27FC236}">
-              <a16:creationId xmlns:a16="http://schemas.microsoft.com/office/drawing/2014/main" xmlns="" id="{36D1FDFF-84F9-A395-CDB0-AC77470C24F7}"/>
+              <a16:creationId xmlns:a16="http://schemas.microsoft.com/office/drawing/2014/main" id="{36D1FDFF-84F9-A395-CDB0-AC77470C24F7}"/>
             </a:ext>
           </a:extLst>
         </p:cNvPr>
@@ -7763,7 +7871,7 @@
           <p:cNvPr id="2" name="Título 1">
             <a:extLst>
               <a:ext uri="{FF2B5EF4-FFF2-40B4-BE49-F238E27FC236}">
-                <a16:creationId xmlns:a16="http://schemas.microsoft.com/office/drawing/2014/main" xmlns="" id="{CA82907A-6417-D3C2-265A-0FFD53046E99}"/>
+                <a16:creationId xmlns:a16="http://schemas.microsoft.com/office/drawing/2014/main" id="{CA82907A-6417-D3C2-265A-0FFD53046E99}"/>
               </a:ext>
             </a:extLst>
           </p:cNvPr>
@@ -7800,7 +7908,7 @@
           <p:cNvPr id="3" name="Espaço Reservado para Conteúdo 2">
             <a:extLst>
               <a:ext uri="{FF2B5EF4-FFF2-40B4-BE49-F238E27FC236}">
-                <a16:creationId xmlns:a16="http://schemas.microsoft.com/office/drawing/2014/main" xmlns="" xmlns:a14="http://schemas.microsoft.com/office/drawing/2010/main" xmlns:mc="http://schemas.openxmlformats.org/markup-compatibility/2006" id="{3C767761-7363-3966-1F66-B32029649DCD}"/>
+                <a16:creationId xmlns:a16="http://schemas.microsoft.com/office/drawing/2014/main" id="{3C767761-7363-3966-1F66-B32029649DCD}"/>
               </a:ext>
             </a:extLst>
           </p:cNvPr>
@@ -7824,7 +7932,7 @@
           <a:lstStyle/>
           <a:p>
             <a:r>
-              <a:rPr lang="pt-BR" b="1" dirty="0" smtClean="0">
+              <a:rPr lang="pt-BR" b="1" dirty="0">
                 <a:solidFill>
                   <a:srgbClr val="7030A0"/>
                 </a:solidFill>
@@ -7852,64 +7960,51 @@
               <a:t>clusters</a:t>
             </a:r>
             <a:r>
-              <a:rPr lang="pt-BR" dirty="0" smtClean="0"/>
+              <a:rPr lang="pt-BR" dirty="0"/>
               <a:t>.</a:t>
             </a:r>
           </a:p>
           <a:p>
             <a:r>
-              <a:rPr lang="pt-BR" dirty="0" smtClean="0"/>
+              <a:rPr lang="pt-BR" dirty="0"/>
               <a:t>Existem diversos métodos para otimizar o </a:t>
             </a:r>
             <a:r>
-              <a:rPr lang="pt-BR" dirty="0" err="1" smtClean="0"/>
+              <a:rPr lang="pt-BR" dirty="0" err="1"/>
               <a:t>hiperparâmetro</a:t>
             </a:r>
             <a:r>
-              <a:rPr lang="pt-BR" dirty="0" smtClean="0"/>
-              <a:t> que defin</a:t>
-            </a:r>
-            <a:r>
-              <a:rPr lang="pt-BR" dirty="0" smtClean="0"/>
-              <a:t>e o número de </a:t>
-            </a:r>
-            <a:r>
-              <a:rPr lang="pt-BR" i="1" dirty="0" smtClean="0"/>
+              <a:rPr lang="pt-BR" dirty="0"/>
+              <a:t> que define o número de </a:t>
+            </a:r>
+            <a:r>
+              <a:rPr lang="pt-BR" i="1" dirty="0"/>
               <a:t>clusters</a:t>
             </a:r>
             <a:r>
-              <a:rPr lang="pt-BR" dirty="0" smtClean="0"/>
-              <a:t>, </a:t>
-            </a:r>
-            <a:r>
-              <a:rPr lang="pt-BR" dirty="0" smtClean="0"/>
-              <a:t>dentre eles, o mais usado é o método do cotovelo.</a:t>
-            </a:r>
-          </a:p>
-          <a:p>
-            <a:r>
-              <a:rPr lang="pt-BR" dirty="0" smtClean="0"/>
-              <a:t>Veremos como ele funciona em breve</a:t>
-            </a:r>
-            <a:r>
-              <a:rPr lang="pt-BR" dirty="0" smtClean="0"/>
-              <a:t>.</a:t>
-            </a:r>
-          </a:p>
-          <a:p>
-            <a:r>
-              <a:rPr lang="pt-BR" dirty="0" smtClean="0"/>
+              <a:rPr lang="pt-BR" dirty="0"/>
+              <a:t>, dentre eles, o mais usado é o método do cotovelo.</a:t>
+            </a:r>
+          </a:p>
+          <a:p>
+            <a:r>
+              <a:rPr lang="pt-BR" dirty="0"/>
+              <a:t>Veremos como ele funciona em breve.</a:t>
+            </a:r>
+          </a:p>
+          <a:p>
+            <a:r>
+              <a:rPr lang="pt-BR" dirty="0"/>
               <a:t>Porém, antes, precisamos entender como os </a:t>
             </a:r>
             <a:r>
-              <a:rPr lang="pt-BR" i="1" dirty="0" smtClean="0"/>
+              <a:rPr lang="pt-BR" i="1" dirty="0"/>
               <a:t>clusters</a:t>
             </a:r>
             <a:r>
-              <a:rPr lang="pt-BR" dirty="0" smtClean="0"/>
+              <a:rPr lang="pt-BR" dirty="0"/>
               <a:t> são criados.</a:t>
             </a:r>
-            <a:endParaRPr lang="pt-BR" dirty="0"/>
           </a:p>
           <a:p>
             <a:endParaRPr lang="pt-BR" dirty="0"/>
@@ -7921,7 +8016,7 @@
           <p:cNvPr id="5" name="Picture 2" descr="K-Means Clustering using Python. Welcome back guys! Hope you had a great… |  by Luigi Fiori | Medium">
             <a:extLst>
               <a:ext uri="{FF2B5EF4-FFF2-40B4-BE49-F238E27FC236}">
-                <a16:creationId xmlns:a16="http://schemas.microsoft.com/office/drawing/2014/main" xmlns="" id="{079377DD-55D2-BED3-3BB3-D573A6F13921}"/>
+                <a16:creationId xmlns:a16="http://schemas.microsoft.com/office/drawing/2014/main" id="{079377DD-55D2-BED3-3BB3-D573A6F13921}"/>
               </a:ext>
             </a:extLst>
           </p:cNvPr>
@@ -7982,7 +8077,7 @@
         <p:cNvPr id="1" name="">
           <a:extLst>
             <a:ext uri="{FF2B5EF4-FFF2-40B4-BE49-F238E27FC236}">
-              <a16:creationId xmlns:a16="http://schemas.microsoft.com/office/drawing/2014/main" xmlns="" id="{654994D8-D711-9C2A-C202-7BAD7B93F7EE}"/>
+              <a16:creationId xmlns:a16="http://schemas.microsoft.com/office/drawing/2014/main" id="{654994D8-D711-9C2A-C202-7BAD7B93F7EE}"/>
             </a:ext>
           </a:extLst>
         </p:cNvPr>
@@ -8002,7 +8097,7 @@
           <p:cNvPr id="2" name="Título 1">
             <a:extLst>
               <a:ext uri="{FF2B5EF4-FFF2-40B4-BE49-F238E27FC236}">
-                <a16:creationId xmlns:a16="http://schemas.microsoft.com/office/drawing/2014/main" xmlns="" id="{FA636E4B-196C-922B-890C-6917F63A065D}"/>
+                <a16:creationId xmlns:a16="http://schemas.microsoft.com/office/drawing/2014/main" id="{FA636E4B-196C-922B-890C-6917F63A065D}"/>
               </a:ext>
             </a:extLst>
           </p:cNvPr>
@@ -8034,14 +8129,14 @@
           </a:p>
         </p:txBody>
       </p:sp>
-      <mc:AlternateContent xmlns:mc="http://schemas.openxmlformats.org/markup-compatibility/2006">
-        <mc:Choice xmlns:a14="http://schemas.microsoft.com/office/drawing/2010/main" Requires="a14">
+      <mc:AlternateContent xmlns:mc="http://schemas.openxmlformats.org/markup-compatibility/2006" xmlns:a14="http://schemas.microsoft.com/office/drawing/2010/main">
+        <mc:Choice Requires="a14">
           <p:sp>
             <p:nvSpPr>
               <p:cNvPr id="3" name="Espaço Reservado para Conteúdo 2">
                 <a:extLst>
                   <a:ext uri="{FF2B5EF4-FFF2-40B4-BE49-F238E27FC236}">
-                    <a16:creationId xmlns:a16="http://schemas.microsoft.com/office/drawing/2014/main" xmlns="" id="{1FCDFA83-D279-17E3-E2CD-6E304EAF637F}"/>
+                    <a16:creationId xmlns:a16="http://schemas.microsoft.com/office/drawing/2014/main" id="{1FCDFA83-D279-17E3-E2CD-6E304EAF637F}"/>
                   </a:ext>
                 </a:extLst>
               </p:cNvPr>
@@ -8065,7 +8160,7 @@
               <a:lstStyle/>
               <a:p>
                 <a:r>
-                  <a:rPr lang="pt-BR" dirty="0" smtClean="0"/>
+                  <a:rPr lang="pt-BR" dirty="0"/>
                   <a:t>Algoritmos para identificação de </a:t>
                 </a:r>
                 <a:r>
@@ -8074,15 +8169,7 @@
                 </a:r>
                 <a:r>
                   <a:rPr lang="pt-BR" dirty="0"/>
-                  <a:t> </a:t>
-                </a:r>
-                <a:r>
-                  <a:rPr lang="pt-BR" dirty="0" smtClean="0"/>
-                  <a:t>precisam </a:t>
-                </a:r>
-                <a:r>
-                  <a:rPr lang="pt-BR" dirty="0"/>
-                  <a:t>de uma </a:t>
+                  <a:t> precisam de uma </a:t>
                 </a:r>
                 <a:r>
                   <a:rPr lang="pt-BR" b="1" dirty="0">
@@ -8106,23 +8193,7 @@
                       <a:srgbClr val="7030A0"/>
                     </a:solidFill>
                   </a:rPr>
-                  <a:t> entre </a:t>
-                </a:r>
-                <a:r>
-                  <a:rPr lang="pt-BR" b="1" dirty="0" smtClean="0">
-                    <a:solidFill>
-                      <a:srgbClr val="7030A0"/>
-                    </a:solidFill>
-                  </a:rPr>
-                  <a:t>uma amostra e </a:t>
-                </a:r>
-                <a:r>
-                  <a:rPr lang="pt-BR" b="1" dirty="0">
-                    <a:solidFill>
-                      <a:srgbClr val="7030A0"/>
-                    </a:solidFill>
-                  </a:rPr>
-                  <a:t>o centroide</a:t>
+                  <a:t> entre uma amostra e o centroide</a:t>
                 </a:r>
                 <a:r>
                   <a:rPr lang="pt-BR" dirty="0"/>
@@ -8140,15 +8211,7 @@
               <a:p>
                 <a:r>
                   <a:rPr lang="pt-BR" dirty="0"/>
-                  <a:t>Uma forma de fazer isso </a:t>
-                </a:r>
-                <a:r>
-                  <a:rPr lang="pt-BR" dirty="0" smtClean="0"/>
-                  <a:t>é </a:t>
-                </a:r>
-                <a:r>
-                  <a:rPr lang="pt-BR" dirty="0"/>
-                  <a:t>usar a </a:t>
+                  <a:t>Uma forma de fazer isso é usar a </a:t>
                 </a:r>
                 <a:r>
                   <a:rPr lang="pt-BR" b="1" dirty="0">
@@ -8160,18 +8223,14 @@
                 </a:r>
                 <a:r>
                   <a:rPr lang="pt-BR" dirty="0"/>
-                  <a:t>entre os dois </a:t>
-                </a:r>
-                <a:r>
-                  <a:rPr lang="pt-BR" dirty="0" smtClean="0"/>
-                  <a:t>vetores</a:t>
+                  <a:t>entre os dois vetores</a:t>
                 </a:r>
               </a:p>
               <a:p>
                 <a:pPr marL="0" indent="0">
                   <a:buNone/>
                 </a:pPr>
-                <a:endParaRPr lang="pt-BR" sz="600" dirty="0" smtClean="0"/>
+                <a:endParaRPr lang="pt-BR" sz="600" dirty="0"/>
               </a:p>
               <a:p>
                 <a:pPr marL="0" indent="0">
@@ -8391,19 +8450,7 @@
                 </a14:m>
                 <a:r>
                   <a:rPr lang="pt-BR" dirty="0"/>
-                  <a:t> é o número de </a:t>
-                </a:r>
-                <a:r>
-                  <a:rPr lang="pt-BR" dirty="0" smtClean="0"/>
-                  <a:t>atributos</a:t>
-                </a:r>
-                <a:r>
-                  <a:rPr lang="pt-BR" dirty="0"/>
-                  <a:t> </a:t>
-                </a:r>
-                <a:r>
-                  <a:rPr lang="pt-BR" dirty="0" smtClean="0"/>
-                  <a:t>e </a:t>
+                  <a:t> é o número de atributos e </a:t>
                 </a:r>
                 <a14:m>
                   <m:oMath xmlns:m="http://schemas.openxmlformats.org/officeDocument/2006/math">
@@ -8435,7 +8482,7 @@
                   </m:oMath>
                 </a14:m>
                 <a:r>
-                  <a:rPr lang="pt-BR" dirty="0" smtClean="0"/>
+                  <a:rPr lang="pt-BR" dirty="0"/>
                   <a:t> e </a:t>
                 </a:r>
                 <a14:m>
@@ -8468,7 +8515,7 @@
                   </m:oMath>
                 </a14:m>
                 <a:r>
-                  <a:rPr lang="pt-BR" dirty="0" smtClean="0"/>
+                  <a:rPr lang="pt-BR" dirty="0"/>
                   <a:t> são os </a:t>
                 </a:r>
                 <a14:m>
@@ -8482,22 +8529,22 @@
                   </m:oMath>
                 </a14:m>
                 <a:r>
-                  <a:rPr lang="pt-BR" dirty="0" smtClean="0"/>
+                  <a:rPr lang="pt-BR" dirty="0"/>
                   <a:t>-</a:t>
                 </a:r>
                 <a:r>
-                  <a:rPr lang="pt-BR" dirty="0" err="1" smtClean="0"/>
+                  <a:rPr lang="pt-BR" dirty="0" err="1"/>
                   <a:t>ésimos</a:t>
                 </a:r>
                 <a:r>
-                  <a:rPr lang="pt-BR" dirty="0" smtClean="0"/>
+                  <a:rPr lang="pt-BR" dirty="0"/>
                   <a:t> elementos dos vetores tendo sua distância calculada.</a:t>
                 </a:r>
               </a:p>
             </p:txBody>
           </p:sp>
         </mc:Choice>
-        <mc:Fallback>
+        <mc:Fallback xmlns="">
           <p:sp>
             <p:nvSpPr>
               <p:cNvPr id="3" name="Espaço Reservado para Conteúdo 2">
@@ -8602,8 +8649,8 @@
           </a:p>
         </p:txBody>
       </p:sp>
-      <mc:AlternateContent xmlns:mc="http://schemas.openxmlformats.org/markup-compatibility/2006">
-        <mc:Choice xmlns:a14="http://schemas.microsoft.com/office/drawing/2010/main" Requires="a14">
+      <mc:AlternateContent xmlns:mc="http://schemas.openxmlformats.org/markup-compatibility/2006" xmlns:a14="http://schemas.microsoft.com/office/drawing/2010/main">
+        <mc:Choice Requires="a14">
           <p:sp>
             <p:nvSpPr>
               <p:cNvPr id="3" name="Espaço Reservado para Conteúdo 2"/>
@@ -8627,7 +8674,7 @@
               <a:lstStyle/>
               <a:p>
                 <a:r>
-                  <a:rPr lang="pt-BR" dirty="0" smtClean="0"/>
+                  <a:rPr lang="pt-BR" dirty="0"/>
                   <a:t>Vamos supor que existam </a:t>
                 </a:r>
                 <a14:m>
@@ -8733,16 +8780,8 @@
               </a:p>
               <a:p>
                 <a:r>
-                  <a:rPr lang="pt-BR" dirty="0" smtClean="0"/>
-                  <a:t>Uma </a:t>
-                </a:r>
-                <a:r>
                   <a:rPr lang="pt-BR" dirty="0"/>
-                  <a:t>a</a:t>
-                </a:r>
-                <a:r>
-                  <a:rPr lang="pt-BR" dirty="0" smtClean="0"/>
-                  <a:t>mostra </a:t>
+                  <a:t>Uma amostra </a:t>
                 </a:r>
                 <a14:m>
                   <m:oMath xmlns:m="http://schemas.openxmlformats.org/officeDocument/2006/math">
@@ -8989,38 +9028,33 @@
               <a:p>
                 <a:r>
                   <a:rPr lang="pt-BR" dirty="0"/>
-                  <a:t>Agora, veremos como funciona </a:t>
+                  <a:t>Agora, veremos como funciona o </a:t>
                 </a:r>
                 <a:r>
-                  <a:rPr lang="pt-BR" dirty="0" smtClean="0"/>
-                  <a:t>o </a:t>
-                </a:r>
-                <a:r>
-                  <a:rPr lang="pt-BR" dirty="0" err="1" smtClean="0"/>
+                  <a:rPr lang="pt-BR" dirty="0" err="1"/>
                   <a:t>algortimo</a:t>
                 </a:r>
                 <a:r>
-                  <a:rPr lang="pt-BR" dirty="0" smtClean="0"/>
+                  <a:rPr lang="pt-BR" dirty="0"/>
                   <a:t> </a:t>
                 </a:r>
                 <a:r>
-                  <a:rPr lang="pt-BR" i="1" dirty="0" smtClean="0"/>
+                  <a:rPr lang="pt-BR" i="1" dirty="0"/>
                   <a:t>k-</a:t>
                 </a:r>
                 <a:r>
-                  <a:rPr lang="pt-BR" i="1" dirty="0" err="1" smtClean="0"/>
+                  <a:rPr lang="pt-BR" i="1" dirty="0" err="1"/>
                   <a:t>Means</a:t>
                 </a:r>
                 <a:r>
-                  <a:rPr lang="pt-BR" dirty="0" smtClean="0"/>
+                  <a:rPr lang="pt-BR" dirty="0"/>
                   <a:t>.</a:t>
                 </a:r>
-                <a:endParaRPr lang="pt-BR" dirty="0"/>
               </a:p>
             </p:txBody>
           </p:sp>
         </mc:Choice>
-        <mc:Fallback>
+        <mc:Fallback xmlns="">
           <p:sp>
             <p:nvSpPr>
               <p:cNvPr id="3" name="Espaço Reservado para Conteúdo 2"/>
@@ -9115,8 +9149,8 @@
           </a:p>
         </p:txBody>
       </p:sp>
-      <mc:AlternateContent xmlns:mc="http://schemas.openxmlformats.org/markup-compatibility/2006">
-        <mc:Choice xmlns:a14="http://schemas.microsoft.com/office/drawing/2010/main" Requires="a14">
+      <mc:AlternateContent xmlns:mc="http://schemas.openxmlformats.org/markup-compatibility/2006" xmlns:a14="http://schemas.microsoft.com/office/drawing/2010/main">
+        <mc:Choice Requires="a14">
           <p:sp>
             <p:nvSpPr>
               <p:cNvPr id="3" name="Espaço Reservado para Conteúdo 2"/>
@@ -9167,41 +9201,29 @@
                 </a14:m>
                 <a:r>
                   <a:rPr lang="pt-BR" dirty="0"/>
-                  <a:t> é </a:t>
+                  <a:t> é um </a:t>
                 </a:r>
                 <a:r>
-                  <a:rPr lang="pt-BR" dirty="0" smtClean="0"/>
-                  <a:t>um </a:t>
-                </a:r>
-                <a:r>
-                  <a:rPr lang="pt-BR" dirty="0" err="1" smtClean="0"/>
+                  <a:rPr lang="pt-BR" dirty="0" err="1"/>
                   <a:t>hiperparâmetro</a:t>
                 </a:r>
                 <a:r>
-                  <a:rPr lang="pt-BR" dirty="0" smtClean="0"/>
-                  <a:t> que define </a:t>
+                  <a:rPr lang="pt-BR" dirty="0"/>
+                  <a:t> que define o número de </a:t>
                 </a:r>
                 <a:r>
-                  <a:rPr lang="pt-BR" dirty="0" smtClean="0"/>
-                  <a:t>o número de </a:t>
-                </a:r>
-                <a:r>
-                  <a:rPr lang="pt-BR" i="1" dirty="0" smtClean="0"/>
+                  <a:rPr lang="pt-BR" i="1" dirty="0"/>
                   <a:t>clusters</a:t>
                 </a:r>
                 <a:r>
-                  <a:rPr lang="pt-BR" dirty="0" smtClean="0"/>
+                  <a:rPr lang="pt-BR" dirty="0"/>
                   <a:t>.</a:t>
                 </a:r>
               </a:p>
               <a:p>
                 <a:r>
-                  <a:rPr lang="pt-BR" dirty="0" smtClean="0"/>
-                  <a:t>O </a:t>
-                </a:r>
-                <a:r>
                   <a:rPr lang="pt-BR" dirty="0"/>
-                  <a:t>pseudocódigo do algoritmo é mostrado abaixo.</a:t>
+                  <a:t>O pseudocódigo do algoritmo é mostrado abaixo.</a:t>
                 </a:r>
               </a:p>
               <a:p>
@@ -9223,16 +9245,12 @@
                 <a:pPr marL="0" indent="0">
                   <a:buNone/>
                 </a:pPr>
-                <a:endParaRPr lang="pt-BR" dirty="0" smtClean="0"/>
+                <a:endParaRPr lang="pt-BR" dirty="0"/>
               </a:p>
               <a:p>
                 <a:r>
-                  <a:rPr lang="pt-BR" dirty="0" smtClean="0"/>
-                  <a:t>O </a:t>
-                </a:r>
-                <a:r>
                   <a:rPr lang="pt-BR" dirty="0"/>
-                  <a:t>algoritmo garantidamente chega a uma situação em que cada exemplo se encontra no </a:t>
+                  <a:t>O algoritmo garantidamente chega a uma situação em que cada exemplo se encontra no </a:t>
                 </a:r>
                 <a:r>
                   <a:rPr lang="pt-BR" i="1" dirty="0"/>
@@ -9246,7 +9264,7 @@
             </p:txBody>
           </p:sp>
         </mc:Choice>
-        <mc:Fallback>
+        <mc:Fallback xmlns="">
           <p:sp>
             <p:nvSpPr>
               <p:cNvPr id="3" name="Espaço Reservado para Conteúdo 2"/>
@@ -9451,14 +9469,13 @@
                   <a:t>Calcule o novo centroide de cada </a:t>
                 </a:r>
                 <a:r>
-                  <a:rPr lang="pt-BR" i="1" dirty="0" smtClean="0"/>
+                  <a:rPr lang="pt-BR" i="1" dirty="0"/>
                   <a:t>cluster</a:t>
                 </a:r>
                 <a:r>
-                  <a:rPr lang="pt-BR" dirty="0" smtClean="0"/>
+                  <a:rPr lang="pt-BR" dirty="0"/>
                   <a:t>*.</a:t>
                 </a:r>
-                <a:endParaRPr lang="pt-BR" dirty="0"/>
               </a:p>
               <a:p>
                 <a:pPr marL="342900" indent="-342900">
@@ -9629,10 +9646,9 @@
               <a:buNone/>
             </a:pPr>
             <a:r>
-              <a:rPr lang="pt-BR" sz="5400" dirty="0" smtClean="0"/>
+              <a:rPr lang="pt-BR" sz="5400" dirty="0"/>
               <a:t>Vejamos um exemplo</a:t>
             </a:r>
-            <a:endParaRPr lang="pt-BR" sz="5400" dirty="0"/>
           </a:p>
         </p:txBody>
       </p:sp>
@@ -9682,15 +9698,15 @@
           <a:lstStyle/>
           <a:p>
             <a:r>
-              <a:rPr lang="pt-BR" dirty="0" smtClean="0"/>
+              <a:rPr lang="pt-BR" dirty="0"/>
               <a:t>Funcionamento do </a:t>
             </a:r>
             <a:r>
-              <a:rPr lang="pt-BR" i="1" dirty="0" smtClean="0"/>
+              <a:rPr lang="pt-BR" i="1" dirty="0"/>
               <a:t>k-</a:t>
             </a:r>
             <a:r>
-              <a:rPr lang="pt-BR" i="1" dirty="0" err="1" smtClean="0"/>
+              <a:rPr lang="pt-BR" i="1" dirty="0" err="1"/>
               <a:t>Means</a:t>
             </a:r>
             <a:endParaRPr lang="pt-BR" i="1" dirty="0"/>
@@ -9702,7 +9718,7 @@
           <p:cNvPr id="4" name="Picture 5">
             <a:extLst>
               <a:ext uri="{FF2B5EF4-FFF2-40B4-BE49-F238E27FC236}">
-                <a16:creationId xmlns:a16="http://schemas.microsoft.com/office/drawing/2014/main" xmlns="" id="{F98B536F-38AB-58C5-0FFB-41BDB557E9EF}"/>
+                <a16:creationId xmlns:a16="http://schemas.microsoft.com/office/drawing/2014/main" id="{F98B536F-38AB-58C5-0FFB-41BDB557E9EF}"/>
               </a:ext>
             </a:extLst>
           </p:cNvPr>
@@ -9727,14 +9743,14 @@
           </a:prstGeom>
         </p:spPr>
       </p:pic>
-      <mc:AlternateContent xmlns:mc="http://schemas.openxmlformats.org/markup-compatibility/2006">
-        <mc:Choice xmlns:a14="http://schemas.microsoft.com/office/drawing/2010/main" Requires="a14">
+      <mc:AlternateContent xmlns:mc="http://schemas.openxmlformats.org/markup-compatibility/2006" xmlns:a14="http://schemas.microsoft.com/office/drawing/2010/main">
+        <mc:Choice Requires="a14">
           <p:sp>
             <p:nvSpPr>
               <p:cNvPr id="5" name="TextBox 7">
                 <a:extLst>
                   <a:ext uri="{FF2B5EF4-FFF2-40B4-BE49-F238E27FC236}">
-                    <a16:creationId xmlns:a16="http://schemas.microsoft.com/office/drawing/2014/main" xmlns="" id="{04EA9FAE-D371-68E0-2CB7-9C8893491B3B}"/>
+                    <a16:creationId xmlns:a16="http://schemas.microsoft.com/office/drawing/2014/main" id="{04EA9FAE-D371-68E0-2CB7-9C8893491B3B}"/>
                   </a:ext>
                 </a:extLst>
               </p:cNvPr>
@@ -9758,7 +9774,7 @@
               <a:lstStyle/>
               <a:p>
                 <a:r>
-                  <a:rPr lang="pt-BR" dirty="0" smtClean="0"/>
+                  <a:rPr lang="pt-BR" dirty="0"/>
                   <a:t>1. Define-se o número de clusters, </a:t>
                 </a:r>
                 <a14:m>
@@ -9772,19 +9788,15 @@
                   </m:oMath>
                 </a14:m>
                 <a:r>
-                  <a:rPr lang="pt-BR" dirty="0" smtClean="0"/>
-                  <a:t> </a:t>
-                </a:r>
-                <a:r>
                   <a:rPr lang="pt-BR" dirty="0"/>
-                  <a:t>= 3</a:t>
+                  <a:t> = 3</a:t>
                 </a:r>
                 <a:endParaRPr lang="en-US" dirty="0"/>
               </a:p>
             </p:txBody>
           </p:sp>
         </mc:Choice>
-        <mc:Fallback>
+        <mc:Fallback xmlns="">
           <p:sp>
             <p:nvSpPr>
               <p:cNvPr id="5" name="TextBox 7">
@@ -10081,7 +10093,7 @@
           <p:cNvPr id="3" name="Picture 5">
             <a:extLst>
               <a:ext uri="{FF2B5EF4-FFF2-40B4-BE49-F238E27FC236}">
-                <a16:creationId xmlns:a16="http://schemas.microsoft.com/office/drawing/2014/main" xmlns="" id="{69F3FE92-0D0B-AECE-B64E-FC9D2F3EADBC}"/>
+                <a16:creationId xmlns:a16="http://schemas.microsoft.com/office/drawing/2014/main" id="{69F3FE92-0D0B-AECE-B64E-FC9D2F3EADBC}"/>
               </a:ext>
             </a:extLst>
           </p:cNvPr>
@@ -10111,7 +10123,7 @@
           <p:cNvPr id="4" name="TextBox 7">
             <a:extLst>
               <a:ext uri="{FF2B5EF4-FFF2-40B4-BE49-F238E27FC236}">
-                <a16:creationId xmlns:a16="http://schemas.microsoft.com/office/drawing/2014/main" xmlns="" id="{5D947541-89EC-69EF-1918-6EFD56E0B3C2}"/>
+                <a16:creationId xmlns:a16="http://schemas.microsoft.com/office/drawing/2014/main" id="{5D947541-89EC-69EF-1918-6EFD56E0B3C2}"/>
               </a:ext>
             </a:extLst>
           </p:cNvPr>
@@ -10247,7 +10259,7 @@
           <p:cNvPr id="3" name="Picture 5">
             <a:extLst>
               <a:ext uri="{FF2B5EF4-FFF2-40B4-BE49-F238E27FC236}">
-                <a16:creationId xmlns:a16="http://schemas.microsoft.com/office/drawing/2014/main" xmlns="" id="{1C0684BB-EFF7-DBA8-3519-25CE2A1A9632}"/>
+                <a16:creationId xmlns:a16="http://schemas.microsoft.com/office/drawing/2014/main" id="{1C0684BB-EFF7-DBA8-3519-25CE2A1A9632}"/>
               </a:ext>
             </a:extLst>
           </p:cNvPr>
@@ -10277,7 +10289,7 @@
           <p:cNvPr id="4" name="TextBox 8">
             <a:extLst>
               <a:ext uri="{FF2B5EF4-FFF2-40B4-BE49-F238E27FC236}">
-                <a16:creationId xmlns:a16="http://schemas.microsoft.com/office/drawing/2014/main" xmlns="" id="{38267D7C-379A-003E-4048-8D4DDD969EB6}"/>
+                <a16:creationId xmlns:a16="http://schemas.microsoft.com/office/drawing/2014/main" id="{38267D7C-379A-003E-4048-8D4DDD969EB6}"/>
               </a:ext>
             </a:extLst>
           </p:cNvPr>
@@ -10307,29 +10319,7 @@
                 </a:solidFill>
                 <a:effectLst/>
               </a:rPr>
-              <a:t>3. Atribui-se cada amostra ao </a:t>
-            </a:r>
-            <a:r>
-              <a:rPr lang="pt-BR" b="0" i="0" dirty="0" smtClean="0">
-                <a:solidFill>
-                  <a:srgbClr val="404040"/>
-                </a:solidFill>
-                <a:effectLst/>
-              </a:rPr>
-              <a:t>centroide </a:t>
-            </a:r>
-            <a:r>
-              <a:rPr lang="pt-BR" b="0" i="0" dirty="0">
-                <a:solidFill>
-                  <a:srgbClr val="404040"/>
-                </a:solidFill>
-                <a:effectLst/>
-              </a:rPr>
-              <a:t>mais próximo com base na distância euclidiana.</a:t>
-            </a:r>
-            <a:r>
-              <a:rPr lang="pt-BR" dirty="0"/>
-              <a:t/>
+              <a:t>3. Atribui-se cada amostra ao centroide mais próximo com base na distância euclidiana.</a:t>
             </a:r>
             <a:br>
               <a:rPr lang="pt-BR" dirty="0"/>
@@ -10404,7 +10394,7 @@
           <p:cNvPr id="3" name="Picture 7">
             <a:extLst>
               <a:ext uri="{FF2B5EF4-FFF2-40B4-BE49-F238E27FC236}">
-                <a16:creationId xmlns:a16="http://schemas.microsoft.com/office/drawing/2014/main" xmlns="" id="{4A874BBD-11DB-833A-341F-F134DDD11108}"/>
+                <a16:creationId xmlns:a16="http://schemas.microsoft.com/office/drawing/2014/main" id="{4A874BBD-11DB-833A-341F-F134DDD11108}"/>
               </a:ext>
             </a:extLst>
           </p:cNvPr>
@@ -10434,7 +10424,7 @@
           <p:cNvPr id="4" name="TextBox 9">
             <a:extLst>
               <a:ext uri="{FF2B5EF4-FFF2-40B4-BE49-F238E27FC236}">
-                <a16:creationId xmlns:a16="http://schemas.microsoft.com/office/drawing/2014/main" xmlns="" id="{FB63ADD3-D956-76C5-F130-F38465877D67}"/>
+                <a16:creationId xmlns:a16="http://schemas.microsoft.com/office/drawing/2014/main" id="{FB63ADD3-D956-76C5-F130-F38465877D67}"/>
               </a:ext>
             </a:extLst>
           </p:cNvPr>
@@ -10536,7 +10526,7 @@
           <p:cNvPr id="3" name="Picture 5">
             <a:extLst>
               <a:ext uri="{FF2B5EF4-FFF2-40B4-BE49-F238E27FC236}">
-                <a16:creationId xmlns:a16="http://schemas.microsoft.com/office/drawing/2014/main" xmlns="" id="{BE9E2474-44BE-43D0-EE2F-D03349050DA2}"/>
+                <a16:creationId xmlns:a16="http://schemas.microsoft.com/office/drawing/2014/main" id="{BE9E2474-44BE-43D0-EE2F-D03349050DA2}"/>
               </a:ext>
             </a:extLst>
           </p:cNvPr>
@@ -10566,7 +10556,7 @@
           <p:cNvPr id="4" name="TextBox 9">
             <a:extLst>
               <a:ext uri="{FF2B5EF4-FFF2-40B4-BE49-F238E27FC236}">
-                <a16:creationId xmlns:a16="http://schemas.microsoft.com/office/drawing/2014/main" xmlns="" id="{E7FEC406-7A7E-5D78-DF69-D2416A2375C3}"/>
+                <a16:creationId xmlns:a16="http://schemas.microsoft.com/office/drawing/2014/main" id="{E7FEC406-7A7E-5D78-DF69-D2416A2375C3}"/>
               </a:ext>
             </a:extLst>
           </p:cNvPr>
@@ -10668,7 +10658,7 @@
           <p:cNvPr id="3" name="Picture 5">
             <a:extLst>
               <a:ext uri="{FF2B5EF4-FFF2-40B4-BE49-F238E27FC236}">
-                <a16:creationId xmlns:a16="http://schemas.microsoft.com/office/drawing/2014/main" xmlns="" id="{CD544109-9098-CA3C-766B-DFEB05AE1F38}"/>
+                <a16:creationId xmlns:a16="http://schemas.microsoft.com/office/drawing/2014/main" id="{CD544109-9098-CA3C-766B-DFEB05AE1F38}"/>
               </a:ext>
             </a:extLst>
           </p:cNvPr>
@@ -10698,7 +10688,7 @@
           <p:cNvPr id="4" name="TextBox 9">
             <a:extLst>
               <a:ext uri="{FF2B5EF4-FFF2-40B4-BE49-F238E27FC236}">
-                <a16:creationId xmlns:a16="http://schemas.microsoft.com/office/drawing/2014/main" xmlns="" id="{E7FEC406-7A7E-5D78-DF69-D2416A2375C3}"/>
+                <a16:creationId xmlns:a16="http://schemas.microsoft.com/office/drawing/2014/main" id="{E7FEC406-7A7E-5D78-DF69-D2416A2375C3}"/>
               </a:ext>
             </a:extLst>
           </p:cNvPr>
@@ -10800,7 +10790,7 @@
           <p:cNvPr id="3" name="Picture 5">
             <a:extLst>
               <a:ext uri="{FF2B5EF4-FFF2-40B4-BE49-F238E27FC236}">
-                <a16:creationId xmlns:a16="http://schemas.microsoft.com/office/drawing/2014/main" xmlns="" id="{9F08A47C-C93C-D40B-F5DC-3C29F2EEEE60}"/>
+                <a16:creationId xmlns:a16="http://schemas.microsoft.com/office/drawing/2014/main" id="{9F08A47C-C93C-D40B-F5DC-3C29F2EEEE60}"/>
               </a:ext>
             </a:extLst>
           </p:cNvPr>
@@ -10830,7 +10820,7 @@
           <p:cNvPr id="4" name="TextBox 7">
             <a:extLst>
               <a:ext uri="{FF2B5EF4-FFF2-40B4-BE49-F238E27FC236}">
-                <a16:creationId xmlns:a16="http://schemas.microsoft.com/office/drawing/2014/main" xmlns="" id="{4376C1A9-3731-8BF9-861E-3D686FEA4F43}"/>
+                <a16:creationId xmlns:a16="http://schemas.microsoft.com/office/drawing/2014/main" id="{4376C1A9-3731-8BF9-861E-3D686FEA4F43}"/>
               </a:ext>
             </a:extLst>
           </p:cNvPr>
@@ -10959,116 +10949,6 @@
       </p:grpSpPr>
       <p:sp>
         <p:nvSpPr>
-          <p:cNvPr id="2" name="Title 1">
-            <a:extLst>
-              <a:ext uri="{FF2B5EF4-FFF2-40B4-BE49-F238E27FC236}">
-                <a16:creationId xmlns:a16="http://schemas.microsoft.com/office/drawing/2014/main" xmlns="" id="{D87F6E31-B0DF-F3EC-D348-0D4E93DD1974}"/>
-              </a:ext>
-            </a:extLst>
-          </p:cNvPr>
-          <p:cNvSpPr>
-            <a:spLocks noGrp="1"/>
-          </p:cNvSpPr>
-          <p:nvPr>
-            <p:ph type="title"/>
-          </p:nvPr>
-        </p:nvSpPr>
-        <p:spPr/>
-        <p:txBody>
-          <a:bodyPr/>
-          <a:lstStyle/>
-          <a:p>
-            <a:endParaRPr lang="en-US"/>
-          </a:p>
-        </p:txBody>
-      </p:sp>
-      <p:sp>
-        <p:nvSpPr>
-          <p:cNvPr id="3" name="Content Placeholder 2">
-            <a:extLst>
-              <a:ext uri="{FF2B5EF4-FFF2-40B4-BE49-F238E27FC236}">
-                <a16:creationId xmlns:a16="http://schemas.microsoft.com/office/drawing/2014/main" xmlns="" id="{5007CCEC-CA32-01B4-A9B5-F81A83FF3ECA}"/>
-              </a:ext>
-            </a:extLst>
-          </p:cNvPr>
-          <p:cNvSpPr>
-            <a:spLocks noGrp="1"/>
-          </p:cNvSpPr>
-          <p:nvPr>
-            <p:ph idx="1"/>
-          </p:nvPr>
-        </p:nvSpPr>
-        <p:spPr/>
-        <p:txBody>
-          <a:bodyPr>
-            <a:normAutofit/>
-          </a:bodyPr>
-          <a:lstStyle/>
-          <a:p>
-            <a:r>
-              <a:rPr lang="pt-BR" sz="5400" b="1" dirty="0">
-                <a:solidFill>
-                  <a:srgbClr val="FF0000"/>
-                </a:solidFill>
-              </a:rPr>
-              <a:t>PAREI </a:t>
-            </a:r>
-            <a:r>
-              <a:rPr lang="pt-BR" sz="5400" b="1" dirty="0" err="1">
-                <a:solidFill>
-                  <a:srgbClr val="FF0000"/>
-                </a:solidFill>
-              </a:rPr>
-              <a:t>AQUi</a:t>
-            </a:r>
-            <a:r>
-              <a:rPr lang="pt-BR" sz="5400" b="1" dirty="0">
-                <a:solidFill>
-                  <a:srgbClr val="FF0000"/>
-                </a:solidFill>
-              </a:rPr>
-              <a:t>!!!!</a:t>
-            </a:r>
-            <a:endParaRPr lang="en-US" sz="5400" b="1" dirty="0">
-              <a:solidFill>
-                <a:srgbClr val="FF0000"/>
-              </a:solidFill>
-            </a:endParaRPr>
-          </a:p>
-        </p:txBody>
-      </p:sp>
-    </p:spTree>
-    <p:extLst>
-      <p:ext uri="{BB962C8B-B14F-4D97-AF65-F5344CB8AC3E}">
-        <p14:creationId xmlns:p14="http://schemas.microsoft.com/office/powerpoint/2010/main" val="1718932620"/>
-      </p:ext>
-    </p:extLst>
-  </p:cSld>
-  <p:clrMapOvr>
-    <a:masterClrMapping/>
-  </p:clrMapOvr>
-</p:sld>
-</file>
-
-<file path=ppt/slides/slide27.xml><?xml version="1.0" encoding="utf-8"?>
-<p:sld xmlns:a="http://schemas.openxmlformats.org/drawingml/2006/main" xmlns:r="http://schemas.openxmlformats.org/officeDocument/2006/relationships" xmlns:p="http://schemas.openxmlformats.org/presentationml/2006/main">
-  <p:cSld>
-    <p:spTree>
-      <p:nvGrpSpPr>
-        <p:cNvPr id="1" name=""/>
-        <p:cNvGrpSpPr/>
-        <p:nvPr/>
-      </p:nvGrpSpPr>
-      <p:grpSpPr>
-        <a:xfrm>
-          <a:off x="0" y="0"/>
-          <a:ext cx="0" cy="0"/>
-          <a:chOff x="0" y="0"/>
-          <a:chExt cx="0" cy="0"/>
-        </a:xfrm>
-      </p:grpSpPr>
-      <p:sp>
-        <p:nvSpPr>
           <p:cNvPr id="2" name="Título 1"/>
           <p:cNvSpPr>
             <a:spLocks noGrp="1"/>
@@ -11104,8 +10984,8 @@
             </p:nvSpPr>
             <p:spPr>
               <a:xfrm>
-                <a:off x="5214257" y="1825624"/>
-                <a:ext cx="6977743" cy="5032375"/>
+                <a:off x="5242560" y="1825624"/>
+                <a:ext cx="6949440" cy="5032375"/>
               </a:xfrm>
             </p:spPr>
             <p:txBody>
@@ -11153,9 +11033,37 @@
                 </a:r>
               </a:p>
               <a:p>
+                <a:pPr lvl="1">
+                  <a:buFont typeface="Wingdings" panose="05000000000000000000" pitchFamily="2" charset="2"/>
+                  <a:buChar char="§"/>
+                </a:pPr>
+                <a:r>
+                  <a:rPr lang="pt-BR" dirty="0"/>
+                  <a:t>Pode escolher pontos muito próximos</a:t>
+                </a:r>
+              </a:p>
+              <a:p>
+                <a:pPr lvl="1">
+                  <a:buFont typeface="Wingdings" panose="05000000000000000000" pitchFamily="2" charset="2"/>
+                  <a:buChar char="§"/>
+                </a:pPr>
+                <a:r>
+                  <a:rPr lang="pt-BR" dirty="0"/>
+                  <a:t>Rodar várias vezes e escolher o melhor resultado</a:t>
+                </a:r>
+              </a:p>
+              <a:p>
                 <a:r>
                   <a:rPr lang="pt-BR" dirty="0"/>
                   <a:t>Os </a:t>
+                </a:r>
+                <a:r>
+                  <a:rPr lang="pt-BR" b="1" i="1" dirty="0">
+                    <a:solidFill>
+                      <a:srgbClr val="7030A0"/>
+                    </a:solidFill>
+                  </a:rPr>
+                  <a:t>clusters</a:t>
                 </a:r>
                 <a:r>
                   <a:rPr lang="pt-BR" b="1" dirty="0">
@@ -11163,7 +11071,7 @@
                       <a:srgbClr val="7030A0"/>
                     </a:solidFill>
                   </a:rPr>
-                  <a:t>clusters iniciais </a:t>
+                  <a:t> iniciais </a:t>
                 </a:r>
                 <a:r>
                   <a:rPr lang="pt-BR" dirty="0"/>
@@ -11185,31 +11093,7 @@
               <a:p>
                 <a:r>
                   <a:rPr lang="pt-BR" dirty="0"/>
-                  <a:t>O número de </a:t>
-                </a:r>
-                <a:r>
-                  <a:rPr lang="pt-BR" b="1" dirty="0">
-                    <a:solidFill>
-                      <a:schemeClr val="accent2"/>
-                    </a:solidFill>
-                  </a:rPr>
-                  <a:t>transferências</a:t>
-                </a:r>
-                <a:r>
-                  <a:rPr lang="pt-BR" dirty="0"/>
-                  <a:t> de um exemplo </a:t>
-                </a:r>
-                <a:r>
-                  <a:rPr lang="pt-BR" b="1" dirty="0">
-                    <a:solidFill>
-                      <a:schemeClr val="accent2"/>
-                    </a:solidFill>
-                  </a:rPr>
-                  <a:t>de um cluster para outro depende dos centroides iniciais</a:t>
-                </a:r>
-                <a:r>
-                  <a:rPr lang="pt-BR" dirty="0"/>
-                  <a:t>.</a:t>
+                  <a:t>Cada centroide define uma região e as amostras são distribuídas com base nisso.</a:t>
                 </a:r>
               </a:p>
             </p:txBody>
@@ -11228,13 +11112,13 @@
             </p:nvSpPr>
             <p:spPr>
               <a:xfrm>
-                <a:off x="5214257" y="1825624"/>
-                <a:ext cx="6977743" cy="5032375"/>
+                <a:off x="5242560" y="1825624"/>
+                <a:ext cx="6949440" cy="5032375"/>
               </a:xfrm>
-              <a:blipFill rotWithShape="0">
+              <a:blipFill>
                 <a:blip r:embed="rId2"/>
                 <a:stretch>
-                  <a:fillRect l="-1572" t="-1937" r="-2795"/>
+                  <a:fillRect l="-1579" t="-1937" r="-1316"/>
                 </a:stretch>
               </a:blipFill>
             </p:spPr>
@@ -11243,7 +11127,7 @@
               <a:lstStyle/>
               <a:p>
                 <a:r>
-                  <a:rPr lang="pt-BR">
+                  <a:rPr lang="en-US">
                     <a:noFill/>
                   </a:rPr>
                   <a:t> </a:t>
@@ -11258,7 +11142,286 @@
           <p:cNvPr id="4" name="Picture 2" descr="Quantum machine learning: distance estimation for k-means clustering | by  Sashwat Anagolum | Towards Data Science">
             <a:extLst>
               <a:ext uri="{FF2B5EF4-FFF2-40B4-BE49-F238E27FC236}">
-                <a16:creationId xmlns:a16="http://schemas.microsoft.com/office/drawing/2014/main" xmlns="" id="{3663CA52-EDD8-4A35-5A6A-3A247A7891B7}"/>
+                <a16:creationId xmlns:a16="http://schemas.microsoft.com/office/drawing/2014/main" id="{3663CA52-EDD8-4A35-5A6A-3A247A7891B7}"/>
+              </a:ext>
+            </a:extLst>
+          </p:cNvPr>
+          <p:cNvPicPr>
+            <a:picLocks noChangeAspect="1" noChangeArrowheads="1"/>
+          </p:cNvPicPr>
+          <p:nvPr/>
+        </p:nvPicPr>
+        <p:blipFill rotWithShape="1">
+          <a:blip r:embed="rId3">
+            <a:extLst>
+              <a:ext uri="{28A0092B-C50C-407E-A947-70E740481C1C}">
+                <a14:useLocalDpi xmlns:a14="http://schemas.microsoft.com/office/drawing/2010/main" val="0"/>
+              </a:ext>
+            </a:extLst>
+          </a:blip>
+          <a:srcRect l="3750" t="11979" r="8929"/>
+          <a:stretch/>
+        </p:blipFill>
+        <p:spPr bwMode="auto">
+          <a:xfrm>
+            <a:off x="369389" y="2253117"/>
+            <a:ext cx="4487974" cy="3392940"/>
+          </a:xfrm>
+          <a:prstGeom prst="rect">
+            <a:avLst/>
+          </a:prstGeom>
+          <a:noFill/>
+          <a:extLst>
+            <a:ext uri="{909E8E84-426E-40DD-AFC4-6F175D3DCCD1}">
+              <a14:hiddenFill xmlns:a14="http://schemas.microsoft.com/office/drawing/2010/main">
+                <a:solidFill>
+                  <a:srgbClr val="FFFFFF"/>
+                </a:solidFill>
+              </a14:hiddenFill>
+            </a:ext>
+          </a:extLst>
+        </p:spPr>
+      </p:pic>
+    </p:spTree>
+    <p:extLst>
+      <p:ext uri="{BB962C8B-B14F-4D97-AF65-F5344CB8AC3E}">
+        <p14:creationId xmlns:p14="http://schemas.microsoft.com/office/powerpoint/2010/main" val="3945627550"/>
+      </p:ext>
+    </p:extLst>
+  </p:cSld>
+  <p:clrMapOvr>
+    <a:masterClrMapping/>
+  </p:clrMapOvr>
+</p:sld>
+</file>
+
+<file path=ppt/slides/slide27.xml><?xml version="1.0" encoding="utf-8"?>
+<p:sld xmlns:a="http://schemas.openxmlformats.org/drawingml/2006/main" xmlns:r="http://schemas.openxmlformats.org/officeDocument/2006/relationships" xmlns:p="http://schemas.openxmlformats.org/presentationml/2006/main">
+  <p:cSld>
+    <p:spTree>
+      <p:nvGrpSpPr>
+        <p:cNvPr id="1" name="">
+          <a:extLst>
+            <a:ext uri="{FF2B5EF4-FFF2-40B4-BE49-F238E27FC236}">
+              <a16:creationId xmlns:a16="http://schemas.microsoft.com/office/drawing/2014/main" id="{17B1A926-A8C8-946A-0DCB-7DA6EAEC80E3}"/>
+            </a:ext>
+          </a:extLst>
+        </p:cNvPr>
+        <p:cNvGrpSpPr/>
+        <p:nvPr/>
+      </p:nvGrpSpPr>
+      <p:grpSpPr>
+        <a:xfrm>
+          <a:off x="0" y="0"/>
+          <a:ext cx="0" cy="0"/>
+          <a:chOff x="0" y="0"/>
+          <a:chExt cx="0" cy="0"/>
+        </a:xfrm>
+      </p:grpSpPr>
+      <p:sp>
+        <p:nvSpPr>
+          <p:cNvPr id="2" name="Título 1">
+            <a:extLst>
+              <a:ext uri="{FF2B5EF4-FFF2-40B4-BE49-F238E27FC236}">
+                <a16:creationId xmlns:a16="http://schemas.microsoft.com/office/drawing/2014/main" id="{602E24AF-FE6E-7B0A-D179-EB49A1DEB2F8}"/>
+              </a:ext>
+            </a:extLst>
+          </p:cNvPr>
+          <p:cNvSpPr>
+            <a:spLocks noGrp="1"/>
+          </p:cNvSpPr>
+          <p:nvPr>
+            <p:ph type="title"/>
+          </p:nvPr>
+        </p:nvSpPr>
+        <p:spPr/>
+        <p:txBody>
+          <a:bodyPr/>
+          <a:lstStyle/>
+          <a:p>
+            <a:r>
+              <a:rPr lang="pt-BR" dirty="0"/>
+              <a:t>Como inicializar os centroides? </a:t>
+            </a:r>
+            <a:endParaRPr lang="en-US" dirty="0"/>
+          </a:p>
+        </p:txBody>
+      </p:sp>
+      <p:sp>
+        <p:nvSpPr>
+          <p:cNvPr id="3" name="Espaço Reservado para Conteúdo 2">
+            <a:extLst>
+              <a:ext uri="{FF2B5EF4-FFF2-40B4-BE49-F238E27FC236}">
+                <a16:creationId xmlns:a16="http://schemas.microsoft.com/office/drawing/2014/main" id="{4E35406F-F929-EFBE-0B16-7CF919C6F311}"/>
+              </a:ext>
+            </a:extLst>
+          </p:cNvPr>
+          <p:cNvSpPr>
+            <a:spLocks noGrp="1"/>
+          </p:cNvSpPr>
+          <p:nvPr>
+            <p:ph idx="1"/>
+          </p:nvPr>
+        </p:nvSpPr>
+        <p:spPr>
+          <a:xfrm>
+            <a:off x="5435600" y="1825624"/>
+            <a:ext cx="6756400" cy="5032375"/>
+          </a:xfrm>
+        </p:spPr>
+        <p:txBody>
+          <a:bodyPr>
+            <a:normAutofit/>
+          </a:bodyPr>
+          <a:lstStyle/>
+          <a:p>
+            <a:r>
+              <a:rPr lang="pt-BR" dirty="0"/>
+              <a:t>Se os centroides iniciais mudam:</a:t>
+            </a:r>
+          </a:p>
+          <a:p>
+            <a:pPr lvl="1">
+              <a:buFont typeface="Wingdings" panose="05000000000000000000" pitchFamily="2" charset="2"/>
+              <a:buChar char="§"/>
+            </a:pPr>
+            <a:r>
+              <a:rPr lang="pt-BR" dirty="0"/>
+              <a:t>muda completamente a divisão inicial </a:t>
+            </a:r>
+          </a:p>
+          <a:p>
+            <a:pPr lvl="1">
+              <a:buFont typeface="Wingdings" panose="05000000000000000000" pitchFamily="2" charset="2"/>
+              <a:buChar char="§"/>
+            </a:pPr>
+            <a:r>
+              <a:rPr lang="pt-BR" dirty="0"/>
+              <a:t>muda quais amostras vão para qual </a:t>
+            </a:r>
+            <a:r>
+              <a:rPr lang="pt-BR" i="1" dirty="0"/>
+              <a:t>cluster</a:t>
+            </a:r>
+            <a:r>
+              <a:rPr lang="pt-BR" dirty="0"/>
+              <a:t> no início</a:t>
+            </a:r>
+          </a:p>
+          <a:p>
+            <a:r>
+              <a:rPr lang="pt-BR" dirty="0"/>
+              <a:t>O número de </a:t>
+            </a:r>
+            <a:r>
+              <a:rPr lang="pt-BR" b="1" dirty="0">
+                <a:solidFill>
+                  <a:schemeClr val="accent2"/>
+                </a:solidFill>
+              </a:rPr>
+              <a:t>transferências</a:t>
+            </a:r>
+            <a:r>
+              <a:rPr lang="pt-BR" dirty="0"/>
+              <a:t> de um exemplo </a:t>
+            </a:r>
+            <a:r>
+              <a:rPr lang="pt-BR" b="1" dirty="0">
+                <a:solidFill>
+                  <a:schemeClr val="accent2"/>
+                </a:solidFill>
+              </a:rPr>
+              <a:t>de um </a:t>
+            </a:r>
+            <a:r>
+              <a:rPr lang="pt-BR" b="1" i="1" dirty="0">
+                <a:solidFill>
+                  <a:schemeClr val="accent2"/>
+                </a:solidFill>
+              </a:rPr>
+              <a:t>cluster</a:t>
+            </a:r>
+            <a:r>
+              <a:rPr lang="pt-BR" b="1" dirty="0">
+                <a:solidFill>
+                  <a:schemeClr val="accent2"/>
+                </a:solidFill>
+              </a:rPr>
+              <a:t> para outro depende dos centroides iniciais</a:t>
+            </a:r>
+            <a:r>
+              <a:rPr lang="pt-BR" dirty="0"/>
+              <a:t>.</a:t>
+            </a:r>
+          </a:p>
+          <a:p>
+            <a:pPr lvl="1">
+              <a:buFont typeface="Wingdings" panose="05000000000000000000" pitchFamily="2" charset="2"/>
+              <a:buChar char="§"/>
+            </a:pPr>
+            <a:r>
+              <a:rPr lang="pt-BR" dirty="0"/>
+              <a:t>Todo o processo depende do ponto de partida.</a:t>
+            </a:r>
+          </a:p>
+          <a:p>
+            <a:r>
+              <a:rPr lang="pt-BR" dirty="0"/>
+              <a:t>Se os </a:t>
+            </a:r>
+            <a:r>
+              <a:rPr lang="pt-BR" b="1" dirty="0">
+                <a:solidFill>
+                  <a:srgbClr val="7030A0"/>
+                </a:solidFill>
+              </a:rPr>
+              <a:t>centroides iniciais </a:t>
+            </a:r>
+            <a:r>
+              <a:rPr lang="pt-BR" dirty="0"/>
+              <a:t>já forem </a:t>
+            </a:r>
+            <a:r>
+              <a:rPr lang="pt-BR" b="1" dirty="0">
+                <a:solidFill>
+                  <a:srgbClr val="7030A0"/>
+                </a:solidFill>
+              </a:rPr>
+              <a:t>perfeitos</a:t>
+            </a:r>
+            <a:r>
+              <a:rPr lang="pt-BR" dirty="0"/>
+              <a:t>, </a:t>
+            </a:r>
+            <a:r>
+              <a:rPr lang="pt-BR" b="1" dirty="0">
+                <a:solidFill>
+                  <a:srgbClr val="7030A0"/>
+                </a:solidFill>
+              </a:rPr>
+              <a:t>nenhum exemplo precisa ser atribuído a outro </a:t>
+            </a:r>
+            <a:r>
+              <a:rPr lang="pt-BR" b="1" i="1" dirty="0">
+                <a:solidFill>
+                  <a:srgbClr val="7030A0"/>
+                </a:solidFill>
+              </a:rPr>
+              <a:t>cluster</a:t>
+            </a:r>
+            <a:r>
+              <a:rPr lang="pt-BR" dirty="0"/>
+              <a:t> e o algoritmo é encerado.</a:t>
+            </a:r>
+          </a:p>
+        </p:txBody>
+      </p:sp>
+      <p:pic>
+        <p:nvPicPr>
+          <p:cNvPr id="4" name="Picture 2" descr="Quantum machine learning: distance estimation for k-means clustering | by  Sashwat Anagolum | Towards Data Science">
+            <a:extLst>
+              <a:ext uri="{FF2B5EF4-FFF2-40B4-BE49-F238E27FC236}">
+                <a16:creationId xmlns:a16="http://schemas.microsoft.com/office/drawing/2014/main" id="{375C1022-A6C8-5B17-2FC3-13794270B208}"/>
               </a:ext>
             </a:extLst>
           </p:cNvPr>
@@ -11301,7 +11464,7 @@
     </p:spTree>
     <p:extLst>
       <p:ext uri="{BB962C8B-B14F-4D97-AF65-F5344CB8AC3E}">
-        <p14:creationId xmlns:p14="http://schemas.microsoft.com/office/powerpoint/2010/main" val="3945627550"/>
+        <p14:creationId xmlns:p14="http://schemas.microsoft.com/office/powerpoint/2010/main" val="2772848034"/>
       </p:ext>
     </p:extLst>
   </p:cSld>
@@ -11319,7 +11482,7 @@
         <p:cNvPr id="1" name="">
           <a:extLst>
             <a:ext uri="{FF2B5EF4-FFF2-40B4-BE49-F238E27FC236}">
-              <a16:creationId xmlns:a16="http://schemas.microsoft.com/office/drawing/2014/main" xmlns="" id="{17B1A926-A8C8-946A-0DCB-7DA6EAEC80E3}"/>
+              <a16:creationId xmlns:a16="http://schemas.microsoft.com/office/drawing/2014/main" id="{AE9261F7-2166-8305-B7FE-ACE2323DFB84}"/>
             </a:ext>
           </a:extLst>
         </p:cNvPr>
@@ -11339,7 +11502,7 @@
           <p:cNvPr id="2" name="Título 1">
             <a:extLst>
               <a:ext uri="{FF2B5EF4-FFF2-40B4-BE49-F238E27FC236}">
-                <a16:creationId xmlns:a16="http://schemas.microsoft.com/office/drawing/2014/main" xmlns="" id="{602E24AF-FE6E-7B0A-D179-EB49A1DEB2F8}"/>
+                <a16:creationId xmlns:a16="http://schemas.microsoft.com/office/drawing/2014/main" id="{EB419064-8E96-0B34-B387-5724815C4DE4}"/>
               </a:ext>
             </a:extLst>
           </p:cNvPr>
@@ -11368,7 +11531,7 @@
           <p:cNvPr id="3" name="Espaço Reservado para Conteúdo 2">
             <a:extLst>
               <a:ext uri="{FF2B5EF4-FFF2-40B4-BE49-F238E27FC236}">
-                <a16:creationId xmlns:a16="http://schemas.microsoft.com/office/drawing/2014/main" xmlns="" id="{4E35406F-F929-EFBE-0B16-7CF919C6F311}"/>
+                <a16:creationId xmlns:a16="http://schemas.microsoft.com/office/drawing/2014/main" id="{CDAB57C6-5307-315D-C613-2F33992F1909}"/>
               </a:ext>
             </a:extLst>
           </p:cNvPr>
@@ -11382,7 +11545,7 @@
         <p:spPr>
           <a:xfrm>
             <a:off x="5421086" y="1825624"/>
-            <a:ext cx="6570022" cy="5032375"/>
+            <a:ext cx="6770914" cy="5032375"/>
           </a:xfrm>
         </p:spPr>
         <p:txBody>
@@ -11393,48 +11556,6 @@
           <a:p>
             <a:r>
               <a:rPr lang="pt-BR" dirty="0"/>
-              <a:t>Se os </a:t>
-            </a:r>
-            <a:r>
-              <a:rPr lang="pt-BR" b="1" dirty="0">
-                <a:solidFill>
-                  <a:srgbClr val="7030A0"/>
-                </a:solidFill>
-              </a:rPr>
-              <a:t>centroides iniciais </a:t>
-            </a:r>
-            <a:r>
-              <a:rPr lang="pt-BR" dirty="0"/>
-              <a:t>já forem </a:t>
-            </a:r>
-            <a:r>
-              <a:rPr lang="pt-BR" b="1" dirty="0">
-                <a:solidFill>
-                  <a:srgbClr val="7030A0"/>
-                </a:solidFill>
-              </a:rPr>
-              <a:t>perfeitos</a:t>
-            </a:r>
-            <a:r>
-              <a:rPr lang="pt-BR" dirty="0"/>
-              <a:t>, </a:t>
-            </a:r>
-            <a:r>
-              <a:rPr lang="pt-BR" b="1" dirty="0">
-                <a:solidFill>
-                  <a:srgbClr val="7030A0"/>
-                </a:solidFill>
-              </a:rPr>
-              <a:t>nenhum exemplo precisa ser atribuído a outro cluster</a:t>
-            </a:r>
-            <a:r>
-              <a:rPr lang="pt-BR" dirty="0"/>
-              <a:t> e o algoritmo é encerado.</a:t>
-            </a:r>
-          </a:p>
-          <a:p>
-            <a:r>
-              <a:rPr lang="pt-BR" dirty="0"/>
               <a:t>Portanto, a </a:t>
             </a:r>
             <a:r>
@@ -11504,6 +11625,23 @@
               <a:t>.</a:t>
             </a:r>
           </a:p>
+          <a:p>
+            <a:r>
+              <a:rPr lang="pt-BR" dirty="0"/>
+              <a:t>O algoritmo é </a:t>
+            </a:r>
+            <a:r>
+              <a:rPr lang="pt-BR" b="1" dirty="0"/>
+              <a:t>altamente sensível à escolha inicial dos centroides.</a:t>
+            </a:r>
+            <a:endParaRPr lang="pt-BR" dirty="0"/>
+          </a:p>
+          <a:p>
+            <a:pPr marL="0" indent="0">
+              <a:buNone/>
+            </a:pPr>
+            <a:endParaRPr lang="pt-BR" dirty="0"/>
+          </a:p>
         </p:txBody>
       </p:sp>
       <p:pic>
@@ -11511,7 +11649,7 @@
           <p:cNvPr id="4" name="Picture 2" descr="Quantum machine learning: distance estimation for k-means clustering | by  Sashwat Anagolum | Towards Data Science">
             <a:extLst>
               <a:ext uri="{FF2B5EF4-FFF2-40B4-BE49-F238E27FC236}">
-                <a16:creationId xmlns:a16="http://schemas.microsoft.com/office/drawing/2014/main" xmlns="" id="{375C1022-A6C8-5B17-2FC3-13794270B208}"/>
+                <a16:creationId xmlns:a16="http://schemas.microsoft.com/office/drawing/2014/main" id="{9210F1A3-8D21-F13E-A400-833A1EDE2998}"/>
               </a:ext>
             </a:extLst>
           </p:cNvPr>
@@ -11554,7 +11692,7 @@
     </p:spTree>
     <p:extLst>
       <p:ext uri="{BB962C8B-B14F-4D97-AF65-F5344CB8AC3E}">
-        <p14:creationId xmlns:p14="http://schemas.microsoft.com/office/powerpoint/2010/main" val="2772848034"/>
+        <p14:creationId xmlns:p14="http://schemas.microsoft.com/office/powerpoint/2010/main" val="2692400189"/>
       </p:ext>
     </p:extLst>
   </p:cSld>
@@ -11569,7 +11707,13 @@
   <p:cSld>
     <p:spTree>
       <p:nvGrpSpPr>
-        <p:cNvPr id="1" name=""/>
+        <p:cNvPr id="1" name="">
+          <a:extLst>
+            <a:ext uri="{FF2B5EF4-FFF2-40B4-BE49-F238E27FC236}">
+              <a16:creationId xmlns:a16="http://schemas.microsoft.com/office/drawing/2014/main" id="{4B1B77C4-9B17-7A8C-9D74-1E6EDF9D99AB}"/>
+            </a:ext>
+          </a:extLst>
+        </p:cNvPr>
         <p:cNvGrpSpPr/>
         <p:nvPr/>
       </p:nvGrpSpPr>
@@ -11583,26 +11727,13 @@
       </p:grpSpPr>
       <p:sp>
         <p:nvSpPr>
-          <p:cNvPr id="2" name="Título 1"/>
-          <p:cNvSpPr>
-            <a:spLocks noGrp="1"/>
-          </p:cNvSpPr>
-          <p:nvPr>
-            <p:ph type="title"/>
-          </p:nvPr>
-        </p:nvSpPr>
-        <p:spPr/>
-        <p:txBody>
-          <a:bodyPr/>
-          <a:lstStyle/>
-          <a:p>
-            <a:endParaRPr lang="pt-BR"/>
-          </a:p>
-        </p:txBody>
-      </p:sp>
-      <p:sp>
-        <p:nvSpPr>
-          <p:cNvPr id="3" name="Espaço Reservado para Conteúdo 2"/>
+          <p:cNvPr id="3" name="Espaço Reservado para Conteúdo 2">
+            <a:extLst>
+              <a:ext uri="{FF2B5EF4-FFF2-40B4-BE49-F238E27FC236}">
+                <a16:creationId xmlns:a16="http://schemas.microsoft.com/office/drawing/2014/main" id="{33358A61-5705-A1F7-E051-797E22A8C17B}"/>
+              </a:ext>
+            </a:extLst>
+          </p:cNvPr>
           <p:cNvSpPr>
             <a:spLocks noGrp="1"/>
           </p:cNvSpPr>
@@ -11610,39 +11741,40 @@
             <p:ph idx="1"/>
           </p:nvPr>
         </p:nvSpPr>
-        <p:spPr/>
+        <p:spPr>
+          <a:xfrm>
+            <a:off x="838200" y="2594292"/>
+            <a:ext cx="10515600" cy="1865948"/>
+          </a:xfrm>
+        </p:spPr>
         <p:txBody>
-          <a:bodyPr/>
+          <a:bodyPr>
+            <a:normAutofit/>
+          </a:bodyPr>
           <a:lstStyle/>
           <a:p>
-            <a:r>
-              <a:rPr lang="pt-BR" dirty="0"/>
-              <a:t>Aí surge uma dúvida. </a:t>
-            </a:r>
-          </a:p>
-          <a:p>
-            <a:r>
-              <a:rPr lang="pt-BR" dirty="0"/>
-              <a:t>Quantos </a:t>
-            </a:r>
-            <a:r>
-              <a:rPr lang="pt-BR" i="1" dirty="0"/>
+            <a:pPr marL="0" indent="0" algn="ctr">
+              <a:buNone/>
+            </a:pPr>
+            <a:r>
+              <a:rPr lang="pt-BR" sz="5400" dirty="0"/>
+              <a:t>Como definimos o número de </a:t>
+            </a:r>
+            <a:r>
+              <a:rPr lang="pt-BR" sz="5400" i="1" dirty="0"/>
               <a:t>clusters</a:t>
             </a:r>
             <a:r>
-              <a:rPr lang="pt-BR" dirty="0"/>
-              <a:t> um conjunto de dados contém?</a:t>
-            </a:r>
-          </a:p>
-          <a:p>
-            <a:endParaRPr lang="pt-BR" dirty="0"/>
+              <a:rPr lang="pt-BR" sz="5400" dirty="0"/>
+              <a:t>?</a:t>
+            </a:r>
           </a:p>
         </p:txBody>
       </p:sp>
     </p:spTree>
     <p:extLst>
       <p:ext uri="{BB962C8B-B14F-4D97-AF65-F5344CB8AC3E}">
-        <p14:creationId xmlns:p14="http://schemas.microsoft.com/office/powerpoint/2010/main" val="1550317019"/>
+        <p14:creationId xmlns:p14="http://schemas.microsoft.com/office/powerpoint/2010/main" val="828297064"/>
       </p:ext>
     </p:extLst>
   </p:cSld>
@@ -11674,7 +11806,7 @@
           <p:cNvPr id="6" name="TextBox 5">
             <a:extLst>
               <a:ext uri="{FF2B5EF4-FFF2-40B4-BE49-F238E27FC236}">
-                <a16:creationId xmlns:a16="http://schemas.microsoft.com/office/drawing/2014/main" xmlns="" id="{7A9955D7-EF0A-C073-CA9C-EC6A396485B8}"/>
+                <a16:creationId xmlns:a16="http://schemas.microsoft.com/office/drawing/2014/main" id="{7A9955D7-EF0A-C073-CA9C-EC6A396485B8}"/>
               </a:ext>
             </a:extLst>
           </p:cNvPr>
@@ -11723,7 +11855,7 @@
           <p:cNvPr id="3" name="Picture 2">
             <a:extLst>
               <a:ext uri="{FF2B5EF4-FFF2-40B4-BE49-F238E27FC236}">
-                <a16:creationId xmlns:a16="http://schemas.microsoft.com/office/drawing/2014/main" xmlns="" id="{9863C601-9BD1-3DD0-9219-97CD9BA5DC5A}"/>
+                <a16:creationId xmlns:a16="http://schemas.microsoft.com/office/drawing/2014/main" id="{9863C601-9BD1-3DD0-9219-97CD9BA5DC5A}"/>
               </a:ext>
             </a:extLst>
           </p:cNvPr>
@@ -11789,7 +11921,7 @@
           <p:cNvPr id="2" name="Title 1">
             <a:extLst>
               <a:ext uri="{FF2B5EF4-FFF2-40B4-BE49-F238E27FC236}">
-                <a16:creationId xmlns:a16="http://schemas.microsoft.com/office/drawing/2014/main" xmlns="" id="{0719C974-9A37-ED60-45B8-7CF90E038097}"/>
+                <a16:creationId xmlns:a16="http://schemas.microsoft.com/office/drawing/2014/main" id="{D33574C0-6E04-C0DD-EAA0-CBB82A39C711}"/>
               </a:ext>
             </a:extLst>
           </p:cNvPr>
@@ -11805,69 +11937,208 @@
           <a:bodyPr/>
           <a:lstStyle/>
           <a:p>
-            <a:endParaRPr lang="en-US"/>
+            <a:r>
+              <a:rPr lang="pt-BR" dirty="0"/>
+              <a:t>Método do cotovelo</a:t>
+            </a:r>
+            <a:endParaRPr lang="en-US" dirty="0"/>
           </a:p>
         </p:txBody>
       </p:sp>
-      <p:sp>
-        <p:nvSpPr>
-          <p:cNvPr id="3" name="Content Placeholder 2">
+      <mc:AlternateContent xmlns:mc="http://schemas.openxmlformats.org/markup-compatibility/2006">
+        <mc:Choice xmlns:a14="http://schemas.microsoft.com/office/drawing/2010/main" Requires="a14">
+          <p:sp>
+            <p:nvSpPr>
+              <p:cNvPr id="3" name="Content Placeholder 2">
+                <a:extLst>
+                  <a:ext uri="{FF2B5EF4-FFF2-40B4-BE49-F238E27FC236}">
+                    <a16:creationId xmlns:a16="http://schemas.microsoft.com/office/drawing/2014/main" id="{9BBD5BC8-7DE0-62E2-804E-33545D87626B}"/>
+                  </a:ext>
+                </a:extLst>
+              </p:cNvPr>
+              <p:cNvSpPr>
+                <a:spLocks noGrp="1"/>
+              </p:cNvSpPr>
+              <p:nvPr>
+                <p:ph idx="1"/>
+              </p:nvPr>
+            </p:nvSpPr>
+            <p:spPr>
+              <a:xfrm>
+                <a:off x="5943600" y="1825624"/>
+                <a:ext cx="6248400" cy="5032375"/>
+              </a:xfrm>
+            </p:spPr>
+            <p:txBody>
+              <a:bodyPr/>
+              <a:lstStyle/>
+              <a:p>
+                <a:r>
+                  <a:rPr lang="pt-BR" dirty="0"/>
+                  <a:t>O método busca o ponto onde </a:t>
+                </a:r>
+                <a:r>
+                  <a:rPr lang="pt-BR" b="1" dirty="0"/>
+                  <a:t>a melhoria do aumento de </a:t>
+                </a:r>
+                <a:r>
+                  <a:rPr lang="pt-BR" b="1" i="1" dirty="0"/>
+                  <a:t>clusters</a:t>
+                </a:r>
+                <a:r>
+                  <a:rPr lang="pt-BR" b="1" dirty="0"/>
+                  <a:t> começa a diminuir significativamente</a:t>
+                </a:r>
+                <a:r>
+                  <a:rPr lang="pt-BR" dirty="0"/>
+                  <a:t>.</a:t>
+                </a:r>
+              </a:p>
+              <a:p>
+                <a:r>
+                  <a:rPr lang="pt-BR" dirty="0"/>
+                  <a:t>Ou seja, aumentar </a:t>
+                </a:r>
+                <a14:m>
+                  <m:oMath xmlns:m="http://schemas.openxmlformats.org/officeDocument/2006/math">
+                    <m:r>
+                      <a:rPr lang="pt-BR" b="0" i="1" smtClean="0">
+                        <a:latin typeface="Cambria Math" panose="02040503050406030204" pitchFamily="18" charset="0"/>
+                      </a:rPr>
+                      <m:t>𝑘</m:t>
+                    </m:r>
+                  </m:oMath>
+                </a14:m>
+                <a:r>
+                  <a:rPr lang="pt-BR" dirty="0"/>
+                  <a:t> sempre melhora o ajuste, mas chega um ponto em que o ganho é </a:t>
+                </a:r>
+                <a:r>
+                  <a:rPr lang="pt-BR" b="1" dirty="0"/>
+                  <a:t>marginal</a:t>
+                </a:r>
+                <a:r>
+                  <a:rPr lang="pt-BR" dirty="0"/>
+                  <a:t>.</a:t>
+                </a:r>
+              </a:p>
+              <a:p>
+                <a:r>
+                  <a:rPr lang="pt-BR" dirty="0"/>
+                  <a:t>Esse ponto é o “</a:t>
+                </a:r>
+                <a:r>
+                  <a:rPr lang="pt-BR" b="1" dirty="0"/>
+                  <a:t>cotovelo” da curva.</a:t>
+                </a:r>
+              </a:p>
+              <a:p>
+                <a:r>
+                  <a:rPr lang="pt-BR" dirty="0"/>
+                  <a:t>Que métrica usamos para plotar a curva?</a:t>
+                </a:r>
+              </a:p>
+              <a:p>
+                <a:endParaRPr lang="en-US" dirty="0"/>
+              </a:p>
+            </p:txBody>
+          </p:sp>
+        </mc:Choice>
+        <mc:Fallback>
+          <p:sp>
+            <p:nvSpPr>
+              <p:cNvPr id="3" name="Content Placeholder 2">
+                <a:extLst>
+                  <a:ext uri="{FF2B5EF4-FFF2-40B4-BE49-F238E27FC236}">
+                    <a16:creationId xmlns:a16="http://schemas.microsoft.com/office/drawing/2014/main" id="{9BBD5BC8-7DE0-62E2-804E-33545D87626B}"/>
+                  </a:ext>
+                </a:extLst>
+              </p:cNvPr>
+              <p:cNvSpPr>
+                <a:spLocks noGrp="1" noRot="1" noChangeAspect="1" noMove="1" noResize="1" noEditPoints="1" noAdjustHandles="1" noChangeArrowheads="1" noChangeShapeType="1" noTextEdit="1"/>
+              </p:cNvSpPr>
+              <p:nvPr>
+                <p:ph idx="1"/>
+              </p:nvPr>
+            </p:nvSpPr>
+            <p:spPr>
+              <a:xfrm>
+                <a:off x="5943600" y="1825624"/>
+                <a:ext cx="6248400" cy="5032375"/>
+              </a:xfrm>
+              <a:blipFill>
+                <a:blip r:embed="rId2"/>
+                <a:stretch>
+                  <a:fillRect l="-1756" t="-1937" r="-390"/>
+                </a:stretch>
+              </a:blipFill>
+            </p:spPr>
+            <p:txBody>
+              <a:bodyPr/>
+              <a:lstStyle/>
+              <a:p>
+                <a:r>
+                  <a:rPr lang="en-US">
+                    <a:noFill/>
+                  </a:rPr>
+                  <a:t> </a:t>
+                </a:r>
+              </a:p>
+            </p:txBody>
+          </p:sp>
+        </mc:Fallback>
+      </mc:AlternateContent>
+      <p:pic>
+        <p:nvPicPr>
+          <p:cNvPr id="1026" name="Picture 2" descr="K-Means: Getting the Optimal Number of Clusters- Analytics Vidhya">
             <a:extLst>
               <a:ext uri="{FF2B5EF4-FFF2-40B4-BE49-F238E27FC236}">
-                <a16:creationId xmlns:a16="http://schemas.microsoft.com/office/drawing/2014/main" xmlns="" id="{D812A04D-0F4A-CB81-D7DF-C4B0B13163E8}"/>
+                <a16:creationId xmlns:a16="http://schemas.microsoft.com/office/drawing/2014/main" id="{5704EB20-2972-D237-4FE5-23EBC8E55F97}"/>
               </a:ext>
             </a:extLst>
           </p:cNvPr>
-          <p:cNvSpPr>
-            <a:spLocks noGrp="1"/>
-          </p:cNvSpPr>
-          <p:nvPr>
-            <p:ph idx="1"/>
-          </p:nvPr>
-        </p:nvSpPr>
-        <p:spPr/>
-        <p:txBody>
-          <a:bodyPr>
-            <a:normAutofit/>
-          </a:bodyPr>
-          <a:lstStyle/>
-          <a:p>
-            <a:r>
-              <a:rPr lang="pt-BR" sz="6000" b="1" dirty="0">
+          <p:cNvPicPr>
+            <a:picLocks noChangeAspect="1" noChangeArrowheads="1"/>
+          </p:cNvPicPr>
+          <p:nvPr/>
+        </p:nvPicPr>
+        <p:blipFill>
+          <a:blip r:embed="rId3">
+            <a:extLst>
+              <a:ext uri="{28A0092B-C50C-407E-A947-70E740481C1C}">
+                <a14:useLocalDpi xmlns:a14="http://schemas.microsoft.com/office/drawing/2010/main" val="0"/>
+              </a:ext>
+            </a:extLst>
+          </a:blip>
+          <a:srcRect/>
+          <a:stretch>
+            <a:fillRect/>
+          </a:stretch>
+        </p:blipFill>
+        <p:spPr bwMode="auto">
+          <a:xfrm>
+            <a:off x="584200" y="2316480"/>
+            <a:ext cx="4521890" cy="3323589"/>
+          </a:xfrm>
+          <a:prstGeom prst="rect">
+            <a:avLst/>
+          </a:prstGeom>
+          <a:noFill/>
+          <a:extLst>
+            <a:ext uri="{909E8E84-426E-40DD-AFC4-6F175D3DCCD1}">
+              <a14:hiddenFill xmlns:a14="http://schemas.microsoft.com/office/drawing/2010/main">
                 <a:solidFill>
-                  <a:srgbClr val="FF0000"/>
+                  <a:srgbClr val="FFFFFF"/>
                 </a:solidFill>
-              </a:rPr>
-              <a:t>Quais as formas usadas para definir o melhor número de </a:t>
-            </a:r>
-            <a:r>
-              <a:rPr lang="pt-BR" sz="6000" b="1" dirty="0" err="1">
-                <a:solidFill>
-                  <a:srgbClr val="FF0000"/>
-                </a:solidFill>
-              </a:rPr>
-              <a:t>clsuters</a:t>
-            </a:r>
-            <a:r>
-              <a:rPr lang="pt-BR" sz="6000" b="1" dirty="0">
-                <a:solidFill>
-                  <a:srgbClr val="FF0000"/>
-                </a:solidFill>
-              </a:rPr>
-              <a:t>???</a:t>
-            </a:r>
-            <a:endParaRPr lang="en-US" sz="6000" b="1" dirty="0">
-              <a:solidFill>
-                <a:srgbClr val="FF0000"/>
-              </a:solidFill>
-            </a:endParaRPr>
-          </a:p>
-        </p:txBody>
-      </p:sp>
+              </a14:hiddenFill>
+            </a:ext>
+          </a:extLst>
+        </p:spPr>
+      </p:pic>
     </p:spTree>
     <p:extLst>
       <p:ext uri="{BB962C8B-B14F-4D97-AF65-F5344CB8AC3E}">
-        <p14:creationId xmlns:p14="http://schemas.microsoft.com/office/powerpoint/2010/main" val="1271403432"/>
+        <p14:creationId xmlns:p14="http://schemas.microsoft.com/office/powerpoint/2010/main" val="2253543936"/>
       </p:ext>
     </p:extLst>
   </p:cSld>
@@ -11878,6 +12149,845 @@
 </file>
 
 <file path=ppt/slides/slide31.xml><?xml version="1.0" encoding="utf-8"?>
+<p:sld xmlns:a="http://schemas.openxmlformats.org/drawingml/2006/main" xmlns:r="http://schemas.openxmlformats.org/officeDocument/2006/relationships" xmlns:p="http://schemas.openxmlformats.org/presentationml/2006/main">
+  <p:cSld>
+    <p:spTree>
+      <p:nvGrpSpPr>
+        <p:cNvPr id="1" name="">
+          <a:extLst>
+            <a:ext uri="{FF2B5EF4-FFF2-40B4-BE49-F238E27FC236}">
+              <a16:creationId xmlns:a16="http://schemas.microsoft.com/office/drawing/2014/main" id="{87908164-8DED-57E8-103F-9479D1C12B23}"/>
+            </a:ext>
+          </a:extLst>
+        </p:cNvPr>
+        <p:cNvGrpSpPr/>
+        <p:nvPr/>
+      </p:nvGrpSpPr>
+      <p:grpSpPr>
+        <a:xfrm>
+          <a:off x="0" y="0"/>
+          <a:ext cx="0" cy="0"/>
+          <a:chOff x="0" y="0"/>
+          <a:chExt cx="0" cy="0"/>
+        </a:xfrm>
+      </p:grpSpPr>
+      <p:sp>
+        <p:nvSpPr>
+          <p:cNvPr id="2" name="Title 1">
+            <a:extLst>
+              <a:ext uri="{FF2B5EF4-FFF2-40B4-BE49-F238E27FC236}">
+                <a16:creationId xmlns:a16="http://schemas.microsoft.com/office/drawing/2014/main" id="{B5A49F49-61D7-0208-3364-6E7A9D6433FC}"/>
+              </a:ext>
+            </a:extLst>
+          </p:cNvPr>
+          <p:cNvSpPr>
+            <a:spLocks noGrp="1"/>
+          </p:cNvSpPr>
+          <p:nvPr>
+            <p:ph type="title"/>
+          </p:nvPr>
+        </p:nvSpPr>
+        <p:spPr/>
+        <p:txBody>
+          <a:bodyPr/>
+          <a:lstStyle/>
+          <a:p>
+            <a:r>
+              <a:rPr lang="pt-BR" dirty="0"/>
+              <a:t>Soma dos quadrados </a:t>
+            </a:r>
+            <a:r>
+              <a:rPr lang="pt-BR" dirty="0" err="1"/>
+              <a:t>intra-</a:t>
+            </a:r>
+            <a:r>
+              <a:rPr lang="pt-BR" i="1" dirty="0" err="1"/>
+              <a:t>clusters</a:t>
+            </a:r>
+            <a:endParaRPr lang="en-US" dirty="0"/>
+          </a:p>
+        </p:txBody>
+      </p:sp>
+      <mc:AlternateContent xmlns:mc="http://schemas.openxmlformats.org/markup-compatibility/2006">
+        <mc:Choice xmlns:a14="http://schemas.microsoft.com/office/drawing/2010/main" Requires="a14">
+          <p:sp>
+            <p:nvSpPr>
+              <p:cNvPr id="3" name="Content Placeholder 2">
+                <a:extLst>
+                  <a:ext uri="{FF2B5EF4-FFF2-40B4-BE49-F238E27FC236}">
+                    <a16:creationId xmlns:a16="http://schemas.microsoft.com/office/drawing/2014/main" id="{62BBDDAA-8E03-1533-DC27-B212B34350D5}"/>
+                  </a:ext>
+                </a:extLst>
+              </p:cNvPr>
+              <p:cNvSpPr>
+                <a:spLocks noGrp="1"/>
+              </p:cNvSpPr>
+              <p:nvPr>
+                <p:ph idx="1"/>
+              </p:nvPr>
+            </p:nvSpPr>
+            <p:spPr>
+              <a:xfrm>
+                <a:off x="5943600" y="1825624"/>
+                <a:ext cx="6248400" cy="5032375"/>
+              </a:xfrm>
+            </p:spPr>
+            <p:txBody>
+              <a:bodyPr>
+                <a:normAutofit/>
+              </a:bodyPr>
+              <a:lstStyle/>
+              <a:p>
+                <a:r>
+                  <a:rPr lang="pt-BR" dirty="0"/>
+                  <a:t>Usa-se a soma dos quadrados </a:t>
+                </a:r>
+                <a:r>
+                  <a:rPr lang="pt-BR" dirty="0" err="1"/>
+                  <a:t>intra-</a:t>
+                </a:r>
+                <a:r>
+                  <a:rPr lang="pt-BR" i="1" dirty="0" err="1"/>
+                  <a:t>clusters</a:t>
+                </a:r>
+                <a:r>
+                  <a:rPr lang="pt-BR" dirty="0"/>
+                  <a:t>, também conhecida como inércia</a:t>
+                </a:r>
+              </a:p>
+              <a:p>
+                <a:pPr marL="0" indent="0">
+                  <a:buNone/>
+                </a:pPr>
+                <a14:m>
+                  <m:oMathPara xmlns:m="http://schemas.openxmlformats.org/officeDocument/2006/math">
+                    <m:oMathParaPr>
+                      <m:jc m:val="centerGroup"/>
+                    </m:oMathParaPr>
+                    <m:oMath xmlns:m="http://schemas.openxmlformats.org/officeDocument/2006/math">
+                      <m:r>
+                        <a:rPr lang="pt-BR" b="0" i="1" smtClean="0">
+                          <a:latin typeface="Cambria Math" panose="02040503050406030204" pitchFamily="18" charset="0"/>
+                        </a:rPr>
+                        <m:t>𝐼</m:t>
+                      </m:r>
+                      <m:r>
+                        <a:rPr lang="pt-BR" b="0" i="1" smtClean="0">
+                          <a:latin typeface="Cambria Math" panose="02040503050406030204" pitchFamily="18" charset="0"/>
+                        </a:rPr>
+                        <m:t>(</m:t>
+                      </m:r>
+                      <m:r>
+                        <a:rPr lang="pt-BR" b="0" i="1" smtClean="0">
+                          <a:latin typeface="Cambria Math" panose="02040503050406030204" pitchFamily="18" charset="0"/>
+                        </a:rPr>
+                        <m:t>𝑘</m:t>
+                      </m:r>
+                      <m:r>
+                        <a:rPr lang="pt-BR" b="0" i="1" smtClean="0">
+                          <a:latin typeface="Cambria Math" panose="02040503050406030204" pitchFamily="18" charset="0"/>
+                        </a:rPr>
+                        <m:t>)=</m:t>
+                      </m:r>
+                      <m:nary>
+                        <m:naryPr>
+                          <m:chr m:val="∑"/>
+                          <m:ctrlPr>
+                            <a:rPr lang="pt-BR" b="0" i="1" smtClean="0">
+                              <a:latin typeface="Cambria Math" panose="02040503050406030204" pitchFamily="18" charset="0"/>
+                            </a:rPr>
+                          </m:ctrlPr>
+                        </m:naryPr>
+                        <m:sub>
+                          <m:r>
+                            <m:rPr>
+                              <m:brk m:alnAt="23"/>
+                            </m:rPr>
+                            <a:rPr lang="pt-BR" b="0" i="1" smtClean="0">
+                              <a:latin typeface="Cambria Math" panose="02040503050406030204" pitchFamily="18" charset="0"/>
+                            </a:rPr>
+                            <m:t>𝑖</m:t>
+                          </m:r>
+                          <m:r>
+                            <a:rPr lang="pt-BR" b="0" i="1" smtClean="0">
+                              <a:latin typeface="Cambria Math" panose="02040503050406030204" pitchFamily="18" charset="0"/>
+                            </a:rPr>
+                            <m:t>=1</m:t>
+                          </m:r>
+                        </m:sub>
+                        <m:sup>
+                          <m:r>
+                            <a:rPr lang="pt-BR" b="0" i="1" smtClean="0">
+                              <a:latin typeface="Cambria Math" panose="02040503050406030204" pitchFamily="18" charset="0"/>
+                            </a:rPr>
+                            <m:t>𝑘</m:t>
+                          </m:r>
+                        </m:sup>
+                        <m:e>
+                          <m:nary>
+                            <m:naryPr>
+                              <m:chr m:val="∑"/>
+                              <m:supHide m:val="on"/>
+                              <m:ctrlPr>
+                                <a:rPr lang="pt-BR" b="0" i="1" smtClean="0">
+                                  <a:latin typeface="Cambria Math" panose="02040503050406030204" pitchFamily="18" charset="0"/>
+                                </a:rPr>
+                              </m:ctrlPr>
+                            </m:naryPr>
+                            <m:sub>
+                              <m:r>
+                                <m:rPr>
+                                  <m:brk m:alnAt="7"/>
+                                </m:rPr>
+                                <a:rPr lang="pt-BR" b="0" i="1" smtClean="0">
+                                  <a:latin typeface="Cambria Math" panose="02040503050406030204" pitchFamily="18" charset="0"/>
+                                </a:rPr>
+                                <m:t>𝑥</m:t>
+                              </m:r>
+                              <m:r>
+                                <a:rPr lang="pt-BR" b="0" i="1" smtClean="0">
+                                  <a:latin typeface="Cambria Math" panose="02040503050406030204" pitchFamily="18" charset="0"/>
+                                  <a:ea typeface="Cambria Math" panose="02040503050406030204" pitchFamily="18" charset="0"/>
+                                </a:rPr>
+                                <m:t>∈</m:t>
+                              </m:r>
+                              <m:sSub>
+                                <m:sSubPr>
+                                  <m:ctrlPr>
+                                    <a:rPr lang="pt-BR" b="0" i="1" smtClean="0">
+                                      <a:latin typeface="Cambria Math" panose="02040503050406030204" pitchFamily="18" charset="0"/>
+                                      <a:ea typeface="Cambria Math" panose="02040503050406030204" pitchFamily="18" charset="0"/>
+                                    </a:rPr>
+                                  </m:ctrlPr>
+                                </m:sSubPr>
+                                <m:e>
+                                  <m:r>
+                                    <a:rPr lang="pt-BR" b="0" i="1" smtClean="0">
+                                      <a:latin typeface="Cambria Math" panose="02040503050406030204" pitchFamily="18" charset="0"/>
+                                      <a:ea typeface="Cambria Math" panose="02040503050406030204" pitchFamily="18" charset="0"/>
+                                    </a:rPr>
+                                    <m:t>𝐶</m:t>
+                                  </m:r>
+                                </m:e>
+                                <m:sub>
+                                  <m:r>
+                                    <a:rPr lang="pt-BR" b="0" i="1" smtClean="0">
+                                      <a:latin typeface="Cambria Math" panose="02040503050406030204" pitchFamily="18" charset="0"/>
+                                      <a:ea typeface="Cambria Math" panose="02040503050406030204" pitchFamily="18" charset="0"/>
+                                    </a:rPr>
+                                    <m:t>𝑖</m:t>
+                                  </m:r>
+                                </m:sub>
+                              </m:sSub>
+                            </m:sub>
+                            <m:sup/>
+                            <m:e>
+                              <m:sSup>
+                                <m:sSupPr>
+                                  <m:ctrlPr>
+                                    <a:rPr lang="pt-BR" b="0" i="1" smtClean="0">
+                                      <a:latin typeface="Cambria Math" panose="02040503050406030204" pitchFamily="18" charset="0"/>
+                                    </a:rPr>
+                                  </m:ctrlPr>
+                                </m:sSupPr>
+                                <m:e>
+                                  <m:d>
+                                    <m:dPr>
+                                      <m:begChr m:val="‖"/>
+                                      <m:endChr m:val="‖"/>
+                                      <m:ctrlPr>
+                                        <a:rPr lang="pt-BR" b="0" i="1" smtClean="0">
+                                          <a:latin typeface="Cambria Math" panose="02040503050406030204" pitchFamily="18" charset="0"/>
+                                        </a:rPr>
+                                      </m:ctrlPr>
+                                    </m:dPr>
+                                    <m:e>
+                                      <m:r>
+                                        <a:rPr lang="pt-BR" b="0" i="1" smtClean="0">
+                                          <a:latin typeface="Cambria Math" panose="02040503050406030204" pitchFamily="18" charset="0"/>
+                                        </a:rPr>
+                                        <m:t>𝑥</m:t>
+                                      </m:r>
+                                      <m:r>
+                                        <a:rPr lang="pt-BR" b="0" i="1" smtClean="0">
+                                          <a:latin typeface="Cambria Math" panose="02040503050406030204" pitchFamily="18" charset="0"/>
+                                        </a:rPr>
+                                        <m:t>−</m:t>
+                                      </m:r>
+                                      <m:sSub>
+                                        <m:sSubPr>
+                                          <m:ctrlPr>
+                                            <a:rPr lang="pt-BR" i="1">
+                                              <a:latin typeface="Cambria Math" panose="02040503050406030204" pitchFamily="18" charset="0"/>
+                                            </a:rPr>
+                                          </m:ctrlPr>
+                                        </m:sSubPr>
+                                        <m:e>
+                                          <m:r>
+                                            <a:rPr lang="pt-BR" i="1" smtClean="0">
+                                              <a:latin typeface="Cambria Math" panose="02040503050406030204" pitchFamily="18" charset="0"/>
+                                              <a:ea typeface="Cambria Math" panose="02040503050406030204" pitchFamily="18" charset="0"/>
+                                            </a:rPr>
+                                            <m:t>𝜇</m:t>
+                                          </m:r>
+                                        </m:e>
+                                        <m:sub>
+                                          <m:r>
+                                            <a:rPr lang="pt-BR" b="0" i="1" smtClean="0">
+                                              <a:latin typeface="Cambria Math" panose="02040503050406030204" pitchFamily="18" charset="0"/>
+                                            </a:rPr>
+                                            <m:t>𝑖</m:t>
+                                          </m:r>
+                                        </m:sub>
+                                      </m:sSub>
+                                    </m:e>
+                                  </m:d>
+                                </m:e>
+                                <m:sup>
+                                  <m:r>
+                                    <a:rPr lang="pt-BR" b="0" i="1" smtClean="0">
+                                      <a:latin typeface="Cambria Math" panose="02040503050406030204" pitchFamily="18" charset="0"/>
+                                    </a:rPr>
+                                    <m:t>2</m:t>
+                                  </m:r>
+                                </m:sup>
+                              </m:sSup>
+                            </m:e>
+                          </m:nary>
+                        </m:e>
+                      </m:nary>
+                    </m:oMath>
+                  </m:oMathPara>
+                </a14:m>
+                <a:endParaRPr lang="pt-BR" dirty="0"/>
+              </a:p>
+              <a:p>
+                <a:pPr marL="0" indent="0">
+                  <a:buNone/>
+                </a:pPr>
+                <a:r>
+                  <a:rPr lang="pt-BR" dirty="0"/>
+                  <a:t>onde </a:t>
+                </a:r>
+                <a14:m>
+                  <m:oMath xmlns:m="http://schemas.openxmlformats.org/officeDocument/2006/math">
+                    <m:sSub>
+                      <m:sSubPr>
+                        <m:ctrlPr>
+                          <a:rPr lang="pt-BR" i="1">
+                            <a:latin typeface="Cambria Math" panose="02040503050406030204" pitchFamily="18" charset="0"/>
+                          </a:rPr>
+                        </m:ctrlPr>
+                      </m:sSubPr>
+                      <m:e>
+                        <m:r>
+                          <a:rPr lang="pt-BR" i="1">
+                            <a:latin typeface="Cambria Math" panose="02040503050406030204" pitchFamily="18" charset="0"/>
+                            <a:ea typeface="Cambria Math" panose="02040503050406030204" pitchFamily="18" charset="0"/>
+                          </a:rPr>
+                          <m:t>𝜇</m:t>
+                        </m:r>
+                      </m:e>
+                      <m:sub>
+                        <m:r>
+                          <a:rPr lang="pt-BR" i="1">
+                            <a:latin typeface="Cambria Math" panose="02040503050406030204" pitchFamily="18" charset="0"/>
+                          </a:rPr>
+                          <m:t>𝑖</m:t>
+                        </m:r>
+                      </m:sub>
+                    </m:sSub>
+                  </m:oMath>
+                </a14:m>
+                <a:r>
+                  <a:rPr lang="pt-BR" dirty="0"/>
+                  <a:t> é o centroide do </a:t>
+                </a:r>
+                <a14:m>
+                  <m:oMath xmlns:m="http://schemas.openxmlformats.org/officeDocument/2006/math">
+                    <m:r>
+                      <a:rPr lang="pt-BR" b="0" i="1" smtClean="0">
+                        <a:latin typeface="Cambria Math" panose="02040503050406030204" pitchFamily="18" charset="0"/>
+                      </a:rPr>
+                      <m:t>𝑖</m:t>
+                    </m:r>
+                  </m:oMath>
+                </a14:m>
+                <a:r>
+                  <a:rPr lang="pt-BR" dirty="0"/>
+                  <a:t>-ésimo </a:t>
+                </a:r>
+                <a:r>
+                  <a:rPr lang="pt-BR" i="1" dirty="0"/>
+                  <a:t>cluster</a:t>
+                </a:r>
+                <a:r>
+                  <a:rPr lang="pt-BR" dirty="0"/>
+                  <a:t> e </a:t>
+                </a:r>
+                <a14:m>
+                  <m:oMath xmlns:m="http://schemas.openxmlformats.org/officeDocument/2006/math">
+                    <m:sSup>
+                      <m:sSupPr>
+                        <m:ctrlPr>
+                          <a:rPr lang="pt-BR" i="1">
+                            <a:latin typeface="Cambria Math" panose="02040503050406030204" pitchFamily="18" charset="0"/>
+                          </a:rPr>
+                        </m:ctrlPr>
+                      </m:sSupPr>
+                      <m:e>
+                        <m:d>
+                          <m:dPr>
+                            <m:begChr m:val="‖"/>
+                            <m:endChr m:val="‖"/>
+                            <m:ctrlPr>
+                              <a:rPr lang="pt-BR" i="1">
+                                <a:latin typeface="Cambria Math" panose="02040503050406030204" pitchFamily="18" charset="0"/>
+                              </a:rPr>
+                            </m:ctrlPr>
+                          </m:dPr>
+                          <m:e>
+                            <m:r>
+                              <a:rPr lang="pt-BR" i="1">
+                                <a:latin typeface="Cambria Math" panose="02040503050406030204" pitchFamily="18" charset="0"/>
+                              </a:rPr>
+                              <m:t>𝑥</m:t>
+                            </m:r>
+                            <m:r>
+                              <a:rPr lang="pt-BR" i="1">
+                                <a:latin typeface="Cambria Math" panose="02040503050406030204" pitchFamily="18" charset="0"/>
+                              </a:rPr>
+                              <m:t>−</m:t>
+                            </m:r>
+                            <m:sSub>
+                              <m:sSubPr>
+                                <m:ctrlPr>
+                                  <a:rPr lang="pt-BR" i="1">
+                                    <a:latin typeface="Cambria Math" panose="02040503050406030204" pitchFamily="18" charset="0"/>
+                                  </a:rPr>
+                                </m:ctrlPr>
+                              </m:sSubPr>
+                              <m:e>
+                                <m:r>
+                                  <a:rPr lang="pt-BR" i="1">
+                                    <a:latin typeface="Cambria Math" panose="02040503050406030204" pitchFamily="18" charset="0"/>
+                                    <a:ea typeface="Cambria Math" panose="02040503050406030204" pitchFamily="18" charset="0"/>
+                                  </a:rPr>
+                                  <m:t>𝜇</m:t>
+                                </m:r>
+                              </m:e>
+                              <m:sub>
+                                <m:r>
+                                  <a:rPr lang="pt-BR" i="1">
+                                    <a:latin typeface="Cambria Math" panose="02040503050406030204" pitchFamily="18" charset="0"/>
+                                  </a:rPr>
+                                  <m:t>𝑖</m:t>
+                                </m:r>
+                              </m:sub>
+                            </m:sSub>
+                          </m:e>
+                        </m:d>
+                      </m:e>
+                      <m:sup>
+                        <m:r>
+                          <a:rPr lang="pt-BR" i="1">
+                            <a:latin typeface="Cambria Math" panose="02040503050406030204" pitchFamily="18" charset="0"/>
+                          </a:rPr>
+                          <m:t>2</m:t>
+                        </m:r>
+                      </m:sup>
+                    </m:sSup>
+                  </m:oMath>
+                </a14:m>
+                <a:r>
+                  <a:rPr lang="pt-BR" dirty="0"/>
+                  <a:t> é a distância </a:t>
+                </a:r>
+                <a:r>
+                  <a:rPr lang="pt-BR"/>
+                  <a:t>até esse </a:t>
+                </a:r>
+                <a:r>
+                  <a:rPr lang="pt-BR" i="1" dirty="0"/>
+                  <a:t>cluster</a:t>
+                </a:r>
+                <a:r>
+                  <a:rPr lang="pt-BR" dirty="0"/>
+                  <a:t>.</a:t>
+                </a:r>
+              </a:p>
+              <a:p>
+                <a:r>
+                  <a:rPr lang="pt-BR" dirty="0"/>
+                  <a:t>Ela mede o quão “compactos” são os </a:t>
+                </a:r>
+                <a:r>
+                  <a:rPr lang="pt-BR" i="1" dirty="0"/>
+                  <a:t>clusters</a:t>
+                </a:r>
+                <a:r>
+                  <a:rPr lang="pt-BR" dirty="0"/>
+                  <a:t>.</a:t>
+                </a:r>
+              </a:p>
+              <a:p>
+                <a:pPr lvl="1">
+                  <a:buFont typeface="Wingdings" panose="05000000000000000000" pitchFamily="2" charset="2"/>
+                  <a:buChar char="§"/>
+                </a:pPr>
+                <a:r>
+                  <a:rPr lang="pt-BR" dirty="0"/>
+                  <a:t>quanto menor → melhor</a:t>
+                </a:r>
+                <a:endParaRPr lang="en-US" dirty="0"/>
+              </a:p>
+              <a:p>
+                <a:pPr marL="0" indent="0">
+                  <a:buNone/>
+                </a:pPr>
+                <a:endParaRPr lang="pt-BR" dirty="0"/>
+              </a:p>
+            </p:txBody>
+          </p:sp>
+        </mc:Choice>
+        <mc:Fallback>
+          <p:sp>
+            <p:nvSpPr>
+              <p:cNvPr id="3" name="Content Placeholder 2">
+                <a:extLst>
+                  <a:ext uri="{FF2B5EF4-FFF2-40B4-BE49-F238E27FC236}">
+                    <a16:creationId xmlns:a16="http://schemas.microsoft.com/office/drawing/2014/main" id="{62BBDDAA-8E03-1533-DC27-B212B34350D5}"/>
+                  </a:ext>
+                </a:extLst>
+              </p:cNvPr>
+              <p:cNvSpPr>
+                <a:spLocks noGrp="1" noRot="1" noChangeAspect="1" noMove="1" noResize="1" noEditPoints="1" noAdjustHandles="1" noChangeArrowheads="1" noChangeShapeType="1" noTextEdit="1"/>
+              </p:cNvSpPr>
+              <p:nvPr>
+                <p:ph idx="1"/>
+              </p:nvPr>
+            </p:nvSpPr>
+            <p:spPr>
+              <a:xfrm>
+                <a:off x="5943600" y="1825624"/>
+                <a:ext cx="6248400" cy="5032375"/>
+              </a:xfrm>
+              <a:blipFill>
+                <a:blip r:embed="rId3"/>
+                <a:stretch>
+                  <a:fillRect l="-1951" t="-1937" r="-2927"/>
+                </a:stretch>
+              </a:blipFill>
+            </p:spPr>
+            <p:txBody>
+              <a:bodyPr/>
+              <a:lstStyle/>
+              <a:p>
+                <a:r>
+                  <a:rPr lang="en-US">
+                    <a:noFill/>
+                  </a:rPr>
+                  <a:t> </a:t>
+                </a:r>
+              </a:p>
+            </p:txBody>
+          </p:sp>
+        </mc:Fallback>
+      </mc:AlternateContent>
+      <p:pic>
+        <p:nvPicPr>
+          <p:cNvPr id="1026" name="Picture 2" descr="K-Means: Getting the Optimal Number of Clusters- Analytics Vidhya">
+            <a:extLst>
+              <a:ext uri="{FF2B5EF4-FFF2-40B4-BE49-F238E27FC236}">
+                <a16:creationId xmlns:a16="http://schemas.microsoft.com/office/drawing/2014/main" id="{6CFEC85E-0DF3-CC25-5FF3-CFFD6DEE23BA}"/>
+              </a:ext>
+            </a:extLst>
+          </p:cNvPr>
+          <p:cNvPicPr>
+            <a:picLocks noChangeAspect="1" noChangeArrowheads="1"/>
+          </p:cNvPicPr>
+          <p:nvPr/>
+        </p:nvPicPr>
+        <p:blipFill>
+          <a:blip r:embed="rId4">
+            <a:extLst>
+              <a:ext uri="{28A0092B-C50C-407E-A947-70E740481C1C}">
+                <a14:useLocalDpi xmlns:a14="http://schemas.microsoft.com/office/drawing/2010/main" val="0"/>
+              </a:ext>
+            </a:extLst>
+          </a:blip>
+          <a:srcRect/>
+          <a:stretch>
+            <a:fillRect/>
+          </a:stretch>
+        </p:blipFill>
+        <p:spPr bwMode="auto">
+          <a:xfrm>
+            <a:off x="584200" y="2316480"/>
+            <a:ext cx="4521890" cy="3323589"/>
+          </a:xfrm>
+          <a:prstGeom prst="rect">
+            <a:avLst/>
+          </a:prstGeom>
+          <a:noFill/>
+          <a:extLst>
+            <a:ext uri="{909E8E84-426E-40DD-AFC4-6F175D3DCCD1}">
+              <a14:hiddenFill xmlns:a14="http://schemas.microsoft.com/office/drawing/2010/main">
+                <a:solidFill>
+                  <a:srgbClr val="FFFFFF"/>
+                </a:solidFill>
+              </a14:hiddenFill>
+            </a:ext>
+          </a:extLst>
+        </p:spPr>
+      </p:pic>
+    </p:spTree>
+    <p:extLst>
+      <p:ext uri="{BB962C8B-B14F-4D97-AF65-F5344CB8AC3E}">
+        <p14:creationId xmlns:p14="http://schemas.microsoft.com/office/powerpoint/2010/main" val="1622617209"/>
+      </p:ext>
+    </p:extLst>
+  </p:cSld>
+  <p:clrMapOvr>
+    <a:masterClrMapping/>
+  </p:clrMapOvr>
+</p:sld>
+</file>
+
+<file path=ppt/slides/slide32.xml><?xml version="1.0" encoding="utf-8"?>
+<p:sld xmlns:a="http://schemas.openxmlformats.org/drawingml/2006/main" xmlns:r="http://schemas.openxmlformats.org/officeDocument/2006/relationships" xmlns:p="http://schemas.openxmlformats.org/presentationml/2006/main">
+  <p:cSld>
+    <p:spTree>
+      <p:nvGrpSpPr>
+        <p:cNvPr id="1" name="">
+          <a:extLst>
+            <a:ext uri="{FF2B5EF4-FFF2-40B4-BE49-F238E27FC236}">
+              <a16:creationId xmlns:a16="http://schemas.microsoft.com/office/drawing/2014/main" id="{80E41F28-4876-5B0D-7F6C-0F152E330D44}"/>
+            </a:ext>
+          </a:extLst>
+        </p:cNvPr>
+        <p:cNvGrpSpPr/>
+        <p:nvPr/>
+      </p:nvGrpSpPr>
+      <p:grpSpPr>
+        <a:xfrm>
+          <a:off x="0" y="0"/>
+          <a:ext cx="0" cy="0"/>
+          <a:chOff x="0" y="0"/>
+          <a:chExt cx="0" cy="0"/>
+        </a:xfrm>
+      </p:grpSpPr>
+      <p:sp>
+        <p:nvSpPr>
+          <p:cNvPr id="2" name="Title 1">
+            <a:extLst>
+              <a:ext uri="{FF2B5EF4-FFF2-40B4-BE49-F238E27FC236}">
+                <a16:creationId xmlns:a16="http://schemas.microsoft.com/office/drawing/2014/main" id="{3C9425F9-4CBE-8456-1A61-B7A51F1FAC86}"/>
+              </a:ext>
+            </a:extLst>
+          </p:cNvPr>
+          <p:cNvSpPr>
+            <a:spLocks noGrp="1"/>
+          </p:cNvSpPr>
+          <p:nvPr>
+            <p:ph type="title"/>
+          </p:nvPr>
+        </p:nvSpPr>
+        <p:spPr/>
+        <p:txBody>
+          <a:bodyPr/>
+          <a:lstStyle/>
+          <a:p>
+            <a:r>
+              <a:rPr lang="pt-BR" dirty="0"/>
+              <a:t>Soma dos quadrados </a:t>
+            </a:r>
+            <a:r>
+              <a:rPr lang="pt-BR" dirty="0" err="1"/>
+              <a:t>intra-</a:t>
+            </a:r>
+            <a:r>
+              <a:rPr lang="pt-BR" i="1" dirty="0" err="1"/>
+              <a:t>clusters</a:t>
+            </a:r>
+            <a:endParaRPr lang="en-US" dirty="0"/>
+          </a:p>
+        </p:txBody>
+      </p:sp>
+      <mc:AlternateContent xmlns:mc="http://schemas.openxmlformats.org/markup-compatibility/2006">
+        <mc:Choice xmlns:a14="http://schemas.microsoft.com/office/drawing/2010/main" Requires="a14">
+          <p:sp>
+            <p:nvSpPr>
+              <p:cNvPr id="3" name="Content Placeholder 2">
+                <a:extLst>
+                  <a:ext uri="{FF2B5EF4-FFF2-40B4-BE49-F238E27FC236}">
+                    <a16:creationId xmlns:a16="http://schemas.microsoft.com/office/drawing/2014/main" id="{26A65B5D-EAEC-B338-BC6A-DAC5DA0B1384}"/>
+                  </a:ext>
+                </a:extLst>
+              </p:cNvPr>
+              <p:cNvSpPr>
+                <a:spLocks noGrp="1"/>
+              </p:cNvSpPr>
+              <p:nvPr>
+                <p:ph idx="1"/>
+              </p:nvPr>
+            </p:nvSpPr>
+            <p:spPr>
+              <a:xfrm>
+                <a:off x="5943600" y="1825624"/>
+                <a:ext cx="6248400" cy="5032375"/>
+              </a:xfrm>
+            </p:spPr>
+            <p:txBody>
+              <a:bodyPr>
+                <a:normAutofit/>
+              </a:bodyPr>
+              <a:lstStyle/>
+              <a:p>
+                <a:r>
+                  <a:rPr lang="pt-BR" dirty="0"/>
+                  <a:t>A curva quantifica o quão próximos os pontos de um cluster estão do seu </a:t>
+                </a:r>
+                <a:r>
+                  <a:rPr lang="pt-BR" dirty="0" err="1"/>
+                  <a:t>centróide</a:t>
+                </a:r>
+                <a:r>
+                  <a:rPr lang="pt-BR" dirty="0"/>
+                  <a:t> (centro do cluster).</a:t>
+                </a:r>
+              </a:p>
+              <a:p>
+                <a:r>
+                  <a:rPr lang="pt-BR" dirty="0"/>
+                  <a:t>analisa a curva de WSS em função de </a:t>
+                </a:r>
+                <a14:m>
+                  <m:oMath xmlns:m="http://schemas.openxmlformats.org/officeDocument/2006/math">
+                    <m:r>
+                      <a:rPr lang="pt-BR" i="1">
+                        <a:latin typeface="Cambria Math" panose="02040503050406030204" pitchFamily="18" charset="0"/>
+                      </a:rPr>
+                      <m:t>𝑘</m:t>
+                    </m:r>
+                  </m:oMath>
+                </a14:m>
+                <a:r>
+                  <a:rPr lang="pt-BR" dirty="0"/>
+                  <a:t>.</a:t>
+                </a:r>
+              </a:p>
+              <a:p>
+                <a:endParaRPr lang="en-US" dirty="0"/>
+              </a:p>
+            </p:txBody>
+          </p:sp>
+        </mc:Choice>
+        <mc:Fallback>
+          <p:sp>
+            <p:nvSpPr>
+              <p:cNvPr id="3" name="Content Placeholder 2">
+                <a:extLst>
+                  <a:ext uri="{FF2B5EF4-FFF2-40B4-BE49-F238E27FC236}">
+                    <a16:creationId xmlns:a16="http://schemas.microsoft.com/office/drawing/2014/main" id="{26A65B5D-EAEC-B338-BC6A-DAC5DA0B1384}"/>
+                  </a:ext>
+                </a:extLst>
+              </p:cNvPr>
+              <p:cNvSpPr>
+                <a:spLocks noGrp="1" noRot="1" noChangeAspect="1" noMove="1" noResize="1" noEditPoints="1" noAdjustHandles="1" noChangeArrowheads="1" noChangeShapeType="1" noTextEdit="1"/>
+              </p:cNvSpPr>
+              <p:nvPr>
+                <p:ph idx="1"/>
+              </p:nvPr>
+            </p:nvSpPr>
+            <p:spPr>
+              <a:xfrm>
+                <a:off x="5943600" y="1825624"/>
+                <a:ext cx="6248400" cy="5032375"/>
+              </a:xfrm>
+              <a:blipFill>
+                <a:blip r:embed="rId2"/>
+                <a:stretch>
+                  <a:fillRect l="-1756" t="-1937" r="-195"/>
+                </a:stretch>
+              </a:blipFill>
+            </p:spPr>
+            <p:txBody>
+              <a:bodyPr/>
+              <a:lstStyle/>
+              <a:p>
+                <a:r>
+                  <a:rPr lang="en-US">
+                    <a:noFill/>
+                  </a:rPr>
+                  <a:t> </a:t>
+                </a:r>
+              </a:p>
+            </p:txBody>
+          </p:sp>
+        </mc:Fallback>
+      </mc:AlternateContent>
+      <p:pic>
+        <p:nvPicPr>
+          <p:cNvPr id="1026" name="Picture 2" descr="K-Means: Getting the Optimal Number of Clusters- Analytics Vidhya">
+            <a:extLst>
+              <a:ext uri="{FF2B5EF4-FFF2-40B4-BE49-F238E27FC236}">
+                <a16:creationId xmlns:a16="http://schemas.microsoft.com/office/drawing/2014/main" id="{8E934D73-7290-09A0-C88B-24CA35D9280A}"/>
+              </a:ext>
+            </a:extLst>
+          </p:cNvPr>
+          <p:cNvPicPr>
+            <a:picLocks noChangeAspect="1" noChangeArrowheads="1"/>
+          </p:cNvPicPr>
+          <p:nvPr/>
+        </p:nvPicPr>
+        <p:blipFill>
+          <a:blip r:embed="rId3">
+            <a:extLst>
+              <a:ext uri="{28A0092B-C50C-407E-A947-70E740481C1C}">
+                <a14:useLocalDpi xmlns:a14="http://schemas.microsoft.com/office/drawing/2010/main" val="0"/>
+              </a:ext>
+            </a:extLst>
+          </a:blip>
+          <a:srcRect/>
+          <a:stretch>
+            <a:fillRect/>
+          </a:stretch>
+        </p:blipFill>
+        <p:spPr bwMode="auto">
+          <a:xfrm>
+            <a:off x="584200" y="2316480"/>
+            <a:ext cx="4521890" cy="3323589"/>
+          </a:xfrm>
+          <a:prstGeom prst="rect">
+            <a:avLst/>
+          </a:prstGeom>
+          <a:noFill/>
+          <a:extLst>
+            <a:ext uri="{909E8E84-426E-40DD-AFC4-6F175D3DCCD1}">
+              <a14:hiddenFill xmlns:a14="http://schemas.microsoft.com/office/drawing/2010/main">
+                <a:solidFill>
+                  <a:srgbClr val="FFFFFF"/>
+                </a:solidFill>
+              </a14:hiddenFill>
+            </a:ext>
+          </a:extLst>
+        </p:spPr>
+      </p:pic>
+    </p:spTree>
+    <p:extLst>
+      <p:ext uri="{BB962C8B-B14F-4D97-AF65-F5344CB8AC3E}">
+        <p14:creationId xmlns:p14="http://schemas.microsoft.com/office/powerpoint/2010/main" val="4116783913"/>
+      </p:ext>
+    </p:extLst>
+  </p:cSld>
+  <p:clrMapOvr>
+    <a:masterClrMapping/>
+  </p:clrMapOvr>
+</p:sld>
+</file>
+
+<file path=ppt/slides/slide33.xml><?xml version="1.0" encoding="utf-8"?>
 <p:sld xmlns:a="http://schemas.openxmlformats.org/drawingml/2006/main" xmlns:r="http://schemas.openxmlformats.org/officeDocument/2006/relationships" xmlns:p="http://schemas.openxmlformats.org/presentationml/2006/main">
   <p:cSld>
     <p:spTree>
@@ -11896,6 +13006,116 @@
       </p:grpSpPr>
       <p:sp>
         <p:nvSpPr>
+          <p:cNvPr id="2" name="Title 1">
+            <a:extLst>
+              <a:ext uri="{FF2B5EF4-FFF2-40B4-BE49-F238E27FC236}">
+                <a16:creationId xmlns:a16="http://schemas.microsoft.com/office/drawing/2014/main" id="{D87F6E31-B0DF-F3EC-D348-0D4E93DD1974}"/>
+              </a:ext>
+            </a:extLst>
+          </p:cNvPr>
+          <p:cNvSpPr>
+            <a:spLocks noGrp="1"/>
+          </p:cNvSpPr>
+          <p:nvPr>
+            <p:ph type="title"/>
+          </p:nvPr>
+        </p:nvSpPr>
+        <p:spPr/>
+        <p:txBody>
+          <a:bodyPr/>
+          <a:lstStyle/>
+          <a:p>
+            <a:endParaRPr lang="en-US"/>
+          </a:p>
+        </p:txBody>
+      </p:sp>
+      <p:sp>
+        <p:nvSpPr>
+          <p:cNvPr id="3" name="Content Placeholder 2">
+            <a:extLst>
+              <a:ext uri="{FF2B5EF4-FFF2-40B4-BE49-F238E27FC236}">
+                <a16:creationId xmlns:a16="http://schemas.microsoft.com/office/drawing/2014/main" id="{5007CCEC-CA32-01B4-A9B5-F81A83FF3ECA}"/>
+              </a:ext>
+            </a:extLst>
+          </p:cNvPr>
+          <p:cNvSpPr>
+            <a:spLocks noGrp="1"/>
+          </p:cNvSpPr>
+          <p:nvPr>
+            <p:ph idx="1"/>
+          </p:nvPr>
+        </p:nvSpPr>
+        <p:spPr/>
+        <p:txBody>
+          <a:bodyPr>
+            <a:normAutofit/>
+          </a:bodyPr>
+          <a:lstStyle/>
+          <a:p>
+            <a:r>
+              <a:rPr lang="pt-BR" sz="5400" b="1" dirty="0">
+                <a:solidFill>
+                  <a:srgbClr val="FF0000"/>
+                </a:solidFill>
+              </a:rPr>
+              <a:t>PAREI </a:t>
+            </a:r>
+            <a:r>
+              <a:rPr lang="pt-BR" sz="5400" b="1" dirty="0" err="1">
+                <a:solidFill>
+                  <a:srgbClr val="FF0000"/>
+                </a:solidFill>
+              </a:rPr>
+              <a:t>AQUi</a:t>
+            </a:r>
+            <a:r>
+              <a:rPr lang="pt-BR" sz="5400" b="1" dirty="0">
+                <a:solidFill>
+                  <a:srgbClr val="FF0000"/>
+                </a:solidFill>
+              </a:rPr>
+              <a:t>!!!!</a:t>
+            </a:r>
+            <a:endParaRPr lang="en-US" sz="5400" b="1" dirty="0">
+              <a:solidFill>
+                <a:srgbClr val="FF0000"/>
+              </a:solidFill>
+            </a:endParaRPr>
+          </a:p>
+        </p:txBody>
+      </p:sp>
+    </p:spTree>
+    <p:extLst>
+      <p:ext uri="{BB962C8B-B14F-4D97-AF65-F5344CB8AC3E}">
+        <p14:creationId xmlns:p14="http://schemas.microsoft.com/office/powerpoint/2010/main" val="1718932620"/>
+      </p:ext>
+    </p:extLst>
+  </p:cSld>
+  <p:clrMapOvr>
+    <a:masterClrMapping/>
+  </p:clrMapOvr>
+</p:sld>
+</file>
+
+<file path=ppt/slides/slide34.xml><?xml version="1.0" encoding="utf-8"?>
+<p:sld xmlns:a="http://schemas.openxmlformats.org/drawingml/2006/main" xmlns:r="http://schemas.openxmlformats.org/officeDocument/2006/relationships" xmlns:p="http://schemas.openxmlformats.org/presentationml/2006/main">
+  <p:cSld>
+    <p:spTree>
+      <p:nvGrpSpPr>
+        <p:cNvPr id="1" name=""/>
+        <p:cNvGrpSpPr/>
+        <p:nvPr/>
+      </p:nvGrpSpPr>
+      <p:grpSpPr>
+        <a:xfrm>
+          <a:off x="0" y="0"/>
+          <a:ext cx="0" cy="0"/>
+          <a:chOff x="0" y="0"/>
+          <a:chExt cx="0" cy="0"/>
+        </a:xfrm>
+      </p:grpSpPr>
+      <p:sp>
+        <p:nvSpPr>
           <p:cNvPr id="2" name="Título 1"/>
           <p:cNvSpPr>
             <a:spLocks noGrp="1"/>
@@ -11910,10 +13130,9 @@
           <a:lstStyle/>
           <a:p>
             <a:r>
-              <a:rPr lang="pt-BR" dirty="0" smtClean="0"/>
+              <a:rPr lang="pt-BR" dirty="0"/>
               <a:t>Método do cotovelo</a:t>
             </a:r>
-            <a:endParaRPr lang="pt-BR" dirty="0"/>
           </a:p>
         </p:txBody>
       </p:sp>
@@ -11983,10 +13202,6 @@
             </a:r>
           </a:p>
           <a:p>
-            <a:r>
-              <a:rPr lang="pt-BR" dirty="0"/>
-              <a:t/>
-            </a:r>
             <a:br>
               <a:rPr lang="pt-BR" dirty="0"/>
             </a:br>
@@ -12004,10 +13219,6 @@
             </a:r>
           </a:p>
           <a:p>
-            <a:r>
-              <a:rPr lang="pt-BR" dirty="0"/>
-              <a:t/>
-            </a:r>
             <a:br>
               <a:rPr lang="pt-BR" dirty="0"/>
             </a:br>
@@ -12025,10 +13236,6 @@
             </a:r>
           </a:p>
           <a:p>
-            <a:r>
-              <a:rPr lang="pt-BR" dirty="0"/>
-              <a:t/>
-            </a:r>
             <a:br>
               <a:rPr lang="pt-BR" dirty="0"/>
             </a:br>
@@ -12170,17 +13377,9 @@
             </a:r>
           </a:p>
           <a:p>
-            <a:r>
-              <a:rPr lang="pt-BR" dirty="0"/>
-              <a:t/>
-            </a:r>
             <a:br>
               <a:rPr lang="pt-BR" dirty="0"/>
             </a:br>
-            <a:r>
-              <a:rPr lang="pt-BR" dirty="0"/>
-              <a:t/>
-            </a:r>
             <a:br>
               <a:rPr lang="pt-BR" dirty="0"/>
             </a:br>
@@ -12191,10 +13390,6 @@
             <a:endParaRPr lang="pt-BR" dirty="0"/>
           </a:p>
           <a:p>
-            <a:r>
-              <a:rPr lang="pt-BR" dirty="0"/>
-              <a:t/>
-            </a:r>
             <a:br>
               <a:rPr lang="pt-BR" dirty="0"/>
             </a:br>
@@ -12204,10 +13399,6 @@
             </a:r>
           </a:p>
           <a:p>
-            <a:r>
-              <a:rPr lang="pt-BR" dirty="0"/>
-              <a:t/>
-            </a:r>
             <a:br>
               <a:rPr lang="pt-BR" dirty="0"/>
             </a:br>
@@ -12226,7 +13417,7 @@
           <p:cNvPr id="4" name="Picture 2" descr="Base Teórica do K-Means! Aprenda a Lógica desse Algoritmo Hoje!">
             <a:extLst>
               <a:ext uri="{FF2B5EF4-FFF2-40B4-BE49-F238E27FC236}">
-                <a16:creationId xmlns:a16="http://schemas.microsoft.com/office/drawing/2014/main" xmlns="" id="{0694ADFD-EB2E-2BF0-18BE-B07E4CD60A5F}"/>
+                <a16:creationId xmlns:a16="http://schemas.microsoft.com/office/drawing/2014/main" id="{0694ADFD-EB2E-2BF0-18BE-B07E4CD60A5F}"/>
               </a:ext>
             </a:extLst>
           </p:cNvPr>
@@ -12273,7 +13464,7 @@
           <p:cNvPr id="5" name="Imagem 4">
             <a:extLst>
               <a:ext uri="{FF2B5EF4-FFF2-40B4-BE49-F238E27FC236}">
-                <a16:creationId xmlns:a16="http://schemas.microsoft.com/office/drawing/2014/main" xmlns="" id="{EEF69E85-6440-34FE-5C8A-A5F37765D292}"/>
+                <a16:creationId xmlns:a16="http://schemas.microsoft.com/office/drawing/2014/main" id="{EEF69E85-6440-34FE-5C8A-A5F37765D292}"/>
               </a:ext>
             </a:extLst>
           </p:cNvPr>
@@ -12311,7 +13502,7 @@
 </p:sld>
 </file>
 
-<file path=ppt/slides/slide32.xml><?xml version="1.0" encoding="utf-8"?>
+<file path=ppt/slides/slide35.xml><?xml version="1.0" encoding="utf-8"?>
 <p:sld xmlns:a="http://schemas.openxmlformats.org/drawingml/2006/main" xmlns:r="http://schemas.openxmlformats.org/officeDocument/2006/relationships" xmlns:p="http://schemas.openxmlformats.org/presentationml/2006/main">
   <p:cSld>
     <p:spTree>
@@ -12552,7 +13743,7 @@
 </p:sld>
 </file>
 
-<file path=ppt/slides/slide33.xml><?xml version="1.0" encoding="utf-8"?>
+<file path=ppt/slides/slide36.xml><?xml version="1.0" encoding="utf-8"?>
 <p:sld xmlns:a="http://schemas.openxmlformats.org/drawingml/2006/main" xmlns:r="http://schemas.openxmlformats.org/officeDocument/2006/relationships" xmlns:p="http://schemas.openxmlformats.org/presentationml/2006/main">
   <p:cSld>
     <p:spTree>
@@ -12574,7 +13765,7 @@
           <p:cNvPr id="2" name="Título 1">
             <a:extLst>
               <a:ext uri="{FF2B5EF4-FFF2-40B4-BE49-F238E27FC236}">
-                <a16:creationId xmlns:a16="http://schemas.microsoft.com/office/drawing/2014/main" xmlns="" id="{654EC41E-A91F-2BE6-4481-EFFD64DC2B91}"/>
+                <a16:creationId xmlns:a16="http://schemas.microsoft.com/office/drawing/2014/main" id="{654EC41E-A91F-2BE6-4481-EFFD64DC2B91}"/>
               </a:ext>
             </a:extLst>
           </p:cNvPr>
@@ -12604,7 +13795,7 @@
               <p:cNvPr id="3" name="Espaço Reservado para Conteúdo 2">
                 <a:extLst>
                   <a:ext uri="{FF2B5EF4-FFF2-40B4-BE49-F238E27FC236}">
-                    <a16:creationId xmlns:a16="http://schemas.microsoft.com/office/drawing/2014/main" xmlns="" id="{7C91871B-A0D0-6F26-D59B-6230818E6267}"/>
+                    <a16:creationId xmlns:a16="http://schemas.microsoft.com/office/drawing/2014/main" id="{7C91871B-A0D0-6F26-D59B-6230818E6267}"/>
                   </a:ext>
                 </a:extLst>
               </p:cNvPr>
@@ -12771,7 +13962,7 @@
 </p:sld>
 </file>
 
-<file path=ppt/slides/slide34.xml><?xml version="1.0" encoding="utf-8"?>
+<file path=ppt/slides/slide37.xml><?xml version="1.0" encoding="utf-8"?>
 <p:sld xmlns:a="http://schemas.openxmlformats.org/drawingml/2006/main" xmlns:r="http://schemas.openxmlformats.org/officeDocument/2006/relationships" xmlns:p="http://schemas.openxmlformats.org/presentationml/2006/main">
   <p:cSld>
     <p:spTree>
@@ -12793,7 +13984,7 @@
           <p:cNvPr id="2" name="Title 1">
             <a:extLst>
               <a:ext uri="{FF2B5EF4-FFF2-40B4-BE49-F238E27FC236}">
-                <a16:creationId xmlns:a16="http://schemas.microsoft.com/office/drawing/2014/main" xmlns="" id="{A07C804B-5A43-5C89-0C42-420DDBB1CA5A}"/>
+                <a16:creationId xmlns:a16="http://schemas.microsoft.com/office/drawing/2014/main" id="{A07C804B-5A43-5C89-0C42-420DDBB1CA5A}"/>
               </a:ext>
             </a:extLst>
           </p:cNvPr>
@@ -12826,7 +14017,7 @@
           <p:cNvPr id="3" name="Content Placeholder 2">
             <a:extLst>
               <a:ext uri="{FF2B5EF4-FFF2-40B4-BE49-F238E27FC236}">
-                <a16:creationId xmlns:a16="http://schemas.microsoft.com/office/drawing/2014/main" xmlns="" id="{288A7DCE-B5C5-82F5-CC2A-E963BDDE03C9}"/>
+                <a16:creationId xmlns:a16="http://schemas.microsoft.com/office/drawing/2014/main" id="{288A7DCE-B5C5-82F5-CC2A-E963BDDE03C9}"/>
               </a:ext>
             </a:extLst>
           </p:cNvPr>
@@ -12898,7 +14089,7 @@
 </p:sld>
 </file>
 
-<file path=ppt/slides/slide35.xml><?xml version="1.0" encoding="utf-8"?>
+<file path=ppt/slides/slide38.xml><?xml version="1.0" encoding="utf-8"?>
 <p:sld xmlns:a="http://schemas.openxmlformats.org/drawingml/2006/main" xmlns:r="http://schemas.openxmlformats.org/officeDocument/2006/relationships" xmlns:p="http://schemas.openxmlformats.org/presentationml/2006/main">
   <p:cSld>
     <p:spTree>
@@ -12920,7 +14111,7 @@
           <p:cNvPr id="2" name="Título 1">
             <a:extLst>
               <a:ext uri="{FF2B5EF4-FFF2-40B4-BE49-F238E27FC236}">
-                <a16:creationId xmlns:a16="http://schemas.microsoft.com/office/drawing/2014/main" xmlns="" id="{94AB8438-E56E-2412-517C-8456E4CA773C}"/>
+                <a16:creationId xmlns:a16="http://schemas.microsoft.com/office/drawing/2014/main" id="{94AB8438-E56E-2412-517C-8456E4CA773C}"/>
               </a:ext>
             </a:extLst>
           </p:cNvPr>
@@ -12948,7 +14139,7 @@
           <p:cNvPr id="3" name="Espaço Reservado para Conteúdo 2">
             <a:extLst>
               <a:ext uri="{FF2B5EF4-FFF2-40B4-BE49-F238E27FC236}">
-                <a16:creationId xmlns:a16="http://schemas.microsoft.com/office/drawing/2014/main" xmlns="" id="{F7E2B09C-6D56-4C9F-A364-B904CCE2F1A0}"/>
+                <a16:creationId xmlns:a16="http://schemas.microsoft.com/office/drawing/2014/main" id="{F7E2B09C-6D56-4C9F-A364-B904CCE2F1A0}"/>
               </a:ext>
             </a:extLst>
           </p:cNvPr>
@@ -12987,7 +14178,7 @@
           <p:cNvPr id="18" name="Group 17">
             <a:extLst>
               <a:ext uri="{FF2B5EF4-FFF2-40B4-BE49-F238E27FC236}">
-                <a16:creationId xmlns:a16="http://schemas.microsoft.com/office/drawing/2014/main" xmlns="" id="{627C64FD-88E0-EC8E-2A34-0D5737B4C854}"/>
+                <a16:creationId xmlns:a16="http://schemas.microsoft.com/office/drawing/2014/main" id="{627C64FD-88E0-EC8E-2A34-0D5737B4C854}"/>
               </a:ext>
             </a:extLst>
           </p:cNvPr>
@@ -13007,7 +14198,7 @@
             <p:cNvPr id="12" name="Picture 4" descr="Project Jupyter | Try Jupyter">
               <a:extLst>
                 <a:ext uri="{FF2B5EF4-FFF2-40B4-BE49-F238E27FC236}">
-                  <a16:creationId xmlns:a16="http://schemas.microsoft.com/office/drawing/2014/main" xmlns="" id="{FF92EA36-91E7-292B-D7A0-2D4D83A10F98}"/>
+                  <a16:creationId xmlns:a16="http://schemas.microsoft.com/office/drawing/2014/main" id="{FF92EA36-91E7-292B-D7A0-2D4D83A10F98}"/>
                 </a:ext>
               </a:extLst>
             </p:cNvPr>
@@ -13054,7 +14245,7 @@
             <p:cNvPr id="13" name="Picture 8" descr="Google Colaboratory Colab - Guía Completa Español - Marketing Branding">
               <a:extLst>
                 <a:ext uri="{FF2B5EF4-FFF2-40B4-BE49-F238E27FC236}">
-                  <a16:creationId xmlns:a16="http://schemas.microsoft.com/office/drawing/2014/main" xmlns="" id="{46F1718A-89E6-9E63-E40B-2B19852D6AA0}"/>
+                  <a16:creationId xmlns:a16="http://schemas.microsoft.com/office/drawing/2014/main" id="{46F1718A-89E6-9E63-E40B-2B19852D6AA0}"/>
                 </a:ext>
               </a:extLst>
             </p:cNvPr>
@@ -13099,7 +14290,7 @@
             <p:cNvPr id="14" name="Picture 10" descr="IT12A01: FUNDAMENTALS OF PYTHON PROGRAMMING (SF) (SYNCHRONOUS E-LEARNING) -  NTUC LearningHub">
               <a:extLst>
                 <a:ext uri="{FF2B5EF4-FFF2-40B4-BE49-F238E27FC236}">
-                  <a16:creationId xmlns:a16="http://schemas.microsoft.com/office/drawing/2014/main" xmlns="" id="{33F6B1B4-9B79-D634-3E35-33F24609C848}"/>
+                  <a16:creationId xmlns:a16="http://schemas.microsoft.com/office/drawing/2014/main" id="{33F6B1B4-9B79-D634-3E35-33F24609C848}"/>
                 </a:ext>
               </a:extLst>
             </p:cNvPr>
@@ -13144,7 +14335,7 @@
             <p:cNvPr id="15" name="Sinal de Adição 7">
               <a:extLst>
                 <a:ext uri="{FF2B5EF4-FFF2-40B4-BE49-F238E27FC236}">
-                  <a16:creationId xmlns:a16="http://schemas.microsoft.com/office/drawing/2014/main" xmlns="" id="{6959EE6C-DCDB-E78B-5C50-EBD3FF3049E2}"/>
+                  <a16:creationId xmlns:a16="http://schemas.microsoft.com/office/drawing/2014/main" id="{6959EE6C-DCDB-E78B-5C50-EBD3FF3049E2}"/>
                 </a:ext>
               </a:extLst>
             </p:cNvPr>
@@ -13192,7 +14383,7 @@
             <p:cNvPr id="17" name="Sinal de Adição 10">
               <a:extLst>
                 <a:ext uri="{FF2B5EF4-FFF2-40B4-BE49-F238E27FC236}">
-                  <a16:creationId xmlns:a16="http://schemas.microsoft.com/office/drawing/2014/main" xmlns="" id="{30A21FDB-ABA6-9FD5-49EF-7762414AEF0C}"/>
+                  <a16:creationId xmlns:a16="http://schemas.microsoft.com/office/drawing/2014/main" id="{30A21FDB-ABA6-9FD5-49EF-7762414AEF0C}"/>
                 </a:ext>
               </a:extLst>
             </p:cNvPr>
@@ -13249,7 +14440,7 @@
 </p:sld>
 </file>
 
-<file path=ppt/slides/slide36.xml><?xml version="1.0" encoding="utf-8"?>
+<file path=ppt/slides/slide39.xml><?xml version="1.0" encoding="utf-8"?>
 <p:sld xmlns:a="http://schemas.openxmlformats.org/drawingml/2006/main" xmlns:r="http://schemas.openxmlformats.org/officeDocument/2006/relationships" xmlns:p="http://schemas.openxmlformats.org/presentationml/2006/main">
   <p:cSld>
     <p:spTree>
@@ -13271,7 +14462,7 @@
           <p:cNvPr id="2" name="Title 1">
             <a:extLst>
               <a:ext uri="{FF2B5EF4-FFF2-40B4-BE49-F238E27FC236}">
-                <a16:creationId xmlns:a16="http://schemas.microsoft.com/office/drawing/2014/main" xmlns="" id="{E8FD0E11-3B37-4336-5BF0-C8C033354AF6}"/>
+                <a16:creationId xmlns:a16="http://schemas.microsoft.com/office/drawing/2014/main" id="{E8FD0E11-3B37-4336-5BF0-C8C033354AF6}"/>
               </a:ext>
             </a:extLst>
           </p:cNvPr>
@@ -13300,7 +14491,7 @@
           <p:cNvPr id="3" name="Content Placeholder 2">
             <a:extLst>
               <a:ext uri="{FF2B5EF4-FFF2-40B4-BE49-F238E27FC236}">
-                <a16:creationId xmlns:a16="http://schemas.microsoft.com/office/drawing/2014/main" xmlns="" id="{32CB14AB-72E4-05EB-962C-F8B4618D0574}"/>
+                <a16:creationId xmlns:a16="http://schemas.microsoft.com/office/drawing/2014/main" id="{32CB14AB-72E4-05EB-962C-F8B4618D0574}"/>
               </a:ext>
             </a:extLst>
           </p:cNvPr>
@@ -13344,7 +14535,7 @@
 </p:sld>
 </file>
 
-<file path=ppt/slides/slide37.xml><?xml version="1.0" encoding="utf-8"?>
+<file path=ppt/slides/slide4.xml><?xml version="1.0" encoding="utf-8"?>
 <p:sld xmlns:a="http://schemas.openxmlformats.org/drawingml/2006/main" xmlns:r="http://schemas.openxmlformats.org/officeDocument/2006/relationships" xmlns:p="http://schemas.openxmlformats.org/presentationml/2006/main">
   <p:cSld>
     <p:spTree>
@@ -13363,10 +14554,130 @@
       </p:grpSpPr>
       <p:sp>
         <p:nvSpPr>
+          <p:cNvPr id="2" name="Title 1"/>
+          <p:cNvSpPr>
+            <a:spLocks noGrp="1"/>
+          </p:cNvSpPr>
+          <p:nvPr>
+            <p:ph type="title"/>
+          </p:nvPr>
+        </p:nvSpPr>
+        <p:spPr/>
+        <p:txBody>
+          <a:bodyPr/>
+          <a:lstStyle/>
+          <a:p>
+            <a:r>
+              <a:rPr lang="pt-BR" dirty="0"/>
+              <a:t>Motivação</a:t>
+            </a:r>
+          </a:p>
+        </p:txBody>
+      </p:sp>
+      <p:sp>
+        <p:nvSpPr>
+          <p:cNvPr id="7" name="Content Placeholder 2"/>
+          <p:cNvSpPr>
+            <a:spLocks noGrp="1"/>
+          </p:cNvSpPr>
+          <p:nvPr>
+            <p:ph idx="1"/>
+          </p:nvPr>
+        </p:nvSpPr>
+        <p:spPr>
+          <a:xfrm>
+            <a:off x="5802087" y="1690688"/>
+            <a:ext cx="6240978" cy="5036683"/>
+          </a:xfrm>
+        </p:spPr>
+        <p:txBody>
+          <a:bodyPr>
+            <a:normAutofit/>
+          </a:bodyPr>
+          <a:lstStyle/>
+          <a:p>
+            <a:r>
+              <a:rPr lang="pt-BR" dirty="0"/>
+              <a:t>O que podemos fazer se não tivermos informações sobre as classes (i.e., rótulos) a que pertencem os exemplos de entrada?</a:t>
+            </a:r>
+          </a:p>
+        </p:txBody>
+      </p:sp>
+      <p:pic>
+        <p:nvPicPr>
+          <p:cNvPr id="6" name="Picture 2" descr="K-Means Clustering using Python. Welcome back guys! Hope you had a great… |  by Luigi Fiori | Medium"/>
+          <p:cNvPicPr>
+            <a:picLocks noChangeAspect="1" noChangeArrowheads="1"/>
+          </p:cNvPicPr>
+          <p:nvPr/>
+        </p:nvPicPr>
+        <p:blipFill rotWithShape="1">
+          <a:blip r:embed="rId3">
+            <a:extLst>
+              <a:ext uri="{28A0092B-C50C-407E-A947-70E740481C1C}">
+                <a14:useLocalDpi xmlns:a14="http://schemas.microsoft.com/office/drawing/2010/main" val="0"/>
+              </a:ext>
+            </a:extLst>
+          </a:blip>
+          <a:srcRect l="1639" t="3709" r="55246" b="11854"/>
+          <a:stretch/>
+        </p:blipFill>
+        <p:spPr bwMode="auto">
+          <a:xfrm>
+            <a:off x="1090832" y="2101933"/>
+            <a:ext cx="3894188" cy="3177638"/>
+          </a:xfrm>
+          <a:prstGeom prst="rect">
+            <a:avLst/>
+          </a:prstGeom>
+          <a:noFill/>
+          <a:extLst>
+            <a:ext uri="{909E8E84-426E-40DD-AFC4-6F175D3DCCD1}">
+              <a14:hiddenFill xmlns:a14="http://schemas.microsoft.com/office/drawing/2010/main">
+                <a:solidFill>
+                  <a:srgbClr val="FFFFFF"/>
+                </a:solidFill>
+              </a14:hiddenFill>
+            </a:ext>
+          </a:extLst>
+        </p:spPr>
+      </p:pic>
+    </p:spTree>
+    <p:extLst>
+      <p:ext uri="{BB962C8B-B14F-4D97-AF65-F5344CB8AC3E}">
+        <p14:creationId xmlns:p14="http://schemas.microsoft.com/office/powerpoint/2010/main" val="1021130030"/>
+      </p:ext>
+    </p:extLst>
+  </p:cSld>
+  <p:clrMapOvr>
+    <a:masterClrMapping/>
+  </p:clrMapOvr>
+</p:sld>
+</file>
+
+<file path=ppt/slides/slide40.xml><?xml version="1.0" encoding="utf-8"?>
+<p:sld xmlns:a="http://schemas.openxmlformats.org/drawingml/2006/main" xmlns:r="http://schemas.openxmlformats.org/officeDocument/2006/relationships" xmlns:p="http://schemas.openxmlformats.org/presentationml/2006/main">
+  <p:cSld>
+    <p:spTree>
+      <p:nvGrpSpPr>
+        <p:cNvPr id="1" name=""/>
+        <p:cNvGrpSpPr/>
+        <p:nvPr/>
+      </p:nvGrpSpPr>
+      <p:grpSpPr>
+        <a:xfrm>
+          <a:off x="0" y="0"/>
+          <a:ext cx="0" cy="0"/>
+          <a:chOff x="0" y="0"/>
+          <a:chExt cx="0" cy="0"/>
+        </a:xfrm>
+      </p:grpSpPr>
+      <p:sp>
+        <p:nvSpPr>
           <p:cNvPr id="4" name="Título 1">
             <a:extLst>
               <a:ext uri="{FF2B5EF4-FFF2-40B4-BE49-F238E27FC236}">
-                <a16:creationId xmlns:a16="http://schemas.microsoft.com/office/drawing/2014/main" xmlns="" id="{32666AC8-2E17-4DB4-B0F5-60C640CCFD2E}"/>
+                <a16:creationId xmlns:a16="http://schemas.microsoft.com/office/drawing/2014/main" id="{32666AC8-2E17-4DB4-B0F5-60C640CCFD2E}"/>
               </a:ext>
             </a:extLst>
           </p:cNvPr>
@@ -13430,7 +14741,7 @@
 </p:sld>
 </file>
 
-<file path=ppt/slides/slide38.xml><?xml version="1.0" encoding="utf-8"?>
+<file path=ppt/slides/slide41.xml><?xml version="1.0" encoding="utf-8"?>
 <p:sld xmlns:a="http://schemas.openxmlformats.org/drawingml/2006/main" xmlns:r="http://schemas.openxmlformats.org/officeDocument/2006/relationships" xmlns:p="http://schemas.openxmlformats.org/presentationml/2006/main">
   <p:cSld>
     <p:spTree>
@@ -13452,7 +14763,7 @@
           <p:cNvPr id="4" name="Título 1">
             <a:extLst>
               <a:ext uri="{FF2B5EF4-FFF2-40B4-BE49-F238E27FC236}">
-                <a16:creationId xmlns:a16="http://schemas.microsoft.com/office/drawing/2014/main" xmlns="" id="{32666AC8-2E17-4DB4-B0F5-60C640CCFD2E}"/>
+                <a16:creationId xmlns:a16="http://schemas.microsoft.com/office/drawing/2014/main" id="{32666AC8-2E17-4DB4-B0F5-60C640CCFD2E}"/>
               </a:ext>
             </a:extLst>
           </p:cNvPr>
@@ -13516,7 +14827,7 @@
 </p:sld>
 </file>
 
-<file path=ppt/slides/slide39.xml><?xml version="1.0" encoding="utf-8"?>
+<file path=ppt/slides/slide42.xml><?xml version="1.0" encoding="utf-8"?>
 <p:sld xmlns:a="http://schemas.openxmlformats.org/drawingml/2006/main" xmlns:r="http://schemas.openxmlformats.org/officeDocument/2006/relationships" xmlns:p="http://schemas.openxmlformats.org/presentationml/2006/main">
   <p:cSld>
     <p:spTree>
@@ -13749,126 +15060,6 @@
 </p:sld>
 </file>
 
-<file path=ppt/slides/slide4.xml><?xml version="1.0" encoding="utf-8"?>
-<p:sld xmlns:a="http://schemas.openxmlformats.org/drawingml/2006/main" xmlns:r="http://schemas.openxmlformats.org/officeDocument/2006/relationships" xmlns:p="http://schemas.openxmlformats.org/presentationml/2006/main">
-  <p:cSld>
-    <p:spTree>
-      <p:nvGrpSpPr>
-        <p:cNvPr id="1" name=""/>
-        <p:cNvGrpSpPr/>
-        <p:nvPr/>
-      </p:nvGrpSpPr>
-      <p:grpSpPr>
-        <a:xfrm>
-          <a:off x="0" y="0"/>
-          <a:ext cx="0" cy="0"/>
-          <a:chOff x="0" y="0"/>
-          <a:chExt cx="0" cy="0"/>
-        </a:xfrm>
-      </p:grpSpPr>
-      <p:sp>
-        <p:nvSpPr>
-          <p:cNvPr id="2" name="Title 1"/>
-          <p:cNvSpPr>
-            <a:spLocks noGrp="1"/>
-          </p:cNvSpPr>
-          <p:nvPr>
-            <p:ph type="title"/>
-          </p:nvPr>
-        </p:nvSpPr>
-        <p:spPr/>
-        <p:txBody>
-          <a:bodyPr/>
-          <a:lstStyle/>
-          <a:p>
-            <a:r>
-              <a:rPr lang="pt-BR" dirty="0"/>
-              <a:t>Motivação</a:t>
-            </a:r>
-          </a:p>
-        </p:txBody>
-      </p:sp>
-      <p:sp>
-        <p:nvSpPr>
-          <p:cNvPr id="7" name="Content Placeholder 2"/>
-          <p:cNvSpPr>
-            <a:spLocks noGrp="1"/>
-          </p:cNvSpPr>
-          <p:nvPr>
-            <p:ph idx="1"/>
-          </p:nvPr>
-        </p:nvSpPr>
-        <p:spPr>
-          <a:xfrm>
-            <a:off x="5802087" y="1690688"/>
-            <a:ext cx="6240978" cy="5036683"/>
-          </a:xfrm>
-        </p:spPr>
-        <p:txBody>
-          <a:bodyPr>
-            <a:normAutofit/>
-          </a:bodyPr>
-          <a:lstStyle/>
-          <a:p>
-            <a:r>
-              <a:rPr lang="pt-BR" dirty="0"/>
-              <a:t>O que podemos fazer se não tivermos informações sobre as classes (i.e., rótulos) a que pertencem os exemplos de entrada?</a:t>
-            </a:r>
-          </a:p>
-        </p:txBody>
-      </p:sp>
-      <p:pic>
-        <p:nvPicPr>
-          <p:cNvPr id="6" name="Picture 2" descr="K-Means Clustering using Python. Welcome back guys! Hope you had a great… |  by Luigi Fiori | Medium"/>
-          <p:cNvPicPr>
-            <a:picLocks noChangeAspect="1" noChangeArrowheads="1"/>
-          </p:cNvPicPr>
-          <p:nvPr/>
-        </p:nvPicPr>
-        <p:blipFill rotWithShape="1">
-          <a:blip r:embed="rId3">
-            <a:extLst>
-              <a:ext uri="{28A0092B-C50C-407E-A947-70E740481C1C}">
-                <a14:useLocalDpi xmlns:a14="http://schemas.microsoft.com/office/drawing/2010/main" val="0"/>
-              </a:ext>
-            </a:extLst>
-          </a:blip>
-          <a:srcRect l="1639" t="3709" r="55246" b="11854"/>
-          <a:stretch/>
-        </p:blipFill>
-        <p:spPr bwMode="auto">
-          <a:xfrm>
-            <a:off x="1090832" y="2101933"/>
-            <a:ext cx="3894188" cy="3177638"/>
-          </a:xfrm>
-          <a:prstGeom prst="rect">
-            <a:avLst/>
-          </a:prstGeom>
-          <a:noFill/>
-          <a:extLst>
-            <a:ext uri="{909E8E84-426E-40DD-AFC4-6F175D3DCCD1}">
-              <a14:hiddenFill xmlns:a14="http://schemas.microsoft.com/office/drawing/2010/main">
-                <a:solidFill>
-                  <a:srgbClr val="FFFFFF"/>
-                </a:solidFill>
-              </a14:hiddenFill>
-            </a:ext>
-          </a:extLst>
-        </p:spPr>
-      </p:pic>
-    </p:spTree>
-    <p:extLst>
-      <p:ext uri="{BB962C8B-B14F-4D97-AF65-F5344CB8AC3E}">
-        <p14:creationId xmlns:p14="http://schemas.microsoft.com/office/powerpoint/2010/main" val="1021130030"/>
-      </p:ext>
-    </p:extLst>
-  </p:cSld>
-  <p:clrMapOvr>
-    <a:masterClrMapping/>
-  </p:clrMapOvr>
-</p:sld>
-</file>
-
 <file path=ppt/slides/slide5.xml><?xml version="1.0" encoding="utf-8"?>
 <p:sld xmlns:a="http://schemas.openxmlformats.org/drawingml/2006/main" xmlns:r="http://schemas.openxmlformats.org/officeDocument/2006/relationships" xmlns:p="http://schemas.openxmlformats.org/presentationml/2006/main">
   <p:cSld>
@@ -13877,7 +15068,7 @@
         <p:cNvPr id="1" name="">
           <a:extLst>
             <a:ext uri="{FF2B5EF4-FFF2-40B4-BE49-F238E27FC236}">
-              <a16:creationId xmlns:a16="http://schemas.microsoft.com/office/drawing/2014/main" xmlns="" id="{E5F23F1A-965B-E657-4F46-B48EB78CFF12}"/>
+              <a16:creationId xmlns:a16="http://schemas.microsoft.com/office/drawing/2014/main" id="{E5F23F1A-965B-E657-4F46-B48EB78CFF12}"/>
             </a:ext>
           </a:extLst>
         </p:cNvPr>
@@ -13897,7 +15088,7 @@
           <p:cNvPr id="2" name="Title 1">
             <a:extLst>
               <a:ext uri="{FF2B5EF4-FFF2-40B4-BE49-F238E27FC236}">
-                <a16:creationId xmlns:a16="http://schemas.microsoft.com/office/drawing/2014/main" xmlns="" id="{1D2CEC37-D651-72A5-0293-3FB911F60F37}"/>
+                <a16:creationId xmlns:a16="http://schemas.microsoft.com/office/drawing/2014/main" id="{1D2CEC37-D651-72A5-0293-3FB911F60F37}"/>
               </a:ext>
             </a:extLst>
           </p:cNvPr>
@@ -13925,7 +15116,7 @@
           <p:cNvPr id="7" name="Content Placeholder 2">
             <a:extLst>
               <a:ext uri="{FF2B5EF4-FFF2-40B4-BE49-F238E27FC236}">
-                <a16:creationId xmlns:a16="http://schemas.microsoft.com/office/drawing/2014/main" xmlns="" id="{B3C1A135-4B52-F54B-5BDE-7C6DA1069706}"/>
+                <a16:creationId xmlns:a16="http://schemas.microsoft.com/office/drawing/2014/main" id="{B3C1A135-4B52-F54B-5BDE-7C6DA1069706}"/>
               </a:ext>
             </a:extLst>
           </p:cNvPr>
@@ -14016,7 +15207,7 @@
           <p:cNvPr id="5" name="Grupo 4">
             <a:extLst>
               <a:ext uri="{FF2B5EF4-FFF2-40B4-BE49-F238E27FC236}">
-                <a16:creationId xmlns:a16="http://schemas.microsoft.com/office/drawing/2014/main" xmlns="" id="{FD3AFEA6-16E8-D562-210E-DDE126CC469D}"/>
+                <a16:creationId xmlns:a16="http://schemas.microsoft.com/office/drawing/2014/main" id="{FD3AFEA6-16E8-D562-210E-DDE126CC469D}"/>
               </a:ext>
             </a:extLst>
           </p:cNvPr>
@@ -14036,7 +15227,7 @@
             <p:cNvPr id="6" name="Picture 2" descr="K-Means Clustering using Python. Welcome back guys! Hope you had a great… |  by Luigi Fiori | Medium">
               <a:extLst>
                 <a:ext uri="{FF2B5EF4-FFF2-40B4-BE49-F238E27FC236}">
-                  <a16:creationId xmlns:a16="http://schemas.microsoft.com/office/drawing/2014/main" xmlns="" id="{5EE61C46-3856-780A-E6BB-BC8EBB4234F4}"/>
+                  <a16:creationId xmlns:a16="http://schemas.microsoft.com/office/drawing/2014/main" id="{5EE61C46-3856-780A-E6BB-BC8EBB4234F4}"/>
                 </a:ext>
               </a:extLst>
             </p:cNvPr>
@@ -14081,7 +15272,7 @@
             <p:cNvPr id="8" name="CaixaDeTexto 7">
               <a:extLst>
                 <a:ext uri="{FF2B5EF4-FFF2-40B4-BE49-F238E27FC236}">
-                  <a16:creationId xmlns:a16="http://schemas.microsoft.com/office/drawing/2014/main" xmlns="" id="{843AD3E7-A8FE-599D-36F8-EA8BA9682F1B}"/>
+                  <a16:creationId xmlns:a16="http://schemas.microsoft.com/office/drawing/2014/main" id="{843AD3E7-A8FE-599D-36F8-EA8BA9682F1B}"/>
                 </a:ext>
               </a:extLst>
             </p:cNvPr>
@@ -14118,7 +15309,7 @@
             <p:cNvPr id="9" name="Picture 2" descr="K-Means Clustering using Python. Welcome back guys! Hope you had a great… |  by Luigi Fiori | Medium">
               <a:extLst>
                 <a:ext uri="{FF2B5EF4-FFF2-40B4-BE49-F238E27FC236}">
-                  <a16:creationId xmlns:a16="http://schemas.microsoft.com/office/drawing/2014/main" xmlns="" id="{E7C74A0F-F2DD-912F-E092-3530D068D40B}"/>
+                  <a16:creationId xmlns:a16="http://schemas.microsoft.com/office/drawing/2014/main" id="{E7C74A0F-F2DD-912F-E092-3530D068D40B}"/>
                 </a:ext>
               </a:extLst>
             </p:cNvPr>
@@ -14163,7 +15354,7 @@
             <p:cNvPr id="10" name="Seta para a direita 9">
               <a:extLst>
                 <a:ext uri="{FF2B5EF4-FFF2-40B4-BE49-F238E27FC236}">
-                  <a16:creationId xmlns:a16="http://schemas.microsoft.com/office/drawing/2014/main" xmlns="" id="{88A77E2D-B8CF-1AE8-8196-DD8F94371FF0}"/>
+                  <a16:creationId xmlns:a16="http://schemas.microsoft.com/office/drawing/2014/main" id="{88A77E2D-B8CF-1AE8-8196-DD8F94371FF0}"/>
                 </a:ext>
               </a:extLst>
             </p:cNvPr>
@@ -14864,7 +16055,7 @@
           <p:cNvPr id="2" name="Title 1">
             <a:extLst>
               <a:ext uri="{FF2B5EF4-FFF2-40B4-BE49-F238E27FC236}">
-                <a16:creationId xmlns:a16="http://schemas.microsoft.com/office/drawing/2014/main" xmlns="" id="{536BFB42-0017-5ED1-7773-E084E5A015B7}"/>
+                <a16:creationId xmlns:a16="http://schemas.microsoft.com/office/drawing/2014/main" id="{536BFB42-0017-5ED1-7773-E084E5A015B7}"/>
               </a:ext>
             </a:extLst>
           </p:cNvPr>
@@ -14893,7 +16084,7 @@
           <p:cNvPr id="3" name="Content Placeholder 2">
             <a:extLst>
               <a:ext uri="{FF2B5EF4-FFF2-40B4-BE49-F238E27FC236}">
-                <a16:creationId xmlns:a16="http://schemas.microsoft.com/office/drawing/2014/main" xmlns="" id="{D299C266-04B6-6A8C-91F5-24FCD2CC3103}"/>
+                <a16:creationId xmlns:a16="http://schemas.microsoft.com/office/drawing/2014/main" id="{D299C266-04B6-6A8C-91F5-24FCD2CC3103}"/>
               </a:ext>
             </a:extLst>
           </p:cNvPr>
@@ -15063,7 +16254,7 @@
           <p:cNvPr id="5" name="Picture 2" descr="K-means clustering on the digits dataset (PCA-reduced data) Centroids are marked with white cross">
             <a:extLst>
               <a:ext uri="{FF2B5EF4-FFF2-40B4-BE49-F238E27FC236}">
-                <a16:creationId xmlns:a16="http://schemas.microsoft.com/office/drawing/2014/main" xmlns="" id="{A7524CD6-9254-ABD9-EBBF-94136AAAEDE9}"/>
+                <a16:creationId xmlns:a16="http://schemas.microsoft.com/office/drawing/2014/main" id="{A7524CD6-9254-ABD9-EBBF-94136AAAEDE9}"/>
               </a:ext>
             </a:extLst>
           </p:cNvPr>
@@ -15285,7 +16476,7 @@
           <p:cNvPr id="1028" name="Picture 4" descr="K Means Clustering no Aprendizado de Máquinas — Aprendizado de Máquina —  DATA SCIENCE">
             <a:extLst>
               <a:ext uri="{FF2B5EF4-FFF2-40B4-BE49-F238E27FC236}">
-                <a16:creationId xmlns:a16="http://schemas.microsoft.com/office/drawing/2014/main" xmlns="" id="{D99905E1-3749-BAAD-E01A-C9B3686C4770}"/>
+                <a16:creationId xmlns:a16="http://schemas.microsoft.com/office/drawing/2014/main" id="{D99905E1-3749-BAAD-E01A-C9B3686C4770}"/>
               </a:ext>
             </a:extLst>
           </p:cNvPr>

--- a/slides/C24_kMeans.pptx
+++ b/slides/C24_kMeans.pptx
@@ -5,7 +5,7 @@
     <p:sldMasterId id="2147483648" r:id="rId1"/>
   </p:sldMasterIdLst>
   <p:notesMasterIdLst>
-    <p:notesMasterId r:id="rId44"/>
+    <p:notesMasterId r:id="rId41"/>
   </p:notesMasterIdLst>
   <p:sldIdLst>
     <p:sldId id="256" r:id="rId2"/>
@@ -40,16 +40,13 @@
     <p:sldId id="421" r:id="rId31"/>
     <p:sldId id="422" r:id="rId32"/>
     <p:sldId id="423" r:id="rId33"/>
-    <p:sldId id="418" r:id="rId34"/>
-    <p:sldId id="411" r:id="rId35"/>
-    <p:sldId id="293" r:id="rId36"/>
-    <p:sldId id="300" r:id="rId37"/>
-    <p:sldId id="398" r:id="rId38"/>
-    <p:sldId id="338" r:id="rId39"/>
-    <p:sldId id="395" r:id="rId40"/>
-    <p:sldId id="396" r:id="rId41"/>
-    <p:sldId id="306" r:id="rId42"/>
-    <p:sldId id="265" r:id="rId43"/>
+    <p:sldId id="424" r:id="rId34"/>
+    <p:sldId id="398" r:id="rId35"/>
+    <p:sldId id="338" r:id="rId36"/>
+    <p:sldId id="395" r:id="rId37"/>
+    <p:sldId id="396" r:id="rId38"/>
+    <p:sldId id="306" r:id="rId39"/>
+    <p:sldId id="265" r:id="rId40"/>
   </p:sldIdLst>
   <p:sldSz cx="12192000" cy="6858000"/>
   <p:notesSz cx="6858000" cy="9144000"/>
@@ -784,7 +781,7 @@
       </p:grpSpPr>
       <p:sp>
         <p:nvSpPr>
-          <p:cNvPr id="2" name="Espaço Reservado para Imagem de Slide 1"/>
+          <p:cNvPr id="2" name="Slide Image Placeholder 1"/>
           <p:cNvSpPr>
             <a:spLocks noGrp="1" noRot="1" noChangeAspect="1"/>
           </p:cNvSpPr>
@@ -796,7 +793,7 @@
       </p:sp>
       <p:sp>
         <p:nvSpPr>
-          <p:cNvPr id="3" name="Espaço Reservado para Anotações 2"/>
+          <p:cNvPr id="3" name="Notes Placeholder 2"/>
           <p:cNvSpPr>
             <a:spLocks noGrp="1"/>
           </p:cNvSpPr>
@@ -809,21 +806,18 @@
           <a:bodyPr/>
           <a:lstStyle/>
           <a:p>
-            <a:r>
-              <a:rPr lang="pt-BR"/>
-              <a:t>https://colab.research.google.com/github/zz4fap/tp557-iot-ml/blob/main/examples/k_means_centros_de_distribui%C3%A7%C3%A3o.ipynb</a:t>
-            </a:r>
-          </a:p>
-        </p:txBody>
-      </p:sp>
-      <p:sp>
-        <p:nvSpPr>
-          <p:cNvPr id="4" name="Espaço Reservado para Número de Slide 3"/>
+            <a:endParaRPr lang="en-US" dirty="0"/>
+          </a:p>
+        </p:txBody>
+      </p:sp>
+      <p:sp>
+        <p:nvSpPr>
+          <p:cNvPr id="4" name="Slide Number Placeholder 3"/>
           <p:cNvSpPr>
             <a:spLocks noGrp="1"/>
           </p:cNvSpPr>
           <p:nvPr>
-            <p:ph type="sldNum" sz="quarter" idx="10"/>
+            <p:ph type="sldNum" sz="quarter" idx="5"/>
           </p:nvPr>
         </p:nvSpPr>
         <p:spPr/>
@@ -842,7 +836,7 @@
     </p:spTree>
     <p:extLst>
       <p:ext uri="{BB962C8B-B14F-4D97-AF65-F5344CB8AC3E}">
-        <p14:creationId xmlns:p14="http://schemas.microsoft.com/office/powerpoint/2010/main" val="2397769607"/>
+        <p14:creationId xmlns:p14="http://schemas.microsoft.com/office/powerpoint/2010/main" val="3697094825"/>
       </p:ext>
     </p:extLst>
   </p:cSld>
@@ -871,7 +865,7 @@
       </p:grpSpPr>
       <p:sp>
         <p:nvSpPr>
-          <p:cNvPr id="2" name="Espaço Reservado para Imagem de Slide 1"/>
+          <p:cNvPr id="2" name="Slide Image Placeholder 1"/>
           <p:cNvSpPr>
             <a:spLocks noGrp="1" noRot="1" noChangeAspect="1"/>
           </p:cNvSpPr>
@@ -880,10 +874,17 @@
           </p:nvPr>
         </p:nvSpPr>
         <p:spPr/>
-      </p:sp>
-      <p:sp>
-        <p:nvSpPr>
-          <p:cNvPr id="3" name="Espaço Reservado para Anotações 2"/>
+        <p:txBody>
+          <a:bodyPr/>
+          <a:lstStyle/>
+          <a:p>
+            <a:endParaRPr lang="en-US"/>
+          </a:p>
+        </p:txBody>
+      </p:sp>
+      <p:sp>
+        <p:nvSpPr>
+          <p:cNvPr id="3" name="Notes Placeholder 2"/>
           <p:cNvSpPr>
             <a:spLocks noGrp="1"/>
           </p:cNvSpPr>
@@ -914,707 +915,9 @@
               <a:defRPr/>
             </a:pPr>
             <a:r>
-              <a:rPr lang="pt-BR" sz="1200" b="0" dirty="0">
-                <a:solidFill>
-                  <a:srgbClr val="00B0F0"/>
-                </a:solidFill>
-              </a:rPr>
-              <a:t>E</a:t>
-            </a:r>
-            <a:r>
-              <a:rPr lang="pt-BR" dirty="0"/>
-              <a:t>xemplo:</a:t>
-            </a:r>
-            <a:r>
-              <a:rPr lang="pt-BR" baseline="0" dirty="0"/>
-              <a:t> </a:t>
-            </a:r>
-            <a:r>
-              <a:rPr lang="pt-BR" dirty="0"/>
-              <a:t>https://colab.research.google.com/github/zz4fap/t320_aprendizado_de_maquina/blob/main/notebooks/clustering/kmeans_example.ipynb</a:t>
-            </a:r>
-          </a:p>
-          <a:p>
-            <a:pPr marL="0" marR="0" lvl="0" indent="0" algn="l" defTabSz="914400" rtl="0" eaLnBrk="1" fontAlgn="auto" latinLnBrk="0" hangingPunct="1">
-              <a:lnSpc>
-                <a:spcPct val="100000"/>
-              </a:lnSpc>
-              <a:spcBef>
-                <a:spcPts val="0"/>
-              </a:spcBef>
-              <a:spcAft>
-                <a:spcPts val="0"/>
-              </a:spcAft>
-              <a:buClrTx/>
-              <a:buSzTx/>
-              <a:buFontTx/>
-              <a:buNone/>
-              <a:tabLst/>
-              <a:defRPr/>
-            </a:pPr>
-            <a:endParaRPr lang="pt-BR" sz="1200" b="0" dirty="0">
-              <a:solidFill>
-                <a:srgbClr val="00B0F0"/>
-              </a:solidFill>
-            </a:endParaRPr>
-          </a:p>
-          <a:p>
-            <a:pPr marL="0" marR="0" lvl="0" indent="0" algn="l" defTabSz="914400" rtl="0" eaLnBrk="1" fontAlgn="auto" latinLnBrk="0" hangingPunct="1">
-              <a:lnSpc>
-                <a:spcPct val="100000"/>
-              </a:lnSpc>
-              <a:spcBef>
-                <a:spcPts val="0"/>
-              </a:spcBef>
-              <a:spcAft>
-                <a:spcPts val="0"/>
-              </a:spcAft>
-              <a:buClrTx/>
-              <a:buSzTx/>
-              <a:buFontTx/>
-              <a:buNone/>
-              <a:tabLst/>
-              <a:defRPr/>
-            </a:pPr>
-            <a:endParaRPr lang="pt-BR" sz="1200" b="0" dirty="0">
-              <a:solidFill>
-                <a:srgbClr val="00B0F0"/>
-              </a:solidFill>
-            </a:endParaRPr>
-          </a:p>
-          <a:p>
-            <a:r>
-              <a:rPr lang="pt-BR" dirty="0"/>
-              <a:t>Identificar o melhor número de clusters (</a:t>
-            </a:r>
-            <a:r>
-              <a:rPr lang="pt-BR" dirty="0" err="1"/>
-              <a:t>kk</a:t>
-            </a:r>
-            <a:r>
-              <a:rPr lang="pt-BR" dirty="0"/>
-              <a:t>) no K-</a:t>
-            </a:r>
-            <a:r>
-              <a:rPr lang="pt-BR" dirty="0" err="1"/>
-              <a:t>Means</a:t>
-            </a:r>
-            <a:r>
-              <a:rPr lang="pt-BR" dirty="0"/>
-              <a:t> é um passo fundamental para garantir a eficiência e a utilidade da clusterização. Existem várias abordagens para determinar o valor ideal de </a:t>
-            </a:r>
-            <a:r>
-              <a:rPr lang="pt-BR" dirty="0" err="1"/>
-              <a:t>kk</a:t>
-            </a:r>
-            <a:r>
-              <a:rPr lang="pt-BR" dirty="0"/>
-              <a:t>. As mais comuns incluem:</a:t>
-            </a:r>
-          </a:p>
-          <a:p>
-            <a:r>
-              <a:rPr lang="pt-BR" b="1" dirty="0"/>
-              <a:t>1. Método do Cotovelo (</a:t>
-            </a:r>
-            <a:r>
-              <a:rPr lang="pt-BR" b="1" dirty="0" err="1"/>
-              <a:t>Elbow</a:t>
-            </a:r>
-            <a:r>
-              <a:rPr lang="pt-BR" b="1" dirty="0"/>
-              <a:t> </a:t>
-            </a:r>
-            <a:r>
-              <a:rPr lang="pt-BR" b="1" dirty="0" err="1"/>
-              <a:t>Method</a:t>
-            </a:r>
-            <a:r>
-              <a:rPr lang="pt-BR" b="1" dirty="0"/>
-              <a:t>)</a:t>
-            </a:r>
-          </a:p>
-          <a:p>
-            <a:r>
-              <a:rPr lang="pt-BR" dirty="0"/>
-              <a:t>Este método analisa a variação da </a:t>
-            </a:r>
-            <a:r>
-              <a:rPr lang="pt-BR" b="1" dirty="0"/>
-              <a:t>inércia </a:t>
-            </a:r>
-            <a:r>
-              <a:rPr lang="pt-BR" b="1" dirty="0" err="1"/>
-              <a:t>intra-cluster</a:t>
-            </a:r>
-            <a:r>
-              <a:rPr lang="pt-BR" dirty="0"/>
-              <a:t> (ou soma dos erros quadráticos dentro dos clusters, WSSWSS) à medida que o número de clusters aumenta.</a:t>
-            </a:r>
-          </a:p>
-          <a:p>
-            <a:r>
-              <a:rPr lang="pt-BR" b="1" dirty="0"/>
-              <a:t>Passos:</a:t>
-            </a:r>
-          </a:p>
-          <a:p>
-            <a:pPr>
-              <a:buFont typeface="+mj-lt"/>
-              <a:buAutoNum type="arabicPeriod"/>
-            </a:pPr>
-            <a:r>
-              <a:rPr lang="pt-BR" dirty="0"/>
-              <a:t>Execute o K-</a:t>
-            </a:r>
-            <a:r>
-              <a:rPr lang="pt-BR" dirty="0" err="1"/>
-              <a:t>Means</a:t>
-            </a:r>
-            <a:r>
-              <a:rPr lang="pt-BR" dirty="0"/>
-              <a:t> com diferentes valores de </a:t>
-            </a:r>
-            <a:r>
-              <a:rPr lang="pt-BR" dirty="0" err="1"/>
-              <a:t>kk</a:t>
-            </a:r>
-            <a:r>
-              <a:rPr lang="pt-BR" dirty="0"/>
-              <a:t> (por exemplo, k=1k=1 a k=10k=10).</a:t>
-            </a:r>
-          </a:p>
-          <a:p>
-            <a:pPr>
-              <a:buFont typeface="+mj-lt"/>
-              <a:buAutoNum type="arabicPeriod"/>
-            </a:pPr>
-            <a:r>
-              <a:rPr lang="pt-BR" dirty="0"/>
-              <a:t>Calcule o WSSWSS para cada valor de </a:t>
-            </a:r>
-            <a:r>
-              <a:rPr lang="pt-BR" dirty="0" err="1"/>
-              <a:t>kk</a:t>
-            </a:r>
-            <a:r>
-              <a:rPr lang="pt-BR" dirty="0"/>
-              <a:t>.</a:t>
-            </a:r>
-          </a:p>
-          <a:p>
-            <a:pPr>
-              <a:buFont typeface="+mj-lt"/>
-              <a:buAutoNum type="arabicPeriod"/>
-            </a:pPr>
-            <a:r>
-              <a:rPr lang="pt-BR" dirty="0"/>
-              <a:t>Trace um gráfico do WSSWSS em função de </a:t>
-            </a:r>
-            <a:r>
-              <a:rPr lang="pt-BR" dirty="0" err="1"/>
-              <a:t>kk</a:t>
-            </a:r>
-            <a:r>
-              <a:rPr lang="pt-BR" dirty="0"/>
-              <a:t>.</a:t>
-            </a:r>
-          </a:p>
-          <a:p>
-            <a:pPr>
-              <a:buFont typeface="+mj-lt"/>
-              <a:buAutoNum type="arabicPeriod"/>
-            </a:pPr>
-            <a:r>
-              <a:rPr lang="pt-BR" dirty="0"/>
-              <a:t>Identifique o "cotovelo" no gráfico — o ponto onde a redução no WSSWSS se torna menos significativa.</a:t>
-            </a:r>
-          </a:p>
-          <a:p>
-            <a:r>
-              <a:rPr lang="pt-BR" b="1" dirty="0"/>
-              <a:t>Observação:</a:t>
-            </a:r>
-          </a:p>
-          <a:p>
-            <a:r>
-              <a:rPr lang="pt-BR" dirty="0"/>
-              <a:t>O "cotovelo" indica que aumentar </a:t>
-            </a:r>
-            <a:r>
-              <a:rPr lang="pt-BR" dirty="0" err="1"/>
-              <a:t>kk</a:t>
-            </a:r>
-            <a:r>
-              <a:rPr lang="pt-BR" dirty="0"/>
-              <a:t> além desse ponto não resulta em uma melhoria substancial na compactação dos clusters.</a:t>
-            </a:r>
-          </a:p>
-          <a:p>
-            <a:r>
-              <a:rPr lang="pt-BR" b="1" dirty="0"/>
-              <a:t>2. Coeficiente de Silhueta (</a:t>
-            </a:r>
-            <a:r>
-              <a:rPr lang="pt-BR" b="1" dirty="0" err="1"/>
-              <a:t>Silhouette</a:t>
-            </a:r>
-            <a:r>
-              <a:rPr lang="pt-BR" b="1" dirty="0"/>
-              <a:t> Score)</a:t>
-            </a:r>
-          </a:p>
-          <a:p>
-            <a:r>
-              <a:rPr lang="pt-BR" dirty="0"/>
-              <a:t>O coeficiente de silhueta avalia a </a:t>
-            </a:r>
-            <a:r>
-              <a:rPr lang="pt-BR" b="1" dirty="0"/>
-              <a:t>qualidade da clusterização</a:t>
-            </a:r>
-            <a:r>
-              <a:rPr lang="pt-BR" dirty="0"/>
-              <a:t>, considerando a coesão dentro dos clusters e a separação entre eles.</a:t>
-            </a:r>
-          </a:p>
-          <a:p>
-            <a:pPr>
-              <a:buFont typeface="Arial" panose="020B0604020202020204" pitchFamily="34" charset="0"/>
-              <a:buChar char="•"/>
-            </a:pPr>
-            <a:r>
-              <a:rPr lang="pt-BR" dirty="0"/>
-              <a:t>s=b−</a:t>
-            </a:r>
-            <a:r>
-              <a:rPr lang="pt-BR" dirty="0" err="1"/>
-              <a:t>amax</a:t>
-            </a:r>
-            <a:r>
-              <a:rPr lang="pt-BR" dirty="0"/>
-              <a:t>⁡(</a:t>
-            </a:r>
-            <a:r>
-              <a:rPr lang="pt-BR" dirty="0" err="1"/>
-              <a:t>a,b</a:t>
-            </a:r>
-            <a:r>
-              <a:rPr lang="pt-BR" dirty="0"/>
-              <a:t>)s = \</a:t>
-            </a:r>
-            <a:r>
-              <a:rPr lang="pt-BR" dirty="0" err="1"/>
-              <a:t>frac</a:t>
-            </a:r>
-            <a:r>
-              <a:rPr lang="pt-BR" dirty="0"/>
-              <a:t>{b - a}{\</a:t>
-            </a:r>
-            <a:r>
-              <a:rPr lang="pt-BR" dirty="0" err="1"/>
-              <a:t>max</a:t>
-            </a:r>
-            <a:r>
-              <a:rPr lang="pt-BR" dirty="0"/>
-              <a:t>(a, b)} aa: distância média de um ponto para os outros pontos do mesmo cluster.</a:t>
-            </a:r>
-          </a:p>
-          <a:p>
-            <a:pPr>
-              <a:buFont typeface="Arial" panose="020B0604020202020204" pitchFamily="34" charset="0"/>
-              <a:buChar char="•"/>
-            </a:pPr>
-            <a:r>
-              <a:rPr lang="pt-BR" dirty="0" err="1"/>
-              <a:t>bb</a:t>
-            </a:r>
-            <a:r>
-              <a:rPr lang="pt-BR" dirty="0"/>
-              <a:t>: distância média de um ponto para os pontos do cluster mais próximo.</a:t>
-            </a:r>
-          </a:p>
-          <a:p>
-            <a:r>
-              <a:rPr lang="pt-BR" b="1" dirty="0"/>
-              <a:t>Passos:</a:t>
-            </a:r>
-          </a:p>
-          <a:p>
-            <a:pPr>
-              <a:buFont typeface="+mj-lt"/>
-              <a:buAutoNum type="arabicPeriod"/>
-            </a:pPr>
-            <a:r>
-              <a:rPr lang="pt-BR" dirty="0"/>
-              <a:t>Execute o K-</a:t>
-            </a:r>
-            <a:r>
-              <a:rPr lang="pt-BR" dirty="0" err="1"/>
-              <a:t>Means</a:t>
-            </a:r>
-            <a:r>
-              <a:rPr lang="pt-BR" dirty="0"/>
-              <a:t> para diferentes valores de </a:t>
-            </a:r>
-            <a:r>
-              <a:rPr lang="pt-BR" dirty="0" err="1"/>
-              <a:t>kk</a:t>
-            </a:r>
-            <a:r>
-              <a:rPr lang="pt-BR" dirty="0"/>
-              <a:t>.</a:t>
-            </a:r>
-          </a:p>
-          <a:p>
-            <a:pPr>
-              <a:buFont typeface="+mj-lt"/>
-              <a:buAutoNum type="arabicPeriod"/>
-            </a:pPr>
-            <a:r>
-              <a:rPr lang="pt-BR" dirty="0"/>
-              <a:t>Calcule o coeficiente de silhueta para cada ponto e, em seguida, a média para o conjunto.</a:t>
-            </a:r>
-          </a:p>
-          <a:p>
-            <a:pPr>
-              <a:buFont typeface="+mj-lt"/>
-              <a:buAutoNum type="arabicPeriod"/>
-            </a:pPr>
-            <a:r>
-              <a:rPr lang="pt-BR" dirty="0"/>
-              <a:t>Escolha </a:t>
-            </a:r>
-            <a:r>
-              <a:rPr lang="pt-BR" dirty="0" err="1"/>
-              <a:t>kk</a:t>
-            </a:r>
-            <a:r>
-              <a:rPr lang="pt-BR" dirty="0"/>
-              <a:t> que maximize o valor médio do coeficiente de silhueta.</a:t>
-            </a:r>
-          </a:p>
-          <a:p>
-            <a:r>
-              <a:rPr lang="pt-BR" b="1" dirty="0"/>
-              <a:t>3. Critério Gap </a:t>
-            </a:r>
-            <a:r>
-              <a:rPr lang="pt-BR" b="1" dirty="0" err="1"/>
-              <a:t>Statistic</a:t>
-            </a:r>
-            <a:endParaRPr lang="pt-BR" b="1" dirty="0"/>
-          </a:p>
-          <a:p>
-            <a:r>
-              <a:rPr lang="pt-BR" dirty="0"/>
-              <a:t>Este método compara a dispersão dos clusters no conjunto de dados com uma dispersão esperada de um conjunto de dados gerado aleatoriamente.</a:t>
-            </a:r>
-          </a:p>
-          <a:p>
-            <a:r>
-              <a:rPr lang="pt-BR" b="1" dirty="0"/>
-              <a:t>Passos:</a:t>
-            </a:r>
-          </a:p>
-          <a:p>
-            <a:pPr>
-              <a:buFont typeface="+mj-lt"/>
-              <a:buAutoNum type="arabicPeriod"/>
-            </a:pPr>
-            <a:r>
-              <a:rPr lang="pt-BR" dirty="0"/>
-              <a:t>Execute o K-</a:t>
-            </a:r>
-            <a:r>
-              <a:rPr lang="pt-BR" dirty="0" err="1"/>
-              <a:t>Means</a:t>
-            </a:r>
-            <a:r>
-              <a:rPr lang="pt-BR" dirty="0"/>
-              <a:t> para diferentes valores de </a:t>
-            </a:r>
-            <a:r>
-              <a:rPr lang="pt-BR" dirty="0" err="1"/>
-              <a:t>kk</a:t>
-            </a:r>
-            <a:r>
-              <a:rPr lang="pt-BR" dirty="0"/>
-              <a:t> no conjunto de dados real.</a:t>
-            </a:r>
-          </a:p>
-          <a:p>
-            <a:pPr>
-              <a:buFont typeface="+mj-lt"/>
-              <a:buAutoNum type="arabicPeriod"/>
-            </a:pPr>
-            <a:r>
-              <a:rPr lang="pt-BR" dirty="0"/>
-              <a:t>Gere um conjunto de dados aleatório com a mesma distribuição e calcule a dispersão dos clusters.</a:t>
-            </a:r>
-          </a:p>
-          <a:p>
-            <a:pPr>
-              <a:buFont typeface="+mj-lt"/>
-              <a:buAutoNum type="arabicPeriod"/>
-            </a:pPr>
-            <a:r>
-              <a:rPr lang="pt-BR" dirty="0"/>
-              <a:t>Compare as dispersões e encontre </a:t>
-            </a:r>
-            <a:r>
-              <a:rPr lang="pt-BR" dirty="0" err="1"/>
-              <a:t>kk</a:t>
-            </a:r>
-            <a:r>
-              <a:rPr lang="pt-BR" dirty="0"/>
-              <a:t> que maximize a diferença (gap) entre os dois conjuntos.</a:t>
-            </a:r>
-          </a:p>
-          <a:p>
-            <a:r>
-              <a:rPr lang="pt-BR" b="1" dirty="0"/>
-              <a:t>4. Validação Cruzada</a:t>
-            </a:r>
-          </a:p>
-          <a:p>
-            <a:r>
-              <a:rPr lang="pt-BR" dirty="0"/>
-              <a:t>Divida o conjunto de dados em subconjuntos e avalie a consistência dos clusters em diferentes amostras.</a:t>
-            </a:r>
-          </a:p>
-          <a:p>
-            <a:r>
-              <a:rPr lang="pt-BR" b="1" dirty="0"/>
-              <a:t>5. Métodos Automáticos, como X-</a:t>
-            </a:r>
-            <a:r>
-              <a:rPr lang="pt-BR" b="1" dirty="0" err="1"/>
-              <a:t>Means</a:t>
-            </a:r>
-            <a:r>
-              <a:rPr lang="pt-BR" b="1" dirty="0"/>
-              <a:t> e G-</a:t>
-            </a:r>
-            <a:r>
-              <a:rPr lang="pt-BR" b="1" dirty="0" err="1"/>
-              <a:t>Means</a:t>
-            </a:r>
-            <a:endParaRPr lang="pt-BR" b="1" dirty="0"/>
-          </a:p>
-          <a:p>
-            <a:pPr>
-              <a:buFont typeface="Arial" panose="020B0604020202020204" pitchFamily="34" charset="0"/>
-              <a:buChar char="•"/>
-            </a:pPr>
-            <a:r>
-              <a:rPr lang="pt-BR" b="1" dirty="0"/>
-              <a:t>X-</a:t>
-            </a:r>
-            <a:r>
-              <a:rPr lang="pt-BR" b="1" dirty="0" err="1"/>
-              <a:t>Means</a:t>
-            </a:r>
-            <a:r>
-              <a:rPr lang="pt-BR" dirty="0"/>
-              <a:t>: Extensão do K-</a:t>
-            </a:r>
-            <a:r>
-              <a:rPr lang="pt-BR" dirty="0" err="1"/>
-              <a:t>Means</a:t>
-            </a:r>
-            <a:r>
-              <a:rPr lang="pt-BR" dirty="0"/>
-              <a:t> que escolhe automaticamente </a:t>
-            </a:r>
-            <a:r>
-              <a:rPr lang="pt-BR" dirty="0" err="1"/>
-              <a:t>kk</a:t>
-            </a:r>
-            <a:r>
-              <a:rPr lang="pt-BR" dirty="0"/>
-              <a:t> otimizando o critério Bayesiano.</a:t>
-            </a:r>
-          </a:p>
-          <a:p>
-            <a:pPr>
-              <a:buFont typeface="Arial" panose="020B0604020202020204" pitchFamily="34" charset="0"/>
-              <a:buChar char="•"/>
-            </a:pPr>
-            <a:r>
-              <a:rPr lang="pt-BR" b="1" dirty="0"/>
-              <a:t>G-</a:t>
-            </a:r>
-            <a:r>
-              <a:rPr lang="pt-BR" b="1" dirty="0" err="1"/>
-              <a:t>Means</a:t>
-            </a:r>
-            <a:r>
-              <a:rPr lang="pt-BR" dirty="0"/>
-              <a:t>: Usa testes estatísticos para determinar se os clusters seguem uma distribuição gaussiana.</a:t>
-            </a:r>
-          </a:p>
-          <a:p>
-            <a:r>
-              <a:rPr lang="pt-BR" b="1" dirty="0"/>
-              <a:t>Considerações:</a:t>
-            </a:r>
-          </a:p>
-          <a:p>
-            <a:pPr>
-              <a:buFont typeface="Arial" panose="020B0604020202020204" pitchFamily="34" charset="0"/>
-              <a:buChar char="•"/>
-            </a:pPr>
-            <a:r>
-              <a:rPr lang="pt-BR" b="1" dirty="0"/>
-              <a:t>Dimensão dos dados</a:t>
-            </a:r>
-            <a:r>
-              <a:rPr lang="pt-BR" dirty="0"/>
-              <a:t>: Em alta dimensionalidade, os métodos podem se tornar menos claros devido à maldição da dimensionalidade.</a:t>
-            </a:r>
-          </a:p>
-          <a:p>
-            <a:pPr>
-              <a:buFont typeface="Arial" panose="020B0604020202020204" pitchFamily="34" charset="0"/>
-              <a:buChar char="•"/>
-            </a:pPr>
-            <a:r>
-              <a:rPr lang="pt-BR" b="1" dirty="0"/>
-              <a:t>Interpretação</a:t>
-            </a:r>
-            <a:r>
-              <a:rPr lang="pt-BR" dirty="0"/>
-              <a:t>: O número de clusters deve fazer sentido no contexto do problema, além de ser estatisticamente válido.</a:t>
-            </a:r>
-          </a:p>
-          <a:p>
-            <a:r>
-              <a:rPr lang="pt-BR" dirty="0"/>
-              <a:t>Combinar múltiplos métodos pode ser útil para confirmar a escolha do melhor </a:t>
-            </a:r>
-            <a:r>
-              <a:rPr lang="pt-BR" dirty="0" err="1"/>
-              <a:t>kk</a:t>
-            </a:r>
-            <a:r>
-              <a:rPr lang="pt-BR" dirty="0"/>
-              <a:t>.</a:t>
-            </a:r>
-          </a:p>
-          <a:p>
-            <a:endParaRPr lang="en-US" dirty="0"/>
-          </a:p>
-        </p:txBody>
-      </p:sp>
-      <p:sp>
-        <p:nvSpPr>
-          <p:cNvPr id="4" name="Espaço Reservado para Número de Slide 3"/>
-          <p:cNvSpPr>
-            <a:spLocks noGrp="1"/>
-          </p:cNvSpPr>
-          <p:nvPr>
-            <p:ph type="sldNum" sz="quarter" idx="10"/>
-          </p:nvPr>
-        </p:nvSpPr>
-        <p:spPr/>
-        <p:txBody>
-          <a:bodyPr/>
-          <a:lstStyle/>
-          <a:p>
-            <a:fld id="{F430A2A4-8C14-4B1A-AD48-7B6401078BF7}" type="slidenum">
-              <a:rPr lang="pt-BR" smtClean="0"/>
-              <a:t>35</a:t>
-            </a:fld>
-            <a:endParaRPr lang="pt-BR"/>
-          </a:p>
-        </p:txBody>
-      </p:sp>
-    </p:spTree>
-    <p:extLst>
-      <p:ext uri="{BB962C8B-B14F-4D97-AF65-F5344CB8AC3E}">
-        <p14:creationId xmlns:p14="http://schemas.microsoft.com/office/powerpoint/2010/main" val="3992294165"/>
-      </p:ext>
-    </p:extLst>
-  </p:cSld>
-  <p:clrMapOvr>
-    <a:masterClrMapping/>
-  </p:clrMapOvr>
-</p:notes>
-</file>
-
-<file path=ppt/notesSlides/notesSlide14.xml><?xml version="1.0" encoding="utf-8"?>
-<p:notes xmlns:a="http://schemas.openxmlformats.org/drawingml/2006/main" xmlns:r="http://schemas.openxmlformats.org/officeDocument/2006/relationships" xmlns:p="http://schemas.openxmlformats.org/presentationml/2006/main">
-  <p:cSld>
-    <p:spTree>
-      <p:nvGrpSpPr>
-        <p:cNvPr id="1" name=""/>
-        <p:cNvGrpSpPr/>
-        <p:nvPr/>
-      </p:nvGrpSpPr>
-      <p:grpSpPr>
-        <a:xfrm>
-          <a:off x="0" y="0"/>
-          <a:ext cx="0" cy="0"/>
-          <a:chOff x="0" y="0"/>
-          <a:chExt cx="0" cy="0"/>
-        </a:xfrm>
-      </p:grpSpPr>
-      <p:sp>
-        <p:nvSpPr>
-          <p:cNvPr id="2" name="Slide Image Placeholder 1"/>
-          <p:cNvSpPr>
-            <a:spLocks noGrp="1" noRot="1" noChangeAspect="1"/>
-          </p:cNvSpPr>
-          <p:nvPr>
-            <p:ph type="sldImg"/>
-          </p:nvPr>
-        </p:nvSpPr>
-        <p:spPr/>
-        <p:txBody>
-          <a:bodyPr/>
-          <a:lstStyle/>
-          <a:p>
-            <a:endParaRPr lang="en-US"/>
-          </a:p>
-        </p:txBody>
-      </p:sp>
-      <p:sp>
-        <p:nvSpPr>
-          <p:cNvPr id="3" name="Notes Placeholder 2"/>
-          <p:cNvSpPr>
-            <a:spLocks noGrp="1"/>
-          </p:cNvSpPr>
-          <p:nvPr>
-            <p:ph type="body" idx="1"/>
-          </p:nvPr>
-        </p:nvSpPr>
-        <p:spPr/>
-        <p:txBody>
-          <a:bodyPr/>
-          <a:lstStyle/>
-          <a:p>
-            <a:r>
-              <a:rPr lang="pt-BR" sz="1200" kern="1200" dirty="0">
-                <a:solidFill>
-                  <a:schemeClr val="tx1"/>
-                </a:solidFill>
-                <a:latin typeface="+mn-lt"/>
-                <a:ea typeface="+mn-ea"/>
-                <a:cs typeface="+mn-cs"/>
-                <a:hlinkClick r:id="rId3">
-                  <a:extLst>
-                    <a:ext uri="{A12FA001-AC4F-418D-AE19-62706E023703}">
-                      <ahyp:hlinkClr xmlns:ahyp="http://schemas.microsoft.com/office/drawing/2018/hyperlinkcolor" val="tx"/>
-                    </a:ext>
-                  </a:extLst>
-                </a:hlinkClick>
-              </a:rPr>
-              <a:t>Referencias</a:t>
-            </a:r>
-          </a:p>
-          <a:p>
-            <a:endParaRPr lang="en-US" dirty="0"/>
+              <a:rPr lang="pt-BR" dirty="0"/>
+              <a:t>https://colab.research.google.com/github/zz4fap/c24_inteligencia_artificial/blob/master/notebooks/kmeans.ipynb</a:t>
+            </a:r>
           </a:p>
         </p:txBody>
       </p:sp>
@@ -1635,7 +938,7 @@
           <a:p>
             <a:fld id="{6FC8D850-966F-45A6-8DE7-15B891E7D40D}" type="slidenum">
               <a:rPr lang="pt-BR" smtClean="0"/>
-              <a:t>38</a:t>
+              <a:t>35</a:t>
             </a:fld>
             <a:endParaRPr lang="pt-BR"/>
           </a:p>
@@ -10970,8 +10273,8 @@
           </a:p>
         </p:txBody>
       </p:sp>
-      <mc:AlternateContent xmlns:mc="http://schemas.openxmlformats.org/markup-compatibility/2006">
-        <mc:Choice xmlns:a14="http://schemas.microsoft.com/office/drawing/2010/main" Requires="a14">
+      <mc:AlternateContent xmlns:mc="http://schemas.openxmlformats.org/markup-compatibility/2006" xmlns:a14="http://schemas.microsoft.com/office/drawing/2010/main">
+        <mc:Choice Requires="a14">
           <p:sp>
             <p:nvSpPr>
               <p:cNvPr id="3" name="Espaço Reservado para Conteúdo 2"/>
@@ -11099,7 +10402,7 @@
             </p:txBody>
           </p:sp>
         </mc:Choice>
-        <mc:Fallback>
+        <mc:Fallback xmlns="">
           <p:sp>
             <p:nvSpPr>
               <p:cNvPr id="3" name="Espaço Reservado para Conteúdo 2"/>
@@ -11945,8 +11248,8 @@
           </a:p>
         </p:txBody>
       </p:sp>
-      <mc:AlternateContent xmlns:mc="http://schemas.openxmlformats.org/markup-compatibility/2006">
-        <mc:Choice xmlns:a14="http://schemas.microsoft.com/office/drawing/2010/main" Requires="a14">
+      <mc:AlternateContent xmlns:mc="http://schemas.openxmlformats.org/markup-compatibility/2006" xmlns:a14="http://schemas.microsoft.com/office/drawing/2010/main">
+        <mc:Choice Requires="a14">
           <p:sp>
             <p:nvSpPr>
               <p:cNvPr id="3" name="Content Placeholder 2">
@@ -12044,7 +11347,7 @@
             </p:txBody>
           </p:sp>
         </mc:Choice>
-        <mc:Fallback>
+        <mc:Fallback xmlns="">
           <p:sp>
             <p:nvSpPr>
               <p:cNvPr id="3" name="Content Placeholder 2">
@@ -12228,8 +11531,8 @@
             </p:nvSpPr>
             <p:spPr>
               <a:xfrm>
-                <a:off x="5943600" y="1825624"/>
-                <a:ext cx="6248400" cy="5032375"/>
+                <a:off x="5638800" y="1825624"/>
+                <a:ext cx="6451600" cy="5032375"/>
               </a:xfrm>
             </p:spPr>
             <p:txBody>
@@ -12347,6 +11650,12 @@
                               <m:r>
                                 <a:rPr lang="pt-BR" b="0" i="1" smtClean="0">
                                   <a:latin typeface="Cambria Math" panose="02040503050406030204" pitchFamily="18" charset="0"/>
+                                </a:rPr>
+                                <m:t> </m:t>
+                              </m:r>
+                              <m:r>
+                                <a:rPr lang="pt-BR" b="0" i="1" smtClean="0">
+                                  <a:latin typeface="Cambria Math" panose="02040503050406030204" pitchFamily="18" charset="0"/>
                                   <a:ea typeface="Cambria Math" panose="02040503050406030204" pitchFamily="18" charset="0"/>
                                 </a:rPr>
                                 <m:t>∈</m:t>
@@ -12361,6 +11670,13 @@
                                   </m:ctrlPr>
                                 </m:sSubPr>
                                 <m:e>
+                                  <m:r>
+                                    <a:rPr lang="pt-BR" b="0" i="1" smtClean="0">
+                                      <a:latin typeface="Cambria Math" panose="02040503050406030204" pitchFamily="18" charset="0"/>
+                                      <a:ea typeface="Cambria Math" panose="02040503050406030204" pitchFamily="18" charset="0"/>
+                                    </a:rPr>
+                                    <m:t> </m:t>
+                                  </m:r>
                                   <m:r>
                                     <a:rPr lang="pt-BR" b="0" i="1" smtClean="0">
                                       <a:latin typeface="Cambria Math" panose="02040503050406030204" pitchFamily="18" charset="0"/>
@@ -12519,6 +11835,64 @@
                 </a:r>
                 <a:r>
                   <a:rPr lang="pt-BR" i="1" dirty="0"/>
+                  <a:t>cluster,</a:t>
+                </a:r>
+                <a:r>
+                  <a:rPr lang="pt-BR" dirty="0"/>
+                  <a:t> </a:t>
+                </a:r>
+                <a14:m>
+                  <m:oMath xmlns:m="http://schemas.openxmlformats.org/officeDocument/2006/math">
+                    <m:sSub>
+                      <m:sSubPr>
+                        <m:ctrlPr>
+                          <a:rPr lang="pt-BR" i="1">
+                            <a:latin typeface="Cambria Math" panose="02040503050406030204" pitchFamily="18" charset="0"/>
+                            <a:ea typeface="Cambria Math" panose="02040503050406030204" pitchFamily="18" charset="0"/>
+                          </a:rPr>
+                        </m:ctrlPr>
+                      </m:sSubPr>
+                      <m:e>
+                        <m:r>
+                          <a:rPr lang="pt-BR" i="1">
+                            <a:latin typeface="Cambria Math" panose="02040503050406030204" pitchFamily="18" charset="0"/>
+                            <a:ea typeface="Cambria Math" panose="02040503050406030204" pitchFamily="18" charset="0"/>
+                          </a:rPr>
+                          <m:t>𝐶</m:t>
+                        </m:r>
+                      </m:e>
+                      <m:sub>
+                        <m:r>
+                          <a:rPr lang="pt-BR" i="1">
+                            <a:latin typeface="Cambria Math" panose="02040503050406030204" pitchFamily="18" charset="0"/>
+                            <a:ea typeface="Cambria Math" panose="02040503050406030204" pitchFamily="18" charset="0"/>
+                          </a:rPr>
+                          <m:t>𝑖</m:t>
+                        </m:r>
+                      </m:sub>
+                    </m:sSub>
+                  </m:oMath>
+                </a14:m>
+                <a:r>
+                  <a:rPr lang="pt-BR" dirty="0"/>
+                  <a:t> é conjunto de amostras no </a:t>
+                </a:r>
+                <a14:m>
+                  <m:oMath xmlns:m="http://schemas.openxmlformats.org/officeDocument/2006/math">
+                    <m:r>
+                      <a:rPr lang="pt-BR" i="1">
+                        <a:latin typeface="Cambria Math" panose="02040503050406030204" pitchFamily="18" charset="0"/>
+                      </a:rPr>
+                      <m:t>𝑖</m:t>
+                    </m:r>
+                  </m:oMath>
+                </a14:m>
+                <a:r>
+                  <a:rPr lang="pt-BR" dirty="0"/>
+                  <a:t>-ésimo </a:t>
+                </a:r>
+                <a:r>
+                  <a:rPr lang="pt-BR" i="1" dirty="0"/>
                   <a:t>cluster</a:t>
                 </a:r>
                 <a:r>
@@ -12601,16 +11975,38 @@
                 </a14:m>
                 <a:r>
                   <a:rPr lang="pt-BR" dirty="0"/>
-                  <a:t> é a distância </a:t>
-                </a:r>
-                <a:r>
-                  <a:rPr lang="pt-BR"/>
-                  <a:t>até esse </a:t>
-                </a:r>
-                <a:r>
-                  <a:rPr lang="pt-BR" i="1" dirty="0"/>
-                  <a:t>cluster</a:t>
-                </a:r>
+                  <a:t> é a distância até </a:t>
+                </a:r>
+                <a14:m>
+                  <m:oMath xmlns:m="http://schemas.openxmlformats.org/officeDocument/2006/math">
+                    <m:sSub>
+                      <m:sSubPr>
+                        <m:ctrlPr>
+                          <a:rPr lang="pt-BR" i="1">
+                            <a:latin typeface="Cambria Math" panose="02040503050406030204" pitchFamily="18" charset="0"/>
+                          </a:rPr>
+                        </m:ctrlPr>
+                      </m:sSubPr>
+                      <m:e>
+                        <m:r>
+                          <a:rPr lang="pt-BR" i="1">
+                            <a:latin typeface="Cambria Math" panose="02040503050406030204" pitchFamily="18" charset="0"/>
+                            <a:ea typeface="Cambria Math" panose="02040503050406030204" pitchFamily="18" charset="0"/>
+                          </a:rPr>
+                          <m:t>𝜇</m:t>
+                        </m:r>
+                      </m:e>
+                      <m:sub>
+                        <m:r>
+                          <a:rPr lang="pt-BR" i="1">
+                            <a:latin typeface="Cambria Math" panose="02040503050406030204" pitchFamily="18" charset="0"/>
+                          </a:rPr>
+                          <m:t>𝑖</m:t>
+                        </m:r>
+                      </m:sub>
+                    </m:sSub>
+                  </m:oMath>
+                </a14:m>
                 <a:r>
                   <a:rPr lang="pt-BR" dirty="0"/>
                   <a:t>.</a:t>
@@ -12669,13 +12065,13 @@
             </p:nvSpPr>
             <p:spPr>
               <a:xfrm>
-                <a:off x="5943600" y="1825624"/>
-                <a:ext cx="6248400" cy="5032375"/>
+                <a:off x="5638800" y="1825624"/>
+                <a:ext cx="6451600" cy="5032375"/>
               </a:xfrm>
               <a:blipFill>
                 <a:blip r:embed="rId3"/>
                 <a:stretch>
-                  <a:fillRect l="-1951" t="-1937" r="-2927"/>
+                  <a:fillRect l="-1890" t="-1937" r="-662"/>
                 </a:stretch>
               </a:blipFill>
             </p:spPr>
@@ -12846,26 +12242,12 @@
               <a:p>
                 <a:r>
                   <a:rPr lang="pt-BR" dirty="0"/>
-                  <a:t>A curva quantifica o quão próximos os pontos de um cluster estão do seu </a:t>
-                </a:r>
-                <a:r>
-                  <a:rPr lang="pt-BR" dirty="0" err="1"/>
-                  <a:t>centróide</a:t>
-                </a:r>
-                <a:r>
-                  <a:rPr lang="pt-BR" dirty="0"/>
-                  <a:t> (centro do cluster).</a:t>
-                </a:r>
-              </a:p>
-              <a:p>
-                <a:r>
-                  <a:rPr lang="pt-BR" dirty="0"/>
-                  <a:t>analisa a curva de WSS em função de </a:t>
+                  <a:t>Plota-se o valor da inércia para um intervalo de valores de </a:t>
                 </a:r>
                 <a14:m>
                   <m:oMath xmlns:m="http://schemas.openxmlformats.org/officeDocument/2006/math">
                     <m:r>
-                      <a:rPr lang="pt-BR" i="1">
+                      <a:rPr lang="pt-BR" b="0" i="1" smtClean="0">
                         <a:latin typeface="Cambria Math" panose="02040503050406030204" pitchFamily="18" charset="0"/>
                       </a:rPr>
                       <m:t>𝑘</m:t>
@@ -12878,7 +12260,42 @@
                 </a:r>
               </a:p>
               <a:p>
-                <a:endParaRPr lang="en-US" dirty="0"/>
+                <a:r>
+                  <a:rPr lang="pt-BR" dirty="0"/>
+                  <a:t>A curva resultante quantifica o quão próximos os pontos de um cluster estão do seu centroide.</a:t>
+                </a:r>
+              </a:p>
+              <a:p>
+                <a:r>
+                  <a:rPr lang="pt-BR" dirty="0"/>
+                  <a:t>Quanto menor a inércia, mais coesos são os </a:t>
+                </a:r>
+                <a:r>
+                  <a:rPr lang="pt-BR" i="1" dirty="0"/>
+                  <a:t>clusters</a:t>
+                </a:r>
+                <a:r>
+                  <a:rPr lang="pt-BR" dirty="0"/>
+                  <a:t>:</a:t>
+                </a:r>
+              </a:p>
+              <a:p>
+                <a:pPr lvl="1">
+                  <a:buFont typeface="Wingdings" panose="05000000000000000000" pitchFamily="2" charset="2"/>
+                  <a:buChar char="§"/>
+                </a:pPr>
+                <a:r>
+                  <a:rPr lang="pt-BR" dirty="0"/>
+                  <a:t>os pontos dentro de um </a:t>
+                </a:r>
+                <a:r>
+                  <a:rPr lang="pt-BR" i="1" dirty="0"/>
+                  <a:t>cluster</a:t>
+                </a:r>
+                <a:r>
+                  <a:rPr lang="pt-BR" dirty="0"/>
+                  <a:t> estão fortemente agrupados, próximos entre si e do centroide.</a:t>
+                </a:r>
               </a:p>
             </p:txBody>
           </p:sp>
@@ -12908,7 +12325,7 @@
               <a:blipFill>
                 <a:blip r:embed="rId2"/>
                 <a:stretch>
-                  <a:fillRect l="-1756" t="-1937" r="-195"/>
+                  <a:fillRect l="-1756" t="-1937" r="-1659"/>
                 </a:stretch>
               </a:blipFill>
             </p:spPr>
@@ -12992,7 +12409,13 @@
   <p:cSld>
     <p:spTree>
       <p:nvGrpSpPr>
-        <p:cNvPr id="1" name=""/>
+        <p:cNvPr id="1" name="">
+          <a:extLst>
+            <a:ext uri="{FF2B5EF4-FFF2-40B4-BE49-F238E27FC236}">
+              <a16:creationId xmlns:a16="http://schemas.microsoft.com/office/drawing/2014/main" id="{B7B07C05-733D-F365-8063-0C296100784E}"/>
+            </a:ext>
+          </a:extLst>
+        </p:cNvPr>
         <p:cNvGrpSpPr/>
         <p:nvPr/>
       </p:nvGrpSpPr>
@@ -13009,7 +12432,7 @@
           <p:cNvPr id="2" name="Title 1">
             <a:extLst>
               <a:ext uri="{FF2B5EF4-FFF2-40B4-BE49-F238E27FC236}">
-                <a16:creationId xmlns:a16="http://schemas.microsoft.com/office/drawing/2014/main" id="{D87F6E31-B0DF-F3EC-D348-0D4E93DD1974}"/>
+                <a16:creationId xmlns:a16="http://schemas.microsoft.com/office/drawing/2014/main" id="{0CA87339-937F-71D3-5575-377273E7022F}"/>
               </a:ext>
             </a:extLst>
           </p:cNvPr>
@@ -13025,69 +12448,178 @@
           <a:bodyPr/>
           <a:lstStyle/>
           <a:p>
-            <a:endParaRPr lang="en-US"/>
-          </a:p>
-        </p:txBody>
-      </p:sp>
-      <p:sp>
-        <p:nvSpPr>
-          <p:cNvPr id="3" name="Content Placeholder 2">
+            <a:r>
+              <a:rPr lang="pt-BR" dirty="0"/>
+              <a:t>Soma dos quadrados </a:t>
+            </a:r>
+            <a:r>
+              <a:rPr lang="pt-BR" dirty="0" err="1"/>
+              <a:t>intra-</a:t>
+            </a:r>
+            <a:r>
+              <a:rPr lang="pt-BR" i="1" dirty="0" err="1"/>
+              <a:t>clusters</a:t>
+            </a:r>
+            <a:endParaRPr lang="en-US" dirty="0"/>
+          </a:p>
+        </p:txBody>
+      </p:sp>
+      <mc:AlternateContent xmlns:mc="http://schemas.openxmlformats.org/markup-compatibility/2006">
+        <mc:Choice xmlns:a14="http://schemas.microsoft.com/office/drawing/2010/main" Requires="a14">
+          <p:sp>
+            <p:nvSpPr>
+              <p:cNvPr id="3" name="Content Placeholder 2">
+                <a:extLst>
+                  <a:ext uri="{FF2B5EF4-FFF2-40B4-BE49-F238E27FC236}">
+                    <a16:creationId xmlns:a16="http://schemas.microsoft.com/office/drawing/2014/main" id="{574CDA6D-9D3D-7343-173D-1326829D74DB}"/>
+                  </a:ext>
+                </a:extLst>
+              </p:cNvPr>
+              <p:cNvSpPr>
+                <a:spLocks noGrp="1"/>
+              </p:cNvSpPr>
+              <p:nvPr>
+                <p:ph idx="1"/>
+              </p:nvPr>
+            </p:nvSpPr>
+            <p:spPr>
+              <a:xfrm>
+                <a:off x="5943600" y="1825624"/>
+                <a:ext cx="6156960" cy="5032375"/>
+              </a:xfrm>
+            </p:spPr>
+            <p:txBody>
+              <a:bodyPr>
+                <a:normAutofit/>
+              </a:bodyPr>
+              <a:lstStyle/>
+              <a:p>
+                <a:r>
+                  <a:rPr lang="pt-BR" dirty="0"/>
+                  <a:t>Assim, o valor ideal de </a:t>
+                </a:r>
+                <a14:m>
+                  <m:oMath xmlns:m="http://schemas.openxmlformats.org/officeDocument/2006/math">
+                    <m:r>
+                      <a:rPr lang="pt-BR" b="0" i="1" smtClean="0">
+                        <a:latin typeface="Cambria Math" panose="02040503050406030204" pitchFamily="18" charset="0"/>
+                      </a:rPr>
+                      <m:t>𝑘</m:t>
+                    </m:r>
+                  </m:oMath>
+                </a14:m>
+                <a:r>
+                  <a:rPr lang="pt-BR" dirty="0"/>
+                  <a:t> é encontrando localizando-se o cotovelo na curva.</a:t>
+                </a:r>
+              </a:p>
+              <a:p>
+                <a:r>
+                  <a:rPr lang="pt-BR" dirty="0"/>
+                  <a:t>Quando o cotovelo não é visível (transição suave), uma técnica comum é traçar uma reta conectando os pontos extremos da curva e identificar o ponto mais distante dessa reta como o "cotovelo" ideal.</a:t>
+                </a:r>
+              </a:p>
+              <a:p>
+                <a:endParaRPr lang="pt-BR" dirty="0"/>
+              </a:p>
+            </p:txBody>
+          </p:sp>
+        </mc:Choice>
+        <mc:Fallback>
+          <p:sp>
+            <p:nvSpPr>
+              <p:cNvPr id="3" name="Content Placeholder 2">
+                <a:extLst>
+                  <a:ext uri="{FF2B5EF4-FFF2-40B4-BE49-F238E27FC236}">
+                    <a16:creationId xmlns:a16="http://schemas.microsoft.com/office/drawing/2014/main" id="{574CDA6D-9D3D-7343-173D-1326829D74DB}"/>
+                  </a:ext>
+                </a:extLst>
+              </p:cNvPr>
+              <p:cNvSpPr>
+                <a:spLocks noGrp="1" noRot="1" noChangeAspect="1" noMove="1" noResize="1" noEditPoints="1" noAdjustHandles="1" noChangeArrowheads="1" noChangeShapeType="1" noTextEdit="1"/>
+              </p:cNvSpPr>
+              <p:nvPr>
+                <p:ph idx="1"/>
+              </p:nvPr>
+            </p:nvSpPr>
+            <p:spPr>
+              <a:xfrm>
+                <a:off x="5943600" y="1825624"/>
+                <a:ext cx="6156960" cy="5032375"/>
+              </a:xfrm>
+              <a:blipFill>
+                <a:blip r:embed="rId2"/>
+                <a:stretch>
+                  <a:fillRect l="-1782" t="-1937" r="-2673"/>
+                </a:stretch>
+              </a:blipFill>
+            </p:spPr>
+            <p:txBody>
+              <a:bodyPr/>
+              <a:lstStyle/>
+              <a:p>
+                <a:r>
+                  <a:rPr lang="en-US">
+                    <a:noFill/>
+                  </a:rPr>
+                  <a:t> </a:t>
+                </a:r>
+              </a:p>
+            </p:txBody>
+          </p:sp>
+        </mc:Fallback>
+      </mc:AlternateContent>
+      <p:pic>
+        <p:nvPicPr>
+          <p:cNvPr id="1026" name="Picture 2" descr="K-Means: Getting the Optimal Number of Clusters- Analytics Vidhya">
             <a:extLst>
               <a:ext uri="{FF2B5EF4-FFF2-40B4-BE49-F238E27FC236}">
-                <a16:creationId xmlns:a16="http://schemas.microsoft.com/office/drawing/2014/main" id="{5007CCEC-CA32-01B4-A9B5-F81A83FF3ECA}"/>
+                <a16:creationId xmlns:a16="http://schemas.microsoft.com/office/drawing/2014/main" id="{E3714189-5C25-70A9-3FD4-7F7A02D9BA2A}"/>
               </a:ext>
             </a:extLst>
           </p:cNvPr>
-          <p:cNvSpPr>
-            <a:spLocks noGrp="1"/>
-          </p:cNvSpPr>
-          <p:nvPr>
-            <p:ph idx="1"/>
-          </p:nvPr>
-        </p:nvSpPr>
-        <p:spPr/>
-        <p:txBody>
-          <a:bodyPr>
-            <a:normAutofit/>
-          </a:bodyPr>
-          <a:lstStyle/>
-          <a:p>
-            <a:r>
-              <a:rPr lang="pt-BR" sz="5400" b="1" dirty="0">
+          <p:cNvPicPr>
+            <a:picLocks noChangeAspect="1" noChangeArrowheads="1"/>
+          </p:cNvPicPr>
+          <p:nvPr/>
+        </p:nvPicPr>
+        <p:blipFill>
+          <a:blip r:embed="rId3">
+            <a:extLst>
+              <a:ext uri="{28A0092B-C50C-407E-A947-70E740481C1C}">
+                <a14:useLocalDpi xmlns:a14="http://schemas.microsoft.com/office/drawing/2010/main" val="0"/>
+              </a:ext>
+            </a:extLst>
+          </a:blip>
+          <a:srcRect/>
+          <a:stretch>
+            <a:fillRect/>
+          </a:stretch>
+        </p:blipFill>
+        <p:spPr bwMode="auto">
+          <a:xfrm>
+            <a:off x="584200" y="2316480"/>
+            <a:ext cx="4521890" cy="3323589"/>
+          </a:xfrm>
+          <a:prstGeom prst="rect">
+            <a:avLst/>
+          </a:prstGeom>
+          <a:noFill/>
+          <a:extLst>
+            <a:ext uri="{909E8E84-426E-40DD-AFC4-6F175D3DCCD1}">
+              <a14:hiddenFill xmlns:a14="http://schemas.microsoft.com/office/drawing/2010/main">
                 <a:solidFill>
-                  <a:srgbClr val="FF0000"/>
+                  <a:srgbClr val="FFFFFF"/>
                 </a:solidFill>
-              </a:rPr>
-              <a:t>PAREI </a:t>
-            </a:r>
-            <a:r>
-              <a:rPr lang="pt-BR" sz="5400" b="1" dirty="0" err="1">
-                <a:solidFill>
-                  <a:srgbClr val="FF0000"/>
-                </a:solidFill>
-              </a:rPr>
-              <a:t>AQUi</a:t>
-            </a:r>
-            <a:r>
-              <a:rPr lang="pt-BR" sz="5400" b="1" dirty="0">
-                <a:solidFill>
-                  <a:srgbClr val="FF0000"/>
-                </a:solidFill>
-              </a:rPr>
-              <a:t>!!!!</a:t>
-            </a:r>
-            <a:endParaRPr lang="en-US" sz="5400" b="1" dirty="0">
-              <a:solidFill>
-                <a:srgbClr val="FF0000"/>
-              </a:solidFill>
-            </a:endParaRPr>
-          </a:p>
-        </p:txBody>
-      </p:sp>
+              </a14:hiddenFill>
+            </a:ext>
+          </a:extLst>
+        </p:spPr>
+      </p:pic>
     </p:spTree>
     <p:extLst>
       <p:ext uri="{BB962C8B-B14F-4D97-AF65-F5344CB8AC3E}">
-        <p14:creationId xmlns:p14="http://schemas.microsoft.com/office/powerpoint/2010/main" val="1718932620"/>
+        <p14:creationId xmlns:p14="http://schemas.microsoft.com/office/powerpoint/2010/main" val="1179410688"/>
       </p:ext>
     </p:extLst>
   </p:cSld>
@@ -13116,7 +12648,13 @@
       </p:grpSpPr>
       <p:sp>
         <p:nvSpPr>
-          <p:cNvPr id="2" name="Título 1"/>
+          <p:cNvPr id="2" name="Title 1">
+            <a:extLst>
+              <a:ext uri="{FF2B5EF4-FFF2-40B4-BE49-F238E27FC236}">
+                <a16:creationId xmlns:a16="http://schemas.microsoft.com/office/drawing/2014/main" id="{A07C804B-5A43-5C89-0C42-420DDBB1CA5A}"/>
+              </a:ext>
+            </a:extLst>
+          </p:cNvPr>
           <p:cNvSpPr>
             <a:spLocks noGrp="1"/>
           </p:cNvSpPr>
@@ -13131,14 +12669,25 @@
           <a:p>
             <a:r>
               <a:rPr lang="pt-BR" dirty="0"/>
-              <a:t>Método do cotovelo</a:t>
-            </a:r>
-          </a:p>
-        </p:txBody>
-      </p:sp>
-      <p:sp>
-        <p:nvSpPr>
-          <p:cNvPr id="3" name="Espaço Reservado para Conteúdo 2"/>
+              <a:t>Outros algoritmos de </a:t>
+            </a:r>
+            <a:r>
+              <a:rPr lang="pt-BR" i="1" dirty="0"/>
+              <a:t>clustering</a:t>
+            </a:r>
+            <a:endParaRPr lang="en-US" i="1" dirty="0"/>
+          </a:p>
+        </p:txBody>
+      </p:sp>
+      <p:sp>
+        <p:nvSpPr>
+          <p:cNvPr id="3" name="Content Placeholder 2">
+            <a:extLst>
+              <a:ext uri="{FF2B5EF4-FFF2-40B4-BE49-F238E27FC236}">
+                <a16:creationId xmlns:a16="http://schemas.microsoft.com/office/drawing/2014/main" id="{288A7DCE-B5C5-82F5-CC2A-E963BDDE03C9}"/>
+              </a:ext>
+            </a:extLst>
+          </p:cNvPr>
           <p:cNvSpPr>
             <a:spLocks noGrp="1"/>
           </p:cNvSpPr>
@@ -13146,353 +12695,144 @@
             <p:ph idx="1"/>
           </p:nvPr>
         </p:nvSpPr>
-        <p:spPr>
-          <a:xfrm>
-            <a:off x="7293186" y="1825624"/>
-            <a:ext cx="4898814" cy="5032375"/>
-          </a:xfrm>
-        </p:spPr>
-        <p:txBody>
-          <a:bodyPr>
-            <a:normAutofit fontScale="32500" lnSpcReduction="20000"/>
-          </a:bodyPr>
+        <p:spPr/>
+        <p:txBody>
+          <a:bodyPr/>
           <a:lstStyle/>
           <a:p>
             <a:r>
               <a:rPr lang="pt-BR" dirty="0"/>
-              <a:t>Essa abordagem utiliza a Soma dos Quadrados </a:t>
-            </a:r>
-            <a:r>
-              <a:rPr lang="pt-BR" dirty="0" err="1"/>
-              <a:t>Intra-Clusters</a:t>
-            </a:r>
-            <a:r>
-              <a:rPr lang="pt-BR" dirty="0"/>
-              <a:t> (WSS - </a:t>
-            </a:r>
-            <a:r>
-              <a:rPr lang="pt-BR" dirty="0" err="1"/>
-              <a:t>Within</a:t>
-            </a:r>
-            <a:r>
-              <a:rPr lang="pt-BR" dirty="0"/>
-              <a:t>-Cluster Sum </a:t>
-            </a:r>
-            <a:r>
-              <a:rPr lang="pt-BR" dirty="0" err="1"/>
-              <a:t>of</a:t>
-            </a:r>
-            <a:r>
-              <a:rPr lang="pt-BR" dirty="0"/>
+              <a:t>DBSCAN: clusterização baseada em </a:t>
+            </a:r>
+            <a:r>
+              <a:rPr lang="en-US" dirty="0" err="1"/>
+              <a:t>densidade</a:t>
+            </a:r>
+            <a:r>
+              <a:rPr lang="en-US" dirty="0"/>
+              <a:t>.</a:t>
+            </a:r>
+          </a:p>
+          <a:p>
+            <a:pPr lvl="1">
+              <a:buFont typeface="Wingdings" panose="05000000000000000000" pitchFamily="2" charset="2"/>
+              <a:buChar char="§"/>
+            </a:pPr>
+            <a:r>
+              <a:rPr lang="pt-BR" i="1" dirty="0"/>
+              <a:t>Clusters</a:t>
+            </a:r>
+            <a:r>
+              <a:rPr lang="pt-BR" dirty="0"/>
+              <a:t> são regiões </a:t>
+            </a:r>
+            <a:r>
+              <a:rPr lang="pt-BR" b="1" dirty="0"/>
+              <a:t>densas</a:t>
+            </a:r>
+            <a:r>
+              <a:rPr lang="pt-BR" dirty="0"/>
+              <a:t> separadas por regiões vazias.</a:t>
+            </a:r>
+          </a:p>
+          <a:p>
+            <a:r>
+              <a:rPr lang="pt-BR" dirty="0"/>
+              <a:t>HDBSCAN: Extensão do DBSCAN que constrói uma </a:t>
+            </a:r>
+            <a:r>
+              <a:rPr lang="pt-BR" b="1" dirty="0"/>
+              <a:t>hierarquia de densidades.</a:t>
+            </a:r>
+            <a:endParaRPr lang="pt-BR" dirty="0"/>
+          </a:p>
+          <a:p>
+            <a:r>
+              <a:rPr lang="pt-BR" i="1" dirty="0" err="1"/>
+              <a:t>Gaussian</a:t>
+            </a:r>
+            <a:r>
+              <a:rPr lang="pt-BR" i="1" dirty="0"/>
               <a:t> </a:t>
             </a:r>
             <a:r>
-              <a:rPr lang="pt-BR" dirty="0" err="1"/>
-              <a:t>Squares</a:t>
-            </a:r>
-            <a:r>
-              <a:rPr lang="pt-BR" dirty="0"/>
-              <a:t>), também conhecido como inércia, e analisa a curva de WSS em função de</a:t>
-            </a:r>
-          </a:p>
-          <a:p>
-            <a:r>
-              <a:rPr lang="pt-BR" dirty="0"/>
-              <a:t>$k$.</a:t>
-            </a:r>
-          </a:p>
-          <a:p>
-            <a:br>
-              <a:rPr lang="pt-BR" dirty="0"/>
-            </a:br>
-            <a:r>
-              <a:rPr lang="pt-BR" dirty="0"/>
-              <a:t>A curva quantifica o quão próximos os pontos de um cluster estão do seu </a:t>
-            </a:r>
-            <a:r>
-              <a:rPr lang="pt-BR" dirty="0" err="1"/>
-              <a:t>centróide</a:t>
-            </a:r>
-            <a:r>
-              <a:rPr lang="pt-BR" dirty="0"/>
-              <a:t> (centro do cluster).</a:t>
-            </a:r>
-          </a:p>
-          <a:p>
-            <a:br>
-              <a:rPr lang="pt-BR" dirty="0"/>
-            </a:br>
-            <a:r>
-              <a:rPr lang="pt-BR" dirty="0"/>
-              <a:t>Quanto menor o WSS, mais coesos são os clusters (os pontos dentro de um cluster estão fortemente agrupados, próximos entre si e do </a:t>
-            </a:r>
-            <a:r>
-              <a:rPr lang="pt-BR" dirty="0" err="1"/>
-              <a:t>centróide</a:t>
-            </a:r>
-            <a:r>
-              <a:rPr lang="pt-BR" dirty="0"/>
-              <a:t>).</a:t>
-            </a:r>
-          </a:p>
-          <a:p>
-            <a:br>
-              <a:rPr lang="pt-BR" dirty="0"/>
-            </a:br>
-            <a:r>
-              <a:rPr lang="pt-BR" dirty="0"/>
-              <a:t>A equação do </a:t>
+              <a:rPr lang="pt-BR" i="1" dirty="0" err="1"/>
+              <a:t>mixtures</a:t>
+            </a:r>
+            <a:r>
+              <a:rPr lang="pt-BR" dirty="0"/>
+              <a:t>: Assume que os dados vêm de uma mistura de </a:t>
             </a:r>
             <a:r>
               <a:rPr lang="pt-BR" b="1" dirty="0"/>
-              <a:t>**</a:t>
-            </a:r>
-            <a:r>
-              <a:rPr lang="pt-BR" b="1" dirty="0" err="1"/>
-              <a:t>Within</a:t>
-            </a:r>
-            <a:r>
-              <a:rPr lang="pt-BR" b="1" dirty="0"/>
-              <a:t>-Cluster Sum </a:t>
-            </a:r>
-            <a:r>
-              <a:rPr lang="pt-BR" b="1" dirty="0" err="1"/>
-              <a:t>of</a:t>
-            </a:r>
-            <a:r>
-              <a:rPr lang="pt-BR" b="1" dirty="0"/>
+              <a:t>distribuições gaussianas.</a:t>
+            </a:r>
+            <a:endParaRPr lang="en-US" dirty="0"/>
+          </a:p>
+          <a:p>
+            <a:r>
+              <a:rPr lang="en-US" dirty="0" err="1"/>
+              <a:t>Documentação</a:t>
+            </a:r>
+            <a:r>
+              <a:rPr lang="en-US" dirty="0"/>
+              <a:t> da </a:t>
+            </a:r>
+            <a:r>
+              <a:rPr lang="en-US" dirty="0" err="1"/>
+              <a:t>biblioteca</a:t>
+            </a:r>
+            <a:r>
+              <a:rPr lang="en-US" dirty="0"/>
               <a:t> </a:t>
             </a:r>
             <a:r>
-              <a:rPr lang="pt-BR" b="1" dirty="0" err="1"/>
-              <a:t>Squares</a:t>
-            </a:r>
-            <a:r>
-              <a:rPr lang="pt-BR" b="1" dirty="0"/>
-              <a:t> (WSS)**</a:t>
-            </a:r>
-            <a:r>
-              <a:rPr lang="pt-BR" dirty="0"/>
-              <a:t> é:</a:t>
-            </a:r>
-          </a:p>
-          <a:p>
-            <a:r>
-              <a:rPr lang="pt-BR" dirty="0"/>
-              <a:t>$$WSS = \sum</a:t>
-            </a:r>
-            <a:r>
-              <a:rPr lang="pt-BR" i="1" dirty="0"/>
-              <a:t>_{i=1}^{k} \sum_</a:t>
-            </a:r>
-            <a:r>
-              <a:rPr lang="pt-BR" dirty="0"/>
-              <a:t>{x \in </a:t>
-            </a:r>
-            <a:r>
-              <a:rPr lang="pt-BR" dirty="0" err="1"/>
-              <a:t>C_i</a:t>
-            </a:r>
-            <a:r>
-              <a:rPr lang="pt-BR" dirty="0"/>
-              <a:t>} \|x - \</a:t>
-            </a:r>
-            <a:r>
-              <a:rPr lang="pt-BR" dirty="0" err="1"/>
-              <a:t>mu_i</a:t>
-            </a:r>
-            <a:r>
-              <a:rPr lang="pt-BR" dirty="0"/>
-              <a:t>\|^2$$,</a:t>
-            </a:r>
-          </a:p>
-          <a:p>
-            <a:r>
-              <a:rPr lang="pt-BR" dirty="0"/>
-              <a:t>onde:</a:t>
-            </a:r>
-          </a:p>
-          <a:p>
-            <a:r>
-              <a:rPr lang="pt-BR" dirty="0"/>
-              <a:t>- $k$ -&gt; número de clusters,</a:t>
-            </a:r>
-          </a:p>
-          <a:p>
-            <a:r>
-              <a:rPr lang="pt-BR" dirty="0"/>
-              <a:t>- $</a:t>
-            </a:r>
-            <a:r>
-              <a:rPr lang="pt-BR" dirty="0" err="1"/>
-              <a:t>C_i</a:t>
-            </a:r>
-            <a:r>
-              <a:rPr lang="pt-BR" dirty="0"/>
-              <a:t>$ -&gt; conjunto de pontos no cluster \( i \),</a:t>
-            </a:r>
-          </a:p>
-          <a:p>
-            <a:r>
-              <a:rPr lang="pt-BR" dirty="0"/>
-              <a:t>- $</a:t>
-            </a:r>
-            <a:r>
-              <a:rPr lang="pt-BR" dirty="0" err="1"/>
-              <a:t>mu_i</a:t>
-            </a:r>
-            <a:r>
-              <a:rPr lang="pt-BR" dirty="0"/>
-              <a:t>$ = </a:t>
-            </a:r>
-            <a:r>
-              <a:rPr lang="pt-BR" dirty="0" err="1"/>
-              <a:t>centróide</a:t>
-            </a:r>
-            <a:r>
-              <a:rPr lang="pt-BR" dirty="0"/>
-              <a:t> (média) do cluster \( i \),</a:t>
-            </a:r>
-          </a:p>
-          <a:p>
-            <a:r>
-              <a:rPr lang="pt-BR" dirty="0"/>
-              <a:t>- $ \|x - \</a:t>
-            </a:r>
-            <a:r>
-              <a:rPr lang="pt-BR" dirty="0" err="1"/>
-              <a:t>mu_i</a:t>
-            </a:r>
-            <a:r>
-              <a:rPr lang="pt-BR" dirty="0"/>
-              <a:t>\|^2 $ -&gt; distância quadrada (Euclidiana) entre um ponto $x$ e seu </a:t>
-            </a:r>
-            <a:r>
-              <a:rPr lang="pt-BR" dirty="0" err="1"/>
-              <a:t>centróide</a:t>
-            </a:r>
-            <a:r>
-              <a:rPr lang="pt-BR" dirty="0"/>
-              <a:t>.</a:t>
-            </a:r>
-          </a:p>
-          <a:p>
-            <a:br>
-              <a:rPr lang="pt-BR" dirty="0"/>
-            </a:br>
-            <a:br>
-              <a:rPr lang="pt-BR" dirty="0"/>
-            </a:br>
-            <a:r>
-              <a:rPr lang="pt-BR" b="1" dirty="0"/>
-              <a:t>**O objetivo é encontrar um $k$ onde aumentar o número de clusters não reduz significativamente o WSS. Isso ocorre a partir do cotovelo da curva.**</a:t>
-            </a:r>
-            <a:endParaRPr lang="pt-BR" dirty="0"/>
-          </a:p>
-          <a:p>
-            <a:br>
-              <a:rPr lang="pt-BR" dirty="0"/>
-            </a:br>
-            <a:r>
-              <a:rPr lang="pt-BR" dirty="0"/>
-              <a:t>Assim, o valor ideal de $k$ é encontrando localizando-se o cotovelo na curva.</a:t>
-            </a:r>
-          </a:p>
-          <a:p>
-            <a:br>
-              <a:rPr lang="pt-BR" dirty="0"/>
-            </a:br>
-            <a:r>
-              <a:rPr lang="pt-BR" dirty="0"/>
-              <a:t>Quando o cotovelo na curva não é claramente visível, uma técnica comum é traçar uma reta conectando os pontos extremos da curva e identificar o ponto mais distante dessa reta como o "cotovelo" ideal.</a:t>
-            </a:r>
-          </a:p>
-          <a:p>
-            <a:endParaRPr lang="pt-BR" dirty="0"/>
-          </a:p>
-        </p:txBody>
-      </p:sp>
-      <p:pic>
-        <p:nvPicPr>
-          <p:cNvPr id="4" name="Picture 2" descr="Base Teórica do K-Means! Aprenda a Lógica desse Algoritmo Hoje!">
-            <a:extLst>
-              <a:ext uri="{FF2B5EF4-FFF2-40B4-BE49-F238E27FC236}">
-                <a16:creationId xmlns:a16="http://schemas.microsoft.com/office/drawing/2014/main" id="{0694ADFD-EB2E-2BF0-18BE-B07E4CD60A5F}"/>
-              </a:ext>
-            </a:extLst>
-          </p:cNvPr>
-          <p:cNvPicPr>
-            <a:picLocks noChangeAspect="1" noChangeArrowheads="1"/>
-          </p:cNvPicPr>
-          <p:nvPr/>
-        </p:nvPicPr>
-        <p:blipFill>
-          <a:blip r:embed="rId3">
-            <a:extLst>
-              <a:ext uri="{28A0092B-C50C-407E-A947-70E740481C1C}">
-                <a14:useLocalDpi xmlns:a14="http://schemas.microsoft.com/office/drawing/2010/main" val="0"/>
-              </a:ext>
-            </a:extLst>
-          </a:blip>
-          <a:srcRect/>
-          <a:stretch>
-            <a:fillRect/>
-          </a:stretch>
-        </p:blipFill>
-        <p:spPr bwMode="auto">
-          <a:xfrm>
-            <a:off x="-256699" y="2565319"/>
-            <a:ext cx="7549885" cy="3444004"/>
-          </a:xfrm>
-          <a:prstGeom prst="rect">
-            <a:avLst/>
-          </a:prstGeom>
-          <a:noFill/>
-          <a:extLst>
-            <a:ext uri="{909E8E84-426E-40DD-AFC4-6F175D3DCCD1}">
-              <a14:hiddenFill xmlns:a14="http://schemas.microsoft.com/office/drawing/2010/main">
-                <a:solidFill>
-                  <a:srgbClr val="FFFFFF"/>
-                </a:solidFill>
-              </a14:hiddenFill>
-            </a:ext>
-          </a:extLst>
-        </p:spPr>
-      </p:pic>
-      <p:pic>
-        <p:nvPicPr>
-          <p:cNvPr id="5" name="Imagem 4">
-            <a:extLst>
-              <a:ext uri="{FF2B5EF4-FFF2-40B4-BE49-F238E27FC236}">
-                <a16:creationId xmlns:a16="http://schemas.microsoft.com/office/drawing/2014/main" id="{EEF69E85-6440-34FE-5C8A-A5F37765D292}"/>
-              </a:ext>
-            </a:extLst>
-          </p:cNvPr>
-          <p:cNvPicPr>
-            <a:picLocks noChangeAspect="1"/>
-          </p:cNvPicPr>
-          <p:nvPr/>
-        </p:nvPicPr>
-        <p:blipFill>
-          <a:blip r:embed="rId4"/>
-          <a:stretch>
-            <a:fillRect/>
-          </a:stretch>
-        </p:blipFill>
-        <p:spPr>
-          <a:xfrm>
-            <a:off x="3182963" y="3894857"/>
-            <a:ext cx="2377646" cy="784928"/>
-          </a:xfrm>
-          <a:prstGeom prst="rect">
-            <a:avLst/>
-          </a:prstGeom>
-        </p:spPr>
-      </p:pic>
+              <a:rPr lang="en-US" i="1" dirty="0"/>
+              <a:t>scikit-learn</a:t>
+            </a:r>
+            <a:r>
+              <a:rPr lang="en-US" dirty="0"/>
+              <a:t> </a:t>
+            </a:r>
+            <a:r>
+              <a:rPr lang="en-US" dirty="0" err="1"/>
+              <a:t>sobre</a:t>
+            </a:r>
+            <a:r>
+              <a:rPr lang="en-US" dirty="0"/>
+              <a:t> </a:t>
+            </a:r>
+            <a:r>
+              <a:rPr lang="en-US" dirty="0" err="1"/>
+              <a:t>clusterização</a:t>
+            </a:r>
+            <a:r>
+              <a:rPr lang="en-US" dirty="0"/>
+              <a:t>:</a:t>
+            </a:r>
+          </a:p>
+          <a:p>
+            <a:pPr lvl="1">
+              <a:buFont typeface="Wingdings" panose="05000000000000000000" pitchFamily="2" charset="2"/>
+              <a:buChar char="§"/>
+            </a:pPr>
+            <a:r>
+              <a:rPr lang="en-US" dirty="0">
+                <a:hlinkClick r:id="rId3"/>
+              </a:rPr>
+              <a:t>https://scikit-learn.org/stable/modules/clustering.html</a:t>
+            </a:r>
+            <a:endParaRPr lang="en-US" dirty="0"/>
+          </a:p>
+          <a:p>
+            <a:endParaRPr lang="en-US" dirty="0"/>
+          </a:p>
+        </p:txBody>
+      </p:sp>
     </p:spTree>
     <p:extLst>
       <p:ext uri="{BB962C8B-B14F-4D97-AF65-F5344CB8AC3E}">
-        <p14:creationId xmlns:p14="http://schemas.microsoft.com/office/powerpoint/2010/main" val="756208419"/>
+        <p14:creationId xmlns:p14="http://schemas.microsoft.com/office/powerpoint/2010/main" val="3933081201"/>
       </p:ext>
     </p:extLst>
   </p:cSld>
@@ -13521,593 +12861,6 @@
       </p:grpSpPr>
       <p:sp>
         <p:nvSpPr>
-          <p:cNvPr id="2" name="Título 1"/>
-          <p:cNvSpPr>
-            <a:spLocks noGrp="1"/>
-          </p:cNvSpPr>
-          <p:nvPr>
-            <p:ph type="title"/>
-          </p:nvPr>
-        </p:nvSpPr>
-        <p:spPr/>
-        <p:txBody>
-          <a:bodyPr/>
-          <a:lstStyle/>
-          <a:p>
-            <a:r>
-              <a:rPr lang="pt-BR" dirty="0" err="1"/>
-              <a:t>SciKit-Learn</a:t>
-            </a:r>
-            <a:r>
-              <a:rPr lang="pt-BR" dirty="0"/>
-              <a:t>: k-</a:t>
-            </a:r>
-            <a:r>
-              <a:rPr lang="pt-BR" dirty="0" err="1"/>
-              <a:t>Means</a:t>
-            </a:r>
-            <a:endParaRPr lang="en-US" dirty="0"/>
-          </a:p>
-        </p:txBody>
-      </p:sp>
-      <p:pic>
-        <p:nvPicPr>
-          <p:cNvPr id="6" name="Imagem 5"/>
-          <p:cNvPicPr>
-            <a:picLocks noChangeAspect="1"/>
-          </p:cNvPicPr>
-          <p:nvPr/>
-        </p:nvPicPr>
-        <p:blipFill rotWithShape="1">
-          <a:blip r:embed="rId3">
-            <a:extLst>
-              <a:ext uri="{28A0092B-C50C-407E-A947-70E740481C1C}">
-                <a14:useLocalDpi xmlns:a14="http://schemas.microsoft.com/office/drawing/2010/main" val="0"/>
-              </a:ext>
-            </a:extLst>
-          </a:blip>
-          <a:srcRect t="11075" r="9212"/>
-          <a:stretch/>
-        </p:blipFill>
-        <p:spPr>
-          <a:xfrm>
-            <a:off x="645742" y="2410691"/>
-            <a:ext cx="4248376" cy="2774144"/>
-          </a:xfrm>
-          <a:prstGeom prst="rect">
-            <a:avLst/>
-          </a:prstGeom>
-        </p:spPr>
-      </p:pic>
-      <p:pic>
-        <p:nvPicPr>
-          <p:cNvPr id="7" name="Imagem 6"/>
-          <p:cNvPicPr>
-            <a:picLocks noChangeAspect="1"/>
-          </p:cNvPicPr>
-          <p:nvPr/>
-        </p:nvPicPr>
-        <p:blipFill rotWithShape="1">
-          <a:blip r:embed="rId4">
-            <a:extLst>
-              <a:ext uri="{28A0092B-C50C-407E-A947-70E740481C1C}">
-                <a14:useLocalDpi xmlns:a14="http://schemas.microsoft.com/office/drawing/2010/main" val="0"/>
-              </a:ext>
-            </a:extLst>
-          </a:blip>
-          <a:srcRect t="11359" r="9402"/>
-          <a:stretch/>
-        </p:blipFill>
-        <p:spPr>
-          <a:xfrm>
-            <a:off x="6722898" y="2410691"/>
-            <a:ext cx="4239511" cy="2765280"/>
-          </a:xfrm>
-          <a:prstGeom prst="rect">
-            <a:avLst/>
-          </a:prstGeom>
-        </p:spPr>
-      </p:pic>
-      <p:sp>
-        <p:nvSpPr>
-          <p:cNvPr id="8" name="CaixaDeTexto 7"/>
-          <p:cNvSpPr txBox="1"/>
-          <p:nvPr/>
-        </p:nvSpPr>
-        <p:spPr>
-          <a:xfrm>
-            <a:off x="5091120" y="2905640"/>
-            <a:ext cx="1573319" cy="400110"/>
-          </a:xfrm>
-          <a:prstGeom prst="rect">
-            <a:avLst/>
-          </a:prstGeom>
-          <a:noFill/>
-        </p:spPr>
-        <p:txBody>
-          <a:bodyPr wrap="square" rtlCol="0">
-            <a:spAutoFit/>
-          </a:bodyPr>
-          <a:lstStyle/>
-          <a:p>
-            <a:pPr algn="ctr"/>
-            <a:r>
-              <a:rPr lang="pt-BR" sz="2000" b="1" dirty="0"/>
-              <a:t>k-</a:t>
-            </a:r>
-            <a:r>
-              <a:rPr lang="pt-BR" sz="2000" b="1" dirty="0" err="1"/>
-              <a:t>Means</a:t>
-            </a:r>
-            <a:endParaRPr lang="en-US" sz="2000" b="1" dirty="0"/>
-          </a:p>
-        </p:txBody>
-      </p:sp>
-      <p:sp>
-        <p:nvSpPr>
-          <p:cNvPr id="9" name="Seta para a direita 8"/>
-          <p:cNvSpPr/>
-          <p:nvPr/>
-        </p:nvSpPr>
-        <p:spPr>
-          <a:xfrm>
-            <a:off x="5416920" y="3305750"/>
-            <a:ext cx="921721" cy="623453"/>
-          </a:xfrm>
-          <a:prstGeom prst="rightArrow">
-            <a:avLst/>
-          </a:prstGeom>
-          <a:solidFill>
-            <a:srgbClr val="7030A0"/>
-          </a:solidFill>
-        </p:spPr>
-        <p:style>
-          <a:lnRef idx="2">
-            <a:schemeClr val="accent1">
-              <a:shade val="50000"/>
-            </a:schemeClr>
-          </a:lnRef>
-          <a:fillRef idx="1">
-            <a:schemeClr val="accent1"/>
-          </a:fillRef>
-          <a:effectRef idx="0">
-            <a:schemeClr val="accent1"/>
-          </a:effectRef>
-          <a:fontRef idx="minor">
-            <a:schemeClr val="lt1"/>
-          </a:fontRef>
-        </p:style>
-        <p:txBody>
-          <a:bodyPr rtlCol="0" anchor="ctr"/>
-          <a:lstStyle/>
-          <a:p>
-            <a:pPr algn="ctr"/>
-            <a:endParaRPr lang="en-US"/>
-          </a:p>
-        </p:txBody>
-      </p:sp>
-      <p:sp>
-        <p:nvSpPr>
-          <p:cNvPr id="10" name="Retângulo 9"/>
-          <p:cNvSpPr/>
-          <p:nvPr/>
-        </p:nvSpPr>
-        <p:spPr>
-          <a:xfrm>
-            <a:off x="4312228" y="5711308"/>
-            <a:ext cx="3314882" cy="369332"/>
-          </a:xfrm>
-          <a:prstGeom prst="rect">
-            <a:avLst/>
-          </a:prstGeom>
-        </p:spPr>
-        <p:txBody>
-          <a:bodyPr wrap="none">
-            <a:spAutoFit/>
-          </a:bodyPr>
-          <a:lstStyle/>
-          <a:p>
-            <a:pPr lvl="0">
-              <a:defRPr/>
-            </a:pPr>
-            <a:r>
-              <a:rPr lang="pt-BR" dirty="0">
-                <a:hlinkClick r:id="rId5"/>
-              </a:rPr>
-              <a:t>Exemplo: </a:t>
-            </a:r>
-            <a:r>
-              <a:rPr lang="pt-BR" dirty="0" err="1">
-                <a:hlinkClick r:id="rId5"/>
-              </a:rPr>
-              <a:t>kmeans_example.ipynb</a:t>
-            </a:r>
-            <a:endParaRPr lang="pt-BR" dirty="0">
-              <a:solidFill>
-                <a:srgbClr val="00B0F0"/>
-              </a:solidFill>
-            </a:endParaRPr>
-          </a:p>
-        </p:txBody>
-      </p:sp>
-    </p:spTree>
-    <p:extLst>
-      <p:ext uri="{BB962C8B-B14F-4D97-AF65-F5344CB8AC3E}">
-        <p14:creationId xmlns:p14="http://schemas.microsoft.com/office/powerpoint/2010/main" val="1312467314"/>
-      </p:ext>
-    </p:extLst>
-  </p:cSld>
-  <p:clrMapOvr>
-    <a:masterClrMapping/>
-  </p:clrMapOvr>
-</p:sld>
-</file>
-
-<file path=ppt/slides/slide36.xml><?xml version="1.0" encoding="utf-8"?>
-<p:sld xmlns:a="http://schemas.openxmlformats.org/drawingml/2006/main" xmlns:r="http://schemas.openxmlformats.org/officeDocument/2006/relationships" xmlns:p="http://schemas.openxmlformats.org/presentationml/2006/main">
-  <p:cSld>
-    <p:spTree>
-      <p:nvGrpSpPr>
-        <p:cNvPr id="1" name=""/>
-        <p:cNvGrpSpPr/>
-        <p:nvPr/>
-      </p:nvGrpSpPr>
-      <p:grpSpPr>
-        <a:xfrm>
-          <a:off x="0" y="0"/>
-          <a:ext cx="0" cy="0"/>
-          <a:chOff x="0" y="0"/>
-          <a:chExt cx="0" cy="0"/>
-        </a:xfrm>
-      </p:grpSpPr>
-      <p:sp>
-        <p:nvSpPr>
-          <p:cNvPr id="2" name="Título 1">
-            <a:extLst>
-              <a:ext uri="{FF2B5EF4-FFF2-40B4-BE49-F238E27FC236}">
-                <a16:creationId xmlns:a16="http://schemas.microsoft.com/office/drawing/2014/main" id="{654EC41E-A91F-2BE6-4481-EFFD64DC2B91}"/>
-              </a:ext>
-            </a:extLst>
-          </p:cNvPr>
-          <p:cNvSpPr>
-            <a:spLocks noGrp="1"/>
-          </p:cNvSpPr>
-          <p:nvPr>
-            <p:ph type="title"/>
-          </p:nvPr>
-        </p:nvSpPr>
-        <p:spPr/>
-        <p:txBody>
-          <a:bodyPr/>
-          <a:lstStyle/>
-          <a:p>
-            <a:r>
-              <a:rPr lang="pt-BR" dirty="0"/>
-              <a:t>Como escolher o número ideal de clusters?</a:t>
-            </a:r>
-          </a:p>
-        </p:txBody>
-      </p:sp>
-      <mc:AlternateContent xmlns:mc="http://schemas.openxmlformats.org/markup-compatibility/2006" xmlns:a14="http://schemas.microsoft.com/office/drawing/2010/main">
-        <mc:Choice Requires="a14">
-          <p:sp>
-            <p:nvSpPr>
-              <p:cNvPr id="3" name="Espaço Reservado para Conteúdo 2">
-                <a:extLst>
-                  <a:ext uri="{FF2B5EF4-FFF2-40B4-BE49-F238E27FC236}">
-                    <a16:creationId xmlns:a16="http://schemas.microsoft.com/office/drawing/2014/main" id="{7C91871B-A0D0-6F26-D59B-6230818E6267}"/>
-                  </a:ext>
-                </a:extLst>
-              </p:cNvPr>
-              <p:cNvSpPr>
-                <a:spLocks noGrp="1"/>
-              </p:cNvSpPr>
-              <p:nvPr>
-                <p:ph idx="1"/>
-              </p:nvPr>
-            </p:nvSpPr>
-            <p:spPr>
-              <a:xfrm>
-                <a:off x="838200" y="1825624"/>
-                <a:ext cx="11201400" cy="5032375"/>
-              </a:xfrm>
-            </p:spPr>
-            <p:txBody>
-              <a:bodyPr>
-                <a:normAutofit/>
-              </a:bodyPr>
-              <a:lstStyle/>
-              <a:p>
-                <a:r>
-                  <a:rPr lang="pt-BR" dirty="0"/>
-                  <a:t>Existem várias abordagens para determinar o valor ideal de </a:t>
-                </a:r>
-                <a14:m>
-                  <m:oMath xmlns:m="http://schemas.openxmlformats.org/officeDocument/2006/math">
-                    <m:r>
-                      <a:rPr lang="pt-BR" b="0" i="1" smtClean="0">
-                        <a:latin typeface="Cambria Math" panose="02040503050406030204" pitchFamily="18" charset="0"/>
-                      </a:rPr>
-                      <m:t>𝑘</m:t>
-                    </m:r>
-                  </m:oMath>
-                </a14:m>
-                <a:r>
-                  <a:rPr lang="pt-BR" dirty="0"/>
-                  <a:t>. </a:t>
-                </a:r>
-              </a:p>
-              <a:p>
-                <a:r>
-                  <a:rPr lang="pt-BR" dirty="0"/>
-                  <a:t>A mais comum é o método da silhueta.</a:t>
-                </a:r>
-              </a:p>
-              <a:p>
-                <a:r>
-                  <a:rPr lang="pt-BR" dirty="0"/>
-                  <a:t>O coeficiente de silhueta avalia a </a:t>
-                </a:r>
-                <a:r>
-                  <a:rPr lang="pt-BR" b="1" dirty="0"/>
-                  <a:t>qualidade da clusterização</a:t>
-                </a:r>
-                <a:r>
-                  <a:rPr lang="pt-BR" dirty="0"/>
-                  <a:t>, considerando a </a:t>
-                </a:r>
-                <a:r>
-                  <a:rPr lang="pt-BR" b="1" dirty="0">
-                    <a:solidFill>
-                      <a:schemeClr val="accent5"/>
-                    </a:solidFill>
-                  </a:rPr>
-                  <a:t>coesão dentro dos clusters e a separação entre eles</a:t>
-                </a:r>
-                <a:r>
-                  <a:rPr lang="pt-BR" dirty="0"/>
-                  <a:t>.</a:t>
-                </a:r>
-              </a:p>
-              <a:p>
-                <a:r>
-                  <a:rPr lang="pt-BR" dirty="0"/>
-                  <a:t>Escolhemos o número de clusters que maximiza o coeficiente.</a:t>
-                </a:r>
-              </a:p>
-              <a:p>
-                <a:r>
-                  <a:rPr lang="pt-BR" dirty="0"/>
-                  <a:t>A documentação da biblioteca </a:t>
-                </a:r>
-                <a:r>
-                  <a:rPr lang="pt-BR" dirty="0" err="1"/>
-                  <a:t>SciKit-Learn</a:t>
-                </a:r>
-                <a:r>
-                  <a:rPr lang="pt-BR" dirty="0"/>
-                  <a:t> contém um exemplo de como usar a coeficiente de silhueta para definir o melhor número de clusters.</a:t>
-                </a:r>
-              </a:p>
-              <a:p>
-                <a:pPr lvl="1">
-                  <a:buFont typeface="Wingdings" panose="05000000000000000000" pitchFamily="2" charset="2"/>
-                  <a:buChar char="§"/>
-                </a:pPr>
-                <a:r>
-                  <a:rPr lang="pt-BR" dirty="0">
-                    <a:hlinkClick r:id="rId2"/>
-                  </a:rPr>
-                  <a:t>https://scikit-learn.org/1.5/auto_examples/cluster/plot_kmeans_silhouette_analysis.html</a:t>
-                </a:r>
-                <a:endParaRPr lang="pt-BR" dirty="0"/>
-              </a:p>
-            </p:txBody>
-          </p:sp>
-        </mc:Choice>
-        <mc:Fallback xmlns="">
-          <p:sp>
-            <p:nvSpPr>
-              <p:cNvPr id="3" name="Espaço Reservado para Conteúdo 2">
-                <a:extLst>
-                  <a:ext uri="{FF2B5EF4-FFF2-40B4-BE49-F238E27FC236}">
-                    <a16:creationId xmlns:a16="http://schemas.microsoft.com/office/drawing/2014/main" id="{7C91871B-A0D0-6F26-D59B-6230818E6267}"/>
-                  </a:ext>
-                </a:extLst>
-              </p:cNvPr>
-              <p:cNvSpPr>
-                <a:spLocks noGrp="1" noRot="1" noChangeAspect="1" noMove="1" noResize="1" noEditPoints="1" noAdjustHandles="1" noChangeArrowheads="1" noChangeShapeType="1" noTextEdit="1"/>
-              </p:cNvSpPr>
-              <p:nvPr>
-                <p:ph idx="1"/>
-              </p:nvPr>
-            </p:nvSpPr>
-            <p:spPr>
-              <a:xfrm>
-                <a:off x="838200" y="1825624"/>
-                <a:ext cx="11201400" cy="5032375"/>
-              </a:xfrm>
-              <a:blipFill>
-                <a:blip r:embed="rId3"/>
-                <a:stretch>
-                  <a:fillRect l="-980" t="-1937"/>
-                </a:stretch>
-              </a:blipFill>
-            </p:spPr>
-            <p:txBody>
-              <a:bodyPr/>
-              <a:lstStyle/>
-              <a:p>
-                <a:r>
-                  <a:rPr lang="en-US">
-                    <a:noFill/>
-                  </a:rPr>
-                  <a:t> </a:t>
-                </a:r>
-              </a:p>
-            </p:txBody>
-          </p:sp>
-        </mc:Fallback>
-      </mc:AlternateContent>
-    </p:spTree>
-    <p:extLst>
-      <p:ext uri="{BB962C8B-B14F-4D97-AF65-F5344CB8AC3E}">
-        <p14:creationId xmlns:p14="http://schemas.microsoft.com/office/powerpoint/2010/main" val="2565590634"/>
-      </p:ext>
-    </p:extLst>
-  </p:cSld>
-  <p:clrMapOvr>
-    <a:masterClrMapping/>
-  </p:clrMapOvr>
-</p:sld>
-</file>
-
-<file path=ppt/slides/slide37.xml><?xml version="1.0" encoding="utf-8"?>
-<p:sld xmlns:a="http://schemas.openxmlformats.org/drawingml/2006/main" xmlns:r="http://schemas.openxmlformats.org/officeDocument/2006/relationships" xmlns:p="http://schemas.openxmlformats.org/presentationml/2006/main">
-  <p:cSld>
-    <p:spTree>
-      <p:nvGrpSpPr>
-        <p:cNvPr id="1" name=""/>
-        <p:cNvGrpSpPr/>
-        <p:nvPr/>
-      </p:nvGrpSpPr>
-      <p:grpSpPr>
-        <a:xfrm>
-          <a:off x="0" y="0"/>
-          <a:ext cx="0" cy="0"/>
-          <a:chOff x="0" y="0"/>
-          <a:chExt cx="0" cy="0"/>
-        </a:xfrm>
-      </p:grpSpPr>
-      <p:sp>
-        <p:nvSpPr>
-          <p:cNvPr id="2" name="Title 1">
-            <a:extLst>
-              <a:ext uri="{FF2B5EF4-FFF2-40B4-BE49-F238E27FC236}">
-                <a16:creationId xmlns:a16="http://schemas.microsoft.com/office/drawing/2014/main" id="{A07C804B-5A43-5C89-0C42-420DDBB1CA5A}"/>
-              </a:ext>
-            </a:extLst>
-          </p:cNvPr>
-          <p:cNvSpPr>
-            <a:spLocks noGrp="1"/>
-          </p:cNvSpPr>
-          <p:nvPr>
-            <p:ph type="title"/>
-          </p:nvPr>
-        </p:nvSpPr>
-        <p:spPr/>
-        <p:txBody>
-          <a:bodyPr/>
-          <a:lstStyle/>
-          <a:p>
-            <a:r>
-              <a:rPr lang="pt-BR" dirty="0"/>
-              <a:t>Outros algoritmos de </a:t>
-            </a:r>
-            <a:r>
-              <a:rPr lang="pt-BR" i="1" dirty="0"/>
-              <a:t>clustering</a:t>
-            </a:r>
-            <a:endParaRPr lang="en-US" i="1" dirty="0"/>
-          </a:p>
-        </p:txBody>
-      </p:sp>
-      <p:sp>
-        <p:nvSpPr>
-          <p:cNvPr id="3" name="Content Placeholder 2">
-            <a:extLst>
-              <a:ext uri="{FF2B5EF4-FFF2-40B4-BE49-F238E27FC236}">
-                <a16:creationId xmlns:a16="http://schemas.microsoft.com/office/drawing/2014/main" id="{288A7DCE-B5C5-82F5-CC2A-E963BDDE03C9}"/>
-              </a:ext>
-            </a:extLst>
-          </p:cNvPr>
-          <p:cNvSpPr>
-            <a:spLocks noGrp="1"/>
-          </p:cNvSpPr>
-          <p:nvPr>
-            <p:ph idx="1"/>
-          </p:nvPr>
-        </p:nvSpPr>
-        <p:spPr/>
-        <p:txBody>
-          <a:bodyPr/>
-          <a:lstStyle/>
-          <a:p>
-            <a:r>
-              <a:rPr lang="pt-BR" dirty="0"/>
-              <a:t>DBSCAN</a:t>
-            </a:r>
-          </a:p>
-          <a:p>
-            <a:r>
-              <a:rPr lang="pt-BR" dirty="0"/>
-              <a:t>HDBSCAN</a:t>
-            </a:r>
-          </a:p>
-          <a:p>
-            <a:r>
-              <a:rPr lang="pt-BR" dirty="0" err="1"/>
-              <a:t>Gaussian</a:t>
-            </a:r>
-            <a:r>
-              <a:rPr lang="pt-BR" dirty="0"/>
-              <a:t> </a:t>
-            </a:r>
-            <a:r>
-              <a:rPr lang="pt-BR" dirty="0" err="1"/>
-              <a:t>mixtrures</a:t>
-            </a:r>
-            <a:endParaRPr lang="pt-BR" dirty="0"/>
-          </a:p>
-          <a:p>
-            <a:endParaRPr lang="en-US" dirty="0"/>
-          </a:p>
-          <a:p>
-            <a:r>
-              <a:rPr lang="en-US" dirty="0">
-                <a:hlinkClick r:id="rId2"/>
-              </a:rPr>
-              <a:t>https://scikit-learn.org/stable/modules/clustering.html</a:t>
-            </a:r>
-            <a:endParaRPr lang="en-US" dirty="0"/>
-          </a:p>
-          <a:p>
-            <a:endParaRPr lang="en-US" dirty="0"/>
-          </a:p>
-        </p:txBody>
-      </p:sp>
-    </p:spTree>
-    <p:extLst>
-      <p:ext uri="{BB962C8B-B14F-4D97-AF65-F5344CB8AC3E}">
-        <p14:creationId xmlns:p14="http://schemas.microsoft.com/office/powerpoint/2010/main" val="3933081201"/>
-      </p:ext>
-    </p:extLst>
-  </p:cSld>
-  <p:clrMapOvr>
-    <a:masterClrMapping/>
-  </p:clrMapOvr>
-</p:sld>
-</file>
-
-<file path=ppt/slides/slide38.xml><?xml version="1.0" encoding="utf-8"?>
-<p:sld xmlns:a="http://schemas.openxmlformats.org/drawingml/2006/main" xmlns:r="http://schemas.openxmlformats.org/officeDocument/2006/relationships" xmlns:p="http://schemas.openxmlformats.org/presentationml/2006/main">
-  <p:cSld>
-    <p:spTree>
-      <p:nvGrpSpPr>
-        <p:cNvPr id="1" name=""/>
-        <p:cNvGrpSpPr/>
-        <p:nvPr/>
-      </p:nvGrpSpPr>
-      <p:grpSpPr>
-        <a:xfrm>
-          <a:off x="0" y="0"/>
-          <a:ext cx="0" cy="0"/>
-          <a:chOff x="0" y="0"/>
-          <a:chExt cx="0" cy="0"/>
-        </a:xfrm>
-      </p:grpSpPr>
-      <p:sp>
-        <p:nvSpPr>
           <p:cNvPr id="2" name="Título 1">
             <a:extLst>
               <a:ext uri="{FF2B5EF4-FFF2-40B4-BE49-F238E27FC236}">
@@ -14156,11 +12909,15 @@
           <a:lstStyle/>
           <a:p>
             <a:r>
-              <a:rPr lang="pt-BR" dirty="0"/>
+              <a:rPr lang="pt-BR" dirty="0">
+                <a:hlinkClick r:id="rId3"/>
+              </a:rPr>
               <a:t>Exemplo: </a:t>
             </a:r>
             <a:r>
-              <a:rPr lang="pt-BR" dirty="0" err="1"/>
+              <a:rPr lang="pt-BR" dirty="0" err="1">
+                <a:hlinkClick r:id="rId3"/>
+              </a:rPr>
               <a:t>kmeans.ipynb</a:t>
             </a:r>
             <a:endParaRPr lang="en-US" dirty="0"/>
@@ -14208,7 +12965,7 @@
             <p:nvPr/>
           </p:nvPicPr>
           <p:blipFill>
-            <a:blip r:embed="rId3" cstate="print">
+            <a:blip r:embed="rId4" cstate="print">
               <a:extLst>
                 <a:ext uri="{28A0092B-C50C-407E-A947-70E740481C1C}">
                   <a14:useLocalDpi xmlns:a14="http://schemas.microsoft.com/office/drawing/2010/main" val="0"/>
@@ -14255,7 +13012,7 @@
             <p:nvPr/>
           </p:nvPicPr>
           <p:blipFill rotWithShape="1">
-            <a:blip r:embed="rId4" cstate="print">
+            <a:blip r:embed="rId5" cstate="print">
               <a:extLst>
                 <a:ext uri="{28A0092B-C50C-407E-A947-70E740481C1C}">
                   <a14:useLocalDpi xmlns:a14="http://schemas.microsoft.com/office/drawing/2010/main" val="0"/>
@@ -14300,7 +13057,7 @@
             <p:nvPr/>
           </p:nvPicPr>
           <p:blipFill rotWithShape="1">
-            <a:blip r:embed="rId5">
+            <a:blip r:embed="rId6">
               <a:extLst>
                 <a:ext uri="{28A0092B-C50C-407E-A947-70E740481C1C}">
                   <a14:useLocalDpi xmlns:a14="http://schemas.microsoft.com/office/drawing/2010/main" val="0"/>
@@ -14440,7 +13197,7 @@
 </p:sld>
 </file>
 
-<file path=ppt/slides/slide39.xml><?xml version="1.0" encoding="utf-8"?>
+<file path=ppt/slides/slide36.xml><?xml version="1.0" encoding="utf-8"?>
 <p:sld xmlns:a="http://schemas.openxmlformats.org/drawingml/2006/main" xmlns:r="http://schemas.openxmlformats.org/officeDocument/2006/relationships" xmlns:p="http://schemas.openxmlformats.org/presentationml/2006/main">
   <p:cSld>
     <p:spTree>
@@ -14535,127 +13292,7 @@
 </p:sld>
 </file>
 
-<file path=ppt/slides/slide4.xml><?xml version="1.0" encoding="utf-8"?>
-<p:sld xmlns:a="http://schemas.openxmlformats.org/drawingml/2006/main" xmlns:r="http://schemas.openxmlformats.org/officeDocument/2006/relationships" xmlns:p="http://schemas.openxmlformats.org/presentationml/2006/main">
-  <p:cSld>
-    <p:spTree>
-      <p:nvGrpSpPr>
-        <p:cNvPr id="1" name=""/>
-        <p:cNvGrpSpPr/>
-        <p:nvPr/>
-      </p:nvGrpSpPr>
-      <p:grpSpPr>
-        <a:xfrm>
-          <a:off x="0" y="0"/>
-          <a:ext cx="0" cy="0"/>
-          <a:chOff x="0" y="0"/>
-          <a:chExt cx="0" cy="0"/>
-        </a:xfrm>
-      </p:grpSpPr>
-      <p:sp>
-        <p:nvSpPr>
-          <p:cNvPr id="2" name="Title 1"/>
-          <p:cNvSpPr>
-            <a:spLocks noGrp="1"/>
-          </p:cNvSpPr>
-          <p:nvPr>
-            <p:ph type="title"/>
-          </p:nvPr>
-        </p:nvSpPr>
-        <p:spPr/>
-        <p:txBody>
-          <a:bodyPr/>
-          <a:lstStyle/>
-          <a:p>
-            <a:r>
-              <a:rPr lang="pt-BR" dirty="0"/>
-              <a:t>Motivação</a:t>
-            </a:r>
-          </a:p>
-        </p:txBody>
-      </p:sp>
-      <p:sp>
-        <p:nvSpPr>
-          <p:cNvPr id="7" name="Content Placeholder 2"/>
-          <p:cNvSpPr>
-            <a:spLocks noGrp="1"/>
-          </p:cNvSpPr>
-          <p:nvPr>
-            <p:ph idx="1"/>
-          </p:nvPr>
-        </p:nvSpPr>
-        <p:spPr>
-          <a:xfrm>
-            <a:off x="5802087" y="1690688"/>
-            <a:ext cx="6240978" cy="5036683"/>
-          </a:xfrm>
-        </p:spPr>
-        <p:txBody>
-          <a:bodyPr>
-            <a:normAutofit/>
-          </a:bodyPr>
-          <a:lstStyle/>
-          <a:p>
-            <a:r>
-              <a:rPr lang="pt-BR" dirty="0"/>
-              <a:t>O que podemos fazer se não tivermos informações sobre as classes (i.e., rótulos) a que pertencem os exemplos de entrada?</a:t>
-            </a:r>
-          </a:p>
-        </p:txBody>
-      </p:sp>
-      <p:pic>
-        <p:nvPicPr>
-          <p:cNvPr id="6" name="Picture 2" descr="K-Means Clustering using Python. Welcome back guys! Hope you had a great… |  by Luigi Fiori | Medium"/>
-          <p:cNvPicPr>
-            <a:picLocks noChangeAspect="1" noChangeArrowheads="1"/>
-          </p:cNvPicPr>
-          <p:nvPr/>
-        </p:nvPicPr>
-        <p:blipFill rotWithShape="1">
-          <a:blip r:embed="rId3">
-            <a:extLst>
-              <a:ext uri="{28A0092B-C50C-407E-A947-70E740481C1C}">
-                <a14:useLocalDpi xmlns:a14="http://schemas.microsoft.com/office/drawing/2010/main" val="0"/>
-              </a:ext>
-            </a:extLst>
-          </a:blip>
-          <a:srcRect l="1639" t="3709" r="55246" b="11854"/>
-          <a:stretch/>
-        </p:blipFill>
-        <p:spPr bwMode="auto">
-          <a:xfrm>
-            <a:off x="1090832" y="2101933"/>
-            <a:ext cx="3894188" cy="3177638"/>
-          </a:xfrm>
-          <a:prstGeom prst="rect">
-            <a:avLst/>
-          </a:prstGeom>
-          <a:noFill/>
-          <a:extLst>
-            <a:ext uri="{909E8E84-426E-40DD-AFC4-6F175D3DCCD1}">
-              <a14:hiddenFill xmlns:a14="http://schemas.microsoft.com/office/drawing/2010/main">
-                <a:solidFill>
-                  <a:srgbClr val="FFFFFF"/>
-                </a:solidFill>
-              </a14:hiddenFill>
-            </a:ext>
-          </a:extLst>
-        </p:spPr>
-      </p:pic>
-    </p:spTree>
-    <p:extLst>
-      <p:ext uri="{BB962C8B-B14F-4D97-AF65-F5344CB8AC3E}">
-        <p14:creationId xmlns:p14="http://schemas.microsoft.com/office/powerpoint/2010/main" val="1021130030"/>
-      </p:ext>
-    </p:extLst>
-  </p:cSld>
-  <p:clrMapOvr>
-    <a:masterClrMapping/>
-  </p:clrMapOvr>
-</p:sld>
-</file>
-
-<file path=ppt/slides/slide40.xml><?xml version="1.0" encoding="utf-8"?>
+<file path=ppt/slides/slide37.xml><?xml version="1.0" encoding="utf-8"?>
 <p:sld xmlns:a="http://schemas.openxmlformats.org/drawingml/2006/main" xmlns:r="http://schemas.openxmlformats.org/officeDocument/2006/relationships" xmlns:p="http://schemas.openxmlformats.org/presentationml/2006/main">
   <p:cSld>
     <p:spTree>
@@ -14741,7 +13378,7 @@
 </p:sld>
 </file>
 
-<file path=ppt/slides/slide41.xml><?xml version="1.0" encoding="utf-8"?>
+<file path=ppt/slides/slide38.xml><?xml version="1.0" encoding="utf-8"?>
 <p:sld xmlns:a="http://schemas.openxmlformats.org/drawingml/2006/main" xmlns:r="http://schemas.openxmlformats.org/officeDocument/2006/relationships" xmlns:p="http://schemas.openxmlformats.org/presentationml/2006/main">
   <p:cSld>
     <p:spTree>
@@ -14827,7 +13464,7 @@
 </p:sld>
 </file>
 
-<file path=ppt/slides/slide42.xml><?xml version="1.0" encoding="utf-8"?>
+<file path=ppt/slides/slide39.xml><?xml version="1.0" encoding="utf-8"?>
 <p:sld xmlns:a="http://schemas.openxmlformats.org/drawingml/2006/main" xmlns:r="http://schemas.openxmlformats.org/officeDocument/2006/relationships" xmlns:p="http://schemas.openxmlformats.org/presentationml/2006/main">
   <p:cSld>
     <p:spTree>
@@ -15051,6 +13688,126 @@
     <p:extLst>
       <p:ext uri="{BB962C8B-B14F-4D97-AF65-F5344CB8AC3E}">
         <p14:creationId xmlns:p14="http://schemas.microsoft.com/office/powerpoint/2010/main" val="3996790408"/>
+      </p:ext>
+    </p:extLst>
+  </p:cSld>
+  <p:clrMapOvr>
+    <a:masterClrMapping/>
+  </p:clrMapOvr>
+</p:sld>
+</file>
+
+<file path=ppt/slides/slide4.xml><?xml version="1.0" encoding="utf-8"?>
+<p:sld xmlns:a="http://schemas.openxmlformats.org/drawingml/2006/main" xmlns:r="http://schemas.openxmlformats.org/officeDocument/2006/relationships" xmlns:p="http://schemas.openxmlformats.org/presentationml/2006/main">
+  <p:cSld>
+    <p:spTree>
+      <p:nvGrpSpPr>
+        <p:cNvPr id="1" name=""/>
+        <p:cNvGrpSpPr/>
+        <p:nvPr/>
+      </p:nvGrpSpPr>
+      <p:grpSpPr>
+        <a:xfrm>
+          <a:off x="0" y="0"/>
+          <a:ext cx="0" cy="0"/>
+          <a:chOff x="0" y="0"/>
+          <a:chExt cx="0" cy="0"/>
+        </a:xfrm>
+      </p:grpSpPr>
+      <p:sp>
+        <p:nvSpPr>
+          <p:cNvPr id="2" name="Title 1"/>
+          <p:cNvSpPr>
+            <a:spLocks noGrp="1"/>
+          </p:cNvSpPr>
+          <p:nvPr>
+            <p:ph type="title"/>
+          </p:nvPr>
+        </p:nvSpPr>
+        <p:spPr/>
+        <p:txBody>
+          <a:bodyPr/>
+          <a:lstStyle/>
+          <a:p>
+            <a:r>
+              <a:rPr lang="pt-BR" dirty="0"/>
+              <a:t>Motivação</a:t>
+            </a:r>
+          </a:p>
+        </p:txBody>
+      </p:sp>
+      <p:sp>
+        <p:nvSpPr>
+          <p:cNvPr id="7" name="Content Placeholder 2"/>
+          <p:cNvSpPr>
+            <a:spLocks noGrp="1"/>
+          </p:cNvSpPr>
+          <p:nvPr>
+            <p:ph idx="1"/>
+          </p:nvPr>
+        </p:nvSpPr>
+        <p:spPr>
+          <a:xfrm>
+            <a:off x="5802087" y="1690688"/>
+            <a:ext cx="6240978" cy="5036683"/>
+          </a:xfrm>
+        </p:spPr>
+        <p:txBody>
+          <a:bodyPr>
+            <a:normAutofit/>
+          </a:bodyPr>
+          <a:lstStyle/>
+          <a:p>
+            <a:r>
+              <a:rPr lang="pt-BR" dirty="0"/>
+              <a:t>O que podemos fazer se não tivermos informações sobre as classes (i.e., rótulos) a que pertencem os exemplos de entrada?</a:t>
+            </a:r>
+          </a:p>
+        </p:txBody>
+      </p:sp>
+      <p:pic>
+        <p:nvPicPr>
+          <p:cNvPr id="6" name="Picture 2" descr="K-Means Clustering using Python. Welcome back guys! Hope you had a great… |  by Luigi Fiori | Medium"/>
+          <p:cNvPicPr>
+            <a:picLocks noChangeAspect="1" noChangeArrowheads="1"/>
+          </p:cNvPicPr>
+          <p:nvPr/>
+        </p:nvPicPr>
+        <p:blipFill rotWithShape="1">
+          <a:blip r:embed="rId3">
+            <a:extLst>
+              <a:ext uri="{28A0092B-C50C-407E-A947-70E740481C1C}">
+                <a14:useLocalDpi xmlns:a14="http://schemas.microsoft.com/office/drawing/2010/main" val="0"/>
+              </a:ext>
+            </a:extLst>
+          </a:blip>
+          <a:srcRect l="1639" t="3709" r="55246" b="11854"/>
+          <a:stretch/>
+        </p:blipFill>
+        <p:spPr bwMode="auto">
+          <a:xfrm>
+            <a:off x="1090832" y="2101933"/>
+            <a:ext cx="3894188" cy="3177638"/>
+          </a:xfrm>
+          <a:prstGeom prst="rect">
+            <a:avLst/>
+          </a:prstGeom>
+          <a:noFill/>
+          <a:extLst>
+            <a:ext uri="{909E8E84-426E-40DD-AFC4-6F175D3DCCD1}">
+              <a14:hiddenFill xmlns:a14="http://schemas.microsoft.com/office/drawing/2010/main">
+                <a:solidFill>
+                  <a:srgbClr val="FFFFFF"/>
+                </a:solidFill>
+              </a14:hiddenFill>
+            </a:ext>
+          </a:extLst>
+        </p:spPr>
+      </p:pic>
+    </p:spTree>
+    <p:extLst>
+      <p:ext uri="{BB962C8B-B14F-4D97-AF65-F5344CB8AC3E}">
+        <p14:creationId xmlns:p14="http://schemas.microsoft.com/office/powerpoint/2010/main" val="1021130030"/>
       </p:ext>
     </p:extLst>
   </p:cSld>

--- a/slides/C24_kMeans.pptx
+++ b/slides/C24_kMeans.pptx
@@ -5,7 +5,7 @@
     <p:sldMasterId id="2147483648" r:id="rId1"/>
   </p:sldMasterIdLst>
   <p:notesMasterIdLst>
-    <p:notesMasterId r:id="rId41"/>
+    <p:notesMasterId r:id="rId42"/>
   </p:notesMasterIdLst>
   <p:sldIdLst>
     <p:sldId id="256" r:id="rId2"/>
@@ -42,11 +42,12 @@
     <p:sldId id="423" r:id="rId33"/>
     <p:sldId id="424" r:id="rId34"/>
     <p:sldId id="398" r:id="rId35"/>
-    <p:sldId id="338" r:id="rId36"/>
-    <p:sldId id="395" r:id="rId37"/>
-    <p:sldId id="396" r:id="rId38"/>
-    <p:sldId id="306" r:id="rId39"/>
-    <p:sldId id="265" r:id="rId40"/>
+    <p:sldId id="425" r:id="rId36"/>
+    <p:sldId id="338" r:id="rId37"/>
+    <p:sldId id="395" r:id="rId38"/>
+    <p:sldId id="396" r:id="rId39"/>
+    <p:sldId id="306" r:id="rId40"/>
+    <p:sldId id="265" r:id="rId41"/>
   </p:sldIdLst>
   <p:sldSz cx="12192000" cy="6858000"/>
   <p:notesSz cx="6858000" cy="9144000"/>
@@ -235,7 +236,7 @@
           <a:p>
             <a:fld id="{C3C82C08-3EFC-4473-8294-F0E229C19EFF}" type="datetimeFigureOut">
               <a:rPr lang="pt-BR" smtClean="0"/>
-              <a:t>09/04/2026</a:t>
+              <a:t>10/04/2026</a:t>
             </a:fld>
             <a:endParaRPr lang="pt-BR"/>
           </a:p>
@@ -938,7 +939,7 @@
           <a:p>
             <a:fld id="{6FC8D850-966F-45A6-8DE7-15B891E7D40D}" type="slidenum">
               <a:rPr lang="pt-BR" smtClean="0"/>
-              <a:t>35</a:t>
+              <a:t>36</a:t>
             </a:fld>
             <a:endParaRPr lang="pt-BR"/>
           </a:p>
@@ -2973,7 +2974,7 @@
           <a:p>
             <a:fld id="{221D0464-8C8A-49C0-859F-777E51766A35}" type="datetimeFigureOut">
               <a:rPr lang="pt-BR" smtClean="0"/>
-              <a:t>09/04/2026</a:t>
+              <a:t>10/04/2026</a:t>
             </a:fld>
             <a:endParaRPr lang="pt-BR"/>
           </a:p>
@@ -3143,7 +3144,7 @@
           <a:p>
             <a:fld id="{221D0464-8C8A-49C0-859F-777E51766A35}" type="datetimeFigureOut">
               <a:rPr lang="pt-BR" smtClean="0"/>
-              <a:t>09/04/2026</a:t>
+              <a:t>10/04/2026</a:t>
             </a:fld>
             <a:endParaRPr lang="pt-BR"/>
           </a:p>
@@ -3323,7 +3324,7 @@
           <a:p>
             <a:fld id="{221D0464-8C8A-49C0-859F-777E51766A35}" type="datetimeFigureOut">
               <a:rPr lang="pt-BR" smtClean="0"/>
-              <a:t>09/04/2026</a:t>
+              <a:t>10/04/2026</a:t>
             </a:fld>
             <a:endParaRPr lang="pt-BR"/>
           </a:p>
@@ -3493,7 +3494,7 @@
           <a:p>
             <a:fld id="{221D0464-8C8A-49C0-859F-777E51766A35}" type="datetimeFigureOut">
               <a:rPr lang="pt-BR" smtClean="0"/>
-              <a:t>09/04/2026</a:t>
+              <a:t>10/04/2026</a:t>
             </a:fld>
             <a:endParaRPr lang="pt-BR"/>
           </a:p>
@@ -3739,7 +3740,7 @@
           <a:p>
             <a:fld id="{221D0464-8C8A-49C0-859F-777E51766A35}" type="datetimeFigureOut">
               <a:rPr lang="pt-BR" smtClean="0"/>
-              <a:t>09/04/2026</a:t>
+              <a:t>10/04/2026</a:t>
             </a:fld>
             <a:endParaRPr lang="pt-BR"/>
           </a:p>
@@ -3971,7 +3972,7 @@
           <a:p>
             <a:fld id="{221D0464-8C8A-49C0-859F-777E51766A35}" type="datetimeFigureOut">
               <a:rPr lang="pt-BR" smtClean="0"/>
-              <a:t>09/04/2026</a:t>
+              <a:t>10/04/2026</a:t>
             </a:fld>
             <a:endParaRPr lang="pt-BR"/>
           </a:p>
@@ -4338,7 +4339,7 @@
           <a:p>
             <a:fld id="{221D0464-8C8A-49C0-859F-777E51766A35}" type="datetimeFigureOut">
               <a:rPr lang="pt-BR" smtClean="0"/>
-              <a:t>09/04/2026</a:t>
+              <a:t>10/04/2026</a:t>
             </a:fld>
             <a:endParaRPr lang="pt-BR"/>
           </a:p>
@@ -4456,7 +4457,7 @@
           <a:p>
             <a:fld id="{221D0464-8C8A-49C0-859F-777E51766A35}" type="datetimeFigureOut">
               <a:rPr lang="pt-BR" smtClean="0"/>
-              <a:t>09/04/2026</a:t>
+              <a:t>10/04/2026</a:t>
             </a:fld>
             <a:endParaRPr lang="pt-BR"/>
           </a:p>
@@ -4551,7 +4552,7 @@
           <a:p>
             <a:fld id="{221D0464-8C8A-49C0-859F-777E51766A35}" type="datetimeFigureOut">
               <a:rPr lang="pt-BR" smtClean="0"/>
-              <a:t>09/04/2026</a:t>
+              <a:t>10/04/2026</a:t>
             </a:fld>
             <a:endParaRPr lang="pt-BR"/>
           </a:p>
@@ -4828,7 +4829,7 @@
           <a:p>
             <a:fld id="{221D0464-8C8A-49C0-859F-777E51766A35}" type="datetimeFigureOut">
               <a:rPr lang="pt-BR" smtClean="0"/>
-              <a:t>09/04/2026</a:t>
+              <a:t>10/04/2026</a:t>
             </a:fld>
             <a:endParaRPr lang="pt-BR"/>
           </a:p>
@@ -5081,7 +5082,7 @@
           <a:p>
             <a:fld id="{221D0464-8C8A-49C0-859F-777E51766A35}" type="datetimeFigureOut">
               <a:rPr lang="pt-BR" smtClean="0"/>
-              <a:t>09/04/2026</a:t>
+              <a:t>10/04/2026</a:t>
             </a:fld>
             <a:endParaRPr lang="pt-BR"/>
           </a:p>
@@ -5294,7 +5295,7 @@
           <a:p>
             <a:fld id="{221D0464-8C8A-49C0-859F-777E51766A35}" type="datetimeFigureOut">
               <a:rPr lang="pt-BR" smtClean="0"/>
-              <a:t>09/04/2026</a:t>
+              <a:t>10/04/2026</a:t>
             </a:fld>
             <a:endParaRPr lang="pt-BR"/>
           </a:p>
@@ -6096,7 +6097,7 @@
             </a:r>
             <a:r>
               <a:rPr lang="pt-BR" dirty="0"/>
-              <a:t> e a distância até os </a:t>
+              <a:t> (ID) e a distância até os </a:t>
             </a:r>
             <a:r>
               <a:rPr lang="pt-BR" dirty="0" err="1"/>
@@ -10568,13 +10569,13 @@
         </p:nvSpPr>
         <p:spPr>
           <a:xfrm>
-            <a:off x="5435600" y="1825624"/>
-            <a:ext cx="6756400" cy="5032375"/>
+            <a:off x="5466080" y="1825624"/>
+            <a:ext cx="6725920" cy="5032375"/>
           </a:xfrm>
         </p:spPr>
         <p:txBody>
           <a:bodyPr>
-            <a:normAutofit/>
+            <a:normAutofit lnSpcReduction="10000"/>
           </a:bodyPr>
           <a:lstStyle/>
           <a:p>
@@ -10608,7 +10609,17 @@
             </a:r>
             <a:r>
               <a:rPr lang="pt-BR" dirty="0"/>
-              <a:t> no início</a:t>
+              <a:t> no início.</a:t>
+            </a:r>
+          </a:p>
+          <a:p>
+            <a:pPr lvl="1">
+              <a:buFont typeface="Wingdings" panose="05000000000000000000" pitchFamily="2" charset="2"/>
+              <a:buChar char="§"/>
+            </a:pPr>
+            <a:r>
+              <a:rPr lang="pt-BR" dirty="0"/>
+              <a:t>pode convergir para agrupamentos diferentes para cada execução.</a:t>
             </a:r>
           </a:p>
           <a:p>
@@ -10746,7 +10757,7 @@
         </p:blipFill>
         <p:spPr bwMode="auto">
           <a:xfrm>
-            <a:off x="511629" y="2202317"/>
+            <a:off x="420189" y="2496957"/>
             <a:ext cx="4487974" cy="3392940"/>
           </a:xfrm>
           <a:prstGeom prst="rect">
@@ -11248,8 +11259,8 @@
           </a:p>
         </p:txBody>
       </p:sp>
-      <mc:AlternateContent xmlns:mc="http://schemas.openxmlformats.org/markup-compatibility/2006" xmlns:a14="http://schemas.microsoft.com/office/drawing/2010/main">
-        <mc:Choice Requires="a14">
+      <mc:AlternateContent xmlns:mc="http://schemas.openxmlformats.org/markup-compatibility/2006">
+        <mc:Choice xmlns:a14="http://schemas.microsoft.com/office/drawing/2010/main" Requires="a14">
           <p:sp>
             <p:nvSpPr>
               <p:cNvPr id="3" name="Content Placeholder 2">
@@ -11268,8 +11279,8 @@
             </p:nvSpPr>
             <p:spPr>
               <a:xfrm>
-                <a:off x="5943600" y="1825624"/>
-                <a:ext cx="6248400" cy="5032375"/>
+                <a:off x="5730240" y="1825624"/>
+                <a:ext cx="6461760" cy="5032375"/>
               </a:xfrm>
             </p:spPr>
             <p:txBody>
@@ -11326,6 +11337,105 @@
                 </a:r>
               </a:p>
               <a:p>
+                <a:pPr lvl="1">
+                  <a:buFont typeface="Wingdings" panose="05000000000000000000" pitchFamily="2" charset="2"/>
+                  <a:buChar char="§"/>
+                </a:pPr>
+                <a:r>
+                  <a:rPr lang="pt-BR" dirty="0"/>
+                  <a:t>No limite, quando </a:t>
+                </a:r>
+                <a14:m>
+                  <m:oMath xmlns:m="http://schemas.openxmlformats.org/officeDocument/2006/math">
+                    <m:r>
+                      <a:rPr lang="pt-BR" i="1">
+                        <a:latin typeface="Cambria Math" panose="02040503050406030204" pitchFamily="18" charset="0"/>
+                      </a:rPr>
+                      <m:t>𝑘</m:t>
+                    </m:r>
+                  </m:oMath>
+                </a14:m>
+                <a:r>
+                  <a:rPr lang="pt-BR" dirty="0"/>
+                  <a:t> igual a </a:t>
+                </a:r>
+                <a14:m>
+                  <m:oMath xmlns:m="http://schemas.openxmlformats.org/officeDocument/2006/math">
+                    <m:r>
+                      <a:rPr lang="pt-BR" b="0" i="1" smtClean="0">
+                        <a:latin typeface="Cambria Math" panose="02040503050406030204" pitchFamily="18" charset="0"/>
+                      </a:rPr>
+                      <m:t>𝑁</m:t>
+                    </m:r>
+                  </m:oMath>
+                </a14:m>
+                <a:r>
+                  <a:rPr lang="pt-BR" dirty="0"/>
+                  <a:t>, </a:t>
+                </a:r>
+                <a:r>
+                  <a:rPr lang="en-US" dirty="0"/>
+                  <a:t>a </a:t>
+                </a:r>
+                <a:r>
+                  <a:rPr lang="en-US" dirty="0" err="1"/>
+                  <a:t>inércia</a:t>
+                </a:r>
+                <a:r>
+                  <a:rPr lang="en-US" dirty="0"/>
+                  <a:t> é 0 (</a:t>
+                </a:r>
+                <a:r>
+                  <a:rPr lang="en-US" dirty="0" err="1"/>
+                  <a:t>mínima</a:t>
+                </a:r>
+                <a:r>
+                  <a:rPr lang="en-US" dirty="0"/>
+                  <a:t> </a:t>
+                </a:r>
+                <a:r>
+                  <a:rPr lang="en-US" dirty="0" err="1"/>
+                  <a:t>possível</a:t>
+                </a:r>
+                <a:r>
+                  <a:rPr lang="en-US" dirty="0"/>
+                  <a:t>), mas o </a:t>
+                </a:r>
+                <a:r>
+                  <a:rPr lang="en-US" dirty="0" err="1"/>
+                  <a:t>modelo</a:t>
+                </a:r>
+                <a:r>
+                  <a:rPr lang="en-US" dirty="0"/>
+                  <a:t> </a:t>
+                </a:r>
+                <a:r>
+                  <a:rPr lang="en-US" dirty="0" err="1"/>
+                  <a:t>será</a:t>
+                </a:r>
+                <a:r>
+                  <a:rPr lang="en-US" dirty="0"/>
+                  <a:t> </a:t>
+                </a:r>
+                <a:r>
+                  <a:rPr lang="en-US" dirty="0" err="1"/>
+                  <a:t>extremamente</a:t>
+                </a:r>
+                <a:r>
+                  <a:rPr lang="en-US" dirty="0"/>
+                  <a:t> </a:t>
+                </a:r>
+                <a:r>
+                  <a:rPr lang="en-US" dirty="0" err="1"/>
+                  <a:t>complexo</a:t>
+                </a:r>
+                <a:r>
+                  <a:rPr lang="en-US" dirty="0"/>
+                  <a:t> (overfitting).</a:t>
+                </a:r>
+                <a:endParaRPr lang="pt-BR" dirty="0"/>
+              </a:p>
+              <a:p>
                 <a:r>
                   <a:rPr lang="pt-BR" dirty="0"/>
                   <a:t>Esse ponto é o “</a:t>
@@ -11347,7 +11457,7 @@
             </p:txBody>
           </p:sp>
         </mc:Choice>
-        <mc:Fallback xmlns="">
+        <mc:Fallback>
           <p:sp>
             <p:nvSpPr>
               <p:cNvPr id="3" name="Content Placeholder 2">
@@ -11366,13 +11476,13 @@
             </p:nvSpPr>
             <p:spPr>
               <a:xfrm>
-                <a:off x="5943600" y="1825624"/>
-                <a:ext cx="6248400" cy="5032375"/>
+                <a:off x="5730240" y="1825624"/>
+                <a:ext cx="6461760" cy="5032375"/>
               </a:xfrm>
               <a:blipFill>
                 <a:blip r:embed="rId2"/>
                 <a:stretch>
-                  <a:fillRect l="-1756" t="-1937" r="-390"/>
+                  <a:fillRect l="-1698" t="-1937"/>
                 </a:stretch>
               </a:blipFill>
             </p:spPr>
@@ -11511,8 +11621,8 @@
           </a:p>
         </p:txBody>
       </p:sp>
-      <mc:AlternateContent xmlns:mc="http://schemas.openxmlformats.org/markup-compatibility/2006">
-        <mc:Choice xmlns:a14="http://schemas.microsoft.com/office/drawing/2010/main" Requires="a14">
+      <mc:AlternateContent xmlns:mc="http://schemas.openxmlformats.org/markup-compatibility/2006" xmlns:a14="http://schemas.microsoft.com/office/drawing/2010/main">
+        <mc:Choice Requires="a14">
           <p:sp>
             <p:nvSpPr>
               <p:cNvPr id="3" name="Content Placeholder 2">
@@ -12046,7 +12156,7 @@
             </p:txBody>
           </p:sp>
         </mc:Choice>
-        <mc:Fallback>
+        <mc:Fallback xmlns="">
           <p:sp>
             <p:nvSpPr>
               <p:cNvPr id="3" name="Content Placeholder 2">
@@ -12210,8 +12320,8 @@
           </a:p>
         </p:txBody>
       </p:sp>
-      <mc:AlternateContent xmlns:mc="http://schemas.openxmlformats.org/markup-compatibility/2006">
-        <mc:Choice xmlns:a14="http://schemas.microsoft.com/office/drawing/2010/main" Requires="a14">
+      <mc:AlternateContent xmlns:mc="http://schemas.openxmlformats.org/markup-compatibility/2006" xmlns:a14="http://schemas.microsoft.com/office/drawing/2010/main">
+        <mc:Choice Requires="a14">
           <p:sp>
             <p:nvSpPr>
               <p:cNvPr id="3" name="Content Placeholder 2">
@@ -12300,7 +12410,7 @@
             </p:txBody>
           </p:sp>
         </mc:Choice>
-        <mc:Fallback>
+        <mc:Fallback xmlns="">
           <p:sp>
             <p:nvSpPr>
               <p:cNvPr id="3" name="Content Placeholder 2">
@@ -12464,8 +12574,8 @@
           </a:p>
         </p:txBody>
       </p:sp>
-      <mc:AlternateContent xmlns:mc="http://schemas.openxmlformats.org/markup-compatibility/2006">
-        <mc:Choice xmlns:a14="http://schemas.microsoft.com/office/drawing/2010/main" Requires="a14">
+      <mc:AlternateContent xmlns:mc="http://schemas.openxmlformats.org/markup-compatibility/2006" xmlns:a14="http://schemas.microsoft.com/office/drawing/2010/main">
+        <mc:Choice Requires="a14">
           <p:sp>
             <p:nvSpPr>
               <p:cNvPr id="3" name="Content Placeholder 2">
@@ -12525,7 +12635,7 @@
             </p:txBody>
           </p:sp>
         </mc:Choice>
-        <mc:Fallback>
+        <mc:Fallback xmlns="">
           <p:sp>
             <p:nvSpPr>
               <p:cNvPr id="3" name="Content Placeholder 2">
@@ -12843,6 +12953,186 @@
 </file>
 
 <file path=ppt/slides/slide35.xml><?xml version="1.0" encoding="utf-8"?>
+<p:sld xmlns:a="http://schemas.openxmlformats.org/drawingml/2006/main" xmlns:r="http://schemas.openxmlformats.org/officeDocument/2006/relationships" xmlns:p="http://schemas.openxmlformats.org/presentationml/2006/main">
+  <p:cSld>
+    <p:spTree>
+      <p:nvGrpSpPr>
+        <p:cNvPr id="1" name=""/>
+        <p:cNvGrpSpPr/>
+        <p:nvPr/>
+      </p:nvGrpSpPr>
+      <p:grpSpPr>
+        <a:xfrm>
+          <a:off x="0" y="0"/>
+          <a:ext cx="0" cy="0"/>
+          <a:chOff x="0" y="0"/>
+          <a:chExt cx="0" cy="0"/>
+        </a:xfrm>
+      </p:grpSpPr>
+      <p:sp>
+        <p:nvSpPr>
+          <p:cNvPr id="2" name="Title 1">
+            <a:extLst>
+              <a:ext uri="{FF2B5EF4-FFF2-40B4-BE49-F238E27FC236}">
+                <a16:creationId xmlns:a16="http://schemas.microsoft.com/office/drawing/2014/main" id="{9FD61470-7062-5DCF-6407-C45E5BF63D31}"/>
+              </a:ext>
+            </a:extLst>
+          </p:cNvPr>
+          <p:cNvSpPr>
+            <a:spLocks noGrp="1"/>
+          </p:cNvSpPr>
+          <p:nvPr>
+            <p:ph type="title"/>
+          </p:nvPr>
+        </p:nvSpPr>
+        <p:spPr/>
+        <p:txBody>
+          <a:bodyPr/>
+          <a:lstStyle/>
+          <a:p>
+            <a:r>
+              <a:rPr lang="pt-BR" dirty="0"/>
+              <a:t>Aplicação: detecção de anomalias</a:t>
+            </a:r>
+            <a:endParaRPr lang="en-US" dirty="0"/>
+          </a:p>
+        </p:txBody>
+      </p:sp>
+      <p:sp>
+        <p:nvSpPr>
+          <p:cNvPr id="3" name="Content Placeholder 2">
+            <a:extLst>
+              <a:ext uri="{FF2B5EF4-FFF2-40B4-BE49-F238E27FC236}">
+                <a16:creationId xmlns:a16="http://schemas.microsoft.com/office/drawing/2014/main" id="{06C85168-BBA5-1819-2A3F-16AFDD60A698}"/>
+              </a:ext>
+            </a:extLst>
+          </p:cNvPr>
+          <p:cNvSpPr>
+            <a:spLocks noGrp="1"/>
+          </p:cNvSpPr>
+          <p:nvPr>
+            <p:ph idx="1"/>
+          </p:nvPr>
+        </p:nvSpPr>
+        <p:spPr>
+          <a:xfrm>
+            <a:off x="5679440" y="1825624"/>
+            <a:ext cx="6512560" cy="5032375"/>
+          </a:xfrm>
+        </p:spPr>
+        <p:txBody>
+          <a:bodyPr>
+            <a:normAutofit/>
+          </a:bodyPr>
+          <a:lstStyle/>
+          <a:p>
+            <a:r>
+              <a:rPr lang="pt-BR" dirty="0"/>
+              <a:t>Nessa aplicação, encontramos os centroides e a área dos </a:t>
+            </a:r>
+            <a:r>
+              <a:rPr lang="pt-BR" i="1" dirty="0"/>
+              <a:t>clusters</a:t>
+            </a:r>
+            <a:r>
+              <a:rPr lang="pt-BR" dirty="0"/>
+              <a:t>.</a:t>
+            </a:r>
+          </a:p>
+          <a:p>
+            <a:r>
+              <a:rPr lang="pt-BR" dirty="0"/>
+              <a:t>A área é definida por um valor de raio que faça com que 97% das amostras tenham distância ao centroide mais próximo menor ou igual a esse valor.</a:t>
+            </a:r>
+          </a:p>
+          <a:p>
+            <a:r>
+              <a:rPr lang="pt-BR" dirty="0"/>
+              <a:t>Uma amostra é classificada como anomalia se a distância entre ela e o centroide mais próximo for significativamente alta.</a:t>
+            </a:r>
+          </a:p>
+          <a:p>
+            <a:pPr lvl="1">
+              <a:buFont typeface="Wingdings" panose="05000000000000000000" pitchFamily="2" charset="2"/>
+              <a:buChar char="§"/>
+            </a:pPr>
+            <a:r>
+              <a:rPr lang="pt-BR" dirty="0"/>
+              <a:t>Ou seja, se ela estiver fora da área do </a:t>
+            </a:r>
+            <a:r>
+              <a:rPr lang="pt-BR" i="1" dirty="0"/>
+              <a:t>cluster</a:t>
+            </a:r>
+            <a:r>
+              <a:rPr lang="pt-BR" dirty="0"/>
+              <a:t>. </a:t>
+            </a:r>
+            <a:endParaRPr lang="en-US" dirty="0"/>
+          </a:p>
+        </p:txBody>
+      </p:sp>
+      <p:pic>
+        <p:nvPicPr>
+          <p:cNvPr id="1026" name="Picture 2">
+            <a:extLst>
+              <a:ext uri="{FF2B5EF4-FFF2-40B4-BE49-F238E27FC236}">
+                <a16:creationId xmlns:a16="http://schemas.microsoft.com/office/drawing/2014/main" id="{7F44AA9B-6E70-9E5C-102F-FC9BEDBA27E0}"/>
+              </a:ext>
+            </a:extLst>
+          </p:cNvPr>
+          <p:cNvPicPr>
+            <a:picLocks noChangeAspect="1" noChangeArrowheads="1"/>
+          </p:cNvPicPr>
+          <p:nvPr/>
+        </p:nvPicPr>
+        <p:blipFill>
+          <a:blip r:embed="rId2">
+            <a:extLst>
+              <a:ext uri="{28A0092B-C50C-407E-A947-70E740481C1C}">
+                <a14:useLocalDpi xmlns:a14="http://schemas.microsoft.com/office/drawing/2010/main" val="0"/>
+              </a:ext>
+            </a:extLst>
+          </a:blip>
+          <a:srcRect/>
+          <a:stretch>
+            <a:fillRect/>
+          </a:stretch>
+        </p:blipFill>
+        <p:spPr bwMode="auto">
+          <a:xfrm>
+            <a:off x="584200" y="2519680"/>
+            <a:ext cx="4258504" cy="3264853"/>
+          </a:xfrm>
+          <a:prstGeom prst="rect">
+            <a:avLst/>
+          </a:prstGeom>
+          <a:noFill/>
+          <a:extLst>
+            <a:ext uri="{909E8E84-426E-40DD-AFC4-6F175D3DCCD1}">
+              <a14:hiddenFill xmlns:a14="http://schemas.microsoft.com/office/drawing/2010/main">
+                <a:solidFill>
+                  <a:srgbClr val="FFFFFF"/>
+                </a:solidFill>
+              </a14:hiddenFill>
+            </a:ext>
+          </a:extLst>
+        </p:spPr>
+      </p:pic>
+    </p:spTree>
+    <p:extLst>
+      <p:ext uri="{BB962C8B-B14F-4D97-AF65-F5344CB8AC3E}">
+        <p14:creationId xmlns:p14="http://schemas.microsoft.com/office/powerpoint/2010/main" val="3452961158"/>
+      </p:ext>
+    </p:extLst>
+  </p:cSld>
+  <p:clrMapOvr>
+    <a:masterClrMapping/>
+  </p:clrMapOvr>
+</p:sld>
+</file>
+
+<file path=ppt/slides/slide36.xml><?xml version="1.0" encoding="utf-8"?>
 <p:sld xmlns:a="http://schemas.openxmlformats.org/drawingml/2006/main" xmlns:r="http://schemas.openxmlformats.org/officeDocument/2006/relationships" xmlns:p="http://schemas.openxmlformats.org/presentationml/2006/main">
   <p:cSld>
     <p:spTree>
@@ -13197,101 +13487,6 @@
 </p:sld>
 </file>
 
-<file path=ppt/slides/slide36.xml><?xml version="1.0" encoding="utf-8"?>
-<p:sld xmlns:a="http://schemas.openxmlformats.org/drawingml/2006/main" xmlns:r="http://schemas.openxmlformats.org/officeDocument/2006/relationships" xmlns:p="http://schemas.openxmlformats.org/presentationml/2006/main">
-  <p:cSld>
-    <p:spTree>
-      <p:nvGrpSpPr>
-        <p:cNvPr id="1" name=""/>
-        <p:cNvGrpSpPr/>
-        <p:nvPr/>
-      </p:nvGrpSpPr>
-      <p:grpSpPr>
-        <a:xfrm>
-          <a:off x="0" y="0"/>
-          <a:ext cx="0" cy="0"/>
-          <a:chOff x="0" y="0"/>
-          <a:chExt cx="0" cy="0"/>
-        </a:xfrm>
-      </p:grpSpPr>
-      <p:sp>
-        <p:nvSpPr>
-          <p:cNvPr id="2" name="Title 1">
-            <a:extLst>
-              <a:ext uri="{FF2B5EF4-FFF2-40B4-BE49-F238E27FC236}">
-                <a16:creationId xmlns:a16="http://schemas.microsoft.com/office/drawing/2014/main" id="{E8FD0E11-3B37-4336-5BF0-C8C033354AF6}"/>
-              </a:ext>
-            </a:extLst>
-          </p:cNvPr>
-          <p:cNvSpPr>
-            <a:spLocks noGrp="1"/>
-          </p:cNvSpPr>
-          <p:nvPr>
-            <p:ph type="title"/>
-          </p:nvPr>
-        </p:nvSpPr>
-        <p:spPr/>
-        <p:txBody>
-          <a:bodyPr/>
-          <a:lstStyle/>
-          <a:p>
-            <a:r>
-              <a:rPr lang="pt-BR" dirty="0"/>
-              <a:t>Lista de exercícios</a:t>
-            </a:r>
-            <a:endParaRPr lang="en-US" dirty="0"/>
-          </a:p>
-        </p:txBody>
-      </p:sp>
-      <p:sp>
-        <p:nvSpPr>
-          <p:cNvPr id="3" name="Content Placeholder 2">
-            <a:extLst>
-              <a:ext uri="{FF2B5EF4-FFF2-40B4-BE49-F238E27FC236}">
-                <a16:creationId xmlns:a16="http://schemas.microsoft.com/office/drawing/2014/main" id="{32CB14AB-72E4-05EB-962C-F8B4618D0574}"/>
-              </a:ext>
-            </a:extLst>
-          </p:cNvPr>
-          <p:cNvSpPr>
-            <a:spLocks noGrp="1"/>
-          </p:cNvSpPr>
-          <p:nvPr>
-            <p:ph idx="1"/>
-          </p:nvPr>
-        </p:nvSpPr>
-        <p:spPr/>
-        <p:txBody>
-          <a:bodyPr/>
-          <a:lstStyle/>
-          <a:p>
-            <a:pPr marL="0" indent="0">
-              <a:buNone/>
-            </a:pPr>
-            <a:r>
-              <a:rPr lang="pt-BR" dirty="0"/>
-              <a:t>Lista #13 – </a:t>
-            </a:r>
-            <a:r>
-              <a:rPr lang="pt-BR" dirty="0" err="1"/>
-              <a:t>kmeans</a:t>
-            </a:r>
-            <a:endParaRPr lang="en-US" dirty="0"/>
-          </a:p>
-        </p:txBody>
-      </p:sp>
-    </p:spTree>
-    <p:extLst>
-      <p:ext uri="{BB962C8B-B14F-4D97-AF65-F5344CB8AC3E}">
-        <p14:creationId xmlns:p14="http://schemas.microsoft.com/office/powerpoint/2010/main" val="4209356042"/>
-      </p:ext>
-    </p:extLst>
-  </p:cSld>
-  <p:clrMapOvr>
-    <a:masterClrMapping/>
-  </p:clrMapOvr>
-</p:sld>
-</file>
-
 <file path=ppt/slides/slide37.xml><?xml version="1.0" encoding="utf-8"?>
 <p:sld xmlns:a="http://schemas.openxmlformats.org/drawingml/2006/main" xmlns:r="http://schemas.openxmlformats.org/officeDocument/2006/relationships" xmlns:p="http://schemas.openxmlformats.org/presentationml/2006/main">
   <p:cSld>
@@ -13311,64 +13506,73 @@
       </p:grpSpPr>
       <p:sp>
         <p:nvSpPr>
-          <p:cNvPr id="4" name="Título 1">
+          <p:cNvPr id="2" name="Title 1">
             <a:extLst>
               <a:ext uri="{FF2B5EF4-FFF2-40B4-BE49-F238E27FC236}">
-                <a16:creationId xmlns:a16="http://schemas.microsoft.com/office/drawing/2014/main" id="{32666AC8-2E17-4DB4-B0F5-60C640CCFD2E}"/>
+                <a16:creationId xmlns:a16="http://schemas.microsoft.com/office/drawing/2014/main" id="{E8FD0E11-3B37-4336-5BF0-C8C033354AF6}"/>
               </a:ext>
             </a:extLst>
           </p:cNvPr>
-          <p:cNvSpPr txBox="1">
-            <a:spLocks/>
-          </p:cNvSpPr>
-          <p:nvPr/>
-        </p:nvSpPr>
-        <p:spPr>
-          <a:xfrm>
-            <a:off x="1431533" y="2720526"/>
-            <a:ext cx="9144000" cy="1029541"/>
-          </a:xfrm>
-          <a:prstGeom prst="rect">
-            <a:avLst/>
-          </a:prstGeom>
-        </p:spPr>
-        <p:txBody>
-          <a:bodyPr vert="horz" lIns="91440" tIns="45720" rIns="91440" bIns="45720" rtlCol="0" anchor="ctr">
-            <a:normAutofit/>
-          </a:bodyPr>
-          <a:lstStyle>
-            <a:lvl1pPr algn="l" defTabSz="914400" rtl="0" eaLnBrk="1" latinLnBrk="0" hangingPunct="1">
-              <a:lnSpc>
-                <a:spcPct val="90000"/>
-              </a:lnSpc>
-              <a:spcBef>
-                <a:spcPct val="0"/>
-              </a:spcBef>
+          <p:cNvSpPr>
+            <a:spLocks noGrp="1"/>
+          </p:cNvSpPr>
+          <p:nvPr>
+            <p:ph type="title"/>
+          </p:nvPr>
+        </p:nvSpPr>
+        <p:spPr/>
+        <p:txBody>
+          <a:bodyPr/>
+          <a:lstStyle/>
+          <a:p>
+            <a:r>
+              <a:rPr lang="pt-BR" dirty="0"/>
+              <a:t>Lista de exercícios</a:t>
+            </a:r>
+            <a:endParaRPr lang="en-US" dirty="0"/>
+          </a:p>
+        </p:txBody>
+      </p:sp>
+      <p:sp>
+        <p:nvSpPr>
+          <p:cNvPr id="3" name="Content Placeholder 2">
+            <a:extLst>
+              <a:ext uri="{FF2B5EF4-FFF2-40B4-BE49-F238E27FC236}">
+                <a16:creationId xmlns:a16="http://schemas.microsoft.com/office/drawing/2014/main" id="{32CB14AB-72E4-05EB-962C-F8B4618D0574}"/>
+              </a:ext>
+            </a:extLst>
+          </p:cNvPr>
+          <p:cNvSpPr>
+            <a:spLocks noGrp="1"/>
+          </p:cNvSpPr>
+          <p:nvPr>
+            <p:ph idx="1"/>
+          </p:nvPr>
+        </p:nvSpPr>
+        <p:spPr/>
+        <p:txBody>
+          <a:bodyPr/>
+          <a:lstStyle/>
+          <a:p>
+            <a:pPr marL="0" indent="0">
               <a:buNone/>
-              <a:defRPr sz="4400" kern="1200">
-                <a:solidFill>
-                  <a:schemeClr val="tx1"/>
-                </a:solidFill>
-                <a:latin typeface="+mj-lt"/>
-                <a:ea typeface="+mj-ea"/>
-                <a:cs typeface="+mj-cs"/>
-              </a:defRPr>
-            </a:lvl1pPr>
-          </a:lstStyle>
-          <a:p>
-            <a:pPr algn="ctr"/>
-            <a:r>
-              <a:rPr lang="pt-BR" sz="6600" dirty="0"/>
-              <a:t>Perguntas?</a:t>
-            </a:r>
-            <a:endParaRPr lang="pt-BR" sz="6600" b="1" i="1" dirty="0"/>
+            </a:pPr>
+            <a:r>
+              <a:rPr lang="pt-BR" dirty="0"/>
+              <a:t>Lista #13 – </a:t>
+            </a:r>
+            <a:r>
+              <a:rPr lang="pt-BR" dirty="0" err="1"/>
+              <a:t>kmeans</a:t>
+            </a:r>
+            <a:endParaRPr lang="en-US" dirty="0"/>
           </a:p>
         </p:txBody>
       </p:sp>
     </p:spTree>
     <p:extLst>
       <p:ext uri="{BB962C8B-B14F-4D97-AF65-F5344CB8AC3E}">
-        <p14:creationId xmlns:p14="http://schemas.microsoft.com/office/powerpoint/2010/main" val="3773005660"/>
+        <p14:creationId xmlns:p14="http://schemas.microsoft.com/office/powerpoint/2010/main" val="4209356042"/>
       </p:ext>
     </p:extLst>
   </p:cSld>
@@ -13445,6 +13649,92 @@
             <a:pPr algn="ctr"/>
             <a:r>
               <a:rPr lang="pt-BR" sz="6600" dirty="0"/>
+              <a:t>Perguntas?</a:t>
+            </a:r>
+            <a:endParaRPr lang="pt-BR" sz="6600" b="1" i="1" dirty="0"/>
+          </a:p>
+        </p:txBody>
+      </p:sp>
+    </p:spTree>
+    <p:extLst>
+      <p:ext uri="{BB962C8B-B14F-4D97-AF65-F5344CB8AC3E}">
+        <p14:creationId xmlns:p14="http://schemas.microsoft.com/office/powerpoint/2010/main" val="3773005660"/>
+      </p:ext>
+    </p:extLst>
+  </p:cSld>
+  <p:clrMapOvr>
+    <a:masterClrMapping/>
+  </p:clrMapOvr>
+</p:sld>
+</file>
+
+<file path=ppt/slides/slide39.xml><?xml version="1.0" encoding="utf-8"?>
+<p:sld xmlns:a="http://schemas.openxmlformats.org/drawingml/2006/main" xmlns:r="http://schemas.openxmlformats.org/officeDocument/2006/relationships" xmlns:p="http://schemas.openxmlformats.org/presentationml/2006/main">
+  <p:cSld>
+    <p:spTree>
+      <p:nvGrpSpPr>
+        <p:cNvPr id="1" name=""/>
+        <p:cNvGrpSpPr/>
+        <p:nvPr/>
+      </p:nvGrpSpPr>
+      <p:grpSpPr>
+        <a:xfrm>
+          <a:off x="0" y="0"/>
+          <a:ext cx="0" cy="0"/>
+          <a:chOff x="0" y="0"/>
+          <a:chExt cx="0" cy="0"/>
+        </a:xfrm>
+      </p:grpSpPr>
+      <p:sp>
+        <p:nvSpPr>
+          <p:cNvPr id="4" name="Título 1">
+            <a:extLst>
+              <a:ext uri="{FF2B5EF4-FFF2-40B4-BE49-F238E27FC236}">
+                <a16:creationId xmlns:a16="http://schemas.microsoft.com/office/drawing/2014/main" id="{32666AC8-2E17-4DB4-B0F5-60C640CCFD2E}"/>
+              </a:ext>
+            </a:extLst>
+          </p:cNvPr>
+          <p:cNvSpPr txBox="1">
+            <a:spLocks/>
+          </p:cNvSpPr>
+          <p:nvPr/>
+        </p:nvSpPr>
+        <p:spPr>
+          <a:xfrm>
+            <a:off x="1431533" y="2720526"/>
+            <a:ext cx="9144000" cy="1029541"/>
+          </a:xfrm>
+          <a:prstGeom prst="rect">
+            <a:avLst/>
+          </a:prstGeom>
+        </p:spPr>
+        <p:txBody>
+          <a:bodyPr vert="horz" lIns="91440" tIns="45720" rIns="91440" bIns="45720" rtlCol="0" anchor="ctr">
+            <a:normAutofit/>
+          </a:bodyPr>
+          <a:lstStyle>
+            <a:lvl1pPr algn="l" defTabSz="914400" rtl="0" eaLnBrk="1" latinLnBrk="0" hangingPunct="1">
+              <a:lnSpc>
+                <a:spcPct val="90000"/>
+              </a:lnSpc>
+              <a:spcBef>
+                <a:spcPct val="0"/>
+              </a:spcBef>
+              <a:buNone/>
+              <a:defRPr sz="4400" kern="1200">
+                <a:solidFill>
+                  <a:schemeClr val="tx1"/>
+                </a:solidFill>
+                <a:latin typeface="+mj-lt"/>
+                <a:ea typeface="+mj-ea"/>
+                <a:cs typeface="+mj-cs"/>
+              </a:defRPr>
+            </a:lvl1pPr>
+          </a:lstStyle>
+          <a:p>
+            <a:pPr algn="ctr"/>
+            <a:r>
+              <a:rPr lang="pt-BR" sz="6600" dirty="0"/>
               <a:t>Obrigado!</a:t>
             </a:r>
             <a:endParaRPr lang="pt-BR" sz="6600" b="1" i="1" dirty="0"/>
@@ -13464,7 +13754,127 @@
 </p:sld>
 </file>
 
-<file path=ppt/slides/slide39.xml><?xml version="1.0" encoding="utf-8"?>
+<file path=ppt/slides/slide4.xml><?xml version="1.0" encoding="utf-8"?>
+<p:sld xmlns:a="http://schemas.openxmlformats.org/drawingml/2006/main" xmlns:r="http://schemas.openxmlformats.org/officeDocument/2006/relationships" xmlns:p="http://schemas.openxmlformats.org/presentationml/2006/main">
+  <p:cSld>
+    <p:spTree>
+      <p:nvGrpSpPr>
+        <p:cNvPr id="1" name=""/>
+        <p:cNvGrpSpPr/>
+        <p:nvPr/>
+      </p:nvGrpSpPr>
+      <p:grpSpPr>
+        <a:xfrm>
+          <a:off x="0" y="0"/>
+          <a:ext cx="0" cy="0"/>
+          <a:chOff x="0" y="0"/>
+          <a:chExt cx="0" cy="0"/>
+        </a:xfrm>
+      </p:grpSpPr>
+      <p:sp>
+        <p:nvSpPr>
+          <p:cNvPr id="2" name="Title 1"/>
+          <p:cNvSpPr>
+            <a:spLocks noGrp="1"/>
+          </p:cNvSpPr>
+          <p:nvPr>
+            <p:ph type="title"/>
+          </p:nvPr>
+        </p:nvSpPr>
+        <p:spPr/>
+        <p:txBody>
+          <a:bodyPr/>
+          <a:lstStyle/>
+          <a:p>
+            <a:r>
+              <a:rPr lang="pt-BR" dirty="0"/>
+              <a:t>Motivação</a:t>
+            </a:r>
+          </a:p>
+        </p:txBody>
+      </p:sp>
+      <p:sp>
+        <p:nvSpPr>
+          <p:cNvPr id="7" name="Content Placeholder 2"/>
+          <p:cNvSpPr>
+            <a:spLocks noGrp="1"/>
+          </p:cNvSpPr>
+          <p:nvPr>
+            <p:ph idx="1"/>
+          </p:nvPr>
+        </p:nvSpPr>
+        <p:spPr>
+          <a:xfrm>
+            <a:off x="5802087" y="1690688"/>
+            <a:ext cx="6240978" cy="5036683"/>
+          </a:xfrm>
+        </p:spPr>
+        <p:txBody>
+          <a:bodyPr>
+            <a:normAutofit/>
+          </a:bodyPr>
+          <a:lstStyle/>
+          <a:p>
+            <a:r>
+              <a:rPr lang="pt-BR" dirty="0"/>
+              <a:t>O que podemos fazer se não tivermos informações sobre as classes (i.e., rótulos) a que pertencem os exemplos de entrada?</a:t>
+            </a:r>
+          </a:p>
+        </p:txBody>
+      </p:sp>
+      <p:pic>
+        <p:nvPicPr>
+          <p:cNvPr id="6" name="Picture 2" descr="K-Means Clustering using Python. Welcome back guys! Hope you had a great… |  by Luigi Fiori | Medium"/>
+          <p:cNvPicPr>
+            <a:picLocks noChangeAspect="1" noChangeArrowheads="1"/>
+          </p:cNvPicPr>
+          <p:nvPr/>
+        </p:nvPicPr>
+        <p:blipFill rotWithShape="1">
+          <a:blip r:embed="rId3">
+            <a:extLst>
+              <a:ext uri="{28A0092B-C50C-407E-A947-70E740481C1C}">
+                <a14:useLocalDpi xmlns:a14="http://schemas.microsoft.com/office/drawing/2010/main" val="0"/>
+              </a:ext>
+            </a:extLst>
+          </a:blip>
+          <a:srcRect l="1639" t="3709" r="55246" b="11854"/>
+          <a:stretch/>
+        </p:blipFill>
+        <p:spPr bwMode="auto">
+          <a:xfrm>
+            <a:off x="1090832" y="2101933"/>
+            <a:ext cx="3894188" cy="3177638"/>
+          </a:xfrm>
+          <a:prstGeom prst="rect">
+            <a:avLst/>
+          </a:prstGeom>
+          <a:noFill/>
+          <a:extLst>
+            <a:ext uri="{909E8E84-426E-40DD-AFC4-6F175D3DCCD1}">
+              <a14:hiddenFill xmlns:a14="http://schemas.microsoft.com/office/drawing/2010/main">
+                <a:solidFill>
+                  <a:srgbClr val="FFFFFF"/>
+                </a:solidFill>
+              </a14:hiddenFill>
+            </a:ext>
+          </a:extLst>
+        </p:spPr>
+      </p:pic>
+    </p:spTree>
+    <p:extLst>
+      <p:ext uri="{BB962C8B-B14F-4D97-AF65-F5344CB8AC3E}">
+        <p14:creationId xmlns:p14="http://schemas.microsoft.com/office/powerpoint/2010/main" val="1021130030"/>
+      </p:ext>
+    </p:extLst>
+  </p:cSld>
+  <p:clrMapOvr>
+    <a:masterClrMapping/>
+  </p:clrMapOvr>
+</p:sld>
+</file>
+
+<file path=ppt/slides/slide40.xml><?xml version="1.0" encoding="utf-8"?>
 <p:sld xmlns:a="http://schemas.openxmlformats.org/drawingml/2006/main" xmlns:r="http://schemas.openxmlformats.org/officeDocument/2006/relationships" xmlns:p="http://schemas.openxmlformats.org/presentationml/2006/main">
   <p:cSld>
     <p:spTree>
@@ -13688,126 +14098,6 @@
     <p:extLst>
       <p:ext uri="{BB962C8B-B14F-4D97-AF65-F5344CB8AC3E}">
         <p14:creationId xmlns:p14="http://schemas.microsoft.com/office/powerpoint/2010/main" val="3996790408"/>
-      </p:ext>
-    </p:extLst>
-  </p:cSld>
-  <p:clrMapOvr>
-    <a:masterClrMapping/>
-  </p:clrMapOvr>
-</p:sld>
-</file>
-
-<file path=ppt/slides/slide4.xml><?xml version="1.0" encoding="utf-8"?>
-<p:sld xmlns:a="http://schemas.openxmlformats.org/drawingml/2006/main" xmlns:r="http://schemas.openxmlformats.org/officeDocument/2006/relationships" xmlns:p="http://schemas.openxmlformats.org/presentationml/2006/main">
-  <p:cSld>
-    <p:spTree>
-      <p:nvGrpSpPr>
-        <p:cNvPr id="1" name=""/>
-        <p:cNvGrpSpPr/>
-        <p:nvPr/>
-      </p:nvGrpSpPr>
-      <p:grpSpPr>
-        <a:xfrm>
-          <a:off x="0" y="0"/>
-          <a:ext cx="0" cy="0"/>
-          <a:chOff x="0" y="0"/>
-          <a:chExt cx="0" cy="0"/>
-        </a:xfrm>
-      </p:grpSpPr>
-      <p:sp>
-        <p:nvSpPr>
-          <p:cNvPr id="2" name="Title 1"/>
-          <p:cNvSpPr>
-            <a:spLocks noGrp="1"/>
-          </p:cNvSpPr>
-          <p:nvPr>
-            <p:ph type="title"/>
-          </p:nvPr>
-        </p:nvSpPr>
-        <p:spPr/>
-        <p:txBody>
-          <a:bodyPr/>
-          <a:lstStyle/>
-          <a:p>
-            <a:r>
-              <a:rPr lang="pt-BR" dirty="0"/>
-              <a:t>Motivação</a:t>
-            </a:r>
-          </a:p>
-        </p:txBody>
-      </p:sp>
-      <p:sp>
-        <p:nvSpPr>
-          <p:cNvPr id="7" name="Content Placeholder 2"/>
-          <p:cNvSpPr>
-            <a:spLocks noGrp="1"/>
-          </p:cNvSpPr>
-          <p:nvPr>
-            <p:ph idx="1"/>
-          </p:nvPr>
-        </p:nvSpPr>
-        <p:spPr>
-          <a:xfrm>
-            <a:off x="5802087" y="1690688"/>
-            <a:ext cx="6240978" cy="5036683"/>
-          </a:xfrm>
-        </p:spPr>
-        <p:txBody>
-          <a:bodyPr>
-            <a:normAutofit/>
-          </a:bodyPr>
-          <a:lstStyle/>
-          <a:p>
-            <a:r>
-              <a:rPr lang="pt-BR" dirty="0"/>
-              <a:t>O que podemos fazer se não tivermos informações sobre as classes (i.e., rótulos) a que pertencem os exemplos de entrada?</a:t>
-            </a:r>
-          </a:p>
-        </p:txBody>
-      </p:sp>
-      <p:pic>
-        <p:nvPicPr>
-          <p:cNvPr id="6" name="Picture 2" descr="K-Means Clustering using Python. Welcome back guys! Hope you had a great… |  by Luigi Fiori | Medium"/>
-          <p:cNvPicPr>
-            <a:picLocks noChangeAspect="1" noChangeArrowheads="1"/>
-          </p:cNvPicPr>
-          <p:nvPr/>
-        </p:nvPicPr>
-        <p:blipFill rotWithShape="1">
-          <a:blip r:embed="rId3">
-            <a:extLst>
-              <a:ext uri="{28A0092B-C50C-407E-A947-70E740481C1C}">
-                <a14:useLocalDpi xmlns:a14="http://schemas.microsoft.com/office/drawing/2010/main" val="0"/>
-              </a:ext>
-            </a:extLst>
-          </a:blip>
-          <a:srcRect l="1639" t="3709" r="55246" b="11854"/>
-          <a:stretch/>
-        </p:blipFill>
-        <p:spPr bwMode="auto">
-          <a:xfrm>
-            <a:off x="1090832" y="2101933"/>
-            <a:ext cx="3894188" cy="3177638"/>
-          </a:xfrm>
-          <a:prstGeom prst="rect">
-            <a:avLst/>
-          </a:prstGeom>
-          <a:noFill/>
-          <a:extLst>
-            <a:ext uri="{909E8E84-426E-40DD-AFC4-6F175D3DCCD1}">
-              <a14:hiddenFill xmlns:a14="http://schemas.microsoft.com/office/drawing/2010/main">
-                <a:solidFill>
-                  <a:srgbClr val="FFFFFF"/>
-                </a:solidFill>
-              </a14:hiddenFill>
-            </a:ext>
-          </a:extLst>
-        </p:spPr>
-      </p:pic>
-    </p:spTree>
-    <p:extLst>
-      <p:ext uri="{BB962C8B-B14F-4D97-AF65-F5344CB8AC3E}">
-        <p14:creationId xmlns:p14="http://schemas.microsoft.com/office/powerpoint/2010/main" val="1021130030"/>
       </p:ext>
     </p:extLst>
   </p:cSld>

--- a/slides/C24_kMeans.pptx
+++ b/slides/C24_kMeans.pptx
@@ -5,7 +5,7 @@
     <p:sldMasterId id="2147483648" r:id="rId1"/>
   </p:sldMasterIdLst>
   <p:notesMasterIdLst>
-    <p:notesMasterId r:id="rId42"/>
+    <p:notesMasterId r:id="rId43"/>
   </p:notesMasterIdLst>
   <p:sldIdLst>
     <p:sldId id="256" r:id="rId2"/>
@@ -16,38 +16,39 @@
     <p:sldId id="286" r:id="rId7"/>
     <p:sldId id="285" r:id="rId8"/>
     <p:sldId id="401" r:id="rId9"/>
-    <p:sldId id="287" r:id="rId10"/>
-    <p:sldId id="400" r:id="rId11"/>
-    <p:sldId id="296" r:id="rId12"/>
-    <p:sldId id="413" r:id="rId13"/>
-    <p:sldId id="414" r:id="rId14"/>
-    <p:sldId id="415" r:id="rId15"/>
-    <p:sldId id="298" r:id="rId16"/>
-    <p:sldId id="290" r:id="rId17"/>
-    <p:sldId id="291" r:id="rId18"/>
-    <p:sldId id="417" r:id="rId19"/>
-    <p:sldId id="404" r:id="rId20"/>
-    <p:sldId id="405" r:id="rId21"/>
-    <p:sldId id="406" r:id="rId22"/>
-    <p:sldId id="407" r:id="rId23"/>
-    <p:sldId id="408" r:id="rId24"/>
-    <p:sldId id="409" r:id="rId25"/>
-    <p:sldId id="410" r:id="rId26"/>
-    <p:sldId id="292" r:id="rId27"/>
-    <p:sldId id="299" r:id="rId28"/>
-    <p:sldId id="419" r:id="rId29"/>
-    <p:sldId id="420" r:id="rId30"/>
-    <p:sldId id="421" r:id="rId31"/>
-    <p:sldId id="422" r:id="rId32"/>
-    <p:sldId id="423" r:id="rId33"/>
-    <p:sldId id="424" r:id="rId34"/>
-    <p:sldId id="398" r:id="rId35"/>
-    <p:sldId id="425" r:id="rId36"/>
-    <p:sldId id="338" r:id="rId37"/>
-    <p:sldId id="395" r:id="rId38"/>
-    <p:sldId id="396" r:id="rId39"/>
-    <p:sldId id="306" r:id="rId40"/>
-    <p:sldId id="265" r:id="rId41"/>
+    <p:sldId id="426" r:id="rId10"/>
+    <p:sldId id="287" r:id="rId11"/>
+    <p:sldId id="400" r:id="rId12"/>
+    <p:sldId id="296" r:id="rId13"/>
+    <p:sldId id="413" r:id="rId14"/>
+    <p:sldId id="414" r:id="rId15"/>
+    <p:sldId id="415" r:id="rId16"/>
+    <p:sldId id="298" r:id="rId17"/>
+    <p:sldId id="290" r:id="rId18"/>
+    <p:sldId id="291" r:id="rId19"/>
+    <p:sldId id="417" r:id="rId20"/>
+    <p:sldId id="404" r:id="rId21"/>
+    <p:sldId id="405" r:id="rId22"/>
+    <p:sldId id="406" r:id="rId23"/>
+    <p:sldId id="407" r:id="rId24"/>
+    <p:sldId id="408" r:id="rId25"/>
+    <p:sldId id="409" r:id="rId26"/>
+    <p:sldId id="410" r:id="rId27"/>
+    <p:sldId id="292" r:id="rId28"/>
+    <p:sldId id="299" r:id="rId29"/>
+    <p:sldId id="419" r:id="rId30"/>
+    <p:sldId id="420" r:id="rId31"/>
+    <p:sldId id="421" r:id="rId32"/>
+    <p:sldId id="422" r:id="rId33"/>
+    <p:sldId id="423" r:id="rId34"/>
+    <p:sldId id="424" r:id="rId35"/>
+    <p:sldId id="398" r:id="rId36"/>
+    <p:sldId id="425" r:id="rId37"/>
+    <p:sldId id="338" r:id="rId38"/>
+    <p:sldId id="395" r:id="rId39"/>
+    <p:sldId id="396" r:id="rId40"/>
+    <p:sldId id="306" r:id="rId41"/>
+    <p:sldId id="265" r:id="rId42"/>
   </p:sldIdLst>
   <p:sldSz cx="12192000" cy="6858000"/>
   <p:notesSz cx="6858000" cy="9144000"/>
@@ -236,7 +237,7 @@
           <a:p>
             <a:fld id="{C3C82C08-3EFC-4473-8294-F0E229C19EFF}" type="datetimeFigureOut">
               <a:rPr lang="pt-BR" smtClean="0"/>
-              <a:t>10/04/2026</a:t>
+              <a:t>01/06/2026</a:t>
             </a:fld>
             <a:endParaRPr lang="pt-BR"/>
           </a:p>
@@ -395,7 +396,7 @@
           <a:p>
             <a:fld id="{F430A2A4-8C14-4B1A-AD48-7B6401078BF7}" type="slidenum">
               <a:rPr lang="pt-BR" smtClean="0"/>
-              <a:t>‹#›</a:t>
+              <a:t>‹nº›</a:t>
             </a:fld>
             <a:endParaRPr lang="pt-BR"/>
           </a:p>
@@ -614,7 +615,7 @@
       </p:grpSpPr>
       <p:sp>
         <p:nvSpPr>
-          <p:cNvPr id="2" name="Slide Image Placeholder 1"/>
+          <p:cNvPr id="2" name="Espaço Reservado para Imagem de Slide 1"/>
           <p:cNvSpPr>
             <a:spLocks noGrp="1" noRot="1" noChangeAspect="1"/>
           </p:cNvSpPr>
@@ -626,7 +627,7 @@
       </p:sp>
       <p:sp>
         <p:nvSpPr>
-          <p:cNvPr id="3" name="Notes Placeholder 2"/>
+          <p:cNvPr id="3" name="Espaço Reservado para Anotações 2"/>
           <p:cNvSpPr>
             <a:spLocks noGrp="1"/>
           </p:cNvSpPr>
@@ -639,13 +640,383 @@
           <a:bodyPr/>
           <a:lstStyle/>
           <a:p>
-            <a:endParaRPr lang="en-US" dirty="0"/>
+            <a:r>
+              <a:rPr lang="pt-BR" dirty="0"/>
+              <a:t>O K-</a:t>
+            </a:r>
+            <a:r>
+              <a:rPr lang="pt-BR" dirty="0" err="1"/>
+              <a:t>Means</a:t>
+            </a:r>
+            <a:r>
+              <a:rPr lang="pt-BR" dirty="0"/>
+              <a:t> encerra o treinamento com base em </a:t>
+            </a:r>
+            <a:r>
+              <a:rPr lang="pt-BR" b="1" dirty="0"/>
+              <a:t>critérios de convergência</a:t>
+            </a:r>
+            <a:r>
+              <a:rPr lang="pt-BR" dirty="0"/>
+              <a:t> que indicam quando o algoritmo atingiu um estado estável ou suficiente para parar. Esses critérios incluem:</a:t>
+            </a:r>
+          </a:p>
+          <a:p>
+            <a:r>
+              <a:rPr lang="pt-BR" b="1" dirty="0"/>
+              <a:t>1. Estabilização dos Centroides</a:t>
+            </a:r>
+          </a:p>
+          <a:p>
+            <a:pPr>
+              <a:buFont typeface="Arial" panose="020B0604020202020204" pitchFamily="34" charset="0"/>
+              <a:buChar char="•"/>
+            </a:pPr>
+            <a:r>
+              <a:rPr lang="pt-BR" dirty="0"/>
+              <a:t>O algoritmo para quando os </a:t>
+            </a:r>
+            <a:r>
+              <a:rPr lang="pt-BR" b="1" dirty="0"/>
+              <a:t>centroides não se movem mais significativamente</a:t>
+            </a:r>
+            <a:r>
+              <a:rPr lang="pt-BR" dirty="0"/>
+              <a:t> entre iterações.</a:t>
+            </a:r>
+          </a:p>
+          <a:p>
+            <a:pPr>
+              <a:buFont typeface="Arial" panose="020B0604020202020204" pitchFamily="34" charset="0"/>
+              <a:buChar char="•"/>
+            </a:pPr>
+            <a:r>
+              <a:rPr lang="pt-BR" dirty="0"/>
+              <a:t>Concretamente, isso significa que os deslocamentos dos centroides são menores que um limite pré-definido (ϵ\</a:t>
+            </a:r>
+            <a:r>
+              <a:rPr lang="pt-BR" dirty="0" err="1"/>
+              <a:t>epsilon</a:t>
+            </a:r>
+            <a:r>
+              <a:rPr lang="pt-BR" dirty="0"/>
+              <a:t>).</a:t>
+            </a:r>
+          </a:p>
+          <a:p>
+            <a:r>
+              <a:rPr lang="pt-BR" dirty="0"/>
+              <a:t>∥novo centroide−antigo centroide∥&lt;ϵ\|\</a:t>
+            </a:r>
+            <a:r>
+              <a:rPr lang="pt-BR" dirty="0" err="1"/>
+              <a:t>text</a:t>
+            </a:r>
+            <a:r>
+              <a:rPr lang="pt-BR" dirty="0"/>
+              <a:t>{novo centroide} - \</a:t>
+            </a:r>
+            <a:r>
+              <a:rPr lang="pt-BR" dirty="0" err="1"/>
+              <a:t>text</a:t>
+            </a:r>
+            <a:r>
+              <a:rPr lang="pt-BR" dirty="0"/>
+              <a:t>{antigo centroide}\| &lt; \</a:t>
+            </a:r>
+            <a:r>
+              <a:rPr lang="pt-BR" dirty="0" err="1"/>
+              <a:t>epsilon</a:t>
+            </a:r>
+            <a:r>
+              <a:rPr lang="pt-BR" dirty="0"/>
+              <a:t> </a:t>
+            </a:r>
+            <a:r>
+              <a:rPr lang="pt-BR" b="1" dirty="0"/>
+              <a:t>2. Estabilização das Atribuições de Cluster</a:t>
+            </a:r>
+          </a:p>
+          <a:p>
+            <a:pPr>
+              <a:buFont typeface="Arial" panose="020B0604020202020204" pitchFamily="34" charset="0"/>
+              <a:buChar char="•"/>
+            </a:pPr>
+            <a:r>
+              <a:rPr lang="pt-BR" dirty="0"/>
+              <a:t>Se os pontos não mudarem de cluster entre iterações, o K-</a:t>
+            </a:r>
+            <a:r>
+              <a:rPr lang="pt-BR" dirty="0" err="1"/>
+              <a:t>Means</a:t>
+            </a:r>
+            <a:r>
+              <a:rPr lang="pt-BR" dirty="0"/>
+              <a:t> considera que atingiu a convergência.</a:t>
+            </a:r>
+          </a:p>
+          <a:p>
+            <a:r>
+              <a:rPr lang="pt-BR" b="1" dirty="0"/>
+              <a:t>3. Número Máximo de Iterações</a:t>
+            </a:r>
+          </a:p>
+          <a:p>
+            <a:pPr>
+              <a:buFont typeface="Arial" panose="020B0604020202020204" pitchFamily="34" charset="0"/>
+              <a:buChar char="•"/>
+            </a:pPr>
+            <a:r>
+              <a:rPr lang="pt-BR" dirty="0"/>
+              <a:t>Um limite máximo de iterações pode ser imposto (</a:t>
+            </a:r>
+            <a:r>
+              <a:rPr lang="pt-BR" dirty="0" err="1"/>
+              <a:t>max_itermax</a:t>
+            </a:r>
+            <a:r>
+              <a:rPr lang="pt-BR" dirty="0"/>
+              <a:t>\_iter) para evitar que o algoritmo continue indefinidamente, especialmente em casos em que a convergência é difícil de alcançar.</a:t>
+            </a:r>
+          </a:p>
+          <a:p>
+            <a:r>
+              <a:rPr lang="pt-BR" b="1" dirty="0"/>
+              <a:t>4. Convergência da Função Objetivo</a:t>
+            </a:r>
+          </a:p>
+          <a:p>
+            <a:pPr>
+              <a:buFont typeface="Arial" panose="020B0604020202020204" pitchFamily="34" charset="0"/>
+              <a:buChar char="•"/>
+            </a:pPr>
+            <a:r>
+              <a:rPr lang="pt-BR" dirty="0"/>
+              <a:t>O algoritmo minimiza a </a:t>
+            </a:r>
+            <a:r>
+              <a:rPr lang="pt-BR" b="1" dirty="0"/>
+              <a:t>soma dos erros quadráticos </a:t>
+            </a:r>
+            <a:r>
+              <a:rPr lang="pt-BR" b="1" dirty="0" err="1"/>
+              <a:t>intra-cluster</a:t>
+            </a:r>
+            <a:r>
+              <a:rPr lang="pt-BR" b="1" dirty="0"/>
+              <a:t> (WSS)</a:t>
+            </a:r>
+            <a:r>
+              <a:rPr lang="pt-BR" dirty="0"/>
+              <a:t>, definida como:</a:t>
+            </a:r>
+          </a:p>
+          <a:p>
+            <a:pPr>
+              <a:buFont typeface="Arial" panose="020B0604020202020204" pitchFamily="34" charset="0"/>
+              <a:buChar char="•"/>
+            </a:pPr>
+            <a:r>
+              <a:rPr lang="pt-BR" dirty="0"/>
+              <a:t>WSS=∑i=1k∑x∈Ci∥x−μi∥2\</a:t>
+            </a:r>
+            <a:r>
+              <a:rPr lang="pt-BR" dirty="0" err="1"/>
+              <a:t>text</a:t>
+            </a:r>
+            <a:r>
+              <a:rPr lang="pt-BR" dirty="0"/>
+              <a:t>{WSS} = \sum_{i=1}^{k} \sum_{x \in </a:t>
+            </a:r>
+            <a:r>
+              <a:rPr lang="pt-BR" dirty="0" err="1"/>
+              <a:t>C_i</a:t>
+            </a:r>
+            <a:r>
+              <a:rPr lang="pt-BR" dirty="0"/>
+              <a:t>} \|\</a:t>
+            </a:r>
+            <a:r>
+              <a:rPr lang="pt-BR" dirty="0" err="1"/>
+              <a:t>mathbf</a:t>
+            </a:r>
+            <a:r>
+              <a:rPr lang="pt-BR" dirty="0"/>
+              <a:t>{x} - \</a:t>
+            </a:r>
+            <a:r>
+              <a:rPr lang="pt-BR" dirty="0" err="1"/>
+              <a:t>mu_i</a:t>
+            </a:r>
+            <a:r>
+              <a:rPr lang="pt-BR" dirty="0"/>
+              <a:t>\|^2 O K-</a:t>
+            </a:r>
+            <a:r>
+              <a:rPr lang="pt-BR" dirty="0" err="1"/>
+              <a:t>Means</a:t>
+            </a:r>
+            <a:r>
+              <a:rPr lang="pt-BR" dirty="0"/>
+              <a:t> para quando a redução no WSSWSS entre iterações consecutivas é menor que um limiar (Δ\Delta).</a:t>
+            </a:r>
+          </a:p>
+          <a:p>
+            <a:r>
+              <a:rPr lang="pt-BR" b="1" dirty="0"/>
+              <a:t>Processo Geral:</a:t>
+            </a:r>
+          </a:p>
+          <a:p>
+            <a:pPr>
+              <a:buFont typeface="+mj-lt"/>
+              <a:buAutoNum type="arabicPeriod"/>
+            </a:pPr>
+            <a:r>
+              <a:rPr lang="pt-BR" b="1" dirty="0"/>
+              <a:t>Inicialização</a:t>
+            </a:r>
+            <a:r>
+              <a:rPr lang="pt-BR" dirty="0"/>
+              <a:t>: Escolher </a:t>
+            </a:r>
+            <a:r>
+              <a:rPr lang="pt-BR" dirty="0" err="1"/>
+              <a:t>kk</a:t>
+            </a:r>
+            <a:r>
+              <a:rPr lang="pt-BR" dirty="0"/>
+              <a:t> centroides iniciais (aleatoriamente ou por métodos como K-</a:t>
+            </a:r>
+            <a:r>
+              <a:rPr lang="pt-BR" dirty="0" err="1"/>
+              <a:t>Means</a:t>
+            </a:r>
+            <a:r>
+              <a:rPr lang="pt-BR" dirty="0"/>
+              <a:t>++).</a:t>
+            </a:r>
+          </a:p>
+          <a:p>
+            <a:pPr>
+              <a:buFont typeface="+mj-lt"/>
+              <a:buAutoNum type="arabicPeriod"/>
+            </a:pPr>
+            <a:r>
+              <a:rPr lang="pt-BR" b="1" dirty="0"/>
+              <a:t>Passo de Atribuição</a:t>
+            </a:r>
+            <a:r>
+              <a:rPr lang="pt-BR" dirty="0"/>
+              <a:t>: Atribuir cada ponto ao cluster mais próximo (com base na distância, normalmente Euclidiana).</a:t>
+            </a:r>
+          </a:p>
+          <a:p>
+            <a:pPr>
+              <a:buFont typeface="+mj-lt"/>
+              <a:buAutoNum type="arabicPeriod"/>
+            </a:pPr>
+            <a:r>
+              <a:rPr lang="pt-BR" b="1" dirty="0"/>
+              <a:t>Passo de Atualização</a:t>
+            </a:r>
+            <a:r>
+              <a:rPr lang="pt-BR" dirty="0"/>
+              <a:t>: Recalcular os centroides como a média dos pontos atribuídos a cada cluster.</a:t>
+            </a:r>
+          </a:p>
+          <a:p>
+            <a:pPr>
+              <a:buFont typeface="+mj-lt"/>
+              <a:buAutoNum type="arabicPeriod"/>
+            </a:pPr>
+            <a:r>
+              <a:rPr lang="pt-BR" b="1" dirty="0"/>
+              <a:t>Verificação do Critério de Parada</a:t>
+            </a:r>
+            <a:r>
+              <a:rPr lang="pt-BR" dirty="0"/>
+              <a:t>: Verificar se algum dos critérios acima foi atendido. Caso contrário, repetir os passos 2 e 3.</a:t>
+            </a:r>
+          </a:p>
+          <a:p>
+            <a:r>
+              <a:rPr lang="pt-BR" b="1" dirty="0"/>
+              <a:t>Convergência e Garantias</a:t>
+            </a:r>
+          </a:p>
+          <a:p>
+            <a:pPr>
+              <a:buFont typeface="Arial" panose="020B0604020202020204" pitchFamily="34" charset="0"/>
+              <a:buChar char="•"/>
+            </a:pPr>
+            <a:r>
+              <a:rPr lang="pt-BR" dirty="0"/>
+              <a:t>O K-</a:t>
+            </a:r>
+            <a:r>
+              <a:rPr lang="pt-BR" dirty="0" err="1"/>
+              <a:t>Means</a:t>
+            </a:r>
+            <a:r>
+              <a:rPr lang="pt-BR" dirty="0"/>
+              <a:t> </a:t>
+            </a:r>
+            <a:r>
+              <a:rPr lang="pt-BR" b="1" dirty="0"/>
+              <a:t>sempre converge</a:t>
+            </a:r>
+            <a:r>
+              <a:rPr lang="pt-BR" dirty="0"/>
+              <a:t>, mas pode parar em mínimos locais (não garante o ótimo global).</a:t>
+            </a:r>
+          </a:p>
+          <a:p>
+            <a:pPr>
+              <a:buFont typeface="Arial" panose="020B0604020202020204" pitchFamily="34" charset="0"/>
+              <a:buChar char="•"/>
+            </a:pPr>
+            <a:r>
+              <a:rPr lang="pt-BR" dirty="0"/>
+              <a:t>Para melhorar a convergência, pode-se: </a:t>
+            </a:r>
+          </a:p>
+          <a:p>
+            <a:pPr marL="742950" lvl="1" indent="-285750">
+              <a:buFont typeface="Arial" panose="020B0604020202020204" pitchFamily="34" charset="0"/>
+              <a:buChar char="•"/>
+            </a:pPr>
+            <a:r>
+              <a:rPr lang="pt-BR" dirty="0"/>
+              <a:t>Usar inicialização inteligente (como K-</a:t>
+            </a:r>
+            <a:r>
+              <a:rPr lang="pt-BR" dirty="0" err="1"/>
+              <a:t>Means</a:t>
+            </a:r>
+            <a:r>
+              <a:rPr lang="pt-BR" dirty="0"/>
+              <a:t>++).</a:t>
+            </a:r>
+          </a:p>
+          <a:p>
+            <a:pPr marL="742950" lvl="1" indent="-285750">
+              <a:buFont typeface="Arial" panose="020B0604020202020204" pitchFamily="34" charset="0"/>
+              <a:buChar char="•"/>
+            </a:pPr>
+            <a:r>
+              <a:rPr lang="pt-BR" dirty="0"/>
+              <a:t>Executar o algoritmo várias vezes com diferentes inicializações e escolher o melhor resultado.</a:t>
+            </a:r>
+          </a:p>
+          <a:p>
+            <a:endParaRPr lang="pt-BR" dirty="0"/>
           </a:p>
         </p:txBody>
       </p:sp>
       <p:sp>
         <p:nvSpPr>
-          <p:cNvPr id="4" name="Slide Number Placeholder 3"/>
+          <p:cNvPr id="4" name="Espaço Reservado para Número de Slide 3"/>
           <p:cNvSpPr>
             <a:spLocks noGrp="1"/>
           </p:cNvSpPr>
@@ -660,7 +1031,7 @@
           <a:p>
             <a:fld id="{F430A2A4-8C14-4B1A-AD48-7B6401078BF7}" type="slidenum">
               <a:rPr lang="pt-BR" smtClean="0"/>
-              <a:t>27</a:t>
+              <a:t>18</a:t>
             </a:fld>
             <a:endParaRPr lang="pt-BR"/>
           </a:p>
@@ -669,7 +1040,7 @@
     </p:spTree>
     <p:extLst>
       <p:ext uri="{BB962C8B-B14F-4D97-AF65-F5344CB8AC3E}">
-        <p14:creationId xmlns:p14="http://schemas.microsoft.com/office/powerpoint/2010/main" val="26339951"/>
+        <p14:creationId xmlns:p14="http://schemas.microsoft.com/office/powerpoint/2010/main" val="3481659351"/>
       </p:ext>
     </p:extLst>
   </p:cSld>
@@ -744,7 +1115,7 @@
           <a:p>
             <a:fld id="{F430A2A4-8C14-4B1A-AD48-7B6401078BF7}" type="slidenum">
               <a:rPr lang="pt-BR" smtClean="0"/>
-              <a:t>31</a:t>
+              <a:t>28</a:t>
             </a:fld>
             <a:endParaRPr lang="pt-BR"/>
           </a:p>
@@ -753,7 +1124,7 @@
     </p:spTree>
     <p:extLst>
       <p:ext uri="{BB962C8B-B14F-4D97-AF65-F5344CB8AC3E}">
-        <p14:creationId xmlns:p14="http://schemas.microsoft.com/office/powerpoint/2010/main" val="1918560515"/>
+        <p14:creationId xmlns:p14="http://schemas.microsoft.com/office/powerpoint/2010/main" val="26339951"/>
       </p:ext>
     </p:extLst>
   </p:cSld>
@@ -828,7 +1199,7 @@
           <a:p>
             <a:fld id="{F430A2A4-8C14-4B1A-AD48-7B6401078BF7}" type="slidenum">
               <a:rPr lang="pt-BR" smtClean="0"/>
-              <a:t>34</a:t>
+              <a:t>32</a:t>
             </a:fld>
             <a:endParaRPr lang="pt-BR"/>
           </a:p>
@@ -837,7 +1208,7 @@
     </p:spTree>
     <p:extLst>
       <p:ext uri="{BB962C8B-B14F-4D97-AF65-F5344CB8AC3E}">
-        <p14:creationId xmlns:p14="http://schemas.microsoft.com/office/powerpoint/2010/main" val="3697094825"/>
+        <p14:creationId xmlns:p14="http://schemas.microsoft.com/office/powerpoint/2010/main" val="1918560515"/>
       </p:ext>
     </p:extLst>
   </p:cSld>
@@ -875,6 +1246,90 @@
           </p:nvPr>
         </p:nvSpPr>
         <p:spPr/>
+      </p:sp>
+      <p:sp>
+        <p:nvSpPr>
+          <p:cNvPr id="3" name="Notes Placeholder 2"/>
+          <p:cNvSpPr>
+            <a:spLocks noGrp="1"/>
+          </p:cNvSpPr>
+          <p:nvPr>
+            <p:ph type="body" idx="1"/>
+          </p:nvPr>
+        </p:nvSpPr>
+        <p:spPr/>
+        <p:txBody>
+          <a:bodyPr/>
+          <a:lstStyle/>
+          <a:p>
+            <a:endParaRPr lang="en-US" dirty="0"/>
+          </a:p>
+        </p:txBody>
+      </p:sp>
+      <p:sp>
+        <p:nvSpPr>
+          <p:cNvPr id="4" name="Slide Number Placeholder 3"/>
+          <p:cNvSpPr>
+            <a:spLocks noGrp="1"/>
+          </p:cNvSpPr>
+          <p:nvPr>
+            <p:ph type="sldNum" sz="quarter" idx="5"/>
+          </p:nvPr>
+        </p:nvSpPr>
+        <p:spPr/>
+        <p:txBody>
+          <a:bodyPr/>
+          <a:lstStyle/>
+          <a:p>
+            <a:fld id="{F430A2A4-8C14-4B1A-AD48-7B6401078BF7}" type="slidenum">
+              <a:rPr lang="pt-BR" smtClean="0"/>
+              <a:t>35</a:t>
+            </a:fld>
+            <a:endParaRPr lang="pt-BR"/>
+          </a:p>
+        </p:txBody>
+      </p:sp>
+    </p:spTree>
+    <p:extLst>
+      <p:ext uri="{BB962C8B-B14F-4D97-AF65-F5344CB8AC3E}">
+        <p14:creationId xmlns:p14="http://schemas.microsoft.com/office/powerpoint/2010/main" val="3697094825"/>
+      </p:ext>
+    </p:extLst>
+  </p:cSld>
+  <p:clrMapOvr>
+    <a:masterClrMapping/>
+  </p:clrMapOvr>
+</p:notes>
+</file>
+
+<file path=ppt/notesSlides/notesSlide14.xml><?xml version="1.0" encoding="utf-8"?>
+<p:notes xmlns:a="http://schemas.openxmlformats.org/drawingml/2006/main" xmlns:r="http://schemas.openxmlformats.org/officeDocument/2006/relationships" xmlns:p="http://schemas.openxmlformats.org/presentationml/2006/main">
+  <p:cSld>
+    <p:spTree>
+      <p:nvGrpSpPr>
+        <p:cNvPr id="1" name=""/>
+        <p:cNvGrpSpPr/>
+        <p:nvPr/>
+      </p:nvGrpSpPr>
+      <p:grpSpPr>
+        <a:xfrm>
+          <a:off x="0" y="0"/>
+          <a:ext cx="0" cy="0"/>
+          <a:chOff x="0" y="0"/>
+          <a:chExt cx="0" cy="0"/>
+        </a:xfrm>
+      </p:grpSpPr>
+      <p:sp>
+        <p:nvSpPr>
+          <p:cNvPr id="2" name="Slide Image Placeholder 1"/>
+          <p:cNvSpPr>
+            <a:spLocks noGrp="1" noRot="1" noChangeAspect="1"/>
+          </p:cNvSpPr>
+          <p:nvPr>
+            <p:ph type="sldImg"/>
+          </p:nvPr>
+        </p:nvSpPr>
+        <p:spPr/>
         <p:txBody>
           <a:bodyPr/>
           <a:lstStyle/>
@@ -939,7 +1394,7 @@
           <a:p>
             <a:fld id="{6FC8D850-966F-45A6-8DE7-15B891E7D40D}" type="slidenum">
               <a:rPr lang="pt-BR" smtClean="0"/>
-              <a:t>36</a:t>
+              <a:t>37</a:t>
             </a:fld>
             <a:endParaRPr lang="pt-BR"/>
           </a:p>
@@ -1978,7 +2433,13 @@
   <p:cSld>
     <p:spTree>
       <p:nvGrpSpPr>
-        <p:cNvPr id="1" name=""/>
+        <p:cNvPr id="1" name="">
+          <a:extLst>
+            <a:ext uri="{FF2B5EF4-FFF2-40B4-BE49-F238E27FC236}">
+              <a16:creationId xmlns:a16="http://schemas.microsoft.com/office/drawing/2014/main" id="{809F23C5-D79E-FEA4-B74E-098BF94B10DF}"/>
+            </a:ext>
+          </a:extLst>
+        </p:cNvPr>
         <p:cNvGrpSpPr/>
         <p:nvPr/>
       </p:nvGrpSpPr>
@@ -1992,7 +2453,13 @@
       </p:grpSpPr>
       <p:sp>
         <p:nvSpPr>
-          <p:cNvPr id="2" name="Espaço Reservado para Imagem de Slide 1"/>
+          <p:cNvPr id="2" name="Slide Image Placeholder 1">
+            <a:extLst>
+              <a:ext uri="{FF2B5EF4-FFF2-40B4-BE49-F238E27FC236}">
+                <a16:creationId xmlns:a16="http://schemas.microsoft.com/office/drawing/2014/main" id="{2D909D08-D934-578A-D3C6-F349020FC96B}"/>
+              </a:ext>
+            </a:extLst>
+          </p:cNvPr>
           <p:cNvSpPr>
             <a:spLocks noGrp="1" noRot="1" noChangeAspect="1"/>
           </p:cNvSpPr>
@@ -2004,7 +2471,13 @@
       </p:sp>
       <p:sp>
         <p:nvSpPr>
-          <p:cNvPr id="3" name="Espaço Reservado para Anotações 2"/>
+          <p:cNvPr id="3" name="Notes Placeholder 2">
+            <a:extLst>
+              <a:ext uri="{FF2B5EF4-FFF2-40B4-BE49-F238E27FC236}">
+                <a16:creationId xmlns:a16="http://schemas.microsoft.com/office/drawing/2014/main" id="{B854B9EF-FF47-6D40-8F4E-85E653BECF49}"/>
+              </a:ext>
+            </a:extLst>
+          </p:cNvPr>
           <p:cNvSpPr>
             <a:spLocks noGrp="1"/>
           </p:cNvSpPr>
@@ -2017,65 +2490,45 @@
           <a:bodyPr/>
           <a:lstStyle/>
           <a:p>
-            <a:pPr marL="0" marR="0" lvl="0" indent="0" algn="l" defTabSz="914400" rtl="0" eaLnBrk="1" fontAlgn="auto" latinLnBrk="0" hangingPunct="1">
-              <a:lnSpc>
-                <a:spcPct val="100000"/>
-              </a:lnSpc>
-              <a:spcBef>
-                <a:spcPts val="0"/>
-              </a:spcBef>
-              <a:spcAft>
-                <a:spcPts val="0"/>
-              </a:spcAft>
-              <a:buClrTx/>
-              <a:buSzTx/>
-              <a:buFontTx/>
-              <a:buNone/>
-              <a:tabLst/>
-              <a:defRPr/>
-            </a:pPr>
-            <a:r>
-              <a:rPr lang="pt-BR" dirty="0"/>
-              <a:t>Se os atributos forem numéricos, o </a:t>
-            </a:r>
-            <a:r>
-              <a:rPr lang="pt-BR" b="1" dirty="0">
-                <a:solidFill>
-                  <a:srgbClr val="7030A0"/>
-                </a:solidFill>
-              </a:rPr>
-              <a:t>centroide</a:t>
-            </a:r>
-            <a:r>
-              <a:rPr lang="pt-BR" dirty="0"/>
-              <a:t> é obtido através das </a:t>
-            </a:r>
-            <a:r>
-              <a:rPr lang="pt-BR" b="1" dirty="0">
-                <a:solidFill>
-                  <a:srgbClr val="00B050"/>
-                </a:solidFill>
-              </a:rPr>
-              <a:t>médias individuais dos atributos</a:t>
+            <a:r>
+              <a:rPr lang="pt-BR" b="1" dirty="0"/>
+              <a:t>Um outlier é uma observação anormal em relação ao conjunto de dados</a:t>
+            </a:r>
+            <a:r>
+              <a:rPr lang="pt-BR" dirty="0"/>
+              <a:t>, </a:t>
+            </a:r>
+          </a:p>
+          <a:p>
+            <a:endParaRPr lang="pt-BR" dirty="0"/>
+          </a:p>
+          <a:p>
+            <a:r>
+              <a:rPr lang="pt-BR" b="1" dirty="0"/>
+              <a:t>Um padrão raro pode representar um comportamento legítimo, porém pouco frequente</a:t>
             </a:r>
             <a:r>
               <a:rPr lang="pt-BR" dirty="0"/>
               <a:t>.</a:t>
             </a:r>
-          </a:p>
-          <a:p>
             <a:endParaRPr lang="en-US" dirty="0"/>
           </a:p>
         </p:txBody>
       </p:sp>
       <p:sp>
         <p:nvSpPr>
-          <p:cNvPr id="4" name="Espaço Reservado para Número de Slide 3"/>
+          <p:cNvPr id="4" name="Slide Number Placeholder 3">
+            <a:extLst>
+              <a:ext uri="{FF2B5EF4-FFF2-40B4-BE49-F238E27FC236}">
+                <a16:creationId xmlns:a16="http://schemas.microsoft.com/office/drawing/2014/main" id="{23CC5A4E-3D9D-7285-8F3F-C33B2C50E4A0}"/>
+              </a:ext>
+            </a:extLst>
+          </p:cNvPr>
           <p:cNvSpPr>
             <a:spLocks noGrp="1"/>
           </p:cNvSpPr>
           <p:nvPr>
-            <p:ph type="sldNum" sz="quarter" idx="10"/>
+            <p:ph type="sldNum" sz="quarter" idx="5"/>
           </p:nvPr>
         </p:nvSpPr>
         <p:spPr/>
@@ -2094,7 +2547,7 @@
     </p:spTree>
     <p:extLst>
       <p:ext uri="{BB962C8B-B14F-4D97-AF65-F5344CB8AC3E}">
-        <p14:creationId xmlns:p14="http://schemas.microsoft.com/office/powerpoint/2010/main" val="4076858274"/>
+        <p14:creationId xmlns:p14="http://schemas.microsoft.com/office/powerpoint/2010/main" val="1781426804"/>
       </p:ext>
     </p:extLst>
   </p:cSld>
@@ -2123,6 +2576,137 @@
       </p:grpSpPr>
       <p:sp>
         <p:nvSpPr>
+          <p:cNvPr id="2" name="Espaço Reservado para Imagem de Slide 1"/>
+          <p:cNvSpPr>
+            <a:spLocks noGrp="1" noRot="1" noChangeAspect="1"/>
+          </p:cNvSpPr>
+          <p:nvPr>
+            <p:ph type="sldImg"/>
+          </p:nvPr>
+        </p:nvSpPr>
+        <p:spPr/>
+      </p:sp>
+      <p:sp>
+        <p:nvSpPr>
+          <p:cNvPr id="3" name="Espaço Reservado para Anotações 2"/>
+          <p:cNvSpPr>
+            <a:spLocks noGrp="1"/>
+          </p:cNvSpPr>
+          <p:nvPr>
+            <p:ph type="body" idx="1"/>
+          </p:nvPr>
+        </p:nvSpPr>
+        <p:spPr/>
+        <p:txBody>
+          <a:bodyPr/>
+          <a:lstStyle/>
+          <a:p>
+            <a:pPr marL="0" marR="0" lvl="0" indent="0" algn="l" defTabSz="914400" rtl="0" eaLnBrk="1" fontAlgn="auto" latinLnBrk="0" hangingPunct="1">
+              <a:lnSpc>
+                <a:spcPct val="100000"/>
+              </a:lnSpc>
+              <a:spcBef>
+                <a:spcPts val="0"/>
+              </a:spcBef>
+              <a:spcAft>
+                <a:spcPts val="0"/>
+              </a:spcAft>
+              <a:buClrTx/>
+              <a:buSzTx/>
+              <a:buFontTx/>
+              <a:buNone/>
+              <a:tabLst/>
+              <a:defRPr/>
+            </a:pPr>
+            <a:r>
+              <a:rPr lang="pt-BR" dirty="0"/>
+              <a:t>Se os atributos forem numéricos, o </a:t>
+            </a:r>
+            <a:r>
+              <a:rPr lang="pt-BR" b="1" dirty="0">
+                <a:solidFill>
+                  <a:srgbClr val="7030A0"/>
+                </a:solidFill>
+              </a:rPr>
+              <a:t>centroide</a:t>
+            </a:r>
+            <a:r>
+              <a:rPr lang="pt-BR" dirty="0"/>
+              <a:t> é obtido através das </a:t>
+            </a:r>
+            <a:r>
+              <a:rPr lang="pt-BR" b="1" dirty="0">
+                <a:solidFill>
+                  <a:srgbClr val="00B050"/>
+                </a:solidFill>
+              </a:rPr>
+              <a:t>médias individuais dos atributos</a:t>
+            </a:r>
+            <a:r>
+              <a:rPr lang="pt-BR" dirty="0"/>
+              <a:t>.</a:t>
+            </a:r>
+          </a:p>
+          <a:p>
+            <a:endParaRPr lang="en-US" dirty="0"/>
+          </a:p>
+        </p:txBody>
+      </p:sp>
+      <p:sp>
+        <p:nvSpPr>
+          <p:cNvPr id="4" name="Espaço Reservado para Número de Slide 3"/>
+          <p:cNvSpPr>
+            <a:spLocks noGrp="1"/>
+          </p:cNvSpPr>
+          <p:nvPr>
+            <p:ph type="sldNum" sz="quarter" idx="10"/>
+          </p:nvPr>
+        </p:nvSpPr>
+        <p:spPr/>
+        <p:txBody>
+          <a:bodyPr/>
+          <a:lstStyle/>
+          <a:p>
+            <a:fld id="{F430A2A4-8C14-4B1A-AD48-7B6401078BF7}" type="slidenum">
+              <a:rPr lang="pt-BR" smtClean="0"/>
+              <a:t>10</a:t>
+            </a:fld>
+            <a:endParaRPr lang="pt-BR"/>
+          </a:p>
+        </p:txBody>
+      </p:sp>
+    </p:spTree>
+    <p:extLst>
+      <p:ext uri="{BB962C8B-B14F-4D97-AF65-F5344CB8AC3E}">
+        <p14:creationId xmlns:p14="http://schemas.microsoft.com/office/powerpoint/2010/main" val="4076858274"/>
+      </p:ext>
+    </p:extLst>
+  </p:cSld>
+  <p:clrMapOvr>
+    <a:masterClrMapping/>
+  </p:clrMapOvr>
+</p:notes>
+</file>
+
+<file path=ppt/notesSlides/notesSlide8.xml><?xml version="1.0" encoding="utf-8"?>
+<p:notes xmlns:a="http://schemas.openxmlformats.org/drawingml/2006/main" xmlns:r="http://schemas.openxmlformats.org/officeDocument/2006/relationships" xmlns:p="http://schemas.openxmlformats.org/presentationml/2006/main">
+  <p:cSld>
+    <p:spTree>
+      <p:nvGrpSpPr>
+        <p:cNvPr id="1" name=""/>
+        <p:cNvGrpSpPr/>
+        <p:nvPr/>
+      </p:nvGrpSpPr>
+      <p:grpSpPr>
+        <a:xfrm>
+          <a:off x="0" y="0"/>
+          <a:ext cx="0" cy="0"/>
+          <a:chOff x="0" y="0"/>
+          <a:chExt cx="0" cy="0"/>
+        </a:xfrm>
+      </p:grpSpPr>
+      <p:sp>
+        <p:nvSpPr>
           <p:cNvPr id="2" name="Slide Image Placeholder 1"/>
           <p:cNvSpPr>
             <a:spLocks noGrp="1" noRot="1" noChangeAspect="1"/>
@@ -2169,7 +2753,7 @@
           <a:p>
             <a:fld id="{F430A2A4-8C14-4B1A-AD48-7B6401078BF7}" type="slidenum">
               <a:rPr lang="pt-BR" smtClean="0"/>
-              <a:t>10</a:t>
+              <a:t>11</a:t>
             </a:fld>
             <a:endParaRPr lang="pt-BR"/>
           </a:p>
@@ -2188,7 +2772,7 @@
 </p:notes>
 </file>
 
-<file path=ppt/notesSlides/notesSlide8.xml><?xml version="1.0" encoding="utf-8"?>
+<file path=ppt/notesSlides/notesSlide9.xml><?xml version="1.0" encoding="utf-8"?>
 <p:notes xmlns:a="http://schemas.openxmlformats.org/drawingml/2006/main" xmlns:r="http://schemas.openxmlformats.org/officeDocument/2006/relationships" xmlns:p="http://schemas.openxmlformats.org/presentationml/2006/main">
   <p:cSld>
     <p:spTree>
@@ -2370,7 +2954,7 @@
           <a:p>
             <a:fld id="{F430A2A4-8C14-4B1A-AD48-7B6401078BF7}" type="slidenum">
               <a:rPr lang="pt-BR" smtClean="0"/>
-              <a:t>11</a:t>
+              <a:t>12</a:t>
             </a:fld>
             <a:endParaRPr lang="pt-BR"/>
           </a:p>
@@ -2380,460 +2964,6 @@
     <p:extLst>
       <p:ext uri="{BB962C8B-B14F-4D97-AF65-F5344CB8AC3E}">
         <p14:creationId xmlns:p14="http://schemas.microsoft.com/office/powerpoint/2010/main" val="2545804501"/>
-      </p:ext>
-    </p:extLst>
-  </p:cSld>
-  <p:clrMapOvr>
-    <a:masterClrMapping/>
-  </p:clrMapOvr>
-</p:notes>
-</file>
-
-<file path=ppt/notesSlides/notesSlide9.xml><?xml version="1.0" encoding="utf-8"?>
-<p:notes xmlns:a="http://schemas.openxmlformats.org/drawingml/2006/main" xmlns:r="http://schemas.openxmlformats.org/officeDocument/2006/relationships" xmlns:p="http://schemas.openxmlformats.org/presentationml/2006/main">
-  <p:cSld>
-    <p:spTree>
-      <p:nvGrpSpPr>
-        <p:cNvPr id="1" name=""/>
-        <p:cNvGrpSpPr/>
-        <p:nvPr/>
-      </p:nvGrpSpPr>
-      <p:grpSpPr>
-        <a:xfrm>
-          <a:off x="0" y="0"/>
-          <a:ext cx="0" cy="0"/>
-          <a:chOff x="0" y="0"/>
-          <a:chExt cx="0" cy="0"/>
-        </a:xfrm>
-      </p:grpSpPr>
-      <p:sp>
-        <p:nvSpPr>
-          <p:cNvPr id="2" name="Espaço Reservado para Imagem de Slide 1"/>
-          <p:cNvSpPr>
-            <a:spLocks noGrp="1" noRot="1" noChangeAspect="1"/>
-          </p:cNvSpPr>
-          <p:nvPr>
-            <p:ph type="sldImg"/>
-          </p:nvPr>
-        </p:nvSpPr>
-        <p:spPr/>
-      </p:sp>
-      <p:sp>
-        <p:nvSpPr>
-          <p:cNvPr id="3" name="Espaço Reservado para Anotações 2"/>
-          <p:cNvSpPr>
-            <a:spLocks noGrp="1"/>
-          </p:cNvSpPr>
-          <p:nvPr>
-            <p:ph type="body" idx="1"/>
-          </p:nvPr>
-        </p:nvSpPr>
-        <p:spPr/>
-        <p:txBody>
-          <a:bodyPr/>
-          <a:lstStyle/>
-          <a:p>
-            <a:r>
-              <a:rPr lang="pt-BR" dirty="0"/>
-              <a:t>O K-</a:t>
-            </a:r>
-            <a:r>
-              <a:rPr lang="pt-BR" dirty="0" err="1"/>
-              <a:t>Means</a:t>
-            </a:r>
-            <a:r>
-              <a:rPr lang="pt-BR" dirty="0"/>
-              <a:t> encerra o treinamento com base em </a:t>
-            </a:r>
-            <a:r>
-              <a:rPr lang="pt-BR" b="1" dirty="0"/>
-              <a:t>critérios de convergência</a:t>
-            </a:r>
-            <a:r>
-              <a:rPr lang="pt-BR" dirty="0"/>
-              <a:t> que indicam quando o algoritmo atingiu um estado estável ou suficiente para parar. Esses critérios incluem:</a:t>
-            </a:r>
-          </a:p>
-          <a:p>
-            <a:r>
-              <a:rPr lang="pt-BR" b="1" dirty="0"/>
-              <a:t>1. Estabilização dos Centroides</a:t>
-            </a:r>
-          </a:p>
-          <a:p>
-            <a:pPr>
-              <a:buFont typeface="Arial" panose="020B0604020202020204" pitchFamily="34" charset="0"/>
-              <a:buChar char="•"/>
-            </a:pPr>
-            <a:r>
-              <a:rPr lang="pt-BR" dirty="0"/>
-              <a:t>O algoritmo para quando os </a:t>
-            </a:r>
-            <a:r>
-              <a:rPr lang="pt-BR" b="1" dirty="0"/>
-              <a:t>centroides não se movem mais significativamente</a:t>
-            </a:r>
-            <a:r>
-              <a:rPr lang="pt-BR" dirty="0"/>
-              <a:t> entre iterações.</a:t>
-            </a:r>
-          </a:p>
-          <a:p>
-            <a:pPr>
-              <a:buFont typeface="Arial" panose="020B0604020202020204" pitchFamily="34" charset="0"/>
-              <a:buChar char="•"/>
-            </a:pPr>
-            <a:r>
-              <a:rPr lang="pt-BR" dirty="0"/>
-              <a:t>Concretamente, isso significa que os deslocamentos dos centroides são menores que um limite pré-definido (ϵ\</a:t>
-            </a:r>
-            <a:r>
-              <a:rPr lang="pt-BR" dirty="0" err="1"/>
-              <a:t>epsilon</a:t>
-            </a:r>
-            <a:r>
-              <a:rPr lang="pt-BR" dirty="0"/>
-              <a:t>).</a:t>
-            </a:r>
-          </a:p>
-          <a:p>
-            <a:r>
-              <a:rPr lang="pt-BR" dirty="0"/>
-              <a:t>∥novo centroide−antigo centroide∥&lt;ϵ\|\</a:t>
-            </a:r>
-            <a:r>
-              <a:rPr lang="pt-BR" dirty="0" err="1"/>
-              <a:t>text</a:t>
-            </a:r>
-            <a:r>
-              <a:rPr lang="pt-BR" dirty="0"/>
-              <a:t>{novo centroide} - \</a:t>
-            </a:r>
-            <a:r>
-              <a:rPr lang="pt-BR" dirty="0" err="1"/>
-              <a:t>text</a:t>
-            </a:r>
-            <a:r>
-              <a:rPr lang="pt-BR" dirty="0"/>
-              <a:t>{antigo centroide}\| &lt; \</a:t>
-            </a:r>
-            <a:r>
-              <a:rPr lang="pt-BR" dirty="0" err="1"/>
-              <a:t>epsilon</a:t>
-            </a:r>
-            <a:r>
-              <a:rPr lang="pt-BR" dirty="0"/>
-              <a:t> </a:t>
-            </a:r>
-            <a:r>
-              <a:rPr lang="pt-BR" b="1" dirty="0"/>
-              <a:t>2. Estabilização das Atribuições de Cluster</a:t>
-            </a:r>
-          </a:p>
-          <a:p>
-            <a:pPr>
-              <a:buFont typeface="Arial" panose="020B0604020202020204" pitchFamily="34" charset="0"/>
-              <a:buChar char="•"/>
-            </a:pPr>
-            <a:r>
-              <a:rPr lang="pt-BR" dirty="0"/>
-              <a:t>Se os pontos não mudarem de cluster entre iterações, o K-</a:t>
-            </a:r>
-            <a:r>
-              <a:rPr lang="pt-BR" dirty="0" err="1"/>
-              <a:t>Means</a:t>
-            </a:r>
-            <a:r>
-              <a:rPr lang="pt-BR" dirty="0"/>
-              <a:t> considera que atingiu a convergência.</a:t>
-            </a:r>
-          </a:p>
-          <a:p>
-            <a:r>
-              <a:rPr lang="pt-BR" b="1" dirty="0"/>
-              <a:t>3. Número Máximo de Iterações</a:t>
-            </a:r>
-          </a:p>
-          <a:p>
-            <a:pPr>
-              <a:buFont typeface="Arial" panose="020B0604020202020204" pitchFamily="34" charset="0"/>
-              <a:buChar char="•"/>
-            </a:pPr>
-            <a:r>
-              <a:rPr lang="pt-BR" dirty="0"/>
-              <a:t>Um limite máximo de iterações pode ser imposto (</a:t>
-            </a:r>
-            <a:r>
-              <a:rPr lang="pt-BR" dirty="0" err="1"/>
-              <a:t>max_itermax</a:t>
-            </a:r>
-            <a:r>
-              <a:rPr lang="pt-BR" dirty="0"/>
-              <a:t>\_iter) para evitar que o algoritmo continue indefinidamente, especialmente em casos em que a convergência é difícil de alcançar.</a:t>
-            </a:r>
-          </a:p>
-          <a:p>
-            <a:r>
-              <a:rPr lang="pt-BR" b="1" dirty="0"/>
-              <a:t>4. Convergência da Função Objetivo</a:t>
-            </a:r>
-          </a:p>
-          <a:p>
-            <a:pPr>
-              <a:buFont typeface="Arial" panose="020B0604020202020204" pitchFamily="34" charset="0"/>
-              <a:buChar char="•"/>
-            </a:pPr>
-            <a:r>
-              <a:rPr lang="pt-BR" dirty="0"/>
-              <a:t>O algoritmo minimiza a </a:t>
-            </a:r>
-            <a:r>
-              <a:rPr lang="pt-BR" b="1" dirty="0"/>
-              <a:t>soma dos erros quadráticos </a:t>
-            </a:r>
-            <a:r>
-              <a:rPr lang="pt-BR" b="1" dirty="0" err="1"/>
-              <a:t>intra-cluster</a:t>
-            </a:r>
-            <a:r>
-              <a:rPr lang="pt-BR" b="1" dirty="0"/>
-              <a:t> (WSS)</a:t>
-            </a:r>
-            <a:r>
-              <a:rPr lang="pt-BR" dirty="0"/>
-              <a:t>, definida como:</a:t>
-            </a:r>
-          </a:p>
-          <a:p>
-            <a:pPr>
-              <a:buFont typeface="Arial" panose="020B0604020202020204" pitchFamily="34" charset="0"/>
-              <a:buChar char="•"/>
-            </a:pPr>
-            <a:r>
-              <a:rPr lang="pt-BR" dirty="0"/>
-              <a:t>WSS=∑i=1k∑x∈Ci∥x−μi∥2\</a:t>
-            </a:r>
-            <a:r>
-              <a:rPr lang="pt-BR" dirty="0" err="1"/>
-              <a:t>text</a:t>
-            </a:r>
-            <a:r>
-              <a:rPr lang="pt-BR" dirty="0"/>
-              <a:t>{WSS} = \sum_{i=1}^{k} \sum_{x \in </a:t>
-            </a:r>
-            <a:r>
-              <a:rPr lang="pt-BR" dirty="0" err="1"/>
-              <a:t>C_i</a:t>
-            </a:r>
-            <a:r>
-              <a:rPr lang="pt-BR" dirty="0"/>
-              <a:t>} \|\</a:t>
-            </a:r>
-            <a:r>
-              <a:rPr lang="pt-BR" dirty="0" err="1"/>
-              <a:t>mathbf</a:t>
-            </a:r>
-            <a:r>
-              <a:rPr lang="pt-BR" dirty="0"/>
-              <a:t>{x} - \</a:t>
-            </a:r>
-            <a:r>
-              <a:rPr lang="pt-BR" dirty="0" err="1"/>
-              <a:t>mu_i</a:t>
-            </a:r>
-            <a:r>
-              <a:rPr lang="pt-BR" dirty="0"/>
-              <a:t>\|^2 O K-</a:t>
-            </a:r>
-            <a:r>
-              <a:rPr lang="pt-BR" dirty="0" err="1"/>
-              <a:t>Means</a:t>
-            </a:r>
-            <a:r>
-              <a:rPr lang="pt-BR" dirty="0"/>
-              <a:t> para quando a redução no WSSWSS entre iterações consecutivas é menor que um limiar (Δ\Delta).</a:t>
-            </a:r>
-          </a:p>
-          <a:p>
-            <a:r>
-              <a:rPr lang="pt-BR" b="1" dirty="0"/>
-              <a:t>Processo Geral:</a:t>
-            </a:r>
-          </a:p>
-          <a:p>
-            <a:pPr>
-              <a:buFont typeface="+mj-lt"/>
-              <a:buAutoNum type="arabicPeriod"/>
-            </a:pPr>
-            <a:r>
-              <a:rPr lang="pt-BR" b="1" dirty="0"/>
-              <a:t>Inicialização</a:t>
-            </a:r>
-            <a:r>
-              <a:rPr lang="pt-BR" dirty="0"/>
-              <a:t>: Escolher </a:t>
-            </a:r>
-            <a:r>
-              <a:rPr lang="pt-BR" dirty="0" err="1"/>
-              <a:t>kk</a:t>
-            </a:r>
-            <a:r>
-              <a:rPr lang="pt-BR" dirty="0"/>
-              <a:t> centroides iniciais (aleatoriamente ou por métodos como K-</a:t>
-            </a:r>
-            <a:r>
-              <a:rPr lang="pt-BR" dirty="0" err="1"/>
-              <a:t>Means</a:t>
-            </a:r>
-            <a:r>
-              <a:rPr lang="pt-BR" dirty="0"/>
-              <a:t>++).</a:t>
-            </a:r>
-          </a:p>
-          <a:p>
-            <a:pPr>
-              <a:buFont typeface="+mj-lt"/>
-              <a:buAutoNum type="arabicPeriod"/>
-            </a:pPr>
-            <a:r>
-              <a:rPr lang="pt-BR" b="1" dirty="0"/>
-              <a:t>Passo de Atribuição</a:t>
-            </a:r>
-            <a:r>
-              <a:rPr lang="pt-BR" dirty="0"/>
-              <a:t>: Atribuir cada ponto ao cluster mais próximo (com base na distância, normalmente Euclidiana).</a:t>
-            </a:r>
-          </a:p>
-          <a:p>
-            <a:pPr>
-              <a:buFont typeface="+mj-lt"/>
-              <a:buAutoNum type="arabicPeriod"/>
-            </a:pPr>
-            <a:r>
-              <a:rPr lang="pt-BR" b="1" dirty="0"/>
-              <a:t>Passo de Atualização</a:t>
-            </a:r>
-            <a:r>
-              <a:rPr lang="pt-BR" dirty="0"/>
-              <a:t>: Recalcular os centroides como a média dos pontos atribuídos a cada cluster.</a:t>
-            </a:r>
-          </a:p>
-          <a:p>
-            <a:pPr>
-              <a:buFont typeface="+mj-lt"/>
-              <a:buAutoNum type="arabicPeriod"/>
-            </a:pPr>
-            <a:r>
-              <a:rPr lang="pt-BR" b="1" dirty="0"/>
-              <a:t>Verificação do Critério de Parada</a:t>
-            </a:r>
-            <a:r>
-              <a:rPr lang="pt-BR" dirty="0"/>
-              <a:t>: Verificar se algum dos critérios acima foi atendido. Caso contrário, repetir os passos 2 e 3.</a:t>
-            </a:r>
-          </a:p>
-          <a:p>
-            <a:r>
-              <a:rPr lang="pt-BR" b="1" dirty="0"/>
-              <a:t>Convergência e Garantias</a:t>
-            </a:r>
-          </a:p>
-          <a:p>
-            <a:pPr>
-              <a:buFont typeface="Arial" panose="020B0604020202020204" pitchFamily="34" charset="0"/>
-              <a:buChar char="•"/>
-            </a:pPr>
-            <a:r>
-              <a:rPr lang="pt-BR" dirty="0"/>
-              <a:t>O K-</a:t>
-            </a:r>
-            <a:r>
-              <a:rPr lang="pt-BR" dirty="0" err="1"/>
-              <a:t>Means</a:t>
-            </a:r>
-            <a:r>
-              <a:rPr lang="pt-BR" dirty="0"/>
-              <a:t> </a:t>
-            </a:r>
-            <a:r>
-              <a:rPr lang="pt-BR" b="1" dirty="0"/>
-              <a:t>sempre converge</a:t>
-            </a:r>
-            <a:r>
-              <a:rPr lang="pt-BR" dirty="0"/>
-              <a:t>, mas pode parar em mínimos locais (não garante o ótimo global).</a:t>
-            </a:r>
-          </a:p>
-          <a:p>
-            <a:pPr>
-              <a:buFont typeface="Arial" panose="020B0604020202020204" pitchFamily="34" charset="0"/>
-              <a:buChar char="•"/>
-            </a:pPr>
-            <a:r>
-              <a:rPr lang="pt-BR" dirty="0"/>
-              <a:t>Para melhorar a convergência, pode-se: </a:t>
-            </a:r>
-          </a:p>
-          <a:p>
-            <a:pPr marL="742950" lvl="1" indent="-285750">
-              <a:buFont typeface="Arial" panose="020B0604020202020204" pitchFamily="34" charset="0"/>
-              <a:buChar char="•"/>
-            </a:pPr>
-            <a:r>
-              <a:rPr lang="pt-BR" dirty="0"/>
-              <a:t>Usar inicialização inteligente (como K-</a:t>
-            </a:r>
-            <a:r>
-              <a:rPr lang="pt-BR" dirty="0" err="1"/>
-              <a:t>Means</a:t>
-            </a:r>
-            <a:r>
-              <a:rPr lang="pt-BR" dirty="0"/>
-              <a:t>++).</a:t>
-            </a:r>
-          </a:p>
-          <a:p>
-            <a:pPr marL="742950" lvl="1" indent="-285750">
-              <a:buFont typeface="Arial" panose="020B0604020202020204" pitchFamily="34" charset="0"/>
-              <a:buChar char="•"/>
-            </a:pPr>
-            <a:r>
-              <a:rPr lang="pt-BR" dirty="0"/>
-              <a:t>Executar o algoritmo várias vezes com diferentes inicializações e escolher o melhor resultado.</a:t>
-            </a:r>
-          </a:p>
-          <a:p>
-            <a:endParaRPr lang="pt-BR" dirty="0"/>
-          </a:p>
-        </p:txBody>
-      </p:sp>
-      <p:sp>
-        <p:nvSpPr>
-          <p:cNvPr id="4" name="Espaço Reservado para Número de Slide 3"/>
-          <p:cNvSpPr>
-            <a:spLocks noGrp="1"/>
-          </p:cNvSpPr>
-          <p:nvPr>
-            <p:ph type="sldNum" sz="quarter" idx="5"/>
-          </p:nvPr>
-        </p:nvSpPr>
-        <p:spPr/>
-        <p:txBody>
-          <a:bodyPr/>
-          <a:lstStyle/>
-          <a:p>
-            <a:fld id="{F430A2A4-8C14-4B1A-AD48-7B6401078BF7}" type="slidenum">
-              <a:rPr lang="pt-BR" smtClean="0"/>
-              <a:t>17</a:t>
-            </a:fld>
-            <a:endParaRPr lang="pt-BR"/>
-          </a:p>
-        </p:txBody>
-      </p:sp>
-    </p:spTree>
-    <p:extLst>
-      <p:ext uri="{BB962C8B-B14F-4D97-AF65-F5344CB8AC3E}">
-        <p14:creationId xmlns:p14="http://schemas.microsoft.com/office/powerpoint/2010/main" val="3481659351"/>
       </p:ext>
     </p:extLst>
   </p:cSld>
@@ -2974,7 +3104,7 @@
           <a:p>
             <a:fld id="{221D0464-8C8A-49C0-859F-777E51766A35}" type="datetimeFigureOut">
               <a:rPr lang="pt-BR" smtClean="0"/>
-              <a:t>10/04/2026</a:t>
+              <a:t>01/06/2026</a:t>
             </a:fld>
             <a:endParaRPr lang="pt-BR"/>
           </a:p>
@@ -3016,7 +3146,7 @@
           <a:p>
             <a:fld id="{5CB2E8FC-741C-4BF1-B071-7D772D706EF9}" type="slidenum">
               <a:rPr lang="pt-BR" smtClean="0"/>
-              <a:t>‹#›</a:t>
+              <a:t>‹nº›</a:t>
             </a:fld>
             <a:endParaRPr lang="pt-BR"/>
           </a:p>
@@ -3144,7 +3274,7 @@
           <a:p>
             <a:fld id="{221D0464-8C8A-49C0-859F-777E51766A35}" type="datetimeFigureOut">
               <a:rPr lang="pt-BR" smtClean="0"/>
-              <a:t>10/04/2026</a:t>
+              <a:t>01/06/2026</a:t>
             </a:fld>
             <a:endParaRPr lang="pt-BR"/>
           </a:p>
@@ -3186,7 +3316,7 @@
           <a:p>
             <a:fld id="{5CB2E8FC-741C-4BF1-B071-7D772D706EF9}" type="slidenum">
               <a:rPr lang="pt-BR" smtClean="0"/>
-              <a:t>‹#›</a:t>
+              <a:t>‹nº›</a:t>
             </a:fld>
             <a:endParaRPr lang="pt-BR"/>
           </a:p>
@@ -3324,7 +3454,7 @@
           <a:p>
             <a:fld id="{221D0464-8C8A-49C0-859F-777E51766A35}" type="datetimeFigureOut">
               <a:rPr lang="pt-BR" smtClean="0"/>
-              <a:t>10/04/2026</a:t>
+              <a:t>01/06/2026</a:t>
             </a:fld>
             <a:endParaRPr lang="pt-BR"/>
           </a:p>
@@ -3366,7 +3496,7 @@
           <a:p>
             <a:fld id="{5CB2E8FC-741C-4BF1-B071-7D772D706EF9}" type="slidenum">
               <a:rPr lang="pt-BR" smtClean="0"/>
-              <a:t>‹#›</a:t>
+              <a:t>‹nº›</a:t>
             </a:fld>
             <a:endParaRPr lang="pt-BR"/>
           </a:p>
@@ -3494,7 +3624,7 @@
           <a:p>
             <a:fld id="{221D0464-8C8A-49C0-859F-777E51766A35}" type="datetimeFigureOut">
               <a:rPr lang="pt-BR" smtClean="0"/>
-              <a:t>10/04/2026</a:t>
+              <a:t>01/06/2026</a:t>
             </a:fld>
             <a:endParaRPr lang="pt-BR"/>
           </a:p>
@@ -3536,7 +3666,7 @@
           <a:p>
             <a:fld id="{5CB2E8FC-741C-4BF1-B071-7D772D706EF9}" type="slidenum">
               <a:rPr lang="pt-BR" smtClean="0"/>
-              <a:t>‹#›</a:t>
+              <a:t>‹nº›</a:t>
             </a:fld>
             <a:endParaRPr lang="pt-BR"/>
           </a:p>
@@ -3740,7 +3870,7 @@
           <a:p>
             <a:fld id="{221D0464-8C8A-49C0-859F-777E51766A35}" type="datetimeFigureOut">
               <a:rPr lang="pt-BR" smtClean="0"/>
-              <a:t>10/04/2026</a:t>
+              <a:t>01/06/2026</a:t>
             </a:fld>
             <a:endParaRPr lang="pt-BR"/>
           </a:p>
@@ -3782,7 +3912,7 @@
           <a:p>
             <a:fld id="{5CB2E8FC-741C-4BF1-B071-7D772D706EF9}" type="slidenum">
               <a:rPr lang="pt-BR" smtClean="0"/>
-              <a:t>‹#›</a:t>
+              <a:t>‹nº›</a:t>
             </a:fld>
             <a:endParaRPr lang="pt-BR"/>
           </a:p>
@@ -3972,7 +4102,7 @@
           <a:p>
             <a:fld id="{221D0464-8C8A-49C0-859F-777E51766A35}" type="datetimeFigureOut">
               <a:rPr lang="pt-BR" smtClean="0"/>
-              <a:t>10/04/2026</a:t>
+              <a:t>01/06/2026</a:t>
             </a:fld>
             <a:endParaRPr lang="pt-BR"/>
           </a:p>
@@ -4014,7 +4144,7 @@
           <a:p>
             <a:fld id="{5CB2E8FC-741C-4BF1-B071-7D772D706EF9}" type="slidenum">
               <a:rPr lang="pt-BR" smtClean="0"/>
-              <a:t>‹#›</a:t>
+              <a:t>‹nº›</a:t>
             </a:fld>
             <a:endParaRPr lang="pt-BR"/>
           </a:p>
@@ -4339,7 +4469,7 @@
           <a:p>
             <a:fld id="{221D0464-8C8A-49C0-859F-777E51766A35}" type="datetimeFigureOut">
               <a:rPr lang="pt-BR" smtClean="0"/>
-              <a:t>10/04/2026</a:t>
+              <a:t>01/06/2026</a:t>
             </a:fld>
             <a:endParaRPr lang="pt-BR"/>
           </a:p>
@@ -4381,7 +4511,7 @@
           <a:p>
             <a:fld id="{5CB2E8FC-741C-4BF1-B071-7D772D706EF9}" type="slidenum">
               <a:rPr lang="pt-BR" smtClean="0"/>
-              <a:t>‹#›</a:t>
+              <a:t>‹nº›</a:t>
             </a:fld>
             <a:endParaRPr lang="pt-BR"/>
           </a:p>
@@ -4457,7 +4587,7 @@
           <a:p>
             <a:fld id="{221D0464-8C8A-49C0-859F-777E51766A35}" type="datetimeFigureOut">
               <a:rPr lang="pt-BR" smtClean="0"/>
-              <a:t>10/04/2026</a:t>
+              <a:t>01/06/2026</a:t>
             </a:fld>
             <a:endParaRPr lang="pt-BR"/>
           </a:p>
@@ -4499,7 +4629,7 @@
           <a:p>
             <a:fld id="{5CB2E8FC-741C-4BF1-B071-7D772D706EF9}" type="slidenum">
               <a:rPr lang="pt-BR" smtClean="0"/>
-              <a:t>‹#›</a:t>
+              <a:t>‹nº›</a:t>
             </a:fld>
             <a:endParaRPr lang="pt-BR"/>
           </a:p>
@@ -4552,7 +4682,7 @@
           <a:p>
             <a:fld id="{221D0464-8C8A-49C0-859F-777E51766A35}" type="datetimeFigureOut">
               <a:rPr lang="pt-BR" smtClean="0"/>
-              <a:t>10/04/2026</a:t>
+              <a:t>01/06/2026</a:t>
             </a:fld>
             <a:endParaRPr lang="pt-BR"/>
           </a:p>
@@ -4594,7 +4724,7 @@
           <a:p>
             <a:fld id="{5CB2E8FC-741C-4BF1-B071-7D772D706EF9}" type="slidenum">
               <a:rPr lang="pt-BR" smtClean="0"/>
-              <a:t>‹#›</a:t>
+              <a:t>‹nº›</a:t>
             </a:fld>
             <a:endParaRPr lang="pt-BR"/>
           </a:p>
@@ -4829,7 +4959,7 @@
           <a:p>
             <a:fld id="{221D0464-8C8A-49C0-859F-777E51766A35}" type="datetimeFigureOut">
               <a:rPr lang="pt-BR" smtClean="0"/>
-              <a:t>10/04/2026</a:t>
+              <a:t>01/06/2026</a:t>
             </a:fld>
             <a:endParaRPr lang="pt-BR"/>
           </a:p>
@@ -4871,7 +5001,7 @@
           <a:p>
             <a:fld id="{5CB2E8FC-741C-4BF1-B071-7D772D706EF9}" type="slidenum">
               <a:rPr lang="pt-BR" smtClean="0"/>
-              <a:t>‹#›</a:t>
+              <a:t>‹nº›</a:t>
             </a:fld>
             <a:endParaRPr lang="pt-BR"/>
           </a:p>
@@ -5082,7 +5212,7 @@
           <a:p>
             <a:fld id="{221D0464-8C8A-49C0-859F-777E51766A35}" type="datetimeFigureOut">
               <a:rPr lang="pt-BR" smtClean="0"/>
-              <a:t>10/04/2026</a:t>
+              <a:t>01/06/2026</a:t>
             </a:fld>
             <a:endParaRPr lang="pt-BR"/>
           </a:p>
@@ -5124,7 +5254,7 @@
           <a:p>
             <a:fld id="{5CB2E8FC-741C-4BF1-B071-7D772D706EF9}" type="slidenum">
               <a:rPr lang="pt-BR" smtClean="0"/>
-              <a:t>‹#›</a:t>
+              <a:t>‹nº›</a:t>
             </a:fld>
             <a:endParaRPr lang="pt-BR"/>
           </a:p>
@@ -5295,7 +5425,7 @@
           <a:p>
             <a:fld id="{221D0464-8C8A-49C0-859F-777E51766A35}" type="datetimeFigureOut">
               <a:rPr lang="pt-BR" smtClean="0"/>
-              <a:t>10/04/2026</a:t>
+              <a:t>01/06/2026</a:t>
             </a:fld>
             <a:endParaRPr lang="pt-BR"/>
           </a:p>
@@ -5373,7 +5503,7 @@
           <a:p>
             <a:fld id="{5CB2E8FC-741C-4BF1-B071-7D772D706EF9}" type="slidenum">
               <a:rPr lang="pt-BR" smtClean="0"/>
-              <a:t>‹#›</a:t>
+              <a:t>‹nº›</a:t>
             </a:fld>
             <a:endParaRPr lang="pt-BR"/>
           </a:p>
@@ -5913,6 +6043,264 @@
       </p:grpSpPr>
       <p:sp>
         <p:nvSpPr>
+          <p:cNvPr id="2" name="Título 1"/>
+          <p:cNvSpPr>
+            <a:spLocks noGrp="1"/>
+          </p:cNvSpPr>
+          <p:nvPr>
+            <p:ph type="title"/>
+          </p:nvPr>
+        </p:nvSpPr>
+        <p:spPr/>
+        <p:txBody>
+          <a:bodyPr/>
+          <a:lstStyle/>
+          <a:p>
+            <a:r>
+              <a:rPr lang="en-US" dirty="0"/>
+              <a:t>Como </a:t>
+            </a:r>
+            <a:r>
+              <a:rPr lang="en-US" dirty="0" err="1"/>
+              <a:t>representar</a:t>
+            </a:r>
+            <a:r>
+              <a:rPr lang="en-US" dirty="0"/>
+              <a:t> </a:t>
+            </a:r>
+            <a:r>
+              <a:rPr lang="en-US" dirty="0" err="1"/>
+              <a:t>os</a:t>
+            </a:r>
+            <a:r>
+              <a:rPr lang="en-US" dirty="0"/>
+              <a:t> </a:t>
+            </a:r>
+            <a:r>
+              <a:rPr lang="en-US" i="1" dirty="0"/>
+              <a:t>clusters</a:t>
+            </a:r>
+            <a:r>
+              <a:rPr lang="en-US" dirty="0"/>
+              <a:t>?</a:t>
+            </a:r>
+          </a:p>
+        </p:txBody>
+      </p:sp>
+      <p:sp>
+        <p:nvSpPr>
+          <p:cNvPr id="3" name="Espaço Reservado para Conteúdo 2"/>
+          <p:cNvSpPr>
+            <a:spLocks noGrp="1"/>
+          </p:cNvSpPr>
+          <p:nvPr>
+            <p:ph idx="1"/>
+          </p:nvPr>
+        </p:nvSpPr>
+        <p:spPr>
+          <a:xfrm>
+            <a:off x="5257799" y="1825624"/>
+            <a:ext cx="6825343" cy="5032375"/>
+          </a:xfrm>
+        </p:spPr>
+        <p:txBody>
+          <a:bodyPr>
+            <a:normAutofit/>
+          </a:bodyPr>
+          <a:lstStyle/>
+          <a:p>
+            <a:r>
+              <a:rPr lang="pt-BR" dirty="0"/>
+              <a:t>Para identificar </a:t>
+            </a:r>
+            <a:r>
+              <a:rPr lang="pt-BR" i="1" dirty="0"/>
+              <a:t>clusters</a:t>
+            </a:r>
+            <a:r>
+              <a:rPr lang="pt-BR" dirty="0"/>
+              <a:t>, temos que primeiro </a:t>
+            </a:r>
+            <a:r>
+              <a:rPr lang="pt-BR" b="1" dirty="0">
+                <a:solidFill>
+                  <a:srgbClr val="00B050"/>
+                </a:solidFill>
+              </a:rPr>
+              <a:t>decidir como eles serão representados</a:t>
+            </a:r>
+            <a:r>
+              <a:rPr lang="pt-BR" dirty="0"/>
+              <a:t>.</a:t>
+            </a:r>
+          </a:p>
+          <a:p>
+            <a:r>
+              <a:rPr lang="pt-BR" dirty="0"/>
+              <a:t>Existem algumas opções como a </a:t>
+            </a:r>
+            <a:r>
+              <a:rPr lang="pt-BR" b="1" dirty="0">
+                <a:solidFill>
+                  <a:schemeClr val="accent2"/>
+                </a:solidFill>
+              </a:rPr>
+              <a:t>densidade</a:t>
+            </a:r>
+            <a:r>
+              <a:rPr lang="pt-BR" dirty="0"/>
+              <a:t>, </a:t>
+            </a:r>
+            <a:r>
+              <a:rPr lang="pt-BR" b="1" dirty="0">
+                <a:solidFill>
+                  <a:schemeClr val="accent2"/>
+                </a:solidFill>
+              </a:rPr>
+              <a:t>distribuição</a:t>
+            </a:r>
+            <a:r>
+              <a:rPr lang="pt-BR" dirty="0"/>
+              <a:t>, </a:t>
+            </a:r>
+            <a:r>
+              <a:rPr lang="pt-BR" b="1" dirty="0">
+                <a:solidFill>
+                  <a:schemeClr val="accent2"/>
+                </a:solidFill>
+              </a:rPr>
+              <a:t>hierarquia</a:t>
+            </a:r>
+            <a:r>
+              <a:rPr lang="pt-BR" dirty="0"/>
+              <a:t>, etc.</a:t>
+            </a:r>
+          </a:p>
+          <a:p>
+            <a:r>
+              <a:rPr lang="pt-BR" dirty="0"/>
+              <a:t>Porém, a abordagem mais simples usa os </a:t>
+            </a:r>
+            <a:r>
+              <a:rPr lang="pt-BR" b="1" dirty="0"/>
+              <a:t>centroides </a:t>
+            </a:r>
+            <a:r>
+              <a:rPr lang="pt-BR" dirty="0"/>
+              <a:t>(i.e., centros) dos </a:t>
+            </a:r>
+            <a:r>
+              <a:rPr lang="pt-BR" i="1" dirty="0"/>
+              <a:t>clusters</a:t>
+            </a:r>
+            <a:r>
+              <a:rPr lang="pt-BR" dirty="0"/>
+              <a:t>.</a:t>
+            </a:r>
+          </a:p>
+          <a:p>
+            <a:r>
+              <a:rPr lang="pt-BR" dirty="0"/>
+              <a:t>O algoritmo </a:t>
+            </a:r>
+            <a:r>
+              <a:rPr lang="pt-BR" b="1" i="1" dirty="0"/>
+              <a:t>k-</a:t>
+            </a:r>
+            <a:r>
+              <a:rPr lang="pt-BR" b="1" i="1" dirty="0" err="1"/>
+              <a:t>Means</a:t>
+            </a:r>
+            <a:r>
+              <a:rPr lang="pt-BR" dirty="0"/>
+              <a:t> implementa esta abordagem.</a:t>
+            </a:r>
+          </a:p>
+          <a:p>
+            <a:r>
+              <a:rPr lang="pt-BR" dirty="0"/>
+              <a:t>Vejamos então suas características e como funciona.</a:t>
+            </a:r>
+          </a:p>
+        </p:txBody>
+      </p:sp>
+      <p:pic>
+        <p:nvPicPr>
+          <p:cNvPr id="1028" name="Picture 4" descr="K Means Clustering no Aprendizado de Máquinas — Aprendizado de Máquina —  DATA SCIENCE">
+            <a:extLst>
+              <a:ext uri="{FF2B5EF4-FFF2-40B4-BE49-F238E27FC236}">
+                <a16:creationId xmlns:a16="http://schemas.microsoft.com/office/drawing/2014/main" id="{D99905E1-3749-BAAD-E01A-C9B3686C4770}"/>
+              </a:ext>
+            </a:extLst>
+          </p:cNvPr>
+          <p:cNvPicPr>
+            <a:picLocks noChangeAspect="1" noChangeArrowheads="1"/>
+          </p:cNvPicPr>
+          <p:nvPr/>
+        </p:nvPicPr>
+        <p:blipFill rotWithShape="1">
+          <a:blip r:embed="rId3">
+            <a:extLst>
+              <a:ext uri="{28A0092B-C50C-407E-A947-70E740481C1C}">
+                <a14:useLocalDpi xmlns:a14="http://schemas.microsoft.com/office/drawing/2010/main" val="0"/>
+              </a:ext>
+            </a:extLst>
+          </a:blip>
+          <a:srcRect t="18889" r="58743" b="36825"/>
+          <a:stretch/>
+        </p:blipFill>
+        <p:spPr bwMode="auto">
+          <a:xfrm>
+            <a:off x="838200" y="2253343"/>
+            <a:ext cx="3951287" cy="3037114"/>
+          </a:xfrm>
+          <a:prstGeom prst="rect">
+            <a:avLst/>
+          </a:prstGeom>
+          <a:noFill/>
+          <a:extLst>
+            <a:ext uri="{909E8E84-426E-40DD-AFC4-6F175D3DCCD1}">
+              <a14:hiddenFill xmlns:a14="http://schemas.microsoft.com/office/drawing/2010/main">
+                <a:solidFill>
+                  <a:srgbClr val="FFFFFF"/>
+                </a:solidFill>
+              </a14:hiddenFill>
+            </a:ext>
+          </a:extLst>
+        </p:spPr>
+      </p:pic>
+    </p:spTree>
+    <p:extLst>
+      <p:ext uri="{BB962C8B-B14F-4D97-AF65-F5344CB8AC3E}">
+        <p14:creationId xmlns:p14="http://schemas.microsoft.com/office/powerpoint/2010/main" val="4003545077"/>
+      </p:ext>
+    </p:extLst>
+  </p:cSld>
+  <p:clrMapOvr>
+    <a:masterClrMapping/>
+  </p:clrMapOvr>
+</p:sld>
+</file>
+
+<file path=ppt/slides/slide11.xml><?xml version="1.0" encoding="utf-8"?>
+<p:sld xmlns:a="http://schemas.openxmlformats.org/drawingml/2006/main" xmlns:r="http://schemas.openxmlformats.org/officeDocument/2006/relationships" xmlns:p="http://schemas.openxmlformats.org/presentationml/2006/main">
+  <p:cSld>
+    <p:spTree>
+      <p:nvGrpSpPr>
+        <p:cNvPr id="1" name=""/>
+        <p:cNvGrpSpPr/>
+        <p:nvPr/>
+      </p:nvGrpSpPr>
+      <p:grpSpPr>
+        <a:xfrm>
+          <a:off x="0" y="0"/>
+          <a:ext cx="0" cy="0"/>
+          <a:chOff x="0" y="0"/>
+          <a:chExt cx="0" cy="0"/>
+        </a:xfrm>
+      </p:grpSpPr>
+      <p:sp>
+        <p:nvSpPr>
           <p:cNvPr id="2" name="Title 1">
             <a:extLst>
               <a:ext uri="{FF2B5EF4-FFF2-40B4-BE49-F238E27FC236}">
@@ -5964,7 +6352,7 @@
         </p:spPr>
         <p:txBody>
           <a:bodyPr>
-            <a:normAutofit/>
+            <a:normAutofit lnSpcReduction="10000"/>
           </a:bodyPr>
           <a:lstStyle/>
           <a:p>
@@ -5986,10 +6374,33 @@
             </a:r>
           </a:p>
           <a:p>
-            <a:pPr lvl="1"/>
-            <a:r>
-              <a:rPr lang="pt-BR" dirty="0"/>
-              <a:t>Representa a "média" das amostras dentro do cluster.</a:t>
+            <a:pPr lvl="1">
+              <a:buFont typeface="Wingdings" panose="05000000000000000000" pitchFamily="2" charset="2"/>
+              <a:buChar char="§"/>
+            </a:pPr>
+            <a:r>
+              <a:rPr lang="pt-BR" dirty="0"/>
+              <a:t>Representa a </a:t>
+            </a:r>
+            <a:r>
+              <a:rPr lang="pt-BR" b="1" dirty="0">
+                <a:solidFill>
+                  <a:srgbClr val="7030A0"/>
+                </a:solidFill>
+              </a:rPr>
+              <a:t>"média" das amostras dentro de um </a:t>
+            </a:r>
+            <a:r>
+              <a:rPr lang="pt-BR" b="1" i="1" dirty="0">
+                <a:solidFill>
+                  <a:srgbClr val="7030A0"/>
+                </a:solidFill>
+              </a:rPr>
+              <a:t>cluster</a:t>
+            </a:r>
+            <a:r>
+              <a:rPr lang="pt-BR" dirty="0"/>
+              <a:t>.</a:t>
             </a:r>
           </a:p>
           <a:p>
@@ -6017,7 +6428,15 @@
             </a:pPr>
             <a:r>
               <a:rPr lang="pt-BR" dirty="0"/>
-              <a:t>centros para inicializar redes neurais Bayesianas ou de </a:t>
+              <a:t>centros para inicializar </a:t>
+            </a:r>
+            <a:r>
+              <a:rPr lang="pt-BR" dirty="0" err="1"/>
+              <a:t>GMMs</a:t>
+            </a:r>
+            <a:r>
+              <a:rPr lang="pt-BR" dirty="0"/>
+              <a:t>, redes neurais Bayesianas ou de </a:t>
             </a:r>
             <a:r>
               <a:rPr lang="en-US" dirty="0" err="1"/>
@@ -6066,8 +6485,36 @@
               <a:buChar char="§"/>
             </a:pPr>
             <a:r>
-              <a:rPr lang="pt-BR" dirty="0"/>
-              <a:t>forma de visualizar dados multidimensionais.</a:t>
+              <a:rPr lang="pt-BR" i="1" dirty="0"/>
+              <a:t>feature </a:t>
+            </a:r>
+            <a:r>
+              <a:rPr lang="pt-BR" i="1" dirty="0" err="1"/>
+              <a:t>engineering</a:t>
+            </a:r>
+            <a:r>
+              <a:rPr lang="pt-BR" i="1" dirty="0"/>
+              <a:t>:</a:t>
+            </a:r>
+            <a:r>
+              <a:rPr lang="pt-BR" dirty="0"/>
+              <a:t> o índice do </a:t>
+            </a:r>
+            <a:r>
+              <a:rPr lang="pt-BR" dirty="0" err="1"/>
+              <a:t>centróide</a:t>
+            </a:r>
+            <a:r>
+              <a:rPr lang="pt-BR" dirty="0"/>
+              <a:t> (ID) e a distância até os </a:t>
+            </a:r>
+            <a:r>
+              <a:rPr lang="pt-BR" dirty="0" err="1"/>
+              <a:t>centróides</a:t>
+            </a:r>
+            <a:r>
+              <a:rPr lang="pt-BR" dirty="0"/>
+              <a:t> podem ser novos atributos.</a:t>
             </a:r>
           </a:p>
           <a:p>
@@ -6076,20 +6523,8 @@
               <a:buChar char="§"/>
             </a:pPr>
             <a:r>
-              <a:rPr lang="pt-BR" i="1" dirty="0"/>
-              <a:t>feature </a:t>
-            </a:r>
-            <a:r>
-              <a:rPr lang="pt-BR" i="1" dirty="0" err="1"/>
-              <a:t>engineering</a:t>
-            </a:r>
-            <a:r>
-              <a:rPr lang="pt-BR" i="1" dirty="0"/>
-              <a:t>:</a:t>
-            </a:r>
-            <a:r>
-              <a:rPr lang="pt-BR" dirty="0"/>
-              <a:t> o índice do </a:t>
+              <a:rPr lang="pt-BR" dirty="0"/>
+              <a:t>forma de detectar anomalias: distância alta ao </a:t>
             </a:r>
             <a:r>
               <a:rPr lang="pt-BR" dirty="0" err="1"/>
@@ -6097,32 +6532,6 @@
             </a:r>
             <a:r>
               <a:rPr lang="pt-BR" dirty="0"/>
-              <a:t> (ID) e a distância até os </a:t>
-            </a:r>
-            <a:r>
-              <a:rPr lang="pt-BR" dirty="0" err="1"/>
-              <a:t>centróides</a:t>
-            </a:r>
-            <a:r>
-              <a:rPr lang="pt-BR" dirty="0"/>
-              <a:t> podem ser novos atributos.</a:t>
-            </a:r>
-          </a:p>
-          <a:p>
-            <a:pPr lvl="1">
-              <a:buFont typeface="Wingdings" panose="05000000000000000000" pitchFamily="2" charset="2"/>
-              <a:buChar char="§"/>
-            </a:pPr>
-            <a:r>
-              <a:rPr lang="pt-BR" dirty="0"/>
-              <a:t>forma de detectar anomalias: distância alta ao </a:t>
-            </a:r>
-            <a:r>
-              <a:rPr lang="pt-BR" dirty="0" err="1"/>
-              <a:t>centróide</a:t>
-            </a:r>
-            <a:r>
-              <a:rPr lang="pt-BR" dirty="0"/>
               <a:t> indica </a:t>
             </a:r>
             <a:r>
@@ -6131,7 +6540,7 @@
             </a:r>
             <a:r>
               <a:rPr lang="pt-BR" dirty="0"/>
-              <a:t>.</a:t>
+              <a:t> ou dado que foge do padrão.</a:t>
             </a:r>
           </a:p>
           <a:p>
@@ -6190,7 +6599,7 @@
 </p:sld>
 </file>
 
-<file path=ppt/slides/slide11.xml><?xml version="1.0" encoding="utf-8"?>
+<file path=ppt/slides/slide12.xml><?xml version="1.0" encoding="utf-8"?>
 <p:sld xmlns:a="http://schemas.openxmlformats.org/drawingml/2006/main" xmlns:r="http://schemas.openxmlformats.org/officeDocument/2006/relationships" xmlns:p="http://schemas.openxmlformats.org/presentationml/2006/main">
   <p:cSld>
     <p:spTree>
@@ -6265,8 +6674,8 @@
           </a:p>
         </p:txBody>
       </p:sp>
-      <mc:AlternateContent xmlns:mc="http://schemas.openxmlformats.org/markup-compatibility/2006" xmlns:a14="http://schemas.microsoft.com/office/drawing/2010/main">
-        <mc:Choice Requires="a14">
+      <mc:AlternateContent xmlns:mc="http://schemas.openxmlformats.org/markup-compatibility/2006">
+        <mc:Choice xmlns:a14="http://schemas.microsoft.com/office/drawing/2010/main" Requires="a14">
           <p:sp>
             <p:nvSpPr>
               <p:cNvPr id="3" name="Espaço Reservado para Conteúdo 2">
@@ -6305,7 +6714,7 @@
                 </a:r>
                 <a:r>
                   <a:rPr lang="pt-BR" dirty="0"/>
-                  <a:t>em um espaço bidimensional, </a:t>
+                  <a:t>em um espaço bidimensional formado por </a:t>
                 </a:r>
                 <a14:m>
                   <m:oMath xmlns:m="http://schemas.openxmlformats.org/officeDocument/2006/math">
@@ -6381,7 +6790,7 @@
               <a:p>
                 <a:r>
                   <a:rPr lang="pt-BR" dirty="0"/>
-                  <a:t>Nesse caso, se elas pertencem a um </a:t>
+                  <a:t>Se eles pertencem a um </a:t>
                 </a:r>
                 <a:r>
                   <a:rPr lang="pt-BR" i="1" dirty="0"/>
@@ -6540,7 +6949,19 @@
                 </a:r>
                 <a:r>
                   <a:rPr lang="pt-BR" dirty="0"/>
-                  <a:t>.: Em geral, aplicamos clusterização apenas a atributos numéricos.</a:t>
+                  <a:t>.: Em geral, </a:t>
+                </a:r>
+                <a:r>
+                  <a:rPr lang="pt-BR" b="1" dirty="0">
+                    <a:solidFill>
+                      <a:schemeClr val="accent2"/>
+                    </a:solidFill>
+                  </a:rPr>
+                  <a:t>aplicamos clusterização apenas a atributos numéricos</a:t>
+                </a:r>
+                <a:r>
+                  <a:rPr lang="pt-BR" dirty="0"/>
+                  <a:t>.</a:t>
                 </a:r>
               </a:p>
               <a:p>
@@ -6581,13 +7002,13 @@
             </p:txBody>
           </p:sp>
         </mc:Choice>
-        <mc:Fallback xmlns="">
+        <mc:Fallback>
           <p:sp>
             <p:nvSpPr>
               <p:cNvPr id="3" name="Espaço Reservado para Conteúdo 2">
                 <a:extLst>
                   <a:ext uri="{FF2B5EF4-FFF2-40B4-BE49-F238E27FC236}">
-                    <a16:creationId xmlns:a16="http://schemas.microsoft.com/office/drawing/2014/main" xmlns:a14="http://schemas.microsoft.com/office/drawing/2010/main" xmlns="" id="{A72472E5-6211-3EFD-BA89-06782640C939}"/>
+                    <a16:creationId xmlns:a16="http://schemas.microsoft.com/office/drawing/2014/main" id="{A72472E5-6211-3EFD-BA89-06782640C939}"/>
                   </a:ext>
                 </a:extLst>
               </p:cNvPr>
@@ -6603,10 +7024,10 @@
                 <a:off x="4739641" y="1825624"/>
                 <a:ext cx="7452360" cy="5032375"/>
               </a:xfrm>
-              <a:blipFill rotWithShape="0">
+              <a:blipFill>
                 <a:blip r:embed="rId3"/>
                 <a:stretch>
-                  <a:fillRect l="-1473" t="-1937" r="-655"/>
+                  <a:fillRect l="-1473" t="-1937" r="-1064"/>
                 </a:stretch>
               </a:blipFill>
             </p:spPr>
@@ -6615,7 +7036,7 @@
               <a:lstStyle/>
               <a:p>
                 <a:r>
-                  <a:rPr lang="pt-BR">
+                  <a:rPr lang="en-US">
                     <a:noFill/>
                   </a:rPr>
                   <a:t> </a:t>
@@ -6683,7 +7104,7 @@
 </p:sld>
 </file>
 
-<file path=ppt/slides/slide12.xml><?xml version="1.0" encoding="utf-8"?>
+<file path=ppt/slides/slide13.xml><?xml version="1.0" encoding="utf-8"?>
 <p:sld xmlns:a="http://schemas.openxmlformats.org/drawingml/2006/main" xmlns:r="http://schemas.openxmlformats.org/officeDocument/2006/relationships" xmlns:p="http://schemas.openxmlformats.org/presentationml/2006/main">
   <p:cSld>
     <p:spTree>
@@ -6797,20 +7218,20 @@
             </a:r>
             <a:r>
               <a:rPr lang="pt-BR" dirty="0"/>
-              <a:t> a </a:t>
+              <a:t> </a:t>
             </a:r>
             <a:r>
               <a:rPr lang="pt-BR" b="1" dirty="0">
                 <a:solidFill>
-                  <a:srgbClr val="00B050"/>
+                  <a:schemeClr val="accent2"/>
                 </a:solidFill>
               </a:rPr>
-              <a:t>um e apenas um </a:t>
+              <a:t>a um e apenas um </a:t>
             </a:r>
             <a:r>
               <a:rPr lang="pt-BR" b="1" i="1" dirty="0">
                 <a:solidFill>
-                  <a:srgbClr val="00B050"/>
+                  <a:schemeClr val="accent2"/>
                 </a:solidFill>
               </a:rPr>
               <a:t>cluster</a:t>
@@ -6831,7 +7252,15 @@
                   <a:srgbClr val="0070C0"/>
                 </a:solidFill>
               </a:rPr>
-              <a:t>dentro do mesmo cluster</a:t>
+              <a:t>dentro do mesmo </a:t>
+            </a:r>
+            <a:r>
+              <a:rPr lang="pt-BR" b="1" i="1" dirty="0">
+                <a:solidFill>
+                  <a:srgbClr val="0070C0"/>
+                </a:solidFill>
+              </a:rPr>
+              <a:t>cluster</a:t>
             </a:r>
             <a:r>
               <a:rPr lang="pt-BR" dirty="0"/>
@@ -6901,6 +7330,9 @@
             </a:r>
           </a:p>
           <a:p>
+            <a:pPr marL="0" indent="0" algn="ctr">
+              <a:buNone/>
+            </a:pPr>
             <a:r>
               <a:rPr lang="pt-BR" dirty="0"/>
               <a:t>Quantos </a:t>
@@ -6968,7 +7400,7 @@
 </p:sld>
 </file>
 
-<file path=ppt/slides/slide13.xml><?xml version="1.0" encoding="utf-8"?>
+<file path=ppt/slides/slide14.xml><?xml version="1.0" encoding="utf-8"?>
 <p:sld xmlns:a="http://schemas.openxmlformats.org/drawingml/2006/main" xmlns:r="http://schemas.openxmlformats.org/officeDocument/2006/relationships" xmlns:p="http://schemas.openxmlformats.org/presentationml/2006/main">
   <p:cSld>
     <p:spTree>
@@ -7058,7 +7490,15 @@
           <a:p>
             <a:r>
               <a:rPr lang="pt-BR" dirty="0"/>
-              <a:t>Na figura conseguimos identificar visualmente três clusters. </a:t>
+              <a:t>Na figura conseguimos identificar visualmente três </a:t>
+            </a:r>
+            <a:r>
+              <a:rPr lang="pt-BR" i="1" dirty="0"/>
+              <a:t>clusters</a:t>
+            </a:r>
+            <a:r>
+              <a:rPr lang="pt-BR" dirty="0"/>
+              <a:t>. </a:t>
             </a:r>
           </a:p>
           <a:p>
@@ -7074,7 +7514,15 @@
             </a:pPr>
             <a:r>
               <a:rPr lang="pt-BR" dirty="0"/>
-              <a:t>em um extremo, todo o conjunto de dados pode ser pensado como formando um grande cluster; </a:t>
+              <a:t>em um extremo, todo o conjunto de dados pode ser pensado como formando um grande </a:t>
+            </a:r>
+            <a:r>
+              <a:rPr lang="pt-BR" i="1" dirty="0"/>
+              <a:t>cluster</a:t>
+            </a:r>
+            <a:r>
+              <a:rPr lang="pt-BR" dirty="0"/>
+              <a:t>; </a:t>
             </a:r>
           </a:p>
           <a:p>
@@ -7084,7 +7532,15 @@
             </a:pPr>
             <a:r>
               <a:rPr lang="pt-BR" dirty="0"/>
-              <a:t>no outro, cada exemplo pode ser visto como representando seu próprio cluster de um único exemplo.</a:t>
+              <a:t>no outro extremo, cada exemplo pode ser visto como representando seu próprio </a:t>
+            </a:r>
+            <a:r>
+              <a:rPr lang="pt-BR" i="1" dirty="0"/>
+              <a:t>cluster</a:t>
+            </a:r>
+            <a:r>
+              <a:rPr lang="pt-BR" dirty="0"/>
+              <a:t> de um único exemplo.</a:t>
             </a:r>
           </a:p>
         </p:txBody>
@@ -7147,7 +7603,7 @@
 </p:sld>
 </file>
 
-<file path=ppt/slides/slide14.xml><?xml version="1.0" encoding="utf-8"?>
+<file path=ppt/slides/slide15.xml><?xml version="1.0" encoding="utf-8"?>
 <p:sld xmlns:a="http://schemas.openxmlformats.org/drawingml/2006/main" xmlns:r="http://schemas.openxmlformats.org/officeDocument/2006/relationships" xmlns:p="http://schemas.openxmlformats.org/presentationml/2006/main">
   <p:cSld>
     <p:spTree>
@@ -7245,7 +7701,19 @@
             </a:r>
             <a:r>
               <a:rPr lang="pt-BR" dirty="0"/>
-              <a:t> práticas geralmente evitam esse problema pedindo ao </a:t>
+              <a:t> práticas geralmente evitam esse problema </a:t>
+            </a:r>
+            <a:r>
+              <a:rPr lang="pt-BR" b="1" dirty="0">
+                <a:solidFill>
+                  <a:schemeClr val="accent2"/>
+                </a:solidFill>
+              </a:rPr>
+              <a:t>pedindo</a:t>
+            </a:r>
+            <a:r>
+              <a:rPr lang="pt-BR" dirty="0"/>
+              <a:t> ao </a:t>
             </a:r>
             <a:r>
               <a:rPr lang="pt-BR" b="1" dirty="0">
@@ -7271,23 +7739,55 @@
           <a:p>
             <a:r>
               <a:rPr lang="pt-BR" dirty="0"/>
-              <a:t>Existem diversos métodos para otimizar o </a:t>
-            </a:r>
-            <a:r>
-              <a:rPr lang="pt-BR" dirty="0" err="1"/>
+              <a:t>Existem diversos métodos para </a:t>
+            </a:r>
+            <a:r>
+              <a:rPr lang="pt-BR" b="1" dirty="0">
+                <a:solidFill>
+                  <a:srgbClr val="00B050"/>
+                </a:solidFill>
+              </a:rPr>
+              <a:t>otimizar o </a:t>
+            </a:r>
+            <a:r>
+              <a:rPr lang="pt-BR" b="1" dirty="0" err="1">
+                <a:solidFill>
+                  <a:srgbClr val="00B050"/>
+                </a:solidFill>
+              </a:rPr>
               <a:t>hiperparâmetro</a:t>
             </a:r>
             <a:r>
-              <a:rPr lang="pt-BR" dirty="0"/>
+              <a:rPr lang="pt-BR" b="1" dirty="0">
+                <a:solidFill>
+                  <a:srgbClr val="00B050"/>
+                </a:solidFill>
+              </a:rPr>
               <a:t> que define o número de </a:t>
             </a:r>
             <a:r>
-              <a:rPr lang="pt-BR" i="1" dirty="0"/>
+              <a:rPr lang="pt-BR" b="1" i="1" dirty="0">
+                <a:solidFill>
+                  <a:srgbClr val="00B050"/>
+                </a:solidFill>
+              </a:rPr>
               <a:t>clusters</a:t>
             </a:r>
             <a:r>
               <a:rPr lang="pt-BR" dirty="0"/>
-              <a:t>, dentre eles, o mais usado é o método do cotovelo.</a:t>
+              <a:t>, dentre eles, o mais usado é o </a:t>
+            </a:r>
+            <a:r>
+              <a:rPr lang="pt-BR" b="1" dirty="0">
+                <a:solidFill>
+                  <a:schemeClr val="accent5"/>
+                </a:solidFill>
+              </a:rPr>
+              <a:t>método do cotovelo</a:t>
+            </a:r>
+            <a:r>
+              <a:rPr lang="pt-BR" dirty="0"/>
+              <a:t>.</a:t>
             </a:r>
           </a:p>
           <a:p>
@@ -7373,7 +7873,7 @@
 </p:sld>
 </file>
 
-<file path=ppt/slides/slide15.xml><?xml version="1.0" encoding="utf-8"?>
+<file path=ppt/slides/slide16.xml><?xml version="1.0" encoding="utf-8"?>
 <p:sld xmlns:a="http://schemas.openxmlformats.org/drawingml/2006/main" xmlns:r="http://schemas.openxmlformats.org/officeDocument/2006/relationships" xmlns:p="http://schemas.openxmlformats.org/presentationml/2006/main">
   <p:cSld>
     <p:spTree>
@@ -7905,7 +8405,7 @@
 </p:sld>
 </file>
 
-<file path=ppt/slides/slide16.xml><?xml version="1.0" encoding="utf-8"?>
+<file path=ppt/slides/slide17.xml><?xml version="1.0" encoding="utf-8"?>
 <p:sld xmlns:a="http://schemas.openxmlformats.org/drawingml/2006/main" xmlns:r="http://schemas.openxmlformats.org/officeDocument/2006/relationships" xmlns:p="http://schemas.openxmlformats.org/presentationml/2006/main">
   <p:cSld>
     <p:spTree>
@@ -7953,8 +8453,8 @@
           </a:p>
         </p:txBody>
       </p:sp>
-      <mc:AlternateContent xmlns:mc="http://schemas.openxmlformats.org/markup-compatibility/2006" xmlns:a14="http://schemas.microsoft.com/office/drawing/2010/main">
-        <mc:Choice Requires="a14">
+      <mc:AlternateContent xmlns:mc="http://schemas.openxmlformats.org/markup-compatibility/2006">
+        <mc:Choice xmlns:a14="http://schemas.microsoft.com/office/drawing/2010/main" Requires="a14">
           <p:sp>
             <p:nvSpPr>
               <p:cNvPr id="3" name="Espaço Reservado para Conteúdo 2"/>
@@ -7993,7 +8493,15 @@
                 </a14:m>
                 <a:r>
                   <a:rPr lang="pt-BR" dirty="0"/>
-                  <a:t> clusters cujos centroides são denotados pelo vetor, </a:t>
+                  <a:t> </a:t>
+                </a:r>
+                <a:r>
+                  <a:rPr lang="pt-BR" i="1" dirty="0"/>
+                  <a:t>clusters</a:t>
+                </a:r>
+                <a:r>
+                  <a:rPr lang="pt-BR" dirty="0"/>
+                  <a:t> cujos centroides são denotados pelo vetor, </a:t>
                 </a:r>
                 <a14:m>
                   <m:oMath xmlns:m="http://schemas.openxmlformats.org/officeDocument/2006/math">
@@ -8235,7 +8743,7 @@
                 </a14:m>
                 <a:r>
                   <a:rPr lang="pt-BR" dirty="0"/>
-                  <a:t>é a menor dessas distâncias, então, é natural colocarmos </a:t>
+                  <a:t>é a menor dessas distâncias, então, colocarmos </a:t>
                 </a:r>
                 <a14:m>
                   <m:oMath xmlns:m="http://schemas.openxmlformats.org/officeDocument/2006/math">
@@ -8296,7 +8804,15 @@
                 </a14:m>
                 <a:r>
                   <a:rPr lang="pt-BR" dirty="0"/>
-                  <a:t>-ésimo cluster.</a:t>
+                  <a:t>-ésimo </a:t>
+                </a:r>
+                <a:r>
+                  <a:rPr lang="pt-BR" i="1" dirty="0"/>
+                  <a:t>cluster</a:t>
+                </a:r>
+                <a:r>
+                  <a:rPr lang="pt-BR" dirty="0"/>
+                  <a:t>.</a:t>
                 </a:r>
               </a:p>
               <a:p>
@@ -8322,7 +8838,23 @@
                       <a:schemeClr val="accent5"/>
                     </a:solidFill>
                   </a:rPr>
-                  <a:t>definir a qual cluster um exemplo pertence</a:t>
+                  <a:t>definir a qual </a:t>
+                </a:r>
+                <a:r>
+                  <a:rPr lang="pt-BR" b="1" i="1" dirty="0">
+                    <a:solidFill>
+                      <a:schemeClr val="accent5"/>
+                    </a:solidFill>
+                  </a:rPr>
+                  <a:t>cluster</a:t>
+                </a:r>
+                <a:r>
+                  <a:rPr lang="pt-BR" b="1" dirty="0">
+                    <a:solidFill>
+                      <a:schemeClr val="accent5"/>
+                    </a:solidFill>
+                  </a:rPr>
+                  <a:t> um exemplo pertence</a:t>
                 </a:r>
                 <a:r>
                   <a:rPr lang="pt-BR" dirty="0"/>
@@ -8358,7 +8890,7 @@
             </p:txBody>
           </p:sp>
         </mc:Choice>
-        <mc:Fallback xmlns="">
+        <mc:Fallback>
           <p:sp>
             <p:nvSpPr>
               <p:cNvPr id="3" name="Espaço Reservado para Conteúdo 2"/>
@@ -8374,7 +8906,7 @@
                 <a:off x="838199" y="1825624"/>
                 <a:ext cx="11353801" cy="5032376"/>
               </a:xfrm>
-              <a:blipFill rotWithShape="0">
+              <a:blipFill>
                 <a:blip r:embed="rId2"/>
                 <a:stretch>
                   <a:fillRect l="-913" t="-1937"/>
@@ -8386,7 +8918,7 @@
               <a:lstStyle/>
               <a:p>
                 <a:r>
-                  <a:rPr lang="pt-BR">
+                  <a:rPr lang="en-US">
                     <a:noFill/>
                   </a:rPr>
                   <a:t> </a:t>
@@ -8409,7 +8941,7 @@
 </p:sld>
 </file>
 
-<file path=ppt/slides/slide17.xml><?xml version="1.0" encoding="utf-8"?>
+<file path=ppt/slides/slide18.xml><?xml version="1.0" encoding="utf-8"?>
 <p:sld xmlns:a="http://schemas.openxmlformats.org/drawingml/2006/main" xmlns:r="http://schemas.openxmlformats.org/officeDocument/2006/relationships" xmlns:p="http://schemas.openxmlformats.org/presentationml/2006/main">
   <p:cSld>
     <p:spTree>
@@ -8606,8 +9138,8 @@
           </p:sp>
         </mc:Fallback>
       </mc:AlternateContent>
-      <mc:AlternateContent xmlns:mc="http://schemas.openxmlformats.org/markup-compatibility/2006" xmlns:a14="http://schemas.microsoft.com/office/drawing/2010/main">
-        <mc:Choice Requires="a14">
+      <mc:AlternateContent xmlns:mc="http://schemas.openxmlformats.org/markup-compatibility/2006">
+        <mc:Choice xmlns:a14="http://schemas.microsoft.com/office/drawing/2010/main" Requires="a14">
           <p:sp>
             <p:nvSpPr>
               <p:cNvPr id="4" name="TextBox 4"/>
@@ -8692,7 +9224,7 @@
                 </a14:m>
                 <a:r>
                   <a:rPr lang="pt-BR" dirty="0"/>
-                  <a:t> centroides iniciais (geralmente, feito de forma aleatória).</a:t>
+                  <a:t> centroides iniciais (geralmente, definidos de forma aleatória).</a:t>
                 </a:r>
               </a:p>
               <a:p>
@@ -8798,7 +9330,7 @@
             </p:txBody>
           </p:sp>
         </mc:Choice>
-        <mc:Fallback xmlns="">
+        <mc:Fallback>
           <p:sp>
             <p:nvSpPr>
               <p:cNvPr id="4" name="TextBox 4"/>
@@ -8815,7 +9347,7 @@
               <a:prstGeom prst="rect">
                 <a:avLst/>
               </a:prstGeom>
-              <a:blipFill rotWithShape="0">
+              <a:blipFill>
                 <a:blip r:embed="rId4"/>
                 <a:stretch>
                   <a:fillRect l="-531" t="-1190" b="-3274"/>
@@ -8832,7 +9364,7 @@
               <a:lstStyle/>
               <a:p>
                 <a:r>
-                  <a:rPr lang="pt-BR">
+                  <a:rPr lang="en-US">
                     <a:noFill/>
                   </a:rPr>
                   <a:t> </a:t>
@@ -8907,7 +9439,7 @@
 </p:sld>
 </file>
 
-<file path=ppt/slides/slide18.xml><?xml version="1.0" encoding="utf-8"?>
+<file path=ppt/slides/slide19.xml><?xml version="1.0" encoding="utf-8"?>
 <p:sld xmlns:a="http://schemas.openxmlformats.org/drawingml/2006/main" xmlns:r="http://schemas.openxmlformats.org/officeDocument/2006/relationships" xmlns:p="http://schemas.openxmlformats.org/presentationml/2006/main">
   <p:cSld>
     <p:spTree>
@@ -8969,7 +9501,225 @@
 </p:sld>
 </file>
 
-<file path=ppt/slides/slide19.xml><?xml version="1.0" encoding="utf-8"?>
+<file path=ppt/slides/slide2.xml><?xml version="1.0" encoding="utf-8"?>
+<p:sld xmlns:a="http://schemas.openxmlformats.org/drawingml/2006/main" xmlns:r="http://schemas.openxmlformats.org/officeDocument/2006/relationships" xmlns:p="http://schemas.openxmlformats.org/presentationml/2006/main">
+  <p:cSld>
+    <p:spTree>
+      <p:nvGrpSpPr>
+        <p:cNvPr id="1" name=""/>
+        <p:cNvGrpSpPr/>
+        <p:nvPr/>
+      </p:nvGrpSpPr>
+      <p:grpSpPr>
+        <a:xfrm>
+          <a:off x="0" y="0"/>
+          <a:ext cx="0" cy="0"/>
+          <a:chOff x="0" y="0"/>
+          <a:chExt cx="0" cy="0"/>
+        </a:xfrm>
+      </p:grpSpPr>
+      <p:sp>
+        <p:nvSpPr>
+          <p:cNvPr id="2" name="Título 1"/>
+          <p:cNvSpPr>
+            <a:spLocks noGrp="1"/>
+          </p:cNvSpPr>
+          <p:nvPr>
+            <p:ph type="title"/>
+          </p:nvPr>
+        </p:nvSpPr>
+        <p:spPr/>
+        <p:txBody>
+          <a:bodyPr/>
+          <a:lstStyle/>
+          <a:p>
+            <a:r>
+              <a:rPr lang="pt-BR" dirty="0"/>
+              <a:t>Recapitulando</a:t>
+            </a:r>
+            <a:endParaRPr lang="en-US" dirty="0"/>
+          </a:p>
+        </p:txBody>
+      </p:sp>
+      <p:sp>
+        <p:nvSpPr>
+          <p:cNvPr id="3" name="Espaço Reservado para Conteúdo 2"/>
+          <p:cNvSpPr>
+            <a:spLocks noGrp="1"/>
+          </p:cNvSpPr>
+          <p:nvPr>
+            <p:ph idx="1"/>
+          </p:nvPr>
+        </p:nvSpPr>
+        <p:spPr>
+          <a:xfrm>
+            <a:off x="838199" y="1825624"/>
+            <a:ext cx="11223172" cy="5032376"/>
+          </a:xfrm>
+        </p:spPr>
+        <p:txBody>
+          <a:bodyPr>
+            <a:normAutofit/>
+          </a:bodyPr>
+          <a:lstStyle/>
+          <a:p>
+            <a:r>
+              <a:rPr lang="pt-BR" dirty="0"/>
+              <a:t>Até o momento, todos os algoritmos que aprendemos seguiam o paradigma do </a:t>
+            </a:r>
+            <a:r>
+              <a:rPr lang="pt-BR" b="1" dirty="0">
+                <a:solidFill>
+                  <a:schemeClr val="accent2"/>
+                </a:solidFill>
+              </a:rPr>
+              <a:t>aprendizado supervisionado</a:t>
+            </a:r>
+            <a:r>
+              <a:rPr lang="pt-BR" dirty="0"/>
+              <a:t>.</a:t>
+            </a:r>
+          </a:p>
+          <a:p>
+            <a:r>
+              <a:rPr lang="pt-BR" dirty="0"/>
+              <a:t>Hoje, falaremos sobre </a:t>
+            </a:r>
+            <a:r>
+              <a:rPr lang="pt-BR" b="1" i="1" dirty="0"/>
+              <a:t>clustering</a:t>
+            </a:r>
+            <a:r>
+              <a:rPr lang="pt-BR" dirty="0"/>
+              <a:t>, que são algoritmos de </a:t>
+            </a:r>
+            <a:r>
+              <a:rPr lang="pt-BR" b="1" dirty="0"/>
+              <a:t>aprendizado não-supervisionado</a:t>
+            </a:r>
+            <a:r>
+              <a:rPr lang="pt-BR" dirty="0"/>
+              <a:t>.</a:t>
+            </a:r>
+          </a:p>
+          <a:p>
+            <a:pPr lvl="1">
+              <a:buFont typeface="Wingdings" panose="05000000000000000000" pitchFamily="2" charset="2"/>
+              <a:buChar char="§"/>
+            </a:pPr>
+            <a:r>
+              <a:rPr lang="pt-BR" b="1" dirty="0">
+                <a:solidFill>
+                  <a:srgbClr val="7030A0"/>
+                </a:solidFill>
+              </a:rPr>
+              <a:t>Não temos rótulos</a:t>
+            </a:r>
+            <a:r>
+              <a:rPr lang="pt-BR" dirty="0"/>
+              <a:t>, apenas atributos.</a:t>
+            </a:r>
+          </a:p>
+          <a:p>
+            <a:r>
+              <a:rPr lang="pt-BR" dirty="0"/>
+              <a:t>Eles visam criar </a:t>
+            </a:r>
+            <a:r>
+              <a:rPr lang="pt-BR" b="1" dirty="0">
+                <a:solidFill>
+                  <a:srgbClr val="7030A0"/>
+                </a:solidFill>
+              </a:rPr>
+              <a:t>agrupamentos</a:t>
+            </a:r>
+            <a:r>
+              <a:rPr lang="pt-BR" dirty="0"/>
+              <a:t> de dados (chamados de </a:t>
+            </a:r>
+            <a:r>
+              <a:rPr lang="pt-BR" b="1" i="1" dirty="0"/>
+              <a:t>clusters</a:t>
+            </a:r>
+            <a:r>
+              <a:rPr lang="pt-BR" b="1" dirty="0"/>
+              <a:t> </a:t>
+            </a:r>
+            <a:r>
+              <a:rPr lang="pt-BR" dirty="0"/>
+              <a:t>ou</a:t>
+            </a:r>
+            <a:r>
+              <a:rPr lang="pt-BR" b="1" dirty="0"/>
+              <a:t> grupos</a:t>
+            </a:r>
+            <a:r>
+              <a:rPr lang="pt-BR" dirty="0"/>
+              <a:t>) segundo seu </a:t>
+            </a:r>
+            <a:r>
+              <a:rPr lang="pt-BR" b="1" dirty="0">
+                <a:solidFill>
+                  <a:srgbClr val="00B050"/>
+                </a:solidFill>
+              </a:rPr>
+              <a:t>grau de semelhança</a:t>
+            </a:r>
+            <a:r>
+              <a:rPr lang="pt-BR" dirty="0"/>
+              <a:t>. </a:t>
+            </a:r>
+          </a:p>
+          <a:p>
+            <a:r>
+              <a:rPr lang="pt-BR" dirty="0"/>
+              <a:t>Nesta aula, aprenderemos sobre o algoritmo chamado de </a:t>
+            </a:r>
+            <a:r>
+              <a:rPr lang="pt-BR" b="1" dirty="0"/>
+              <a:t>k-Médias</a:t>
+            </a:r>
+            <a:r>
+              <a:rPr lang="pt-BR" dirty="0"/>
+              <a:t> (ou </a:t>
+            </a:r>
+            <a:r>
+              <a:rPr lang="pt-BR" b="1" i="1" dirty="0"/>
+              <a:t>k-</a:t>
+            </a:r>
+            <a:r>
+              <a:rPr lang="pt-BR" b="1" i="1" dirty="0" err="1"/>
+              <a:t>Means</a:t>
+            </a:r>
+            <a:r>
+              <a:rPr lang="pt-BR" dirty="0"/>
+              <a:t>, em inglês) que é um dos algoritmos mais simples de </a:t>
+            </a:r>
+            <a:r>
+              <a:rPr lang="pt-BR" b="1" i="1" dirty="0"/>
+              <a:t>clustering</a:t>
+            </a:r>
+            <a:r>
+              <a:rPr lang="pt-BR" dirty="0"/>
+              <a:t>.</a:t>
+            </a:r>
+          </a:p>
+        </p:txBody>
+      </p:sp>
+    </p:spTree>
+    <p:extLst>
+      <p:ext uri="{BB962C8B-B14F-4D97-AF65-F5344CB8AC3E}">
+        <p14:creationId xmlns:p14="http://schemas.microsoft.com/office/powerpoint/2010/main" val="2127415881"/>
+      </p:ext>
+    </p:extLst>
+  </p:cSld>
+  <p:clrMapOvr>
+    <a:masterClrMapping/>
+  </p:clrMapOvr>
+</p:sld>
+</file>
+
+<file path=ppt/slides/slide20.xml><?xml version="1.0" encoding="utf-8"?>
 <p:sld xmlns:a="http://schemas.openxmlformats.org/drawingml/2006/main" xmlns:r="http://schemas.openxmlformats.org/officeDocument/2006/relationships" xmlns:p="http://schemas.openxmlformats.org/presentationml/2006/main">
   <p:cSld>
     <p:spTree>
@@ -9158,193 +9908,7 @@
 </p:sld>
 </file>
 
-<file path=ppt/slides/slide2.xml><?xml version="1.0" encoding="utf-8"?>
-<p:sld xmlns:a="http://schemas.openxmlformats.org/drawingml/2006/main" xmlns:r="http://schemas.openxmlformats.org/officeDocument/2006/relationships" xmlns:p="http://schemas.openxmlformats.org/presentationml/2006/main">
-  <p:cSld>
-    <p:spTree>
-      <p:nvGrpSpPr>
-        <p:cNvPr id="1" name=""/>
-        <p:cNvGrpSpPr/>
-        <p:nvPr/>
-      </p:nvGrpSpPr>
-      <p:grpSpPr>
-        <a:xfrm>
-          <a:off x="0" y="0"/>
-          <a:ext cx="0" cy="0"/>
-          <a:chOff x="0" y="0"/>
-          <a:chExt cx="0" cy="0"/>
-        </a:xfrm>
-      </p:grpSpPr>
-      <p:sp>
-        <p:nvSpPr>
-          <p:cNvPr id="2" name="Título 1"/>
-          <p:cNvSpPr>
-            <a:spLocks noGrp="1"/>
-          </p:cNvSpPr>
-          <p:nvPr>
-            <p:ph type="title"/>
-          </p:nvPr>
-        </p:nvSpPr>
-        <p:spPr/>
-        <p:txBody>
-          <a:bodyPr/>
-          <a:lstStyle/>
-          <a:p>
-            <a:r>
-              <a:rPr lang="pt-BR" dirty="0"/>
-              <a:t>Recapitulando</a:t>
-            </a:r>
-            <a:endParaRPr lang="en-US" dirty="0"/>
-          </a:p>
-        </p:txBody>
-      </p:sp>
-      <p:sp>
-        <p:nvSpPr>
-          <p:cNvPr id="3" name="Espaço Reservado para Conteúdo 2"/>
-          <p:cNvSpPr>
-            <a:spLocks noGrp="1"/>
-          </p:cNvSpPr>
-          <p:nvPr>
-            <p:ph idx="1"/>
-          </p:nvPr>
-        </p:nvSpPr>
-        <p:spPr>
-          <a:xfrm>
-            <a:off x="838199" y="1825624"/>
-            <a:ext cx="11223172" cy="5032376"/>
-          </a:xfrm>
-        </p:spPr>
-        <p:txBody>
-          <a:bodyPr>
-            <a:normAutofit/>
-          </a:bodyPr>
-          <a:lstStyle/>
-          <a:p>
-            <a:r>
-              <a:rPr lang="pt-BR" dirty="0"/>
-              <a:t>Até o momento, todos os algoritmos que aprendemos seguiam o paradigma do aprendizado supervisionado.</a:t>
-            </a:r>
-          </a:p>
-          <a:p>
-            <a:r>
-              <a:rPr lang="pt-BR" dirty="0"/>
-              <a:t>Hoje, falaremos sobre </a:t>
-            </a:r>
-            <a:r>
-              <a:rPr lang="pt-BR" b="1" i="1" dirty="0"/>
-              <a:t>clustering</a:t>
-            </a:r>
-            <a:r>
-              <a:rPr lang="pt-BR" dirty="0"/>
-              <a:t>, que são algoritmos de </a:t>
-            </a:r>
-            <a:r>
-              <a:rPr lang="pt-BR" b="1" dirty="0"/>
-              <a:t>aprendizado não-supervisionado</a:t>
-            </a:r>
-            <a:r>
-              <a:rPr lang="pt-BR" dirty="0"/>
-              <a:t>.</a:t>
-            </a:r>
-          </a:p>
-          <a:p>
-            <a:pPr lvl="1">
-              <a:buFont typeface="Wingdings" panose="05000000000000000000" pitchFamily="2" charset="2"/>
-              <a:buChar char="§"/>
-            </a:pPr>
-            <a:r>
-              <a:rPr lang="pt-BR" dirty="0"/>
-              <a:t>Não temos rótulos, apenas atributos.</a:t>
-            </a:r>
-          </a:p>
-          <a:p>
-            <a:r>
-              <a:rPr lang="pt-BR" dirty="0"/>
-              <a:t>Eles visam criar agrupamentos de dados (chamados de </a:t>
-            </a:r>
-            <a:r>
-              <a:rPr lang="pt-BR" b="1" i="1" dirty="0"/>
-              <a:t>clusters</a:t>
-            </a:r>
-            <a:r>
-              <a:rPr lang="pt-BR" b="1" dirty="0"/>
-              <a:t> </a:t>
-            </a:r>
-            <a:r>
-              <a:rPr lang="pt-BR" dirty="0"/>
-              <a:t>ou</a:t>
-            </a:r>
-            <a:r>
-              <a:rPr lang="pt-BR" b="1" dirty="0"/>
-              <a:t> grupos</a:t>
-            </a:r>
-            <a:r>
-              <a:rPr lang="pt-BR" dirty="0"/>
-              <a:t>) segundo seu </a:t>
-            </a:r>
-            <a:r>
-              <a:rPr lang="pt-BR" b="1" dirty="0">
-                <a:solidFill>
-                  <a:srgbClr val="00B050"/>
-                </a:solidFill>
-              </a:rPr>
-              <a:t>grau de semelhança</a:t>
-            </a:r>
-            <a:r>
-              <a:rPr lang="pt-BR" dirty="0"/>
-              <a:t>. </a:t>
-            </a:r>
-          </a:p>
-          <a:p>
-            <a:r>
-              <a:rPr lang="pt-BR" dirty="0"/>
-              <a:t>Nesta aula, aprenderemos sobre o algoritmo chamado de </a:t>
-            </a:r>
-            <a:r>
-              <a:rPr lang="pt-BR" b="1" dirty="0"/>
-              <a:t>k-Médias</a:t>
-            </a:r>
-            <a:r>
-              <a:rPr lang="pt-BR" dirty="0"/>
-              <a:t> (ou </a:t>
-            </a:r>
-            <a:r>
-              <a:rPr lang="pt-BR" b="1" i="1" dirty="0"/>
-              <a:t>k-</a:t>
-            </a:r>
-            <a:r>
-              <a:rPr lang="pt-BR" b="1" i="1" dirty="0" err="1"/>
-              <a:t>Means</a:t>
-            </a:r>
-            <a:r>
-              <a:rPr lang="pt-BR" dirty="0"/>
-              <a:t>, em inglês) que é um dos algoritmos mais simples de </a:t>
-            </a:r>
-            <a:r>
-              <a:rPr lang="pt-BR" b="1" i="1" dirty="0"/>
-              <a:t>clustering</a:t>
-            </a:r>
-            <a:r>
-              <a:rPr lang="pt-BR" dirty="0"/>
-              <a:t>.</a:t>
-            </a:r>
-          </a:p>
-        </p:txBody>
-      </p:sp>
-    </p:spTree>
-    <p:extLst>
-      <p:ext uri="{BB962C8B-B14F-4D97-AF65-F5344CB8AC3E}">
-        <p14:creationId xmlns:p14="http://schemas.microsoft.com/office/powerpoint/2010/main" val="2127415881"/>
-      </p:ext>
-    </p:extLst>
-  </p:cSld>
-  <p:clrMapOvr>
-    <a:masterClrMapping/>
-  </p:clrMapOvr>
-</p:sld>
-</file>
-
-<file path=ppt/slides/slide20.xml><?xml version="1.0" encoding="utf-8"?>
+<file path=ppt/slides/slide21.xml><?xml version="1.0" encoding="utf-8"?>
 <p:sld xmlns:a="http://schemas.openxmlformats.org/drawingml/2006/main" xmlns:r="http://schemas.openxmlformats.org/officeDocument/2006/relationships" xmlns:p="http://schemas.openxmlformats.org/presentationml/2006/main">
   <p:cSld>
     <p:spTree>
@@ -9510,7 +10074,7 @@
 </p:sld>
 </file>
 
-<file path=ppt/slides/slide21.xml><?xml version="1.0" encoding="utf-8"?>
+<file path=ppt/slides/slide22.xml><?xml version="1.0" encoding="utf-8"?>
 <p:sld xmlns:a="http://schemas.openxmlformats.org/drawingml/2006/main" xmlns:r="http://schemas.openxmlformats.org/officeDocument/2006/relationships" xmlns:p="http://schemas.openxmlformats.org/presentationml/2006/main">
   <p:cSld>
     <p:spTree>
@@ -9645,7 +10209,7 @@
 </p:sld>
 </file>
 
-<file path=ppt/slides/slide22.xml><?xml version="1.0" encoding="utf-8"?>
+<file path=ppt/slides/slide23.xml><?xml version="1.0" encoding="utf-8"?>
 <p:sld xmlns:a="http://schemas.openxmlformats.org/drawingml/2006/main" xmlns:r="http://schemas.openxmlformats.org/officeDocument/2006/relationships" xmlns:p="http://schemas.openxmlformats.org/presentationml/2006/main">
   <p:cSld>
     <p:spTree>
@@ -9777,7 +10341,7 @@
 </p:sld>
 </file>
 
-<file path=ppt/slides/slide23.xml><?xml version="1.0" encoding="utf-8"?>
+<file path=ppt/slides/slide24.xml><?xml version="1.0" encoding="utf-8"?>
 <p:sld xmlns:a="http://schemas.openxmlformats.org/drawingml/2006/main" xmlns:r="http://schemas.openxmlformats.org/officeDocument/2006/relationships" xmlns:p="http://schemas.openxmlformats.org/presentationml/2006/main">
   <p:cSld>
     <p:spTree>
@@ -9909,7 +10473,7 @@
 </p:sld>
 </file>
 
-<file path=ppt/slides/slide24.xml><?xml version="1.0" encoding="utf-8"?>
+<file path=ppt/slides/slide25.xml><?xml version="1.0" encoding="utf-8"?>
 <p:sld xmlns:a="http://schemas.openxmlformats.org/drawingml/2006/main" xmlns:r="http://schemas.openxmlformats.org/officeDocument/2006/relationships" xmlns:p="http://schemas.openxmlformats.org/presentationml/2006/main">
   <p:cSld>
     <p:spTree>
@@ -10041,7 +10605,7 @@
 </p:sld>
 </file>
 
-<file path=ppt/slides/slide25.xml><?xml version="1.0" encoding="utf-8"?>
+<file path=ppt/slides/slide26.xml><?xml version="1.0" encoding="utf-8"?>
 <p:sld xmlns:a="http://schemas.openxmlformats.org/drawingml/2006/main" xmlns:r="http://schemas.openxmlformats.org/officeDocument/2006/relationships" xmlns:p="http://schemas.openxmlformats.org/presentationml/2006/main">
   <p:cSld>
     <p:spTree>
@@ -10234,7 +10798,7 @@
 </p:sld>
 </file>
 
-<file path=ppt/slides/slide26.xml><?xml version="1.0" encoding="utf-8"?>
+<file path=ppt/slides/slide27.xml><?xml version="1.0" encoding="utf-8"?>
 <p:sld xmlns:a="http://schemas.openxmlformats.org/drawingml/2006/main" xmlns:r="http://schemas.openxmlformats.org/officeDocument/2006/relationships" xmlns:p="http://schemas.openxmlformats.org/presentationml/2006/main">
   <p:cSld>
     <p:spTree>
@@ -10499,7 +11063,7 @@
 </p:sld>
 </file>
 
-<file path=ppt/slides/slide27.xml><?xml version="1.0" encoding="utf-8"?>
+<file path=ppt/slides/slide28.xml><?xml version="1.0" encoding="utf-8"?>
 <p:sld xmlns:a="http://schemas.openxmlformats.org/drawingml/2006/main" xmlns:r="http://schemas.openxmlformats.org/officeDocument/2006/relationships" xmlns:p="http://schemas.openxmlformats.org/presentationml/2006/main">
   <p:cSld>
     <p:spTree>
@@ -10788,7 +11352,7 @@
 </p:sld>
 </file>
 
-<file path=ppt/slides/slide28.xml><?xml version="1.0" encoding="utf-8"?>
+<file path=ppt/slides/slide29.xml><?xml version="1.0" encoding="utf-8"?>
 <p:sld xmlns:a="http://schemas.openxmlformats.org/drawingml/2006/main" xmlns:r="http://schemas.openxmlformats.org/officeDocument/2006/relationships" xmlns:p="http://schemas.openxmlformats.org/presentationml/2006/main">
   <p:cSld>
     <p:spTree>
@@ -11016,88 +11580,6 @@
 </p:sld>
 </file>
 
-<file path=ppt/slides/slide29.xml><?xml version="1.0" encoding="utf-8"?>
-<p:sld xmlns:a="http://schemas.openxmlformats.org/drawingml/2006/main" xmlns:r="http://schemas.openxmlformats.org/officeDocument/2006/relationships" xmlns:p="http://schemas.openxmlformats.org/presentationml/2006/main">
-  <p:cSld>
-    <p:spTree>
-      <p:nvGrpSpPr>
-        <p:cNvPr id="1" name="">
-          <a:extLst>
-            <a:ext uri="{FF2B5EF4-FFF2-40B4-BE49-F238E27FC236}">
-              <a16:creationId xmlns:a16="http://schemas.microsoft.com/office/drawing/2014/main" id="{4B1B77C4-9B17-7A8C-9D74-1E6EDF9D99AB}"/>
-            </a:ext>
-          </a:extLst>
-        </p:cNvPr>
-        <p:cNvGrpSpPr/>
-        <p:nvPr/>
-      </p:nvGrpSpPr>
-      <p:grpSpPr>
-        <a:xfrm>
-          <a:off x="0" y="0"/>
-          <a:ext cx="0" cy="0"/>
-          <a:chOff x="0" y="0"/>
-          <a:chExt cx="0" cy="0"/>
-        </a:xfrm>
-      </p:grpSpPr>
-      <p:sp>
-        <p:nvSpPr>
-          <p:cNvPr id="3" name="Espaço Reservado para Conteúdo 2">
-            <a:extLst>
-              <a:ext uri="{FF2B5EF4-FFF2-40B4-BE49-F238E27FC236}">
-                <a16:creationId xmlns:a16="http://schemas.microsoft.com/office/drawing/2014/main" id="{33358A61-5705-A1F7-E051-797E22A8C17B}"/>
-              </a:ext>
-            </a:extLst>
-          </p:cNvPr>
-          <p:cNvSpPr>
-            <a:spLocks noGrp="1"/>
-          </p:cNvSpPr>
-          <p:nvPr>
-            <p:ph idx="1"/>
-          </p:nvPr>
-        </p:nvSpPr>
-        <p:spPr>
-          <a:xfrm>
-            <a:off x="838200" y="2594292"/>
-            <a:ext cx="10515600" cy="1865948"/>
-          </a:xfrm>
-        </p:spPr>
-        <p:txBody>
-          <a:bodyPr>
-            <a:normAutofit/>
-          </a:bodyPr>
-          <a:lstStyle/>
-          <a:p>
-            <a:pPr marL="0" indent="0" algn="ctr">
-              <a:buNone/>
-            </a:pPr>
-            <a:r>
-              <a:rPr lang="pt-BR" sz="5400" dirty="0"/>
-              <a:t>Como definimos o número de </a:t>
-            </a:r>
-            <a:r>
-              <a:rPr lang="pt-BR" sz="5400" i="1" dirty="0"/>
-              <a:t>clusters</a:t>
-            </a:r>
-            <a:r>
-              <a:rPr lang="pt-BR" sz="5400" dirty="0"/>
-              <a:t>?</a:t>
-            </a:r>
-          </a:p>
-        </p:txBody>
-      </p:sp>
-    </p:spTree>
-    <p:extLst>
-      <p:ext uri="{BB962C8B-B14F-4D97-AF65-F5344CB8AC3E}">
-        <p14:creationId xmlns:p14="http://schemas.microsoft.com/office/powerpoint/2010/main" val="828297064"/>
-      </p:ext>
-    </p:extLst>
-  </p:cSld>
-  <p:clrMapOvr>
-    <a:masterClrMapping/>
-  </p:clrMapOvr>
-</p:sld>
-</file>
-
 <file path=ppt/slides/slide3.xml><?xml version="1.0" encoding="utf-8"?>
 <p:sld xmlns:a="http://schemas.openxmlformats.org/drawingml/2006/main" xmlns:r="http://schemas.openxmlformats.org/officeDocument/2006/relationships" xmlns:p="http://schemas.openxmlformats.org/presentationml/2006/main">
   <p:cSld>
@@ -11154,7 +11636,19 @@
             </a:r>
             <a:r>
               <a:rPr lang="pt-BR" sz="2800" dirty="0"/>
-              <a:t> organiza dados como na figura: cada ponto encontra seu grupo mais próximo, formando </a:t>
+              <a:t> organiza dados como na figura: cada ponto encontra seu </a:t>
+            </a:r>
+            <a:r>
+              <a:rPr lang="pt-BR" sz="2800" b="1" dirty="0">
+                <a:solidFill>
+                  <a:schemeClr val="accent2"/>
+                </a:solidFill>
+              </a:rPr>
+              <a:t>grupo mais próximo</a:t>
+            </a:r>
+            <a:r>
+              <a:rPr lang="pt-BR" sz="2800" dirty="0"/>
+              <a:t>, formando </a:t>
             </a:r>
             <a:r>
               <a:rPr lang="pt-BR" sz="2800" i="1" dirty="0"/>
@@ -11218,6 +11712,88 @@
   <p:cSld>
     <p:spTree>
       <p:nvGrpSpPr>
+        <p:cNvPr id="1" name="">
+          <a:extLst>
+            <a:ext uri="{FF2B5EF4-FFF2-40B4-BE49-F238E27FC236}">
+              <a16:creationId xmlns:a16="http://schemas.microsoft.com/office/drawing/2014/main" id="{4B1B77C4-9B17-7A8C-9D74-1E6EDF9D99AB}"/>
+            </a:ext>
+          </a:extLst>
+        </p:cNvPr>
+        <p:cNvGrpSpPr/>
+        <p:nvPr/>
+      </p:nvGrpSpPr>
+      <p:grpSpPr>
+        <a:xfrm>
+          <a:off x="0" y="0"/>
+          <a:ext cx="0" cy="0"/>
+          <a:chOff x="0" y="0"/>
+          <a:chExt cx="0" cy="0"/>
+        </a:xfrm>
+      </p:grpSpPr>
+      <p:sp>
+        <p:nvSpPr>
+          <p:cNvPr id="3" name="Espaço Reservado para Conteúdo 2">
+            <a:extLst>
+              <a:ext uri="{FF2B5EF4-FFF2-40B4-BE49-F238E27FC236}">
+                <a16:creationId xmlns:a16="http://schemas.microsoft.com/office/drawing/2014/main" id="{33358A61-5705-A1F7-E051-797E22A8C17B}"/>
+              </a:ext>
+            </a:extLst>
+          </p:cNvPr>
+          <p:cNvSpPr>
+            <a:spLocks noGrp="1"/>
+          </p:cNvSpPr>
+          <p:nvPr>
+            <p:ph idx="1"/>
+          </p:nvPr>
+        </p:nvSpPr>
+        <p:spPr>
+          <a:xfrm>
+            <a:off x="838200" y="2594292"/>
+            <a:ext cx="10515600" cy="1865948"/>
+          </a:xfrm>
+        </p:spPr>
+        <p:txBody>
+          <a:bodyPr>
+            <a:normAutofit/>
+          </a:bodyPr>
+          <a:lstStyle/>
+          <a:p>
+            <a:pPr marL="0" indent="0" algn="ctr">
+              <a:buNone/>
+            </a:pPr>
+            <a:r>
+              <a:rPr lang="pt-BR" sz="5400" dirty="0"/>
+              <a:t>Como definimos o número de </a:t>
+            </a:r>
+            <a:r>
+              <a:rPr lang="pt-BR" sz="5400" i="1" dirty="0"/>
+              <a:t>clusters</a:t>
+            </a:r>
+            <a:r>
+              <a:rPr lang="pt-BR" sz="5400" dirty="0"/>
+              <a:t>?</a:t>
+            </a:r>
+          </a:p>
+        </p:txBody>
+      </p:sp>
+    </p:spTree>
+    <p:extLst>
+      <p:ext uri="{BB962C8B-B14F-4D97-AF65-F5344CB8AC3E}">
+        <p14:creationId xmlns:p14="http://schemas.microsoft.com/office/powerpoint/2010/main" val="828297064"/>
+      </p:ext>
+    </p:extLst>
+  </p:cSld>
+  <p:clrMapOvr>
+    <a:masterClrMapping/>
+  </p:clrMapOvr>
+</p:sld>
+</file>
+
+<file path=ppt/slides/slide31.xml><?xml version="1.0" encoding="utf-8"?>
+<p:sld xmlns:a="http://schemas.openxmlformats.org/drawingml/2006/main" xmlns:r="http://schemas.openxmlformats.org/officeDocument/2006/relationships" xmlns:p="http://schemas.openxmlformats.org/presentationml/2006/main">
+  <p:cSld>
+    <p:spTree>
+      <p:nvGrpSpPr>
         <p:cNvPr id="1" name=""/>
         <p:cNvGrpSpPr/>
         <p:nvPr/>
@@ -11259,8 +11835,8 @@
           </a:p>
         </p:txBody>
       </p:sp>
-      <mc:AlternateContent xmlns:mc="http://schemas.openxmlformats.org/markup-compatibility/2006">
-        <mc:Choice xmlns:a14="http://schemas.microsoft.com/office/drawing/2010/main" Requires="a14">
+      <mc:AlternateContent xmlns:mc="http://schemas.openxmlformats.org/markup-compatibility/2006" xmlns:a14="http://schemas.microsoft.com/office/drawing/2010/main">
+        <mc:Choice Requires="a14">
           <p:sp>
             <p:nvSpPr>
               <p:cNvPr id="3" name="Content Placeholder 2">
@@ -11457,7 +12033,7 @@
             </p:txBody>
           </p:sp>
         </mc:Choice>
-        <mc:Fallback>
+        <mc:Fallback xmlns="">
           <p:sp>
             <p:nvSpPr>
               <p:cNvPr id="3" name="Content Placeholder 2">
@@ -11561,7 +12137,7 @@
 </p:sld>
 </file>
 
-<file path=ppt/slides/slide31.xml><?xml version="1.0" encoding="utf-8"?>
+<file path=ppt/slides/slide32.xml><?xml version="1.0" encoding="utf-8"?>
 <p:sld xmlns:a="http://schemas.openxmlformats.org/drawingml/2006/main" xmlns:r="http://schemas.openxmlformats.org/officeDocument/2006/relationships" xmlns:p="http://schemas.openxmlformats.org/presentationml/2006/main">
   <p:cSld>
     <p:spTree>
@@ -12260,7 +12836,7 @@
 </p:sld>
 </file>
 
-<file path=ppt/slides/slide32.xml><?xml version="1.0" encoding="utf-8"?>
+<file path=ppt/slides/slide33.xml><?xml version="1.0" encoding="utf-8"?>
 <p:sld xmlns:a="http://schemas.openxmlformats.org/drawingml/2006/main" xmlns:r="http://schemas.openxmlformats.org/officeDocument/2006/relationships" xmlns:p="http://schemas.openxmlformats.org/presentationml/2006/main">
   <p:cSld>
     <p:spTree>
@@ -12514,7 +13090,7 @@
 </p:sld>
 </file>
 
-<file path=ppt/slides/slide33.xml><?xml version="1.0" encoding="utf-8"?>
+<file path=ppt/slides/slide34.xml><?xml version="1.0" encoding="utf-8"?>
 <p:sld xmlns:a="http://schemas.openxmlformats.org/drawingml/2006/main" xmlns:r="http://schemas.openxmlformats.org/officeDocument/2006/relationships" xmlns:p="http://schemas.openxmlformats.org/presentationml/2006/main">
   <p:cSld>
     <p:spTree>
@@ -12739,7 +13315,7 @@
 </p:sld>
 </file>
 
-<file path=ppt/slides/slide34.xml><?xml version="1.0" encoding="utf-8"?>
+<file path=ppt/slides/slide35.xml><?xml version="1.0" encoding="utf-8"?>
 <p:sld xmlns:a="http://schemas.openxmlformats.org/drawingml/2006/main" xmlns:r="http://schemas.openxmlformats.org/officeDocument/2006/relationships" xmlns:p="http://schemas.openxmlformats.org/presentationml/2006/main">
   <p:cSld>
     <p:spTree>
@@ -12952,7 +13528,7 @@
 </p:sld>
 </file>
 
-<file path=ppt/slides/slide35.xml><?xml version="1.0" encoding="utf-8"?>
+<file path=ppt/slides/slide36.xml><?xml version="1.0" encoding="utf-8"?>
 <p:sld xmlns:a="http://schemas.openxmlformats.org/drawingml/2006/main" xmlns:r="http://schemas.openxmlformats.org/officeDocument/2006/relationships" xmlns:p="http://schemas.openxmlformats.org/presentationml/2006/main">
   <p:cSld>
     <p:spTree>
@@ -13132,7 +13708,7 @@
 </p:sld>
 </file>
 
-<file path=ppt/slides/slide36.xml><?xml version="1.0" encoding="utf-8"?>
+<file path=ppt/slides/slide37.xml><?xml version="1.0" encoding="utf-8"?>
 <p:sld xmlns:a="http://schemas.openxmlformats.org/drawingml/2006/main" xmlns:r="http://schemas.openxmlformats.org/officeDocument/2006/relationships" xmlns:p="http://schemas.openxmlformats.org/presentationml/2006/main">
   <p:cSld>
     <p:spTree>
@@ -13487,7 +14063,7 @@
 </p:sld>
 </file>
 
-<file path=ppt/slides/slide37.xml><?xml version="1.0" encoding="utf-8"?>
+<file path=ppt/slides/slide38.xml><?xml version="1.0" encoding="utf-8"?>
 <p:sld xmlns:a="http://schemas.openxmlformats.org/drawingml/2006/main" xmlns:r="http://schemas.openxmlformats.org/officeDocument/2006/relationships" xmlns:p="http://schemas.openxmlformats.org/presentationml/2006/main">
   <p:cSld>
     <p:spTree>
@@ -13558,11 +14134,15 @@
               <a:buNone/>
             </a:pPr>
             <a:r>
-              <a:rPr lang="pt-BR" dirty="0"/>
+              <a:rPr lang="pt-BR" dirty="0">
+                <a:hlinkClick r:id="rId2"/>
+              </a:rPr>
               <a:t>Lista #13 – </a:t>
             </a:r>
             <a:r>
-              <a:rPr lang="pt-BR" dirty="0" err="1"/>
+              <a:rPr lang="pt-BR" dirty="0" err="1">
+                <a:hlinkClick r:id="rId2"/>
+              </a:rPr>
               <a:t>kmeans</a:t>
             </a:r>
             <a:endParaRPr lang="en-US" dirty="0"/>
@@ -13582,7 +14162,7 @@
 </p:sld>
 </file>
 
-<file path=ppt/slides/slide38.xml><?xml version="1.0" encoding="utf-8"?>
+<file path=ppt/slides/slide39.xml><?xml version="1.0" encoding="utf-8"?>
 <p:sld xmlns:a="http://schemas.openxmlformats.org/drawingml/2006/main" xmlns:r="http://schemas.openxmlformats.org/officeDocument/2006/relationships" xmlns:p="http://schemas.openxmlformats.org/presentationml/2006/main">
   <p:cSld>
     <p:spTree>
@@ -13668,92 +14248,6 @@
 </p:sld>
 </file>
 
-<file path=ppt/slides/slide39.xml><?xml version="1.0" encoding="utf-8"?>
-<p:sld xmlns:a="http://schemas.openxmlformats.org/drawingml/2006/main" xmlns:r="http://schemas.openxmlformats.org/officeDocument/2006/relationships" xmlns:p="http://schemas.openxmlformats.org/presentationml/2006/main">
-  <p:cSld>
-    <p:spTree>
-      <p:nvGrpSpPr>
-        <p:cNvPr id="1" name=""/>
-        <p:cNvGrpSpPr/>
-        <p:nvPr/>
-      </p:nvGrpSpPr>
-      <p:grpSpPr>
-        <a:xfrm>
-          <a:off x="0" y="0"/>
-          <a:ext cx="0" cy="0"/>
-          <a:chOff x="0" y="0"/>
-          <a:chExt cx="0" cy="0"/>
-        </a:xfrm>
-      </p:grpSpPr>
-      <p:sp>
-        <p:nvSpPr>
-          <p:cNvPr id="4" name="Título 1">
-            <a:extLst>
-              <a:ext uri="{FF2B5EF4-FFF2-40B4-BE49-F238E27FC236}">
-                <a16:creationId xmlns:a16="http://schemas.microsoft.com/office/drawing/2014/main" id="{32666AC8-2E17-4DB4-B0F5-60C640CCFD2E}"/>
-              </a:ext>
-            </a:extLst>
-          </p:cNvPr>
-          <p:cNvSpPr txBox="1">
-            <a:spLocks/>
-          </p:cNvSpPr>
-          <p:nvPr/>
-        </p:nvSpPr>
-        <p:spPr>
-          <a:xfrm>
-            <a:off x="1431533" y="2720526"/>
-            <a:ext cx="9144000" cy="1029541"/>
-          </a:xfrm>
-          <a:prstGeom prst="rect">
-            <a:avLst/>
-          </a:prstGeom>
-        </p:spPr>
-        <p:txBody>
-          <a:bodyPr vert="horz" lIns="91440" tIns="45720" rIns="91440" bIns="45720" rtlCol="0" anchor="ctr">
-            <a:normAutofit/>
-          </a:bodyPr>
-          <a:lstStyle>
-            <a:lvl1pPr algn="l" defTabSz="914400" rtl="0" eaLnBrk="1" latinLnBrk="0" hangingPunct="1">
-              <a:lnSpc>
-                <a:spcPct val="90000"/>
-              </a:lnSpc>
-              <a:spcBef>
-                <a:spcPct val="0"/>
-              </a:spcBef>
-              <a:buNone/>
-              <a:defRPr sz="4400" kern="1200">
-                <a:solidFill>
-                  <a:schemeClr val="tx1"/>
-                </a:solidFill>
-                <a:latin typeface="+mj-lt"/>
-                <a:ea typeface="+mj-ea"/>
-                <a:cs typeface="+mj-cs"/>
-              </a:defRPr>
-            </a:lvl1pPr>
-          </a:lstStyle>
-          <a:p>
-            <a:pPr algn="ctr"/>
-            <a:r>
-              <a:rPr lang="pt-BR" sz="6600" dirty="0"/>
-              <a:t>Obrigado!</a:t>
-            </a:r>
-            <a:endParaRPr lang="pt-BR" sz="6600" b="1" i="1" dirty="0"/>
-          </a:p>
-        </p:txBody>
-      </p:sp>
-    </p:spTree>
-    <p:extLst>
-      <p:ext uri="{BB962C8B-B14F-4D97-AF65-F5344CB8AC3E}">
-        <p14:creationId xmlns:p14="http://schemas.microsoft.com/office/powerpoint/2010/main" val="2655704619"/>
-      </p:ext>
-    </p:extLst>
-  </p:cSld>
-  <p:clrMapOvr>
-    <a:masterClrMapping/>
-  </p:clrMapOvr>
-</p:sld>
-</file>
-
 <file path=ppt/slides/slide4.xml><?xml version="1.0" encoding="utf-8"?>
 <p:sld xmlns:a="http://schemas.openxmlformats.org/drawingml/2006/main" xmlns:r="http://schemas.openxmlformats.org/officeDocument/2006/relationships" xmlns:p="http://schemas.openxmlformats.org/presentationml/2006/main">
   <p:cSld>
@@ -13817,7 +14311,19 @@
           <a:p>
             <a:r>
               <a:rPr lang="pt-BR" dirty="0"/>
-              <a:t>O que podemos fazer se não tivermos informações sobre as classes (i.e., rótulos) a que pertencem os exemplos de entrada?</a:t>
+              <a:t>O que podemos fazer se </a:t>
+            </a:r>
+            <a:r>
+              <a:rPr lang="pt-BR" b="1" dirty="0">
+                <a:solidFill>
+                  <a:schemeClr val="accent2"/>
+                </a:solidFill>
+              </a:rPr>
+              <a:t>não tivermos informações sobre as classes </a:t>
+            </a:r>
+            <a:r>
+              <a:rPr lang="pt-BR" dirty="0"/>
+              <a:t>(i.e., rótulos) a que pertencem os exemplos de entrada?</a:t>
             </a:r>
           </a:p>
         </p:txBody>
@@ -13875,6 +14381,92 @@
 </file>
 
 <file path=ppt/slides/slide40.xml><?xml version="1.0" encoding="utf-8"?>
+<p:sld xmlns:a="http://schemas.openxmlformats.org/drawingml/2006/main" xmlns:r="http://schemas.openxmlformats.org/officeDocument/2006/relationships" xmlns:p="http://schemas.openxmlformats.org/presentationml/2006/main">
+  <p:cSld>
+    <p:spTree>
+      <p:nvGrpSpPr>
+        <p:cNvPr id="1" name=""/>
+        <p:cNvGrpSpPr/>
+        <p:nvPr/>
+      </p:nvGrpSpPr>
+      <p:grpSpPr>
+        <a:xfrm>
+          <a:off x="0" y="0"/>
+          <a:ext cx="0" cy="0"/>
+          <a:chOff x="0" y="0"/>
+          <a:chExt cx="0" cy="0"/>
+        </a:xfrm>
+      </p:grpSpPr>
+      <p:sp>
+        <p:nvSpPr>
+          <p:cNvPr id="4" name="Título 1">
+            <a:extLst>
+              <a:ext uri="{FF2B5EF4-FFF2-40B4-BE49-F238E27FC236}">
+                <a16:creationId xmlns:a16="http://schemas.microsoft.com/office/drawing/2014/main" id="{32666AC8-2E17-4DB4-B0F5-60C640CCFD2E}"/>
+              </a:ext>
+            </a:extLst>
+          </p:cNvPr>
+          <p:cNvSpPr txBox="1">
+            <a:spLocks/>
+          </p:cNvSpPr>
+          <p:nvPr/>
+        </p:nvSpPr>
+        <p:spPr>
+          <a:xfrm>
+            <a:off x="1431533" y="2720526"/>
+            <a:ext cx="9144000" cy="1029541"/>
+          </a:xfrm>
+          <a:prstGeom prst="rect">
+            <a:avLst/>
+          </a:prstGeom>
+        </p:spPr>
+        <p:txBody>
+          <a:bodyPr vert="horz" lIns="91440" tIns="45720" rIns="91440" bIns="45720" rtlCol="0" anchor="ctr">
+            <a:normAutofit/>
+          </a:bodyPr>
+          <a:lstStyle>
+            <a:lvl1pPr algn="l" defTabSz="914400" rtl="0" eaLnBrk="1" latinLnBrk="0" hangingPunct="1">
+              <a:lnSpc>
+                <a:spcPct val="90000"/>
+              </a:lnSpc>
+              <a:spcBef>
+                <a:spcPct val="0"/>
+              </a:spcBef>
+              <a:buNone/>
+              <a:defRPr sz="4400" kern="1200">
+                <a:solidFill>
+                  <a:schemeClr val="tx1"/>
+                </a:solidFill>
+                <a:latin typeface="+mj-lt"/>
+                <a:ea typeface="+mj-ea"/>
+                <a:cs typeface="+mj-cs"/>
+              </a:defRPr>
+            </a:lvl1pPr>
+          </a:lstStyle>
+          <a:p>
+            <a:pPr algn="ctr"/>
+            <a:r>
+              <a:rPr lang="pt-BR" sz="6600" dirty="0"/>
+              <a:t>Obrigado!</a:t>
+            </a:r>
+            <a:endParaRPr lang="pt-BR" sz="6600" b="1" i="1" dirty="0"/>
+          </a:p>
+        </p:txBody>
+      </p:sp>
+    </p:spTree>
+    <p:extLst>
+      <p:ext uri="{BB962C8B-B14F-4D97-AF65-F5344CB8AC3E}">
+        <p14:creationId xmlns:p14="http://schemas.microsoft.com/office/powerpoint/2010/main" val="2655704619"/>
+      </p:ext>
+    </p:extLst>
+  </p:cSld>
+  <p:clrMapOvr>
+    <a:masterClrMapping/>
+  </p:clrMapOvr>
+</p:sld>
+</file>
+
+<file path=ppt/slides/slide41.xml><?xml version="1.0" encoding="utf-8"?>
 <p:sld xmlns:a="http://schemas.openxmlformats.org/drawingml/2006/main" xmlns:r="http://schemas.openxmlformats.org/officeDocument/2006/relationships" xmlns:p="http://schemas.openxmlformats.org/presentationml/2006/main">
   <p:cSld>
     <p:spTree>
@@ -14176,33 +14768,49 @@
         </p:nvSpPr>
         <p:spPr>
           <a:xfrm>
-            <a:off x="838199" y="4027637"/>
-            <a:ext cx="11353801" cy="2830362"/>
+            <a:off x="838199" y="4828825"/>
+            <a:ext cx="11211561" cy="2029173"/>
           </a:xfrm>
         </p:spPr>
         <p:txBody>
           <a:bodyPr>
-            <a:normAutofit lnSpcReduction="10000"/>
+            <a:normAutofit/>
           </a:bodyPr>
           <a:lstStyle/>
           <a:p>
             <a:r>
               <a:rPr lang="pt-BR" dirty="0"/>
-              <a:t>Veremos que informações úteis podem ser obtidas mesmo de exemplos cujas classes não são conhecidas.</a:t>
-            </a:r>
-          </a:p>
-          <a:p>
-            <a:r>
-              <a:rPr lang="pt-BR" dirty="0"/>
-              <a:t>Enquanto o </a:t>
+              <a:t>O </a:t>
             </a:r>
             <a:r>
               <a:rPr lang="pt-BR" b="1" dirty="0"/>
-              <a:t>aprendizado supervisionado </a:t>
-            </a:r>
-            <a:r>
-              <a:rPr lang="pt-BR" dirty="0"/>
-              <a:t>se concentra na </a:t>
+              <a:t>aprendizado não-supervisionado</a:t>
+            </a:r>
+            <a:r>
+              <a:rPr lang="pt-BR" dirty="0"/>
+              <a:t> </a:t>
+            </a:r>
+            <a:r>
+              <a:rPr lang="pt-BR" b="1" dirty="0">
+                <a:solidFill>
+                  <a:srgbClr val="7030A0"/>
+                </a:solidFill>
+              </a:rPr>
+              <a:t>extrai estrutura e informações úteis de dados sem rótulos</a:t>
+            </a:r>
+            <a:r>
+              <a:rPr lang="pt-BR" dirty="0"/>
+              <a:t>.</a:t>
+            </a:r>
+          </a:p>
+          <a:p>
+            <a:r>
+              <a:rPr lang="pt-BR" i="1" dirty="0"/>
+              <a:t>Clustering</a:t>
+            </a:r>
+            <a:r>
+              <a:rPr lang="pt-BR" dirty="0"/>
+              <a:t> tenta </a:t>
             </a:r>
             <a:r>
               <a:rPr lang="pt-BR" b="1" dirty="0">
@@ -14210,41 +14818,31 @@
                   <a:srgbClr val="00B050"/>
                 </a:solidFill>
               </a:rPr>
-              <a:t>indução de classificadores</a:t>
-            </a:r>
-            <a:r>
-              <a:rPr lang="pt-BR" dirty="0"/>
-              <a:t>, o </a:t>
-            </a:r>
-            <a:r>
-              <a:rPr lang="pt-BR" b="1" dirty="0"/>
-              <a:t>aprendizado não-supervisionado </a:t>
-            </a:r>
-            <a:r>
-              <a:rPr lang="pt-BR" dirty="0"/>
-              <a:t>está interessado em </a:t>
+              <a:t>reproduzir como humanos organizam o mundo</a:t>
+            </a:r>
+            <a:r>
+              <a:rPr lang="pt-BR" dirty="0"/>
+              <a:t>: </a:t>
             </a:r>
             <a:r>
               <a:rPr lang="pt-BR" b="1" dirty="0">
                 <a:solidFill>
-                  <a:srgbClr val="7030A0"/>
+                  <a:schemeClr val="accent2"/>
                 </a:solidFill>
               </a:rPr>
-              <a:t>extrair estrutura e conhecimento de dados quando não existem rótulos</a:t>
-            </a:r>
-            <a:r>
-              <a:rPr lang="pt-BR" dirty="0"/>
-              <a:t>.</a:t>
-            </a:r>
-          </a:p>
-          <a:p>
-            <a:r>
-              <a:rPr lang="pt-BR" i="1" dirty="0"/>
-              <a:t>Clustering</a:t>
-            </a:r>
-            <a:r>
-              <a:rPr lang="pt-BR" dirty="0"/>
-              <a:t> tenta reproduzir como humanos organizam o mundo: agrupamos objetos por similaridade</a:t>
+              <a:t>agrupamos</a:t>
+            </a:r>
+            <a:r>
+              <a:rPr lang="pt-BR" dirty="0"/>
+              <a:t> objetos </a:t>
+            </a:r>
+            <a:r>
+              <a:rPr lang="pt-BR" b="1" dirty="0">
+                <a:solidFill>
+                  <a:schemeClr val="accent2"/>
+                </a:solidFill>
+              </a:rPr>
+              <a:t>por similaridade.</a:t>
             </a:r>
           </a:p>
         </p:txBody>
@@ -14263,8 +14861,8 @@
         </p:nvGrpSpPr>
         <p:grpSpPr>
           <a:xfrm>
-            <a:off x="3115576" y="1690688"/>
-            <a:ext cx="5960847" cy="2029172"/>
+            <a:off x="2543308" y="1690688"/>
+            <a:ext cx="7105384" cy="2759392"/>
             <a:chOff x="3186691" y="4631401"/>
             <a:chExt cx="5960847" cy="2029172"/>
           </a:xfrm>
@@ -14576,11 +15174,27 @@
             </a:r>
             <a:r>
               <a:rPr lang="pt-BR" b="1" dirty="0"/>
-              <a:t>com base em similaridade</a:t>
-            </a:r>
-            <a:r>
-              <a:rPr lang="pt-BR" dirty="0"/>
-              <a:t> sem precisar de supervisão.</a:t>
+              <a:t>com base em </a:t>
+            </a:r>
+            <a:r>
+              <a:rPr lang="pt-BR" b="1" dirty="0">
+                <a:solidFill>
+                  <a:srgbClr val="00B050"/>
+                </a:solidFill>
+              </a:rPr>
+              <a:t>similaridade</a:t>
+            </a:r>
+            <a:r>
+              <a:rPr lang="pt-BR" dirty="0"/>
+              <a:t> </a:t>
+            </a:r>
+            <a:r>
+              <a:rPr lang="pt-BR" b="1" dirty="0"/>
+              <a:t>sem precisar de supervisão</a:t>
+            </a:r>
+            <a:r>
+              <a:rPr lang="pt-BR" dirty="0"/>
+              <a:t>.</a:t>
             </a:r>
           </a:p>
           <a:p>
@@ -14850,7 +15464,7 @@
             </a:r>
             <a:r>
               <a:rPr lang="pt-BR" dirty="0"/>
-              <a:t> é um conjunto de </a:t>
+              <a:t> é um conjunto dos </a:t>
             </a:r>
             <a:r>
               <a:rPr lang="pt-BR" b="1" i="1" dirty="0">
@@ -15042,8 +15656,8 @@
         </p:nvSpPr>
         <p:spPr>
           <a:xfrm>
-            <a:off x="7282335" y="5041169"/>
-            <a:ext cx="4223866" cy="1323439"/>
+            <a:off x="7328635" y="5041169"/>
+            <a:ext cx="4442305" cy="1323439"/>
           </a:xfrm>
           <a:prstGeom prst="rect">
             <a:avLst/>
@@ -15062,7 +15676,23 @@
             </a:r>
             <a:r>
               <a:rPr lang="pt-BR" sz="1600" dirty="0"/>
-              <a:t>.: A identificação visual de clusters em um espaço bidimensional é fácil, mas em quatro ou mais dimensões isso já não é mais possível. Nesses casos, apenas algoritmos de identificação de clusters conseguem agrupar os dados. </a:t>
+              <a:t>.: A identificação visual de </a:t>
+            </a:r>
+            <a:r>
+              <a:rPr lang="pt-BR" sz="1600" i="1" dirty="0"/>
+              <a:t>clusters</a:t>
+            </a:r>
+            <a:r>
+              <a:rPr lang="pt-BR" sz="1600" dirty="0"/>
+              <a:t> em um espaço bi ou tridimensional é fácil, mas em quatro ou mais dimensões isso já não é mais possível. Nesses casos, apenas algoritmos de identificação de </a:t>
+            </a:r>
+            <a:r>
+              <a:rPr lang="pt-BR" sz="1600" i="1" dirty="0"/>
+              <a:t>clusters</a:t>
+            </a:r>
+            <a:r>
+              <a:rPr lang="pt-BR" sz="1600" dirty="0"/>
+              <a:t> conseguem agrupar os dados. </a:t>
             </a:r>
           </a:p>
         </p:txBody>
@@ -15144,12 +15774,14 @@
         </p:nvSpPr>
         <p:spPr>
           <a:xfrm>
-            <a:off x="5377542" y="1825624"/>
-            <a:ext cx="6814457" cy="5032375"/>
+            <a:off x="5171440" y="1825624"/>
+            <a:ext cx="7020559" cy="5032375"/>
           </a:xfrm>
         </p:spPr>
         <p:txBody>
-          <a:bodyPr/>
+          <a:bodyPr>
+            <a:normAutofit/>
+          </a:bodyPr>
           <a:lstStyle/>
           <a:p>
             <a:r>
@@ -15163,6 +15795,14 @@
             <a:r>
               <a:rPr lang="en-US" dirty="0" err="1"/>
               <a:t>complexidade</a:t>
+            </a:r>
+            <a:r>
+              <a:rPr lang="en-US" dirty="0"/>
+              <a:t> e</a:t>
+            </a:r>
+            <a:r>
+              <a:rPr lang="pt-BR" dirty="0"/>
+              <a:t> dimensionalidade</a:t>
             </a:r>
             <a:endParaRPr lang="en-US" dirty="0"/>
           </a:p>
@@ -15173,7 +15813,53 @@
             </a:pPr>
             <a:r>
               <a:rPr lang="pt-BR" dirty="0"/>
-              <a:t>substituir milhões de pontos por alguns grupos </a:t>
+              <a:t>Em um </a:t>
+            </a:r>
+            <a:r>
+              <a:rPr lang="pt-BR" b="1" dirty="0">
+                <a:solidFill>
+                  <a:schemeClr val="accent2"/>
+                </a:solidFill>
+              </a:rPr>
+              <a:t>conjunto muito grande de dados</a:t>
+            </a:r>
+            <a:r>
+              <a:rPr lang="pt-BR" dirty="0"/>
+              <a:t>, podemos </a:t>
+            </a:r>
+            <a:r>
+              <a:rPr lang="pt-BR" b="1" dirty="0">
+                <a:solidFill>
+                  <a:schemeClr val="accent2"/>
+                </a:solidFill>
+              </a:rPr>
+              <a:t>armazenar os centroides</a:t>
+            </a:r>
+            <a:r>
+              <a:rPr lang="pt-BR" dirty="0"/>
+              <a:t> </a:t>
+            </a:r>
+            <a:r>
+              <a:rPr lang="pt-BR" b="1" dirty="0">
+                <a:solidFill>
+                  <a:schemeClr val="accent2"/>
+                </a:solidFill>
+              </a:rPr>
+              <a:t>e/ou os índices correspondentes aos vetores de atributo</a:t>
+            </a:r>
+            <a:r>
+              <a:rPr lang="pt-BR" dirty="0"/>
+              <a:t> ao invés de todos os vetores de atributo.</a:t>
+            </a:r>
+          </a:p>
+          <a:p>
+            <a:pPr lvl="2">
+              <a:buFont typeface="Courier New" panose="02070309020205020404" pitchFamily="49" charset="0"/>
+              <a:buChar char="o"/>
+            </a:pPr>
+            <a:r>
+              <a:rPr lang="pt-BR" dirty="0"/>
+              <a:t>Pode ser usado para comprimir imagens.</a:t>
             </a:r>
           </a:p>
           <a:p>
@@ -15182,116 +15868,29 @@
               <a:buChar char="§"/>
             </a:pPr>
             <a:r>
-              <a:rPr lang="pt-BR" dirty="0"/>
-              <a:t>resumir dados complexos</a:t>
-            </a:r>
-            <a:endParaRPr lang="en-US" dirty="0"/>
-          </a:p>
-          <a:p>
-            <a:r>
-              <a:rPr lang="en-US" dirty="0"/>
-              <a:t>Pré-</a:t>
-            </a:r>
-            <a:r>
-              <a:rPr lang="en-US" dirty="0" err="1"/>
-              <a:t>processamento</a:t>
-            </a:r>
-            <a:r>
-              <a:rPr lang="en-US" dirty="0"/>
-              <a:t> para outros </a:t>
-            </a:r>
-            <a:r>
-              <a:rPr lang="en-US" dirty="0" err="1"/>
-              <a:t>modelos</a:t>
-            </a:r>
-            <a:endParaRPr lang="en-US" dirty="0"/>
-          </a:p>
-          <a:p>
-            <a:pPr lvl="1">
-              <a:buFont typeface="Wingdings" panose="05000000000000000000" pitchFamily="2" charset="2"/>
-              <a:buChar char="§"/>
-            </a:pPr>
-            <a:r>
-              <a:rPr lang="pt-BR" dirty="0"/>
-              <a:t>criar features (cluster ID)</a:t>
-            </a:r>
-          </a:p>
-          <a:p>
-            <a:pPr lvl="1">
-              <a:buFont typeface="Wingdings" panose="05000000000000000000" pitchFamily="2" charset="2"/>
-              <a:buChar char="§"/>
-            </a:pPr>
-            <a:r>
-              <a:rPr lang="pt-BR" dirty="0"/>
-              <a:t>inicializar modelos</a:t>
-            </a:r>
-          </a:p>
-          <a:p>
-            <a:pPr lvl="1">
-              <a:buFont typeface="Wingdings" panose="05000000000000000000" pitchFamily="2" charset="2"/>
-              <a:buChar char="§"/>
-            </a:pPr>
-            <a:r>
-              <a:rPr lang="pt-BR" dirty="0"/>
-              <a:t>reduzir dimensionalidade</a:t>
-            </a:r>
-          </a:p>
-          <a:p>
-            <a:pPr lvl="1">
-              <a:buFont typeface="Wingdings" panose="05000000000000000000" pitchFamily="2" charset="2"/>
-              <a:buChar char="§"/>
-            </a:pPr>
-            <a:r>
-              <a:rPr lang="pt-BR" dirty="0"/>
-              <a:t>organizar dados antes de aprendizado supervisionado</a:t>
-            </a:r>
-          </a:p>
-          <a:p>
-            <a:r>
-              <a:rPr lang="en-US" dirty="0" err="1"/>
-              <a:t>Detecção</a:t>
-            </a:r>
-            <a:r>
-              <a:rPr lang="en-US" dirty="0"/>
-              <a:t> de </a:t>
-            </a:r>
-            <a:r>
-              <a:rPr lang="en-US" dirty="0" err="1"/>
-              <a:t>padrões</a:t>
-            </a:r>
-            <a:r>
-              <a:rPr lang="en-US" dirty="0"/>
-              <a:t> </a:t>
-            </a:r>
-            <a:r>
-              <a:rPr lang="en-US" dirty="0" err="1"/>
-              <a:t>raros</a:t>
-            </a:r>
-            <a:endParaRPr lang="en-US" dirty="0"/>
-          </a:p>
-          <a:p>
-            <a:pPr lvl="1">
-              <a:buFont typeface="Wingdings" panose="05000000000000000000" pitchFamily="2" charset="2"/>
-              <a:buChar char="§"/>
-            </a:pPr>
-            <a:r>
-              <a:rPr lang="pt-BR" dirty="0"/>
-              <a:t>detector de comportamento “normal”</a:t>
-            </a:r>
-          </a:p>
-          <a:p>
-            <a:pPr lvl="1">
-              <a:buFont typeface="Wingdings" panose="05000000000000000000" pitchFamily="2" charset="2"/>
-              <a:buChar char="§"/>
-            </a:pPr>
-            <a:r>
-              <a:rPr lang="pt-BR" dirty="0"/>
-              <a:t>tudo fora disso é considerado suspeito</a:t>
-            </a:r>
-            <a:endParaRPr lang="en-US" dirty="0"/>
-          </a:p>
-          <a:p>
-            <a:pPr lvl="1"/>
+              <a:rPr lang="pt-BR" b="1" dirty="0">
+                <a:solidFill>
+                  <a:srgbClr val="7030A0"/>
+                </a:solidFill>
+              </a:rPr>
+              <a:t>Vetores de atributo muito longos </a:t>
+            </a:r>
+            <a:r>
+              <a:rPr lang="pt-BR" dirty="0"/>
+              <a:t>podem ser representados por um </a:t>
+            </a:r>
+            <a:r>
+              <a:rPr lang="pt-BR" b="1" dirty="0">
+                <a:solidFill>
+                  <a:srgbClr val="7030A0"/>
+                </a:solidFill>
+              </a:rPr>
+              <a:t>vetor com as distâncias a um conjunto de centroides</a:t>
+            </a:r>
+            <a:r>
+              <a:rPr lang="pt-BR" dirty="0"/>
+              <a:t>.</a:t>
+            </a:r>
             <a:endParaRPr lang="en-US" dirty="0"/>
           </a:p>
         </p:txBody>
@@ -15359,7 +15958,13 @@
   <p:cSld>
     <p:spTree>
       <p:nvGrpSpPr>
-        <p:cNvPr id="1" name=""/>
+        <p:cNvPr id="1" name="">
+          <a:extLst>
+            <a:ext uri="{FF2B5EF4-FFF2-40B4-BE49-F238E27FC236}">
+              <a16:creationId xmlns:a16="http://schemas.microsoft.com/office/drawing/2014/main" id="{3A831676-6BED-CA70-6524-D513003AAAD0}"/>
+            </a:ext>
+          </a:extLst>
+        </p:cNvPr>
         <p:cNvGrpSpPr/>
         <p:nvPr/>
       </p:nvGrpSpPr>
@@ -15373,7 +15978,13 @@
       </p:grpSpPr>
       <p:sp>
         <p:nvSpPr>
-          <p:cNvPr id="2" name="Título 1"/>
+          <p:cNvPr id="2" name="Title 1">
+            <a:extLst>
+              <a:ext uri="{FF2B5EF4-FFF2-40B4-BE49-F238E27FC236}">
+                <a16:creationId xmlns:a16="http://schemas.microsoft.com/office/drawing/2014/main" id="{04A038D5-B823-B9FD-D23F-5029CC44B85D}"/>
+              </a:ext>
+            </a:extLst>
+          </p:cNvPr>
           <p:cNvSpPr>
             <a:spLocks noGrp="1"/>
           </p:cNvSpPr>
@@ -15387,39 +15998,22 @@
           <a:lstStyle/>
           <a:p>
             <a:r>
-              <a:rPr lang="en-US" dirty="0"/>
-              <a:t>Como </a:t>
-            </a:r>
-            <a:r>
-              <a:rPr lang="en-US" dirty="0" err="1"/>
-              <a:t>representar</a:t>
-            </a:r>
-            <a:r>
-              <a:rPr lang="en-US" dirty="0"/>
-              <a:t> </a:t>
-            </a:r>
-            <a:r>
-              <a:rPr lang="en-US" dirty="0" err="1"/>
-              <a:t>os</a:t>
-            </a:r>
-            <a:r>
-              <a:rPr lang="en-US" dirty="0"/>
-              <a:t> </a:t>
-            </a:r>
-            <a:r>
-              <a:rPr lang="en-US" i="1" dirty="0"/>
-              <a:t>clusters</a:t>
-            </a:r>
-            <a:r>
-              <a:rPr lang="en-US" dirty="0"/>
-              <a:t>?</a:t>
-            </a:r>
+              <a:rPr lang="pt-BR" dirty="0"/>
+              <a:t>Aplicações</a:t>
+            </a:r>
+            <a:endParaRPr lang="en-US" dirty="0"/>
           </a:p>
         </p:txBody>
       </p:sp>
       <p:sp>
         <p:nvSpPr>
-          <p:cNvPr id="3" name="Espaço Reservado para Conteúdo 2"/>
+          <p:cNvPr id="3" name="Content Placeholder 2">
+            <a:extLst>
+              <a:ext uri="{FF2B5EF4-FFF2-40B4-BE49-F238E27FC236}">
+                <a16:creationId xmlns:a16="http://schemas.microsoft.com/office/drawing/2014/main" id="{7A9B68C4-7FDA-1A4B-497F-F6FD37E35497}"/>
+              </a:ext>
+            </a:extLst>
+          </p:cNvPr>
           <p:cNvSpPr>
             <a:spLocks noGrp="1"/>
           </p:cNvSpPr>
@@ -15429,8 +16023,8 @@
         </p:nvSpPr>
         <p:spPr>
           <a:xfrm>
-            <a:off x="5257799" y="1825624"/>
-            <a:ext cx="6825343" cy="5032375"/>
+            <a:off x="3952240" y="1825624"/>
+            <a:ext cx="8239760" cy="5032375"/>
           </a:xfrm>
         </p:spPr>
         <p:txBody>
@@ -15440,90 +16034,162 @@
           <a:lstStyle/>
           <a:p>
             <a:r>
-              <a:rPr lang="pt-BR" dirty="0"/>
-              <a:t>Para realizar a identificação, temos que </a:t>
-            </a:r>
-            <a:r>
-              <a:rPr lang="pt-BR" b="1" dirty="0">
-                <a:solidFill>
-                  <a:srgbClr val="00B050"/>
-                </a:solidFill>
-              </a:rPr>
-              <a:t>decidir como os </a:t>
-            </a:r>
-            <a:r>
-              <a:rPr lang="pt-BR" b="1" i="1" dirty="0">
-                <a:solidFill>
-                  <a:srgbClr val="00B050"/>
-                </a:solidFill>
-              </a:rPr>
+              <a:rPr lang="en-US" dirty="0" err="1"/>
+              <a:t>Detecção</a:t>
+            </a:r>
+            <a:r>
+              <a:rPr lang="en-US" dirty="0"/>
+              <a:t> de </a:t>
+            </a:r>
+            <a:r>
+              <a:rPr lang="en-US" dirty="0" err="1"/>
+              <a:t>padrões</a:t>
+            </a:r>
+            <a:r>
+              <a:rPr lang="en-US" dirty="0"/>
+              <a:t> </a:t>
+            </a:r>
+            <a:r>
+              <a:rPr lang="en-US" dirty="0" err="1"/>
+              <a:t>raros</a:t>
+            </a:r>
+            <a:endParaRPr lang="en-US" dirty="0"/>
+          </a:p>
+          <a:p>
+            <a:pPr lvl="1">
+              <a:buFont typeface="Wingdings" panose="05000000000000000000" pitchFamily="2" charset="2"/>
+              <a:buChar char="§"/>
+            </a:pPr>
+            <a:r>
+              <a:rPr lang="pt-BR" dirty="0"/>
+              <a:t>detector de comportamento “normal”</a:t>
+            </a:r>
+          </a:p>
+          <a:p>
+            <a:pPr lvl="1">
+              <a:buFont typeface="Wingdings" panose="05000000000000000000" pitchFamily="2" charset="2"/>
+              <a:buChar char="§"/>
+            </a:pPr>
+            <a:r>
+              <a:rPr lang="pt-BR" dirty="0"/>
+              <a:t>tudo fora disso é considerado suspeito</a:t>
+            </a:r>
+            <a:endParaRPr lang="en-US" dirty="0"/>
+          </a:p>
+          <a:p>
+            <a:r>
+              <a:rPr lang="en-US" dirty="0"/>
+              <a:t>Pré-</a:t>
+            </a:r>
+            <a:r>
+              <a:rPr lang="en-US" dirty="0" err="1"/>
+              <a:t>processamento</a:t>
+            </a:r>
+            <a:r>
+              <a:rPr lang="en-US" dirty="0"/>
+              <a:t> para outros </a:t>
+            </a:r>
+            <a:r>
+              <a:rPr lang="en-US" dirty="0" err="1"/>
+              <a:t>modelos</a:t>
+            </a:r>
+            <a:endParaRPr lang="en-US" dirty="0"/>
+          </a:p>
+          <a:p>
+            <a:pPr lvl="1">
+              <a:buFont typeface="Wingdings" panose="05000000000000000000" pitchFamily="2" charset="2"/>
+              <a:buChar char="§"/>
+            </a:pPr>
+            <a:r>
+              <a:rPr lang="pt-BR" dirty="0"/>
+              <a:t>criar novos atributos </a:t>
+            </a:r>
+          </a:p>
+          <a:p>
+            <a:pPr lvl="2">
+              <a:buFont typeface="Courier New" panose="02070309020205020404" pitchFamily="49" charset="0"/>
+              <a:buChar char="o"/>
+            </a:pPr>
+            <a:r>
+              <a:rPr lang="pt-BR" dirty="0"/>
+              <a:t>e.g., o índice do </a:t>
+            </a:r>
+            <a:r>
+              <a:rPr lang="pt-BR" i="1" dirty="0"/>
+              <a:t>cluster</a:t>
+            </a:r>
+            <a:r>
+              <a:rPr lang="pt-BR" dirty="0"/>
+              <a:t>, distâncias até os </a:t>
+            </a:r>
+            <a:r>
+              <a:rPr lang="pt-BR" i="1" dirty="0"/>
               <a:t>clusters</a:t>
             </a:r>
-            <a:r>
-              <a:rPr lang="pt-BR" b="1" dirty="0">
-                <a:solidFill>
-                  <a:srgbClr val="00B050"/>
-                </a:solidFill>
-              </a:rPr>
-              <a:t> serão representados</a:t>
-            </a:r>
-            <a:r>
-              <a:rPr lang="pt-BR" dirty="0"/>
-              <a:t>.</a:t>
-            </a:r>
-          </a:p>
-          <a:p>
-            <a:r>
-              <a:rPr lang="pt-BR" dirty="0"/>
-              <a:t>Existem algumas opções como a densidade, distribuição, hierarquia, etc.</a:t>
-            </a:r>
-          </a:p>
-          <a:p>
-            <a:r>
-              <a:rPr lang="pt-BR" dirty="0"/>
-              <a:t>Porém, a abordagem mais simples usa os </a:t>
-            </a:r>
-            <a:r>
-              <a:rPr lang="pt-BR" b="1" dirty="0"/>
-              <a:t>centroides </a:t>
-            </a:r>
-            <a:r>
-              <a:rPr lang="pt-BR" dirty="0"/>
-              <a:t>(i.e., centros) dos clusters.</a:t>
-            </a:r>
-          </a:p>
-          <a:p>
-            <a:r>
-              <a:rPr lang="pt-BR" dirty="0"/>
-              <a:t>O algoritmo conhecido como </a:t>
-            </a:r>
-            <a:r>
-              <a:rPr lang="pt-BR" b="1" i="1" dirty="0"/>
-              <a:t>k-</a:t>
-            </a:r>
-            <a:r>
-              <a:rPr lang="pt-BR" b="1" i="1" dirty="0" err="1"/>
-              <a:t>Means</a:t>
-            </a:r>
-            <a:r>
-              <a:rPr lang="pt-BR" dirty="0"/>
-              <a:t> implementa esta abordagem.</a:t>
-            </a:r>
-          </a:p>
-          <a:p>
-            <a:r>
-              <a:rPr lang="pt-BR" dirty="0"/>
-              <a:t>Vejamos então suas características e como funciona.</a:t>
+            <a:endParaRPr lang="pt-BR" dirty="0"/>
+          </a:p>
+          <a:p>
+            <a:pPr lvl="1">
+              <a:buFont typeface="Wingdings" panose="05000000000000000000" pitchFamily="2" charset="2"/>
+              <a:buChar char="§"/>
+            </a:pPr>
+            <a:r>
+              <a:rPr lang="pt-BR" dirty="0"/>
+              <a:t>inicializar modelos</a:t>
+            </a:r>
+          </a:p>
+          <a:p>
+            <a:pPr lvl="2">
+              <a:buFont typeface="Courier New" panose="02070309020205020404" pitchFamily="49" charset="0"/>
+              <a:buChar char="o"/>
+            </a:pPr>
+            <a:r>
+              <a:rPr lang="pt-BR" dirty="0"/>
+              <a:t>Muitos algoritmos (e.g., GMM) precisam definir centros iniciais.</a:t>
+            </a:r>
+          </a:p>
+          <a:p>
+            <a:pPr lvl="1">
+              <a:buFont typeface="Wingdings" panose="05000000000000000000" pitchFamily="2" charset="2"/>
+              <a:buChar char="§"/>
+            </a:pPr>
+            <a:r>
+              <a:rPr lang="pt-BR" dirty="0"/>
+              <a:t>organizar dados antes do treinamento de modelos de aprendizado supervisionado</a:t>
+            </a:r>
+          </a:p>
+          <a:p>
+            <a:pPr lvl="2">
+              <a:buFont typeface="Courier New" panose="02070309020205020404" pitchFamily="49" charset="0"/>
+              <a:buChar char="o"/>
+            </a:pPr>
+            <a:r>
+              <a:rPr lang="pt-BR" dirty="0"/>
+              <a:t>Identificar subgrupos implícitos (e.g., para treinar um modelo específico para cada subgrupo)</a:t>
+            </a:r>
+          </a:p>
+          <a:p>
+            <a:pPr lvl="2">
+              <a:buFont typeface="Courier New" panose="02070309020205020404" pitchFamily="49" charset="0"/>
+              <a:buChar char="o"/>
+            </a:pPr>
+            <a:r>
+              <a:rPr lang="pt-BR" dirty="0"/>
+              <a:t>Detecção de </a:t>
+            </a:r>
+            <a:r>
+              <a:rPr lang="pt-BR" i="1" dirty="0"/>
+              <a:t>outliers</a:t>
             </a:r>
           </a:p>
         </p:txBody>
       </p:sp>
       <p:pic>
         <p:nvPicPr>
-          <p:cNvPr id="1028" name="Picture 4" descr="K Means Clustering no Aprendizado de Máquinas — Aprendizado de Máquina —  DATA SCIENCE">
+          <p:cNvPr id="5" name="Picture 2" descr="K-means clustering on the digits dataset (PCA-reduced data) Centroids are marked with white cross">
             <a:extLst>
               <a:ext uri="{FF2B5EF4-FFF2-40B4-BE49-F238E27FC236}">
-                <a16:creationId xmlns:a16="http://schemas.microsoft.com/office/drawing/2014/main" id="{D99905E1-3749-BAAD-E01A-C9B3686C4770}"/>
+                <a16:creationId xmlns:a16="http://schemas.microsoft.com/office/drawing/2014/main" id="{900BE683-11F2-C00F-2CDC-3D7D2CF03B9A}"/>
               </a:ext>
             </a:extLst>
           </p:cNvPr>
@@ -15540,13 +16206,13 @@
               </a:ext>
             </a:extLst>
           </a:blip>
-          <a:srcRect t="18889" r="58743" b="36825"/>
+          <a:srcRect l="12278" t="11622" r="9484" b="10196"/>
           <a:stretch/>
         </p:blipFill>
         <p:spPr bwMode="auto">
           <a:xfrm>
-            <a:off x="838200" y="2253343"/>
-            <a:ext cx="3951287" cy="3037114"/>
+            <a:off x="299721" y="2907700"/>
+            <a:ext cx="3271456" cy="2451809"/>
           </a:xfrm>
           <a:prstGeom prst="rect">
             <a:avLst/>
@@ -15566,7 +16232,7 @@
     </p:spTree>
     <p:extLst>
       <p:ext uri="{BB962C8B-B14F-4D97-AF65-F5344CB8AC3E}">
-        <p14:creationId xmlns:p14="http://schemas.microsoft.com/office/powerpoint/2010/main" val="4003545077"/>
+        <p14:creationId xmlns:p14="http://schemas.microsoft.com/office/powerpoint/2010/main" val="235986258"/>
       </p:ext>
     </p:extLst>
   </p:cSld>

--- a/slides/C24_kMeans.pptx
+++ b/slides/C24_kMeans.pptx
@@ -1522,7 +1522,7 @@
         <p:cNvPr id="1" name="">
           <a:extLst>
             <a:ext uri="{FF2B5EF4-FFF2-40B4-BE49-F238E27FC236}">
-              <a16:creationId xmlns:a16="http://schemas.microsoft.com/office/drawing/2014/main" id="{BFE637E2-97BB-CFD3-DBB7-5EC561A4F1C5}"/>
+              <a16:creationId xmlns:a16="http://schemas.microsoft.com/office/drawing/2014/main" xmlns="" id="{BFE637E2-97BB-CFD3-DBB7-5EC561A4F1C5}"/>
             </a:ext>
           </a:extLst>
         </p:cNvPr>
@@ -1542,7 +1542,7 @@
           <p:cNvPr id="2" name="Slide Image Placeholder 1">
             <a:extLst>
               <a:ext uri="{FF2B5EF4-FFF2-40B4-BE49-F238E27FC236}">
-                <a16:creationId xmlns:a16="http://schemas.microsoft.com/office/drawing/2014/main" id="{4ED7BD22-361E-0DCE-46D8-42A9C128E592}"/>
+                <a16:creationId xmlns:a16="http://schemas.microsoft.com/office/drawing/2014/main" xmlns="" id="{4ED7BD22-361E-0DCE-46D8-42A9C128E592}"/>
               </a:ext>
             </a:extLst>
           </p:cNvPr>
@@ -1560,7 +1560,7 @@
           <p:cNvPr id="3" name="Notes Placeholder 2">
             <a:extLst>
               <a:ext uri="{FF2B5EF4-FFF2-40B4-BE49-F238E27FC236}">
-                <a16:creationId xmlns:a16="http://schemas.microsoft.com/office/drawing/2014/main" id="{A845AE5E-1008-C289-F444-04515B31A21D}"/>
+                <a16:creationId xmlns:a16="http://schemas.microsoft.com/office/drawing/2014/main" xmlns="" id="{A845AE5E-1008-C289-F444-04515B31A21D}"/>
               </a:ext>
             </a:extLst>
           </p:cNvPr>
@@ -1638,7 +1638,7 @@
           <p:cNvPr id="4" name="Slide Number Placeholder 3">
             <a:extLst>
               <a:ext uri="{FF2B5EF4-FFF2-40B4-BE49-F238E27FC236}">
-                <a16:creationId xmlns:a16="http://schemas.microsoft.com/office/drawing/2014/main" id="{64C5BAB2-4C6F-96F0-D4ED-0C66FFB4872B}"/>
+                <a16:creationId xmlns:a16="http://schemas.microsoft.com/office/drawing/2014/main" xmlns="" id="{64C5BAB2-4C6F-96F0-D4ED-0C66FFB4872B}"/>
               </a:ext>
             </a:extLst>
           </p:cNvPr>
@@ -2436,7 +2436,7 @@
         <p:cNvPr id="1" name="">
           <a:extLst>
             <a:ext uri="{FF2B5EF4-FFF2-40B4-BE49-F238E27FC236}">
-              <a16:creationId xmlns:a16="http://schemas.microsoft.com/office/drawing/2014/main" id="{809F23C5-D79E-FEA4-B74E-098BF94B10DF}"/>
+              <a16:creationId xmlns:a16="http://schemas.microsoft.com/office/drawing/2014/main" xmlns="" id="{809F23C5-D79E-FEA4-B74E-098BF94B10DF}"/>
             </a:ext>
           </a:extLst>
         </p:cNvPr>
@@ -2456,7 +2456,7 @@
           <p:cNvPr id="2" name="Slide Image Placeholder 1">
             <a:extLst>
               <a:ext uri="{FF2B5EF4-FFF2-40B4-BE49-F238E27FC236}">
-                <a16:creationId xmlns:a16="http://schemas.microsoft.com/office/drawing/2014/main" id="{2D909D08-D934-578A-D3C6-F349020FC96B}"/>
+                <a16:creationId xmlns:a16="http://schemas.microsoft.com/office/drawing/2014/main" xmlns="" id="{2D909D08-D934-578A-D3C6-F349020FC96B}"/>
               </a:ext>
             </a:extLst>
           </p:cNvPr>
@@ -2474,7 +2474,7 @@
           <p:cNvPr id="3" name="Notes Placeholder 2">
             <a:extLst>
               <a:ext uri="{FF2B5EF4-FFF2-40B4-BE49-F238E27FC236}">
-                <a16:creationId xmlns:a16="http://schemas.microsoft.com/office/drawing/2014/main" id="{B854B9EF-FF47-6D40-8F4E-85E653BECF49}"/>
+                <a16:creationId xmlns:a16="http://schemas.microsoft.com/office/drawing/2014/main" xmlns="" id="{B854B9EF-FF47-6D40-8F4E-85E653BECF49}"/>
               </a:ext>
             </a:extLst>
           </p:cNvPr>
@@ -2520,7 +2520,7 @@
           <p:cNvPr id="4" name="Slide Number Placeholder 3">
             <a:extLst>
               <a:ext uri="{FF2B5EF4-FFF2-40B4-BE49-F238E27FC236}">
-                <a16:creationId xmlns:a16="http://schemas.microsoft.com/office/drawing/2014/main" id="{23CC5A4E-3D9D-7285-8F3F-C33B2C50E4A0}"/>
+                <a16:creationId xmlns:a16="http://schemas.microsoft.com/office/drawing/2014/main" xmlns="" id="{23CC5A4E-3D9D-7285-8F3F-C33B2C50E4A0}"/>
               </a:ext>
             </a:extLst>
           </p:cNvPr>
@@ -2780,7 +2780,7 @@
         <p:cNvPr id="1" name="">
           <a:extLst>
             <a:ext uri="{FF2B5EF4-FFF2-40B4-BE49-F238E27FC236}">
-              <a16:creationId xmlns:a16="http://schemas.microsoft.com/office/drawing/2014/main" id="{D98F69D2-AA2F-1FAB-FC58-E17B9F051FEC}"/>
+              <a16:creationId xmlns:a16="http://schemas.microsoft.com/office/drawing/2014/main" xmlns="" id="{D98F69D2-AA2F-1FAB-FC58-E17B9F051FEC}"/>
             </a:ext>
           </a:extLst>
         </p:cNvPr>
@@ -2800,7 +2800,7 @@
           <p:cNvPr id="2" name="Espaço Reservado para Imagem de Slide 1">
             <a:extLst>
               <a:ext uri="{FF2B5EF4-FFF2-40B4-BE49-F238E27FC236}">
-                <a16:creationId xmlns:a16="http://schemas.microsoft.com/office/drawing/2014/main" id="{BFA38404-D7C9-03F2-A7E5-10C0EFC8F190}"/>
+                <a16:creationId xmlns:a16="http://schemas.microsoft.com/office/drawing/2014/main" xmlns="" id="{BFA38404-D7C9-03F2-A7E5-10C0EFC8F190}"/>
               </a:ext>
             </a:extLst>
           </p:cNvPr>
@@ -2818,7 +2818,7 @@
           <p:cNvPr id="3" name="Espaço Reservado para Anotações 2">
             <a:extLst>
               <a:ext uri="{FF2B5EF4-FFF2-40B4-BE49-F238E27FC236}">
-                <a16:creationId xmlns:a16="http://schemas.microsoft.com/office/drawing/2014/main" id="{5A8313F1-5D52-52B4-46D0-20D6D6D5149A}"/>
+                <a16:creationId xmlns:a16="http://schemas.microsoft.com/office/drawing/2014/main" xmlns="" id="{5A8313F1-5D52-52B4-46D0-20D6D6D5149A}"/>
               </a:ext>
             </a:extLst>
           </p:cNvPr>
@@ -2936,7 +2936,7 @@
           <p:cNvPr id="4" name="Espaço Reservado para Número de Slide 3">
             <a:extLst>
               <a:ext uri="{FF2B5EF4-FFF2-40B4-BE49-F238E27FC236}">
-                <a16:creationId xmlns:a16="http://schemas.microsoft.com/office/drawing/2014/main" id="{428A95A6-CC49-168A-C37A-1C6EB3B93225}"/>
+                <a16:creationId xmlns:a16="http://schemas.microsoft.com/office/drawing/2014/main" xmlns="" id="{428A95A6-CC49-168A-C37A-1C6EB3B93225}"/>
               </a:ext>
             </a:extLst>
           </p:cNvPr>
@@ -5835,7 +5835,7 @@
           <p:cNvPr id="4" name="CaixaDeTexto 3">
             <a:extLst>
               <a:ext uri="{FF2B5EF4-FFF2-40B4-BE49-F238E27FC236}">
-                <a16:creationId xmlns:a16="http://schemas.microsoft.com/office/drawing/2014/main" id="{430EB894-B7D4-434C-9D1A-A14094D9BEEC}"/>
+                <a16:creationId xmlns:a16="http://schemas.microsoft.com/office/drawing/2014/main" xmlns="" id="{430EB894-B7D4-434C-9D1A-A14094D9BEEC}"/>
               </a:ext>
             </a:extLst>
           </p:cNvPr>
@@ -5879,7 +5879,7 @@
           <p:cNvPr id="1026" name="Picture 2" descr="Logo">
             <a:extLst>
               <a:ext uri="{FF2B5EF4-FFF2-40B4-BE49-F238E27FC236}">
-                <a16:creationId xmlns:a16="http://schemas.microsoft.com/office/drawing/2014/main" id="{3F2642E0-4F6A-4196-8F58-E77D36E9A33F}"/>
+                <a16:creationId xmlns:a16="http://schemas.microsoft.com/office/drawing/2014/main" xmlns="" id="{3F2642E0-4F6A-4196-8F58-E77D36E9A33F}"/>
               </a:ext>
             </a:extLst>
           </p:cNvPr>
@@ -5924,7 +5924,7 @@
           <p:cNvPr id="5122" name="Picture 2" descr="Image result for machine learning">
             <a:extLst>
               <a:ext uri="{FF2B5EF4-FFF2-40B4-BE49-F238E27FC236}">
-                <a16:creationId xmlns:a16="http://schemas.microsoft.com/office/drawing/2014/main" id="{810CE0A2-4102-44A6-A370-175E7896CDCB}"/>
+                <a16:creationId xmlns:a16="http://schemas.microsoft.com/office/drawing/2014/main" xmlns="" id="{810CE0A2-4102-44A6-A370-175E7896CDCB}"/>
               </a:ext>
             </a:extLst>
           </p:cNvPr>
@@ -5969,7 +5969,7 @@
           <p:cNvPr id="7" name="Título 1">
             <a:extLst>
               <a:ext uri="{FF2B5EF4-FFF2-40B4-BE49-F238E27FC236}">
-                <a16:creationId xmlns:a16="http://schemas.microsoft.com/office/drawing/2014/main" id="{32666AC8-2E17-4DB4-B0F5-60C640CCFD2E}"/>
+                <a16:creationId xmlns:a16="http://schemas.microsoft.com/office/drawing/2014/main" xmlns="" id="{32666AC8-2E17-4DB4-B0F5-60C640CCFD2E}"/>
               </a:ext>
             </a:extLst>
           </p:cNvPr>
@@ -5995,6 +5995,10 @@
             <a:r>
               <a:rPr lang="pt-BR" sz="6600" dirty="0"/>
               <a:t>C24 - Inteligência Artificial:</a:t>
+            </a:r>
+            <a:r>
+              <a:rPr lang="pt-BR" sz="7200" dirty="0"/>
+              <a:t/>
             </a:r>
             <a:br>
               <a:rPr lang="pt-BR" sz="7200" dirty="0"/>
@@ -6229,7 +6233,7 @@
           <p:cNvPr id="1028" name="Picture 4" descr="K Means Clustering no Aprendizado de Máquinas — Aprendizado de Máquina —  DATA SCIENCE">
             <a:extLst>
               <a:ext uri="{FF2B5EF4-FFF2-40B4-BE49-F238E27FC236}">
-                <a16:creationId xmlns:a16="http://schemas.microsoft.com/office/drawing/2014/main" id="{D99905E1-3749-BAAD-E01A-C9B3686C4770}"/>
+                <a16:creationId xmlns:a16="http://schemas.microsoft.com/office/drawing/2014/main" xmlns="" id="{D99905E1-3749-BAAD-E01A-C9B3686C4770}"/>
               </a:ext>
             </a:extLst>
           </p:cNvPr>
@@ -6304,7 +6308,7 @@
           <p:cNvPr id="2" name="Title 1">
             <a:extLst>
               <a:ext uri="{FF2B5EF4-FFF2-40B4-BE49-F238E27FC236}">
-                <a16:creationId xmlns:a16="http://schemas.microsoft.com/office/drawing/2014/main" id="{FFE84507-EC77-45EC-8B3A-27BFC439AB0A}"/>
+                <a16:creationId xmlns:a16="http://schemas.microsoft.com/office/drawing/2014/main" xmlns="" id="{FFE84507-EC77-45EC-8B3A-27BFC439AB0A}"/>
               </a:ext>
             </a:extLst>
           </p:cNvPr>
@@ -6333,7 +6337,7 @@
           <p:cNvPr id="3" name="Content Placeholder 2">
             <a:extLst>
               <a:ext uri="{FF2B5EF4-FFF2-40B4-BE49-F238E27FC236}">
-                <a16:creationId xmlns:a16="http://schemas.microsoft.com/office/drawing/2014/main" id="{04FEB374-1415-DA51-E59A-B5E50D17F763}"/>
+                <a16:creationId xmlns:a16="http://schemas.microsoft.com/office/drawing/2014/main" xmlns="" id="{04FEB374-1415-DA51-E59A-B5E50D17F763}"/>
               </a:ext>
             </a:extLst>
           </p:cNvPr>
@@ -6388,7 +6392,23 @@
                   <a:srgbClr val="7030A0"/>
                 </a:solidFill>
               </a:rPr>
-              <a:t>"média" das amostras dentro de um </a:t>
+              <a:t>"média" das amostras </a:t>
+            </a:r>
+            <a:r>
+              <a:rPr lang="pt-BR" b="1" dirty="0" smtClean="0">
+                <a:solidFill>
+                  <a:srgbClr val="7030A0"/>
+                </a:solidFill>
+              </a:rPr>
+              <a:t>que pertencem a </a:t>
+            </a:r>
+            <a:r>
+              <a:rPr lang="pt-BR" b="1" dirty="0">
+                <a:solidFill>
+                  <a:srgbClr val="7030A0"/>
+                </a:solidFill>
+              </a:rPr>
+              <a:t>um </a:t>
             </a:r>
             <a:r>
               <a:rPr lang="pt-BR" b="1" i="1" dirty="0">
@@ -6471,12 +6491,20 @@
               <a:t>forma de comprimir dados usando apenas o </a:t>
             </a:r>
             <a:r>
-              <a:rPr lang="pt-BR" dirty="0" err="1"/>
+              <a:rPr lang="pt-BR" dirty="0" smtClean="0"/>
+              <a:t>índice do </a:t>
+            </a:r>
+            <a:r>
+              <a:rPr lang="pt-BR" dirty="0" err="1" smtClean="0"/>
               <a:t>centróide</a:t>
             </a:r>
             <a:r>
-              <a:rPr lang="pt-BR" dirty="0"/>
-              <a:t> mais próximo.</a:t>
+              <a:rPr lang="pt-BR" dirty="0" smtClean="0"/>
+              <a:t> </a:t>
+            </a:r>
+            <a:r>
+              <a:rPr lang="pt-BR" dirty="0"/>
+              <a:t>mais próximo.</a:t>
             </a:r>
           </a:p>
           <a:p>
@@ -6524,15 +6552,19 @@
             </a:pPr>
             <a:r>
               <a:rPr lang="pt-BR" dirty="0"/>
-              <a:t>forma de detectar anomalias: distância alta ao </a:t>
-            </a:r>
-            <a:r>
-              <a:rPr lang="pt-BR" dirty="0" err="1"/>
+              <a:t>forma de detectar anomalias: distância alta </a:t>
+            </a:r>
+            <a:r>
+              <a:rPr lang="pt-BR" dirty="0" smtClean="0"/>
+              <a:t>até o </a:t>
+            </a:r>
+            <a:r>
+              <a:rPr lang="pt-BR" dirty="0" err="1" smtClean="0"/>
               <a:t>centróide</a:t>
             </a:r>
             <a:r>
-              <a:rPr lang="pt-BR" dirty="0"/>
-              <a:t> indica </a:t>
+              <a:rPr lang="pt-BR" dirty="0" smtClean="0"/>
+              <a:t> pode indicar </a:t>
             </a:r>
             <a:r>
               <a:rPr lang="pt-BR" i="1" dirty="0"/>
@@ -6540,8 +6572,13 @@
             </a:r>
             <a:r>
               <a:rPr lang="pt-BR" dirty="0"/>
-              <a:t> ou dado que foge do padrão.</a:t>
-            </a:r>
+              <a:t> ou dado que foge do </a:t>
+            </a:r>
+            <a:r>
+              <a:rPr lang="pt-BR" dirty="0" smtClean="0"/>
+              <a:t>padrão (evento raro).</a:t>
+            </a:r>
+            <a:endParaRPr lang="pt-BR" dirty="0"/>
           </a:p>
           <a:p>
             <a:pPr lvl="1">
@@ -6607,7 +6644,7 @@
         <p:cNvPr id="1" name="">
           <a:extLst>
             <a:ext uri="{FF2B5EF4-FFF2-40B4-BE49-F238E27FC236}">
-              <a16:creationId xmlns:a16="http://schemas.microsoft.com/office/drawing/2014/main" id="{5B00F73A-8390-7530-E708-9D3EBFB35B37}"/>
+              <a16:creationId xmlns:a16="http://schemas.microsoft.com/office/drawing/2014/main" xmlns="" id="{5B00F73A-8390-7530-E708-9D3EBFB35B37}"/>
             </a:ext>
           </a:extLst>
         </p:cNvPr>
@@ -6627,7 +6664,7 @@
           <p:cNvPr id="2" name="Título 1">
             <a:extLst>
               <a:ext uri="{FF2B5EF4-FFF2-40B4-BE49-F238E27FC236}">
-                <a16:creationId xmlns:a16="http://schemas.microsoft.com/office/drawing/2014/main" id="{A7779880-5E02-1DB8-EA94-C86330794A8C}"/>
+                <a16:creationId xmlns:a16="http://schemas.microsoft.com/office/drawing/2014/main" xmlns="" id="{A7779880-5E02-1DB8-EA94-C86330794A8C}"/>
               </a:ext>
             </a:extLst>
           </p:cNvPr>
@@ -6674,14 +6711,14 @@
           </a:p>
         </p:txBody>
       </p:sp>
-      <mc:AlternateContent xmlns:mc="http://schemas.openxmlformats.org/markup-compatibility/2006">
-        <mc:Choice xmlns:a14="http://schemas.microsoft.com/office/drawing/2010/main" Requires="a14">
+      <mc:AlternateContent xmlns:mc="http://schemas.openxmlformats.org/markup-compatibility/2006" xmlns:a14="http://schemas.microsoft.com/office/drawing/2010/main">
+        <mc:Choice Requires="a14">
           <p:sp>
             <p:nvSpPr>
               <p:cNvPr id="3" name="Espaço Reservado para Conteúdo 2">
                 <a:extLst>
                   <a:ext uri="{FF2B5EF4-FFF2-40B4-BE49-F238E27FC236}">
-                    <a16:creationId xmlns:a16="http://schemas.microsoft.com/office/drawing/2014/main" id="{A72472E5-6211-3EFD-BA89-06782640C939}"/>
+                    <a16:creationId xmlns:a16="http://schemas.microsoft.com/office/drawing/2014/main" xmlns="" id="{A72472E5-6211-3EFD-BA89-06782640C939}"/>
                   </a:ext>
                 </a:extLst>
               </p:cNvPr>
@@ -7002,7 +7039,7 @@
             </p:txBody>
           </p:sp>
         </mc:Choice>
-        <mc:Fallback>
+        <mc:Fallback xmlns="">
           <p:sp>
             <p:nvSpPr>
               <p:cNvPr id="3" name="Espaço Reservado para Conteúdo 2">
@@ -7051,7 +7088,7 @@
           <p:cNvPr id="4" name="Picture 3" descr="K Means Clustering no Aprendizado de Máquinas — Aprendizado de Máquina —  DATA SCIENCE">
             <a:extLst>
               <a:ext uri="{FF2B5EF4-FFF2-40B4-BE49-F238E27FC236}">
-                <a16:creationId xmlns:a16="http://schemas.microsoft.com/office/drawing/2014/main" id="{E728BEA3-C89C-08D5-CE28-8BD1C00DAD53}"/>
+                <a16:creationId xmlns:a16="http://schemas.microsoft.com/office/drawing/2014/main" xmlns="" id="{E728BEA3-C89C-08D5-CE28-8BD1C00DAD53}"/>
               </a:ext>
             </a:extLst>
           </p:cNvPr>
@@ -7408,7 +7445,7 @@
         <p:cNvPr id="1" name="">
           <a:extLst>
             <a:ext uri="{FF2B5EF4-FFF2-40B4-BE49-F238E27FC236}">
-              <a16:creationId xmlns:a16="http://schemas.microsoft.com/office/drawing/2014/main" id="{36D1FDFF-84F9-A395-CDB0-AC77470C24F7}"/>
+              <a16:creationId xmlns:a16="http://schemas.microsoft.com/office/drawing/2014/main" xmlns="" id="{36D1FDFF-84F9-A395-CDB0-AC77470C24F7}"/>
             </a:ext>
           </a:extLst>
         </p:cNvPr>
@@ -7428,7 +7465,7 @@
           <p:cNvPr id="2" name="Título 1">
             <a:extLst>
               <a:ext uri="{FF2B5EF4-FFF2-40B4-BE49-F238E27FC236}">
-                <a16:creationId xmlns:a16="http://schemas.microsoft.com/office/drawing/2014/main" id="{CA82907A-6417-D3C2-265A-0FFD53046E99}"/>
+                <a16:creationId xmlns:a16="http://schemas.microsoft.com/office/drawing/2014/main" xmlns="" id="{CA82907A-6417-D3C2-265A-0FFD53046E99}"/>
               </a:ext>
             </a:extLst>
           </p:cNvPr>
@@ -7465,7 +7502,7 @@
           <p:cNvPr id="3" name="Espaço Reservado para Conteúdo 2">
             <a:extLst>
               <a:ext uri="{FF2B5EF4-FFF2-40B4-BE49-F238E27FC236}">
-                <a16:creationId xmlns:a16="http://schemas.microsoft.com/office/drawing/2014/main" id="{3C767761-7363-3966-1F66-B32029649DCD}"/>
+                <a16:creationId xmlns:a16="http://schemas.microsoft.com/office/drawing/2014/main" xmlns="" id="{3C767761-7363-3966-1F66-B32029649DCD}"/>
               </a:ext>
             </a:extLst>
           </p:cNvPr>
@@ -7550,7 +7587,7 @@
           <p:cNvPr id="5" name="Picture 2" descr="K-Means Clustering using Python. Welcome back guys! Hope you had a great… |  by Luigi Fiori | Medium">
             <a:extLst>
               <a:ext uri="{FF2B5EF4-FFF2-40B4-BE49-F238E27FC236}">
-                <a16:creationId xmlns:a16="http://schemas.microsoft.com/office/drawing/2014/main" id="{079377DD-55D2-BED3-3BB3-D573A6F13921}"/>
+                <a16:creationId xmlns:a16="http://schemas.microsoft.com/office/drawing/2014/main" xmlns="" id="{079377DD-55D2-BED3-3BB3-D573A6F13921}"/>
               </a:ext>
             </a:extLst>
           </p:cNvPr>
@@ -7611,7 +7648,7 @@
         <p:cNvPr id="1" name="">
           <a:extLst>
             <a:ext uri="{FF2B5EF4-FFF2-40B4-BE49-F238E27FC236}">
-              <a16:creationId xmlns:a16="http://schemas.microsoft.com/office/drawing/2014/main" id="{36D1FDFF-84F9-A395-CDB0-AC77470C24F7}"/>
+              <a16:creationId xmlns:a16="http://schemas.microsoft.com/office/drawing/2014/main" xmlns="" id="{36D1FDFF-84F9-A395-CDB0-AC77470C24F7}"/>
             </a:ext>
           </a:extLst>
         </p:cNvPr>
@@ -7631,7 +7668,7 @@
           <p:cNvPr id="2" name="Título 1">
             <a:extLst>
               <a:ext uri="{FF2B5EF4-FFF2-40B4-BE49-F238E27FC236}">
-                <a16:creationId xmlns:a16="http://schemas.microsoft.com/office/drawing/2014/main" id="{CA82907A-6417-D3C2-265A-0FFD53046E99}"/>
+                <a16:creationId xmlns:a16="http://schemas.microsoft.com/office/drawing/2014/main" xmlns="" id="{CA82907A-6417-D3C2-265A-0FFD53046E99}"/>
               </a:ext>
             </a:extLst>
           </p:cNvPr>
@@ -7668,7 +7705,7 @@
           <p:cNvPr id="3" name="Espaço Reservado para Conteúdo 2">
             <a:extLst>
               <a:ext uri="{FF2B5EF4-FFF2-40B4-BE49-F238E27FC236}">
-                <a16:creationId xmlns:a16="http://schemas.microsoft.com/office/drawing/2014/main" id="{3C767761-7363-3966-1F66-B32029649DCD}"/>
+                <a16:creationId xmlns:a16="http://schemas.microsoft.com/office/drawing/2014/main" xmlns="" id="{3C767761-7363-3966-1F66-B32029649DCD}"/>
               </a:ext>
             </a:extLst>
           </p:cNvPr>
@@ -7820,7 +7857,7 @@
           <p:cNvPr id="5" name="Picture 2" descr="K-Means Clustering using Python. Welcome back guys! Hope you had a great… |  by Luigi Fiori | Medium">
             <a:extLst>
               <a:ext uri="{FF2B5EF4-FFF2-40B4-BE49-F238E27FC236}">
-                <a16:creationId xmlns:a16="http://schemas.microsoft.com/office/drawing/2014/main" id="{079377DD-55D2-BED3-3BB3-D573A6F13921}"/>
+                <a16:creationId xmlns:a16="http://schemas.microsoft.com/office/drawing/2014/main" xmlns="" id="{079377DD-55D2-BED3-3BB3-D573A6F13921}"/>
               </a:ext>
             </a:extLst>
           </p:cNvPr>
@@ -7881,7 +7918,7 @@
         <p:cNvPr id="1" name="">
           <a:extLst>
             <a:ext uri="{FF2B5EF4-FFF2-40B4-BE49-F238E27FC236}">
-              <a16:creationId xmlns:a16="http://schemas.microsoft.com/office/drawing/2014/main" id="{654994D8-D711-9C2A-C202-7BAD7B93F7EE}"/>
+              <a16:creationId xmlns:a16="http://schemas.microsoft.com/office/drawing/2014/main" xmlns="" id="{654994D8-D711-9C2A-C202-7BAD7B93F7EE}"/>
             </a:ext>
           </a:extLst>
         </p:cNvPr>
@@ -7901,7 +7938,7 @@
           <p:cNvPr id="2" name="Título 1">
             <a:extLst>
               <a:ext uri="{FF2B5EF4-FFF2-40B4-BE49-F238E27FC236}">
-                <a16:creationId xmlns:a16="http://schemas.microsoft.com/office/drawing/2014/main" id="{FA636E4B-196C-922B-890C-6917F63A065D}"/>
+                <a16:creationId xmlns:a16="http://schemas.microsoft.com/office/drawing/2014/main" xmlns="" id="{FA636E4B-196C-922B-890C-6917F63A065D}"/>
               </a:ext>
             </a:extLst>
           </p:cNvPr>
@@ -7933,14 +7970,14 @@
           </a:p>
         </p:txBody>
       </p:sp>
-      <mc:AlternateContent xmlns:mc="http://schemas.openxmlformats.org/markup-compatibility/2006" xmlns:a14="http://schemas.microsoft.com/office/drawing/2010/main">
-        <mc:Choice Requires="a14">
+      <mc:AlternateContent xmlns:mc="http://schemas.openxmlformats.org/markup-compatibility/2006">
+        <mc:Choice xmlns:a14="http://schemas.microsoft.com/office/drawing/2010/main" Requires="a14">
           <p:sp>
             <p:nvSpPr>
               <p:cNvPr id="3" name="Espaço Reservado para Conteúdo 2">
                 <a:extLst>
                   <a:ext uri="{FF2B5EF4-FFF2-40B4-BE49-F238E27FC236}">
-                    <a16:creationId xmlns:a16="http://schemas.microsoft.com/office/drawing/2014/main" id="{1FCDFA83-D279-17E3-E2CD-6E304EAF637F}"/>
+                    <a16:creationId xmlns:a16="http://schemas.microsoft.com/office/drawing/2014/main" xmlns="" id="{1FCDFA83-D279-17E3-E2CD-6E304EAF637F}"/>
                   </a:ext>
                 </a:extLst>
               </p:cNvPr>
@@ -8342,19 +8379,54 @@
                 </a:r>
                 <a:r>
                   <a:rPr lang="pt-BR" dirty="0"/>
-                  <a:t> elementos dos vetores tendo sua distância calculada.</a:t>
-                </a:r>
+                  <a:t> elementos dos vetores tendo sua distância calculada</a:t>
+                </a:r>
+                <a:r>
+                  <a:rPr lang="pt-BR" dirty="0" smtClean="0"/>
+                  <a:t>.</a:t>
+                </a:r>
+              </a:p>
+              <a:p>
+                <a:r>
+                  <a:rPr lang="pt-BR" dirty="0" smtClean="0"/>
+                  <a:t>Outras </a:t>
+                </a:r>
+                <a:r>
+                  <a:rPr lang="pt-BR" dirty="0"/>
+                  <a:t>medidas de distância: </a:t>
+                </a:r>
+                <a:r>
+                  <a:rPr lang="pt-BR" dirty="0" err="1" smtClean="0"/>
+                  <a:t>Minkowski</a:t>
+                </a:r>
+                <a:r>
+                  <a:rPr lang="pt-BR" dirty="0" smtClean="0"/>
+                  <a:t>, cosseno</a:t>
+                </a:r>
+                <a:r>
+                  <a:rPr lang="pt-BR" dirty="0"/>
+                  <a:t>, Manhattan e </a:t>
+                </a:r>
+                <a:r>
+                  <a:rPr lang="pt-BR" dirty="0" err="1" smtClean="0"/>
+                  <a:t>Mahalanobis</a:t>
+                </a:r>
+                <a:r>
+                  <a:rPr lang="pt-BR" dirty="0" smtClean="0"/>
+                  <a:t>.</a:t>
+                </a:r>
+                <a:endParaRPr lang="pt-BR" dirty="0"/>
               </a:p>
             </p:txBody>
           </p:sp>
         </mc:Choice>
-        <mc:Fallback xmlns="">
+        <mc:Fallback>
           <p:sp>
             <p:nvSpPr>
               <p:cNvPr id="3" name="Espaço Reservado para Conteúdo 2">
                 <a:extLst>
                   <a:ext uri="{FF2B5EF4-FFF2-40B4-BE49-F238E27FC236}">
-                    <a16:creationId xmlns:a16="http://schemas.microsoft.com/office/drawing/2014/main" xmlns="" id="{1FCDFA83-D279-17E3-E2CD-6E304EAF637F}"/>
+                    <a16:creationId xmlns:a16="http://schemas.microsoft.com/office/drawing/2014/main" xmlns:a14="http://schemas.microsoft.com/office/drawing/2010/main" xmlns="" id="{1FCDFA83-D279-17E3-E2CD-6E304EAF637F}"/>
                   </a:ext>
                 </a:extLst>
               </p:cNvPr>
@@ -8373,7 +8445,7 @@
               <a:blipFill rotWithShape="0">
                 <a:blip r:embed="rId2"/>
                 <a:stretch>
-                  <a:fillRect l="-1128" t="-1937"/>
+                  <a:fillRect l="-1128" t="-1937" b="-121"/>
                 </a:stretch>
               </a:blipFill>
             </p:spPr>
@@ -8453,8 +8525,8 @@
           </a:p>
         </p:txBody>
       </p:sp>
-      <mc:AlternateContent xmlns:mc="http://schemas.openxmlformats.org/markup-compatibility/2006">
-        <mc:Choice xmlns:a14="http://schemas.microsoft.com/office/drawing/2010/main" Requires="a14">
+      <mc:AlternateContent xmlns:mc="http://schemas.openxmlformats.org/markup-compatibility/2006" xmlns:a14="http://schemas.microsoft.com/office/drawing/2010/main">
+        <mc:Choice Requires="a14">
           <p:sp>
             <p:nvSpPr>
               <p:cNvPr id="3" name="Espaço Reservado para Conteúdo 2"/>
@@ -8890,7 +8962,7 @@
             </p:txBody>
           </p:sp>
         </mc:Choice>
-        <mc:Fallback>
+        <mc:Fallback xmlns="">
           <p:sp>
             <p:nvSpPr>
               <p:cNvPr id="3" name="Espaço Reservado para Conteúdo 2"/>
@@ -9138,8 +9210,8 @@
           </p:sp>
         </mc:Fallback>
       </mc:AlternateContent>
-      <mc:AlternateContent xmlns:mc="http://schemas.openxmlformats.org/markup-compatibility/2006">
-        <mc:Choice xmlns:a14="http://schemas.microsoft.com/office/drawing/2010/main" Requires="a14">
+      <mc:AlternateContent xmlns:mc="http://schemas.openxmlformats.org/markup-compatibility/2006" xmlns:a14="http://schemas.microsoft.com/office/drawing/2010/main">
+        <mc:Choice Requires="a14">
           <p:sp>
             <p:nvSpPr>
               <p:cNvPr id="4" name="TextBox 4"/>
@@ -9330,7 +9402,7 @@
             </p:txBody>
           </p:sp>
         </mc:Choice>
-        <mc:Fallback>
+        <mc:Fallback xmlns="">
           <p:sp>
             <p:nvSpPr>
               <p:cNvPr id="4" name="TextBox 4"/>
@@ -9772,7 +9844,7 @@
           <p:cNvPr id="4" name="Picture 5">
             <a:extLst>
               <a:ext uri="{FF2B5EF4-FFF2-40B4-BE49-F238E27FC236}">
-                <a16:creationId xmlns:a16="http://schemas.microsoft.com/office/drawing/2014/main" id="{F98B536F-38AB-58C5-0FFB-41BDB557E9EF}"/>
+                <a16:creationId xmlns:a16="http://schemas.microsoft.com/office/drawing/2014/main" xmlns="" id="{F98B536F-38AB-58C5-0FFB-41BDB557E9EF}"/>
               </a:ext>
             </a:extLst>
           </p:cNvPr>
@@ -9804,7 +9876,7 @@
               <p:cNvPr id="5" name="TextBox 7">
                 <a:extLst>
                   <a:ext uri="{FF2B5EF4-FFF2-40B4-BE49-F238E27FC236}">
-                    <a16:creationId xmlns:a16="http://schemas.microsoft.com/office/drawing/2014/main" id="{04EA9FAE-D371-68E0-2CB7-9C8893491B3B}"/>
+                    <a16:creationId xmlns:a16="http://schemas.microsoft.com/office/drawing/2014/main" xmlns="" id="{04EA9FAE-D371-68E0-2CB7-9C8893491B3B}"/>
                   </a:ext>
                 </a:extLst>
               </p:cNvPr>
@@ -9961,7 +10033,7 @@
           <p:cNvPr id="3" name="Picture 5">
             <a:extLst>
               <a:ext uri="{FF2B5EF4-FFF2-40B4-BE49-F238E27FC236}">
-                <a16:creationId xmlns:a16="http://schemas.microsoft.com/office/drawing/2014/main" id="{69F3FE92-0D0B-AECE-B64E-FC9D2F3EADBC}"/>
+                <a16:creationId xmlns:a16="http://schemas.microsoft.com/office/drawing/2014/main" xmlns="" id="{69F3FE92-0D0B-AECE-B64E-FC9D2F3EADBC}"/>
               </a:ext>
             </a:extLst>
           </p:cNvPr>
@@ -9991,7 +10063,7 @@
           <p:cNvPr id="4" name="TextBox 7">
             <a:extLst>
               <a:ext uri="{FF2B5EF4-FFF2-40B4-BE49-F238E27FC236}">
-                <a16:creationId xmlns:a16="http://schemas.microsoft.com/office/drawing/2014/main" id="{5D947541-89EC-69EF-1918-6EFD56E0B3C2}"/>
+                <a16:creationId xmlns:a16="http://schemas.microsoft.com/office/drawing/2014/main" xmlns="" id="{5D947541-89EC-69EF-1918-6EFD56E0B3C2}"/>
               </a:ext>
             </a:extLst>
           </p:cNvPr>
@@ -10127,7 +10199,7 @@
           <p:cNvPr id="3" name="Picture 5">
             <a:extLst>
               <a:ext uri="{FF2B5EF4-FFF2-40B4-BE49-F238E27FC236}">
-                <a16:creationId xmlns:a16="http://schemas.microsoft.com/office/drawing/2014/main" id="{1C0684BB-EFF7-DBA8-3519-25CE2A1A9632}"/>
+                <a16:creationId xmlns:a16="http://schemas.microsoft.com/office/drawing/2014/main" xmlns="" id="{1C0684BB-EFF7-DBA8-3519-25CE2A1A9632}"/>
               </a:ext>
             </a:extLst>
           </p:cNvPr>
@@ -10157,7 +10229,7 @@
           <p:cNvPr id="4" name="TextBox 8">
             <a:extLst>
               <a:ext uri="{FF2B5EF4-FFF2-40B4-BE49-F238E27FC236}">
-                <a16:creationId xmlns:a16="http://schemas.microsoft.com/office/drawing/2014/main" id="{38267D7C-379A-003E-4048-8D4DDD969EB6}"/>
+                <a16:creationId xmlns:a16="http://schemas.microsoft.com/office/drawing/2014/main" xmlns="" id="{38267D7C-379A-003E-4048-8D4DDD969EB6}"/>
               </a:ext>
             </a:extLst>
           </p:cNvPr>
@@ -10188,6 +10260,10 @@
                 <a:effectLst/>
               </a:rPr>
               <a:t>3. Atribui-se cada amostra ao centroide mais próximo com base na distância euclidiana.</a:t>
+            </a:r>
+            <a:r>
+              <a:rPr lang="pt-BR" dirty="0"/>
+              <a:t/>
             </a:r>
             <a:br>
               <a:rPr lang="pt-BR" dirty="0"/>
@@ -10262,7 +10338,7 @@
           <p:cNvPr id="3" name="Picture 7">
             <a:extLst>
               <a:ext uri="{FF2B5EF4-FFF2-40B4-BE49-F238E27FC236}">
-                <a16:creationId xmlns:a16="http://schemas.microsoft.com/office/drawing/2014/main" id="{4A874BBD-11DB-833A-341F-F134DDD11108}"/>
+                <a16:creationId xmlns:a16="http://schemas.microsoft.com/office/drawing/2014/main" xmlns="" id="{4A874BBD-11DB-833A-341F-F134DDD11108}"/>
               </a:ext>
             </a:extLst>
           </p:cNvPr>
@@ -10292,7 +10368,7 @@
           <p:cNvPr id="4" name="TextBox 9">
             <a:extLst>
               <a:ext uri="{FF2B5EF4-FFF2-40B4-BE49-F238E27FC236}">
-                <a16:creationId xmlns:a16="http://schemas.microsoft.com/office/drawing/2014/main" id="{FB63ADD3-D956-76C5-F130-F38465877D67}"/>
+                <a16:creationId xmlns:a16="http://schemas.microsoft.com/office/drawing/2014/main" xmlns="" id="{FB63ADD3-D956-76C5-F130-F38465877D67}"/>
               </a:ext>
             </a:extLst>
           </p:cNvPr>
@@ -10394,7 +10470,7 @@
           <p:cNvPr id="3" name="Picture 5">
             <a:extLst>
               <a:ext uri="{FF2B5EF4-FFF2-40B4-BE49-F238E27FC236}">
-                <a16:creationId xmlns:a16="http://schemas.microsoft.com/office/drawing/2014/main" id="{BE9E2474-44BE-43D0-EE2F-D03349050DA2}"/>
+                <a16:creationId xmlns:a16="http://schemas.microsoft.com/office/drawing/2014/main" xmlns="" id="{BE9E2474-44BE-43D0-EE2F-D03349050DA2}"/>
               </a:ext>
             </a:extLst>
           </p:cNvPr>
@@ -10424,7 +10500,7 @@
           <p:cNvPr id="4" name="TextBox 9">
             <a:extLst>
               <a:ext uri="{FF2B5EF4-FFF2-40B4-BE49-F238E27FC236}">
-                <a16:creationId xmlns:a16="http://schemas.microsoft.com/office/drawing/2014/main" id="{E7FEC406-7A7E-5D78-DF69-D2416A2375C3}"/>
+                <a16:creationId xmlns:a16="http://schemas.microsoft.com/office/drawing/2014/main" xmlns="" id="{E7FEC406-7A7E-5D78-DF69-D2416A2375C3}"/>
               </a:ext>
             </a:extLst>
           </p:cNvPr>
@@ -10526,7 +10602,7 @@
           <p:cNvPr id="3" name="Picture 5">
             <a:extLst>
               <a:ext uri="{FF2B5EF4-FFF2-40B4-BE49-F238E27FC236}">
-                <a16:creationId xmlns:a16="http://schemas.microsoft.com/office/drawing/2014/main" id="{CD544109-9098-CA3C-766B-DFEB05AE1F38}"/>
+                <a16:creationId xmlns:a16="http://schemas.microsoft.com/office/drawing/2014/main" xmlns="" id="{CD544109-9098-CA3C-766B-DFEB05AE1F38}"/>
               </a:ext>
             </a:extLst>
           </p:cNvPr>
@@ -10556,7 +10632,7 @@
           <p:cNvPr id="4" name="TextBox 9">
             <a:extLst>
               <a:ext uri="{FF2B5EF4-FFF2-40B4-BE49-F238E27FC236}">
-                <a16:creationId xmlns:a16="http://schemas.microsoft.com/office/drawing/2014/main" id="{E7FEC406-7A7E-5D78-DF69-D2416A2375C3}"/>
+                <a16:creationId xmlns:a16="http://schemas.microsoft.com/office/drawing/2014/main" xmlns="" id="{E7FEC406-7A7E-5D78-DF69-D2416A2375C3}"/>
               </a:ext>
             </a:extLst>
           </p:cNvPr>
@@ -10658,7 +10734,7 @@
           <p:cNvPr id="3" name="Picture 5">
             <a:extLst>
               <a:ext uri="{FF2B5EF4-FFF2-40B4-BE49-F238E27FC236}">
-                <a16:creationId xmlns:a16="http://schemas.microsoft.com/office/drawing/2014/main" id="{9F08A47C-C93C-D40B-F5DC-3C29F2EEEE60}"/>
+                <a16:creationId xmlns:a16="http://schemas.microsoft.com/office/drawing/2014/main" xmlns="" id="{9F08A47C-C93C-D40B-F5DC-3C29F2EEEE60}"/>
               </a:ext>
             </a:extLst>
           </p:cNvPr>
@@ -10688,7 +10764,7 @@
           <p:cNvPr id="4" name="TextBox 7">
             <a:extLst>
               <a:ext uri="{FF2B5EF4-FFF2-40B4-BE49-F238E27FC236}">
-                <a16:creationId xmlns:a16="http://schemas.microsoft.com/office/drawing/2014/main" id="{4376C1A9-3731-8BF9-861E-3D686FEA4F43}"/>
+                <a16:creationId xmlns:a16="http://schemas.microsoft.com/office/drawing/2014/main" xmlns="" id="{4376C1A9-3731-8BF9-861E-3D686FEA4F43}"/>
               </a:ext>
             </a:extLst>
           </p:cNvPr>
@@ -11010,7 +11086,7 @@
           <p:cNvPr id="4" name="Picture 2" descr="Quantum machine learning: distance estimation for k-means clustering | by  Sashwat Anagolum | Towards Data Science">
             <a:extLst>
               <a:ext uri="{FF2B5EF4-FFF2-40B4-BE49-F238E27FC236}">
-                <a16:creationId xmlns:a16="http://schemas.microsoft.com/office/drawing/2014/main" id="{3663CA52-EDD8-4A35-5A6A-3A247A7891B7}"/>
+                <a16:creationId xmlns:a16="http://schemas.microsoft.com/office/drawing/2014/main" xmlns="" id="{3663CA52-EDD8-4A35-5A6A-3A247A7891B7}"/>
               </a:ext>
             </a:extLst>
           </p:cNvPr>
@@ -11071,7 +11147,7 @@
         <p:cNvPr id="1" name="">
           <a:extLst>
             <a:ext uri="{FF2B5EF4-FFF2-40B4-BE49-F238E27FC236}">
-              <a16:creationId xmlns:a16="http://schemas.microsoft.com/office/drawing/2014/main" id="{17B1A926-A8C8-946A-0DCB-7DA6EAEC80E3}"/>
+              <a16:creationId xmlns:a16="http://schemas.microsoft.com/office/drawing/2014/main" xmlns="" id="{17B1A926-A8C8-946A-0DCB-7DA6EAEC80E3}"/>
             </a:ext>
           </a:extLst>
         </p:cNvPr>
@@ -11091,7 +11167,7 @@
           <p:cNvPr id="2" name="Título 1">
             <a:extLst>
               <a:ext uri="{FF2B5EF4-FFF2-40B4-BE49-F238E27FC236}">
-                <a16:creationId xmlns:a16="http://schemas.microsoft.com/office/drawing/2014/main" id="{602E24AF-FE6E-7B0A-D179-EB49A1DEB2F8}"/>
+                <a16:creationId xmlns:a16="http://schemas.microsoft.com/office/drawing/2014/main" xmlns="" id="{602E24AF-FE6E-7B0A-D179-EB49A1DEB2F8}"/>
               </a:ext>
             </a:extLst>
           </p:cNvPr>
@@ -11120,7 +11196,7 @@
           <p:cNvPr id="3" name="Espaço Reservado para Conteúdo 2">
             <a:extLst>
               <a:ext uri="{FF2B5EF4-FFF2-40B4-BE49-F238E27FC236}">
-                <a16:creationId xmlns:a16="http://schemas.microsoft.com/office/drawing/2014/main" id="{4E35406F-F929-EFBE-0B16-7CF919C6F311}"/>
+                <a16:creationId xmlns:a16="http://schemas.microsoft.com/office/drawing/2014/main" xmlns="" id="{4E35406F-F929-EFBE-0B16-7CF919C6F311}"/>
               </a:ext>
             </a:extLst>
           </p:cNvPr>
@@ -11299,7 +11375,7 @@
           <p:cNvPr id="4" name="Picture 2" descr="Quantum machine learning: distance estimation for k-means clustering | by  Sashwat Anagolum | Towards Data Science">
             <a:extLst>
               <a:ext uri="{FF2B5EF4-FFF2-40B4-BE49-F238E27FC236}">
-                <a16:creationId xmlns:a16="http://schemas.microsoft.com/office/drawing/2014/main" id="{375C1022-A6C8-5B17-2FC3-13794270B208}"/>
+                <a16:creationId xmlns:a16="http://schemas.microsoft.com/office/drawing/2014/main" xmlns="" id="{375C1022-A6C8-5B17-2FC3-13794270B208}"/>
               </a:ext>
             </a:extLst>
           </p:cNvPr>
@@ -11360,7 +11436,7 @@
         <p:cNvPr id="1" name="">
           <a:extLst>
             <a:ext uri="{FF2B5EF4-FFF2-40B4-BE49-F238E27FC236}">
-              <a16:creationId xmlns:a16="http://schemas.microsoft.com/office/drawing/2014/main" id="{AE9261F7-2166-8305-B7FE-ACE2323DFB84}"/>
+              <a16:creationId xmlns:a16="http://schemas.microsoft.com/office/drawing/2014/main" xmlns="" id="{AE9261F7-2166-8305-B7FE-ACE2323DFB84}"/>
             </a:ext>
           </a:extLst>
         </p:cNvPr>
@@ -11380,7 +11456,7 @@
           <p:cNvPr id="2" name="Título 1">
             <a:extLst>
               <a:ext uri="{FF2B5EF4-FFF2-40B4-BE49-F238E27FC236}">
-                <a16:creationId xmlns:a16="http://schemas.microsoft.com/office/drawing/2014/main" id="{EB419064-8E96-0B34-B387-5724815C4DE4}"/>
+                <a16:creationId xmlns:a16="http://schemas.microsoft.com/office/drawing/2014/main" xmlns="" id="{EB419064-8E96-0B34-B387-5724815C4DE4}"/>
               </a:ext>
             </a:extLst>
           </p:cNvPr>
@@ -11409,7 +11485,7 @@
           <p:cNvPr id="3" name="Espaço Reservado para Conteúdo 2">
             <a:extLst>
               <a:ext uri="{FF2B5EF4-FFF2-40B4-BE49-F238E27FC236}">
-                <a16:creationId xmlns:a16="http://schemas.microsoft.com/office/drawing/2014/main" id="{CDAB57C6-5307-315D-C613-2F33992F1909}"/>
+                <a16:creationId xmlns:a16="http://schemas.microsoft.com/office/drawing/2014/main" xmlns="" id="{CDAB57C6-5307-315D-C613-2F33992F1909}"/>
               </a:ext>
             </a:extLst>
           </p:cNvPr>
@@ -11527,7 +11603,7 @@
           <p:cNvPr id="4" name="Picture 2" descr="Quantum machine learning: distance estimation for k-means clustering | by  Sashwat Anagolum | Towards Data Science">
             <a:extLst>
               <a:ext uri="{FF2B5EF4-FFF2-40B4-BE49-F238E27FC236}">
-                <a16:creationId xmlns:a16="http://schemas.microsoft.com/office/drawing/2014/main" id="{9210F1A3-8D21-F13E-A400-833A1EDE2998}"/>
+                <a16:creationId xmlns:a16="http://schemas.microsoft.com/office/drawing/2014/main" xmlns="" id="{9210F1A3-8D21-F13E-A400-833A1EDE2998}"/>
               </a:ext>
             </a:extLst>
           </p:cNvPr>
@@ -11602,7 +11678,7 @@
           <p:cNvPr id="6" name="TextBox 5">
             <a:extLst>
               <a:ext uri="{FF2B5EF4-FFF2-40B4-BE49-F238E27FC236}">
-                <a16:creationId xmlns:a16="http://schemas.microsoft.com/office/drawing/2014/main" id="{7A9955D7-EF0A-C073-CA9C-EC6A396485B8}"/>
+                <a16:creationId xmlns:a16="http://schemas.microsoft.com/office/drawing/2014/main" xmlns="" id="{7A9955D7-EF0A-C073-CA9C-EC6A396485B8}"/>
               </a:ext>
             </a:extLst>
           </p:cNvPr>
@@ -11641,10 +11717,18 @@
             <a:r>
               <a:rPr lang="pt-BR" sz="2800" b="1" dirty="0">
                 <a:solidFill>
+                  <a:srgbClr val="7030A0"/>
+                </a:solidFill>
+              </a:rPr>
+              <a:t>grupo</a:t>
+            </a:r>
+            <a:r>
+              <a:rPr lang="pt-BR" sz="2800" b="1" dirty="0">
+                <a:solidFill>
                   <a:schemeClr val="accent2"/>
                 </a:solidFill>
               </a:rPr>
-              <a:t>grupo mais próximo</a:t>
+              <a:t> mais próximo</a:t>
             </a:r>
             <a:r>
               <a:rPr lang="pt-BR" sz="2800" dirty="0"/>
@@ -11663,7 +11747,7 @@
           <p:cNvPr id="3" name="Picture 2">
             <a:extLst>
               <a:ext uri="{FF2B5EF4-FFF2-40B4-BE49-F238E27FC236}">
-                <a16:creationId xmlns:a16="http://schemas.microsoft.com/office/drawing/2014/main" id="{9863C601-9BD1-3DD0-9219-97CD9BA5DC5A}"/>
+                <a16:creationId xmlns:a16="http://schemas.microsoft.com/office/drawing/2014/main" xmlns="" id="{9863C601-9BD1-3DD0-9219-97CD9BA5DC5A}"/>
               </a:ext>
             </a:extLst>
           </p:cNvPr>
@@ -11715,7 +11799,7 @@
         <p:cNvPr id="1" name="">
           <a:extLst>
             <a:ext uri="{FF2B5EF4-FFF2-40B4-BE49-F238E27FC236}">
-              <a16:creationId xmlns:a16="http://schemas.microsoft.com/office/drawing/2014/main" id="{4B1B77C4-9B17-7A8C-9D74-1E6EDF9D99AB}"/>
+              <a16:creationId xmlns:a16="http://schemas.microsoft.com/office/drawing/2014/main" xmlns="" id="{4B1B77C4-9B17-7A8C-9D74-1E6EDF9D99AB}"/>
             </a:ext>
           </a:extLst>
         </p:cNvPr>
@@ -11735,7 +11819,7 @@
           <p:cNvPr id="3" name="Espaço Reservado para Conteúdo 2">
             <a:extLst>
               <a:ext uri="{FF2B5EF4-FFF2-40B4-BE49-F238E27FC236}">
-                <a16:creationId xmlns:a16="http://schemas.microsoft.com/office/drawing/2014/main" id="{33358A61-5705-A1F7-E051-797E22A8C17B}"/>
+                <a16:creationId xmlns:a16="http://schemas.microsoft.com/office/drawing/2014/main" xmlns="" id="{33358A61-5705-A1F7-E051-797E22A8C17B}"/>
               </a:ext>
             </a:extLst>
           </p:cNvPr>
@@ -11811,7 +11895,7 @@
           <p:cNvPr id="2" name="Title 1">
             <a:extLst>
               <a:ext uri="{FF2B5EF4-FFF2-40B4-BE49-F238E27FC236}">
-                <a16:creationId xmlns:a16="http://schemas.microsoft.com/office/drawing/2014/main" id="{D33574C0-6E04-C0DD-EAA0-CBB82A39C711}"/>
+                <a16:creationId xmlns:a16="http://schemas.microsoft.com/office/drawing/2014/main" xmlns="" id="{D33574C0-6E04-C0DD-EAA0-CBB82A39C711}"/>
               </a:ext>
             </a:extLst>
           </p:cNvPr>
@@ -11842,7 +11926,7 @@
               <p:cNvPr id="3" name="Content Placeholder 2">
                 <a:extLst>
                   <a:ext uri="{FF2B5EF4-FFF2-40B4-BE49-F238E27FC236}">
-                    <a16:creationId xmlns:a16="http://schemas.microsoft.com/office/drawing/2014/main" id="{9BBD5BC8-7DE0-62E2-804E-33545D87626B}"/>
+                    <a16:creationId xmlns:a16="http://schemas.microsoft.com/office/drawing/2014/main" xmlns="" id="{9BBD5BC8-7DE0-62E2-804E-33545D87626B}"/>
                   </a:ext>
                 </a:extLst>
               </p:cNvPr>
@@ -12082,7 +12166,7 @@
           <p:cNvPr id="1026" name="Picture 2" descr="K-Means: Getting the Optimal Number of Clusters- Analytics Vidhya">
             <a:extLst>
               <a:ext uri="{FF2B5EF4-FFF2-40B4-BE49-F238E27FC236}">
-                <a16:creationId xmlns:a16="http://schemas.microsoft.com/office/drawing/2014/main" id="{5704EB20-2972-D237-4FE5-23EBC8E55F97}"/>
+                <a16:creationId xmlns:a16="http://schemas.microsoft.com/office/drawing/2014/main" xmlns="" id="{5704EB20-2972-D237-4FE5-23EBC8E55F97}"/>
               </a:ext>
             </a:extLst>
           </p:cNvPr>
@@ -12145,7 +12229,7 @@
         <p:cNvPr id="1" name="">
           <a:extLst>
             <a:ext uri="{FF2B5EF4-FFF2-40B4-BE49-F238E27FC236}">
-              <a16:creationId xmlns:a16="http://schemas.microsoft.com/office/drawing/2014/main" id="{87908164-8DED-57E8-103F-9479D1C12B23}"/>
+              <a16:creationId xmlns:a16="http://schemas.microsoft.com/office/drawing/2014/main" xmlns="" id="{87908164-8DED-57E8-103F-9479D1C12B23}"/>
             </a:ext>
           </a:extLst>
         </p:cNvPr>
@@ -12165,7 +12249,7 @@
           <p:cNvPr id="2" name="Title 1">
             <a:extLst>
               <a:ext uri="{FF2B5EF4-FFF2-40B4-BE49-F238E27FC236}">
-                <a16:creationId xmlns:a16="http://schemas.microsoft.com/office/drawing/2014/main" id="{B5A49F49-61D7-0208-3364-6E7A9D6433FC}"/>
+                <a16:creationId xmlns:a16="http://schemas.microsoft.com/office/drawing/2014/main" xmlns="" id="{B5A49F49-61D7-0208-3364-6E7A9D6433FC}"/>
               </a:ext>
             </a:extLst>
           </p:cNvPr>
@@ -12204,7 +12288,7 @@
               <p:cNvPr id="3" name="Content Placeholder 2">
                 <a:extLst>
                   <a:ext uri="{FF2B5EF4-FFF2-40B4-BE49-F238E27FC236}">
-                    <a16:creationId xmlns:a16="http://schemas.microsoft.com/office/drawing/2014/main" id="{62BBDDAA-8E03-1533-DC27-B212B34350D5}"/>
+                    <a16:creationId xmlns:a16="http://schemas.microsoft.com/office/drawing/2014/main" xmlns="" id="{62BBDDAA-8E03-1533-DC27-B212B34350D5}"/>
                   </a:ext>
                 </a:extLst>
               </p:cNvPr>
@@ -12781,7 +12865,7 @@
           <p:cNvPr id="1026" name="Picture 2" descr="K-Means: Getting the Optimal Number of Clusters- Analytics Vidhya">
             <a:extLst>
               <a:ext uri="{FF2B5EF4-FFF2-40B4-BE49-F238E27FC236}">
-                <a16:creationId xmlns:a16="http://schemas.microsoft.com/office/drawing/2014/main" id="{6CFEC85E-0DF3-CC25-5FF3-CFFD6DEE23BA}"/>
+                <a16:creationId xmlns:a16="http://schemas.microsoft.com/office/drawing/2014/main" xmlns="" id="{6CFEC85E-0DF3-CC25-5FF3-CFFD6DEE23BA}"/>
               </a:ext>
             </a:extLst>
           </p:cNvPr>
@@ -12844,7 +12928,7 @@
         <p:cNvPr id="1" name="">
           <a:extLst>
             <a:ext uri="{FF2B5EF4-FFF2-40B4-BE49-F238E27FC236}">
-              <a16:creationId xmlns:a16="http://schemas.microsoft.com/office/drawing/2014/main" id="{80E41F28-4876-5B0D-7F6C-0F152E330D44}"/>
+              <a16:creationId xmlns:a16="http://schemas.microsoft.com/office/drawing/2014/main" xmlns="" id="{80E41F28-4876-5B0D-7F6C-0F152E330D44}"/>
             </a:ext>
           </a:extLst>
         </p:cNvPr>
@@ -12864,7 +12948,7 @@
           <p:cNvPr id="2" name="Title 1">
             <a:extLst>
               <a:ext uri="{FF2B5EF4-FFF2-40B4-BE49-F238E27FC236}">
-                <a16:creationId xmlns:a16="http://schemas.microsoft.com/office/drawing/2014/main" id="{3C9425F9-4CBE-8456-1A61-B7A51F1FAC86}"/>
+                <a16:creationId xmlns:a16="http://schemas.microsoft.com/office/drawing/2014/main" xmlns="" id="{3C9425F9-4CBE-8456-1A61-B7A51F1FAC86}"/>
               </a:ext>
             </a:extLst>
           </p:cNvPr>
@@ -12903,7 +12987,7 @@
               <p:cNvPr id="3" name="Content Placeholder 2">
                 <a:extLst>
                   <a:ext uri="{FF2B5EF4-FFF2-40B4-BE49-F238E27FC236}">
-                    <a16:creationId xmlns:a16="http://schemas.microsoft.com/office/drawing/2014/main" id="{26A65B5D-EAEC-B338-BC6A-DAC5DA0B1384}"/>
+                    <a16:creationId xmlns:a16="http://schemas.microsoft.com/office/drawing/2014/main" xmlns="" id="{26A65B5D-EAEC-B338-BC6A-DAC5DA0B1384}"/>
                   </a:ext>
                 </a:extLst>
               </p:cNvPr>
@@ -13035,7 +13119,7 @@
           <p:cNvPr id="1026" name="Picture 2" descr="K-Means: Getting the Optimal Number of Clusters- Analytics Vidhya">
             <a:extLst>
               <a:ext uri="{FF2B5EF4-FFF2-40B4-BE49-F238E27FC236}">
-                <a16:creationId xmlns:a16="http://schemas.microsoft.com/office/drawing/2014/main" id="{8E934D73-7290-09A0-C88B-24CA35D9280A}"/>
+                <a16:creationId xmlns:a16="http://schemas.microsoft.com/office/drawing/2014/main" xmlns="" id="{8E934D73-7290-09A0-C88B-24CA35D9280A}"/>
               </a:ext>
             </a:extLst>
           </p:cNvPr>
@@ -13098,7 +13182,7 @@
         <p:cNvPr id="1" name="">
           <a:extLst>
             <a:ext uri="{FF2B5EF4-FFF2-40B4-BE49-F238E27FC236}">
-              <a16:creationId xmlns:a16="http://schemas.microsoft.com/office/drawing/2014/main" id="{B7B07C05-733D-F365-8063-0C296100784E}"/>
+              <a16:creationId xmlns:a16="http://schemas.microsoft.com/office/drawing/2014/main" xmlns="" id="{B7B07C05-733D-F365-8063-0C296100784E}"/>
             </a:ext>
           </a:extLst>
         </p:cNvPr>
@@ -13118,7 +13202,7 @@
           <p:cNvPr id="2" name="Title 1">
             <a:extLst>
               <a:ext uri="{FF2B5EF4-FFF2-40B4-BE49-F238E27FC236}">
-                <a16:creationId xmlns:a16="http://schemas.microsoft.com/office/drawing/2014/main" id="{0CA87339-937F-71D3-5575-377273E7022F}"/>
+                <a16:creationId xmlns:a16="http://schemas.microsoft.com/office/drawing/2014/main" xmlns="" id="{0CA87339-937F-71D3-5575-377273E7022F}"/>
               </a:ext>
             </a:extLst>
           </p:cNvPr>
@@ -13157,7 +13241,7 @@
               <p:cNvPr id="3" name="Content Placeholder 2">
                 <a:extLst>
                   <a:ext uri="{FF2B5EF4-FFF2-40B4-BE49-F238E27FC236}">
-                    <a16:creationId xmlns:a16="http://schemas.microsoft.com/office/drawing/2014/main" id="{574CDA6D-9D3D-7343-173D-1326829D74DB}"/>
+                    <a16:creationId xmlns:a16="http://schemas.microsoft.com/office/drawing/2014/main" xmlns="" id="{574CDA6D-9D3D-7343-173D-1326829D74DB}"/>
                   </a:ext>
                 </a:extLst>
               </p:cNvPr>
@@ -13260,7 +13344,7 @@
           <p:cNvPr id="1026" name="Picture 2" descr="K-Means: Getting the Optimal Number of Clusters- Analytics Vidhya">
             <a:extLst>
               <a:ext uri="{FF2B5EF4-FFF2-40B4-BE49-F238E27FC236}">
-                <a16:creationId xmlns:a16="http://schemas.microsoft.com/office/drawing/2014/main" id="{E3714189-5C25-70A9-3FD4-7F7A02D9BA2A}"/>
+                <a16:creationId xmlns:a16="http://schemas.microsoft.com/office/drawing/2014/main" xmlns="" id="{E3714189-5C25-70A9-3FD4-7F7A02D9BA2A}"/>
               </a:ext>
             </a:extLst>
           </p:cNvPr>
@@ -13337,7 +13421,7 @@
           <p:cNvPr id="2" name="Title 1">
             <a:extLst>
               <a:ext uri="{FF2B5EF4-FFF2-40B4-BE49-F238E27FC236}">
-                <a16:creationId xmlns:a16="http://schemas.microsoft.com/office/drawing/2014/main" id="{A07C804B-5A43-5C89-0C42-420DDBB1CA5A}"/>
+                <a16:creationId xmlns:a16="http://schemas.microsoft.com/office/drawing/2014/main" xmlns="" id="{A07C804B-5A43-5C89-0C42-420DDBB1CA5A}"/>
               </a:ext>
             </a:extLst>
           </p:cNvPr>
@@ -13370,7 +13454,7 @@
           <p:cNvPr id="3" name="Content Placeholder 2">
             <a:extLst>
               <a:ext uri="{FF2B5EF4-FFF2-40B4-BE49-F238E27FC236}">
-                <a16:creationId xmlns:a16="http://schemas.microsoft.com/office/drawing/2014/main" id="{288A7DCE-B5C5-82F5-CC2A-E963BDDE03C9}"/>
+                <a16:creationId xmlns:a16="http://schemas.microsoft.com/office/drawing/2014/main" xmlns="" id="{288A7DCE-B5C5-82F5-CC2A-E963BDDE03C9}"/>
               </a:ext>
             </a:extLst>
           </p:cNvPr>
@@ -13550,7 +13634,7 @@
           <p:cNvPr id="2" name="Title 1">
             <a:extLst>
               <a:ext uri="{FF2B5EF4-FFF2-40B4-BE49-F238E27FC236}">
-                <a16:creationId xmlns:a16="http://schemas.microsoft.com/office/drawing/2014/main" id="{9FD61470-7062-5DCF-6407-C45E5BF63D31}"/>
+                <a16:creationId xmlns:a16="http://schemas.microsoft.com/office/drawing/2014/main" xmlns="" id="{9FD61470-7062-5DCF-6407-C45E5BF63D31}"/>
               </a:ext>
             </a:extLst>
           </p:cNvPr>
@@ -13579,7 +13663,7 @@
           <p:cNvPr id="3" name="Content Placeholder 2">
             <a:extLst>
               <a:ext uri="{FF2B5EF4-FFF2-40B4-BE49-F238E27FC236}">
-                <a16:creationId xmlns:a16="http://schemas.microsoft.com/office/drawing/2014/main" id="{06C85168-BBA5-1819-2A3F-16AFDD60A698}"/>
+                <a16:creationId xmlns:a16="http://schemas.microsoft.com/office/drawing/2014/main" xmlns="" id="{06C85168-BBA5-1819-2A3F-16AFDD60A698}"/>
               </a:ext>
             </a:extLst>
           </p:cNvPr>
@@ -13653,7 +13737,7 @@
           <p:cNvPr id="1026" name="Picture 2">
             <a:extLst>
               <a:ext uri="{FF2B5EF4-FFF2-40B4-BE49-F238E27FC236}">
-                <a16:creationId xmlns:a16="http://schemas.microsoft.com/office/drawing/2014/main" id="{7F44AA9B-6E70-9E5C-102F-FC9BEDBA27E0}"/>
+                <a16:creationId xmlns:a16="http://schemas.microsoft.com/office/drawing/2014/main" xmlns="" id="{7F44AA9B-6E70-9E5C-102F-FC9BEDBA27E0}"/>
               </a:ext>
             </a:extLst>
           </p:cNvPr>
@@ -13730,7 +13814,7 @@
           <p:cNvPr id="2" name="Título 1">
             <a:extLst>
               <a:ext uri="{FF2B5EF4-FFF2-40B4-BE49-F238E27FC236}">
-                <a16:creationId xmlns:a16="http://schemas.microsoft.com/office/drawing/2014/main" id="{94AB8438-E56E-2412-517C-8456E4CA773C}"/>
+                <a16:creationId xmlns:a16="http://schemas.microsoft.com/office/drawing/2014/main" xmlns="" id="{94AB8438-E56E-2412-517C-8456E4CA773C}"/>
               </a:ext>
             </a:extLst>
           </p:cNvPr>
@@ -13758,7 +13842,7 @@
           <p:cNvPr id="3" name="Espaço Reservado para Conteúdo 2">
             <a:extLst>
               <a:ext uri="{FF2B5EF4-FFF2-40B4-BE49-F238E27FC236}">
-                <a16:creationId xmlns:a16="http://schemas.microsoft.com/office/drawing/2014/main" id="{F7E2B09C-6D56-4C9F-A364-B904CCE2F1A0}"/>
+                <a16:creationId xmlns:a16="http://schemas.microsoft.com/office/drawing/2014/main" xmlns="" id="{F7E2B09C-6D56-4C9F-A364-B904CCE2F1A0}"/>
               </a:ext>
             </a:extLst>
           </p:cNvPr>
@@ -13801,7 +13885,7 @@
           <p:cNvPr id="18" name="Group 17">
             <a:extLst>
               <a:ext uri="{FF2B5EF4-FFF2-40B4-BE49-F238E27FC236}">
-                <a16:creationId xmlns:a16="http://schemas.microsoft.com/office/drawing/2014/main" id="{627C64FD-88E0-EC8E-2A34-0D5737B4C854}"/>
+                <a16:creationId xmlns:a16="http://schemas.microsoft.com/office/drawing/2014/main" xmlns="" id="{627C64FD-88E0-EC8E-2A34-0D5737B4C854}"/>
               </a:ext>
             </a:extLst>
           </p:cNvPr>
@@ -13821,7 +13905,7 @@
             <p:cNvPr id="12" name="Picture 4" descr="Project Jupyter | Try Jupyter">
               <a:extLst>
                 <a:ext uri="{FF2B5EF4-FFF2-40B4-BE49-F238E27FC236}">
-                  <a16:creationId xmlns:a16="http://schemas.microsoft.com/office/drawing/2014/main" id="{FF92EA36-91E7-292B-D7A0-2D4D83A10F98}"/>
+                  <a16:creationId xmlns:a16="http://schemas.microsoft.com/office/drawing/2014/main" xmlns="" id="{FF92EA36-91E7-292B-D7A0-2D4D83A10F98}"/>
                 </a:ext>
               </a:extLst>
             </p:cNvPr>
@@ -13868,7 +13952,7 @@
             <p:cNvPr id="13" name="Picture 8" descr="Google Colaboratory Colab - Guía Completa Español - Marketing Branding">
               <a:extLst>
                 <a:ext uri="{FF2B5EF4-FFF2-40B4-BE49-F238E27FC236}">
-                  <a16:creationId xmlns:a16="http://schemas.microsoft.com/office/drawing/2014/main" id="{46F1718A-89E6-9E63-E40B-2B19852D6AA0}"/>
+                  <a16:creationId xmlns:a16="http://schemas.microsoft.com/office/drawing/2014/main" xmlns="" id="{46F1718A-89E6-9E63-E40B-2B19852D6AA0}"/>
                 </a:ext>
               </a:extLst>
             </p:cNvPr>
@@ -13913,7 +13997,7 @@
             <p:cNvPr id="14" name="Picture 10" descr="IT12A01: FUNDAMENTALS OF PYTHON PROGRAMMING (SF) (SYNCHRONOUS E-LEARNING) -  NTUC LearningHub">
               <a:extLst>
                 <a:ext uri="{FF2B5EF4-FFF2-40B4-BE49-F238E27FC236}">
-                  <a16:creationId xmlns:a16="http://schemas.microsoft.com/office/drawing/2014/main" id="{33F6B1B4-9B79-D634-3E35-33F24609C848}"/>
+                  <a16:creationId xmlns:a16="http://schemas.microsoft.com/office/drawing/2014/main" xmlns="" id="{33F6B1B4-9B79-D634-3E35-33F24609C848}"/>
                 </a:ext>
               </a:extLst>
             </p:cNvPr>
@@ -13958,7 +14042,7 @@
             <p:cNvPr id="15" name="Sinal de Adição 7">
               <a:extLst>
                 <a:ext uri="{FF2B5EF4-FFF2-40B4-BE49-F238E27FC236}">
-                  <a16:creationId xmlns:a16="http://schemas.microsoft.com/office/drawing/2014/main" id="{6959EE6C-DCDB-E78B-5C50-EBD3FF3049E2}"/>
+                  <a16:creationId xmlns:a16="http://schemas.microsoft.com/office/drawing/2014/main" xmlns="" id="{6959EE6C-DCDB-E78B-5C50-EBD3FF3049E2}"/>
                 </a:ext>
               </a:extLst>
             </p:cNvPr>
@@ -14006,7 +14090,7 @@
             <p:cNvPr id="17" name="Sinal de Adição 10">
               <a:extLst>
                 <a:ext uri="{FF2B5EF4-FFF2-40B4-BE49-F238E27FC236}">
-                  <a16:creationId xmlns:a16="http://schemas.microsoft.com/office/drawing/2014/main" id="{30A21FDB-ABA6-9FD5-49EF-7762414AEF0C}"/>
+                  <a16:creationId xmlns:a16="http://schemas.microsoft.com/office/drawing/2014/main" xmlns="" id="{30A21FDB-ABA6-9FD5-49EF-7762414AEF0C}"/>
                 </a:ext>
               </a:extLst>
             </p:cNvPr>
@@ -14085,7 +14169,7 @@
           <p:cNvPr id="2" name="Title 1">
             <a:extLst>
               <a:ext uri="{FF2B5EF4-FFF2-40B4-BE49-F238E27FC236}">
-                <a16:creationId xmlns:a16="http://schemas.microsoft.com/office/drawing/2014/main" id="{E8FD0E11-3B37-4336-5BF0-C8C033354AF6}"/>
+                <a16:creationId xmlns:a16="http://schemas.microsoft.com/office/drawing/2014/main" xmlns="" id="{E8FD0E11-3B37-4336-5BF0-C8C033354AF6}"/>
               </a:ext>
             </a:extLst>
           </p:cNvPr>
@@ -14114,7 +14198,7 @@
           <p:cNvPr id="3" name="Content Placeholder 2">
             <a:extLst>
               <a:ext uri="{FF2B5EF4-FFF2-40B4-BE49-F238E27FC236}">
-                <a16:creationId xmlns:a16="http://schemas.microsoft.com/office/drawing/2014/main" id="{32CB14AB-72E4-05EB-962C-F8B4618D0574}"/>
+                <a16:creationId xmlns:a16="http://schemas.microsoft.com/office/drawing/2014/main" xmlns="" id="{32CB14AB-72E4-05EB-962C-F8B4618D0574}"/>
               </a:ext>
             </a:extLst>
           </p:cNvPr>
@@ -14184,7 +14268,7 @@
           <p:cNvPr id="4" name="Título 1">
             <a:extLst>
               <a:ext uri="{FF2B5EF4-FFF2-40B4-BE49-F238E27FC236}">
-                <a16:creationId xmlns:a16="http://schemas.microsoft.com/office/drawing/2014/main" id="{32666AC8-2E17-4DB4-B0F5-60C640CCFD2E}"/>
+                <a16:creationId xmlns:a16="http://schemas.microsoft.com/office/drawing/2014/main" xmlns="" id="{32666AC8-2E17-4DB4-B0F5-60C640CCFD2E}"/>
               </a:ext>
             </a:extLst>
           </p:cNvPr>
@@ -14300,7 +14384,7 @@
         <p:spPr>
           <a:xfrm>
             <a:off x="5802087" y="1690688"/>
-            <a:ext cx="6240978" cy="5036683"/>
+            <a:ext cx="6240978" cy="5167312"/>
           </a:xfrm>
         </p:spPr>
         <p:txBody>
@@ -14323,8 +14407,19 @@
             </a:r>
             <a:r>
               <a:rPr lang="pt-BR" dirty="0"/>
-              <a:t>(i.e., rótulos) a que pertencem os exemplos de entrada?</a:t>
-            </a:r>
+              <a:t>(i.e., rótulos) a que pertencem os </a:t>
+            </a:r>
+            <a:r>
+              <a:rPr lang="pt-BR" dirty="0" smtClean="0"/>
+              <a:t>exemplos?</a:t>
+            </a:r>
+          </a:p>
+          <a:p>
+            <a:r>
+              <a:rPr lang="pt-BR" dirty="0" smtClean="0"/>
+              <a:t>Conseguimos extrair alguma informação útil?</a:t>
+            </a:r>
+            <a:endParaRPr lang="pt-BR" dirty="0"/>
           </a:p>
         </p:txBody>
       </p:sp>
@@ -14402,7 +14497,7 @@
           <p:cNvPr id="4" name="Título 1">
             <a:extLst>
               <a:ext uri="{FF2B5EF4-FFF2-40B4-BE49-F238E27FC236}">
-                <a16:creationId xmlns:a16="http://schemas.microsoft.com/office/drawing/2014/main" id="{32666AC8-2E17-4DB4-B0F5-60C640CCFD2E}"/>
+                <a16:creationId xmlns:a16="http://schemas.microsoft.com/office/drawing/2014/main" xmlns="" id="{32666AC8-2E17-4DB4-B0F5-60C640CCFD2E}"/>
               </a:ext>
             </a:extLst>
           </p:cNvPr>
@@ -14707,7 +14802,7 @@
         <p:cNvPr id="1" name="">
           <a:extLst>
             <a:ext uri="{FF2B5EF4-FFF2-40B4-BE49-F238E27FC236}">
-              <a16:creationId xmlns:a16="http://schemas.microsoft.com/office/drawing/2014/main" id="{E5F23F1A-965B-E657-4F46-B48EB78CFF12}"/>
+              <a16:creationId xmlns:a16="http://schemas.microsoft.com/office/drawing/2014/main" xmlns="" id="{E5F23F1A-965B-E657-4F46-B48EB78CFF12}"/>
             </a:ext>
           </a:extLst>
         </p:cNvPr>
@@ -14727,7 +14822,7 @@
           <p:cNvPr id="2" name="Title 1">
             <a:extLst>
               <a:ext uri="{FF2B5EF4-FFF2-40B4-BE49-F238E27FC236}">
-                <a16:creationId xmlns:a16="http://schemas.microsoft.com/office/drawing/2014/main" id="{1D2CEC37-D651-72A5-0293-3FB911F60F37}"/>
+                <a16:creationId xmlns:a16="http://schemas.microsoft.com/office/drawing/2014/main" xmlns="" id="{1D2CEC37-D651-72A5-0293-3FB911F60F37}"/>
               </a:ext>
             </a:extLst>
           </p:cNvPr>
@@ -14755,7 +14850,7 @@
           <p:cNvPr id="7" name="Content Placeholder 2">
             <a:extLst>
               <a:ext uri="{FF2B5EF4-FFF2-40B4-BE49-F238E27FC236}">
-                <a16:creationId xmlns:a16="http://schemas.microsoft.com/office/drawing/2014/main" id="{B3C1A135-4B52-F54B-5BDE-7C6DA1069706}"/>
+                <a16:creationId xmlns:a16="http://schemas.microsoft.com/office/drawing/2014/main" xmlns="" id="{B3C1A135-4B52-F54B-5BDE-7C6DA1069706}"/>
               </a:ext>
             </a:extLst>
           </p:cNvPr>
@@ -14805,12 +14900,20 @@
           </a:p>
           <a:p>
             <a:r>
-              <a:rPr lang="pt-BR" i="1" dirty="0"/>
-              <a:t>Clustering</a:t>
-            </a:r>
-            <a:r>
-              <a:rPr lang="pt-BR" dirty="0"/>
-              <a:t> tenta </a:t>
+              <a:rPr lang="pt-BR" dirty="0" smtClean="0"/>
+              <a:t>O </a:t>
+            </a:r>
+            <a:r>
+              <a:rPr lang="pt-BR" i="1" dirty="0" err="1" smtClean="0"/>
+              <a:t>clustering</a:t>
+            </a:r>
+            <a:r>
+              <a:rPr lang="pt-BR" dirty="0" smtClean="0"/>
+              <a:t> </a:t>
+            </a:r>
+            <a:r>
+              <a:rPr lang="pt-BR" dirty="0"/>
+              <a:t>tenta </a:t>
             </a:r>
             <a:r>
               <a:rPr lang="pt-BR" b="1" dirty="0">
@@ -14852,7 +14955,7 @@
           <p:cNvPr id="5" name="Grupo 4">
             <a:extLst>
               <a:ext uri="{FF2B5EF4-FFF2-40B4-BE49-F238E27FC236}">
-                <a16:creationId xmlns:a16="http://schemas.microsoft.com/office/drawing/2014/main" id="{FD3AFEA6-16E8-D562-210E-DDE126CC469D}"/>
+                <a16:creationId xmlns:a16="http://schemas.microsoft.com/office/drawing/2014/main" xmlns="" id="{FD3AFEA6-16E8-D562-210E-DDE126CC469D}"/>
               </a:ext>
             </a:extLst>
           </p:cNvPr>
@@ -14872,7 +14975,7 @@
             <p:cNvPr id="6" name="Picture 2" descr="K-Means Clustering using Python. Welcome back guys! Hope you had a great… |  by Luigi Fiori | Medium">
               <a:extLst>
                 <a:ext uri="{FF2B5EF4-FFF2-40B4-BE49-F238E27FC236}">
-                  <a16:creationId xmlns:a16="http://schemas.microsoft.com/office/drawing/2014/main" id="{5EE61C46-3856-780A-E6BB-BC8EBB4234F4}"/>
+                  <a16:creationId xmlns:a16="http://schemas.microsoft.com/office/drawing/2014/main" xmlns="" id="{5EE61C46-3856-780A-E6BB-BC8EBB4234F4}"/>
                 </a:ext>
               </a:extLst>
             </p:cNvPr>
@@ -14917,7 +15020,7 @@
             <p:cNvPr id="8" name="CaixaDeTexto 7">
               <a:extLst>
                 <a:ext uri="{FF2B5EF4-FFF2-40B4-BE49-F238E27FC236}">
-                  <a16:creationId xmlns:a16="http://schemas.microsoft.com/office/drawing/2014/main" id="{843AD3E7-A8FE-599D-36F8-EA8BA9682F1B}"/>
+                  <a16:creationId xmlns:a16="http://schemas.microsoft.com/office/drawing/2014/main" xmlns="" id="{843AD3E7-A8FE-599D-36F8-EA8BA9682F1B}"/>
                 </a:ext>
               </a:extLst>
             </p:cNvPr>
@@ -14954,7 +15057,7 @@
             <p:cNvPr id="9" name="Picture 2" descr="K-Means Clustering using Python. Welcome back guys! Hope you had a great… |  by Luigi Fiori | Medium">
               <a:extLst>
                 <a:ext uri="{FF2B5EF4-FFF2-40B4-BE49-F238E27FC236}">
-                  <a16:creationId xmlns:a16="http://schemas.microsoft.com/office/drawing/2014/main" id="{E7C74A0F-F2DD-912F-E092-3530D068D40B}"/>
+                  <a16:creationId xmlns:a16="http://schemas.microsoft.com/office/drawing/2014/main" xmlns="" id="{E7C74A0F-F2DD-912F-E092-3530D068D40B}"/>
                 </a:ext>
               </a:extLst>
             </p:cNvPr>
@@ -14999,7 +15102,7 @@
             <p:cNvPr id="10" name="Seta para a direita 9">
               <a:extLst>
                 <a:ext uri="{FF2B5EF4-FFF2-40B4-BE49-F238E27FC236}">
-                  <a16:creationId xmlns:a16="http://schemas.microsoft.com/office/drawing/2014/main" id="{88A77E2D-B8CF-1AE8-8196-DD8F94371FF0}"/>
+                  <a16:creationId xmlns:a16="http://schemas.microsoft.com/office/drawing/2014/main" xmlns="" id="{88A77E2D-B8CF-1AE8-8196-DD8F94371FF0}"/>
                 </a:ext>
               </a:extLst>
             </p:cNvPr>
@@ -15119,45 +15222,7 @@
           <a:lstStyle/>
           <a:p>
             <a:r>
-              <a:rPr lang="pt-BR" dirty="0"/>
-              <a:t>A tarefa mais popular dos algoritmos deste paradigma é a procura por </a:t>
-            </a:r>
-            <a:r>
-              <a:rPr lang="pt-BR" b="1" dirty="0"/>
-              <a:t>grupos</a:t>
-            </a:r>
-            <a:r>
-              <a:rPr lang="pt-BR" dirty="0"/>
-              <a:t> (chamados </a:t>
-            </a:r>
-            <a:r>
-              <a:rPr lang="pt-BR" b="1" i="1" dirty="0">
-                <a:solidFill>
-                  <a:srgbClr val="7030A0"/>
-                </a:solidFill>
-              </a:rPr>
-              <a:t>clusters</a:t>
-            </a:r>
-            <a:r>
-              <a:rPr lang="pt-BR" dirty="0"/>
-              <a:t>) de </a:t>
-            </a:r>
-            <a:r>
-              <a:rPr lang="pt-BR" b="1" dirty="0">
-                <a:solidFill>
-                  <a:srgbClr val="7030A0"/>
-                </a:solidFill>
-              </a:rPr>
-              <a:t>exemplos semelhantes</a:t>
-            </a:r>
-            <a:r>
-              <a:rPr lang="pt-BR" dirty="0"/>
-              <a:t>. </a:t>
-            </a:r>
-          </a:p>
-          <a:p>
-            <a:r>
-              <a:rPr lang="pt-BR" dirty="0"/>
+              <a:rPr lang="pt-BR" dirty="0" smtClean="0"/>
               <a:t>O </a:t>
             </a:r>
             <a:r>
@@ -15464,10 +15529,34 @@
             </a:r>
             <a:r>
               <a:rPr lang="pt-BR" dirty="0"/>
-              <a:t> é um conjunto dos </a:t>
-            </a:r>
-            <a:r>
-              <a:rPr lang="pt-BR" b="1" i="1" dirty="0">
+              <a:t> </a:t>
+            </a:r>
+            <a:r>
+              <a:rPr lang="pt-BR" dirty="0" smtClean="0"/>
+              <a:t>são os </a:t>
+            </a:r>
+            <a:r>
+              <a:rPr lang="pt-BR" b="1" dirty="0" smtClean="0">
+                <a:solidFill>
+                  <a:srgbClr val="00B050"/>
+                </a:solidFill>
+              </a:rPr>
+              <a:t>centroides</a:t>
+            </a:r>
+            <a:r>
+              <a:rPr lang="pt-BR" dirty="0" smtClean="0"/>
+              <a:t> e os </a:t>
+            </a:r>
+            <a:r>
+              <a:rPr lang="pt-BR" b="1" dirty="0" smtClean="0">
+                <a:solidFill>
+                  <a:srgbClr val="00B050"/>
+                </a:solidFill>
+              </a:rPr>
+              <a:t>índices dos </a:t>
+            </a:r>
+            <a:r>
+              <a:rPr lang="pt-BR" b="1" i="1" dirty="0" smtClean="0">
                 <a:solidFill>
                   <a:srgbClr val="00B050"/>
                 </a:solidFill>
@@ -15475,8 +15564,16 @@
               <a:t>clusters</a:t>
             </a:r>
             <a:r>
-              <a:rPr lang="pt-BR" dirty="0"/>
-              <a:t> a que pertencem cada um dos exemplos do conjunto de treinamento.</a:t>
+              <a:rPr lang="pt-BR" b="1" dirty="0" smtClean="0">
+                <a:solidFill>
+                  <a:srgbClr val="00B050"/>
+                </a:solidFill>
+              </a:rPr>
+              <a:t> </a:t>
+            </a:r>
+            <a:r>
+              <a:rPr lang="pt-BR" dirty="0"/>
+              <a:t>a que pertencem cada um dos exemplos do conjunto de treinamento.</a:t>
             </a:r>
           </a:p>
         </p:txBody>
@@ -15732,7 +15829,7 @@
           <p:cNvPr id="2" name="Title 1">
             <a:extLst>
               <a:ext uri="{FF2B5EF4-FFF2-40B4-BE49-F238E27FC236}">
-                <a16:creationId xmlns:a16="http://schemas.microsoft.com/office/drawing/2014/main" id="{536BFB42-0017-5ED1-7773-E084E5A015B7}"/>
+                <a16:creationId xmlns:a16="http://schemas.microsoft.com/office/drawing/2014/main" xmlns="" id="{536BFB42-0017-5ED1-7773-E084E5A015B7}"/>
               </a:ext>
             </a:extLst>
           </p:cNvPr>
@@ -15761,7 +15858,7 @@
           <p:cNvPr id="3" name="Content Placeholder 2">
             <a:extLst>
               <a:ext uri="{FF2B5EF4-FFF2-40B4-BE49-F238E27FC236}">
-                <a16:creationId xmlns:a16="http://schemas.microsoft.com/office/drawing/2014/main" id="{D299C266-04B6-6A8C-91F5-24FCD2CC3103}"/>
+                <a16:creationId xmlns:a16="http://schemas.microsoft.com/office/drawing/2014/main" xmlns="" id="{D299C266-04B6-6A8C-91F5-24FCD2CC3103}"/>
               </a:ext>
             </a:extLst>
           </p:cNvPr>
@@ -15900,7 +15997,7 @@
           <p:cNvPr id="5" name="Picture 2" descr="K-means clustering on the digits dataset (PCA-reduced data) Centroids are marked with white cross">
             <a:extLst>
               <a:ext uri="{FF2B5EF4-FFF2-40B4-BE49-F238E27FC236}">
-                <a16:creationId xmlns:a16="http://schemas.microsoft.com/office/drawing/2014/main" id="{A7524CD6-9254-ABD9-EBBF-94136AAAEDE9}"/>
+                <a16:creationId xmlns:a16="http://schemas.microsoft.com/office/drawing/2014/main" xmlns="" id="{A7524CD6-9254-ABD9-EBBF-94136AAAEDE9}"/>
               </a:ext>
             </a:extLst>
           </p:cNvPr>
@@ -15961,7 +16058,7 @@
         <p:cNvPr id="1" name="">
           <a:extLst>
             <a:ext uri="{FF2B5EF4-FFF2-40B4-BE49-F238E27FC236}">
-              <a16:creationId xmlns:a16="http://schemas.microsoft.com/office/drawing/2014/main" id="{3A831676-6BED-CA70-6524-D513003AAAD0}"/>
+              <a16:creationId xmlns:a16="http://schemas.microsoft.com/office/drawing/2014/main" xmlns="" id="{3A831676-6BED-CA70-6524-D513003AAAD0}"/>
             </a:ext>
           </a:extLst>
         </p:cNvPr>
@@ -15981,7 +16078,7 @@
           <p:cNvPr id="2" name="Title 1">
             <a:extLst>
               <a:ext uri="{FF2B5EF4-FFF2-40B4-BE49-F238E27FC236}">
-                <a16:creationId xmlns:a16="http://schemas.microsoft.com/office/drawing/2014/main" id="{04A038D5-B823-B9FD-D23F-5029CC44B85D}"/>
+                <a16:creationId xmlns:a16="http://schemas.microsoft.com/office/drawing/2014/main" xmlns="" id="{04A038D5-B823-B9FD-D23F-5029CC44B85D}"/>
               </a:ext>
             </a:extLst>
           </p:cNvPr>
@@ -16010,7 +16107,7 @@
           <p:cNvPr id="3" name="Content Placeholder 2">
             <a:extLst>
               <a:ext uri="{FF2B5EF4-FFF2-40B4-BE49-F238E27FC236}">
-                <a16:creationId xmlns:a16="http://schemas.microsoft.com/office/drawing/2014/main" id="{7A9B68C4-7FDA-1A4B-497F-F6FD37E35497}"/>
+                <a16:creationId xmlns:a16="http://schemas.microsoft.com/office/drawing/2014/main" xmlns="" id="{7A9B68C4-7FDA-1A4B-497F-F6FD37E35497}"/>
               </a:ext>
             </a:extLst>
           </p:cNvPr>
@@ -16189,7 +16286,7 @@
           <p:cNvPr id="5" name="Picture 2" descr="K-means clustering on the digits dataset (PCA-reduced data) Centroids are marked with white cross">
             <a:extLst>
               <a:ext uri="{FF2B5EF4-FFF2-40B4-BE49-F238E27FC236}">
-                <a16:creationId xmlns:a16="http://schemas.microsoft.com/office/drawing/2014/main" id="{900BE683-11F2-C00F-2CDC-3D7D2CF03B9A}"/>
+                <a16:creationId xmlns:a16="http://schemas.microsoft.com/office/drawing/2014/main" xmlns="" id="{900BE683-11F2-C00F-2CDC-3D7D2CF03B9A}"/>
               </a:ext>
             </a:extLst>
           </p:cNvPr>

--- a/slides/C24_kMeans.pptx
+++ b/slides/C24_kMeans.pptx
@@ -5,7 +5,7 @@
     <p:sldMasterId id="2147483648" r:id="rId1"/>
   </p:sldMasterIdLst>
   <p:notesMasterIdLst>
-    <p:notesMasterId r:id="rId48"/>
+    <p:notesMasterId r:id="rId49"/>
   </p:notesMasterIdLst>
   <p:sldIdLst>
     <p:sldId id="256" r:id="rId2"/>
@@ -28,32 +28,33 @@
     <p:sldId id="291" r:id="rId19"/>
     <p:sldId id="417" r:id="rId20"/>
     <p:sldId id="404" r:id="rId21"/>
-    <p:sldId id="405" r:id="rId22"/>
-    <p:sldId id="427" r:id="rId23"/>
-    <p:sldId id="406" r:id="rId24"/>
-    <p:sldId id="407" r:id="rId25"/>
-    <p:sldId id="408" r:id="rId26"/>
-    <p:sldId id="409" r:id="rId27"/>
-    <p:sldId id="410" r:id="rId28"/>
-    <p:sldId id="292" r:id="rId29"/>
-    <p:sldId id="299" r:id="rId30"/>
-    <p:sldId id="419" r:id="rId31"/>
-    <p:sldId id="428" r:id="rId32"/>
-    <p:sldId id="420" r:id="rId33"/>
-    <p:sldId id="421" r:id="rId34"/>
-    <p:sldId id="422" r:id="rId35"/>
-    <p:sldId id="429" r:id="rId36"/>
-    <p:sldId id="423" r:id="rId37"/>
-    <p:sldId id="424" r:id="rId38"/>
-    <p:sldId id="398" r:id="rId39"/>
-    <p:sldId id="431" r:id="rId40"/>
-    <p:sldId id="430" r:id="rId41"/>
-    <p:sldId id="425" r:id="rId42"/>
-    <p:sldId id="338" r:id="rId43"/>
-    <p:sldId id="395" r:id="rId44"/>
-    <p:sldId id="396" r:id="rId45"/>
-    <p:sldId id="306" r:id="rId46"/>
-    <p:sldId id="265" r:id="rId47"/>
+    <p:sldId id="432" r:id="rId22"/>
+    <p:sldId id="405" r:id="rId23"/>
+    <p:sldId id="427" r:id="rId24"/>
+    <p:sldId id="406" r:id="rId25"/>
+    <p:sldId id="407" r:id="rId26"/>
+    <p:sldId id="408" r:id="rId27"/>
+    <p:sldId id="409" r:id="rId28"/>
+    <p:sldId id="410" r:id="rId29"/>
+    <p:sldId id="292" r:id="rId30"/>
+    <p:sldId id="299" r:id="rId31"/>
+    <p:sldId id="419" r:id="rId32"/>
+    <p:sldId id="428" r:id="rId33"/>
+    <p:sldId id="420" r:id="rId34"/>
+    <p:sldId id="421" r:id="rId35"/>
+    <p:sldId id="422" r:id="rId36"/>
+    <p:sldId id="429" r:id="rId37"/>
+    <p:sldId id="423" r:id="rId38"/>
+    <p:sldId id="424" r:id="rId39"/>
+    <p:sldId id="398" r:id="rId40"/>
+    <p:sldId id="431" r:id="rId41"/>
+    <p:sldId id="430" r:id="rId42"/>
+    <p:sldId id="425" r:id="rId43"/>
+    <p:sldId id="338" r:id="rId44"/>
+    <p:sldId id="395" r:id="rId45"/>
+    <p:sldId id="396" r:id="rId46"/>
+    <p:sldId id="306" r:id="rId47"/>
+    <p:sldId id="265" r:id="rId48"/>
   </p:sldIdLst>
   <p:sldSz cx="12192000" cy="6858000"/>
   <p:notesSz cx="6858000" cy="9144000"/>
@@ -1084,8 +1085,8 @@
         </p:nvSpPr>
         <p:spPr/>
       </p:sp>
-      <mc:AlternateContent xmlns:mc="http://schemas.openxmlformats.org/markup-compatibility/2006">
-        <mc:Choice xmlns:a14="http://schemas.microsoft.com/office/drawing/2010/main" Requires="a14">
+      <mc:AlternateContent xmlns:mc="http://schemas.openxmlformats.org/markup-compatibility/2006" xmlns:a14="http://schemas.microsoft.com/office/drawing/2010/main">
+        <mc:Choice Requires="a14">
           <p:sp>
             <p:nvSpPr>
               <p:cNvPr id="3" name="Espaço Reservado para Anotações 2"/>
@@ -1173,6 +1174,10 @@
                   <a:rPr lang="en-US" b="1" dirty="0"/>
                   <a:t>)</a:t>
                 </a:r>
+                <a:r>
+                  <a:rPr lang="en-US" dirty="0"/>
+                  <a:t/>
+                </a:r>
                 <a:br>
                   <a:rPr lang="en-US" dirty="0"/>
                 </a:br>
@@ -1267,7 +1272,7 @@
                         <a:solidFill>
                           <a:schemeClr val="tx1"/>
                         </a:solidFill>
-                        <a:latin typeface="+mn-lt"/>
+                        <a:latin typeface="Cambria Math" panose="02040503050406030204" pitchFamily="18" charset="0"/>
                         <a:ea typeface="+mn-ea"/>
                         <a:cs typeface="+mn-cs"/>
                       </a:rPr>
@@ -1356,6 +1361,10 @@
                   <a:rPr lang="en-US" b="1" dirty="0" err="1"/>
                   <a:t>desprezível</a:t>
                 </a:r>
+                <a:r>
+                  <a:rPr lang="en-US" dirty="0"/>
+                  <a:t/>
+                </a:r>
                 <a:br>
                   <a:rPr lang="en-US" dirty="0"/>
                 </a:br>
@@ -1397,6 +1406,7 @@
                 </a:r>
               </a:p>
               <a:p>
+                <a:pPr/>
                 <a14:m>
                   <m:oMathPara xmlns:m="http://schemas.openxmlformats.org/officeDocument/2006/math">
                     <m:oMathParaPr>
@@ -1408,7 +1418,7 @@
                           <a:solidFill>
                             <a:schemeClr val="tx1"/>
                           </a:solidFill>
-                          <a:latin typeface="+mn-lt"/>
+                          <a:latin typeface="Cambria Math" panose="02040503050406030204" pitchFamily="18" charset="0"/>
                           <a:ea typeface="+mn-ea"/>
                           <a:cs typeface="+mn-cs"/>
                         </a:rPr>
@@ -1419,7 +1429,7 @@
                           <a:solidFill>
                             <a:schemeClr val="tx1"/>
                           </a:solidFill>
-                          <a:latin typeface="+mn-lt"/>
+                          <a:latin typeface="Cambria Math" panose="02040503050406030204" pitchFamily="18" charset="0"/>
                           <a:ea typeface="+mn-ea"/>
                           <a:cs typeface="+mn-cs"/>
                         </a:rPr>
@@ -1435,7 +1445,7 @@
                               <a:solidFill>
                                 <a:schemeClr val="tx1"/>
                               </a:solidFill>
-                              <a:latin typeface="+mn-lt"/>
+                              <a:latin typeface="Cambria Math" panose="02040503050406030204" pitchFamily="18" charset="0"/>
                               <a:ea typeface="+mn-ea"/>
                               <a:cs typeface="+mn-cs"/>
                             </a:rPr>
@@ -1447,7 +1457,7 @@
                               <a:solidFill>
                                 <a:schemeClr val="tx1"/>
                               </a:solidFill>
-                              <a:latin typeface="+mn-lt"/>
+                              <a:latin typeface="Cambria Math" panose="02040503050406030204" pitchFamily="18" charset="0"/>
                               <a:ea typeface="+mn-ea"/>
                               <a:cs typeface="+mn-cs"/>
                             </a:rPr>
@@ -1458,7 +1468,7 @@
                               <a:solidFill>
                                 <a:schemeClr val="tx1"/>
                               </a:solidFill>
-                              <a:latin typeface="+mn-lt"/>
+                              <a:latin typeface="Cambria Math" panose="02040503050406030204" pitchFamily="18" charset="0"/>
                               <a:ea typeface="+mn-ea"/>
                               <a:cs typeface="+mn-cs"/>
                             </a:rPr>
@@ -1471,7 +1481,7 @@
                               <a:solidFill>
                                 <a:schemeClr val="tx1"/>
                               </a:solidFill>
-                              <a:latin typeface="+mn-lt"/>
+                              <a:latin typeface="Cambria Math" panose="02040503050406030204" pitchFamily="18" charset="0"/>
                               <a:ea typeface="+mn-ea"/>
                               <a:cs typeface="+mn-cs"/>
                             </a:rPr>
@@ -1489,7 +1499,7 @@
                                   <a:solidFill>
                                     <a:schemeClr val="tx1"/>
                                   </a:solidFill>
-                                  <a:latin typeface="+mn-lt"/>
+                                  <a:latin typeface="Cambria Math" panose="02040503050406030204" pitchFamily="18" charset="0"/>
                                   <a:ea typeface="+mn-ea"/>
                                   <a:cs typeface="+mn-cs"/>
                                 </a:rPr>
@@ -1503,7 +1513,7 @@
                                       <a:solidFill>
                                         <a:schemeClr val="tx1"/>
                                       </a:solidFill>
-                                      <a:latin typeface="+mn-lt"/>
+                                      <a:latin typeface="Cambria Math" panose="02040503050406030204" pitchFamily="18" charset="0"/>
                                       <a:ea typeface="+mn-ea"/>
                                       <a:cs typeface="+mn-cs"/>
                                     </a:rPr>
@@ -1515,7 +1525,7 @@
                                       <a:solidFill>
                                         <a:schemeClr val="tx1"/>
                                       </a:solidFill>
-                                      <a:latin typeface="+mn-lt"/>
+                                      <a:latin typeface="Cambria Math" panose="02040503050406030204" pitchFamily="18" charset="0"/>
                                       <a:ea typeface="+mn-ea"/>
                                       <a:cs typeface="+mn-cs"/>
                                     </a:rPr>
@@ -1528,7 +1538,7 @@
                                       <a:solidFill>
                                         <a:schemeClr val="tx1"/>
                                       </a:solidFill>
-                                      <a:latin typeface="+mn-lt"/>
+                                      <a:latin typeface="Cambria Math" panose="02040503050406030204" pitchFamily="18" charset="0"/>
                                       <a:ea typeface="+mn-ea"/>
                                       <a:cs typeface="+mn-cs"/>
                                     </a:rPr>
@@ -1541,7 +1551,7 @@
                                   <a:solidFill>
                                     <a:schemeClr val="tx1"/>
                                   </a:solidFill>
-                                  <a:latin typeface="+mn-lt"/>
+                                  <a:latin typeface="Cambria Math" panose="02040503050406030204" pitchFamily="18" charset="0"/>
                                   <a:ea typeface="+mn-ea"/>
                                   <a:cs typeface="+mn-cs"/>
                                 </a:rPr>
@@ -1554,7 +1564,7 @@
                                       <a:solidFill>
                                         <a:schemeClr val="tx1"/>
                                       </a:solidFill>
-                                      <a:latin typeface="+mn-lt"/>
+                                      <a:latin typeface="Cambria Math" panose="02040503050406030204" pitchFamily="18" charset="0"/>
                                       <a:ea typeface="+mn-ea"/>
                                       <a:cs typeface="+mn-cs"/>
                                     </a:rPr>
@@ -1566,7 +1576,7 @@
                                       <a:solidFill>
                                         <a:schemeClr val="tx1"/>
                                       </a:solidFill>
-                                      <a:latin typeface="+mn-lt"/>
+                                      <a:latin typeface="Cambria Math" panose="02040503050406030204" pitchFamily="18" charset="0"/>
                                       <a:ea typeface="+mn-ea"/>
                                       <a:cs typeface="+mn-cs"/>
                                     </a:rPr>
@@ -1579,7 +1589,7 @@
                                       <a:solidFill>
                                         <a:schemeClr val="tx1"/>
                                       </a:solidFill>
-                                      <a:latin typeface="+mn-lt"/>
+                                      <a:latin typeface="Cambria Math" panose="02040503050406030204" pitchFamily="18" charset="0"/>
                                       <a:ea typeface="+mn-ea"/>
                                       <a:cs typeface="+mn-cs"/>
                                     </a:rPr>
@@ -1595,7 +1605,7 @@
                                   <a:solidFill>
                                     <a:schemeClr val="tx1"/>
                                   </a:solidFill>
-                                  <a:latin typeface="+mn-lt"/>
+                                  <a:latin typeface="Cambria Math" panose="02040503050406030204" pitchFamily="18" charset="0"/>
                                   <a:ea typeface="+mn-ea"/>
                                   <a:cs typeface="+mn-cs"/>
                                 </a:rPr>
@@ -1612,7 +1622,7 @@
                               <a:solidFill>
                                 <a:schemeClr val="tx1"/>
                               </a:solidFill>
-                              <a:latin typeface="+mn-lt"/>
+                              <a:latin typeface="Cambria Math" panose="02040503050406030204" pitchFamily="18" charset="0"/>
                               <a:ea typeface="+mn-ea"/>
                               <a:cs typeface="+mn-cs"/>
                             </a:rPr>
@@ -1624,7 +1634,7 @@
                               <a:solidFill>
                                 <a:schemeClr val="tx1"/>
                               </a:solidFill>
-                              <a:latin typeface="+mn-lt"/>
+                              <a:latin typeface="Cambria Math" panose="02040503050406030204" pitchFamily="18" charset="0"/>
                               <a:ea typeface="+mn-ea"/>
                               <a:cs typeface="+mn-cs"/>
                             </a:rPr>
@@ -1637,7 +1647,7 @@
                               <a:solidFill>
                                 <a:schemeClr val="tx1"/>
                               </a:solidFill>
-                              <a:latin typeface="+mn-lt"/>
+                              <a:latin typeface="Cambria Math" panose="02040503050406030204" pitchFamily="18" charset="0"/>
                               <a:ea typeface="+mn-ea"/>
                               <a:cs typeface="+mn-cs"/>
                             </a:rPr>
@@ -1650,7 +1660,7 @@
                           <a:solidFill>
                             <a:schemeClr val="tx1"/>
                           </a:solidFill>
-                          <a:latin typeface="+mn-lt"/>
+                          <a:latin typeface="Cambria Math" panose="02040503050406030204" pitchFamily="18" charset="0"/>
                           <a:ea typeface="+mn-ea"/>
                           <a:cs typeface="+mn-cs"/>
                         </a:rPr>
@@ -1663,7 +1673,7 @@
                               <a:solidFill>
                                 <a:schemeClr val="tx1"/>
                               </a:solidFill>
-                              <a:latin typeface="+mn-lt"/>
+                              <a:latin typeface="Cambria Math" panose="02040503050406030204" pitchFamily="18" charset="0"/>
                               <a:ea typeface="+mn-ea"/>
                               <a:cs typeface="+mn-cs"/>
                             </a:rPr>
@@ -1675,7 +1685,7 @@
                               <a:solidFill>
                                 <a:schemeClr val="tx1"/>
                               </a:solidFill>
-                              <a:latin typeface="+mn-lt"/>
+                              <a:latin typeface="Cambria Math" panose="02040503050406030204" pitchFamily="18" charset="0"/>
                               <a:ea typeface="+mn-ea"/>
                               <a:cs typeface="+mn-cs"/>
                             </a:rPr>
@@ -1688,7 +1698,7 @@
                               <a:solidFill>
                                 <a:schemeClr val="tx1"/>
                               </a:solidFill>
-                              <a:latin typeface="+mn-lt"/>
+                              <a:latin typeface="Cambria Math" panose="02040503050406030204" pitchFamily="18" charset="0"/>
                               <a:ea typeface="+mn-ea"/>
                               <a:cs typeface="+mn-cs"/>
                             </a:rPr>
@@ -1703,7 +1713,7 @@
                               <a:solidFill>
                                 <a:schemeClr val="tx1"/>
                               </a:solidFill>
-                              <a:latin typeface="+mn-lt"/>
+                              <a:latin typeface="Cambria Math" panose="02040503050406030204" pitchFamily="18" charset="0"/>
                               <a:ea typeface="+mn-ea"/>
                               <a:cs typeface="+mn-cs"/>
                             </a:rPr>
@@ -1715,7 +1725,7 @@
                               <a:solidFill>
                                 <a:schemeClr val="tx1"/>
                               </a:solidFill>
-                              <a:latin typeface="+mn-lt"/>
+                              <a:latin typeface="Cambria Math" panose="02040503050406030204" pitchFamily="18" charset="0"/>
                               <a:ea typeface="+mn-ea"/>
                               <a:cs typeface="+mn-cs"/>
                             </a:rPr>
@@ -1728,7 +1738,7 @@
                               <a:solidFill>
                                 <a:schemeClr val="tx1"/>
                               </a:solidFill>
-                              <a:latin typeface="+mn-lt"/>
+                              <a:latin typeface="Cambria Math" panose="02040503050406030204" pitchFamily="18" charset="0"/>
                               <a:ea typeface="+mn-ea"/>
                               <a:cs typeface="+mn-cs"/>
                             </a:rPr>
@@ -1780,6 +1790,7 @@
                 </a:r>
               </a:p>
               <a:p>
+                <a:pPr/>
                 <a14:m>
                   <m:oMathPara xmlns:m="http://schemas.openxmlformats.org/officeDocument/2006/math">
                     <m:oMathParaPr>
@@ -1791,7 +1802,7 @@
                           <a:solidFill>
                             <a:schemeClr val="tx1"/>
                           </a:solidFill>
-                          <a:latin typeface="+mn-lt"/>
+                          <a:latin typeface="Cambria Math" panose="02040503050406030204" pitchFamily="18" charset="0"/>
                           <a:ea typeface="+mn-ea"/>
                           <a:cs typeface="+mn-cs"/>
                         </a:rPr>
@@ -1804,7 +1815,7 @@
                               <a:solidFill>
                                 <a:schemeClr val="tx1"/>
                               </a:solidFill>
-                              <a:latin typeface="+mn-lt"/>
+                              <a:latin typeface="Cambria Math" panose="02040503050406030204" pitchFamily="18" charset="0"/>
                               <a:ea typeface="+mn-ea"/>
                               <a:cs typeface="+mn-cs"/>
                             </a:rPr>
@@ -1816,7 +1827,7 @@
                               <a:solidFill>
                                 <a:schemeClr val="tx1"/>
                               </a:solidFill>
-                              <a:latin typeface="+mn-lt"/>
+                              <a:latin typeface="Cambria Math" panose="02040503050406030204" pitchFamily="18" charset="0"/>
                               <a:ea typeface="+mn-ea"/>
                               <a:cs typeface="+mn-cs"/>
                             </a:rPr>
@@ -1831,7 +1842,7 @@
                                   <a:solidFill>
                                     <a:schemeClr val="tx1"/>
                                   </a:solidFill>
-                                  <a:latin typeface="+mn-lt"/>
+                                  <a:latin typeface="Cambria Math" panose="02040503050406030204" pitchFamily="18" charset="0"/>
                                   <a:ea typeface="+mn-ea"/>
                                   <a:cs typeface="+mn-cs"/>
                                 </a:rPr>
@@ -1843,7 +1854,7 @@
                                   <a:solidFill>
                                     <a:schemeClr val="tx1"/>
                                   </a:solidFill>
-                                  <a:latin typeface="+mn-lt"/>
+                                  <a:latin typeface="Cambria Math" panose="02040503050406030204" pitchFamily="18" charset="0"/>
                                   <a:ea typeface="+mn-ea"/>
                                   <a:cs typeface="+mn-cs"/>
                                 </a:rPr>
@@ -1858,7 +1869,7 @@
                           <a:solidFill>
                             <a:schemeClr val="tx1"/>
                           </a:solidFill>
-                          <a:latin typeface="+mn-lt"/>
+                          <a:latin typeface="Cambria Math" panose="02040503050406030204" pitchFamily="18" charset="0"/>
                           <a:ea typeface="+mn-ea"/>
                           <a:cs typeface="+mn-cs"/>
                         </a:rPr>
@@ -1871,7 +1882,7 @@
                               <a:solidFill>
                                 <a:schemeClr val="tx1"/>
                               </a:solidFill>
-                              <a:latin typeface="+mn-lt"/>
+                              <a:latin typeface="Cambria Math" panose="02040503050406030204" pitchFamily="18" charset="0"/>
                               <a:ea typeface="+mn-ea"/>
                               <a:cs typeface="+mn-cs"/>
                             </a:rPr>
@@ -1883,7 +1894,7 @@
                               <a:solidFill>
                                 <a:schemeClr val="tx1"/>
                               </a:solidFill>
-                              <a:latin typeface="+mn-lt"/>
+                              <a:latin typeface="Cambria Math" panose="02040503050406030204" pitchFamily="18" charset="0"/>
                               <a:ea typeface="+mn-ea"/>
                               <a:cs typeface="+mn-cs"/>
                             </a:rPr>
@@ -1898,7 +1909,7 @@
                                   <a:solidFill>
                                     <a:schemeClr val="tx1"/>
                                   </a:solidFill>
-                                  <a:latin typeface="+mn-lt"/>
+                                  <a:latin typeface="Cambria Math" panose="02040503050406030204" pitchFamily="18" charset="0"/>
                                   <a:ea typeface="+mn-ea"/>
                                   <a:cs typeface="+mn-cs"/>
                                 </a:rPr>
@@ -1910,7 +1921,7 @@
                                   <a:solidFill>
                                     <a:schemeClr val="tx1"/>
                                   </a:solidFill>
-                                  <a:latin typeface="+mn-lt"/>
+                                  <a:latin typeface="Cambria Math" panose="02040503050406030204" pitchFamily="18" charset="0"/>
                                   <a:ea typeface="+mn-ea"/>
                                   <a:cs typeface="+mn-cs"/>
                                 </a:rPr>
@@ -1921,7 +1932,7 @@
                                   <a:solidFill>
                                     <a:schemeClr val="tx1"/>
                                   </a:solidFill>
-                                  <a:latin typeface="+mn-lt"/>
+                                  <a:latin typeface="Cambria Math" panose="02040503050406030204" pitchFamily="18" charset="0"/>
                                   <a:ea typeface="+mn-ea"/>
                                   <a:cs typeface="+mn-cs"/>
                                 </a:rPr>
@@ -1936,7 +1947,7 @@
                           <a:solidFill>
                             <a:schemeClr val="tx1"/>
                           </a:solidFill>
-                          <a:latin typeface="+mn-lt"/>
+                          <a:latin typeface="Cambria Math" panose="02040503050406030204" pitchFamily="18" charset="0"/>
                           <a:ea typeface="+mn-ea"/>
                           <a:cs typeface="+mn-cs"/>
                         </a:rPr>
@@ -1947,7 +1958,7 @@
                           <a:solidFill>
                             <a:schemeClr val="tx1"/>
                           </a:solidFill>
-                          <a:latin typeface="+mn-lt"/>
+                          <a:latin typeface="Cambria Math" panose="02040503050406030204" pitchFamily="18" charset="0"/>
                           <a:ea typeface="+mn-ea"/>
                           <a:cs typeface="+mn-cs"/>
                         </a:rPr>
@@ -2046,7 +2057,7 @@
             </p:txBody>
           </p:sp>
         </mc:Choice>
-        <mc:Fallback>
+        <mc:Fallback xmlns="">
           <p:sp>
             <p:nvSpPr>
               <p:cNvPr id="3" name="Espaço Reservado para Anotações 2"/>
@@ -2525,7 +2536,7 @@
           <a:p>
             <a:fld id="{F430A2A4-8C14-4B1A-AD48-7B6401078BF7}" type="slidenum">
               <a:rPr lang="pt-BR" smtClean="0"/>
-              <a:t>27</a:t>
+              <a:t>28</a:t>
             </a:fld>
             <a:endParaRPr lang="pt-BR"/>
           </a:p>
@@ -2952,7 +2963,7 @@
           <a:p>
             <a:fld id="{F430A2A4-8C14-4B1A-AD48-7B6401078BF7}" type="slidenum">
               <a:rPr lang="pt-BR" smtClean="0"/>
-              <a:t>28</a:t>
+              <a:t>29</a:t>
             </a:fld>
             <a:endParaRPr lang="pt-BR"/>
           </a:p>
@@ -3036,7 +3047,7 @@
           <a:p>
             <a:fld id="{F430A2A4-8C14-4B1A-AD48-7B6401078BF7}" type="slidenum">
               <a:rPr lang="pt-BR" smtClean="0"/>
-              <a:t>29</a:t>
+              <a:t>30</a:t>
             </a:fld>
             <a:endParaRPr lang="pt-BR"/>
           </a:p>
@@ -3120,7 +3131,7 @@
           <a:p>
             <a:fld id="{F430A2A4-8C14-4B1A-AD48-7B6401078BF7}" type="slidenum">
               <a:rPr lang="pt-BR" smtClean="0"/>
-              <a:t>30</a:t>
+              <a:t>31</a:t>
             </a:fld>
             <a:endParaRPr lang="pt-BR"/>
           </a:p>
@@ -3204,7 +3215,7 @@
           <a:p>
             <a:fld id="{F430A2A4-8C14-4B1A-AD48-7B6401078BF7}" type="slidenum">
               <a:rPr lang="pt-BR" smtClean="0"/>
-              <a:t>33</a:t>
+              <a:t>34</a:t>
             </a:fld>
             <a:endParaRPr lang="pt-BR"/>
           </a:p>
@@ -3267,6 +3278,36 @@
           <a:bodyPr/>
           <a:lstStyle/>
           <a:p>
+            <a:r>
+              <a:rPr lang="pt-BR" b="1" dirty="0" smtClean="0"/>
+              <a:t>Interpretação</a:t>
+            </a:r>
+          </a:p>
+          <a:p>
+            <a:r>
+              <a:rPr lang="pt-BR" dirty="0" smtClean="0"/>
+              <a:t>Quando KKK aumenta, o WCSS sempre diminui. </a:t>
+            </a:r>
+          </a:p>
+          <a:p>
+            <a:r>
+              <a:rPr lang="pt-BR" dirty="0" smtClean="0"/>
+              <a:t>Inicialmente, a redução é grande. </a:t>
+            </a:r>
+          </a:p>
+          <a:p>
+            <a:r>
+              <a:rPr lang="pt-BR" dirty="0" smtClean="0"/>
+              <a:t>Após certo ponto, adicionar novos clusters produz apenas pequenas melhorias. </a:t>
+            </a:r>
+          </a:p>
+          <a:p>
+            <a:r>
+              <a:rPr lang="pt-BR" dirty="0" smtClean="0"/>
+              <a:t>O ponto de transição ("cotovelo") é escolhido como o valor adequado de KKK.</a:t>
+            </a:r>
+          </a:p>
+          <a:p>
             <a:endParaRPr lang="en-US" dirty="0"/>
           </a:p>
         </p:txBody>
@@ -3288,7 +3329,7 @@
           <a:p>
             <a:fld id="{F430A2A4-8C14-4B1A-AD48-7B6401078BF7}" type="slidenum">
               <a:rPr lang="pt-BR" smtClean="0"/>
-              <a:t>34</a:t>
+              <a:t>35</a:t>
             </a:fld>
             <a:endParaRPr lang="pt-BR"/>
           </a:p>
@@ -3315,7 +3356,7 @@
         <p:cNvPr id="1" name="">
           <a:extLst>
             <a:ext uri="{FF2B5EF4-FFF2-40B4-BE49-F238E27FC236}">
-              <a16:creationId xmlns:a16="http://schemas.microsoft.com/office/drawing/2014/main" id="{2BFBD800-01D7-A39D-E846-C72D571F5FCD}"/>
+              <a16:creationId xmlns:a16="http://schemas.microsoft.com/office/drawing/2014/main" xmlns="" id="{2BFBD800-01D7-A39D-E846-C72D571F5FCD}"/>
             </a:ext>
           </a:extLst>
         </p:cNvPr>
@@ -3335,7 +3376,7 @@
           <p:cNvPr id="2" name="Slide Image Placeholder 1">
             <a:extLst>
               <a:ext uri="{FF2B5EF4-FFF2-40B4-BE49-F238E27FC236}">
-                <a16:creationId xmlns:a16="http://schemas.microsoft.com/office/drawing/2014/main" id="{E01EBC9F-B5E3-BEC3-6A71-51DF0B468A3A}"/>
+                <a16:creationId xmlns:a16="http://schemas.microsoft.com/office/drawing/2014/main" xmlns="" id="{E01EBC9F-B5E3-BEC3-6A71-51DF0B468A3A}"/>
               </a:ext>
             </a:extLst>
           </p:cNvPr>
@@ -3353,7 +3394,7 @@
           <p:cNvPr id="3" name="Notes Placeholder 2">
             <a:extLst>
               <a:ext uri="{FF2B5EF4-FFF2-40B4-BE49-F238E27FC236}">
-                <a16:creationId xmlns:a16="http://schemas.microsoft.com/office/drawing/2014/main" id="{1AF5EA39-9E7E-D2B5-F484-0F0F8EAFEA82}"/>
+                <a16:creationId xmlns:a16="http://schemas.microsoft.com/office/drawing/2014/main" xmlns="" id="{1AF5EA39-9E7E-D2B5-F484-0F0F8EAFEA82}"/>
               </a:ext>
             </a:extLst>
           </p:cNvPr>
@@ -3378,7 +3419,7 @@
           <p:cNvPr id="4" name="Slide Number Placeholder 3">
             <a:extLst>
               <a:ext uri="{FF2B5EF4-FFF2-40B4-BE49-F238E27FC236}">
-                <a16:creationId xmlns:a16="http://schemas.microsoft.com/office/drawing/2014/main" id="{F463EA5E-3249-B642-7821-23B19568114F}"/>
+                <a16:creationId xmlns:a16="http://schemas.microsoft.com/office/drawing/2014/main" xmlns="" id="{F463EA5E-3249-B642-7821-23B19568114F}"/>
               </a:ext>
             </a:extLst>
           </p:cNvPr>
@@ -3396,7 +3437,7 @@
           <a:p>
             <a:fld id="{F430A2A4-8C14-4B1A-AD48-7B6401078BF7}" type="slidenum">
               <a:rPr lang="pt-BR" smtClean="0"/>
-              <a:t>35</a:t>
+              <a:t>36</a:t>
             </a:fld>
             <a:endParaRPr lang="pt-BR"/>
           </a:p>
@@ -3480,7 +3521,7 @@
           <a:p>
             <a:fld id="{F430A2A4-8C14-4B1A-AD48-7B6401078BF7}" type="slidenum">
               <a:rPr lang="pt-BR" smtClean="0"/>
-              <a:t>38</a:t>
+              <a:t>39</a:t>
             </a:fld>
             <a:endParaRPr lang="pt-BR"/>
           </a:p>
@@ -3507,7 +3548,7 @@
         <p:cNvPr id="1" name="">
           <a:extLst>
             <a:ext uri="{FF2B5EF4-FFF2-40B4-BE49-F238E27FC236}">
-              <a16:creationId xmlns:a16="http://schemas.microsoft.com/office/drawing/2014/main" id="{E2EC8DCE-580C-2F9B-DF93-13AF21CDBEF4}"/>
+              <a16:creationId xmlns:a16="http://schemas.microsoft.com/office/drawing/2014/main" xmlns="" id="{E2EC8DCE-580C-2F9B-DF93-13AF21CDBEF4}"/>
             </a:ext>
           </a:extLst>
         </p:cNvPr>
@@ -3527,7 +3568,7 @@
           <p:cNvPr id="2" name="Slide Image Placeholder 1">
             <a:extLst>
               <a:ext uri="{FF2B5EF4-FFF2-40B4-BE49-F238E27FC236}">
-                <a16:creationId xmlns:a16="http://schemas.microsoft.com/office/drawing/2014/main" id="{11806667-3C3D-BBFD-E722-236A60B9F6EF}"/>
+                <a16:creationId xmlns:a16="http://schemas.microsoft.com/office/drawing/2014/main" xmlns="" id="{11806667-3C3D-BBFD-E722-236A60B9F6EF}"/>
               </a:ext>
             </a:extLst>
           </p:cNvPr>
@@ -3545,7 +3586,7 @@
           <p:cNvPr id="3" name="Notes Placeholder 2">
             <a:extLst>
               <a:ext uri="{FF2B5EF4-FFF2-40B4-BE49-F238E27FC236}">
-                <a16:creationId xmlns:a16="http://schemas.microsoft.com/office/drawing/2014/main" id="{C6F46484-F59D-5D1E-9E45-354EC353FEB7}"/>
+                <a16:creationId xmlns:a16="http://schemas.microsoft.com/office/drawing/2014/main" xmlns="" id="{C6F46484-F59D-5D1E-9E45-354EC353FEB7}"/>
               </a:ext>
             </a:extLst>
           </p:cNvPr>
@@ -3570,7 +3611,7 @@
           <p:cNvPr id="4" name="Slide Number Placeholder 3">
             <a:extLst>
               <a:ext uri="{FF2B5EF4-FFF2-40B4-BE49-F238E27FC236}">
-                <a16:creationId xmlns:a16="http://schemas.microsoft.com/office/drawing/2014/main" id="{3DA842C5-AFF6-0C16-1C6E-4863960E8823}"/>
+                <a16:creationId xmlns:a16="http://schemas.microsoft.com/office/drawing/2014/main" xmlns="" id="{3DA842C5-AFF6-0C16-1C6E-4863960E8823}"/>
               </a:ext>
             </a:extLst>
           </p:cNvPr>
@@ -3588,7 +3629,7 @@
           <a:p>
             <a:fld id="{F430A2A4-8C14-4B1A-AD48-7B6401078BF7}" type="slidenum">
               <a:rPr lang="pt-BR" smtClean="0"/>
-              <a:t>39</a:t>
+              <a:t>40</a:t>
             </a:fld>
             <a:endParaRPr lang="pt-BR"/>
           </a:p>
@@ -3716,7 +3757,7 @@
         <p:cNvPr id="1" name="">
           <a:extLst>
             <a:ext uri="{FF2B5EF4-FFF2-40B4-BE49-F238E27FC236}">
-              <a16:creationId xmlns:a16="http://schemas.microsoft.com/office/drawing/2014/main" id="{92B3B1D1-6413-D653-7A60-836376734DD4}"/>
+              <a16:creationId xmlns:a16="http://schemas.microsoft.com/office/drawing/2014/main" xmlns="" id="{92B3B1D1-6413-D653-7A60-836376734DD4}"/>
             </a:ext>
           </a:extLst>
         </p:cNvPr>
@@ -3736,7 +3777,7 @@
           <p:cNvPr id="2" name="Slide Image Placeholder 1">
             <a:extLst>
               <a:ext uri="{FF2B5EF4-FFF2-40B4-BE49-F238E27FC236}">
-                <a16:creationId xmlns:a16="http://schemas.microsoft.com/office/drawing/2014/main" id="{D3CA87F6-A2F4-78FD-E0E9-0EC825294E11}"/>
+                <a16:creationId xmlns:a16="http://schemas.microsoft.com/office/drawing/2014/main" xmlns="" id="{D3CA87F6-A2F4-78FD-E0E9-0EC825294E11}"/>
               </a:ext>
             </a:extLst>
           </p:cNvPr>
@@ -3754,7 +3795,7 @@
           <p:cNvPr id="3" name="Notes Placeholder 2">
             <a:extLst>
               <a:ext uri="{FF2B5EF4-FFF2-40B4-BE49-F238E27FC236}">
-                <a16:creationId xmlns:a16="http://schemas.microsoft.com/office/drawing/2014/main" id="{11C1A12C-F471-DFC3-36FF-9A5E37C18E98}"/>
+                <a16:creationId xmlns:a16="http://schemas.microsoft.com/office/drawing/2014/main" xmlns="" id="{11C1A12C-F471-DFC3-36FF-9A5E37C18E98}"/>
               </a:ext>
             </a:extLst>
           </p:cNvPr>
@@ -3994,7 +4035,7 @@
           <p:cNvPr id="4" name="Slide Number Placeholder 3">
             <a:extLst>
               <a:ext uri="{FF2B5EF4-FFF2-40B4-BE49-F238E27FC236}">
-                <a16:creationId xmlns:a16="http://schemas.microsoft.com/office/drawing/2014/main" id="{90A34F87-060F-2F08-5989-3D2AAB512B79}"/>
+                <a16:creationId xmlns:a16="http://schemas.microsoft.com/office/drawing/2014/main" xmlns="" id="{90A34F87-060F-2F08-5989-3D2AAB512B79}"/>
               </a:ext>
             </a:extLst>
           </p:cNvPr>
@@ -4012,7 +4053,7 @@
           <a:p>
             <a:fld id="{F430A2A4-8C14-4B1A-AD48-7B6401078BF7}" type="slidenum">
               <a:rPr lang="pt-BR" smtClean="0"/>
-              <a:t>40</a:t>
+              <a:t>41</a:t>
             </a:fld>
             <a:endParaRPr lang="pt-BR"/>
           </a:p>
@@ -4123,7 +4164,7 @@
           <a:p>
             <a:fld id="{6FC8D850-966F-45A6-8DE7-15B891E7D40D}" type="slidenum">
               <a:rPr lang="pt-BR" smtClean="0"/>
-              <a:t>42</a:t>
+              <a:t>43</a:t>
             </a:fld>
             <a:endParaRPr lang="pt-BR"/>
           </a:p>
@@ -4150,7 +4191,7 @@
         <p:cNvPr id="1" name="">
           <a:extLst>
             <a:ext uri="{FF2B5EF4-FFF2-40B4-BE49-F238E27FC236}">
-              <a16:creationId xmlns:a16="http://schemas.microsoft.com/office/drawing/2014/main" id="{BFE637E2-97BB-CFD3-DBB7-5EC561A4F1C5}"/>
+              <a16:creationId xmlns:a16="http://schemas.microsoft.com/office/drawing/2014/main" xmlns="" id="{BFE637E2-97BB-CFD3-DBB7-5EC561A4F1C5}"/>
             </a:ext>
           </a:extLst>
         </p:cNvPr>
@@ -4170,7 +4211,7 @@
           <p:cNvPr id="2" name="Slide Image Placeholder 1">
             <a:extLst>
               <a:ext uri="{FF2B5EF4-FFF2-40B4-BE49-F238E27FC236}">
-                <a16:creationId xmlns:a16="http://schemas.microsoft.com/office/drawing/2014/main" id="{4ED7BD22-361E-0DCE-46D8-42A9C128E592}"/>
+                <a16:creationId xmlns:a16="http://schemas.microsoft.com/office/drawing/2014/main" xmlns="" id="{4ED7BD22-361E-0DCE-46D8-42A9C128E592}"/>
               </a:ext>
             </a:extLst>
           </p:cNvPr>
@@ -4188,7 +4229,7 @@
           <p:cNvPr id="3" name="Notes Placeholder 2">
             <a:extLst>
               <a:ext uri="{FF2B5EF4-FFF2-40B4-BE49-F238E27FC236}">
-                <a16:creationId xmlns:a16="http://schemas.microsoft.com/office/drawing/2014/main" id="{A845AE5E-1008-C289-F444-04515B31A21D}"/>
+                <a16:creationId xmlns:a16="http://schemas.microsoft.com/office/drawing/2014/main" xmlns="" id="{A845AE5E-1008-C289-F444-04515B31A21D}"/>
               </a:ext>
             </a:extLst>
           </p:cNvPr>
@@ -4266,7 +4307,7 @@
           <p:cNvPr id="4" name="Slide Number Placeholder 3">
             <a:extLst>
               <a:ext uri="{FF2B5EF4-FFF2-40B4-BE49-F238E27FC236}">
-                <a16:creationId xmlns:a16="http://schemas.microsoft.com/office/drawing/2014/main" id="{64C5BAB2-4C6F-96F0-D4ED-0C66FFB4872B}"/>
+                <a16:creationId xmlns:a16="http://schemas.microsoft.com/office/drawing/2014/main" xmlns="" id="{64C5BAB2-4C6F-96F0-D4ED-0C66FFB4872B}"/>
               </a:ext>
             </a:extLst>
           </p:cNvPr>
@@ -5064,7 +5105,7 @@
         <p:cNvPr id="1" name="">
           <a:extLst>
             <a:ext uri="{FF2B5EF4-FFF2-40B4-BE49-F238E27FC236}">
-              <a16:creationId xmlns:a16="http://schemas.microsoft.com/office/drawing/2014/main" id="{809F23C5-D79E-FEA4-B74E-098BF94B10DF}"/>
+              <a16:creationId xmlns:a16="http://schemas.microsoft.com/office/drawing/2014/main" xmlns="" id="{809F23C5-D79E-FEA4-B74E-098BF94B10DF}"/>
             </a:ext>
           </a:extLst>
         </p:cNvPr>
@@ -5084,7 +5125,7 @@
           <p:cNvPr id="2" name="Slide Image Placeholder 1">
             <a:extLst>
               <a:ext uri="{FF2B5EF4-FFF2-40B4-BE49-F238E27FC236}">
-                <a16:creationId xmlns:a16="http://schemas.microsoft.com/office/drawing/2014/main" id="{2D909D08-D934-578A-D3C6-F349020FC96B}"/>
+                <a16:creationId xmlns:a16="http://schemas.microsoft.com/office/drawing/2014/main" xmlns="" id="{2D909D08-D934-578A-D3C6-F349020FC96B}"/>
               </a:ext>
             </a:extLst>
           </p:cNvPr>
@@ -5102,7 +5143,7 @@
           <p:cNvPr id="3" name="Notes Placeholder 2">
             <a:extLst>
               <a:ext uri="{FF2B5EF4-FFF2-40B4-BE49-F238E27FC236}">
-                <a16:creationId xmlns:a16="http://schemas.microsoft.com/office/drawing/2014/main" id="{B854B9EF-FF47-6D40-8F4E-85E653BECF49}"/>
+                <a16:creationId xmlns:a16="http://schemas.microsoft.com/office/drawing/2014/main" xmlns="" id="{B854B9EF-FF47-6D40-8F4E-85E653BECF49}"/>
               </a:ext>
             </a:extLst>
           </p:cNvPr>
@@ -5148,7 +5189,7 @@
           <p:cNvPr id="4" name="Slide Number Placeholder 3">
             <a:extLst>
               <a:ext uri="{FF2B5EF4-FFF2-40B4-BE49-F238E27FC236}">
-                <a16:creationId xmlns:a16="http://schemas.microsoft.com/office/drawing/2014/main" id="{23CC5A4E-3D9D-7285-8F3F-C33B2C50E4A0}"/>
+                <a16:creationId xmlns:a16="http://schemas.microsoft.com/office/drawing/2014/main" xmlns="" id="{23CC5A4E-3D9D-7285-8F3F-C33B2C50E4A0}"/>
               </a:ext>
             </a:extLst>
           </p:cNvPr>
@@ -5408,7 +5449,7 @@
         <p:cNvPr id="1" name="">
           <a:extLst>
             <a:ext uri="{FF2B5EF4-FFF2-40B4-BE49-F238E27FC236}">
-              <a16:creationId xmlns:a16="http://schemas.microsoft.com/office/drawing/2014/main" id="{D98F69D2-AA2F-1FAB-FC58-E17B9F051FEC}"/>
+              <a16:creationId xmlns:a16="http://schemas.microsoft.com/office/drawing/2014/main" xmlns="" id="{D98F69D2-AA2F-1FAB-FC58-E17B9F051FEC}"/>
             </a:ext>
           </a:extLst>
         </p:cNvPr>
@@ -5428,7 +5469,7 @@
           <p:cNvPr id="2" name="Espaço Reservado para Imagem de Slide 1">
             <a:extLst>
               <a:ext uri="{FF2B5EF4-FFF2-40B4-BE49-F238E27FC236}">
-                <a16:creationId xmlns:a16="http://schemas.microsoft.com/office/drawing/2014/main" id="{BFA38404-D7C9-03F2-A7E5-10C0EFC8F190}"/>
+                <a16:creationId xmlns:a16="http://schemas.microsoft.com/office/drawing/2014/main" xmlns="" id="{BFA38404-D7C9-03F2-A7E5-10C0EFC8F190}"/>
               </a:ext>
             </a:extLst>
           </p:cNvPr>
@@ -5446,7 +5487,7 @@
           <p:cNvPr id="3" name="Espaço Reservado para Anotações 2">
             <a:extLst>
               <a:ext uri="{FF2B5EF4-FFF2-40B4-BE49-F238E27FC236}">
-                <a16:creationId xmlns:a16="http://schemas.microsoft.com/office/drawing/2014/main" id="{5A8313F1-5D52-52B4-46D0-20D6D6D5149A}"/>
+                <a16:creationId xmlns:a16="http://schemas.microsoft.com/office/drawing/2014/main" xmlns="" id="{5A8313F1-5D52-52B4-46D0-20D6D6D5149A}"/>
               </a:ext>
             </a:extLst>
           </p:cNvPr>
@@ -5564,7 +5605,7 @@
           <p:cNvPr id="4" name="Espaço Reservado para Número de Slide 3">
             <a:extLst>
               <a:ext uri="{FF2B5EF4-FFF2-40B4-BE49-F238E27FC236}">
-                <a16:creationId xmlns:a16="http://schemas.microsoft.com/office/drawing/2014/main" id="{428A95A6-CC49-168A-C37A-1C6EB3B93225}"/>
+                <a16:creationId xmlns:a16="http://schemas.microsoft.com/office/drawing/2014/main" xmlns="" id="{428A95A6-CC49-168A-C37A-1C6EB3B93225}"/>
               </a:ext>
             </a:extLst>
           </p:cNvPr>
@@ -8463,7 +8504,7 @@
           <p:cNvPr id="4" name="CaixaDeTexto 3">
             <a:extLst>
               <a:ext uri="{FF2B5EF4-FFF2-40B4-BE49-F238E27FC236}">
-                <a16:creationId xmlns:a16="http://schemas.microsoft.com/office/drawing/2014/main" id="{430EB894-B7D4-434C-9D1A-A14094D9BEEC}"/>
+                <a16:creationId xmlns:a16="http://schemas.microsoft.com/office/drawing/2014/main" xmlns="" id="{430EB894-B7D4-434C-9D1A-A14094D9BEEC}"/>
               </a:ext>
             </a:extLst>
           </p:cNvPr>
@@ -8507,7 +8548,7 @@
           <p:cNvPr id="1026" name="Picture 2" descr="Logo">
             <a:extLst>
               <a:ext uri="{FF2B5EF4-FFF2-40B4-BE49-F238E27FC236}">
-                <a16:creationId xmlns:a16="http://schemas.microsoft.com/office/drawing/2014/main" id="{3F2642E0-4F6A-4196-8F58-E77D36E9A33F}"/>
+                <a16:creationId xmlns:a16="http://schemas.microsoft.com/office/drawing/2014/main" xmlns="" id="{3F2642E0-4F6A-4196-8F58-E77D36E9A33F}"/>
               </a:ext>
             </a:extLst>
           </p:cNvPr>
@@ -8552,7 +8593,7 @@
           <p:cNvPr id="5122" name="Picture 2" descr="Image result for machine learning">
             <a:extLst>
               <a:ext uri="{FF2B5EF4-FFF2-40B4-BE49-F238E27FC236}">
-                <a16:creationId xmlns:a16="http://schemas.microsoft.com/office/drawing/2014/main" id="{810CE0A2-4102-44A6-A370-175E7896CDCB}"/>
+                <a16:creationId xmlns:a16="http://schemas.microsoft.com/office/drawing/2014/main" xmlns="" id="{810CE0A2-4102-44A6-A370-175E7896CDCB}"/>
               </a:ext>
             </a:extLst>
           </p:cNvPr>
@@ -8597,7 +8638,7 @@
           <p:cNvPr id="7" name="Título 1">
             <a:extLst>
               <a:ext uri="{FF2B5EF4-FFF2-40B4-BE49-F238E27FC236}">
-                <a16:creationId xmlns:a16="http://schemas.microsoft.com/office/drawing/2014/main" id="{32666AC8-2E17-4DB4-B0F5-60C640CCFD2E}"/>
+                <a16:creationId xmlns:a16="http://schemas.microsoft.com/office/drawing/2014/main" xmlns="" id="{32666AC8-2E17-4DB4-B0F5-60C640CCFD2E}"/>
               </a:ext>
             </a:extLst>
           </p:cNvPr>
@@ -8623,6 +8664,10 @@
             <a:r>
               <a:rPr lang="pt-BR" sz="6600" dirty="0"/>
               <a:t>C24 - Inteligência Artificial:</a:t>
+            </a:r>
+            <a:r>
+              <a:rPr lang="pt-BR" sz="7200" dirty="0"/>
+              <a:t/>
             </a:r>
             <a:br>
               <a:rPr lang="pt-BR" sz="7200" dirty="0"/>
@@ -8857,7 +8902,7 @@
           <p:cNvPr id="1028" name="Picture 4" descr="K Means Clustering no Aprendizado de Máquinas — Aprendizado de Máquina —  DATA SCIENCE">
             <a:extLst>
               <a:ext uri="{FF2B5EF4-FFF2-40B4-BE49-F238E27FC236}">
-                <a16:creationId xmlns:a16="http://schemas.microsoft.com/office/drawing/2014/main" id="{D99905E1-3749-BAAD-E01A-C9B3686C4770}"/>
+                <a16:creationId xmlns:a16="http://schemas.microsoft.com/office/drawing/2014/main" xmlns="" id="{D99905E1-3749-BAAD-E01A-C9B3686C4770}"/>
               </a:ext>
             </a:extLst>
           </p:cNvPr>
@@ -8932,7 +8977,7 @@
           <p:cNvPr id="2" name="Title 1">
             <a:extLst>
               <a:ext uri="{FF2B5EF4-FFF2-40B4-BE49-F238E27FC236}">
-                <a16:creationId xmlns:a16="http://schemas.microsoft.com/office/drawing/2014/main" id="{FFE84507-EC77-45EC-8B3A-27BFC439AB0A}"/>
+                <a16:creationId xmlns:a16="http://schemas.microsoft.com/office/drawing/2014/main" xmlns="" id="{FFE84507-EC77-45EC-8B3A-27BFC439AB0A}"/>
               </a:ext>
             </a:extLst>
           </p:cNvPr>
@@ -8961,7 +9006,7 @@
           <p:cNvPr id="3" name="Content Placeholder 2">
             <a:extLst>
               <a:ext uri="{FF2B5EF4-FFF2-40B4-BE49-F238E27FC236}">
-                <a16:creationId xmlns:a16="http://schemas.microsoft.com/office/drawing/2014/main" id="{04FEB374-1415-DA51-E59A-B5E50D17F763}"/>
+                <a16:creationId xmlns:a16="http://schemas.microsoft.com/office/drawing/2014/main" xmlns="" id="{04FEB374-1415-DA51-E59A-B5E50D17F763}"/>
               </a:ext>
             </a:extLst>
           </p:cNvPr>
@@ -9235,7 +9280,7 @@
         <p:cNvPr id="1" name="">
           <a:extLst>
             <a:ext uri="{FF2B5EF4-FFF2-40B4-BE49-F238E27FC236}">
-              <a16:creationId xmlns:a16="http://schemas.microsoft.com/office/drawing/2014/main" id="{5B00F73A-8390-7530-E708-9D3EBFB35B37}"/>
+              <a16:creationId xmlns:a16="http://schemas.microsoft.com/office/drawing/2014/main" xmlns="" id="{5B00F73A-8390-7530-E708-9D3EBFB35B37}"/>
             </a:ext>
           </a:extLst>
         </p:cNvPr>
@@ -9255,7 +9300,7 @@
           <p:cNvPr id="2" name="Título 1">
             <a:extLst>
               <a:ext uri="{FF2B5EF4-FFF2-40B4-BE49-F238E27FC236}">
-                <a16:creationId xmlns:a16="http://schemas.microsoft.com/office/drawing/2014/main" id="{A7779880-5E02-1DB8-EA94-C86330794A8C}"/>
+                <a16:creationId xmlns:a16="http://schemas.microsoft.com/office/drawing/2014/main" xmlns="" id="{A7779880-5E02-1DB8-EA94-C86330794A8C}"/>
               </a:ext>
             </a:extLst>
           </p:cNvPr>
@@ -9309,7 +9354,7 @@
               <p:cNvPr id="3" name="Espaço Reservado para Conteúdo 2">
                 <a:extLst>
                   <a:ext uri="{FF2B5EF4-FFF2-40B4-BE49-F238E27FC236}">
-                    <a16:creationId xmlns:a16="http://schemas.microsoft.com/office/drawing/2014/main" id="{A72472E5-6211-3EFD-BA89-06782640C939}"/>
+                    <a16:creationId xmlns:a16="http://schemas.microsoft.com/office/drawing/2014/main" xmlns="" id="{A72472E5-6211-3EFD-BA89-06782640C939}"/>
                   </a:ext>
                 </a:extLst>
               </p:cNvPr>
@@ -9679,7 +9724,7 @@
           <p:cNvPr id="4" name="Picture 3" descr="K Means Clustering no Aprendizado de Máquinas — Aprendizado de Máquina —  DATA SCIENCE">
             <a:extLst>
               <a:ext uri="{FF2B5EF4-FFF2-40B4-BE49-F238E27FC236}">
-                <a16:creationId xmlns:a16="http://schemas.microsoft.com/office/drawing/2014/main" id="{E728BEA3-C89C-08D5-CE28-8BD1C00DAD53}"/>
+                <a16:creationId xmlns:a16="http://schemas.microsoft.com/office/drawing/2014/main" xmlns="" id="{E728BEA3-C89C-08D5-CE28-8BD1C00DAD53}"/>
               </a:ext>
             </a:extLst>
           </p:cNvPr>
@@ -10036,7 +10081,7 @@
         <p:cNvPr id="1" name="">
           <a:extLst>
             <a:ext uri="{FF2B5EF4-FFF2-40B4-BE49-F238E27FC236}">
-              <a16:creationId xmlns:a16="http://schemas.microsoft.com/office/drawing/2014/main" id="{36D1FDFF-84F9-A395-CDB0-AC77470C24F7}"/>
+              <a16:creationId xmlns:a16="http://schemas.microsoft.com/office/drawing/2014/main" xmlns="" id="{36D1FDFF-84F9-A395-CDB0-AC77470C24F7}"/>
             </a:ext>
           </a:extLst>
         </p:cNvPr>
@@ -10056,7 +10101,7 @@
           <p:cNvPr id="2" name="Título 1">
             <a:extLst>
               <a:ext uri="{FF2B5EF4-FFF2-40B4-BE49-F238E27FC236}">
-                <a16:creationId xmlns:a16="http://schemas.microsoft.com/office/drawing/2014/main" id="{CA82907A-6417-D3C2-265A-0FFD53046E99}"/>
+                <a16:creationId xmlns:a16="http://schemas.microsoft.com/office/drawing/2014/main" xmlns="" id="{CA82907A-6417-D3C2-265A-0FFD53046E99}"/>
               </a:ext>
             </a:extLst>
           </p:cNvPr>
@@ -10093,7 +10138,7 @@
           <p:cNvPr id="3" name="Espaço Reservado para Conteúdo 2">
             <a:extLst>
               <a:ext uri="{FF2B5EF4-FFF2-40B4-BE49-F238E27FC236}">
-                <a16:creationId xmlns:a16="http://schemas.microsoft.com/office/drawing/2014/main" id="{3C767761-7363-3966-1F66-B32029649DCD}"/>
+                <a16:creationId xmlns:a16="http://schemas.microsoft.com/office/drawing/2014/main" xmlns="" id="{3C767761-7363-3966-1F66-B32029649DCD}"/>
               </a:ext>
             </a:extLst>
           </p:cNvPr>
@@ -10178,7 +10223,7 @@
           <p:cNvPr id="5" name="Picture 2" descr="K-Means Clustering using Python. Welcome back guys! Hope you had a great… |  by Luigi Fiori | Medium">
             <a:extLst>
               <a:ext uri="{FF2B5EF4-FFF2-40B4-BE49-F238E27FC236}">
-                <a16:creationId xmlns:a16="http://schemas.microsoft.com/office/drawing/2014/main" id="{079377DD-55D2-BED3-3BB3-D573A6F13921}"/>
+                <a16:creationId xmlns:a16="http://schemas.microsoft.com/office/drawing/2014/main" xmlns="" id="{079377DD-55D2-BED3-3BB3-D573A6F13921}"/>
               </a:ext>
             </a:extLst>
           </p:cNvPr>
@@ -10239,7 +10284,7 @@
         <p:cNvPr id="1" name="">
           <a:extLst>
             <a:ext uri="{FF2B5EF4-FFF2-40B4-BE49-F238E27FC236}">
-              <a16:creationId xmlns:a16="http://schemas.microsoft.com/office/drawing/2014/main" id="{36D1FDFF-84F9-A395-CDB0-AC77470C24F7}"/>
+              <a16:creationId xmlns:a16="http://schemas.microsoft.com/office/drawing/2014/main" xmlns="" id="{36D1FDFF-84F9-A395-CDB0-AC77470C24F7}"/>
             </a:ext>
           </a:extLst>
         </p:cNvPr>
@@ -10259,7 +10304,7 @@
           <p:cNvPr id="2" name="Título 1">
             <a:extLst>
               <a:ext uri="{FF2B5EF4-FFF2-40B4-BE49-F238E27FC236}">
-                <a16:creationId xmlns:a16="http://schemas.microsoft.com/office/drawing/2014/main" id="{CA82907A-6417-D3C2-265A-0FFD53046E99}"/>
+                <a16:creationId xmlns:a16="http://schemas.microsoft.com/office/drawing/2014/main" xmlns="" id="{CA82907A-6417-D3C2-265A-0FFD53046E99}"/>
               </a:ext>
             </a:extLst>
           </p:cNvPr>
@@ -10296,7 +10341,7 @@
           <p:cNvPr id="3" name="Espaço Reservado para Conteúdo 2">
             <a:extLst>
               <a:ext uri="{FF2B5EF4-FFF2-40B4-BE49-F238E27FC236}">
-                <a16:creationId xmlns:a16="http://schemas.microsoft.com/office/drawing/2014/main" id="{3C767761-7363-3966-1F66-B32029649DCD}"/>
+                <a16:creationId xmlns:a16="http://schemas.microsoft.com/office/drawing/2014/main" xmlns="" id="{3C767761-7363-3966-1F66-B32029649DCD}"/>
               </a:ext>
             </a:extLst>
           </p:cNvPr>
@@ -10448,7 +10493,7 @@
           <p:cNvPr id="5" name="Picture 2" descr="K-Means Clustering using Python. Welcome back guys! Hope you had a great… |  by Luigi Fiori | Medium">
             <a:extLst>
               <a:ext uri="{FF2B5EF4-FFF2-40B4-BE49-F238E27FC236}">
-                <a16:creationId xmlns:a16="http://schemas.microsoft.com/office/drawing/2014/main" id="{079377DD-55D2-BED3-3BB3-D573A6F13921}"/>
+                <a16:creationId xmlns:a16="http://schemas.microsoft.com/office/drawing/2014/main" xmlns="" id="{079377DD-55D2-BED3-3BB3-D573A6F13921}"/>
               </a:ext>
             </a:extLst>
           </p:cNvPr>
@@ -10509,7 +10554,7 @@
         <p:cNvPr id="1" name="">
           <a:extLst>
             <a:ext uri="{FF2B5EF4-FFF2-40B4-BE49-F238E27FC236}">
-              <a16:creationId xmlns:a16="http://schemas.microsoft.com/office/drawing/2014/main" id="{654994D8-D711-9C2A-C202-7BAD7B93F7EE}"/>
+              <a16:creationId xmlns:a16="http://schemas.microsoft.com/office/drawing/2014/main" xmlns="" id="{654994D8-D711-9C2A-C202-7BAD7B93F7EE}"/>
             </a:ext>
           </a:extLst>
         </p:cNvPr>
@@ -10529,7 +10574,7 @@
           <p:cNvPr id="2" name="Título 1">
             <a:extLst>
               <a:ext uri="{FF2B5EF4-FFF2-40B4-BE49-F238E27FC236}">
-                <a16:creationId xmlns:a16="http://schemas.microsoft.com/office/drawing/2014/main" id="{FA636E4B-196C-922B-890C-6917F63A065D}"/>
+                <a16:creationId xmlns:a16="http://schemas.microsoft.com/office/drawing/2014/main" xmlns="" id="{FA636E4B-196C-922B-890C-6917F63A065D}"/>
               </a:ext>
             </a:extLst>
           </p:cNvPr>
@@ -10568,7 +10613,7 @@
               <p:cNvPr id="3" name="Espaço Reservado para Conteúdo 2">
                 <a:extLst>
                   <a:ext uri="{FF2B5EF4-FFF2-40B4-BE49-F238E27FC236}">
-                    <a16:creationId xmlns:a16="http://schemas.microsoft.com/office/drawing/2014/main" id="{1FCDFA83-D279-17E3-E2CD-6E304EAF637F}"/>
+                    <a16:creationId xmlns:a16="http://schemas.microsoft.com/office/drawing/2014/main" xmlns="" id="{1FCDFA83-D279-17E3-E2CD-6E304EAF637F}"/>
                   </a:ext>
                 </a:extLst>
               </p:cNvPr>
@@ -11788,8 +11833,8 @@
           </p:sp>
         </mc:Fallback>
       </mc:AlternateContent>
-      <mc:AlternateContent xmlns:mc="http://schemas.openxmlformats.org/markup-compatibility/2006">
-        <mc:Choice xmlns:a14="http://schemas.microsoft.com/office/drawing/2010/main" Requires="a14">
+      <mc:AlternateContent xmlns:mc="http://schemas.openxmlformats.org/markup-compatibility/2006" xmlns:a14="http://schemas.microsoft.com/office/drawing/2010/main">
+        <mc:Choice Requires="a14">
           <p:sp>
             <p:nvSpPr>
               <p:cNvPr id="4" name="TextBox 4"/>
@@ -12018,7 +12063,7 @@
             </p:txBody>
           </p:sp>
         </mc:Choice>
-        <mc:Fallback>
+        <mc:Fallback xmlns="">
           <p:sp>
             <p:nvSpPr>
               <p:cNvPr id="4" name="TextBox 4"/>
@@ -12478,7 +12523,7 @@
           <p:cNvPr id="4" name="Picture 5">
             <a:extLst>
               <a:ext uri="{FF2B5EF4-FFF2-40B4-BE49-F238E27FC236}">
-                <a16:creationId xmlns:a16="http://schemas.microsoft.com/office/drawing/2014/main" id="{F98B536F-38AB-58C5-0FFB-41BDB557E9EF}"/>
+                <a16:creationId xmlns:a16="http://schemas.microsoft.com/office/drawing/2014/main" xmlns="" id="{F98B536F-38AB-58C5-0FFB-41BDB557E9EF}"/>
               </a:ext>
             </a:extLst>
           </p:cNvPr>
@@ -12503,220 +12548,58 @@
           </a:prstGeom>
         </p:spPr>
       </p:pic>
+      <p:sp>
+        <p:nvSpPr>
+          <p:cNvPr id="5" name="TextBox 7">
+            <a:extLst>
+              <a:ext uri="{FF2B5EF4-FFF2-40B4-BE49-F238E27FC236}">
+                <a16:creationId xmlns:a16="http://schemas.microsoft.com/office/drawing/2014/main" xmlns:a14="http://schemas.microsoft.com/office/drawing/2010/main" xmlns:mc="http://schemas.openxmlformats.org/markup-compatibility/2006" xmlns="" id="{04EA9FAE-D371-68E0-2CB7-9C8893491B3B}"/>
+              </a:ext>
+            </a:extLst>
+          </p:cNvPr>
+          <p:cNvSpPr txBox="1"/>
+          <p:nvPr/>
+        </p:nvSpPr>
+        <p:spPr>
+          <a:xfrm>
+            <a:off x="303430" y="2475186"/>
+            <a:ext cx="2532992" cy="646331"/>
+          </a:xfrm>
+          <a:prstGeom prst="rect">
+            <a:avLst/>
+          </a:prstGeom>
+          <a:noFill/>
+        </p:spPr>
+        <p:txBody>
+          <a:bodyPr wrap="square" rtlCol="0">
+            <a:spAutoFit/>
+          </a:bodyPr>
+          <a:lstStyle/>
+          <a:p>
+            <a:r>
+              <a:rPr lang="pt-BR" dirty="0" smtClean="0"/>
+              <a:t>Quais são os </a:t>
+            </a:r>
+            <a:r>
+              <a:rPr lang="pt-BR" i="1" dirty="0" smtClean="0"/>
+              <a:t>clusters</a:t>
+            </a:r>
+            <a:r>
+              <a:rPr lang="pt-BR" dirty="0" smtClean="0"/>
+              <a:t> para os dados ao lado?</a:t>
+            </a:r>
+            <a:endParaRPr lang="en-US" dirty="0"/>
+          </a:p>
+        </p:txBody>
+      </p:sp>
       <mc:AlternateContent xmlns:mc="http://schemas.openxmlformats.org/markup-compatibility/2006" xmlns:a14="http://schemas.microsoft.com/office/drawing/2010/main">
         <mc:Choice Requires="a14">
-          <p:sp>
-            <p:nvSpPr>
-              <p:cNvPr id="5" name="TextBox 7">
-                <a:extLst>
-                  <a:ext uri="{FF2B5EF4-FFF2-40B4-BE49-F238E27FC236}">
-                    <a16:creationId xmlns:a16="http://schemas.microsoft.com/office/drawing/2014/main" id="{04EA9FAE-D371-68E0-2CB7-9C8893491B3B}"/>
-                  </a:ext>
-                </a:extLst>
-              </p:cNvPr>
-              <p:cNvSpPr txBox="1"/>
-              <p:nvPr/>
-            </p:nvSpPr>
-            <p:spPr>
-              <a:xfrm>
-                <a:off x="303430" y="2475186"/>
-                <a:ext cx="2532992" cy="646331"/>
-              </a:xfrm>
-              <a:prstGeom prst="rect">
-                <a:avLst/>
-              </a:prstGeom>
-              <a:noFill/>
-            </p:spPr>
-            <p:txBody>
-              <a:bodyPr wrap="square" rtlCol="0">
-                <a:spAutoFit/>
-              </a:bodyPr>
-              <a:lstStyle/>
-              <a:p>
-                <a:r>
-                  <a:rPr lang="pt-BR" dirty="0"/>
-                  <a:t>1. Define-se o número de clusters, </a:t>
-                </a:r>
-                <a14:m>
-                  <m:oMath xmlns:m="http://schemas.openxmlformats.org/officeDocument/2006/math">
-                    <m:r>
-                      <a:rPr lang="pt-BR" b="0" i="1" smtClean="0">
-                        <a:latin typeface="Cambria Math" panose="02040503050406030204" pitchFamily="18" charset="0"/>
-                      </a:rPr>
-                      <m:t>𝑘</m:t>
-                    </m:r>
-                  </m:oMath>
-                </a14:m>
-                <a:r>
-                  <a:rPr lang="pt-BR" dirty="0"/>
-                  <a:t> = 3</a:t>
-                </a:r>
-                <a:endParaRPr lang="en-US" dirty="0"/>
-              </a:p>
-            </p:txBody>
-          </p:sp>
-        </mc:Choice>
-        <mc:Fallback xmlns="">
-          <p:sp>
-            <p:nvSpPr>
-              <p:cNvPr id="5" name="TextBox 7">
-                <a:extLst>
-                  <a:ext uri="{FF2B5EF4-FFF2-40B4-BE49-F238E27FC236}">
-                    <a16:creationId xmlns:a16="http://schemas.microsoft.com/office/drawing/2014/main" xmlns="" id="{04EA9FAE-D371-68E0-2CB7-9C8893491B3B}"/>
-                  </a:ext>
-                </a:extLst>
-              </p:cNvPr>
-              <p:cNvSpPr txBox="1">
-                <a:spLocks noRot="1" noChangeAspect="1" noMove="1" noResize="1" noEditPoints="1" noAdjustHandles="1" noChangeArrowheads="1" noChangeShapeType="1" noTextEdit="1"/>
-              </p:cNvSpPr>
-              <p:nvPr/>
-            </p:nvSpPr>
-            <p:spPr>
-              <a:xfrm>
-                <a:off x="303430" y="2475186"/>
-                <a:ext cx="2532992" cy="646331"/>
-              </a:xfrm>
-              <a:prstGeom prst="rect">
-                <a:avLst/>
-              </a:prstGeom>
-              <a:blipFill rotWithShape="0">
-                <a:blip r:embed="rId3"/>
-                <a:stretch>
-                  <a:fillRect l="-2169" t="-4717" b="-14151"/>
-                </a:stretch>
-              </a:blipFill>
-            </p:spPr>
-            <p:txBody>
-              <a:bodyPr/>
-              <a:lstStyle/>
-              <a:p>
-                <a:r>
-                  <a:rPr lang="pt-BR">
-                    <a:noFill/>
-                  </a:rPr>
-                  <a:t> </a:t>
-                </a:r>
-              </a:p>
-            </p:txBody>
-          </p:sp>
-        </mc:Fallback>
-      </mc:AlternateContent>
-      <mc:AlternateContent xmlns:mc="http://schemas.openxmlformats.org/markup-compatibility/2006">
-        <mc:Choice xmlns:a14="http://schemas.microsoft.com/office/drawing/2010/main" Requires="a14">
-          <p:sp>
-            <p:nvSpPr>
-              <p:cNvPr id="3" name="TextBox 7">
-                <a:extLst>
-                  <a:ext uri="{FF2B5EF4-FFF2-40B4-BE49-F238E27FC236}">
-                    <a16:creationId xmlns:a16="http://schemas.microsoft.com/office/drawing/2014/main" id="{94261EAA-BD9C-FEF4-0DB3-0E9FAB8B504D}"/>
-                  </a:ext>
-                </a:extLst>
-              </p:cNvPr>
-              <p:cNvSpPr txBox="1"/>
-              <p:nvPr/>
-            </p:nvSpPr>
-            <p:spPr>
-              <a:xfrm>
-                <a:off x="253521" y="4100786"/>
-                <a:ext cx="2632810" cy="1477328"/>
-              </a:xfrm>
-              <a:prstGeom prst="rect">
-                <a:avLst/>
-              </a:prstGeom>
-              <a:noFill/>
-            </p:spPr>
-            <p:txBody>
-              <a:bodyPr wrap="square" rtlCol="0">
-                <a:spAutoFit/>
-              </a:bodyPr>
-              <a:lstStyle/>
-              <a:p>
-                <a:pPr marL="285750" indent="-285750">
-                  <a:buFont typeface="Arial" panose="020B0604020202020204" pitchFamily="34" charset="0"/>
-                  <a:buChar char="•"/>
-                </a:pPr>
-                <a14:m>
-                  <m:oMath xmlns:m="http://schemas.openxmlformats.org/officeDocument/2006/math">
-                    <m:r>
-                      <a:rPr lang="pt-BR" b="0" i="1" smtClean="0">
-                        <a:latin typeface="Cambria Math" panose="02040503050406030204" pitchFamily="18" charset="0"/>
-                      </a:rPr>
-                      <m:t>𝑘</m:t>
-                    </m:r>
-                  </m:oMath>
-                </a14:m>
-                <a:r>
-                  <a:rPr lang="pt-BR" dirty="0"/>
-                  <a:t> = 3 pode não ser o valor ideal.</a:t>
-                </a:r>
-              </a:p>
-              <a:p>
-                <a:pPr marL="285750" indent="-285750">
-                  <a:buFont typeface="Arial" panose="020B0604020202020204" pitchFamily="34" charset="0"/>
-                  <a:buChar char="•"/>
-                </a:pPr>
-                <a:r>
-                  <a:rPr lang="pt-BR" dirty="0"/>
-                  <a:t>Para encontrar o valor ideal, pode-se usar o método do cotovelo.</a:t>
-                </a:r>
-                <a:endParaRPr lang="en-US" dirty="0"/>
-              </a:p>
-            </p:txBody>
-          </p:sp>
-        </mc:Choice>
-        <mc:Fallback>
-          <p:sp>
-            <p:nvSpPr>
-              <p:cNvPr id="3" name="TextBox 7">
-                <a:extLst>
-                  <a:ext uri="{FF2B5EF4-FFF2-40B4-BE49-F238E27FC236}">
-                    <a16:creationId xmlns:a16="http://schemas.microsoft.com/office/drawing/2014/main" id="{94261EAA-BD9C-FEF4-0DB3-0E9FAB8B504D}"/>
-                  </a:ext>
-                </a:extLst>
-              </p:cNvPr>
-              <p:cNvSpPr txBox="1">
-                <a:spLocks noRot="1" noChangeAspect="1" noMove="1" noResize="1" noEditPoints="1" noAdjustHandles="1" noChangeArrowheads="1" noChangeShapeType="1" noTextEdit="1"/>
-              </p:cNvSpPr>
-              <p:nvPr/>
-            </p:nvSpPr>
-            <p:spPr>
-              <a:xfrm>
-                <a:off x="253521" y="4100786"/>
-                <a:ext cx="2632810" cy="1477328"/>
-              </a:xfrm>
-              <a:prstGeom prst="rect">
-                <a:avLst/>
-              </a:prstGeom>
-              <a:blipFill>
-                <a:blip r:embed="rId4"/>
-                <a:stretch>
-                  <a:fillRect l="-1624" t="-2479" b="-5785"/>
-                </a:stretch>
-              </a:blipFill>
-            </p:spPr>
-            <p:txBody>
-              <a:bodyPr/>
-              <a:lstStyle/>
-              <a:p>
-                <a:r>
-                  <a:rPr lang="en-US">
-                    <a:noFill/>
-                  </a:rPr>
-                  <a:t> </a:t>
-                </a:r>
-              </a:p>
-            </p:txBody>
-          </p:sp>
-        </mc:Fallback>
-      </mc:AlternateContent>
-      <mc:AlternateContent xmlns:mc="http://schemas.openxmlformats.org/markup-compatibility/2006">
-        <mc:Choice xmlns:a14="http://schemas.microsoft.com/office/drawing/2010/main" Requires="a14">
           <p:sp>
             <p:nvSpPr>
               <p:cNvPr id="6" name="CaixaDeTexto 5">
                 <a:extLst>
                   <a:ext uri="{FF2B5EF4-FFF2-40B4-BE49-F238E27FC236}">
-                    <a16:creationId xmlns:a16="http://schemas.microsoft.com/office/drawing/2014/main" id="{9394829D-4B20-87E4-723D-060131B1A09F}"/>
+                    <a16:creationId xmlns:a16="http://schemas.microsoft.com/office/drawing/2014/main" xmlns="" id="{9394829D-4B20-87E4-723D-060131B1A09F}"/>
                   </a:ext>
                 </a:extLst>
               </p:cNvPr>
@@ -12739,6 +12622,7 @@
               </a:bodyPr>
               <a:lstStyle/>
               <a:p>
+                <a:pPr/>
                 <a14:m>
                   <m:oMathPara xmlns:m="http://schemas.openxmlformats.org/officeDocument/2006/math">
                     <m:oMathParaPr>
@@ -12778,7 +12662,7 @@
             </p:txBody>
           </p:sp>
         </mc:Choice>
-        <mc:Fallback>
+        <mc:Fallback xmlns="">
           <p:sp>
             <p:nvSpPr>
               <p:cNvPr id="6" name="CaixaDeTexto 5">
@@ -12823,14 +12707,14 @@
           </p:sp>
         </mc:Fallback>
       </mc:AlternateContent>
-      <mc:AlternateContent xmlns:mc="http://schemas.openxmlformats.org/markup-compatibility/2006">
-        <mc:Choice xmlns:a14="http://schemas.microsoft.com/office/drawing/2010/main" Requires="a14">
+      <mc:AlternateContent xmlns:mc="http://schemas.openxmlformats.org/markup-compatibility/2006" xmlns:a14="http://schemas.microsoft.com/office/drawing/2010/main">
+        <mc:Choice Requires="a14">
           <p:sp>
             <p:nvSpPr>
               <p:cNvPr id="7" name="CaixaDeTexto 6">
                 <a:extLst>
                   <a:ext uri="{FF2B5EF4-FFF2-40B4-BE49-F238E27FC236}">
-                    <a16:creationId xmlns:a16="http://schemas.microsoft.com/office/drawing/2014/main" id="{8E080567-D2AB-8C1E-406B-08C7B8BE3295}"/>
+                    <a16:creationId xmlns:a16="http://schemas.microsoft.com/office/drawing/2014/main" xmlns="" id="{8E080567-D2AB-8C1E-406B-08C7B8BE3295}"/>
                   </a:ext>
                 </a:extLst>
               </p:cNvPr>
@@ -12853,6 +12737,7 @@
               </a:bodyPr>
               <a:lstStyle/>
               <a:p>
+                <a:pPr/>
                 <a14:m>
                   <m:oMathPara xmlns:m="http://schemas.openxmlformats.org/officeDocument/2006/math">
                     <m:oMathParaPr>
@@ -12892,7 +12777,7 @@
             </p:txBody>
           </p:sp>
         </mc:Choice>
-        <mc:Fallback>
+        <mc:Fallback xmlns="">
           <p:sp>
             <p:nvSpPr>
               <p:cNvPr id="7" name="CaixaDeTexto 6">
@@ -12994,16 +12879,16 @@
               <a:rPr lang="pt-BR" i="1" dirty="0" err="1"/>
               <a:t>Means</a:t>
             </a:r>
-            <a:endParaRPr lang="pt-BR" dirty="0"/>
+            <a:endParaRPr lang="pt-BR" i="1" dirty="0"/>
           </a:p>
         </p:txBody>
       </p:sp>
       <p:pic>
         <p:nvPicPr>
-          <p:cNvPr id="3" name="Picture 5">
+          <p:cNvPr id="4" name="Picture 5">
             <a:extLst>
               <a:ext uri="{FF2B5EF4-FFF2-40B4-BE49-F238E27FC236}">
-                <a16:creationId xmlns:a16="http://schemas.microsoft.com/office/drawing/2014/main" id="{69F3FE92-0D0B-AECE-B64E-FC9D2F3EADBC}"/>
+                <a16:creationId xmlns:a16="http://schemas.microsoft.com/office/drawing/2014/main" xmlns="" id="{F98B536F-38AB-58C5-0FFB-41BDB557E9EF}"/>
               </a:ext>
             </a:extLst>
           </p:cNvPr>
@@ -13020,22 +12905,22 @@
         </p:blipFill>
         <p:spPr>
           <a:xfrm>
-            <a:off x="2966601" y="1913835"/>
-            <a:ext cx="6258798" cy="4944165"/>
+            <a:off x="2836422" y="1856677"/>
+            <a:ext cx="6315956" cy="5001323"/>
           </a:xfrm>
           <a:prstGeom prst="rect">
             <a:avLst/>
           </a:prstGeom>
         </p:spPr>
       </p:pic>
-      <mc:AlternateContent xmlns:mc="http://schemas.openxmlformats.org/markup-compatibility/2006">
-        <mc:Choice xmlns:a14="http://schemas.microsoft.com/office/drawing/2010/main" Requires="a14">
+      <mc:AlternateContent xmlns:mc="http://schemas.openxmlformats.org/markup-compatibility/2006" xmlns:a14="http://schemas.microsoft.com/office/drawing/2010/main">
+        <mc:Choice Requires="a14">
           <p:sp>
             <p:nvSpPr>
-              <p:cNvPr id="4" name="TextBox 7">
+              <p:cNvPr id="5" name="TextBox 7">
                 <a:extLst>
                   <a:ext uri="{FF2B5EF4-FFF2-40B4-BE49-F238E27FC236}">
-                    <a16:creationId xmlns:a16="http://schemas.microsoft.com/office/drawing/2014/main" id="{5D947541-89EC-69EF-1918-6EFD56E0B3C2}"/>
+                    <a16:creationId xmlns:a16="http://schemas.microsoft.com/office/drawing/2014/main" xmlns="" id="{04EA9FAE-D371-68E0-2CB7-9C8893491B3B}"/>
                   </a:ext>
                 </a:extLst>
               </p:cNvPr>
@@ -13044,8 +12929,8 @@
             </p:nvSpPr>
             <p:spPr>
               <a:xfrm>
-                <a:off x="65746" y="2490952"/>
-                <a:ext cx="2900855" cy="1200329"/>
+                <a:off x="303430" y="2475186"/>
+                <a:ext cx="2532992" cy="646331"/>
               </a:xfrm>
               <a:prstGeom prst="rect">
                 <a:avLst/>
@@ -13059,29 +12944,13 @@
               <a:lstStyle/>
               <a:p>
                 <a:r>
-                  <a:rPr lang="en-US" dirty="0"/>
-                  <a:t>2. </a:t>
-                </a:r>
-                <a:r>
-                  <a:rPr lang="en-US" dirty="0" err="1"/>
-                  <a:t>Escolhe</a:t>
-                </a:r>
-                <a:r>
-                  <a:rPr lang="en-US" dirty="0"/>
-                  <a:t>-se </a:t>
-                </a:r>
-                <a:r>
-                  <a:rPr lang="en-US" dirty="0" err="1"/>
-                  <a:t>os</a:t>
-                </a:r>
-                <a:r>
-                  <a:rPr lang="en-US" dirty="0"/>
-                  <a:t> </a:t>
+                  <a:rPr lang="pt-BR" dirty="0"/>
+                  <a:t>1. Define-se o número de clusters, </a:t>
                 </a:r>
                 <a14:m>
                   <m:oMath xmlns:m="http://schemas.openxmlformats.org/officeDocument/2006/math">
                     <m:r>
-                      <a:rPr lang="pt-BR" i="1">
+                      <a:rPr lang="pt-BR" b="0" i="1" smtClean="0">
                         <a:latin typeface="Cambria Math" panose="02040503050406030204" pitchFamily="18" charset="0"/>
                       </a:rPr>
                       <m:t>𝑘</m:t>
@@ -13090,63 +12959,20 @@
                 </a14:m>
                 <a:r>
                   <a:rPr lang="pt-BR" dirty="0"/>
-                  <a:t> = 3 </a:t>
-                </a:r>
-                <a:r>
-                  <a:rPr lang="en-US" dirty="0" err="1"/>
-                  <a:t>centroides</a:t>
-                </a:r>
-                <a:r>
-                  <a:rPr lang="en-US" dirty="0"/>
-                  <a:t> (</a:t>
-                </a:r>
-                <a:r>
-                  <a:rPr lang="en-US" dirty="0" err="1"/>
-                  <a:t>cruzes</a:t>
-                </a:r>
-                <a:r>
-                  <a:rPr lang="en-US" dirty="0"/>
-                  <a:t> </a:t>
-                </a:r>
-                <a:r>
-                  <a:rPr lang="en-US" dirty="0" err="1"/>
-                  <a:t>coloridas</a:t>
-                </a:r>
-                <a:r>
-                  <a:rPr lang="en-US" dirty="0"/>
-                  <a:t>) para </a:t>
-                </a:r>
-                <a:r>
-                  <a:rPr lang="en-US" dirty="0" err="1"/>
-                  <a:t>cada</a:t>
-                </a:r>
-                <a:r>
-                  <a:rPr lang="en-US" dirty="0"/>
-                  <a:t> cluster de forma </a:t>
-                </a:r>
-                <a:r>
-                  <a:rPr lang="en-US" b="1" dirty="0" err="1">
-                    <a:solidFill>
-                      <a:schemeClr val="accent2"/>
-                    </a:solidFill>
-                  </a:rPr>
-                  <a:t>aleatória</a:t>
-                </a:r>
-                <a:r>
-                  <a:rPr lang="en-US" dirty="0"/>
-                  <a:t>.</a:t>
-                </a:r>
+                  <a:t> = 3</a:t>
+                </a:r>
+                <a:endParaRPr lang="en-US" dirty="0"/>
               </a:p>
             </p:txBody>
           </p:sp>
         </mc:Choice>
-        <mc:Fallback>
+        <mc:Fallback xmlns="">
           <p:sp>
             <p:nvSpPr>
-              <p:cNvPr id="4" name="TextBox 7">
+              <p:cNvPr id="5" name="TextBox 7">
                 <a:extLst>
                   <a:ext uri="{FF2B5EF4-FFF2-40B4-BE49-F238E27FC236}">
-                    <a16:creationId xmlns:a16="http://schemas.microsoft.com/office/drawing/2014/main" id="{5D947541-89EC-69EF-1918-6EFD56E0B3C2}"/>
+                    <a16:creationId xmlns:a16="http://schemas.microsoft.com/office/drawing/2014/main" xmlns="" id="{04EA9FAE-D371-68E0-2CB7-9C8893491B3B}"/>
                   </a:ext>
                 </a:extLst>
               </p:cNvPr>
@@ -13157,16 +12983,16 @@
             </p:nvSpPr>
             <p:spPr>
               <a:xfrm>
-                <a:off x="65746" y="2490952"/>
-                <a:ext cx="2900855" cy="1200329"/>
+                <a:off x="303430" y="2475186"/>
+                <a:ext cx="2532992" cy="646331"/>
               </a:xfrm>
               <a:prstGeom prst="rect">
                 <a:avLst/>
               </a:prstGeom>
-              <a:blipFill>
+              <a:blipFill rotWithShape="0">
                 <a:blip r:embed="rId3"/>
                 <a:stretch>
-                  <a:fillRect l="-1891" t="-3046" b="-7107"/>
+                  <a:fillRect l="-2169" t="-4717" b="-14151"/>
                 </a:stretch>
               </a:blipFill>
             </p:spPr>
@@ -13175,7 +13001,7 @@
               <a:lstStyle/>
               <a:p>
                 <a:r>
-                  <a:rPr lang="en-US">
+                  <a:rPr lang="pt-BR">
                     <a:noFill/>
                   </a:rPr>
                   <a:t> </a:t>
@@ -13185,54 +13011,237 @@
           </p:sp>
         </mc:Fallback>
       </mc:AlternateContent>
-      <p:sp>
-        <p:nvSpPr>
-          <p:cNvPr id="5" name="TextBox 7">
-            <a:extLst>
-              <a:ext uri="{FF2B5EF4-FFF2-40B4-BE49-F238E27FC236}">
-                <a16:creationId xmlns:a16="http://schemas.microsoft.com/office/drawing/2014/main" id="{15C593E3-E791-E720-8381-43B9961E52D8}"/>
-              </a:ext>
-            </a:extLst>
-          </p:cNvPr>
-          <p:cNvSpPr txBox="1"/>
-          <p:nvPr/>
-        </p:nvSpPr>
-        <p:spPr>
-          <a:xfrm>
-            <a:off x="253521" y="4100786"/>
-            <a:ext cx="2632810" cy="1200329"/>
-          </a:xfrm>
-          <a:prstGeom prst="rect">
-            <a:avLst/>
-          </a:prstGeom>
-          <a:noFill/>
-        </p:spPr>
-        <p:txBody>
-          <a:bodyPr wrap="square" rtlCol="0">
-            <a:spAutoFit/>
-          </a:bodyPr>
-          <a:lstStyle/>
-          <a:p>
-            <a:pPr marL="285750" indent="-285750">
-              <a:buFont typeface="Arial" panose="020B0604020202020204" pitchFamily="34" charset="0"/>
-              <a:buChar char="•"/>
-            </a:pPr>
-            <a:r>
-              <a:rPr lang="pt-BR" dirty="0"/>
-              <a:t>No caso desse exemplo, os centroides são vetores bidimensionais.</a:t>
-            </a:r>
-            <a:endParaRPr lang="en-US" dirty="0"/>
-          </a:p>
-        </p:txBody>
-      </p:sp>
-      <mc:AlternateContent xmlns:mc="http://schemas.openxmlformats.org/markup-compatibility/2006">
-        <mc:Choice xmlns:a14="http://schemas.microsoft.com/office/drawing/2010/main" Requires="a14">
+      <mc:AlternateContent xmlns:mc="http://schemas.openxmlformats.org/markup-compatibility/2006" xmlns:a14="http://schemas.microsoft.com/office/drawing/2010/main">
+        <mc:Choice Requires="a14">
+          <p:sp>
+            <p:nvSpPr>
+              <p:cNvPr id="3" name="TextBox 7">
+                <a:extLst>
+                  <a:ext uri="{FF2B5EF4-FFF2-40B4-BE49-F238E27FC236}">
+                    <a16:creationId xmlns:a16="http://schemas.microsoft.com/office/drawing/2014/main" xmlns="" id="{94261EAA-BD9C-FEF4-0DB3-0E9FAB8B504D}"/>
+                  </a:ext>
+                </a:extLst>
+              </p:cNvPr>
+              <p:cNvSpPr txBox="1"/>
+              <p:nvPr/>
+            </p:nvSpPr>
+            <p:spPr>
+              <a:xfrm>
+                <a:off x="253521" y="4100786"/>
+                <a:ext cx="2632810" cy="1477328"/>
+              </a:xfrm>
+              <a:prstGeom prst="rect">
+                <a:avLst/>
+              </a:prstGeom>
+              <a:noFill/>
+            </p:spPr>
+            <p:txBody>
+              <a:bodyPr wrap="square" rtlCol="0">
+                <a:spAutoFit/>
+              </a:bodyPr>
+              <a:lstStyle/>
+              <a:p>
+                <a:pPr marL="285750" indent="-285750">
+                  <a:buFont typeface="Arial" panose="020B0604020202020204" pitchFamily="34" charset="0"/>
+                  <a:buChar char="•"/>
+                </a:pPr>
+                <a14:m>
+                  <m:oMath xmlns:m="http://schemas.openxmlformats.org/officeDocument/2006/math">
+                    <m:r>
+                      <a:rPr lang="pt-BR" b="0" i="1" smtClean="0">
+                        <a:latin typeface="Cambria Math" panose="02040503050406030204" pitchFamily="18" charset="0"/>
+                      </a:rPr>
+                      <m:t>𝑘</m:t>
+                    </m:r>
+                  </m:oMath>
+                </a14:m>
+                <a:r>
+                  <a:rPr lang="pt-BR" dirty="0"/>
+                  <a:t> = 3 pode não ser o valor ideal.</a:t>
+                </a:r>
+              </a:p>
+              <a:p>
+                <a:pPr marL="285750" indent="-285750">
+                  <a:buFont typeface="Arial" panose="020B0604020202020204" pitchFamily="34" charset="0"/>
+                  <a:buChar char="•"/>
+                </a:pPr>
+                <a:r>
+                  <a:rPr lang="pt-BR" dirty="0"/>
+                  <a:t>Para encontrar o valor ideal, pode-se usar o método do cotovelo.</a:t>
+                </a:r>
+                <a:endParaRPr lang="en-US" dirty="0"/>
+              </a:p>
+            </p:txBody>
+          </p:sp>
+        </mc:Choice>
+        <mc:Fallback xmlns="">
+          <p:sp>
+            <p:nvSpPr>
+              <p:cNvPr id="3" name="TextBox 7">
+                <a:extLst>
+                  <a:ext uri="{FF2B5EF4-FFF2-40B4-BE49-F238E27FC236}">
+                    <a16:creationId xmlns:a16="http://schemas.microsoft.com/office/drawing/2014/main" id="{94261EAA-BD9C-FEF4-0DB3-0E9FAB8B504D}"/>
+                  </a:ext>
+                </a:extLst>
+              </p:cNvPr>
+              <p:cNvSpPr txBox="1">
+                <a:spLocks noRot="1" noChangeAspect="1" noMove="1" noResize="1" noEditPoints="1" noAdjustHandles="1" noChangeArrowheads="1" noChangeShapeType="1" noTextEdit="1"/>
+              </p:cNvSpPr>
+              <p:nvPr/>
+            </p:nvSpPr>
+            <p:spPr>
+              <a:xfrm>
+                <a:off x="253521" y="4100786"/>
+                <a:ext cx="2632810" cy="1477328"/>
+              </a:xfrm>
+              <a:prstGeom prst="rect">
+                <a:avLst/>
+              </a:prstGeom>
+              <a:blipFill>
+                <a:blip r:embed="rId4"/>
+                <a:stretch>
+                  <a:fillRect l="-1624" t="-2479" b="-5785"/>
+                </a:stretch>
+              </a:blipFill>
+            </p:spPr>
+            <p:txBody>
+              <a:bodyPr/>
+              <a:lstStyle/>
+              <a:p>
+                <a:r>
+                  <a:rPr lang="en-US">
+                    <a:noFill/>
+                  </a:rPr>
+                  <a:t> </a:t>
+                </a:r>
+              </a:p>
+            </p:txBody>
+          </p:sp>
+        </mc:Fallback>
+      </mc:AlternateContent>
+      <mc:AlternateContent xmlns:mc="http://schemas.openxmlformats.org/markup-compatibility/2006" xmlns:a14="http://schemas.microsoft.com/office/drawing/2010/main">
+        <mc:Choice Requires="a14">
           <p:sp>
             <p:nvSpPr>
               <p:cNvPr id="6" name="CaixaDeTexto 5">
                 <a:extLst>
                   <a:ext uri="{FF2B5EF4-FFF2-40B4-BE49-F238E27FC236}">
-                    <a16:creationId xmlns:a16="http://schemas.microsoft.com/office/drawing/2014/main" id="{E5331C65-AAE5-E2AD-B6DD-576B355B6874}"/>
+                    <a16:creationId xmlns:a16="http://schemas.microsoft.com/office/drawing/2014/main" xmlns="" id="{9394829D-4B20-87E4-723D-060131B1A09F}"/>
+                  </a:ext>
+                </a:extLst>
+              </p:cNvPr>
+              <p:cNvSpPr txBox="1"/>
+              <p:nvPr/>
+            </p:nvSpPr>
+            <p:spPr>
+              <a:xfrm>
+                <a:off x="2948182" y="1528939"/>
+                <a:ext cx="466090" cy="369332"/>
+              </a:xfrm>
+              <a:prstGeom prst="rect">
+                <a:avLst/>
+              </a:prstGeom>
+              <a:noFill/>
+            </p:spPr>
+            <p:txBody>
+              <a:bodyPr wrap="none" rtlCol="0">
+                <a:spAutoFit/>
+              </a:bodyPr>
+              <a:lstStyle/>
+              <a:p>
+                <a:pPr/>
+                <a14:m>
+                  <m:oMathPara xmlns:m="http://schemas.openxmlformats.org/officeDocument/2006/math">
+                    <m:oMathParaPr>
+                      <m:jc m:val="centerGroup"/>
+                    </m:oMathParaPr>
+                    <m:oMath xmlns:m="http://schemas.openxmlformats.org/officeDocument/2006/math">
+                      <m:sSub>
+                        <m:sSubPr>
+                          <m:ctrlPr>
+                            <a:rPr lang="en-US" i="1" smtClean="0">
+                              <a:latin typeface="Cambria Math" panose="02040503050406030204" pitchFamily="18" charset="0"/>
+                            </a:rPr>
+                          </m:ctrlPr>
+                        </m:sSubPr>
+                        <m:e>
+                          <m:r>
+                            <a:rPr lang="pt-BR" b="0" i="1" smtClean="0">
+                              <a:latin typeface="Cambria Math" panose="02040503050406030204" pitchFamily="18" charset="0"/>
+                            </a:rPr>
+                            <m:t>𝑥</m:t>
+                          </m:r>
+                        </m:e>
+                        <m:sub>
+                          <m:r>
+                            <a:rPr lang="pt-BR" b="0" i="1" smtClean="0">
+                              <a:latin typeface="Cambria Math" panose="02040503050406030204" pitchFamily="18" charset="0"/>
+                            </a:rPr>
+                            <m:t>2</m:t>
+                          </m:r>
+                        </m:sub>
+                      </m:sSub>
+                    </m:oMath>
+                  </m:oMathPara>
+                </a14:m>
+                <a:endParaRPr lang="en-US" dirty="0"/>
+              </a:p>
+            </p:txBody>
+          </p:sp>
+        </mc:Choice>
+        <mc:Fallback xmlns="">
+          <p:sp>
+            <p:nvSpPr>
+              <p:cNvPr id="6" name="CaixaDeTexto 5">
+                <a:extLst>
+                  <a:ext uri="{FF2B5EF4-FFF2-40B4-BE49-F238E27FC236}">
+                    <a16:creationId xmlns:a16="http://schemas.microsoft.com/office/drawing/2014/main" id="{9394829D-4B20-87E4-723D-060131B1A09F}"/>
+                  </a:ext>
+                </a:extLst>
+              </p:cNvPr>
+              <p:cNvSpPr txBox="1">
+                <a:spLocks noRot="1" noChangeAspect="1" noMove="1" noResize="1" noEditPoints="1" noAdjustHandles="1" noChangeArrowheads="1" noChangeShapeType="1" noTextEdit="1"/>
+              </p:cNvSpPr>
+              <p:nvPr/>
+            </p:nvSpPr>
+            <p:spPr>
+              <a:xfrm>
+                <a:off x="2948182" y="1528939"/>
+                <a:ext cx="466090" cy="369332"/>
+              </a:xfrm>
+              <a:prstGeom prst="rect">
+                <a:avLst/>
+              </a:prstGeom>
+              <a:blipFill>
+                <a:blip r:embed="rId5"/>
+                <a:stretch>
+                  <a:fillRect/>
+                </a:stretch>
+              </a:blipFill>
+            </p:spPr>
+            <p:txBody>
+              <a:bodyPr/>
+              <a:lstStyle/>
+              <a:p>
+                <a:r>
+                  <a:rPr lang="en-US">
+                    <a:noFill/>
+                  </a:rPr>
+                  <a:t> </a:t>
+                </a:r>
+              </a:p>
+            </p:txBody>
+          </p:sp>
+        </mc:Fallback>
+      </mc:AlternateContent>
+      <mc:AlternateContent xmlns:mc="http://schemas.openxmlformats.org/markup-compatibility/2006" xmlns:a14="http://schemas.microsoft.com/office/drawing/2010/main">
+        <mc:Choice Requires="a14">
+          <p:sp>
+            <p:nvSpPr>
+              <p:cNvPr id="7" name="CaixaDeTexto 6">
+                <a:extLst>
+                  <a:ext uri="{FF2B5EF4-FFF2-40B4-BE49-F238E27FC236}">
+                    <a16:creationId xmlns:a16="http://schemas.microsoft.com/office/drawing/2014/main" xmlns="" id="{8E080567-D2AB-8C1E-406B-08C7B8BE3295}"/>
                   </a:ext>
                 </a:extLst>
               </p:cNvPr>
@@ -13255,6 +13264,7 @@
               </a:bodyPr>
               <a:lstStyle/>
               <a:p>
+                <a:pPr/>
                 <a14:m>
                   <m:oMathPara xmlns:m="http://schemas.openxmlformats.org/officeDocument/2006/math">
                     <m:oMathParaPr>
@@ -13294,7 +13304,410 @@
             </p:txBody>
           </p:sp>
         </mc:Choice>
-        <mc:Fallback>
+        <mc:Fallback xmlns="">
+          <p:sp>
+            <p:nvSpPr>
+              <p:cNvPr id="7" name="CaixaDeTexto 6">
+                <a:extLst>
+                  <a:ext uri="{FF2B5EF4-FFF2-40B4-BE49-F238E27FC236}">
+                    <a16:creationId xmlns:a16="http://schemas.microsoft.com/office/drawing/2014/main" id="{8E080567-D2AB-8C1E-406B-08C7B8BE3295}"/>
+                  </a:ext>
+                </a:extLst>
+              </p:cNvPr>
+              <p:cNvSpPr txBox="1">
+                <a:spLocks noRot="1" noChangeAspect="1" noMove="1" noResize="1" noEditPoints="1" noAdjustHandles="1" noChangeArrowheads="1" noChangeShapeType="1" noTextEdit="1"/>
+              </p:cNvSpPr>
+              <p:nvPr/>
+            </p:nvSpPr>
+            <p:spPr>
+              <a:xfrm>
+                <a:off x="9122533" y="6308209"/>
+                <a:ext cx="460767" cy="369332"/>
+              </a:xfrm>
+              <a:prstGeom prst="rect">
+                <a:avLst/>
+              </a:prstGeom>
+              <a:blipFill>
+                <a:blip r:embed="rId6"/>
+                <a:stretch>
+                  <a:fillRect/>
+                </a:stretch>
+              </a:blipFill>
+            </p:spPr>
+            <p:txBody>
+              <a:bodyPr/>
+              <a:lstStyle/>
+              <a:p>
+                <a:r>
+                  <a:rPr lang="en-US">
+                    <a:noFill/>
+                  </a:rPr>
+                  <a:t> </a:t>
+                </a:r>
+              </a:p>
+            </p:txBody>
+          </p:sp>
+        </mc:Fallback>
+      </mc:AlternateContent>
+    </p:spTree>
+    <p:extLst>
+      <p:ext uri="{BB962C8B-B14F-4D97-AF65-F5344CB8AC3E}">
+        <p14:creationId xmlns:p14="http://schemas.microsoft.com/office/powerpoint/2010/main" val="977897140"/>
+      </p:ext>
+    </p:extLst>
+  </p:cSld>
+  <p:clrMapOvr>
+    <a:masterClrMapping/>
+  </p:clrMapOvr>
+</p:sld>
+</file>
+
+<file path=ppt/slides/slide22.xml><?xml version="1.0" encoding="utf-8"?>
+<p:sld xmlns:a="http://schemas.openxmlformats.org/drawingml/2006/main" xmlns:r="http://schemas.openxmlformats.org/officeDocument/2006/relationships" xmlns:p="http://schemas.openxmlformats.org/presentationml/2006/main">
+  <p:cSld>
+    <p:spTree>
+      <p:nvGrpSpPr>
+        <p:cNvPr id="1" name=""/>
+        <p:cNvGrpSpPr/>
+        <p:nvPr/>
+      </p:nvGrpSpPr>
+      <p:grpSpPr>
+        <a:xfrm>
+          <a:off x="0" y="0"/>
+          <a:ext cx="0" cy="0"/>
+          <a:chOff x="0" y="0"/>
+          <a:chExt cx="0" cy="0"/>
+        </a:xfrm>
+      </p:grpSpPr>
+      <p:sp>
+        <p:nvSpPr>
+          <p:cNvPr id="2" name="Título 1"/>
+          <p:cNvSpPr>
+            <a:spLocks noGrp="1"/>
+          </p:cNvSpPr>
+          <p:nvPr>
+            <p:ph type="title"/>
+          </p:nvPr>
+        </p:nvSpPr>
+        <p:spPr/>
+        <p:txBody>
+          <a:bodyPr/>
+          <a:lstStyle/>
+          <a:p>
+            <a:r>
+              <a:rPr lang="pt-BR" dirty="0"/>
+              <a:t>Funcionamento do </a:t>
+            </a:r>
+            <a:r>
+              <a:rPr lang="pt-BR" i="1" dirty="0"/>
+              <a:t>k-</a:t>
+            </a:r>
+            <a:r>
+              <a:rPr lang="pt-BR" i="1" dirty="0" err="1"/>
+              <a:t>Means</a:t>
+            </a:r>
+            <a:endParaRPr lang="pt-BR" dirty="0"/>
+          </a:p>
+        </p:txBody>
+      </p:sp>
+      <p:pic>
+        <p:nvPicPr>
+          <p:cNvPr id="3" name="Picture 5">
+            <a:extLst>
+              <a:ext uri="{FF2B5EF4-FFF2-40B4-BE49-F238E27FC236}">
+                <a16:creationId xmlns:a16="http://schemas.microsoft.com/office/drawing/2014/main" xmlns="" id="{69F3FE92-0D0B-AECE-B64E-FC9D2F3EADBC}"/>
+              </a:ext>
+            </a:extLst>
+          </p:cNvPr>
+          <p:cNvPicPr>
+            <a:picLocks noChangeAspect="1"/>
+          </p:cNvPicPr>
+          <p:nvPr/>
+        </p:nvPicPr>
+        <p:blipFill>
+          <a:blip r:embed="rId2"/>
+          <a:stretch>
+            <a:fillRect/>
+          </a:stretch>
+        </p:blipFill>
+        <p:spPr>
+          <a:xfrm>
+            <a:off x="2966601" y="1913835"/>
+            <a:ext cx="6258798" cy="4944165"/>
+          </a:xfrm>
+          <a:prstGeom prst="rect">
+            <a:avLst/>
+          </a:prstGeom>
+        </p:spPr>
+      </p:pic>
+      <mc:AlternateContent xmlns:mc="http://schemas.openxmlformats.org/markup-compatibility/2006" xmlns:a14="http://schemas.microsoft.com/office/drawing/2010/main">
+        <mc:Choice Requires="a14">
+          <p:sp>
+            <p:nvSpPr>
+              <p:cNvPr id="4" name="TextBox 7">
+                <a:extLst>
+                  <a:ext uri="{FF2B5EF4-FFF2-40B4-BE49-F238E27FC236}">
+                    <a16:creationId xmlns:a16="http://schemas.microsoft.com/office/drawing/2014/main" xmlns="" id="{5D947541-89EC-69EF-1918-6EFD56E0B3C2}"/>
+                  </a:ext>
+                </a:extLst>
+              </p:cNvPr>
+              <p:cNvSpPr txBox="1"/>
+              <p:nvPr/>
+            </p:nvSpPr>
+            <p:spPr>
+              <a:xfrm>
+                <a:off x="65746" y="2490952"/>
+                <a:ext cx="2900855" cy="1200329"/>
+              </a:xfrm>
+              <a:prstGeom prst="rect">
+                <a:avLst/>
+              </a:prstGeom>
+              <a:noFill/>
+            </p:spPr>
+            <p:txBody>
+              <a:bodyPr wrap="square" rtlCol="0">
+                <a:spAutoFit/>
+              </a:bodyPr>
+              <a:lstStyle/>
+              <a:p>
+                <a:r>
+                  <a:rPr lang="en-US" dirty="0"/>
+                  <a:t>2. </a:t>
+                </a:r>
+                <a:r>
+                  <a:rPr lang="en-US" dirty="0" err="1"/>
+                  <a:t>Escolhe</a:t>
+                </a:r>
+                <a:r>
+                  <a:rPr lang="en-US" dirty="0"/>
+                  <a:t>-se </a:t>
+                </a:r>
+                <a:r>
+                  <a:rPr lang="en-US" dirty="0" err="1"/>
+                  <a:t>os</a:t>
+                </a:r>
+                <a:r>
+                  <a:rPr lang="en-US" dirty="0"/>
+                  <a:t> </a:t>
+                </a:r>
+                <a14:m>
+                  <m:oMath xmlns:m="http://schemas.openxmlformats.org/officeDocument/2006/math">
+                    <m:r>
+                      <a:rPr lang="pt-BR" i="1">
+                        <a:latin typeface="Cambria Math" panose="02040503050406030204" pitchFamily="18" charset="0"/>
+                      </a:rPr>
+                      <m:t>𝑘</m:t>
+                    </m:r>
+                  </m:oMath>
+                </a14:m>
+                <a:r>
+                  <a:rPr lang="pt-BR" dirty="0"/>
+                  <a:t> = 3 </a:t>
+                </a:r>
+                <a:r>
+                  <a:rPr lang="en-US" dirty="0" err="1"/>
+                  <a:t>centroides</a:t>
+                </a:r>
+                <a:r>
+                  <a:rPr lang="en-US" dirty="0"/>
+                  <a:t> (</a:t>
+                </a:r>
+                <a:r>
+                  <a:rPr lang="en-US" dirty="0" err="1"/>
+                  <a:t>cruzes</a:t>
+                </a:r>
+                <a:r>
+                  <a:rPr lang="en-US" dirty="0"/>
+                  <a:t> </a:t>
+                </a:r>
+                <a:r>
+                  <a:rPr lang="en-US" dirty="0" err="1"/>
+                  <a:t>coloridas</a:t>
+                </a:r>
+                <a:r>
+                  <a:rPr lang="en-US" dirty="0"/>
+                  <a:t>) para </a:t>
+                </a:r>
+                <a:r>
+                  <a:rPr lang="en-US" dirty="0" err="1"/>
+                  <a:t>cada</a:t>
+                </a:r>
+                <a:r>
+                  <a:rPr lang="en-US" dirty="0"/>
+                  <a:t> cluster de forma </a:t>
+                </a:r>
+                <a:r>
+                  <a:rPr lang="en-US" b="1" dirty="0" err="1">
+                    <a:solidFill>
+                      <a:schemeClr val="accent2"/>
+                    </a:solidFill>
+                  </a:rPr>
+                  <a:t>aleatória</a:t>
+                </a:r>
+                <a:r>
+                  <a:rPr lang="en-US" dirty="0"/>
+                  <a:t>.</a:t>
+                </a:r>
+              </a:p>
+            </p:txBody>
+          </p:sp>
+        </mc:Choice>
+        <mc:Fallback xmlns="">
+          <p:sp>
+            <p:nvSpPr>
+              <p:cNvPr id="4" name="TextBox 7">
+                <a:extLst>
+                  <a:ext uri="{FF2B5EF4-FFF2-40B4-BE49-F238E27FC236}">
+                    <a16:creationId xmlns:a16="http://schemas.microsoft.com/office/drawing/2014/main" id="{5D947541-89EC-69EF-1918-6EFD56E0B3C2}"/>
+                  </a:ext>
+                </a:extLst>
+              </p:cNvPr>
+              <p:cNvSpPr txBox="1">
+                <a:spLocks noRot="1" noChangeAspect="1" noMove="1" noResize="1" noEditPoints="1" noAdjustHandles="1" noChangeArrowheads="1" noChangeShapeType="1" noTextEdit="1"/>
+              </p:cNvSpPr>
+              <p:nvPr/>
+            </p:nvSpPr>
+            <p:spPr>
+              <a:xfrm>
+                <a:off x="65746" y="2490952"/>
+                <a:ext cx="2900855" cy="1200329"/>
+              </a:xfrm>
+              <a:prstGeom prst="rect">
+                <a:avLst/>
+              </a:prstGeom>
+              <a:blipFill>
+                <a:blip r:embed="rId3"/>
+                <a:stretch>
+                  <a:fillRect l="-1891" t="-3046" b="-7107"/>
+                </a:stretch>
+              </a:blipFill>
+            </p:spPr>
+            <p:txBody>
+              <a:bodyPr/>
+              <a:lstStyle/>
+              <a:p>
+                <a:r>
+                  <a:rPr lang="en-US">
+                    <a:noFill/>
+                  </a:rPr>
+                  <a:t> </a:t>
+                </a:r>
+              </a:p>
+            </p:txBody>
+          </p:sp>
+        </mc:Fallback>
+      </mc:AlternateContent>
+      <p:sp>
+        <p:nvSpPr>
+          <p:cNvPr id="5" name="TextBox 7">
+            <a:extLst>
+              <a:ext uri="{FF2B5EF4-FFF2-40B4-BE49-F238E27FC236}">
+                <a16:creationId xmlns:a16="http://schemas.microsoft.com/office/drawing/2014/main" xmlns="" id="{15C593E3-E791-E720-8381-43B9961E52D8}"/>
+              </a:ext>
+            </a:extLst>
+          </p:cNvPr>
+          <p:cNvSpPr txBox="1"/>
+          <p:nvPr/>
+        </p:nvSpPr>
+        <p:spPr>
+          <a:xfrm>
+            <a:off x="253521" y="4100786"/>
+            <a:ext cx="2632810" cy="1200329"/>
+          </a:xfrm>
+          <a:prstGeom prst="rect">
+            <a:avLst/>
+          </a:prstGeom>
+          <a:noFill/>
+        </p:spPr>
+        <p:txBody>
+          <a:bodyPr wrap="square" rtlCol="0">
+            <a:spAutoFit/>
+          </a:bodyPr>
+          <a:lstStyle/>
+          <a:p>
+            <a:pPr marL="285750" indent="-285750">
+              <a:buFont typeface="Arial" panose="020B0604020202020204" pitchFamily="34" charset="0"/>
+              <a:buChar char="•"/>
+            </a:pPr>
+            <a:r>
+              <a:rPr lang="pt-BR" dirty="0"/>
+              <a:t>No caso desse exemplo, os centroides são vetores bidimensionais.</a:t>
+            </a:r>
+            <a:endParaRPr lang="en-US" dirty="0"/>
+          </a:p>
+        </p:txBody>
+      </p:sp>
+      <mc:AlternateContent xmlns:mc="http://schemas.openxmlformats.org/markup-compatibility/2006" xmlns:a14="http://schemas.microsoft.com/office/drawing/2010/main">
+        <mc:Choice Requires="a14">
+          <p:sp>
+            <p:nvSpPr>
+              <p:cNvPr id="6" name="CaixaDeTexto 5">
+                <a:extLst>
+                  <a:ext uri="{FF2B5EF4-FFF2-40B4-BE49-F238E27FC236}">
+                    <a16:creationId xmlns:a16="http://schemas.microsoft.com/office/drawing/2014/main" xmlns="" id="{E5331C65-AAE5-E2AD-B6DD-576B355B6874}"/>
+                  </a:ext>
+                </a:extLst>
+              </p:cNvPr>
+              <p:cNvSpPr txBox="1"/>
+              <p:nvPr/>
+            </p:nvSpPr>
+            <p:spPr>
+              <a:xfrm>
+                <a:off x="9122533" y="6308209"/>
+                <a:ext cx="460767" cy="369332"/>
+              </a:xfrm>
+              <a:prstGeom prst="rect">
+                <a:avLst/>
+              </a:prstGeom>
+              <a:noFill/>
+            </p:spPr>
+            <p:txBody>
+              <a:bodyPr wrap="none" rtlCol="0">
+                <a:spAutoFit/>
+              </a:bodyPr>
+              <a:lstStyle/>
+              <a:p>
+                <a:pPr/>
+                <a14:m>
+                  <m:oMathPara xmlns:m="http://schemas.openxmlformats.org/officeDocument/2006/math">
+                    <m:oMathParaPr>
+                      <m:jc m:val="centerGroup"/>
+                    </m:oMathParaPr>
+                    <m:oMath xmlns:m="http://schemas.openxmlformats.org/officeDocument/2006/math">
+                      <m:sSub>
+                        <m:sSubPr>
+                          <m:ctrlPr>
+                            <a:rPr lang="en-US" i="1" smtClean="0">
+                              <a:latin typeface="Cambria Math" panose="02040503050406030204" pitchFamily="18" charset="0"/>
+                            </a:rPr>
+                          </m:ctrlPr>
+                        </m:sSubPr>
+                        <m:e>
+                          <m:r>
+                            <a:rPr lang="pt-BR" b="0" i="1" smtClean="0">
+                              <a:latin typeface="Cambria Math" panose="02040503050406030204" pitchFamily="18" charset="0"/>
+                            </a:rPr>
+                            <m:t>𝑥</m:t>
+                          </m:r>
+                        </m:e>
+                        <m:sub>
+                          <m:r>
+                            <a:rPr lang="pt-BR" b="0" i="1" smtClean="0">
+                              <a:latin typeface="Cambria Math" panose="02040503050406030204" pitchFamily="18" charset="0"/>
+                            </a:rPr>
+                            <m:t>1</m:t>
+                          </m:r>
+                        </m:sub>
+                      </m:sSub>
+                    </m:oMath>
+                  </m:oMathPara>
+                </a14:m>
+                <a:endParaRPr lang="en-US" dirty="0"/>
+              </a:p>
+            </p:txBody>
+          </p:sp>
+        </mc:Choice>
+        <mc:Fallback xmlns="">
           <p:sp>
             <p:nvSpPr>
               <p:cNvPr id="6" name="CaixaDeTexto 5">
@@ -13339,14 +13752,14 @@
           </p:sp>
         </mc:Fallback>
       </mc:AlternateContent>
-      <mc:AlternateContent xmlns:mc="http://schemas.openxmlformats.org/markup-compatibility/2006">
-        <mc:Choice xmlns:a14="http://schemas.microsoft.com/office/drawing/2010/main" Requires="a14">
+      <mc:AlternateContent xmlns:mc="http://schemas.openxmlformats.org/markup-compatibility/2006" xmlns:a14="http://schemas.microsoft.com/office/drawing/2010/main">
+        <mc:Choice Requires="a14">
           <p:sp>
             <p:nvSpPr>
               <p:cNvPr id="7" name="CaixaDeTexto 6">
                 <a:extLst>
                   <a:ext uri="{FF2B5EF4-FFF2-40B4-BE49-F238E27FC236}">
-                    <a16:creationId xmlns:a16="http://schemas.microsoft.com/office/drawing/2014/main" id="{86008807-F6C3-2E5C-872D-2AE7E0F51759}"/>
+                    <a16:creationId xmlns:a16="http://schemas.microsoft.com/office/drawing/2014/main" xmlns="" id="{86008807-F6C3-2E5C-872D-2AE7E0F51759}"/>
                   </a:ext>
                 </a:extLst>
               </p:cNvPr>
@@ -13369,6 +13782,7 @@
               </a:bodyPr>
               <a:lstStyle/>
               <a:p>
+                <a:pPr/>
                 <a14:m>
                   <m:oMathPara xmlns:m="http://schemas.openxmlformats.org/officeDocument/2006/math">
                     <m:oMathParaPr>
@@ -13408,7 +13822,7 @@
             </p:txBody>
           </p:sp>
         </mc:Choice>
-        <mc:Fallback>
+        <mc:Fallback xmlns="">
           <p:sp>
             <p:nvSpPr>
               <p:cNvPr id="7" name="CaixaDeTexto 6">
@@ -13466,7 +13880,7 @@
 </p:sld>
 </file>
 
-<file path=ppt/slides/slide22.xml><?xml version="1.0" encoding="utf-8"?>
+<file path=ppt/slides/slide23.xml><?xml version="1.0" encoding="utf-8"?>
 <p:sld xmlns:a="http://schemas.openxmlformats.org/drawingml/2006/main" xmlns:r="http://schemas.openxmlformats.org/officeDocument/2006/relationships" xmlns:p="http://schemas.openxmlformats.org/presentationml/2006/main">
   <p:cSld>
     <p:spTree>
@@ -13474,7 +13888,7 @@
         <p:cNvPr id="1" name="">
           <a:extLst>
             <a:ext uri="{FF2B5EF4-FFF2-40B4-BE49-F238E27FC236}">
-              <a16:creationId xmlns:a16="http://schemas.microsoft.com/office/drawing/2014/main" id="{D8DA98CE-9EF5-3AD6-65F9-FD33EF5B8939}"/>
+              <a16:creationId xmlns:a16="http://schemas.microsoft.com/office/drawing/2014/main" xmlns="" id="{D8DA98CE-9EF5-3AD6-65F9-FD33EF5B8939}"/>
             </a:ext>
           </a:extLst>
         </p:cNvPr>
@@ -13494,7 +13908,7 @@
           <p:cNvPr id="2" name="Título 1">
             <a:extLst>
               <a:ext uri="{FF2B5EF4-FFF2-40B4-BE49-F238E27FC236}">
-                <a16:creationId xmlns:a16="http://schemas.microsoft.com/office/drawing/2014/main" id="{1F5C7894-C1F5-A1F1-009D-36B5B378F2DE}"/>
+                <a16:creationId xmlns:a16="http://schemas.microsoft.com/office/drawing/2014/main" xmlns="" id="{1F5C7894-C1F5-A1F1-009D-36B5B378F2DE}"/>
               </a:ext>
             </a:extLst>
           </p:cNvPr>
@@ -13531,7 +13945,7 @@
           <p:cNvPr id="3" name="Picture 5">
             <a:extLst>
               <a:ext uri="{FF2B5EF4-FFF2-40B4-BE49-F238E27FC236}">
-                <a16:creationId xmlns:a16="http://schemas.microsoft.com/office/drawing/2014/main" id="{8983368B-E268-9198-467D-F5018D6F2838}"/>
+                <a16:creationId xmlns:a16="http://schemas.microsoft.com/office/drawing/2014/main" xmlns="" id="{8983368B-E268-9198-467D-F5018D6F2838}"/>
               </a:ext>
             </a:extLst>
           </p:cNvPr>
@@ -13561,7 +13975,7 @@
           <p:cNvPr id="4" name="TextBox 7">
             <a:extLst>
               <a:ext uri="{FF2B5EF4-FFF2-40B4-BE49-F238E27FC236}">
-                <a16:creationId xmlns:a16="http://schemas.microsoft.com/office/drawing/2014/main" id="{DCB1D521-B224-771D-3581-F3E43D318FD1}"/>
+                <a16:creationId xmlns:a16="http://schemas.microsoft.com/office/drawing/2014/main" xmlns="" id="{DCB1D521-B224-771D-3581-F3E43D318FD1}"/>
               </a:ext>
             </a:extLst>
           </p:cNvPr>
@@ -13659,14 +14073,14 @@
           </a:p>
         </p:txBody>
       </p:sp>
-      <mc:AlternateContent xmlns:mc="http://schemas.openxmlformats.org/markup-compatibility/2006">
-        <mc:Choice xmlns:a14="http://schemas.microsoft.com/office/drawing/2010/main" Requires="a14">
+      <mc:AlternateContent xmlns:mc="http://schemas.openxmlformats.org/markup-compatibility/2006" xmlns:a14="http://schemas.microsoft.com/office/drawing/2010/main">
+        <mc:Choice Requires="a14">
           <p:sp>
             <p:nvSpPr>
               <p:cNvPr id="6" name="CaixaDeTexto 5">
                 <a:extLst>
                   <a:ext uri="{FF2B5EF4-FFF2-40B4-BE49-F238E27FC236}">
-                    <a16:creationId xmlns:a16="http://schemas.microsoft.com/office/drawing/2014/main" id="{C4D5F6EB-1EDE-2182-F0D4-0AC792F8F92D}"/>
+                    <a16:creationId xmlns:a16="http://schemas.microsoft.com/office/drawing/2014/main" xmlns="" id="{C4D5F6EB-1EDE-2182-F0D4-0AC792F8F92D}"/>
                   </a:ext>
                 </a:extLst>
               </p:cNvPr>
@@ -13689,6 +14103,7 @@
               </a:bodyPr>
               <a:lstStyle/>
               <a:p>
+                <a:pPr/>
                 <a14:m>
                   <m:oMathPara xmlns:m="http://schemas.openxmlformats.org/officeDocument/2006/math">
                     <m:oMathParaPr>
@@ -13728,7 +14143,7 @@
             </p:txBody>
           </p:sp>
         </mc:Choice>
-        <mc:Fallback>
+        <mc:Fallback xmlns="">
           <p:sp>
             <p:nvSpPr>
               <p:cNvPr id="6" name="CaixaDeTexto 5">
@@ -13773,14 +14188,14 @@
           </p:sp>
         </mc:Fallback>
       </mc:AlternateContent>
-      <mc:AlternateContent xmlns:mc="http://schemas.openxmlformats.org/markup-compatibility/2006">
-        <mc:Choice xmlns:a14="http://schemas.microsoft.com/office/drawing/2010/main" Requires="a14">
+      <mc:AlternateContent xmlns:mc="http://schemas.openxmlformats.org/markup-compatibility/2006" xmlns:a14="http://schemas.microsoft.com/office/drawing/2010/main">
+        <mc:Choice Requires="a14">
           <p:sp>
             <p:nvSpPr>
               <p:cNvPr id="7" name="CaixaDeTexto 6">
                 <a:extLst>
                   <a:ext uri="{FF2B5EF4-FFF2-40B4-BE49-F238E27FC236}">
-                    <a16:creationId xmlns:a16="http://schemas.microsoft.com/office/drawing/2014/main" id="{545CD790-04F0-515F-1167-59E7615D90A7}"/>
+                    <a16:creationId xmlns:a16="http://schemas.microsoft.com/office/drawing/2014/main" xmlns="" id="{545CD790-04F0-515F-1167-59E7615D90A7}"/>
                   </a:ext>
                 </a:extLst>
               </p:cNvPr>
@@ -13803,6 +14218,7 @@
               </a:bodyPr>
               <a:lstStyle/>
               <a:p>
+                <a:pPr/>
                 <a14:m>
                   <m:oMathPara xmlns:m="http://schemas.openxmlformats.org/officeDocument/2006/math">
                     <m:oMathParaPr>
@@ -13842,7 +14258,7 @@
             </p:txBody>
           </p:sp>
         </mc:Choice>
-        <mc:Fallback>
+        <mc:Fallback xmlns="">
           <p:sp>
             <p:nvSpPr>
               <p:cNvPr id="7" name="CaixaDeTexto 6">
@@ -13892,7 +14308,7 @@
           <p:cNvPr id="9" name="Conector de Seta Reta 8">
             <a:extLst>
               <a:ext uri="{FF2B5EF4-FFF2-40B4-BE49-F238E27FC236}">
-                <a16:creationId xmlns:a16="http://schemas.microsoft.com/office/drawing/2014/main" id="{62713A92-C724-CE92-1ADF-A1638940BFAB}"/>
+                <a16:creationId xmlns:a16="http://schemas.microsoft.com/office/drawing/2014/main" xmlns="" id="{62713A92-C724-CE92-1ADF-A1638940BFAB}"/>
               </a:ext>
             </a:extLst>
           </p:cNvPr>
@@ -13937,7 +14353,7 @@
           <p:cNvPr id="10" name="Conector de Seta Reta 9">
             <a:extLst>
               <a:ext uri="{FF2B5EF4-FFF2-40B4-BE49-F238E27FC236}">
-                <a16:creationId xmlns:a16="http://schemas.microsoft.com/office/drawing/2014/main" id="{731B1510-EE7C-4E3B-9E3E-622FF00589E1}"/>
+                <a16:creationId xmlns:a16="http://schemas.microsoft.com/office/drawing/2014/main" xmlns="" id="{731B1510-EE7C-4E3B-9E3E-622FF00589E1}"/>
               </a:ext>
             </a:extLst>
           </p:cNvPr>
@@ -13982,7 +14398,7 @@
           <p:cNvPr id="14" name="Conector de Seta Reta 13">
             <a:extLst>
               <a:ext uri="{FF2B5EF4-FFF2-40B4-BE49-F238E27FC236}">
-                <a16:creationId xmlns:a16="http://schemas.microsoft.com/office/drawing/2014/main" id="{B9582103-8E0A-C6AD-8808-F36BE36FEAF3}"/>
+                <a16:creationId xmlns:a16="http://schemas.microsoft.com/office/drawing/2014/main" xmlns="" id="{B9582103-8E0A-C6AD-8808-F36BE36FEAF3}"/>
               </a:ext>
             </a:extLst>
           </p:cNvPr>
@@ -14022,14 +14438,14 @@
           </a:fontRef>
         </p:style>
       </p:cxnSp>
-      <mc:AlternateContent xmlns:mc="http://schemas.openxmlformats.org/markup-compatibility/2006">
-        <mc:Choice xmlns:a14="http://schemas.microsoft.com/office/drawing/2010/main" Requires="a14">
+      <mc:AlternateContent xmlns:mc="http://schemas.openxmlformats.org/markup-compatibility/2006" xmlns:a14="http://schemas.microsoft.com/office/drawing/2010/main">
+        <mc:Choice Requires="a14">
           <p:sp>
             <p:nvSpPr>
               <p:cNvPr id="22" name="CaixaDeTexto 21">
                 <a:extLst>
                   <a:ext uri="{FF2B5EF4-FFF2-40B4-BE49-F238E27FC236}">
-                    <a16:creationId xmlns:a16="http://schemas.microsoft.com/office/drawing/2014/main" id="{BDB6C656-8E3A-C1CC-E96B-7694442FF83E}"/>
+                    <a16:creationId xmlns:a16="http://schemas.microsoft.com/office/drawing/2014/main" xmlns="" id="{BDB6C656-8E3A-C1CC-E96B-7694442FF83E}"/>
                   </a:ext>
                 </a:extLst>
               </p:cNvPr>
@@ -14052,6 +14468,7 @@
               </a:bodyPr>
               <a:lstStyle/>
               <a:p>
+                <a:pPr/>
                 <a14:m>
                   <m:oMathPara xmlns:m="http://schemas.openxmlformats.org/officeDocument/2006/math">
                     <m:oMathParaPr>
@@ -14091,7 +14508,7 @@
             </p:txBody>
           </p:sp>
         </mc:Choice>
-        <mc:Fallback>
+        <mc:Fallback xmlns="">
           <p:sp>
             <p:nvSpPr>
               <p:cNvPr id="22" name="CaixaDeTexto 21">
@@ -14136,14 +14553,14 @@
           </p:sp>
         </mc:Fallback>
       </mc:AlternateContent>
-      <mc:AlternateContent xmlns:mc="http://schemas.openxmlformats.org/markup-compatibility/2006">
-        <mc:Choice xmlns:a14="http://schemas.microsoft.com/office/drawing/2010/main" Requires="a14">
+      <mc:AlternateContent xmlns:mc="http://schemas.openxmlformats.org/markup-compatibility/2006" xmlns:a14="http://schemas.microsoft.com/office/drawing/2010/main">
+        <mc:Choice Requires="a14">
           <p:sp>
             <p:nvSpPr>
               <p:cNvPr id="23" name="CaixaDeTexto 22">
                 <a:extLst>
                   <a:ext uri="{FF2B5EF4-FFF2-40B4-BE49-F238E27FC236}">
-                    <a16:creationId xmlns:a16="http://schemas.microsoft.com/office/drawing/2014/main" id="{DA52AC4A-53E2-EA09-A858-8517D44303EF}"/>
+                    <a16:creationId xmlns:a16="http://schemas.microsoft.com/office/drawing/2014/main" xmlns="" id="{DA52AC4A-53E2-EA09-A858-8517D44303EF}"/>
                   </a:ext>
                 </a:extLst>
               </p:cNvPr>
@@ -14166,6 +14583,7 @@
               </a:bodyPr>
               <a:lstStyle/>
               <a:p>
+                <a:pPr/>
                 <a14:m>
                   <m:oMathPara xmlns:m="http://schemas.openxmlformats.org/officeDocument/2006/math">
                     <m:oMathParaPr>
@@ -14205,7 +14623,7 @@
             </p:txBody>
           </p:sp>
         </mc:Choice>
-        <mc:Fallback>
+        <mc:Fallback xmlns="">
           <p:sp>
             <p:nvSpPr>
               <p:cNvPr id="23" name="CaixaDeTexto 22">
@@ -14250,14 +14668,14 @@
           </p:sp>
         </mc:Fallback>
       </mc:AlternateContent>
-      <mc:AlternateContent xmlns:mc="http://schemas.openxmlformats.org/markup-compatibility/2006">
-        <mc:Choice xmlns:a14="http://schemas.microsoft.com/office/drawing/2010/main" Requires="a14">
+      <mc:AlternateContent xmlns:mc="http://schemas.openxmlformats.org/markup-compatibility/2006" xmlns:a14="http://schemas.microsoft.com/office/drawing/2010/main">
+        <mc:Choice Requires="a14">
           <p:sp>
             <p:nvSpPr>
               <p:cNvPr id="24" name="CaixaDeTexto 23">
                 <a:extLst>
                   <a:ext uri="{FF2B5EF4-FFF2-40B4-BE49-F238E27FC236}">
-                    <a16:creationId xmlns:a16="http://schemas.microsoft.com/office/drawing/2014/main" id="{6D87A4D6-505A-8442-E1E7-131D3FDE4794}"/>
+                    <a16:creationId xmlns:a16="http://schemas.microsoft.com/office/drawing/2014/main" xmlns="" id="{6D87A4D6-505A-8442-E1E7-131D3FDE4794}"/>
                   </a:ext>
                 </a:extLst>
               </p:cNvPr>
@@ -14280,6 +14698,7 @@
               </a:bodyPr>
               <a:lstStyle/>
               <a:p>
+                <a:pPr/>
                 <a14:m>
                   <m:oMathPara xmlns:m="http://schemas.openxmlformats.org/officeDocument/2006/math">
                     <m:oMathParaPr>
@@ -14319,7 +14738,7 @@
             </p:txBody>
           </p:sp>
         </mc:Choice>
-        <mc:Fallback>
+        <mc:Fallback xmlns="">
           <p:sp>
             <p:nvSpPr>
               <p:cNvPr id="24" name="CaixaDeTexto 23">
@@ -14368,406 +14787,6 @@
     <p:extLst>
       <p:ext uri="{BB962C8B-B14F-4D97-AF65-F5344CB8AC3E}">
         <p14:creationId xmlns:p14="http://schemas.microsoft.com/office/powerpoint/2010/main" val="1806372664"/>
-      </p:ext>
-    </p:extLst>
-  </p:cSld>
-  <p:clrMapOvr>
-    <a:masterClrMapping/>
-  </p:clrMapOvr>
-</p:sld>
-</file>
-
-<file path=ppt/slides/slide23.xml><?xml version="1.0" encoding="utf-8"?>
-<p:sld xmlns:a="http://schemas.openxmlformats.org/drawingml/2006/main" xmlns:r="http://schemas.openxmlformats.org/officeDocument/2006/relationships" xmlns:p="http://schemas.openxmlformats.org/presentationml/2006/main">
-  <p:cSld>
-    <p:spTree>
-      <p:nvGrpSpPr>
-        <p:cNvPr id="1" name=""/>
-        <p:cNvGrpSpPr/>
-        <p:nvPr/>
-      </p:nvGrpSpPr>
-      <p:grpSpPr>
-        <a:xfrm>
-          <a:off x="0" y="0"/>
-          <a:ext cx="0" cy="0"/>
-          <a:chOff x="0" y="0"/>
-          <a:chExt cx="0" cy="0"/>
-        </a:xfrm>
-      </p:grpSpPr>
-      <p:sp>
-        <p:nvSpPr>
-          <p:cNvPr id="2" name="Título 1"/>
-          <p:cNvSpPr>
-            <a:spLocks noGrp="1"/>
-          </p:cNvSpPr>
-          <p:nvPr>
-            <p:ph type="title"/>
-          </p:nvPr>
-        </p:nvSpPr>
-        <p:spPr/>
-        <p:txBody>
-          <a:bodyPr/>
-          <a:lstStyle/>
-          <a:p>
-            <a:r>
-              <a:rPr lang="pt-BR" dirty="0"/>
-              <a:t>Funcionamento do </a:t>
-            </a:r>
-            <a:r>
-              <a:rPr lang="pt-BR" i="1" dirty="0"/>
-              <a:t>k-</a:t>
-            </a:r>
-            <a:r>
-              <a:rPr lang="pt-BR" i="1" dirty="0" err="1"/>
-              <a:t>Means</a:t>
-            </a:r>
-            <a:endParaRPr lang="pt-BR" dirty="0"/>
-          </a:p>
-        </p:txBody>
-      </p:sp>
-      <p:pic>
-        <p:nvPicPr>
-          <p:cNvPr id="3" name="Picture 5">
-            <a:extLst>
-              <a:ext uri="{FF2B5EF4-FFF2-40B4-BE49-F238E27FC236}">
-                <a16:creationId xmlns:a16="http://schemas.microsoft.com/office/drawing/2014/main" id="{1C0684BB-EFF7-DBA8-3519-25CE2A1A9632}"/>
-              </a:ext>
-            </a:extLst>
-          </p:cNvPr>
-          <p:cNvPicPr>
-            <a:picLocks noChangeAspect="1"/>
-          </p:cNvPicPr>
-          <p:nvPr/>
-        </p:nvPicPr>
-        <p:blipFill>
-          <a:blip r:embed="rId2"/>
-          <a:stretch>
-            <a:fillRect/>
-          </a:stretch>
-        </p:blipFill>
-        <p:spPr>
-          <a:xfrm>
-            <a:off x="2961837" y="1885256"/>
-            <a:ext cx="6268325" cy="4972744"/>
-          </a:xfrm>
-          <a:prstGeom prst="rect">
-            <a:avLst/>
-          </a:prstGeom>
-        </p:spPr>
-      </p:pic>
-      <p:sp>
-        <p:nvSpPr>
-          <p:cNvPr id="4" name="TextBox 8">
-            <a:extLst>
-              <a:ext uri="{FF2B5EF4-FFF2-40B4-BE49-F238E27FC236}">
-                <a16:creationId xmlns:a16="http://schemas.microsoft.com/office/drawing/2014/main" id="{38267D7C-379A-003E-4048-8D4DDD969EB6}"/>
-              </a:ext>
-            </a:extLst>
-          </p:cNvPr>
-          <p:cNvSpPr txBox="1"/>
-          <p:nvPr/>
-        </p:nvSpPr>
-        <p:spPr>
-          <a:xfrm>
-            <a:off x="101600" y="2865735"/>
-            <a:ext cx="2652110" cy="1477328"/>
-          </a:xfrm>
-          <a:prstGeom prst="rect">
-            <a:avLst/>
-          </a:prstGeom>
-          <a:noFill/>
-        </p:spPr>
-        <p:txBody>
-          <a:bodyPr wrap="square">
-            <a:spAutoFit/>
-          </a:bodyPr>
-          <a:lstStyle/>
-          <a:p>
-            <a:r>
-              <a:rPr lang="pt-BR" dirty="0"/>
-              <a:t>4</a:t>
-            </a:r>
-            <a:r>
-              <a:rPr lang="pt-BR" b="0" i="0" dirty="0">
-                <a:effectLst/>
-              </a:rPr>
-              <a:t>. Atribui-se cada amostra ao centroide mais próximo com base na distância euclidiana.</a:t>
-            </a:r>
-            <a:br>
-              <a:rPr lang="pt-BR" dirty="0"/>
-            </a:br>
-            <a:endParaRPr lang="en-US" dirty="0"/>
-          </a:p>
-        </p:txBody>
-      </p:sp>
-      <mc:AlternateContent xmlns:mc="http://schemas.openxmlformats.org/markup-compatibility/2006">
-        <mc:Choice xmlns:a14="http://schemas.microsoft.com/office/drawing/2010/main" Requires="a14">
-          <p:sp>
-            <p:nvSpPr>
-              <p:cNvPr id="5" name="CaixaDeTexto 4">
-                <a:extLst>
-                  <a:ext uri="{FF2B5EF4-FFF2-40B4-BE49-F238E27FC236}">
-                    <a16:creationId xmlns:a16="http://schemas.microsoft.com/office/drawing/2014/main" id="{78E95116-5D09-D006-AF8C-01BA9B4576F4}"/>
-                  </a:ext>
-                </a:extLst>
-              </p:cNvPr>
-              <p:cNvSpPr txBox="1"/>
-              <p:nvPr/>
-            </p:nvSpPr>
-            <p:spPr>
-              <a:xfrm>
-                <a:off x="9122533" y="6308209"/>
-                <a:ext cx="460767" cy="369332"/>
-              </a:xfrm>
-              <a:prstGeom prst="rect">
-                <a:avLst/>
-              </a:prstGeom>
-              <a:noFill/>
-            </p:spPr>
-            <p:txBody>
-              <a:bodyPr wrap="none" rtlCol="0">
-                <a:spAutoFit/>
-              </a:bodyPr>
-              <a:lstStyle/>
-              <a:p>
-                <a14:m>
-                  <m:oMathPara xmlns:m="http://schemas.openxmlformats.org/officeDocument/2006/math">
-                    <m:oMathParaPr>
-                      <m:jc m:val="centerGroup"/>
-                    </m:oMathParaPr>
-                    <m:oMath xmlns:m="http://schemas.openxmlformats.org/officeDocument/2006/math">
-                      <m:sSub>
-                        <m:sSubPr>
-                          <m:ctrlPr>
-                            <a:rPr lang="en-US" i="1" smtClean="0">
-                              <a:latin typeface="Cambria Math" panose="02040503050406030204" pitchFamily="18" charset="0"/>
-                            </a:rPr>
-                          </m:ctrlPr>
-                        </m:sSubPr>
-                        <m:e>
-                          <m:r>
-                            <a:rPr lang="pt-BR" b="0" i="1" smtClean="0">
-                              <a:latin typeface="Cambria Math" panose="02040503050406030204" pitchFamily="18" charset="0"/>
-                            </a:rPr>
-                            <m:t>𝑥</m:t>
-                          </m:r>
-                        </m:e>
-                        <m:sub>
-                          <m:r>
-                            <a:rPr lang="pt-BR" b="0" i="1" smtClean="0">
-                              <a:latin typeface="Cambria Math" panose="02040503050406030204" pitchFamily="18" charset="0"/>
-                            </a:rPr>
-                            <m:t>1</m:t>
-                          </m:r>
-                        </m:sub>
-                      </m:sSub>
-                    </m:oMath>
-                  </m:oMathPara>
-                </a14:m>
-                <a:endParaRPr lang="en-US" dirty="0"/>
-              </a:p>
-            </p:txBody>
-          </p:sp>
-        </mc:Choice>
-        <mc:Fallback>
-          <p:sp>
-            <p:nvSpPr>
-              <p:cNvPr id="5" name="CaixaDeTexto 4">
-                <a:extLst>
-                  <a:ext uri="{FF2B5EF4-FFF2-40B4-BE49-F238E27FC236}">
-                    <a16:creationId xmlns:a16="http://schemas.microsoft.com/office/drawing/2014/main" id="{78E95116-5D09-D006-AF8C-01BA9B4576F4}"/>
-                  </a:ext>
-                </a:extLst>
-              </p:cNvPr>
-              <p:cNvSpPr txBox="1">
-                <a:spLocks noRot="1" noChangeAspect="1" noMove="1" noResize="1" noEditPoints="1" noAdjustHandles="1" noChangeArrowheads="1" noChangeShapeType="1" noTextEdit="1"/>
-              </p:cNvSpPr>
-              <p:nvPr/>
-            </p:nvSpPr>
-            <p:spPr>
-              <a:xfrm>
-                <a:off x="9122533" y="6308209"/>
-                <a:ext cx="460767" cy="369332"/>
-              </a:xfrm>
-              <a:prstGeom prst="rect">
-                <a:avLst/>
-              </a:prstGeom>
-              <a:blipFill>
-                <a:blip r:embed="rId3"/>
-                <a:stretch>
-                  <a:fillRect/>
-                </a:stretch>
-              </a:blipFill>
-            </p:spPr>
-            <p:txBody>
-              <a:bodyPr/>
-              <a:lstStyle/>
-              <a:p>
-                <a:r>
-                  <a:rPr lang="en-US">
-                    <a:noFill/>
-                  </a:rPr>
-                  <a:t> </a:t>
-                </a:r>
-              </a:p>
-            </p:txBody>
-          </p:sp>
-        </mc:Fallback>
-      </mc:AlternateContent>
-      <mc:AlternateContent xmlns:mc="http://schemas.openxmlformats.org/markup-compatibility/2006">
-        <mc:Choice xmlns:a14="http://schemas.microsoft.com/office/drawing/2010/main" Requires="a14">
-          <p:sp>
-            <p:nvSpPr>
-              <p:cNvPr id="6" name="CaixaDeTexto 5">
-                <a:extLst>
-                  <a:ext uri="{FF2B5EF4-FFF2-40B4-BE49-F238E27FC236}">
-                    <a16:creationId xmlns:a16="http://schemas.microsoft.com/office/drawing/2014/main" id="{90A00675-B65E-F1F4-C6FE-54445E99E783}"/>
-                  </a:ext>
-                </a:extLst>
-              </p:cNvPr>
-              <p:cNvSpPr txBox="1"/>
-              <p:nvPr/>
-            </p:nvSpPr>
-            <p:spPr>
-              <a:xfrm>
-                <a:off x="2948182" y="1528939"/>
-                <a:ext cx="466090" cy="369332"/>
-              </a:xfrm>
-              <a:prstGeom prst="rect">
-                <a:avLst/>
-              </a:prstGeom>
-              <a:noFill/>
-            </p:spPr>
-            <p:txBody>
-              <a:bodyPr wrap="none" rtlCol="0">
-                <a:spAutoFit/>
-              </a:bodyPr>
-              <a:lstStyle/>
-              <a:p>
-                <a14:m>
-                  <m:oMathPara xmlns:m="http://schemas.openxmlformats.org/officeDocument/2006/math">
-                    <m:oMathParaPr>
-                      <m:jc m:val="centerGroup"/>
-                    </m:oMathParaPr>
-                    <m:oMath xmlns:m="http://schemas.openxmlformats.org/officeDocument/2006/math">
-                      <m:sSub>
-                        <m:sSubPr>
-                          <m:ctrlPr>
-                            <a:rPr lang="en-US" i="1" smtClean="0">
-                              <a:latin typeface="Cambria Math" panose="02040503050406030204" pitchFamily="18" charset="0"/>
-                            </a:rPr>
-                          </m:ctrlPr>
-                        </m:sSubPr>
-                        <m:e>
-                          <m:r>
-                            <a:rPr lang="pt-BR" b="0" i="1" smtClean="0">
-                              <a:latin typeface="Cambria Math" panose="02040503050406030204" pitchFamily="18" charset="0"/>
-                            </a:rPr>
-                            <m:t>𝑥</m:t>
-                          </m:r>
-                        </m:e>
-                        <m:sub>
-                          <m:r>
-                            <a:rPr lang="pt-BR" b="0" i="1" smtClean="0">
-                              <a:latin typeface="Cambria Math" panose="02040503050406030204" pitchFamily="18" charset="0"/>
-                            </a:rPr>
-                            <m:t>2</m:t>
-                          </m:r>
-                        </m:sub>
-                      </m:sSub>
-                    </m:oMath>
-                  </m:oMathPara>
-                </a14:m>
-                <a:endParaRPr lang="en-US" dirty="0"/>
-              </a:p>
-            </p:txBody>
-          </p:sp>
-        </mc:Choice>
-        <mc:Fallback>
-          <p:sp>
-            <p:nvSpPr>
-              <p:cNvPr id="6" name="CaixaDeTexto 5">
-                <a:extLst>
-                  <a:ext uri="{FF2B5EF4-FFF2-40B4-BE49-F238E27FC236}">
-                    <a16:creationId xmlns:a16="http://schemas.microsoft.com/office/drawing/2014/main" id="{90A00675-B65E-F1F4-C6FE-54445E99E783}"/>
-                  </a:ext>
-                </a:extLst>
-              </p:cNvPr>
-              <p:cNvSpPr txBox="1">
-                <a:spLocks noRot="1" noChangeAspect="1" noMove="1" noResize="1" noEditPoints="1" noAdjustHandles="1" noChangeArrowheads="1" noChangeShapeType="1" noTextEdit="1"/>
-              </p:cNvSpPr>
-              <p:nvPr/>
-            </p:nvSpPr>
-            <p:spPr>
-              <a:xfrm>
-                <a:off x="2948182" y="1528939"/>
-                <a:ext cx="466090" cy="369332"/>
-              </a:xfrm>
-              <a:prstGeom prst="rect">
-                <a:avLst/>
-              </a:prstGeom>
-              <a:blipFill>
-                <a:blip r:embed="rId4"/>
-                <a:stretch>
-                  <a:fillRect/>
-                </a:stretch>
-              </a:blipFill>
-            </p:spPr>
-            <p:txBody>
-              <a:bodyPr/>
-              <a:lstStyle/>
-              <a:p>
-                <a:r>
-                  <a:rPr lang="en-US">
-                    <a:noFill/>
-                  </a:rPr>
-                  <a:t> </a:t>
-                </a:r>
-              </a:p>
-            </p:txBody>
-          </p:sp>
-        </mc:Fallback>
-      </mc:AlternateContent>
-      <p:sp>
-        <p:nvSpPr>
-          <p:cNvPr id="8" name="CaixaDeTexto 7">
-            <a:extLst>
-              <a:ext uri="{FF2B5EF4-FFF2-40B4-BE49-F238E27FC236}">
-                <a16:creationId xmlns:a16="http://schemas.microsoft.com/office/drawing/2014/main" id="{E5B4902D-D874-6983-8D28-B7D7A1CDE08B}"/>
-              </a:ext>
-            </a:extLst>
-          </p:cNvPr>
-          <p:cNvSpPr txBox="1"/>
-          <p:nvPr/>
-        </p:nvSpPr>
-        <p:spPr>
-          <a:xfrm>
-            <a:off x="666750" y="4715808"/>
-            <a:ext cx="1866900" cy="923330"/>
-          </a:xfrm>
-          <a:prstGeom prst="rect">
-            <a:avLst/>
-          </a:prstGeom>
-          <a:noFill/>
-        </p:spPr>
-        <p:txBody>
-          <a:bodyPr wrap="square">
-            <a:spAutoFit/>
-          </a:bodyPr>
-          <a:lstStyle/>
-          <a:p>
-            <a:pPr algn="ctr"/>
-            <a:r>
-              <a:rPr lang="pt-BR" dirty="0"/>
-              <a:t>Cada centroide define uma região.</a:t>
-            </a:r>
-          </a:p>
-        </p:txBody>
-      </p:sp>
-    </p:spTree>
-    <p:extLst>
-      <p:ext uri="{BB962C8B-B14F-4D97-AF65-F5344CB8AC3E}">
-        <p14:creationId xmlns:p14="http://schemas.microsoft.com/office/powerpoint/2010/main" val="3168554397"/>
       </p:ext>
     </p:extLst>
   </p:cSld>
@@ -14827,10 +14846,10 @@
       </p:sp>
       <p:pic>
         <p:nvPicPr>
-          <p:cNvPr id="3" name="Picture 7">
+          <p:cNvPr id="3" name="Picture 5">
             <a:extLst>
               <a:ext uri="{FF2B5EF4-FFF2-40B4-BE49-F238E27FC236}">
-                <a16:creationId xmlns:a16="http://schemas.microsoft.com/office/drawing/2014/main" id="{4A874BBD-11DB-833A-341F-F134DDD11108}"/>
+                <a16:creationId xmlns:a16="http://schemas.microsoft.com/office/drawing/2014/main" xmlns="" id="{1C0684BB-EFF7-DBA8-3519-25CE2A1A9632}"/>
               </a:ext>
             </a:extLst>
           </p:cNvPr>
@@ -14847,8 +14866,8 @@
         </p:blipFill>
         <p:spPr>
           <a:xfrm>
-            <a:off x="2957074" y="1913835"/>
-            <a:ext cx="6277851" cy="4944165"/>
+            <a:off x="2961837" y="1885256"/>
+            <a:ext cx="6268325" cy="4972744"/>
           </a:xfrm>
           <a:prstGeom prst="rect">
             <a:avLst/>
@@ -14857,10 +14876,10 @@
       </p:pic>
       <p:sp>
         <p:nvSpPr>
-          <p:cNvPr id="4" name="TextBox 9">
+          <p:cNvPr id="4" name="TextBox 8">
             <a:extLst>
               <a:ext uri="{FF2B5EF4-FFF2-40B4-BE49-F238E27FC236}">
-                <a16:creationId xmlns:a16="http://schemas.microsoft.com/office/drawing/2014/main" id="{FB63ADD3-D956-76C5-F130-F38465877D67}"/>
+                <a16:creationId xmlns:a16="http://schemas.microsoft.com/office/drawing/2014/main" xmlns="" id="{38267D7C-379A-003E-4048-8D4DDD969EB6}"/>
               </a:ext>
             </a:extLst>
           </p:cNvPr>
@@ -14869,8 +14888,8 @@
         </p:nvSpPr>
         <p:spPr>
           <a:xfrm>
-            <a:off x="101600" y="2577501"/>
-            <a:ext cx="2998952" cy="923330"/>
+            <a:off x="101600" y="2865735"/>
+            <a:ext cx="2652110" cy="1477328"/>
           </a:xfrm>
           <a:prstGeom prst="rect">
             <a:avLst/>
@@ -14884,34 +14903,34 @@
           <a:lstStyle/>
           <a:p>
             <a:r>
-              <a:rPr lang="pt-BR" dirty="0">
-                <a:solidFill>
-                  <a:srgbClr val="404040"/>
-                </a:solidFill>
-              </a:rPr>
-              <a:t>5</a:t>
+              <a:rPr lang="pt-BR" dirty="0"/>
+              <a:t>4</a:t>
             </a:r>
             <a:r>
               <a:rPr lang="pt-BR" b="0" i="0" dirty="0">
-                <a:solidFill>
-                  <a:srgbClr val="404040"/>
-                </a:solidFill>
                 <a:effectLst/>
               </a:rPr>
-              <a:t>. Calcula-se o novo centroide de cada cluster usando-se a média das amostras.</a:t>
-            </a:r>
+              <a:t>. Atribui-se cada amostra ao centroide mais próximo com base na distância euclidiana.</a:t>
+            </a:r>
+            <a:r>
+              <a:rPr lang="pt-BR" dirty="0"/>
+              <a:t/>
+            </a:r>
+            <a:br>
+              <a:rPr lang="pt-BR" dirty="0"/>
+            </a:br>
             <a:endParaRPr lang="en-US" dirty="0"/>
           </a:p>
         </p:txBody>
       </p:sp>
-      <mc:AlternateContent xmlns:mc="http://schemas.openxmlformats.org/markup-compatibility/2006">
-        <mc:Choice xmlns:a14="http://schemas.microsoft.com/office/drawing/2010/main" Requires="a14">
+      <mc:AlternateContent xmlns:mc="http://schemas.openxmlformats.org/markup-compatibility/2006" xmlns:a14="http://schemas.microsoft.com/office/drawing/2010/main">
+        <mc:Choice Requires="a14">
           <p:sp>
             <p:nvSpPr>
               <p:cNvPr id="5" name="CaixaDeTexto 4">
                 <a:extLst>
                   <a:ext uri="{FF2B5EF4-FFF2-40B4-BE49-F238E27FC236}">
-                    <a16:creationId xmlns:a16="http://schemas.microsoft.com/office/drawing/2014/main" id="{0C6ACB57-D239-9466-9CB2-D2D5D29640A8}"/>
+                    <a16:creationId xmlns:a16="http://schemas.microsoft.com/office/drawing/2014/main" xmlns="" id="{78E95116-5D09-D006-AF8C-01BA9B4576F4}"/>
                   </a:ext>
                 </a:extLst>
               </p:cNvPr>
@@ -14934,6 +14953,7 @@
               </a:bodyPr>
               <a:lstStyle/>
               <a:p>
+                <a:pPr/>
                 <a14:m>
                   <m:oMathPara xmlns:m="http://schemas.openxmlformats.org/officeDocument/2006/math">
                     <m:oMathParaPr>
@@ -14973,13 +14993,13 @@
             </p:txBody>
           </p:sp>
         </mc:Choice>
-        <mc:Fallback>
+        <mc:Fallback xmlns="">
           <p:sp>
             <p:nvSpPr>
               <p:cNvPr id="5" name="CaixaDeTexto 4">
                 <a:extLst>
                   <a:ext uri="{FF2B5EF4-FFF2-40B4-BE49-F238E27FC236}">
-                    <a16:creationId xmlns:a16="http://schemas.microsoft.com/office/drawing/2014/main" id="{0C6ACB57-D239-9466-9CB2-D2D5D29640A8}"/>
+                    <a16:creationId xmlns:a16="http://schemas.microsoft.com/office/drawing/2014/main" id="{78E95116-5D09-D006-AF8C-01BA9B4576F4}"/>
                   </a:ext>
                 </a:extLst>
               </p:cNvPr>
@@ -15018,14 +15038,14 @@
           </p:sp>
         </mc:Fallback>
       </mc:AlternateContent>
-      <mc:AlternateContent xmlns:mc="http://schemas.openxmlformats.org/markup-compatibility/2006">
-        <mc:Choice xmlns:a14="http://schemas.microsoft.com/office/drawing/2010/main" Requires="a14">
+      <mc:AlternateContent xmlns:mc="http://schemas.openxmlformats.org/markup-compatibility/2006" xmlns:a14="http://schemas.microsoft.com/office/drawing/2010/main">
+        <mc:Choice Requires="a14">
           <p:sp>
             <p:nvSpPr>
               <p:cNvPr id="6" name="CaixaDeTexto 5">
                 <a:extLst>
                   <a:ext uri="{FF2B5EF4-FFF2-40B4-BE49-F238E27FC236}">
-                    <a16:creationId xmlns:a16="http://schemas.microsoft.com/office/drawing/2014/main" id="{52AAA0DA-6F63-3A71-192E-C21A1F7F8984}"/>
+                    <a16:creationId xmlns:a16="http://schemas.microsoft.com/office/drawing/2014/main" xmlns="" id="{90A00675-B65E-F1F4-C6FE-54445E99E783}"/>
                   </a:ext>
                 </a:extLst>
               </p:cNvPr>
@@ -15048,6 +15068,7 @@
               </a:bodyPr>
               <a:lstStyle/>
               <a:p>
+                <a:pPr/>
                 <a14:m>
                   <m:oMathPara xmlns:m="http://schemas.openxmlformats.org/officeDocument/2006/math">
                     <m:oMathParaPr>
@@ -15087,13 +15108,13 @@
             </p:txBody>
           </p:sp>
         </mc:Choice>
-        <mc:Fallback>
+        <mc:Fallback xmlns="">
           <p:sp>
             <p:nvSpPr>
               <p:cNvPr id="6" name="CaixaDeTexto 5">
                 <a:extLst>
                   <a:ext uri="{FF2B5EF4-FFF2-40B4-BE49-F238E27FC236}">
-                    <a16:creationId xmlns:a16="http://schemas.microsoft.com/office/drawing/2014/main" id="{52AAA0DA-6F63-3A71-192E-C21A1F7F8984}"/>
+                    <a16:creationId xmlns:a16="http://schemas.microsoft.com/office/drawing/2014/main" id="{90A00675-B65E-F1F4-C6FE-54445E99E783}"/>
                   </a:ext>
                 </a:extLst>
               </p:cNvPr>
@@ -15134,10 +15155,10 @@
       </mc:AlternateContent>
       <p:sp>
         <p:nvSpPr>
-          <p:cNvPr id="7" name="CaixaDeTexto 6">
+          <p:cNvPr id="8" name="CaixaDeTexto 7">
             <a:extLst>
               <a:ext uri="{FF2B5EF4-FFF2-40B4-BE49-F238E27FC236}">
-                <a16:creationId xmlns:a16="http://schemas.microsoft.com/office/drawing/2014/main" id="{132849C2-FE58-8CDA-FEE0-77AC4DCF0F05}"/>
+                <a16:creationId xmlns:a16="http://schemas.microsoft.com/office/drawing/2014/main" xmlns="" id="{E5B4902D-D874-6983-8D28-B7D7A1CDE08B}"/>
               </a:ext>
             </a:extLst>
           </p:cNvPr>
@@ -15146,8 +15167,8 @@
         </p:nvSpPr>
         <p:spPr>
           <a:xfrm>
-            <a:off x="162720" y="4180061"/>
-            <a:ext cx="2361406" cy="923330"/>
+            <a:off x="666750" y="4715808"/>
+            <a:ext cx="1866900" cy="923330"/>
           </a:xfrm>
           <a:prstGeom prst="rect">
             <a:avLst/>
@@ -15155,7 +15176,7 @@
           <a:noFill/>
         </p:spPr>
         <p:txBody>
-          <a:bodyPr wrap="square" rtlCol="0">
+          <a:bodyPr wrap="square">
             <a:spAutoFit/>
           </a:bodyPr>
           <a:lstStyle/>
@@ -15163,36 +15184,15 @@
             <a:pPr algn="ctr"/>
             <a:r>
               <a:rPr lang="pt-BR" dirty="0"/>
-              <a:t>Os centroides são os </a:t>
-            </a:r>
-            <a:r>
-              <a:rPr lang="pt-BR" b="1" dirty="0">
-                <a:solidFill>
-                  <a:schemeClr val="accent2"/>
-                </a:solidFill>
-              </a:rPr>
-              <a:t>centros geométricos</a:t>
-            </a:r>
-            <a:r>
-              <a:rPr lang="pt-BR" dirty="0"/>
-              <a:t> de cada </a:t>
-            </a:r>
-            <a:r>
-              <a:rPr lang="pt-BR" i="1" dirty="0"/>
-              <a:t>cluster</a:t>
-            </a:r>
-            <a:r>
-              <a:rPr lang="pt-BR" dirty="0"/>
-              <a:t>.</a:t>
-            </a:r>
-            <a:endParaRPr lang="en-US" dirty="0"/>
+              <a:t>Cada centroide define uma região.</a:t>
+            </a:r>
           </a:p>
         </p:txBody>
       </p:sp>
     </p:spTree>
     <p:extLst>
       <p:ext uri="{BB962C8B-B14F-4D97-AF65-F5344CB8AC3E}">
-        <p14:creationId xmlns:p14="http://schemas.microsoft.com/office/powerpoint/2010/main" val="1154901412"/>
+        <p14:creationId xmlns:p14="http://schemas.microsoft.com/office/powerpoint/2010/main" val="3168554397"/>
       </p:ext>
     </p:extLst>
   </p:cSld>
@@ -15252,10 +15252,10 @@
       </p:sp>
       <p:pic>
         <p:nvPicPr>
-          <p:cNvPr id="3" name="Picture 5">
+          <p:cNvPr id="3" name="Picture 7">
             <a:extLst>
               <a:ext uri="{FF2B5EF4-FFF2-40B4-BE49-F238E27FC236}">
-                <a16:creationId xmlns:a16="http://schemas.microsoft.com/office/drawing/2014/main" id="{BE9E2474-44BE-43D0-EE2F-D03349050DA2}"/>
+                <a16:creationId xmlns:a16="http://schemas.microsoft.com/office/drawing/2014/main" xmlns="" id="{4A874BBD-11DB-833A-341F-F134DDD11108}"/>
               </a:ext>
             </a:extLst>
           </p:cNvPr>
@@ -15272,8 +15272,8 @@
         </p:blipFill>
         <p:spPr>
           <a:xfrm>
-            <a:off x="2836422" y="1913835"/>
-            <a:ext cx="6315956" cy="4944165"/>
+            <a:off x="2957074" y="1913835"/>
+            <a:ext cx="6277851" cy="4944165"/>
           </a:xfrm>
           <a:prstGeom prst="rect">
             <a:avLst/>
@@ -15285,7 +15285,7 @@
           <p:cNvPr id="4" name="TextBox 9">
             <a:extLst>
               <a:ext uri="{FF2B5EF4-FFF2-40B4-BE49-F238E27FC236}">
-                <a16:creationId xmlns:a16="http://schemas.microsoft.com/office/drawing/2014/main" id="{E7FEC406-7A7E-5D78-DF69-D2416A2375C3}"/>
+                <a16:creationId xmlns:a16="http://schemas.microsoft.com/office/drawing/2014/main" xmlns="" id="{FB63ADD3-D956-76C5-F130-F38465877D67}"/>
               </a:ext>
             </a:extLst>
           </p:cNvPr>
@@ -15294,8 +15294,8 @@
         </p:nvSpPr>
         <p:spPr>
           <a:xfrm>
-            <a:off x="304800" y="2629284"/>
-            <a:ext cx="2531622" cy="646331"/>
+            <a:off x="101600" y="2577501"/>
+            <a:ext cx="2998952" cy="1200329"/>
           </a:xfrm>
           <a:prstGeom prst="rect">
             <a:avLst/>
@@ -15309,26 +15309,61 @@
           <a:lstStyle/>
           <a:p>
             <a:r>
+              <a:rPr lang="pt-BR" dirty="0">
+                <a:solidFill>
+                  <a:srgbClr val="404040"/>
+                </a:solidFill>
+              </a:rPr>
+              <a:t>5</a:t>
+            </a:r>
+            <a:r>
               <a:rPr lang="pt-BR" b="0" i="0" dirty="0">
                 <a:solidFill>
                   <a:srgbClr val="404040"/>
                 </a:solidFill>
                 <a:effectLst/>
               </a:rPr>
-              <a:t>6. Repete-se os passos 3, 4 e 5.</a:t>
+              <a:t>. Calcula-se o novo centroide de cada </a:t>
+            </a:r>
+            <a:r>
+              <a:rPr lang="pt-BR" b="0" i="1" dirty="0">
+                <a:solidFill>
+                  <a:srgbClr val="404040"/>
+                </a:solidFill>
+                <a:effectLst/>
+              </a:rPr>
+              <a:t>cluster</a:t>
+            </a:r>
+            <a:r>
+              <a:rPr lang="pt-BR" b="0" i="0" dirty="0">
+                <a:solidFill>
+                  <a:srgbClr val="404040"/>
+                </a:solidFill>
+                <a:effectLst/>
+              </a:rPr>
+              <a:t> usando-se a média das </a:t>
+            </a:r>
+            <a:r>
+              <a:rPr lang="pt-BR" b="0" i="0" dirty="0" smtClean="0">
+                <a:solidFill>
+                  <a:srgbClr val="404040"/>
+                </a:solidFill>
+                <a:effectLst/>
+              </a:rPr>
+              <a:t>amostras que pertencem a ele.</a:t>
             </a:r>
             <a:endParaRPr lang="en-US" dirty="0"/>
           </a:p>
         </p:txBody>
       </p:sp>
-      <mc:AlternateContent xmlns:mc="http://schemas.openxmlformats.org/markup-compatibility/2006">
-        <mc:Choice xmlns:a14="http://schemas.microsoft.com/office/drawing/2010/main" Requires="a14">
+      <mc:AlternateContent xmlns:mc="http://schemas.openxmlformats.org/markup-compatibility/2006" xmlns:a14="http://schemas.microsoft.com/office/drawing/2010/main">
+        <mc:Choice Requires="a14">
           <p:sp>
             <p:nvSpPr>
               <p:cNvPr id="5" name="CaixaDeTexto 4">
                 <a:extLst>
                   <a:ext uri="{FF2B5EF4-FFF2-40B4-BE49-F238E27FC236}">
-                    <a16:creationId xmlns:a16="http://schemas.microsoft.com/office/drawing/2014/main" id="{60096C69-8085-B3E2-C37E-D817E99EDB92}"/>
+                    <a16:creationId xmlns:a16="http://schemas.microsoft.com/office/drawing/2014/main" xmlns="" id="{0C6ACB57-D239-9466-9CB2-D2D5D29640A8}"/>
                   </a:ext>
                 </a:extLst>
               </p:cNvPr>
@@ -15351,6 +15386,7 @@
               </a:bodyPr>
               <a:lstStyle/>
               <a:p>
+                <a:pPr/>
                 <a14:m>
                   <m:oMathPara xmlns:m="http://schemas.openxmlformats.org/officeDocument/2006/math">
                     <m:oMathParaPr>
@@ -15390,13 +15426,13 @@
             </p:txBody>
           </p:sp>
         </mc:Choice>
-        <mc:Fallback>
+        <mc:Fallback xmlns="">
           <p:sp>
             <p:nvSpPr>
               <p:cNvPr id="5" name="CaixaDeTexto 4">
                 <a:extLst>
                   <a:ext uri="{FF2B5EF4-FFF2-40B4-BE49-F238E27FC236}">
-                    <a16:creationId xmlns:a16="http://schemas.microsoft.com/office/drawing/2014/main" id="{60096C69-8085-B3E2-C37E-D817E99EDB92}"/>
+                    <a16:creationId xmlns:a16="http://schemas.microsoft.com/office/drawing/2014/main" id="{0C6ACB57-D239-9466-9CB2-D2D5D29640A8}"/>
                   </a:ext>
                 </a:extLst>
               </p:cNvPr>
@@ -15435,14 +15471,14 @@
           </p:sp>
         </mc:Fallback>
       </mc:AlternateContent>
-      <mc:AlternateContent xmlns:mc="http://schemas.openxmlformats.org/markup-compatibility/2006">
-        <mc:Choice xmlns:a14="http://schemas.microsoft.com/office/drawing/2010/main" Requires="a14">
+      <mc:AlternateContent xmlns:mc="http://schemas.openxmlformats.org/markup-compatibility/2006" xmlns:a14="http://schemas.microsoft.com/office/drawing/2010/main">
+        <mc:Choice Requires="a14">
           <p:sp>
             <p:nvSpPr>
               <p:cNvPr id="6" name="CaixaDeTexto 5">
                 <a:extLst>
                   <a:ext uri="{FF2B5EF4-FFF2-40B4-BE49-F238E27FC236}">
-                    <a16:creationId xmlns:a16="http://schemas.microsoft.com/office/drawing/2014/main" id="{73B01896-536C-FF3D-BD3E-69A81D1AD994}"/>
+                    <a16:creationId xmlns:a16="http://schemas.microsoft.com/office/drawing/2014/main" xmlns="" id="{52AAA0DA-6F63-3A71-192E-C21A1F7F8984}"/>
                   </a:ext>
                 </a:extLst>
               </p:cNvPr>
@@ -15465,6 +15501,7 @@
               </a:bodyPr>
               <a:lstStyle/>
               <a:p>
+                <a:pPr/>
                 <a14:m>
                   <m:oMathPara xmlns:m="http://schemas.openxmlformats.org/officeDocument/2006/math">
                     <m:oMathParaPr>
@@ -15504,13 +15541,13 @@
             </p:txBody>
           </p:sp>
         </mc:Choice>
-        <mc:Fallback>
+        <mc:Fallback xmlns="">
           <p:sp>
             <p:nvSpPr>
               <p:cNvPr id="6" name="CaixaDeTexto 5">
                 <a:extLst>
                   <a:ext uri="{FF2B5EF4-FFF2-40B4-BE49-F238E27FC236}">
-                    <a16:creationId xmlns:a16="http://schemas.microsoft.com/office/drawing/2014/main" id="{73B01896-536C-FF3D-BD3E-69A81D1AD994}"/>
+                    <a16:creationId xmlns:a16="http://schemas.microsoft.com/office/drawing/2014/main" id="{52AAA0DA-6F63-3A71-192E-C21A1F7F8984}"/>
                   </a:ext>
                 </a:extLst>
               </p:cNvPr>
@@ -15549,10 +15586,67 @@
           </p:sp>
         </mc:Fallback>
       </mc:AlternateContent>
+      <p:sp>
+        <p:nvSpPr>
+          <p:cNvPr id="7" name="CaixaDeTexto 6">
+            <a:extLst>
+              <a:ext uri="{FF2B5EF4-FFF2-40B4-BE49-F238E27FC236}">
+                <a16:creationId xmlns:a16="http://schemas.microsoft.com/office/drawing/2014/main" xmlns="" id="{132849C2-FE58-8CDA-FEE0-77AC4DCF0F05}"/>
+              </a:ext>
+            </a:extLst>
+          </p:cNvPr>
+          <p:cNvSpPr txBox="1"/>
+          <p:nvPr/>
+        </p:nvSpPr>
+        <p:spPr>
+          <a:xfrm>
+            <a:off x="162720" y="4180061"/>
+            <a:ext cx="2361406" cy="923330"/>
+          </a:xfrm>
+          <a:prstGeom prst="rect">
+            <a:avLst/>
+          </a:prstGeom>
+          <a:noFill/>
+        </p:spPr>
+        <p:txBody>
+          <a:bodyPr wrap="square" rtlCol="0">
+            <a:spAutoFit/>
+          </a:bodyPr>
+          <a:lstStyle/>
+          <a:p>
+            <a:pPr algn="ctr"/>
+            <a:r>
+              <a:rPr lang="pt-BR" dirty="0"/>
+              <a:t>Os centroides são os </a:t>
+            </a:r>
+            <a:r>
+              <a:rPr lang="pt-BR" b="1" dirty="0">
+                <a:solidFill>
+                  <a:schemeClr val="accent2"/>
+                </a:solidFill>
+              </a:rPr>
+              <a:t>centros geométricos</a:t>
+            </a:r>
+            <a:r>
+              <a:rPr lang="pt-BR" dirty="0"/>
+              <a:t> de cada </a:t>
+            </a:r>
+            <a:r>
+              <a:rPr lang="pt-BR" i="1" dirty="0"/>
+              <a:t>cluster</a:t>
+            </a:r>
+            <a:r>
+              <a:rPr lang="pt-BR" dirty="0"/>
+              <a:t>.</a:t>
+            </a:r>
+            <a:endParaRPr lang="en-US" dirty="0"/>
+          </a:p>
+        </p:txBody>
+      </p:sp>
     </p:spTree>
     <p:extLst>
       <p:ext uri="{BB962C8B-B14F-4D97-AF65-F5344CB8AC3E}">
-        <p14:creationId xmlns:p14="http://schemas.microsoft.com/office/powerpoint/2010/main" val="928097257"/>
+        <p14:creationId xmlns:p14="http://schemas.microsoft.com/office/powerpoint/2010/main" val="1154901412"/>
       </p:ext>
     </p:extLst>
   </p:cSld>
@@ -15615,7 +15709,7 @@
           <p:cNvPr id="3" name="Picture 5">
             <a:extLst>
               <a:ext uri="{FF2B5EF4-FFF2-40B4-BE49-F238E27FC236}">
-                <a16:creationId xmlns:a16="http://schemas.microsoft.com/office/drawing/2014/main" id="{CD544109-9098-CA3C-766B-DFEB05AE1F38}"/>
+                <a16:creationId xmlns:a16="http://schemas.microsoft.com/office/drawing/2014/main" xmlns="" id="{BE9E2474-44BE-43D0-EE2F-D03349050DA2}"/>
               </a:ext>
             </a:extLst>
           </p:cNvPr>
@@ -15632,8 +15726,8 @@
         </p:blipFill>
         <p:spPr>
           <a:xfrm>
-            <a:off x="2879290" y="1932888"/>
-            <a:ext cx="6230219" cy="4925112"/>
+            <a:off x="2836422" y="1913835"/>
+            <a:ext cx="6315956" cy="4944165"/>
           </a:xfrm>
           <a:prstGeom prst="rect">
             <a:avLst/>
@@ -15645,7 +15739,7 @@
           <p:cNvPr id="4" name="TextBox 9">
             <a:extLst>
               <a:ext uri="{FF2B5EF4-FFF2-40B4-BE49-F238E27FC236}">
-                <a16:creationId xmlns:a16="http://schemas.microsoft.com/office/drawing/2014/main" id="{E7FEC406-7A7E-5D78-DF69-D2416A2375C3}"/>
+                <a16:creationId xmlns:a16="http://schemas.microsoft.com/office/drawing/2014/main" xmlns="" id="{E7FEC406-7A7E-5D78-DF69-D2416A2375C3}"/>
               </a:ext>
             </a:extLst>
           </p:cNvPr>
@@ -15669,34 +15763,26 @@
           <a:lstStyle/>
           <a:p>
             <a:r>
-              <a:rPr lang="pt-BR" dirty="0">
-                <a:solidFill>
-                  <a:srgbClr val="404040"/>
-                </a:solidFill>
-              </a:rPr>
-              <a:t>7</a:t>
-            </a:r>
-            <a:r>
               <a:rPr lang="pt-BR" b="0" i="0" dirty="0">
                 <a:solidFill>
                   <a:srgbClr val="404040"/>
                 </a:solidFill>
                 <a:effectLst/>
               </a:rPr>
-              <a:t>. Repete-se os passos 3 e 4.</a:t>
+              <a:t>6. Repete-se os passos 3, 4 e 5.</a:t>
             </a:r>
             <a:endParaRPr lang="en-US" dirty="0"/>
           </a:p>
         </p:txBody>
       </p:sp>
-      <mc:AlternateContent xmlns:mc="http://schemas.openxmlformats.org/markup-compatibility/2006">
-        <mc:Choice xmlns:a14="http://schemas.microsoft.com/office/drawing/2010/main" Requires="a14">
+      <mc:AlternateContent xmlns:mc="http://schemas.openxmlformats.org/markup-compatibility/2006" xmlns:a14="http://schemas.microsoft.com/office/drawing/2010/main">
+        <mc:Choice Requires="a14">
           <p:sp>
             <p:nvSpPr>
               <p:cNvPr id="5" name="CaixaDeTexto 4">
                 <a:extLst>
                   <a:ext uri="{FF2B5EF4-FFF2-40B4-BE49-F238E27FC236}">
-                    <a16:creationId xmlns:a16="http://schemas.microsoft.com/office/drawing/2014/main" id="{C109775A-C499-C3C4-E79E-01495E781EF7}"/>
+                    <a16:creationId xmlns:a16="http://schemas.microsoft.com/office/drawing/2014/main" xmlns="" id="{60096C69-8085-B3E2-C37E-D817E99EDB92}"/>
                   </a:ext>
                 </a:extLst>
               </p:cNvPr>
@@ -15719,6 +15805,7 @@
               </a:bodyPr>
               <a:lstStyle/>
               <a:p>
+                <a:pPr/>
                 <a14:m>
                   <m:oMathPara xmlns:m="http://schemas.openxmlformats.org/officeDocument/2006/math">
                     <m:oMathParaPr>
@@ -15758,13 +15845,13 @@
             </p:txBody>
           </p:sp>
         </mc:Choice>
-        <mc:Fallback>
+        <mc:Fallback xmlns="">
           <p:sp>
             <p:nvSpPr>
               <p:cNvPr id="5" name="CaixaDeTexto 4">
                 <a:extLst>
                   <a:ext uri="{FF2B5EF4-FFF2-40B4-BE49-F238E27FC236}">
-                    <a16:creationId xmlns:a16="http://schemas.microsoft.com/office/drawing/2014/main" id="{C109775A-C499-C3C4-E79E-01495E781EF7}"/>
+                    <a16:creationId xmlns:a16="http://schemas.microsoft.com/office/drawing/2014/main" id="{60096C69-8085-B3E2-C37E-D817E99EDB92}"/>
                   </a:ext>
                 </a:extLst>
               </p:cNvPr>
@@ -15803,14 +15890,14 @@
           </p:sp>
         </mc:Fallback>
       </mc:AlternateContent>
-      <mc:AlternateContent xmlns:mc="http://schemas.openxmlformats.org/markup-compatibility/2006">
-        <mc:Choice xmlns:a14="http://schemas.microsoft.com/office/drawing/2010/main" Requires="a14">
+      <mc:AlternateContent xmlns:mc="http://schemas.openxmlformats.org/markup-compatibility/2006" xmlns:a14="http://schemas.microsoft.com/office/drawing/2010/main">
+        <mc:Choice Requires="a14">
           <p:sp>
             <p:nvSpPr>
               <p:cNvPr id="6" name="CaixaDeTexto 5">
                 <a:extLst>
                   <a:ext uri="{FF2B5EF4-FFF2-40B4-BE49-F238E27FC236}">
-                    <a16:creationId xmlns:a16="http://schemas.microsoft.com/office/drawing/2014/main" id="{2AFF475B-F76C-02F7-444D-681E49B85A06}"/>
+                    <a16:creationId xmlns:a16="http://schemas.microsoft.com/office/drawing/2014/main" xmlns="" id="{73B01896-536C-FF3D-BD3E-69A81D1AD994}"/>
                   </a:ext>
                 </a:extLst>
               </p:cNvPr>
@@ -15833,6 +15920,7 @@
               </a:bodyPr>
               <a:lstStyle/>
               <a:p>
+                <a:pPr/>
                 <a14:m>
                   <m:oMathPara xmlns:m="http://schemas.openxmlformats.org/officeDocument/2006/math">
                     <m:oMathParaPr>
@@ -15872,13 +15960,13 @@
             </p:txBody>
           </p:sp>
         </mc:Choice>
-        <mc:Fallback>
+        <mc:Fallback xmlns="">
           <p:sp>
             <p:nvSpPr>
               <p:cNvPr id="6" name="CaixaDeTexto 5">
                 <a:extLst>
                   <a:ext uri="{FF2B5EF4-FFF2-40B4-BE49-F238E27FC236}">
-                    <a16:creationId xmlns:a16="http://schemas.microsoft.com/office/drawing/2014/main" id="{2AFF475B-F76C-02F7-444D-681E49B85A06}"/>
+                    <a16:creationId xmlns:a16="http://schemas.microsoft.com/office/drawing/2014/main" id="{73B01896-536C-FF3D-BD3E-69A81D1AD994}"/>
                   </a:ext>
                 </a:extLst>
               </p:cNvPr>
@@ -15920,7 +16008,7 @@
     </p:spTree>
     <p:extLst>
       <p:ext uri="{BB962C8B-B14F-4D97-AF65-F5344CB8AC3E}">
-        <p14:creationId xmlns:p14="http://schemas.microsoft.com/office/powerpoint/2010/main" val="1524781492"/>
+        <p14:creationId xmlns:p14="http://schemas.microsoft.com/office/powerpoint/2010/main" val="928097257"/>
       </p:ext>
     </p:extLst>
   </p:cSld>
@@ -15983,7 +16071,7 @@
           <p:cNvPr id="3" name="Picture 5">
             <a:extLst>
               <a:ext uri="{FF2B5EF4-FFF2-40B4-BE49-F238E27FC236}">
-                <a16:creationId xmlns:a16="http://schemas.microsoft.com/office/drawing/2014/main" id="{9F08A47C-C93C-D40B-F5DC-3C29F2EEEE60}"/>
+                <a16:creationId xmlns:a16="http://schemas.microsoft.com/office/drawing/2014/main" xmlns="" id="{CD544109-9098-CA3C-766B-DFEB05AE1F38}"/>
               </a:ext>
             </a:extLst>
           </p:cNvPr>
@@ -15993,15 +16081,15 @@
           <p:nvPr/>
         </p:nvPicPr>
         <p:blipFill>
-          <a:blip r:embed="rId3"/>
+          <a:blip r:embed="rId2"/>
           <a:stretch>
             <a:fillRect/>
           </a:stretch>
         </p:blipFill>
         <p:spPr>
           <a:xfrm>
-            <a:off x="2995180" y="1961467"/>
-            <a:ext cx="6201640" cy="4896533"/>
+            <a:off x="2879290" y="1932888"/>
+            <a:ext cx="6230219" cy="4925112"/>
           </a:xfrm>
           <a:prstGeom prst="rect">
             <a:avLst/>
@@ -16010,10 +16098,10 @@
       </p:pic>
       <p:sp>
         <p:nvSpPr>
-          <p:cNvPr id="4" name="TextBox 7">
+          <p:cNvPr id="4" name="TextBox 9">
             <a:extLst>
               <a:ext uri="{FF2B5EF4-FFF2-40B4-BE49-F238E27FC236}">
-                <a16:creationId xmlns:a16="http://schemas.microsoft.com/office/drawing/2014/main" id="{4376C1A9-3731-8BF9-861E-3D686FEA4F43}"/>
+                <a16:creationId xmlns:a16="http://schemas.microsoft.com/office/drawing/2014/main" xmlns="" id="{E7FEC406-7A7E-5D78-DF69-D2416A2375C3}"/>
               </a:ext>
             </a:extLst>
           </p:cNvPr>
@@ -16022,8 +16110,8 @@
         </p:nvSpPr>
         <p:spPr>
           <a:xfrm>
-            <a:off x="151415" y="2248285"/>
-            <a:ext cx="2954890" cy="3970318"/>
+            <a:off x="304800" y="2629284"/>
+            <a:ext cx="2531622" cy="646331"/>
           </a:xfrm>
           <a:prstGeom prst="rect">
             <a:avLst/>
@@ -16037,72 +16125,59 @@
           <a:lstStyle/>
           <a:p>
             <a:r>
-              <a:rPr lang="pt-BR" b="0" i="0" noProof="0" dirty="0">
+              <a:rPr lang="pt-BR" dirty="0">
+                <a:solidFill>
+                  <a:srgbClr val="404040"/>
+                </a:solidFill>
+              </a:rPr>
+              <a:t>7</a:t>
+            </a:r>
+            <a:r>
+              <a:rPr lang="pt-BR" b="0" i="0" dirty="0">
+                <a:solidFill>
+                  <a:srgbClr val="404040"/>
+                </a:solidFill>
                 <a:effectLst/>
               </a:rPr>
-              <a:t>Repete-se os passos </a:t>
-            </a:r>
-            <a:r>
-              <a:rPr lang="pt-BR" noProof="0" dirty="0"/>
-              <a:t>3 à 5 </a:t>
-            </a:r>
-            <a:r>
-              <a:rPr lang="pt-BR" b="0" i="0" noProof="0" dirty="0">
+              <a:t>. Repete-se os passos </a:t>
+            </a:r>
+            <a:r>
+              <a:rPr lang="pt-BR" b="0" i="0" dirty="0" smtClean="0">
+                <a:solidFill>
+                  <a:srgbClr val="404040"/>
+                </a:solidFill>
                 <a:effectLst/>
               </a:rPr>
-              <a:t>até que um dos casos abaixo ocorra:</a:t>
-            </a:r>
-            <a:endParaRPr lang="pt-BR" noProof="0" dirty="0"/>
-          </a:p>
-          <a:p>
-            <a:pPr marL="342900" indent="-342900">
-              <a:buFont typeface="+mj-lt"/>
-              <a:buAutoNum type="arabicPeriod"/>
-            </a:pPr>
-            <a:r>
-              <a:rPr lang="pt-BR" noProof="0" dirty="0"/>
-              <a:t>Os centroides não mudem mais (ou mudem muito pouco),</a:t>
-            </a:r>
-            <a:endParaRPr lang="pt-BR" b="0" i="0" noProof="0" dirty="0">
-              <a:effectLst/>
-            </a:endParaRPr>
-          </a:p>
-          <a:p>
-            <a:pPr marL="342900" indent="-342900">
-              <a:buFont typeface="+mj-lt"/>
-              <a:buAutoNum type="arabicPeriod"/>
-            </a:pPr>
-            <a:r>
-              <a:rPr lang="pt-BR" b="0" i="0" noProof="0" dirty="0">
-                <a:effectLst/>
+              <a:t>3, 4</a:t>
+            </a:r>
+            <a:r>
+              <a:rPr lang="pt-BR" dirty="0">
+                <a:solidFill>
+                  <a:srgbClr val="404040"/>
+                </a:solidFill>
               </a:rPr>
-              <a:t>A soma das distâncias entre as amostras e o centroide correspondente seja minimizada (e permaneça praticamente constante),</a:t>
-            </a:r>
-            <a:endParaRPr lang="pt-BR" noProof="0" dirty="0"/>
-          </a:p>
-          <a:p>
-            <a:pPr marL="342900" indent="-342900">
-              <a:buFont typeface="+mj-lt"/>
-              <a:buAutoNum type="arabicPeriod"/>
-            </a:pPr>
-            <a:r>
-              <a:rPr lang="pt-BR" b="0" i="0" noProof="0" dirty="0">
-                <a:effectLst/>
+              <a:t> </a:t>
+            </a:r>
+            <a:r>
+              <a:rPr lang="pt-BR" dirty="0" smtClean="0">
+                <a:solidFill>
+                  <a:srgbClr val="404040"/>
+                </a:solidFill>
               </a:rPr>
-              <a:t>O número máximo de iterações seja atingido.</a:t>
-            </a:r>
-            <a:endParaRPr lang="pt-BR" noProof="0" dirty="0"/>
+              <a:t>e 5.</a:t>
+            </a:r>
+            <a:endParaRPr lang="en-US" dirty="0"/>
           </a:p>
         </p:txBody>
       </p:sp>
-      <mc:AlternateContent xmlns:mc="http://schemas.openxmlformats.org/markup-compatibility/2006">
-        <mc:Choice xmlns:a14="http://schemas.microsoft.com/office/drawing/2010/main" Requires="a14">
+      <mc:AlternateContent xmlns:mc="http://schemas.openxmlformats.org/markup-compatibility/2006" xmlns:a14="http://schemas.microsoft.com/office/drawing/2010/main">
+        <mc:Choice Requires="a14">
           <p:sp>
             <p:nvSpPr>
               <p:cNvPr id="5" name="CaixaDeTexto 4">
                 <a:extLst>
                   <a:ext uri="{FF2B5EF4-FFF2-40B4-BE49-F238E27FC236}">
-                    <a16:creationId xmlns:a16="http://schemas.microsoft.com/office/drawing/2014/main" id="{E5AB75DE-BA99-68D6-B1F0-5B51B6E4323B}"/>
+                    <a16:creationId xmlns:a16="http://schemas.microsoft.com/office/drawing/2014/main" xmlns="" id="{C109775A-C499-C3C4-E79E-01495E781EF7}"/>
                   </a:ext>
                 </a:extLst>
               </p:cNvPr>
@@ -16125,6 +16200,7 @@
               </a:bodyPr>
               <a:lstStyle/>
               <a:p>
+                <a:pPr/>
                 <a14:m>
                   <m:oMathPara xmlns:m="http://schemas.openxmlformats.org/officeDocument/2006/math">
                     <m:oMathParaPr>
@@ -16164,13 +16240,13 @@
             </p:txBody>
           </p:sp>
         </mc:Choice>
-        <mc:Fallback>
+        <mc:Fallback xmlns="">
           <p:sp>
             <p:nvSpPr>
               <p:cNvPr id="5" name="CaixaDeTexto 4">
                 <a:extLst>
                   <a:ext uri="{FF2B5EF4-FFF2-40B4-BE49-F238E27FC236}">
-                    <a16:creationId xmlns:a16="http://schemas.microsoft.com/office/drawing/2014/main" id="{E5AB75DE-BA99-68D6-B1F0-5B51B6E4323B}"/>
+                    <a16:creationId xmlns:a16="http://schemas.microsoft.com/office/drawing/2014/main" id="{C109775A-C499-C3C4-E79E-01495E781EF7}"/>
                   </a:ext>
                 </a:extLst>
               </p:cNvPr>
@@ -16188,7 +16264,7 @@
                 <a:avLst/>
               </a:prstGeom>
               <a:blipFill>
-                <a:blip r:embed="rId4"/>
+                <a:blip r:embed="rId3"/>
                 <a:stretch>
                   <a:fillRect/>
                 </a:stretch>
@@ -16209,14 +16285,14 @@
           </p:sp>
         </mc:Fallback>
       </mc:AlternateContent>
-      <mc:AlternateContent xmlns:mc="http://schemas.openxmlformats.org/markup-compatibility/2006">
-        <mc:Choice xmlns:a14="http://schemas.microsoft.com/office/drawing/2010/main" Requires="a14">
+      <mc:AlternateContent xmlns:mc="http://schemas.openxmlformats.org/markup-compatibility/2006" xmlns:a14="http://schemas.microsoft.com/office/drawing/2010/main">
+        <mc:Choice Requires="a14">
           <p:sp>
             <p:nvSpPr>
               <p:cNvPr id="6" name="CaixaDeTexto 5">
                 <a:extLst>
                   <a:ext uri="{FF2B5EF4-FFF2-40B4-BE49-F238E27FC236}">
-                    <a16:creationId xmlns:a16="http://schemas.microsoft.com/office/drawing/2014/main" id="{8B47F7AC-AF19-FB59-F5BA-3C2889223118}"/>
+                    <a16:creationId xmlns:a16="http://schemas.microsoft.com/office/drawing/2014/main" xmlns="" id="{2AFF475B-F76C-02F7-444D-681E49B85A06}"/>
                   </a:ext>
                 </a:extLst>
               </p:cNvPr>
@@ -16239,6 +16315,7 @@
               </a:bodyPr>
               <a:lstStyle/>
               <a:p>
+                <a:pPr/>
                 <a14:m>
                   <m:oMathPara xmlns:m="http://schemas.openxmlformats.org/officeDocument/2006/math">
                     <m:oMathParaPr>
@@ -16278,13 +16355,13 @@
             </p:txBody>
           </p:sp>
         </mc:Choice>
-        <mc:Fallback>
+        <mc:Fallback xmlns="">
           <p:sp>
             <p:nvSpPr>
               <p:cNvPr id="6" name="CaixaDeTexto 5">
                 <a:extLst>
                   <a:ext uri="{FF2B5EF4-FFF2-40B4-BE49-F238E27FC236}">
-                    <a16:creationId xmlns:a16="http://schemas.microsoft.com/office/drawing/2014/main" id="{8B47F7AC-AF19-FB59-F5BA-3C2889223118}"/>
+                    <a16:creationId xmlns:a16="http://schemas.microsoft.com/office/drawing/2014/main" id="{2AFF475B-F76C-02F7-444D-681E49B85A06}"/>
                   </a:ext>
                 </a:extLst>
               </p:cNvPr>
@@ -16302,7 +16379,7 @@
                 <a:avLst/>
               </a:prstGeom>
               <a:blipFill>
-                <a:blip r:embed="rId5"/>
+                <a:blip r:embed="rId4"/>
                 <a:stretch>
                   <a:fillRect/>
                 </a:stretch>
@@ -16326,7 +16403,7 @@
     </p:spTree>
     <p:extLst>
       <p:ext uri="{BB962C8B-B14F-4D97-AF65-F5344CB8AC3E}">
-        <p14:creationId xmlns:p14="http://schemas.microsoft.com/office/powerpoint/2010/main" val="3046733346"/>
+        <p14:creationId xmlns:p14="http://schemas.microsoft.com/office/powerpoint/2010/main" val="1524781492"/>
       </p:ext>
     </p:extLst>
   </p:cSld>
@@ -16370,6 +16447,434 @@
           <a:p>
             <a:r>
               <a:rPr lang="pt-BR" dirty="0"/>
+              <a:t>Funcionamento do </a:t>
+            </a:r>
+            <a:r>
+              <a:rPr lang="pt-BR" i="1" dirty="0"/>
+              <a:t>k-</a:t>
+            </a:r>
+            <a:r>
+              <a:rPr lang="pt-BR" i="1" dirty="0" err="1"/>
+              <a:t>Means</a:t>
+            </a:r>
+            <a:endParaRPr lang="pt-BR" dirty="0"/>
+          </a:p>
+        </p:txBody>
+      </p:sp>
+      <p:pic>
+        <p:nvPicPr>
+          <p:cNvPr id="3" name="Picture 5">
+            <a:extLst>
+              <a:ext uri="{FF2B5EF4-FFF2-40B4-BE49-F238E27FC236}">
+                <a16:creationId xmlns:a16="http://schemas.microsoft.com/office/drawing/2014/main" xmlns="" id="{9F08A47C-C93C-D40B-F5DC-3C29F2EEEE60}"/>
+              </a:ext>
+            </a:extLst>
+          </p:cNvPr>
+          <p:cNvPicPr>
+            <a:picLocks noChangeAspect="1"/>
+          </p:cNvPicPr>
+          <p:nvPr/>
+        </p:nvPicPr>
+        <p:blipFill>
+          <a:blip r:embed="rId3"/>
+          <a:stretch>
+            <a:fillRect/>
+          </a:stretch>
+        </p:blipFill>
+        <p:spPr>
+          <a:xfrm>
+            <a:off x="2995180" y="1961467"/>
+            <a:ext cx="6201640" cy="4896533"/>
+          </a:xfrm>
+          <a:prstGeom prst="rect">
+            <a:avLst/>
+          </a:prstGeom>
+        </p:spPr>
+      </p:pic>
+      <p:sp>
+        <p:nvSpPr>
+          <p:cNvPr id="4" name="TextBox 7">
+            <a:extLst>
+              <a:ext uri="{FF2B5EF4-FFF2-40B4-BE49-F238E27FC236}">
+                <a16:creationId xmlns:a16="http://schemas.microsoft.com/office/drawing/2014/main" xmlns="" id="{4376C1A9-3731-8BF9-861E-3D686FEA4F43}"/>
+              </a:ext>
+            </a:extLst>
+          </p:cNvPr>
+          <p:cNvSpPr txBox="1"/>
+          <p:nvPr/>
+        </p:nvSpPr>
+        <p:spPr>
+          <a:xfrm>
+            <a:off x="40290" y="1968560"/>
+            <a:ext cx="3083910" cy="4247317"/>
+          </a:xfrm>
+          <a:prstGeom prst="rect">
+            <a:avLst/>
+          </a:prstGeom>
+          <a:noFill/>
+        </p:spPr>
+        <p:txBody>
+          <a:bodyPr wrap="square">
+            <a:spAutoFit/>
+          </a:bodyPr>
+          <a:lstStyle/>
+          <a:p>
+            <a:r>
+              <a:rPr lang="pt-BR" b="0" i="0" noProof="0" dirty="0">
+                <a:effectLst/>
+              </a:rPr>
+              <a:t>Repete-se os passos </a:t>
+            </a:r>
+            <a:r>
+              <a:rPr lang="pt-BR" noProof="0" dirty="0"/>
+              <a:t>3 à 5 </a:t>
+            </a:r>
+            <a:r>
+              <a:rPr lang="pt-BR" b="0" i="0" noProof="0" dirty="0">
+                <a:effectLst/>
+              </a:rPr>
+              <a:t>até que um dos casos abaixo ocorra:</a:t>
+            </a:r>
+            <a:endParaRPr lang="pt-BR" noProof="0" dirty="0"/>
+          </a:p>
+          <a:p>
+            <a:pPr marL="342900" indent="-342900">
+              <a:buFont typeface="+mj-lt"/>
+              <a:buAutoNum type="arabicPeriod"/>
+            </a:pPr>
+            <a:r>
+              <a:rPr lang="pt-BR" noProof="0" dirty="0"/>
+              <a:t>Os centroides não mudem mais (ou mudem muito pouco),</a:t>
+            </a:r>
+            <a:endParaRPr lang="pt-BR" b="0" i="0" noProof="0" dirty="0">
+              <a:effectLst/>
+            </a:endParaRPr>
+          </a:p>
+          <a:p>
+            <a:pPr marL="342900" indent="-342900">
+              <a:buFont typeface="+mj-lt"/>
+              <a:buAutoNum type="arabicPeriod"/>
+            </a:pPr>
+            <a:r>
+              <a:rPr lang="pt-BR" b="0" i="0" noProof="0" dirty="0">
+                <a:effectLst/>
+              </a:rPr>
+              <a:t>A soma das distâncias entre as amostras e o centroide correspondente seja minimizada (e permaneça praticamente constante</a:t>
+            </a:r>
+            <a:r>
+              <a:rPr lang="pt-BR" b="0" i="0" noProof="0" dirty="0" smtClean="0">
+                <a:effectLst/>
+              </a:rPr>
+              <a:t>),</a:t>
+            </a:r>
+          </a:p>
+          <a:p>
+            <a:pPr marL="800100" lvl="1" indent="-342900">
+              <a:buFont typeface="Wingdings" panose="05000000000000000000" pitchFamily="2" charset="2"/>
+              <a:buChar char="§"/>
+            </a:pPr>
+            <a:r>
+              <a:rPr lang="pt-BR" dirty="0" smtClean="0"/>
+              <a:t>Distancia </a:t>
+            </a:r>
+            <a:r>
+              <a:rPr lang="pt-BR" i="1" dirty="0" err="1" smtClean="0"/>
+              <a:t>intra-cluster</a:t>
+            </a:r>
+            <a:endParaRPr lang="pt-BR" i="1" noProof="0" dirty="0"/>
+          </a:p>
+          <a:p>
+            <a:pPr marL="342900" indent="-342900">
+              <a:buFont typeface="+mj-lt"/>
+              <a:buAutoNum type="arabicPeriod"/>
+            </a:pPr>
+            <a:r>
+              <a:rPr lang="pt-BR" b="0" i="0" noProof="0" dirty="0">
+                <a:effectLst/>
+              </a:rPr>
+              <a:t>O número máximo de iterações seja atingido.</a:t>
+            </a:r>
+            <a:endParaRPr lang="pt-BR" noProof="0" dirty="0"/>
+          </a:p>
+        </p:txBody>
+      </p:sp>
+      <mc:AlternateContent xmlns:mc="http://schemas.openxmlformats.org/markup-compatibility/2006" xmlns:a14="http://schemas.microsoft.com/office/drawing/2010/main">
+        <mc:Choice Requires="a14">
+          <p:sp>
+            <p:nvSpPr>
+              <p:cNvPr id="5" name="CaixaDeTexto 4">
+                <a:extLst>
+                  <a:ext uri="{FF2B5EF4-FFF2-40B4-BE49-F238E27FC236}">
+                    <a16:creationId xmlns:a16="http://schemas.microsoft.com/office/drawing/2014/main" xmlns="" id="{E5AB75DE-BA99-68D6-B1F0-5B51B6E4323B}"/>
+                  </a:ext>
+                </a:extLst>
+              </p:cNvPr>
+              <p:cNvSpPr txBox="1"/>
+              <p:nvPr/>
+            </p:nvSpPr>
+            <p:spPr>
+              <a:xfrm>
+                <a:off x="9122533" y="6308209"/>
+                <a:ext cx="460767" cy="369332"/>
+              </a:xfrm>
+              <a:prstGeom prst="rect">
+                <a:avLst/>
+              </a:prstGeom>
+              <a:noFill/>
+            </p:spPr>
+            <p:txBody>
+              <a:bodyPr wrap="none" rtlCol="0">
+                <a:spAutoFit/>
+              </a:bodyPr>
+              <a:lstStyle/>
+              <a:p>
+                <a:pPr/>
+                <a14:m>
+                  <m:oMathPara xmlns:m="http://schemas.openxmlformats.org/officeDocument/2006/math">
+                    <m:oMathParaPr>
+                      <m:jc m:val="centerGroup"/>
+                    </m:oMathParaPr>
+                    <m:oMath xmlns:m="http://schemas.openxmlformats.org/officeDocument/2006/math">
+                      <m:sSub>
+                        <m:sSubPr>
+                          <m:ctrlPr>
+                            <a:rPr lang="en-US" i="1" smtClean="0">
+                              <a:latin typeface="Cambria Math" panose="02040503050406030204" pitchFamily="18" charset="0"/>
+                            </a:rPr>
+                          </m:ctrlPr>
+                        </m:sSubPr>
+                        <m:e>
+                          <m:r>
+                            <a:rPr lang="pt-BR" b="0" i="1" smtClean="0">
+                              <a:latin typeface="Cambria Math" panose="02040503050406030204" pitchFamily="18" charset="0"/>
+                            </a:rPr>
+                            <m:t>𝑥</m:t>
+                          </m:r>
+                        </m:e>
+                        <m:sub>
+                          <m:r>
+                            <a:rPr lang="pt-BR" b="0" i="1" smtClean="0">
+                              <a:latin typeface="Cambria Math" panose="02040503050406030204" pitchFamily="18" charset="0"/>
+                            </a:rPr>
+                            <m:t>1</m:t>
+                          </m:r>
+                        </m:sub>
+                      </m:sSub>
+                    </m:oMath>
+                  </m:oMathPara>
+                </a14:m>
+                <a:endParaRPr lang="en-US" dirty="0"/>
+              </a:p>
+            </p:txBody>
+          </p:sp>
+        </mc:Choice>
+        <mc:Fallback xmlns="">
+          <p:sp>
+            <p:nvSpPr>
+              <p:cNvPr id="5" name="CaixaDeTexto 4">
+                <a:extLst>
+                  <a:ext uri="{FF2B5EF4-FFF2-40B4-BE49-F238E27FC236}">
+                    <a16:creationId xmlns:a16="http://schemas.microsoft.com/office/drawing/2014/main" id="{E5AB75DE-BA99-68D6-B1F0-5B51B6E4323B}"/>
+                  </a:ext>
+                </a:extLst>
+              </p:cNvPr>
+              <p:cNvSpPr txBox="1">
+                <a:spLocks noRot="1" noChangeAspect="1" noMove="1" noResize="1" noEditPoints="1" noAdjustHandles="1" noChangeArrowheads="1" noChangeShapeType="1" noTextEdit="1"/>
+              </p:cNvSpPr>
+              <p:nvPr/>
+            </p:nvSpPr>
+            <p:spPr>
+              <a:xfrm>
+                <a:off x="9122533" y="6308209"/>
+                <a:ext cx="460767" cy="369332"/>
+              </a:xfrm>
+              <a:prstGeom prst="rect">
+                <a:avLst/>
+              </a:prstGeom>
+              <a:blipFill>
+                <a:blip r:embed="rId4"/>
+                <a:stretch>
+                  <a:fillRect/>
+                </a:stretch>
+              </a:blipFill>
+            </p:spPr>
+            <p:txBody>
+              <a:bodyPr/>
+              <a:lstStyle/>
+              <a:p>
+                <a:r>
+                  <a:rPr lang="en-US">
+                    <a:noFill/>
+                  </a:rPr>
+                  <a:t> </a:t>
+                </a:r>
+              </a:p>
+            </p:txBody>
+          </p:sp>
+        </mc:Fallback>
+      </mc:AlternateContent>
+      <mc:AlternateContent xmlns:mc="http://schemas.openxmlformats.org/markup-compatibility/2006" xmlns:a14="http://schemas.microsoft.com/office/drawing/2010/main">
+        <mc:Choice Requires="a14">
+          <p:sp>
+            <p:nvSpPr>
+              <p:cNvPr id="6" name="CaixaDeTexto 5">
+                <a:extLst>
+                  <a:ext uri="{FF2B5EF4-FFF2-40B4-BE49-F238E27FC236}">
+                    <a16:creationId xmlns:a16="http://schemas.microsoft.com/office/drawing/2014/main" xmlns="" id="{8B47F7AC-AF19-FB59-F5BA-3C2889223118}"/>
+                  </a:ext>
+                </a:extLst>
+              </p:cNvPr>
+              <p:cNvSpPr txBox="1"/>
+              <p:nvPr/>
+            </p:nvSpPr>
+            <p:spPr>
+              <a:xfrm>
+                <a:off x="2948182" y="1528939"/>
+                <a:ext cx="466090" cy="369332"/>
+              </a:xfrm>
+              <a:prstGeom prst="rect">
+                <a:avLst/>
+              </a:prstGeom>
+              <a:noFill/>
+            </p:spPr>
+            <p:txBody>
+              <a:bodyPr wrap="none" rtlCol="0">
+                <a:spAutoFit/>
+              </a:bodyPr>
+              <a:lstStyle/>
+              <a:p>
+                <a:pPr/>
+                <a14:m>
+                  <m:oMathPara xmlns:m="http://schemas.openxmlformats.org/officeDocument/2006/math">
+                    <m:oMathParaPr>
+                      <m:jc m:val="centerGroup"/>
+                    </m:oMathParaPr>
+                    <m:oMath xmlns:m="http://schemas.openxmlformats.org/officeDocument/2006/math">
+                      <m:sSub>
+                        <m:sSubPr>
+                          <m:ctrlPr>
+                            <a:rPr lang="en-US" i="1" smtClean="0">
+                              <a:latin typeface="Cambria Math" panose="02040503050406030204" pitchFamily="18" charset="0"/>
+                            </a:rPr>
+                          </m:ctrlPr>
+                        </m:sSubPr>
+                        <m:e>
+                          <m:r>
+                            <a:rPr lang="pt-BR" b="0" i="1" smtClean="0">
+                              <a:latin typeface="Cambria Math" panose="02040503050406030204" pitchFamily="18" charset="0"/>
+                            </a:rPr>
+                            <m:t>𝑥</m:t>
+                          </m:r>
+                        </m:e>
+                        <m:sub>
+                          <m:r>
+                            <a:rPr lang="pt-BR" b="0" i="1" smtClean="0">
+                              <a:latin typeface="Cambria Math" panose="02040503050406030204" pitchFamily="18" charset="0"/>
+                            </a:rPr>
+                            <m:t>2</m:t>
+                          </m:r>
+                        </m:sub>
+                      </m:sSub>
+                    </m:oMath>
+                  </m:oMathPara>
+                </a14:m>
+                <a:endParaRPr lang="en-US" dirty="0"/>
+              </a:p>
+            </p:txBody>
+          </p:sp>
+        </mc:Choice>
+        <mc:Fallback xmlns="">
+          <p:sp>
+            <p:nvSpPr>
+              <p:cNvPr id="6" name="CaixaDeTexto 5">
+                <a:extLst>
+                  <a:ext uri="{FF2B5EF4-FFF2-40B4-BE49-F238E27FC236}">
+                    <a16:creationId xmlns:a16="http://schemas.microsoft.com/office/drawing/2014/main" id="{8B47F7AC-AF19-FB59-F5BA-3C2889223118}"/>
+                  </a:ext>
+                </a:extLst>
+              </p:cNvPr>
+              <p:cNvSpPr txBox="1">
+                <a:spLocks noRot="1" noChangeAspect="1" noMove="1" noResize="1" noEditPoints="1" noAdjustHandles="1" noChangeArrowheads="1" noChangeShapeType="1" noTextEdit="1"/>
+              </p:cNvSpPr>
+              <p:nvPr/>
+            </p:nvSpPr>
+            <p:spPr>
+              <a:xfrm>
+                <a:off x="2948182" y="1528939"/>
+                <a:ext cx="466090" cy="369332"/>
+              </a:xfrm>
+              <a:prstGeom prst="rect">
+                <a:avLst/>
+              </a:prstGeom>
+              <a:blipFill>
+                <a:blip r:embed="rId5"/>
+                <a:stretch>
+                  <a:fillRect/>
+                </a:stretch>
+              </a:blipFill>
+            </p:spPr>
+            <p:txBody>
+              <a:bodyPr/>
+              <a:lstStyle/>
+              <a:p>
+                <a:r>
+                  <a:rPr lang="en-US">
+                    <a:noFill/>
+                  </a:rPr>
+                  <a:t> </a:t>
+                </a:r>
+              </a:p>
+            </p:txBody>
+          </p:sp>
+        </mc:Fallback>
+      </mc:AlternateContent>
+    </p:spTree>
+    <p:extLst>
+      <p:ext uri="{BB962C8B-B14F-4D97-AF65-F5344CB8AC3E}">
+        <p14:creationId xmlns:p14="http://schemas.microsoft.com/office/powerpoint/2010/main" val="3046733346"/>
+      </p:ext>
+    </p:extLst>
+  </p:cSld>
+  <p:clrMapOvr>
+    <a:masterClrMapping/>
+  </p:clrMapOvr>
+</p:sld>
+</file>
+
+<file path=ppt/slides/slide29.xml><?xml version="1.0" encoding="utf-8"?>
+<p:sld xmlns:a="http://schemas.openxmlformats.org/drawingml/2006/main" xmlns:r="http://schemas.openxmlformats.org/officeDocument/2006/relationships" xmlns:p="http://schemas.openxmlformats.org/presentationml/2006/main">
+  <p:cSld>
+    <p:spTree>
+      <p:nvGrpSpPr>
+        <p:cNvPr id="1" name=""/>
+        <p:cNvGrpSpPr/>
+        <p:nvPr/>
+      </p:nvGrpSpPr>
+      <p:grpSpPr>
+        <a:xfrm>
+          <a:off x="0" y="0"/>
+          <a:ext cx="0" cy="0"/>
+          <a:chOff x="0" y="0"/>
+          <a:chExt cx="0" cy="0"/>
+        </a:xfrm>
+      </p:grpSpPr>
+      <p:sp>
+        <p:nvSpPr>
+          <p:cNvPr id="2" name="Título 1"/>
+          <p:cNvSpPr>
+            <a:spLocks noGrp="1"/>
+          </p:cNvSpPr>
+          <p:nvPr>
+            <p:ph type="title"/>
+          </p:nvPr>
+        </p:nvSpPr>
+        <p:spPr/>
+        <p:txBody>
+          <a:bodyPr/>
+          <a:lstStyle/>
+          <a:p>
+            <a:r>
+              <a:rPr lang="pt-BR" dirty="0"/>
               <a:t>Como inicializar os centroides? </a:t>
             </a:r>
             <a:endParaRPr lang="en-US" dirty="0"/>
@@ -16405,12 +16910,12 @@
                   <a:t>A inicialização mais simples é </a:t>
                 </a:r>
                 <a:r>
-                  <a:rPr lang="pt-BR" b="1" dirty="0">
+                  <a:rPr lang="pt-BR" b="1" dirty="0" smtClean="0">
                     <a:solidFill>
                       <a:schemeClr val="accent5"/>
                     </a:solidFill>
                   </a:rPr>
-                  <a:t>escolher </a:t>
+                  <a:t>escolher aleatoriamente </a:t>
                 </a:r>
                 <a14:m>
                   <m:oMath xmlns:m="http://schemas.openxmlformats.org/officeDocument/2006/math">
@@ -16431,11 +16936,15 @@
                       <a:schemeClr val="accent5"/>
                     </a:solidFill>
                   </a:rPr>
-                  <a:t> exemplos de treinamento aleatórios</a:t>
+                  <a:t> exemplos de treinamento </a:t>
+                </a:r>
+                <a:r>
+                  <a:rPr lang="pt-BR" dirty="0" smtClean="0"/>
+                  <a:t>como </a:t>
                 </a:r>
                 <a:r>
                   <a:rPr lang="pt-BR" dirty="0"/>
-                  <a:t> como os centroides iniciais.</a:t>
+                  <a:t>os centroides iniciais.</a:t>
                 </a:r>
               </a:p>
               <a:p>
@@ -16478,12 +16987,24 @@
                   <a:t>fazendo com que o algoritmo convirja para </a:t>
                 </a:r>
                 <a:r>
-                  <a:rPr lang="pt-BR" i="1" dirty="0"/>
+                  <a:rPr lang="pt-BR" b="1" i="1" dirty="0">
+                    <a:solidFill>
+                      <a:srgbClr val="7030A0"/>
+                    </a:solidFill>
+                  </a:rPr>
                   <a:t>clusters</a:t>
                 </a:r>
                 <a:r>
+                  <a:rPr lang="pt-BR" b="1" dirty="0">
+                    <a:solidFill>
+                      <a:srgbClr val="7030A0"/>
+                    </a:solidFill>
+                  </a:rPr>
+                  <a:t> diferentes a cada execução</a:t>
+                </a:r>
+                <a:r>
                   <a:rPr lang="pt-BR" dirty="0"/>
-                  <a:t> diferentes a cada execução.</a:t>
+                  <a:t>.</a:t>
                 </a:r>
               </a:p>
               <a:p>
@@ -16545,10 +17066,10 @@
                 <a:off x="5242560" y="1825624"/>
                 <a:ext cx="6863715" cy="5032375"/>
               </a:xfrm>
-              <a:blipFill>
+              <a:blipFill rotWithShape="0">
                 <a:blip r:embed="rId3"/>
                 <a:stretch>
-                  <a:fillRect l="-1599" t="-1937" b="-2058"/>
+                  <a:fillRect l="-1599" t="-1937" r="-2575" b="-2058"/>
                 </a:stretch>
               </a:blipFill>
             </p:spPr>
@@ -16557,7 +17078,7 @@
               <a:lstStyle/>
               <a:p>
                 <a:r>
-                  <a:rPr lang="en-US">
+                  <a:rPr lang="pt-BR">
                     <a:noFill/>
                   </a:rPr>
                   <a:t> </a:t>
@@ -16572,7 +17093,7 @@
           <p:cNvPr id="4" name="Picture 2" descr="Quantum machine learning: distance estimation for k-means clustering | by  Sashwat Anagolum | Towards Data Science">
             <a:extLst>
               <a:ext uri="{FF2B5EF4-FFF2-40B4-BE49-F238E27FC236}">
-                <a16:creationId xmlns:a16="http://schemas.microsoft.com/office/drawing/2014/main" id="{3663CA52-EDD8-4A35-5A6A-3A247A7891B7}"/>
+                <a16:creationId xmlns:a16="http://schemas.microsoft.com/office/drawing/2014/main" xmlns="" id="{3663CA52-EDD8-4A35-5A6A-3A247A7891B7}"/>
               </a:ext>
             </a:extLst>
           </p:cNvPr>
@@ -16625,7 +17146,142 @@
 </p:sld>
 </file>
 
-<file path=ppt/slides/slide29.xml><?xml version="1.0" encoding="utf-8"?>
+<file path=ppt/slides/slide3.xml><?xml version="1.0" encoding="utf-8"?>
+<p:sld xmlns:a="http://schemas.openxmlformats.org/drawingml/2006/main" xmlns:r="http://schemas.openxmlformats.org/officeDocument/2006/relationships" xmlns:p="http://schemas.openxmlformats.org/presentationml/2006/main">
+  <p:cSld>
+    <p:spTree>
+      <p:nvGrpSpPr>
+        <p:cNvPr id="1" name=""/>
+        <p:cNvGrpSpPr/>
+        <p:nvPr/>
+      </p:nvGrpSpPr>
+      <p:grpSpPr>
+        <a:xfrm>
+          <a:off x="0" y="0"/>
+          <a:ext cx="0" cy="0"/>
+          <a:chOff x="0" y="0"/>
+          <a:chExt cx="0" cy="0"/>
+        </a:xfrm>
+      </p:grpSpPr>
+      <p:sp>
+        <p:nvSpPr>
+          <p:cNvPr id="6" name="TextBox 5">
+            <a:extLst>
+              <a:ext uri="{FF2B5EF4-FFF2-40B4-BE49-F238E27FC236}">
+                <a16:creationId xmlns:a16="http://schemas.microsoft.com/office/drawing/2014/main" xmlns="" id="{7A9955D7-EF0A-C073-CA9C-EC6A396485B8}"/>
+              </a:ext>
+            </a:extLst>
+          </p:cNvPr>
+          <p:cNvSpPr txBox="1"/>
+          <p:nvPr/>
+        </p:nvSpPr>
+        <p:spPr>
+          <a:xfrm>
+            <a:off x="6574971" y="2814935"/>
+            <a:ext cx="4898572" cy="1815882"/>
+          </a:xfrm>
+          <a:prstGeom prst="rect">
+            <a:avLst/>
+          </a:prstGeom>
+          <a:noFill/>
+        </p:spPr>
+        <p:txBody>
+          <a:bodyPr wrap="square">
+            <a:spAutoFit/>
+          </a:bodyPr>
+          <a:lstStyle/>
+          <a:p>
+            <a:pPr algn="ctr"/>
+            <a:r>
+              <a:rPr lang="pt-BR" sz="2800" dirty="0"/>
+              <a:t>A </a:t>
+            </a:r>
+            <a:r>
+              <a:rPr lang="pt-BR" sz="2800" b="1" dirty="0"/>
+              <a:t>clusterização</a:t>
+            </a:r>
+            <a:r>
+              <a:rPr lang="pt-BR" sz="2800" dirty="0"/>
+              <a:t> organiza dados como na figura: cada ponto encontra seu </a:t>
+            </a:r>
+            <a:r>
+              <a:rPr lang="pt-BR" sz="2800" b="1" dirty="0">
+                <a:solidFill>
+                  <a:srgbClr val="7030A0"/>
+                </a:solidFill>
+              </a:rPr>
+              <a:t>grupo</a:t>
+            </a:r>
+            <a:r>
+              <a:rPr lang="pt-BR" sz="2800" b="1" dirty="0">
+                <a:solidFill>
+                  <a:schemeClr val="accent2"/>
+                </a:solidFill>
+              </a:rPr>
+              <a:t> mais próximo</a:t>
+            </a:r>
+            <a:r>
+              <a:rPr lang="pt-BR" sz="2800" dirty="0"/>
+              <a:t>, formando </a:t>
+            </a:r>
+            <a:r>
+              <a:rPr lang="pt-BR" sz="2800" i="1" dirty="0"/>
+              <a:t>clusters.</a:t>
+            </a:r>
+            <a:endParaRPr lang="en-US" sz="2800" dirty="0"/>
+          </a:p>
+        </p:txBody>
+      </p:sp>
+      <p:pic>
+        <p:nvPicPr>
+          <p:cNvPr id="3" name="Picture 2">
+            <a:extLst>
+              <a:ext uri="{FF2B5EF4-FFF2-40B4-BE49-F238E27FC236}">
+                <a16:creationId xmlns:a16="http://schemas.microsoft.com/office/drawing/2014/main" xmlns="" id="{9863C601-9BD1-3DD0-9219-97CD9BA5DC5A}"/>
+              </a:ext>
+            </a:extLst>
+          </p:cNvPr>
+          <p:cNvPicPr>
+            <a:picLocks noChangeAspect="1"/>
+          </p:cNvPicPr>
+          <p:nvPr/>
+        </p:nvPicPr>
+        <p:blipFill>
+          <a:blip r:embed="rId2" cstate="print">
+            <a:extLst>
+              <a:ext uri="{28A0092B-C50C-407E-A947-70E740481C1C}">
+                <a14:useLocalDpi xmlns:a14="http://schemas.microsoft.com/office/drawing/2010/main" val="0"/>
+              </a:ext>
+            </a:extLst>
+          </a:blip>
+          <a:stretch>
+            <a:fillRect/>
+          </a:stretch>
+        </p:blipFill>
+        <p:spPr>
+          <a:xfrm>
+            <a:off x="1934027" y="642219"/>
+            <a:ext cx="3889829" cy="5834743"/>
+          </a:xfrm>
+          <a:prstGeom prst="rect">
+            <a:avLst/>
+          </a:prstGeom>
+        </p:spPr>
+      </p:pic>
+    </p:spTree>
+    <p:extLst>
+      <p:ext uri="{BB962C8B-B14F-4D97-AF65-F5344CB8AC3E}">
+        <p14:creationId xmlns:p14="http://schemas.microsoft.com/office/powerpoint/2010/main" val="3439447642"/>
+      </p:ext>
+    </p:extLst>
+  </p:cSld>
+  <p:clrMapOvr>
+    <a:masterClrMapping/>
+  </p:clrMapOvr>
+</p:sld>
+</file>
+
+<file path=ppt/slides/slide30.xml><?xml version="1.0" encoding="utf-8"?>
 <p:sld xmlns:a="http://schemas.openxmlformats.org/drawingml/2006/main" xmlns:r="http://schemas.openxmlformats.org/officeDocument/2006/relationships" xmlns:p="http://schemas.openxmlformats.org/presentationml/2006/main">
   <p:cSld>
     <p:spTree>
@@ -16633,7 +17289,7 @@
         <p:cNvPr id="1" name="">
           <a:extLst>
             <a:ext uri="{FF2B5EF4-FFF2-40B4-BE49-F238E27FC236}">
-              <a16:creationId xmlns:a16="http://schemas.microsoft.com/office/drawing/2014/main" id="{17B1A926-A8C8-946A-0DCB-7DA6EAEC80E3}"/>
+              <a16:creationId xmlns:a16="http://schemas.microsoft.com/office/drawing/2014/main" xmlns="" id="{17B1A926-A8C8-946A-0DCB-7DA6EAEC80E3}"/>
             </a:ext>
           </a:extLst>
         </p:cNvPr>
@@ -16653,7 +17309,7 @@
           <p:cNvPr id="2" name="Título 1">
             <a:extLst>
               <a:ext uri="{FF2B5EF4-FFF2-40B4-BE49-F238E27FC236}">
-                <a16:creationId xmlns:a16="http://schemas.microsoft.com/office/drawing/2014/main" id="{602E24AF-FE6E-7B0A-D179-EB49A1DEB2F8}"/>
+                <a16:creationId xmlns:a16="http://schemas.microsoft.com/office/drawing/2014/main" xmlns="" id="{602E24AF-FE6E-7B0A-D179-EB49A1DEB2F8}"/>
               </a:ext>
             </a:extLst>
           </p:cNvPr>
@@ -16682,7 +17338,7 @@
           <p:cNvPr id="3" name="Espaço Reservado para Conteúdo 2">
             <a:extLst>
               <a:ext uri="{FF2B5EF4-FFF2-40B4-BE49-F238E27FC236}">
-                <a16:creationId xmlns:a16="http://schemas.microsoft.com/office/drawing/2014/main" id="{4E35406F-F929-EFBE-0B16-7CF919C6F311}"/>
+                <a16:creationId xmlns:a16="http://schemas.microsoft.com/office/drawing/2014/main" xmlns="" id="{4E35406F-F929-EFBE-0B16-7CF919C6F311}"/>
               </a:ext>
             </a:extLst>
           </p:cNvPr>
@@ -16853,7 +17509,7 @@
           <p:cNvPr id="4" name="Picture 2" descr="Quantum machine learning: distance estimation for k-means clustering | by  Sashwat Anagolum | Towards Data Science">
             <a:extLst>
               <a:ext uri="{FF2B5EF4-FFF2-40B4-BE49-F238E27FC236}">
-                <a16:creationId xmlns:a16="http://schemas.microsoft.com/office/drawing/2014/main" id="{375C1022-A6C8-5B17-2FC3-13794270B208}"/>
+                <a16:creationId xmlns:a16="http://schemas.microsoft.com/office/drawing/2014/main" xmlns="" id="{375C1022-A6C8-5B17-2FC3-13794270B208}"/>
               </a:ext>
             </a:extLst>
           </p:cNvPr>
@@ -16906,142 +17562,7 @@
 </p:sld>
 </file>
 
-<file path=ppt/slides/slide3.xml><?xml version="1.0" encoding="utf-8"?>
-<p:sld xmlns:a="http://schemas.openxmlformats.org/drawingml/2006/main" xmlns:r="http://schemas.openxmlformats.org/officeDocument/2006/relationships" xmlns:p="http://schemas.openxmlformats.org/presentationml/2006/main">
-  <p:cSld>
-    <p:spTree>
-      <p:nvGrpSpPr>
-        <p:cNvPr id="1" name=""/>
-        <p:cNvGrpSpPr/>
-        <p:nvPr/>
-      </p:nvGrpSpPr>
-      <p:grpSpPr>
-        <a:xfrm>
-          <a:off x="0" y="0"/>
-          <a:ext cx="0" cy="0"/>
-          <a:chOff x="0" y="0"/>
-          <a:chExt cx="0" cy="0"/>
-        </a:xfrm>
-      </p:grpSpPr>
-      <p:sp>
-        <p:nvSpPr>
-          <p:cNvPr id="6" name="TextBox 5">
-            <a:extLst>
-              <a:ext uri="{FF2B5EF4-FFF2-40B4-BE49-F238E27FC236}">
-                <a16:creationId xmlns:a16="http://schemas.microsoft.com/office/drawing/2014/main" id="{7A9955D7-EF0A-C073-CA9C-EC6A396485B8}"/>
-              </a:ext>
-            </a:extLst>
-          </p:cNvPr>
-          <p:cNvSpPr txBox="1"/>
-          <p:nvPr/>
-        </p:nvSpPr>
-        <p:spPr>
-          <a:xfrm>
-            <a:off x="6574971" y="2814935"/>
-            <a:ext cx="4898572" cy="1815882"/>
-          </a:xfrm>
-          <a:prstGeom prst="rect">
-            <a:avLst/>
-          </a:prstGeom>
-          <a:noFill/>
-        </p:spPr>
-        <p:txBody>
-          <a:bodyPr wrap="square">
-            <a:spAutoFit/>
-          </a:bodyPr>
-          <a:lstStyle/>
-          <a:p>
-            <a:pPr algn="ctr"/>
-            <a:r>
-              <a:rPr lang="pt-BR" sz="2800" dirty="0"/>
-              <a:t>A </a:t>
-            </a:r>
-            <a:r>
-              <a:rPr lang="pt-BR" sz="2800" b="1" dirty="0"/>
-              <a:t>clusterização</a:t>
-            </a:r>
-            <a:r>
-              <a:rPr lang="pt-BR" sz="2800" dirty="0"/>
-              <a:t> organiza dados como na figura: cada ponto encontra seu </a:t>
-            </a:r>
-            <a:r>
-              <a:rPr lang="pt-BR" sz="2800" b="1" dirty="0">
-                <a:solidFill>
-                  <a:srgbClr val="7030A0"/>
-                </a:solidFill>
-              </a:rPr>
-              <a:t>grupo</a:t>
-            </a:r>
-            <a:r>
-              <a:rPr lang="pt-BR" sz="2800" b="1" dirty="0">
-                <a:solidFill>
-                  <a:schemeClr val="accent2"/>
-                </a:solidFill>
-              </a:rPr>
-              <a:t> mais próximo</a:t>
-            </a:r>
-            <a:r>
-              <a:rPr lang="pt-BR" sz="2800" dirty="0"/>
-              <a:t>, formando </a:t>
-            </a:r>
-            <a:r>
-              <a:rPr lang="pt-BR" sz="2800" i="1" dirty="0"/>
-              <a:t>clusters.</a:t>
-            </a:r>
-            <a:endParaRPr lang="en-US" sz="2800" dirty="0"/>
-          </a:p>
-        </p:txBody>
-      </p:sp>
-      <p:pic>
-        <p:nvPicPr>
-          <p:cNvPr id="3" name="Picture 2">
-            <a:extLst>
-              <a:ext uri="{FF2B5EF4-FFF2-40B4-BE49-F238E27FC236}">
-                <a16:creationId xmlns:a16="http://schemas.microsoft.com/office/drawing/2014/main" id="{9863C601-9BD1-3DD0-9219-97CD9BA5DC5A}"/>
-              </a:ext>
-            </a:extLst>
-          </p:cNvPr>
-          <p:cNvPicPr>
-            <a:picLocks noChangeAspect="1"/>
-          </p:cNvPicPr>
-          <p:nvPr/>
-        </p:nvPicPr>
-        <p:blipFill>
-          <a:blip r:embed="rId2" cstate="print">
-            <a:extLst>
-              <a:ext uri="{28A0092B-C50C-407E-A947-70E740481C1C}">
-                <a14:useLocalDpi xmlns:a14="http://schemas.microsoft.com/office/drawing/2010/main" val="0"/>
-              </a:ext>
-            </a:extLst>
-          </a:blip>
-          <a:stretch>
-            <a:fillRect/>
-          </a:stretch>
-        </p:blipFill>
-        <p:spPr>
-          <a:xfrm>
-            <a:off x="1934027" y="642219"/>
-            <a:ext cx="3889829" cy="5834743"/>
-          </a:xfrm>
-          <a:prstGeom prst="rect">
-            <a:avLst/>
-          </a:prstGeom>
-        </p:spPr>
-      </p:pic>
-    </p:spTree>
-    <p:extLst>
-      <p:ext uri="{BB962C8B-B14F-4D97-AF65-F5344CB8AC3E}">
-        <p14:creationId xmlns:p14="http://schemas.microsoft.com/office/powerpoint/2010/main" val="3439447642"/>
-      </p:ext>
-    </p:extLst>
-  </p:cSld>
-  <p:clrMapOvr>
-    <a:masterClrMapping/>
-  </p:clrMapOvr>
-</p:sld>
-</file>
-
-<file path=ppt/slides/slide30.xml><?xml version="1.0" encoding="utf-8"?>
+<file path=ppt/slides/slide31.xml><?xml version="1.0" encoding="utf-8"?>
 <p:sld xmlns:a="http://schemas.openxmlformats.org/drawingml/2006/main" xmlns:r="http://schemas.openxmlformats.org/officeDocument/2006/relationships" xmlns:p="http://schemas.openxmlformats.org/presentationml/2006/main">
   <p:cSld>
     <p:spTree>
@@ -17049,7 +17570,7 @@
         <p:cNvPr id="1" name="">
           <a:extLst>
             <a:ext uri="{FF2B5EF4-FFF2-40B4-BE49-F238E27FC236}">
-              <a16:creationId xmlns:a16="http://schemas.microsoft.com/office/drawing/2014/main" id="{AE9261F7-2166-8305-B7FE-ACE2323DFB84}"/>
+              <a16:creationId xmlns:a16="http://schemas.microsoft.com/office/drawing/2014/main" xmlns="" id="{AE9261F7-2166-8305-B7FE-ACE2323DFB84}"/>
             </a:ext>
           </a:extLst>
         </p:cNvPr>
@@ -17069,7 +17590,7 @@
           <p:cNvPr id="2" name="Título 1">
             <a:extLst>
               <a:ext uri="{FF2B5EF4-FFF2-40B4-BE49-F238E27FC236}">
-                <a16:creationId xmlns:a16="http://schemas.microsoft.com/office/drawing/2014/main" id="{EB419064-8E96-0B34-B387-5724815C4DE4}"/>
+                <a16:creationId xmlns:a16="http://schemas.microsoft.com/office/drawing/2014/main" xmlns="" id="{EB419064-8E96-0B34-B387-5724815C4DE4}"/>
               </a:ext>
             </a:extLst>
           </p:cNvPr>
@@ -17098,7 +17619,7 @@
           <p:cNvPr id="3" name="Espaço Reservado para Conteúdo 2">
             <a:extLst>
               <a:ext uri="{FF2B5EF4-FFF2-40B4-BE49-F238E27FC236}">
-                <a16:creationId xmlns:a16="http://schemas.microsoft.com/office/drawing/2014/main" id="{CDAB57C6-5307-315D-C613-2F33992F1909}"/>
+                <a16:creationId xmlns:a16="http://schemas.microsoft.com/office/drawing/2014/main" xmlns="" id="{CDAB57C6-5307-315D-C613-2F33992F1909}"/>
               </a:ext>
             </a:extLst>
           </p:cNvPr>
@@ -17180,12 +17701,20 @@
               <a:t>do algoritmo </a:t>
             </a:r>
             <a:r>
+              <a:rPr lang="pt-BR" b="1" dirty="0" smtClean="0">
+                <a:solidFill>
+                  <a:srgbClr val="FF0000"/>
+                </a:solidFill>
+              </a:rPr>
+              <a:t>depende(m) </a:t>
+            </a:r>
+            <a:r>
               <a:rPr lang="pt-BR" b="1" dirty="0">
                 <a:solidFill>
                   <a:srgbClr val="FF0000"/>
                 </a:solidFill>
               </a:rPr>
-              <a:t>depende da inicialização</a:t>
+              <a:t>da inicialização</a:t>
             </a:r>
             <a:r>
               <a:rPr lang="pt-BR" dirty="0"/>
@@ -17216,7 +17745,7 @@
           <p:cNvPr id="4" name="Picture 2" descr="Quantum machine learning: distance estimation for k-means clustering | by  Sashwat Anagolum | Towards Data Science">
             <a:extLst>
               <a:ext uri="{FF2B5EF4-FFF2-40B4-BE49-F238E27FC236}">
-                <a16:creationId xmlns:a16="http://schemas.microsoft.com/office/drawing/2014/main" id="{9210F1A3-8D21-F13E-A400-833A1EDE2998}"/>
+                <a16:creationId xmlns:a16="http://schemas.microsoft.com/office/drawing/2014/main" xmlns="" id="{9210F1A3-8D21-F13E-A400-833A1EDE2998}"/>
               </a:ext>
             </a:extLst>
           </p:cNvPr>
@@ -17269,7 +17798,7 @@
 </p:sld>
 </file>
 
-<file path=ppt/slides/slide31.xml><?xml version="1.0" encoding="utf-8"?>
+<file path=ppt/slides/slide32.xml><?xml version="1.0" encoding="utf-8"?>
 <p:sld xmlns:a="http://schemas.openxmlformats.org/drawingml/2006/main" xmlns:r="http://schemas.openxmlformats.org/officeDocument/2006/relationships" xmlns:p="http://schemas.openxmlformats.org/presentationml/2006/main">
   <p:cSld>
     <p:spTree>
@@ -17291,7 +17820,7 @@
           <p:cNvPr id="2" name="Título 1">
             <a:extLst>
               <a:ext uri="{FF2B5EF4-FFF2-40B4-BE49-F238E27FC236}">
-                <a16:creationId xmlns:a16="http://schemas.microsoft.com/office/drawing/2014/main" id="{5A7C1863-7C97-79AC-2F35-9281336A5253}"/>
+                <a16:creationId xmlns:a16="http://schemas.microsoft.com/office/drawing/2014/main" xmlns="" id="{5A7C1863-7C97-79AC-2F35-9281336A5253}"/>
               </a:ext>
             </a:extLst>
           </p:cNvPr>
@@ -17320,7 +17849,7 @@
           <p:cNvPr id="3" name="Espaço Reservado para Conteúdo 2">
             <a:extLst>
               <a:ext uri="{FF2B5EF4-FFF2-40B4-BE49-F238E27FC236}">
-                <a16:creationId xmlns:a16="http://schemas.microsoft.com/office/drawing/2014/main" id="{5CF5F738-0911-4080-7C0B-00C85429D100}"/>
+                <a16:creationId xmlns:a16="http://schemas.microsoft.com/office/drawing/2014/main" xmlns="" id="{5CF5F738-0911-4080-7C0B-00C85429D100}"/>
               </a:ext>
             </a:extLst>
           </p:cNvPr>
@@ -17343,7 +17872,19 @@
           <a:p>
             <a:r>
               <a:rPr lang="pt-BR" dirty="0"/>
-              <a:t>Em resumo, todo o processo depende do ponto de partida.</a:t>
+              <a:t>Em resumo, todo o processo </a:t>
+            </a:r>
+            <a:r>
+              <a:rPr lang="pt-BR" b="1" dirty="0">
+                <a:solidFill>
+                  <a:schemeClr val="accent2"/>
+                </a:solidFill>
+              </a:rPr>
+              <a:t>depende do ponto de partida</a:t>
+            </a:r>
+            <a:r>
+              <a:rPr lang="pt-BR" dirty="0"/>
+              <a:t>.</a:t>
             </a:r>
           </a:p>
           <a:p>
@@ -17394,7 +17935,7 @@
           <p:cNvPr id="4" name="Picture 2" descr="Quantum machine learning: distance estimation for k-means clustering | by  Sashwat Anagolum | Towards Data Science">
             <a:extLst>
               <a:ext uri="{FF2B5EF4-FFF2-40B4-BE49-F238E27FC236}">
-                <a16:creationId xmlns:a16="http://schemas.microsoft.com/office/drawing/2014/main" id="{041411F5-12C8-E07A-BDDC-6F27AEAA64BF}"/>
+                <a16:creationId xmlns:a16="http://schemas.microsoft.com/office/drawing/2014/main" xmlns="" id="{041411F5-12C8-E07A-BDDC-6F27AEAA64BF}"/>
               </a:ext>
             </a:extLst>
           </p:cNvPr>
@@ -17439,7 +17980,7 @@
           <p:cNvPr id="5" name="CaixaDeTexto 4">
             <a:extLst>
               <a:ext uri="{FF2B5EF4-FFF2-40B4-BE49-F238E27FC236}">
-                <a16:creationId xmlns:a16="http://schemas.microsoft.com/office/drawing/2014/main" id="{9ACF3B1F-984C-3937-9E90-44AF3710C1EC}"/>
+                <a16:creationId xmlns:a16="http://schemas.microsoft.com/office/drawing/2014/main" xmlns="" id="{9ACF3B1F-984C-3937-9E90-44AF3710C1EC}"/>
               </a:ext>
             </a:extLst>
           </p:cNvPr>
@@ -17448,7 +17989,7 @@
         </p:nvSpPr>
         <p:spPr>
           <a:xfrm>
-            <a:off x="7248525" y="6492875"/>
+            <a:off x="7111365" y="6492875"/>
             <a:ext cx="5064271" cy="369332"/>
           </a:xfrm>
           <a:prstGeom prst="rect">
@@ -17467,8 +18008,8 @@
               <a:t>*O resultado que minimiza a distância </a:t>
             </a:r>
             <a:r>
-              <a:rPr lang="pt-BR" i="1" dirty="0" err="1"/>
-              <a:t>intraclusters</a:t>
+              <a:rPr lang="pt-BR" i="1" dirty="0" err="1" smtClean="0"/>
+              <a:t>intra-clusters</a:t>
             </a:r>
             <a:r>
               <a:rPr lang="pt-BR" dirty="0"/>
@@ -17491,7 +18032,7 @@
 </p:sld>
 </file>
 
-<file path=ppt/slides/slide32.xml><?xml version="1.0" encoding="utf-8"?>
+<file path=ppt/slides/slide33.xml><?xml version="1.0" encoding="utf-8"?>
 <p:sld xmlns:a="http://schemas.openxmlformats.org/drawingml/2006/main" xmlns:r="http://schemas.openxmlformats.org/officeDocument/2006/relationships" xmlns:p="http://schemas.openxmlformats.org/presentationml/2006/main">
   <p:cSld>
     <p:spTree>
@@ -17499,7 +18040,7 @@
         <p:cNvPr id="1" name="">
           <a:extLst>
             <a:ext uri="{FF2B5EF4-FFF2-40B4-BE49-F238E27FC236}">
-              <a16:creationId xmlns:a16="http://schemas.microsoft.com/office/drawing/2014/main" id="{4B1B77C4-9B17-7A8C-9D74-1E6EDF9D99AB}"/>
+              <a16:creationId xmlns:a16="http://schemas.microsoft.com/office/drawing/2014/main" xmlns="" id="{4B1B77C4-9B17-7A8C-9D74-1E6EDF9D99AB}"/>
             </a:ext>
           </a:extLst>
         </p:cNvPr>
@@ -17519,7 +18060,7 @@
           <p:cNvPr id="3" name="Espaço Reservado para Conteúdo 2">
             <a:extLst>
               <a:ext uri="{FF2B5EF4-FFF2-40B4-BE49-F238E27FC236}">
-                <a16:creationId xmlns:a16="http://schemas.microsoft.com/office/drawing/2014/main" id="{33358A61-5705-A1F7-E051-797E22A8C17B}"/>
+                <a16:creationId xmlns:a16="http://schemas.microsoft.com/office/drawing/2014/main" xmlns="" id="{33358A61-5705-A1F7-E051-797E22A8C17B}"/>
               </a:ext>
             </a:extLst>
           </p:cNvPr>
@@ -17573,7 +18114,7 @@
 </p:sld>
 </file>
 
-<file path=ppt/slides/slide33.xml><?xml version="1.0" encoding="utf-8"?>
+<file path=ppt/slides/slide34.xml><?xml version="1.0" encoding="utf-8"?>
 <p:sld xmlns:a="http://schemas.openxmlformats.org/drawingml/2006/main" xmlns:r="http://schemas.openxmlformats.org/officeDocument/2006/relationships" xmlns:p="http://schemas.openxmlformats.org/presentationml/2006/main">
   <p:cSld>
     <p:spTree>
@@ -17595,7 +18136,7 @@
           <p:cNvPr id="2" name="Title 1">
             <a:extLst>
               <a:ext uri="{FF2B5EF4-FFF2-40B4-BE49-F238E27FC236}">
-                <a16:creationId xmlns:a16="http://schemas.microsoft.com/office/drawing/2014/main" id="{D33574C0-6E04-C0DD-EAA0-CBB82A39C711}"/>
+                <a16:creationId xmlns:a16="http://schemas.microsoft.com/office/drawing/2014/main" xmlns="" id="{D33574C0-6E04-C0DD-EAA0-CBB82A39C711}"/>
               </a:ext>
             </a:extLst>
           </p:cNvPr>
@@ -17626,7 +18167,7 @@
               <p:cNvPr id="3" name="Content Placeholder 2">
                 <a:extLst>
                   <a:ext uri="{FF2B5EF4-FFF2-40B4-BE49-F238E27FC236}">
-                    <a16:creationId xmlns:a16="http://schemas.microsoft.com/office/drawing/2014/main" id="{9BBD5BC8-7DE0-62E2-804E-33545D87626B}"/>
+                    <a16:creationId xmlns:a16="http://schemas.microsoft.com/office/drawing/2014/main" xmlns="" id="{9BBD5BC8-7DE0-62E2-804E-33545D87626B}"/>
                   </a:ext>
                 </a:extLst>
               </p:cNvPr>
@@ -17735,7 +18276,15 @@
               <a:p>
                 <a:r>
                   <a:rPr lang="pt-BR" noProof="0" dirty="0"/>
-                  <a:t>Que métrica usamos para plotar a curva e encontrar o cotovelo?</a:t>
+                  <a:t>Que métrica usamos para plotar a </a:t>
+                </a:r>
+                <a:r>
+                  <a:rPr lang="pt-BR" noProof="0" dirty="0" smtClean="0"/>
+                  <a:t>curva ao lado </a:t>
+                </a:r>
+                <a:r>
+                  <a:rPr lang="pt-BR" noProof="0" dirty="0"/>
+                  <a:t>e encontrar o cotovelo?</a:t>
                 </a:r>
               </a:p>
               <a:p>
@@ -17750,7 +18299,7 @@
               <p:cNvPr id="3" name="Content Placeholder 2">
                 <a:extLst>
                   <a:ext uri="{FF2B5EF4-FFF2-40B4-BE49-F238E27FC236}">
-                    <a16:creationId xmlns:a16="http://schemas.microsoft.com/office/drawing/2014/main" id="{9BBD5BC8-7DE0-62E2-804E-33545D87626B}"/>
+                    <a16:creationId xmlns:a16="http://schemas.microsoft.com/office/drawing/2014/main" xmlns:a14="http://schemas.microsoft.com/office/drawing/2010/main" xmlns="" id="{9BBD5BC8-7DE0-62E2-804E-33545D87626B}"/>
                   </a:ext>
                 </a:extLst>
               </p:cNvPr>
@@ -17766,10 +18315,10 @@
                 <a:off x="5730240" y="1825624"/>
                 <a:ext cx="6461760" cy="5032375"/>
               </a:xfrm>
-              <a:blipFill>
+              <a:blipFill rotWithShape="0">
                 <a:blip r:embed="rId3"/>
                 <a:stretch>
-                  <a:fillRect l="-1698" t="-1937" r="-2736"/>
+                  <a:fillRect l="-1698" t="-1937"/>
                 </a:stretch>
               </a:blipFill>
             </p:spPr>
@@ -17778,7 +18327,7 @@
               <a:lstStyle/>
               <a:p>
                 <a:r>
-                  <a:rPr lang="en-US">
+                  <a:rPr lang="pt-BR">
                     <a:noFill/>
                   </a:rPr>
                   <a:t> </a:t>
@@ -17793,7 +18342,7 @@
           <p:cNvPr id="1026" name="Picture 2" descr="K-Means: Getting the Optimal Number of Clusters- Analytics Vidhya">
             <a:extLst>
               <a:ext uri="{FF2B5EF4-FFF2-40B4-BE49-F238E27FC236}">
-                <a16:creationId xmlns:a16="http://schemas.microsoft.com/office/drawing/2014/main" id="{5704EB20-2972-D237-4FE5-23EBC8E55F97}"/>
+                <a16:creationId xmlns:a16="http://schemas.microsoft.com/office/drawing/2014/main" xmlns="" id="{5704EB20-2972-D237-4FE5-23EBC8E55F97}"/>
               </a:ext>
             </a:extLst>
           </p:cNvPr>
@@ -17848,7 +18397,7 @@
 </p:sld>
 </file>
 
-<file path=ppt/slides/slide34.xml><?xml version="1.0" encoding="utf-8"?>
+<file path=ppt/slides/slide35.xml><?xml version="1.0" encoding="utf-8"?>
 <p:sld xmlns:a="http://schemas.openxmlformats.org/drawingml/2006/main" xmlns:r="http://schemas.openxmlformats.org/officeDocument/2006/relationships" xmlns:p="http://schemas.openxmlformats.org/presentationml/2006/main">
   <p:cSld>
     <p:spTree>
@@ -17856,7 +18405,7 @@
         <p:cNvPr id="1" name="">
           <a:extLst>
             <a:ext uri="{FF2B5EF4-FFF2-40B4-BE49-F238E27FC236}">
-              <a16:creationId xmlns:a16="http://schemas.microsoft.com/office/drawing/2014/main" id="{87908164-8DED-57E8-103F-9479D1C12B23}"/>
+              <a16:creationId xmlns:a16="http://schemas.microsoft.com/office/drawing/2014/main" xmlns="" id="{87908164-8DED-57E8-103F-9479D1C12B23}"/>
             </a:ext>
           </a:extLst>
         </p:cNvPr>
@@ -17876,7 +18425,7 @@
           <p:cNvPr id="2" name="Title 1">
             <a:extLst>
               <a:ext uri="{FF2B5EF4-FFF2-40B4-BE49-F238E27FC236}">
-                <a16:creationId xmlns:a16="http://schemas.microsoft.com/office/drawing/2014/main" id="{B5A49F49-61D7-0208-3364-6E7A9D6433FC}"/>
+                <a16:creationId xmlns:a16="http://schemas.microsoft.com/office/drawing/2014/main" xmlns="" id="{B5A49F49-61D7-0208-3364-6E7A9D6433FC}"/>
               </a:ext>
             </a:extLst>
           </p:cNvPr>
@@ -17915,7 +18464,7 @@
               <p:cNvPr id="3" name="Content Placeholder 2">
                 <a:extLst>
                   <a:ext uri="{FF2B5EF4-FFF2-40B4-BE49-F238E27FC236}">
-                    <a16:creationId xmlns:a16="http://schemas.microsoft.com/office/drawing/2014/main" id="{62BBDDAA-8E03-1533-DC27-B212B34350D5}"/>
+                    <a16:creationId xmlns:a16="http://schemas.microsoft.com/office/drawing/2014/main" xmlns="" id="{62BBDDAA-8E03-1533-DC27-B212B34350D5}"/>
                   </a:ext>
                 </a:extLst>
               </p:cNvPr>
@@ -17939,15 +18488,31 @@
               <a:lstStyle/>
               <a:p>
                 <a:r>
-                  <a:rPr lang="pt-BR" noProof="0" dirty="0"/>
-                  <a:t>Usa-se a soma dos quadrados </a:t>
-                </a:r>
-                <a:r>
-                  <a:rPr lang="pt-BR" noProof="0" dirty="0" err="1"/>
+                  <a:rPr lang="pt-BR" noProof="0" dirty="0" smtClean="0"/>
+                  <a:t>Usa-se a </a:t>
+                </a:r>
+                <a:r>
+                  <a:rPr lang="pt-BR" b="1" noProof="0" dirty="0" smtClean="0">
+                    <a:solidFill>
+                      <a:srgbClr val="00B050"/>
+                    </a:solidFill>
+                  </a:rPr>
+                  <a:t>soma dos quadrados das distâncias </a:t>
+                </a:r>
+                <a:r>
+                  <a:rPr lang="pt-BR" b="1" noProof="0" dirty="0" err="1" smtClean="0">
+                    <a:solidFill>
+                      <a:srgbClr val="00B050"/>
+                    </a:solidFill>
+                  </a:rPr>
                   <a:t>intra-</a:t>
                 </a:r>
                 <a:r>
-                  <a:rPr lang="pt-BR" i="1" noProof="0" dirty="0" err="1"/>
+                  <a:rPr lang="pt-BR" b="1" i="1" noProof="0" dirty="0" err="1" smtClean="0">
+                    <a:solidFill>
+                      <a:srgbClr val="00B050"/>
+                    </a:solidFill>
+                  </a:rPr>
                   <a:t>clusters</a:t>
                 </a:r>
                 <a:r>
@@ -17955,7 +18520,11 @@
                   <a:t>, também conhecida como </a:t>
                 </a:r>
                 <a:r>
-                  <a:rPr lang="pt-BR" b="1" noProof="0" dirty="0"/>
+                  <a:rPr lang="pt-BR" b="1" noProof="0" dirty="0">
+                    <a:solidFill>
+                      <a:schemeClr val="accent2"/>
+                    </a:solidFill>
+                  </a:rPr>
                   <a:t>inércia</a:t>
                 </a:r>
               </a:p>
@@ -17975,23 +18544,28 @@
                         </a:rPr>
                         <m:t>𝐼</m:t>
                       </m:r>
+                      <m:d>
+                        <m:dPr>
+                          <m:ctrlPr>
+                            <a:rPr lang="pt-BR" b="0" i="1" noProof="0" smtClean="0">
+                              <a:latin typeface="Cambria Math" panose="02040503050406030204" pitchFamily="18" charset="0"/>
+                            </a:rPr>
+                          </m:ctrlPr>
+                        </m:dPr>
+                        <m:e>
+                          <m:r>
+                            <a:rPr lang="pt-BR" b="0" i="1" noProof="0" smtClean="0">
+                              <a:latin typeface="Cambria Math" panose="02040503050406030204" pitchFamily="18" charset="0"/>
+                            </a:rPr>
+                            <m:t>𝑘</m:t>
+                          </m:r>
+                        </m:e>
+                      </m:d>
                       <m:r>
                         <a:rPr lang="pt-BR" b="0" i="1" noProof="0" smtClean="0">
                           <a:latin typeface="Cambria Math" panose="02040503050406030204" pitchFamily="18" charset="0"/>
                         </a:rPr>
-                        <m:t>(</m:t>
-                      </m:r>
-                      <m:r>
-                        <a:rPr lang="pt-BR" b="0" i="1" noProof="0" smtClean="0">
-                          <a:latin typeface="Cambria Math" panose="02040503050406030204" pitchFamily="18" charset="0"/>
-                        </a:rPr>
-                        <m:t>𝑘</m:t>
-                      </m:r>
-                      <m:r>
-                        <a:rPr lang="pt-BR" b="0" i="1" noProof="0" smtClean="0">
-                          <a:latin typeface="Cambria Math" panose="02040503050406030204" pitchFamily="18" charset="0"/>
-                        </a:rPr>
-                        <m:t>)=</m:t>
+                        <m:t>=</m:t>
                       </m:r>
                       <m:nary>
                         <m:naryPr>
@@ -18173,6 +18747,12 @@
                           </m:nary>
                         </m:e>
                       </m:nary>
+                      <m:r>
+                        <a:rPr lang="pt-BR" b="0" i="1" noProof="0" smtClean="0">
+                          <a:latin typeface="Cambria Math" panose="02040503050406030204" pitchFamily="18" charset="0"/>
+                        </a:rPr>
+                        <m:t>,</m:t>
+                      </m:r>
                     </m:oMath>
                   </m:oMathPara>
                 </a14:m>
@@ -18422,7 +19002,7 @@
               <p:cNvPr id="3" name="Content Placeholder 2">
                 <a:extLst>
                   <a:ext uri="{FF2B5EF4-FFF2-40B4-BE49-F238E27FC236}">
-                    <a16:creationId xmlns:a16="http://schemas.microsoft.com/office/drawing/2014/main" id="{62BBDDAA-8E03-1533-DC27-B212B34350D5}"/>
+                    <a16:creationId xmlns:a16="http://schemas.microsoft.com/office/drawing/2014/main" xmlns:a14="http://schemas.microsoft.com/office/drawing/2010/main" xmlns="" id="{62BBDDAA-8E03-1533-DC27-B212B34350D5}"/>
                   </a:ext>
                 </a:extLst>
               </p:cNvPr>
@@ -18438,7 +19018,7 @@
                 <a:off x="5514975" y="1825624"/>
                 <a:ext cx="6575425" cy="5032375"/>
               </a:xfrm>
-              <a:blipFill>
+              <a:blipFill rotWithShape="0">
                 <a:blip r:embed="rId3"/>
                 <a:stretch>
                   <a:fillRect l="-1948" t="-1937" r="-1948"/>
@@ -18450,7 +19030,7 @@
               <a:lstStyle/>
               <a:p>
                 <a:r>
-                  <a:rPr lang="en-US">
+                  <a:rPr lang="pt-BR">
                     <a:noFill/>
                   </a:rPr>
                   <a:t> </a:t>
@@ -18465,7 +19045,7 @@
           <p:cNvPr id="1026" name="Picture 2" descr="K-Means: Getting the Optimal Number of Clusters- Analytics Vidhya">
             <a:extLst>
               <a:ext uri="{FF2B5EF4-FFF2-40B4-BE49-F238E27FC236}">
-                <a16:creationId xmlns:a16="http://schemas.microsoft.com/office/drawing/2014/main" id="{6CFEC85E-0DF3-CC25-5FF3-CFFD6DEE23BA}"/>
+                <a16:creationId xmlns:a16="http://schemas.microsoft.com/office/drawing/2014/main" xmlns="" id="{6CFEC85E-0DF3-CC25-5FF3-CFFD6DEE23BA}"/>
               </a:ext>
             </a:extLst>
           </p:cNvPr>
@@ -18520,7 +19100,7 @@
 </p:sld>
 </file>
 
-<file path=ppt/slides/slide35.xml><?xml version="1.0" encoding="utf-8"?>
+<file path=ppt/slides/slide36.xml><?xml version="1.0" encoding="utf-8"?>
 <p:sld xmlns:a="http://schemas.openxmlformats.org/drawingml/2006/main" xmlns:r="http://schemas.openxmlformats.org/officeDocument/2006/relationships" xmlns:p="http://schemas.openxmlformats.org/presentationml/2006/main">
   <p:cSld>
     <p:spTree>
@@ -18528,7 +19108,7 @@
         <p:cNvPr id="1" name="">
           <a:extLst>
             <a:ext uri="{FF2B5EF4-FFF2-40B4-BE49-F238E27FC236}">
-              <a16:creationId xmlns:a16="http://schemas.microsoft.com/office/drawing/2014/main" id="{87DFA626-DD2F-2FAE-B6DB-E3A8F4CF8024}"/>
+              <a16:creationId xmlns:a16="http://schemas.microsoft.com/office/drawing/2014/main" xmlns="" id="{87DFA626-DD2F-2FAE-B6DB-E3A8F4CF8024}"/>
             </a:ext>
           </a:extLst>
         </p:cNvPr>
@@ -18548,7 +19128,7 @@
           <p:cNvPr id="2" name="Title 1">
             <a:extLst>
               <a:ext uri="{FF2B5EF4-FFF2-40B4-BE49-F238E27FC236}">
-                <a16:creationId xmlns:a16="http://schemas.microsoft.com/office/drawing/2014/main" id="{B7352CA9-0A26-4AAF-CC50-88C9A6412588}"/>
+                <a16:creationId xmlns:a16="http://schemas.microsoft.com/office/drawing/2014/main" xmlns="" id="{B7352CA9-0A26-4AAF-CC50-88C9A6412588}"/>
               </a:ext>
             </a:extLst>
           </p:cNvPr>
@@ -18580,14 +19160,14 @@
           </a:p>
         </p:txBody>
       </p:sp>
-      <mc:AlternateContent xmlns:mc="http://schemas.openxmlformats.org/markup-compatibility/2006">
-        <mc:Choice xmlns:a14="http://schemas.microsoft.com/office/drawing/2010/main" Requires="a14">
+      <mc:AlternateContent xmlns:mc="http://schemas.openxmlformats.org/markup-compatibility/2006" xmlns:a14="http://schemas.microsoft.com/office/drawing/2010/main">
+        <mc:Choice Requires="a14">
           <p:sp>
             <p:nvSpPr>
               <p:cNvPr id="3" name="Content Placeholder 2">
                 <a:extLst>
                   <a:ext uri="{FF2B5EF4-FFF2-40B4-BE49-F238E27FC236}">
-                    <a16:creationId xmlns:a16="http://schemas.microsoft.com/office/drawing/2014/main" id="{E2384B4F-7F1C-F6F4-111C-53CD600364F9}"/>
+                    <a16:creationId xmlns:a16="http://schemas.microsoft.com/office/drawing/2014/main" xmlns="" id="{E2384B4F-7F1C-F6F4-111C-53CD600364F9}"/>
                   </a:ext>
                 </a:extLst>
               </p:cNvPr>
@@ -18725,7 +19305,7 @@
             </p:txBody>
           </p:sp>
         </mc:Choice>
-        <mc:Fallback>
+        <mc:Fallback xmlns="">
           <p:sp>
             <p:nvSpPr>
               <p:cNvPr id="3" name="Content Placeholder 2">
@@ -18774,7 +19354,7 @@
           <p:cNvPr id="1026" name="Picture 2" descr="K-Means: Getting the Optimal Number of Clusters- Analytics Vidhya">
             <a:extLst>
               <a:ext uri="{FF2B5EF4-FFF2-40B4-BE49-F238E27FC236}">
-                <a16:creationId xmlns:a16="http://schemas.microsoft.com/office/drawing/2014/main" id="{6A39DB7C-77E9-9B78-DDB1-E282620D563F}"/>
+                <a16:creationId xmlns:a16="http://schemas.microsoft.com/office/drawing/2014/main" xmlns="" id="{6A39DB7C-77E9-9B78-DDB1-E282620D563F}"/>
               </a:ext>
             </a:extLst>
           </p:cNvPr>
@@ -18829,7 +19409,7 @@
 </p:sld>
 </file>
 
-<file path=ppt/slides/slide36.xml><?xml version="1.0" encoding="utf-8"?>
+<file path=ppt/slides/slide37.xml><?xml version="1.0" encoding="utf-8"?>
 <p:sld xmlns:a="http://schemas.openxmlformats.org/drawingml/2006/main" xmlns:r="http://schemas.openxmlformats.org/officeDocument/2006/relationships" xmlns:p="http://schemas.openxmlformats.org/presentationml/2006/main">
   <p:cSld>
     <p:spTree>
@@ -18837,7 +19417,7 @@
         <p:cNvPr id="1" name="">
           <a:extLst>
             <a:ext uri="{FF2B5EF4-FFF2-40B4-BE49-F238E27FC236}">
-              <a16:creationId xmlns:a16="http://schemas.microsoft.com/office/drawing/2014/main" id="{80E41F28-4876-5B0D-7F6C-0F152E330D44}"/>
+              <a16:creationId xmlns:a16="http://schemas.microsoft.com/office/drawing/2014/main" xmlns="" id="{80E41F28-4876-5B0D-7F6C-0F152E330D44}"/>
             </a:ext>
           </a:extLst>
         </p:cNvPr>
@@ -18857,7 +19437,7 @@
           <p:cNvPr id="2" name="Title 1">
             <a:extLst>
               <a:ext uri="{FF2B5EF4-FFF2-40B4-BE49-F238E27FC236}">
-                <a16:creationId xmlns:a16="http://schemas.microsoft.com/office/drawing/2014/main" id="{3C9425F9-4CBE-8456-1A61-B7A51F1FAC86}"/>
+                <a16:creationId xmlns:a16="http://schemas.microsoft.com/office/drawing/2014/main" xmlns="" id="{3C9425F9-4CBE-8456-1A61-B7A51F1FAC86}"/>
               </a:ext>
             </a:extLst>
           </p:cNvPr>
@@ -18896,7 +19476,7 @@
               <p:cNvPr id="3" name="Content Placeholder 2">
                 <a:extLst>
                   <a:ext uri="{FF2B5EF4-FFF2-40B4-BE49-F238E27FC236}">
-                    <a16:creationId xmlns:a16="http://schemas.microsoft.com/office/drawing/2014/main" id="{26A65B5D-EAEC-B338-BC6A-DAC5DA0B1384}"/>
+                    <a16:creationId xmlns:a16="http://schemas.microsoft.com/office/drawing/2014/main" xmlns="" id="{26A65B5D-EAEC-B338-BC6A-DAC5DA0B1384}"/>
                   </a:ext>
                 </a:extLst>
               </p:cNvPr>
@@ -18921,7 +19501,19 @@
               <a:p>
                 <a:r>
                   <a:rPr lang="pt-BR" dirty="0"/>
-                  <a:t>Calcula-se e plota-se o valor da inércia para um intervalo de valores de </a:t>
+                  <a:t>Calcula-se e plota-se o </a:t>
+                </a:r>
+                <a:r>
+                  <a:rPr lang="pt-BR" b="1" dirty="0">
+                    <a:solidFill>
+                      <a:schemeClr val="accent5"/>
+                    </a:solidFill>
+                  </a:rPr>
+                  <a:t>valor da inércia para um intervalo</a:t>
+                </a:r>
+                <a:r>
+                  <a:rPr lang="pt-BR" dirty="0"/>
+                  <a:t> de valores de </a:t>
                 </a:r>
                 <a14:m>
                   <m:oMath xmlns:m="http://schemas.openxmlformats.org/officeDocument/2006/math">
@@ -19021,12 +19613,52 @@
                       <a:srgbClr val="00B050"/>
                     </a:solidFill>
                   </a:rPr>
-                  <a:t>próximos entre si e do centroide</a:t>
-                </a:r>
+                  <a:t>próximos entre si e do </a:t>
+                </a:r>
+                <a:r>
+                  <a:rPr lang="pt-BR" b="1" dirty="0" smtClean="0">
+                    <a:solidFill>
+                      <a:srgbClr val="00B050"/>
+                    </a:solidFill>
+                  </a:rPr>
+                  <a:t>centroide</a:t>
+                </a:r>
+                <a:endParaRPr lang="pt-BR" dirty="0" smtClean="0"/>
+              </a:p>
+              <a:p>
+                <a:pPr lvl="1">
+                  <a:buFont typeface="Wingdings" panose="05000000000000000000" pitchFamily="2" charset="2"/>
+                  <a:buChar char="§"/>
+                </a:pPr>
                 <a:r>
                   <a:rPr lang="pt-BR" dirty="0"/>
+                  <a:t>e</a:t>
+                </a:r>
+                <a:r>
+                  <a:rPr lang="pt-BR" dirty="0" smtClean="0"/>
+                  <a:t> </a:t>
+                </a:r>
+                <a:r>
+                  <a:rPr lang="pt-BR" b="1" dirty="0" smtClean="0">
+                    <a:solidFill>
+                      <a:schemeClr val="accent5"/>
+                    </a:solidFill>
+                  </a:rPr>
+                  <a:t>distantes dos outros </a:t>
+                </a:r>
+                <a:r>
+                  <a:rPr lang="pt-BR" b="1" i="1" dirty="0" smtClean="0">
+                    <a:solidFill>
+                      <a:schemeClr val="accent5"/>
+                    </a:solidFill>
+                  </a:rPr>
+                  <a:t>clusters</a:t>
+                </a:r>
+                <a:r>
+                  <a:rPr lang="pt-BR" dirty="0" smtClean="0"/>
                   <a:t>.</a:t>
                 </a:r>
+                <a:endParaRPr lang="pt-BR" dirty="0"/>
               </a:p>
             </p:txBody>
           </p:sp>
@@ -19037,7 +19669,7 @@
               <p:cNvPr id="3" name="Content Placeholder 2">
                 <a:extLst>
                   <a:ext uri="{FF2B5EF4-FFF2-40B4-BE49-F238E27FC236}">
-                    <a16:creationId xmlns:a16="http://schemas.microsoft.com/office/drawing/2014/main" id="{26A65B5D-EAEC-B338-BC6A-DAC5DA0B1384}"/>
+                    <a16:creationId xmlns:a16="http://schemas.microsoft.com/office/drawing/2014/main" xmlns:a14="http://schemas.microsoft.com/office/drawing/2010/main" xmlns="" id="{26A65B5D-EAEC-B338-BC6A-DAC5DA0B1384}"/>
                   </a:ext>
                 </a:extLst>
               </p:cNvPr>
@@ -19053,7 +19685,7 @@
                 <a:off x="5943600" y="1825624"/>
                 <a:ext cx="6248400" cy="5032375"/>
               </a:xfrm>
-              <a:blipFill>
+              <a:blipFill rotWithShape="0">
                 <a:blip r:embed="rId2"/>
                 <a:stretch>
                   <a:fillRect l="-1756" t="-1937" r="-1854"/>
@@ -19065,7 +19697,7 @@
               <a:lstStyle/>
               <a:p>
                 <a:r>
-                  <a:rPr lang="en-US">
+                  <a:rPr lang="pt-BR">
                     <a:noFill/>
                   </a:rPr>
                   <a:t> </a:t>
@@ -19080,7 +19712,7 @@
           <p:cNvPr id="1026" name="Picture 2" descr="K-Means: Getting the Optimal Number of Clusters- Analytics Vidhya">
             <a:extLst>
               <a:ext uri="{FF2B5EF4-FFF2-40B4-BE49-F238E27FC236}">
-                <a16:creationId xmlns:a16="http://schemas.microsoft.com/office/drawing/2014/main" id="{8E934D73-7290-09A0-C88B-24CA35D9280A}"/>
+                <a16:creationId xmlns:a16="http://schemas.microsoft.com/office/drawing/2014/main" xmlns="" id="{8E934D73-7290-09A0-C88B-24CA35D9280A}"/>
               </a:ext>
             </a:extLst>
           </p:cNvPr>
@@ -19135,7 +19767,7 @@
 </p:sld>
 </file>
 
-<file path=ppt/slides/slide37.xml><?xml version="1.0" encoding="utf-8"?>
+<file path=ppt/slides/slide38.xml><?xml version="1.0" encoding="utf-8"?>
 <p:sld xmlns:a="http://schemas.openxmlformats.org/drawingml/2006/main" xmlns:r="http://schemas.openxmlformats.org/officeDocument/2006/relationships" xmlns:p="http://schemas.openxmlformats.org/presentationml/2006/main">
   <p:cSld>
     <p:spTree>
@@ -19143,7 +19775,7 @@
         <p:cNvPr id="1" name="">
           <a:extLst>
             <a:ext uri="{FF2B5EF4-FFF2-40B4-BE49-F238E27FC236}">
-              <a16:creationId xmlns:a16="http://schemas.microsoft.com/office/drawing/2014/main" id="{B7B07C05-733D-F365-8063-0C296100784E}"/>
+              <a16:creationId xmlns:a16="http://schemas.microsoft.com/office/drawing/2014/main" xmlns="" id="{B7B07C05-733D-F365-8063-0C296100784E}"/>
             </a:ext>
           </a:extLst>
         </p:cNvPr>
@@ -19163,7 +19795,7 @@
           <p:cNvPr id="2" name="Title 1">
             <a:extLst>
               <a:ext uri="{FF2B5EF4-FFF2-40B4-BE49-F238E27FC236}">
-                <a16:creationId xmlns:a16="http://schemas.microsoft.com/office/drawing/2014/main" id="{0CA87339-937F-71D3-5575-377273E7022F}"/>
+                <a16:creationId xmlns:a16="http://schemas.microsoft.com/office/drawing/2014/main" xmlns="" id="{0CA87339-937F-71D3-5575-377273E7022F}"/>
               </a:ext>
             </a:extLst>
           </p:cNvPr>
@@ -19202,7 +19834,7 @@
               <p:cNvPr id="3" name="Content Placeholder 2">
                 <a:extLst>
                   <a:ext uri="{FF2B5EF4-FFF2-40B4-BE49-F238E27FC236}">
-                    <a16:creationId xmlns:a16="http://schemas.microsoft.com/office/drawing/2014/main" id="{574CDA6D-9D3D-7343-173D-1326829D74DB}"/>
+                    <a16:creationId xmlns:a16="http://schemas.microsoft.com/office/drawing/2014/main" xmlns="" id="{574CDA6D-9D3D-7343-173D-1326829D74DB}"/>
                   </a:ext>
                 </a:extLst>
               </p:cNvPr>
@@ -19259,7 +19891,15 @@
               <a:p>
                 <a:r>
                   <a:rPr lang="pt-BR" dirty="0"/>
-                  <a:t>Quando o cotovelo não é visível (transição suave), uma técnica comum é traçar uma </a:t>
+                  <a:t>Quando o </a:t>
+                </a:r>
+                <a:r>
+                  <a:rPr lang="pt-BR" b="1" dirty="0"/>
+                  <a:t>cotovelo não é visível </a:t>
+                </a:r>
+                <a:r>
+                  <a:rPr lang="pt-BR" dirty="0"/>
+                  <a:t>(transição suave), uma técnica comum é traçar uma </a:t>
                 </a:r>
                 <a:r>
                   <a:rPr lang="pt-BR" b="1" dirty="0">
@@ -19310,7 +19950,7 @@
               <p:cNvPr id="3" name="Content Placeholder 2">
                 <a:extLst>
                   <a:ext uri="{FF2B5EF4-FFF2-40B4-BE49-F238E27FC236}">
-                    <a16:creationId xmlns:a16="http://schemas.microsoft.com/office/drawing/2014/main" id="{574CDA6D-9D3D-7343-173D-1326829D74DB}"/>
+                    <a16:creationId xmlns:a16="http://schemas.microsoft.com/office/drawing/2014/main" xmlns:a14="http://schemas.microsoft.com/office/drawing/2010/main" xmlns="" id="{574CDA6D-9D3D-7343-173D-1326829D74DB}"/>
                   </a:ext>
                 </a:extLst>
               </p:cNvPr>
@@ -19326,7 +19966,7 @@
                 <a:off x="5943600" y="1825624"/>
                 <a:ext cx="6156960" cy="5032375"/>
               </a:xfrm>
-              <a:blipFill>
+              <a:blipFill rotWithShape="0">
                 <a:blip r:embed="rId2"/>
                 <a:stretch>
                   <a:fillRect l="-1782" t="-1937" r="-2673"/>
@@ -19338,7 +19978,7 @@
               <a:lstStyle/>
               <a:p>
                 <a:r>
-                  <a:rPr lang="en-US">
+                  <a:rPr lang="pt-BR">
                     <a:noFill/>
                   </a:rPr>
                   <a:t> </a:t>
@@ -19353,7 +19993,7 @@
           <p:cNvPr id="1026" name="Picture 2" descr="K-Means: Getting the Optimal Number of Clusters- Analytics Vidhya">
             <a:extLst>
               <a:ext uri="{FF2B5EF4-FFF2-40B4-BE49-F238E27FC236}">
-                <a16:creationId xmlns:a16="http://schemas.microsoft.com/office/drawing/2014/main" id="{E3714189-5C25-70A9-3FD4-7F7A02D9BA2A}"/>
+                <a16:creationId xmlns:a16="http://schemas.microsoft.com/office/drawing/2014/main" xmlns="" id="{E3714189-5C25-70A9-3FD4-7F7A02D9BA2A}"/>
               </a:ext>
             </a:extLst>
           </p:cNvPr>
@@ -19408,7 +20048,7 @@
 </p:sld>
 </file>
 
-<file path=ppt/slides/slide38.xml><?xml version="1.0" encoding="utf-8"?>
+<file path=ppt/slides/slide39.xml><?xml version="1.0" encoding="utf-8"?>
 <p:sld xmlns:a="http://schemas.openxmlformats.org/drawingml/2006/main" xmlns:r="http://schemas.openxmlformats.org/officeDocument/2006/relationships" xmlns:p="http://schemas.openxmlformats.org/presentationml/2006/main">
   <p:cSld>
     <p:spTree>
@@ -19430,7 +20070,7 @@
           <p:cNvPr id="2" name="Title 1">
             <a:extLst>
               <a:ext uri="{FF2B5EF4-FFF2-40B4-BE49-F238E27FC236}">
-                <a16:creationId xmlns:a16="http://schemas.microsoft.com/office/drawing/2014/main" id="{A07C804B-5A43-5C89-0C42-420DDBB1CA5A}"/>
+                <a16:creationId xmlns:a16="http://schemas.microsoft.com/office/drawing/2014/main" xmlns="" id="{A07C804B-5A43-5C89-0C42-420DDBB1CA5A}"/>
               </a:ext>
             </a:extLst>
           </p:cNvPr>
@@ -19465,7 +20105,7 @@
               <p:cNvPr id="3" name="Content Placeholder 2">
                 <a:extLst>
                   <a:ext uri="{FF2B5EF4-FFF2-40B4-BE49-F238E27FC236}">
-                    <a16:creationId xmlns:a16="http://schemas.microsoft.com/office/drawing/2014/main" id="{288A7DCE-B5C5-82F5-CC2A-E963BDDE03C9}"/>
+                    <a16:creationId xmlns:a16="http://schemas.microsoft.com/office/drawing/2014/main" xmlns="" id="{288A7DCE-B5C5-82F5-CC2A-E963BDDE03C9}"/>
                   </a:ext>
                 </a:extLst>
               </p:cNvPr>
@@ -19746,7 +20386,9 @@
                 <a14:m>
                   <m:oMath xmlns:m="http://schemas.openxmlformats.org/officeDocument/2006/math">
                     <m:r>
-                      <a:rPr lang="en-US" i="1"/>
+                      <a:rPr lang="en-US" i="1">
+                        <a:latin typeface="Cambria Math" panose="02040503050406030204" pitchFamily="18" charset="0"/>
+                      </a:rPr>
                       <m:t>𝜀</m:t>
                     </m:r>
                   </m:oMath>
@@ -19886,7 +20528,9 @@
                 <a14:m>
                   <m:oMath xmlns:m="http://schemas.openxmlformats.org/officeDocument/2006/math">
                     <m:r>
-                      <a:rPr lang="en-US" i="1"/>
+                      <a:rPr lang="en-US" i="1">
+                        <a:latin typeface="Cambria Math" panose="02040503050406030204" pitchFamily="18" charset="0"/>
+                      </a:rPr>
                       <m:t>𝜀</m:t>
                     </m:r>
                   </m:oMath>
@@ -19936,31 +20580,59 @@
                   <a:t> </a:t>
                 </a:r>
                 <a:r>
-                  <a:rPr lang="en-US" i="1" dirty="0"/>
+                  <a:rPr lang="en-US" b="1" i="1" dirty="0">
+                    <a:solidFill>
+                      <a:schemeClr val="accent2"/>
+                    </a:solidFill>
+                  </a:rPr>
                   <a:t>clusters</a:t>
                 </a:r>
                 <a:r>
-                  <a:rPr lang="en-US" dirty="0"/>
+                  <a:rPr lang="en-US" b="1" dirty="0">
+                    <a:solidFill>
+                      <a:schemeClr val="accent2"/>
+                    </a:solidFill>
+                  </a:rPr>
                   <a:t> </a:t>
                 </a:r>
                 <a:r>
-                  <a:rPr lang="en-US" dirty="0" err="1"/>
+                  <a:rPr lang="en-US" b="1" dirty="0" err="1">
+                    <a:solidFill>
+                      <a:schemeClr val="accent2"/>
+                    </a:solidFill>
+                  </a:rPr>
                   <a:t>possuem</a:t>
                 </a:r>
                 <a:r>
-                  <a:rPr lang="en-US" dirty="0"/>
+                  <a:rPr lang="en-US" b="1" dirty="0">
+                    <a:solidFill>
+                      <a:schemeClr val="accent2"/>
+                    </a:solidFill>
+                  </a:rPr>
                   <a:t> </a:t>
                 </a:r>
                 <a:r>
-                  <a:rPr lang="en-US" dirty="0" err="1"/>
+                  <a:rPr lang="en-US" b="1" dirty="0" err="1">
+                    <a:solidFill>
+                      <a:schemeClr val="accent2"/>
+                    </a:solidFill>
+                  </a:rPr>
                   <a:t>densidades</a:t>
                 </a:r>
                 <a:r>
-                  <a:rPr lang="en-US" dirty="0"/>
+                  <a:rPr lang="en-US" b="1" dirty="0">
+                    <a:solidFill>
+                      <a:schemeClr val="accent2"/>
+                    </a:solidFill>
+                  </a:rPr>
                   <a:t> </a:t>
                 </a:r>
                 <a:r>
-                  <a:rPr lang="en-US" dirty="0" err="1"/>
+                  <a:rPr lang="en-US" b="1" dirty="0" err="1">
+                    <a:solidFill>
+                      <a:schemeClr val="accent2"/>
+                    </a:solidFill>
+                  </a:rPr>
                   <a:t>diferentes</a:t>
                 </a:r>
                 <a:r>
@@ -19977,7 +20649,7 @@
               <p:cNvPr id="3" name="Content Placeholder 2">
                 <a:extLst>
                   <a:ext uri="{FF2B5EF4-FFF2-40B4-BE49-F238E27FC236}">
-                    <a16:creationId xmlns:a16="http://schemas.microsoft.com/office/drawing/2014/main" id="{288A7DCE-B5C5-82F5-CC2A-E963BDDE03C9}"/>
+                    <a16:creationId xmlns:a16="http://schemas.microsoft.com/office/drawing/2014/main" xmlns:a14="http://schemas.microsoft.com/office/drawing/2010/main" xmlns="" id="{288A7DCE-B5C5-82F5-CC2A-E963BDDE03C9}"/>
                   </a:ext>
                 </a:extLst>
               </p:cNvPr>
@@ -19993,7 +20665,7 @@
                 <a:off x="838200" y="1825624"/>
                 <a:ext cx="11262360" cy="5032375"/>
               </a:xfrm>
-              <a:blipFill>
+              <a:blipFill rotWithShape="0">
                 <a:blip r:embed="rId3"/>
                 <a:stretch>
                   <a:fillRect l="-975" t="-1937" r="-704"/>
@@ -20005,7 +20677,7 @@
               <a:lstStyle/>
               <a:p>
                 <a:r>
-                  <a:rPr lang="en-US">
+                  <a:rPr lang="pt-BR">
                     <a:noFill/>
                   </a:rPr>
                   <a:t> </a:t>
@@ -20019,658 +20691,6 @@
     <p:extLst>
       <p:ext uri="{BB962C8B-B14F-4D97-AF65-F5344CB8AC3E}">
         <p14:creationId xmlns:p14="http://schemas.microsoft.com/office/powerpoint/2010/main" val="3933081201"/>
-      </p:ext>
-    </p:extLst>
-  </p:cSld>
-  <p:clrMapOvr>
-    <a:masterClrMapping/>
-  </p:clrMapOvr>
-</p:sld>
-</file>
-
-<file path=ppt/slides/slide39.xml><?xml version="1.0" encoding="utf-8"?>
-<p:sld xmlns:a="http://schemas.openxmlformats.org/drawingml/2006/main" xmlns:r="http://schemas.openxmlformats.org/officeDocument/2006/relationships" xmlns:p="http://schemas.openxmlformats.org/presentationml/2006/main">
-  <p:cSld>
-    <p:spTree>
-      <p:nvGrpSpPr>
-        <p:cNvPr id="1" name="">
-          <a:extLst>
-            <a:ext uri="{FF2B5EF4-FFF2-40B4-BE49-F238E27FC236}">
-              <a16:creationId xmlns:a16="http://schemas.microsoft.com/office/drawing/2014/main" id="{4BB8D935-B229-ABED-0162-993DF59C12FC}"/>
-            </a:ext>
-          </a:extLst>
-        </p:cNvPr>
-        <p:cNvGrpSpPr/>
-        <p:nvPr/>
-      </p:nvGrpSpPr>
-      <p:grpSpPr>
-        <a:xfrm>
-          <a:off x="0" y="0"/>
-          <a:ext cx="0" cy="0"/>
-          <a:chOff x="0" y="0"/>
-          <a:chExt cx="0" cy="0"/>
-        </a:xfrm>
-      </p:grpSpPr>
-      <p:sp>
-        <p:nvSpPr>
-          <p:cNvPr id="2" name="Title 1">
-            <a:extLst>
-              <a:ext uri="{FF2B5EF4-FFF2-40B4-BE49-F238E27FC236}">
-                <a16:creationId xmlns:a16="http://schemas.microsoft.com/office/drawing/2014/main" id="{B44C7204-534B-1F0D-77A7-A0DCF0D54749}"/>
-              </a:ext>
-            </a:extLst>
-          </p:cNvPr>
-          <p:cNvSpPr>
-            <a:spLocks noGrp="1"/>
-          </p:cNvSpPr>
-          <p:nvPr>
-            <p:ph type="title"/>
-          </p:nvPr>
-        </p:nvSpPr>
-        <p:spPr/>
-        <p:txBody>
-          <a:bodyPr/>
-          <a:lstStyle/>
-          <a:p>
-            <a:r>
-              <a:rPr lang="pt-BR" dirty="0"/>
-              <a:t>Outros algoritmos de </a:t>
-            </a:r>
-            <a:r>
-              <a:rPr lang="pt-BR" i="1" dirty="0"/>
-              <a:t>clustering</a:t>
-            </a:r>
-            <a:endParaRPr lang="en-US" i="1" dirty="0"/>
-          </a:p>
-        </p:txBody>
-      </p:sp>
-      <mc:AlternateContent xmlns:mc="http://schemas.openxmlformats.org/markup-compatibility/2006">
-        <mc:Choice xmlns:a14="http://schemas.microsoft.com/office/drawing/2010/main" Requires="a14">
-          <p:sp>
-            <p:nvSpPr>
-              <p:cNvPr id="3" name="Content Placeholder 2">
-                <a:extLst>
-                  <a:ext uri="{FF2B5EF4-FFF2-40B4-BE49-F238E27FC236}">
-                    <a16:creationId xmlns:a16="http://schemas.microsoft.com/office/drawing/2014/main" id="{3CB4EA62-3EE8-902F-04AE-D82CB62A4097}"/>
-                  </a:ext>
-                </a:extLst>
-              </p:cNvPr>
-              <p:cNvSpPr>
-                <a:spLocks noGrp="1"/>
-              </p:cNvSpPr>
-              <p:nvPr>
-                <p:ph idx="1"/>
-              </p:nvPr>
-            </p:nvSpPr>
-            <p:spPr>
-              <a:xfrm>
-                <a:off x="5974080" y="1825624"/>
-                <a:ext cx="6217920" cy="5032375"/>
-              </a:xfrm>
-            </p:spPr>
-            <p:txBody>
-              <a:bodyPr>
-                <a:normAutofit/>
-              </a:bodyPr>
-              <a:lstStyle/>
-              <a:p>
-                <a:r>
-                  <a:rPr lang="pt-BR" dirty="0"/>
-                  <a:t>Enquanto o </a:t>
-                </a:r>
-                <a14:m>
-                  <m:oMath xmlns:m="http://schemas.openxmlformats.org/officeDocument/2006/math">
-                    <m:r>
-                      <a:rPr lang="pt-BR" i="1">
-                        <a:latin typeface="Cambria Math" panose="02040503050406030204" pitchFamily="18" charset="0"/>
-                      </a:rPr>
-                      <m:t>𝑘</m:t>
-                    </m:r>
-                  </m:oMath>
-                </a14:m>
-                <a:r>
-                  <a:rPr lang="en-US" dirty="0"/>
-                  <a:t>-</a:t>
-                </a:r>
-                <a:r>
-                  <a:rPr lang="en-US" i="1" dirty="0"/>
-                  <a:t>means</a:t>
-                </a:r>
-                <a:r>
-                  <a:rPr lang="en-US" dirty="0"/>
-                  <a:t> </a:t>
-                </a:r>
-                <a:r>
-                  <a:rPr lang="en-US" dirty="0" err="1"/>
-                  <a:t>responde</a:t>
-                </a:r>
-                <a:r>
-                  <a:rPr lang="en-US" dirty="0"/>
-                  <a:t> a </a:t>
-                </a:r>
-                <a:r>
-                  <a:rPr lang="en-US" dirty="0" err="1"/>
-                  <a:t>pergunta</a:t>
-                </a:r>
-                <a:endParaRPr lang="pt-BR" dirty="0"/>
-              </a:p>
-              <a:p>
-                <a:pPr marL="0" indent="0" algn="ctr">
-                  <a:buNone/>
-                </a:pPr>
-                <a:r>
-                  <a:rPr lang="en-US" i="1" dirty="0"/>
-                  <a:t>Onde devo </a:t>
-                </a:r>
-                <a:r>
-                  <a:rPr lang="en-US" i="1" dirty="0" err="1"/>
-                  <a:t>colocar</a:t>
-                </a:r>
-                <a:r>
-                  <a:rPr lang="en-US" i="1" dirty="0"/>
-                  <a:t> </a:t>
-                </a:r>
-                <a14:m>
-                  <m:oMath xmlns:m="http://schemas.openxmlformats.org/officeDocument/2006/math">
-                    <m:r>
-                      <a:rPr lang="pt-BR" b="0" i="1" smtClean="0">
-                        <a:latin typeface="Cambria Math" panose="02040503050406030204" pitchFamily="18" charset="0"/>
-                      </a:rPr>
-                      <m:t>𝑘</m:t>
-                    </m:r>
-                  </m:oMath>
-                </a14:m>
-                <a:r>
-                  <a:rPr lang="en-US" i="1" dirty="0"/>
-                  <a:t> </a:t>
-                </a:r>
-                <a:r>
-                  <a:rPr lang="en-US" i="1" dirty="0" err="1"/>
-                  <a:t>centróides</a:t>
-                </a:r>
-                <a:r>
-                  <a:rPr lang="en-US" i="1" dirty="0"/>
-                  <a:t> para </a:t>
-                </a:r>
-                <a:r>
-                  <a:rPr lang="en-US" b="1" i="1" dirty="0" err="1">
-                    <a:solidFill>
-                      <a:srgbClr val="00B050"/>
-                    </a:solidFill>
-                  </a:rPr>
-                  <a:t>minimizar</a:t>
-                </a:r>
-                <a:r>
-                  <a:rPr lang="en-US" b="1" i="1" dirty="0">
-                    <a:solidFill>
-                      <a:srgbClr val="00B050"/>
-                    </a:solidFill>
-                  </a:rPr>
-                  <a:t> a </a:t>
-                </a:r>
-                <a:r>
-                  <a:rPr lang="en-US" b="1" i="1" dirty="0" err="1">
-                    <a:solidFill>
-                      <a:srgbClr val="00B050"/>
-                    </a:solidFill>
-                  </a:rPr>
-                  <a:t>distância</a:t>
-                </a:r>
-                <a:r>
-                  <a:rPr lang="en-US" b="1" i="1" dirty="0">
-                    <a:solidFill>
-                      <a:srgbClr val="00B050"/>
-                    </a:solidFill>
-                  </a:rPr>
-                  <a:t> </a:t>
-                </a:r>
-                <a:r>
-                  <a:rPr lang="en-US" b="1" i="1" dirty="0" err="1">
-                    <a:solidFill>
-                      <a:srgbClr val="00B050"/>
-                    </a:solidFill>
-                  </a:rPr>
-                  <a:t>média</a:t>
-                </a:r>
-                <a:r>
-                  <a:rPr lang="en-US" i="1" dirty="0"/>
-                  <a:t> dos </a:t>
-                </a:r>
-                <a:r>
-                  <a:rPr lang="en-US" i="1" dirty="0" err="1"/>
-                  <a:t>pontos</a:t>
-                </a:r>
-                <a:r>
-                  <a:rPr lang="en-US" i="1" dirty="0"/>
-                  <a:t>?</a:t>
-                </a:r>
-                <a:endParaRPr lang="pt-BR" i="1" dirty="0"/>
-              </a:p>
-              <a:p>
-                <a:r>
-                  <a:rPr lang="pt-BR" dirty="0"/>
-                  <a:t>O DBSCAN responde a pergunta:</a:t>
-                </a:r>
-              </a:p>
-              <a:p>
-                <a:pPr marL="0" indent="0" algn="ctr">
-                  <a:buNone/>
-                </a:pPr>
-                <a:r>
-                  <a:rPr lang="en-US" i="1" dirty="0"/>
-                  <a:t>Quais </a:t>
-                </a:r>
-                <a:r>
-                  <a:rPr lang="en-US" i="1" dirty="0" err="1"/>
-                  <a:t>regiões</a:t>
-                </a:r>
-                <a:r>
-                  <a:rPr lang="en-US" i="1" dirty="0"/>
-                  <a:t> do </a:t>
-                </a:r>
-                <a:r>
-                  <a:rPr lang="en-US" i="1" dirty="0" err="1"/>
-                  <a:t>espaço</a:t>
-                </a:r>
-                <a:r>
-                  <a:rPr lang="en-US" i="1" dirty="0"/>
-                  <a:t> </a:t>
-                </a:r>
-                <a:r>
-                  <a:rPr lang="en-US" i="1" dirty="0" err="1"/>
-                  <a:t>possuem</a:t>
-                </a:r>
-                <a:r>
-                  <a:rPr lang="en-US" i="1" dirty="0"/>
-                  <a:t> </a:t>
-                </a:r>
-                <a:r>
-                  <a:rPr lang="en-US" b="1" i="1" dirty="0" err="1">
-                    <a:solidFill>
-                      <a:srgbClr val="7030A0"/>
-                    </a:solidFill>
-                  </a:rPr>
-                  <a:t>densidade</a:t>
-                </a:r>
-                <a:r>
-                  <a:rPr lang="en-US" b="1" i="1" dirty="0">
-                    <a:solidFill>
-                      <a:srgbClr val="7030A0"/>
-                    </a:solidFill>
-                  </a:rPr>
-                  <a:t> </a:t>
-                </a:r>
-                <a:r>
-                  <a:rPr lang="en-US" b="1" i="1" dirty="0" err="1">
-                    <a:solidFill>
-                      <a:srgbClr val="7030A0"/>
-                    </a:solidFill>
-                  </a:rPr>
-                  <a:t>suficiente</a:t>
-                </a:r>
-                <a:r>
-                  <a:rPr lang="en-US" b="1" i="1" dirty="0">
-                    <a:solidFill>
-                      <a:srgbClr val="7030A0"/>
-                    </a:solidFill>
-                  </a:rPr>
-                  <a:t> </a:t>
-                </a:r>
-                <a:r>
-                  <a:rPr lang="en-US" i="1" dirty="0"/>
-                  <a:t>para </a:t>
-                </a:r>
-                <a:r>
-                  <a:rPr lang="en-US" i="1" dirty="0" err="1"/>
-                  <a:t>serem</a:t>
-                </a:r>
-                <a:r>
-                  <a:rPr lang="en-US" i="1" dirty="0"/>
-                  <a:t> </a:t>
-                </a:r>
-                <a:r>
-                  <a:rPr lang="en-US" b="1" i="1" dirty="0" err="1">
-                    <a:solidFill>
-                      <a:srgbClr val="7030A0"/>
-                    </a:solidFill>
-                  </a:rPr>
-                  <a:t>consideradas</a:t>
-                </a:r>
-                <a:r>
-                  <a:rPr lang="en-US" b="1" i="1" dirty="0">
-                    <a:solidFill>
-                      <a:srgbClr val="7030A0"/>
-                    </a:solidFill>
-                  </a:rPr>
-                  <a:t> clusters</a:t>
-                </a:r>
-                <a:r>
-                  <a:rPr lang="en-US" i="1" dirty="0"/>
-                  <a:t>?</a:t>
-                </a:r>
-              </a:p>
-              <a:p>
-                <a14:m>
-                  <m:oMath xmlns:m="http://schemas.openxmlformats.org/officeDocument/2006/math">
-                    <m:r>
-                      <a:rPr lang="pt-BR" b="1" i="1" smtClean="0">
-                        <a:solidFill>
-                          <a:schemeClr val="accent5"/>
-                        </a:solidFill>
-                        <a:latin typeface="Cambria Math" panose="02040503050406030204" pitchFamily="18" charset="0"/>
-                      </a:rPr>
-                      <m:t>𝒌</m:t>
-                    </m:r>
-                  </m:oMath>
-                </a14:m>
-                <a:r>
-                  <a:rPr lang="en-US" b="1" dirty="0">
-                    <a:solidFill>
-                      <a:schemeClr val="accent5"/>
-                    </a:solidFill>
-                  </a:rPr>
-                  <a:t>-</a:t>
-                </a:r>
-                <a:r>
-                  <a:rPr lang="en-US" b="1" i="1" dirty="0">
-                    <a:solidFill>
-                      <a:schemeClr val="accent5"/>
-                    </a:solidFill>
-                  </a:rPr>
-                  <a:t>means</a:t>
-                </a:r>
-                <a:r>
-                  <a:rPr lang="en-US" dirty="0"/>
-                  <a:t> </a:t>
-                </a:r>
-                <a:r>
-                  <a:rPr lang="en-US" dirty="0" err="1"/>
-                  <a:t>funciona</a:t>
-                </a:r>
-                <a:r>
-                  <a:rPr lang="en-US" dirty="0"/>
-                  <a:t> </a:t>
-                </a:r>
-                <a:r>
-                  <a:rPr lang="en-US" dirty="0" err="1"/>
-                  <a:t>bem</a:t>
-                </a:r>
-                <a:r>
-                  <a:rPr lang="en-US" dirty="0"/>
-                  <a:t> com </a:t>
-                </a:r>
-                <a:r>
-                  <a:rPr lang="en-US" b="1" i="1" dirty="0">
-                    <a:solidFill>
-                      <a:schemeClr val="accent5"/>
-                    </a:solidFill>
-                  </a:rPr>
-                  <a:t>clusters</a:t>
-                </a:r>
-                <a:r>
-                  <a:rPr lang="en-US" b="1" dirty="0">
-                    <a:solidFill>
-                      <a:schemeClr val="accent5"/>
-                    </a:solidFill>
-                  </a:rPr>
-                  <a:t> </a:t>
-                </a:r>
-                <a:r>
-                  <a:rPr lang="en-US" b="1" dirty="0" err="1">
-                    <a:solidFill>
-                      <a:schemeClr val="accent5"/>
-                    </a:solidFill>
-                  </a:rPr>
-                  <a:t>aproximadamente</a:t>
-                </a:r>
-                <a:r>
-                  <a:rPr lang="en-US" b="1" dirty="0">
-                    <a:solidFill>
-                      <a:schemeClr val="accent5"/>
-                    </a:solidFill>
-                  </a:rPr>
-                  <a:t> </a:t>
-                </a:r>
-                <a:r>
-                  <a:rPr lang="en-US" b="1" dirty="0" err="1">
-                    <a:solidFill>
-                      <a:schemeClr val="accent5"/>
-                    </a:solidFill>
-                  </a:rPr>
-                  <a:t>esféricos</a:t>
-                </a:r>
-                <a:r>
-                  <a:rPr lang="en-US" dirty="0"/>
-                  <a:t>, </a:t>
-                </a:r>
-                <a:r>
-                  <a:rPr lang="en-US" dirty="0" err="1"/>
-                  <a:t>já</a:t>
-                </a:r>
-                <a:r>
-                  <a:rPr lang="en-US" dirty="0"/>
-                  <a:t> o </a:t>
-                </a:r>
-                <a:r>
-                  <a:rPr lang="en-US" b="1" dirty="0">
-                    <a:solidFill>
-                      <a:schemeClr val="accent2"/>
-                    </a:solidFill>
-                  </a:rPr>
-                  <a:t>DBSCAN </a:t>
-                </a:r>
-                <a:r>
-                  <a:rPr lang="en-US" b="1" dirty="0" err="1">
-                    <a:solidFill>
-                      <a:schemeClr val="accent2"/>
-                    </a:solidFill>
-                  </a:rPr>
-                  <a:t>detecta</a:t>
-                </a:r>
-                <a:r>
-                  <a:rPr lang="en-US" b="1" dirty="0">
-                    <a:solidFill>
-                      <a:schemeClr val="accent2"/>
-                    </a:solidFill>
-                  </a:rPr>
-                  <a:t> formas </a:t>
-                </a:r>
-                <a:r>
-                  <a:rPr lang="en-US" b="1" dirty="0" err="1">
-                    <a:solidFill>
-                      <a:schemeClr val="accent2"/>
-                    </a:solidFill>
-                  </a:rPr>
-                  <a:t>arbitrárias</a:t>
-                </a:r>
-                <a:r>
-                  <a:rPr lang="en-US" dirty="0"/>
-                  <a:t>.</a:t>
-                </a:r>
-                <a:endParaRPr lang="en-US" i="1" dirty="0"/>
-              </a:p>
-            </p:txBody>
-          </p:sp>
-        </mc:Choice>
-        <mc:Fallback>
-          <p:sp>
-            <p:nvSpPr>
-              <p:cNvPr id="3" name="Content Placeholder 2">
-                <a:extLst>
-                  <a:ext uri="{FF2B5EF4-FFF2-40B4-BE49-F238E27FC236}">
-                    <a16:creationId xmlns:a16="http://schemas.microsoft.com/office/drawing/2014/main" id="{3CB4EA62-3EE8-902F-04AE-D82CB62A4097}"/>
-                  </a:ext>
-                </a:extLst>
-              </p:cNvPr>
-              <p:cNvSpPr>
-                <a:spLocks noGrp="1" noRot="1" noChangeAspect="1" noMove="1" noResize="1" noEditPoints="1" noAdjustHandles="1" noChangeArrowheads="1" noChangeShapeType="1" noTextEdit="1"/>
-              </p:cNvSpPr>
-              <p:nvPr>
-                <p:ph idx="1"/>
-              </p:nvPr>
-            </p:nvSpPr>
-            <p:spPr>
-              <a:xfrm>
-                <a:off x="5974080" y="1825624"/>
-                <a:ext cx="6217920" cy="5032375"/>
-              </a:xfrm>
-              <a:blipFill>
-                <a:blip r:embed="rId3"/>
-                <a:stretch>
-                  <a:fillRect l="-1765" t="-1937" r="-1275"/>
-                </a:stretch>
-              </a:blipFill>
-            </p:spPr>
-            <p:txBody>
-              <a:bodyPr/>
-              <a:lstStyle/>
-              <a:p>
-                <a:r>
-                  <a:rPr lang="en-US">
-                    <a:noFill/>
-                  </a:rPr>
-                  <a:t> </a:t>
-                </a:r>
-              </a:p>
-            </p:txBody>
-          </p:sp>
-        </mc:Fallback>
-      </mc:AlternateContent>
-      <p:pic>
-        <p:nvPicPr>
-          <p:cNvPr id="4" name="Imagem 3" descr="Frontiers | A fast parallelized DBSCAN algorithm based on OpenMp for  detection of criminals on streaming services">
-            <a:extLst>
-              <a:ext uri="{FF2B5EF4-FFF2-40B4-BE49-F238E27FC236}">
-                <a16:creationId xmlns:a16="http://schemas.microsoft.com/office/drawing/2014/main" id="{1EE39F38-A35D-1695-90CC-E32AE4A44ECF}"/>
-              </a:ext>
-            </a:extLst>
-          </p:cNvPr>
-          <p:cNvPicPr>
-            <a:picLocks noChangeAspect="1"/>
-          </p:cNvPicPr>
-          <p:nvPr/>
-        </p:nvPicPr>
-        <p:blipFill>
-          <a:blip r:embed="rId4"/>
-          <a:stretch>
-            <a:fillRect/>
-          </a:stretch>
-        </p:blipFill>
-        <p:spPr>
-          <a:xfrm>
-            <a:off x="40640" y="2448560"/>
-            <a:ext cx="5714196" cy="3194090"/>
-          </a:xfrm>
-          <a:prstGeom prst="rect">
-            <a:avLst/>
-          </a:prstGeom>
-        </p:spPr>
-      </p:pic>
-      <mc:AlternateContent xmlns:mc="http://schemas.openxmlformats.org/markup-compatibility/2006">
-        <mc:Choice xmlns:a14="http://schemas.microsoft.com/office/drawing/2010/main" Requires="a14">
-          <p:sp>
-            <p:nvSpPr>
-              <p:cNvPr id="5" name="CaixaDeTexto 4">
-                <a:extLst>
-                  <a:ext uri="{FF2B5EF4-FFF2-40B4-BE49-F238E27FC236}">
-                    <a16:creationId xmlns:a16="http://schemas.microsoft.com/office/drawing/2014/main" id="{B2957CE3-F17D-B95C-04CD-777B6E52D0C6}"/>
-                  </a:ext>
-                </a:extLst>
-              </p:cNvPr>
-              <p:cNvSpPr txBox="1"/>
-              <p:nvPr/>
-            </p:nvSpPr>
-            <p:spPr>
-              <a:xfrm>
-                <a:off x="4511040" y="5110758"/>
-                <a:ext cx="800540" cy="369332"/>
-              </a:xfrm>
-              <a:prstGeom prst="rect">
-                <a:avLst/>
-              </a:prstGeom>
-              <a:noFill/>
-            </p:spPr>
-            <p:txBody>
-              <a:bodyPr wrap="none" rtlCol="0">
-                <a:spAutoFit/>
-              </a:bodyPr>
-              <a:lstStyle/>
-              <a:p>
-                <a14:m>
-                  <m:oMathPara xmlns:m="http://schemas.openxmlformats.org/officeDocument/2006/math">
-                    <m:oMathParaPr>
-                      <m:jc m:val="centerGroup"/>
-                    </m:oMathParaPr>
-                    <m:oMath xmlns:m="http://schemas.openxmlformats.org/officeDocument/2006/math">
-                      <m:r>
-                        <a:rPr lang="pt-BR" b="0" i="1" smtClean="0">
-                          <a:latin typeface="Cambria Math" panose="02040503050406030204" pitchFamily="18" charset="0"/>
-                        </a:rPr>
-                        <m:t>𝑘</m:t>
-                      </m:r>
-                      <m:r>
-                        <a:rPr lang="pt-BR" b="0" i="1" smtClean="0">
-                          <a:latin typeface="Cambria Math" panose="02040503050406030204" pitchFamily="18" charset="0"/>
-                        </a:rPr>
-                        <m:t>=2</m:t>
-                      </m:r>
-                    </m:oMath>
-                  </m:oMathPara>
-                </a14:m>
-                <a:endParaRPr lang="en-US" dirty="0"/>
-              </a:p>
-            </p:txBody>
-          </p:sp>
-        </mc:Choice>
-        <mc:Fallback>
-          <p:sp>
-            <p:nvSpPr>
-              <p:cNvPr id="5" name="CaixaDeTexto 4">
-                <a:extLst>
-                  <a:ext uri="{FF2B5EF4-FFF2-40B4-BE49-F238E27FC236}">
-                    <a16:creationId xmlns:a16="http://schemas.microsoft.com/office/drawing/2014/main" id="{B2957CE3-F17D-B95C-04CD-777B6E52D0C6}"/>
-                  </a:ext>
-                </a:extLst>
-              </p:cNvPr>
-              <p:cNvSpPr txBox="1">
-                <a:spLocks noRot="1" noChangeAspect="1" noMove="1" noResize="1" noEditPoints="1" noAdjustHandles="1" noChangeArrowheads="1" noChangeShapeType="1" noTextEdit="1"/>
-              </p:cNvSpPr>
-              <p:nvPr/>
-            </p:nvSpPr>
-            <p:spPr>
-              <a:xfrm>
-                <a:off x="4511040" y="5110758"/>
-                <a:ext cx="800540" cy="369332"/>
-              </a:xfrm>
-              <a:prstGeom prst="rect">
-                <a:avLst/>
-              </a:prstGeom>
-              <a:blipFill>
-                <a:blip r:embed="rId5"/>
-                <a:stretch>
-                  <a:fillRect/>
-                </a:stretch>
-              </a:blipFill>
-            </p:spPr>
-            <p:txBody>
-              <a:bodyPr/>
-              <a:lstStyle/>
-              <a:p>
-                <a:r>
-                  <a:rPr lang="en-US">
-                    <a:noFill/>
-                  </a:rPr>
-                  <a:t> </a:t>
-                </a:r>
-              </a:p>
-            </p:txBody>
-          </p:sp>
-        </mc:Fallback>
-      </mc:AlternateContent>
-    </p:spTree>
-    <p:extLst>
-      <p:ext uri="{BB962C8B-B14F-4D97-AF65-F5344CB8AC3E}">
-        <p14:creationId xmlns:p14="http://schemas.microsoft.com/office/powerpoint/2010/main" val="1711034512"/>
       </p:ext>
     </p:extLst>
   </p:cSld>
@@ -20826,7 +20846,7 @@
         <p:cNvPr id="1" name="">
           <a:extLst>
             <a:ext uri="{FF2B5EF4-FFF2-40B4-BE49-F238E27FC236}">
-              <a16:creationId xmlns:a16="http://schemas.microsoft.com/office/drawing/2014/main" id="{FD5C8E66-2680-D18B-377A-23C180E28624}"/>
+              <a16:creationId xmlns:a16="http://schemas.microsoft.com/office/drawing/2014/main" xmlns="" id="{4BB8D935-B229-ABED-0162-993DF59C12FC}"/>
             </a:ext>
           </a:extLst>
         </p:cNvPr>
@@ -20846,7 +20866,7 @@
           <p:cNvPr id="2" name="Title 1">
             <a:extLst>
               <a:ext uri="{FF2B5EF4-FFF2-40B4-BE49-F238E27FC236}">
-                <a16:creationId xmlns:a16="http://schemas.microsoft.com/office/drawing/2014/main" id="{4922C354-C54E-3199-8E70-B0FEAC54336F}"/>
+                <a16:creationId xmlns:a16="http://schemas.microsoft.com/office/drawing/2014/main" xmlns="" id="{B44C7204-534B-1F0D-77A7-A0DCF0D54749}"/>
               </a:ext>
             </a:extLst>
           </p:cNvPr>
@@ -20874,12 +20894,669 @@
           </a:p>
         </p:txBody>
       </p:sp>
+      <mc:AlternateContent xmlns:mc="http://schemas.openxmlformats.org/markup-compatibility/2006">
+        <mc:Choice xmlns:a14="http://schemas.microsoft.com/office/drawing/2010/main" Requires="a14">
+          <p:sp>
+            <p:nvSpPr>
+              <p:cNvPr id="3" name="Content Placeholder 2">
+                <a:extLst>
+                  <a:ext uri="{FF2B5EF4-FFF2-40B4-BE49-F238E27FC236}">
+                    <a16:creationId xmlns:a16="http://schemas.microsoft.com/office/drawing/2014/main" xmlns="" id="{3CB4EA62-3EE8-902F-04AE-D82CB62A4097}"/>
+                  </a:ext>
+                </a:extLst>
+              </p:cNvPr>
+              <p:cNvSpPr>
+                <a:spLocks noGrp="1"/>
+              </p:cNvSpPr>
+              <p:nvPr>
+                <p:ph idx="1"/>
+              </p:nvPr>
+            </p:nvSpPr>
+            <p:spPr>
+              <a:xfrm>
+                <a:off x="5974080" y="1825624"/>
+                <a:ext cx="6217920" cy="5032375"/>
+              </a:xfrm>
+            </p:spPr>
+            <p:txBody>
+              <a:bodyPr>
+                <a:normAutofit/>
+              </a:bodyPr>
+              <a:lstStyle/>
+              <a:p>
+                <a:r>
+                  <a:rPr lang="pt-BR" dirty="0"/>
+                  <a:t>Enquanto o </a:t>
+                </a:r>
+                <a14:m>
+                  <m:oMath xmlns:m="http://schemas.openxmlformats.org/officeDocument/2006/math">
+                    <m:r>
+                      <a:rPr lang="pt-BR" i="1">
+                        <a:latin typeface="Cambria Math" panose="02040503050406030204" pitchFamily="18" charset="0"/>
+                      </a:rPr>
+                      <m:t>𝑘</m:t>
+                    </m:r>
+                  </m:oMath>
+                </a14:m>
+                <a:r>
+                  <a:rPr lang="en-US" dirty="0"/>
+                  <a:t>-</a:t>
+                </a:r>
+                <a:r>
+                  <a:rPr lang="en-US" i="1" dirty="0"/>
+                  <a:t>means</a:t>
+                </a:r>
+                <a:r>
+                  <a:rPr lang="en-US" dirty="0"/>
+                  <a:t> </a:t>
+                </a:r>
+                <a:r>
+                  <a:rPr lang="en-US" dirty="0" err="1"/>
+                  <a:t>responde</a:t>
+                </a:r>
+                <a:r>
+                  <a:rPr lang="en-US" dirty="0"/>
+                  <a:t> a </a:t>
+                </a:r>
+                <a:r>
+                  <a:rPr lang="en-US" dirty="0" err="1"/>
+                  <a:t>pergunta</a:t>
+                </a:r>
+                <a:endParaRPr lang="pt-BR" dirty="0"/>
+              </a:p>
+              <a:p>
+                <a:pPr marL="0" indent="0" algn="ctr">
+                  <a:buNone/>
+                </a:pPr>
+                <a:r>
+                  <a:rPr lang="en-US" i="1" dirty="0" err="1" smtClean="0"/>
+                  <a:t>Onde</a:t>
+                </a:r>
+                <a:r>
+                  <a:rPr lang="en-US" i="1" dirty="0" smtClean="0"/>
+                  <a:t> </a:t>
+                </a:r>
+                <a14:m>
+                  <m:oMath xmlns:m="http://schemas.openxmlformats.org/officeDocument/2006/math">
+                    <m:r>
+                      <a:rPr lang="pt-BR" b="0" i="1" smtClean="0">
+                        <a:latin typeface="Cambria Math" panose="02040503050406030204" pitchFamily="18" charset="0"/>
+                      </a:rPr>
+                      <m:t>𝑘</m:t>
+                    </m:r>
+                  </m:oMath>
+                </a14:m>
+                <a:r>
+                  <a:rPr lang="en-US" i="1" dirty="0"/>
+                  <a:t> </a:t>
+                </a:r>
+                <a:r>
+                  <a:rPr lang="en-US" i="1" dirty="0" err="1"/>
+                  <a:t>centróides</a:t>
+                </a:r>
+                <a:r>
+                  <a:rPr lang="en-US" i="1" dirty="0"/>
+                  <a:t> </a:t>
+                </a:r>
+                <a:r>
+                  <a:rPr lang="en-US" i="1" dirty="0" err="1" smtClean="0"/>
+                  <a:t>devem</a:t>
+                </a:r>
+                <a:r>
+                  <a:rPr lang="en-US" i="1" dirty="0" smtClean="0"/>
+                  <a:t> </a:t>
+                </a:r>
+                <a:r>
+                  <a:rPr lang="en-US" i="1" dirty="0" err="1" smtClean="0"/>
+                  <a:t>ficar</a:t>
+                </a:r>
+                <a:r>
+                  <a:rPr lang="en-US" i="1" dirty="0" smtClean="0"/>
+                  <a:t> para </a:t>
+                </a:r>
+                <a:r>
+                  <a:rPr lang="en-US" b="1" i="1" dirty="0" err="1">
+                    <a:solidFill>
+                      <a:srgbClr val="00B050"/>
+                    </a:solidFill>
+                  </a:rPr>
+                  <a:t>minimizar</a:t>
+                </a:r>
+                <a:r>
+                  <a:rPr lang="en-US" b="1" i="1" dirty="0">
+                    <a:solidFill>
+                      <a:srgbClr val="00B050"/>
+                    </a:solidFill>
+                  </a:rPr>
+                  <a:t> a </a:t>
+                </a:r>
+                <a:r>
+                  <a:rPr lang="en-US" b="1" i="1" dirty="0" err="1">
+                    <a:solidFill>
+                      <a:srgbClr val="00B050"/>
+                    </a:solidFill>
+                  </a:rPr>
+                  <a:t>distância</a:t>
+                </a:r>
+                <a:r>
+                  <a:rPr lang="en-US" b="1" i="1" dirty="0">
+                    <a:solidFill>
+                      <a:srgbClr val="00B050"/>
+                    </a:solidFill>
+                  </a:rPr>
+                  <a:t> </a:t>
+                </a:r>
+                <a:r>
+                  <a:rPr lang="en-US" b="1" i="1" dirty="0" smtClean="0">
+                    <a:solidFill>
+                      <a:srgbClr val="00B050"/>
+                    </a:solidFill>
+                  </a:rPr>
+                  <a:t>intra-cluster</a:t>
+                </a:r>
+                <a:r>
+                  <a:rPr lang="en-US" i="1" dirty="0" smtClean="0"/>
+                  <a:t>?</a:t>
+                </a:r>
+                <a:endParaRPr lang="pt-BR" i="1" dirty="0"/>
+              </a:p>
+              <a:p>
+                <a:r>
+                  <a:rPr lang="pt-BR" dirty="0"/>
+                  <a:t>O DBSCAN responde a pergunta:</a:t>
+                </a:r>
+              </a:p>
+              <a:p>
+                <a:pPr marL="0" indent="0" algn="ctr">
+                  <a:buNone/>
+                </a:pPr>
+                <a:r>
+                  <a:rPr lang="en-US" i="1" dirty="0"/>
+                  <a:t>Quais </a:t>
+                </a:r>
+                <a:r>
+                  <a:rPr lang="en-US" i="1" dirty="0" err="1"/>
+                  <a:t>regiões</a:t>
+                </a:r>
+                <a:r>
+                  <a:rPr lang="en-US" i="1" dirty="0"/>
+                  <a:t> do </a:t>
+                </a:r>
+                <a:r>
+                  <a:rPr lang="en-US" i="1" dirty="0" err="1"/>
+                  <a:t>espaço</a:t>
+                </a:r>
+                <a:r>
+                  <a:rPr lang="en-US" i="1" dirty="0"/>
+                  <a:t> </a:t>
+                </a:r>
+                <a:r>
+                  <a:rPr lang="en-US" i="1" dirty="0" err="1"/>
+                  <a:t>possuem</a:t>
+                </a:r>
+                <a:r>
+                  <a:rPr lang="en-US" i="1" dirty="0"/>
+                  <a:t> </a:t>
+                </a:r>
+                <a:r>
+                  <a:rPr lang="en-US" b="1" i="1" dirty="0" err="1">
+                    <a:solidFill>
+                      <a:srgbClr val="7030A0"/>
+                    </a:solidFill>
+                  </a:rPr>
+                  <a:t>densidade</a:t>
+                </a:r>
+                <a:r>
+                  <a:rPr lang="en-US" b="1" i="1" dirty="0">
+                    <a:solidFill>
+                      <a:srgbClr val="7030A0"/>
+                    </a:solidFill>
+                  </a:rPr>
+                  <a:t> </a:t>
+                </a:r>
+                <a:r>
+                  <a:rPr lang="en-US" b="1" i="1" dirty="0" err="1">
+                    <a:solidFill>
+                      <a:srgbClr val="7030A0"/>
+                    </a:solidFill>
+                  </a:rPr>
+                  <a:t>suficiente</a:t>
+                </a:r>
+                <a:r>
+                  <a:rPr lang="en-US" b="1" i="1" dirty="0">
+                    <a:solidFill>
+                      <a:srgbClr val="7030A0"/>
+                    </a:solidFill>
+                  </a:rPr>
+                  <a:t> </a:t>
+                </a:r>
+                <a:r>
+                  <a:rPr lang="en-US" i="1" dirty="0"/>
+                  <a:t>para </a:t>
+                </a:r>
+                <a:r>
+                  <a:rPr lang="en-US" i="1" dirty="0" err="1"/>
+                  <a:t>serem</a:t>
+                </a:r>
+                <a:r>
+                  <a:rPr lang="en-US" i="1" dirty="0"/>
+                  <a:t> </a:t>
+                </a:r>
+                <a:r>
+                  <a:rPr lang="en-US" b="1" i="1" dirty="0" err="1">
+                    <a:solidFill>
+                      <a:srgbClr val="7030A0"/>
+                    </a:solidFill>
+                  </a:rPr>
+                  <a:t>consideradas</a:t>
+                </a:r>
+                <a:r>
+                  <a:rPr lang="en-US" b="1" i="1" dirty="0">
+                    <a:solidFill>
+                      <a:srgbClr val="7030A0"/>
+                    </a:solidFill>
+                  </a:rPr>
+                  <a:t> clusters</a:t>
+                </a:r>
+                <a:r>
+                  <a:rPr lang="en-US" i="1" dirty="0"/>
+                  <a:t>?</a:t>
+                </a:r>
+              </a:p>
+              <a:p>
+                <a14:m>
+                  <m:oMath xmlns:m="http://schemas.openxmlformats.org/officeDocument/2006/math">
+                    <m:r>
+                      <a:rPr lang="pt-BR" b="1" i="1" smtClean="0">
+                        <a:solidFill>
+                          <a:schemeClr val="accent5"/>
+                        </a:solidFill>
+                        <a:latin typeface="Cambria Math" panose="02040503050406030204" pitchFamily="18" charset="0"/>
+                      </a:rPr>
+                      <m:t>𝒌</m:t>
+                    </m:r>
+                  </m:oMath>
+                </a14:m>
+                <a:r>
+                  <a:rPr lang="en-US" b="1" dirty="0">
+                    <a:solidFill>
+                      <a:schemeClr val="accent5"/>
+                    </a:solidFill>
+                  </a:rPr>
+                  <a:t>-</a:t>
+                </a:r>
+                <a:r>
+                  <a:rPr lang="en-US" b="1" i="1" dirty="0">
+                    <a:solidFill>
+                      <a:schemeClr val="accent5"/>
+                    </a:solidFill>
+                  </a:rPr>
+                  <a:t>means</a:t>
+                </a:r>
+                <a:r>
+                  <a:rPr lang="en-US" dirty="0"/>
+                  <a:t> </a:t>
+                </a:r>
+                <a:r>
+                  <a:rPr lang="en-US" dirty="0" err="1"/>
+                  <a:t>funciona</a:t>
+                </a:r>
+                <a:r>
+                  <a:rPr lang="en-US" dirty="0"/>
+                  <a:t> </a:t>
+                </a:r>
+                <a:r>
+                  <a:rPr lang="en-US" dirty="0" err="1"/>
+                  <a:t>bem</a:t>
+                </a:r>
+                <a:r>
+                  <a:rPr lang="en-US" dirty="0"/>
+                  <a:t> com </a:t>
+                </a:r>
+                <a:r>
+                  <a:rPr lang="en-US" b="1" i="1" dirty="0">
+                    <a:solidFill>
+                      <a:schemeClr val="accent5"/>
+                    </a:solidFill>
+                  </a:rPr>
+                  <a:t>clusters</a:t>
+                </a:r>
+                <a:r>
+                  <a:rPr lang="en-US" b="1" dirty="0">
+                    <a:solidFill>
+                      <a:schemeClr val="accent5"/>
+                    </a:solidFill>
+                  </a:rPr>
+                  <a:t> </a:t>
+                </a:r>
+                <a:r>
+                  <a:rPr lang="en-US" b="1" dirty="0" err="1">
+                    <a:solidFill>
+                      <a:schemeClr val="accent5"/>
+                    </a:solidFill>
+                  </a:rPr>
+                  <a:t>aproximadamente</a:t>
+                </a:r>
+                <a:r>
+                  <a:rPr lang="en-US" b="1" dirty="0">
+                    <a:solidFill>
+                      <a:schemeClr val="accent5"/>
+                    </a:solidFill>
+                  </a:rPr>
+                  <a:t> </a:t>
+                </a:r>
+                <a:r>
+                  <a:rPr lang="en-US" b="1" dirty="0" err="1">
+                    <a:solidFill>
+                      <a:schemeClr val="accent5"/>
+                    </a:solidFill>
+                  </a:rPr>
+                  <a:t>esféricos</a:t>
+                </a:r>
+                <a:r>
+                  <a:rPr lang="en-US" dirty="0"/>
+                  <a:t>, </a:t>
+                </a:r>
+                <a:r>
+                  <a:rPr lang="en-US" dirty="0" err="1"/>
+                  <a:t>já</a:t>
+                </a:r>
+                <a:r>
+                  <a:rPr lang="en-US" dirty="0"/>
+                  <a:t> o </a:t>
+                </a:r>
+                <a:r>
+                  <a:rPr lang="en-US" b="1" dirty="0">
+                    <a:solidFill>
+                      <a:schemeClr val="accent2"/>
+                    </a:solidFill>
+                  </a:rPr>
+                  <a:t>DBSCAN </a:t>
+                </a:r>
+                <a:r>
+                  <a:rPr lang="en-US" b="1" dirty="0" err="1">
+                    <a:solidFill>
+                      <a:schemeClr val="accent2"/>
+                    </a:solidFill>
+                  </a:rPr>
+                  <a:t>detecta</a:t>
+                </a:r>
+                <a:r>
+                  <a:rPr lang="en-US" b="1" dirty="0">
+                    <a:solidFill>
+                      <a:schemeClr val="accent2"/>
+                    </a:solidFill>
+                  </a:rPr>
+                  <a:t> formas </a:t>
+                </a:r>
+                <a:r>
+                  <a:rPr lang="en-US" b="1" dirty="0" err="1">
+                    <a:solidFill>
+                      <a:schemeClr val="accent2"/>
+                    </a:solidFill>
+                  </a:rPr>
+                  <a:t>arbitrárias</a:t>
+                </a:r>
+                <a:r>
+                  <a:rPr lang="en-US" dirty="0"/>
+                  <a:t>.</a:t>
+                </a:r>
+                <a:endParaRPr lang="en-US" i="1" dirty="0"/>
+              </a:p>
+            </p:txBody>
+          </p:sp>
+        </mc:Choice>
+        <mc:Fallback>
+          <p:sp>
+            <p:nvSpPr>
+              <p:cNvPr id="3" name="Content Placeholder 2">
+                <a:extLst>
+                  <a:ext uri="{FF2B5EF4-FFF2-40B4-BE49-F238E27FC236}">
+                    <a16:creationId xmlns:a16="http://schemas.microsoft.com/office/drawing/2014/main" xmlns:a14="http://schemas.microsoft.com/office/drawing/2010/main" xmlns="" id="{3CB4EA62-3EE8-902F-04AE-D82CB62A4097}"/>
+                  </a:ext>
+                </a:extLst>
+              </p:cNvPr>
+              <p:cNvSpPr>
+                <a:spLocks noGrp="1" noRot="1" noChangeAspect="1" noMove="1" noResize="1" noEditPoints="1" noAdjustHandles="1" noChangeArrowheads="1" noChangeShapeType="1" noTextEdit="1"/>
+              </p:cNvSpPr>
+              <p:nvPr>
+                <p:ph idx="1"/>
+              </p:nvPr>
+            </p:nvSpPr>
+            <p:spPr>
+              <a:xfrm>
+                <a:off x="5974080" y="1825624"/>
+                <a:ext cx="6217920" cy="5032375"/>
+              </a:xfrm>
+              <a:blipFill rotWithShape="0">
+                <a:blip r:embed="rId3"/>
+                <a:stretch>
+                  <a:fillRect l="-1765" t="-1937"/>
+                </a:stretch>
+              </a:blipFill>
+            </p:spPr>
+            <p:txBody>
+              <a:bodyPr/>
+              <a:lstStyle/>
+              <a:p>
+                <a:r>
+                  <a:rPr lang="pt-BR">
+                    <a:noFill/>
+                  </a:rPr>
+                  <a:t> </a:t>
+                </a:r>
+              </a:p>
+            </p:txBody>
+          </p:sp>
+        </mc:Fallback>
+      </mc:AlternateContent>
+      <p:pic>
+        <p:nvPicPr>
+          <p:cNvPr id="4" name="Imagem 3" descr="Frontiers | A fast parallelized DBSCAN algorithm based on OpenMp for  detection of criminals on streaming services">
+            <a:extLst>
+              <a:ext uri="{FF2B5EF4-FFF2-40B4-BE49-F238E27FC236}">
+                <a16:creationId xmlns:a16="http://schemas.microsoft.com/office/drawing/2014/main" xmlns="" id="{1EE39F38-A35D-1695-90CC-E32AE4A44ECF}"/>
+              </a:ext>
+            </a:extLst>
+          </p:cNvPr>
+          <p:cNvPicPr>
+            <a:picLocks noChangeAspect="1"/>
+          </p:cNvPicPr>
+          <p:nvPr/>
+        </p:nvPicPr>
+        <p:blipFill>
+          <a:blip r:embed="rId4"/>
+          <a:stretch>
+            <a:fillRect/>
+          </a:stretch>
+        </p:blipFill>
+        <p:spPr>
+          <a:xfrm>
+            <a:off x="40640" y="2448560"/>
+            <a:ext cx="5714196" cy="3194090"/>
+          </a:xfrm>
+          <a:prstGeom prst="rect">
+            <a:avLst/>
+          </a:prstGeom>
+        </p:spPr>
+      </p:pic>
+      <mc:AlternateContent xmlns:mc="http://schemas.openxmlformats.org/markup-compatibility/2006" xmlns:a14="http://schemas.microsoft.com/office/drawing/2010/main">
+        <mc:Choice Requires="a14">
+          <p:sp>
+            <p:nvSpPr>
+              <p:cNvPr id="5" name="CaixaDeTexto 4">
+                <a:extLst>
+                  <a:ext uri="{FF2B5EF4-FFF2-40B4-BE49-F238E27FC236}">
+                    <a16:creationId xmlns:a16="http://schemas.microsoft.com/office/drawing/2014/main" xmlns="" id="{B2957CE3-F17D-B95C-04CD-777B6E52D0C6}"/>
+                  </a:ext>
+                </a:extLst>
+              </p:cNvPr>
+              <p:cNvSpPr txBox="1"/>
+              <p:nvPr/>
+            </p:nvSpPr>
+            <p:spPr>
+              <a:xfrm>
+                <a:off x="4511040" y="5110758"/>
+                <a:ext cx="800540" cy="369332"/>
+              </a:xfrm>
+              <a:prstGeom prst="rect">
+                <a:avLst/>
+              </a:prstGeom>
+              <a:noFill/>
+            </p:spPr>
+            <p:txBody>
+              <a:bodyPr wrap="none" rtlCol="0">
+                <a:spAutoFit/>
+              </a:bodyPr>
+              <a:lstStyle/>
+              <a:p>
+                <a:pPr/>
+                <a14:m>
+                  <m:oMathPara xmlns:m="http://schemas.openxmlformats.org/officeDocument/2006/math">
+                    <m:oMathParaPr>
+                      <m:jc m:val="centerGroup"/>
+                    </m:oMathParaPr>
+                    <m:oMath xmlns:m="http://schemas.openxmlformats.org/officeDocument/2006/math">
+                      <m:r>
+                        <a:rPr lang="pt-BR" b="0" i="1" smtClean="0">
+                          <a:latin typeface="Cambria Math" panose="02040503050406030204" pitchFamily="18" charset="0"/>
+                        </a:rPr>
+                        <m:t>𝑘</m:t>
+                      </m:r>
+                      <m:r>
+                        <a:rPr lang="pt-BR" b="0" i="1" smtClean="0">
+                          <a:latin typeface="Cambria Math" panose="02040503050406030204" pitchFamily="18" charset="0"/>
+                        </a:rPr>
+                        <m:t>=2</m:t>
+                      </m:r>
+                    </m:oMath>
+                  </m:oMathPara>
+                </a14:m>
+                <a:endParaRPr lang="en-US" dirty="0"/>
+              </a:p>
+            </p:txBody>
+          </p:sp>
+        </mc:Choice>
+        <mc:Fallback xmlns="">
+          <p:sp>
+            <p:nvSpPr>
+              <p:cNvPr id="5" name="CaixaDeTexto 4">
+                <a:extLst>
+                  <a:ext uri="{FF2B5EF4-FFF2-40B4-BE49-F238E27FC236}">
+                    <a16:creationId xmlns:a16="http://schemas.microsoft.com/office/drawing/2014/main" id="{B2957CE3-F17D-B95C-04CD-777B6E52D0C6}"/>
+                  </a:ext>
+                </a:extLst>
+              </p:cNvPr>
+              <p:cNvSpPr txBox="1">
+                <a:spLocks noRot="1" noChangeAspect="1" noMove="1" noResize="1" noEditPoints="1" noAdjustHandles="1" noChangeArrowheads="1" noChangeShapeType="1" noTextEdit="1"/>
+              </p:cNvSpPr>
+              <p:nvPr/>
+            </p:nvSpPr>
+            <p:spPr>
+              <a:xfrm>
+                <a:off x="4511040" y="5110758"/>
+                <a:ext cx="800540" cy="369332"/>
+              </a:xfrm>
+              <a:prstGeom prst="rect">
+                <a:avLst/>
+              </a:prstGeom>
+              <a:blipFill>
+                <a:blip r:embed="rId5"/>
+                <a:stretch>
+                  <a:fillRect/>
+                </a:stretch>
+              </a:blipFill>
+            </p:spPr>
+            <p:txBody>
+              <a:bodyPr/>
+              <a:lstStyle/>
+              <a:p>
+                <a:r>
+                  <a:rPr lang="en-US">
+                    <a:noFill/>
+                  </a:rPr>
+                  <a:t> </a:t>
+                </a:r>
+              </a:p>
+            </p:txBody>
+          </p:sp>
+        </mc:Fallback>
+      </mc:AlternateContent>
+    </p:spTree>
+    <p:extLst>
+      <p:ext uri="{BB962C8B-B14F-4D97-AF65-F5344CB8AC3E}">
+        <p14:creationId xmlns:p14="http://schemas.microsoft.com/office/powerpoint/2010/main" val="1711034512"/>
+      </p:ext>
+    </p:extLst>
+  </p:cSld>
+  <p:clrMapOvr>
+    <a:masterClrMapping/>
+  </p:clrMapOvr>
+</p:sld>
+</file>
+
+<file path=ppt/slides/slide41.xml><?xml version="1.0" encoding="utf-8"?>
+<p:sld xmlns:a="http://schemas.openxmlformats.org/drawingml/2006/main" xmlns:r="http://schemas.openxmlformats.org/officeDocument/2006/relationships" xmlns:p="http://schemas.openxmlformats.org/presentationml/2006/main">
+  <p:cSld>
+    <p:spTree>
+      <p:nvGrpSpPr>
+        <p:cNvPr id="1" name="">
+          <a:extLst>
+            <a:ext uri="{FF2B5EF4-FFF2-40B4-BE49-F238E27FC236}">
+              <a16:creationId xmlns:a16="http://schemas.microsoft.com/office/drawing/2014/main" xmlns="" id="{FD5C8E66-2680-D18B-377A-23C180E28624}"/>
+            </a:ext>
+          </a:extLst>
+        </p:cNvPr>
+        <p:cNvGrpSpPr/>
+        <p:nvPr/>
+      </p:nvGrpSpPr>
+      <p:grpSpPr>
+        <a:xfrm>
+          <a:off x="0" y="0"/>
+          <a:ext cx="0" cy="0"/>
+          <a:chOff x="0" y="0"/>
+          <a:chExt cx="0" cy="0"/>
+        </a:xfrm>
+      </p:grpSpPr>
+      <p:sp>
+        <p:nvSpPr>
+          <p:cNvPr id="2" name="Title 1">
+            <a:extLst>
+              <a:ext uri="{FF2B5EF4-FFF2-40B4-BE49-F238E27FC236}">
+                <a16:creationId xmlns:a16="http://schemas.microsoft.com/office/drawing/2014/main" xmlns="" id="{4922C354-C54E-3199-8E70-B0FEAC54336F}"/>
+              </a:ext>
+            </a:extLst>
+          </p:cNvPr>
+          <p:cNvSpPr>
+            <a:spLocks noGrp="1"/>
+          </p:cNvSpPr>
+          <p:nvPr>
+            <p:ph type="title"/>
+          </p:nvPr>
+        </p:nvSpPr>
+        <p:spPr/>
+        <p:txBody>
+          <a:bodyPr/>
+          <a:lstStyle/>
+          <a:p>
+            <a:r>
+              <a:rPr lang="pt-BR" dirty="0"/>
+              <a:t>Outros algoritmos de </a:t>
+            </a:r>
+            <a:r>
+              <a:rPr lang="pt-BR" i="1" dirty="0"/>
+              <a:t>clustering</a:t>
+            </a:r>
+            <a:endParaRPr lang="en-US" i="1" dirty="0"/>
+          </a:p>
+        </p:txBody>
+      </p:sp>
       <p:sp>
         <p:nvSpPr>
           <p:cNvPr id="3" name="Content Placeholder 2">
             <a:extLst>
               <a:ext uri="{FF2B5EF4-FFF2-40B4-BE49-F238E27FC236}">
-                <a16:creationId xmlns:a16="http://schemas.microsoft.com/office/drawing/2014/main" id="{19772337-3C92-B2F0-5BA1-2C7C272144F7}"/>
+                <a16:creationId xmlns:a16="http://schemas.microsoft.com/office/drawing/2014/main" xmlns="" id="{19772337-3C92-B2F0-5BA1-2C7C272144F7}"/>
               </a:ext>
             </a:extLst>
           </p:cNvPr>
@@ -21086,15 +21763,27 @@
               <a:t> </a:t>
             </a:r>
             <a:r>
-              <a:rPr lang="en-US" dirty="0" err="1"/>
+              <a:rPr lang="en-US" b="1" dirty="0" err="1">
+                <a:solidFill>
+                  <a:schemeClr val="accent2"/>
+                </a:solidFill>
+              </a:rPr>
               <a:t>representando</a:t>
             </a:r>
             <a:r>
-              <a:rPr lang="en-US" dirty="0"/>
+              <a:rPr lang="en-US" b="1" dirty="0">
+                <a:solidFill>
+                  <a:schemeClr val="accent2"/>
+                </a:solidFill>
+              </a:rPr>
               <a:t> um </a:t>
             </a:r>
             <a:r>
-              <a:rPr lang="en-US" i="1" dirty="0"/>
+              <a:rPr lang="en-US" b="1" i="1" dirty="0">
+                <a:solidFill>
+                  <a:schemeClr val="accent2"/>
+                </a:solidFill>
+              </a:rPr>
               <a:t>cluster</a:t>
             </a:r>
             <a:r>
@@ -21140,31 +21829,59 @@
               <a:t> </a:t>
             </a:r>
             <a:r>
-              <a:rPr lang="en-US" dirty="0" err="1"/>
+              <a:rPr lang="en-US" b="1" dirty="0" err="1">
+                <a:solidFill>
+                  <a:srgbClr val="7030A0"/>
+                </a:solidFill>
+              </a:rPr>
               <a:t>probabilidades</a:t>
             </a:r>
             <a:r>
-              <a:rPr lang="en-US" dirty="0"/>
+              <a:rPr lang="en-US" b="1" dirty="0">
+                <a:solidFill>
+                  <a:srgbClr val="7030A0"/>
+                </a:solidFill>
+              </a:rPr>
               <a:t> de </a:t>
             </a:r>
             <a:r>
-              <a:rPr lang="en-US" dirty="0" err="1"/>
+              <a:rPr lang="en-US" b="1" dirty="0" err="1">
+                <a:solidFill>
+                  <a:srgbClr val="7030A0"/>
+                </a:solidFill>
+              </a:rPr>
               <a:t>pertencimento</a:t>
             </a:r>
             <a:r>
-              <a:rPr lang="en-US" dirty="0"/>
+              <a:rPr lang="en-US" b="1" dirty="0">
+                <a:solidFill>
+                  <a:srgbClr val="7030A0"/>
+                </a:solidFill>
+              </a:rPr>
               <a:t> </a:t>
             </a:r>
             <a:r>
-              <a:rPr lang="en-US" dirty="0" err="1"/>
+              <a:rPr lang="en-US" b="1" dirty="0" err="1">
+                <a:solidFill>
+                  <a:srgbClr val="7030A0"/>
+                </a:solidFill>
+              </a:rPr>
               <a:t>aos</a:t>
             </a:r>
             <a:r>
-              <a:rPr lang="en-US" dirty="0"/>
+              <a:rPr lang="en-US" b="1" dirty="0">
+                <a:solidFill>
+                  <a:srgbClr val="7030A0"/>
+                </a:solidFill>
+              </a:rPr>
               <a:t> </a:t>
             </a:r>
             <a:r>
-              <a:rPr lang="en-US" i="1" dirty="0"/>
+              <a:rPr lang="en-US" b="1" i="1" dirty="0">
+                <a:solidFill>
+                  <a:srgbClr val="7030A0"/>
+                </a:solidFill>
+              </a:rPr>
               <a:t>clusters</a:t>
             </a:r>
             <a:r>
@@ -21245,7 +21962,7 @@
 </p:sld>
 </file>
 
-<file path=ppt/slides/slide41.xml><?xml version="1.0" encoding="utf-8"?>
+<file path=ppt/slides/slide42.xml><?xml version="1.0" encoding="utf-8"?>
 <p:sld xmlns:a="http://schemas.openxmlformats.org/drawingml/2006/main" xmlns:r="http://schemas.openxmlformats.org/officeDocument/2006/relationships" xmlns:p="http://schemas.openxmlformats.org/presentationml/2006/main">
   <p:cSld>
     <p:spTree>
@@ -21262,14 +21979,14 @@
           <a:chExt cx="0" cy="0"/>
         </a:xfrm>
       </p:grpSpPr>
-      <mc:AlternateContent xmlns:mc="http://schemas.openxmlformats.org/markup-compatibility/2006">
-        <mc:Choice xmlns:a14="http://schemas.microsoft.com/office/drawing/2010/main" Requires="a14">
+      <mc:AlternateContent xmlns:mc="http://schemas.openxmlformats.org/markup-compatibility/2006" xmlns:a14="http://schemas.microsoft.com/office/drawing/2010/main">
+        <mc:Choice Requires="a14">
           <p:sp>
             <p:nvSpPr>
               <p:cNvPr id="2" name="Title 1">
                 <a:extLst>
                   <a:ext uri="{FF2B5EF4-FFF2-40B4-BE49-F238E27FC236}">
-                    <a16:creationId xmlns:a16="http://schemas.microsoft.com/office/drawing/2014/main" id="{9FD61470-7062-5DCF-6407-C45E5BF63D31}"/>
+                    <a16:creationId xmlns:a16="http://schemas.microsoft.com/office/drawing/2014/main" xmlns="" id="{9FD61470-7062-5DCF-6407-C45E5BF63D31}"/>
                   </a:ext>
                 </a:extLst>
               </p:cNvPr>
@@ -21316,7 +22033,7 @@
             </p:txBody>
           </p:sp>
         </mc:Choice>
-        <mc:Fallback>
+        <mc:Fallback xmlns="">
           <p:sp>
             <p:nvSpPr>
               <p:cNvPr id="2" name="Title 1">
@@ -21361,7 +22078,7 @@
           <p:cNvPr id="3" name="Content Placeholder 2">
             <a:extLst>
               <a:ext uri="{FF2B5EF4-FFF2-40B4-BE49-F238E27FC236}">
-                <a16:creationId xmlns:a16="http://schemas.microsoft.com/office/drawing/2014/main" id="{06C85168-BBA5-1819-2A3F-16AFDD60A698}"/>
+                <a16:creationId xmlns:a16="http://schemas.microsoft.com/office/drawing/2014/main" xmlns="" id="{06C85168-BBA5-1819-2A3F-16AFDD60A698}"/>
               </a:ext>
             </a:extLst>
           </p:cNvPr>
@@ -21386,7 +22103,11 @@
           <a:p>
             <a:r>
               <a:rPr lang="pt-BR" dirty="0"/>
-              <a:t>Nessa aplicação, encontramos os </a:t>
+              <a:t>Nessa aplicação, </a:t>
+            </a:r>
+            <a:r>
+              <a:rPr lang="pt-BR" dirty="0" smtClean="0"/>
+              <a:t>precisamos encontrar os </a:t>
             </a:r>
             <a:r>
               <a:rPr lang="pt-BR" b="1" dirty="0">
@@ -21555,7 +22276,7 @@
           <p:cNvPr id="1026" name="Picture 2">
             <a:extLst>
               <a:ext uri="{FF2B5EF4-FFF2-40B4-BE49-F238E27FC236}">
-                <a16:creationId xmlns:a16="http://schemas.microsoft.com/office/drawing/2014/main" id="{7F44AA9B-6E70-9E5C-102F-FC9BEDBA27E0}"/>
+                <a16:creationId xmlns:a16="http://schemas.microsoft.com/office/drawing/2014/main" xmlns="" id="{7F44AA9B-6E70-9E5C-102F-FC9BEDBA27E0}"/>
               </a:ext>
             </a:extLst>
           </p:cNvPr>
@@ -21602,7 +22323,7 @@
           <p:cNvPr id="5" name="CaixaDeTexto 4">
             <a:extLst>
               <a:ext uri="{FF2B5EF4-FFF2-40B4-BE49-F238E27FC236}">
-                <a16:creationId xmlns:a16="http://schemas.microsoft.com/office/drawing/2014/main" id="{5743B3A5-B8E2-5133-40EE-7ED25A2F18DC}"/>
+                <a16:creationId xmlns:a16="http://schemas.microsoft.com/office/drawing/2014/main" xmlns="" id="{5743B3A5-B8E2-5133-40EE-7ED25A2F18DC}"/>
               </a:ext>
             </a:extLst>
           </p:cNvPr>
@@ -21627,7 +22348,15 @@
           <a:p>
             <a:r>
               <a:rPr lang="pt-BR" sz="1400" dirty="0"/>
-              <a:t>* Em geral, usa-se um valor acima de 95%.</a:t>
+              <a:t>* Em geral, usa-se um valor </a:t>
+            </a:r>
+            <a:r>
+              <a:rPr lang="pt-BR" sz="1400" dirty="0" smtClean="0"/>
+              <a:t>igual ou acima </a:t>
+            </a:r>
+            <a:r>
+              <a:rPr lang="pt-BR" sz="1400" dirty="0"/>
+              <a:t>de 95%.</a:t>
             </a:r>
           </a:p>
         </p:txBody>
@@ -21645,7 +22374,7 @@
 </p:sld>
 </file>
 
-<file path=ppt/slides/slide42.xml><?xml version="1.0" encoding="utf-8"?>
+<file path=ppt/slides/slide43.xml><?xml version="1.0" encoding="utf-8"?>
 <p:sld xmlns:a="http://schemas.openxmlformats.org/drawingml/2006/main" xmlns:r="http://schemas.openxmlformats.org/officeDocument/2006/relationships" xmlns:p="http://schemas.openxmlformats.org/presentationml/2006/main">
   <p:cSld>
     <p:spTree>
@@ -21667,7 +22396,7 @@
           <p:cNvPr id="2" name="Título 1">
             <a:extLst>
               <a:ext uri="{FF2B5EF4-FFF2-40B4-BE49-F238E27FC236}">
-                <a16:creationId xmlns:a16="http://schemas.microsoft.com/office/drawing/2014/main" id="{94AB8438-E56E-2412-517C-8456E4CA773C}"/>
+                <a16:creationId xmlns:a16="http://schemas.microsoft.com/office/drawing/2014/main" xmlns="" id="{94AB8438-E56E-2412-517C-8456E4CA773C}"/>
               </a:ext>
             </a:extLst>
           </p:cNvPr>
@@ -21695,7 +22424,7 @@
           <p:cNvPr id="3" name="Espaço Reservado para Conteúdo 2">
             <a:extLst>
               <a:ext uri="{FF2B5EF4-FFF2-40B4-BE49-F238E27FC236}">
-                <a16:creationId xmlns:a16="http://schemas.microsoft.com/office/drawing/2014/main" id="{F7E2B09C-6D56-4C9F-A364-B904CCE2F1A0}"/>
+                <a16:creationId xmlns:a16="http://schemas.microsoft.com/office/drawing/2014/main" xmlns="" id="{F7E2B09C-6D56-4C9F-A364-B904CCE2F1A0}"/>
               </a:ext>
             </a:extLst>
           </p:cNvPr>
@@ -21738,7 +22467,7 @@
           <p:cNvPr id="18" name="Group 17">
             <a:extLst>
               <a:ext uri="{FF2B5EF4-FFF2-40B4-BE49-F238E27FC236}">
-                <a16:creationId xmlns:a16="http://schemas.microsoft.com/office/drawing/2014/main" id="{627C64FD-88E0-EC8E-2A34-0D5737B4C854}"/>
+                <a16:creationId xmlns:a16="http://schemas.microsoft.com/office/drawing/2014/main" xmlns="" id="{627C64FD-88E0-EC8E-2A34-0D5737B4C854}"/>
               </a:ext>
             </a:extLst>
           </p:cNvPr>
@@ -21758,7 +22487,7 @@
             <p:cNvPr id="12" name="Picture 4" descr="Project Jupyter | Try Jupyter">
               <a:extLst>
                 <a:ext uri="{FF2B5EF4-FFF2-40B4-BE49-F238E27FC236}">
-                  <a16:creationId xmlns:a16="http://schemas.microsoft.com/office/drawing/2014/main" id="{FF92EA36-91E7-292B-D7A0-2D4D83A10F98}"/>
+                  <a16:creationId xmlns:a16="http://schemas.microsoft.com/office/drawing/2014/main" xmlns="" id="{FF92EA36-91E7-292B-D7A0-2D4D83A10F98}"/>
                 </a:ext>
               </a:extLst>
             </p:cNvPr>
@@ -21805,7 +22534,7 @@
             <p:cNvPr id="13" name="Picture 8" descr="Google Colaboratory Colab - Guía Completa Español - Marketing Branding">
               <a:extLst>
                 <a:ext uri="{FF2B5EF4-FFF2-40B4-BE49-F238E27FC236}">
-                  <a16:creationId xmlns:a16="http://schemas.microsoft.com/office/drawing/2014/main" id="{46F1718A-89E6-9E63-E40B-2B19852D6AA0}"/>
+                  <a16:creationId xmlns:a16="http://schemas.microsoft.com/office/drawing/2014/main" xmlns="" id="{46F1718A-89E6-9E63-E40B-2B19852D6AA0}"/>
                 </a:ext>
               </a:extLst>
             </p:cNvPr>
@@ -21850,7 +22579,7 @@
             <p:cNvPr id="14" name="Picture 10" descr="IT12A01: FUNDAMENTALS OF PYTHON PROGRAMMING (SF) (SYNCHRONOUS E-LEARNING) -  NTUC LearningHub">
               <a:extLst>
                 <a:ext uri="{FF2B5EF4-FFF2-40B4-BE49-F238E27FC236}">
-                  <a16:creationId xmlns:a16="http://schemas.microsoft.com/office/drawing/2014/main" id="{33F6B1B4-9B79-D634-3E35-33F24609C848}"/>
+                  <a16:creationId xmlns:a16="http://schemas.microsoft.com/office/drawing/2014/main" xmlns="" id="{33F6B1B4-9B79-D634-3E35-33F24609C848}"/>
                 </a:ext>
               </a:extLst>
             </p:cNvPr>
@@ -21895,7 +22624,7 @@
             <p:cNvPr id="15" name="Sinal de Adição 7">
               <a:extLst>
                 <a:ext uri="{FF2B5EF4-FFF2-40B4-BE49-F238E27FC236}">
-                  <a16:creationId xmlns:a16="http://schemas.microsoft.com/office/drawing/2014/main" id="{6959EE6C-DCDB-E78B-5C50-EBD3FF3049E2}"/>
+                  <a16:creationId xmlns:a16="http://schemas.microsoft.com/office/drawing/2014/main" xmlns="" id="{6959EE6C-DCDB-E78B-5C50-EBD3FF3049E2}"/>
                 </a:ext>
               </a:extLst>
             </p:cNvPr>
@@ -21943,7 +22672,7 @@
             <p:cNvPr id="17" name="Sinal de Adição 10">
               <a:extLst>
                 <a:ext uri="{FF2B5EF4-FFF2-40B4-BE49-F238E27FC236}">
-                  <a16:creationId xmlns:a16="http://schemas.microsoft.com/office/drawing/2014/main" id="{30A21FDB-ABA6-9FD5-49EF-7762414AEF0C}"/>
+                  <a16:creationId xmlns:a16="http://schemas.microsoft.com/office/drawing/2014/main" xmlns="" id="{30A21FDB-ABA6-9FD5-49EF-7762414AEF0C}"/>
                 </a:ext>
               </a:extLst>
             </p:cNvPr>
@@ -22000,7 +22729,7 @@
 </p:sld>
 </file>
 
-<file path=ppt/slides/slide43.xml><?xml version="1.0" encoding="utf-8"?>
+<file path=ppt/slides/slide44.xml><?xml version="1.0" encoding="utf-8"?>
 <p:sld xmlns:a="http://schemas.openxmlformats.org/drawingml/2006/main" xmlns:r="http://schemas.openxmlformats.org/officeDocument/2006/relationships" xmlns:p="http://schemas.openxmlformats.org/presentationml/2006/main">
   <p:cSld>
     <p:spTree>
@@ -22022,7 +22751,7 @@
           <p:cNvPr id="2" name="Title 1">
             <a:extLst>
               <a:ext uri="{FF2B5EF4-FFF2-40B4-BE49-F238E27FC236}">
-                <a16:creationId xmlns:a16="http://schemas.microsoft.com/office/drawing/2014/main" id="{E8FD0E11-3B37-4336-5BF0-C8C033354AF6}"/>
+                <a16:creationId xmlns:a16="http://schemas.microsoft.com/office/drawing/2014/main" xmlns="" id="{E8FD0E11-3B37-4336-5BF0-C8C033354AF6}"/>
               </a:ext>
             </a:extLst>
           </p:cNvPr>
@@ -22051,7 +22780,7 @@
           <p:cNvPr id="3" name="Content Placeholder 2">
             <a:extLst>
               <a:ext uri="{FF2B5EF4-FFF2-40B4-BE49-F238E27FC236}">
-                <a16:creationId xmlns:a16="http://schemas.microsoft.com/office/drawing/2014/main" id="{32CB14AB-72E4-05EB-962C-F8B4618D0574}"/>
+                <a16:creationId xmlns:a16="http://schemas.microsoft.com/office/drawing/2014/main" xmlns="" id="{32CB14AB-72E4-05EB-962C-F8B4618D0574}"/>
               </a:ext>
             </a:extLst>
           </p:cNvPr>
@@ -22099,7 +22828,7 @@
 </p:sld>
 </file>
 
-<file path=ppt/slides/slide44.xml><?xml version="1.0" encoding="utf-8"?>
+<file path=ppt/slides/slide45.xml><?xml version="1.0" encoding="utf-8"?>
 <p:sld xmlns:a="http://schemas.openxmlformats.org/drawingml/2006/main" xmlns:r="http://schemas.openxmlformats.org/officeDocument/2006/relationships" xmlns:p="http://schemas.openxmlformats.org/presentationml/2006/main">
   <p:cSld>
     <p:spTree>
@@ -22121,7 +22850,7 @@
           <p:cNvPr id="4" name="Título 1">
             <a:extLst>
               <a:ext uri="{FF2B5EF4-FFF2-40B4-BE49-F238E27FC236}">
-                <a16:creationId xmlns:a16="http://schemas.microsoft.com/office/drawing/2014/main" id="{32666AC8-2E17-4DB4-B0F5-60C640CCFD2E}"/>
+                <a16:creationId xmlns:a16="http://schemas.microsoft.com/office/drawing/2014/main" xmlns="" id="{32666AC8-2E17-4DB4-B0F5-60C640CCFD2E}"/>
               </a:ext>
             </a:extLst>
           </p:cNvPr>
@@ -22185,7 +22914,7 @@
 </p:sld>
 </file>
 
-<file path=ppt/slides/slide45.xml><?xml version="1.0" encoding="utf-8"?>
+<file path=ppt/slides/slide46.xml><?xml version="1.0" encoding="utf-8"?>
 <p:sld xmlns:a="http://schemas.openxmlformats.org/drawingml/2006/main" xmlns:r="http://schemas.openxmlformats.org/officeDocument/2006/relationships" xmlns:p="http://schemas.openxmlformats.org/presentationml/2006/main">
   <p:cSld>
     <p:spTree>
@@ -22207,7 +22936,7 @@
           <p:cNvPr id="4" name="Título 1">
             <a:extLst>
               <a:ext uri="{FF2B5EF4-FFF2-40B4-BE49-F238E27FC236}">
-                <a16:creationId xmlns:a16="http://schemas.microsoft.com/office/drawing/2014/main" id="{32666AC8-2E17-4DB4-B0F5-60C640CCFD2E}"/>
+                <a16:creationId xmlns:a16="http://schemas.microsoft.com/office/drawing/2014/main" xmlns="" id="{32666AC8-2E17-4DB4-B0F5-60C640CCFD2E}"/>
               </a:ext>
             </a:extLst>
           </p:cNvPr>
@@ -22271,7 +23000,7 @@
 </p:sld>
 </file>
 
-<file path=ppt/slides/slide46.xml><?xml version="1.0" encoding="utf-8"?>
+<file path=ppt/slides/slide47.xml><?xml version="1.0" encoding="utf-8"?>
 <p:sld xmlns:a="http://schemas.openxmlformats.org/drawingml/2006/main" xmlns:r="http://schemas.openxmlformats.org/officeDocument/2006/relationships" xmlns:p="http://schemas.openxmlformats.org/presentationml/2006/main">
   <p:cSld>
     <p:spTree>
@@ -22512,7 +23241,7 @@
         <p:cNvPr id="1" name="">
           <a:extLst>
             <a:ext uri="{FF2B5EF4-FFF2-40B4-BE49-F238E27FC236}">
-              <a16:creationId xmlns:a16="http://schemas.microsoft.com/office/drawing/2014/main" id="{E5F23F1A-965B-E657-4F46-B48EB78CFF12}"/>
+              <a16:creationId xmlns:a16="http://schemas.microsoft.com/office/drawing/2014/main" xmlns="" id="{E5F23F1A-965B-E657-4F46-B48EB78CFF12}"/>
             </a:ext>
           </a:extLst>
         </p:cNvPr>
@@ -22532,7 +23261,7 @@
           <p:cNvPr id="2" name="Title 1">
             <a:extLst>
               <a:ext uri="{FF2B5EF4-FFF2-40B4-BE49-F238E27FC236}">
-                <a16:creationId xmlns:a16="http://schemas.microsoft.com/office/drawing/2014/main" id="{1D2CEC37-D651-72A5-0293-3FB911F60F37}"/>
+                <a16:creationId xmlns:a16="http://schemas.microsoft.com/office/drawing/2014/main" xmlns="" id="{1D2CEC37-D651-72A5-0293-3FB911F60F37}"/>
               </a:ext>
             </a:extLst>
           </p:cNvPr>
@@ -22560,7 +23289,7 @@
           <p:cNvPr id="7" name="Content Placeholder 2">
             <a:extLst>
               <a:ext uri="{FF2B5EF4-FFF2-40B4-BE49-F238E27FC236}">
-                <a16:creationId xmlns:a16="http://schemas.microsoft.com/office/drawing/2014/main" id="{B3C1A135-4B52-F54B-5BDE-7C6DA1069706}"/>
+                <a16:creationId xmlns:a16="http://schemas.microsoft.com/office/drawing/2014/main" xmlns="" id="{B3C1A135-4B52-F54B-5BDE-7C6DA1069706}"/>
               </a:ext>
             </a:extLst>
           </p:cNvPr>
@@ -22661,7 +23390,7 @@
           <p:cNvPr id="5" name="Grupo 4">
             <a:extLst>
               <a:ext uri="{FF2B5EF4-FFF2-40B4-BE49-F238E27FC236}">
-                <a16:creationId xmlns:a16="http://schemas.microsoft.com/office/drawing/2014/main" id="{FD3AFEA6-16E8-D562-210E-DDE126CC469D}"/>
+                <a16:creationId xmlns:a16="http://schemas.microsoft.com/office/drawing/2014/main" xmlns="" id="{FD3AFEA6-16E8-D562-210E-DDE126CC469D}"/>
               </a:ext>
             </a:extLst>
           </p:cNvPr>
@@ -22681,7 +23410,7 @@
             <p:cNvPr id="6" name="Picture 2" descr="K-Means Clustering using Python. Welcome back guys! Hope you had a great… |  by Luigi Fiori | Medium">
               <a:extLst>
                 <a:ext uri="{FF2B5EF4-FFF2-40B4-BE49-F238E27FC236}">
-                  <a16:creationId xmlns:a16="http://schemas.microsoft.com/office/drawing/2014/main" id="{5EE61C46-3856-780A-E6BB-BC8EBB4234F4}"/>
+                  <a16:creationId xmlns:a16="http://schemas.microsoft.com/office/drawing/2014/main" xmlns="" id="{5EE61C46-3856-780A-E6BB-BC8EBB4234F4}"/>
                 </a:ext>
               </a:extLst>
             </p:cNvPr>
@@ -22726,7 +23455,7 @@
             <p:cNvPr id="8" name="CaixaDeTexto 7">
               <a:extLst>
                 <a:ext uri="{FF2B5EF4-FFF2-40B4-BE49-F238E27FC236}">
-                  <a16:creationId xmlns:a16="http://schemas.microsoft.com/office/drawing/2014/main" id="{843AD3E7-A8FE-599D-36F8-EA8BA9682F1B}"/>
+                  <a16:creationId xmlns:a16="http://schemas.microsoft.com/office/drawing/2014/main" xmlns="" id="{843AD3E7-A8FE-599D-36F8-EA8BA9682F1B}"/>
                 </a:ext>
               </a:extLst>
             </p:cNvPr>
@@ -22763,7 +23492,7 @@
             <p:cNvPr id="9" name="Picture 2" descr="K-Means Clustering using Python. Welcome back guys! Hope you had a great… |  by Luigi Fiori | Medium">
               <a:extLst>
                 <a:ext uri="{FF2B5EF4-FFF2-40B4-BE49-F238E27FC236}">
-                  <a16:creationId xmlns:a16="http://schemas.microsoft.com/office/drawing/2014/main" id="{E7C74A0F-F2DD-912F-E092-3530D068D40B}"/>
+                  <a16:creationId xmlns:a16="http://schemas.microsoft.com/office/drawing/2014/main" xmlns="" id="{E7C74A0F-F2DD-912F-E092-3530D068D40B}"/>
                 </a:ext>
               </a:extLst>
             </p:cNvPr>
@@ -22808,7 +23537,7 @@
             <p:cNvPr id="10" name="Seta para a direita 9">
               <a:extLst>
                 <a:ext uri="{FF2B5EF4-FFF2-40B4-BE49-F238E27FC236}">
-                  <a16:creationId xmlns:a16="http://schemas.microsoft.com/office/drawing/2014/main" id="{88A77E2D-B8CF-1AE8-8196-DD8F94371FF0}"/>
+                  <a16:creationId xmlns:a16="http://schemas.microsoft.com/office/drawing/2014/main" xmlns="" id="{88A77E2D-B8CF-1AE8-8196-DD8F94371FF0}"/>
                 </a:ext>
               </a:extLst>
             </p:cNvPr>
@@ -23531,7 +24260,7 @@
           <p:cNvPr id="2" name="Title 1">
             <a:extLst>
               <a:ext uri="{FF2B5EF4-FFF2-40B4-BE49-F238E27FC236}">
-                <a16:creationId xmlns:a16="http://schemas.microsoft.com/office/drawing/2014/main" id="{536BFB42-0017-5ED1-7773-E084E5A015B7}"/>
+                <a16:creationId xmlns:a16="http://schemas.microsoft.com/office/drawing/2014/main" xmlns="" id="{536BFB42-0017-5ED1-7773-E084E5A015B7}"/>
               </a:ext>
             </a:extLst>
           </p:cNvPr>
@@ -23560,7 +24289,7 @@
           <p:cNvPr id="3" name="Content Placeholder 2">
             <a:extLst>
               <a:ext uri="{FF2B5EF4-FFF2-40B4-BE49-F238E27FC236}">
-                <a16:creationId xmlns:a16="http://schemas.microsoft.com/office/drawing/2014/main" id="{D299C266-04B6-6A8C-91F5-24FCD2CC3103}"/>
+                <a16:creationId xmlns:a16="http://schemas.microsoft.com/office/drawing/2014/main" xmlns="" id="{D299C266-04B6-6A8C-91F5-24FCD2CC3103}"/>
               </a:ext>
             </a:extLst>
           </p:cNvPr>
@@ -23699,7 +24428,7 @@
           <p:cNvPr id="5" name="Picture 2" descr="K-means clustering on the digits dataset (PCA-reduced data) Centroids are marked with white cross">
             <a:extLst>
               <a:ext uri="{FF2B5EF4-FFF2-40B4-BE49-F238E27FC236}">
-                <a16:creationId xmlns:a16="http://schemas.microsoft.com/office/drawing/2014/main" id="{A7524CD6-9254-ABD9-EBBF-94136AAAEDE9}"/>
+                <a16:creationId xmlns:a16="http://schemas.microsoft.com/office/drawing/2014/main" xmlns="" id="{A7524CD6-9254-ABD9-EBBF-94136AAAEDE9}"/>
               </a:ext>
             </a:extLst>
           </p:cNvPr>
@@ -23760,7 +24489,7 @@
         <p:cNvPr id="1" name="">
           <a:extLst>
             <a:ext uri="{FF2B5EF4-FFF2-40B4-BE49-F238E27FC236}">
-              <a16:creationId xmlns:a16="http://schemas.microsoft.com/office/drawing/2014/main" id="{3A831676-6BED-CA70-6524-D513003AAAD0}"/>
+              <a16:creationId xmlns:a16="http://schemas.microsoft.com/office/drawing/2014/main" xmlns="" id="{3A831676-6BED-CA70-6524-D513003AAAD0}"/>
             </a:ext>
           </a:extLst>
         </p:cNvPr>
@@ -23780,7 +24509,7 @@
           <p:cNvPr id="2" name="Title 1">
             <a:extLst>
               <a:ext uri="{FF2B5EF4-FFF2-40B4-BE49-F238E27FC236}">
-                <a16:creationId xmlns:a16="http://schemas.microsoft.com/office/drawing/2014/main" id="{04A038D5-B823-B9FD-D23F-5029CC44B85D}"/>
+                <a16:creationId xmlns:a16="http://schemas.microsoft.com/office/drawing/2014/main" xmlns="" id="{04A038D5-B823-B9FD-D23F-5029CC44B85D}"/>
               </a:ext>
             </a:extLst>
           </p:cNvPr>
@@ -23809,7 +24538,7 @@
           <p:cNvPr id="3" name="Content Placeholder 2">
             <a:extLst>
               <a:ext uri="{FF2B5EF4-FFF2-40B4-BE49-F238E27FC236}">
-                <a16:creationId xmlns:a16="http://schemas.microsoft.com/office/drawing/2014/main" id="{7A9B68C4-7FDA-1A4B-497F-F6FD37E35497}"/>
+                <a16:creationId xmlns:a16="http://schemas.microsoft.com/office/drawing/2014/main" xmlns="" id="{7A9B68C4-7FDA-1A4B-497F-F6FD37E35497}"/>
               </a:ext>
             </a:extLst>
           </p:cNvPr>
@@ -23988,7 +24717,7 @@
           <p:cNvPr id="5" name="Picture 2" descr="K-means clustering on the digits dataset (PCA-reduced data) Centroids are marked with white cross">
             <a:extLst>
               <a:ext uri="{FF2B5EF4-FFF2-40B4-BE49-F238E27FC236}">
-                <a16:creationId xmlns:a16="http://schemas.microsoft.com/office/drawing/2014/main" id="{900BE683-11F2-C00F-2CDC-3D7D2CF03B9A}"/>
+                <a16:creationId xmlns:a16="http://schemas.microsoft.com/office/drawing/2014/main" xmlns="" id="{900BE683-11F2-C00F-2CDC-3D7D2CF03B9A}"/>
               </a:ext>
             </a:extLst>
           </p:cNvPr>
